--- a/docs/答辩_CareCompanion.pptx
+++ b/docs/答辩_CareCompanion.pptx
@@ -19,8 +19,14 @@
     <p:sldId id="267" r:id="rId18"/>
     <p:sldId id="268" r:id="rId19"/>
     <p:sldId id="269" r:id="rId20"/>
+    <p:sldId id="270" r:id="rId21"/>
+    <p:sldId id="271" r:id="rId22"/>
+    <p:sldId id="272" r:id="rId23"/>
+    <p:sldId id="273" r:id="rId24"/>
+    <p:sldId id="274" r:id="rId25"/>
+    <p:sldId id="275" r:id="rId26"/>
   </p:sldIdLst>
-  <p:sldSz cx="9144000" cy="6858000" type="screen4x3"/>
+  <p:sldSz cx="9144000" cy="5143500" type="screen4x3"/>
   <p:notesSz cx="6858000" cy="9144000"/>
   <p:defaultTextStyle>
     <a:defPPr>
@@ -3097,7 +3103,7 @@
     <p:bg>
       <p:bgPr>
         <a:solidFill>
-          <a:srgbClr val="0F172A"/>
+          <a:srgbClr val="FFFFFF"/>
         </a:solidFill>
         <a:effectLst/>
       </p:bgPr>
@@ -3111,14 +3117,57 @@
       <p:grpSpPr/>
       <p:sp>
         <p:nvSpPr>
-          <p:cNvPr id="2" name="TextBox 1"/>
+          <p:cNvPr id="2" name="Rectangle 1"/>
+          <p:cNvSpPr/>
+          <p:nvPr/>
+        </p:nvSpPr>
+        <p:spPr>
+          <a:xfrm>
+            <a:off x="0" y="0"/>
+            <a:ext cx="9144000" cy="502920"/>
+          </a:xfrm>
+          <a:prstGeom prst="rect">
+            <a:avLst/>
+          </a:prstGeom>
+          <a:solidFill>
+            <a:srgbClr val="143278"/>
+          </a:solidFill>
+          <a:ln>
+            <a:noFill/>
+          </a:ln>
+        </p:spPr>
+        <p:style>
+          <a:lnRef idx="1">
+            <a:schemeClr val="accent1"/>
+          </a:lnRef>
+          <a:fillRef idx="3">
+            <a:schemeClr val="accent1"/>
+          </a:fillRef>
+          <a:effectRef idx="2">
+            <a:schemeClr val="accent1"/>
+          </a:effectRef>
+          <a:fontRef idx="minor">
+            <a:schemeClr val="lt1"/>
+          </a:fontRef>
+        </p:style>
+        <p:txBody>
+          <a:bodyPr rtlCol="0" anchor="ctr"/>
+          <a:lstStyle/>
+          <a:p>
+            <a:pPr algn="ctr"/>
+          </a:p>
+        </p:txBody>
+      </p:sp>
+      <p:sp>
+        <p:nvSpPr>
+          <p:cNvPr id="3" name="TextBox 2"/>
           <p:cNvSpPr txBox="1"/>
           <p:nvPr/>
         </p:nvSpPr>
         <p:spPr>
           <a:xfrm>
-            <a:off x="731520" y="1828800"/>
-            <a:ext cx="7772400" cy="1371600"/>
+            <a:off x="137160" y="73152"/>
+            <a:ext cx="8869680" cy="411480"/>
           </a:xfrm>
           <a:prstGeom prst="rect">
             <a:avLst/>
@@ -3131,29 +3180,41 @@
           </a:bodyPr>
           <a:lstStyle/>
           <a:p>
-            <a:pPr algn="l">
-              <a:defRPr sz="4400" b="1">
-                <a:solidFill>
-                  <a:srgbClr val="F0F4FC"/>
-                </a:solidFill>
-              </a:defRPr>
-            </a:pPr>
-            <a:r>
-              <a:t>CareCompanion</a:t>
-            </a:r>
-          </a:p>
-        </p:txBody>
-      </p:sp>
-      <p:sp>
-        <p:nvSpPr>
-          <p:cNvPr id="3" name="TextBox 2"/>
+            <a:pPr>
+              <a:defRPr sz="1100" b="1">
+                <a:solidFill>
+                  <a:srgbClr val="FFFFFF"/>
+                </a:solidFill>
+              </a:defRPr>
+            </a:pPr>
+            <a:r>
+              <a:t>第二十六届中国机器人及人工智能大赛</a:t>
+            </a:r>
+          </a:p>
+          <a:p>
+            <a:pPr>
+              <a:defRPr sz="1000">
+                <a:solidFill>
+                  <a:srgbClr val="C8DCFF"/>
+                </a:solidFill>
+              </a:defRPr>
+            </a:pPr>
+            <a:r>
+              <a:t>机器人创新赛道</a:t>
+            </a:r>
+          </a:p>
+        </p:txBody>
+      </p:sp>
+      <p:sp>
+        <p:nvSpPr>
+          <p:cNvPr id="4" name="TextBox 3"/>
           <p:cNvSpPr txBox="1"/>
           <p:nvPr/>
         </p:nvSpPr>
         <p:spPr>
           <a:xfrm>
-            <a:off x="731520" y="2743200"/>
-            <a:ext cx="7772400" cy="1097280"/>
+            <a:off x="502920" y="1463040"/>
+            <a:ext cx="8138160" cy="731520"/>
           </a:xfrm>
           <a:prstGeom prst="rect">
             <a:avLst/>
@@ -3166,29 +3227,29 @@
           </a:bodyPr>
           <a:lstStyle/>
           <a:p>
-            <a:pPr>
-              <a:defRPr sz="2400">
-                <a:solidFill>
-                  <a:srgbClr val="38BDF8"/>
-                </a:solidFill>
-              </a:defRPr>
-            </a:pPr>
-            <a:r>
-              <a:t>智能养老人形陪伴机器人系统</a:t>
-            </a:r>
-          </a:p>
-        </p:txBody>
-      </p:sp>
-      <p:sp>
-        <p:nvSpPr>
-          <p:cNvPr id="4" name="TextBox 3"/>
+            <a:pPr algn="ctr">
+              <a:defRPr sz="3600" b="1">
+                <a:solidFill>
+                  <a:srgbClr val="143278"/>
+                </a:solidFill>
+              </a:defRPr>
+            </a:pPr>
+            <a:r>
+              <a:t>CareCompanion</a:t>
+            </a:r>
+          </a:p>
+        </p:txBody>
+      </p:sp>
+      <p:sp>
+        <p:nvSpPr>
+          <p:cNvPr id="5" name="TextBox 4"/>
           <p:cNvSpPr txBox="1"/>
           <p:nvPr/>
         </p:nvSpPr>
         <p:spPr>
           <a:xfrm>
-            <a:off x="731520" y="4754880"/>
-            <a:ext cx="7772400" cy="914400"/>
+            <a:off x="502920" y="2148840"/>
+            <a:ext cx="8138160" cy="731520"/>
           </a:xfrm>
           <a:prstGeom prst="rect">
             <a:avLst/>
@@ -3201,20 +3262,128 @@
           </a:bodyPr>
           <a:lstStyle/>
           <a:p>
-            <a:pPr>
-              <a:defRPr sz="1400">
-                <a:solidFill>
-                  <a:srgbClr val="94A3B8"/>
-                </a:solidFill>
-              </a:defRPr>
-            </a:pPr>
-            <a:r>
-              <a:t>中国机器人及人工智能大赛 · 机器人创新赛道</a:t>
-            </a:r>
-          </a:p>
-          <a:p>
-            <a:r>
-              <a:t>多模态感知 · 风险决策 · 人形机器人部署</a:t>
+            <a:pPr algn="ctr">
+              <a:defRPr sz="2200" b="1">
+                <a:solidFill>
+                  <a:srgbClr val="1E1E1E"/>
+                </a:solidFill>
+              </a:defRPr>
+            </a:pPr>
+            <a:r>
+              <a:t>智能养老人形陪伴机器人系统</a:t>
+            </a:r>
+          </a:p>
+        </p:txBody>
+      </p:sp>
+      <p:sp>
+        <p:nvSpPr>
+          <p:cNvPr id="6" name="TextBox 5"/>
+          <p:cNvSpPr txBox="1"/>
+          <p:nvPr/>
+        </p:nvSpPr>
+        <p:spPr>
+          <a:xfrm>
+            <a:off x="502920" y="2743200"/>
+            <a:ext cx="7315200" cy="3474720"/>
+          </a:xfrm>
+          <a:prstGeom prst="rect">
+            <a:avLst/>
+          </a:prstGeom>
+          <a:noFill/>
+        </p:spPr>
+        <p:txBody>
+          <a:bodyPr wrap="square">
+            <a:spAutoFit/>
+          </a:bodyPr>
+          <a:lstStyle/>
+          <a:p>
+            <a:pPr>
+              <a:lnSpc>
+                <a:spcPct val="135000"/>
+              </a:lnSpc>
+              <a:defRPr sz="1800" b="1">
+                <a:solidFill>
+                  <a:srgbClr val="1E1E1E"/>
+                </a:solidFill>
+              </a:defRPr>
+            </a:pPr>
+            <a:r>
+              <a:t>第一部分</a:t>
+            </a:r>
+            <a:br/>
+            <a:br/>
+            <a:r>
+              <a:t>「感知—决策—执行」一体化的居家养老安全陪伴平台</a:t>
+            </a:r>
+          </a:p>
+        </p:txBody>
+      </p:sp>
+      <p:sp>
+        <p:nvSpPr>
+          <p:cNvPr id="7" name="TextBox 6"/>
+          <p:cNvSpPr txBox="1"/>
+          <p:nvPr/>
+        </p:nvSpPr>
+        <p:spPr>
+          <a:xfrm>
+            <a:off x="502920" y="4434840"/>
+            <a:ext cx="8138160" cy="274320"/>
+          </a:xfrm>
+          <a:prstGeom prst="rect">
+            <a:avLst/>
+          </a:prstGeom>
+          <a:noFill/>
+        </p:spPr>
+        <p:txBody>
+          <a:bodyPr wrap="none">
+            <a:spAutoFit/>
+          </a:bodyPr>
+          <a:lstStyle/>
+          <a:p>
+            <a:pPr algn="ctr">
+              <a:defRPr sz="1100">
+                <a:solidFill>
+                  <a:srgbClr val="505050"/>
+                </a:solidFill>
+              </a:defRPr>
+            </a:pPr>
+            <a:r>
+              <a:t>第二十六届中国机器人及人工智能大赛</a:t>
+            </a:r>
+          </a:p>
+        </p:txBody>
+      </p:sp>
+      <p:sp>
+        <p:nvSpPr>
+          <p:cNvPr id="8" name="TextBox 7"/>
+          <p:cNvSpPr txBox="1"/>
+          <p:nvPr/>
+        </p:nvSpPr>
+        <p:spPr>
+          <a:xfrm>
+            <a:off x="502920" y="4690872"/>
+            <a:ext cx="8138160" cy="274320"/>
+          </a:xfrm>
+          <a:prstGeom prst="rect">
+            <a:avLst/>
+          </a:prstGeom>
+          <a:noFill/>
+        </p:spPr>
+        <p:txBody>
+          <a:bodyPr wrap="none">
+            <a:spAutoFit/>
+          </a:bodyPr>
+          <a:lstStyle/>
+          <a:p>
+            <a:pPr algn="ctr">
+              <a:defRPr sz="1100">
+                <a:solidFill>
+                  <a:srgbClr val="505050"/>
+                </a:solidFill>
+              </a:defRPr>
+            </a:pPr>
+            <a:r>
+              <a:t>机器人创新赛道</a:t>
             </a:r>
           </a:p>
         </p:txBody>
@@ -3233,7 +3402,7 @@
     <p:bg>
       <p:bgPr>
         <a:solidFill>
-          <a:srgbClr val="0F172A"/>
+          <a:srgbClr val="FFFFFF"/>
         </a:solidFill>
         <a:effectLst/>
       </p:bgPr>
@@ -3247,14 +3416,57 @@
       <p:grpSpPr/>
       <p:sp>
         <p:nvSpPr>
-          <p:cNvPr id="2" name="TextBox 1"/>
+          <p:cNvPr id="2" name="Rectangle 1"/>
+          <p:cNvSpPr/>
+          <p:nvPr/>
+        </p:nvSpPr>
+        <p:spPr>
+          <a:xfrm>
+            <a:off x="0" y="0"/>
+            <a:ext cx="9144000" cy="502920"/>
+          </a:xfrm>
+          <a:prstGeom prst="rect">
+            <a:avLst/>
+          </a:prstGeom>
+          <a:solidFill>
+            <a:srgbClr val="143278"/>
+          </a:solidFill>
+          <a:ln>
+            <a:noFill/>
+          </a:ln>
+        </p:spPr>
+        <p:style>
+          <a:lnRef idx="1">
+            <a:schemeClr val="accent1"/>
+          </a:lnRef>
+          <a:fillRef idx="3">
+            <a:schemeClr val="accent1"/>
+          </a:fillRef>
+          <a:effectRef idx="2">
+            <a:schemeClr val="accent1"/>
+          </a:effectRef>
+          <a:fontRef idx="minor">
+            <a:schemeClr val="lt1"/>
+          </a:fontRef>
+        </p:style>
+        <p:txBody>
+          <a:bodyPr rtlCol="0" anchor="ctr"/>
+          <a:lstStyle/>
+          <a:p>
+            <a:pPr algn="ctr"/>
+          </a:p>
+        </p:txBody>
+      </p:sp>
+      <p:sp>
+        <p:nvSpPr>
+          <p:cNvPr id="3" name="TextBox 2"/>
           <p:cNvSpPr txBox="1"/>
           <p:nvPr/>
         </p:nvSpPr>
         <p:spPr>
           <a:xfrm>
-            <a:off x="548640" y="457200"/>
-            <a:ext cx="8229600" cy="1097280"/>
+            <a:off x="137160" y="73152"/>
+            <a:ext cx="8869680" cy="411480"/>
           </a:xfrm>
           <a:prstGeom prst="rect">
             <a:avLst/>
@@ -3267,29 +3479,41 @@
           </a:bodyPr>
           <a:lstStyle/>
           <a:p>
-            <a:pPr algn="l">
-              <a:defRPr sz="3000" b="1">
-                <a:solidFill>
-                  <a:srgbClr val="F0F4FC"/>
-                </a:solidFill>
-              </a:defRPr>
-            </a:pPr>
-            <a:r>
-              <a:t>9. 人形机器人部署</a:t>
-            </a:r>
-          </a:p>
-        </p:txBody>
-      </p:sp>
-      <p:sp>
-        <p:nvSpPr>
-          <p:cNvPr id="3" name="TextBox 2"/>
+            <a:pPr>
+              <a:defRPr sz="1100" b="1">
+                <a:solidFill>
+                  <a:srgbClr val="FFFFFF"/>
+                </a:solidFill>
+              </a:defRPr>
+            </a:pPr>
+            <a:r>
+              <a:t>第二十六届中国机器人及人工智能大赛</a:t>
+            </a:r>
+          </a:p>
+          <a:p>
+            <a:pPr>
+              <a:defRPr sz="1000">
+                <a:solidFill>
+                  <a:srgbClr val="C8DCFF"/>
+                </a:solidFill>
+              </a:defRPr>
+            </a:pPr>
+            <a:r>
+              <a:t>机器人创新赛道</a:t>
+            </a:r>
+          </a:p>
+        </p:txBody>
+      </p:sp>
+      <p:sp>
+        <p:nvSpPr>
+          <p:cNvPr id="4" name="TextBox 3"/>
           <p:cNvSpPr txBox="1"/>
           <p:nvPr/>
         </p:nvSpPr>
         <p:spPr>
           <a:xfrm>
-            <a:off x="548640" y="1234440"/>
-            <a:ext cx="8229600" cy="731520"/>
+            <a:off x="502920" y="685800"/>
+            <a:ext cx="8138160" cy="731520"/>
           </a:xfrm>
           <a:prstGeom prst="rect">
             <a:avLst/>
@@ -3302,29 +3526,29 @@
           </a:bodyPr>
           <a:lstStyle/>
           <a:p>
-            <a:pPr>
-              <a:defRPr sz="1600">
-                <a:solidFill>
-                  <a:srgbClr val="94A3B8"/>
-                </a:solidFill>
-              </a:defRPr>
-            </a:pPr>
-            <a:r>
-              <a:t>Deployment</a:t>
-            </a:r>
-          </a:p>
-        </p:txBody>
-      </p:sp>
-      <p:sp>
-        <p:nvSpPr>
-          <p:cNvPr id="4" name="TextBox 3"/>
+            <a:pPr algn="l">
+              <a:defRPr sz="2600" b="1">
+                <a:solidFill>
+                  <a:srgbClr val="1E1E1E"/>
+                </a:solidFill>
+              </a:defRPr>
+            </a:pPr>
+            <a:r>
+              <a:t>情感陪伴与紧急响应</a:t>
+            </a:r>
+          </a:p>
+        </p:txBody>
+      </p:sp>
+      <p:sp>
+        <p:nvSpPr>
+          <p:cNvPr id="5" name="TextBox 4"/>
           <p:cNvSpPr txBox="1"/>
           <p:nvPr/>
         </p:nvSpPr>
         <p:spPr>
           <a:xfrm>
-            <a:off x="731520" y="1645920"/>
-            <a:ext cx="7772400" cy="4114800"/>
+            <a:off x="502920" y="1325880"/>
+            <a:ext cx="8138160" cy="3840480"/>
           </a:xfrm>
           <a:prstGeom prst="rect">
             <a:avLst/>
@@ -3339,76 +3563,61 @@
           <a:p>
             <a:pPr>
               <a:spcAft>
-                <a:spcPts val="1000"/>
+                <a:spcPts val="600"/>
               </a:spcAft>
-              <a:defRPr sz="1800">
-                <a:solidFill>
-                  <a:srgbClr val="F0F4FC"/>
-                </a:solidFill>
-              </a:defRPr>
-            </a:pPr>
-            <a:r>
-              <a:t>边缘 NUC/Jetson 运行 care_companion</a:t>
+              <a:defRPr sz="1400">
+                <a:solidFill>
+                  <a:srgbClr val="1E1E1E"/>
+                </a:solidFill>
+              </a:defRPr>
+            </a:pPr>
+            <a:r>
+              <a:t>对话：文本情感词典 + 视觉情绪标签融合；可插拔 LLM（默认离线 Mock）</a:t>
             </a:r>
           </a:p>
           <a:p>
             <a:pPr>
               <a:spcAft>
-                <a:spcPts val="1000"/>
+                <a:spcPts val="600"/>
               </a:spcAft>
-              <a:defRPr sz="1800">
-                <a:solidFill>
-                  <a:srgbClr val="F0F4FC"/>
-                </a:solidFill>
-              </a:defRPr>
-            </a:pPr>
-            <a:r>
-              <a:t>ROS2 发布 /care/robot_cmd JSON 指令</a:t>
+              <a:defRPr sz="1400">
+                <a:solidFill>
+                  <a:srgbClr val="1E1E1E"/>
+                </a:solidFill>
+              </a:defRPr>
+            </a:pPr>
+            <a:r>
+              <a:t>示例：「最近有点孤独」→ 温暖安抚 + speak + gesture</a:t>
             </a:r>
           </a:p>
           <a:p>
             <a:pPr>
               <a:spcAft>
-                <a:spcPts val="1000"/>
+                <a:spcPts val="600"/>
               </a:spcAft>
-              <a:defRPr sz="1800">
-                <a:solidFill>
-                  <a:srgbClr val="F0F4FC"/>
-                </a:solidFill>
-              </a:defRPr>
-            </a:pPr>
-            <a:r>
-              <a:t>机器人端订阅 → Unitree / 智元 SDK 映射</a:t>
+              <a:defRPr sz="1400">
+                <a:solidFill>
+                  <a:srgbClr val="1E1E1E"/>
+                </a:solidFill>
+              </a:defRPr>
+            </a:pPr>
+            <a:r>
+              <a:t>紧急：alert_sound → speak → call_emergency → raise_hand</a:t>
             </a:r>
           </a:p>
           <a:p>
             <a:pPr>
               <a:spcAft>
-                <a:spcPts val="1000"/>
+                <a:spcPts val="600"/>
               </a:spcAft>
-              <a:defRPr sz="1800">
-                <a:solidFill>
-                  <a:srgbClr val="F0F4FC"/>
-                </a:solidFill>
-              </a:defRPr>
-            </a:pPr>
-            <a:r>
-              <a:t>指令：speak · gesture · approach · call_emergency</a:t>
-            </a:r>
-          </a:p>
-          <a:p>
-            <a:pPr>
-              <a:spcAft>
-                <a:spcPts val="1000"/>
-              </a:spcAft>
-              <a:defRPr sz="1800">
-                <a:solidFill>
-                  <a:srgbClr val="F0F4FC"/>
-                </a:solidFill>
-              </a:defRPr>
-            </a:pPr>
-            <a:r>
-              <a:t>与 Isaac Lab 仿真可对接扩展</a:t>
+              <a:defRPr sz="1400">
+                <a:solidFill>
+                  <a:srgbClr val="1E1E1E"/>
+                </a:solidFill>
+              </a:defRPr>
+            </a:pPr>
+            <a:r>
+              <a:t>EmergencyNotifier：家属 App 推送 / 短信备份 / 本地告警（日志可审计）</a:t>
             </a:r>
           </a:p>
         </p:txBody>
@@ -3427,7 +3636,7 @@
     <p:bg>
       <p:bgPr>
         <a:solidFill>
-          <a:srgbClr val="0F172A"/>
+          <a:srgbClr val="FFFFFF"/>
         </a:solidFill>
         <a:effectLst/>
       </p:bgPr>
@@ -3441,14 +3650,57 @@
       <p:grpSpPr/>
       <p:sp>
         <p:nvSpPr>
-          <p:cNvPr id="2" name="TextBox 1"/>
+          <p:cNvPr id="2" name="Rectangle 1"/>
+          <p:cNvSpPr/>
+          <p:nvPr/>
+        </p:nvSpPr>
+        <p:spPr>
+          <a:xfrm>
+            <a:off x="0" y="0"/>
+            <a:ext cx="9144000" cy="502920"/>
+          </a:xfrm>
+          <a:prstGeom prst="rect">
+            <a:avLst/>
+          </a:prstGeom>
+          <a:solidFill>
+            <a:srgbClr val="143278"/>
+          </a:solidFill>
+          <a:ln>
+            <a:noFill/>
+          </a:ln>
+        </p:spPr>
+        <p:style>
+          <a:lnRef idx="1">
+            <a:schemeClr val="accent1"/>
+          </a:lnRef>
+          <a:fillRef idx="3">
+            <a:schemeClr val="accent1"/>
+          </a:fillRef>
+          <a:effectRef idx="2">
+            <a:schemeClr val="accent1"/>
+          </a:effectRef>
+          <a:fontRef idx="minor">
+            <a:schemeClr val="lt1"/>
+          </a:fontRef>
+        </p:style>
+        <p:txBody>
+          <a:bodyPr rtlCol="0" anchor="ctr"/>
+          <a:lstStyle/>
+          <a:p>
+            <a:pPr algn="ctr"/>
+          </a:p>
+        </p:txBody>
+      </p:sp>
+      <p:sp>
+        <p:nvSpPr>
+          <p:cNvPr id="3" name="TextBox 2"/>
           <p:cNvSpPr txBox="1"/>
           <p:nvPr/>
         </p:nvSpPr>
         <p:spPr>
           <a:xfrm>
-            <a:off x="548640" y="457200"/>
-            <a:ext cx="8229600" cy="1097280"/>
+            <a:off x="137160" y="73152"/>
+            <a:ext cx="8869680" cy="411480"/>
           </a:xfrm>
           <a:prstGeom prst="rect">
             <a:avLst/>
@@ -3461,29 +3713,41 @@
           </a:bodyPr>
           <a:lstStyle/>
           <a:p>
-            <a:pPr algn="l">
-              <a:defRPr sz="3000" b="1">
-                <a:solidFill>
-                  <a:srgbClr val="F0F4FC"/>
-                </a:solidFill>
-              </a:defRPr>
-            </a:pPr>
-            <a:r>
-              <a:t>10. 与现有方案对比</a:t>
-            </a:r>
-          </a:p>
-        </p:txBody>
-      </p:sp>
-      <p:sp>
-        <p:nvSpPr>
-          <p:cNvPr id="3" name="TextBox 2"/>
+            <a:pPr>
+              <a:defRPr sz="1100" b="1">
+                <a:solidFill>
+                  <a:srgbClr val="FFFFFF"/>
+                </a:solidFill>
+              </a:defRPr>
+            </a:pPr>
+            <a:r>
+              <a:t>第二十六届中国机器人及人工智能大赛</a:t>
+            </a:r>
+          </a:p>
+          <a:p>
+            <a:pPr>
+              <a:defRPr sz="1000">
+                <a:solidFill>
+                  <a:srgbClr val="C8DCFF"/>
+                </a:solidFill>
+              </a:defRPr>
+            </a:pPr>
+            <a:r>
+              <a:t>机器人创新赛道</a:t>
+            </a:r>
+          </a:p>
+        </p:txBody>
+      </p:sp>
+      <p:sp>
+        <p:nvSpPr>
+          <p:cNvPr id="4" name="TextBox 3"/>
           <p:cNvSpPr txBox="1"/>
           <p:nvPr/>
         </p:nvSpPr>
         <p:spPr>
           <a:xfrm>
-            <a:off x="548640" y="1234440"/>
-            <a:ext cx="8229600" cy="731520"/>
+            <a:off x="502920" y="685800"/>
+            <a:ext cx="8138160" cy="731520"/>
           </a:xfrm>
           <a:prstGeom prst="rect">
             <a:avLst/>
@@ -3496,29 +3760,29 @@
           </a:bodyPr>
           <a:lstStyle/>
           <a:p>
-            <a:pPr>
-              <a:defRPr sz="1600">
-                <a:solidFill>
-                  <a:srgbClr val="94A3B8"/>
-                </a:solidFill>
-              </a:defRPr>
-            </a:pPr>
-            <a:r>
-              <a:t>Comparison</a:t>
-            </a:r>
-          </a:p>
-        </p:txBody>
-      </p:sp>
-      <p:sp>
-        <p:nvSpPr>
-          <p:cNvPr id="4" name="TextBox 3"/>
+            <a:pPr algn="l">
+              <a:defRPr sz="2600" b="1">
+                <a:solidFill>
+                  <a:srgbClr val="1E1E1E"/>
+                </a:solidFill>
+              </a:defRPr>
+            </a:pPr>
+            <a:r>
+              <a:t>数据处理与决策流程</a:t>
+            </a:r>
+          </a:p>
+        </p:txBody>
+      </p:sp>
+      <p:sp>
+        <p:nvSpPr>
+          <p:cNvPr id="5" name="TextBox 4"/>
           <p:cNvSpPr txBox="1"/>
           <p:nvPr/>
         </p:nvSpPr>
         <p:spPr>
           <a:xfrm>
-            <a:off x="731520" y="1645920"/>
-            <a:ext cx="7772400" cy="4114800"/>
+            <a:off x="502920" y="1325880"/>
+            <a:ext cx="8138160" cy="3840480"/>
           </a:xfrm>
           <a:prstGeom prst="rect">
             <a:avLst/>
@@ -3533,61 +3797,76 @@
           <a:p>
             <a:pPr>
               <a:spcAft>
-                <a:spcPts val="1000"/>
+                <a:spcPts val="600"/>
               </a:spcAft>
-              <a:defRPr sz="1800">
-                <a:solidFill>
-                  <a:srgbClr val="F0F4FC"/>
-                </a:solidFill>
-              </a:defRPr>
-            </a:pPr>
-            <a:r>
-              <a:t>vs 智能音箱：多模态安全 + 实体动作 + 紧急硬优先级</a:t>
+              <a:defRPr sz="1400">
+                <a:solidFill>
+                  <a:srgbClr val="1E1E1E"/>
+                </a:solidFill>
+              </a:defRPr>
+            </a:pPr>
+            <a:r>
+              <a:t>1. 采集感知帧：摄像头骨架 / 滑块仿真 / 可穿戴 JSON</a:t>
             </a:r>
           </a:p>
           <a:p>
             <a:pPr>
               <a:spcAft>
-                <a:spcPts val="1000"/>
+                <a:spcPts val="600"/>
               </a:spcAft>
-              <a:defRPr sz="1800">
-                <a:solidFill>
-                  <a:srgbClr val="F0F4FC"/>
-                </a:solidFill>
-              </a:defRPr>
-            </a:pPr>
-            <a:r>
-              <a:t>vs 纯监控摄像头：主动对话 + 机器人执行 + 可解释决策</a:t>
+              <a:defRPr sz="1400">
+                <a:solidFill>
+                  <a:srgbClr val="1E1E1E"/>
+                </a:solidFill>
+              </a:defRPr>
+            </a:pPr>
+            <a:r>
+              <a:t>2. FallDetector 更新跌倒分数，Emotion/Health 更新标签</a:t>
             </a:r>
           </a:p>
           <a:p>
             <a:pPr>
               <a:spcAft>
-                <a:spcPts val="1000"/>
+                <a:spcPts val="600"/>
               </a:spcAft>
-              <a:defRPr sz="1800">
-                <a:solidFill>
-                  <a:srgbClr val="F0F4FC"/>
-                </a:solidFill>
-              </a:defRPr>
-            </a:pPr>
-            <a:r>
-              <a:t>vs 纯仿真毕设：ROS2 真机路径 + 评测脚本 + 开源仓库</a:t>
+              <a:defRPr sz="1400">
+                <a:solidFill>
+                  <a:srgbClr val="1E1E1E"/>
+                </a:solidFill>
+              </a:defRPr>
+            </a:pPr>
+            <a:r>
+              <a:t>3. RiskEngine 评估等级，状态机切换</a:t>
             </a:r>
           </a:p>
           <a:p>
             <a:pPr>
               <a:spcAft>
-                <a:spcPts val="1000"/>
+                <a:spcPts val="600"/>
               </a:spcAft>
-              <a:defRPr sz="1800">
-                <a:solidFill>
-                  <a:srgbClr val="F0F4FC"/>
-                </a:solidFill>
-              </a:defRPr>
-            </a:pPr>
-            <a:r>
-              <a:t>应用：社区养老、居家陪护、康复中心预研</a:t>
+              <a:defRPr sz="1400">
+                <a:solidFill>
+                  <a:srgbClr val="1E1E1E"/>
+                </a:solidFill>
+              </a:defRPr>
+            </a:pPr>
+            <a:r>
+              <a:t>4. DialogueManager 生成回复，CarePlanner 输出 RobotAction 序列</a:t>
+            </a:r>
+          </a:p>
+          <a:p>
+            <a:pPr>
+              <a:spcAft>
+                <a:spcPts val="600"/>
+              </a:spcAft>
+              <a:defRPr sz="1400">
+                <a:solidFill>
+                  <a:srgbClr val="1E1E1E"/>
+                </a:solidFill>
+              </a:defRPr>
+            </a:pPr>
+            <a:r>
+              <a:t>5. RobotAdapter 下发至仿真日志或 ROS2 /care/robot_cmd</a:t>
             </a:r>
           </a:p>
         </p:txBody>
@@ -3606,7 +3885,7 @@
     <p:bg>
       <p:bgPr>
         <a:solidFill>
-          <a:srgbClr val="0F172A"/>
+          <a:srgbClr val="FFFFFF"/>
         </a:solidFill>
         <a:effectLst/>
       </p:bgPr>
@@ -3620,14 +3899,57 @@
       <p:grpSpPr/>
       <p:sp>
         <p:nvSpPr>
-          <p:cNvPr id="2" name="TextBox 1"/>
+          <p:cNvPr id="2" name="Rectangle 1"/>
+          <p:cNvSpPr/>
+          <p:nvPr/>
+        </p:nvSpPr>
+        <p:spPr>
+          <a:xfrm>
+            <a:off x="0" y="0"/>
+            <a:ext cx="9144000" cy="502920"/>
+          </a:xfrm>
+          <a:prstGeom prst="rect">
+            <a:avLst/>
+          </a:prstGeom>
+          <a:solidFill>
+            <a:srgbClr val="143278"/>
+          </a:solidFill>
+          <a:ln>
+            <a:noFill/>
+          </a:ln>
+        </p:spPr>
+        <p:style>
+          <a:lnRef idx="1">
+            <a:schemeClr val="accent1"/>
+          </a:lnRef>
+          <a:fillRef idx="3">
+            <a:schemeClr val="accent1"/>
+          </a:fillRef>
+          <a:effectRef idx="2">
+            <a:schemeClr val="accent1"/>
+          </a:effectRef>
+          <a:fontRef idx="minor">
+            <a:schemeClr val="lt1"/>
+          </a:fontRef>
+        </p:style>
+        <p:txBody>
+          <a:bodyPr rtlCol="0" anchor="ctr"/>
+          <a:lstStyle/>
+          <a:p>
+            <a:pPr algn="ctr"/>
+          </a:p>
+        </p:txBody>
+      </p:sp>
+      <p:sp>
+        <p:nvSpPr>
+          <p:cNvPr id="3" name="TextBox 2"/>
           <p:cNvSpPr txBox="1"/>
           <p:nvPr/>
         </p:nvSpPr>
         <p:spPr>
           <a:xfrm>
-            <a:off x="548640" y="457200"/>
-            <a:ext cx="8229600" cy="1097280"/>
+            <a:off x="137160" y="73152"/>
+            <a:ext cx="8869680" cy="411480"/>
           </a:xfrm>
           <a:prstGeom prst="rect">
             <a:avLst/>
@@ -3640,29 +3962,41 @@
           </a:bodyPr>
           <a:lstStyle/>
           <a:p>
-            <a:pPr algn="l">
-              <a:defRPr sz="3000" b="1">
-                <a:solidFill>
-                  <a:srgbClr val="F0F4FC"/>
-                </a:solidFill>
-              </a:defRPr>
-            </a:pPr>
-            <a:r>
-              <a:t>11. 社会价值与应用前景</a:t>
-            </a:r>
-          </a:p>
-        </p:txBody>
-      </p:sp>
-      <p:sp>
-        <p:nvSpPr>
-          <p:cNvPr id="3" name="TextBox 2"/>
+            <a:pPr>
+              <a:defRPr sz="1100" b="1">
+                <a:solidFill>
+                  <a:srgbClr val="FFFFFF"/>
+                </a:solidFill>
+              </a:defRPr>
+            </a:pPr>
+            <a:r>
+              <a:t>第二十六届中国机器人及人工智能大赛</a:t>
+            </a:r>
+          </a:p>
+          <a:p>
+            <a:pPr>
+              <a:defRPr sz="1000">
+                <a:solidFill>
+                  <a:srgbClr val="C8DCFF"/>
+                </a:solidFill>
+              </a:defRPr>
+            </a:pPr>
+            <a:r>
+              <a:t>机器人创新赛道</a:t>
+            </a:r>
+          </a:p>
+        </p:txBody>
+      </p:sp>
+      <p:sp>
+        <p:nvSpPr>
+          <p:cNvPr id="4" name="TextBox 3"/>
           <p:cNvSpPr txBox="1"/>
           <p:nvPr/>
         </p:nvSpPr>
         <p:spPr>
           <a:xfrm>
-            <a:off x="548640" y="1234440"/>
-            <a:ext cx="8229600" cy="731520"/>
+            <a:off x="502920" y="1828800"/>
+            <a:ext cx="8138160" cy="731520"/>
           </a:xfrm>
           <a:prstGeom prst="rect">
             <a:avLst/>
@@ -3675,29 +4009,29 @@
           </a:bodyPr>
           <a:lstStyle/>
           <a:p>
-            <a:pPr>
-              <a:defRPr sz="1600">
-                <a:solidFill>
-                  <a:srgbClr val="94A3B8"/>
-                </a:solidFill>
-              </a:defRPr>
-            </a:pPr>
-            <a:r>
-              <a:t>Impact</a:t>
-            </a:r>
-          </a:p>
-        </p:txBody>
-      </p:sp>
-      <p:sp>
-        <p:nvSpPr>
-          <p:cNvPr id="4" name="TextBox 3"/>
+            <a:pPr algn="ctr">
+              <a:defRPr sz="3200" b="1">
+                <a:solidFill>
+                  <a:srgbClr val="1E1E1E"/>
+                </a:solidFill>
+              </a:defRPr>
+            </a:pPr>
+            <a:r>
+              <a:t>第三部分</a:t>
+            </a:r>
+          </a:p>
+        </p:txBody>
+      </p:sp>
+      <p:sp>
+        <p:nvSpPr>
+          <p:cNvPr id="5" name="TextBox 4"/>
           <p:cNvSpPr txBox="1"/>
           <p:nvPr/>
         </p:nvSpPr>
         <p:spPr>
           <a:xfrm>
-            <a:off x="731520" y="1645920"/>
-            <a:ext cx="7772400" cy="4114800"/>
+            <a:off x="502920" y="2606040"/>
+            <a:ext cx="8138160" cy="731520"/>
           </a:xfrm>
           <a:prstGeom prst="rect">
             <a:avLst/>
@@ -3705,83 +4039,20 @@
           <a:noFill/>
         </p:spPr>
         <p:txBody>
-          <a:bodyPr wrap="square">
+          <a:bodyPr wrap="none">
             <a:spAutoFit/>
           </a:bodyPr>
           <a:lstStyle/>
           <a:p>
-            <a:pPr>
-              <a:spcAft>
-                <a:spcPts val="1000"/>
-              </a:spcAft>
-              <a:defRPr sz="1800">
-                <a:solidFill>
-                  <a:srgbClr val="F0F4FC"/>
-                </a:solidFill>
-              </a:defRPr>
-            </a:pPr>
-            <a:r>
-              <a:t>契合智慧养老、适老化改造政策方向</a:t>
-            </a:r>
-          </a:p>
-          <a:p>
-            <a:pPr>
-              <a:spcAft>
-                <a:spcPts val="1000"/>
-              </a:spcAft>
-              <a:defRPr sz="1800">
-                <a:solidFill>
-                  <a:srgbClr val="F0F4FC"/>
-                </a:solidFill>
-              </a:defRPr>
-            </a:pPr>
-            <a:r>
-              <a:t>降低跌倒「发现空窗期」，提升救援效率</a:t>
-            </a:r>
-          </a:p>
-          <a:p>
-            <a:pPr>
-              <a:spcAft>
-                <a:spcPts val="1000"/>
-              </a:spcAft>
-              <a:defRPr sz="1800">
-                <a:solidFill>
-                  <a:srgbClr val="F0F4FC"/>
-                </a:solidFill>
-              </a:defRPr>
-            </a:pPr>
-            <a:r>
-              <a:t>情感陪伴缓解孤独，辅助用药与活动提醒</a:t>
-            </a:r>
-          </a:p>
-          <a:p>
-            <a:pPr>
-              <a:spcAft>
-                <a:spcPts val="1000"/>
-              </a:spcAft>
-              <a:defRPr sz="1800">
-                <a:solidFill>
-                  <a:srgbClr val="F0F4FC"/>
-                </a:solidFill>
-              </a:defRPr>
-            </a:pPr>
-            <a:r>
-              <a:t>模块化部署，可按需启用视觉/LLM/真机</a:t>
-            </a:r>
-          </a:p>
-          <a:p>
-            <a:pPr>
-              <a:spcAft>
-                <a:spcPts val="1000"/>
-              </a:spcAft>
-              <a:defRPr sz="1800">
-                <a:solidFill>
-                  <a:srgbClr val="F0F4FC"/>
-                </a:solidFill>
-              </a:defRPr>
-            </a:pPr>
-            <a:r>
-              <a:t>已开源：https://github.com/FBB123571/ElderCare-Humanoid-Platform</a:t>
+            <a:pPr algn="ctr">
+              <a:defRPr sz="2200" b="1">
+                <a:solidFill>
+                  <a:srgbClr val="143278"/>
+                </a:solidFill>
+              </a:defRPr>
+            </a:pPr>
+            <a:r>
+              <a:t>系统实现 · 评测 · 演示</a:t>
             </a:r>
           </a:p>
         </p:txBody>
@@ -3800,7 +4071,7 @@
     <p:bg>
       <p:bgPr>
         <a:solidFill>
-          <a:srgbClr val="0F172A"/>
+          <a:srgbClr val="FFFFFF"/>
         </a:solidFill>
         <a:effectLst/>
       </p:bgPr>
@@ -3814,14 +4085,57 @@
       <p:grpSpPr/>
       <p:sp>
         <p:nvSpPr>
-          <p:cNvPr id="2" name="TextBox 1"/>
+          <p:cNvPr id="2" name="Rectangle 1"/>
+          <p:cNvSpPr/>
+          <p:nvPr/>
+        </p:nvSpPr>
+        <p:spPr>
+          <a:xfrm>
+            <a:off x="0" y="0"/>
+            <a:ext cx="9144000" cy="502920"/>
+          </a:xfrm>
+          <a:prstGeom prst="rect">
+            <a:avLst/>
+          </a:prstGeom>
+          <a:solidFill>
+            <a:srgbClr val="143278"/>
+          </a:solidFill>
+          <a:ln>
+            <a:noFill/>
+          </a:ln>
+        </p:spPr>
+        <p:style>
+          <a:lnRef idx="1">
+            <a:schemeClr val="accent1"/>
+          </a:lnRef>
+          <a:fillRef idx="3">
+            <a:schemeClr val="accent1"/>
+          </a:fillRef>
+          <a:effectRef idx="2">
+            <a:schemeClr val="accent1"/>
+          </a:effectRef>
+          <a:fontRef idx="minor">
+            <a:schemeClr val="lt1"/>
+          </a:fontRef>
+        </p:style>
+        <p:txBody>
+          <a:bodyPr rtlCol="0" anchor="ctr"/>
+          <a:lstStyle/>
+          <a:p>
+            <a:pPr algn="ctr"/>
+          </a:p>
+        </p:txBody>
+      </p:sp>
+      <p:sp>
+        <p:nvSpPr>
+          <p:cNvPr id="3" name="TextBox 2"/>
           <p:cNvSpPr txBox="1"/>
           <p:nvPr/>
         </p:nvSpPr>
         <p:spPr>
           <a:xfrm>
-            <a:off x="548640" y="457200"/>
-            <a:ext cx="8229600" cy="1097280"/>
+            <a:off x="137160" y="73152"/>
+            <a:ext cx="8869680" cy="411480"/>
           </a:xfrm>
           <a:prstGeom prst="rect">
             <a:avLst/>
@@ -3834,29 +4148,41 @@
           </a:bodyPr>
           <a:lstStyle/>
           <a:p>
-            <a:pPr algn="l">
-              <a:defRPr sz="3000" b="1">
-                <a:solidFill>
-                  <a:srgbClr val="F0F4FC"/>
-                </a:solidFill>
-              </a:defRPr>
-            </a:pPr>
-            <a:r>
-              <a:t>12. 总结与展望</a:t>
-            </a:r>
-          </a:p>
-        </p:txBody>
-      </p:sp>
-      <p:sp>
-        <p:nvSpPr>
-          <p:cNvPr id="3" name="TextBox 2"/>
+            <a:pPr>
+              <a:defRPr sz="1100" b="1">
+                <a:solidFill>
+                  <a:srgbClr val="FFFFFF"/>
+                </a:solidFill>
+              </a:defRPr>
+            </a:pPr>
+            <a:r>
+              <a:t>第二十六届中国机器人及人工智能大赛</a:t>
+            </a:r>
+          </a:p>
+          <a:p>
+            <a:pPr>
+              <a:defRPr sz="1000">
+                <a:solidFill>
+                  <a:srgbClr val="C8DCFF"/>
+                </a:solidFill>
+              </a:defRPr>
+            </a:pPr>
+            <a:r>
+              <a:t>机器人创新赛道</a:t>
+            </a:r>
+          </a:p>
+        </p:txBody>
+      </p:sp>
+      <p:sp>
+        <p:nvSpPr>
+          <p:cNvPr id="4" name="TextBox 3"/>
           <p:cNvSpPr txBox="1"/>
           <p:nvPr/>
         </p:nvSpPr>
         <p:spPr>
           <a:xfrm>
-            <a:off x="548640" y="1234440"/>
-            <a:ext cx="8229600" cy="731520"/>
+            <a:off x="502920" y="685800"/>
+            <a:ext cx="8138160" cy="731520"/>
           </a:xfrm>
           <a:prstGeom prst="rect">
             <a:avLst/>
@@ -3869,29 +4195,29 @@
           </a:bodyPr>
           <a:lstStyle/>
           <a:p>
-            <a:pPr>
-              <a:defRPr sz="1600">
-                <a:solidFill>
-                  <a:srgbClr val="94A3B8"/>
-                </a:solidFill>
-              </a:defRPr>
-            </a:pPr>
-            <a:r>
-              <a:t>Conclusion</a:t>
-            </a:r>
-          </a:p>
-        </p:txBody>
-      </p:sp>
-      <p:sp>
-        <p:nvSpPr>
-          <p:cNvPr id="4" name="TextBox 3"/>
+            <a:pPr algn="l">
+              <a:defRPr sz="2600" b="1">
+                <a:solidFill>
+                  <a:srgbClr val="1E1E1E"/>
+                </a:solidFill>
+              </a:defRPr>
+            </a:pPr>
+            <a:r>
+              <a:t>Web 控制台与视觉演示</a:t>
+            </a:r>
+          </a:p>
+        </p:txBody>
+      </p:sp>
+      <p:sp>
+        <p:nvSpPr>
+          <p:cNvPr id="5" name="TextBox 4"/>
           <p:cNvSpPr txBox="1"/>
           <p:nvPr/>
         </p:nvSpPr>
         <p:spPr>
           <a:xfrm>
-            <a:off x="731520" y="1645920"/>
-            <a:ext cx="7772400" cy="4114800"/>
+            <a:off x="502920" y="1325880"/>
+            <a:ext cx="8138160" cy="3840480"/>
           </a:xfrm>
           <a:prstGeom prst="rect">
             <a:avLst/>
@@ -3906,61 +4232,76 @@
           <a:p>
             <a:pPr>
               <a:spcAft>
-                <a:spcPts val="1000"/>
+                <a:spcPts val="600"/>
               </a:spcAft>
-              <a:defRPr sz="1800">
-                <a:solidFill>
-                  <a:srgbClr val="F0F4FC"/>
-                </a:solidFill>
-              </a:defRPr>
-            </a:pPr>
-            <a:r>
-              <a:t>完成：多模态决策核心 + Web 可视化 + MediaPipe 视觉 + 评测体系</a:t>
+              <a:defRPr sz="1400">
+                <a:solidFill>
+                  <a:srgbClr val="1E1E1E"/>
+                </a:solidFill>
+              </a:defRPr>
+            </a:pPr>
+            <a:r>
+              <a:t>FastAPI + 现代化 Web 前端，浏览器即可答辩演示</a:t>
             </a:r>
           </a:p>
           <a:p>
             <a:pPr>
               <a:spcAft>
-                <a:spcPts val="1000"/>
+                <a:spcPts val="600"/>
               </a:spcAft>
-              <a:defRPr sz="1800">
-                <a:solidFill>
-                  <a:srgbClr val="F0F4FC"/>
-                </a:solidFill>
-              </a:defRPr>
-            </a:pPr>
-            <a:r>
-              <a:t>创新：可解释风险融合 + 紧急闭环 + 人形接口</a:t>
+              <a:defRPr sz="1400">
+                <a:solidFill>
+                  <a:srgbClr val="1E1E1E"/>
+                </a:solidFill>
+              </a:defRPr>
+            </a:pPr>
+            <a:r>
+              <a:t>功能：感知调节 · 实时风险仪表盘 · 对话日志 · 机器人指令流</a:t>
             </a:r>
           </a:p>
           <a:p>
             <a:pPr>
               <a:spcAft>
-                <a:spcPts val="1000"/>
+                <a:spcPts val="600"/>
               </a:spcAft>
-              <a:defRPr sz="1800">
-                <a:solidFill>
-                  <a:srgbClr val="F0F4FC"/>
-                </a:solidFill>
-              </a:defRPr>
-            </a:pPr>
-            <a:r>
-              <a:t>展望：真机联调 · 公开数据集 · 多老人交互 · 联邦隐私</a:t>
+              <a:defRPr sz="1400">
+                <a:solidFill>
+                  <a:srgbClr val="1E1E1E"/>
+                </a:solidFill>
+              </a:defRPr>
+            </a:pPr>
+            <a:r>
+              <a:t>摄像头：打开 → 分析当前帧 → MediaPipe 骨架叠加</a:t>
             </a:r>
           </a:p>
           <a:p>
             <a:pPr>
               <a:spcAft>
-                <a:spcPts val="1000"/>
+                <a:spcPts val="600"/>
               </a:spcAft>
-              <a:defRPr sz="1800">
-                <a:solidFill>
-                  <a:srgbClr val="F0F4FC"/>
-                </a:solidFill>
-              </a:defRPr>
-            </a:pPr>
-            <a:r>
-              <a:t>感谢各位评委老师！</a:t>
+              <a:defRPr sz="1400">
+                <a:solidFill>
+                  <a:srgbClr val="1E1E1E"/>
+                </a:solidFill>
+              </a:defRPr>
+            </a:pPr>
+            <a:r>
+              <a:t>一键剧本：日常监测 → 老人倾诉 → 跌倒 → 紧急呼叫</a:t>
+            </a:r>
+          </a:p>
+          <a:p>
+            <a:pPr>
+              <a:spcAft>
+                <a:spcPts val="600"/>
+              </a:spcAft>
+              <a:defRPr sz="1400">
+                <a:solidFill>
+                  <a:srgbClr val="1E1E1E"/>
+                </a:solidFill>
+              </a:defRPr>
+            </a:pPr>
+            <a:r>
+              <a:t>启动：bash scripts/run_web.sh  →  http://localhost:8765</a:t>
             </a:r>
           </a:p>
         </p:txBody>
@@ -3979,7 +4320,7 @@
     <p:bg>
       <p:bgPr>
         <a:solidFill>
-          <a:srgbClr val="0F172A"/>
+          <a:srgbClr val="FFFFFF"/>
         </a:solidFill>
         <a:effectLst/>
       </p:bgPr>
@@ -3993,14 +4334,57 @@
       <p:grpSpPr/>
       <p:sp>
         <p:nvSpPr>
-          <p:cNvPr id="2" name="TextBox 1"/>
+          <p:cNvPr id="2" name="Rectangle 1"/>
+          <p:cNvSpPr/>
+          <p:nvPr/>
+        </p:nvSpPr>
+        <p:spPr>
+          <a:xfrm>
+            <a:off x="0" y="0"/>
+            <a:ext cx="9144000" cy="502920"/>
+          </a:xfrm>
+          <a:prstGeom prst="rect">
+            <a:avLst/>
+          </a:prstGeom>
+          <a:solidFill>
+            <a:srgbClr val="143278"/>
+          </a:solidFill>
+          <a:ln>
+            <a:noFill/>
+          </a:ln>
+        </p:spPr>
+        <p:style>
+          <a:lnRef idx="1">
+            <a:schemeClr val="accent1"/>
+          </a:lnRef>
+          <a:fillRef idx="3">
+            <a:schemeClr val="accent1"/>
+          </a:fillRef>
+          <a:effectRef idx="2">
+            <a:schemeClr val="accent1"/>
+          </a:effectRef>
+          <a:fontRef idx="minor">
+            <a:schemeClr val="lt1"/>
+          </a:fontRef>
+        </p:style>
+        <p:txBody>
+          <a:bodyPr rtlCol="0" anchor="ctr"/>
+          <a:lstStyle/>
+          <a:p>
+            <a:pPr algn="ctr"/>
+          </a:p>
+        </p:txBody>
+      </p:sp>
+      <p:sp>
+        <p:nvSpPr>
+          <p:cNvPr id="3" name="TextBox 2"/>
           <p:cNvSpPr txBox="1"/>
           <p:nvPr/>
         </p:nvSpPr>
         <p:spPr>
           <a:xfrm>
-            <a:off x="548640" y="457200"/>
-            <a:ext cx="8229600" cy="1097280"/>
+            <a:off x="137160" y="73152"/>
+            <a:ext cx="8869680" cy="411480"/>
           </a:xfrm>
           <a:prstGeom prst="rect">
             <a:avLst/>
@@ -4013,29 +4397,41 @@
           </a:bodyPr>
           <a:lstStyle/>
           <a:p>
-            <a:pPr algn="l">
-              <a:defRPr sz="3000" b="1">
-                <a:solidFill>
-                  <a:srgbClr val="F0F4FC"/>
-                </a:solidFill>
-              </a:defRPr>
-            </a:pPr>
-            <a:r>
-              <a:t>Q &amp; A</a:t>
-            </a:r>
-          </a:p>
-        </p:txBody>
-      </p:sp>
-      <p:sp>
-        <p:nvSpPr>
-          <p:cNvPr id="3" name="TextBox 2"/>
+            <a:pPr>
+              <a:defRPr sz="1100" b="1">
+                <a:solidFill>
+                  <a:srgbClr val="FFFFFF"/>
+                </a:solidFill>
+              </a:defRPr>
+            </a:pPr>
+            <a:r>
+              <a:t>第二十六届中国机器人及人工智能大赛</a:t>
+            </a:r>
+          </a:p>
+          <a:p>
+            <a:pPr>
+              <a:defRPr sz="1000">
+                <a:solidFill>
+                  <a:srgbClr val="C8DCFF"/>
+                </a:solidFill>
+              </a:defRPr>
+            </a:pPr>
+            <a:r>
+              <a:t>机器人创新赛道</a:t>
+            </a:r>
+          </a:p>
+        </p:txBody>
+      </p:sp>
+      <p:sp>
+        <p:nvSpPr>
+          <p:cNvPr id="4" name="TextBox 3"/>
           <p:cNvSpPr txBox="1"/>
           <p:nvPr/>
         </p:nvSpPr>
         <p:spPr>
           <a:xfrm>
-            <a:off x="548640" y="1234440"/>
-            <a:ext cx="8229600" cy="731520"/>
+            <a:off x="502920" y="685800"/>
+            <a:ext cx="8138160" cy="731520"/>
           </a:xfrm>
           <a:prstGeom prst="rect">
             <a:avLst/>
@@ -4048,29 +4444,343 @@
           </a:bodyPr>
           <a:lstStyle/>
           <a:p>
-            <a:pPr>
-              <a:defRPr sz="1600">
-                <a:solidFill>
-                  <a:srgbClr val="94A3B8"/>
-                </a:solidFill>
-              </a:defRPr>
-            </a:pPr>
-            <a:r>
-              <a:t>欢迎提问</a:t>
-            </a:r>
-          </a:p>
-        </p:txBody>
-      </p:sp>
-      <p:sp>
-        <p:nvSpPr>
-          <p:cNvPr id="4" name="TextBox 3"/>
+            <a:pPr algn="l">
+              <a:defRPr sz="2600" b="1">
+                <a:solidFill>
+                  <a:srgbClr val="1E1E1E"/>
+                </a:solidFill>
+              </a:defRPr>
+            </a:pPr>
+            <a:r>
+              <a:t>实验评测结果</a:t>
+            </a:r>
+          </a:p>
+        </p:txBody>
+      </p:sp>
+      <p:graphicFrame>
+        <p:nvGraphicFramePr>
+          <p:cNvPr id="5" name="Table 4"/>
+          <p:cNvGraphicFramePr>
+            <a:graphicFrameLocks noGrp="1"/>
+          </p:cNvGraphicFramePr>
+          <p:nvPr/>
+        </p:nvGraphicFramePr>
+        <p:xfrm>
+          <a:off x="1097280" y="1371600"/>
+          <a:ext cx="6949440" cy="2240279"/>
+        </p:xfrm>
+        <a:graphic>
+          <a:graphicData uri="http://schemas.openxmlformats.org/drawingml/2006/table">
+            <a:tbl>
+              <a:tblPr firstRow="1" bandRow="1">
+                <a:tableStyleId>{5C22544A-7EE6-4342-B048-85BDC9FD1C3A}</a:tableStyleId>
+              </a:tblPr>
+              <a:tblGrid>
+                <a:gridCol w="3840480"/>
+                <a:gridCol w="3108960"/>
+              </a:tblGrid>
+              <a:tr h="320039">
+                <a:tc>
+                  <a:txBody>
+                    <a:bodyPr/>
+                    <a:lstStyle/>
+                    <a:p>
+                      <a:pPr>
+                        <a:defRPr sz="1200" b="1">
+                          <a:solidFill>
+                            <a:srgbClr val="FFFFFF"/>
+                          </a:solidFill>
+                        </a:defRPr>
+                      </a:pPr>
+                      <a:r>
+                        <a:t>指标</a:t>
+                      </a:r>
+                    </a:p>
+                  </a:txBody>
+                  <a:tcPr>
+                    <a:solidFill>
+                      <a:srgbClr val="143278"/>
+                    </a:solidFill>
+                  </a:tcPr>
+                </a:tc>
+                <a:tc>
+                  <a:txBody>
+                    <a:bodyPr/>
+                    <a:lstStyle/>
+                    <a:p>
+                      <a:pPr>
+                        <a:defRPr sz="1200" b="1">
+                          <a:solidFill>
+                            <a:srgbClr val="FFFFFF"/>
+                          </a:solidFill>
+                        </a:defRPr>
+                      </a:pPr>
+                      <a:r>
+                        <a:t>结果</a:t>
+                      </a:r>
+                    </a:p>
+                  </a:txBody>
+                  <a:tcPr>
+                    <a:solidFill>
+                      <a:srgbClr val="143278"/>
+                    </a:solidFill>
+                  </a:tcPr>
+                </a:tc>
+              </a:tr>
+              <a:tr h="320039">
+                <a:tc>
+                  <a:txBody>
+                    <a:bodyPr/>
+                    <a:lstStyle/>
+                    <a:p>
+                      <a:pPr>
+                        <a:defRPr sz="1200">
+                          <a:solidFill>
+                            <a:srgbClr val="1E1E1E"/>
+                          </a:solidFill>
+                        </a:defRPr>
+                      </a:pPr>
+                      <a:r>
+                        <a:t>跌倒检测 Precision（合成6场景）</a:t>
+                      </a:r>
+                    </a:p>
+                  </a:txBody>
+                  <a:tcPr/>
+                </a:tc>
+                <a:tc>
+                  <a:txBody>
+                    <a:bodyPr/>
+                    <a:lstStyle/>
+                    <a:p>
+                      <a:pPr>
+                        <a:defRPr sz="1200">
+                          <a:solidFill>
+                            <a:srgbClr val="1E1E1E"/>
+                          </a:solidFill>
+                        </a:defRPr>
+                      </a:pPr>
+                      <a:r>
+                        <a:t>100%</a:t>
+                      </a:r>
+                    </a:p>
+                  </a:txBody>
+                  <a:tcPr/>
+                </a:tc>
+              </a:tr>
+              <a:tr h="320039">
+                <a:tc>
+                  <a:txBody>
+                    <a:bodyPr/>
+                    <a:lstStyle/>
+                    <a:p>
+                      <a:pPr>
+                        <a:defRPr sz="1200">
+                          <a:solidFill>
+                            <a:srgbClr val="1E1E1E"/>
+                          </a:solidFill>
+                        </a:defRPr>
+                      </a:pPr>
+                      <a:r>
+                        <a:t>跌倒检测 Recall</a:t>
+                      </a:r>
+                    </a:p>
+                  </a:txBody>
+                  <a:tcPr/>
+                </a:tc>
+                <a:tc>
+                  <a:txBody>
+                    <a:bodyPr/>
+                    <a:lstStyle/>
+                    <a:p>
+                      <a:pPr>
+                        <a:defRPr sz="1200">
+                          <a:solidFill>
+                            <a:srgbClr val="1E1E1E"/>
+                          </a:solidFill>
+                        </a:defRPr>
+                      </a:pPr>
+                      <a:r>
+                        <a:t>100%</a:t>
+                      </a:r>
+                    </a:p>
+                  </a:txBody>
+                  <a:tcPr/>
+                </a:tc>
+              </a:tr>
+              <a:tr h="320039">
+                <a:tc>
+                  <a:txBody>
+                    <a:bodyPr/>
+                    <a:lstStyle/>
+                    <a:p>
+                      <a:pPr>
+                        <a:defRPr sz="1200">
+                          <a:solidFill>
+                            <a:srgbClr val="1E1E1E"/>
+                          </a:solidFill>
+                        </a:defRPr>
+                      </a:pPr>
+                      <a:r>
+                        <a:t>跌倒检测 F1</a:t>
+                      </a:r>
+                    </a:p>
+                  </a:txBody>
+                  <a:tcPr/>
+                </a:tc>
+                <a:tc>
+                  <a:txBody>
+                    <a:bodyPr/>
+                    <a:lstStyle/>
+                    <a:p>
+                      <a:pPr>
+                        <a:defRPr sz="1200">
+                          <a:solidFill>
+                            <a:srgbClr val="1E1E1E"/>
+                          </a:solidFill>
+                        </a:defRPr>
+                      </a:pPr>
+                      <a:r>
+                        <a:t>100%</a:t>
+                      </a:r>
+                    </a:p>
+                  </a:txBody>
+                  <a:tcPr/>
+                </a:tc>
+              </a:tr>
+              <a:tr h="320039">
+                <a:tc>
+                  <a:txBody>
+                    <a:bodyPr/>
+                    <a:lstStyle/>
+                    <a:p>
+                      <a:pPr>
+                        <a:defRPr sz="1200">
+                          <a:solidFill>
+                            <a:srgbClr val="1E1E1E"/>
+                          </a:solidFill>
+                        </a:defRPr>
+                      </a:pPr>
+                      <a:r>
+                        <a:t>端到端紧急呼叫触发率</a:t>
+                      </a:r>
+                    </a:p>
+                  </a:txBody>
+                  <a:tcPr/>
+                </a:tc>
+                <a:tc>
+                  <a:txBody>
+                    <a:bodyPr/>
+                    <a:lstStyle/>
+                    <a:p>
+                      <a:pPr>
+                        <a:defRPr sz="1200">
+                          <a:solidFill>
+                            <a:srgbClr val="1E1E1E"/>
+                          </a:solidFill>
+                        </a:defRPr>
+                      </a:pPr>
+                      <a:r>
+                        <a:t>100%</a:t>
+                      </a:r>
+                    </a:p>
+                  </a:txBody>
+                  <a:tcPr/>
+                </a:tc>
+              </a:tr>
+              <a:tr h="320039">
+                <a:tc>
+                  <a:txBody>
+                    <a:bodyPr/>
+                    <a:lstStyle/>
+                    <a:p>
+                      <a:pPr>
+                        <a:defRPr sz="1200">
+                          <a:solidFill>
+                            <a:srgbClr val="1E1E1E"/>
+                          </a:solidFill>
+                        </a:defRPr>
+                      </a:pPr>
+                      <a:r>
+                        <a:t>单帧决策延迟（CPU，无云端LLM）</a:t>
+                      </a:r>
+                    </a:p>
+                  </a:txBody>
+                  <a:tcPr/>
+                </a:tc>
+                <a:tc>
+                  <a:txBody>
+                    <a:bodyPr/>
+                    <a:lstStyle/>
+                    <a:p>
+                      <a:pPr>
+                        <a:defRPr sz="1200">
+                          <a:solidFill>
+                            <a:srgbClr val="1E1E1E"/>
+                          </a:solidFill>
+                        </a:defRPr>
+                      </a:pPr>
+                      <a:r>
+                        <a:t>&lt; 50 ms</a:t>
+                      </a:r>
+                    </a:p>
+                  </a:txBody>
+                  <a:tcPr/>
+                </a:tc>
+              </a:tr>
+              <a:tr h="320045">
+                <a:tc>
+                  <a:txBody>
+                    <a:bodyPr/>
+                    <a:lstStyle/>
+                    <a:p>
+                      <a:pPr>
+                        <a:defRPr sz="1200">
+                          <a:solidFill>
+                            <a:srgbClr val="1E1E1E"/>
+                          </a:solidFill>
+                        </a:defRPr>
+                      </a:pPr>
+                      <a:r>
+                        <a:t>单元测试 + 无头压测</a:t>
+                      </a:r>
+                    </a:p>
+                  </a:txBody>
+                  <a:tcPr/>
+                </a:tc>
+                <a:tc>
+                  <a:txBody>
+                    <a:bodyPr/>
+                    <a:lstStyle/>
+                    <a:p>
+                      <a:pPr>
+                        <a:defRPr sz="1200">
+                          <a:solidFill>
+                            <a:srgbClr val="1E1E1E"/>
+                          </a:solidFill>
+                        </a:defRPr>
+                      </a:pPr>
+                      <a:r>
+                        <a:t>pytest 全部通过</a:t>
+                      </a:r>
+                    </a:p>
+                  </a:txBody>
+                  <a:tcPr/>
+                </a:tc>
+              </a:tr>
+            </a:tbl>
+          </a:graphicData>
+        </a:graphic>
+      </p:graphicFrame>
+      <p:sp>
+        <p:nvSpPr>
+          <p:cNvPr id="6" name="TextBox 5"/>
           <p:cNvSpPr txBox="1"/>
           <p:nvPr/>
         </p:nvSpPr>
         <p:spPr>
           <a:xfrm>
-            <a:off x="731520" y="2286000"/>
-            <a:ext cx="7772400" cy="4114800"/>
+            <a:off x="502920" y="3977639"/>
+            <a:ext cx="8138160" cy="3474720"/>
           </a:xfrm>
           <a:prstGeom prst="rect">
             <a:avLst/>
@@ -4084,47 +4794,1375 @@
           <a:lstStyle/>
           <a:p>
             <a:pPr>
+              <a:lnSpc>
+                <a:spcPct val="135000"/>
+              </a:lnSpc>
+              <a:defRPr sz="1100" b="0">
+                <a:solidFill>
+                  <a:srgbClr val="1E1E1E"/>
+                </a:solidFill>
+              </a:defRPr>
+            </a:pPr>
+            <a:r>
+              <a:t>详见 data/evaluation/results/fall_eval_report.json</a:t>
+            </a:r>
+          </a:p>
+        </p:txBody>
+      </p:sp>
+    </p:spTree>
+  </p:cSld>
+  <p:clrMapOvr>
+    <a:masterClrMapping/>
+  </p:clrMapOvr>
+</p:sld>
+</file>
+
+<file path=ppt/slides/slide15.xml><?xml version="1.0" encoding="utf-8"?>
+<p:sld xmlns:a="http://schemas.openxmlformats.org/drawingml/2006/main" xmlns:p="http://schemas.openxmlformats.org/presentationml/2006/main" xmlns:r="http://schemas.openxmlformats.org/officeDocument/2006/relationships">
+  <p:cSld>
+    <p:bg>
+      <p:bgPr>
+        <a:solidFill>
+          <a:srgbClr val="FFFFFF"/>
+        </a:solidFill>
+        <a:effectLst/>
+      </p:bgPr>
+    </p:bg>
+    <p:spTree>
+      <p:nvGrpSpPr>
+        <p:cNvPr id="1" name=""/>
+        <p:cNvGrpSpPr/>
+        <p:nvPr/>
+      </p:nvGrpSpPr>
+      <p:grpSpPr/>
+      <p:sp>
+        <p:nvSpPr>
+          <p:cNvPr id="2" name="Rectangle 1"/>
+          <p:cNvSpPr/>
+          <p:nvPr/>
+        </p:nvSpPr>
+        <p:spPr>
+          <a:xfrm>
+            <a:off x="0" y="0"/>
+            <a:ext cx="9144000" cy="502920"/>
+          </a:xfrm>
+          <a:prstGeom prst="rect">
+            <a:avLst/>
+          </a:prstGeom>
+          <a:solidFill>
+            <a:srgbClr val="143278"/>
+          </a:solidFill>
+          <a:ln>
+            <a:noFill/>
+          </a:ln>
+        </p:spPr>
+        <p:style>
+          <a:lnRef idx="1">
+            <a:schemeClr val="accent1"/>
+          </a:lnRef>
+          <a:fillRef idx="3">
+            <a:schemeClr val="accent1"/>
+          </a:fillRef>
+          <a:effectRef idx="2">
+            <a:schemeClr val="accent1"/>
+          </a:effectRef>
+          <a:fontRef idx="minor">
+            <a:schemeClr val="lt1"/>
+          </a:fontRef>
+        </p:style>
+        <p:txBody>
+          <a:bodyPr rtlCol="0" anchor="ctr"/>
+          <a:lstStyle/>
+          <a:p>
+            <a:pPr algn="ctr"/>
+          </a:p>
+        </p:txBody>
+      </p:sp>
+      <p:sp>
+        <p:nvSpPr>
+          <p:cNvPr id="3" name="TextBox 2"/>
+          <p:cNvSpPr txBox="1"/>
+          <p:nvPr/>
+        </p:nvSpPr>
+        <p:spPr>
+          <a:xfrm>
+            <a:off x="137160" y="73152"/>
+            <a:ext cx="8869680" cy="411480"/>
+          </a:xfrm>
+          <a:prstGeom prst="rect">
+            <a:avLst/>
+          </a:prstGeom>
+          <a:noFill/>
+        </p:spPr>
+        <p:txBody>
+          <a:bodyPr wrap="none">
+            <a:spAutoFit/>
+          </a:bodyPr>
+          <a:lstStyle/>
+          <a:p>
+            <a:pPr>
+              <a:defRPr sz="1100" b="1">
+                <a:solidFill>
+                  <a:srgbClr val="FFFFFF"/>
+                </a:solidFill>
+              </a:defRPr>
+            </a:pPr>
+            <a:r>
+              <a:t>第二十六届中国机器人及人工智能大赛</a:t>
+            </a:r>
+          </a:p>
+          <a:p>
+            <a:pPr>
+              <a:defRPr sz="1000">
+                <a:solidFill>
+                  <a:srgbClr val="C8DCFF"/>
+                </a:solidFill>
+              </a:defRPr>
+            </a:pPr>
+            <a:r>
+              <a:t>机器人创新赛道</a:t>
+            </a:r>
+          </a:p>
+        </p:txBody>
+      </p:sp>
+      <p:sp>
+        <p:nvSpPr>
+          <p:cNvPr id="4" name="TextBox 3"/>
+          <p:cNvSpPr txBox="1"/>
+          <p:nvPr/>
+        </p:nvSpPr>
+        <p:spPr>
+          <a:xfrm>
+            <a:off x="502920" y="685800"/>
+            <a:ext cx="8138160" cy="731520"/>
+          </a:xfrm>
+          <a:prstGeom prst="rect">
+            <a:avLst/>
+          </a:prstGeom>
+          <a:noFill/>
+        </p:spPr>
+        <p:txBody>
+          <a:bodyPr wrap="none">
+            <a:spAutoFit/>
+          </a:bodyPr>
+          <a:lstStyle/>
+          <a:p>
+            <a:pPr algn="l">
+              <a:defRPr sz="2600" b="1">
+                <a:solidFill>
+                  <a:srgbClr val="1E1E1E"/>
+                </a:solidFill>
+              </a:defRPr>
+            </a:pPr>
+            <a:r>
+              <a:t>开源与知识产权</a:t>
+            </a:r>
+          </a:p>
+        </p:txBody>
+      </p:sp>
+      <p:sp>
+        <p:nvSpPr>
+          <p:cNvPr id="5" name="TextBox 4"/>
+          <p:cNvSpPr txBox="1"/>
+          <p:nvPr/>
+        </p:nvSpPr>
+        <p:spPr>
+          <a:xfrm>
+            <a:off x="502920" y="1325880"/>
+            <a:ext cx="8138160" cy="3840480"/>
+          </a:xfrm>
+          <a:prstGeom prst="rect">
+            <a:avLst/>
+          </a:prstGeom>
+          <a:noFill/>
+        </p:spPr>
+        <p:txBody>
+          <a:bodyPr wrap="square">
+            <a:spAutoFit/>
+          </a:bodyPr>
+          <a:lstStyle/>
+          <a:p>
+            <a:pPr>
               <a:spcAft>
-                <a:spcPts val="1000"/>
+                <a:spcPts val="600"/>
               </a:spcAft>
-              <a:defRPr sz="1800">
-                <a:solidFill>
-                  <a:srgbClr val="F0F4FC"/>
-                </a:solidFill>
-              </a:defRPr>
-            </a:pPr>
-            <a:r>
-              <a:t>演示：Web 控制台 live demo</a:t>
+              <a:defRPr sz="1400">
+                <a:solidFill>
+                  <a:srgbClr val="1E1E1E"/>
+                </a:solidFill>
+              </a:defRPr>
+            </a:pPr>
+            <a:r>
+              <a:t>GitHub 开源：https://github.com/FBB123571/ElderCare-Humanoid-Platform</a:t>
             </a:r>
           </a:p>
           <a:p>
             <a:pPr>
               <a:spcAft>
-                <a:spcPts val="1000"/>
+                <a:spcPts val="600"/>
               </a:spcAft>
-              <a:defRPr sz="1800">
-                <a:solidFill>
-                  <a:srgbClr val="F0F4FC"/>
-                </a:solidFill>
-              </a:defRPr>
-            </a:pPr>
-            <a:r>
-              <a:t>代码：GitHub 开源可复现</a:t>
+              <a:defRPr sz="1400">
+                <a:solidFill>
+                  <a:srgbClr val="1E1E1E"/>
+                </a:solidFill>
+              </a:defRPr>
+            </a:pPr>
+            <a:r>
+              <a:t>软件名称建议：CareCompanion 智能养老人形陪伴机器人系统 V1.0</a:t>
             </a:r>
           </a:p>
           <a:p>
             <a:pPr>
               <a:spcAft>
-                <a:spcPts val="1000"/>
+                <a:spcPts val="600"/>
               </a:spcAft>
-              <a:defRPr sz="1800">
-                <a:solidFill>
-                  <a:srgbClr val="F0F4FC"/>
-                </a:solidFill>
-              </a:defRPr>
-            </a:pPr>
-            <a:r>
-              <a:t>联系方式：（请填写团队信息）</a:t>
+              <a:defRPr sz="1400">
+                <a:solidFill>
+                  <a:srgbClr val="1E1E1E"/>
+                </a:solidFill>
+              </a:defRPr>
+            </a:pPr>
+            <a:r>
+              <a:t>核心代码：care_companion/ · web/ · scripts/ · tests/</a:t>
+            </a:r>
+          </a:p>
+          <a:p>
+            <a:pPr>
+              <a:spcAft>
+                <a:spcPts val="600"/>
+              </a:spcAft>
+              <a:defRPr sz="1400">
+                <a:solidFill>
+                  <a:srgbClr val="1E1E1E"/>
+                </a:solidFill>
+              </a:defRPr>
+            </a:pPr>
+            <a:r>
+              <a:t>文档：技术报告 · 架构说明 · 部署指南 · 竞赛答辩要点</a:t>
+            </a:r>
+          </a:p>
+          <a:p>
+            <a:pPr>
+              <a:spcAft>
+                <a:spcPts val="600"/>
+              </a:spcAft>
+              <a:defRPr sz="1400">
+                <a:solidFill>
+                  <a:srgbClr val="1E1E1E"/>
+                </a:solidFill>
+              </a:defRPr>
+            </a:pPr>
+            <a:r>
+              <a:t>（请填写）软著登记号 / 团队成员 / 指导教师</a:t>
+            </a:r>
+          </a:p>
+        </p:txBody>
+      </p:sp>
+    </p:spTree>
+  </p:cSld>
+  <p:clrMapOvr>
+    <a:masterClrMapping/>
+  </p:clrMapOvr>
+</p:sld>
+</file>
+
+<file path=ppt/slides/slide16.xml><?xml version="1.0" encoding="utf-8"?>
+<p:sld xmlns:a="http://schemas.openxmlformats.org/drawingml/2006/main" xmlns:p="http://schemas.openxmlformats.org/presentationml/2006/main" xmlns:r="http://schemas.openxmlformats.org/officeDocument/2006/relationships">
+  <p:cSld>
+    <p:bg>
+      <p:bgPr>
+        <a:solidFill>
+          <a:srgbClr val="FFFFFF"/>
+        </a:solidFill>
+        <a:effectLst/>
+      </p:bgPr>
+    </p:bg>
+    <p:spTree>
+      <p:nvGrpSpPr>
+        <p:cNvPr id="1" name=""/>
+        <p:cNvGrpSpPr/>
+        <p:nvPr/>
+      </p:nvGrpSpPr>
+      <p:grpSpPr/>
+      <p:sp>
+        <p:nvSpPr>
+          <p:cNvPr id="2" name="Rectangle 1"/>
+          <p:cNvSpPr/>
+          <p:nvPr/>
+        </p:nvSpPr>
+        <p:spPr>
+          <a:xfrm>
+            <a:off x="0" y="0"/>
+            <a:ext cx="9144000" cy="502920"/>
+          </a:xfrm>
+          <a:prstGeom prst="rect">
+            <a:avLst/>
+          </a:prstGeom>
+          <a:solidFill>
+            <a:srgbClr val="143278"/>
+          </a:solidFill>
+          <a:ln>
+            <a:noFill/>
+          </a:ln>
+        </p:spPr>
+        <p:style>
+          <a:lnRef idx="1">
+            <a:schemeClr val="accent1"/>
+          </a:lnRef>
+          <a:fillRef idx="3">
+            <a:schemeClr val="accent1"/>
+          </a:fillRef>
+          <a:effectRef idx="2">
+            <a:schemeClr val="accent1"/>
+          </a:effectRef>
+          <a:fontRef idx="minor">
+            <a:schemeClr val="lt1"/>
+          </a:fontRef>
+        </p:style>
+        <p:txBody>
+          <a:bodyPr rtlCol="0" anchor="ctr"/>
+          <a:lstStyle/>
+          <a:p>
+            <a:pPr algn="ctr"/>
+          </a:p>
+        </p:txBody>
+      </p:sp>
+      <p:sp>
+        <p:nvSpPr>
+          <p:cNvPr id="3" name="TextBox 2"/>
+          <p:cNvSpPr txBox="1"/>
+          <p:nvPr/>
+        </p:nvSpPr>
+        <p:spPr>
+          <a:xfrm>
+            <a:off x="137160" y="73152"/>
+            <a:ext cx="8869680" cy="411480"/>
+          </a:xfrm>
+          <a:prstGeom prst="rect">
+            <a:avLst/>
+          </a:prstGeom>
+          <a:noFill/>
+        </p:spPr>
+        <p:txBody>
+          <a:bodyPr wrap="none">
+            <a:spAutoFit/>
+          </a:bodyPr>
+          <a:lstStyle/>
+          <a:p>
+            <a:pPr>
+              <a:defRPr sz="1100" b="1">
+                <a:solidFill>
+                  <a:srgbClr val="FFFFFF"/>
+                </a:solidFill>
+              </a:defRPr>
+            </a:pPr>
+            <a:r>
+              <a:t>第二十六届中国机器人及人工智能大赛</a:t>
+            </a:r>
+          </a:p>
+          <a:p>
+            <a:pPr>
+              <a:defRPr sz="1000">
+                <a:solidFill>
+                  <a:srgbClr val="C8DCFF"/>
+                </a:solidFill>
+              </a:defRPr>
+            </a:pPr>
+            <a:r>
+              <a:t>机器人创新赛道</a:t>
+            </a:r>
+          </a:p>
+        </p:txBody>
+      </p:sp>
+      <p:sp>
+        <p:nvSpPr>
+          <p:cNvPr id="4" name="TextBox 3"/>
+          <p:cNvSpPr txBox="1"/>
+          <p:nvPr/>
+        </p:nvSpPr>
+        <p:spPr>
+          <a:xfrm>
+            <a:off x="502920" y="1828800"/>
+            <a:ext cx="8138160" cy="731520"/>
+          </a:xfrm>
+          <a:prstGeom prst="rect">
+            <a:avLst/>
+          </a:prstGeom>
+          <a:noFill/>
+        </p:spPr>
+        <p:txBody>
+          <a:bodyPr wrap="none">
+            <a:spAutoFit/>
+          </a:bodyPr>
+          <a:lstStyle/>
+          <a:p>
+            <a:pPr algn="ctr">
+              <a:defRPr sz="3200" b="1">
+                <a:solidFill>
+                  <a:srgbClr val="1E1E1E"/>
+                </a:solidFill>
+              </a:defRPr>
+            </a:pPr>
+            <a:r>
+              <a:t>第四部分</a:t>
+            </a:r>
+          </a:p>
+        </p:txBody>
+      </p:sp>
+      <p:sp>
+        <p:nvSpPr>
+          <p:cNvPr id="5" name="TextBox 4"/>
+          <p:cNvSpPr txBox="1"/>
+          <p:nvPr/>
+        </p:nvSpPr>
+        <p:spPr>
+          <a:xfrm>
+            <a:off x="502920" y="2606040"/>
+            <a:ext cx="8138160" cy="731520"/>
+          </a:xfrm>
+          <a:prstGeom prst="rect">
+            <a:avLst/>
+          </a:prstGeom>
+          <a:noFill/>
+        </p:spPr>
+        <p:txBody>
+          <a:bodyPr wrap="none">
+            <a:spAutoFit/>
+          </a:bodyPr>
+          <a:lstStyle/>
+          <a:p>
+            <a:pPr algn="ctr">
+              <a:defRPr sz="2200" b="1">
+                <a:solidFill>
+                  <a:srgbClr val="143278"/>
+                </a:solidFill>
+              </a:defRPr>
+            </a:pPr>
+            <a:r>
+              <a:t>创新维度与未来展望</a:t>
+            </a:r>
+          </a:p>
+        </p:txBody>
+      </p:sp>
+    </p:spTree>
+  </p:cSld>
+  <p:clrMapOvr>
+    <a:masterClrMapping/>
+  </p:clrMapOvr>
+</p:sld>
+</file>
+
+<file path=ppt/slides/slide17.xml><?xml version="1.0" encoding="utf-8"?>
+<p:sld xmlns:a="http://schemas.openxmlformats.org/drawingml/2006/main" xmlns:p="http://schemas.openxmlformats.org/presentationml/2006/main" xmlns:r="http://schemas.openxmlformats.org/officeDocument/2006/relationships">
+  <p:cSld>
+    <p:bg>
+      <p:bgPr>
+        <a:solidFill>
+          <a:srgbClr val="FFFFFF"/>
+        </a:solidFill>
+        <a:effectLst/>
+      </p:bgPr>
+    </p:bg>
+    <p:spTree>
+      <p:nvGrpSpPr>
+        <p:cNvPr id="1" name=""/>
+        <p:cNvGrpSpPr/>
+        <p:nvPr/>
+      </p:nvGrpSpPr>
+      <p:grpSpPr/>
+      <p:sp>
+        <p:nvSpPr>
+          <p:cNvPr id="2" name="Rectangle 1"/>
+          <p:cNvSpPr/>
+          <p:nvPr/>
+        </p:nvSpPr>
+        <p:spPr>
+          <a:xfrm>
+            <a:off x="0" y="0"/>
+            <a:ext cx="9144000" cy="502920"/>
+          </a:xfrm>
+          <a:prstGeom prst="rect">
+            <a:avLst/>
+          </a:prstGeom>
+          <a:solidFill>
+            <a:srgbClr val="143278"/>
+          </a:solidFill>
+          <a:ln>
+            <a:noFill/>
+          </a:ln>
+        </p:spPr>
+        <p:style>
+          <a:lnRef idx="1">
+            <a:schemeClr val="accent1"/>
+          </a:lnRef>
+          <a:fillRef idx="3">
+            <a:schemeClr val="accent1"/>
+          </a:fillRef>
+          <a:effectRef idx="2">
+            <a:schemeClr val="accent1"/>
+          </a:effectRef>
+          <a:fontRef idx="minor">
+            <a:schemeClr val="lt1"/>
+          </a:fontRef>
+        </p:style>
+        <p:txBody>
+          <a:bodyPr rtlCol="0" anchor="ctr"/>
+          <a:lstStyle/>
+          <a:p>
+            <a:pPr algn="ctr"/>
+          </a:p>
+        </p:txBody>
+      </p:sp>
+      <p:sp>
+        <p:nvSpPr>
+          <p:cNvPr id="3" name="TextBox 2"/>
+          <p:cNvSpPr txBox="1"/>
+          <p:nvPr/>
+        </p:nvSpPr>
+        <p:spPr>
+          <a:xfrm>
+            <a:off x="137160" y="73152"/>
+            <a:ext cx="8869680" cy="411480"/>
+          </a:xfrm>
+          <a:prstGeom prst="rect">
+            <a:avLst/>
+          </a:prstGeom>
+          <a:noFill/>
+        </p:spPr>
+        <p:txBody>
+          <a:bodyPr wrap="none">
+            <a:spAutoFit/>
+          </a:bodyPr>
+          <a:lstStyle/>
+          <a:p>
+            <a:pPr>
+              <a:defRPr sz="1100" b="1">
+                <a:solidFill>
+                  <a:srgbClr val="FFFFFF"/>
+                </a:solidFill>
+              </a:defRPr>
+            </a:pPr>
+            <a:r>
+              <a:t>第二十六届中国机器人及人工智能大赛</a:t>
+            </a:r>
+          </a:p>
+          <a:p>
+            <a:pPr>
+              <a:defRPr sz="1000">
+                <a:solidFill>
+                  <a:srgbClr val="C8DCFF"/>
+                </a:solidFill>
+              </a:defRPr>
+            </a:pPr>
+            <a:r>
+              <a:t>机器人创新赛道</a:t>
+            </a:r>
+          </a:p>
+        </p:txBody>
+      </p:sp>
+      <p:sp>
+        <p:nvSpPr>
+          <p:cNvPr id="4" name="TextBox 3"/>
+          <p:cNvSpPr txBox="1"/>
+          <p:nvPr/>
+        </p:nvSpPr>
+        <p:spPr>
+          <a:xfrm>
+            <a:off x="502920" y="685800"/>
+            <a:ext cx="8138160" cy="731520"/>
+          </a:xfrm>
+          <a:prstGeom prst="rect">
+            <a:avLst/>
+          </a:prstGeom>
+          <a:noFill/>
+        </p:spPr>
+        <p:txBody>
+          <a:bodyPr wrap="none">
+            <a:spAutoFit/>
+          </a:bodyPr>
+          <a:lstStyle/>
+          <a:p>
+            <a:pPr algn="l">
+              <a:defRPr sz="2600" b="1">
+                <a:solidFill>
+                  <a:srgbClr val="1E1E1E"/>
+                </a:solidFill>
+              </a:defRPr>
+            </a:pPr>
+            <a:r>
+              <a:t>创新维度总结</a:t>
+            </a:r>
+          </a:p>
+        </p:txBody>
+      </p:sp>
+      <p:graphicFrame>
+        <p:nvGraphicFramePr>
+          <p:cNvPr id="5" name="Table 4"/>
+          <p:cNvGraphicFramePr>
+            <a:graphicFrameLocks noGrp="1"/>
+          </p:cNvGraphicFramePr>
+          <p:nvPr/>
+        </p:nvGraphicFramePr>
+        <p:xfrm>
+          <a:off x="365760" y="1234440"/>
+          <a:ext cx="8412480" cy="3474720"/>
+        </p:xfrm>
+        <a:graphic>
+          <a:graphicData uri="http://schemas.openxmlformats.org/drawingml/2006/table">
+            <a:tbl>
+              <a:tblPr firstRow="1" bandRow="1">
+                <a:tableStyleId>{5C22544A-7EE6-4342-B048-85BDC9FD1C3A}</a:tableStyleId>
+              </a:tblPr>
+              <a:tblGrid>
+                <a:gridCol w="1828800"/>
+                <a:gridCol w="6583680"/>
+              </a:tblGrid>
+              <a:tr h="579120">
+                <a:tc>
+                  <a:txBody>
+                    <a:bodyPr/>
+                    <a:lstStyle/>
+                    <a:p>
+                      <a:pPr>
+                        <a:defRPr sz="1100" b="1">
+                          <a:solidFill>
+                            <a:srgbClr val="FFFFFF"/>
+                          </a:solidFill>
+                        </a:defRPr>
+                      </a:pPr>
+                      <a:r>
+                        <a:t>创新维度</a:t>
+                      </a:r>
+                    </a:p>
+                  </a:txBody>
+                  <a:tcPr>
+                    <a:solidFill>
+                      <a:srgbClr val="143278"/>
+                    </a:solidFill>
+                  </a:tcPr>
+                </a:tc>
+                <a:tc>
+                  <a:txBody>
+                    <a:bodyPr/>
+                    <a:lstStyle/>
+                    <a:p>
+                      <a:pPr>
+                        <a:defRPr sz="1100" b="1">
+                          <a:solidFill>
+                            <a:srgbClr val="FFFFFF"/>
+                          </a:solidFill>
+                        </a:defRPr>
+                      </a:pPr>
+                      <a:r>
+                        <a:t>描述</a:t>
+                      </a:r>
+                    </a:p>
+                  </a:txBody>
+                  <a:tcPr>
+                    <a:solidFill>
+                      <a:srgbClr val="143278"/>
+                    </a:solidFill>
+                  </a:tcPr>
+                </a:tc>
+              </a:tr>
+              <a:tr h="579120">
+                <a:tc>
+                  <a:txBody>
+                    <a:bodyPr/>
+                    <a:lstStyle/>
+                    <a:p>
+                      <a:pPr>
+                        <a:defRPr sz="1000">
+                          <a:solidFill>
+                            <a:srgbClr val="1E1E1E"/>
+                          </a:solidFill>
+                        </a:defRPr>
+                      </a:pPr>
+                      <a:r>
+                        <a:t>多模态融合</a:t>
+                      </a:r>
+                    </a:p>
+                  </a:txBody>
+                  <a:tcPr/>
+                </a:tc>
+                <a:tc>
+                  <a:txBody>
+                    <a:bodyPr/>
+                    <a:lstStyle/>
+                    <a:p>
+                      <a:pPr>
+                        <a:defRPr sz="1000">
+                          <a:solidFill>
+                            <a:srgbClr val="1E1E1E"/>
+                          </a:solidFill>
+                        </a:defRPr>
+                      </a:pPr>
+                      <a:r>
+                        <a:t>跌倒、情绪、健康统一 RiskEngine，输出可解释原因，优于孤立模块堆叠</a:t>
+                      </a:r>
+                    </a:p>
+                  </a:txBody>
+                  <a:tcPr/>
+                </a:tc>
+              </a:tr>
+              <a:tr h="579120">
+                <a:tc>
+                  <a:txBody>
+                    <a:bodyPr/>
+                    <a:lstStyle/>
+                    <a:p>
+                      <a:pPr>
+                        <a:defRPr sz="1000">
+                          <a:solidFill>
+                            <a:srgbClr val="1E1E1E"/>
+                          </a:solidFill>
+                        </a:defRPr>
+                      </a:pPr>
+                      <a:r>
+                        <a:t>安全闭环</a:t>
+                      </a:r>
+                    </a:p>
+                  </a:txBody>
+                  <a:tcPr/>
+                </a:tc>
+                <a:tc>
+                  <a:txBody>
+                    <a:bodyPr/>
+                    <a:lstStyle/>
+                    <a:p>
+                      <a:pPr>
+                        <a:defRPr sz="1000">
+                          <a:solidFill>
+                            <a:srgbClr val="1E1E1E"/>
+                          </a:solidFill>
+                        </a:defRPr>
+                      </a:pPr>
+                      <a:r>
+                        <a:t>紧急事件硬优先级状态机，覆盖对话与常规任务，触发 call_emergency</a:t>
+                      </a:r>
+                    </a:p>
+                  </a:txBody>
+                  <a:tcPr/>
+                </a:tc>
+              </a:tr>
+              <a:tr h="579120">
+                <a:tc>
+                  <a:txBody>
+                    <a:bodyPr/>
+                    <a:lstStyle/>
+                    <a:p>
+                      <a:pPr>
+                        <a:defRPr sz="1000">
+                          <a:solidFill>
+                            <a:srgbClr val="1E1E1E"/>
+                          </a:solidFill>
+                        </a:defRPr>
+                      </a:pPr>
+                      <a:r>
+                        <a:t>视觉感知</a:t>
+                      </a:r>
+                    </a:p>
+                  </a:txBody>
+                  <a:tcPr/>
+                </a:tc>
+                <a:tc>
+                  <a:txBody>
+                    <a:bodyPr/>
+                    <a:lstStyle/>
+                    <a:p>
+                      <a:pPr>
+                        <a:defRPr sz="1000">
+                          <a:solidFill>
+                            <a:srgbClr val="1E1E1E"/>
+                          </a:solidFill>
+                        </a:defRPr>
+                      </a:pPr>
+                      <a:r>
+                        <a:t>MediaPipe 姿态接入 Web 与本地摄像头，非纯滑块仿真</a:t>
+                      </a:r>
+                    </a:p>
+                  </a:txBody>
+                  <a:tcPr/>
+                </a:tc>
+              </a:tr>
+              <a:tr h="579120">
+                <a:tc>
+                  <a:txBody>
+                    <a:bodyPr/>
+                    <a:lstStyle/>
+                    <a:p>
+                      <a:pPr>
+                        <a:defRPr sz="1000">
+                          <a:solidFill>
+                            <a:srgbClr val="1E1E1E"/>
+                          </a:solidFill>
+                        </a:defRPr>
+                      </a:pPr>
+                      <a:r>
+                        <a:t>工程化</a:t>
+                      </a:r>
+                    </a:p>
+                  </a:txBody>
+                  <a:tcPr/>
+                </a:tc>
+                <a:tc>
+                  <a:txBody>
+                    <a:bodyPr/>
+                    <a:lstStyle/>
+                    <a:p>
+                      <a:pPr>
+                        <a:defRPr sz="1000">
+                          <a:solidFill>
+                            <a:srgbClr val="1E1E1E"/>
+                          </a:solidFill>
+                        </a:defRPr>
+                      </a:pPr>
+                      <a:r>
+                        <a:t>仿真/Web/ROS2 共用 Orchestrator；一键评测与无头验证脚本</a:t>
+                      </a:r>
+                    </a:p>
+                  </a:txBody>
+                  <a:tcPr/>
+                </a:tc>
+              </a:tr>
+              <a:tr h="579120">
+                <a:tc>
+                  <a:txBody>
+                    <a:bodyPr/>
+                    <a:lstStyle/>
+                    <a:p>
+                      <a:pPr>
+                        <a:defRPr sz="1000">
+                          <a:solidFill>
+                            <a:srgbClr val="1E1E1E"/>
+                          </a:solidFill>
+                        </a:defRPr>
+                      </a:pPr>
+                      <a:r>
+                        <a:t>应用价值</a:t>
+                      </a:r>
+                    </a:p>
+                  </a:txBody>
+                  <a:tcPr/>
+                </a:tc>
+                <a:tc>
+                  <a:txBody>
+                    <a:bodyPr/>
+                    <a:lstStyle/>
+                    <a:p>
+                      <a:pPr>
+                        <a:defRPr sz="1000">
+                          <a:solidFill>
+                            <a:srgbClr val="1E1E1E"/>
+                          </a:solidFill>
+                        </a:defRPr>
+                      </a:pPr>
+                      <a:r>
+                        <a:t>契合智慧养老政策，降低跌倒发现空窗，支持边缘本地推理保护隐私</a:t>
+                      </a:r>
+                    </a:p>
+                  </a:txBody>
+                  <a:tcPr/>
+                </a:tc>
+              </a:tr>
+            </a:tbl>
+          </a:graphicData>
+        </a:graphic>
+      </p:graphicFrame>
+    </p:spTree>
+  </p:cSld>
+  <p:clrMapOvr>
+    <a:masterClrMapping/>
+  </p:clrMapOvr>
+</p:sld>
+</file>
+
+<file path=ppt/slides/slide18.xml><?xml version="1.0" encoding="utf-8"?>
+<p:sld xmlns:a="http://schemas.openxmlformats.org/drawingml/2006/main" xmlns:p="http://schemas.openxmlformats.org/presentationml/2006/main" xmlns:r="http://schemas.openxmlformats.org/officeDocument/2006/relationships">
+  <p:cSld>
+    <p:bg>
+      <p:bgPr>
+        <a:solidFill>
+          <a:srgbClr val="FFFFFF"/>
+        </a:solidFill>
+        <a:effectLst/>
+      </p:bgPr>
+    </p:bg>
+    <p:spTree>
+      <p:nvGrpSpPr>
+        <p:cNvPr id="1" name=""/>
+        <p:cNvGrpSpPr/>
+        <p:nvPr/>
+      </p:nvGrpSpPr>
+      <p:grpSpPr/>
+      <p:sp>
+        <p:nvSpPr>
+          <p:cNvPr id="2" name="Rectangle 1"/>
+          <p:cNvSpPr/>
+          <p:nvPr/>
+        </p:nvSpPr>
+        <p:spPr>
+          <a:xfrm>
+            <a:off x="0" y="0"/>
+            <a:ext cx="9144000" cy="502920"/>
+          </a:xfrm>
+          <a:prstGeom prst="rect">
+            <a:avLst/>
+          </a:prstGeom>
+          <a:solidFill>
+            <a:srgbClr val="143278"/>
+          </a:solidFill>
+          <a:ln>
+            <a:noFill/>
+          </a:ln>
+        </p:spPr>
+        <p:style>
+          <a:lnRef idx="1">
+            <a:schemeClr val="accent1"/>
+          </a:lnRef>
+          <a:fillRef idx="3">
+            <a:schemeClr val="accent1"/>
+          </a:fillRef>
+          <a:effectRef idx="2">
+            <a:schemeClr val="accent1"/>
+          </a:effectRef>
+          <a:fontRef idx="minor">
+            <a:schemeClr val="lt1"/>
+          </a:fontRef>
+        </p:style>
+        <p:txBody>
+          <a:bodyPr rtlCol="0" anchor="ctr"/>
+          <a:lstStyle/>
+          <a:p>
+            <a:pPr algn="ctr"/>
+          </a:p>
+        </p:txBody>
+      </p:sp>
+      <p:sp>
+        <p:nvSpPr>
+          <p:cNvPr id="3" name="TextBox 2"/>
+          <p:cNvSpPr txBox="1"/>
+          <p:nvPr/>
+        </p:nvSpPr>
+        <p:spPr>
+          <a:xfrm>
+            <a:off x="137160" y="73152"/>
+            <a:ext cx="8869680" cy="411480"/>
+          </a:xfrm>
+          <a:prstGeom prst="rect">
+            <a:avLst/>
+          </a:prstGeom>
+          <a:noFill/>
+        </p:spPr>
+        <p:txBody>
+          <a:bodyPr wrap="none">
+            <a:spAutoFit/>
+          </a:bodyPr>
+          <a:lstStyle/>
+          <a:p>
+            <a:pPr>
+              <a:defRPr sz="1100" b="1">
+                <a:solidFill>
+                  <a:srgbClr val="FFFFFF"/>
+                </a:solidFill>
+              </a:defRPr>
+            </a:pPr>
+            <a:r>
+              <a:t>第二十六届中国机器人及人工智能大赛</a:t>
+            </a:r>
+          </a:p>
+          <a:p>
+            <a:pPr>
+              <a:defRPr sz="1000">
+                <a:solidFill>
+                  <a:srgbClr val="C8DCFF"/>
+                </a:solidFill>
+              </a:defRPr>
+            </a:pPr>
+            <a:r>
+              <a:t>机器人创新赛道</a:t>
+            </a:r>
+          </a:p>
+        </p:txBody>
+      </p:sp>
+      <p:sp>
+        <p:nvSpPr>
+          <p:cNvPr id="4" name="TextBox 3"/>
+          <p:cNvSpPr txBox="1"/>
+          <p:nvPr/>
+        </p:nvSpPr>
+        <p:spPr>
+          <a:xfrm>
+            <a:off x="502920" y="685800"/>
+            <a:ext cx="8138160" cy="731520"/>
+          </a:xfrm>
+          <a:prstGeom prst="rect">
+            <a:avLst/>
+          </a:prstGeom>
+          <a:noFill/>
+        </p:spPr>
+        <p:txBody>
+          <a:bodyPr wrap="none">
+            <a:spAutoFit/>
+          </a:bodyPr>
+          <a:lstStyle/>
+          <a:p>
+            <a:pPr algn="l">
+              <a:defRPr sz="2600" b="1">
+                <a:solidFill>
+                  <a:srgbClr val="1E1E1E"/>
+                </a:solidFill>
+              </a:defRPr>
+            </a:pPr>
+            <a:r>
+              <a:t>未来工作</a:t>
+            </a:r>
+          </a:p>
+        </p:txBody>
+      </p:sp>
+      <p:sp>
+        <p:nvSpPr>
+          <p:cNvPr id="5" name="TextBox 4"/>
+          <p:cNvSpPr txBox="1"/>
+          <p:nvPr/>
+        </p:nvSpPr>
+        <p:spPr>
+          <a:xfrm>
+            <a:off x="502920" y="1325880"/>
+            <a:ext cx="8138160" cy="3840480"/>
+          </a:xfrm>
+          <a:prstGeom prst="rect">
+            <a:avLst/>
+          </a:prstGeom>
+          <a:noFill/>
+        </p:spPr>
+        <p:txBody>
+          <a:bodyPr wrap="square">
+            <a:spAutoFit/>
+          </a:bodyPr>
+          <a:lstStyle/>
+          <a:p>
+            <a:pPr>
+              <a:spcAft>
+                <a:spcPts val="600"/>
+              </a:spcAft>
+              <a:defRPr sz="1400">
+                <a:solidFill>
+                  <a:srgbClr val="1E1E1E"/>
+                </a:solidFill>
+              </a:defRPr>
+            </a:pPr>
+            <a:r>
+              <a:t>p 对接 Unitree 等人形机器人，完成 speak/gesture/approach 真机视频</a:t>
+            </a:r>
+          </a:p>
+          <a:p>
+            <a:pPr>
+              <a:spcAft>
+                <a:spcPts val="600"/>
+              </a:spcAft>
+              <a:defRPr sz="1400">
+                <a:solidFill>
+                  <a:srgbClr val="1E1E1E"/>
+                </a:solidFill>
+              </a:defRPr>
+            </a:pPr>
+            <a:r>
+              <a:t>p 引入 UR Fall 等公开数据集，开展泛化评测与误报分析</a:t>
+            </a:r>
+          </a:p>
+          <a:p>
+            <a:pPr>
+              <a:spcAft>
+                <a:spcPts val="600"/>
+              </a:spcAft>
+              <a:defRPr sz="1400">
+                <a:solidFill>
+                  <a:srgbClr val="1E1E1E"/>
+                </a:solidFill>
+              </a:defRPr>
+            </a:pPr>
+            <a:r>
+              <a:t>p 多老人房间场景、遮挡与光照鲁棒性优化</a:t>
+            </a:r>
+          </a:p>
+          <a:p>
+            <a:pPr>
+              <a:spcAft>
+                <a:spcPts val="600"/>
+              </a:spcAft>
+              <a:defRPr sz="1400">
+                <a:solidFill>
+                  <a:srgbClr val="1E1E1E"/>
+                </a:solidFill>
+              </a:defRPr>
+            </a:pPr>
+            <a:r>
+              <a:t>p 结合社区/养老院调研，完善产品化与成本评估</a:t>
+            </a:r>
+          </a:p>
+          <a:p>
+            <a:pPr>
+              <a:spcAft>
+                <a:spcPts val="600"/>
+              </a:spcAft>
+              <a:defRPr sz="1400">
+                <a:solidFill>
+                  <a:srgbClr val="1E1E1E"/>
+                </a:solidFill>
+              </a:defRPr>
+            </a:pPr>
+            <a:r>
+              <a:t>p 申请软件著作权 V1.0，探索专利（跌倒融合决策方法）</a:t>
+            </a:r>
+          </a:p>
+        </p:txBody>
+      </p:sp>
+    </p:spTree>
+  </p:cSld>
+  <p:clrMapOvr>
+    <a:masterClrMapping/>
+  </p:clrMapOvr>
+</p:sld>
+</file>
+
+<file path=ppt/slides/slide19.xml><?xml version="1.0" encoding="utf-8"?>
+<p:sld xmlns:a="http://schemas.openxmlformats.org/drawingml/2006/main" xmlns:p="http://schemas.openxmlformats.org/presentationml/2006/main" xmlns:r="http://schemas.openxmlformats.org/officeDocument/2006/relationships">
+  <p:cSld>
+    <p:bg>
+      <p:bgPr>
+        <a:solidFill>
+          <a:srgbClr val="FFFFFF"/>
+        </a:solidFill>
+        <a:effectLst/>
+      </p:bgPr>
+    </p:bg>
+    <p:spTree>
+      <p:nvGrpSpPr>
+        <p:cNvPr id="1" name=""/>
+        <p:cNvGrpSpPr/>
+        <p:nvPr/>
+      </p:nvGrpSpPr>
+      <p:grpSpPr/>
+      <p:sp>
+        <p:nvSpPr>
+          <p:cNvPr id="2" name="Rectangle 1"/>
+          <p:cNvSpPr/>
+          <p:nvPr/>
+        </p:nvSpPr>
+        <p:spPr>
+          <a:xfrm>
+            <a:off x="0" y="0"/>
+            <a:ext cx="9144000" cy="502920"/>
+          </a:xfrm>
+          <a:prstGeom prst="rect">
+            <a:avLst/>
+          </a:prstGeom>
+          <a:solidFill>
+            <a:srgbClr val="143278"/>
+          </a:solidFill>
+          <a:ln>
+            <a:noFill/>
+          </a:ln>
+        </p:spPr>
+        <p:style>
+          <a:lnRef idx="1">
+            <a:schemeClr val="accent1"/>
+          </a:lnRef>
+          <a:fillRef idx="3">
+            <a:schemeClr val="accent1"/>
+          </a:fillRef>
+          <a:effectRef idx="2">
+            <a:schemeClr val="accent1"/>
+          </a:effectRef>
+          <a:fontRef idx="minor">
+            <a:schemeClr val="lt1"/>
+          </a:fontRef>
+        </p:style>
+        <p:txBody>
+          <a:bodyPr rtlCol="0" anchor="ctr"/>
+          <a:lstStyle/>
+          <a:p>
+            <a:pPr algn="ctr"/>
+          </a:p>
+        </p:txBody>
+      </p:sp>
+      <p:sp>
+        <p:nvSpPr>
+          <p:cNvPr id="3" name="TextBox 2"/>
+          <p:cNvSpPr txBox="1"/>
+          <p:nvPr/>
+        </p:nvSpPr>
+        <p:spPr>
+          <a:xfrm>
+            <a:off x="137160" y="73152"/>
+            <a:ext cx="8869680" cy="411480"/>
+          </a:xfrm>
+          <a:prstGeom prst="rect">
+            <a:avLst/>
+          </a:prstGeom>
+          <a:noFill/>
+        </p:spPr>
+        <p:txBody>
+          <a:bodyPr wrap="none">
+            <a:spAutoFit/>
+          </a:bodyPr>
+          <a:lstStyle/>
+          <a:p>
+            <a:pPr>
+              <a:defRPr sz="1100" b="1">
+                <a:solidFill>
+                  <a:srgbClr val="FFFFFF"/>
+                </a:solidFill>
+              </a:defRPr>
+            </a:pPr>
+            <a:r>
+              <a:t>第二十六届中国机器人及人工智能大赛</a:t>
+            </a:r>
+          </a:p>
+          <a:p>
+            <a:pPr>
+              <a:defRPr sz="1000">
+                <a:solidFill>
+                  <a:srgbClr val="C8DCFF"/>
+                </a:solidFill>
+              </a:defRPr>
+            </a:pPr>
+            <a:r>
+              <a:t>机器人创新赛道</a:t>
+            </a:r>
+          </a:p>
+        </p:txBody>
+      </p:sp>
+      <p:sp>
+        <p:nvSpPr>
+          <p:cNvPr id="4" name="TextBox 3"/>
+          <p:cNvSpPr txBox="1"/>
+          <p:nvPr/>
+        </p:nvSpPr>
+        <p:spPr>
+          <a:xfrm>
+            <a:off x="502920" y="685800"/>
+            <a:ext cx="8138160" cy="731520"/>
+          </a:xfrm>
+          <a:prstGeom prst="rect">
+            <a:avLst/>
+          </a:prstGeom>
+          <a:noFill/>
+        </p:spPr>
+        <p:txBody>
+          <a:bodyPr wrap="none">
+            <a:spAutoFit/>
+          </a:bodyPr>
+          <a:lstStyle/>
+          <a:p>
+            <a:pPr algn="l">
+              <a:defRPr sz="2600" b="1">
+                <a:solidFill>
+                  <a:srgbClr val="1E1E1E"/>
+                </a:solidFill>
+              </a:defRPr>
+            </a:pPr>
+            <a:r>
+              <a:t>参考文献</a:t>
+            </a:r>
+          </a:p>
+        </p:txBody>
+      </p:sp>
+      <p:sp>
+        <p:nvSpPr>
+          <p:cNvPr id="5" name="TextBox 4"/>
+          <p:cNvSpPr txBox="1"/>
+          <p:nvPr/>
+        </p:nvSpPr>
+        <p:spPr>
+          <a:xfrm>
+            <a:off x="502920" y="1234440"/>
+            <a:ext cx="8138160" cy="3840480"/>
+          </a:xfrm>
+          <a:prstGeom prst="rect">
+            <a:avLst/>
+          </a:prstGeom>
+          <a:noFill/>
+        </p:spPr>
+        <p:txBody>
+          <a:bodyPr wrap="square">
+            <a:spAutoFit/>
+          </a:bodyPr>
+          <a:lstStyle/>
+          <a:p>
+            <a:pPr>
+              <a:spcAft>
+                <a:spcPts val="600"/>
+              </a:spcAft>
+              <a:defRPr sz="1200">
+                <a:solidFill>
+                  <a:srgbClr val="1E1E1E"/>
+                </a:solidFill>
+              </a:defRPr>
+            </a:pPr>
+            <a:r>
+              <a:t>[1] Google MediaPipe Pose: Real-time pose estimation.</a:t>
+            </a:r>
+          </a:p>
+          <a:p>
+            <a:pPr>
+              <a:spcAft>
+                <a:spcPts val="600"/>
+              </a:spcAft>
+              <a:defRPr sz="1200">
+                <a:solidFill>
+                  <a:srgbClr val="1E1E1E"/>
+                </a:solidFill>
+              </a:defRPr>
+            </a:pPr>
+            <a:r>
+              <a:t>[2] Unitree Robotics SDK / ROS2 documentation.</a:t>
+            </a:r>
+          </a:p>
+          <a:p>
+            <a:pPr>
+              <a:spcAft>
+                <a:spcPts val="600"/>
+              </a:spcAft>
+              <a:defRPr sz="1200">
+                <a:solidFill>
+                  <a:srgbClr val="1E1E1E"/>
+                </a:solidFill>
+              </a:defRPr>
+            </a:pPr>
+            <a:r>
+              <a:t>[3] 国务院：《「十四五」国家老龄事业发展和养老服务体系规划》.</a:t>
+            </a:r>
+          </a:p>
+          <a:p>
+            <a:pPr>
+              <a:spcAft>
+                <a:spcPts val="600"/>
+              </a:spcAft>
+              <a:defRPr sz="1200">
+                <a:solidFill>
+                  <a:srgbClr val="1E1E1E"/>
+                </a:solidFill>
+              </a:defRPr>
+            </a:pPr>
+            <a:r>
+              <a:t>[4] CareCompanion 项目文档：docs/TECHNICAL_REPORT.md</a:t>
+            </a:r>
+          </a:p>
+          <a:p>
+            <a:pPr>
+              <a:spcAft>
+                <a:spcPts val="600"/>
+              </a:spcAft>
+              <a:defRPr sz="1200">
+                <a:solidFill>
+                  <a:srgbClr val="1E1E1E"/>
+                </a:solidFill>
+              </a:defRPr>
+            </a:pPr>
+            <a:r>
+              <a:t>[5] 仓库：github.com/FBB123571/ElderCare-Humanoid-Platform</a:t>
             </a:r>
           </a:p>
         </p:txBody>
@@ -4143,7 +6181,7 @@
     <p:bg>
       <p:bgPr>
         <a:solidFill>
-          <a:srgbClr val="0F172A"/>
+          <a:srgbClr val="FFFFFF"/>
         </a:solidFill>
         <a:effectLst/>
       </p:bgPr>
@@ -4157,14 +6195,57 @@
       <p:grpSpPr/>
       <p:sp>
         <p:nvSpPr>
-          <p:cNvPr id="2" name="TextBox 1"/>
+          <p:cNvPr id="2" name="Rectangle 1"/>
+          <p:cNvSpPr/>
+          <p:nvPr/>
+        </p:nvSpPr>
+        <p:spPr>
+          <a:xfrm>
+            <a:off x="0" y="0"/>
+            <a:ext cx="9144000" cy="502920"/>
+          </a:xfrm>
+          <a:prstGeom prst="rect">
+            <a:avLst/>
+          </a:prstGeom>
+          <a:solidFill>
+            <a:srgbClr val="143278"/>
+          </a:solidFill>
+          <a:ln>
+            <a:noFill/>
+          </a:ln>
+        </p:spPr>
+        <p:style>
+          <a:lnRef idx="1">
+            <a:schemeClr val="accent1"/>
+          </a:lnRef>
+          <a:fillRef idx="3">
+            <a:schemeClr val="accent1"/>
+          </a:fillRef>
+          <a:effectRef idx="2">
+            <a:schemeClr val="accent1"/>
+          </a:effectRef>
+          <a:fontRef idx="minor">
+            <a:schemeClr val="lt1"/>
+          </a:fontRef>
+        </p:style>
+        <p:txBody>
+          <a:bodyPr rtlCol="0" anchor="ctr"/>
+          <a:lstStyle/>
+          <a:p>
+            <a:pPr algn="ctr"/>
+          </a:p>
+        </p:txBody>
+      </p:sp>
+      <p:sp>
+        <p:nvSpPr>
+          <p:cNvPr id="3" name="TextBox 2"/>
           <p:cNvSpPr txBox="1"/>
           <p:nvPr/>
         </p:nvSpPr>
         <p:spPr>
           <a:xfrm>
-            <a:off x="548640" y="457200"/>
-            <a:ext cx="8229600" cy="1097280"/>
+            <a:off x="137160" y="73152"/>
+            <a:ext cx="8869680" cy="411480"/>
           </a:xfrm>
           <a:prstGeom prst="rect">
             <a:avLst/>
@@ -4177,29 +6258,41 @@
           </a:bodyPr>
           <a:lstStyle/>
           <a:p>
-            <a:pPr algn="l">
-              <a:defRPr sz="3000" b="1">
-                <a:solidFill>
-                  <a:srgbClr val="F0F4FC"/>
-                </a:solidFill>
-              </a:defRPr>
-            </a:pPr>
-            <a:r>
-              <a:t>1. 背景与痛点</a:t>
-            </a:r>
-          </a:p>
-        </p:txBody>
-      </p:sp>
-      <p:sp>
-        <p:nvSpPr>
-          <p:cNvPr id="3" name="TextBox 2"/>
+            <a:pPr>
+              <a:defRPr sz="1100" b="1">
+                <a:solidFill>
+                  <a:srgbClr val="FFFFFF"/>
+                </a:solidFill>
+              </a:defRPr>
+            </a:pPr>
+            <a:r>
+              <a:t>第二十六届中国机器人及人工智能大赛</a:t>
+            </a:r>
+          </a:p>
+          <a:p>
+            <a:pPr>
+              <a:defRPr sz="1000">
+                <a:solidFill>
+                  <a:srgbClr val="C8DCFF"/>
+                </a:solidFill>
+              </a:defRPr>
+            </a:pPr>
+            <a:r>
+              <a:t>机器人创新赛道</a:t>
+            </a:r>
+          </a:p>
+        </p:txBody>
+      </p:sp>
+      <p:sp>
+        <p:nvSpPr>
+          <p:cNvPr id="4" name="TextBox 3"/>
           <p:cNvSpPr txBox="1"/>
           <p:nvPr/>
         </p:nvSpPr>
         <p:spPr>
           <a:xfrm>
-            <a:off x="548640" y="1234440"/>
-            <a:ext cx="8229600" cy="731520"/>
+            <a:off x="502920" y="1828800"/>
+            <a:ext cx="8138160" cy="731520"/>
           </a:xfrm>
           <a:prstGeom prst="rect">
             <a:avLst/>
@@ -4212,15 +6305,166 @@
           </a:bodyPr>
           <a:lstStyle/>
           <a:p>
-            <a:pPr>
-              <a:defRPr sz="1600">
-                <a:solidFill>
-                  <a:srgbClr val="94A3B8"/>
-                </a:solidFill>
-              </a:defRPr>
-            </a:pPr>
-            <a:r>
-              <a:t>Population Aging &amp; Home Care</a:t>
+            <a:pPr algn="ctr">
+              <a:defRPr sz="3200" b="1">
+                <a:solidFill>
+                  <a:srgbClr val="1E1E1E"/>
+                </a:solidFill>
+              </a:defRPr>
+            </a:pPr>
+            <a:r>
+              <a:t>第一部分</a:t>
+            </a:r>
+          </a:p>
+        </p:txBody>
+      </p:sp>
+      <p:sp>
+        <p:nvSpPr>
+          <p:cNvPr id="5" name="TextBox 4"/>
+          <p:cNvSpPr txBox="1"/>
+          <p:nvPr/>
+        </p:nvSpPr>
+        <p:spPr>
+          <a:xfrm>
+            <a:off x="502920" y="2606040"/>
+            <a:ext cx="8138160" cy="731520"/>
+          </a:xfrm>
+          <a:prstGeom prst="rect">
+            <a:avLst/>
+          </a:prstGeom>
+          <a:noFill/>
+        </p:spPr>
+        <p:txBody>
+          <a:bodyPr wrap="none">
+            <a:spAutoFit/>
+          </a:bodyPr>
+          <a:lstStyle/>
+          <a:p>
+            <a:pPr algn="ctr">
+              <a:defRPr sz="2200" b="1">
+                <a:solidFill>
+                  <a:srgbClr val="143278"/>
+                </a:solidFill>
+              </a:defRPr>
+            </a:pPr>
+            <a:r>
+              <a:t>项目背景与需求分析</a:t>
+            </a:r>
+          </a:p>
+        </p:txBody>
+      </p:sp>
+    </p:spTree>
+  </p:cSld>
+  <p:clrMapOvr>
+    <a:masterClrMapping/>
+  </p:clrMapOvr>
+</p:sld>
+</file>
+
+<file path=ppt/slides/slide20.xml><?xml version="1.0" encoding="utf-8"?>
+<p:sld xmlns:a="http://schemas.openxmlformats.org/drawingml/2006/main" xmlns:p="http://schemas.openxmlformats.org/presentationml/2006/main" xmlns:r="http://schemas.openxmlformats.org/officeDocument/2006/relationships">
+  <p:cSld>
+    <p:bg>
+      <p:bgPr>
+        <a:solidFill>
+          <a:srgbClr val="FFFFFF"/>
+        </a:solidFill>
+        <a:effectLst/>
+      </p:bgPr>
+    </p:bg>
+    <p:spTree>
+      <p:nvGrpSpPr>
+        <p:cNvPr id="1" name=""/>
+        <p:cNvGrpSpPr/>
+        <p:nvPr/>
+      </p:nvGrpSpPr>
+      <p:grpSpPr/>
+      <p:sp>
+        <p:nvSpPr>
+          <p:cNvPr id="2" name="Rectangle 1"/>
+          <p:cNvSpPr/>
+          <p:nvPr/>
+        </p:nvSpPr>
+        <p:spPr>
+          <a:xfrm>
+            <a:off x="0" y="0"/>
+            <a:ext cx="9144000" cy="502920"/>
+          </a:xfrm>
+          <a:prstGeom prst="rect">
+            <a:avLst/>
+          </a:prstGeom>
+          <a:solidFill>
+            <a:srgbClr val="143278"/>
+          </a:solidFill>
+          <a:ln>
+            <a:noFill/>
+          </a:ln>
+        </p:spPr>
+        <p:style>
+          <a:lnRef idx="1">
+            <a:schemeClr val="accent1"/>
+          </a:lnRef>
+          <a:fillRef idx="3">
+            <a:schemeClr val="accent1"/>
+          </a:fillRef>
+          <a:effectRef idx="2">
+            <a:schemeClr val="accent1"/>
+          </a:effectRef>
+          <a:fontRef idx="minor">
+            <a:schemeClr val="lt1"/>
+          </a:fontRef>
+        </p:style>
+        <p:txBody>
+          <a:bodyPr rtlCol="0" anchor="ctr"/>
+          <a:lstStyle/>
+          <a:p>
+            <a:pPr algn="ctr"/>
+          </a:p>
+        </p:txBody>
+      </p:sp>
+      <p:sp>
+        <p:nvSpPr>
+          <p:cNvPr id="3" name="TextBox 2"/>
+          <p:cNvSpPr txBox="1"/>
+          <p:nvPr/>
+        </p:nvSpPr>
+        <p:spPr>
+          <a:xfrm>
+            <a:off x="137160" y="73152"/>
+            <a:ext cx="8869680" cy="411480"/>
+          </a:xfrm>
+          <a:prstGeom prst="rect">
+            <a:avLst/>
+          </a:prstGeom>
+          <a:noFill/>
+        </p:spPr>
+        <p:txBody>
+          <a:bodyPr wrap="none">
+            <a:spAutoFit/>
+          </a:bodyPr>
+          <a:lstStyle/>
+          <a:p>
+            <a:pPr>
+              <a:defRPr sz="1100" b="1">
+                <a:solidFill>
+                  <a:srgbClr val="FFFFFF"/>
+                </a:solidFill>
+              </a:defRPr>
+            </a:pPr>
+            <a:r>
+              <a:t>第二十六届中国机器人及人工智能大赛</a:t>
+            </a:r>
+          </a:p>
+          <a:p>
+            <a:pPr>
+              <a:defRPr sz="1000">
+                <a:solidFill>
+                  <a:srgbClr val="C8DCFF"/>
+                </a:solidFill>
+              </a:defRPr>
+            </a:pPr>
+            <a:r>
+              <a:t>机器人创新赛道</a:t>
             </a:r>
           </a:p>
         </p:txBody>
@@ -4233,8 +6477,8 @@
         </p:nvSpPr>
         <p:spPr>
           <a:xfrm>
-            <a:off x="731520" y="1645920"/>
-            <a:ext cx="7772400" cy="4114800"/>
+            <a:off x="502920" y="2011680"/>
+            <a:ext cx="8138160" cy="1097280"/>
           </a:xfrm>
           <a:prstGeom prst="rect">
             <a:avLst/>
@@ -4242,83 +6486,55 @@
           <a:noFill/>
         </p:spPr>
         <p:txBody>
-          <a:bodyPr wrap="square">
+          <a:bodyPr wrap="none">
             <a:spAutoFit/>
           </a:bodyPr>
           <a:lstStyle/>
           <a:p>
-            <a:pPr>
-              <a:spcAft>
-                <a:spcPts val="1000"/>
-              </a:spcAft>
-              <a:defRPr sz="1800">
-                <a:solidFill>
-                  <a:srgbClr val="F0F4FC"/>
-                </a:solidFill>
-              </a:defRPr>
-            </a:pPr>
-            <a:r>
-              <a:t>我国老龄化加速，空巢/独居老人安全与情感需求突出</a:t>
-            </a:r>
-          </a:p>
-          <a:p>
-            <a:pPr>
-              <a:spcAft>
-                <a:spcPts val="1000"/>
-              </a:spcAft>
-              <a:defRPr sz="1800">
-                <a:solidFill>
-                  <a:srgbClr val="F0F4FC"/>
-                </a:solidFill>
-              </a:defRPr>
-            </a:pPr>
-            <a:r>
-              <a:t>跌倒为老年人意外伤害首要原因之一，发现滞后后果严重</a:t>
-            </a:r>
-          </a:p>
-          <a:p>
-            <a:pPr>
-              <a:spcAft>
-                <a:spcPts val="1000"/>
-              </a:spcAft>
-              <a:defRPr sz="1800">
-                <a:solidFill>
-                  <a:srgbClr val="F0F4FC"/>
-                </a:solidFill>
-              </a:defRPr>
-            </a:pPr>
-            <a:r>
-              <a:t>传统智能音箱：缺乏视觉安全闭环，无法实体援助</a:t>
-            </a:r>
-          </a:p>
-          <a:p>
-            <a:pPr>
-              <a:spcAft>
-                <a:spcPts val="1000"/>
-              </a:spcAft>
-              <a:defRPr sz="1800">
-                <a:solidFill>
-                  <a:srgbClr val="F0F4FC"/>
-                </a:solidFill>
-              </a:defRPr>
-            </a:pPr>
-            <a:r>
-              <a:t>单一健康手环：缺乏对话陪伴与主动干预</a:t>
-            </a:r>
-          </a:p>
-          <a:p>
-            <a:pPr>
-              <a:spcAft>
-                <a:spcPts val="1000"/>
-              </a:spcAft>
-              <a:defRPr sz="1800">
-                <a:solidFill>
-                  <a:srgbClr val="F0F4FC"/>
-                </a:solidFill>
-              </a:defRPr>
-            </a:pPr>
-            <a:r>
-              <a:t>→ 需要「感知 + 决策 + 人形执行」一体化陪伴系统</a:t>
+            <a:pPr algn="ctr">
+              <a:defRPr sz="3600" b="1">
+                <a:solidFill>
+                  <a:srgbClr val="143278"/>
+                </a:solidFill>
+              </a:defRPr>
+            </a:pPr>
+            <a:r>
+              <a:t>敬请批评指正</a:t>
+            </a:r>
+          </a:p>
+        </p:txBody>
+      </p:sp>
+      <p:sp>
+        <p:nvSpPr>
+          <p:cNvPr id="5" name="TextBox 4"/>
+          <p:cNvSpPr txBox="1"/>
+          <p:nvPr/>
+        </p:nvSpPr>
+        <p:spPr>
+          <a:xfrm>
+            <a:off x="502920" y="2926080"/>
+            <a:ext cx="8138160" cy="548640"/>
+          </a:xfrm>
+          <a:prstGeom prst="rect">
+            <a:avLst/>
+          </a:prstGeom>
+          <a:noFill/>
+        </p:spPr>
+        <p:txBody>
+          <a:bodyPr wrap="none">
+            <a:spAutoFit/>
+          </a:bodyPr>
+          <a:lstStyle/>
+          <a:p>
+            <a:pPr algn="ctr">
+              <a:defRPr sz="1600">
+                <a:solidFill>
+                  <a:srgbClr val="505050"/>
+                </a:solidFill>
+              </a:defRPr>
+            </a:pPr>
+            <a:r>
+              <a:t>CareCompanion 团队 · 感谢各位评委老师</a:t>
             </a:r>
           </a:p>
         </p:txBody>
@@ -4337,7 +6553,7 @@
     <p:bg>
       <p:bgPr>
         <a:solidFill>
-          <a:srgbClr val="0F172A"/>
+          <a:srgbClr val="FFFFFF"/>
         </a:solidFill>
         <a:effectLst/>
       </p:bgPr>
@@ -4351,14 +6567,57 @@
       <p:grpSpPr/>
       <p:sp>
         <p:nvSpPr>
-          <p:cNvPr id="2" name="TextBox 1"/>
+          <p:cNvPr id="2" name="Rectangle 1"/>
+          <p:cNvSpPr/>
+          <p:nvPr/>
+        </p:nvSpPr>
+        <p:spPr>
+          <a:xfrm>
+            <a:off x="0" y="0"/>
+            <a:ext cx="9144000" cy="502920"/>
+          </a:xfrm>
+          <a:prstGeom prst="rect">
+            <a:avLst/>
+          </a:prstGeom>
+          <a:solidFill>
+            <a:srgbClr val="143278"/>
+          </a:solidFill>
+          <a:ln>
+            <a:noFill/>
+          </a:ln>
+        </p:spPr>
+        <p:style>
+          <a:lnRef idx="1">
+            <a:schemeClr val="accent1"/>
+          </a:lnRef>
+          <a:fillRef idx="3">
+            <a:schemeClr val="accent1"/>
+          </a:fillRef>
+          <a:effectRef idx="2">
+            <a:schemeClr val="accent1"/>
+          </a:effectRef>
+          <a:fontRef idx="minor">
+            <a:schemeClr val="lt1"/>
+          </a:fontRef>
+        </p:style>
+        <p:txBody>
+          <a:bodyPr rtlCol="0" anchor="ctr"/>
+          <a:lstStyle/>
+          <a:p>
+            <a:pPr algn="ctr"/>
+          </a:p>
+        </p:txBody>
+      </p:sp>
+      <p:sp>
+        <p:nvSpPr>
+          <p:cNvPr id="3" name="TextBox 2"/>
           <p:cNvSpPr txBox="1"/>
           <p:nvPr/>
         </p:nvSpPr>
         <p:spPr>
           <a:xfrm>
-            <a:off x="548640" y="457200"/>
-            <a:ext cx="8229600" cy="1097280"/>
+            <a:off x="137160" y="73152"/>
+            <a:ext cx="8869680" cy="411480"/>
           </a:xfrm>
           <a:prstGeom prst="rect">
             <a:avLst/>
@@ -4371,29 +6630,41 @@
           </a:bodyPr>
           <a:lstStyle/>
           <a:p>
-            <a:pPr algn="l">
-              <a:defRPr sz="3000" b="1">
-                <a:solidFill>
-                  <a:srgbClr val="F0F4FC"/>
-                </a:solidFill>
-              </a:defRPr>
-            </a:pPr>
-            <a:r>
-              <a:t>2. 创新点</a:t>
-            </a:r>
-          </a:p>
-        </p:txBody>
-      </p:sp>
-      <p:sp>
-        <p:nvSpPr>
-          <p:cNvPr id="3" name="TextBox 2"/>
+            <a:pPr>
+              <a:defRPr sz="1100" b="1">
+                <a:solidFill>
+                  <a:srgbClr val="FFFFFF"/>
+                </a:solidFill>
+              </a:defRPr>
+            </a:pPr>
+            <a:r>
+              <a:t>第二十六届中国机器人及人工智能大赛</a:t>
+            </a:r>
+          </a:p>
+          <a:p>
+            <a:pPr>
+              <a:defRPr sz="1000">
+                <a:solidFill>
+                  <a:srgbClr val="C8DCFF"/>
+                </a:solidFill>
+              </a:defRPr>
+            </a:pPr>
+            <a:r>
+              <a:t>机器人创新赛道</a:t>
+            </a:r>
+          </a:p>
+        </p:txBody>
+      </p:sp>
+      <p:sp>
+        <p:nvSpPr>
+          <p:cNvPr id="4" name="TextBox 3"/>
           <p:cNvSpPr txBox="1"/>
           <p:nvPr/>
         </p:nvSpPr>
         <p:spPr>
           <a:xfrm>
-            <a:off x="548640" y="1234440"/>
-            <a:ext cx="8229600" cy="731520"/>
+            <a:off x="502920" y="685800"/>
+            <a:ext cx="8138160" cy="731520"/>
           </a:xfrm>
           <a:prstGeom prst="rect">
             <a:avLst/>
@@ -4406,29 +6677,29 @@
           </a:bodyPr>
           <a:lstStyle/>
           <a:p>
-            <a:pPr>
-              <a:defRPr sz="1600">
-                <a:solidFill>
-                  <a:srgbClr val="94A3B8"/>
-                </a:solidFill>
-              </a:defRPr>
-            </a:pPr>
-            <a:r>
-              <a:t>Innovation</a:t>
-            </a:r>
-          </a:p>
-        </p:txBody>
-      </p:sp>
-      <p:sp>
-        <p:nvSpPr>
-          <p:cNvPr id="4" name="TextBox 3"/>
+            <a:pPr algn="l">
+              <a:defRPr sz="2600" b="1">
+                <a:solidFill>
+                  <a:srgbClr val="1E1E1E"/>
+                </a:solidFill>
+              </a:defRPr>
+            </a:pPr>
+            <a:r>
+              <a:t>社会背景与痛点</a:t>
+            </a:r>
+          </a:p>
+        </p:txBody>
+      </p:sp>
+      <p:sp>
+        <p:nvSpPr>
+          <p:cNvPr id="5" name="TextBox 4"/>
           <p:cNvSpPr txBox="1"/>
           <p:nvPr/>
         </p:nvSpPr>
         <p:spPr>
           <a:xfrm>
-            <a:off x="731520" y="1645920"/>
-            <a:ext cx="7772400" cy="4114800"/>
+            <a:off x="502920" y="1234440"/>
+            <a:ext cx="8138160" cy="3474720"/>
           </a:xfrm>
           <a:prstGeom prst="rect">
             <a:avLst/>
@@ -4442,77 +6713,17 @@
           <a:lstStyle/>
           <a:p>
             <a:pPr>
-              <a:spcAft>
-                <a:spcPts val="1000"/>
-              </a:spcAft>
-              <a:defRPr sz="1800">
-                <a:solidFill>
-                  <a:srgbClr val="F0F4FC"/>
-                </a:solidFill>
-              </a:defRPr>
-            </a:pPr>
-            <a:r>
-              <a:t>多模态风险融合引擎：跌倒 + 情绪 + 生理指标 → 可解释评分</a:t>
-            </a:r>
-          </a:p>
-          <a:p>
-            <a:pPr>
-              <a:spcAft>
-                <a:spcPts val="1000"/>
-              </a:spcAft>
-              <a:defRPr sz="1800">
-                <a:solidFill>
-                  <a:srgbClr val="F0F4FC"/>
-                </a:solidFill>
-              </a:defRPr>
-            </a:pPr>
-            <a:r>
-              <a:t>硬优先级状态机：紧急事件覆盖对话与常规任务</a:t>
-            </a:r>
-          </a:p>
-          <a:p>
-            <a:pPr>
-              <a:spcAft>
-                <a:spcPts val="1000"/>
-              </a:spcAft>
-              <a:defRPr sz="1800">
-                <a:solidFill>
-                  <a:srgbClr val="F0F4FC"/>
-                </a:solidFill>
-              </a:defRPr>
-            </a:pPr>
-            <a:r>
-              <a:t>主动式照护规划：不仅聊天，还执行告警/靠近/呼救</a:t>
-            </a:r>
-          </a:p>
-          <a:p>
-            <a:pPr>
-              <a:spcAft>
-                <a:spcPts val="1000"/>
-              </a:spcAft>
-              <a:defRPr sz="1800">
-                <a:solidFill>
-                  <a:srgbClr val="F0F4FC"/>
-                </a:solidFill>
-              </a:defRPr>
-            </a:pPr>
-            <a:r>
-              <a:t>仿真与真机统一接口：SimulationAdapter / ROS2Adapter</a:t>
-            </a:r>
-          </a:p>
-          <a:p>
-            <a:pPr>
-              <a:spcAft>
-                <a:spcPts val="1000"/>
-              </a:spcAft>
-              <a:defRPr sz="1800">
-                <a:solidFill>
-                  <a:srgbClr val="F0F4FC"/>
-                </a:solidFill>
-              </a:defRPr>
-            </a:pPr>
-            <a:r>
-              <a:t>边缘优先：视觉本地 MediaPipe，对话可离线 Mock</a:t>
+              <a:lnSpc>
+                <a:spcPct val="135000"/>
+              </a:lnSpc>
+              <a:defRPr sz="1500" b="0">
+                <a:solidFill>
+                  <a:srgbClr val="1E1E1E"/>
+                </a:solidFill>
+              </a:defRPr>
+            </a:pPr>
+            <a:r>
+              <a:t>随着我国老龄化程度加深，空巢与独居老人数量持续增加。跌倒已成为老年人意外伤害的首要原因之一，而「发现延迟」往往导致救援错过黄金时间。与此同时，老人对情感陪伴的需求日益增长——他们不仅需要被监测，更需要被理解、被回应。</a:t>
             </a:r>
           </a:p>
         </p:txBody>
@@ -4531,7 +6742,7 @@
     <p:bg>
       <p:bgPr>
         <a:solidFill>
-          <a:srgbClr val="0F172A"/>
+          <a:srgbClr val="FFFFFF"/>
         </a:solidFill>
         <a:effectLst/>
       </p:bgPr>
@@ -4545,14 +6756,57 @@
       <p:grpSpPr/>
       <p:sp>
         <p:nvSpPr>
-          <p:cNvPr id="2" name="TextBox 1"/>
+          <p:cNvPr id="2" name="Rectangle 1"/>
+          <p:cNvSpPr/>
+          <p:nvPr/>
+        </p:nvSpPr>
+        <p:spPr>
+          <a:xfrm>
+            <a:off x="0" y="0"/>
+            <a:ext cx="9144000" cy="502920"/>
+          </a:xfrm>
+          <a:prstGeom prst="rect">
+            <a:avLst/>
+          </a:prstGeom>
+          <a:solidFill>
+            <a:srgbClr val="143278"/>
+          </a:solidFill>
+          <a:ln>
+            <a:noFill/>
+          </a:ln>
+        </p:spPr>
+        <p:style>
+          <a:lnRef idx="1">
+            <a:schemeClr val="accent1"/>
+          </a:lnRef>
+          <a:fillRef idx="3">
+            <a:schemeClr val="accent1"/>
+          </a:fillRef>
+          <a:effectRef idx="2">
+            <a:schemeClr val="accent1"/>
+          </a:effectRef>
+          <a:fontRef idx="minor">
+            <a:schemeClr val="lt1"/>
+          </a:fontRef>
+        </p:style>
+        <p:txBody>
+          <a:bodyPr rtlCol="0" anchor="ctr"/>
+          <a:lstStyle/>
+          <a:p>
+            <a:pPr algn="ctr"/>
+          </a:p>
+        </p:txBody>
+      </p:sp>
+      <p:sp>
+        <p:nvSpPr>
+          <p:cNvPr id="3" name="TextBox 2"/>
           <p:cNvSpPr txBox="1"/>
           <p:nvPr/>
         </p:nvSpPr>
         <p:spPr>
           <a:xfrm>
-            <a:off x="548640" y="457200"/>
-            <a:ext cx="8229600" cy="1097280"/>
+            <a:off x="137160" y="73152"/>
+            <a:ext cx="8869680" cy="411480"/>
           </a:xfrm>
           <a:prstGeom prst="rect">
             <a:avLst/>
@@ -4565,29 +6819,41 @@
           </a:bodyPr>
           <a:lstStyle/>
           <a:p>
-            <a:pPr algn="l">
-              <a:defRPr sz="3000" b="1">
-                <a:solidFill>
-                  <a:srgbClr val="F0F4FC"/>
-                </a:solidFill>
-              </a:defRPr>
-            </a:pPr>
-            <a:r>
-              <a:t>3. 系统架构</a:t>
-            </a:r>
-          </a:p>
-        </p:txBody>
-      </p:sp>
-      <p:sp>
-        <p:nvSpPr>
-          <p:cNvPr id="3" name="TextBox 2"/>
+            <a:pPr>
+              <a:defRPr sz="1100" b="1">
+                <a:solidFill>
+                  <a:srgbClr val="FFFFFF"/>
+                </a:solidFill>
+              </a:defRPr>
+            </a:pPr>
+            <a:r>
+              <a:t>第二十六届中国机器人及人工智能大赛</a:t>
+            </a:r>
+          </a:p>
+          <a:p>
+            <a:pPr>
+              <a:defRPr sz="1000">
+                <a:solidFill>
+                  <a:srgbClr val="C8DCFF"/>
+                </a:solidFill>
+              </a:defRPr>
+            </a:pPr>
+            <a:r>
+              <a:t>机器人创新赛道</a:t>
+            </a:r>
+          </a:p>
+        </p:txBody>
+      </p:sp>
+      <p:sp>
+        <p:nvSpPr>
+          <p:cNvPr id="4" name="TextBox 3"/>
           <p:cNvSpPr txBox="1"/>
           <p:nvPr/>
         </p:nvSpPr>
         <p:spPr>
           <a:xfrm>
-            <a:off x="548640" y="1234440"/>
-            <a:ext cx="8229600" cy="731520"/>
+            <a:off x="502920" y="685800"/>
+            <a:ext cx="8138160" cy="731520"/>
           </a:xfrm>
           <a:prstGeom prst="rect">
             <a:avLst/>
@@ -4600,29 +6866,64 @@
           </a:bodyPr>
           <a:lstStyle/>
           <a:p>
-            <a:pPr>
-              <a:defRPr sz="1600">
-                <a:solidFill>
-                  <a:srgbClr val="94A3B8"/>
-                </a:solidFill>
-              </a:defRPr>
-            </a:pPr>
-            <a:r>
-              <a:t>Architecture</a:t>
-            </a:r>
-          </a:p>
-        </p:txBody>
-      </p:sp>
-      <p:sp>
-        <p:nvSpPr>
-          <p:cNvPr id="4" name="TextBox 3"/>
+            <a:pPr algn="l">
+              <a:defRPr sz="2600" b="1">
+                <a:solidFill>
+                  <a:srgbClr val="1E1E1E"/>
+                </a:solidFill>
+              </a:defRPr>
+            </a:pPr>
+            <a:r>
+              <a:t>现有方案的不足</a:t>
+            </a:r>
+          </a:p>
+        </p:txBody>
+      </p:sp>
+      <p:sp>
+        <p:nvSpPr>
+          <p:cNvPr id="5" name="TextBox 4"/>
           <p:cNvSpPr txBox="1"/>
           <p:nvPr/>
         </p:nvSpPr>
         <p:spPr>
           <a:xfrm>
-            <a:off x="731520" y="1645920"/>
-            <a:ext cx="7772400" cy="4114800"/>
+            <a:off x="411480" y="1234440"/>
+            <a:ext cx="4023360" cy="457200"/>
+          </a:xfrm>
+          <a:prstGeom prst="rect">
+            <a:avLst/>
+          </a:prstGeom>
+          <a:noFill/>
+        </p:spPr>
+        <p:txBody>
+          <a:bodyPr wrap="none">
+            <a:spAutoFit/>
+          </a:bodyPr>
+          <a:lstStyle/>
+          <a:p>
+            <a:pPr>
+              <a:defRPr sz="1400" b="1">
+                <a:solidFill>
+                  <a:srgbClr val="C00000"/>
+                </a:solidFill>
+              </a:defRPr>
+            </a:pPr>
+            <a:r>
+              <a:t>现有产品/方案（Ø）</a:t>
+            </a:r>
+          </a:p>
+        </p:txBody>
+      </p:sp>
+      <p:sp>
+        <p:nvSpPr>
+          <p:cNvPr id="6" name="TextBox 5"/>
+          <p:cNvSpPr txBox="1"/>
+          <p:nvPr/>
+        </p:nvSpPr>
+        <p:spPr>
+          <a:xfrm>
+            <a:off x="411480" y="1691640"/>
+            <a:ext cx="4023360" cy="3200400"/>
           </a:xfrm>
           <a:prstGeom prst="rect">
             <a:avLst/>
@@ -4636,77 +6937,168 @@
           <a:lstStyle/>
           <a:p>
             <a:pPr>
-              <a:spcAft>
-                <a:spcPts val="1000"/>
-              </a:spcAft>
-              <a:defRPr sz="1800">
-                <a:solidFill>
-                  <a:srgbClr val="F0F4FC"/>
-                </a:solidFill>
-              </a:defRPr>
-            </a:pPr>
-            <a:r>
-              <a:t>感知层：FallDetector · EmotionRecognizer · HealthMonitor · PosePipeline</a:t>
-            </a:r>
-          </a:p>
-          <a:p>
-            <a:pPr>
-              <a:spcAft>
-                <a:spcPts val="1000"/>
-              </a:spcAft>
-              <a:defRPr sz="1800">
-                <a:solidFill>
-                  <a:srgbClr val="F0F4FC"/>
-                </a:solidFill>
-              </a:defRPr>
-            </a:pPr>
-            <a:r>
-              <a:t>认知层：RiskEngine · DialogueManager · CarePlanner</a:t>
-            </a:r>
-          </a:p>
-          <a:p>
-            <a:pPr>
-              <a:spcAft>
-                <a:spcPts val="1000"/>
-              </a:spcAft>
-              <a:defRPr sz="1800">
-                <a:solidFill>
-                  <a:srgbClr val="F0F4FC"/>
-                </a:solidFill>
-              </a:defRPr>
-            </a:pPr>
-            <a:r>
-              <a:t>执行层：RobotAdapter → 仿真 / ROS2 / 人形 SDK</a:t>
-            </a:r>
-          </a:p>
-          <a:p>
-            <a:pPr>
-              <a:spcAft>
-                <a:spcPts val="1000"/>
-              </a:spcAft>
-              <a:defRPr sz="1800">
-                <a:solidFill>
-                  <a:srgbClr val="F0F4FC"/>
-                </a:solidFill>
-              </a:defRPr>
-            </a:pPr>
-            <a:r>
-              <a:t>交互层：Web 控制台 + 桌面仿真 + 无头压测</a:t>
-            </a:r>
-          </a:p>
-          <a:p>
-            <a:pPr>
-              <a:spcAft>
-                <a:spcPts val="1000"/>
-              </a:spcAft>
-              <a:defRPr sz="1800">
-                <a:solidFill>
-                  <a:srgbClr val="F0F4FC"/>
-                </a:solidFill>
-              </a:defRPr>
-            </a:pPr>
-            <a:r>
-              <a:t>核心：CareOrchestrator 统一 tick 循环</a:t>
+              <a:defRPr sz="1300">
+                <a:solidFill>
+                  <a:srgbClr val="1E1E1E"/>
+                </a:solidFill>
+              </a:defRPr>
+            </a:pPr>
+            <a:r>
+              <a:t>Ø 智能音箱：无视觉安全闭环，无法实体援助</a:t>
+            </a:r>
+          </a:p>
+          <a:p>
+            <a:pPr>
+              <a:defRPr sz="1300">
+                <a:solidFill>
+                  <a:srgbClr val="1E1E1E"/>
+                </a:solidFill>
+              </a:defRPr>
+            </a:pPr>
+            <a:r>
+              <a:t>Ø 监控摄像头：只告警不陪伴，缺乏对话与动作</a:t>
+            </a:r>
+          </a:p>
+          <a:p>
+            <a:pPr>
+              <a:defRPr sz="1300">
+                <a:solidFill>
+                  <a:srgbClr val="1E1E1E"/>
+                </a:solidFill>
+              </a:defRPr>
+            </a:pPr>
+            <a:r>
+              <a:t>Ø 健康手环：难发现跌倒过程，无机器人执行</a:t>
+            </a:r>
+          </a:p>
+          <a:p>
+            <a:pPr>
+              <a:defRPr sz="1300">
+                <a:solidFill>
+                  <a:srgbClr val="1E1E1E"/>
+                </a:solidFill>
+              </a:defRPr>
+            </a:pPr>
+            <a:r>
+              <a:t>Ø 纯仿真毕设：缺少真机部署路径与量化评测</a:t>
+            </a:r>
+          </a:p>
+        </p:txBody>
+      </p:sp>
+      <p:sp>
+        <p:nvSpPr>
+          <p:cNvPr id="7" name="TextBox 6"/>
+          <p:cNvSpPr txBox="1"/>
+          <p:nvPr/>
+        </p:nvSpPr>
+        <p:spPr>
+          <a:xfrm>
+            <a:off x="4617720" y="1234440"/>
+            <a:ext cx="4023360" cy="457200"/>
+          </a:xfrm>
+          <a:prstGeom prst="rect">
+            <a:avLst/>
+          </a:prstGeom>
+          <a:noFill/>
+        </p:spPr>
+        <p:txBody>
+          <a:bodyPr wrap="none">
+            <a:spAutoFit/>
+          </a:bodyPr>
+          <a:lstStyle/>
+          <a:p>
+            <a:pPr>
+              <a:defRPr sz="1400" b="1">
+                <a:solidFill>
+                  <a:srgbClr val="143278"/>
+                </a:solidFill>
+              </a:defRPr>
+            </a:pPr>
+            <a:r>
+              <a:t>CareCompanion（ü）</a:t>
+            </a:r>
+          </a:p>
+        </p:txBody>
+      </p:sp>
+      <p:sp>
+        <p:nvSpPr>
+          <p:cNvPr id="8" name="TextBox 7"/>
+          <p:cNvSpPr txBox="1"/>
+          <p:nvPr/>
+        </p:nvSpPr>
+        <p:spPr>
+          <a:xfrm>
+            <a:off x="4617720" y="1691640"/>
+            <a:ext cx="4023360" cy="3200400"/>
+          </a:xfrm>
+          <a:prstGeom prst="rect">
+            <a:avLst/>
+          </a:prstGeom>
+          <a:noFill/>
+        </p:spPr>
+        <p:txBody>
+          <a:bodyPr wrap="square">
+            <a:spAutoFit/>
+          </a:bodyPr>
+          <a:lstStyle/>
+          <a:p>
+            <a:pPr>
+              <a:defRPr sz="1300">
+                <a:solidFill>
+                  <a:srgbClr val="1E1E1E"/>
+                </a:solidFill>
+              </a:defRPr>
+            </a:pPr>
+            <a:r>
+              <a:t>ü 多模态融合：跌倒+情绪+生理→统一风险引擎</a:t>
+            </a:r>
+          </a:p>
+          <a:p>
+            <a:pPr>
+              <a:defRPr sz="1300">
+                <a:solidFill>
+                  <a:srgbClr val="1E1E1E"/>
+                </a:solidFill>
+              </a:defRPr>
+            </a:pPr>
+            <a:r>
+              <a:t>ü 可解释决策：输出风险分数与原因列表</a:t>
+            </a:r>
+          </a:p>
+          <a:p>
+            <a:pPr>
+              <a:defRPr sz="1300">
+                <a:solidFill>
+                  <a:srgbClr val="1E1E1E"/>
+                </a:solidFill>
+              </a:defRPr>
+            </a:pPr>
+            <a:r>
+              <a:t>ü 主动照护：告警/语音/手势/紧急呼叫联动</a:t>
+            </a:r>
+          </a:p>
+          <a:p>
+            <a:pPr>
+              <a:defRPr sz="1300">
+                <a:solidFill>
+                  <a:srgbClr val="1E1E1E"/>
+                </a:solidFill>
+              </a:defRPr>
+            </a:pPr>
+            <a:r>
+              <a:t>ü 人形接口：ROS2 标准话题，仿真与真机同源</a:t>
+            </a:r>
+          </a:p>
+          <a:p>
+            <a:pPr>
+              <a:defRPr sz="1300">
+                <a:solidFill>
+                  <a:srgbClr val="1E1E1E"/>
+                </a:solidFill>
+              </a:defRPr>
+            </a:pPr>
+            <a:r>
+              <a:t>ü 开源可复现：Web 控制台 + 评测脚本 + GitHub</a:t>
             </a:r>
           </a:p>
         </p:txBody>
@@ -4725,7 +7117,7 @@
     <p:bg>
       <p:bgPr>
         <a:solidFill>
-          <a:srgbClr val="0F172A"/>
+          <a:srgbClr val="FFFFFF"/>
         </a:solidFill>
         <a:effectLst/>
       </p:bgPr>
@@ -4739,14 +7131,57 @@
       <p:grpSpPr/>
       <p:sp>
         <p:nvSpPr>
-          <p:cNvPr id="2" name="TextBox 1"/>
+          <p:cNvPr id="2" name="Rectangle 1"/>
+          <p:cNvSpPr/>
+          <p:nvPr/>
+        </p:nvSpPr>
+        <p:spPr>
+          <a:xfrm>
+            <a:off x="0" y="0"/>
+            <a:ext cx="9144000" cy="502920"/>
+          </a:xfrm>
+          <a:prstGeom prst="rect">
+            <a:avLst/>
+          </a:prstGeom>
+          <a:solidFill>
+            <a:srgbClr val="143278"/>
+          </a:solidFill>
+          <a:ln>
+            <a:noFill/>
+          </a:ln>
+        </p:spPr>
+        <p:style>
+          <a:lnRef idx="1">
+            <a:schemeClr val="accent1"/>
+          </a:lnRef>
+          <a:fillRef idx="3">
+            <a:schemeClr val="accent1"/>
+          </a:fillRef>
+          <a:effectRef idx="2">
+            <a:schemeClr val="accent1"/>
+          </a:effectRef>
+          <a:fontRef idx="minor">
+            <a:schemeClr val="lt1"/>
+          </a:fontRef>
+        </p:style>
+        <p:txBody>
+          <a:bodyPr rtlCol="0" anchor="ctr"/>
+          <a:lstStyle/>
+          <a:p>
+            <a:pPr algn="ctr"/>
+          </a:p>
+        </p:txBody>
+      </p:sp>
+      <p:sp>
+        <p:nvSpPr>
+          <p:cNvPr id="3" name="TextBox 2"/>
           <p:cNvSpPr txBox="1"/>
           <p:nvPr/>
         </p:nvSpPr>
         <p:spPr>
           <a:xfrm>
-            <a:off x="548640" y="457200"/>
-            <a:ext cx="8229600" cy="1097280"/>
+            <a:off x="137160" y="73152"/>
+            <a:ext cx="8869680" cy="411480"/>
           </a:xfrm>
           <a:prstGeom prst="rect">
             <a:avLst/>
@@ -4759,29 +7194,41 @@
           </a:bodyPr>
           <a:lstStyle/>
           <a:p>
-            <a:pPr algn="l">
-              <a:defRPr sz="3000" b="1">
-                <a:solidFill>
-                  <a:srgbClr val="F0F4FC"/>
-                </a:solidFill>
-              </a:defRPr>
-            </a:pPr>
-            <a:r>
-              <a:t>4. 跌倒检测算法</a:t>
-            </a:r>
-          </a:p>
-        </p:txBody>
-      </p:sp>
-      <p:sp>
-        <p:nvSpPr>
-          <p:cNvPr id="3" name="TextBox 2"/>
+            <a:pPr>
+              <a:defRPr sz="1100" b="1">
+                <a:solidFill>
+                  <a:srgbClr val="FFFFFF"/>
+                </a:solidFill>
+              </a:defRPr>
+            </a:pPr>
+            <a:r>
+              <a:t>第二十六届中国机器人及人工智能大赛</a:t>
+            </a:r>
+          </a:p>
+          <a:p>
+            <a:pPr>
+              <a:defRPr sz="1000">
+                <a:solidFill>
+                  <a:srgbClr val="C8DCFF"/>
+                </a:solidFill>
+              </a:defRPr>
+            </a:pPr>
+            <a:r>
+              <a:t>机器人创新赛道</a:t>
+            </a:r>
+          </a:p>
+        </p:txBody>
+      </p:sp>
+      <p:sp>
+        <p:nvSpPr>
+          <p:cNvPr id="4" name="TextBox 3"/>
           <p:cNvSpPr txBox="1"/>
           <p:nvPr/>
         </p:nvSpPr>
         <p:spPr>
           <a:xfrm>
-            <a:off x="548640" y="1234440"/>
-            <a:ext cx="8229600" cy="731520"/>
+            <a:off x="502920" y="685800"/>
+            <a:ext cx="8138160" cy="731520"/>
           </a:xfrm>
           <a:prstGeom prst="rect">
             <a:avLst/>
@@ -4794,29 +7241,29 @@
           </a:bodyPr>
           <a:lstStyle/>
           <a:p>
-            <a:pPr>
-              <a:defRPr sz="1600">
-                <a:solidFill>
-                  <a:srgbClr val="94A3B8"/>
-                </a:solidFill>
-              </a:defRPr>
-            </a:pPr>
-            <a:r>
-              <a:t>Fall Detection</a:t>
-            </a:r>
-          </a:p>
-        </p:txBody>
-      </p:sp>
-      <p:sp>
-        <p:nvSpPr>
-          <p:cNvPr id="4" name="TextBox 3"/>
+            <a:pPr algn="l">
+              <a:defRPr sz="2600" b="1">
+                <a:solidFill>
+                  <a:srgbClr val="1E1E1E"/>
+                </a:solidFill>
+              </a:defRPr>
+            </a:pPr>
+            <a:r>
+              <a:t>项目概述</a:t>
+            </a:r>
+          </a:p>
+        </p:txBody>
+      </p:sp>
+      <p:sp>
+        <p:nvSpPr>
+          <p:cNvPr id="5" name="TextBox 4"/>
           <p:cNvSpPr txBox="1"/>
           <p:nvPr/>
         </p:nvSpPr>
         <p:spPr>
           <a:xfrm>
-            <a:off x="731520" y="1645920"/>
-            <a:ext cx="7772400" cy="4114800"/>
+            <a:off x="502920" y="1234440"/>
+            <a:ext cx="8138160" cy="3474720"/>
           </a:xfrm>
           <a:prstGeom prst="rect">
             <a:avLst/>
@@ -4830,77 +7277,17 @@
           <a:lstStyle/>
           <a:p>
             <a:pPr>
-              <a:spcAft>
-                <a:spcPts val="1000"/>
-              </a:spcAft>
-              <a:defRPr sz="1800">
-                <a:solidFill>
-                  <a:srgbClr val="F0F4FC"/>
-                </a:solidFill>
-              </a:defRPr>
-            </a:pPr>
-            <a:r>
-              <a:t>几何特征：骨架宽高比 + 垂直速度 + 静止持续时间</a:t>
-            </a:r>
-          </a:p>
-          <a:p>
-            <a:pPr>
-              <a:spcAft>
-                <a:spcPts val="1000"/>
-              </a:spcAft>
-              <a:defRPr sz="1800">
-                <a:solidFill>
-                  <a:srgbClr val="F0F4FC"/>
-                </a:solidFill>
-              </a:defRPr>
-            </a:pPr>
-            <a:r>
-              <a:t>MediaPipe Pose：浏览器/摄像头实时骨架提取</a:t>
-            </a:r>
-          </a:p>
-          <a:p>
-            <a:pPr>
-              <a:spcAft>
-                <a:spcPts val="1000"/>
-              </a:spcAft>
-              <a:defRPr sz="1800">
-                <a:solidFill>
-                  <a:srgbClr val="F0F4FC"/>
-                </a:solidFill>
-              </a:defRPr>
-            </a:pPr>
-            <a:r>
-              <a:t>快速跌倒：下落 + 躺倒（score ≥ 0.7）</a:t>
-            </a:r>
-          </a:p>
-          <a:p>
-            <a:pPr>
-              <a:spcAft>
-                <a:spcPts val="1000"/>
-              </a:spcAft>
-              <a:defRPr sz="1800">
-                <a:solidFill>
-                  <a:srgbClr val="F0F4FC"/>
-                </a:solidFill>
-              </a:defRPr>
-            </a:pPr>
-            <a:r>
-              <a:t>慢速跌倒：躺倒静止 ≥2s（养老场景）</a:t>
-            </a:r>
-          </a:p>
-          <a:p>
-            <a:pPr>
-              <a:spcAft>
-                <a:spcPts val="1000"/>
-              </a:spcAft>
-              <a:defRPr sz="1800">
-                <a:solidFill>
-                  <a:srgbClr val="F0F4FC"/>
-                </a:solidFill>
-              </a:defRPr>
-            </a:pPr>
-            <a:r>
-              <a:t>合成场景评测：Precision/Recall/F1 = 100%</a:t>
+              <a:lnSpc>
+                <a:spcPct val="135000"/>
+              </a:lnSpc>
+              <a:defRPr sz="1500" b="0">
+                <a:solidFill>
+                  <a:srgbClr val="1E1E1E"/>
+                </a:solidFill>
+              </a:defRPr>
+            </a:pPr>
+            <a:r>
+              <a:t>基于上述需求，我们开发了 CareCompanion 智能养老人形陪伴机器人软件平台。平台以 CareOrchestrator 为核心，融合 MediaPipe 视觉姿态、文本情感与健康指标，在 Web 控制台完成演示验证，并通过 ROS2 适配层对接人形机器人。系统已实现跌倒紧急链路自动化验证，合成场景跌倒检测 F1 达 100%。</a:t>
             </a:r>
           </a:p>
         </p:txBody>
@@ -4919,7 +7306,7 @@
     <p:bg>
       <p:bgPr>
         <a:solidFill>
-          <a:srgbClr val="0F172A"/>
+          <a:srgbClr val="FFFFFF"/>
         </a:solidFill>
         <a:effectLst/>
       </p:bgPr>
@@ -4933,14 +7320,57 @@
       <p:grpSpPr/>
       <p:sp>
         <p:nvSpPr>
-          <p:cNvPr id="2" name="TextBox 1"/>
+          <p:cNvPr id="2" name="Rectangle 1"/>
+          <p:cNvSpPr/>
+          <p:nvPr/>
+        </p:nvSpPr>
+        <p:spPr>
+          <a:xfrm>
+            <a:off x="0" y="0"/>
+            <a:ext cx="9144000" cy="502920"/>
+          </a:xfrm>
+          <a:prstGeom prst="rect">
+            <a:avLst/>
+          </a:prstGeom>
+          <a:solidFill>
+            <a:srgbClr val="143278"/>
+          </a:solidFill>
+          <a:ln>
+            <a:noFill/>
+          </a:ln>
+        </p:spPr>
+        <p:style>
+          <a:lnRef idx="1">
+            <a:schemeClr val="accent1"/>
+          </a:lnRef>
+          <a:fillRef idx="3">
+            <a:schemeClr val="accent1"/>
+          </a:fillRef>
+          <a:effectRef idx="2">
+            <a:schemeClr val="accent1"/>
+          </a:effectRef>
+          <a:fontRef idx="minor">
+            <a:schemeClr val="lt1"/>
+          </a:fontRef>
+        </p:style>
+        <p:txBody>
+          <a:bodyPr rtlCol="0" anchor="ctr"/>
+          <a:lstStyle/>
+          <a:p>
+            <a:pPr algn="ctr"/>
+          </a:p>
+        </p:txBody>
+      </p:sp>
+      <p:sp>
+        <p:nvSpPr>
+          <p:cNvPr id="3" name="TextBox 2"/>
           <p:cNvSpPr txBox="1"/>
           <p:nvPr/>
         </p:nvSpPr>
         <p:spPr>
           <a:xfrm>
-            <a:off x="548640" y="457200"/>
-            <a:ext cx="8229600" cy="1097280"/>
+            <a:off x="137160" y="73152"/>
+            <a:ext cx="8869680" cy="411480"/>
           </a:xfrm>
           <a:prstGeom prst="rect">
             <a:avLst/>
@@ -4953,29 +7383,41 @@
           </a:bodyPr>
           <a:lstStyle/>
           <a:p>
-            <a:pPr algn="l">
-              <a:defRPr sz="3000" b="1">
-                <a:solidFill>
-                  <a:srgbClr val="F0F4FC"/>
-                </a:solidFill>
-              </a:defRPr>
-            </a:pPr>
-            <a:r>
-              <a:t>5. 风险融合与决策</a:t>
-            </a:r>
-          </a:p>
-        </p:txBody>
-      </p:sp>
-      <p:sp>
-        <p:nvSpPr>
-          <p:cNvPr id="3" name="TextBox 2"/>
+            <a:pPr>
+              <a:defRPr sz="1100" b="1">
+                <a:solidFill>
+                  <a:srgbClr val="FFFFFF"/>
+                </a:solidFill>
+              </a:defRPr>
+            </a:pPr>
+            <a:r>
+              <a:t>第二十六届中国机器人及人工智能大赛</a:t>
+            </a:r>
+          </a:p>
+          <a:p>
+            <a:pPr>
+              <a:defRPr sz="1000">
+                <a:solidFill>
+                  <a:srgbClr val="C8DCFF"/>
+                </a:solidFill>
+              </a:defRPr>
+            </a:pPr>
+            <a:r>
+              <a:t>机器人创新赛道</a:t>
+            </a:r>
+          </a:p>
+        </p:txBody>
+      </p:sp>
+      <p:sp>
+        <p:nvSpPr>
+          <p:cNvPr id="4" name="TextBox 3"/>
           <p:cNvSpPr txBox="1"/>
           <p:nvPr/>
         </p:nvSpPr>
         <p:spPr>
           <a:xfrm>
-            <a:off x="548640" y="1234440"/>
-            <a:ext cx="8229600" cy="731520"/>
+            <a:off x="502920" y="1828800"/>
+            <a:ext cx="8138160" cy="731520"/>
           </a:xfrm>
           <a:prstGeom prst="rect">
             <a:avLst/>
@@ -4988,29 +7430,29 @@
           </a:bodyPr>
           <a:lstStyle/>
           <a:p>
-            <a:pPr>
-              <a:defRPr sz="1600">
-                <a:solidFill>
-                  <a:srgbClr val="94A3B8"/>
-                </a:solidFill>
-              </a:defRPr>
-            </a:pPr>
-            <a:r>
-              <a:t>Risk Engine</a:t>
-            </a:r>
-          </a:p>
-        </p:txBody>
-      </p:sp>
-      <p:sp>
-        <p:nvSpPr>
-          <p:cNvPr id="4" name="TextBox 3"/>
+            <a:pPr algn="ctr">
+              <a:defRPr sz="3200" b="1">
+                <a:solidFill>
+                  <a:srgbClr val="1E1E1E"/>
+                </a:solidFill>
+              </a:defRPr>
+            </a:pPr>
+            <a:r>
+              <a:t>第二部分</a:t>
+            </a:r>
+          </a:p>
+        </p:txBody>
+      </p:sp>
+      <p:sp>
+        <p:nvSpPr>
+          <p:cNvPr id="5" name="TextBox 4"/>
           <p:cNvSpPr txBox="1"/>
           <p:nvPr/>
         </p:nvSpPr>
         <p:spPr>
           <a:xfrm>
-            <a:off x="731520" y="1645920"/>
-            <a:ext cx="7772400" cy="4114800"/>
+            <a:off x="502920" y="2606040"/>
+            <a:ext cx="8138160" cy="731520"/>
           </a:xfrm>
           <a:prstGeom prst="rect">
             <a:avLst/>
@@ -5018,83 +7460,20 @@
           <a:noFill/>
         </p:spPr>
         <p:txBody>
-          <a:bodyPr wrap="square">
+          <a:bodyPr wrap="none">
             <a:spAutoFit/>
           </a:bodyPr>
           <a:lstStyle/>
           <a:p>
-            <a:pPr>
-              <a:spcAft>
-                <a:spcPts val="1000"/>
-              </a:spcAft>
-              <a:defRPr sz="1800">
-                <a:solidFill>
-                  <a:srgbClr val="F0F4FC"/>
-                </a:solidFill>
-              </a:defRPr>
-            </a:pPr>
-            <a:r>
-              <a:t>加权融合：跌倒 45% · 情绪 25% · 健康 30%</a:t>
-            </a:r>
-          </a:p>
-          <a:p>
-            <a:pPr>
-              <a:spcAft>
-                <a:spcPts val="1000"/>
-              </a:spcAft>
-              <a:defRPr sz="1800">
-                <a:solidFill>
-                  <a:srgbClr val="F0F4FC"/>
-                </a:solidFill>
-              </a:defRPr>
-            </a:pPr>
-            <a:r>
-              <a:t>三级输出：normal / alert / emergency + 原因列表</a:t>
-            </a:r>
-          </a:p>
-          <a:p>
-            <a:pPr>
-              <a:spcAft>
-                <a:spcPts val="1000"/>
-              </a:spcAft>
-              <a:defRPr sz="1800">
-                <a:solidFill>
-                  <a:srgbClr val="F0F4FC"/>
-                </a:solidFill>
-              </a:defRPr>
-            </a:pPr>
-            <a:r>
-              <a:t>状态机：MONITOR → CONVERSE → ALERT → EMERGENCY</a:t>
-            </a:r>
-          </a:p>
-          <a:p>
-            <a:pPr>
-              <a:spcAft>
-                <a:spcPts val="1000"/>
-              </a:spcAft>
-              <a:defRPr sz="1800">
-                <a:solidFill>
-                  <a:srgbClr val="F0F4FC"/>
-                </a:solidFill>
-              </a:defRPr>
-            </a:pPr>
-            <a:r>
-              <a:t>紧急时：告警音 + 语音 + call_emergency + 手势</a:t>
-            </a:r>
-          </a:p>
-          <a:p>
-            <a:pPr>
-              <a:spcAft>
-                <a:spcPts val="1000"/>
-              </a:spcAft>
-              <a:defRPr sz="1800">
-                <a:solidFill>
-                  <a:srgbClr val="F0F4FC"/>
-                </a:solidFill>
-              </a:defRPr>
-            </a:pPr>
-            <a:r>
-              <a:t>紧急通知：家属 App / 短信备份 / 本地告警（可扩展）</a:t>
+            <a:pPr algn="ctr">
+              <a:defRPr sz="2200" b="1">
+                <a:solidFill>
+                  <a:srgbClr val="143278"/>
+                </a:solidFill>
+              </a:defRPr>
+            </a:pPr>
+            <a:r>
+              <a:t>关键技术与系统架构</a:t>
             </a:r>
           </a:p>
         </p:txBody>
@@ -5113,7 +7492,7 @@
     <p:bg>
       <p:bgPr>
         <a:solidFill>
-          <a:srgbClr val="0F172A"/>
+          <a:srgbClr val="FFFFFF"/>
         </a:solidFill>
         <a:effectLst/>
       </p:bgPr>
@@ -5127,14 +7506,57 @@
       <p:grpSpPr/>
       <p:sp>
         <p:nvSpPr>
-          <p:cNvPr id="2" name="TextBox 1"/>
+          <p:cNvPr id="2" name="Rectangle 1"/>
+          <p:cNvSpPr/>
+          <p:nvPr/>
+        </p:nvSpPr>
+        <p:spPr>
+          <a:xfrm>
+            <a:off x="0" y="0"/>
+            <a:ext cx="9144000" cy="502920"/>
+          </a:xfrm>
+          <a:prstGeom prst="rect">
+            <a:avLst/>
+          </a:prstGeom>
+          <a:solidFill>
+            <a:srgbClr val="143278"/>
+          </a:solidFill>
+          <a:ln>
+            <a:noFill/>
+          </a:ln>
+        </p:spPr>
+        <p:style>
+          <a:lnRef idx="1">
+            <a:schemeClr val="accent1"/>
+          </a:lnRef>
+          <a:fillRef idx="3">
+            <a:schemeClr val="accent1"/>
+          </a:fillRef>
+          <a:effectRef idx="2">
+            <a:schemeClr val="accent1"/>
+          </a:effectRef>
+          <a:fontRef idx="minor">
+            <a:schemeClr val="lt1"/>
+          </a:fontRef>
+        </p:style>
+        <p:txBody>
+          <a:bodyPr rtlCol="0" anchor="ctr"/>
+          <a:lstStyle/>
+          <a:p>
+            <a:pPr algn="ctr"/>
+          </a:p>
+        </p:txBody>
+      </p:sp>
+      <p:sp>
+        <p:nvSpPr>
+          <p:cNvPr id="3" name="TextBox 2"/>
           <p:cNvSpPr txBox="1"/>
           <p:nvPr/>
         </p:nvSpPr>
         <p:spPr>
           <a:xfrm>
-            <a:off x="548640" y="457200"/>
-            <a:ext cx="8229600" cy="1097280"/>
+            <a:off x="137160" y="73152"/>
+            <a:ext cx="8869680" cy="411480"/>
           </a:xfrm>
           <a:prstGeom prst="rect">
             <a:avLst/>
@@ -5147,29 +7569,41 @@
           </a:bodyPr>
           <a:lstStyle/>
           <a:p>
-            <a:pPr algn="l">
-              <a:defRPr sz="3000" b="1">
-                <a:solidFill>
-                  <a:srgbClr val="F0F4FC"/>
-                </a:solidFill>
-              </a:defRPr>
-            </a:pPr>
-            <a:r>
-              <a:t>6. 情感陪伴与对话</a:t>
-            </a:r>
-          </a:p>
-        </p:txBody>
-      </p:sp>
-      <p:sp>
-        <p:nvSpPr>
-          <p:cNvPr id="3" name="TextBox 2"/>
+            <a:pPr>
+              <a:defRPr sz="1100" b="1">
+                <a:solidFill>
+                  <a:srgbClr val="FFFFFF"/>
+                </a:solidFill>
+              </a:defRPr>
+            </a:pPr>
+            <a:r>
+              <a:t>第二十六届中国机器人及人工智能大赛</a:t>
+            </a:r>
+          </a:p>
+          <a:p>
+            <a:pPr>
+              <a:defRPr sz="1000">
+                <a:solidFill>
+                  <a:srgbClr val="C8DCFF"/>
+                </a:solidFill>
+              </a:defRPr>
+            </a:pPr>
+            <a:r>
+              <a:t>机器人创新赛道</a:t>
+            </a:r>
+          </a:p>
+        </p:txBody>
+      </p:sp>
+      <p:sp>
+        <p:nvSpPr>
+          <p:cNvPr id="4" name="TextBox 3"/>
           <p:cNvSpPr txBox="1"/>
           <p:nvPr/>
         </p:nvSpPr>
         <p:spPr>
           <a:xfrm>
-            <a:off x="548640" y="1234440"/>
-            <a:ext cx="8229600" cy="731520"/>
+            <a:off x="502920" y="685800"/>
+            <a:ext cx="8138160" cy="731520"/>
           </a:xfrm>
           <a:prstGeom prst="rect">
             <a:avLst/>
@@ -5182,29 +7616,29 @@
           </a:bodyPr>
           <a:lstStyle/>
           <a:p>
-            <a:pPr>
-              <a:defRPr sz="1600">
-                <a:solidFill>
-                  <a:srgbClr val="94A3B8"/>
-                </a:solidFill>
-              </a:defRPr>
-            </a:pPr>
-            <a:r>
-              <a:t>Dialogue</a:t>
-            </a:r>
-          </a:p>
-        </p:txBody>
-      </p:sp>
-      <p:sp>
-        <p:nvSpPr>
-          <p:cNvPr id="4" name="TextBox 3"/>
+            <a:pPr algn="l">
+              <a:defRPr sz="2600" b="1">
+                <a:solidFill>
+                  <a:srgbClr val="1E1E1E"/>
+                </a:solidFill>
+              </a:defRPr>
+            </a:pPr>
+            <a:r>
+              <a:t>系统总体架构</a:t>
+            </a:r>
+          </a:p>
+        </p:txBody>
+      </p:sp>
+      <p:sp>
+        <p:nvSpPr>
+          <p:cNvPr id="5" name="TextBox 4"/>
           <p:cNvSpPr txBox="1"/>
           <p:nvPr/>
         </p:nvSpPr>
         <p:spPr>
           <a:xfrm>
-            <a:off x="731520" y="1645920"/>
-            <a:ext cx="7772400" cy="4114800"/>
+            <a:off x="502920" y="1325880"/>
+            <a:ext cx="8138160" cy="3840480"/>
           </a:xfrm>
           <a:prstGeom prst="rect">
             <a:avLst/>
@@ -5219,76 +7653,76 @@
           <a:p>
             <a:pPr>
               <a:spcAft>
-                <a:spcPts val="1000"/>
+                <a:spcPts val="600"/>
               </a:spcAft>
-              <a:defRPr sz="1800">
-                <a:solidFill>
-                  <a:srgbClr val="F0F4FC"/>
-                </a:solidFill>
-              </a:defRPr>
-            </a:pPr>
-            <a:r>
-              <a:t>文本情感词典 + 视觉情绪标签融合</a:t>
+              <a:defRPr sz="1400">
+                <a:solidFill>
+                  <a:srgbClr val="1E1E1E"/>
+                </a:solidFill>
+              </a:defRPr>
+            </a:pPr>
+            <a:r>
+              <a:t>感知层：FallDetector · EmotionRecognizer · HealthMonitor · PosePipeline（MediaPipe）</a:t>
             </a:r>
           </a:p>
           <a:p>
             <a:pPr>
               <a:spcAft>
-                <a:spcPts val="1000"/>
+                <a:spcPts val="600"/>
               </a:spcAft>
-              <a:defRPr sz="1800">
-                <a:solidFill>
-                  <a:srgbClr val="F0F4FC"/>
-                </a:solidFill>
-              </a:defRPr>
-            </a:pPr>
-            <a:r>
-              <a:t>可插拔 LLM：默认 Mock 离线，支持 OpenAI 兼容 API</a:t>
+              <a:defRPr sz="1400">
+                <a:solidFill>
+                  <a:srgbClr val="1E1E1E"/>
+                </a:solidFill>
+              </a:defRPr>
+            </a:pPr>
+            <a:r>
+              <a:t>认知层：RiskEngine（多模态融合）· DialogueManager · CarePlanner</a:t>
             </a:r>
           </a:p>
           <a:p>
             <a:pPr>
               <a:spcAft>
-                <a:spcPts val="1000"/>
+                <a:spcPts val="600"/>
               </a:spcAft>
-              <a:defRPr sz="1800">
-                <a:solidFill>
-                  <a:srgbClr val="F0F4FC"/>
-                </a:solidFill>
-              </a:defRPr>
-            </a:pPr>
-            <a:r>
-              <a:t>场景示例：「有点孤独」→ 温暖安抚 + 挥手</a:t>
+              <a:defRPr sz="1400">
+                <a:solidFill>
+                  <a:srgbClr val="1E1E1E"/>
+                </a:solidFill>
+              </a:defRPr>
+            </a:pPr>
+            <a:r>
+              <a:t>执行层：RobotAdapter → SimulationAdapter / ROS2Adapter</a:t>
             </a:r>
           </a:p>
           <a:p>
             <a:pPr>
               <a:spcAft>
-                <a:spcPts val="1000"/>
+                <a:spcPts val="600"/>
               </a:spcAft>
-              <a:defRPr sz="1800">
-                <a:solidFill>
-                  <a:srgbClr val="F0F4FC"/>
-                </a:solidFill>
-              </a:defRPr>
-            </a:pPr>
-            <a:r>
-              <a:t>用药/问候等关键词触发专属回复</a:t>
+              <a:defRPr sz="1400">
+                <a:solidFill>
+                  <a:srgbClr val="1E1E1E"/>
+                </a:solidFill>
+              </a:defRPr>
+            </a:pPr>
+            <a:r>
+              <a:t>交互层：Web 控制台 · 桌面 GUI · 无头自动化剧本</a:t>
             </a:r>
           </a:p>
           <a:p>
             <a:pPr>
               <a:spcAft>
-                <a:spcPts val="1000"/>
+                <a:spcPts val="600"/>
               </a:spcAft>
-              <a:defRPr sz="1800">
-                <a:solidFill>
-                  <a:srgbClr val="F0F4FC"/>
-                </a:solidFill>
-              </a:defRPr>
-            </a:pPr>
-            <a:r>
-              <a:t>与风险等级联动，紧急时优先安全话术</a:t>
+              <a:defRPr sz="1400">
+                <a:solidFill>
+                  <a:srgbClr val="1E1E1E"/>
+                </a:solidFill>
+              </a:defRPr>
+            </a:pPr>
+            <a:r>
+              <a:t>状态机：MONITOR → CONVERSE → ALERT → EMERGENCY（紧急硬优先级）</a:t>
             </a:r>
           </a:p>
         </p:txBody>
@@ -5307,7 +7741,7 @@
     <p:bg>
       <p:bgPr>
         <a:solidFill>
-          <a:srgbClr val="0F172A"/>
+          <a:srgbClr val="FFFFFF"/>
         </a:solidFill>
         <a:effectLst/>
       </p:bgPr>
@@ -5321,14 +7755,57 @@
       <p:grpSpPr/>
       <p:sp>
         <p:nvSpPr>
-          <p:cNvPr id="2" name="TextBox 1"/>
+          <p:cNvPr id="2" name="Rectangle 1"/>
+          <p:cNvSpPr/>
+          <p:nvPr/>
+        </p:nvSpPr>
+        <p:spPr>
+          <a:xfrm>
+            <a:off x="0" y="0"/>
+            <a:ext cx="9144000" cy="502920"/>
+          </a:xfrm>
+          <a:prstGeom prst="rect">
+            <a:avLst/>
+          </a:prstGeom>
+          <a:solidFill>
+            <a:srgbClr val="143278"/>
+          </a:solidFill>
+          <a:ln>
+            <a:noFill/>
+          </a:ln>
+        </p:spPr>
+        <p:style>
+          <a:lnRef idx="1">
+            <a:schemeClr val="accent1"/>
+          </a:lnRef>
+          <a:fillRef idx="3">
+            <a:schemeClr val="accent1"/>
+          </a:fillRef>
+          <a:effectRef idx="2">
+            <a:schemeClr val="accent1"/>
+          </a:effectRef>
+          <a:fontRef idx="minor">
+            <a:schemeClr val="lt1"/>
+          </a:fontRef>
+        </p:style>
+        <p:txBody>
+          <a:bodyPr rtlCol="0" anchor="ctr"/>
+          <a:lstStyle/>
+          <a:p>
+            <a:pPr algn="ctr"/>
+          </a:p>
+        </p:txBody>
+      </p:sp>
+      <p:sp>
+        <p:nvSpPr>
+          <p:cNvPr id="3" name="TextBox 2"/>
           <p:cNvSpPr txBox="1"/>
           <p:nvPr/>
         </p:nvSpPr>
         <p:spPr>
           <a:xfrm>
-            <a:off x="548640" y="457200"/>
-            <a:ext cx="8229600" cy="1097280"/>
+            <a:off x="137160" y="73152"/>
+            <a:ext cx="8869680" cy="411480"/>
           </a:xfrm>
           <a:prstGeom prst="rect">
             <a:avLst/>
@@ -5341,29 +7818,41 @@
           </a:bodyPr>
           <a:lstStyle/>
           <a:p>
-            <a:pPr algn="l">
-              <a:defRPr sz="3000" b="1">
-                <a:solidFill>
-                  <a:srgbClr val="F0F4FC"/>
-                </a:solidFill>
-              </a:defRPr>
-            </a:pPr>
-            <a:r>
-              <a:t>7. Web 控制台演示</a:t>
-            </a:r>
-          </a:p>
-        </p:txBody>
-      </p:sp>
-      <p:sp>
-        <p:nvSpPr>
-          <p:cNvPr id="3" name="TextBox 2"/>
+            <a:pPr>
+              <a:defRPr sz="1100" b="1">
+                <a:solidFill>
+                  <a:srgbClr val="FFFFFF"/>
+                </a:solidFill>
+              </a:defRPr>
+            </a:pPr>
+            <a:r>
+              <a:t>第二十六届中国机器人及人工智能大赛</a:t>
+            </a:r>
+          </a:p>
+          <a:p>
+            <a:pPr>
+              <a:defRPr sz="1000">
+                <a:solidFill>
+                  <a:srgbClr val="C8DCFF"/>
+                </a:solidFill>
+              </a:defRPr>
+            </a:pPr>
+            <a:r>
+              <a:t>机器人创新赛道</a:t>
+            </a:r>
+          </a:p>
+        </p:txBody>
+      </p:sp>
+      <p:sp>
+        <p:nvSpPr>
+          <p:cNvPr id="4" name="TextBox 3"/>
           <p:cNvSpPr txBox="1"/>
           <p:nvPr/>
         </p:nvSpPr>
         <p:spPr>
           <a:xfrm>
-            <a:off x="548640" y="1234440"/>
-            <a:ext cx="8229600" cy="731520"/>
+            <a:off x="502920" y="685800"/>
+            <a:ext cx="8138160" cy="731520"/>
           </a:xfrm>
           <a:prstGeom prst="rect">
             <a:avLst/>
@@ -5376,29 +7865,29 @@
           </a:bodyPr>
           <a:lstStyle/>
           <a:p>
-            <a:pPr>
-              <a:defRPr sz="1600">
-                <a:solidFill>
-                  <a:srgbClr val="94A3B8"/>
-                </a:solidFill>
-              </a:defRPr>
-            </a:pPr>
-            <a:r>
-              <a:t>Demo</a:t>
-            </a:r>
-          </a:p>
-        </p:txBody>
-      </p:sp>
-      <p:sp>
-        <p:nvSpPr>
-          <p:cNvPr id="4" name="TextBox 3"/>
+            <a:pPr algn="l">
+              <a:defRPr sz="2600" b="1">
+                <a:solidFill>
+                  <a:srgbClr val="1E1E1E"/>
+                </a:solidFill>
+              </a:defRPr>
+            </a:pPr>
+            <a:r>
+              <a:t>多模态风险融合引擎</a:t>
+            </a:r>
+          </a:p>
+        </p:txBody>
+      </p:sp>
+      <p:sp>
+        <p:nvSpPr>
+          <p:cNvPr id="5" name="TextBox 4"/>
           <p:cNvSpPr txBox="1"/>
           <p:nvPr/>
         </p:nvSpPr>
         <p:spPr>
           <a:xfrm>
-            <a:off x="731520" y="1645920"/>
-            <a:ext cx="7772400" cy="4114800"/>
+            <a:off x="502920" y="1325880"/>
+            <a:ext cx="8138160" cy="3840480"/>
           </a:xfrm>
           <a:prstGeom prst="rect">
             <a:avLst/>
@@ -5413,76 +7902,99 @@
           <a:p>
             <a:pPr>
               <a:spcAft>
-                <a:spcPts val="1000"/>
+                <a:spcPts val="600"/>
               </a:spcAft>
-              <a:defRPr sz="1800">
-                <a:solidFill>
-                  <a:srgbClr val="F0F4FC"/>
-                </a:solidFill>
-              </a:defRPr>
-            </a:pPr>
-            <a:r>
-              <a:t>浏览器访问：感知调节 + 实时风险仪表盘</a:t>
+              <a:defRPr sz="1400">
+                <a:solidFill>
+                  <a:srgbClr val="1E1E1E"/>
+                </a:solidFill>
+              </a:defRPr>
+            </a:pPr>
+            <a:r>
+              <a:t>融合公式：S = 0.45·S_fall + 0.25·S_emo + 0.30·S_health</a:t>
             </a:r>
           </a:p>
           <a:p>
             <a:pPr>
               <a:spcAft>
-                <a:spcPts val="1000"/>
+                <a:spcPts val="600"/>
               </a:spcAft>
-              <a:defRPr sz="1800">
-                <a:solidFill>
-                  <a:srgbClr val="F0F4FC"/>
-                </a:solidFill>
-              </a:defRPr>
-            </a:pPr>
-            <a:r>
-              <a:t>摄像头：MediaPipe 骨架叠加 + 自动填充姿态参数</a:t>
+              <a:defRPr sz="1400">
+                <a:solidFill>
+                  <a:srgbClr val="1E1E1E"/>
+                </a:solidFill>
+              </a:defRPr>
+            </a:pPr>
+            <a:r>
+              <a:t>输出：风险分数、等级（normal/alert/emergency）、原因列表</a:t>
             </a:r>
           </a:p>
           <a:p>
             <a:pPr>
               <a:spcAft>
-                <a:spcPts val="1000"/>
+                <a:spcPts val="600"/>
               </a:spcAft>
-              <a:defRPr sz="1800">
-                <a:solidFill>
-                  <a:srgbClr val="F0F4FC"/>
-                </a:solidFill>
-              </a:defRPr>
-            </a:pPr>
-            <a:r>
-              <a:t>一键剧本：日常监测 → 倾诉 → 跌倒 → 紧急</a:t>
+              <a:defRPr sz="1400">
+                <a:solidFill>
+                  <a:srgbClr val="1E1E1E"/>
+                </a:solidFill>
+              </a:defRPr>
+            </a:pPr>
+            <a:r>
+              <a:t>阈值：alert ≥ 0.65，emergency ≥ 0.85 或确认跌倒</a:t>
             </a:r>
           </a:p>
           <a:p>
             <a:pPr>
               <a:spcAft>
-                <a:spcPts val="1000"/>
+                <a:spcPts val="600"/>
               </a:spcAft>
-              <a:defRPr sz="1800">
-                <a:solidFill>
-                  <a:srgbClr val="F0F4FC"/>
-                </a:solidFill>
-              </a:defRPr>
-            </a:pPr>
-            <a:r>
-              <a:t>对话日志 + 机器人指令流可视化</a:t>
-            </a:r>
-          </a:p>
-          <a:p>
-            <a:pPr>
-              <a:spcAft>
-                <a:spcPts val="1000"/>
-              </a:spcAft>
-              <a:defRPr sz="1800">
-                <a:solidFill>
-                  <a:srgbClr val="F0F4FC"/>
-                </a:solidFill>
-              </a:defRPr>
-            </a:pPr>
-            <a:r>
-              <a:t>部署：bash scripts/run_web.sh · 端口 8765</a:t>
+              <a:defRPr sz="1400">
+                <a:solidFill>
+                  <a:srgbClr val="1E1E1E"/>
+                </a:solidFill>
+              </a:defRPr>
+            </a:pPr>
+            <a:r>
+              <a:t>优势：非黑盒 LLM，便于答辩解释与医疗合规沟通</a:t>
+            </a:r>
+          </a:p>
+        </p:txBody>
+      </p:sp>
+      <p:sp>
+        <p:nvSpPr>
+          <p:cNvPr id="6" name="TextBox 5"/>
+          <p:cNvSpPr txBox="1"/>
+          <p:nvPr/>
+        </p:nvSpPr>
+        <p:spPr>
+          <a:xfrm>
+            <a:off x="502920" y="3657600"/>
+            <a:ext cx="8138160" cy="3474720"/>
+          </a:xfrm>
+          <a:prstGeom prst="rect">
+            <a:avLst/>
+          </a:prstGeom>
+          <a:noFill/>
+        </p:spPr>
+        <p:txBody>
+          <a:bodyPr wrap="square">
+            <a:spAutoFit/>
+          </a:bodyPr>
+          <a:lstStyle/>
+          <a:p>
+            <a:pPr>
+              <a:lnSpc>
+                <a:spcPct val="135000"/>
+              </a:lnSpc>
+              <a:defRPr sz="1200" b="0">
+                <a:solidFill>
+                  <a:srgbClr val="1E1E1E"/>
+                </a:solidFill>
+              </a:defRPr>
+            </a:pPr>
+            <a:r>
+              <a:t>config/default.yaml 集中管理权重与阈值，支持场景调参。</a:t>
             </a:r>
           </a:p>
         </p:txBody>
@@ -5501,7 +8013,7 @@
     <p:bg>
       <p:bgPr>
         <a:solidFill>
-          <a:srgbClr val="0F172A"/>
+          <a:srgbClr val="FFFFFF"/>
         </a:solidFill>
         <a:effectLst/>
       </p:bgPr>
@@ -5515,14 +8027,57 @@
       <p:grpSpPr/>
       <p:sp>
         <p:nvSpPr>
-          <p:cNvPr id="2" name="TextBox 1"/>
+          <p:cNvPr id="2" name="Rectangle 1"/>
+          <p:cNvSpPr/>
+          <p:nvPr/>
+        </p:nvSpPr>
+        <p:spPr>
+          <a:xfrm>
+            <a:off x="0" y="0"/>
+            <a:ext cx="9144000" cy="502920"/>
+          </a:xfrm>
+          <a:prstGeom prst="rect">
+            <a:avLst/>
+          </a:prstGeom>
+          <a:solidFill>
+            <a:srgbClr val="143278"/>
+          </a:solidFill>
+          <a:ln>
+            <a:noFill/>
+          </a:ln>
+        </p:spPr>
+        <p:style>
+          <a:lnRef idx="1">
+            <a:schemeClr val="accent1"/>
+          </a:lnRef>
+          <a:fillRef idx="3">
+            <a:schemeClr val="accent1"/>
+          </a:fillRef>
+          <a:effectRef idx="2">
+            <a:schemeClr val="accent1"/>
+          </a:effectRef>
+          <a:fontRef idx="minor">
+            <a:schemeClr val="lt1"/>
+          </a:fontRef>
+        </p:style>
+        <p:txBody>
+          <a:bodyPr rtlCol="0" anchor="ctr"/>
+          <a:lstStyle/>
+          <a:p>
+            <a:pPr algn="ctr"/>
+          </a:p>
+        </p:txBody>
+      </p:sp>
+      <p:sp>
+        <p:nvSpPr>
+          <p:cNvPr id="3" name="TextBox 2"/>
           <p:cNvSpPr txBox="1"/>
           <p:nvPr/>
         </p:nvSpPr>
         <p:spPr>
           <a:xfrm>
-            <a:off x="548640" y="457200"/>
-            <a:ext cx="8229600" cy="1097280"/>
+            <a:off x="137160" y="73152"/>
+            <a:ext cx="8869680" cy="411480"/>
           </a:xfrm>
           <a:prstGeom prst="rect">
             <a:avLst/>
@@ -5535,29 +8090,41 @@
           </a:bodyPr>
           <a:lstStyle/>
           <a:p>
-            <a:pPr algn="l">
-              <a:defRPr sz="3000" b="1">
-                <a:solidFill>
-                  <a:srgbClr val="F0F4FC"/>
-                </a:solidFill>
-              </a:defRPr>
-            </a:pPr>
-            <a:r>
-              <a:t>8. 实验与评测</a:t>
-            </a:r>
-          </a:p>
-        </p:txBody>
-      </p:sp>
-      <p:sp>
-        <p:nvSpPr>
-          <p:cNvPr id="3" name="TextBox 2"/>
+            <a:pPr>
+              <a:defRPr sz="1100" b="1">
+                <a:solidFill>
+                  <a:srgbClr val="FFFFFF"/>
+                </a:solidFill>
+              </a:defRPr>
+            </a:pPr>
+            <a:r>
+              <a:t>第二十六届中国机器人及人工智能大赛</a:t>
+            </a:r>
+          </a:p>
+          <a:p>
+            <a:pPr>
+              <a:defRPr sz="1000">
+                <a:solidFill>
+                  <a:srgbClr val="C8DCFF"/>
+                </a:solidFill>
+              </a:defRPr>
+            </a:pPr>
+            <a:r>
+              <a:t>机器人创新赛道</a:t>
+            </a:r>
+          </a:p>
+        </p:txBody>
+      </p:sp>
+      <p:sp>
+        <p:nvSpPr>
+          <p:cNvPr id="4" name="TextBox 3"/>
           <p:cNvSpPr txBox="1"/>
           <p:nvPr/>
         </p:nvSpPr>
         <p:spPr>
           <a:xfrm>
-            <a:off x="548640" y="1234440"/>
-            <a:ext cx="8229600" cy="731520"/>
+            <a:off x="502920" y="685800"/>
+            <a:ext cx="8138160" cy="731520"/>
           </a:xfrm>
           <a:prstGeom prst="rect">
             <a:avLst/>
@@ -5570,29 +8137,29 @@
           </a:bodyPr>
           <a:lstStyle/>
           <a:p>
-            <a:pPr>
-              <a:defRPr sz="1600">
-                <a:solidFill>
-                  <a:srgbClr val="94A3B8"/>
-                </a:solidFill>
-              </a:defRPr>
-            </a:pPr>
-            <a:r>
-              <a:t>Evaluation</a:t>
-            </a:r>
-          </a:p>
-        </p:txBody>
-      </p:sp>
-      <p:sp>
-        <p:nvSpPr>
-          <p:cNvPr id="4" name="TextBox 3"/>
+            <a:pPr algn="l">
+              <a:defRPr sz="2600" b="1">
+                <a:solidFill>
+                  <a:srgbClr val="1E1E1E"/>
+                </a:solidFill>
+              </a:defRPr>
+            </a:pPr>
+            <a:r>
+              <a:t>跌倒检测算法</a:t>
+            </a:r>
+          </a:p>
+        </p:txBody>
+      </p:sp>
+      <p:sp>
+        <p:nvSpPr>
+          <p:cNvPr id="5" name="TextBox 4"/>
           <p:cNvSpPr txBox="1"/>
           <p:nvPr/>
         </p:nvSpPr>
         <p:spPr>
           <a:xfrm>
-            <a:off x="731520" y="1645920"/>
-            <a:ext cx="7772400" cy="4114800"/>
+            <a:off x="502920" y="1325880"/>
+            <a:ext cx="8138160" cy="3840480"/>
           </a:xfrm>
           <a:prstGeom prst="rect">
             <a:avLst/>
@@ -5607,76 +8174,76 @@
           <a:p>
             <a:pPr>
               <a:spcAft>
-                <a:spcPts val="1000"/>
+                <a:spcPts val="600"/>
               </a:spcAft>
-              <a:defRPr sz="1800">
-                <a:solidFill>
-                  <a:srgbClr val="F0F4FC"/>
-                </a:solidFill>
-              </a:defRPr>
-            </a:pPr>
-            <a:r>
-              <a:t>跌倒检测：6 类合成场景，F1=100%（见 docs/evaluation/METRICS.md）</a:t>
+              <a:defRPr sz="1400">
+                <a:solidFill>
+                  <a:srgbClr val="1E1E1E"/>
+                </a:solidFill>
+              </a:defRPr>
+            </a:pPr>
+            <a:r>
+              <a:t>几何特征：骨架宽高比 R=w/h、垂直速度 v_y、静止持续时间</a:t>
             </a:r>
           </a:p>
           <a:p>
             <a:pPr>
               <a:spcAft>
-                <a:spcPts val="1000"/>
+                <a:spcPts val="600"/>
               </a:spcAft>
-              <a:defRPr sz="1800">
-                <a:solidFill>
-                  <a:srgbClr val="F0F4FC"/>
-                </a:solidFill>
-              </a:defRPr>
-            </a:pPr>
-            <a:r>
-              <a:t>端到端：run_headless_demo 100% 触发紧急呼叫</a:t>
+              <a:defRPr sz="1400">
+                <a:solidFill>
+                  <a:srgbClr val="1E1E1E"/>
+                </a:solidFill>
+              </a:defRPr>
+            </a:pPr>
+            <a:r>
+              <a:t>快速跌倒：快速下落 + 躺倒姿态（score ≥ 0.7）</a:t>
             </a:r>
           </a:p>
           <a:p>
             <a:pPr>
               <a:spcAft>
-                <a:spcPts val="1000"/>
+                <a:spcPts val="600"/>
               </a:spcAft>
-              <a:defRPr sz="1800">
-                <a:solidFill>
-                  <a:srgbClr val="F0F4FC"/>
-                </a:solidFill>
-              </a:defRPr>
-            </a:pPr>
-            <a:r>
-              <a:t>单元测试：pytest 覆盖决策与紧急链路</a:t>
+              <a:defRPr sz="1400">
+                <a:solidFill>
+                  <a:srgbClr val="1E1E1E"/>
+                </a:solidFill>
+              </a:defRPr>
+            </a:pPr>
+            <a:r>
+              <a:t>慢速跌倒：躺倒静止 ≥ 2s（养老场景常见，score ≥ 0.55）</a:t>
             </a:r>
           </a:p>
           <a:p>
             <a:pPr>
               <a:spcAft>
-                <a:spcPts val="1000"/>
+                <a:spcPts val="600"/>
               </a:spcAft>
-              <a:defRPr sz="1800">
-                <a:solidFill>
-                  <a:srgbClr val="F0F4FC"/>
-                </a:solidFill>
-              </a:defRPr>
-            </a:pPr>
-            <a:r>
-              <a:t>单 tick 延迟 &lt;50ms（无云端 LLM）</a:t>
+              <a:defRPr sz="1400">
+                <a:solidFill>
+                  <a:srgbClr val="1E1E1E"/>
+                </a:solidFill>
+              </a:defRPr>
+            </a:pPr>
+            <a:r>
+              <a:t>MediaPipe Pose：浏览器/摄像头实时骨架 → 自动填充感知参数</a:t>
             </a:r>
           </a:p>
           <a:p>
             <a:pPr>
               <a:spcAft>
-                <a:spcPts val="1000"/>
+                <a:spcPts val="600"/>
               </a:spcAft>
-              <a:defRPr sz="1800">
-                <a:solidFill>
-                  <a:srgbClr val="F0F4FC"/>
-                </a:solidFill>
-              </a:defRPr>
-            </a:pPr>
-            <a:r>
-              <a:t>待补充：公开数据集 + 真机视频</a:t>
+              <a:defRPr sz="1400">
+                <a:solidFill>
+                  <a:srgbClr val="1E1E1E"/>
+                </a:solidFill>
+              </a:defRPr>
+            </a:pPr>
+            <a:r>
+              <a:t>评测：6 类合成场景，Precision/Recall/F1 = 100%</a:t>
             </a:r>
           </a:p>
         </p:txBody>

--- a/docs/答辩_CareCompanion.pptx
+++ b/docs/答辩_CareCompanion.pptx
@@ -25,6 +25,12 @@
     <p:sldId id="273" r:id="rId24"/>
     <p:sldId id="274" r:id="rId25"/>
     <p:sldId id="275" r:id="rId26"/>
+    <p:sldId id="276" r:id="rId27"/>
+    <p:sldId id="277" r:id="rId28"/>
+    <p:sldId id="278" r:id="rId29"/>
+    <p:sldId id="279" r:id="rId30"/>
+    <p:sldId id="280" r:id="rId31"/>
+    <p:sldId id="281" r:id="rId32"/>
   </p:sldIdLst>
   <p:sldSz cx="9144000" cy="5143500" type="screen4x3"/>
   <p:notesSz cx="6858000" cy="9144000"/>
@@ -3547,7 +3553,7 @@
         </p:nvSpPr>
         <p:spPr>
           <a:xfrm>
-            <a:off x="502920" y="1325880"/>
+            <a:off x="502920" y="1234440"/>
             <a:ext cx="8138160" cy="3840480"/>
           </a:xfrm>
           <a:prstGeom prst="rect">
@@ -3565,7 +3571,7 @@
               <a:spcAft>
                 <a:spcPts val="600"/>
               </a:spcAft>
-              <a:defRPr sz="1400">
+              <a:defRPr sz="1300">
                 <a:solidFill>
                   <a:srgbClr val="1E1E1E"/>
                 </a:solidFill>
@@ -3580,14 +3586,14 @@
               <a:spcAft>
                 <a:spcPts val="600"/>
               </a:spcAft>
-              <a:defRPr sz="1400">
+              <a:defRPr sz="1300">
                 <a:solidFill>
                   <a:srgbClr val="1E1E1E"/>
                 </a:solidFill>
               </a:defRPr>
             </a:pPr>
             <a:r>
-              <a:t>示例：「最近有点孤独」→ 温暖安抚 + speak + gesture</a:t>
+              <a:t>紧急链路：alert_sound → speak → call_emergency → raise_hand</a:t>
             </a:r>
           </a:p>
           <a:p>
@@ -3595,29 +3601,14 @@
               <a:spcAft>
                 <a:spcPts val="600"/>
               </a:spcAft>
-              <a:defRPr sz="1400">
+              <a:defRPr sz="1300">
                 <a:solidFill>
                   <a:srgbClr val="1E1E1E"/>
                 </a:solidFill>
               </a:defRPr>
             </a:pPr>
             <a:r>
-              <a:t>紧急：alert_sound → speak → call_emergency → raise_hand</a:t>
-            </a:r>
-          </a:p>
-          <a:p>
-            <a:pPr>
-              <a:spcAft>
-                <a:spcPts val="600"/>
-              </a:spcAft>
-              <a:defRPr sz="1400">
-                <a:solidFill>
-                  <a:srgbClr val="1E1E1E"/>
-                </a:solidFill>
-              </a:defRPr>
-            </a:pPr>
-            <a:r>
-              <a:t>EmergencyNotifier：家属 App 推送 / 短信备份 / 本地告警（日志可审计）</a:t>
+              <a:t>EmergencyNotifier：家属 App / 短信 / 本地告警（可审计日志）</a:t>
             </a:r>
           </a:p>
         </p:txBody>
@@ -3768,21 +3759,45 @@
               </a:defRPr>
             </a:pPr>
             <a:r>
-              <a:t>数据处理与决策流程</a:t>
-            </a:r>
-          </a:p>
-        </p:txBody>
-      </p:sp>
-      <p:sp>
-        <p:nvSpPr>
-          <p:cNvPr id="5" name="TextBox 4"/>
+              <a:t>（界面）情感倾诉交互</a:t>
+            </a:r>
+          </a:p>
+        </p:txBody>
+      </p:sp>
+      <p:pic>
+        <p:nvPicPr>
+          <p:cNvPr id="5" name="Picture 4" descr="ppt_emotion_input.png"/>
+          <p:cNvPicPr>
+            <a:picLocks noChangeAspect="1"/>
+          </p:cNvPicPr>
+          <p:nvPr/>
+        </p:nvPicPr>
+        <p:blipFill>
+          <a:blip r:embed="rId2"/>
+          <a:stretch>
+            <a:fillRect/>
+          </a:stretch>
+        </p:blipFill>
+        <p:spPr>
+          <a:xfrm>
+            <a:off x="292608" y="1024128"/>
+            <a:ext cx="8549640" cy="7272204"/>
+          </a:xfrm>
+          <a:prstGeom prst="rect">
+            <a:avLst/>
+          </a:prstGeom>
+        </p:spPr>
+      </p:pic>
+      <p:sp>
+        <p:nvSpPr>
+          <p:cNvPr id="6" name="TextBox 5"/>
           <p:cNvSpPr txBox="1"/>
           <p:nvPr/>
         </p:nvSpPr>
         <p:spPr>
           <a:xfrm>
-            <a:off x="502920" y="1325880"/>
-            <a:ext cx="8138160" cy="3840480"/>
+            <a:off x="292608" y="4617720"/>
+            <a:ext cx="8549640" cy="411480"/>
           </a:xfrm>
           <a:prstGeom prst="rect">
             <a:avLst/>
@@ -3790,83 +3805,20 @@
           <a:noFill/>
         </p:spPr>
         <p:txBody>
-          <a:bodyPr wrap="square">
+          <a:bodyPr wrap="none">
             <a:spAutoFit/>
           </a:bodyPr>
           <a:lstStyle/>
           <a:p>
-            <a:pPr>
-              <a:spcAft>
-                <a:spcPts val="600"/>
-              </a:spcAft>
-              <a:defRPr sz="1400">
-                <a:solidFill>
-                  <a:srgbClr val="1E1E1E"/>
-                </a:solidFill>
-              </a:defRPr>
-            </a:pPr>
-            <a:r>
-              <a:t>1. 采集感知帧：摄像头骨架 / 滑块仿真 / 可穿戴 JSON</a:t>
-            </a:r>
-          </a:p>
-          <a:p>
-            <a:pPr>
-              <a:spcAft>
-                <a:spcPts val="600"/>
-              </a:spcAft>
-              <a:defRPr sz="1400">
-                <a:solidFill>
-                  <a:srgbClr val="1E1E1E"/>
-                </a:solidFill>
-              </a:defRPr>
-            </a:pPr>
-            <a:r>
-              <a:t>2. FallDetector 更新跌倒分数，Emotion/Health 更新标签</a:t>
-            </a:r>
-          </a:p>
-          <a:p>
-            <a:pPr>
-              <a:spcAft>
-                <a:spcPts val="600"/>
-              </a:spcAft>
-              <a:defRPr sz="1400">
-                <a:solidFill>
-                  <a:srgbClr val="1E1E1E"/>
-                </a:solidFill>
-              </a:defRPr>
-            </a:pPr>
-            <a:r>
-              <a:t>3. RiskEngine 评估等级，状态机切换</a:t>
-            </a:r>
-          </a:p>
-          <a:p>
-            <a:pPr>
-              <a:spcAft>
-                <a:spcPts val="600"/>
-              </a:spcAft>
-              <a:defRPr sz="1400">
-                <a:solidFill>
-                  <a:srgbClr val="1E1E1E"/>
-                </a:solidFill>
-              </a:defRPr>
-            </a:pPr>
-            <a:r>
-              <a:t>4. DialogueManager 生成回复，CarePlanner 输出 RobotAction 序列</a:t>
-            </a:r>
-          </a:p>
-          <a:p>
-            <a:pPr>
-              <a:spcAft>
-                <a:spcPts val="600"/>
-              </a:spcAft>
-              <a:defRPr sz="1400">
-                <a:solidFill>
-                  <a:srgbClr val="1E1E1E"/>
-                </a:solidFill>
-              </a:defRPr>
-            </a:pPr>
-            <a:r>
-              <a:t>5. RobotAdapter 下发至仿真日志或 ROS2 /care/robot_cmd</a:t>
+            <a:pPr algn="ctr">
+              <a:defRPr sz="1100">
+                <a:solidFill>
+                  <a:srgbClr val="505050"/>
+                </a:solidFill>
+              </a:defRPr>
+            </a:pPr>
+            <a:r>
+              <a:t>老人输入「最近有点孤独，睡不太好」→ 系统识别情绪低落并生成安抚话术</a:t>
             </a:r>
           </a:p>
         </p:txBody>
@@ -3995,7 +3947,7 @@
         </p:nvSpPr>
         <p:spPr>
           <a:xfrm>
-            <a:off x="502920" y="1828800"/>
+            <a:off x="502920" y="685800"/>
             <a:ext cx="8138160" cy="731520"/>
           </a:xfrm>
           <a:prstGeom prst="rect">
@@ -4009,15 +3961,15 @@
           </a:bodyPr>
           <a:lstStyle/>
           <a:p>
-            <a:pPr algn="ctr">
-              <a:defRPr sz="3200" b="1">
+            <a:pPr algn="l">
+              <a:defRPr sz="2600" b="1">
                 <a:solidFill>
                   <a:srgbClr val="1E1E1E"/>
                 </a:solidFill>
               </a:defRPr>
             </a:pPr>
             <a:r>
-              <a:t>第三部分</a:t>
+              <a:t>数据处理与决策流程</a:t>
             </a:r>
           </a:p>
         </p:txBody>
@@ -4030,8 +3982,8 @@
         </p:nvSpPr>
         <p:spPr>
           <a:xfrm>
-            <a:off x="502920" y="2606040"/>
-            <a:ext cx="8138160" cy="731520"/>
+            <a:off x="502920" y="1325880"/>
+            <a:ext cx="8138160" cy="3840480"/>
           </a:xfrm>
           <a:prstGeom prst="rect">
             <a:avLst/>
@@ -4039,20 +3991,83 @@
           <a:noFill/>
         </p:spPr>
         <p:txBody>
-          <a:bodyPr wrap="none">
+          <a:bodyPr wrap="square">
             <a:spAutoFit/>
           </a:bodyPr>
           <a:lstStyle/>
           <a:p>
-            <a:pPr algn="ctr">
-              <a:defRPr sz="2200" b="1">
-                <a:solidFill>
-                  <a:srgbClr val="143278"/>
-                </a:solidFill>
-              </a:defRPr>
-            </a:pPr>
-            <a:r>
-              <a:t>系统实现 · 评测 · 演示</a:t>
+            <a:pPr>
+              <a:spcAft>
+                <a:spcPts val="600"/>
+              </a:spcAft>
+              <a:defRPr sz="1400">
+                <a:solidFill>
+                  <a:srgbClr val="1E1E1E"/>
+                </a:solidFill>
+              </a:defRPr>
+            </a:pPr>
+            <a:r>
+              <a:t>1. 采集感知帧：摄像头骨架 / 滑块仿真 / 可穿戴 JSON</a:t>
+            </a:r>
+          </a:p>
+          <a:p>
+            <a:pPr>
+              <a:spcAft>
+                <a:spcPts val="600"/>
+              </a:spcAft>
+              <a:defRPr sz="1400">
+                <a:solidFill>
+                  <a:srgbClr val="1E1E1E"/>
+                </a:solidFill>
+              </a:defRPr>
+            </a:pPr>
+            <a:r>
+              <a:t>2. FallDetector 更新跌倒分数，Emotion/Health 更新标签</a:t>
+            </a:r>
+          </a:p>
+          <a:p>
+            <a:pPr>
+              <a:spcAft>
+                <a:spcPts val="600"/>
+              </a:spcAft>
+              <a:defRPr sz="1400">
+                <a:solidFill>
+                  <a:srgbClr val="1E1E1E"/>
+                </a:solidFill>
+              </a:defRPr>
+            </a:pPr>
+            <a:r>
+              <a:t>3. RiskEngine 评估等级，状态机切换</a:t>
+            </a:r>
+          </a:p>
+          <a:p>
+            <a:pPr>
+              <a:spcAft>
+                <a:spcPts val="600"/>
+              </a:spcAft>
+              <a:defRPr sz="1400">
+                <a:solidFill>
+                  <a:srgbClr val="1E1E1E"/>
+                </a:solidFill>
+              </a:defRPr>
+            </a:pPr>
+            <a:r>
+              <a:t>4. DialogueManager 生成回复，CarePlanner 输出 RobotAction 序列</a:t>
+            </a:r>
+          </a:p>
+          <a:p>
+            <a:pPr>
+              <a:spcAft>
+                <a:spcPts val="600"/>
+              </a:spcAft>
+              <a:defRPr sz="1400">
+                <a:solidFill>
+                  <a:srgbClr val="1E1E1E"/>
+                </a:solidFill>
+              </a:defRPr>
+            </a:pPr>
+            <a:r>
+              <a:t>5. RobotAdapter 下发至仿真日志或 ROS2 /care/robot_cmd</a:t>
             </a:r>
           </a:p>
         </p:txBody>
@@ -4181,7 +4196,7 @@
         </p:nvSpPr>
         <p:spPr>
           <a:xfrm>
-            <a:off x="502920" y="685800"/>
+            <a:off x="502920" y="1828800"/>
             <a:ext cx="8138160" cy="731520"/>
           </a:xfrm>
           <a:prstGeom prst="rect">
@@ -4195,15 +4210,15 @@
           </a:bodyPr>
           <a:lstStyle/>
           <a:p>
-            <a:pPr algn="l">
-              <a:defRPr sz="2600" b="1">
+            <a:pPr algn="ctr">
+              <a:defRPr sz="3200" b="1">
                 <a:solidFill>
                   <a:srgbClr val="1E1E1E"/>
                 </a:solidFill>
               </a:defRPr>
             </a:pPr>
             <a:r>
-              <a:t>Web 控制台与视觉演示</a:t>
+              <a:t>第三部分</a:t>
             </a:r>
           </a:p>
         </p:txBody>
@@ -4216,8 +4231,8 @@
         </p:nvSpPr>
         <p:spPr>
           <a:xfrm>
-            <a:off x="502920" y="1325880"/>
-            <a:ext cx="8138160" cy="3840480"/>
+            <a:off x="502920" y="2606040"/>
+            <a:ext cx="8138160" cy="731520"/>
           </a:xfrm>
           <a:prstGeom prst="rect">
             <a:avLst/>
@@ -4225,83 +4240,20 @@
           <a:noFill/>
         </p:spPr>
         <p:txBody>
-          <a:bodyPr wrap="square">
+          <a:bodyPr wrap="none">
             <a:spAutoFit/>
           </a:bodyPr>
           <a:lstStyle/>
           <a:p>
-            <a:pPr>
-              <a:spcAft>
-                <a:spcPts val="600"/>
-              </a:spcAft>
-              <a:defRPr sz="1400">
-                <a:solidFill>
-                  <a:srgbClr val="1E1E1E"/>
-                </a:solidFill>
-              </a:defRPr>
-            </a:pPr>
-            <a:r>
-              <a:t>FastAPI + 现代化 Web 前端，浏览器即可答辩演示</a:t>
-            </a:r>
-          </a:p>
-          <a:p>
-            <a:pPr>
-              <a:spcAft>
-                <a:spcPts val="600"/>
-              </a:spcAft>
-              <a:defRPr sz="1400">
-                <a:solidFill>
-                  <a:srgbClr val="1E1E1E"/>
-                </a:solidFill>
-              </a:defRPr>
-            </a:pPr>
-            <a:r>
-              <a:t>功能：感知调节 · 实时风险仪表盘 · 对话日志 · 机器人指令流</a:t>
-            </a:r>
-          </a:p>
-          <a:p>
-            <a:pPr>
-              <a:spcAft>
-                <a:spcPts val="600"/>
-              </a:spcAft>
-              <a:defRPr sz="1400">
-                <a:solidFill>
-                  <a:srgbClr val="1E1E1E"/>
-                </a:solidFill>
-              </a:defRPr>
-            </a:pPr>
-            <a:r>
-              <a:t>摄像头：打开 → 分析当前帧 → MediaPipe 骨架叠加</a:t>
-            </a:r>
-          </a:p>
-          <a:p>
-            <a:pPr>
-              <a:spcAft>
-                <a:spcPts val="600"/>
-              </a:spcAft>
-              <a:defRPr sz="1400">
-                <a:solidFill>
-                  <a:srgbClr val="1E1E1E"/>
-                </a:solidFill>
-              </a:defRPr>
-            </a:pPr>
-            <a:r>
-              <a:t>一键剧本：日常监测 → 老人倾诉 → 跌倒 → 紧急呼叫</a:t>
-            </a:r>
-          </a:p>
-          <a:p>
-            <a:pPr>
-              <a:spcAft>
-                <a:spcPts val="600"/>
-              </a:spcAft>
-              <a:defRPr sz="1400">
-                <a:solidFill>
-                  <a:srgbClr val="1E1E1E"/>
-                </a:solidFill>
-              </a:defRPr>
-            </a:pPr>
-            <a:r>
-              <a:t>启动：bash scripts/run_web.sh  →  http://localhost:8765</a:t>
+            <a:pPr algn="ctr">
+              <a:defRPr sz="2200" b="1">
+                <a:solidFill>
+                  <a:srgbClr val="143278"/>
+                </a:solidFill>
+              </a:defRPr>
+            </a:pPr>
+            <a:r>
+              <a:t>系统实现 · 评测 · 演示</a:t>
             </a:r>
           </a:p>
         </p:txBody>
@@ -4315,6 +4267,1461 @@
 </file>
 
 <file path=ppt/slides/slide14.xml><?xml version="1.0" encoding="utf-8"?>
+<p:sld xmlns:a="http://schemas.openxmlformats.org/drawingml/2006/main" xmlns:p="http://schemas.openxmlformats.org/presentationml/2006/main" xmlns:r="http://schemas.openxmlformats.org/officeDocument/2006/relationships">
+  <p:cSld>
+    <p:bg>
+      <p:bgPr>
+        <a:solidFill>
+          <a:srgbClr val="FFFFFF"/>
+        </a:solidFill>
+        <a:effectLst/>
+      </p:bgPr>
+    </p:bg>
+    <p:spTree>
+      <p:nvGrpSpPr>
+        <p:cNvPr id="1" name=""/>
+        <p:cNvGrpSpPr/>
+        <p:nvPr/>
+      </p:nvGrpSpPr>
+      <p:grpSpPr/>
+      <p:sp>
+        <p:nvSpPr>
+          <p:cNvPr id="2" name="Rectangle 1"/>
+          <p:cNvSpPr/>
+          <p:nvPr/>
+        </p:nvSpPr>
+        <p:spPr>
+          <a:xfrm>
+            <a:off x="0" y="0"/>
+            <a:ext cx="9144000" cy="502920"/>
+          </a:xfrm>
+          <a:prstGeom prst="rect">
+            <a:avLst/>
+          </a:prstGeom>
+          <a:solidFill>
+            <a:srgbClr val="143278"/>
+          </a:solidFill>
+          <a:ln>
+            <a:noFill/>
+          </a:ln>
+        </p:spPr>
+        <p:style>
+          <a:lnRef idx="1">
+            <a:schemeClr val="accent1"/>
+          </a:lnRef>
+          <a:fillRef idx="3">
+            <a:schemeClr val="accent1"/>
+          </a:fillRef>
+          <a:effectRef idx="2">
+            <a:schemeClr val="accent1"/>
+          </a:effectRef>
+          <a:fontRef idx="minor">
+            <a:schemeClr val="lt1"/>
+          </a:fontRef>
+        </p:style>
+        <p:txBody>
+          <a:bodyPr rtlCol="0" anchor="ctr"/>
+          <a:lstStyle/>
+          <a:p>
+            <a:pPr algn="ctr"/>
+          </a:p>
+        </p:txBody>
+      </p:sp>
+      <p:sp>
+        <p:nvSpPr>
+          <p:cNvPr id="3" name="TextBox 2"/>
+          <p:cNvSpPr txBox="1"/>
+          <p:nvPr/>
+        </p:nvSpPr>
+        <p:spPr>
+          <a:xfrm>
+            <a:off x="137160" y="73152"/>
+            <a:ext cx="8869680" cy="411480"/>
+          </a:xfrm>
+          <a:prstGeom prst="rect">
+            <a:avLst/>
+          </a:prstGeom>
+          <a:noFill/>
+        </p:spPr>
+        <p:txBody>
+          <a:bodyPr wrap="none">
+            <a:spAutoFit/>
+          </a:bodyPr>
+          <a:lstStyle/>
+          <a:p>
+            <a:pPr>
+              <a:defRPr sz="1100" b="1">
+                <a:solidFill>
+                  <a:srgbClr val="FFFFFF"/>
+                </a:solidFill>
+              </a:defRPr>
+            </a:pPr>
+            <a:r>
+              <a:t>第二十六届中国机器人及人工智能大赛</a:t>
+            </a:r>
+          </a:p>
+          <a:p>
+            <a:pPr>
+              <a:defRPr sz="1000">
+                <a:solidFill>
+                  <a:srgbClr val="C8DCFF"/>
+                </a:solidFill>
+              </a:defRPr>
+            </a:pPr>
+            <a:r>
+              <a:t>机器人创新赛道</a:t>
+            </a:r>
+          </a:p>
+        </p:txBody>
+      </p:sp>
+      <p:sp>
+        <p:nvSpPr>
+          <p:cNvPr id="4" name="TextBox 3"/>
+          <p:cNvSpPr txBox="1"/>
+          <p:nvPr/>
+        </p:nvSpPr>
+        <p:spPr>
+          <a:xfrm>
+            <a:off x="502920" y="685800"/>
+            <a:ext cx="8138160" cy="731520"/>
+          </a:xfrm>
+          <a:prstGeom prst="rect">
+            <a:avLst/>
+          </a:prstGeom>
+          <a:noFill/>
+        </p:spPr>
+        <p:txBody>
+          <a:bodyPr wrap="none">
+            <a:spAutoFit/>
+          </a:bodyPr>
+          <a:lstStyle/>
+          <a:p>
+            <a:pPr algn="l">
+              <a:defRPr sz="2600" b="1">
+                <a:solidFill>
+                  <a:srgbClr val="1E1E1E"/>
+                </a:solidFill>
+              </a:defRPr>
+            </a:pPr>
+            <a:r>
+              <a:t>Web 控制台（CareCompanion）</a:t>
+            </a:r>
+          </a:p>
+        </p:txBody>
+      </p:sp>
+      <p:sp>
+        <p:nvSpPr>
+          <p:cNvPr id="5" name="TextBox 4"/>
+          <p:cNvSpPr txBox="1"/>
+          <p:nvPr/>
+        </p:nvSpPr>
+        <p:spPr>
+          <a:xfrm>
+            <a:off x="502920" y="1234440"/>
+            <a:ext cx="8138160" cy="3840480"/>
+          </a:xfrm>
+          <a:prstGeom prst="rect">
+            <a:avLst/>
+          </a:prstGeom>
+          <a:noFill/>
+        </p:spPr>
+        <p:txBody>
+          <a:bodyPr wrap="square">
+            <a:spAutoFit/>
+          </a:bodyPr>
+          <a:lstStyle/>
+          <a:p>
+            <a:pPr>
+              <a:spcAft>
+                <a:spcPts val="600"/>
+              </a:spcAft>
+              <a:defRPr sz="1300">
+                <a:solidFill>
+                  <a:srgbClr val="1E1E1E"/>
+                </a:solidFill>
+              </a:defRPr>
+            </a:pPr>
+            <a:r>
+              <a:t>访问地址：http://localhost:8765（bash scripts/run_web.sh）</a:t>
+            </a:r>
+          </a:p>
+          <a:p>
+            <a:pPr>
+              <a:spcAft>
+                <a:spcPts val="600"/>
+              </a:spcAft>
+              <a:defRPr sz="1300">
+                <a:solidFill>
+                  <a:srgbClr val="1E1E1E"/>
+                </a:solidFill>
+              </a:defRPr>
+            </a:pPr>
+            <a:r>
+              <a:t>技术栈：FastAPI + 浏览器前端，支持答辩现场演示</a:t>
+            </a:r>
+          </a:p>
+          <a:p>
+            <a:pPr>
+              <a:spcAft>
+                <a:spcPts val="600"/>
+              </a:spcAft>
+              <a:defRPr sz="1300">
+                <a:solidFill>
+                  <a:srgbClr val="1E1E1E"/>
+                </a:solidFill>
+              </a:defRPr>
+            </a:pPr>
+            <a:r>
+              <a:t>以下截图为实际运行界面（2026-05-27 答辩预演录制）</a:t>
+            </a:r>
+          </a:p>
+        </p:txBody>
+      </p:sp>
+    </p:spTree>
+  </p:cSld>
+  <p:clrMapOvr>
+    <a:masterClrMapping/>
+  </p:clrMapOvr>
+</p:sld>
+</file>
+
+<file path=ppt/slides/slide15.xml><?xml version="1.0" encoding="utf-8"?>
+<p:sld xmlns:a="http://schemas.openxmlformats.org/drawingml/2006/main" xmlns:p="http://schemas.openxmlformats.org/presentationml/2006/main" xmlns:r="http://schemas.openxmlformats.org/officeDocument/2006/relationships">
+  <p:cSld>
+    <p:bg>
+      <p:bgPr>
+        <a:solidFill>
+          <a:srgbClr val="FFFFFF"/>
+        </a:solidFill>
+        <a:effectLst/>
+      </p:bgPr>
+    </p:bg>
+    <p:spTree>
+      <p:nvGrpSpPr>
+        <p:cNvPr id="1" name=""/>
+        <p:cNvGrpSpPr/>
+        <p:nvPr/>
+      </p:nvGrpSpPr>
+      <p:grpSpPr/>
+      <p:sp>
+        <p:nvSpPr>
+          <p:cNvPr id="2" name="Rectangle 1"/>
+          <p:cNvSpPr/>
+          <p:nvPr/>
+        </p:nvSpPr>
+        <p:spPr>
+          <a:xfrm>
+            <a:off x="0" y="0"/>
+            <a:ext cx="9144000" cy="502920"/>
+          </a:xfrm>
+          <a:prstGeom prst="rect">
+            <a:avLst/>
+          </a:prstGeom>
+          <a:solidFill>
+            <a:srgbClr val="143278"/>
+          </a:solidFill>
+          <a:ln>
+            <a:noFill/>
+          </a:ln>
+        </p:spPr>
+        <p:style>
+          <a:lnRef idx="1">
+            <a:schemeClr val="accent1"/>
+          </a:lnRef>
+          <a:fillRef idx="3">
+            <a:schemeClr val="accent1"/>
+          </a:fillRef>
+          <a:effectRef idx="2">
+            <a:schemeClr val="accent1"/>
+          </a:effectRef>
+          <a:fontRef idx="minor">
+            <a:schemeClr val="lt1"/>
+          </a:fontRef>
+        </p:style>
+        <p:txBody>
+          <a:bodyPr rtlCol="0" anchor="ctr"/>
+          <a:lstStyle/>
+          <a:p>
+            <a:pPr algn="ctr"/>
+          </a:p>
+        </p:txBody>
+      </p:sp>
+      <p:sp>
+        <p:nvSpPr>
+          <p:cNvPr id="3" name="TextBox 2"/>
+          <p:cNvSpPr txBox="1"/>
+          <p:nvPr/>
+        </p:nvSpPr>
+        <p:spPr>
+          <a:xfrm>
+            <a:off x="137160" y="73152"/>
+            <a:ext cx="8869680" cy="411480"/>
+          </a:xfrm>
+          <a:prstGeom prst="rect">
+            <a:avLst/>
+          </a:prstGeom>
+          <a:noFill/>
+        </p:spPr>
+        <p:txBody>
+          <a:bodyPr wrap="none">
+            <a:spAutoFit/>
+          </a:bodyPr>
+          <a:lstStyle/>
+          <a:p>
+            <a:pPr>
+              <a:defRPr sz="1100" b="1">
+                <a:solidFill>
+                  <a:srgbClr val="FFFFFF"/>
+                </a:solidFill>
+              </a:defRPr>
+            </a:pPr>
+            <a:r>
+              <a:t>第二十六届中国机器人及人工智能大赛</a:t>
+            </a:r>
+          </a:p>
+          <a:p>
+            <a:pPr>
+              <a:defRPr sz="1000">
+                <a:solidFill>
+                  <a:srgbClr val="C8DCFF"/>
+                </a:solidFill>
+              </a:defRPr>
+            </a:pPr>
+            <a:r>
+              <a:t>机器人创新赛道</a:t>
+            </a:r>
+          </a:p>
+        </p:txBody>
+      </p:sp>
+      <p:sp>
+        <p:nvSpPr>
+          <p:cNvPr id="4" name="TextBox 3"/>
+          <p:cNvSpPr txBox="1"/>
+          <p:nvPr/>
+        </p:nvSpPr>
+        <p:spPr>
+          <a:xfrm>
+            <a:off x="502920" y="685800"/>
+            <a:ext cx="8138160" cy="731520"/>
+          </a:xfrm>
+          <a:prstGeom prst="rect">
+            <a:avLst/>
+          </a:prstGeom>
+          <a:noFill/>
+        </p:spPr>
+        <p:txBody>
+          <a:bodyPr wrap="none">
+            <a:spAutoFit/>
+          </a:bodyPr>
+          <a:lstStyle/>
+          <a:p>
+            <a:pPr algn="l">
+              <a:defRPr sz="2600" b="1">
+                <a:solidFill>
+                  <a:srgbClr val="1E1E1E"/>
+                </a:solidFill>
+              </a:defRPr>
+            </a:pPr>
+            <a:r>
+              <a:t>系统界面：老人倾诉场景（演示剧本）</a:t>
+            </a:r>
+          </a:p>
+        </p:txBody>
+      </p:sp>
+      <p:pic>
+        <p:nvPicPr>
+          <p:cNvPr id="5" name="Picture 4" descr="ppt_full_dashboard.png"/>
+          <p:cNvPicPr>
+            <a:picLocks noChangeAspect="1"/>
+          </p:cNvPicPr>
+          <p:nvPr/>
+        </p:nvPicPr>
+        <p:blipFill>
+          <a:blip r:embed="rId2"/>
+          <a:stretch>
+            <a:fillRect/>
+          </a:stretch>
+        </p:blipFill>
+        <p:spPr>
+          <a:xfrm>
+            <a:off x="292608" y="1024128"/>
+            <a:ext cx="8549640" cy="4458504"/>
+          </a:xfrm>
+          <a:prstGeom prst="rect">
+            <a:avLst/>
+          </a:prstGeom>
+        </p:spPr>
+      </p:pic>
+      <p:sp>
+        <p:nvSpPr>
+          <p:cNvPr id="6" name="TextBox 5"/>
+          <p:cNvSpPr txBox="1"/>
+          <p:nvPr/>
+        </p:nvSpPr>
+        <p:spPr>
+          <a:xfrm>
+            <a:off x="292608" y="4617720"/>
+            <a:ext cx="8549640" cy="411480"/>
+          </a:xfrm>
+          <a:prstGeom prst="rect">
+            <a:avLst/>
+          </a:prstGeom>
+          <a:noFill/>
+        </p:spPr>
+        <p:txBody>
+          <a:bodyPr wrap="none">
+            <a:spAutoFit/>
+          </a:bodyPr>
+          <a:lstStyle/>
+          <a:p>
+            <a:pPr algn="ctr">
+              <a:defRPr sz="1100">
+                <a:solidFill>
+                  <a:srgbClr val="505050"/>
+                </a:solidFill>
+              </a:defRPr>
+            </a:pPr>
+            <a:r>
+              <a:t>演示场景「老人倾诉」· 风险 0.23 · 机器人主动安抚回复</a:t>
+            </a:r>
+          </a:p>
+        </p:txBody>
+      </p:sp>
+    </p:spTree>
+  </p:cSld>
+  <p:clrMapOvr>
+    <a:masterClrMapping/>
+  </p:clrMapOvr>
+</p:sld>
+</file>
+
+<file path=ppt/slides/slide16.xml><?xml version="1.0" encoding="utf-8"?>
+<p:sld xmlns:a="http://schemas.openxmlformats.org/drawingml/2006/main" xmlns:p="http://schemas.openxmlformats.org/presentationml/2006/main" xmlns:r="http://schemas.openxmlformats.org/officeDocument/2006/relationships">
+  <p:cSld>
+    <p:bg>
+      <p:bgPr>
+        <a:solidFill>
+          <a:srgbClr val="FFFFFF"/>
+        </a:solidFill>
+        <a:effectLst/>
+      </p:bgPr>
+    </p:bg>
+    <p:spTree>
+      <p:nvGrpSpPr>
+        <p:cNvPr id="1" name=""/>
+        <p:cNvGrpSpPr/>
+        <p:nvPr/>
+      </p:nvGrpSpPr>
+      <p:grpSpPr/>
+      <p:sp>
+        <p:nvSpPr>
+          <p:cNvPr id="2" name="Rectangle 1"/>
+          <p:cNvSpPr/>
+          <p:nvPr/>
+        </p:nvSpPr>
+        <p:spPr>
+          <a:xfrm>
+            <a:off x="0" y="0"/>
+            <a:ext cx="9144000" cy="502920"/>
+          </a:xfrm>
+          <a:prstGeom prst="rect">
+            <a:avLst/>
+          </a:prstGeom>
+          <a:solidFill>
+            <a:srgbClr val="143278"/>
+          </a:solidFill>
+          <a:ln>
+            <a:noFill/>
+          </a:ln>
+        </p:spPr>
+        <p:style>
+          <a:lnRef idx="1">
+            <a:schemeClr val="accent1"/>
+          </a:lnRef>
+          <a:fillRef idx="3">
+            <a:schemeClr val="accent1"/>
+          </a:fillRef>
+          <a:effectRef idx="2">
+            <a:schemeClr val="accent1"/>
+          </a:effectRef>
+          <a:fontRef idx="minor">
+            <a:schemeClr val="lt1"/>
+          </a:fontRef>
+        </p:style>
+        <p:txBody>
+          <a:bodyPr rtlCol="0" anchor="ctr"/>
+          <a:lstStyle/>
+          <a:p>
+            <a:pPr algn="ctr"/>
+          </a:p>
+        </p:txBody>
+      </p:sp>
+      <p:sp>
+        <p:nvSpPr>
+          <p:cNvPr id="3" name="TextBox 2"/>
+          <p:cNvSpPr txBox="1"/>
+          <p:nvPr/>
+        </p:nvSpPr>
+        <p:spPr>
+          <a:xfrm>
+            <a:off x="137160" y="73152"/>
+            <a:ext cx="8869680" cy="411480"/>
+          </a:xfrm>
+          <a:prstGeom prst="rect">
+            <a:avLst/>
+          </a:prstGeom>
+          <a:noFill/>
+        </p:spPr>
+        <p:txBody>
+          <a:bodyPr wrap="none">
+            <a:spAutoFit/>
+          </a:bodyPr>
+          <a:lstStyle/>
+          <a:p>
+            <a:pPr>
+              <a:defRPr sz="1100" b="1">
+                <a:solidFill>
+                  <a:srgbClr val="FFFFFF"/>
+                </a:solidFill>
+              </a:defRPr>
+            </a:pPr>
+            <a:r>
+              <a:t>第二十六届中国机器人及人工智能大赛</a:t>
+            </a:r>
+          </a:p>
+          <a:p>
+            <a:pPr>
+              <a:defRPr sz="1000">
+                <a:solidFill>
+                  <a:srgbClr val="C8DCFF"/>
+                </a:solidFill>
+              </a:defRPr>
+            </a:pPr>
+            <a:r>
+              <a:t>机器人创新赛道</a:t>
+            </a:r>
+          </a:p>
+        </p:txBody>
+      </p:sp>
+      <p:sp>
+        <p:nvSpPr>
+          <p:cNvPr id="4" name="TextBox 3"/>
+          <p:cNvSpPr txBox="1"/>
+          <p:nvPr/>
+        </p:nvSpPr>
+        <p:spPr>
+          <a:xfrm>
+            <a:off x="502920" y="685800"/>
+            <a:ext cx="8138160" cy="731520"/>
+          </a:xfrm>
+          <a:prstGeom prst="rect">
+            <a:avLst/>
+          </a:prstGeom>
+          <a:noFill/>
+        </p:spPr>
+        <p:txBody>
+          <a:bodyPr wrap="none">
+            <a:spAutoFit/>
+          </a:bodyPr>
+          <a:lstStyle/>
+          <a:p>
+            <a:pPr algn="l">
+              <a:defRPr sz="2600" b="1">
+                <a:solidFill>
+                  <a:srgbClr val="1E1E1E"/>
+                </a:solidFill>
+              </a:defRPr>
+            </a:pPr>
+            <a:r>
+              <a:t>系统界面：风险决策仪表盘</a:t>
+            </a:r>
+          </a:p>
+        </p:txBody>
+      </p:sp>
+      <p:pic>
+        <p:nvPicPr>
+          <p:cNvPr id="5" name="Picture 4" descr="ppt_risk_panel.png"/>
+          <p:cNvPicPr>
+            <a:picLocks noChangeAspect="1"/>
+          </p:cNvPicPr>
+          <p:nvPr/>
+        </p:nvPicPr>
+        <p:blipFill>
+          <a:blip r:embed="rId2"/>
+          <a:stretch>
+            <a:fillRect/>
+          </a:stretch>
+        </p:blipFill>
+        <p:spPr>
+          <a:xfrm>
+            <a:off x="292608" y="1024128"/>
+            <a:ext cx="8549640" cy="10180036"/>
+          </a:xfrm>
+          <a:prstGeom prst="rect">
+            <a:avLst/>
+          </a:prstGeom>
+        </p:spPr>
+      </p:pic>
+      <p:sp>
+        <p:nvSpPr>
+          <p:cNvPr id="6" name="TextBox 5"/>
+          <p:cNvSpPr txBox="1"/>
+          <p:nvPr/>
+        </p:nvSpPr>
+        <p:spPr>
+          <a:xfrm>
+            <a:off x="292608" y="4617720"/>
+            <a:ext cx="8549640" cy="411480"/>
+          </a:xfrm>
+          <a:prstGeom prst="rect">
+            <a:avLst/>
+          </a:prstGeom>
+          <a:noFill/>
+        </p:spPr>
+        <p:txBody>
+          <a:bodyPr wrap="none">
+            <a:spAutoFit/>
+          </a:bodyPr>
+          <a:lstStyle/>
+          <a:p>
+            <a:pPr algn="ctr">
+              <a:defRPr sz="1100">
+                <a:solidFill>
+                  <a:srgbClr val="505050"/>
+                </a:solidFill>
+              </a:defRPr>
+            </a:pPr>
+            <a:r>
+              <a:t>多模态融合输出：风险分数、因素、机器人回应及四项监测指标</a:t>
+            </a:r>
+          </a:p>
+        </p:txBody>
+      </p:sp>
+    </p:spTree>
+  </p:cSld>
+  <p:clrMapOvr>
+    <a:masterClrMapping/>
+  </p:clrMapOvr>
+</p:sld>
+</file>
+
+<file path=ppt/slides/slide17.xml><?xml version="1.0" encoding="utf-8"?>
+<p:sld xmlns:a="http://schemas.openxmlformats.org/drawingml/2006/main" xmlns:p="http://schemas.openxmlformats.org/presentationml/2006/main" xmlns:r="http://schemas.openxmlformats.org/officeDocument/2006/relationships">
+  <p:cSld>
+    <p:bg>
+      <p:bgPr>
+        <a:solidFill>
+          <a:srgbClr val="FFFFFF"/>
+        </a:solidFill>
+        <a:effectLst/>
+      </p:bgPr>
+    </p:bg>
+    <p:spTree>
+      <p:nvGrpSpPr>
+        <p:cNvPr id="1" name=""/>
+        <p:cNvGrpSpPr/>
+        <p:nvPr/>
+      </p:nvGrpSpPr>
+      <p:grpSpPr/>
+      <p:sp>
+        <p:nvSpPr>
+          <p:cNvPr id="2" name="Rectangle 1"/>
+          <p:cNvSpPr/>
+          <p:nvPr/>
+        </p:nvSpPr>
+        <p:spPr>
+          <a:xfrm>
+            <a:off x="0" y="0"/>
+            <a:ext cx="9144000" cy="502920"/>
+          </a:xfrm>
+          <a:prstGeom prst="rect">
+            <a:avLst/>
+          </a:prstGeom>
+          <a:solidFill>
+            <a:srgbClr val="143278"/>
+          </a:solidFill>
+          <a:ln>
+            <a:noFill/>
+          </a:ln>
+        </p:spPr>
+        <p:style>
+          <a:lnRef idx="1">
+            <a:schemeClr val="accent1"/>
+          </a:lnRef>
+          <a:fillRef idx="3">
+            <a:schemeClr val="accent1"/>
+          </a:fillRef>
+          <a:effectRef idx="2">
+            <a:schemeClr val="accent1"/>
+          </a:effectRef>
+          <a:fontRef idx="minor">
+            <a:schemeClr val="lt1"/>
+          </a:fontRef>
+        </p:style>
+        <p:txBody>
+          <a:bodyPr rtlCol="0" anchor="ctr"/>
+          <a:lstStyle/>
+          <a:p>
+            <a:pPr algn="ctr"/>
+          </a:p>
+        </p:txBody>
+      </p:sp>
+      <p:sp>
+        <p:nvSpPr>
+          <p:cNvPr id="3" name="TextBox 2"/>
+          <p:cNvSpPr txBox="1"/>
+          <p:nvPr/>
+        </p:nvSpPr>
+        <p:spPr>
+          <a:xfrm>
+            <a:off x="137160" y="73152"/>
+            <a:ext cx="8869680" cy="411480"/>
+          </a:xfrm>
+          <a:prstGeom prst="rect">
+            <a:avLst/>
+          </a:prstGeom>
+          <a:noFill/>
+        </p:spPr>
+        <p:txBody>
+          <a:bodyPr wrap="none">
+            <a:spAutoFit/>
+          </a:bodyPr>
+          <a:lstStyle/>
+          <a:p>
+            <a:pPr>
+              <a:defRPr sz="1100" b="1">
+                <a:solidFill>
+                  <a:srgbClr val="FFFFFF"/>
+                </a:solidFill>
+              </a:defRPr>
+            </a:pPr>
+            <a:r>
+              <a:t>第二十六届中国机器人及人工智能大赛</a:t>
+            </a:r>
+          </a:p>
+          <a:p>
+            <a:pPr>
+              <a:defRPr sz="1000">
+                <a:solidFill>
+                  <a:srgbClr val="C8DCFF"/>
+                </a:solidFill>
+              </a:defRPr>
+            </a:pPr>
+            <a:r>
+              <a:t>机器人创新赛道</a:t>
+            </a:r>
+          </a:p>
+        </p:txBody>
+      </p:sp>
+      <p:sp>
+        <p:nvSpPr>
+          <p:cNvPr id="4" name="TextBox 3"/>
+          <p:cNvSpPr txBox="1"/>
+          <p:nvPr/>
+        </p:nvSpPr>
+        <p:spPr>
+          <a:xfrm>
+            <a:off x="502920" y="685800"/>
+            <a:ext cx="8138160" cy="731520"/>
+          </a:xfrm>
+          <a:prstGeom prst="rect">
+            <a:avLst/>
+          </a:prstGeom>
+          <a:noFill/>
+        </p:spPr>
+        <p:txBody>
+          <a:bodyPr wrap="none">
+            <a:spAutoFit/>
+          </a:bodyPr>
+          <a:lstStyle/>
+          <a:p>
+            <a:pPr algn="l">
+              <a:defRPr sz="2600" b="1">
+                <a:solidFill>
+                  <a:srgbClr val="1E1E1E"/>
+                </a:solidFill>
+              </a:defRPr>
+            </a:pPr>
+            <a:r>
+              <a:t>系统界面：紧急状态监测</a:t>
+            </a:r>
+          </a:p>
+        </p:txBody>
+      </p:sp>
+      <p:pic>
+        <p:nvPicPr>
+          <p:cNvPr id="5" name="Picture 4" descr="ppt_header_perception.png"/>
+          <p:cNvPicPr>
+            <a:picLocks noChangeAspect="1"/>
+          </p:cNvPicPr>
+          <p:nvPr/>
+        </p:nvPicPr>
+        <p:blipFill>
+          <a:blip r:embed="rId2"/>
+          <a:stretch>
+            <a:fillRect/>
+          </a:stretch>
+        </p:blipFill>
+        <p:spPr>
+          <a:xfrm>
+            <a:off x="292608" y="1024128"/>
+            <a:ext cx="8549640" cy="4425107"/>
+          </a:xfrm>
+          <a:prstGeom prst="rect">
+            <a:avLst/>
+          </a:prstGeom>
+        </p:spPr>
+      </p:pic>
+      <p:sp>
+        <p:nvSpPr>
+          <p:cNvPr id="6" name="TextBox 5"/>
+          <p:cNvSpPr txBox="1"/>
+          <p:nvPr/>
+        </p:nvSpPr>
+        <p:spPr>
+          <a:xfrm>
+            <a:off x="292608" y="4617720"/>
+            <a:ext cx="8549640" cy="411480"/>
+          </a:xfrm>
+          <a:prstGeom prst="rect">
+            <a:avLst/>
+          </a:prstGeom>
+          <a:noFill/>
+        </p:spPr>
+        <p:txBody>
+          <a:bodyPr wrap="none">
+            <a:spAutoFit/>
+          </a:bodyPr>
+          <a:lstStyle/>
+          <a:p>
+            <a:pPr algn="ctr">
+              <a:defRPr sz="1100">
+                <a:solidFill>
+                  <a:srgbClr val="505050"/>
+                </a:solidFill>
+              </a:defRPr>
+            </a:pPr>
+            <a:r>
+              <a:t>状态机进入「紧急」· 感知输入与 MediaPipe 视觉模块</a:t>
+            </a:r>
+          </a:p>
+        </p:txBody>
+      </p:sp>
+    </p:spTree>
+  </p:cSld>
+  <p:clrMapOvr>
+    <a:masterClrMapping/>
+  </p:clrMapOvr>
+</p:sld>
+</file>
+
+<file path=ppt/slides/slide18.xml><?xml version="1.0" encoding="utf-8"?>
+<p:sld xmlns:a="http://schemas.openxmlformats.org/drawingml/2006/main" xmlns:p="http://schemas.openxmlformats.org/presentationml/2006/main" xmlns:r="http://schemas.openxmlformats.org/officeDocument/2006/relationships">
+  <p:cSld>
+    <p:bg>
+      <p:bgPr>
+        <a:solidFill>
+          <a:srgbClr val="FFFFFF"/>
+        </a:solidFill>
+        <a:effectLst/>
+      </p:bgPr>
+    </p:bg>
+    <p:spTree>
+      <p:nvGrpSpPr>
+        <p:cNvPr id="1" name=""/>
+        <p:cNvGrpSpPr/>
+        <p:nvPr/>
+      </p:nvGrpSpPr>
+      <p:grpSpPr/>
+      <p:sp>
+        <p:nvSpPr>
+          <p:cNvPr id="2" name="Rectangle 1"/>
+          <p:cNvSpPr/>
+          <p:nvPr/>
+        </p:nvSpPr>
+        <p:spPr>
+          <a:xfrm>
+            <a:off x="0" y="0"/>
+            <a:ext cx="9144000" cy="502920"/>
+          </a:xfrm>
+          <a:prstGeom prst="rect">
+            <a:avLst/>
+          </a:prstGeom>
+          <a:solidFill>
+            <a:srgbClr val="143278"/>
+          </a:solidFill>
+          <a:ln>
+            <a:noFill/>
+          </a:ln>
+        </p:spPr>
+        <p:style>
+          <a:lnRef idx="1">
+            <a:schemeClr val="accent1"/>
+          </a:lnRef>
+          <a:fillRef idx="3">
+            <a:schemeClr val="accent1"/>
+          </a:fillRef>
+          <a:effectRef idx="2">
+            <a:schemeClr val="accent1"/>
+          </a:effectRef>
+          <a:fontRef idx="minor">
+            <a:schemeClr val="lt1"/>
+          </a:fontRef>
+        </p:style>
+        <p:txBody>
+          <a:bodyPr rtlCol="0" anchor="ctr"/>
+          <a:lstStyle/>
+          <a:p>
+            <a:pPr algn="ctr"/>
+          </a:p>
+        </p:txBody>
+      </p:sp>
+      <p:sp>
+        <p:nvSpPr>
+          <p:cNvPr id="3" name="TextBox 2"/>
+          <p:cNvSpPr txBox="1"/>
+          <p:nvPr/>
+        </p:nvSpPr>
+        <p:spPr>
+          <a:xfrm>
+            <a:off x="137160" y="73152"/>
+            <a:ext cx="8869680" cy="411480"/>
+          </a:xfrm>
+          <a:prstGeom prst="rect">
+            <a:avLst/>
+          </a:prstGeom>
+          <a:noFill/>
+        </p:spPr>
+        <p:txBody>
+          <a:bodyPr wrap="none">
+            <a:spAutoFit/>
+          </a:bodyPr>
+          <a:lstStyle/>
+          <a:p>
+            <a:pPr>
+              <a:defRPr sz="1100" b="1">
+                <a:solidFill>
+                  <a:srgbClr val="FFFFFF"/>
+                </a:solidFill>
+              </a:defRPr>
+            </a:pPr>
+            <a:r>
+              <a:t>第二十六届中国机器人及人工智能大赛</a:t>
+            </a:r>
+          </a:p>
+          <a:p>
+            <a:pPr>
+              <a:defRPr sz="1000">
+                <a:solidFill>
+                  <a:srgbClr val="C8DCFF"/>
+                </a:solidFill>
+              </a:defRPr>
+            </a:pPr>
+            <a:r>
+              <a:t>机器人创新赛道</a:t>
+            </a:r>
+          </a:p>
+        </p:txBody>
+      </p:sp>
+      <p:sp>
+        <p:nvSpPr>
+          <p:cNvPr id="4" name="TextBox 3"/>
+          <p:cNvSpPr txBox="1"/>
+          <p:nvPr/>
+        </p:nvSpPr>
+        <p:spPr>
+          <a:xfrm>
+            <a:off x="502920" y="685800"/>
+            <a:ext cx="8138160" cy="731520"/>
+          </a:xfrm>
+          <a:prstGeom prst="rect">
+            <a:avLst/>
+          </a:prstGeom>
+          <a:noFill/>
+        </p:spPr>
+        <p:txBody>
+          <a:bodyPr wrap="none">
+            <a:spAutoFit/>
+          </a:bodyPr>
+          <a:lstStyle/>
+          <a:p>
+            <a:pPr algn="l">
+              <a:defRPr sz="2600" b="1">
+                <a:solidFill>
+                  <a:srgbClr val="1E1E1E"/>
+                </a:solidFill>
+              </a:defRPr>
+            </a:pPr>
+            <a:r>
+              <a:t>系统界面：跌倒紧急对话日志</a:t>
+            </a:r>
+          </a:p>
+        </p:txBody>
+      </p:sp>
+      <p:pic>
+        <p:nvPicPr>
+          <p:cNvPr id="5" name="Picture 4" descr="ppt_chat_emergency.png"/>
+          <p:cNvPicPr>
+            <a:picLocks noChangeAspect="1"/>
+          </p:cNvPicPr>
+          <p:nvPr/>
+        </p:nvPicPr>
+        <p:blipFill>
+          <a:blip r:embed="rId2"/>
+          <a:stretch>
+            <a:fillRect/>
+          </a:stretch>
+        </p:blipFill>
+        <p:spPr>
+          <a:xfrm>
+            <a:off x="292608" y="1024128"/>
+            <a:ext cx="8549640" cy="4600441"/>
+          </a:xfrm>
+          <a:prstGeom prst="rect">
+            <a:avLst/>
+          </a:prstGeom>
+        </p:spPr>
+      </p:pic>
+      <p:sp>
+        <p:nvSpPr>
+          <p:cNvPr id="6" name="TextBox 5"/>
+          <p:cNvSpPr txBox="1"/>
+          <p:nvPr/>
+        </p:nvSpPr>
+        <p:spPr>
+          <a:xfrm>
+            <a:off x="292608" y="4617720"/>
+            <a:ext cx="8549640" cy="411480"/>
+          </a:xfrm>
+          <a:prstGeom prst="rect">
+            <a:avLst/>
+          </a:prstGeom>
+          <a:noFill/>
+        </p:spPr>
+        <p:txBody>
+          <a:bodyPr wrap="none">
+            <a:spAutoFit/>
+          </a:bodyPr>
+          <a:lstStyle/>
+          <a:p>
+            <a:pPr algn="ctr">
+              <a:defRPr sz="1100">
+                <a:solidFill>
+                  <a:srgbClr val="505050"/>
+                </a:solidFill>
+              </a:defRPr>
+            </a:pPr>
+            <a:r>
+              <a:t>演示完成：跌倒紧急流程已成功触发 · 多次紧急安抚语音</a:t>
+            </a:r>
+          </a:p>
+        </p:txBody>
+      </p:sp>
+    </p:spTree>
+  </p:cSld>
+  <p:clrMapOvr>
+    <a:masterClrMapping/>
+  </p:clrMapOvr>
+</p:sld>
+</file>
+
+<file path=ppt/slides/slide19.xml><?xml version="1.0" encoding="utf-8"?>
+<p:sld xmlns:a="http://schemas.openxmlformats.org/drawingml/2006/main" xmlns:p="http://schemas.openxmlformats.org/presentationml/2006/main" xmlns:r="http://schemas.openxmlformats.org/officeDocument/2006/relationships">
+  <p:cSld>
+    <p:bg>
+      <p:bgPr>
+        <a:solidFill>
+          <a:srgbClr val="FFFFFF"/>
+        </a:solidFill>
+        <a:effectLst/>
+      </p:bgPr>
+    </p:bg>
+    <p:spTree>
+      <p:nvGrpSpPr>
+        <p:cNvPr id="1" name=""/>
+        <p:cNvGrpSpPr/>
+        <p:nvPr/>
+      </p:nvGrpSpPr>
+      <p:grpSpPr/>
+      <p:sp>
+        <p:nvSpPr>
+          <p:cNvPr id="2" name="Rectangle 1"/>
+          <p:cNvSpPr/>
+          <p:nvPr/>
+        </p:nvSpPr>
+        <p:spPr>
+          <a:xfrm>
+            <a:off x="0" y="0"/>
+            <a:ext cx="9144000" cy="502920"/>
+          </a:xfrm>
+          <a:prstGeom prst="rect">
+            <a:avLst/>
+          </a:prstGeom>
+          <a:solidFill>
+            <a:srgbClr val="143278"/>
+          </a:solidFill>
+          <a:ln>
+            <a:noFill/>
+          </a:ln>
+        </p:spPr>
+        <p:style>
+          <a:lnRef idx="1">
+            <a:schemeClr val="accent1"/>
+          </a:lnRef>
+          <a:fillRef idx="3">
+            <a:schemeClr val="accent1"/>
+          </a:fillRef>
+          <a:effectRef idx="2">
+            <a:schemeClr val="accent1"/>
+          </a:effectRef>
+          <a:fontRef idx="minor">
+            <a:schemeClr val="lt1"/>
+          </a:fontRef>
+        </p:style>
+        <p:txBody>
+          <a:bodyPr rtlCol="0" anchor="ctr"/>
+          <a:lstStyle/>
+          <a:p>
+            <a:pPr algn="ctr"/>
+          </a:p>
+        </p:txBody>
+      </p:sp>
+      <p:sp>
+        <p:nvSpPr>
+          <p:cNvPr id="3" name="TextBox 2"/>
+          <p:cNvSpPr txBox="1"/>
+          <p:nvPr/>
+        </p:nvSpPr>
+        <p:spPr>
+          <a:xfrm>
+            <a:off x="137160" y="73152"/>
+            <a:ext cx="8869680" cy="411480"/>
+          </a:xfrm>
+          <a:prstGeom prst="rect">
+            <a:avLst/>
+          </a:prstGeom>
+          <a:noFill/>
+        </p:spPr>
+        <p:txBody>
+          <a:bodyPr wrap="none">
+            <a:spAutoFit/>
+          </a:bodyPr>
+          <a:lstStyle/>
+          <a:p>
+            <a:pPr>
+              <a:defRPr sz="1100" b="1">
+                <a:solidFill>
+                  <a:srgbClr val="FFFFFF"/>
+                </a:solidFill>
+              </a:defRPr>
+            </a:pPr>
+            <a:r>
+              <a:t>第二十六届中国机器人及人工智能大赛</a:t>
+            </a:r>
+          </a:p>
+          <a:p>
+            <a:pPr>
+              <a:defRPr sz="1000">
+                <a:solidFill>
+                  <a:srgbClr val="C8DCFF"/>
+                </a:solidFill>
+              </a:defRPr>
+            </a:pPr>
+            <a:r>
+              <a:t>机器人创新赛道</a:t>
+            </a:r>
+          </a:p>
+        </p:txBody>
+      </p:sp>
+      <p:sp>
+        <p:nvSpPr>
+          <p:cNvPr id="4" name="TextBox 3"/>
+          <p:cNvSpPr txBox="1"/>
+          <p:nvPr/>
+        </p:nvSpPr>
+        <p:spPr>
+          <a:xfrm>
+            <a:off x="502920" y="685800"/>
+            <a:ext cx="8138160" cy="731520"/>
+          </a:xfrm>
+          <a:prstGeom prst="rect">
+            <a:avLst/>
+          </a:prstGeom>
+          <a:noFill/>
+        </p:spPr>
+        <p:txBody>
+          <a:bodyPr wrap="none">
+            <a:spAutoFit/>
+          </a:bodyPr>
+          <a:lstStyle/>
+          <a:p>
+            <a:pPr algn="l">
+              <a:defRPr sz="2600" b="1">
+                <a:solidFill>
+                  <a:srgbClr val="1E1E1E"/>
+                </a:solidFill>
+              </a:defRPr>
+            </a:pPr>
+            <a:r>
+              <a:t>系统界面：机器人指令流</a:t>
+            </a:r>
+          </a:p>
+        </p:txBody>
+      </p:sp>
+      <p:pic>
+        <p:nvPicPr>
+          <p:cNvPr id="5" name="Picture 4" descr="ppt_robot_commands.png"/>
+          <p:cNvPicPr>
+            <a:picLocks noChangeAspect="1"/>
+          </p:cNvPicPr>
+          <p:nvPr/>
+        </p:nvPicPr>
+        <p:blipFill>
+          <a:blip r:embed="rId2"/>
+          <a:stretch>
+            <a:fillRect/>
+          </a:stretch>
+        </p:blipFill>
+        <p:spPr>
+          <a:xfrm>
+            <a:off x="292608" y="1024128"/>
+            <a:ext cx="8549640" cy="1928679"/>
+          </a:xfrm>
+          <a:prstGeom prst="rect">
+            <a:avLst/>
+          </a:prstGeom>
+        </p:spPr>
+      </p:pic>
+      <p:sp>
+        <p:nvSpPr>
+          <p:cNvPr id="6" name="TextBox 5"/>
+          <p:cNvSpPr txBox="1"/>
+          <p:nvPr/>
+        </p:nvSpPr>
+        <p:spPr>
+          <a:xfrm>
+            <a:off x="292608" y="4617720"/>
+            <a:ext cx="8549640" cy="411480"/>
+          </a:xfrm>
+          <a:prstGeom prst="rect">
+            <a:avLst/>
+          </a:prstGeom>
+          <a:noFill/>
+        </p:spPr>
+        <p:txBody>
+          <a:bodyPr wrap="none">
+            <a:spAutoFit/>
+          </a:bodyPr>
+          <a:lstStyle/>
+          <a:p>
+            <a:pPr algn="ctr">
+              <a:defRPr sz="1100">
+                <a:solidFill>
+                  <a:srgbClr val="505050"/>
+                </a:solidFill>
+              </a:defRPr>
+            </a:pPr>
+            <a:r>
+              <a:t>告警音 → 语音 → 紧急呼叫（跌倒事件）→ 举手手势，全链路可追溯</a:t>
+            </a:r>
+          </a:p>
+        </p:txBody>
+      </p:sp>
+    </p:spTree>
+  </p:cSld>
+  <p:clrMapOvr>
+    <a:masterClrMapping/>
+  </p:clrMapOvr>
+</p:sld>
+</file>
+
+<file path=ppt/slides/slide2.xml><?xml version="1.0" encoding="utf-8"?>
+<p:sld xmlns:a="http://schemas.openxmlformats.org/drawingml/2006/main" xmlns:p="http://schemas.openxmlformats.org/presentationml/2006/main" xmlns:r="http://schemas.openxmlformats.org/officeDocument/2006/relationships">
+  <p:cSld>
+    <p:bg>
+      <p:bgPr>
+        <a:solidFill>
+          <a:srgbClr val="FFFFFF"/>
+        </a:solidFill>
+        <a:effectLst/>
+      </p:bgPr>
+    </p:bg>
+    <p:spTree>
+      <p:nvGrpSpPr>
+        <p:cNvPr id="1" name=""/>
+        <p:cNvGrpSpPr/>
+        <p:nvPr/>
+      </p:nvGrpSpPr>
+      <p:grpSpPr/>
+      <p:sp>
+        <p:nvSpPr>
+          <p:cNvPr id="2" name="Rectangle 1"/>
+          <p:cNvSpPr/>
+          <p:nvPr/>
+        </p:nvSpPr>
+        <p:spPr>
+          <a:xfrm>
+            <a:off x="0" y="0"/>
+            <a:ext cx="9144000" cy="502920"/>
+          </a:xfrm>
+          <a:prstGeom prst="rect">
+            <a:avLst/>
+          </a:prstGeom>
+          <a:solidFill>
+            <a:srgbClr val="143278"/>
+          </a:solidFill>
+          <a:ln>
+            <a:noFill/>
+          </a:ln>
+        </p:spPr>
+        <p:style>
+          <a:lnRef idx="1">
+            <a:schemeClr val="accent1"/>
+          </a:lnRef>
+          <a:fillRef idx="3">
+            <a:schemeClr val="accent1"/>
+          </a:fillRef>
+          <a:effectRef idx="2">
+            <a:schemeClr val="accent1"/>
+          </a:effectRef>
+          <a:fontRef idx="minor">
+            <a:schemeClr val="lt1"/>
+          </a:fontRef>
+        </p:style>
+        <p:txBody>
+          <a:bodyPr rtlCol="0" anchor="ctr"/>
+          <a:lstStyle/>
+          <a:p>
+            <a:pPr algn="ctr"/>
+          </a:p>
+        </p:txBody>
+      </p:sp>
+      <p:sp>
+        <p:nvSpPr>
+          <p:cNvPr id="3" name="TextBox 2"/>
+          <p:cNvSpPr txBox="1"/>
+          <p:nvPr/>
+        </p:nvSpPr>
+        <p:spPr>
+          <a:xfrm>
+            <a:off x="137160" y="73152"/>
+            <a:ext cx="8869680" cy="411480"/>
+          </a:xfrm>
+          <a:prstGeom prst="rect">
+            <a:avLst/>
+          </a:prstGeom>
+          <a:noFill/>
+        </p:spPr>
+        <p:txBody>
+          <a:bodyPr wrap="none">
+            <a:spAutoFit/>
+          </a:bodyPr>
+          <a:lstStyle/>
+          <a:p>
+            <a:pPr>
+              <a:defRPr sz="1100" b="1">
+                <a:solidFill>
+                  <a:srgbClr val="FFFFFF"/>
+                </a:solidFill>
+              </a:defRPr>
+            </a:pPr>
+            <a:r>
+              <a:t>第二十六届中国机器人及人工智能大赛</a:t>
+            </a:r>
+          </a:p>
+          <a:p>
+            <a:pPr>
+              <a:defRPr sz="1000">
+                <a:solidFill>
+                  <a:srgbClr val="C8DCFF"/>
+                </a:solidFill>
+              </a:defRPr>
+            </a:pPr>
+            <a:r>
+              <a:t>机器人创新赛道</a:t>
+            </a:r>
+          </a:p>
+        </p:txBody>
+      </p:sp>
+      <p:sp>
+        <p:nvSpPr>
+          <p:cNvPr id="4" name="TextBox 3"/>
+          <p:cNvSpPr txBox="1"/>
+          <p:nvPr/>
+        </p:nvSpPr>
+        <p:spPr>
+          <a:xfrm>
+            <a:off x="502920" y="1828800"/>
+            <a:ext cx="8138160" cy="731520"/>
+          </a:xfrm>
+          <a:prstGeom prst="rect">
+            <a:avLst/>
+          </a:prstGeom>
+          <a:noFill/>
+        </p:spPr>
+        <p:txBody>
+          <a:bodyPr wrap="none">
+            <a:spAutoFit/>
+          </a:bodyPr>
+          <a:lstStyle/>
+          <a:p>
+            <a:pPr algn="ctr">
+              <a:defRPr sz="3200" b="1">
+                <a:solidFill>
+                  <a:srgbClr val="1E1E1E"/>
+                </a:solidFill>
+              </a:defRPr>
+            </a:pPr>
+            <a:r>
+              <a:t>第一部分</a:t>
+            </a:r>
+          </a:p>
+        </p:txBody>
+      </p:sp>
+      <p:sp>
+        <p:nvSpPr>
+          <p:cNvPr id="5" name="TextBox 4"/>
+          <p:cNvSpPr txBox="1"/>
+          <p:nvPr/>
+        </p:nvSpPr>
+        <p:spPr>
+          <a:xfrm>
+            <a:off x="502920" y="2606040"/>
+            <a:ext cx="8138160" cy="731520"/>
+          </a:xfrm>
+          <a:prstGeom prst="rect">
+            <a:avLst/>
+          </a:prstGeom>
+          <a:noFill/>
+        </p:spPr>
+        <p:txBody>
+          <a:bodyPr wrap="none">
+            <a:spAutoFit/>
+          </a:bodyPr>
+          <a:lstStyle/>
+          <a:p>
+            <a:pPr algn="ctr">
+              <a:defRPr sz="2200" b="1">
+                <a:solidFill>
+                  <a:srgbClr val="143278"/>
+                </a:solidFill>
+              </a:defRPr>
+            </a:pPr>
+            <a:r>
+              <a:t>项目背景与需求分析</a:t>
+            </a:r>
+          </a:p>
+        </p:txBody>
+      </p:sp>
+    </p:spTree>
+  </p:cSld>
+  <p:clrMapOvr>
+    <a:masterClrMapping/>
+  </p:clrMapOvr>
+</p:sld>
+</file>
+
+<file path=ppt/slides/slide20.xml><?xml version="1.0" encoding="utf-8"?>
 <p:sld xmlns:a="http://schemas.openxmlformats.org/drawingml/2006/main" xmlns:p="http://schemas.openxmlformats.org/presentationml/2006/main" xmlns:r="http://schemas.openxmlformats.org/officeDocument/2006/relationships">
   <p:cSld>
     <p:bg>
@@ -4817,7 +6224,7 @@
 </p:sld>
 </file>
 
-<file path=ppt/slides/slide15.xml><?xml version="1.0" encoding="utf-8"?>
+<file path=ppt/slides/slide21.xml><?xml version="1.0" encoding="utf-8"?>
 <p:sld xmlns:a="http://schemas.openxmlformats.org/drawingml/2006/main" xmlns:p="http://schemas.openxmlformats.org/presentationml/2006/main" xmlns:r="http://schemas.openxmlformats.org/officeDocument/2006/relationships">
   <p:cSld>
     <p:bg>
@@ -5008,6 +6415,21 @@
               </a:defRPr>
             </a:pPr>
             <a:r>
+              <a:t>答辩演示：http://localhost:8765（现场端口转发）</a:t>
+            </a:r>
+          </a:p>
+          <a:p>
+            <a:pPr>
+              <a:spcAft>
+                <a:spcPts val="600"/>
+              </a:spcAft>
+              <a:defRPr sz="1400">
+                <a:solidFill>
+                  <a:srgbClr val="1E1E1E"/>
+                </a:solidFill>
+              </a:defRPr>
+            </a:pPr>
+            <a:r>
               <a:t>软件名称建议：CareCompanion 智能养老人形陪伴机器人系统 V1.0</a:t>
             </a:r>
           </a:p>
@@ -5066,7 +6488,7 @@
 </p:sld>
 </file>
 
-<file path=ppt/slides/slide16.xml><?xml version="1.0" encoding="utf-8"?>
+<file path=ppt/slides/slide22.xml><?xml version="1.0" encoding="utf-8"?>
 <p:sld xmlns:a="http://schemas.openxmlformats.org/drawingml/2006/main" xmlns:p="http://schemas.openxmlformats.org/presentationml/2006/main" xmlns:r="http://schemas.openxmlformats.org/officeDocument/2006/relationships">
   <p:cSld>
     <p:bg>
@@ -5252,7 +6674,7 @@
 </p:sld>
 </file>
 
-<file path=ppt/slides/slide17.xml><?xml version="1.0" encoding="utf-8"?>
+<file path=ppt/slides/slide23.xml><?xml version="1.0" encoding="utf-8"?>
 <p:sld xmlns:a="http://schemas.openxmlformats.org/drawingml/2006/main" xmlns:p="http://schemas.openxmlformats.org/presentationml/2006/main" xmlns:r="http://schemas.openxmlformats.org/officeDocument/2006/relationships">
   <p:cSld>
     <p:bg>
@@ -5677,7 +7099,7 @@
 </p:sld>
 </file>
 
-<file path=ppt/slides/slide18.xml><?xml version="1.0" encoding="utf-8"?>
+<file path=ppt/slides/slide24.xml><?xml version="1.0" encoding="utf-8"?>
 <p:sld xmlns:a="http://schemas.openxmlformats.org/drawingml/2006/main" xmlns:p="http://schemas.openxmlformats.org/presentationml/2006/main" xmlns:r="http://schemas.openxmlformats.org/officeDocument/2006/relationships">
   <p:cSld>
     <p:bg>
@@ -5926,7 +7348,7 @@
 </p:sld>
 </file>
 
-<file path=ppt/slides/slide19.xml><?xml version="1.0" encoding="utf-8"?>
+<file path=ppt/slides/slide25.xml><?xml version="1.0" encoding="utf-8"?>
 <p:sld xmlns:a="http://schemas.openxmlformats.org/drawingml/2006/main" xmlns:p="http://schemas.openxmlformats.org/presentationml/2006/main" xmlns:r="http://schemas.openxmlformats.org/officeDocument/2006/relationships">
   <p:cSld>
     <p:bg>
@@ -6175,193 +7597,7 @@
 </p:sld>
 </file>
 
-<file path=ppt/slides/slide2.xml><?xml version="1.0" encoding="utf-8"?>
-<p:sld xmlns:a="http://schemas.openxmlformats.org/drawingml/2006/main" xmlns:p="http://schemas.openxmlformats.org/presentationml/2006/main" xmlns:r="http://schemas.openxmlformats.org/officeDocument/2006/relationships">
-  <p:cSld>
-    <p:bg>
-      <p:bgPr>
-        <a:solidFill>
-          <a:srgbClr val="FFFFFF"/>
-        </a:solidFill>
-        <a:effectLst/>
-      </p:bgPr>
-    </p:bg>
-    <p:spTree>
-      <p:nvGrpSpPr>
-        <p:cNvPr id="1" name=""/>
-        <p:cNvGrpSpPr/>
-        <p:nvPr/>
-      </p:nvGrpSpPr>
-      <p:grpSpPr/>
-      <p:sp>
-        <p:nvSpPr>
-          <p:cNvPr id="2" name="Rectangle 1"/>
-          <p:cNvSpPr/>
-          <p:nvPr/>
-        </p:nvSpPr>
-        <p:spPr>
-          <a:xfrm>
-            <a:off x="0" y="0"/>
-            <a:ext cx="9144000" cy="502920"/>
-          </a:xfrm>
-          <a:prstGeom prst="rect">
-            <a:avLst/>
-          </a:prstGeom>
-          <a:solidFill>
-            <a:srgbClr val="143278"/>
-          </a:solidFill>
-          <a:ln>
-            <a:noFill/>
-          </a:ln>
-        </p:spPr>
-        <p:style>
-          <a:lnRef idx="1">
-            <a:schemeClr val="accent1"/>
-          </a:lnRef>
-          <a:fillRef idx="3">
-            <a:schemeClr val="accent1"/>
-          </a:fillRef>
-          <a:effectRef idx="2">
-            <a:schemeClr val="accent1"/>
-          </a:effectRef>
-          <a:fontRef idx="minor">
-            <a:schemeClr val="lt1"/>
-          </a:fontRef>
-        </p:style>
-        <p:txBody>
-          <a:bodyPr rtlCol="0" anchor="ctr"/>
-          <a:lstStyle/>
-          <a:p>
-            <a:pPr algn="ctr"/>
-          </a:p>
-        </p:txBody>
-      </p:sp>
-      <p:sp>
-        <p:nvSpPr>
-          <p:cNvPr id="3" name="TextBox 2"/>
-          <p:cNvSpPr txBox="1"/>
-          <p:nvPr/>
-        </p:nvSpPr>
-        <p:spPr>
-          <a:xfrm>
-            <a:off x="137160" y="73152"/>
-            <a:ext cx="8869680" cy="411480"/>
-          </a:xfrm>
-          <a:prstGeom prst="rect">
-            <a:avLst/>
-          </a:prstGeom>
-          <a:noFill/>
-        </p:spPr>
-        <p:txBody>
-          <a:bodyPr wrap="none">
-            <a:spAutoFit/>
-          </a:bodyPr>
-          <a:lstStyle/>
-          <a:p>
-            <a:pPr>
-              <a:defRPr sz="1100" b="1">
-                <a:solidFill>
-                  <a:srgbClr val="FFFFFF"/>
-                </a:solidFill>
-              </a:defRPr>
-            </a:pPr>
-            <a:r>
-              <a:t>第二十六届中国机器人及人工智能大赛</a:t>
-            </a:r>
-          </a:p>
-          <a:p>
-            <a:pPr>
-              <a:defRPr sz="1000">
-                <a:solidFill>
-                  <a:srgbClr val="C8DCFF"/>
-                </a:solidFill>
-              </a:defRPr>
-            </a:pPr>
-            <a:r>
-              <a:t>机器人创新赛道</a:t>
-            </a:r>
-          </a:p>
-        </p:txBody>
-      </p:sp>
-      <p:sp>
-        <p:nvSpPr>
-          <p:cNvPr id="4" name="TextBox 3"/>
-          <p:cNvSpPr txBox="1"/>
-          <p:nvPr/>
-        </p:nvSpPr>
-        <p:spPr>
-          <a:xfrm>
-            <a:off x="502920" y="1828800"/>
-            <a:ext cx="8138160" cy="731520"/>
-          </a:xfrm>
-          <a:prstGeom prst="rect">
-            <a:avLst/>
-          </a:prstGeom>
-          <a:noFill/>
-        </p:spPr>
-        <p:txBody>
-          <a:bodyPr wrap="none">
-            <a:spAutoFit/>
-          </a:bodyPr>
-          <a:lstStyle/>
-          <a:p>
-            <a:pPr algn="ctr">
-              <a:defRPr sz="3200" b="1">
-                <a:solidFill>
-                  <a:srgbClr val="1E1E1E"/>
-                </a:solidFill>
-              </a:defRPr>
-            </a:pPr>
-            <a:r>
-              <a:t>第一部分</a:t>
-            </a:r>
-          </a:p>
-        </p:txBody>
-      </p:sp>
-      <p:sp>
-        <p:nvSpPr>
-          <p:cNvPr id="5" name="TextBox 4"/>
-          <p:cNvSpPr txBox="1"/>
-          <p:nvPr/>
-        </p:nvSpPr>
-        <p:spPr>
-          <a:xfrm>
-            <a:off x="502920" y="2606040"/>
-            <a:ext cx="8138160" cy="731520"/>
-          </a:xfrm>
-          <a:prstGeom prst="rect">
-            <a:avLst/>
-          </a:prstGeom>
-          <a:noFill/>
-        </p:spPr>
-        <p:txBody>
-          <a:bodyPr wrap="none">
-            <a:spAutoFit/>
-          </a:bodyPr>
-          <a:lstStyle/>
-          <a:p>
-            <a:pPr algn="ctr">
-              <a:defRPr sz="2200" b="1">
-                <a:solidFill>
-                  <a:srgbClr val="143278"/>
-                </a:solidFill>
-              </a:defRPr>
-            </a:pPr>
-            <a:r>
-              <a:t>项目背景与需求分析</a:t>
-            </a:r>
-          </a:p>
-        </p:txBody>
-      </p:sp>
-    </p:spTree>
-  </p:cSld>
-  <p:clrMapOvr>
-    <a:masterClrMapping/>
-  </p:clrMapOvr>
-</p:sld>
-</file>
-
-<file path=ppt/slides/slide20.xml><?xml version="1.0" encoding="utf-8"?>
+<file path=ppt/slides/slide26.xml><?xml version="1.0" encoding="utf-8"?>
 <p:sld xmlns:a="http://schemas.openxmlformats.org/drawingml/2006/main" xmlns:p="http://schemas.openxmlformats.org/presentationml/2006/main" xmlns:r="http://schemas.openxmlformats.org/officeDocument/2006/relationships">
   <p:cSld>
     <p:bg>

--- a/docs/答辩_CareCompanion.pptx
+++ b/docs/答辩_CareCompanion.pptx
@@ -3228,7 +3228,7 @@
           <a:noFill/>
         </p:spPr>
         <p:txBody>
-          <a:bodyPr wrap="none">
+          <a:bodyPr wrap="square">
             <a:spAutoFit/>
           </a:bodyPr>
           <a:lstStyle/>
@@ -3263,7 +3263,7 @@
           <a:noFill/>
         </p:spPr>
         <p:txBody>
-          <a:bodyPr wrap="none">
+          <a:bodyPr wrap="square">
             <a:spAutoFit/>
           </a:bodyPr>
           <a:lstStyle/>
@@ -3527,7 +3527,7 @@
           <a:noFill/>
         </p:spPr>
         <p:txBody>
-          <a:bodyPr wrap="none">
+          <a:bodyPr wrap="square">
             <a:spAutoFit/>
           </a:bodyPr>
           <a:lstStyle/>
@@ -3729,44 +3729,9 @@
           </a:p>
         </p:txBody>
       </p:sp>
-      <p:sp>
-        <p:nvSpPr>
-          <p:cNvPr id="4" name="TextBox 3"/>
-          <p:cNvSpPr txBox="1"/>
-          <p:nvPr/>
-        </p:nvSpPr>
-        <p:spPr>
-          <a:xfrm>
-            <a:off x="502920" y="685800"/>
-            <a:ext cx="8138160" cy="731520"/>
-          </a:xfrm>
-          <a:prstGeom prst="rect">
-            <a:avLst/>
-          </a:prstGeom>
-          <a:noFill/>
-        </p:spPr>
-        <p:txBody>
-          <a:bodyPr wrap="none">
-            <a:spAutoFit/>
-          </a:bodyPr>
-          <a:lstStyle/>
-          <a:p>
-            <a:pPr algn="l">
-              <a:defRPr sz="2600" b="1">
-                <a:solidFill>
-                  <a:srgbClr val="1E1E1E"/>
-                </a:solidFill>
-              </a:defRPr>
-            </a:pPr>
-            <a:r>
-              <a:t>（界面）情感倾诉交互</a:t>
-            </a:r>
-          </a:p>
-        </p:txBody>
-      </p:sp>
       <p:pic>
         <p:nvPicPr>
-          <p:cNvPr id="5" name="Picture 4" descr="ppt_emotion_input.png"/>
+          <p:cNvPr id="4" name="Picture 3" descr="ppt_emotion_input.png"/>
           <p:cNvPicPr>
             <a:picLocks noChangeAspect="1"/>
           </p:cNvPicPr>
@@ -3780,14 +3745,49 @@
         </p:blipFill>
         <p:spPr>
           <a:xfrm>
-            <a:off x="292608" y="1024128"/>
-            <a:ext cx="8549640" cy="7272204"/>
+            <a:off x="1803814" y="1261872"/>
+            <a:ext cx="5536371" cy="4709160"/>
           </a:xfrm>
           <a:prstGeom prst="rect">
             <a:avLst/>
           </a:prstGeom>
         </p:spPr>
       </p:pic>
+      <p:sp>
+        <p:nvSpPr>
+          <p:cNvPr id="5" name="TextBox 4"/>
+          <p:cNvSpPr txBox="1"/>
+          <p:nvPr/>
+        </p:nvSpPr>
+        <p:spPr>
+          <a:xfrm>
+            <a:off x="365760" y="6144768"/>
+            <a:ext cx="8412480" cy="502920"/>
+          </a:xfrm>
+          <a:prstGeom prst="rect">
+            <a:avLst/>
+          </a:prstGeom>
+          <a:noFill/>
+        </p:spPr>
+        <p:txBody>
+          <a:bodyPr wrap="square">
+            <a:spAutoFit/>
+          </a:bodyPr>
+          <a:lstStyle/>
+          <a:p>
+            <a:pPr algn="ctr">
+              <a:defRPr sz="1000">
+                <a:solidFill>
+                  <a:srgbClr val="505050"/>
+                </a:solidFill>
+              </a:defRPr>
+            </a:pPr>
+            <a:r>
+              <a:t>老人输入「最近有点孤独，睡不太好」→ 系统识别情绪低落并生成安抚话术</a:t>
+            </a:r>
+          </a:p>
+        </p:txBody>
+      </p:sp>
       <p:sp>
         <p:nvSpPr>
           <p:cNvPr id="6" name="TextBox 5"/>
@@ -3796,8 +3796,8 @@
         </p:nvSpPr>
         <p:spPr>
           <a:xfrm>
-            <a:off x="292608" y="4617720"/>
-            <a:ext cx="8549640" cy="411480"/>
+            <a:off x="365760" y="530352"/>
+            <a:ext cx="8412480" cy="566928"/>
           </a:xfrm>
           <a:prstGeom prst="rect">
             <a:avLst/>
@@ -3805,20 +3805,20 @@
           <a:noFill/>
         </p:spPr>
         <p:txBody>
-          <a:bodyPr wrap="none">
+          <a:bodyPr wrap="square">
             <a:spAutoFit/>
           </a:bodyPr>
           <a:lstStyle/>
           <a:p>
-            <a:pPr algn="ctr">
-              <a:defRPr sz="1100">
-                <a:solidFill>
-                  <a:srgbClr val="505050"/>
-                </a:solidFill>
-              </a:defRPr>
-            </a:pPr>
-            <a:r>
-              <a:t>老人输入「最近有点孤独，睡不太好」→ 系统识别情绪低落并生成安抚话术</a:t>
+            <a:pPr algn="l">
+              <a:defRPr sz="2100" b="1">
+                <a:solidFill>
+                  <a:srgbClr val="1E1E1E"/>
+                </a:solidFill>
+              </a:defRPr>
+            </a:pPr>
+            <a:r>
+              <a:t>（界面）情感倾诉交互</a:t>
             </a:r>
           </a:p>
         </p:txBody>
@@ -3956,7 +3956,7 @@
           <a:noFill/>
         </p:spPr>
         <p:txBody>
-          <a:bodyPr wrap="none">
+          <a:bodyPr wrap="square">
             <a:spAutoFit/>
           </a:bodyPr>
           <a:lstStyle/>
@@ -4205,7 +4205,7 @@
           <a:noFill/>
         </p:spPr>
         <p:txBody>
-          <a:bodyPr wrap="none">
+          <a:bodyPr wrap="square">
             <a:spAutoFit/>
           </a:bodyPr>
           <a:lstStyle/>
@@ -4240,7 +4240,7 @@
           <a:noFill/>
         </p:spPr>
         <p:txBody>
-          <a:bodyPr wrap="none">
+          <a:bodyPr wrap="square">
             <a:spAutoFit/>
           </a:bodyPr>
           <a:lstStyle/>
@@ -4391,7 +4391,7 @@
           <a:noFill/>
         </p:spPr>
         <p:txBody>
-          <a:bodyPr wrap="none">
+          <a:bodyPr wrap="square">
             <a:spAutoFit/>
           </a:bodyPr>
           <a:lstStyle/>
@@ -4593,44 +4593,9 @@
           </a:p>
         </p:txBody>
       </p:sp>
-      <p:sp>
-        <p:nvSpPr>
-          <p:cNvPr id="4" name="TextBox 3"/>
-          <p:cNvSpPr txBox="1"/>
-          <p:nvPr/>
-        </p:nvSpPr>
-        <p:spPr>
-          <a:xfrm>
-            <a:off x="502920" y="685800"/>
-            <a:ext cx="8138160" cy="731520"/>
-          </a:xfrm>
-          <a:prstGeom prst="rect">
-            <a:avLst/>
-          </a:prstGeom>
-          <a:noFill/>
-        </p:spPr>
-        <p:txBody>
-          <a:bodyPr wrap="none">
-            <a:spAutoFit/>
-          </a:bodyPr>
-          <a:lstStyle/>
-          <a:p>
-            <a:pPr algn="l">
-              <a:defRPr sz="2600" b="1">
-                <a:solidFill>
-                  <a:srgbClr val="1E1E1E"/>
-                </a:solidFill>
-              </a:defRPr>
-            </a:pPr>
-            <a:r>
-              <a:t>系统界面：老人倾诉场景（演示剧本）</a:t>
-            </a:r>
-          </a:p>
-        </p:txBody>
-      </p:sp>
       <p:pic>
         <p:nvPicPr>
-          <p:cNvPr id="5" name="Picture 4" descr="ppt_full_dashboard.png"/>
+          <p:cNvPr id="4" name="Picture 3" descr="ppt_full_dashboard.png"/>
           <p:cNvPicPr>
             <a:picLocks noChangeAspect="1"/>
           </p:cNvPicPr>
@@ -4644,14 +4609,49 @@
         </p:blipFill>
         <p:spPr>
           <a:xfrm>
-            <a:off x="292608" y="1024128"/>
-            <a:ext cx="8549640" cy="4458504"/>
+            <a:off x="502919" y="1261872"/>
+            <a:ext cx="8138160" cy="4243923"/>
           </a:xfrm>
           <a:prstGeom prst="rect">
             <a:avLst/>
           </a:prstGeom>
         </p:spPr>
       </p:pic>
+      <p:sp>
+        <p:nvSpPr>
+          <p:cNvPr id="5" name="TextBox 4"/>
+          <p:cNvSpPr txBox="1"/>
+          <p:nvPr/>
+        </p:nvSpPr>
+        <p:spPr>
+          <a:xfrm>
+            <a:off x="365760" y="6144768"/>
+            <a:ext cx="8412480" cy="502920"/>
+          </a:xfrm>
+          <a:prstGeom prst="rect">
+            <a:avLst/>
+          </a:prstGeom>
+          <a:noFill/>
+        </p:spPr>
+        <p:txBody>
+          <a:bodyPr wrap="square">
+            <a:spAutoFit/>
+          </a:bodyPr>
+          <a:lstStyle/>
+          <a:p>
+            <a:pPr algn="ctr">
+              <a:defRPr sz="1000">
+                <a:solidFill>
+                  <a:srgbClr val="505050"/>
+                </a:solidFill>
+              </a:defRPr>
+            </a:pPr>
+            <a:r>
+              <a:t>演示场景「老人倾诉」· 风险 0.23 · 机器人主动安抚回复</a:t>
+            </a:r>
+          </a:p>
+        </p:txBody>
+      </p:sp>
       <p:sp>
         <p:nvSpPr>
           <p:cNvPr id="6" name="TextBox 5"/>
@@ -4660,8 +4660,8 @@
         </p:nvSpPr>
         <p:spPr>
           <a:xfrm>
-            <a:off x="292608" y="4617720"/>
-            <a:ext cx="8549640" cy="411480"/>
+            <a:off x="365760" y="530352"/>
+            <a:ext cx="8412480" cy="566928"/>
           </a:xfrm>
           <a:prstGeom prst="rect">
             <a:avLst/>
@@ -4669,20 +4669,20 @@
           <a:noFill/>
         </p:spPr>
         <p:txBody>
-          <a:bodyPr wrap="none">
+          <a:bodyPr wrap="square">
             <a:spAutoFit/>
           </a:bodyPr>
           <a:lstStyle/>
           <a:p>
-            <a:pPr algn="ctr">
-              <a:defRPr sz="1100">
-                <a:solidFill>
-                  <a:srgbClr val="505050"/>
-                </a:solidFill>
-              </a:defRPr>
-            </a:pPr>
-            <a:r>
-              <a:t>演示场景「老人倾诉」· 风险 0.23 · 机器人主动安抚回复</a:t>
+            <a:pPr algn="l">
+              <a:defRPr sz="2100" b="1">
+                <a:solidFill>
+                  <a:srgbClr val="1E1E1E"/>
+                </a:solidFill>
+              </a:defRPr>
+            </a:pPr>
+            <a:r>
+              <a:t>系统界面：老人倾诉场景（演示剧本）</a:t>
             </a:r>
           </a:p>
         </p:txBody>
@@ -4803,44 +4803,9 @@
           </a:p>
         </p:txBody>
       </p:sp>
-      <p:sp>
-        <p:nvSpPr>
-          <p:cNvPr id="4" name="TextBox 3"/>
-          <p:cNvSpPr txBox="1"/>
-          <p:nvPr/>
-        </p:nvSpPr>
-        <p:spPr>
-          <a:xfrm>
-            <a:off x="502920" y="685800"/>
-            <a:ext cx="8138160" cy="731520"/>
-          </a:xfrm>
-          <a:prstGeom prst="rect">
-            <a:avLst/>
-          </a:prstGeom>
-          <a:noFill/>
-        </p:spPr>
-        <p:txBody>
-          <a:bodyPr wrap="none">
-            <a:spAutoFit/>
-          </a:bodyPr>
-          <a:lstStyle/>
-          <a:p>
-            <a:pPr algn="l">
-              <a:defRPr sz="2600" b="1">
-                <a:solidFill>
-                  <a:srgbClr val="1E1E1E"/>
-                </a:solidFill>
-              </a:defRPr>
-            </a:pPr>
-            <a:r>
-              <a:t>系统界面：风险决策仪表盘</a:t>
-            </a:r>
-          </a:p>
-        </p:txBody>
-      </p:sp>
       <p:pic>
         <p:nvPicPr>
-          <p:cNvPr id="5" name="Picture 4" descr="ppt_risk_panel.png"/>
+          <p:cNvPr id="4" name="Picture 3" descr="ppt_risk_panel.png"/>
           <p:cNvPicPr>
             <a:picLocks noChangeAspect="1"/>
           </p:cNvPicPr>
@@ -4854,14 +4819,49 @@
         </p:blipFill>
         <p:spPr>
           <a:xfrm>
-            <a:off x="292608" y="1024128"/>
-            <a:ext cx="8549640" cy="10180036"/>
+            <a:off x="2594520" y="1261872"/>
+            <a:ext cx="3954958" cy="4709160"/>
           </a:xfrm>
           <a:prstGeom prst="rect">
             <a:avLst/>
           </a:prstGeom>
         </p:spPr>
       </p:pic>
+      <p:sp>
+        <p:nvSpPr>
+          <p:cNvPr id="5" name="TextBox 4"/>
+          <p:cNvSpPr txBox="1"/>
+          <p:nvPr/>
+        </p:nvSpPr>
+        <p:spPr>
+          <a:xfrm>
+            <a:off x="365760" y="6144768"/>
+            <a:ext cx="8412480" cy="502920"/>
+          </a:xfrm>
+          <a:prstGeom prst="rect">
+            <a:avLst/>
+          </a:prstGeom>
+          <a:noFill/>
+        </p:spPr>
+        <p:txBody>
+          <a:bodyPr wrap="square">
+            <a:spAutoFit/>
+          </a:bodyPr>
+          <a:lstStyle/>
+          <a:p>
+            <a:pPr algn="ctr">
+              <a:defRPr sz="1000">
+                <a:solidFill>
+                  <a:srgbClr val="505050"/>
+                </a:solidFill>
+              </a:defRPr>
+            </a:pPr>
+            <a:r>
+              <a:t>多模态融合输出：风险分数、因素、机器人回应及四项监测指标</a:t>
+            </a:r>
+          </a:p>
+        </p:txBody>
+      </p:sp>
       <p:sp>
         <p:nvSpPr>
           <p:cNvPr id="6" name="TextBox 5"/>
@@ -4870,8 +4870,8 @@
         </p:nvSpPr>
         <p:spPr>
           <a:xfrm>
-            <a:off x="292608" y="4617720"/>
-            <a:ext cx="8549640" cy="411480"/>
+            <a:off x="365760" y="530352"/>
+            <a:ext cx="8412480" cy="566928"/>
           </a:xfrm>
           <a:prstGeom prst="rect">
             <a:avLst/>
@@ -4879,20 +4879,20 @@
           <a:noFill/>
         </p:spPr>
         <p:txBody>
-          <a:bodyPr wrap="none">
+          <a:bodyPr wrap="square">
             <a:spAutoFit/>
           </a:bodyPr>
           <a:lstStyle/>
           <a:p>
-            <a:pPr algn="ctr">
-              <a:defRPr sz="1100">
-                <a:solidFill>
-                  <a:srgbClr val="505050"/>
-                </a:solidFill>
-              </a:defRPr>
-            </a:pPr>
-            <a:r>
-              <a:t>多模态融合输出：风险分数、因素、机器人回应及四项监测指标</a:t>
+            <a:pPr algn="l">
+              <a:defRPr sz="2100" b="1">
+                <a:solidFill>
+                  <a:srgbClr val="1E1E1E"/>
+                </a:solidFill>
+              </a:defRPr>
+            </a:pPr>
+            <a:r>
+              <a:t>系统界面：风险决策仪表盘</a:t>
             </a:r>
           </a:p>
         </p:txBody>
@@ -5013,44 +5013,9 @@
           </a:p>
         </p:txBody>
       </p:sp>
-      <p:sp>
-        <p:nvSpPr>
-          <p:cNvPr id="4" name="TextBox 3"/>
-          <p:cNvSpPr txBox="1"/>
-          <p:nvPr/>
-        </p:nvSpPr>
-        <p:spPr>
-          <a:xfrm>
-            <a:off x="502920" y="685800"/>
-            <a:ext cx="8138160" cy="731520"/>
-          </a:xfrm>
-          <a:prstGeom prst="rect">
-            <a:avLst/>
-          </a:prstGeom>
-          <a:noFill/>
-        </p:spPr>
-        <p:txBody>
-          <a:bodyPr wrap="none">
-            <a:spAutoFit/>
-          </a:bodyPr>
-          <a:lstStyle/>
-          <a:p>
-            <a:pPr algn="l">
-              <a:defRPr sz="2600" b="1">
-                <a:solidFill>
-                  <a:srgbClr val="1E1E1E"/>
-                </a:solidFill>
-              </a:defRPr>
-            </a:pPr>
-            <a:r>
-              <a:t>系统界面：紧急状态监测</a:t>
-            </a:r>
-          </a:p>
-        </p:txBody>
-      </p:sp>
       <p:pic>
         <p:nvPicPr>
-          <p:cNvPr id="5" name="Picture 4" descr="ppt_header_perception.png"/>
+          <p:cNvPr id="4" name="Picture 3" descr="ppt_header_perception.png"/>
           <p:cNvPicPr>
             <a:picLocks noChangeAspect="1"/>
           </p:cNvPicPr>
@@ -5064,14 +5029,49 @@
         </p:blipFill>
         <p:spPr>
           <a:xfrm>
-            <a:off x="292608" y="1024128"/>
-            <a:ext cx="8549640" cy="4425107"/>
+            <a:off x="502919" y="1261872"/>
+            <a:ext cx="8138160" cy="4212133"/>
           </a:xfrm>
           <a:prstGeom prst="rect">
             <a:avLst/>
           </a:prstGeom>
         </p:spPr>
       </p:pic>
+      <p:sp>
+        <p:nvSpPr>
+          <p:cNvPr id="5" name="TextBox 4"/>
+          <p:cNvSpPr txBox="1"/>
+          <p:nvPr/>
+        </p:nvSpPr>
+        <p:spPr>
+          <a:xfrm>
+            <a:off x="365760" y="6144768"/>
+            <a:ext cx="8412480" cy="502920"/>
+          </a:xfrm>
+          <a:prstGeom prst="rect">
+            <a:avLst/>
+          </a:prstGeom>
+          <a:noFill/>
+        </p:spPr>
+        <p:txBody>
+          <a:bodyPr wrap="square">
+            <a:spAutoFit/>
+          </a:bodyPr>
+          <a:lstStyle/>
+          <a:p>
+            <a:pPr algn="ctr">
+              <a:defRPr sz="1000">
+                <a:solidFill>
+                  <a:srgbClr val="505050"/>
+                </a:solidFill>
+              </a:defRPr>
+            </a:pPr>
+            <a:r>
+              <a:t>状态机进入「紧急」· 感知输入与 MediaPipe 视觉模块</a:t>
+            </a:r>
+          </a:p>
+        </p:txBody>
+      </p:sp>
       <p:sp>
         <p:nvSpPr>
           <p:cNvPr id="6" name="TextBox 5"/>
@@ -5080,8 +5080,8 @@
         </p:nvSpPr>
         <p:spPr>
           <a:xfrm>
-            <a:off x="292608" y="4617720"/>
-            <a:ext cx="8549640" cy="411480"/>
+            <a:off x="365760" y="530352"/>
+            <a:ext cx="8412480" cy="566928"/>
           </a:xfrm>
           <a:prstGeom prst="rect">
             <a:avLst/>
@@ -5089,20 +5089,20 @@
           <a:noFill/>
         </p:spPr>
         <p:txBody>
-          <a:bodyPr wrap="none">
+          <a:bodyPr wrap="square">
             <a:spAutoFit/>
           </a:bodyPr>
           <a:lstStyle/>
           <a:p>
-            <a:pPr algn="ctr">
-              <a:defRPr sz="1100">
-                <a:solidFill>
-                  <a:srgbClr val="505050"/>
-                </a:solidFill>
-              </a:defRPr>
-            </a:pPr>
-            <a:r>
-              <a:t>状态机进入「紧急」· 感知输入与 MediaPipe 视觉模块</a:t>
+            <a:pPr algn="l">
+              <a:defRPr sz="2100" b="1">
+                <a:solidFill>
+                  <a:srgbClr val="1E1E1E"/>
+                </a:solidFill>
+              </a:defRPr>
+            </a:pPr>
+            <a:r>
+              <a:t>系统界面：紧急状态监测</a:t>
             </a:r>
           </a:p>
         </p:txBody>
@@ -5223,44 +5223,9 @@
           </a:p>
         </p:txBody>
       </p:sp>
-      <p:sp>
-        <p:nvSpPr>
-          <p:cNvPr id="4" name="TextBox 3"/>
-          <p:cNvSpPr txBox="1"/>
-          <p:nvPr/>
-        </p:nvSpPr>
-        <p:spPr>
-          <a:xfrm>
-            <a:off x="502920" y="685800"/>
-            <a:ext cx="8138160" cy="731520"/>
-          </a:xfrm>
-          <a:prstGeom prst="rect">
-            <a:avLst/>
-          </a:prstGeom>
-          <a:noFill/>
-        </p:spPr>
-        <p:txBody>
-          <a:bodyPr wrap="none">
-            <a:spAutoFit/>
-          </a:bodyPr>
-          <a:lstStyle/>
-          <a:p>
-            <a:pPr algn="l">
-              <a:defRPr sz="2600" b="1">
-                <a:solidFill>
-                  <a:srgbClr val="1E1E1E"/>
-                </a:solidFill>
-              </a:defRPr>
-            </a:pPr>
-            <a:r>
-              <a:t>系统界面：跌倒紧急对话日志</a:t>
-            </a:r>
-          </a:p>
-        </p:txBody>
-      </p:sp>
       <p:pic>
         <p:nvPicPr>
-          <p:cNvPr id="5" name="Picture 4" descr="ppt_chat_emergency.png"/>
+          <p:cNvPr id="4" name="Picture 3" descr="ppt_chat_emergency.png"/>
           <p:cNvPicPr>
             <a:picLocks noChangeAspect="1"/>
           </p:cNvPicPr>
@@ -5274,14 +5239,49 @@
         </p:blipFill>
         <p:spPr>
           <a:xfrm>
-            <a:off x="292608" y="1024128"/>
-            <a:ext cx="8549640" cy="4600441"/>
+            <a:off x="502919" y="1261872"/>
+            <a:ext cx="8138160" cy="4379029"/>
           </a:xfrm>
           <a:prstGeom prst="rect">
             <a:avLst/>
           </a:prstGeom>
         </p:spPr>
       </p:pic>
+      <p:sp>
+        <p:nvSpPr>
+          <p:cNvPr id="5" name="TextBox 4"/>
+          <p:cNvSpPr txBox="1"/>
+          <p:nvPr/>
+        </p:nvSpPr>
+        <p:spPr>
+          <a:xfrm>
+            <a:off x="365760" y="6144768"/>
+            <a:ext cx="8412480" cy="502920"/>
+          </a:xfrm>
+          <a:prstGeom prst="rect">
+            <a:avLst/>
+          </a:prstGeom>
+          <a:noFill/>
+        </p:spPr>
+        <p:txBody>
+          <a:bodyPr wrap="square">
+            <a:spAutoFit/>
+          </a:bodyPr>
+          <a:lstStyle/>
+          <a:p>
+            <a:pPr algn="ctr">
+              <a:defRPr sz="1000">
+                <a:solidFill>
+                  <a:srgbClr val="505050"/>
+                </a:solidFill>
+              </a:defRPr>
+            </a:pPr>
+            <a:r>
+              <a:t>演示完成：跌倒紧急流程已成功触发 · 多次紧急安抚语音</a:t>
+            </a:r>
+          </a:p>
+        </p:txBody>
+      </p:sp>
       <p:sp>
         <p:nvSpPr>
           <p:cNvPr id="6" name="TextBox 5"/>
@@ -5290,8 +5290,8 @@
         </p:nvSpPr>
         <p:spPr>
           <a:xfrm>
-            <a:off x="292608" y="4617720"/>
-            <a:ext cx="8549640" cy="411480"/>
+            <a:off x="365760" y="530352"/>
+            <a:ext cx="8412480" cy="566928"/>
           </a:xfrm>
           <a:prstGeom prst="rect">
             <a:avLst/>
@@ -5299,20 +5299,20 @@
           <a:noFill/>
         </p:spPr>
         <p:txBody>
-          <a:bodyPr wrap="none">
+          <a:bodyPr wrap="square">
             <a:spAutoFit/>
           </a:bodyPr>
           <a:lstStyle/>
           <a:p>
-            <a:pPr algn="ctr">
-              <a:defRPr sz="1100">
-                <a:solidFill>
-                  <a:srgbClr val="505050"/>
-                </a:solidFill>
-              </a:defRPr>
-            </a:pPr>
-            <a:r>
-              <a:t>演示完成：跌倒紧急流程已成功触发 · 多次紧急安抚语音</a:t>
+            <a:pPr algn="l">
+              <a:defRPr sz="2100" b="1">
+                <a:solidFill>
+                  <a:srgbClr val="1E1E1E"/>
+                </a:solidFill>
+              </a:defRPr>
+            </a:pPr>
+            <a:r>
+              <a:t>系统界面：跌倒紧急对话日志</a:t>
             </a:r>
           </a:p>
         </p:txBody>
@@ -5433,44 +5433,9 @@
           </a:p>
         </p:txBody>
       </p:sp>
-      <p:sp>
-        <p:nvSpPr>
-          <p:cNvPr id="4" name="TextBox 3"/>
-          <p:cNvSpPr txBox="1"/>
-          <p:nvPr/>
-        </p:nvSpPr>
-        <p:spPr>
-          <a:xfrm>
-            <a:off x="502920" y="685800"/>
-            <a:ext cx="8138160" cy="731520"/>
-          </a:xfrm>
-          <a:prstGeom prst="rect">
-            <a:avLst/>
-          </a:prstGeom>
-          <a:noFill/>
-        </p:spPr>
-        <p:txBody>
-          <a:bodyPr wrap="none">
-            <a:spAutoFit/>
-          </a:bodyPr>
-          <a:lstStyle/>
-          <a:p>
-            <a:pPr algn="l">
-              <a:defRPr sz="2600" b="1">
-                <a:solidFill>
-                  <a:srgbClr val="1E1E1E"/>
-                </a:solidFill>
-              </a:defRPr>
-            </a:pPr>
-            <a:r>
-              <a:t>系统界面：机器人指令流</a:t>
-            </a:r>
-          </a:p>
-        </p:txBody>
-      </p:sp>
       <p:pic>
         <p:nvPicPr>
-          <p:cNvPr id="5" name="Picture 4" descr="ppt_robot_commands.png"/>
+          <p:cNvPr id="4" name="Picture 3" descr="ppt_robot_commands.png"/>
           <p:cNvPicPr>
             <a:picLocks noChangeAspect="1"/>
           </p:cNvPicPr>
@@ -5484,14 +5449,49 @@
         </p:blipFill>
         <p:spPr>
           <a:xfrm>
-            <a:off x="292608" y="1024128"/>
-            <a:ext cx="8549640" cy="1928679"/>
+            <a:off x="502919" y="1261872"/>
+            <a:ext cx="8138160" cy="1835854"/>
           </a:xfrm>
           <a:prstGeom prst="rect">
             <a:avLst/>
           </a:prstGeom>
         </p:spPr>
       </p:pic>
+      <p:sp>
+        <p:nvSpPr>
+          <p:cNvPr id="5" name="TextBox 4"/>
+          <p:cNvSpPr txBox="1"/>
+          <p:nvPr/>
+        </p:nvSpPr>
+        <p:spPr>
+          <a:xfrm>
+            <a:off x="365760" y="6144768"/>
+            <a:ext cx="8412480" cy="502920"/>
+          </a:xfrm>
+          <a:prstGeom prst="rect">
+            <a:avLst/>
+          </a:prstGeom>
+          <a:noFill/>
+        </p:spPr>
+        <p:txBody>
+          <a:bodyPr wrap="square">
+            <a:spAutoFit/>
+          </a:bodyPr>
+          <a:lstStyle/>
+          <a:p>
+            <a:pPr algn="ctr">
+              <a:defRPr sz="1000">
+                <a:solidFill>
+                  <a:srgbClr val="505050"/>
+                </a:solidFill>
+              </a:defRPr>
+            </a:pPr>
+            <a:r>
+              <a:t>告警音 → 语音 → 紧急呼叫（跌倒事件）→ 举手手势，全链路可追溯</a:t>
+            </a:r>
+          </a:p>
+        </p:txBody>
+      </p:sp>
       <p:sp>
         <p:nvSpPr>
           <p:cNvPr id="6" name="TextBox 5"/>
@@ -5500,8 +5500,8 @@
         </p:nvSpPr>
         <p:spPr>
           <a:xfrm>
-            <a:off x="292608" y="4617720"/>
-            <a:ext cx="8549640" cy="411480"/>
+            <a:off x="365760" y="530352"/>
+            <a:ext cx="8412480" cy="566928"/>
           </a:xfrm>
           <a:prstGeom prst="rect">
             <a:avLst/>
@@ -5509,20 +5509,20 @@
           <a:noFill/>
         </p:spPr>
         <p:txBody>
-          <a:bodyPr wrap="none">
+          <a:bodyPr wrap="square">
             <a:spAutoFit/>
           </a:bodyPr>
           <a:lstStyle/>
           <a:p>
-            <a:pPr algn="ctr">
-              <a:defRPr sz="1100">
-                <a:solidFill>
-                  <a:srgbClr val="505050"/>
-                </a:solidFill>
-              </a:defRPr>
-            </a:pPr>
-            <a:r>
-              <a:t>告警音 → 语音 → 紧急呼叫（跌倒事件）→ 举手手势，全链路可追溯</a:t>
+            <a:pPr algn="l">
+              <a:defRPr sz="2100" b="1">
+                <a:solidFill>
+                  <a:srgbClr val="1E1E1E"/>
+                </a:solidFill>
+              </a:defRPr>
+            </a:pPr>
+            <a:r>
+              <a:t>系统界面：机器人指令流</a:t>
             </a:r>
           </a:p>
         </p:txBody>
@@ -5660,7 +5660,7 @@
           <a:noFill/>
         </p:spPr>
         <p:txBody>
-          <a:bodyPr wrap="none">
+          <a:bodyPr wrap="square">
             <a:spAutoFit/>
           </a:bodyPr>
           <a:lstStyle/>
@@ -5695,7 +5695,7 @@
           <a:noFill/>
         </p:spPr>
         <p:txBody>
-          <a:bodyPr wrap="none">
+          <a:bodyPr wrap="square">
             <a:spAutoFit/>
           </a:bodyPr>
           <a:lstStyle/>
@@ -5846,7 +5846,7 @@
           <a:noFill/>
         </p:spPr>
         <p:txBody>
-          <a:bodyPr wrap="none">
+          <a:bodyPr wrap="square">
             <a:spAutoFit/>
           </a:bodyPr>
           <a:lstStyle/>
@@ -6349,7 +6349,7 @@
           <a:noFill/>
         </p:spPr>
         <p:txBody>
-          <a:bodyPr wrap="none">
+          <a:bodyPr wrap="square">
             <a:spAutoFit/>
           </a:bodyPr>
           <a:lstStyle/>
@@ -6613,7 +6613,7 @@
           <a:noFill/>
         </p:spPr>
         <p:txBody>
-          <a:bodyPr wrap="none">
+          <a:bodyPr wrap="square">
             <a:spAutoFit/>
           </a:bodyPr>
           <a:lstStyle/>
@@ -6648,7 +6648,7 @@
           <a:noFill/>
         </p:spPr>
         <p:txBody>
-          <a:bodyPr wrap="none">
+          <a:bodyPr wrap="square">
             <a:spAutoFit/>
           </a:bodyPr>
           <a:lstStyle/>
@@ -6799,7 +6799,7 @@
           <a:noFill/>
         </p:spPr>
         <p:txBody>
-          <a:bodyPr wrap="none">
+          <a:bodyPr wrap="square">
             <a:spAutoFit/>
           </a:bodyPr>
           <a:lstStyle/>
@@ -7224,7 +7224,7 @@
           <a:noFill/>
         </p:spPr>
         <p:txBody>
-          <a:bodyPr wrap="none">
+          <a:bodyPr wrap="square">
             <a:spAutoFit/>
           </a:bodyPr>
           <a:lstStyle/>
@@ -7473,7 +7473,7 @@
           <a:noFill/>
         </p:spPr>
         <p:txBody>
-          <a:bodyPr wrap="none">
+          <a:bodyPr wrap="square">
             <a:spAutoFit/>
           </a:bodyPr>
           <a:lstStyle/>
@@ -7908,7 +7908,7 @@
           <a:noFill/>
         </p:spPr>
         <p:txBody>
-          <a:bodyPr wrap="none">
+          <a:bodyPr wrap="square">
             <a:spAutoFit/>
           </a:bodyPr>
           <a:lstStyle/>
@@ -8097,7 +8097,7 @@
           <a:noFill/>
         </p:spPr>
         <p:txBody>
-          <a:bodyPr wrap="none">
+          <a:bodyPr wrap="square">
             <a:spAutoFit/>
           </a:bodyPr>
           <a:lstStyle/>
@@ -8472,7 +8472,7 @@
           <a:noFill/>
         </p:spPr>
         <p:txBody>
-          <a:bodyPr wrap="none">
+          <a:bodyPr wrap="square">
             <a:spAutoFit/>
           </a:bodyPr>
           <a:lstStyle/>
@@ -8661,7 +8661,7 @@
           <a:noFill/>
         </p:spPr>
         <p:txBody>
-          <a:bodyPr wrap="none">
+          <a:bodyPr wrap="square">
             <a:spAutoFit/>
           </a:bodyPr>
           <a:lstStyle/>
@@ -8696,7 +8696,7 @@
           <a:noFill/>
         </p:spPr>
         <p:txBody>
-          <a:bodyPr wrap="none">
+          <a:bodyPr wrap="square">
             <a:spAutoFit/>
           </a:bodyPr>
           <a:lstStyle/>
@@ -8847,7 +8847,7 @@
           <a:noFill/>
         </p:spPr>
         <p:txBody>
-          <a:bodyPr wrap="none">
+          <a:bodyPr wrap="square">
             <a:spAutoFit/>
           </a:bodyPr>
           <a:lstStyle/>
@@ -9096,7 +9096,7 @@
           <a:noFill/>
         </p:spPr>
         <p:txBody>
-          <a:bodyPr wrap="none">
+          <a:bodyPr wrap="square">
             <a:spAutoFit/>
           </a:bodyPr>
           <a:lstStyle/>
@@ -9368,7 +9368,7 @@
           <a:noFill/>
         </p:spPr>
         <p:txBody>
-          <a:bodyPr wrap="none">
+          <a:bodyPr wrap="square">
             <a:spAutoFit/>
           </a:bodyPr>
           <a:lstStyle/>

--- a/docs/答辩_CareCompanion.pptx
+++ b/docs/答辩_CareCompanion.pptx
@@ -3130,7 +3130,7 @@
         <p:spPr>
           <a:xfrm>
             <a:off x="0" y="0"/>
-            <a:ext cx="9144000" cy="502920"/>
+            <a:ext cx="9144000" cy="475488"/>
           </a:xfrm>
           <a:prstGeom prst="rect">
             <a:avLst/>
@@ -3187,14 +3187,14 @@
           <a:lstStyle/>
           <a:p>
             <a:pPr>
-              <a:defRPr sz="1100" b="1">
+              <a:defRPr sz="1000" b="1">
                 <a:solidFill>
                   <a:srgbClr val="FFFFFF"/>
                 </a:solidFill>
               </a:defRPr>
             </a:pPr>
             <a:r>
-              <a:t>第二十六届中国机器人及人工智能大赛</a:t>
+              <a:t>第二十八届中国机器人及人工智能大赛</a:t>
             </a:r>
           </a:p>
           <a:p>
@@ -3219,7 +3219,7 @@
         </p:nvSpPr>
         <p:spPr>
           <a:xfrm>
-            <a:off x="502920" y="1463040"/>
+            <a:off x="502920" y="1051560"/>
             <a:ext cx="8138160" cy="731520"/>
           </a:xfrm>
           <a:prstGeom prst="rect">
@@ -3234,7 +3234,7 @@
           <a:lstStyle/>
           <a:p>
             <a:pPr algn="ctr">
-              <a:defRPr sz="3600" b="1">
+              <a:defRPr sz="3400" b="1">
                 <a:solidFill>
                   <a:srgbClr val="143278"/>
                 </a:solidFill>
@@ -3254,7 +3254,7 @@
         </p:nvSpPr>
         <p:spPr>
           <a:xfrm>
-            <a:off x="502920" y="2148840"/>
+            <a:off x="502920" y="1627632"/>
             <a:ext cx="8138160" cy="731520"/>
           </a:xfrm>
           <a:prstGeom prst="rect">
@@ -3269,7 +3269,7 @@
           <a:lstStyle/>
           <a:p>
             <a:pPr algn="ctr">
-              <a:defRPr sz="2200" b="1">
+              <a:defRPr sz="2100" b="1">
                 <a:solidFill>
                   <a:srgbClr val="1E1E1E"/>
                 </a:solidFill>
@@ -3289,8 +3289,8 @@
         </p:nvSpPr>
         <p:spPr>
           <a:xfrm>
-            <a:off x="502920" y="2743200"/>
-            <a:ext cx="7315200" cy="3474720"/>
+            <a:off x="502920" y="2240280"/>
+            <a:ext cx="7498079" cy="3474720"/>
           </a:xfrm>
           <a:prstGeom prst="rect">
             <a:avLst/>
@@ -3307,17 +3307,12 @@
               <a:lnSpc>
                 <a:spcPct val="135000"/>
               </a:lnSpc>
-              <a:defRPr sz="1800" b="1">
+              <a:defRPr sz="1600" b="1">
                 <a:solidFill>
                   <a:srgbClr val="1E1E1E"/>
                 </a:solidFill>
               </a:defRPr>
             </a:pPr>
-            <a:r>
-              <a:t>第一部分</a:t>
-            </a:r>
-            <a:br/>
-            <a:br/>
             <a:r>
               <a:t>「感知—决策—执行」一体化的居家养老安全陪伴平台</a:t>
             </a:r>
@@ -3332,7 +3327,7 @@
         </p:nvSpPr>
         <p:spPr>
           <a:xfrm>
-            <a:off x="502920" y="4434840"/>
+            <a:off x="502920" y="4274820"/>
             <a:ext cx="8138160" cy="274320"/>
           </a:xfrm>
           <a:prstGeom prst="rect">
@@ -3354,7 +3349,7 @@
               </a:defRPr>
             </a:pPr>
             <a:r>
-              <a:t>第二十六届中国机器人及人工智能大赛</a:t>
+              <a:t>第二十八届中国机器人及人工智能大赛</a:t>
             </a:r>
           </a:p>
         </p:txBody>
@@ -3367,7 +3362,7 @@
         </p:nvSpPr>
         <p:spPr>
           <a:xfrm>
-            <a:off x="502920" y="4690872"/>
+            <a:off x="502920" y="4512564"/>
             <a:ext cx="8138160" cy="274320"/>
           </a:xfrm>
           <a:prstGeom prst="rect">
@@ -3429,7 +3424,7 @@
         <p:spPr>
           <a:xfrm>
             <a:off x="0" y="0"/>
-            <a:ext cx="9144000" cy="502920"/>
+            <a:ext cx="9144000" cy="475488"/>
           </a:xfrm>
           <a:prstGeom prst="rect">
             <a:avLst/>
@@ -3486,14 +3481,14 @@
           <a:lstStyle/>
           <a:p>
             <a:pPr>
-              <a:defRPr sz="1100" b="1">
+              <a:defRPr sz="1000" b="1">
                 <a:solidFill>
                   <a:srgbClr val="FFFFFF"/>
                 </a:solidFill>
               </a:defRPr>
             </a:pPr>
             <a:r>
-              <a:t>第二十六届中国机器人及人工智能大赛</a:t>
+              <a:t>第二十八届中国机器人及人工智能大赛</a:t>
             </a:r>
           </a:p>
           <a:p>
@@ -3518,7 +3513,7 @@
         </p:nvSpPr>
         <p:spPr>
           <a:xfrm>
-            <a:off x="502920" y="685800"/>
+            <a:off x="502920" y="566928"/>
             <a:ext cx="8138160" cy="731520"/>
           </a:xfrm>
           <a:prstGeom prst="rect">
@@ -3533,7 +3528,7 @@
           <a:lstStyle/>
           <a:p>
             <a:pPr algn="l">
-              <a:defRPr sz="2600" b="1">
+              <a:defRPr sz="2400" b="1">
                 <a:solidFill>
                   <a:srgbClr val="1E1E1E"/>
                 </a:solidFill>
@@ -3648,7 +3643,7 @@
         <p:spPr>
           <a:xfrm>
             <a:off x="0" y="0"/>
-            <a:ext cx="9144000" cy="502920"/>
+            <a:ext cx="9144000" cy="475488"/>
           </a:xfrm>
           <a:prstGeom prst="rect">
             <a:avLst/>
@@ -3705,14 +3700,14 @@
           <a:lstStyle/>
           <a:p>
             <a:pPr>
-              <a:defRPr sz="1100" b="1">
+              <a:defRPr sz="1000" b="1">
                 <a:solidFill>
                   <a:srgbClr val="FFFFFF"/>
                 </a:solidFill>
               </a:defRPr>
             </a:pPr>
             <a:r>
-              <a:t>第二十六届中国机器人及人工智能大赛</a:t>
+              <a:t>第二十八届中国机器人及人工智能大赛</a:t>
             </a:r>
           </a:p>
           <a:p>
@@ -3726,12 +3721,57 @@
             <a:r>
               <a:t>机器人创新赛道</a:t>
             </a:r>
+          </a:p>
+        </p:txBody>
+      </p:sp>
+      <p:sp>
+        <p:nvSpPr>
+          <p:cNvPr id="4" name="Rectangle 3"/>
+          <p:cNvSpPr/>
+          <p:nvPr/>
+        </p:nvSpPr>
+        <p:spPr>
+          <a:xfrm>
+            <a:off x="2375151" y="914400"/>
+            <a:ext cx="4393697" cy="3753611"/>
+          </a:xfrm>
+          <a:prstGeom prst="rect">
+            <a:avLst/>
+          </a:prstGeom>
+          <a:solidFill>
+            <a:srgbClr val="EBF2FA"/>
+          </a:solidFill>
+          <a:ln w="9525">
+            <a:solidFill>
+              <a:srgbClr val="B4C3DC"/>
+            </a:solidFill>
+          </a:ln>
+        </p:spPr>
+        <p:style>
+          <a:lnRef idx="1">
+            <a:schemeClr val="accent1"/>
+          </a:lnRef>
+          <a:fillRef idx="3">
+            <a:schemeClr val="accent1"/>
+          </a:fillRef>
+          <a:effectRef idx="2">
+            <a:schemeClr val="accent1"/>
+          </a:effectRef>
+          <a:fontRef idx="minor">
+            <a:schemeClr val="lt1"/>
+          </a:fontRef>
+        </p:style>
+        <p:txBody>
+          <a:bodyPr rtlCol="0" anchor="ctr"/>
+          <a:lstStyle/>
+          <a:p>
+            <a:pPr algn="ctr"/>
           </a:p>
         </p:txBody>
       </p:sp>
       <p:pic>
         <p:nvPicPr>
-          <p:cNvPr id="4" name="Picture 3" descr="ppt_emotion_input.png"/>
+          <p:cNvPr id="5" name="Picture 4" descr="ppt_emotion_input.png"/>
           <p:cNvPicPr>
             <a:picLocks noChangeAspect="1"/>
           </p:cNvPicPr>
@@ -3745,8 +3785,8 @@
         </p:blipFill>
         <p:spPr>
           <a:xfrm>
-            <a:off x="1803814" y="1261872"/>
-            <a:ext cx="5536371" cy="4709160"/>
+            <a:off x="2430015" y="969264"/>
+            <a:ext cx="4283969" cy="3643884"/>
           </a:xfrm>
           <a:prstGeom prst="rect">
             <a:avLst/>
@@ -3755,14 +3795,49 @@
       </p:pic>
       <p:sp>
         <p:nvSpPr>
-          <p:cNvPr id="5" name="TextBox 4"/>
+          <p:cNvPr id="6" name="TextBox 5"/>
           <p:cNvSpPr txBox="1"/>
           <p:nvPr/>
         </p:nvSpPr>
         <p:spPr>
           <a:xfrm>
-            <a:off x="365760" y="6144768"/>
-            <a:ext cx="8412480" cy="502920"/>
+            <a:off x="411480" y="4638751"/>
+            <a:ext cx="8321040" cy="347472"/>
+          </a:xfrm>
+          <a:prstGeom prst="rect">
+            <a:avLst/>
+          </a:prstGeom>
+          <a:noFill/>
+        </p:spPr>
+        <p:txBody>
+          <a:bodyPr wrap="square" anchor="ctr">
+            <a:spAutoFit/>
+          </a:bodyPr>
+          <a:lstStyle/>
+          <a:p>
+            <a:pPr algn="ctr">
+              <a:defRPr sz="900">
+                <a:solidFill>
+                  <a:srgbClr val="505050"/>
+                </a:solidFill>
+              </a:defRPr>
+            </a:pPr>
+            <a:r>
+              <a:t>老人输入「最近有点孤独，睡不太好」→ 系统识别情绪低落并生成安抚话术</a:t>
+            </a:r>
+          </a:p>
+        </p:txBody>
+      </p:sp>
+      <p:sp>
+        <p:nvSpPr>
+          <p:cNvPr id="7" name="TextBox 6"/>
+          <p:cNvSpPr txBox="1"/>
+          <p:nvPr/>
+        </p:nvSpPr>
+        <p:spPr>
+          <a:xfrm>
+            <a:off x="411480" y="530352"/>
+            <a:ext cx="8321040" cy="384048"/>
           </a:xfrm>
           <a:prstGeom prst="rect">
             <a:avLst/>
@@ -3776,42 +3851,7 @@
           <a:lstStyle/>
           <a:p>
             <a:pPr algn="ctr">
-              <a:defRPr sz="1000">
-                <a:solidFill>
-                  <a:srgbClr val="505050"/>
-                </a:solidFill>
-              </a:defRPr>
-            </a:pPr>
-            <a:r>
-              <a:t>老人输入「最近有点孤独，睡不太好」→ 系统识别情绪低落并生成安抚话术</a:t>
-            </a:r>
-          </a:p>
-        </p:txBody>
-      </p:sp>
-      <p:sp>
-        <p:nvSpPr>
-          <p:cNvPr id="6" name="TextBox 5"/>
-          <p:cNvSpPr txBox="1"/>
-          <p:nvPr/>
-        </p:nvSpPr>
-        <p:spPr>
-          <a:xfrm>
-            <a:off x="365760" y="530352"/>
-            <a:ext cx="8412480" cy="566928"/>
-          </a:xfrm>
-          <a:prstGeom prst="rect">
-            <a:avLst/>
-          </a:prstGeom>
-          <a:noFill/>
-        </p:spPr>
-        <p:txBody>
-          <a:bodyPr wrap="square">
-            <a:spAutoFit/>
-          </a:bodyPr>
-          <a:lstStyle/>
-          <a:p>
-            <a:pPr algn="l">
-              <a:defRPr sz="2100" b="1">
+              <a:defRPr sz="1900" b="1">
                 <a:solidFill>
                   <a:srgbClr val="1E1E1E"/>
                 </a:solidFill>
@@ -3858,7 +3898,7 @@
         <p:spPr>
           <a:xfrm>
             <a:off x="0" y="0"/>
-            <a:ext cx="9144000" cy="502920"/>
+            <a:ext cx="9144000" cy="475488"/>
           </a:xfrm>
           <a:prstGeom prst="rect">
             <a:avLst/>
@@ -3915,14 +3955,14 @@
           <a:lstStyle/>
           <a:p>
             <a:pPr>
-              <a:defRPr sz="1100" b="1">
+              <a:defRPr sz="1000" b="1">
                 <a:solidFill>
                   <a:srgbClr val="FFFFFF"/>
                 </a:solidFill>
               </a:defRPr>
             </a:pPr>
             <a:r>
-              <a:t>第二十六届中国机器人及人工智能大赛</a:t>
+              <a:t>第二十八届中国机器人及人工智能大赛</a:t>
             </a:r>
           </a:p>
           <a:p>
@@ -3947,7 +3987,7 @@
         </p:nvSpPr>
         <p:spPr>
           <a:xfrm>
-            <a:off x="502920" y="685800"/>
+            <a:off x="502920" y="566928"/>
             <a:ext cx="8138160" cy="731520"/>
           </a:xfrm>
           <a:prstGeom prst="rect">
@@ -3962,7 +4002,7 @@
           <a:lstStyle/>
           <a:p>
             <a:pPr algn="l">
-              <a:defRPr sz="2600" b="1">
+              <a:defRPr sz="2400" b="1">
                 <a:solidFill>
                   <a:srgbClr val="1E1E1E"/>
                 </a:solidFill>
@@ -4107,7 +4147,7 @@
         <p:spPr>
           <a:xfrm>
             <a:off x="0" y="0"/>
-            <a:ext cx="9144000" cy="502920"/>
+            <a:ext cx="9144000" cy="475488"/>
           </a:xfrm>
           <a:prstGeom prst="rect">
             <a:avLst/>
@@ -4164,14 +4204,14 @@
           <a:lstStyle/>
           <a:p>
             <a:pPr>
-              <a:defRPr sz="1100" b="1">
+              <a:defRPr sz="1000" b="1">
                 <a:solidFill>
                   <a:srgbClr val="FFFFFF"/>
                 </a:solidFill>
               </a:defRPr>
             </a:pPr>
             <a:r>
-              <a:t>第二十六届中国机器人及人工智能大赛</a:t>
+              <a:t>第二十八届中国机器人及人工智能大赛</a:t>
             </a:r>
           </a:p>
           <a:p>
@@ -4196,7 +4236,7 @@
         </p:nvSpPr>
         <p:spPr>
           <a:xfrm>
-            <a:off x="502920" y="1828800"/>
+            <a:off x="502920" y="2068830"/>
             <a:ext cx="8138160" cy="731520"/>
           </a:xfrm>
           <a:prstGeom prst="rect">
@@ -4211,7 +4251,7 @@
           <a:lstStyle/>
           <a:p>
             <a:pPr algn="ctr">
-              <a:defRPr sz="3200" b="1">
+              <a:defRPr sz="3000" b="1">
                 <a:solidFill>
                   <a:srgbClr val="1E1E1E"/>
                 </a:solidFill>
@@ -4231,7 +4271,7 @@
         </p:nvSpPr>
         <p:spPr>
           <a:xfrm>
-            <a:off x="502920" y="2606040"/>
+            <a:off x="502920" y="2617470"/>
             <a:ext cx="8138160" cy="731520"/>
           </a:xfrm>
           <a:prstGeom prst="rect">
@@ -4246,7 +4286,7 @@
           <a:lstStyle/>
           <a:p>
             <a:pPr algn="ctr">
-              <a:defRPr sz="2200" b="1">
+              <a:defRPr sz="2000" b="1">
                 <a:solidFill>
                   <a:srgbClr val="143278"/>
                 </a:solidFill>
@@ -4293,7 +4333,7 @@
         <p:spPr>
           <a:xfrm>
             <a:off x="0" y="0"/>
-            <a:ext cx="9144000" cy="502920"/>
+            <a:ext cx="9144000" cy="475488"/>
           </a:xfrm>
           <a:prstGeom prst="rect">
             <a:avLst/>
@@ -4350,14 +4390,14 @@
           <a:lstStyle/>
           <a:p>
             <a:pPr>
-              <a:defRPr sz="1100" b="1">
+              <a:defRPr sz="1000" b="1">
                 <a:solidFill>
                   <a:srgbClr val="FFFFFF"/>
                 </a:solidFill>
               </a:defRPr>
             </a:pPr>
             <a:r>
-              <a:t>第二十六届中国机器人及人工智能大赛</a:t>
+              <a:t>第二十八届中国机器人及人工智能大赛</a:t>
             </a:r>
           </a:p>
           <a:p>
@@ -4382,7 +4422,7 @@
         </p:nvSpPr>
         <p:spPr>
           <a:xfrm>
-            <a:off x="502920" y="685800"/>
+            <a:off x="502920" y="566928"/>
             <a:ext cx="8138160" cy="731520"/>
           </a:xfrm>
           <a:prstGeom prst="rect">
@@ -4397,7 +4437,7 @@
           <a:lstStyle/>
           <a:p>
             <a:pPr algn="l">
-              <a:defRPr sz="2600" b="1">
+              <a:defRPr sz="2400" b="1">
                 <a:solidFill>
                   <a:srgbClr val="1E1E1E"/>
                 </a:solidFill>
@@ -4512,7 +4552,7 @@
         <p:spPr>
           <a:xfrm>
             <a:off x="0" y="0"/>
-            <a:ext cx="9144000" cy="502920"/>
+            <a:ext cx="9144000" cy="475488"/>
           </a:xfrm>
           <a:prstGeom prst="rect">
             <a:avLst/>
@@ -4569,14 +4609,14 @@
           <a:lstStyle/>
           <a:p>
             <a:pPr>
-              <a:defRPr sz="1100" b="1">
+              <a:defRPr sz="1000" b="1">
                 <a:solidFill>
                   <a:srgbClr val="FFFFFF"/>
                 </a:solidFill>
               </a:defRPr>
             </a:pPr>
             <a:r>
-              <a:t>第二十六届中国机器人及人工智能大赛</a:t>
+              <a:t>第二十八届中国机器人及人工智能大赛</a:t>
             </a:r>
           </a:p>
           <a:p>
@@ -4590,12 +4630,57 @@
             <a:r>
               <a:t>机器人创新赛道</a:t>
             </a:r>
+          </a:p>
+        </p:txBody>
+      </p:sp>
+      <p:sp>
+        <p:nvSpPr>
+          <p:cNvPr id="4" name="Rectangle 3"/>
+          <p:cNvSpPr/>
+          <p:nvPr/>
+        </p:nvSpPr>
+        <p:spPr>
+          <a:xfrm>
+            <a:off x="1023374" y="914400"/>
+            <a:ext cx="7097250" cy="3753611"/>
+          </a:xfrm>
+          <a:prstGeom prst="rect">
+            <a:avLst/>
+          </a:prstGeom>
+          <a:solidFill>
+            <a:srgbClr val="EBF2FA"/>
+          </a:solidFill>
+          <a:ln w="9525">
+            <a:solidFill>
+              <a:srgbClr val="B4C3DC"/>
+            </a:solidFill>
+          </a:ln>
+        </p:spPr>
+        <p:style>
+          <a:lnRef idx="1">
+            <a:schemeClr val="accent1"/>
+          </a:lnRef>
+          <a:fillRef idx="3">
+            <a:schemeClr val="accent1"/>
+          </a:fillRef>
+          <a:effectRef idx="2">
+            <a:schemeClr val="accent1"/>
+          </a:effectRef>
+          <a:fontRef idx="minor">
+            <a:schemeClr val="lt1"/>
+          </a:fontRef>
+        </p:style>
+        <p:txBody>
+          <a:bodyPr rtlCol="0" anchor="ctr"/>
+          <a:lstStyle/>
+          <a:p>
+            <a:pPr algn="ctr"/>
           </a:p>
         </p:txBody>
       </p:sp>
       <p:pic>
         <p:nvPicPr>
-          <p:cNvPr id="4" name="Picture 3" descr="ppt_full_dashboard.png"/>
+          <p:cNvPr id="5" name="Picture 4" descr="ppt_full_dashboard.png"/>
           <p:cNvPicPr>
             <a:picLocks noChangeAspect="1"/>
           </p:cNvPicPr>
@@ -4609,8 +4694,8 @@
         </p:blipFill>
         <p:spPr>
           <a:xfrm>
-            <a:off x="502919" y="1261872"/>
-            <a:ext cx="8138160" cy="4243923"/>
+            <a:off x="1078238" y="969264"/>
+            <a:ext cx="6987522" cy="3643884"/>
           </a:xfrm>
           <a:prstGeom prst="rect">
             <a:avLst/>
@@ -4619,14 +4704,49 @@
       </p:pic>
       <p:sp>
         <p:nvSpPr>
-          <p:cNvPr id="5" name="TextBox 4"/>
+          <p:cNvPr id="6" name="TextBox 5"/>
           <p:cNvSpPr txBox="1"/>
           <p:nvPr/>
         </p:nvSpPr>
         <p:spPr>
           <a:xfrm>
-            <a:off x="365760" y="6144768"/>
-            <a:ext cx="8412480" cy="502920"/>
+            <a:off x="411480" y="4638751"/>
+            <a:ext cx="8321040" cy="347472"/>
+          </a:xfrm>
+          <a:prstGeom prst="rect">
+            <a:avLst/>
+          </a:prstGeom>
+          <a:noFill/>
+        </p:spPr>
+        <p:txBody>
+          <a:bodyPr wrap="square" anchor="ctr">
+            <a:spAutoFit/>
+          </a:bodyPr>
+          <a:lstStyle/>
+          <a:p>
+            <a:pPr algn="ctr">
+              <a:defRPr sz="900">
+                <a:solidFill>
+                  <a:srgbClr val="505050"/>
+                </a:solidFill>
+              </a:defRPr>
+            </a:pPr>
+            <a:r>
+              <a:t>演示场景「老人倾诉」· 风险 0.23 · 机器人主动安抚回复</a:t>
+            </a:r>
+          </a:p>
+        </p:txBody>
+      </p:sp>
+      <p:sp>
+        <p:nvSpPr>
+          <p:cNvPr id="7" name="TextBox 6"/>
+          <p:cNvSpPr txBox="1"/>
+          <p:nvPr/>
+        </p:nvSpPr>
+        <p:spPr>
+          <a:xfrm>
+            <a:off x="411480" y="530352"/>
+            <a:ext cx="8321040" cy="384048"/>
           </a:xfrm>
           <a:prstGeom prst="rect">
             <a:avLst/>
@@ -4640,42 +4760,7 @@
           <a:lstStyle/>
           <a:p>
             <a:pPr algn="ctr">
-              <a:defRPr sz="1000">
-                <a:solidFill>
-                  <a:srgbClr val="505050"/>
-                </a:solidFill>
-              </a:defRPr>
-            </a:pPr>
-            <a:r>
-              <a:t>演示场景「老人倾诉」· 风险 0.23 · 机器人主动安抚回复</a:t>
-            </a:r>
-          </a:p>
-        </p:txBody>
-      </p:sp>
-      <p:sp>
-        <p:nvSpPr>
-          <p:cNvPr id="6" name="TextBox 5"/>
-          <p:cNvSpPr txBox="1"/>
-          <p:nvPr/>
-        </p:nvSpPr>
-        <p:spPr>
-          <a:xfrm>
-            <a:off x="365760" y="530352"/>
-            <a:ext cx="8412480" cy="566928"/>
-          </a:xfrm>
-          <a:prstGeom prst="rect">
-            <a:avLst/>
-          </a:prstGeom>
-          <a:noFill/>
-        </p:spPr>
-        <p:txBody>
-          <a:bodyPr wrap="square">
-            <a:spAutoFit/>
-          </a:bodyPr>
-          <a:lstStyle/>
-          <a:p>
-            <a:pPr algn="l">
-              <a:defRPr sz="2100" b="1">
+              <a:defRPr sz="1900" b="1">
                 <a:solidFill>
                   <a:srgbClr val="1E1E1E"/>
                 </a:solidFill>
@@ -4722,7 +4807,7 @@
         <p:spPr>
           <a:xfrm>
             <a:off x="0" y="0"/>
-            <a:ext cx="9144000" cy="502920"/>
+            <a:ext cx="9144000" cy="475488"/>
           </a:xfrm>
           <a:prstGeom prst="rect">
             <a:avLst/>
@@ -4779,14 +4864,14 @@
           <a:lstStyle/>
           <a:p>
             <a:pPr>
-              <a:defRPr sz="1100" b="1">
+              <a:defRPr sz="1000" b="1">
                 <a:solidFill>
                   <a:srgbClr val="FFFFFF"/>
                 </a:solidFill>
               </a:defRPr>
             </a:pPr>
             <a:r>
-              <a:t>第二十六届中国机器人及人工智能大赛</a:t>
+              <a:t>第二十八届中国机器人及人工智能大赛</a:t>
             </a:r>
           </a:p>
           <a:p>
@@ -4800,12 +4885,57 @@
             <a:r>
               <a:t>机器人创新赛道</a:t>
             </a:r>
+          </a:p>
+        </p:txBody>
+      </p:sp>
+      <p:sp>
+        <p:nvSpPr>
+          <p:cNvPr id="4" name="Rectangle 3"/>
+          <p:cNvSpPr/>
+          <p:nvPr/>
+        </p:nvSpPr>
+        <p:spPr>
+          <a:xfrm>
+            <a:off x="2986989" y="914400"/>
+            <a:ext cx="3170021" cy="3753611"/>
+          </a:xfrm>
+          <a:prstGeom prst="rect">
+            <a:avLst/>
+          </a:prstGeom>
+          <a:solidFill>
+            <a:srgbClr val="EBF2FA"/>
+          </a:solidFill>
+          <a:ln w="9525">
+            <a:solidFill>
+              <a:srgbClr val="B4C3DC"/>
+            </a:solidFill>
+          </a:ln>
+        </p:spPr>
+        <p:style>
+          <a:lnRef idx="1">
+            <a:schemeClr val="accent1"/>
+          </a:lnRef>
+          <a:fillRef idx="3">
+            <a:schemeClr val="accent1"/>
+          </a:fillRef>
+          <a:effectRef idx="2">
+            <a:schemeClr val="accent1"/>
+          </a:effectRef>
+          <a:fontRef idx="minor">
+            <a:schemeClr val="lt1"/>
+          </a:fontRef>
+        </p:style>
+        <p:txBody>
+          <a:bodyPr rtlCol="0" anchor="ctr"/>
+          <a:lstStyle/>
+          <a:p>
+            <a:pPr algn="ctr"/>
           </a:p>
         </p:txBody>
       </p:sp>
       <p:pic>
         <p:nvPicPr>
-          <p:cNvPr id="4" name="Picture 3" descr="ppt_risk_panel.png"/>
+          <p:cNvPr id="5" name="Picture 4" descr="ppt_risk_panel.png"/>
           <p:cNvPicPr>
             <a:picLocks noChangeAspect="1"/>
           </p:cNvPicPr>
@@ -4819,8 +4949,8 @@
         </p:blipFill>
         <p:spPr>
           <a:xfrm>
-            <a:off x="2594520" y="1261872"/>
-            <a:ext cx="3954958" cy="4709160"/>
+            <a:off x="3041853" y="969264"/>
+            <a:ext cx="3060293" cy="3643884"/>
           </a:xfrm>
           <a:prstGeom prst="rect">
             <a:avLst/>
@@ -4829,14 +4959,49 @@
       </p:pic>
       <p:sp>
         <p:nvSpPr>
-          <p:cNvPr id="5" name="TextBox 4"/>
+          <p:cNvPr id="6" name="TextBox 5"/>
           <p:cNvSpPr txBox="1"/>
           <p:nvPr/>
         </p:nvSpPr>
         <p:spPr>
           <a:xfrm>
-            <a:off x="365760" y="6144768"/>
-            <a:ext cx="8412480" cy="502920"/>
+            <a:off x="411480" y="4638751"/>
+            <a:ext cx="8321040" cy="347472"/>
+          </a:xfrm>
+          <a:prstGeom prst="rect">
+            <a:avLst/>
+          </a:prstGeom>
+          <a:noFill/>
+        </p:spPr>
+        <p:txBody>
+          <a:bodyPr wrap="square" anchor="ctr">
+            <a:spAutoFit/>
+          </a:bodyPr>
+          <a:lstStyle/>
+          <a:p>
+            <a:pPr algn="ctr">
+              <a:defRPr sz="900">
+                <a:solidFill>
+                  <a:srgbClr val="505050"/>
+                </a:solidFill>
+              </a:defRPr>
+            </a:pPr>
+            <a:r>
+              <a:t>多模态融合输出：风险分数、因素、机器人回应及四项监测指标</a:t>
+            </a:r>
+          </a:p>
+        </p:txBody>
+      </p:sp>
+      <p:sp>
+        <p:nvSpPr>
+          <p:cNvPr id="7" name="TextBox 6"/>
+          <p:cNvSpPr txBox="1"/>
+          <p:nvPr/>
+        </p:nvSpPr>
+        <p:spPr>
+          <a:xfrm>
+            <a:off x="411480" y="530352"/>
+            <a:ext cx="8321040" cy="384048"/>
           </a:xfrm>
           <a:prstGeom prst="rect">
             <a:avLst/>
@@ -4850,42 +5015,7 @@
           <a:lstStyle/>
           <a:p>
             <a:pPr algn="ctr">
-              <a:defRPr sz="1000">
-                <a:solidFill>
-                  <a:srgbClr val="505050"/>
-                </a:solidFill>
-              </a:defRPr>
-            </a:pPr>
-            <a:r>
-              <a:t>多模态融合输出：风险分数、因素、机器人回应及四项监测指标</a:t>
-            </a:r>
-          </a:p>
-        </p:txBody>
-      </p:sp>
-      <p:sp>
-        <p:nvSpPr>
-          <p:cNvPr id="6" name="TextBox 5"/>
-          <p:cNvSpPr txBox="1"/>
-          <p:nvPr/>
-        </p:nvSpPr>
-        <p:spPr>
-          <a:xfrm>
-            <a:off x="365760" y="530352"/>
-            <a:ext cx="8412480" cy="566928"/>
-          </a:xfrm>
-          <a:prstGeom prst="rect">
-            <a:avLst/>
-          </a:prstGeom>
-          <a:noFill/>
-        </p:spPr>
-        <p:txBody>
-          <a:bodyPr wrap="square">
-            <a:spAutoFit/>
-          </a:bodyPr>
-          <a:lstStyle/>
-          <a:p>
-            <a:pPr algn="l">
-              <a:defRPr sz="2100" b="1">
+              <a:defRPr sz="1900" b="1">
                 <a:solidFill>
                   <a:srgbClr val="1E1E1E"/>
                 </a:solidFill>
@@ -4932,7 +5062,7 @@
         <p:spPr>
           <a:xfrm>
             <a:off x="0" y="0"/>
-            <a:ext cx="9144000" cy="502920"/>
+            <a:ext cx="9144000" cy="475488"/>
           </a:xfrm>
           <a:prstGeom prst="rect">
             <a:avLst/>
@@ -4989,14 +5119,14 @@
           <a:lstStyle/>
           <a:p>
             <a:pPr>
-              <a:defRPr sz="1100" b="1">
+              <a:defRPr sz="1000" b="1">
                 <a:solidFill>
                   <a:srgbClr val="FFFFFF"/>
                 </a:solidFill>
               </a:defRPr>
             </a:pPr>
             <a:r>
-              <a:t>第二十六届中国机器人及人工智能大赛</a:t>
+              <a:t>第二十八届中国机器人及人工智能大赛</a:t>
             </a:r>
           </a:p>
           <a:p>
@@ -5010,12 +5140,57 @@
             <a:r>
               <a:t>机器人创新赛道</a:t>
             </a:r>
+          </a:p>
+        </p:txBody>
+      </p:sp>
+      <p:sp>
+        <p:nvSpPr>
+          <p:cNvPr id="4" name="Rectangle 3"/>
+          <p:cNvSpPr/>
+          <p:nvPr/>
+        </p:nvSpPr>
+        <p:spPr>
+          <a:xfrm>
+            <a:off x="997006" y="914400"/>
+            <a:ext cx="7149986" cy="3753611"/>
+          </a:xfrm>
+          <a:prstGeom prst="rect">
+            <a:avLst/>
+          </a:prstGeom>
+          <a:solidFill>
+            <a:srgbClr val="EBF2FA"/>
+          </a:solidFill>
+          <a:ln w="9525">
+            <a:solidFill>
+              <a:srgbClr val="B4C3DC"/>
+            </a:solidFill>
+          </a:ln>
+        </p:spPr>
+        <p:style>
+          <a:lnRef idx="1">
+            <a:schemeClr val="accent1"/>
+          </a:lnRef>
+          <a:fillRef idx="3">
+            <a:schemeClr val="accent1"/>
+          </a:fillRef>
+          <a:effectRef idx="2">
+            <a:schemeClr val="accent1"/>
+          </a:effectRef>
+          <a:fontRef idx="minor">
+            <a:schemeClr val="lt1"/>
+          </a:fontRef>
+        </p:style>
+        <p:txBody>
+          <a:bodyPr rtlCol="0" anchor="ctr"/>
+          <a:lstStyle/>
+          <a:p>
+            <a:pPr algn="ctr"/>
           </a:p>
         </p:txBody>
       </p:sp>
       <p:pic>
         <p:nvPicPr>
-          <p:cNvPr id="4" name="Picture 3" descr="ppt_header_perception.png"/>
+          <p:cNvPr id="5" name="Picture 4" descr="ppt_header_perception.png"/>
           <p:cNvPicPr>
             <a:picLocks noChangeAspect="1"/>
           </p:cNvPicPr>
@@ -5029,8 +5204,8 @@
         </p:blipFill>
         <p:spPr>
           <a:xfrm>
-            <a:off x="502919" y="1261872"/>
-            <a:ext cx="8138160" cy="4212133"/>
+            <a:off x="1051870" y="969264"/>
+            <a:ext cx="7040258" cy="3643884"/>
           </a:xfrm>
           <a:prstGeom prst="rect">
             <a:avLst/>
@@ -5039,14 +5214,49 @@
       </p:pic>
       <p:sp>
         <p:nvSpPr>
-          <p:cNvPr id="5" name="TextBox 4"/>
+          <p:cNvPr id="6" name="TextBox 5"/>
           <p:cNvSpPr txBox="1"/>
           <p:nvPr/>
         </p:nvSpPr>
         <p:spPr>
           <a:xfrm>
-            <a:off x="365760" y="6144768"/>
-            <a:ext cx="8412480" cy="502920"/>
+            <a:off x="411480" y="4638751"/>
+            <a:ext cx="8321040" cy="347472"/>
+          </a:xfrm>
+          <a:prstGeom prst="rect">
+            <a:avLst/>
+          </a:prstGeom>
+          <a:noFill/>
+        </p:spPr>
+        <p:txBody>
+          <a:bodyPr wrap="square" anchor="ctr">
+            <a:spAutoFit/>
+          </a:bodyPr>
+          <a:lstStyle/>
+          <a:p>
+            <a:pPr algn="ctr">
+              <a:defRPr sz="900">
+                <a:solidFill>
+                  <a:srgbClr val="505050"/>
+                </a:solidFill>
+              </a:defRPr>
+            </a:pPr>
+            <a:r>
+              <a:t>状态机进入「紧急」· 感知输入与 MediaPipe 视觉模块</a:t>
+            </a:r>
+          </a:p>
+        </p:txBody>
+      </p:sp>
+      <p:sp>
+        <p:nvSpPr>
+          <p:cNvPr id="7" name="TextBox 6"/>
+          <p:cNvSpPr txBox="1"/>
+          <p:nvPr/>
+        </p:nvSpPr>
+        <p:spPr>
+          <a:xfrm>
+            <a:off x="411480" y="530352"/>
+            <a:ext cx="8321040" cy="384048"/>
           </a:xfrm>
           <a:prstGeom prst="rect">
             <a:avLst/>
@@ -5060,42 +5270,7 @@
           <a:lstStyle/>
           <a:p>
             <a:pPr algn="ctr">
-              <a:defRPr sz="1000">
-                <a:solidFill>
-                  <a:srgbClr val="505050"/>
-                </a:solidFill>
-              </a:defRPr>
-            </a:pPr>
-            <a:r>
-              <a:t>状态机进入「紧急」· 感知输入与 MediaPipe 视觉模块</a:t>
-            </a:r>
-          </a:p>
-        </p:txBody>
-      </p:sp>
-      <p:sp>
-        <p:nvSpPr>
-          <p:cNvPr id="6" name="TextBox 5"/>
-          <p:cNvSpPr txBox="1"/>
-          <p:nvPr/>
-        </p:nvSpPr>
-        <p:spPr>
-          <a:xfrm>
-            <a:off x="365760" y="530352"/>
-            <a:ext cx="8412480" cy="566928"/>
-          </a:xfrm>
-          <a:prstGeom prst="rect">
-            <a:avLst/>
-          </a:prstGeom>
-          <a:noFill/>
-        </p:spPr>
-        <p:txBody>
-          <a:bodyPr wrap="square">
-            <a:spAutoFit/>
-          </a:bodyPr>
-          <a:lstStyle/>
-          <a:p>
-            <a:pPr algn="l">
-              <a:defRPr sz="2100" b="1">
+              <a:defRPr sz="1900" b="1">
                 <a:solidFill>
                   <a:srgbClr val="1E1E1E"/>
                 </a:solidFill>
@@ -5142,7 +5317,7 @@
         <p:spPr>
           <a:xfrm>
             <a:off x="0" y="0"/>
-            <a:ext cx="9144000" cy="502920"/>
+            <a:ext cx="9144000" cy="475488"/>
           </a:xfrm>
           <a:prstGeom prst="rect">
             <a:avLst/>
@@ -5199,14 +5374,14 @@
           <a:lstStyle/>
           <a:p>
             <a:pPr>
-              <a:defRPr sz="1100" b="1">
+              <a:defRPr sz="1000" b="1">
                 <a:solidFill>
                   <a:srgbClr val="FFFFFF"/>
                 </a:solidFill>
               </a:defRPr>
             </a:pPr>
             <a:r>
-              <a:t>第二十六届中国机器人及人工智能大赛</a:t>
+              <a:t>第二十八届中国机器人及人工智能大赛</a:t>
             </a:r>
           </a:p>
           <a:p>
@@ -5220,12 +5395,57 @@
             <a:r>
               <a:t>机器人创新赛道</a:t>
             </a:r>
+          </a:p>
+        </p:txBody>
+      </p:sp>
+      <p:sp>
+        <p:nvSpPr>
+          <p:cNvPr id="4" name="Rectangle 3"/>
+          <p:cNvSpPr/>
+          <p:nvPr/>
+        </p:nvSpPr>
+        <p:spPr>
+          <a:xfrm>
+            <a:off x="1131167" y="914400"/>
+            <a:ext cx="6881664" cy="3753611"/>
+          </a:xfrm>
+          <a:prstGeom prst="rect">
+            <a:avLst/>
+          </a:prstGeom>
+          <a:solidFill>
+            <a:srgbClr val="EBF2FA"/>
+          </a:solidFill>
+          <a:ln w="9525">
+            <a:solidFill>
+              <a:srgbClr val="B4C3DC"/>
+            </a:solidFill>
+          </a:ln>
+        </p:spPr>
+        <p:style>
+          <a:lnRef idx="1">
+            <a:schemeClr val="accent1"/>
+          </a:lnRef>
+          <a:fillRef idx="3">
+            <a:schemeClr val="accent1"/>
+          </a:fillRef>
+          <a:effectRef idx="2">
+            <a:schemeClr val="accent1"/>
+          </a:effectRef>
+          <a:fontRef idx="minor">
+            <a:schemeClr val="lt1"/>
+          </a:fontRef>
+        </p:style>
+        <p:txBody>
+          <a:bodyPr rtlCol="0" anchor="ctr"/>
+          <a:lstStyle/>
+          <a:p>
+            <a:pPr algn="ctr"/>
           </a:p>
         </p:txBody>
       </p:sp>
       <p:pic>
         <p:nvPicPr>
-          <p:cNvPr id="4" name="Picture 3" descr="ppt_chat_emergency.png"/>
+          <p:cNvPr id="5" name="Picture 4" descr="ppt_chat_emergency.png"/>
           <p:cNvPicPr>
             <a:picLocks noChangeAspect="1"/>
           </p:cNvPicPr>
@@ -5239,8 +5459,8 @@
         </p:blipFill>
         <p:spPr>
           <a:xfrm>
-            <a:off x="502919" y="1261872"/>
-            <a:ext cx="8138160" cy="4379029"/>
+            <a:off x="1186031" y="969264"/>
+            <a:ext cx="6771936" cy="3643884"/>
           </a:xfrm>
           <a:prstGeom prst="rect">
             <a:avLst/>
@@ -5249,14 +5469,49 @@
       </p:pic>
       <p:sp>
         <p:nvSpPr>
-          <p:cNvPr id="5" name="TextBox 4"/>
+          <p:cNvPr id="6" name="TextBox 5"/>
           <p:cNvSpPr txBox="1"/>
           <p:nvPr/>
         </p:nvSpPr>
         <p:spPr>
           <a:xfrm>
-            <a:off x="365760" y="6144768"/>
-            <a:ext cx="8412480" cy="502920"/>
+            <a:off x="411480" y="4638751"/>
+            <a:ext cx="8321040" cy="347472"/>
+          </a:xfrm>
+          <a:prstGeom prst="rect">
+            <a:avLst/>
+          </a:prstGeom>
+          <a:noFill/>
+        </p:spPr>
+        <p:txBody>
+          <a:bodyPr wrap="square" anchor="ctr">
+            <a:spAutoFit/>
+          </a:bodyPr>
+          <a:lstStyle/>
+          <a:p>
+            <a:pPr algn="ctr">
+              <a:defRPr sz="900">
+                <a:solidFill>
+                  <a:srgbClr val="505050"/>
+                </a:solidFill>
+              </a:defRPr>
+            </a:pPr>
+            <a:r>
+              <a:t>演示完成：跌倒紧急流程已成功触发 · 多次紧急安抚语音</a:t>
+            </a:r>
+          </a:p>
+        </p:txBody>
+      </p:sp>
+      <p:sp>
+        <p:nvSpPr>
+          <p:cNvPr id="7" name="TextBox 6"/>
+          <p:cNvSpPr txBox="1"/>
+          <p:nvPr/>
+        </p:nvSpPr>
+        <p:spPr>
+          <a:xfrm>
+            <a:off x="411480" y="530352"/>
+            <a:ext cx="8321040" cy="384048"/>
           </a:xfrm>
           <a:prstGeom prst="rect">
             <a:avLst/>
@@ -5270,42 +5525,7 @@
           <a:lstStyle/>
           <a:p>
             <a:pPr algn="ctr">
-              <a:defRPr sz="1000">
-                <a:solidFill>
-                  <a:srgbClr val="505050"/>
-                </a:solidFill>
-              </a:defRPr>
-            </a:pPr>
-            <a:r>
-              <a:t>演示完成：跌倒紧急流程已成功触发 · 多次紧急安抚语音</a:t>
-            </a:r>
-          </a:p>
-        </p:txBody>
-      </p:sp>
-      <p:sp>
-        <p:nvSpPr>
-          <p:cNvPr id="6" name="TextBox 5"/>
-          <p:cNvSpPr txBox="1"/>
-          <p:nvPr/>
-        </p:nvSpPr>
-        <p:spPr>
-          <a:xfrm>
-            <a:off x="365760" y="530352"/>
-            <a:ext cx="8412480" cy="566928"/>
-          </a:xfrm>
-          <a:prstGeom prst="rect">
-            <a:avLst/>
-          </a:prstGeom>
-          <a:noFill/>
-        </p:spPr>
-        <p:txBody>
-          <a:bodyPr wrap="square">
-            <a:spAutoFit/>
-          </a:bodyPr>
-          <a:lstStyle/>
-          <a:p>
-            <a:pPr algn="l">
-              <a:defRPr sz="2100" b="1">
+              <a:defRPr sz="1900" b="1">
                 <a:solidFill>
                   <a:srgbClr val="1E1E1E"/>
                 </a:solidFill>
@@ -5352,7 +5572,7 @@
         <p:spPr>
           <a:xfrm>
             <a:off x="0" y="0"/>
-            <a:ext cx="9144000" cy="502920"/>
+            <a:ext cx="9144000" cy="475488"/>
           </a:xfrm>
           <a:prstGeom prst="rect">
             <a:avLst/>
@@ -5409,14 +5629,14 @@
           <a:lstStyle/>
           <a:p>
             <a:pPr>
-              <a:defRPr sz="1100" b="1">
+              <a:defRPr sz="1000" b="1">
                 <a:solidFill>
                   <a:srgbClr val="FFFFFF"/>
                 </a:solidFill>
               </a:defRPr>
             </a:pPr>
             <a:r>
-              <a:t>第二十六届中国机器人及人工智能大赛</a:t>
+              <a:t>第二十八届中国机器人及人工智能大赛</a:t>
             </a:r>
           </a:p>
           <a:p>
@@ -5430,12 +5650,57 @@
             <a:r>
               <a:t>机器人创新赛道</a:t>
             </a:r>
+          </a:p>
+        </p:txBody>
+      </p:sp>
+      <p:sp>
+        <p:nvSpPr>
+          <p:cNvPr id="4" name="Rectangle 3"/>
+          <p:cNvSpPr/>
+          <p:nvPr/>
+        </p:nvSpPr>
+        <p:spPr>
+          <a:xfrm>
+            <a:off x="356616" y="1797787"/>
+            <a:ext cx="8430767" cy="1986837"/>
+          </a:xfrm>
+          <a:prstGeom prst="rect">
+            <a:avLst/>
+          </a:prstGeom>
+          <a:solidFill>
+            <a:srgbClr val="EBF2FA"/>
+          </a:solidFill>
+          <a:ln w="9525">
+            <a:solidFill>
+              <a:srgbClr val="B4C3DC"/>
+            </a:solidFill>
+          </a:ln>
+        </p:spPr>
+        <p:style>
+          <a:lnRef idx="1">
+            <a:schemeClr val="accent1"/>
+          </a:lnRef>
+          <a:fillRef idx="3">
+            <a:schemeClr val="accent1"/>
+          </a:fillRef>
+          <a:effectRef idx="2">
+            <a:schemeClr val="accent1"/>
+          </a:effectRef>
+          <a:fontRef idx="minor">
+            <a:schemeClr val="lt1"/>
+          </a:fontRef>
+        </p:style>
+        <p:txBody>
+          <a:bodyPr rtlCol="0" anchor="ctr"/>
+          <a:lstStyle/>
+          <a:p>
+            <a:pPr algn="ctr"/>
           </a:p>
         </p:txBody>
       </p:sp>
       <p:pic>
         <p:nvPicPr>
-          <p:cNvPr id="4" name="Picture 3" descr="ppt_robot_commands.png"/>
+          <p:cNvPr id="5" name="Picture 4" descr="ppt_robot_commands.png"/>
           <p:cNvPicPr>
             <a:picLocks noChangeAspect="1"/>
           </p:cNvPicPr>
@@ -5449,8 +5714,8 @@
         </p:blipFill>
         <p:spPr>
           <a:xfrm>
-            <a:off x="502919" y="1261872"/>
-            <a:ext cx="8138160" cy="1835854"/>
+            <a:off x="411480" y="1852651"/>
+            <a:ext cx="8321040" cy="1877110"/>
           </a:xfrm>
           <a:prstGeom prst="rect">
             <a:avLst/>
@@ -5459,14 +5724,49 @@
       </p:pic>
       <p:sp>
         <p:nvSpPr>
-          <p:cNvPr id="5" name="TextBox 4"/>
+          <p:cNvPr id="6" name="TextBox 5"/>
           <p:cNvSpPr txBox="1"/>
           <p:nvPr/>
         </p:nvSpPr>
         <p:spPr>
           <a:xfrm>
-            <a:off x="365760" y="6144768"/>
-            <a:ext cx="8412480" cy="502920"/>
+            <a:off x="411480" y="4638751"/>
+            <a:ext cx="8321040" cy="347472"/>
+          </a:xfrm>
+          <a:prstGeom prst="rect">
+            <a:avLst/>
+          </a:prstGeom>
+          <a:noFill/>
+        </p:spPr>
+        <p:txBody>
+          <a:bodyPr wrap="square" anchor="ctr">
+            <a:spAutoFit/>
+          </a:bodyPr>
+          <a:lstStyle/>
+          <a:p>
+            <a:pPr algn="ctr">
+              <a:defRPr sz="900">
+                <a:solidFill>
+                  <a:srgbClr val="505050"/>
+                </a:solidFill>
+              </a:defRPr>
+            </a:pPr>
+            <a:r>
+              <a:t>告警音 → 语音 → 紧急呼叫（跌倒事件）→ 举手手势，全链路可追溯</a:t>
+            </a:r>
+          </a:p>
+        </p:txBody>
+      </p:sp>
+      <p:sp>
+        <p:nvSpPr>
+          <p:cNvPr id="7" name="TextBox 6"/>
+          <p:cNvSpPr txBox="1"/>
+          <p:nvPr/>
+        </p:nvSpPr>
+        <p:spPr>
+          <a:xfrm>
+            <a:off x="411480" y="530352"/>
+            <a:ext cx="8321040" cy="384048"/>
           </a:xfrm>
           <a:prstGeom prst="rect">
             <a:avLst/>
@@ -5480,42 +5780,7 @@
           <a:lstStyle/>
           <a:p>
             <a:pPr algn="ctr">
-              <a:defRPr sz="1000">
-                <a:solidFill>
-                  <a:srgbClr val="505050"/>
-                </a:solidFill>
-              </a:defRPr>
-            </a:pPr>
-            <a:r>
-              <a:t>告警音 → 语音 → 紧急呼叫（跌倒事件）→ 举手手势，全链路可追溯</a:t>
-            </a:r>
-          </a:p>
-        </p:txBody>
-      </p:sp>
-      <p:sp>
-        <p:nvSpPr>
-          <p:cNvPr id="6" name="TextBox 5"/>
-          <p:cNvSpPr txBox="1"/>
-          <p:nvPr/>
-        </p:nvSpPr>
-        <p:spPr>
-          <a:xfrm>
-            <a:off x="365760" y="530352"/>
-            <a:ext cx="8412480" cy="566928"/>
-          </a:xfrm>
-          <a:prstGeom prst="rect">
-            <a:avLst/>
-          </a:prstGeom>
-          <a:noFill/>
-        </p:spPr>
-        <p:txBody>
-          <a:bodyPr wrap="square">
-            <a:spAutoFit/>
-          </a:bodyPr>
-          <a:lstStyle/>
-          <a:p>
-            <a:pPr algn="l">
-              <a:defRPr sz="2100" b="1">
+              <a:defRPr sz="1900" b="1">
                 <a:solidFill>
                   <a:srgbClr val="1E1E1E"/>
                 </a:solidFill>
@@ -5562,7 +5827,7 @@
         <p:spPr>
           <a:xfrm>
             <a:off x="0" y="0"/>
-            <a:ext cx="9144000" cy="502920"/>
+            <a:ext cx="9144000" cy="475488"/>
           </a:xfrm>
           <a:prstGeom prst="rect">
             <a:avLst/>
@@ -5619,14 +5884,14 @@
           <a:lstStyle/>
           <a:p>
             <a:pPr>
-              <a:defRPr sz="1100" b="1">
+              <a:defRPr sz="1000" b="1">
                 <a:solidFill>
                   <a:srgbClr val="FFFFFF"/>
                 </a:solidFill>
               </a:defRPr>
             </a:pPr>
             <a:r>
-              <a:t>第二十六届中国机器人及人工智能大赛</a:t>
+              <a:t>第二十八届中国机器人及人工智能大赛</a:t>
             </a:r>
           </a:p>
           <a:p>
@@ -5651,7 +5916,7 @@
         </p:nvSpPr>
         <p:spPr>
           <a:xfrm>
-            <a:off x="502920" y="1828800"/>
+            <a:off x="502920" y="2068830"/>
             <a:ext cx="8138160" cy="731520"/>
           </a:xfrm>
           <a:prstGeom prst="rect">
@@ -5666,7 +5931,7 @@
           <a:lstStyle/>
           <a:p>
             <a:pPr algn="ctr">
-              <a:defRPr sz="3200" b="1">
+              <a:defRPr sz="3000" b="1">
                 <a:solidFill>
                   <a:srgbClr val="1E1E1E"/>
                 </a:solidFill>
@@ -5686,7 +5951,7 @@
         </p:nvSpPr>
         <p:spPr>
           <a:xfrm>
-            <a:off x="502920" y="2606040"/>
+            <a:off x="502920" y="2617470"/>
             <a:ext cx="8138160" cy="731520"/>
           </a:xfrm>
           <a:prstGeom prst="rect">
@@ -5701,7 +5966,7 @@
           <a:lstStyle/>
           <a:p>
             <a:pPr algn="ctr">
-              <a:defRPr sz="2200" b="1">
+              <a:defRPr sz="2000" b="1">
                 <a:solidFill>
                   <a:srgbClr val="143278"/>
                 </a:solidFill>
@@ -5748,7 +6013,7 @@
         <p:spPr>
           <a:xfrm>
             <a:off x="0" y="0"/>
-            <a:ext cx="9144000" cy="502920"/>
+            <a:ext cx="9144000" cy="475488"/>
           </a:xfrm>
           <a:prstGeom prst="rect">
             <a:avLst/>
@@ -5805,14 +6070,14 @@
           <a:lstStyle/>
           <a:p>
             <a:pPr>
-              <a:defRPr sz="1100" b="1">
+              <a:defRPr sz="1000" b="1">
                 <a:solidFill>
                   <a:srgbClr val="FFFFFF"/>
                 </a:solidFill>
               </a:defRPr>
             </a:pPr>
             <a:r>
-              <a:t>第二十六届中国机器人及人工智能大赛</a:t>
+              <a:t>第二十八届中国机器人及人工智能大赛</a:t>
             </a:r>
           </a:p>
           <a:p>
@@ -5837,7 +6102,7 @@
         </p:nvSpPr>
         <p:spPr>
           <a:xfrm>
-            <a:off x="502920" y="685800"/>
+            <a:off x="502920" y="566928"/>
             <a:ext cx="8138160" cy="731520"/>
           </a:xfrm>
           <a:prstGeom prst="rect">
@@ -5852,7 +6117,7 @@
           <a:lstStyle/>
           <a:p>
             <a:pPr algn="l">
-              <a:defRPr sz="2600" b="1">
+              <a:defRPr sz="2400" b="1">
                 <a:solidFill>
                   <a:srgbClr val="1E1E1E"/>
                 </a:solidFill>
@@ -6186,7 +6451,7 @@
         </p:nvSpPr>
         <p:spPr>
           <a:xfrm>
-            <a:off x="502920" y="3977639"/>
+            <a:off x="502920" y="3703320"/>
             <a:ext cx="8138160" cy="3474720"/>
           </a:xfrm>
           <a:prstGeom prst="rect">
@@ -6251,7 +6516,7 @@
         <p:spPr>
           <a:xfrm>
             <a:off x="0" y="0"/>
-            <a:ext cx="9144000" cy="502920"/>
+            <a:ext cx="9144000" cy="475488"/>
           </a:xfrm>
           <a:prstGeom prst="rect">
             <a:avLst/>
@@ -6308,14 +6573,14 @@
           <a:lstStyle/>
           <a:p>
             <a:pPr>
-              <a:defRPr sz="1100" b="1">
+              <a:defRPr sz="1000" b="1">
                 <a:solidFill>
                   <a:srgbClr val="FFFFFF"/>
                 </a:solidFill>
               </a:defRPr>
             </a:pPr>
             <a:r>
-              <a:t>第二十六届中国机器人及人工智能大赛</a:t>
+              <a:t>第二十八届中国机器人及人工智能大赛</a:t>
             </a:r>
           </a:p>
           <a:p>
@@ -6340,7 +6605,7 @@
         </p:nvSpPr>
         <p:spPr>
           <a:xfrm>
-            <a:off x="502920" y="685800"/>
+            <a:off x="502920" y="566928"/>
             <a:ext cx="8138160" cy="731520"/>
           </a:xfrm>
           <a:prstGeom prst="rect">
@@ -6355,7 +6620,7 @@
           <a:lstStyle/>
           <a:p>
             <a:pPr algn="l">
-              <a:defRPr sz="2600" b="1">
+              <a:defRPr sz="2400" b="1">
                 <a:solidFill>
                   <a:srgbClr val="1E1E1E"/>
                 </a:solidFill>
@@ -6515,7 +6780,7 @@
         <p:spPr>
           <a:xfrm>
             <a:off x="0" y="0"/>
-            <a:ext cx="9144000" cy="502920"/>
+            <a:ext cx="9144000" cy="475488"/>
           </a:xfrm>
           <a:prstGeom prst="rect">
             <a:avLst/>
@@ -6572,14 +6837,14 @@
           <a:lstStyle/>
           <a:p>
             <a:pPr>
-              <a:defRPr sz="1100" b="1">
+              <a:defRPr sz="1000" b="1">
                 <a:solidFill>
                   <a:srgbClr val="FFFFFF"/>
                 </a:solidFill>
               </a:defRPr>
             </a:pPr>
             <a:r>
-              <a:t>第二十六届中国机器人及人工智能大赛</a:t>
+              <a:t>第二十八届中国机器人及人工智能大赛</a:t>
             </a:r>
           </a:p>
           <a:p>
@@ -6604,7 +6869,7 @@
         </p:nvSpPr>
         <p:spPr>
           <a:xfrm>
-            <a:off x="502920" y="1828800"/>
+            <a:off x="502920" y="2068830"/>
             <a:ext cx="8138160" cy="731520"/>
           </a:xfrm>
           <a:prstGeom prst="rect">
@@ -6619,7 +6884,7 @@
           <a:lstStyle/>
           <a:p>
             <a:pPr algn="ctr">
-              <a:defRPr sz="3200" b="1">
+              <a:defRPr sz="3000" b="1">
                 <a:solidFill>
                   <a:srgbClr val="1E1E1E"/>
                 </a:solidFill>
@@ -6639,7 +6904,7 @@
         </p:nvSpPr>
         <p:spPr>
           <a:xfrm>
-            <a:off x="502920" y="2606040"/>
+            <a:off x="502920" y="2617470"/>
             <a:ext cx="8138160" cy="731520"/>
           </a:xfrm>
           <a:prstGeom prst="rect">
@@ -6654,7 +6919,7 @@
           <a:lstStyle/>
           <a:p>
             <a:pPr algn="ctr">
-              <a:defRPr sz="2200" b="1">
+              <a:defRPr sz="2000" b="1">
                 <a:solidFill>
                   <a:srgbClr val="143278"/>
                 </a:solidFill>
@@ -6701,7 +6966,7 @@
         <p:spPr>
           <a:xfrm>
             <a:off x="0" y="0"/>
-            <a:ext cx="9144000" cy="502920"/>
+            <a:ext cx="9144000" cy="475488"/>
           </a:xfrm>
           <a:prstGeom prst="rect">
             <a:avLst/>
@@ -6758,14 +7023,14 @@
           <a:lstStyle/>
           <a:p>
             <a:pPr>
-              <a:defRPr sz="1100" b="1">
+              <a:defRPr sz="1000" b="1">
                 <a:solidFill>
                   <a:srgbClr val="FFFFFF"/>
                 </a:solidFill>
               </a:defRPr>
             </a:pPr>
             <a:r>
-              <a:t>第二十六届中国机器人及人工智能大赛</a:t>
+              <a:t>第二十八届中国机器人及人工智能大赛</a:t>
             </a:r>
           </a:p>
           <a:p>
@@ -6790,7 +7055,7 @@
         </p:nvSpPr>
         <p:spPr>
           <a:xfrm>
-            <a:off x="502920" y="685800"/>
+            <a:off x="502920" y="566928"/>
             <a:ext cx="8138160" cy="731520"/>
           </a:xfrm>
           <a:prstGeom prst="rect">
@@ -6805,7 +7070,7 @@
           <a:lstStyle/>
           <a:p>
             <a:pPr algn="l">
-              <a:defRPr sz="2600" b="1">
+              <a:defRPr sz="2400" b="1">
                 <a:solidFill>
                   <a:srgbClr val="1E1E1E"/>
                 </a:solidFill>
@@ -7126,7 +7391,7 @@
         <p:spPr>
           <a:xfrm>
             <a:off x="0" y="0"/>
-            <a:ext cx="9144000" cy="502920"/>
+            <a:ext cx="9144000" cy="475488"/>
           </a:xfrm>
           <a:prstGeom prst="rect">
             <a:avLst/>
@@ -7183,14 +7448,14 @@
           <a:lstStyle/>
           <a:p>
             <a:pPr>
-              <a:defRPr sz="1100" b="1">
+              <a:defRPr sz="1000" b="1">
                 <a:solidFill>
                   <a:srgbClr val="FFFFFF"/>
                 </a:solidFill>
               </a:defRPr>
             </a:pPr>
             <a:r>
-              <a:t>第二十六届中国机器人及人工智能大赛</a:t>
+              <a:t>第二十八届中国机器人及人工智能大赛</a:t>
             </a:r>
           </a:p>
           <a:p>
@@ -7215,7 +7480,7 @@
         </p:nvSpPr>
         <p:spPr>
           <a:xfrm>
-            <a:off x="502920" y="685800"/>
+            <a:off x="502920" y="566928"/>
             <a:ext cx="8138160" cy="731520"/>
           </a:xfrm>
           <a:prstGeom prst="rect">
@@ -7230,7 +7495,7 @@
           <a:lstStyle/>
           <a:p>
             <a:pPr algn="l">
-              <a:defRPr sz="2600" b="1">
+              <a:defRPr sz="2400" b="1">
                 <a:solidFill>
                   <a:srgbClr val="1E1E1E"/>
                 </a:solidFill>
@@ -7375,7 +7640,7 @@
         <p:spPr>
           <a:xfrm>
             <a:off x="0" y="0"/>
-            <a:ext cx="9144000" cy="502920"/>
+            <a:ext cx="9144000" cy="475488"/>
           </a:xfrm>
           <a:prstGeom prst="rect">
             <a:avLst/>
@@ -7432,14 +7697,14 @@
           <a:lstStyle/>
           <a:p>
             <a:pPr>
-              <a:defRPr sz="1100" b="1">
+              <a:defRPr sz="1000" b="1">
                 <a:solidFill>
                   <a:srgbClr val="FFFFFF"/>
                 </a:solidFill>
               </a:defRPr>
             </a:pPr>
             <a:r>
-              <a:t>第二十六届中国机器人及人工智能大赛</a:t>
+              <a:t>第二十八届中国机器人及人工智能大赛</a:t>
             </a:r>
           </a:p>
           <a:p>
@@ -7464,7 +7729,7 @@
         </p:nvSpPr>
         <p:spPr>
           <a:xfrm>
-            <a:off x="502920" y="685800"/>
+            <a:off x="502920" y="566928"/>
             <a:ext cx="8138160" cy="731520"/>
           </a:xfrm>
           <a:prstGeom prst="rect">
@@ -7479,7 +7744,7 @@
           <a:lstStyle/>
           <a:p>
             <a:pPr algn="l">
-              <a:defRPr sz="2600" b="1">
+              <a:defRPr sz="2400" b="1">
                 <a:solidFill>
                   <a:srgbClr val="1E1E1E"/>
                 </a:solidFill>
@@ -7624,7 +7889,7 @@
         <p:spPr>
           <a:xfrm>
             <a:off x="0" y="0"/>
-            <a:ext cx="9144000" cy="502920"/>
+            <a:ext cx="9144000" cy="475488"/>
           </a:xfrm>
           <a:prstGeom prst="rect">
             <a:avLst/>
@@ -7681,14 +7946,14 @@
           <a:lstStyle/>
           <a:p>
             <a:pPr>
-              <a:defRPr sz="1100" b="1">
+              <a:defRPr sz="1000" b="1">
                 <a:solidFill>
                   <a:srgbClr val="FFFFFF"/>
                 </a:solidFill>
               </a:defRPr>
             </a:pPr>
             <a:r>
-              <a:t>第二十六届中国机器人及人工智能大赛</a:t>
+              <a:t>第二十八届中国机器人及人工智能大赛</a:t>
             </a:r>
           </a:p>
           <a:p>
@@ -7713,8 +7978,8 @@
         </p:nvSpPr>
         <p:spPr>
           <a:xfrm>
-            <a:off x="502920" y="2011680"/>
-            <a:ext cx="8138160" cy="1097280"/>
+            <a:off x="502920" y="2068830"/>
+            <a:ext cx="8138160" cy="914400"/>
           </a:xfrm>
           <a:prstGeom prst="rect">
             <a:avLst/>
@@ -7728,7 +7993,7 @@
           <a:lstStyle/>
           <a:p>
             <a:pPr algn="ctr">
-              <a:defRPr sz="3600" b="1">
+              <a:defRPr sz="3200" b="1">
                 <a:solidFill>
                   <a:srgbClr val="143278"/>
                 </a:solidFill>
@@ -7748,8 +8013,8 @@
         </p:nvSpPr>
         <p:spPr>
           <a:xfrm>
-            <a:off x="502920" y="2926080"/>
-            <a:ext cx="8138160" cy="548640"/>
+            <a:off x="502920" y="2891790"/>
+            <a:ext cx="8138160" cy="457200"/>
           </a:xfrm>
           <a:prstGeom prst="rect">
             <a:avLst/>
@@ -7810,7 +8075,7 @@
         <p:spPr>
           <a:xfrm>
             <a:off x="0" y="0"/>
-            <a:ext cx="9144000" cy="502920"/>
+            <a:ext cx="9144000" cy="475488"/>
           </a:xfrm>
           <a:prstGeom prst="rect">
             <a:avLst/>
@@ -7867,14 +8132,14 @@
           <a:lstStyle/>
           <a:p>
             <a:pPr>
-              <a:defRPr sz="1100" b="1">
+              <a:defRPr sz="1000" b="1">
                 <a:solidFill>
                   <a:srgbClr val="FFFFFF"/>
                 </a:solidFill>
               </a:defRPr>
             </a:pPr>
             <a:r>
-              <a:t>第二十六届中国机器人及人工智能大赛</a:t>
+              <a:t>第二十八届中国机器人及人工智能大赛</a:t>
             </a:r>
           </a:p>
           <a:p>
@@ -7899,7 +8164,7 @@
         </p:nvSpPr>
         <p:spPr>
           <a:xfrm>
-            <a:off x="502920" y="685800"/>
+            <a:off x="502920" y="566928"/>
             <a:ext cx="8138160" cy="731520"/>
           </a:xfrm>
           <a:prstGeom prst="rect">
@@ -7914,7 +8179,7 @@
           <a:lstStyle/>
           <a:p>
             <a:pPr algn="l">
-              <a:defRPr sz="2600" b="1">
+              <a:defRPr sz="2400" b="1">
                 <a:solidFill>
                   <a:srgbClr val="1E1E1E"/>
                 </a:solidFill>
@@ -7999,7 +8264,7 @@
         <p:spPr>
           <a:xfrm>
             <a:off x="0" y="0"/>
-            <a:ext cx="9144000" cy="502920"/>
+            <a:ext cx="9144000" cy="475488"/>
           </a:xfrm>
           <a:prstGeom prst="rect">
             <a:avLst/>
@@ -8056,14 +8321,14 @@
           <a:lstStyle/>
           <a:p>
             <a:pPr>
-              <a:defRPr sz="1100" b="1">
+              <a:defRPr sz="1000" b="1">
                 <a:solidFill>
                   <a:srgbClr val="FFFFFF"/>
                 </a:solidFill>
               </a:defRPr>
             </a:pPr>
             <a:r>
-              <a:t>第二十六届中国机器人及人工智能大赛</a:t>
+              <a:t>第二十八届中国机器人及人工智能大赛</a:t>
             </a:r>
           </a:p>
           <a:p>
@@ -8088,7 +8353,7 @@
         </p:nvSpPr>
         <p:spPr>
           <a:xfrm>
-            <a:off x="502920" y="685800"/>
+            <a:off x="502920" y="566928"/>
             <a:ext cx="8138160" cy="731520"/>
           </a:xfrm>
           <a:prstGeom prst="rect">
@@ -8103,7 +8368,7 @@
           <a:lstStyle/>
           <a:p>
             <a:pPr algn="l">
-              <a:defRPr sz="2600" b="1">
+              <a:defRPr sz="2400" b="1">
                 <a:solidFill>
                   <a:srgbClr val="1E1E1E"/>
                 </a:solidFill>
@@ -8374,7 +8639,7 @@
         <p:spPr>
           <a:xfrm>
             <a:off x="0" y="0"/>
-            <a:ext cx="9144000" cy="502920"/>
+            <a:ext cx="9144000" cy="475488"/>
           </a:xfrm>
           <a:prstGeom prst="rect">
             <a:avLst/>
@@ -8431,14 +8696,14 @@
           <a:lstStyle/>
           <a:p>
             <a:pPr>
-              <a:defRPr sz="1100" b="1">
+              <a:defRPr sz="1000" b="1">
                 <a:solidFill>
                   <a:srgbClr val="FFFFFF"/>
                 </a:solidFill>
               </a:defRPr>
             </a:pPr>
             <a:r>
-              <a:t>第二十六届中国机器人及人工智能大赛</a:t>
+              <a:t>第二十八届中国机器人及人工智能大赛</a:t>
             </a:r>
           </a:p>
           <a:p>
@@ -8463,7 +8728,7 @@
         </p:nvSpPr>
         <p:spPr>
           <a:xfrm>
-            <a:off x="502920" y="685800"/>
+            <a:off x="502920" y="566928"/>
             <a:ext cx="8138160" cy="731520"/>
           </a:xfrm>
           <a:prstGeom prst="rect">
@@ -8478,7 +8743,7 @@
           <a:lstStyle/>
           <a:p>
             <a:pPr algn="l">
-              <a:defRPr sz="2600" b="1">
+              <a:defRPr sz="2400" b="1">
                 <a:solidFill>
                   <a:srgbClr val="1E1E1E"/>
                 </a:solidFill>
@@ -8563,7 +8828,7 @@
         <p:spPr>
           <a:xfrm>
             <a:off x="0" y="0"/>
-            <a:ext cx="9144000" cy="502920"/>
+            <a:ext cx="9144000" cy="475488"/>
           </a:xfrm>
           <a:prstGeom prst="rect">
             <a:avLst/>
@@ -8620,14 +8885,14 @@
           <a:lstStyle/>
           <a:p>
             <a:pPr>
-              <a:defRPr sz="1100" b="1">
+              <a:defRPr sz="1000" b="1">
                 <a:solidFill>
                   <a:srgbClr val="FFFFFF"/>
                 </a:solidFill>
               </a:defRPr>
             </a:pPr>
             <a:r>
-              <a:t>第二十六届中国机器人及人工智能大赛</a:t>
+              <a:t>第二十八届中国机器人及人工智能大赛</a:t>
             </a:r>
           </a:p>
           <a:p>
@@ -8652,7 +8917,7 @@
         </p:nvSpPr>
         <p:spPr>
           <a:xfrm>
-            <a:off x="502920" y="1828800"/>
+            <a:off x="502920" y="2068830"/>
             <a:ext cx="8138160" cy="731520"/>
           </a:xfrm>
           <a:prstGeom prst="rect">
@@ -8667,7 +8932,7 @@
           <a:lstStyle/>
           <a:p>
             <a:pPr algn="ctr">
-              <a:defRPr sz="3200" b="1">
+              <a:defRPr sz="3000" b="1">
                 <a:solidFill>
                   <a:srgbClr val="1E1E1E"/>
                 </a:solidFill>
@@ -8687,7 +8952,7 @@
         </p:nvSpPr>
         <p:spPr>
           <a:xfrm>
-            <a:off x="502920" y="2606040"/>
+            <a:off x="502920" y="2617470"/>
             <a:ext cx="8138160" cy="731520"/>
           </a:xfrm>
           <a:prstGeom prst="rect">
@@ -8702,7 +8967,7 @@
           <a:lstStyle/>
           <a:p>
             <a:pPr algn="ctr">
-              <a:defRPr sz="2200" b="1">
+              <a:defRPr sz="2000" b="1">
                 <a:solidFill>
                   <a:srgbClr val="143278"/>
                 </a:solidFill>
@@ -8749,7 +9014,7 @@
         <p:spPr>
           <a:xfrm>
             <a:off x="0" y="0"/>
-            <a:ext cx="9144000" cy="502920"/>
+            <a:ext cx="9144000" cy="475488"/>
           </a:xfrm>
           <a:prstGeom prst="rect">
             <a:avLst/>
@@ -8806,14 +9071,14 @@
           <a:lstStyle/>
           <a:p>
             <a:pPr>
-              <a:defRPr sz="1100" b="1">
+              <a:defRPr sz="1000" b="1">
                 <a:solidFill>
                   <a:srgbClr val="FFFFFF"/>
                 </a:solidFill>
               </a:defRPr>
             </a:pPr>
             <a:r>
-              <a:t>第二十六届中国机器人及人工智能大赛</a:t>
+              <a:t>第二十八届中国机器人及人工智能大赛</a:t>
             </a:r>
           </a:p>
           <a:p>
@@ -8838,7 +9103,7 @@
         </p:nvSpPr>
         <p:spPr>
           <a:xfrm>
-            <a:off x="502920" y="685800"/>
+            <a:off x="502920" y="566928"/>
             <a:ext cx="8138160" cy="731520"/>
           </a:xfrm>
           <a:prstGeom prst="rect">
@@ -8853,7 +9118,7 @@
           <a:lstStyle/>
           <a:p>
             <a:pPr algn="l">
-              <a:defRPr sz="2600" b="1">
+              <a:defRPr sz="2400" b="1">
                 <a:solidFill>
                   <a:srgbClr val="1E1E1E"/>
                 </a:solidFill>
@@ -8998,7 +9263,7 @@
         <p:spPr>
           <a:xfrm>
             <a:off x="0" y="0"/>
-            <a:ext cx="9144000" cy="502920"/>
+            <a:ext cx="9144000" cy="475488"/>
           </a:xfrm>
           <a:prstGeom prst="rect">
             <a:avLst/>
@@ -9055,14 +9320,14 @@
           <a:lstStyle/>
           <a:p>
             <a:pPr>
-              <a:defRPr sz="1100" b="1">
+              <a:defRPr sz="1000" b="1">
                 <a:solidFill>
                   <a:srgbClr val="FFFFFF"/>
                 </a:solidFill>
               </a:defRPr>
             </a:pPr>
             <a:r>
-              <a:t>第二十六届中国机器人及人工智能大赛</a:t>
+              <a:t>第二十八届中国机器人及人工智能大赛</a:t>
             </a:r>
           </a:p>
           <a:p>
@@ -9087,7 +9352,7 @@
         </p:nvSpPr>
         <p:spPr>
           <a:xfrm>
-            <a:off x="502920" y="685800"/>
+            <a:off x="502920" y="566928"/>
             <a:ext cx="8138160" cy="731520"/>
           </a:xfrm>
           <a:prstGeom prst="rect">
@@ -9102,7 +9367,7 @@
           <a:lstStyle/>
           <a:p>
             <a:pPr algn="l">
-              <a:defRPr sz="2600" b="1">
+              <a:defRPr sz="2400" b="1">
                 <a:solidFill>
                   <a:srgbClr val="1E1E1E"/>
                 </a:solidFill>
@@ -9270,7 +9535,7 @@
         <p:spPr>
           <a:xfrm>
             <a:off x="0" y="0"/>
-            <a:ext cx="9144000" cy="502920"/>
+            <a:ext cx="9144000" cy="475488"/>
           </a:xfrm>
           <a:prstGeom prst="rect">
             <a:avLst/>
@@ -9327,14 +9592,14 @@
           <a:lstStyle/>
           <a:p>
             <a:pPr>
-              <a:defRPr sz="1100" b="1">
+              <a:defRPr sz="1000" b="1">
                 <a:solidFill>
                   <a:srgbClr val="FFFFFF"/>
                 </a:solidFill>
               </a:defRPr>
             </a:pPr>
             <a:r>
-              <a:t>第二十六届中国机器人及人工智能大赛</a:t>
+              <a:t>第二十八届中国机器人及人工智能大赛</a:t>
             </a:r>
           </a:p>
           <a:p>
@@ -9359,7 +9624,7 @@
         </p:nvSpPr>
         <p:spPr>
           <a:xfrm>
-            <a:off x="502920" y="685800"/>
+            <a:off x="502920" y="566928"/>
             <a:ext cx="8138160" cy="731520"/>
           </a:xfrm>
           <a:prstGeom prst="rect">
@@ -9374,7 +9639,7 @@
           <a:lstStyle/>
           <a:p>
             <a:pPr algn="l">
-              <a:defRPr sz="2600" b="1">
+              <a:defRPr sz="2400" b="1">
                 <a:solidFill>
                   <a:srgbClr val="1E1E1E"/>
                 </a:solidFill>

--- a/docs/答辩_CareCompanion.pptx
+++ b/docs/答辩_CareCompanion.pptx
@@ -31,6 +31,7 @@
     <p:sldId id="279" r:id="rId30"/>
     <p:sldId id="280" r:id="rId31"/>
     <p:sldId id="281" r:id="rId32"/>
+    <p:sldId id="282" r:id="rId33"/>
   </p:sldIdLst>
   <p:sldSz cx="9144000" cy="5143500" type="screen4x3"/>
   <p:notesSz cx="6858000" cy="9144000"/>
@@ -4641,8 +4642,8 @@
         </p:nvSpPr>
         <p:spPr>
           <a:xfrm>
-            <a:off x="1023374" y="914400"/>
-            <a:ext cx="7097250" cy="3753611"/>
+            <a:off x="2274745" y="914400"/>
+            <a:ext cx="4594508" cy="3753611"/>
           </a:xfrm>
           <a:prstGeom prst="rect">
             <a:avLst/>
@@ -4680,7 +4681,7 @@
       </p:sp>
       <p:pic>
         <p:nvPicPr>
-          <p:cNvPr id="5" name="Picture 4" descr="ppt_full_dashboard.png"/>
+          <p:cNvPr id="5" name="Picture 4" descr="ppt_mediapipe_pose.png"/>
           <p:cNvPicPr>
             <a:picLocks noChangeAspect="1"/>
           </p:cNvPicPr>
@@ -4694,8 +4695,8 @@
         </p:blipFill>
         <p:spPr>
           <a:xfrm>
-            <a:off x="1078238" y="969264"/>
-            <a:ext cx="6987522" cy="3643884"/>
+            <a:off x="2329609" y="969264"/>
+            <a:ext cx="4484780" cy="3643884"/>
           </a:xfrm>
           <a:prstGeom prst="rect">
             <a:avLst/>
@@ -4732,7 +4733,7 @@
               </a:defRPr>
             </a:pPr>
             <a:r>
-              <a:t>演示场景「老人倾诉」· 风险 0.23 · 机器人主动安抚回复</a:t>
+              <a:t>上传全身/上半身照片 → 自动叠加骨架关键点 · 计算宽高比 0.48 · 跌倒判定</a:t>
             </a:r>
           </a:p>
         </p:txBody>
@@ -4767,7 +4768,7 @@
               </a:defRPr>
             </a:pPr>
             <a:r>
-              <a:t>系统界面：老人倾诉场景（演示剧本）</a:t>
+              <a:t>系统界面：MediaPipe 骨架分析（上传照片）</a:t>
             </a:r>
           </a:p>
         </p:txBody>
@@ -4896,8 +4897,8 @@
         </p:nvSpPr>
         <p:spPr>
           <a:xfrm>
-            <a:off x="2986989" y="914400"/>
-            <a:ext cx="3170021" cy="3753611"/>
+            <a:off x="1023374" y="914400"/>
+            <a:ext cx="7097250" cy="3753611"/>
           </a:xfrm>
           <a:prstGeom prst="rect">
             <a:avLst/>
@@ -4935,7 +4936,7 @@
       </p:sp>
       <p:pic>
         <p:nvPicPr>
-          <p:cNvPr id="5" name="Picture 4" descr="ppt_risk_panel.png"/>
+          <p:cNvPr id="5" name="Picture 4" descr="ppt_full_dashboard.png"/>
           <p:cNvPicPr>
             <a:picLocks noChangeAspect="1"/>
           </p:cNvPicPr>
@@ -4949,8 +4950,8 @@
         </p:blipFill>
         <p:spPr>
           <a:xfrm>
-            <a:off x="3041853" y="969264"/>
-            <a:ext cx="3060293" cy="3643884"/>
+            <a:off x="1078238" y="969264"/>
+            <a:ext cx="6987522" cy="3643884"/>
           </a:xfrm>
           <a:prstGeom prst="rect">
             <a:avLst/>
@@ -4987,7 +4988,7 @@
               </a:defRPr>
             </a:pPr>
             <a:r>
-              <a:t>多模态融合输出：风险分数、因素、机器人回应及四项监测指标</a:t>
+              <a:t>演示场景「老人倾诉」· 风险 0.23 · 机器人主动安抚回复</a:t>
             </a:r>
           </a:p>
         </p:txBody>
@@ -5022,7 +5023,7 @@
               </a:defRPr>
             </a:pPr>
             <a:r>
-              <a:t>系统界面：风险决策仪表盘</a:t>
+              <a:t>系统界面：老人倾诉场景（演示剧本）</a:t>
             </a:r>
           </a:p>
         </p:txBody>
@@ -5151,8 +5152,8 @@
         </p:nvSpPr>
         <p:spPr>
           <a:xfrm>
-            <a:off x="997006" y="914400"/>
-            <a:ext cx="7149986" cy="3753611"/>
+            <a:off x="2986989" y="914400"/>
+            <a:ext cx="3170021" cy="3753611"/>
           </a:xfrm>
           <a:prstGeom prst="rect">
             <a:avLst/>
@@ -5190,7 +5191,7 @@
       </p:sp>
       <p:pic>
         <p:nvPicPr>
-          <p:cNvPr id="5" name="Picture 4" descr="ppt_header_perception.png"/>
+          <p:cNvPr id="5" name="Picture 4" descr="ppt_risk_panel.png"/>
           <p:cNvPicPr>
             <a:picLocks noChangeAspect="1"/>
           </p:cNvPicPr>
@@ -5204,8 +5205,8 @@
         </p:blipFill>
         <p:spPr>
           <a:xfrm>
-            <a:off x="1051870" y="969264"/>
-            <a:ext cx="7040258" cy="3643884"/>
+            <a:off x="3041853" y="969264"/>
+            <a:ext cx="3060293" cy="3643884"/>
           </a:xfrm>
           <a:prstGeom prst="rect">
             <a:avLst/>
@@ -5242,7 +5243,7 @@
               </a:defRPr>
             </a:pPr>
             <a:r>
-              <a:t>状态机进入「紧急」· 感知输入与 MediaPipe 视觉模块</a:t>
+              <a:t>多模态融合输出：风险分数、因素、机器人回应及四项监测指标</a:t>
             </a:r>
           </a:p>
         </p:txBody>
@@ -5277,7 +5278,7 @@
               </a:defRPr>
             </a:pPr>
             <a:r>
-              <a:t>系统界面：紧急状态监测</a:t>
+              <a:t>系统界面：风险决策仪表盘</a:t>
             </a:r>
           </a:p>
         </p:txBody>
@@ -5406,8 +5407,8 @@
         </p:nvSpPr>
         <p:spPr>
           <a:xfrm>
-            <a:off x="1131167" y="914400"/>
-            <a:ext cx="6881664" cy="3753611"/>
+            <a:off x="997006" y="914400"/>
+            <a:ext cx="7149986" cy="3753611"/>
           </a:xfrm>
           <a:prstGeom prst="rect">
             <a:avLst/>
@@ -5445,7 +5446,7 @@
       </p:sp>
       <p:pic>
         <p:nvPicPr>
-          <p:cNvPr id="5" name="Picture 4" descr="ppt_chat_emergency.png"/>
+          <p:cNvPr id="5" name="Picture 4" descr="ppt_header_perception.png"/>
           <p:cNvPicPr>
             <a:picLocks noChangeAspect="1"/>
           </p:cNvPicPr>
@@ -5459,8 +5460,8 @@
         </p:blipFill>
         <p:spPr>
           <a:xfrm>
-            <a:off x="1186031" y="969264"/>
-            <a:ext cx="6771936" cy="3643884"/>
+            <a:off x="1051870" y="969264"/>
+            <a:ext cx="7040258" cy="3643884"/>
           </a:xfrm>
           <a:prstGeom prst="rect">
             <a:avLst/>
@@ -5497,7 +5498,7 @@
               </a:defRPr>
             </a:pPr>
             <a:r>
-              <a:t>演示完成：跌倒紧急流程已成功触发 · 多次紧急安抚语音</a:t>
+              <a:t>状态机进入「紧急」· 感知输入与 MediaPipe 视觉模块</a:t>
             </a:r>
           </a:p>
         </p:txBody>
@@ -5532,7 +5533,7 @@
               </a:defRPr>
             </a:pPr>
             <a:r>
-              <a:t>系统界面：跌倒紧急对话日志</a:t>
+              <a:t>系统界面：紧急状态监测</a:t>
             </a:r>
           </a:p>
         </p:txBody>
@@ -5661,8 +5662,8 @@
         </p:nvSpPr>
         <p:spPr>
           <a:xfrm>
-            <a:off x="356616" y="1797787"/>
-            <a:ext cx="8430767" cy="1986837"/>
+            <a:off x="1131167" y="914400"/>
+            <a:ext cx="6881664" cy="3753611"/>
           </a:xfrm>
           <a:prstGeom prst="rect">
             <a:avLst/>
@@ -5700,7 +5701,7 @@
       </p:sp>
       <p:pic>
         <p:nvPicPr>
-          <p:cNvPr id="5" name="Picture 4" descr="ppt_robot_commands.png"/>
+          <p:cNvPr id="5" name="Picture 4" descr="ppt_chat_emergency.png"/>
           <p:cNvPicPr>
             <a:picLocks noChangeAspect="1"/>
           </p:cNvPicPr>
@@ -5714,8 +5715,8 @@
         </p:blipFill>
         <p:spPr>
           <a:xfrm>
-            <a:off x="411480" y="1852651"/>
-            <a:ext cx="8321040" cy="1877110"/>
+            <a:off x="1186031" y="969264"/>
+            <a:ext cx="6771936" cy="3643884"/>
           </a:xfrm>
           <a:prstGeom prst="rect">
             <a:avLst/>
@@ -5752,7 +5753,7 @@
               </a:defRPr>
             </a:pPr>
             <a:r>
-              <a:t>告警音 → 语音 → 紧急呼叫（跌倒事件）→ 举手手势，全链路可追溯</a:t>
+              <a:t>演示完成：跌倒紧急流程已成功触发 · 多次紧急安抚语音</a:t>
             </a:r>
           </a:p>
         </p:txBody>
@@ -5787,7 +5788,7 @@
               </a:defRPr>
             </a:pPr>
             <a:r>
-              <a:t>系统界面：机器人指令流</a:t>
+              <a:t>系统界面：跌倒紧急对话日志</a:t>
             </a:r>
           </a:p>
         </p:txBody>
@@ -5987,6 +5988,261 @@
 </file>
 
 <file path=ppt/slides/slide20.xml><?xml version="1.0" encoding="utf-8"?>
+<p:sld xmlns:a="http://schemas.openxmlformats.org/drawingml/2006/main" xmlns:p="http://schemas.openxmlformats.org/presentationml/2006/main" xmlns:r="http://schemas.openxmlformats.org/officeDocument/2006/relationships">
+  <p:cSld>
+    <p:bg>
+      <p:bgPr>
+        <a:solidFill>
+          <a:srgbClr val="FFFFFF"/>
+        </a:solidFill>
+        <a:effectLst/>
+      </p:bgPr>
+    </p:bg>
+    <p:spTree>
+      <p:nvGrpSpPr>
+        <p:cNvPr id="1" name=""/>
+        <p:cNvGrpSpPr/>
+        <p:nvPr/>
+      </p:nvGrpSpPr>
+      <p:grpSpPr/>
+      <p:sp>
+        <p:nvSpPr>
+          <p:cNvPr id="2" name="Rectangle 1"/>
+          <p:cNvSpPr/>
+          <p:nvPr/>
+        </p:nvSpPr>
+        <p:spPr>
+          <a:xfrm>
+            <a:off x="0" y="0"/>
+            <a:ext cx="9144000" cy="475488"/>
+          </a:xfrm>
+          <a:prstGeom prst="rect">
+            <a:avLst/>
+          </a:prstGeom>
+          <a:solidFill>
+            <a:srgbClr val="143278"/>
+          </a:solidFill>
+          <a:ln>
+            <a:noFill/>
+          </a:ln>
+        </p:spPr>
+        <p:style>
+          <a:lnRef idx="1">
+            <a:schemeClr val="accent1"/>
+          </a:lnRef>
+          <a:fillRef idx="3">
+            <a:schemeClr val="accent1"/>
+          </a:fillRef>
+          <a:effectRef idx="2">
+            <a:schemeClr val="accent1"/>
+          </a:effectRef>
+          <a:fontRef idx="minor">
+            <a:schemeClr val="lt1"/>
+          </a:fontRef>
+        </p:style>
+        <p:txBody>
+          <a:bodyPr rtlCol="0" anchor="ctr"/>
+          <a:lstStyle/>
+          <a:p>
+            <a:pPr algn="ctr"/>
+          </a:p>
+        </p:txBody>
+      </p:sp>
+      <p:sp>
+        <p:nvSpPr>
+          <p:cNvPr id="3" name="TextBox 2"/>
+          <p:cNvSpPr txBox="1"/>
+          <p:nvPr/>
+        </p:nvSpPr>
+        <p:spPr>
+          <a:xfrm>
+            <a:off x="137160" y="73152"/>
+            <a:ext cx="8869680" cy="411480"/>
+          </a:xfrm>
+          <a:prstGeom prst="rect">
+            <a:avLst/>
+          </a:prstGeom>
+          <a:noFill/>
+        </p:spPr>
+        <p:txBody>
+          <a:bodyPr wrap="none">
+            <a:spAutoFit/>
+          </a:bodyPr>
+          <a:lstStyle/>
+          <a:p>
+            <a:pPr>
+              <a:defRPr sz="1000" b="1">
+                <a:solidFill>
+                  <a:srgbClr val="FFFFFF"/>
+                </a:solidFill>
+              </a:defRPr>
+            </a:pPr>
+            <a:r>
+              <a:t>第二十八届中国机器人及人工智能大赛</a:t>
+            </a:r>
+          </a:p>
+          <a:p>
+            <a:pPr>
+              <a:defRPr sz="1000">
+                <a:solidFill>
+                  <a:srgbClr val="C8DCFF"/>
+                </a:solidFill>
+              </a:defRPr>
+            </a:pPr>
+            <a:r>
+              <a:t>机器人创新赛道</a:t>
+            </a:r>
+          </a:p>
+        </p:txBody>
+      </p:sp>
+      <p:sp>
+        <p:nvSpPr>
+          <p:cNvPr id="4" name="Rectangle 3"/>
+          <p:cNvSpPr/>
+          <p:nvPr/>
+        </p:nvSpPr>
+        <p:spPr>
+          <a:xfrm>
+            <a:off x="356616" y="1797787"/>
+            <a:ext cx="8430767" cy="1986837"/>
+          </a:xfrm>
+          <a:prstGeom prst="rect">
+            <a:avLst/>
+          </a:prstGeom>
+          <a:solidFill>
+            <a:srgbClr val="EBF2FA"/>
+          </a:solidFill>
+          <a:ln w="9525">
+            <a:solidFill>
+              <a:srgbClr val="B4C3DC"/>
+            </a:solidFill>
+          </a:ln>
+        </p:spPr>
+        <p:style>
+          <a:lnRef idx="1">
+            <a:schemeClr val="accent1"/>
+          </a:lnRef>
+          <a:fillRef idx="3">
+            <a:schemeClr val="accent1"/>
+          </a:fillRef>
+          <a:effectRef idx="2">
+            <a:schemeClr val="accent1"/>
+          </a:effectRef>
+          <a:fontRef idx="minor">
+            <a:schemeClr val="lt1"/>
+          </a:fontRef>
+        </p:style>
+        <p:txBody>
+          <a:bodyPr rtlCol="0" anchor="ctr"/>
+          <a:lstStyle/>
+          <a:p>
+            <a:pPr algn="ctr"/>
+          </a:p>
+        </p:txBody>
+      </p:sp>
+      <p:pic>
+        <p:nvPicPr>
+          <p:cNvPr id="5" name="Picture 4" descr="ppt_robot_commands.png"/>
+          <p:cNvPicPr>
+            <a:picLocks noChangeAspect="1"/>
+          </p:cNvPicPr>
+          <p:nvPr/>
+        </p:nvPicPr>
+        <p:blipFill>
+          <a:blip r:embed="rId2"/>
+          <a:stretch>
+            <a:fillRect/>
+          </a:stretch>
+        </p:blipFill>
+        <p:spPr>
+          <a:xfrm>
+            <a:off x="411480" y="1852651"/>
+            <a:ext cx="8321040" cy="1877110"/>
+          </a:xfrm>
+          <a:prstGeom prst="rect">
+            <a:avLst/>
+          </a:prstGeom>
+        </p:spPr>
+      </p:pic>
+      <p:sp>
+        <p:nvSpPr>
+          <p:cNvPr id="6" name="TextBox 5"/>
+          <p:cNvSpPr txBox="1"/>
+          <p:nvPr/>
+        </p:nvSpPr>
+        <p:spPr>
+          <a:xfrm>
+            <a:off x="411480" y="4638751"/>
+            <a:ext cx="8321040" cy="347472"/>
+          </a:xfrm>
+          <a:prstGeom prst="rect">
+            <a:avLst/>
+          </a:prstGeom>
+          <a:noFill/>
+        </p:spPr>
+        <p:txBody>
+          <a:bodyPr wrap="square" anchor="ctr">
+            <a:spAutoFit/>
+          </a:bodyPr>
+          <a:lstStyle/>
+          <a:p>
+            <a:pPr algn="ctr">
+              <a:defRPr sz="900">
+                <a:solidFill>
+                  <a:srgbClr val="505050"/>
+                </a:solidFill>
+              </a:defRPr>
+            </a:pPr>
+            <a:r>
+              <a:t>告警音 → 语音 → 紧急呼叫（跌倒事件）→ 举手手势，全链路可追溯</a:t>
+            </a:r>
+          </a:p>
+        </p:txBody>
+      </p:sp>
+      <p:sp>
+        <p:nvSpPr>
+          <p:cNvPr id="7" name="TextBox 6"/>
+          <p:cNvSpPr txBox="1"/>
+          <p:nvPr/>
+        </p:nvSpPr>
+        <p:spPr>
+          <a:xfrm>
+            <a:off x="411480" y="530352"/>
+            <a:ext cx="8321040" cy="384048"/>
+          </a:xfrm>
+          <a:prstGeom prst="rect">
+            <a:avLst/>
+          </a:prstGeom>
+          <a:noFill/>
+        </p:spPr>
+        <p:txBody>
+          <a:bodyPr wrap="square">
+            <a:spAutoFit/>
+          </a:bodyPr>
+          <a:lstStyle/>
+          <a:p>
+            <a:pPr algn="ctr">
+              <a:defRPr sz="1900" b="1">
+                <a:solidFill>
+                  <a:srgbClr val="1E1E1E"/>
+                </a:solidFill>
+              </a:defRPr>
+            </a:pPr>
+            <a:r>
+              <a:t>系统界面：机器人指令流</a:t>
+            </a:r>
+          </a:p>
+        </p:txBody>
+      </p:sp>
+    </p:spTree>
+  </p:cSld>
+  <p:clrMapOvr>
+    <a:masterClrMapping/>
+  </p:clrMapOvr>
+</p:sld>
+</file>
+
+<file path=ppt/slides/slide21.xml><?xml version="1.0" encoding="utf-8"?>
 <p:sld xmlns:a="http://schemas.openxmlformats.org/drawingml/2006/main" xmlns:p="http://schemas.openxmlformats.org/presentationml/2006/main" xmlns:r="http://schemas.openxmlformats.org/officeDocument/2006/relationships">
   <p:cSld>
     <p:bg>
@@ -6489,270 +6745,6 @@
 </p:sld>
 </file>
 
-<file path=ppt/slides/slide21.xml><?xml version="1.0" encoding="utf-8"?>
-<p:sld xmlns:a="http://schemas.openxmlformats.org/drawingml/2006/main" xmlns:p="http://schemas.openxmlformats.org/presentationml/2006/main" xmlns:r="http://schemas.openxmlformats.org/officeDocument/2006/relationships">
-  <p:cSld>
-    <p:bg>
-      <p:bgPr>
-        <a:solidFill>
-          <a:srgbClr val="FFFFFF"/>
-        </a:solidFill>
-        <a:effectLst/>
-      </p:bgPr>
-    </p:bg>
-    <p:spTree>
-      <p:nvGrpSpPr>
-        <p:cNvPr id="1" name=""/>
-        <p:cNvGrpSpPr/>
-        <p:nvPr/>
-      </p:nvGrpSpPr>
-      <p:grpSpPr/>
-      <p:sp>
-        <p:nvSpPr>
-          <p:cNvPr id="2" name="Rectangle 1"/>
-          <p:cNvSpPr/>
-          <p:nvPr/>
-        </p:nvSpPr>
-        <p:spPr>
-          <a:xfrm>
-            <a:off x="0" y="0"/>
-            <a:ext cx="9144000" cy="475488"/>
-          </a:xfrm>
-          <a:prstGeom prst="rect">
-            <a:avLst/>
-          </a:prstGeom>
-          <a:solidFill>
-            <a:srgbClr val="143278"/>
-          </a:solidFill>
-          <a:ln>
-            <a:noFill/>
-          </a:ln>
-        </p:spPr>
-        <p:style>
-          <a:lnRef idx="1">
-            <a:schemeClr val="accent1"/>
-          </a:lnRef>
-          <a:fillRef idx="3">
-            <a:schemeClr val="accent1"/>
-          </a:fillRef>
-          <a:effectRef idx="2">
-            <a:schemeClr val="accent1"/>
-          </a:effectRef>
-          <a:fontRef idx="minor">
-            <a:schemeClr val="lt1"/>
-          </a:fontRef>
-        </p:style>
-        <p:txBody>
-          <a:bodyPr rtlCol="0" anchor="ctr"/>
-          <a:lstStyle/>
-          <a:p>
-            <a:pPr algn="ctr"/>
-          </a:p>
-        </p:txBody>
-      </p:sp>
-      <p:sp>
-        <p:nvSpPr>
-          <p:cNvPr id="3" name="TextBox 2"/>
-          <p:cNvSpPr txBox="1"/>
-          <p:nvPr/>
-        </p:nvSpPr>
-        <p:spPr>
-          <a:xfrm>
-            <a:off x="137160" y="73152"/>
-            <a:ext cx="8869680" cy="411480"/>
-          </a:xfrm>
-          <a:prstGeom prst="rect">
-            <a:avLst/>
-          </a:prstGeom>
-          <a:noFill/>
-        </p:spPr>
-        <p:txBody>
-          <a:bodyPr wrap="none">
-            <a:spAutoFit/>
-          </a:bodyPr>
-          <a:lstStyle/>
-          <a:p>
-            <a:pPr>
-              <a:defRPr sz="1000" b="1">
-                <a:solidFill>
-                  <a:srgbClr val="FFFFFF"/>
-                </a:solidFill>
-              </a:defRPr>
-            </a:pPr>
-            <a:r>
-              <a:t>第二十八届中国机器人及人工智能大赛</a:t>
-            </a:r>
-          </a:p>
-          <a:p>
-            <a:pPr>
-              <a:defRPr sz="1000">
-                <a:solidFill>
-                  <a:srgbClr val="C8DCFF"/>
-                </a:solidFill>
-              </a:defRPr>
-            </a:pPr>
-            <a:r>
-              <a:t>机器人创新赛道</a:t>
-            </a:r>
-          </a:p>
-        </p:txBody>
-      </p:sp>
-      <p:sp>
-        <p:nvSpPr>
-          <p:cNvPr id="4" name="TextBox 3"/>
-          <p:cNvSpPr txBox="1"/>
-          <p:nvPr/>
-        </p:nvSpPr>
-        <p:spPr>
-          <a:xfrm>
-            <a:off x="502920" y="566928"/>
-            <a:ext cx="8138160" cy="731520"/>
-          </a:xfrm>
-          <a:prstGeom prst="rect">
-            <a:avLst/>
-          </a:prstGeom>
-          <a:noFill/>
-        </p:spPr>
-        <p:txBody>
-          <a:bodyPr wrap="square">
-            <a:spAutoFit/>
-          </a:bodyPr>
-          <a:lstStyle/>
-          <a:p>
-            <a:pPr algn="l">
-              <a:defRPr sz="2400" b="1">
-                <a:solidFill>
-                  <a:srgbClr val="1E1E1E"/>
-                </a:solidFill>
-              </a:defRPr>
-            </a:pPr>
-            <a:r>
-              <a:t>开源与知识产权</a:t>
-            </a:r>
-          </a:p>
-        </p:txBody>
-      </p:sp>
-      <p:sp>
-        <p:nvSpPr>
-          <p:cNvPr id="5" name="TextBox 4"/>
-          <p:cNvSpPr txBox="1"/>
-          <p:nvPr/>
-        </p:nvSpPr>
-        <p:spPr>
-          <a:xfrm>
-            <a:off x="502920" y="1325880"/>
-            <a:ext cx="8138160" cy="3840480"/>
-          </a:xfrm>
-          <a:prstGeom prst="rect">
-            <a:avLst/>
-          </a:prstGeom>
-          <a:noFill/>
-        </p:spPr>
-        <p:txBody>
-          <a:bodyPr wrap="square">
-            <a:spAutoFit/>
-          </a:bodyPr>
-          <a:lstStyle/>
-          <a:p>
-            <a:pPr>
-              <a:spcAft>
-                <a:spcPts val="600"/>
-              </a:spcAft>
-              <a:defRPr sz="1400">
-                <a:solidFill>
-                  <a:srgbClr val="1E1E1E"/>
-                </a:solidFill>
-              </a:defRPr>
-            </a:pPr>
-            <a:r>
-              <a:t>GitHub 开源：https://github.com/FBB123571/ElderCare-Humanoid-Platform</a:t>
-            </a:r>
-          </a:p>
-          <a:p>
-            <a:pPr>
-              <a:spcAft>
-                <a:spcPts val="600"/>
-              </a:spcAft>
-              <a:defRPr sz="1400">
-                <a:solidFill>
-                  <a:srgbClr val="1E1E1E"/>
-                </a:solidFill>
-              </a:defRPr>
-            </a:pPr>
-            <a:r>
-              <a:t>答辩演示：http://localhost:8765（现场端口转发）</a:t>
-            </a:r>
-          </a:p>
-          <a:p>
-            <a:pPr>
-              <a:spcAft>
-                <a:spcPts val="600"/>
-              </a:spcAft>
-              <a:defRPr sz="1400">
-                <a:solidFill>
-                  <a:srgbClr val="1E1E1E"/>
-                </a:solidFill>
-              </a:defRPr>
-            </a:pPr>
-            <a:r>
-              <a:t>软件名称建议：CareCompanion 智能养老人形陪伴机器人系统 V1.0</a:t>
-            </a:r>
-          </a:p>
-          <a:p>
-            <a:pPr>
-              <a:spcAft>
-                <a:spcPts val="600"/>
-              </a:spcAft>
-              <a:defRPr sz="1400">
-                <a:solidFill>
-                  <a:srgbClr val="1E1E1E"/>
-                </a:solidFill>
-              </a:defRPr>
-            </a:pPr>
-            <a:r>
-              <a:t>核心代码：care_companion/ · web/ · scripts/ · tests/</a:t>
-            </a:r>
-          </a:p>
-          <a:p>
-            <a:pPr>
-              <a:spcAft>
-                <a:spcPts val="600"/>
-              </a:spcAft>
-              <a:defRPr sz="1400">
-                <a:solidFill>
-                  <a:srgbClr val="1E1E1E"/>
-                </a:solidFill>
-              </a:defRPr>
-            </a:pPr>
-            <a:r>
-              <a:t>文档：技术报告 · 架构说明 · 部署指南 · 竞赛答辩要点</a:t>
-            </a:r>
-          </a:p>
-          <a:p>
-            <a:pPr>
-              <a:spcAft>
-                <a:spcPts val="600"/>
-              </a:spcAft>
-              <a:defRPr sz="1400">
-                <a:solidFill>
-                  <a:srgbClr val="1E1E1E"/>
-                </a:solidFill>
-              </a:defRPr>
-            </a:pPr>
-            <a:r>
-              <a:t>（请填写）软著登记号 / 团队成员 / 指导教师</a:t>
-            </a:r>
-          </a:p>
-        </p:txBody>
-      </p:sp>
-    </p:spTree>
-  </p:cSld>
-  <p:clrMapOvr>
-    <a:masterClrMapping/>
-  </p:clrMapOvr>
-</p:sld>
-</file>
-
 <file path=ppt/slides/slide22.xml><?xml version="1.0" encoding="utf-8"?>
 <p:sld xmlns:a="http://schemas.openxmlformats.org/drawingml/2006/main" xmlns:p="http://schemas.openxmlformats.org/presentationml/2006/main" xmlns:r="http://schemas.openxmlformats.org/officeDocument/2006/relationships">
   <p:cSld>
@@ -6869,7 +6861,7 @@
         </p:nvSpPr>
         <p:spPr>
           <a:xfrm>
-            <a:off x="502920" y="2068830"/>
+            <a:off x="502920" y="566928"/>
             <a:ext cx="8138160" cy="731520"/>
           </a:xfrm>
           <a:prstGeom prst="rect">
@@ -6883,15 +6875,15 @@
           </a:bodyPr>
           <a:lstStyle/>
           <a:p>
-            <a:pPr algn="ctr">
-              <a:defRPr sz="3000" b="1">
+            <a:pPr algn="l">
+              <a:defRPr sz="2400" b="1">
                 <a:solidFill>
                   <a:srgbClr val="1E1E1E"/>
                 </a:solidFill>
               </a:defRPr>
             </a:pPr>
             <a:r>
-              <a:t>第四部分</a:t>
+              <a:t>开源与知识产权</a:t>
             </a:r>
           </a:p>
         </p:txBody>
@@ -6904,8 +6896,8 @@
         </p:nvSpPr>
         <p:spPr>
           <a:xfrm>
-            <a:off x="502920" y="2617470"/>
-            <a:ext cx="8138160" cy="731520"/>
+            <a:off x="502920" y="1325880"/>
+            <a:ext cx="8138160" cy="3840480"/>
           </a:xfrm>
           <a:prstGeom prst="rect">
             <a:avLst/>
@@ -6918,15 +6910,93 @@
           </a:bodyPr>
           <a:lstStyle/>
           <a:p>
-            <a:pPr algn="ctr">
-              <a:defRPr sz="2000" b="1">
-                <a:solidFill>
-                  <a:srgbClr val="143278"/>
-                </a:solidFill>
-              </a:defRPr>
-            </a:pPr>
-            <a:r>
-              <a:t>创新维度与未来展望</a:t>
+            <a:pPr>
+              <a:spcAft>
+                <a:spcPts val="600"/>
+              </a:spcAft>
+              <a:defRPr sz="1400">
+                <a:solidFill>
+                  <a:srgbClr val="1E1E1E"/>
+                </a:solidFill>
+              </a:defRPr>
+            </a:pPr>
+            <a:r>
+              <a:t>GitHub 开源：https://github.com/FBB123571/ElderCare-Humanoid-Platform</a:t>
+            </a:r>
+          </a:p>
+          <a:p>
+            <a:pPr>
+              <a:spcAft>
+                <a:spcPts val="600"/>
+              </a:spcAft>
+              <a:defRPr sz="1400">
+                <a:solidFill>
+                  <a:srgbClr val="1E1E1E"/>
+                </a:solidFill>
+              </a:defRPr>
+            </a:pPr>
+            <a:r>
+              <a:t>答辩演示：http://localhost:8765（现场端口转发）</a:t>
+            </a:r>
+          </a:p>
+          <a:p>
+            <a:pPr>
+              <a:spcAft>
+                <a:spcPts val="600"/>
+              </a:spcAft>
+              <a:defRPr sz="1400">
+                <a:solidFill>
+                  <a:srgbClr val="1E1E1E"/>
+                </a:solidFill>
+              </a:defRPr>
+            </a:pPr>
+            <a:r>
+              <a:t>软件名称建议：CareCompanion 智能养老人形陪伴机器人系统 V1.0</a:t>
+            </a:r>
+          </a:p>
+          <a:p>
+            <a:pPr>
+              <a:spcAft>
+                <a:spcPts val="600"/>
+              </a:spcAft>
+              <a:defRPr sz="1400">
+                <a:solidFill>
+                  <a:srgbClr val="1E1E1E"/>
+                </a:solidFill>
+              </a:defRPr>
+            </a:pPr>
+            <a:r>
+              <a:t>核心代码：care_companion/ · web/ · scripts/ · tests/</a:t>
+            </a:r>
+          </a:p>
+          <a:p>
+            <a:pPr>
+              <a:spcAft>
+                <a:spcPts val="600"/>
+              </a:spcAft>
+              <a:defRPr sz="1400">
+                <a:solidFill>
+                  <a:srgbClr val="1E1E1E"/>
+                </a:solidFill>
+              </a:defRPr>
+            </a:pPr>
+            <a:r>
+              <a:t>文档：技术报告 · 架构说明 · 部署指南 · 竞赛答辩要点</a:t>
+            </a:r>
+          </a:p>
+          <a:p>
+            <a:pPr>
+              <a:spcAft>
+                <a:spcPts val="600"/>
+              </a:spcAft>
+              <a:defRPr sz="1400">
+                <a:solidFill>
+                  <a:srgbClr val="1E1E1E"/>
+                </a:solidFill>
+              </a:defRPr>
+            </a:pPr>
+            <a:r>
+              <a:t>（请填写）软著登记号 / 团队成员 / 指导教师</a:t>
             </a:r>
           </a:p>
         </p:txBody>
@@ -6940,6 +7010,192 @@
 </file>
 
 <file path=ppt/slides/slide23.xml><?xml version="1.0" encoding="utf-8"?>
+<p:sld xmlns:a="http://schemas.openxmlformats.org/drawingml/2006/main" xmlns:p="http://schemas.openxmlformats.org/presentationml/2006/main" xmlns:r="http://schemas.openxmlformats.org/officeDocument/2006/relationships">
+  <p:cSld>
+    <p:bg>
+      <p:bgPr>
+        <a:solidFill>
+          <a:srgbClr val="FFFFFF"/>
+        </a:solidFill>
+        <a:effectLst/>
+      </p:bgPr>
+    </p:bg>
+    <p:spTree>
+      <p:nvGrpSpPr>
+        <p:cNvPr id="1" name=""/>
+        <p:cNvGrpSpPr/>
+        <p:nvPr/>
+      </p:nvGrpSpPr>
+      <p:grpSpPr/>
+      <p:sp>
+        <p:nvSpPr>
+          <p:cNvPr id="2" name="Rectangle 1"/>
+          <p:cNvSpPr/>
+          <p:nvPr/>
+        </p:nvSpPr>
+        <p:spPr>
+          <a:xfrm>
+            <a:off x="0" y="0"/>
+            <a:ext cx="9144000" cy="475488"/>
+          </a:xfrm>
+          <a:prstGeom prst="rect">
+            <a:avLst/>
+          </a:prstGeom>
+          <a:solidFill>
+            <a:srgbClr val="143278"/>
+          </a:solidFill>
+          <a:ln>
+            <a:noFill/>
+          </a:ln>
+        </p:spPr>
+        <p:style>
+          <a:lnRef idx="1">
+            <a:schemeClr val="accent1"/>
+          </a:lnRef>
+          <a:fillRef idx="3">
+            <a:schemeClr val="accent1"/>
+          </a:fillRef>
+          <a:effectRef idx="2">
+            <a:schemeClr val="accent1"/>
+          </a:effectRef>
+          <a:fontRef idx="minor">
+            <a:schemeClr val="lt1"/>
+          </a:fontRef>
+        </p:style>
+        <p:txBody>
+          <a:bodyPr rtlCol="0" anchor="ctr"/>
+          <a:lstStyle/>
+          <a:p>
+            <a:pPr algn="ctr"/>
+          </a:p>
+        </p:txBody>
+      </p:sp>
+      <p:sp>
+        <p:nvSpPr>
+          <p:cNvPr id="3" name="TextBox 2"/>
+          <p:cNvSpPr txBox="1"/>
+          <p:nvPr/>
+        </p:nvSpPr>
+        <p:spPr>
+          <a:xfrm>
+            <a:off x="137160" y="73152"/>
+            <a:ext cx="8869680" cy="411480"/>
+          </a:xfrm>
+          <a:prstGeom prst="rect">
+            <a:avLst/>
+          </a:prstGeom>
+          <a:noFill/>
+        </p:spPr>
+        <p:txBody>
+          <a:bodyPr wrap="none">
+            <a:spAutoFit/>
+          </a:bodyPr>
+          <a:lstStyle/>
+          <a:p>
+            <a:pPr>
+              <a:defRPr sz="1000" b="1">
+                <a:solidFill>
+                  <a:srgbClr val="FFFFFF"/>
+                </a:solidFill>
+              </a:defRPr>
+            </a:pPr>
+            <a:r>
+              <a:t>第二十八届中国机器人及人工智能大赛</a:t>
+            </a:r>
+          </a:p>
+          <a:p>
+            <a:pPr>
+              <a:defRPr sz="1000">
+                <a:solidFill>
+                  <a:srgbClr val="C8DCFF"/>
+                </a:solidFill>
+              </a:defRPr>
+            </a:pPr>
+            <a:r>
+              <a:t>机器人创新赛道</a:t>
+            </a:r>
+          </a:p>
+        </p:txBody>
+      </p:sp>
+      <p:sp>
+        <p:nvSpPr>
+          <p:cNvPr id="4" name="TextBox 3"/>
+          <p:cNvSpPr txBox="1"/>
+          <p:nvPr/>
+        </p:nvSpPr>
+        <p:spPr>
+          <a:xfrm>
+            <a:off x="502920" y="2068830"/>
+            <a:ext cx="8138160" cy="731520"/>
+          </a:xfrm>
+          <a:prstGeom prst="rect">
+            <a:avLst/>
+          </a:prstGeom>
+          <a:noFill/>
+        </p:spPr>
+        <p:txBody>
+          <a:bodyPr wrap="square">
+            <a:spAutoFit/>
+          </a:bodyPr>
+          <a:lstStyle/>
+          <a:p>
+            <a:pPr algn="ctr">
+              <a:defRPr sz="3000" b="1">
+                <a:solidFill>
+                  <a:srgbClr val="1E1E1E"/>
+                </a:solidFill>
+              </a:defRPr>
+            </a:pPr>
+            <a:r>
+              <a:t>第四部分</a:t>
+            </a:r>
+          </a:p>
+        </p:txBody>
+      </p:sp>
+      <p:sp>
+        <p:nvSpPr>
+          <p:cNvPr id="5" name="TextBox 4"/>
+          <p:cNvSpPr txBox="1"/>
+          <p:nvPr/>
+        </p:nvSpPr>
+        <p:spPr>
+          <a:xfrm>
+            <a:off x="502920" y="2617470"/>
+            <a:ext cx="8138160" cy="731520"/>
+          </a:xfrm>
+          <a:prstGeom prst="rect">
+            <a:avLst/>
+          </a:prstGeom>
+          <a:noFill/>
+        </p:spPr>
+        <p:txBody>
+          <a:bodyPr wrap="square">
+            <a:spAutoFit/>
+          </a:bodyPr>
+          <a:lstStyle/>
+          <a:p>
+            <a:pPr algn="ctr">
+              <a:defRPr sz="2000" b="1">
+                <a:solidFill>
+                  <a:srgbClr val="143278"/>
+                </a:solidFill>
+              </a:defRPr>
+            </a:pPr>
+            <a:r>
+              <a:t>创新维度与未来展望</a:t>
+            </a:r>
+          </a:p>
+        </p:txBody>
+      </p:sp>
+    </p:spTree>
+  </p:cSld>
+  <p:clrMapOvr>
+    <a:masterClrMapping/>
+  </p:clrMapOvr>
+</p:sld>
+</file>
+
+<file path=ppt/slides/slide24.xml><?xml version="1.0" encoding="utf-8"?>
 <p:sld xmlns:a="http://schemas.openxmlformats.org/drawingml/2006/main" xmlns:p="http://schemas.openxmlformats.org/presentationml/2006/main" xmlns:r="http://schemas.openxmlformats.org/officeDocument/2006/relationships">
   <p:cSld>
     <p:bg>
@@ -7364,255 +7620,6 @@
 </p:sld>
 </file>
 
-<file path=ppt/slides/slide24.xml><?xml version="1.0" encoding="utf-8"?>
-<p:sld xmlns:a="http://schemas.openxmlformats.org/drawingml/2006/main" xmlns:p="http://schemas.openxmlformats.org/presentationml/2006/main" xmlns:r="http://schemas.openxmlformats.org/officeDocument/2006/relationships">
-  <p:cSld>
-    <p:bg>
-      <p:bgPr>
-        <a:solidFill>
-          <a:srgbClr val="FFFFFF"/>
-        </a:solidFill>
-        <a:effectLst/>
-      </p:bgPr>
-    </p:bg>
-    <p:spTree>
-      <p:nvGrpSpPr>
-        <p:cNvPr id="1" name=""/>
-        <p:cNvGrpSpPr/>
-        <p:nvPr/>
-      </p:nvGrpSpPr>
-      <p:grpSpPr/>
-      <p:sp>
-        <p:nvSpPr>
-          <p:cNvPr id="2" name="Rectangle 1"/>
-          <p:cNvSpPr/>
-          <p:nvPr/>
-        </p:nvSpPr>
-        <p:spPr>
-          <a:xfrm>
-            <a:off x="0" y="0"/>
-            <a:ext cx="9144000" cy="475488"/>
-          </a:xfrm>
-          <a:prstGeom prst="rect">
-            <a:avLst/>
-          </a:prstGeom>
-          <a:solidFill>
-            <a:srgbClr val="143278"/>
-          </a:solidFill>
-          <a:ln>
-            <a:noFill/>
-          </a:ln>
-        </p:spPr>
-        <p:style>
-          <a:lnRef idx="1">
-            <a:schemeClr val="accent1"/>
-          </a:lnRef>
-          <a:fillRef idx="3">
-            <a:schemeClr val="accent1"/>
-          </a:fillRef>
-          <a:effectRef idx="2">
-            <a:schemeClr val="accent1"/>
-          </a:effectRef>
-          <a:fontRef idx="minor">
-            <a:schemeClr val="lt1"/>
-          </a:fontRef>
-        </p:style>
-        <p:txBody>
-          <a:bodyPr rtlCol="0" anchor="ctr"/>
-          <a:lstStyle/>
-          <a:p>
-            <a:pPr algn="ctr"/>
-          </a:p>
-        </p:txBody>
-      </p:sp>
-      <p:sp>
-        <p:nvSpPr>
-          <p:cNvPr id="3" name="TextBox 2"/>
-          <p:cNvSpPr txBox="1"/>
-          <p:nvPr/>
-        </p:nvSpPr>
-        <p:spPr>
-          <a:xfrm>
-            <a:off x="137160" y="73152"/>
-            <a:ext cx="8869680" cy="411480"/>
-          </a:xfrm>
-          <a:prstGeom prst="rect">
-            <a:avLst/>
-          </a:prstGeom>
-          <a:noFill/>
-        </p:spPr>
-        <p:txBody>
-          <a:bodyPr wrap="none">
-            <a:spAutoFit/>
-          </a:bodyPr>
-          <a:lstStyle/>
-          <a:p>
-            <a:pPr>
-              <a:defRPr sz="1000" b="1">
-                <a:solidFill>
-                  <a:srgbClr val="FFFFFF"/>
-                </a:solidFill>
-              </a:defRPr>
-            </a:pPr>
-            <a:r>
-              <a:t>第二十八届中国机器人及人工智能大赛</a:t>
-            </a:r>
-          </a:p>
-          <a:p>
-            <a:pPr>
-              <a:defRPr sz="1000">
-                <a:solidFill>
-                  <a:srgbClr val="C8DCFF"/>
-                </a:solidFill>
-              </a:defRPr>
-            </a:pPr>
-            <a:r>
-              <a:t>机器人创新赛道</a:t>
-            </a:r>
-          </a:p>
-        </p:txBody>
-      </p:sp>
-      <p:sp>
-        <p:nvSpPr>
-          <p:cNvPr id="4" name="TextBox 3"/>
-          <p:cNvSpPr txBox="1"/>
-          <p:nvPr/>
-        </p:nvSpPr>
-        <p:spPr>
-          <a:xfrm>
-            <a:off x="502920" y="566928"/>
-            <a:ext cx="8138160" cy="731520"/>
-          </a:xfrm>
-          <a:prstGeom prst="rect">
-            <a:avLst/>
-          </a:prstGeom>
-          <a:noFill/>
-        </p:spPr>
-        <p:txBody>
-          <a:bodyPr wrap="square">
-            <a:spAutoFit/>
-          </a:bodyPr>
-          <a:lstStyle/>
-          <a:p>
-            <a:pPr algn="l">
-              <a:defRPr sz="2400" b="1">
-                <a:solidFill>
-                  <a:srgbClr val="1E1E1E"/>
-                </a:solidFill>
-              </a:defRPr>
-            </a:pPr>
-            <a:r>
-              <a:t>未来工作</a:t>
-            </a:r>
-          </a:p>
-        </p:txBody>
-      </p:sp>
-      <p:sp>
-        <p:nvSpPr>
-          <p:cNvPr id="5" name="TextBox 4"/>
-          <p:cNvSpPr txBox="1"/>
-          <p:nvPr/>
-        </p:nvSpPr>
-        <p:spPr>
-          <a:xfrm>
-            <a:off x="502920" y="1325880"/>
-            <a:ext cx="8138160" cy="3840480"/>
-          </a:xfrm>
-          <a:prstGeom prst="rect">
-            <a:avLst/>
-          </a:prstGeom>
-          <a:noFill/>
-        </p:spPr>
-        <p:txBody>
-          <a:bodyPr wrap="square">
-            <a:spAutoFit/>
-          </a:bodyPr>
-          <a:lstStyle/>
-          <a:p>
-            <a:pPr>
-              <a:spcAft>
-                <a:spcPts val="600"/>
-              </a:spcAft>
-              <a:defRPr sz="1400">
-                <a:solidFill>
-                  <a:srgbClr val="1E1E1E"/>
-                </a:solidFill>
-              </a:defRPr>
-            </a:pPr>
-            <a:r>
-              <a:t>p 对接 Unitree 等人形机器人，完成 speak/gesture/approach 真机视频</a:t>
-            </a:r>
-          </a:p>
-          <a:p>
-            <a:pPr>
-              <a:spcAft>
-                <a:spcPts val="600"/>
-              </a:spcAft>
-              <a:defRPr sz="1400">
-                <a:solidFill>
-                  <a:srgbClr val="1E1E1E"/>
-                </a:solidFill>
-              </a:defRPr>
-            </a:pPr>
-            <a:r>
-              <a:t>p 引入 UR Fall 等公开数据集，开展泛化评测与误报分析</a:t>
-            </a:r>
-          </a:p>
-          <a:p>
-            <a:pPr>
-              <a:spcAft>
-                <a:spcPts val="600"/>
-              </a:spcAft>
-              <a:defRPr sz="1400">
-                <a:solidFill>
-                  <a:srgbClr val="1E1E1E"/>
-                </a:solidFill>
-              </a:defRPr>
-            </a:pPr>
-            <a:r>
-              <a:t>p 多老人房间场景、遮挡与光照鲁棒性优化</a:t>
-            </a:r>
-          </a:p>
-          <a:p>
-            <a:pPr>
-              <a:spcAft>
-                <a:spcPts val="600"/>
-              </a:spcAft>
-              <a:defRPr sz="1400">
-                <a:solidFill>
-                  <a:srgbClr val="1E1E1E"/>
-                </a:solidFill>
-              </a:defRPr>
-            </a:pPr>
-            <a:r>
-              <a:t>p 结合社区/养老院调研，完善产品化与成本评估</a:t>
-            </a:r>
-          </a:p>
-          <a:p>
-            <a:pPr>
-              <a:spcAft>
-                <a:spcPts val="600"/>
-              </a:spcAft>
-              <a:defRPr sz="1400">
-                <a:solidFill>
-                  <a:srgbClr val="1E1E1E"/>
-                </a:solidFill>
-              </a:defRPr>
-            </a:pPr>
-            <a:r>
-              <a:t>p 申请软件著作权 V1.0，探索专利（跌倒融合决策方法）</a:t>
-            </a:r>
-          </a:p>
-        </p:txBody>
-      </p:sp>
-    </p:spTree>
-  </p:cSld>
-  <p:clrMapOvr>
-    <a:masterClrMapping/>
-  </p:clrMapOvr>
-</p:sld>
-</file>
-
 <file path=ppt/slides/slide25.xml><?xml version="1.0" encoding="utf-8"?>
 <p:sld xmlns:a="http://schemas.openxmlformats.org/drawingml/2006/main" xmlns:p="http://schemas.openxmlformats.org/presentationml/2006/main" xmlns:r="http://schemas.openxmlformats.org/officeDocument/2006/relationships">
   <p:cSld>
@@ -7751,7 +7758,7 @@
               </a:defRPr>
             </a:pPr>
             <a:r>
-              <a:t>参考文献</a:t>
+              <a:t>未来工作</a:t>
             </a:r>
           </a:p>
         </p:txBody>
@@ -7764,7 +7771,7 @@
         </p:nvSpPr>
         <p:spPr>
           <a:xfrm>
-            <a:off x="502920" y="1234440"/>
+            <a:off x="502920" y="1325880"/>
             <a:ext cx="8138160" cy="3840480"/>
           </a:xfrm>
           <a:prstGeom prst="rect">
@@ -7782,14 +7789,14 @@
               <a:spcAft>
                 <a:spcPts val="600"/>
               </a:spcAft>
-              <a:defRPr sz="1200">
+              <a:defRPr sz="1400">
                 <a:solidFill>
                   <a:srgbClr val="1E1E1E"/>
                 </a:solidFill>
               </a:defRPr>
             </a:pPr>
             <a:r>
-              <a:t>[1] Google MediaPipe Pose: Real-time pose estimation.</a:t>
+              <a:t>p 对接 Unitree 等人形机器人，完成 speak/gesture/approach 真机视频</a:t>
             </a:r>
           </a:p>
           <a:p>
@@ -7797,14 +7804,14 @@
               <a:spcAft>
                 <a:spcPts val="600"/>
               </a:spcAft>
-              <a:defRPr sz="1200">
+              <a:defRPr sz="1400">
                 <a:solidFill>
                   <a:srgbClr val="1E1E1E"/>
                 </a:solidFill>
               </a:defRPr>
             </a:pPr>
             <a:r>
-              <a:t>[2] Unitree Robotics SDK / ROS2 documentation.</a:t>
+              <a:t>p 引入 UR Fall 等公开数据集，开展泛化评测与误报分析</a:t>
             </a:r>
           </a:p>
           <a:p>
@@ -7812,14 +7819,14 @@
               <a:spcAft>
                 <a:spcPts val="600"/>
               </a:spcAft>
-              <a:defRPr sz="1200">
+              <a:defRPr sz="1400">
                 <a:solidFill>
                   <a:srgbClr val="1E1E1E"/>
                 </a:solidFill>
               </a:defRPr>
             </a:pPr>
             <a:r>
-              <a:t>[3] 国务院：《「十四五」国家老龄事业发展和养老服务体系规划》.</a:t>
+              <a:t>p 多老人房间场景、遮挡与光照鲁棒性优化</a:t>
             </a:r>
           </a:p>
           <a:p>
@@ -7827,14 +7834,14 @@
               <a:spcAft>
                 <a:spcPts val="600"/>
               </a:spcAft>
-              <a:defRPr sz="1200">
+              <a:defRPr sz="1400">
                 <a:solidFill>
                   <a:srgbClr val="1E1E1E"/>
                 </a:solidFill>
               </a:defRPr>
             </a:pPr>
             <a:r>
-              <a:t>[4] CareCompanion 项目文档：docs/TECHNICAL_REPORT.md</a:t>
+              <a:t>p 结合社区/养老院调研，完善产品化与成本评估</a:t>
             </a:r>
           </a:p>
           <a:p>
@@ -7842,14 +7849,14 @@
               <a:spcAft>
                 <a:spcPts val="600"/>
               </a:spcAft>
-              <a:defRPr sz="1200">
+              <a:defRPr sz="1400">
                 <a:solidFill>
                   <a:srgbClr val="1E1E1E"/>
                 </a:solidFill>
               </a:defRPr>
             </a:pPr>
             <a:r>
-              <a:t>[5] 仓库：github.com/FBB123571/ElderCare-Humanoid-Platform</a:t>
+              <a:t>p 申请软件著作权 V1.0，探索专利（跌倒融合决策方法）</a:t>
             </a:r>
           </a:p>
         </p:txBody>
@@ -7863,6 +7870,255 @@
 </file>
 
 <file path=ppt/slides/slide26.xml><?xml version="1.0" encoding="utf-8"?>
+<p:sld xmlns:a="http://schemas.openxmlformats.org/drawingml/2006/main" xmlns:p="http://schemas.openxmlformats.org/presentationml/2006/main" xmlns:r="http://schemas.openxmlformats.org/officeDocument/2006/relationships">
+  <p:cSld>
+    <p:bg>
+      <p:bgPr>
+        <a:solidFill>
+          <a:srgbClr val="FFFFFF"/>
+        </a:solidFill>
+        <a:effectLst/>
+      </p:bgPr>
+    </p:bg>
+    <p:spTree>
+      <p:nvGrpSpPr>
+        <p:cNvPr id="1" name=""/>
+        <p:cNvGrpSpPr/>
+        <p:nvPr/>
+      </p:nvGrpSpPr>
+      <p:grpSpPr/>
+      <p:sp>
+        <p:nvSpPr>
+          <p:cNvPr id="2" name="Rectangle 1"/>
+          <p:cNvSpPr/>
+          <p:nvPr/>
+        </p:nvSpPr>
+        <p:spPr>
+          <a:xfrm>
+            <a:off x="0" y="0"/>
+            <a:ext cx="9144000" cy="475488"/>
+          </a:xfrm>
+          <a:prstGeom prst="rect">
+            <a:avLst/>
+          </a:prstGeom>
+          <a:solidFill>
+            <a:srgbClr val="143278"/>
+          </a:solidFill>
+          <a:ln>
+            <a:noFill/>
+          </a:ln>
+        </p:spPr>
+        <p:style>
+          <a:lnRef idx="1">
+            <a:schemeClr val="accent1"/>
+          </a:lnRef>
+          <a:fillRef idx="3">
+            <a:schemeClr val="accent1"/>
+          </a:fillRef>
+          <a:effectRef idx="2">
+            <a:schemeClr val="accent1"/>
+          </a:effectRef>
+          <a:fontRef idx="minor">
+            <a:schemeClr val="lt1"/>
+          </a:fontRef>
+        </p:style>
+        <p:txBody>
+          <a:bodyPr rtlCol="0" anchor="ctr"/>
+          <a:lstStyle/>
+          <a:p>
+            <a:pPr algn="ctr"/>
+          </a:p>
+        </p:txBody>
+      </p:sp>
+      <p:sp>
+        <p:nvSpPr>
+          <p:cNvPr id="3" name="TextBox 2"/>
+          <p:cNvSpPr txBox="1"/>
+          <p:nvPr/>
+        </p:nvSpPr>
+        <p:spPr>
+          <a:xfrm>
+            <a:off x="137160" y="73152"/>
+            <a:ext cx="8869680" cy="411480"/>
+          </a:xfrm>
+          <a:prstGeom prst="rect">
+            <a:avLst/>
+          </a:prstGeom>
+          <a:noFill/>
+        </p:spPr>
+        <p:txBody>
+          <a:bodyPr wrap="none">
+            <a:spAutoFit/>
+          </a:bodyPr>
+          <a:lstStyle/>
+          <a:p>
+            <a:pPr>
+              <a:defRPr sz="1000" b="1">
+                <a:solidFill>
+                  <a:srgbClr val="FFFFFF"/>
+                </a:solidFill>
+              </a:defRPr>
+            </a:pPr>
+            <a:r>
+              <a:t>第二十八届中国机器人及人工智能大赛</a:t>
+            </a:r>
+          </a:p>
+          <a:p>
+            <a:pPr>
+              <a:defRPr sz="1000">
+                <a:solidFill>
+                  <a:srgbClr val="C8DCFF"/>
+                </a:solidFill>
+              </a:defRPr>
+            </a:pPr>
+            <a:r>
+              <a:t>机器人创新赛道</a:t>
+            </a:r>
+          </a:p>
+        </p:txBody>
+      </p:sp>
+      <p:sp>
+        <p:nvSpPr>
+          <p:cNvPr id="4" name="TextBox 3"/>
+          <p:cNvSpPr txBox="1"/>
+          <p:nvPr/>
+        </p:nvSpPr>
+        <p:spPr>
+          <a:xfrm>
+            <a:off x="502920" y="566928"/>
+            <a:ext cx="8138160" cy="731520"/>
+          </a:xfrm>
+          <a:prstGeom prst="rect">
+            <a:avLst/>
+          </a:prstGeom>
+          <a:noFill/>
+        </p:spPr>
+        <p:txBody>
+          <a:bodyPr wrap="square">
+            <a:spAutoFit/>
+          </a:bodyPr>
+          <a:lstStyle/>
+          <a:p>
+            <a:pPr algn="l">
+              <a:defRPr sz="2400" b="1">
+                <a:solidFill>
+                  <a:srgbClr val="1E1E1E"/>
+                </a:solidFill>
+              </a:defRPr>
+            </a:pPr>
+            <a:r>
+              <a:t>参考文献</a:t>
+            </a:r>
+          </a:p>
+        </p:txBody>
+      </p:sp>
+      <p:sp>
+        <p:nvSpPr>
+          <p:cNvPr id="5" name="TextBox 4"/>
+          <p:cNvSpPr txBox="1"/>
+          <p:nvPr/>
+        </p:nvSpPr>
+        <p:spPr>
+          <a:xfrm>
+            <a:off x="502920" y="1234440"/>
+            <a:ext cx="8138160" cy="3840480"/>
+          </a:xfrm>
+          <a:prstGeom prst="rect">
+            <a:avLst/>
+          </a:prstGeom>
+          <a:noFill/>
+        </p:spPr>
+        <p:txBody>
+          <a:bodyPr wrap="square">
+            <a:spAutoFit/>
+          </a:bodyPr>
+          <a:lstStyle/>
+          <a:p>
+            <a:pPr>
+              <a:spcAft>
+                <a:spcPts val="600"/>
+              </a:spcAft>
+              <a:defRPr sz="1200">
+                <a:solidFill>
+                  <a:srgbClr val="1E1E1E"/>
+                </a:solidFill>
+              </a:defRPr>
+            </a:pPr>
+            <a:r>
+              <a:t>[1] Google MediaPipe Pose: Real-time pose estimation.</a:t>
+            </a:r>
+          </a:p>
+          <a:p>
+            <a:pPr>
+              <a:spcAft>
+                <a:spcPts val="600"/>
+              </a:spcAft>
+              <a:defRPr sz="1200">
+                <a:solidFill>
+                  <a:srgbClr val="1E1E1E"/>
+                </a:solidFill>
+              </a:defRPr>
+            </a:pPr>
+            <a:r>
+              <a:t>[2] Unitree Robotics SDK / ROS2 documentation.</a:t>
+            </a:r>
+          </a:p>
+          <a:p>
+            <a:pPr>
+              <a:spcAft>
+                <a:spcPts val="600"/>
+              </a:spcAft>
+              <a:defRPr sz="1200">
+                <a:solidFill>
+                  <a:srgbClr val="1E1E1E"/>
+                </a:solidFill>
+              </a:defRPr>
+            </a:pPr>
+            <a:r>
+              <a:t>[3] 国务院：《「十四五」国家老龄事业发展和养老服务体系规划》.</a:t>
+            </a:r>
+          </a:p>
+          <a:p>
+            <a:pPr>
+              <a:spcAft>
+                <a:spcPts val="600"/>
+              </a:spcAft>
+              <a:defRPr sz="1200">
+                <a:solidFill>
+                  <a:srgbClr val="1E1E1E"/>
+                </a:solidFill>
+              </a:defRPr>
+            </a:pPr>
+            <a:r>
+              <a:t>[4] CareCompanion 项目文档：docs/TECHNICAL_REPORT.md</a:t>
+            </a:r>
+          </a:p>
+          <a:p>
+            <a:pPr>
+              <a:spcAft>
+                <a:spcPts val="600"/>
+              </a:spcAft>
+              <a:defRPr sz="1200">
+                <a:solidFill>
+                  <a:srgbClr val="1E1E1E"/>
+                </a:solidFill>
+              </a:defRPr>
+            </a:pPr>
+            <a:r>
+              <a:t>[5] 仓库：github.com/FBB123571/ElderCare-Humanoid-Platform</a:t>
+            </a:r>
+          </a:p>
+        </p:txBody>
+      </p:sp>
+    </p:spTree>
+  </p:cSld>
+  <p:clrMapOvr>
+    <a:masterClrMapping/>
+  </p:clrMapOvr>
+</p:sld>
+</file>
+
+<file path=ppt/slides/slide27.xml><?xml version="1.0" encoding="utf-8"?>
 <p:sld xmlns:a="http://schemas.openxmlformats.org/drawingml/2006/main" xmlns:p="http://schemas.openxmlformats.org/presentationml/2006/main" xmlns:r="http://schemas.openxmlformats.org/officeDocument/2006/relationships">
   <p:cSld>
     <p:bg>

--- a/docs/答辩_CareCompanion.pptx
+++ b/docs/答辩_CareCompanion.pptx
@@ -4642,8 +4642,8 @@
         </p:nvSpPr>
         <p:spPr>
           <a:xfrm>
-            <a:off x="2274745" y="914400"/>
-            <a:ext cx="4594508" cy="3753611"/>
+            <a:off x="3300989" y="914400"/>
+            <a:ext cx="2542020" cy="3753611"/>
           </a:xfrm>
           <a:prstGeom prst="rect">
             <a:avLst/>
@@ -4695,8 +4695,8 @@
         </p:blipFill>
         <p:spPr>
           <a:xfrm>
-            <a:off x="2329609" y="969264"/>
-            <a:ext cx="4484780" cy="3643884"/>
+            <a:off x="3355853" y="969264"/>
+            <a:ext cx="2432292" cy="3643883"/>
           </a:xfrm>
           <a:prstGeom prst="rect">
             <a:avLst/>
@@ -4733,7 +4733,7 @@
               </a:defRPr>
             </a:pPr>
             <a:r>
-              <a:t>上传全身/上半身照片 → 自动叠加骨架关键点 · 计算宽高比 0.48 · 跌倒判定</a:t>
+              <a:t>上传全身照后导出骨架叠加图 · 宽高比 0.48 · 支持答辩现场上传演示</a:t>
             </a:r>
           </a:p>
         </p:txBody>

--- a/docs/答辩_CareCompanion.pptx
+++ b/docs/答辩_CareCompanion.pptx
@@ -32,6 +32,8 @@
     <p:sldId id="280" r:id="rId31"/>
     <p:sldId id="281" r:id="rId32"/>
     <p:sldId id="282" r:id="rId33"/>
+    <p:sldId id="283" r:id="rId34"/>
+    <p:sldId id="284" r:id="rId35"/>
   </p:sldIdLst>
   <p:sldSz cx="9144000" cy="5143500" type="screen4x3"/>
   <p:notesSz cx="6858000" cy="9144000"/>
@@ -3207,7 +3209,7 @@
               </a:defRPr>
             </a:pPr>
             <a:r>
-              <a:t>机器人创新赛道</a:t>
+              <a:t>创新赛 · 机器人创新赛道</a:t>
             </a:r>
           </a:p>
         </p:txBody>
@@ -3220,7 +3222,7 @@
         </p:nvSpPr>
         <p:spPr>
           <a:xfrm>
-            <a:off x="502920" y="1051560"/>
+            <a:off x="502920" y="868680"/>
             <a:ext cx="8138160" cy="731520"/>
           </a:xfrm>
           <a:prstGeom prst="rect">
@@ -3235,7 +3237,7 @@
           <a:lstStyle/>
           <a:p>
             <a:pPr algn="ctr">
-              <a:defRPr sz="3400" b="1">
+              <a:defRPr sz="3200" b="1">
                 <a:solidFill>
                   <a:srgbClr val="143278"/>
                 </a:solidFill>
@@ -3255,7 +3257,7 @@
         </p:nvSpPr>
         <p:spPr>
           <a:xfrm>
-            <a:off x="502920" y="1627632"/>
+            <a:off x="502920" y="1353312"/>
             <a:ext cx="8138160" cy="731520"/>
           </a:xfrm>
           <a:prstGeom prst="rect">
@@ -3270,14 +3272,14 @@
           <a:lstStyle/>
           <a:p>
             <a:pPr algn="ctr">
-              <a:defRPr sz="2100" b="1">
+              <a:defRPr sz="1700" b="1">
                 <a:solidFill>
                   <a:srgbClr val="1E1E1E"/>
                 </a:solidFill>
               </a:defRPr>
             </a:pPr>
             <a:r>
-              <a:t>智能养老人形陪伴机器人系统</a:t>
+              <a:t>基于大语言模型的智能养老陪伴机器人仿真平台</a:t>
             </a:r>
           </a:p>
         </p:txBody>
@@ -3290,8 +3292,8 @@
         </p:nvSpPr>
         <p:spPr>
           <a:xfrm>
-            <a:off x="502920" y="2240280"/>
-            <a:ext cx="7498079" cy="3474720"/>
+            <a:off x="502920" y="2148840"/>
+            <a:ext cx="8046720" cy="3474720"/>
           </a:xfrm>
           <a:prstGeom prst="rect">
             <a:avLst/>
@@ -3308,14 +3310,18 @@
               <a:lnSpc>
                 <a:spcPct val="135000"/>
               </a:lnSpc>
-              <a:defRPr sz="1600" b="1">
+              <a:defRPr sz="1300" b="0">
                 <a:solidFill>
                   <a:srgbClr val="1E1E1E"/>
                 </a:solidFill>
               </a:defRPr>
             </a:pPr>
             <a:r>
-              <a:t>「感知—决策—执行」一体化的居家养老安全陪伴平台</a:t>
+              <a:t>参赛团队：从容应队　|　中山大学（广东）</a:t>
+            </a:r>
+            <a:br/>
+            <a:r>
+              <a:t>队长 刘小凡　队员 白冉　指导教师 彭键清（智能科学与技术）</a:t>
             </a:r>
           </a:p>
         </p:txBody>
@@ -3328,8 +3334,8 @@
         </p:nvSpPr>
         <p:spPr>
           <a:xfrm>
-            <a:off x="502920" y="4274820"/>
-            <a:ext cx="8138160" cy="274320"/>
+            <a:off x="502920" y="4183380"/>
+            <a:ext cx="8138160" cy="502920"/>
           </a:xfrm>
           <a:prstGeom prst="rect">
             <a:avLst/>
@@ -3343,49 +3349,26 @@
           <a:lstStyle/>
           <a:p>
             <a:pPr algn="ctr">
-              <a:defRPr sz="1100">
+              <a:defRPr sz="1000">
                 <a:solidFill>
                   <a:srgbClr val="505050"/>
                 </a:solidFill>
               </a:defRPr>
             </a:pPr>
             <a:r>
-              <a:t>第二十八届中国机器人及人工智能大赛</a:t>
-            </a:r>
-          </a:p>
-        </p:txBody>
-      </p:sp>
-      <p:sp>
-        <p:nvSpPr>
-          <p:cNvPr id="8" name="TextBox 7"/>
-          <p:cNvSpPr txBox="1"/>
-          <p:nvPr/>
-        </p:nvSpPr>
-        <p:spPr>
-          <a:xfrm>
-            <a:off x="502920" y="4512564"/>
-            <a:ext cx="8138160" cy="274320"/>
-          </a:xfrm>
-          <a:prstGeom prst="rect">
-            <a:avLst/>
-          </a:prstGeom>
-          <a:noFill/>
-        </p:spPr>
-        <p:txBody>
-          <a:bodyPr wrap="none">
-            <a:spAutoFit/>
-          </a:bodyPr>
-          <a:lstStyle/>
+              <a:t>第二十八届中国机器人及人工智能大赛　·　创新赛 · 机器人创新赛道</a:t>
+            </a:r>
+          </a:p>
           <a:p>
             <a:pPr algn="ctr">
-              <a:defRPr sz="1100">
+              <a:defRPr sz="900">
                 <a:solidFill>
                   <a:srgbClr val="505050"/>
                 </a:solidFill>
               </a:defRPr>
             </a:pPr>
             <a:r>
-              <a:t>机器人创新赛道</a:t>
+              <a:t>团队编号 CRAIC2026-TEAM-8FJQKLMI　作品编号 CRAIC20264ZEFT1DF</a:t>
             </a:r>
           </a:p>
         </p:txBody>
@@ -3501,7 +3484,7 @@
               </a:defRPr>
             </a:pPr>
             <a:r>
-              <a:t>机器人创新赛道</a:t>
+              <a:t>创新赛 · 机器人创新赛道</a:t>
             </a:r>
           </a:p>
         </p:txBody>
@@ -3536,7 +3519,7 @@
               </a:defRPr>
             </a:pPr>
             <a:r>
-              <a:t>情感陪伴与紧急响应</a:t>
+              <a:t>跌倒检测算法</a:t>
             </a:r>
           </a:p>
         </p:txBody>
@@ -3549,7 +3532,7 @@
         </p:nvSpPr>
         <p:spPr>
           <a:xfrm>
-            <a:off x="502920" y="1234440"/>
+            <a:off x="502920" y="1325880"/>
             <a:ext cx="8138160" cy="3840480"/>
           </a:xfrm>
           <a:prstGeom prst="rect">
@@ -3567,14 +3550,14 @@
               <a:spcAft>
                 <a:spcPts val="600"/>
               </a:spcAft>
-              <a:defRPr sz="1300">
+              <a:defRPr sz="1400">
                 <a:solidFill>
                   <a:srgbClr val="1E1E1E"/>
                 </a:solidFill>
               </a:defRPr>
             </a:pPr>
             <a:r>
-              <a:t>对话：文本情感词典 + 视觉情绪标签融合；可插拔 LLM（默认离线 Mock）</a:t>
+              <a:t>几何特征：骨架宽高比 R=w/h、垂直速度 v_y、静止持续时间</a:t>
             </a:r>
           </a:p>
           <a:p>
@@ -3582,14 +3565,14 @@
               <a:spcAft>
                 <a:spcPts val="600"/>
               </a:spcAft>
-              <a:defRPr sz="1300">
+              <a:defRPr sz="1400">
                 <a:solidFill>
                   <a:srgbClr val="1E1E1E"/>
                 </a:solidFill>
               </a:defRPr>
             </a:pPr>
             <a:r>
-              <a:t>紧急链路：alert_sound → speak → call_emergency → raise_hand</a:t>
+              <a:t>快速跌倒：快速下落 + 躺倒姿态（score ≥ 0.7）</a:t>
             </a:r>
           </a:p>
           <a:p>
@@ -3597,14 +3580,44 @@
               <a:spcAft>
                 <a:spcPts val="600"/>
               </a:spcAft>
-              <a:defRPr sz="1300">
+              <a:defRPr sz="1400">
                 <a:solidFill>
                   <a:srgbClr val="1E1E1E"/>
                 </a:solidFill>
               </a:defRPr>
             </a:pPr>
             <a:r>
-              <a:t>EmergencyNotifier：家属 App / 短信 / 本地告警（可审计日志）</a:t>
+              <a:t>慢速跌倒：躺倒静止 ≥ 2s（养老场景常见，score ≥ 0.55）</a:t>
+            </a:r>
+          </a:p>
+          <a:p>
+            <a:pPr>
+              <a:spcAft>
+                <a:spcPts val="600"/>
+              </a:spcAft>
+              <a:defRPr sz="1400">
+                <a:solidFill>
+                  <a:srgbClr val="1E1E1E"/>
+                </a:solidFill>
+              </a:defRPr>
+            </a:pPr>
+            <a:r>
+              <a:t>MediaPipe Pose：浏览器/摄像头实时骨架 → 自动填充感知参数</a:t>
+            </a:r>
+          </a:p>
+          <a:p>
+            <a:pPr>
+              <a:spcAft>
+                <a:spcPts val="600"/>
+              </a:spcAft>
+              <a:defRPr sz="1400">
+                <a:solidFill>
+                  <a:srgbClr val="1E1E1E"/>
+                </a:solidFill>
+              </a:defRPr>
+            </a:pPr>
+            <a:r>
+              <a:t>评测：6 类合成场景，Precision/Recall/F1 = 100%</a:t>
             </a:r>
           </a:p>
         </p:txBody>
@@ -3720,125 +3733,21 @@
               </a:defRPr>
             </a:pPr>
             <a:r>
-              <a:t>机器人创新赛道</a:t>
-            </a:r>
-          </a:p>
-        </p:txBody>
-      </p:sp>
-      <p:sp>
-        <p:nvSpPr>
-          <p:cNvPr id="4" name="Rectangle 3"/>
-          <p:cNvSpPr/>
-          <p:nvPr/>
-        </p:nvSpPr>
-        <p:spPr>
-          <a:xfrm>
-            <a:off x="2375151" y="914400"/>
-            <a:ext cx="4393697" cy="3753611"/>
-          </a:xfrm>
-          <a:prstGeom prst="rect">
-            <a:avLst/>
-          </a:prstGeom>
-          <a:solidFill>
-            <a:srgbClr val="EBF2FA"/>
-          </a:solidFill>
-          <a:ln w="9525">
-            <a:solidFill>
-              <a:srgbClr val="B4C3DC"/>
-            </a:solidFill>
-          </a:ln>
-        </p:spPr>
-        <p:style>
-          <a:lnRef idx="1">
-            <a:schemeClr val="accent1"/>
-          </a:lnRef>
-          <a:fillRef idx="3">
-            <a:schemeClr val="accent1"/>
-          </a:fillRef>
-          <a:effectRef idx="2">
-            <a:schemeClr val="accent1"/>
-          </a:effectRef>
-          <a:fontRef idx="minor">
-            <a:schemeClr val="lt1"/>
-          </a:fontRef>
-        </p:style>
-        <p:txBody>
-          <a:bodyPr rtlCol="0" anchor="ctr"/>
-          <a:lstStyle/>
-          <a:p>
-            <a:pPr algn="ctr"/>
-          </a:p>
-        </p:txBody>
-      </p:sp>
-      <p:pic>
-        <p:nvPicPr>
-          <p:cNvPr id="5" name="Picture 4" descr="ppt_emotion_input.png"/>
-          <p:cNvPicPr>
-            <a:picLocks noChangeAspect="1"/>
-          </p:cNvPicPr>
-          <p:nvPr/>
-        </p:nvPicPr>
-        <p:blipFill>
-          <a:blip r:embed="rId2"/>
-          <a:stretch>
-            <a:fillRect/>
-          </a:stretch>
-        </p:blipFill>
-        <p:spPr>
-          <a:xfrm>
-            <a:off x="2430015" y="969264"/>
-            <a:ext cx="4283969" cy="3643884"/>
-          </a:xfrm>
-          <a:prstGeom prst="rect">
-            <a:avLst/>
-          </a:prstGeom>
-        </p:spPr>
-      </p:pic>
-      <p:sp>
-        <p:nvSpPr>
-          <p:cNvPr id="6" name="TextBox 5"/>
+              <a:t>创新赛 · 机器人创新赛道</a:t>
+            </a:r>
+          </a:p>
+        </p:txBody>
+      </p:sp>
+      <p:sp>
+        <p:nvSpPr>
+          <p:cNvPr id="4" name="TextBox 3"/>
           <p:cNvSpPr txBox="1"/>
           <p:nvPr/>
         </p:nvSpPr>
         <p:spPr>
           <a:xfrm>
-            <a:off x="411480" y="4638751"/>
-            <a:ext cx="8321040" cy="347472"/>
-          </a:xfrm>
-          <a:prstGeom prst="rect">
-            <a:avLst/>
-          </a:prstGeom>
-          <a:noFill/>
-        </p:spPr>
-        <p:txBody>
-          <a:bodyPr wrap="square" anchor="ctr">
-            <a:spAutoFit/>
-          </a:bodyPr>
-          <a:lstStyle/>
-          <a:p>
-            <a:pPr algn="ctr">
-              <a:defRPr sz="900">
-                <a:solidFill>
-                  <a:srgbClr val="505050"/>
-                </a:solidFill>
-              </a:defRPr>
-            </a:pPr>
-            <a:r>
-              <a:t>老人输入「最近有点孤独，睡不太好」→ 系统识别情绪低落并生成安抚话术</a:t>
-            </a:r>
-          </a:p>
-        </p:txBody>
-      </p:sp>
-      <p:sp>
-        <p:nvSpPr>
-          <p:cNvPr id="7" name="TextBox 6"/>
-          <p:cNvSpPr txBox="1"/>
-          <p:nvPr/>
-        </p:nvSpPr>
-        <p:spPr>
-          <a:xfrm>
-            <a:off x="411480" y="530352"/>
-            <a:ext cx="8321040" cy="384048"/>
+            <a:off x="502920" y="566928"/>
+            <a:ext cx="8138160" cy="731520"/>
           </a:xfrm>
           <a:prstGeom prst="rect">
             <a:avLst/>
@@ -3851,15 +3760,83 @@
           </a:bodyPr>
           <a:lstStyle/>
           <a:p>
-            <a:pPr algn="ctr">
-              <a:defRPr sz="1900" b="1">
+            <a:pPr algn="l">
+              <a:defRPr sz="2400" b="1">
                 <a:solidFill>
                   <a:srgbClr val="1E1E1E"/>
                 </a:solidFill>
               </a:defRPr>
             </a:pPr>
             <a:r>
-              <a:t>（界面）情感倾诉交互</a:t>
+              <a:t>情感陪伴与紧急响应</a:t>
+            </a:r>
+          </a:p>
+        </p:txBody>
+      </p:sp>
+      <p:sp>
+        <p:nvSpPr>
+          <p:cNvPr id="5" name="TextBox 4"/>
+          <p:cNvSpPr txBox="1"/>
+          <p:nvPr/>
+        </p:nvSpPr>
+        <p:spPr>
+          <a:xfrm>
+            <a:off x="502920" y="1234440"/>
+            <a:ext cx="8138160" cy="3840480"/>
+          </a:xfrm>
+          <a:prstGeom prst="rect">
+            <a:avLst/>
+          </a:prstGeom>
+          <a:noFill/>
+        </p:spPr>
+        <p:txBody>
+          <a:bodyPr wrap="square">
+            <a:spAutoFit/>
+          </a:bodyPr>
+          <a:lstStyle/>
+          <a:p>
+            <a:pPr>
+              <a:spcAft>
+                <a:spcPts val="600"/>
+              </a:spcAft>
+              <a:defRPr sz="1300">
+                <a:solidFill>
+                  <a:srgbClr val="1E1E1E"/>
+                </a:solidFill>
+              </a:defRPr>
+            </a:pPr>
+            <a:r>
+              <a:t>对话：文本情感词典 + 视觉情绪标签融合；可插拔 LLM（默认离线 Mock）</a:t>
+            </a:r>
+          </a:p>
+          <a:p>
+            <a:pPr>
+              <a:spcAft>
+                <a:spcPts val="600"/>
+              </a:spcAft>
+              <a:defRPr sz="1300">
+                <a:solidFill>
+                  <a:srgbClr val="1E1E1E"/>
+                </a:solidFill>
+              </a:defRPr>
+            </a:pPr>
+            <a:r>
+              <a:t>紧急链路：alert_sound → speak → call_emergency → raise_hand</a:t>
+            </a:r>
+          </a:p>
+          <a:p>
+            <a:pPr>
+              <a:spcAft>
+                <a:spcPts val="600"/>
+              </a:spcAft>
+              <a:defRPr sz="1300">
+                <a:solidFill>
+                  <a:srgbClr val="1E1E1E"/>
+                </a:solidFill>
+              </a:defRPr>
+            </a:pPr>
+            <a:r>
+              <a:t>EmergencyNotifier：家属 App / 短信 / 本地告警（可审计日志）</a:t>
             </a:r>
           </a:p>
         </p:txBody>
@@ -3975,21 +3952,125 @@
               </a:defRPr>
             </a:pPr>
             <a:r>
-              <a:t>机器人创新赛道</a:t>
-            </a:r>
-          </a:p>
-        </p:txBody>
-      </p:sp>
-      <p:sp>
-        <p:nvSpPr>
-          <p:cNvPr id="4" name="TextBox 3"/>
+              <a:t>创新赛 · 机器人创新赛道</a:t>
+            </a:r>
+          </a:p>
+        </p:txBody>
+      </p:sp>
+      <p:sp>
+        <p:nvSpPr>
+          <p:cNvPr id="4" name="Rectangle 3"/>
+          <p:cNvSpPr/>
+          <p:nvPr/>
+        </p:nvSpPr>
+        <p:spPr>
+          <a:xfrm>
+            <a:off x="2375151" y="914400"/>
+            <a:ext cx="4393697" cy="3753611"/>
+          </a:xfrm>
+          <a:prstGeom prst="rect">
+            <a:avLst/>
+          </a:prstGeom>
+          <a:solidFill>
+            <a:srgbClr val="EBF2FA"/>
+          </a:solidFill>
+          <a:ln w="9525">
+            <a:solidFill>
+              <a:srgbClr val="B4C3DC"/>
+            </a:solidFill>
+          </a:ln>
+        </p:spPr>
+        <p:style>
+          <a:lnRef idx="1">
+            <a:schemeClr val="accent1"/>
+          </a:lnRef>
+          <a:fillRef idx="3">
+            <a:schemeClr val="accent1"/>
+          </a:fillRef>
+          <a:effectRef idx="2">
+            <a:schemeClr val="accent1"/>
+          </a:effectRef>
+          <a:fontRef idx="minor">
+            <a:schemeClr val="lt1"/>
+          </a:fontRef>
+        </p:style>
+        <p:txBody>
+          <a:bodyPr rtlCol="0" anchor="ctr"/>
+          <a:lstStyle/>
+          <a:p>
+            <a:pPr algn="ctr"/>
+          </a:p>
+        </p:txBody>
+      </p:sp>
+      <p:pic>
+        <p:nvPicPr>
+          <p:cNvPr id="5" name="Picture 4" descr="ppt_emotion_input.png"/>
+          <p:cNvPicPr>
+            <a:picLocks noChangeAspect="1"/>
+          </p:cNvPicPr>
+          <p:nvPr/>
+        </p:nvPicPr>
+        <p:blipFill>
+          <a:blip r:embed="rId2"/>
+          <a:stretch>
+            <a:fillRect/>
+          </a:stretch>
+        </p:blipFill>
+        <p:spPr>
+          <a:xfrm>
+            <a:off x="2430015" y="969264"/>
+            <a:ext cx="4283969" cy="3643884"/>
+          </a:xfrm>
+          <a:prstGeom prst="rect">
+            <a:avLst/>
+          </a:prstGeom>
+        </p:spPr>
+      </p:pic>
+      <p:sp>
+        <p:nvSpPr>
+          <p:cNvPr id="6" name="TextBox 5"/>
           <p:cNvSpPr txBox="1"/>
           <p:nvPr/>
         </p:nvSpPr>
         <p:spPr>
           <a:xfrm>
-            <a:off x="502920" y="566928"/>
-            <a:ext cx="8138160" cy="731520"/>
+            <a:off x="411480" y="4638751"/>
+            <a:ext cx="8321040" cy="347472"/>
+          </a:xfrm>
+          <a:prstGeom prst="rect">
+            <a:avLst/>
+          </a:prstGeom>
+          <a:noFill/>
+        </p:spPr>
+        <p:txBody>
+          <a:bodyPr wrap="square" anchor="ctr">
+            <a:spAutoFit/>
+          </a:bodyPr>
+          <a:lstStyle/>
+          <a:p>
+            <a:pPr algn="ctr">
+              <a:defRPr sz="900">
+                <a:solidFill>
+                  <a:srgbClr val="505050"/>
+                </a:solidFill>
+              </a:defRPr>
+            </a:pPr>
+            <a:r>
+              <a:t>老人输入「最近有点孤独，睡不太好」→ 系统识别情绪低落并生成安抚话术</a:t>
+            </a:r>
+          </a:p>
+        </p:txBody>
+      </p:sp>
+      <p:sp>
+        <p:nvSpPr>
+          <p:cNvPr id="7" name="TextBox 6"/>
+          <p:cNvSpPr txBox="1"/>
+          <p:nvPr/>
+        </p:nvSpPr>
+        <p:spPr>
+          <a:xfrm>
+            <a:off x="411480" y="530352"/>
+            <a:ext cx="8321040" cy="384048"/>
           </a:xfrm>
           <a:prstGeom prst="rect">
             <a:avLst/>
@@ -4002,113 +4083,15 @@
           </a:bodyPr>
           <a:lstStyle/>
           <a:p>
-            <a:pPr algn="l">
-              <a:defRPr sz="2400" b="1">
+            <a:pPr algn="ctr">
+              <a:defRPr sz="1900" b="1">
                 <a:solidFill>
                   <a:srgbClr val="1E1E1E"/>
                 </a:solidFill>
               </a:defRPr>
             </a:pPr>
             <a:r>
-              <a:t>数据处理与决策流程</a:t>
-            </a:r>
-          </a:p>
-        </p:txBody>
-      </p:sp>
-      <p:sp>
-        <p:nvSpPr>
-          <p:cNvPr id="5" name="TextBox 4"/>
-          <p:cNvSpPr txBox="1"/>
-          <p:nvPr/>
-        </p:nvSpPr>
-        <p:spPr>
-          <a:xfrm>
-            <a:off x="502920" y="1325880"/>
-            <a:ext cx="8138160" cy="3840480"/>
-          </a:xfrm>
-          <a:prstGeom prst="rect">
-            <a:avLst/>
-          </a:prstGeom>
-          <a:noFill/>
-        </p:spPr>
-        <p:txBody>
-          <a:bodyPr wrap="square">
-            <a:spAutoFit/>
-          </a:bodyPr>
-          <a:lstStyle/>
-          <a:p>
-            <a:pPr>
-              <a:spcAft>
-                <a:spcPts val="600"/>
-              </a:spcAft>
-              <a:defRPr sz="1400">
-                <a:solidFill>
-                  <a:srgbClr val="1E1E1E"/>
-                </a:solidFill>
-              </a:defRPr>
-            </a:pPr>
-            <a:r>
-              <a:t>1. 采集感知帧：摄像头骨架 / 滑块仿真 / 可穿戴 JSON</a:t>
-            </a:r>
-          </a:p>
-          <a:p>
-            <a:pPr>
-              <a:spcAft>
-                <a:spcPts val="600"/>
-              </a:spcAft>
-              <a:defRPr sz="1400">
-                <a:solidFill>
-                  <a:srgbClr val="1E1E1E"/>
-                </a:solidFill>
-              </a:defRPr>
-            </a:pPr>
-            <a:r>
-              <a:t>2. FallDetector 更新跌倒分数，Emotion/Health 更新标签</a:t>
-            </a:r>
-          </a:p>
-          <a:p>
-            <a:pPr>
-              <a:spcAft>
-                <a:spcPts val="600"/>
-              </a:spcAft>
-              <a:defRPr sz="1400">
-                <a:solidFill>
-                  <a:srgbClr val="1E1E1E"/>
-                </a:solidFill>
-              </a:defRPr>
-            </a:pPr>
-            <a:r>
-              <a:t>3. RiskEngine 评估等级，状态机切换</a:t>
-            </a:r>
-          </a:p>
-          <a:p>
-            <a:pPr>
-              <a:spcAft>
-                <a:spcPts val="600"/>
-              </a:spcAft>
-              <a:defRPr sz="1400">
-                <a:solidFill>
-                  <a:srgbClr val="1E1E1E"/>
-                </a:solidFill>
-              </a:defRPr>
-            </a:pPr>
-            <a:r>
-              <a:t>4. DialogueManager 生成回复，CarePlanner 输出 RobotAction 序列</a:t>
-            </a:r>
-          </a:p>
-          <a:p>
-            <a:pPr>
-              <a:spcAft>
-                <a:spcPts val="600"/>
-              </a:spcAft>
-              <a:defRPr sz="1400">
-                <a:solidFill>
-                  <a:srgbClr val="1E1E1E"/>
-                </a:solidFill>
-              </a:defRPr>
-            </a:pPr>
-            <a:r>
-              <a:t>5. RobotAdapter 下发至仿真日志或 ROS2 /care/robot_cmd</a:t>
+              <a:t>（界面）情感倾诉交互</a:t>
             </a:r>
           </a:p>
         </p:txBody>
@@ -4224,7 +4207,7 @@
               </a:defRPr>
             </a:pPr>
             <a:r>
-              <a:t>机器人创新赛道</a:t>
+              <a:t>创新赛 · 机器人创新赛道</a:t>
             </a:r>
           </a:p>
         </p:txBody>
@@ -4237,7 +4220,7 @@
         </p:nvSpPr>
         <p:spPr>
           <a:xfrm>
-            <a:off x="502920" y="2068830"/>
+            <a:off x="502920" y="566928"/>
             <a:ext cx="8138160" cy="731520"/>
           </a:xfrm>
           <a:prstGeom prst="rect">
@@ -4251,15 +4234,15 @@
           </a:bodyPr>
           <a:lstStyle/>
           <a:p>
-            <a:pPr algn="ctr">
-              <a:defRPr sz="3000" b="1">
+            <a:pPr algn="l">
+              <a:defRPr sz="2400" b="1">
                 <a:solidFill>
                   <a:srgbClr val="1E1E1E"/>
                 </a:solidFill>
               </a:defRPr>
             </a:pPr>
             <a:r>
-              <a:t>第三部分</a:t>
+              <a:t>数据处理与决策流程</a:t>
             </a:r>
           </a:p>
         </p:txBody>
@@ -4272,8 +4255,8 @@
         </p:nvSpPr>
         <p:spPr>
           <a:xfrm>
-            <a:off x="502920" y="2617470"/>
-            <a:ext cx="8138160" cy="731520"/>
+            <a:off x="502920" y="1325880"/>
+            <a:ext cx="8138160" cy="3840480"/>
           </a:xfrm>
           <a:prstGeom prst="rect">
             <a:avLst/>
@@ -4286,15 +4269,78 @@
           </a:bodyPr>
           <a:lstStyle/>
           <a:p>
-            <a:pPr algn="ctr">
-              <a:defRPr sz="2000" b="1">
-                <a:solidFill>
-                  <a:srgbClr val="143278"/>
-                </a:solidFill>
-              </a:defRPr>
-            </a:pPr>
-            <a:r>
-              <a:t>系统实现 · 评测 · 演示</a:t>
+            <a:pPr>
+              <a:spcAft>
+                <a:spcPts val="600"/>
+              </a:spcAft>
+              <a:defRPr sz="1400">
+                <a:solidFill>
+                  <a:srgbClr val="1E1E1E"/>
+                </a:solidFill>
+              </a:defRPr>
+            </a:pPr>
+            <a:r>
+              <a:t>1. 采集感知帧：摄像头骨架 / 滑块仿真 / 可穿戴 JSON</a:t>
+            </a:r>
+          </a:p>
+          <a:p>
+            <a:pPr>
+              <a:spcAft>
+                <a:spcPts val="600"/>
+              </a:spcAft>
+              <a:defRPr sz="1400">
+                <a:solidFill>
+                  <a:srgbClr val="1E1E1E"/>
+                </a:solidFill>
+              </a:defRPr>
+            </a:pPr>
+            <a:r>
+              <a:t>2. FallDetector 更新跌倒分数，Emotion/Health 更新标签</a:t>
+            </a:r>
+          </a:p>
+          <a:p>
+            <a:pPr>
+              <a:spcAft>
+                <a:spcPts val="600"/>
+              </a:spcAft>
+              <a:defRPr sz="1400">
+                <a:solidFill>
+                  <a:srgbClr val="1E1E1E"/>
+                </a:solidFill>
+              </a:defRPr>
+            </a:pPr>
+            <a:r>
+              <a:t>3. RiskEngine 评估等级，状态机切换</a:t>
+            </a:r>
+          </a:p>
+          <a:p>
+            <a:pPr>
+              <a:spcAft>
+                <a:spcPts val="600"/>
+              </a:spcAft>
+              <a:defRPr sz="1400">
+                <a:solidFill>
+                  <a:srgbClr val="1E1E1E"/>
+                </a:solidFill>
+              </a:defRPr>
+            </a:pPr>
+            <a:r>
+              <a:t>4. DialogueManager 生成回复，CarePlanner 输出 RobotAction 序列</a:t>
+            </a:r>
+          </a:p>
+          <a:p>
+            <a:pPr>
+              <a:spcAft>
+                <a:spcPts val="600"/>
+              </a:spcAft>
+              <a:defRPr sz="1400">
+                <a:solidFill>
+                  <a:srgbClr val="1E1E1E"/>
+                </a:solidFill>
+              </a:defRPr>
+            </a:pPr>
+            <a:r>
+              <a:t>5. RobotAdapter 下发至仿真日志或 ROS2 /care/robot_cmd</a:t>
             </a:r>
           </a:p>
         </p:txBody>
@@ -4410,7 +4456,7 @@
               </a:defRPr>
             </a:pPr>
             <a:r>
-              <a:t>机器人创新赛道</a:t>
+              <a:t>创新赛 · 机器人创新赛道</a:t>
             </a:r>
           </a:p>
         </p:txBody>
@@ -4423,7 +4469,7 @@
         </p:nvSpPr>
         <p:spPr>
           <a:xfrm>
-            <a:off x="502920" y="566928"/>
+            <a:off x="502920" y="2068830"/>
             <a:ext cx="8138160" cy="731520"/>
           </a:xfrm>
           <a:prstGeom prst="rect">
@@ -4437,15 +4483,15 @@
           </a:bodyPr>
           <a:lstStyle/>
           <a:p>
-            <a:pPr algn="l">
-              <a:defRPr sz="2400" b="1">
+            <a:pPr algn="ctr">
+              <a:defRPr sz="3000" b="1">
                 <a:solidFill>
                   <a:srgbClr val="1E1E1E"/>
                 </a:solidFill>
               </a:defRPr>
             </a:pPr>
             <a:r>
-              <a:t>Web 控制台（CareCompanion）</a:t>
+              <a:t>第三部分</a:t>
             </a:r>
           </a:p>
         </p:txBody>
@@ -4458,8 +4504,8 @@
         </p:nvSpPr>
         <p:spPr>
           <a:xfrm>
-            <a:off x="502920" y="1234440"/>
-            <a:ext cx="8138160" cy="3840480"/>
+            <a:off x="502920" y="2617470"/>
+            <a:ext cx="8138160" cy="731520"/>
           </a:xfrm>
           <a:prstGeom prst="rect">
             <a:avLst/>
@@ -4472,48 +4518,15 @@
           </a:bodyPr>
           <a:lstStyle/>
           <a:p>
-            <a:pPr>
-              <a:spcAft>
-                <a:spcPts val="600"/>
-              </a:spcAft>
-              <a:defRPr sz="1300">
-                <a:solidFill>
-                  <a:srgbClr val="1E1E1E"/>
-                </a:solidFill>
-              </a:defRPr>
-            </a:pPr>
-            <a:r>
-              <a:t>访问地址：http://localhost:8765（bash scripts/run_web.sh）</a:t>
-            </a:r>
-          </a:p>
-          <a:p>
-            <a:pPr>
-              <a:spcAft>
-                <a:spcPts val="600"/>
-              </a:spcAft>
-              <a:defRPr sz="1300">
-                <a:solidFill>
-                  <a:srgbClr val="1E1E1E"/>
-                </a:solidFill>
-              </a:defRPr>
-            </a:pPr>
-            <a:r>
-              <a:t>技术栈：FastAPI + 浏览器前端，支持答辩现场演示</a:t>
-            </a:r>
-          </a:p>
-          <a:p>
-            <a:pPr>
-              <a:spcAft>
-                <a:spcPts val="600"/>
-              </a:spcAft>
-              <a:defRPr sz="1300">
-                <a:solidFill>
-                  <a:srgbClr val="1E1E1E"/>
-                </a:solidFill>
-              </a:defRPr>
-            </a:pPr>
-            <a:r>
-              <a:t>以下截图为实际运行界面（2026-05-27 答辩预演录制）</a:t>
+            <a:pPr algn="ctr">
+              <a:defRPr sz="2000" b="1">
+                <a:solidFill>
+                  <a:srgbClr val="143278"/>
+                </a:solidFill>
+              </a:defRPr>
+            </a:pPr>
+            <a:r>
+              <a:t>系统实现 · 评测 · 演示</a:t>
             </a:r>
           </a:p>
         </p:txBody>
@@ -4629,125 +4642,21 @@
               </a:defRPr>
             </a:pPr>
             <a:r>
-              <a:t>机器人创新赛道</a:t>
-            </a:r>
-          </a:p>
-        </p:txBody>
-      </p:sp>
-      <p:sp>
-        <p:nvSpPr>
-          <p:cNvPr id="4" name="Rectangle 3"/>
-          <p:cNvSpPr/>
-          <p:nvPr/>
-        </p:nvSpPr>
-        <p:spPr>
-          <a:xfrm>
-            <a:off x="3300989" y="914400"/>
-            <a:ext cx="2542020" cy="3753611"/>
-          </a:xfrm>
-          <a:prstGeom prst="rect">
-            <a:avLst/>
-          </a:prstGeom>
-          <a:solidFill>
-            <a:srgbClr val="EBF2FA"/>
-          </a:solidFill>
-          <a:ln w="9525">
-            <a:solidFill>
-              <a:srgbClr val="B4C3DC"/>
-            </a:solidFill>
-          </a:ln>
-        </p:spPr>
-        <p:style>
-          <a:lnRef idx="1">
-            <a:schemeClr val="accent1"/>
-          </a:lnRef>
-          <a:fillRef idx="3">
-            <a:schemeClr val="accent1"/>
-          </a:fillRef>
-          <a:effectRef idx="2">
-            <a:schemeClr val="accent1"/>
-          </a:effectRef>
-          <a:fontRef idx="minor">
-            <a:schemeClr val="lt1"/>
-          </a:fontRef>
-        </p:style>
-        <p:txBody>
-          <a:bodyPr rtlCol="0" anchor="ctr"/>
-          <a:lstStyle/>
-          <a:p>
-            <a:pPr algn="ctr"/>
-          </a:p>
-        </p:txBody>
-      </p:sp>
-      <p:pic>
-        <p:nvPicPr>
-          <p:cNvPr id="5" name="Picture 4" descr="ppt_mediapipe_pose.png"/>
-          <p:cNvPicPr>
-            <a:picLocks noChangeAspect="1"/>
-          </p:cNvPicPr>
-          <p:nvPr/>
-        </p:nvPicPr>
-        <p:blipFill>
-          <a:blip r:embed="rId2"/>
-          <a:stretch>
-            <a:fillRect/>
-          </a:stretch>
-        </p:blipFill>
-        <p:spPr>
-          <a:xfrm>
-            <a:off x="3355853" y="969264"/>
-            <a:ext cx="2432292" cy="3643883"/>
-          </a:xfrm>
-          <a:prstGeom prst="rect">
-            <a:avLst/>
-          </a:prstGeom>
-        </p:spPr>
-      </p:pic>
-      <p:sp>
-        <p:nvSpPr>
-          <p:cNvPr id="6" name="TextBox 5"/>
+              <a:t>创新赛 · 机器人创新赛道</a:t>
+            </a:r>
+          </a:p>
+        </p:txBody>
+      </p:sp>
+      <p:sp>
+        <p:nvSpPr>
+          <p:cNvPr id="4" name="TextBox 3"/>
           <p:cNvSpPr txBox="1"/>
           <p:nvPr/>
         </p:nvSpPr>
         <p:spPr>
           <a:xfrm>
-            <a:off x="411480" y="4638751"/>
-            <a:ext cx="8321040" cy="347472"/>
-          </a:xfrm>
-          <a:prstGeom prst="rect">
-            <a:avLst/>
-          </a:prstGeom>
-          <a:noFill/>
-        </p:spPr>
-        <p:txBody>
-          <a:bodyPr wrap="square" anchor="ctr">
-            <a:spAutoFit/>
-          </a:bodyPr>
-          <a:lstStyle/>
-          <a:p>
-            <a:pPr algn="ctr">
-              <a:defRPr sz="900">
-                <a:solidFill>
-                  <a:srgbClr val="505050"/>
-                </a:solidFill>
-              </a:defRPr>
-            </a:pPr>
-            <a:r>
-              <a:t>上传全身照后导出骨架叠加图 · 宽高比 0.48 · 支持答辩现场上传演示</a:t>
-            </a:r>
-          </a:p>
-        </p:txBody>
-      </p:sp>
-      <p:sp>
-        <p:nvSpPr>
-          <p:cNvPr id="7" name="TextBox 6"/>
-          <p:cNvSpPr txBox="1"/>
-          <p:nvPr/>
-        </p:nvSpPr>
-        <p:spPr>
-          <a:xfrm>
-            <a:off x="411480" y="530352"/>
-            <a:ext cx="8321040" cy="384048"/>
+            <a:off x="502920" y="566928"/>
+            <a:ext cx="8138160" cy="731520"/>
           </a:xfrm>
           <a:prstGeom prst="rect">
             <a:avLst/>
@@ -4760,15 +4669,83 @@
           </a:bodyPr>
           <a:lstStyle/>
           <a:p>
-            <a:pPr algn="ctr">
-              <a:defRPr sz="1900" b="1">
+            <a:pPr algn="l">
+              <a:defRPr sz="2400" b="1">
                 <a:solidFill>
                   <a:srgbClr val="1E1E1E"/>
                 </a:solidFill>
               </a:defRPr>
             </a:pPr>
             <a:r>
-              <a:t>系统界面：MediaPipe 骨架分析（上传照片）</a:t>
+              <a:t>Web 控制台（CareCompanion）</a:t>
+            </a:r>
+          </a:p>
+        </p:txBody>
+      </p:sp>
+      <p:sp>
+        <p:nvSpPr>
+          <p:cNvPr id="5" name="TextBox 4"/>
+          <p:cNvSpPr txBox="1"/>
+          <p:nvPr/>
+        </p:nvSpPr>
+        <p:spPr>
+          <a:xfrm>
+            <a:off x="502920" y="1234440"/>
+            <a:ext cx="8138160" cy="3840480"/>
+          </a:xfrm>
+          <a:prstGeom prst="rect">
+            <a:avLst/>
+          </a:prstGeom>
+          <a:noFill/>
+        </p:spPr>
+        <p:txBody>
+          <a:bodyPr wrap="square">
+            <a:spAutoFit/>
+          </a:bodyPr>
+          <a:lstStyle/>
+          <a:p>
+            <a:pPr>
+              <a:spcAft>
+                <a:spcPts val="600"/>
+              </a:spcAft>
+              <a:defRPr sz="1300">
+                <a:solidFill>
+                  <a:srgbClr val="1E1E1E"/>
+                </a:solidFill>
+              </a:defRPr>
+            </a:pPr>
+            <a:r>
+              <a:t>访问地址：http://localhost:8765（bash scripts/run_web.sh）</a:t>
+            </a:r>
+          </a:p>
+          <a:p>
+            <a:pPr>
+              <a:spcAft>
+                <a:spcPts val="600"/>
+              </a:spcAft>
+              <a:defRPr sz="1300">
+                <a:solidFill>
+                  <a:srgbClr val="1E1E1E"/>
+                </a:solidFill>
+              </a:defRPr>
+            </a:pPr>
+            <a:r>
+              <a:t>技术栈：FastAPI + 浏览器前端，支持答辩现场演示</a:t>
+            </a:r>
+          </a:p>
+          <a:p>
+            <a:pPr>
+              <a:spcAft>
+                <a:spcPts val="600"/>
+              </a:spcAft>
+              <a:defRPr sz="1300">
+                <a:solidFill>
+                  <a:srgbClr val="1E1E1E"/>
+                </a:solidFill>
+              </a:defRPr>
+            </a:pPr>
+            <a:r>
+              <a:t>以下截图为实际运行界面（2026-05-27 答辩预演录制）</a:t>
             </a:r>
           </a:p>
         </p:txBody>
@@ -4884,7 +4861,7 @@
               </a:defRPr>
             </a:pPr>
             <a:r>
-              <a:t>机器人创新赛道</a:t>
+              <a:t>创新赛 · 机器人创新赛道</a:t>
             </a:r>
           </a:p>
         </p:txBody>
@@ -4897,8 +4874,8 @@
         </p:nvSpPr>
         <p:spPr>
           <a:xfrm>
-            <a:off x="1023374" y="914400"/>
-            <a:ext cx="7097250" cy="3753611"/>
+            <a:off x="3300989" y="914400"/>
+            <a:ext cx="2542020" cy="3753611"/>
           </a:xfrm>
           <a:prstGeom prst="rect">
             <a:avLst/>
@@ -4936,7 +4913,7 @@
       </p:sp>
       <p:pic>
         <p:nvPicPr>
-          <p:cNvPr id="5" name="Picture 4" descr="ppt_full_dashboard.png"/>
+          <p:cNvPr id="5" name="Picture 4" descr="ppt_mediapipe_pose.png"/>
           <p:cNvPicPr>
             <a:picLocks noChangeAspect="1"/>
           </p:cNvPicPr>
@@ -4950,8 +4927,8 @@
         </p:blipFill>
         <p:spPr>
           <a:xfrm>
-            <a:off x="1078238" y="969264"/>
-            <a:ext cx="6987522" cy="3643884"/>
+            <a:off x="3355853" y="969264"/>
+            <a:ext cx="2432292" cy="3643883"/>
           </a:xfrm>
           <a:prstGeom prst="rect">
             <a:avLst/>
@@ -4988,7 +4965,7 @@
               </a:defRPr>
             </a:pPr>
             <a:r>
-              <a:t>演示场景「老人倾诉」· 风险 0.23 · 机器人主动安抚回复</a:t>
+              <a:t>上传全身照后导出骨架叠加图 · 宽高比 0.48 · 支持答辩现场上传演示</a:t>
             </a:r>
           </a:p>
         </p:txBody>
@@ -5023,7 +5000,7 @@
               </a:defRPr>
             </a:pPr>
             <a:r>
-              <a:t>系统界面：老人倾诉场景（演示剧本）</a:t>
+              <a:t>系统界面：MediaPipe 骨架分析（上传照片）</a:t>
             </a:r>
           </a:p>
         </p:txBody>
@@ -5139,7 +5116,7 @@
               </a:defRPr>
             </a:pPr>
             <a:r>
-              <a:t>机器人创新赛道</a:t>
+              <a:t>创新赛 · 机器人创新赛道</a:t>
             </a:r>
           </a:p>
         </p:txBody>
@@ -5152,8 +5129,8 @@
         </p:nvSpPr>
         <p:spPr>
           <a:xfrm>
-            <a:off x="2986989" y="914400"/>
-            <a:ext cx="3170021" cy="3753611"/>
+            <a:off x="1023374" y="914400"/>
+            <a:ext cx="7097250" cy="3753611"/>
           </a:xfrm>
           <a:prstGeom prst="rect">
             <a:avLst/>
@@ -5191,7 +5168,7 @@
       </p:sp>
       <p:pic>
         <p:nvPicPr>
-          <p:cNvPr id="5" name="Picture 4" descr="ppt_risk_panel.png"/>
+          <p:cNvPr id="5" name="Picture 4" descr="ppt_full_dashboard.png"/>
           <p:cNvPicPr>
             <a:picLocks noChangeAspect="1"/>
           </p:cNvPicPr>
@@ -5205,8 +5182,8 @@
         </p:blipFill>
         <p:spPr>
           <a:xfrm>
-            <a:off x="3041853" y="969264"/>
-            <a:ext cx="3060293" cy="3643884"/>
+            <a:off x="1078238" y="969264"/>
+            <a:ext cx="6987522" cy="3643884"/>
           </a:xfrm>
           <a:prstGeom prst="rect">
             <a:avLst/>
@@ -5243,7 +5220,7 @@
               </a:defRPr>
             </a:pPr>
             <a:r>
-              <a:t>多模态融合输出：风险分数、因素、机器人回应及四项监测指标</a:t>
+              <a:t>演示场景「老人倾诉」· 风险 0.23 · 机器人主动安抚回复</a:t>
             </a:r>
           </a:p>
         </p:txBody>
@@ -5278,7 +5255,7 @@
               </a:defRPr>
             </a:pPr>
             <a:r>
-              <a:t>系统界面：风险决策仪表盘</a:t>
+              <a:t>系统界面：老人倾诉场景（演示剧本）</a:t>
             </a:r>
           </a:p>
         </p:txBody>
@@ -5394,7 +5371,7 @@
               </a:defRPr>
             </a:pPr>
             <a:r>
-              <a:t>机器人创新赛道</a:t>
+              <a:t>创新赛 · 机器人创新赛道</a:t>
             </a:r>
           </a:p>
         </p:txBody>
@@ -5407,8 +5384,8 @@
         </p:nvSpPr>
         <p:spPr>
           <a:xfrm>
-            <a:off x="997006" y="914400"/>
-            <a:ext cx="7149986" cy="3753611"/>
+            <a:off x="2986989" y="914400"/>
+            <a:ext cx="3170021" cy="3753611"/>
           </a:xfrm>
           <a:prstGeom prst="rect">
             <a:avLst/>
@@ -5446,7 +5423,7 @@
       </p:sp>
       <p:pic>
         <p:nvPicPr>
-          <p:cNvPr id="5" name="Picture 4" descr="ppt_header_perception.png"/>
+          <p:cNvPr id="5" name="Picture 4" descr="ppt_risk_panel.png"/>
           <p:cNvPicPr>
             <a:picLocks noChangeAspect="1"/>
           </p:cNvPicPr>
@@ -5460,8 +5437,8 @@
         </p:blipFill>
         <p:spPr>
           <a:xfrm>
-            <a:off x="1051870" y="969264"/>
-            <a:ext cx="7040258" cy="3643884"/>
+            <a:off x="3041853" y="969264"/>
+            <a:ext cx="3060293" cy="3643884"/>
           </a:xfrm>
           <a:prstGeom prst="rect">
             <a:avLst/>
@@ -5498,7 +5475,7 @@
               </a:defRPr>
             </a:pPr>
             <a:r>
-              <a:t>状态机进入「紧急」· 感知输入与 MediaPipe 视觉模块</a:t>
+              <a:t>多模态融合输出：风险分数、因素、机器人回应及四项监测指标</a:t>
             </a:r>
           </a:p>
         </p:txBody>
@@ -5533,7 +5510,7 @@
               </a:defRPr>
             </a:pPr>
             <a:r>
-              <a:t>系统界面：紧急状态监测</a:t>
+              <a:t>系统界面：风险决策仪表盘</a:t>
             </a:r>
           </a:p>
         </p:txBody>
@@ -5649,7 +5626,7 @@
               </a:defRPr>
             </a:pPr>
             <a:r>
-              <a:t>机器人创新赛道</a:t>
+              <a:t>创新赛 · 机器人创新赛道</a:t>
             </a:r>
           </a:p>
         </p:txBody>
@@ -5662,8 +5639,8 @@
         </p:nvSpPr>
         <p:spPr>
           <a:xfrm>
-            <a:off x="1131167" y="914400"/>
-            <a:ext cx="6881664" cy="3753611"/>
+            <a:off x="997006" y="914400"/>
+            <a:ext cx="7149986" cy="3753611"/>
           </a:xfrm>
           <a:prstGeom prst="rect">
             <a:avLst/>
@@ -5701,7 +5678,7 @@
       </p:sp>
       <p:pic>
         <p:nvPicPr>
-          <p:cNvPr id="5" name="Picture 4" descr="ppt_chat_emergency.png"/>
+          <p:cNvPr id="5" name="Picture 4" descr="ppt_header_perception.png"/>
           <p:cNvPicPr>
             <a:picLocks noChangeAspect="1"/>
           </p:cNvPicPr>
@@ -5715,8 +5692,8 @@
         </p:blipFill>
         <p:spPr>
           <a:xfrm>
-            <a:off x="1186031" y="969264"/>
-            <a:ext cx="6771936" cy="3643884"/>
+            <a:off x="1051870" y="969264"/>
+            <a:ext cx="7040258" cy="3643884"/>
           </a:xfrm>
           <a:prstGeom prst="rect">
             <a:avLst/>
@@ -5753,7 +5730,7 @@
               </a:defRPr>
             </a:pPr>
             <a:r>
-              <a:t>演示完成：跌倒紧急流程已成功触发 · 多次紧急安抚语音</a:t>
+              <a:t>状态机进入「紧急」· 感知输入与 MediaPipe 视觉模块</a:t>
             </a:r>
           </a:p>
         </p:txBody>
@@ -5788,7 +5765,7 @@
               </a:defRPr>
             </a:pPr>
             <a:r>
-              <a:t>系统界面：跌倒紧急对话日志</a:t>
+              <a:t>系统界面：紧急状态监测</a:t>
             </a:r>
           </a:p>
         </p:txBody>
@@ -5904,7 +5881,7 @@
               </a:defRPr>
             </a:pPr>
             <a:r>
-              <a:t>机器人创新赛道</a:t>
+              <a:t>创新赛 · 机器人创新赛道</a:t>
             </a:r>
           </a:p>
         </p:txBody>
@@ -5917,7 +5894,7 @@
         </p:nvSpPr>
         <p:spPr>
           <a:xfrm>
-            <a:off x="502920" y="2068830"/>
+            <a:off x="502920" y="566928"/>
             <a:ext cx="8138160" cy="731520"/>
           </a:xfrm>
           <a:prstGeom prst="rect">
@@ -5931,15 +5908,15 @@
           </a:bodyPr>
           <a:lstStyle/>
           <a:p>
-            <a:pPr algn="ctr">
-              <a:defRPr sz="3000" b="1">
+            <a:pPr algn="l">
+              <a:defRPr sz="2400" b="1">
                 <a:solidFill>
                   <a:srgbClr val="1E1E1E"/>
                 </a:solidFill>
               </a:defRPr>
             </a:pPr>
             <a:r>
-              <a:t>第一部分</a:t>
+              <a:t>参赛信息</a:t>
             </a:r>
           </a:p>
         </p:txBody>
@@ -5952,8 +5929,8 @@
         </p:nvSpPr>
         <p:spPr>
           <a:xfrm>
-            <a:off x="502920" y="2617470"/>
-            <a:ext cx="8138160" cy="731520"/>
+            <a:off x="502920" y="1170432"/>
+            <a:ext cx="8138160" cy="3840480"/>
           </a:xfrm>
           <a:prstGeom prst="rect">
             <a:avLst/>
@@ -5966,15 +5943,138 @@
           </a:bodyPr>
           <a:lstStyle/>
           <a:p>
-            <a:pPr algn="ctr">
-              <a:defRPr sz="2000" b="1">
-                <a:solidFill>
-                  <a:srgbClr val="143278"/>
-                </a:solidFill>
-              </a:defRPr>
-            </a:pPr>
-            <a:r>
-              <a:t>项目背景与需求分析</a:t>
+            <a:pPr>
+              <a:spcAft>
+                <a:spcPts val="600"/>
+              </a:spcAft>
+              <a:defRPr sz="1300">
+                <a:solidFill>
+                  <a:srgbClr val="1E1E1E"/>
+                </a:solidFill>
+              </a:defRPr>
+            </a:pPr>
+            <a:r>
+              <a:t>赛项：创新赛 · 机器人创新赛道</a:t>
+            </a:r>
+          </a:p>
+          <a:p>
+            <a:pPr>
+              <a:spcAft>
+                <a:spcPts val="600"/>
+              </a:spcAft>
+              <a:defRPr sz="1300">
+                <a:solidFill>
+                  <a:srgbClr val="1E1E1E"/>
+                </a:solidFill>
+              </a:defRPr>
+            </a:pPr>
+            <a:r>
+              <a:t>团队名称：从容应队</a:t>
+            </a:r>
+          </a:p>
+          <a:p>
+            <a:pPr>
+              <a:spcAft>
+                <a:spcPts val="600"/>
+              </a:spcAft>
+              <a:defRPr sz="1300">
+                <a:solidFill>
+                  <a:srgbClr val="1E1E1E"/>
+                </a:solidFill>
+              </a:defRPr>
+            </a:pPr>
+            <a:r>
+              <a:t>学校：中山大学（广东）</a:t>
+            </a:r>
+          </a:p>
+          <a:p>
+            <a:pPr>
+              <a:spcAft>
+                <a:spcPts val="600"/>
+              </a:spcAft>
+              <a:defRPr sz="1300">
+                <a:solidFill>
+                  <a:srgbClr val="1E1E1E"/>
+                </a:solidFill>
+              </a:defRPr>
+            </a:pPr>
+            <a:r>
+              <a:t>作品名称：基于大语言模型的智能养老陪伴机器人仿真平台</a:t>
+            </a:r>
+          </a:p>
+          <a:p>
+            <a:pPr>
+              <a:spcAft>
+                <a:spcPts val="600"/>
+              </a:spcAft>
+              <a:defRPr sz="1300">
+                <a:solidFill>
+                  <a:srgbClr val="1E1E1E"/>
+                </a:solidFill>
+              </a:defRPr>
+            </a:pPr>
+            <a:r>
+              <a:t>团队编号：CRAIC2026-TEAM-8FJQKLMI</a:t>
+            </a:r>
+          </a:p>
+          <a:p>
+            <a:pPr>
+              <a:spcAft>
+                <a:spcPts val="600"/>
+              </a:spcAft>
+              <a:defRPr sz="1300">
+                <a:solidFill>
+                  <a:srgbClr val="1E1E1E"/>
+                </a:solidFill>
+              </a:defRPr>
+            </a:pPr>
+            <a:r>
+              <a:t>作品编号：CRAIC20264ZEFT1DF</a:t>
+            </a:r>
+          </a:p>
+          <a:p>
+            <a:pPr>
+              <a:spcAft>
+                <a:spcPts val="600"/>
+              </a:spcAft>
+              <a:defRPr sz="1300">
+                <a:solidFill>
+                  <a:srgbClr val="1E1E1E"/>
+                </a:solidFill>
+              </a:defRPr>
+            </a:pPr>
+            <a:r>
+              <a:t>队员：队长 刘小凡，队员 白冉</a:t>
+            </a:r>
+          </a:p>
+          <a:p>
+            <a:pPr>
+              <a:spcAft>
+                <a:spcPts val="600"/>
+              </a:spcAft>
+              <a:defRPr sz="1300">
+                <a:solidFill>
+                  <a:srgbClr val="1E1E1E"/>
+                </a:solidFill>
+              </a:defRPr>
+            </a:pPr>
+            <a:r>
+              <a:t>指导教师：彭键清（智能科学与技术）</a:t>
+            </a:r>
+          </a:p>
+          <a:p>
+            <a:pPr>
+              <a:spcAft>
+                <a:spcPts val="600"/>
+              </a:spcAft>
+              <a:defRPr sz="1300">
+                <a:solidFill>
+                  <a:srgbClr val="1E1E1E"/>
+                </a:solidFill>
+              </a:defRPr>
+            </a:pPr>
+            <a:r>
+              <a:t>代码仓库：https://github.com/FBB123571/ElderCare-Humanoid-Platform</a:t>
             </a:r>
           </a:p>
         </p:txBody>
@@ -6090,7 +6190,7 @@
               </a:defRPr>
             </a:pPr>
             <a:r>
-              <a:t>机器人创新赛道</a:t>
+              <a:t>创新赛 · 机器人创新赛道</a:t>
             </a:r>
           </a:p>
         </p:txBody>
@@ -6103,8 +6203,8 @@
         </p:nvSpPr>
         <p:spPr>
           <a:xfrm>
-            <a:off x="356616" y="1797787"/>
-            <a:ext cx="8430767" cy="1986837"/>
+            <a:off x="1131167" y="914400"/>
+            <a:ext cx="6881664" cy="3753611"/>
           </a:xfrm>
           <a:prstGeom prst="rect">
             <a:avLst/>
@@ -6142,7 +6242,7 @@
       </p:sp>
       <p:pic>
         <p:nvPicPr>
-          <p:cNvPr id="5" name="Picture 4" descr="ppt_robot_commands.png"/>
+          <p:cNvPr id="5" name="Picture 4" descr="ppt_chat_emergency.png"/>
           <p:cNvPicPr>
             <a:picLocks noChangeAspect="1"/>
           </p:cNvPicPr>
@@ -6156,8 +6256,8 @@
         </p:blipFill>
         <p:spPr>
           <a:xfrm>
-            <a:off x="411480" y="1852651"/>
-            <a:ext cx="8321040" cy="1877110"/>
+            <a:off x="1186031" y="969264"/>
+            <a:ext cx="6771936" cy="3643884"/>
           </a:xfrm>
           <a:prstGeom prst="rect">
             <a:avLst/>
@@ -6194,7 +6294,7 @@
               </a:defRPr>
             </a:pPr>
             <a:r>
-              <a:t>告警音 → 语音 → 紧急呼叫（跌倒事件）→ 举手手势，全链路可追溯</a:t>
+              <a:t>演示完成：跌倒紧急流程已成功触发 · 多次紧急安抚语音</a:t>
             </a:r>
           </a:p>
         </p:txBody>
@@ -6229,7 +6329,7 @@
               </a:defRPr>
             </a:pPr>
             <a:r>
-              <a:t>系统界面：机器人指令流</a:t>
+              <a:t>系统界面：跌倒紧急对话日志</a:t>
             </a:r>
           </a:p>
         </p:txBody>
@@ -6345,7 +6445,262 @@
               </a:defRPr>
             </a:pPr>
             <a:r>
-              <a:t>机器人创新赛道</a:t>
+              <a:t>创新赛 · 机器人创新赛道</a:t>
+            </a:r>
+          </a:p>
+        </p:txBody>
+      </p:sp>
+      <p:sp>
+        <p:nvSpPr>
+          <p:cNvPr id="4" name="Rectangle 3"/>
+          <p:cNvSpPr/>
+          <p:nvPr/>
+        </p:nvSpPr>
+        <p:spPr>
+          <a:xfrm>
+            <a:off x="356616" y="1797787"/>
+            <a:ext cx="8430767" cy="1986837"/>
+          </a:xfrm>
+          <a:prstGeom prst="rect">
+            <a:avLst/>
+          </a:prstGeom>
+          <a:solidFill>
+            <a:srgbClr val="EBF2FA"/>
+          </a:solidFill>
+          <a:ln w="9525">
+            <a:solidFill>
+              <a:srgbClr val="B4C3DC"/>
+            </a:solidFill>
+          </a:ln>
+        </p:spPr>
+        <p:style>
+          <a:lnRef idx="1">
+            <a:schemeClr val="accent1"/>
+          </a:lnRef>
+          <a:fillRef idx="3">
+            <a:schemeClr val="accent1"/>
+          </a:fillRef>
+          <a:effectRef idx="2">
+            <a:schemeClr val="accent1"/>
+          </a:effectRef>
+          <a:fontRef idx="minor">
+            <a:schemeClr val="lt1"/>
+          </a:fontRef>
+        </p:style>
+        <p:txBody>
+          <a:bodyPr rtlCol="0" anchor="ctr"/>
+          <a:lstStyle/>
+          <a:p>
+            <a:pPr algn="ctr"/>
+          </a:p>
+        </p:txBody>
+      </p:sp>
+      <p:pic>
+        <p:nvPicPr>
+          <p:cNvPr id="5" name="Picture 4" descr="ppt_robot_commands.png"/>
+          <p:cNvPicPr>
+            <a:picLocks noChangeAspect="1"/>
+          </p:cNvPicPr>
+          <p:nvPr/>
+        </p:nvPicPr>
+        <p:blipFill>
+          <a:blip r:embed="rId2"/>
+          <a:stretch>
+            <a:fillRect/>
+          </a:stretch>
+        </p:blipFill>
+        <p:spPr>
+          <a:xfrm>
+            <a:off x="411480" y="1852651"/>
+            <a:ext cx="8321040" cy="1877110"/>
+          </a:xfrm>
+          <a:prstGeom prst="rect">
+            <a:avLst/>
+          </a:prstGeom>
+        </p:spPr>
+      </p:pic>
+      <p:sp>
+        <p:nvSpPr>
+          <p:cNvPr id="6" name="TextBox 5"/>
+          <p:cNvSpPr txBox="1"/>
+          <p:nvPr/>
+        </p:nvSpPr>
+        <p:spPr>
+          <a:xfrm>
+            <a:off x="411480" y="4638751"/>
+            <a:ext cx="8321040" cy="347472"/>
+          </a:xfrm>
+          <a:prstGeom prst="rect">
+            <a:avLst/>
+          </a:prstGeom>
+          <a:noFill/>
+        </p:spPr>
+        <p:txBody>
+          <a:bodyPr wrap="square" anchor="ctr">
+            <a:spAutoFit/>
+          </a:bodyPr>
+          <a:lstStyle/>
+          <a:p>
+            <a:pPr algn="ctr">
+              <a:defRPr sz="900">
+                <a:solidFill>
+                  <a:srgbClr val="505050"/>
+                </a:solidFill>
+              </a:defRPr>
+            </a:pPr>
+            <a:r>
+              <a:t>告警音 → 语音 → 紧急呼叫（跌倒事件）→ 举手手势，全链路可追溯</a:t>
+            </a:r>
+          </a:p>
+        </p:txBody>
+      </p:sp>
+      <p:sp>
+        <p:nvSpPr>
+          <p:cNvPr id="7" name="TextBox 6"/>
+          <p:cNvSpPr txBox="1"/>
+          <p:nvPr/>
+        </p:nvSpPr>
+        <p:spPr>
+          <a:xfrm>
+            <a:off x="411480" y="530352"/>
+            <a:ext cx="8321040" cy="384048"/>
+          </a:xfrm>
+          <a:prstGeom prst="rect">
+            <a:avLst/>
+          </a:prstGeom>
+          <a:noFill/>
+        </p:spPr>
+        <p:txBody>
+          <a:bodyPr wrap="square">
+            <a:spAutoFit/>
+          </a:bodyPr>
+          <a:lstStyle/>
+          <a:p>
+            <a:pPr algn="ctr">
+              <a:defRPr sz="1900" b="1">
+                <a:solidFill>
+                  <a:srgbClr val="1E1E1E"/>
+                </a:solidFill>
+              </a:defRPr>
+            </a:pPr>
+            <a:r>
+              <a:t>系统界面：机器人指令流</a:t>
+            </a:r>
+          </a:p>
+        </p:txBody>
+      </p:sp>
+    </p:spTree>
+  </p:cSld>
+  <p:clrMapOvr>
+    <a:masterClrMapping/>
+  </p:clrMapOvr>
+</p:sld>
+</file>
+
+<file path=ppt/slides/slide22.xml><?xml version="1.0" encoding="utf-8"?>
+<p:sld xmlns:a="http://schemas.openxmlformats.org/drawingml/2006/main" xmlns:p="http://schemas.openxmlformats.org/presentationml/2006/main" xmlns:r="http://schemas.openxmlformats.org/officeDocument/2006/relationships">
+  <p:cSld>
+    <p:bg>
+      <p:bgPr>
+        <a:solidFill>
+          <a:srgbClr val="FFFFFF"/>
+        </a:solidFill>
+        <a:effectLst/>
+      </p:bgPr>
+    </p:bg>
+    <p:spTree>
+      <p:nvGrpSpPr>
+        <p:cNvPr id="1" name=""/>
+        <p:cNvGrpSpPr/>
+        <p:nvPr/>
+      </p:nvGrpSpPr>
+      <p:grpSpPr/>
+      <p:sp>
+        <p:nvSpPr>
+          <p:cNvPr id="2" name="Rectangle 1"/>
+          <p:cNvSpPr/>
+          <p:nvPr/>
+        </p:nvSpPr>
+        <p:spPr>
+          <a:xfrm>
+            <a:off x="0" y="0"/>
+            <a:ext cx="9144000" cy="475488"/>
+          </a:xfrm>
+          <a:prstGeom prst="rect">
+            <a:avLst/>
+          </a:prstGeom>
+          <a:solidFill>
+            <a:srgbClr val="143278"/>
+          </a:solidFill>
+          <a:ln>
+            <a:noFill/>
+          </a:ln>
+        </p:spPr>
+        <p:style>
+          <a:lnRef idx="1">
+            <a:schemeClr val="accent1"/>
+          </a:lnRef>
+          <a:fillRef idx="3">
+            <a:schemeClr val="accent1"/>
+          </a:fillRef>
+          <a:effectRef idx="2">
+            <a:schemeClr val="accent1"/>
+          </a:effectRef>
+          <a:fontRef idx="minor">
+            <a:schemeClr val="lt1"/>
+          </a:fontRef>
+        </p:style>
+        <p:txBody>
+          <a:bodyPr rtlCol="0" anchor="ctr"/>
+          <a:lstStyle/>
+          <a:p>
+            <a:pPr algn="ctr"/>
+          </a:p>
+        </p:txBody>
+      </p:sp>
+      <p:sp>
+        <p:nvSpPr>
+          <p:cNvPr id="3" name="TextBox 2"/>
+          <p:cNvSpPr txBox="1"/>
+          <p:nvPr/>
+        </p:nvSpPr>
+        <p:spPr>
+          <a:xfrm>
+            <a:off x="137160" y="73152"/>
+            <a:ext cx="8869680" cy="411480"/>
+          </a:xfrm>
+          <a:prstGeom prst="rect">
+            <a:avLst/>
+          </a:prstGeom>
+          <a:noFill/>
+        </p:spPr>
+        <p:txBody>
+          <a:bodyPr wrap="none">
+            <a:spAutoFit/>
+          </a:bodyPr>
+          <a:lstStyle/>
+          <a:p>
+            <a:pPr>
+              <a:defRPr sz="1000" b="1">
+                <a:solidFill>
+                  <a:srgbClr val="FFFFFF"/>
+                </a:solidFill>
+              </a:defRPr>
+            </a:pPr>
+            <a:r>
+              <a:t>第二十八届中国机器人及人工智能大赛</a:t>
+            </a:r>
+          </a:p>
+          <a:p>
+            <a:pPr>
+              <a:defRPr sz="1000">
+                <a:solidFill>
+                  <a:srgbClr val="C8DCFF"/>
+                </a:solidFill>
+              </a:defRPr>
+            </a:pPr>
+            <a:r>
+              <a:t>创新赛 · 机器人创新赛道</a:t>
             </a:r>
           </a:p>
         </p:txBody>
@@ -6745,270 +7100,6 @@
 </p:sld>
 </file>
 
-<file path=ppt/slides/slide22.xml><?xml version="1.0" encoding="utf-8"?>
-<p:sld xmlns:a="http://schemas.openxmlformats.org/drawingml/2006/main" xmlns:p="http://schemas.openxmlformats.org/presentationml/2006/main" xmlns:r="http://schemas.openxmlformats.org/officeDocument/2006/relationships">
-  <p:cSld>
-    <p:bg>
-      <p:bgPr>
-        <a:solidFill>
-          <a:srgbClr val="FFFFFF"/>
-        </a:solidFill>
-        <a:effectLst/>
-      </p:bgPr>
-    </p:bg>
-    <p:spTree>
-      <p:nvGrpSpPr>
-        <p:cNvPr id="1" name=""/>
-        <p:cNvGrpSpPr/>
-        <p:nvPr/>
-      </p:nvGrpSpPr>
-      <p:grpSpPr/>
-      <p:sp>
-        <p:nvSpPr>
-          <p:cNvPr id="2" name="Rectangle 1"/>
-          <p:cNvSpPr/>
-          <p:nvPr/>
-        </p:nvSpPr>
-        <p:spPr>
-          <a:xfrm>
-            <a:off x="0" y="0"/>
-            <a:ext cx="9144000" cy="475488"/>
-          </a:xfrm>
-          <a:prstGeom prst="rect">
-            <a:avLst/>
-          </a:prstGeom>
-          <a:solidFill>
-            <a:srgbClr val="143278"/>
-          </a:solidFill>
-          <a:ln>
-            <a:noFill/>
-          </a:ln>
-        </p:spPr>
-        <p:style>
-          <a:lnRef idx="1">
-            <a:schemeClr val="accent1"/>
-          </a:lnRef>
-          <a:fillRef idx="3">
-            <a:schemeClr val="accent1"/>
-          </a:fillRef>
-          <a:effectRef idx="2">
-            <a:schemeClr val="accent1"/>
-          </a:effectRef>
-          <a:fontRef idx="minor">
-            <a:schemeClr val="lt1"/>
-          </a:fontRef>
-        </p:style>
-        <p:txBody>
-          <a:bodyPr rtlCol="0" anchor="ctr"/>
-          <a:lstStyle/>
-          <a:p>
-            <a:pPr algn="ctr"/>
-          </a:p>
-        </p:txBody>
-      </p:sp>
-      <p:sp>
-        <p:nvSpPr>
-          <p:cNvPr id="3" name="TextBox 2"/>
-          <p:cNvSpPr txBox="1"/>
-          <p:nvPr/>
-        </p:nvSpPr>
-        <p:spPr>
-          <a:xfrm>
-            <a:off x="137160" y="73152"/>
-            <a:ext cx="8869680" cy="411480"/>
-          </a:xfrm>
-          <a:prstGeom prst="rect">
-            <a:avLst/>
-          </a:prstGeom>
-          <a:noFill/>
-        </p:spPr>
-        <p:txBody>
-          <a:bodyPr wrap="none">
-            <a:spAutoFit/>
-          </a:bodyPr>
-          <a:lstStyle/>
-          <a:p>
-            <a:pPr>
-              <a:defRPr sz="1000" b="1">
-                <a:solidFill>
-                  <a:srgbClr val="FFFFFF"/>
-                </a:solidFill>
-              </a:defRPr>
-            </a:pPr>
-            <a:r>
-              <a:t>第二十八届中国机器人及人工智能大赛</a:t>
-            </a:r>
-          </a:p>
-          <a:p>
-            <a:pPr>
-              <a:defRPr sz="1000">
-                <a:solidFill>
-                  <a:srgbClr val="C8DCFF"/>
-                </a:solidFill>
-              </a:defRPr>
-            </a:pPr>
-            <a:r>
-              <a:t>机器人创新赛道</a:t>
-            </a:r>
-          </a:p>
-        </p:txBody>
-      </p:sp>
-      <p:sp>
-        <p:nvSpPr>
-          <p:cNvPr id="4" name="TextBox 3"/>
-          <p:cNvSpPr txBox="1"/>
-          <p:nvPr/>
-        </p:nvSpPr>
-        <p:spPr>
-          <a:xfrm>
-            <a:off x="502920" y="566928"/>
-            <a:ext cx="8138160" cy="731520"/>
-          </a:xfrm>
-          <a:prstGeom prst="rect">
-            <a:avLst/>
-          </a:prstGeom>
-          <a:noFill/>
-        </p:spPr>
-        <p:txBody>
-          <a:bodyPr wrap="square">
-            <a:spAutoFit/>
-          </a:bodyPr>
-          <a:lstStyle/>
-          <a:p>
-            <a:pPr algn="l">
-              <a:defRPr sz="2400" b="1">
-                <a:solidFill>
-                  <a:srgbClr val="1E1E1E"/>
-                </a:solidFill>
-              </a:defRPr>
-            </a:pPr>
-            <a:r>
-              <a:t>开源与知识产权</a:t>
-            </a:r>
-          </a:p>
-        </p:txBody>
-      </p:sp>
-      <p:sp>
-        <p:nvSpPr>
-          <p:cNvPr id="5" name="TextBox 4"/>
-          <p:cNvSpPr txBox="1"/>
-          <p:nvPr/>
-        </p:nvSpPr>
-        <p:spPr>
-          <a:xfrm>
-            <a:off x="502920" y="1325880"/>
-            <a:ext cx="8138160" cy="3840480"/>
-          </a:xfrm>
-          <a:prstGeom prst="rect">
-            <a:avLst/>
-          </a:prstGeom>
-          <a:noFill/>
-        </p:spPr>
-        <p:txBody>
-          <a:bodyPr wrap="square">
-            <a:spAutoFit/>
-          </a:bodyPr>
-          <a:lstStyle/>
-          <a:p>
-            <a:pPr>
-              <a:spcAft>
-                <a:spcPts val="600"/>
-              </a:spcAft>
-              <a:defRPr sz="1400">
-                <a:solidFill>
-                  <a:srgbClr val="1E1E1E"/>
-                </a:solidFill>
-              </a:defRPr>
-            </a:pPr>
-            <a:r>
-              <a:t>GitHub 开源：https://github.com/FBB123571/ElderCare-Humanoid-Platform</a:t>
-            </a:r>
-          </a:p>
-          <a:p>
-            <a:pPr>
-              <a:spcAft>
-                <a:spcPts val="600"/>
-              </a:spcAft>
-              <a:defRPr sz="1400">
-                <a:solidFill>
-                  <a:srgbClr val="1E1E1E"/>
-                </a:solidFill>
-              </a:defRPr>
-            </a:pPr>
-            <a:r>
-              <a:t>答辩演示：http://localhost:8765（现场端口转发）</a:t>
-            </a:r>
-          </a:p>
-          <a:p>
-            <a:pPr>
-              <a:spcAft>
-                <a:spcPts val="600"/>
-              </a:spcAft>
-              <a:defRPr sz="1400">
-                <a:solidFill>
-                  <a:srgbClr val="1E1E1E"/>
-                </a:solidFill>
-              </a:defRPr>
-            </a:pPr>
-            <a:r>
-              <a:t>软件名称建议：CareCompanion 智能养老人形陪伴机器人系统 V1.0</a:t>
-            </a:r>
-          </a:p>
-          <a:p>
-            <a:pPr>
-              <a:spcAft>
-                <a:spcPts val="600"/>
-              </a:spcAft>
-              <a:defRPr sz="1400">
-                <a:solidFill>
-                  <a:srgbClr val="1E1E1E"/>
-                </a:solidFill>
-              </a:defRPr>
-            </a:pPr>
-            <a:r>
-              <a:t>核心代码：care_companion/ · web/ · scripts/ · tests/</a:t>
-            </a:r>
-          </a:p>
-          <a:p>
-            <a:pPr>
-              <a:spcAft>
-                <a:spcPts val="600"/>
-              </a:spcAft>
-              <a:defRPr sz="1400">
-                <a:solidFill>
-                  <a:srgbClr val="1E1E1E"/>
-                </a:solidFill>
-              </a:defRPr>
-            </a:pPr>
-            <a:r>
-              <a:t>文档：技术报告 · 架构说明 · 部署指南 · 竞赛答辩要点</a:t>
-            </a:r>
-          </a:p>
-          <a:p>
-            <a:pPr>
-              <a:spcAft>
-                <a:spcPts val="600"/>
-              </a:spcAft>
-              <a:defRPr sz="1400">
-                <a:solidFill>
-                  <a:srgbClr val="1E1E1E"/>
-                </a:solidFill>
-              </a:defRPr>
-            </a:pPr>
-            <a:r>
-              <a:t>（请填写）软著登记号 / 团队成员 / 指导教师</a:t>
-            </a:r>
-          </a:p>
-        </p:txBody>
-      </p:sp>
-    </p:spTree>
-  </p:cSld>
-  <p:clrMapOvr>
-    <a:masterClrMapping/>
-  </p:clrMapOvr>
-</p:sld>
-</file>
-
 <file path=ppt/slides/slide23.xml><?xml version="1.0" encoding="utf-8"?>
 <p:sld xmlns:a="http://schemas.openxmlformats.org/drawingml/2006/main" xmlns:p="http://schemas.openxmlformats.org/presentationml/2006/main" xmlns:r="http://schemas.openxmlformats.org/officeDocument/2006/relationships">
   <p:cSld>
@@ -7112,7 +7203,7 @@
               </a:defRPr>
             </a:pPr>
             <a:r>
-              <a:t>机器人创新赛道</a:t>
+              <a:t>创新赛 · 机器人创新赛道</a:t>
             </a:r>
           </a:p>
         </p:txBody>
@@ -7125,7 +7216,7 @@
         </p:nvSpPr>
         <p:spPr>
           <a:xfrm>
-            <a:off x="502920" y="2068830"/>
+            <a:off x="502920" y="566928"/>
             <a:ext cx="8138160" cy="731520"/>
           </a:xfrm>
           <a:prstGeom prst="rect">
@@ -7139,15 +7230,15 @@
           </a:bodyPr>
           <a:lstStyle/>
           <a:p>
-            <a:pPr algn="ctr">
-              <a:defRPr sz="3000" b="1">
+            <a:pPr algn="l">
+              <a:defRPr sz="2400" b="1">
                 <a:solidFill>
                   <a:srgbClr val="1E1E1E"/>
                 </a:solidFill>
               </a:defRPr>
             </a:pPr>
             <a:r>
-              <a:t>第四部分</a:t>
+              <a:t>开源与知识产权</a:t>
             </a:r>
           </a:p>
         </p:txBody>
@@ -7160,8 +7251,8 @@
         </p:nvSpPr>
         <p:spPr>
           <a:xfrm>
-            <a:off x="502920" y="2617470"/>
-            <a:ext cx="8138160" cy="731520"/>
+            <a:off x="502920" y="1170432"/>
+            <a:ext cx="8138160" cy="3840480"/>
           </a:xfrm>
           <a:prstGeom prst="rect">
             <a:avLst/>
@@ -7174,15 +7265,93 @@
           </a:bodyPr>
           <a:lstStyle/>
           <a:p>
-            <a:pPr algn="ctr">
-              <a:defRPr sz="2000" b="1">
-                <a:solidFill>
-                  <a:srgbClr val="143278"/>
-                </a:solidFill>
-              </a:defRPr>
-            </a:pPr>
-            <a:r>
-              <a:t>创新维度与未来展望</a:t>
+            <a:pPr>
+              <a:spcAft>
+                <a:spcPts val="600"/>
+              </a:spcAft>
+              <a:defRPr sz="1300">
+                <a:solidFill>
+                  <a:srgbClr val="1E1E1E"/>
+                </a:solidFill>
+              </a:defRPr>
+            </a:pPr>
+            <a:r>
+              <a:t>开源地址：https://github.com/FBB123571/ElderCare-Humanoid-Platform</a:t>
+            </a:r>
+          </a:p>
+          <a:p>
+            <a:pPr>
+              <a:spcAft>
+                <a:spcPts val="600"/>
+              </a:spcAft>
+              <a:defRPr sz="1300">
+                <a:solidFill>
+                  <a:srgbClr val="1E1E1E"/>
+                </a:solidFill>
+              </a:defRPr>
+            </a:pPr>
+            <a:r>
+              <a:t>参赛团队：从容应队（中山大学）</a:t>
+            </a:r>
+          </a:p>
+          <a:p>
+            <a:pPr>
+              <a:spcAft>
+                <a:spcPts val="600"/>
+              </a:spcAft>
+              <a:defRPr sz="1300">
+                <a:solidFill>
+                  <a:srgbClr val="1E1E1E"/>
+                </a:solidFill>
+              </a:defRPr>
+            </a:pPr>
+            <a:r>
+              <a:t>现场演示：http://localhost:8765（bash scripts/run_web.sh）</a:t>
+            </a:r>
+          </a:p>
+          <a:p>
+            <a:pPr>
+              <a:spcAft>
+                <a:spcPts val="600"/>
+              </a:spcAft>
+              <a:defRPr sz="1300">
+                <a:solidFill>
+                  <a:srgbClr val="1E1E1E"/>
+                </a:solidFill>
+              </a:defRPr>
+            </a:pPr>
+            <a:r>
+              <a:t>演示录像：docs/assets/demo_carecompanion.mp4</a:t>
+            </a:r>
+          </a:p>
+          <a:p>
+            <a:pPr>
+              <a:spcAft>
+                <a:spcPts val="600"/>
+              </a:spcAft>
+              <a:defRPr sz="1300">
+                <a:solidFill>
+                  <a:srgbClr val="1E1E1E"/>
+                </a:solidFill>
+              </a:defRPr>
+            </a:pPr>
+            <a:r>
+              <a:t>软件名称：CareCompanion 智能养老人形陪伴机器人系统 V1.0</a:t>
+            </a:r>
+          </a:p>
+          <a:p>
+            <a:pPr>
+              <a:spcAft>
+                <a:spcPts val="600"/>
+              </a:spcAft>
+              <a:defRPr sz="1300">
+                <a:solidFill>
+                  <a:srgbClr val="1E1E1E"/>
+                </a:solidFill>
+              </a:defRPr>
+            </a:pPr>
+            <a:r>
+              <a:t>软著登记：（申请中 / 按实际填写）</a:t>
             </a:r>
           </a:p>
         </p:txBody>
@@ -7298,7 +7467,193 @@
               </a:defRPr>
             </a:pPr>
             <a:r>
-              <a:t>机器人创新赛道</a:t>
+              <a:t>创新赛 · 机器人创新赛道</a:t>
+            </a:r>
+          </a:p>
+        </p:txBody>
+      </p:sp>
+      <p:sp>
+        <p:nvSpPr>
+          <p:cNvPr id="4" name="TextBox 3"/>
+          <p:cNvSpPr txBox="1"/>
+          <p:nvPr/>
+        </p:nvSpPr>
+        <p:spPr>
+          <a:xfrm>
+            <a:off x="502920" y="2068830"/>
+            <a:ext cx="8138160" cy="731520"/>
+          </a:xfrm>
+          <a:prstGeom prst="rect">
+            <a:avLst/>
+          </a:prstGeom>
+          <a:noFill/>
+        </p:spPr>
+        <p:txBody>
+          <a:bodyPr wrap="square">
+            <a:spAutoFit/>
+          </a:bodyPr>
+          <a:lstStyle/>
+          <a:p>
+            <a:pPr algn="ctr">
+              <a:defRPr sz="3000" b="1">
+                <a:solidFill>
+                  <a:srgbClr val="1E1E1E"/>
+                </a:solidFill>
+              </a:defRPr>
+            </a:pPr>
+            <a:r>
+              <a:t>第四部分</a:t>
+            </a:r>
+          </a:p>
+        </p:txBody>
+      </p:sp>
+      <p:sp>
+        <p:nvSpPr>
+          <p:cNvPr id="5" name="TextBox 4"/>
+          <p:cNvSpPr txBox="1"/>
+          <p:nvPr/>
+        </p:nvSpPr>
+        <p:spPr>
+          <a:xfrm>
+            <a:off x="502920" y="2617470"/>
+            <a:ext cx="8138160" cy="731520"/>
+          </a:xfrm>
+          <a:prstGeom prst="rect">
+            <a:avLst/>
+          </a:prstGeom>
+          <a:noFill/>
+        </p:spPr>
+        <p:txBody>
+          <a:bodyPr wrap="square">
+            <a:spAutoFit/>
+          </a:bodyPr>
+          <a:lstStyle/>
+          <a:p>
+            <a:pPr algn="ctr">
+              <a:defRPr sz="2000" b="1">
+                <a:solidFill>
+                  <a:srgbClr val="143278"/>
+                </a:solidFill>
+              </a:defRPr>
+            </a:pPr>
+            <a:r>
+              <a:t>创新维度与未来展望</a:t>
+            </a:r>
+          </a:p>
+        </p:txBody>
+      </p:sp>
+    </p:spTree>
+  </p:cSld>
+  <p:clrMapOvr>
+    <a:masterClrMapping/>
+  </p:clrMapOvr>
+</p:sld>
+</file>
+
+<file path=ppt/slides/slide25.xml><?xml version="1.0" encoding="utf-8"?>
+<p:sld xmlns:a="http://schemas.openxmlformats.org/drawingml/2006/main" xmlns:p="http://schemas.openxmlformats.org/presentationml/2006/main" xmlns:r="http://schemas.openxmlformats.org/officeDocument/2006/relationships">
+  <p:cSld>
+    <p:bg>
+      <p:bgPr>
+        <a:solidFill>
+          <a:srgbClr val="FFFFFF"/>
+        </a:solidFill>
+        <a:effectLst/>
+      </p:bgPr>
+    </p:bg>
+    <p:spTree>
+      <p:nvGrpSpPr>
+        <p:cNvPr id="1" name=""/>
+        <p:cNvGrpSpPr/>
+        <p:nvPr/>
+      </p:nvGrpSpPr>
+      <p:grpSpPr/>
+      <p:sp>
+        <p:nvSpPr>
+          <p:cNvPr id="2" name="Rectangle 1"/>
+          <p:cNvSpPr/>
+          <p:nvPr/>
+        </p:nvSpPr>
+        <p:spPr>
+          <a:xfrm>
+            <a:off x="0" y="0"/>
+            <a:ext cx="9144000" cy="475488"/>
+          </a:xfrm>
+          <a:prstGeom prst="rect">
+            <a:avLst/>
+          </a:prstGeom>
+          <a:solidFill>
+            <a:srgbClr val="143278"/>
+          </a:solidFill>
+          <a:ln>
+            <a:noFill/>
+          </a:ln>
+        </p:spPr>
+        <p:style>
+          <a:lnRef idx="1">
+            <a:schemeClr val="accent1"/>
+          </a:lnRef>
+          <a:fillRef idx="3">
+            <a:schemeClr val="accent1"/>
+          </a:fillRef>
+          <a:effectRef idx="2">
+            <a:schemeClr val="accent1"/>
+          </a:effectRef>
+          <a:fontRef idx="minor">
+            <a:schemeClr val="lt1"/>
+          </a:fontRef>
+        </p:style>
+        <p:txBody>
+          <a:bodyPr rtlCol="0" anchor="ctr"/>
+          <a:lstStyle/>
+          <a:p>
+            <a:pPr algn="ctr"/>
+          </a:p>
+        </p:txBody>
+      </p:sp>
+      <p:sp>
+        <p:nvSpPr>
+          <p:cNvPr id="3" name="TextBox 2"/>
+          <p:cNvSpPr txBox="1"/>
+          <p:nvPr/>
+        </p:nvSpPr>
+        <p:spPr>
+          <a:xfrm>
+            <a:off x="137160" y="73152"/>
+            <a:ext cx="8869680" cy="411480"/>
+          </a:xfrm>
+          <a:prstGeom prst="rect">
+            <a:avLst/>
+          </a:prstGeom>
+          <a:noFill/>
+        </p:spPr>
+        <p:txBody>
+          <a:bodyPr wrap="none">
+            <a:spAutoFit/>
+          </a:bodyPr>
+          <a:lstStyle/>
+          <a:p>
+            <a:pPr>
+              <a:defRPr sz="1000" b="1">
+                <a:solidFill>
+                  <a:srgbClr val="FFFFFF"/>
+                </a:solidFill>
+              </a:defRPr>
+            </a:pPr>
+            <a:r>
+              <a:t>第二十八届中国机器人及人工智能大赛</a:t>
+            </a:r>
+          </a:p>
+          <a:p>
+            <a:pPr>
+              <a:defRPr sz="1000">
+                <a:solidFill>
+                  <a:srgbClr val="C8DCFF"/>
+                </a:solidFill>
+              </a:defRPr>
+            </a:pPr>
+            <a:r>
+              <a:t>创新赛 · 机器人创新赛道</a:t>
             </a:r>
           </a:p>
         </p:txBody>
@@ -7620,255 +7975,6 @@
 </p:sld>
 </file>
 
-<file path=ppt/slides/slide25.xml><?xml version="1.0" encoding="utf-8"?>
-<p:sld xmlns:a="http://schemas.openxmlformats.org/drawingml/2006/main" xmlns:p="http://schemas.openxmlformats.org/presentationml/2006/main" xmlns:r="http://schemas.openxmlformats.org/officeDocument/2006/relationships">
-  <p:cSld>
-    <p:bg>
-      <p:bgPr>
-        <a:solidFill>
-          <a:srgbClr val="FFFFFF"/>
-        </a:solidFill>
-        <a:effectLst/>
-      </p:bgPr>
-    </p:bg>
-    <p:spTree>
-      <p:nvGrpSpPr>
-        <p:cNvPr id="1" name=""/>
-        <p:cNvGrpSpPr/>
-        <p:nvPr/>
-      </p:nvGrpSpPr>
-      <p:grpSpPr/>
-      <p:sp>
-        <p:nvSpPr>
-          <p:cNvPr id="2" name="Rectangle 1"/>
-          <p:cNvSpPr/>
-          <p:nvPr/>
-        </p:nvSpPr>
-        <p:spPr>
-          <a:xfrm>
-            <a:off x="0" y="0"/>
-            <a:ext cx="9144000" cy="475488"/>
-          </a:xfrm>
-          <a:prstGeom prst="rect">
-            <a:avLst/>
-          </a:prstGeom>
-          <a:solidFill>
-            <a:srgbClr val="143278"/>
-          </a:solidFill>
-          <a:ln>
-            <a:noFill/>
-          </a:ln>
-        </p:spPr>
-        <p:style>
-          <a:lnRef idx="1">
-            <a:schemeClr val="accent1"/>
-          </a:lnRef>
-          <a:fillRef idx="3">
-            <a:schemeClr val="accent1"/>
-          </a:fillRef>
-          <a:effectRef idx="2">
-            <a:schemeClr val="accent1"/>
-          </a:effectRef>
-          <a:fontRef idx="minor">
-            <a:schemeClr val="lt1"/>
-          </a:fontRef>
-        </p:style>
-        <p:txBody>
-          <a:bodyPr rtlCol="0" anchor="ctr"/>
-          <a:lstStyle/>
-          <a:p>
-            <a:pPr algn="ctr"/>
-          </a:p>
-        </p:txBody>
-      </p:sp>
-      <p:sp>
-        <p:nvSpPr>
-          <p:cNvPr id="3" name="TextBox 2"/>
-          <p:cNvSpPr txBox="1"/>
-          <p:nvPr/>
-        </p:nvSpPr>
-        <p:spPr>
-          <a:xfrm>
-            <a:off x="137160" y="73152"/>
-            <a:ext cx="8869680" cy="411480"/>
-          </a:xfrm>
-          <a:prstGeom prst="rect">
-            <a:avLst/>
-          </a:prstGeom>
-          <a:noFill/>
-        </p:spPr>
-        <p:txBody>
-          <a:bodyPr wrap="none">
-            <a:spAutoFit/>
-          </a:bodyPr>
-          <a:lstStyle/>
-          <a:p>
-            <a:pPr>
-              <a:defRPr sz="1000" b="1">
-                <a:solidFill>
-                  <a:srgbClr val="FFFFFF"/>
-                </a:solidFill>
-              </a:defRPr>
-            </a:pPr>
-            <a:r>
-              <a:t>第二十八届中国机器人及人工智能大赛</a:t>
-            </a:r>
-          </a:p>
-          <a:p>
-            <a:pPr>
-              <a:defRPr sz="1000">
-                <a:solidFill>
-                  <a:srgbClr val="C8DCFF"/>
-                </a:solidFill>
-              </a:defRPr>
-            </a:pPr>
-            <a:r>
-              <a:t>机器人创新赛道</a:t>
-            </a:r>
-          </a:p>
-        </p:txBody>
-      </p:sp>
-      <p:sp>
-        <p:nvSpPr>
-          <p:cNvPr id="4" name="TextBox 3"/>
-          <p:cNvSpPr txBox="1"/>
-          <p:nvPr/>
-        </p:nvSpPr>
-        <p:spPr>
-          <a:xfrm>
-            <a:off x="502920" y="566928"/>
-            <a:ext cx="8138160" cy="731520"/>
-          </a:xfrm>
-          <a:prstGeom prst="rect">
-            <a:avLst/>
-          </a:prstGeom>
-          <a:noFill/>
-        </p:spPr>
-        <p:txBody>
-          <a:bodyPr wrap="square">
-            <a:spAutoFit/>
-          </a:bodyPr>
-          <a:lstStyle/>
-          <a:p>
-            <a:pPr algn="l">
-              <a:defRPr sz="2400" b="1">
-                <a:solidFill>
-                  <a:srgbClr val="1E1E1E"/>
-                </a:solidFill>
-              </a:defRPr>
-            </a:pPr>
-            <a:r>
-              <a:t>未来工作</a:t>
-            </a:r>
-          </a:p>
-        </p:txBody>
-      </p:sp>
-      <p:sp>
-        <p:nvSpPr>
-          <p:cNvPr id="5" name="TextBox 4"/>
-          <p:cNvSpPr txBox="1"/>
-          <p:nvPr/>
-        </p:nvSpPr>
-        <p:spPr>
-          <a:xfrm>
-            <a:off x="502920" y="1325880"/>
-            <a:ext cx="8138160" cy="3840480"/>
-          </a:xfrm>
-          <a:prstGeom prst="rect">
-            <a:avLst/>
-          </a:prstGeom>
-          <a:noFill/>
-        </p:spPr>
-        <p:txBody>
-          <a:bodyPr wrap="square">
-            <a:spAutoFit/>
-          </a:bodyPr>
-          <a:lstStyle/>
-          <a:p>
-            <a:pPr>
-              <a:spcAft>
-                <a:spcPts val="600"/>
-              </a:spcAft>
-              <a:defRPr sz="1400">
-                <a:solidFill>
-                  <a:srgbClr val="1E1E1E"/>
-                </a:solidFill>
-              </a:defRPr>
-            </a:pPr>
-            <a:r>
-              <a:t>p 对接 Unitree 等人形机器人，完成 speak/gesture/approach 真机视频</a:t>
-            </a:r>
-          </a:p>
-          <a:p>
-            <a:pPr>
-              <a:spcAft>
-                <a:spcPts val="600"/>
-              </a:spcAft>
-              <a:defRPr sz="1400">
-                <a:solidFill>
-                  <a:srgbClr val="1E1E1E"/>
-                </a:solidFill>
-              </a:defRPr>
-            </a:pPr>
-            <a:r>
-              <a:t>p 引入 UR Fall 等公开数据集，开展泛化评测与误报分析</a:t>
-            </a:r>
-          </a:p>
-          <a:p>
-            <a:pPr>
-              <a:spcAft>
-                <a:spcPts val="600"/>
-              </a:spcAft>
-              <a:defRPr sz="1400">
-                <a:solidFill>
-                  <a:srgbClr val="1E1E1E"/>
-                </a:solidFill>
-              </a:defRPr>
-            </a:pPr>
-            <a:r>
-              <a:t>p 多老人房间场景、遮挡与光照鲁棒性优化</a:t>
-            </a:r>
-          </a:p>
-          <a:p>
-            <a:pPr>
-              <a:spcAft>
-                <a:spcPts val="600"/>
-              </a:spcAft>
-              <a:defRPr sz="1400">
-                <a:solidFill>
-                  <a:srgbClr val="1E1E1E"/>
-                </a:solidFill>
-              </a:defRPr>
-            </a:pPr>
-            <a:r>
-              <a:t>p 结合社区/养老院调研，完善产品化与成本评估</a:t>
-            </a:r>
-          </a:p>
-          <a:p>
-            <a:pPr>
-              <a:spcAft>
-                <a:spcPts val="600"/>
-              </a:spcAft>
-              <a:defRPr sz="1400">
-                <a:solidFill>
-                  <a:srgbClr val="1E1E1E"/>
-                </a:solidFill>
-              </a:defRPr>
-            </a:pPr>
-            <a:r>
-              <a:t>p 申请软件著作权 V1.0，探索专利（跌倒融合决策方法）</a:t>
-            </a:r>
-          </a:p>
-        </p:txBody>
-      </p:sp>
-    </p:spTree>
-  </p:cSld>
-  <p:clrMapOvr>
-    <a:masterClrMapping/>
-  </p:clrMapOvr>
-</p:sld>
-</file>
-
 <file path=ppt/slides/slide26.xml><?xml version="1.0" encoding="utf-8"?>
 <p:sld xmlns:a="http://schemas.openxmlformats.org/drawingml/2006/main" xmlns:p="http://schemas.openxmlformats.org/presentationml/2006/main" xmlns:r="http://schemas.openxmlformats.org/officeDocument/2006/relationships">
   <p:cSld>
@@ -7972,7 +8078,7 @@
               </a:defRPr>
             </a:pPr>
             <a:r>
-              <a:t>机器人创新赛道</a:t>
+              <a:t>创新赛 · 机器人创新赛道</a:t>
             </a:r>
           </a:p>
         </p:txBody>
@@ -8007,7 +8113,7 @@
               </a:defRPr>
             </a:pPr>
             <a:r>
-              <a:t>参考文献</a:t>
+              <a:t>未来工作</a:t>
             </a:r>
           </a:p>
         </p:txBody>
@@ -8020,7 +8126,7 @@
         </p:nvSpPr>
         <p:spPr>
           <a:xfrm>
-            <a:off x="502920" y="1234440"/>
+            <a:off x="502920" y="1325880"/>
             <a:ext cx="8138160" cy="3840480"/>
           </a:xfrm>
           <a:prstGeom prst="rect">
@@ -8038,14 +8144,14 @@
               <a:spcAft>
                 <a:spcPts val="600"/>
               </a:spcAft>
-              <a:defRPr sz="1200">
+              <a:defRPr sz="1400">
                 <a:solidFill>
                   <a:srgbClr val="1E1E1E"/>
                 </a:solidFill>
               </a:defRPr>
             </a:pPr>
             <a:r>
-              <a:t>[1] Google MediaPipe Pose: Real-time pose estimation.</a:t>
+              <a:t>p 对接 Unitree 等人形机器人，完成 speak/gesture/approach 真机视频</a:t>
             </a:r>
           </a:p>
           <a:p>
@@ -8053,14 +8159,14 @@
               <a:spcAft>
                 <a:spcPts val="600"/>
               </a:spcAft>
-              <a:defRPr sz="1200">
+              <a:defRPr sz="1400">
                 <a:solidFill>
                   <a:srgbClr val="1E1E1E"/>
                 </a:solidFill>
               </a:defRPr>
             </a:pPr>
             <a:r>
-              <a:t>[2] Unitree Robotics SDK / ROS2 documentation.</a:t>
+              <a:t>p 引入 UR Fall 等公开数据集，开展泛化评测与误报分析</a:t>
             </a:r>
           </a:p>
           <a:p>
@@ -8068,14 +8174,14 @@
               <a:spcAft>
                 <a:spcPts val="600"/>
               </a:spcAft>
-              <a:defRPr sz="1200">
+              <a:defRPr sz="1400">
                 <a:solidFill>
                   <a:srgbClr val="1E1E1E"/>
                 </a:solidFill>
               </a:defRPr>
             </a:pPr>
             <a:r>
-              <a:t>[3] 国务院：《「十四五」国家老龄事业发展和养老服务体系规划》.</a:t>
+              <a:t>p 多老人房间场景、遮挡与光照鲁棒性优化</a:t>
             </a:r>
           </a:p>
           <a:p>
@@ -8083,14 +8189,14 @@
               <a:spcAft>
                 <a:spcPts val="600"/>
               </a:spcAft>
-              <a:defRPr sz="1200">
+              <a:defRPr sz="1400">
                 <a:solidFill>
                   <a:srgbClr val="1E1E1E"/>
                 </a:solidFill>
               </a:defRPr>
             </a:pPr>
             <a:r>
-              <a:t>[4] CareCompanion 项目文档：docs/TECHNICAL_REPORT.md</a:t>
+              <a:t>p 结合社区/养老院调研，完善产品化与成本评估</a:t>
             </a:r>
           </a:p>
           <a:p>
@@ -8098,14 +8204,14 @@
               <a:spcAft>
                 <a:spcPts val="600"/>
               </a:spcAft>
-              <a:defRPr sz="1200">
+              <a:defRPr sz="1400">
                 <a:solidFill>
                   <a:srgbClr val="1E1E1E"/>
                 </a:solidFill>
               </a:defRPr>
             </a:pPr>
             <a:r>
-              <a:t>[5] 仓库：github.com/FBB123571/ElderCare-Humanoid-Platform</a:t>
+              <a:t>p 申请软件著作权 V1.0，探索专利（跌倒融合决策方法）</a:t>
             </a:r>
           </a:p>
         </p:txBody>
@@ -8221,7 +8327,7 @@
               </a:defRPr>
             </a:pPr>
             <a:r>
-              <a:t>机器人创新赛道</a:t>
+              <a:t>创新赛 · 机器人创新赛道</a:t>
             </a:r>
           </a:p>
         </p:txBody>
@@ -8234,8 +8340,210 @@
         </p:nvSpPr>
         <p:spPr>
           <a:xfrm>
-            <a:off x="502920" y="2068830"/>
-            <a:ext cx="8138160" cy="914400"/>
+            <a:off x="502920" y="566928"/>
+            <a:ext cx="8138160" cy="731520"/>
+          </a:xfrm>
+          <a:prstGeom prst="rect">
+            <a:avLst/>
+          </a:prstGeom>
+          <a:noFill/>
+        </p:spPr>
+        <p:txBody>
+          <a:bodyPr wrap="square">
+            <a:spAutoFit/>
+          </a:bodyPr>
+          <a:lstStyle/>
+          <a:p>
+            <a:pPr algn="l">
+              <a:defRPr sz="2400" b="1">
+                <a:solidFill>
+                  <a:srgbClr val="1E1E1E"/>
+                </a:solidFill>
+              </a:defRPr>
+            </a:pPr>
+            <a:r>
+              <a:t>参考文献</a:t>
+            </a:r>
+          </a:p>
+        </p:txBody>
+      </p:sp>
+      <p:sp>
+        <p:nvSpPr>
+          <p:cNvPr id="5" name="TextBox 4"/>
+          <p:cNvSpPr txBox="1"/>
+          <p:nvPr/>
+        </p:nvSpPr>
+        <p:spPr>
+          <a:xfrm>
+            <a:off x="502920" y="1234440"/>
+            <a:ext cx="8138160" cy="3840480"/>
+          </a:xfrm>
+          <a:prstGeom prst="rect">
+            <a:avLst/>
+          </a:prstGeom>
+          <a:noFill/>
+        </p:spPr>
+        <p:txBody>
+          <a:bodyPr wrap="square">
+            <a:spAutoFit/>
+          </a:bodyPr>
+          <a:lstStyle/>
+          <a:p>
+            <a:pPr>
+              <a:spcAft>
+                <a:spcPts val="600"/>
+              </a:spcAft>
+              <a:defRPr sz="1200">
+                <a:solidFill>
+                  <a:srgbClr val="1E1E1E"/>
+                </a:solidFill>
+              </a:defRPr>
+            </a:pPr>
+            <a:r>
+              <a:t>[1] Google MediaPipe Pose: Real-time pose estimation.</a:t>
+            </a:r>
+          </a:p>
+          <a:p>
+            <a:pPr>
+              <a:spcAft>
+                <a:spcPts val="600"/>
+              </a:spcAft>
+              <a:defRPr sz="1200">
+                <a:solidFill>
+                  <a:srgbClr val="1E1E1E"/>
+                </a:solidFill>
+              </a:defRPr>
+            </a:pPr>
+            <a:r>
+              <a:t>[2] Unitree Robotics SDK / ROS2 documentation.</a:t>
+            </a:r>
+          </a:p>
+          <a:p>
+            <a:pPr>
+              <a:spcAft>
+                <a:spcPts val="600"/>
+              </a:spcAft>
+              <a:defRPr sz="1200">
+                <a:solidFill>
+                  <a:srgbClr val="1E1E1E"/>
+                </a:solidFill>
+              </a:defRPr>
+            </a:pPr>
+            <a:r>
+              <a:t>[3] 国务院：《「十四五」国家老龄事业发展和养老服务体系规划》.</a:t>
+            </a:r>
+          </a:p>
+          <a:p>
+            <a:pPr>
+              <a:spcAft>
+                <a:spcPts val="600"/>
+              </a:spcAft>
+              <a:defRPr sz="1200">
+                <a:solidFill>
+                  <a:srgbClr val="1E1E1E"/>
+                </a:solidFill>
+              </a:defRPr>
+            </a:pPr>
+            <a:r>
+              <a:t>[4] CareCompanion 项目文档：docs/TECHNICAL_REPORT.md</a:t>
+            </a:r>
+          </a:p>
+          <a:p>
+            <a:pPr>
+              <a:spcAft>
+                <a:spcPts val="600"/>
+              </a:spcAft>
+              <a:defRPr sz="1200">
+                <a:solidFill>
+                  <a:srgbClr val="1E1E1E"/>
+                </a:solidFill>
+              </a:defRPr>
+            </a:pPr>
+            <a:r>
+              <a:t>[5] 仓库：github.com/FBB123571/ElderCare-Humanoid-Platform</a:t>
+            </a:r>
+          </a:p>
+        </p:txBody>
+      </p:sp>
+    </p:spTree>
+  </p:cSld>
+  <p:clrMapOvr>
+    <a:masterClrMapping/>
+  </p:clrMapOvr>
+</p:sld>
+</file>
+
+<file path=ppt/slides/slide28.xml><?xml version="1.0" encoding="utf-8"?>
+<p:sld xmlns:a="http://schemas.openxmlformats.org/drawingml/2006/main" xmlns:p="http://schemas.openxmlformats.org/presentationml/2006/main" xmlns:r="http://schemas.openxmlformats.org/officeDocument/2006/relationships">
+  <p:cSld>
+    <p:bg>
+      <p:bgPr>
+        <a:solidFill>
+          <a:srgbClr val="FFFFFF"/>
+        </a:solidFill>
+        <a:effectLst/>
+      </p:bgPr>
+    </p:bg>
+    <p:spTree>
+      <p:nvGrpSpPr>
+        <p:cNvPr id="1" name=""/>
+        <p:cNvGrpSpPr/>
+        <p:nvPr/>
+      </p:nvGrpSpPr>
+      <p:grpSpPr/>
+      <p:sp>
+        <p:nvSpPr>
+          <p:cNvPr id="2" name="Rectangle 1"/>
+          <p:cNvSpPr/>
+          <p:nvPr/>
+        </p:nvSpPr>
+        <p:spPr>
+          <a:xfrm>
+            <a:off x="0" y="0"/>
+            <a:ext cx="9144000" cy="475488"/>
+          </a:xfrm>
+          <a:prstGeom prst="rect">
+            <a:avLst/>
+          </a:prstGeom>
+          <a:solidFill>
+            <a:srgbClr val="143278"/>
+          </a:solidFill>
+          <a:ln>
+            <a:noFill/>
+          </a:ln>
+        </p:spPr>
+        <p:style>
+          <a:lnRef idx="1">
+            <a:schemeClr val="accent1"/>
+          </a:lnRef>
+          <a:fillRef idx="3">
+            <a:schemeClr val="accent1"/>
+          </a:fillRef>
+          <a:effectRef idx="2">
+            <a:schemeClr val="accent1"/>
+          </a:effectRef>
+          <a:fontRef idx="minor">
+            <a:schemeClr val="lt1"/>
+          </a:fontRef>
+        </p:style>
+        <p:txBody>
+          <a:bodyPr rtlCol="0" anchor="ctr"/>
+          <a:lstStyle/>
+          <a:p>
+            <a:pPr algn="ctr"/>
+          </a:p>
+        </p:txBody>
+      </p:sp>
+      <p:sp>
+        <p:nvSpPr>
+          <p:cNvPr id="3" name="TextBox 2"/>
+          <p:cNvSpPr txBox="1"/>
+          <p:nvPr/>
+        </p:nvSpPr>
+        <p:spPr>
+          <a:xfrm>
+            <a:off x="137160" y="73152"/>
+            <a:ext cx="8869680" cy="411480"/>
           </a:xfrm>
           <a:prstGeom prst="rect">
             <a:avLst/>
@@ -8248,29 +8556,220 @@
           </a:bodyPr>
           <a:lstStyle/>
           <a:p>
+            <a:pPr>
+              <a:defRPr sz="1000" b="1">
+                <a:solidFill>
+                  <a:srgbClr val="FFFFFF"/>
+                </a:solidFill>
+              </a:defRPr>
+            </a:pPr>
+            <a:r>
+              <a:t>第二十八届中国机器人及人工智能大赛</a:t>
+            </a:r>
+          </a:p>
+          <a:p>
+            <a:pPr>
+              <a:defRPr sz="1000">
+                <a:solidFill>
+                  <a:srgbClr val="C8DCFF"/>
+                </a:solidFill>
+              </a:defRPr>
+            </a:pPr>
+            <a:r>
+              <a:t>创新赛 · 机器人创新赛道</a:t>
+            </a:r>
+          </a:p>
+        </p:txBody>
+      </p:sp>
+      <p:sp>
+        <p:nvSpPr>
+          <p:cNvPr id="4" name="TextBox 3"/>
+          <p:cNvSpPr txBox="1"/>
+          <p:nvPr/>
+        </p:nvSpPr>
+        <p:spPr>
+          <a:xfrm>
+            <a:off x="502920" y="566928"/>
+            <a:ext cx="8138160" cy="731520"/>
+          </a:xfrm>
+          <a:prstGeom prst="rect">
+            <a:avLst/>
+          </a:prstGeom>
+          <a:noFill/>
+        </p:spPr>
+        <p:txBody>
+          <a:bodyPr wrap="square">
+            <a:spAutoFit/>
+          </a:bodyPr>
+          <a:lstStyle/>
+          <a:p>
+            <a:pPr algn="l">
+              <a:defRPr sz="2400" b="1">
+                <a:solidFill>
+                  <a:srgbClr val="1E1E1E"/>
+                </a:solidFill>
+              </a:defRPr>
+            </a:pPr>
+            <a:r>
+              <a:t>扫码获取代码与演示视频</a:t>
+            </a:r>
+          </a:p>
+        </p:txBody>
+      </p:sp>
+      <p:pic>
+        <p:nvPicPr>
+          <p:cNvPr id="5" name="Picture 4" descr="ppt_demo_qr.png"/>
+          <p:cNvPicPr>
+            <a:picLocks noChangeAspect="1"/>
+          </p:cNvPicPr>
+          <p:nvPr/>
+        </p:nvPicPr>
+        <p:blipFill>
+          <a:blip r:embed="rId2"/>
+          <a:stretch>
+            <a:fillRect/>
+          </a:stretch>
+        </p:blipFill>
+        <p:spPr>
+          <a:xfrm>
+            <a:off x="3429000" y="1115568"/>
+            <a:ext cx="2286000" cy="2286000"/>
+          </a:xfrm>
+          <a:prstGeom prst="rect">
+            <a:avLst/>
+          </a:prstGeom>
+        </p:spPr>
+      </p:pic>
+      <p:sp>
+        <p:nvSpPr>
+          <p:cNvPr id="6" name="TextBox 5"/>
+          <p:cNvSpPr txBox="1"/>
+          <p:nvPr/>
+        </p:nvSpPr>
+        <p:spPr>
+          <a:xfrm>
+            <a:off x="411480" y="3611880"/>
+            <a:ext cx="8321040" cy="1005840"/>
+          </a:xfrm>
+          <a:prstGeom prst="rect">
+            <a:avLst/>
+          </a:prstGeom>
+          <a:noFill/>
+        </p:spPr>
+        <p:txBody>
+          <a:bodyPr wrap="square">
+            <a:spAutoFit/>
+          </a:bodyPr>
+          <a:lstStyle/>
+          <a:p>
             <a:pPr algn="ctr">
-              <a:defRPr sz="3200" b="1">
-                <a:solidFill>
-                  <a:srgbClr val="143278"/>
-                </a:solidFill>
-              </a:defRPr>
-            </a:pPr>
-            <a:r>
-              <a:t>敬请批评指正</a:t>
-            </a:r>
-          </a:p>
-        </p:txBody>
-      </p:sp>
-      <p:sp>
-        <p:nvSpPr>
-          <p:cNvPr id="5" name="TextBox 4"/>
+              <a:defRPr sz="1200">
+                <a:solidFill>
+                  <a:srgbClr val="505050"/>
+                </a:solidFill>
+              </a:defRPr>
+            </a:pPr>
+            <a:r>
+              <a:t>扫码进入 GitHub 仓库</a:t>
+            </a:r>
+            <a:br/>
+            <a:r>
+              <a:t>https://github.com/FBB123571/ElderCare-Humanoid-Platform</a:t>
+            </a:r>
+          </a:p>
+          <a:p>
+            <a:pPr algn="ctr">
+              <a:defRPr sz="1100">
+                <a:solidFill>
+                  <a:srgbClr val="505050"/>
+                </a:solidFill>
+              </a:defRPr>
+            </a:pPr>
+            <a:r>
+              <a:t>演示视频：仓库内 docs/assets/demo_carecompanion.mp4</a:t>
+            </a:r>
+          </a:p>
+        </p:txBody>
+      </p:sp>
+    </p:spTree>
+  </p:cSld>
+  <p:clrMapOvr>
+    <a:masterClrMapping/>
+  </p:clrMapOvr>
+</p:sld>
+</file>
+
+<file path=ppt/slides/slide29.xml><?xml version="1.0" encoding="utf-8"?>
+<p:sld xmlns:a="http://schemas.openxmlformats.org/drawingml/2006/main" xmlns:p="http://schemas.openxmlformats.org/presentationml/2006/main" xmlns:r="http://schemas.openxmlformats.org/officeDocument/2006/relationships">
+  <p:cSld>
+    <p:bg>
+      <p:bgPr>
+        <a:solidFill>
+          <a:srgbClr val="FFFFFF"/>
+        </a:solidFill>
+        <a:effectLst/>
+      </p:bgPr>
+    </p:bg>
+    <p:spTree>
+      <p:nvGrpSpPr>
+        <p:cNvPr id="1" name=""/>
+        <p:cNvGrpSpPr/>
+        <p:nvPr/>
+      </p:nvGrpSpPr>
+      <p:grpSpPr/>
+      <p:sp>
+        <p:nvSpPr>
+          <p:cNvPr id="2" name="Rectangle 1"/>
+          <p:cNvSpPr/>
+          <p:nvPr/>
+        </p:nvSpPr>
+        <p:spPr>
+          <a:xfrm>
+            <a:off x="0" y="0"/>
+            <a:ext cx="9144000" cy="475488"/>
+          </a:xfrm>
+          <a:prstGeom prst="rect">
+            <a:avLst/>
+          </a:prstGeom>
+          <a:solidFill>
+            <a:srgbClr val="143278"/>
+          </a:solidFill>
+          <a:ln>
+            <a:noFill/>
+          </a:ln>
+        </p:spPr>
+        <p:style>
+          <a:lnRef idx="1">
+            <a:schemeClr val="accent1"/>
+          </a:lnRef>
+          <a:fillRef idx="3">
+            <a:schemeClr val="accent1"/>
+          </a:fillRef>
+          <a:effectRef idx="2">
+            <a:schemeClr val="accent1"/>
+          </a:effectRef>
+          <a:fontRef idx="minor">
+            <a:schemeClr val="lt1"/>
+          </a:fontRef>
+        </p:style>
+        <p:txBody>
+          <a:bodyPr rtlCol="0" anchor="ctr"/>
+          <a:lstStyle/>
+          <a:p>
+            <a:pPr algn="ctr"/>
+          </a:p>
+        </p:txBody>
+      </p:sp>
+      <p:sp>
+        <p:nvSpPr>
+          <p:cNvPr id="3" name="TextBox 2"/>
           <p:cNvSpPr txBox="1"/>
           <p:nvPr/>
         </p:nvSpPr>
         <p:spPr>
           <a:xfrm>
-            <a:off x="502920" y="2891790"/>
-            <a:ext cx="8138160" cy="457200"/>
+            <a:off x="137160" y="73152"/>
+            <a:ext cx="8869680" cy="411480"/>
           </a:xfrm>
           <a:prstGeom prst="rect">
             <a:avLst/>
@@ -8283,6 +8782,88 @@
           </a:bodyPr>
           <a:lstStyle/>
           <a:p>
+            <a:pPr>
+              <a:defRPr sz="1000" b="1">
+                <a:solidFill>
+                  <a:srgbClr val="FFFFFF"/>
+                </a:solidFill>
+              </a:defRPr>
+            </a:pPr>
+            <a:r>
+              <a:t>第二十八届中国机器人及人工智能大赛</a:t>
+            </a:r>
+          </a:p>
+          <a:p>
+            <a:pPr>
+              <a:defRPr sz="1000">
+                <a:solidFill>
+                  <a:srgbClr val="C8DCFF"/>
+                </a:solidFill>
+              </a:defRPr>
+            </a:pPr>
+            <a:r>
+              <a:t>创新赛 · 机器人创新赛道</a:t>
+            </a:r>
+          </a:p>
+        </p:txBody>
+      </p:sp>
+      <p:sp>
+        <p:nvSpPr>
+          <p:cNvPr id="4" name="TextBox 3"/>
+          <p:cNvSpPr txBox="1"/>
+          <p:nvPr/>
+        </p:nvSpPr>
+        <p:spPr>
+          <a:xfrm>
+            <a:off x="502920" y="2068830"/>
+            <a:ext cx="8138160" cy="914400"/>
+          </a:xfrm>
+          <a:prstGeom prst="rect">
+            <a:avLst/>
+          </a:prstGeom>
+          <a:noFill/>
+        </p:spPr>
+        <p:txBody>
+          <a:bodyPr wrap="none">
+            <a:spAutoFit/>
+          </a:bodyPr>
+          <a:lstStyle/>
+          <a:p>
+            <a:pPr algn="ctr">
+              <a:defRPr sz="3200" b="1">
+                <a:solidFill>
+                  <a:srgbClr val="143278"/>
+                </a:solidFill>
+              </a:defRPr>
+            </a:pPr>
+            <a:r>
+              <a:t>敬请批评指正</a:t>
+            </a:r>
+          </a:p>
+        </p:txBody>
+      </p:sp>
+      <p:sp>
+        <p:nvSpPr>
+          <p:cNvPr id="5" name="TextBox 4"/>
+          <p:cNvSpPr txBox="1"/>
+          <p:nvPr/>
+        </p:nvSpPr>
+        <p:spPr>
+          <a:xfrm>
+            <a:off x="502920" y="2891790"/>
+            <a:ext cx="8138160" cy="457200"/>
+          </a:xfrm>
+          <a:prstGeom prst="rect">
+            <a:avLst/>
+          </a:prstGeom>
+          <a:noFill/>
+        </p:spPr>
+        <p:txBody>
+          <a:bodyPr wrap="none">
+            <a:spAutoFit/>
+          </a:bodyPr>
+          <a:lstStyle/>
+          <a:p>
             <a:pPr algn="ctr">
               <a:defRPr sz="1600">
                 <a:solidFill>
@@ -8291,7 +8872,7 @@
               </a:defRPr>
             </a:pPr>
             <a:r>
-              <a:t>CareCompanion 团队 · 感谢各位评委老师</a:t>
+              <a:t>从容应队 · 中山大学 · 感谢各位评委老师</a:t>
             </a:r>
           </a:p>
         </p:txBody>
@@ -8407,7 +8988,7 @@
               </a:defRPr>
             </a:pPr>
             <a:r>
-              <a:t>机器人创新赛道</a:t>
+              <a:t>创新赛 · 机器人创新赛道</a:t>
             </a:r>
           </a:p>
         </p:txBody>
@@ -8420,7 +9001,7 @@
         </p:nvSpPr>
         <p:spPr>
           <a:xfrm>
-            <a:off x="502920" y="566928"/>
+            <a:off x="502920" y="2068830"/>
             <a:ext cx="8138160" cy="731520"/>
           </a:xfrm>
           <a:prstGeom prst="rect">
@@ -8434,15 +9015,15 @@
           </a:bodyPr>
           <a:lstStyle/>
           <a:p>
-            <a:pPr algn="l">
-              <a:defRPr sz="2400" b="1">
+            <a:pPr algn="ctr">
+              <a:defRPr sz="3000" b="1">
                 <a:solidFill>
                   <a:srgbClr val="1E1E1E"/>
                 </a:solidFill>
               </a:defRPr>
             </a:pPr>
             <a:r>
-              <a:t>社会背景与痛点</a:t>
+              <a:t>第一部分</a:t>
             </a:r>
           </a:p>
         </p:txBody>
@@ -8455,8 +9036,8 @@
         </p:nvSpPr>
         <p:spPr>
           <a:xfrm>
-            <a:off x="502920" y="1234440"/>
-            <a:ext cx="8138160" cy="3474720"/>
+            <a:off x="502920" y="2617470"/>
+            <a:ext cx="8138160" cy="731520"/>
           </a:xfrm>
           <a:prstGeom prst="rect">
             <a:avLst/>
@@ -8469,18 +9050,15 @@
           </a:bodyPr>
           <a:lstStyle/>
           <a:p>
-            <a:pPr>
-              <a:lnSpc>
-                <a:spcPct val="135000"/>
-              </a:lnSpc>
-              <a:defRPr sz="1500" b="0">
-                <a:solidFill>
-                  <a:srgbClr val="1E1E1E"/>
-                </a:solidFill>
-              </a:defRPr>
-            </a:pPr>
-            <a:r>
-              <a:t>随着我国老龄化程度加深，空巢与独居老人数量持续增加。跌倒已成为老年人意外伤害的首要原因之一，而「发现延迟」往往导致救援错过黄金时间。与此同时，老人对情感陪伴的需求日益增长——他们不仅需要被监测，更需要被理解、被回应。</a:t>
+            <a:pPr algn="ctr">
+              <a:defRPr sz="2000" b="1">
+                <a:solidFill>
+                  <a:srgbClr val="143278"/>
+                </a:solidFill>
+              </a:defRPr>
+            </a:pPr>
+            <a:r>
+              <a:t>项目背景与需求分析</a:t>
             </a:r>
           </a:p>
         </p:txBody>
@@ -8596,7 +9174,7 @@
               </a:defRPr>
             </a:pPr>
             <a:r>
-              <a:t>机器人创新赛道</a:t>
+              <a:t>创新赛 · 机器人创新赛道</a:t>
             </a:r>
           </a:p>
         </p:txBody>
@@ -8631,7 +9209,7 @@
               </a:defRPr>
             </a:pPr>
             <a:r>
-              <a:t>现有方案的不足</a:t>
+              <a:t>社会背景与痛点</a:t>
             </a:r>
           </a:p>
         </p:txBody>
@@ -8644,43 +9222,8 @@
         </p:nvSpPr>
         <p:spPr>
           <a:xfrm>
-            <a:off x="411480" y="1234440"/>
-            <a:ext cx="4023360" cy="457200"/>
-          </a:xfrm>
-          <a:prstGeom prst="rect">
-            <a:avLst/>
-          </a:prstGeom>
-          <a:noFill/>
-        </p:spPr>
-        <p:txBody>
-          <a:bodyPr wrap="none">
-            <a:spAutoFit/>
-          </a:bodyPr>
-          <a:lstStyle/>
-          <a:p>
-            <a:pPr>
-              <a:defRPr sz="1400" b="1">
-                <a:solidFill>
-                  <a:srgbClr val="C00000"/>
-                </a:solidFill>
-              </a:defRPr>
-            </a:pPr>
-            <a:r>
-              <a:t>现有产品/方案（Ø）</a:t>
-            </a:r>
-          </a:p>
-        </p:txBody>
-      </p:sp>
-      <p:sp>
-        <p:nvSpPr>
-          <p:cNvPr id="6" name="TextBox 5"/>
-          <p:cNvSpPr txBox="1"/>
-          <p:nvPr/>
-        </p:nvSpPr>
-        <p:spPr>
-          <a:xfrm>
-            <a:off x="411480" y="1691640"/>
-            <a:ext cx="4023360" cy="3200400"/>
+            <a:off x="502920" y="1234440"/>
+            <a:ext cx="8138160" cy="3474720"/>
           </a:xfrm>
           <a:prstGeom prst="rect">
             <a:avLst/>
@@ -8694,168 +9237,17 @@
           <a:lstStyle/>
           <a:p>
             <a:pPr>
-              <a:defRPr sz="1300">
+              <a:lnSpc>
+                <a:spcPct val="135000"/>
+              </a:lnSpc>
+              <a:defRPr sz="1500" b="0">
                 <a:solidFill>
                   <a:srgbClr val="1E1E1E"/>
                 </a:solidFill>
               </a:defRPr>
             </a:pPr>
             <a:r>
-              <a:t>Ø 智能音箱：无视觉安全闭环，无法实体援助</a:t>
-            </a:r>
-          </a:p>
-          <a:p>
-            <a:pPr>
-              <a:defRPr sz="1300">
-                <a:solidFill>
-                  <a:srgbClr val="1E1E1E"/>
-                </a:solidFill>
-              </a:defRPr>
-            </a:pPr>
-            <a:r>
-              <a:t>Ø 监控摄像头：只告警不陪伴，缺乏对话与动作</a:t>
-            </a:r>
-          </a:p>
-          <a:p>
-            <a:pPr>
-              <a:defRPr sz="1300">
-                <a:solidFill>
-                  <a:srgbClr val="1E1E1E"/>
-                </a:solidFill>
-              </a:defRPr>
-            </a:pPr>
-            <a:r>
-              <a:t>Ø 健康手环：难发现跌倒过程，无机器人执行</a:t>
-            </a:r>
-          </a:p>
-          <a:p>
-            <a:pPr>
-              <a:defRPr sz="1300">
-                <a:solidFill>
-                  <a:srgbClr val="1E1E1E"/>
-                </a:solidFill>
-              </a:defRPr>
-            </a:pPr>
-            <a:r>
-              <a:t>Ø 纯仿真毕设：缺少真机部署路径与量化评测</a:t>
-            </a:r>
-          </a:p>
-        </p:txBody>
-      </p:sp>
-      <p:sp>
-        <p:nvSpPr>
-          <p:cNvPr id="7" name="TextBox 6"/>
-          <p:cNvSpPr txBox="1"/>
-          <p:nvPr/>
-        </p:nvSpPr>
-        <p:spPr>
-          <a:xfrm>
-            <a:off x="4617720" y="1234440"/>
-            <a:ext cx="4023360" cy="457200"/>
-          </a:xfrm>
-          <a:prstGeom prst="rect">
-            <a:avLst/>
-          </a:prstGeom>
-          <a:noFill/>
-        </p:spPr>
-        <p:txBody>
-          <a:bodyPr wrap="none">
-            <a:spAutoFit/>
-          </a:bodyPr>
-          <a:lstStyle/>
-          <a:p>
-            <a:pPr>
-              <a:defRPr sz="1400" b="1">
-                <a:solidFill>
-                  <a:srgbClr val="143278"/>
-                </a:solidFill>
-              </a:defRPr>
-            </a:pPr>
-            <a:r>
-              <a:t>CareCompanion（ü）</a:t>
-            </a:r>
-          </a:p>
-        </p:txBody>
-      </p:sp>
-      <p:sp>
-        <p:nvSpPr>
-          <p:cNvPr id="8" name="TextBox 7"/>
-          <p:cNvSpPr txBox="1"/>
-          <p:nvPr/>
-        </p:nvSpPr>
-        <p:spPr>
-          <a:xfrm>
-            <a:off x="4617720" y="1691640"/>
-            <a:ext cx="4023360" cy="3200400"/>
-          </a:xfrm>
-          <a:prstGeom prst="rect">
-            <a:avLst/>
-          </a:prstGeom>
-          <a:noFill/>
-        </p:spPr>
-        <p:txBody>
-          <a:bodyPr wrap="square">
-            <a:spAutoFit/>
-          </a:bodyPr>
-          <a:lstStyle/>
-          <a:p>
-            <a:pPr>
-              <a:defRPr sz="1300">
-                <a:solidFill>
-                  <a:srgbClr val="1E1E1E"/>
-                </a:solidFill>
-              </a:defRPr>
-            </a:pPr>
-            <a:r>
-              <a:t>ü 多模态融合：跌倒+情绪+生理→统一风险引擎</a:t>
-            </a:r>
-          </a:p>
-          <a:p>
-            <a:pPr>
-              <a:defRPr sz="1300">
-                <a:solidFill>
-                  <a:srgbClr val="1E1E1E"/>
-                </a:solidFill>
-              </a:defRPr>
-            </a:pPr>
-            <a:r>
-              <a:t>ü 可解释决策：输出风险分数与原因列表</a:t>
-            </a:r>
-          </a:p>
-          <a:p>
-            <a:pPr>
-              <a:defRPr sz="1300">
-                <a:solidFill>
-                  <a:srgbClr val="1E1E1E"/>
-                </a:solidFill>
-              </a:defRPr>
-            </a:pPr>
-            <a:r>
-              <a:t>ü 主动照护：告警/语音/手势/紧急呼叫联动</a:t>
-            </a:r>
-          </a:p>
-          <a:p>
-            <a:pPr>
-              <a:defRPr sz="1300">
-                <a:solidFill>
-                  <a:srgbClr val="1E1E1E"/>
-                </a:solidFill>
-              </a:defRPr>
-            </a:pPr>
-            <a:r>
-              <a:t>ü 人形接口：ROS2 标准话题，仿真与真机同源</a:t>
-            </a:r>
-          </a:p>
-          <a:p>
-            <a:pPr>
-              <a:defRPr sz="1300">
-                <a:solidFill>
-                  <a:srgbClr val="1E1E1E"/>
-                </a:solidFill>
-              </a:defRPr>
-            </a:pPr>
-            <a:r>
-              <a:t>ü 开源可复现：Web 控制台 + 评测脚本 + GitHub</a:t>
+              <a:t>随着我国老龄化程度加深，空巢与独居老人数量持续增加。跌倒已成为老年人意外伤害的首要原因之一，而「发现延迟」往往导致救援错过黄金时间。与此同时，老人对情感陪伴的需求日益增长——他们不仅需要被监测，更需要被理解、被回应。</a:t>
             </a:r>
           </a:p>
         </p:txBody>
@@ -8971,7 +9363,7 @@
               </a:defRPr>
             </a:pPr>
             <a:r>
-              <a:t>机器人创新赛道</a:t>
+              <a:t>创新赛 · 机器人创新赛道</a:t>
             </a:r>
           </a:p>
         </p:txBody>
@@ -9006,7 +9398,7 @@
               </a:defRPr>
             </a:pPr>
             <a:r>
-              <a:t>项目概述</a:t>
+              <a:t>现有方案的不足</a:t>
             </a:r>
           </a:p>
         </p:txBody>
@@ -9019,8 +9411,43 @@
         </p:nvSpPr>
         <p:spPr>
           <a:xfrm>
-            <a:off x="502920" y="1234440"/>
-            <a:ext cx="8138160" cy="3474720"/>
+            <a:off x="411480" y="1234440"/>
+            <a:ext cx="4023360" cy="457200"/>
+          </a:xfrm>
+          <a:prstGeom prst="rect">
+            <a:avLst/>
+          </a:prstGeom>
+          <a:noFill/>
+        </p:spPr>
+        <p:txBody>
+          <a:bodyPr wrap="none">
+            <a:spAutoFit/>
+          </a:bodyPr>
+          <a:lstStyle/>
+          <a:p>
+            <a:pPr>
+              <a:defRPr sz="1400" b="1">
+                <a:solidFill>
+                  <a:srgbClr val="C00000"/>
+                </a:solidFill>
+              </a:defRPr>
+            </a:pPr>
+            <a:r>
+              <a:t>现有产品/方案（Ø）</a:t>
+            </a:r>
+          </a:p>
+        </p:txBody>
+      </p:sp>
+      <p:sp>
+        <p:nvSpPr>
+          <p:cNvPr id="6" name="TextBox 5"/>
+          <p:cNvSpPr txBox="1"/>
+          <p:nvPr/>
+        </p:nvSpPr>
+        <p:spPr>
+          <a:xfrm>
+            <a:off x="411480" y="1691640"/>
+            <a:ext cx="4023360" cy="3200400"/>
           </a:xfrm>
           <a:prstGeom prst="rect">
             <a:avLst/>
@@ -9034,17 +9461,168 @@
           <a:lstStyle/>
           <a:p>
             <a:pPr>
-              <a:lnSpc>
-                <a:spcPct val="135000"/>
-              </a:lnSpc>
-              <a:defRPr sz="1500" b="0">
+              <a:defRPr sz="1300">
                 <a:solidFill>
                   <a:srgbClr val="1E1E1E"/>
                 </a:solidFill>
               </a:defRPr>
             </a:pPr>
             <a:r>
-              <a:t>基于上述需求，我们开发了 CareCompanion 智能养老人形陪伴机器人软件平台。平台以 CareOrchestrator 为核心，融合 MediaPipe 视觉姿态、文本情感与健康指标，在 Web 控制台完成演示验证，并通过 ROS2 适配层对接人形机器人。系统已实现跌倒紧急链路自动化验证，合成场景跌倒检测 F1 达 100%。</a:t>
+              <a:t>Ø 智能音箱：无视觉安全闭环，无法实体援助</a:t>
+            </a:r>
+          </a:p>
+          <a:p>
+            <a:pPr>
+              <a:defRPr sz="1300">
+                <a:solidFill>
+                  <a:srgbClr val="1E1E1E"/>
+                </a:solidFill>
+              </a:defRPr>
+            </a:pPr>
+            <a:r>
+              <a:t>Ø 监控摄像头：只告警不陪伴，缺乏对话与动作</a:t>
+            </a:r>
+          </a:p>
+          <a:p>
+            <a:pPr>
+              <a:defRPr sz="1300">
+                <a:solidFill>
+                  <a:srgbClr val="1E1E1E"/>
+                </a:solidFill>
+              </a:defRPr>
+            </a:pPr>
+            <a:r>
+              <a:t>Ø 健康手环：难发现跌倒过程，无机器人执行</a:t>
+            </a:r>
+          </a:p>
+          <a:p>
+            <a:pPr>
+              <a:defRPr sz="1300">
+                <a:solidFill>
+                  <a:srgbClr val="1E1E1E"/>
+                </a:solidFill>
+              </a:defRPr>
+            </a:pPr>
+            <a:r>
+              <a:t>Ø 纯仿真毕设：缺少真机部署路径与量化评测</a:t>
+            </a:r>
+          </a:p>
+        </p:txBody>
+      </p:sp>
+      <p:sp>
+        <p:nvSpPr>
+          <p:cNvPr id="7" name="TextBox 6"/>
+          <p:cNvSpPr txBox="1"/>
+          <p:nvPr/>
+        </p:nvSpPr>
+        <p:spPr>
+          <a:xfrm>
+            <a:off x="4617720" y="1234440"/>
+            <a:ext cx="4023360" cy="457200"/>
+          </a:xfrm>
+          <a:prstGeom prst="rect">
+            <a:avLst/>
+          </a:prstGeom>
+          <a:noFill/>
+        </p:spPr>
+        <p:txBody>
+          <a:bodyPr wrap="none">
+            <a:spAutoFit/>
+          </a:bodyPr>
+          <a:lstStyle/>
+          <a:p>
+            <a:pPr>
+              <a:defRPr sz="1400" b="1">
+                <a:solidFill>
+                  <a:srgbClr val="143278"/>
+                </a:solidFill>
+              </a:defRPr>
+            </a:pPr>
+            <a:r>
+              <a:t>CareCompanion（ü）</a:t>
+            </a:r>
+          </a:p>
+        </p:txBody>
+      </p:sp>
+      <p:sp>
+        <p:nvSpPr>
+          <p:cNvPr id="8" name="TextBox 7"/>
+          <p:cNvSpPr txBox="1"/>
+          <p:nvPr/>
+        </p:nvSpPr>
+        <p:spPr>
+          <a:xfrm>
+            <a:off x="4617720" y="1691640"/>
+            <a:ext cx="4023360" cy="3200400"/>
+          </a:xfrm>
+          <a:prstGeom prst="rect">
+            <a:avLst/>
+          </a:prstGeom>
+          <a:noFill/>
+        </p:spPr>
+        <p:txBody>
+          <a:bodyPr wrap="square">
+            <a:spAutoFit/>
+          </a:bodyPr>
+          <a:lstStyle/>
+          <a:p>
+            <a:pPr>
+              <a:defRPr sz="1300">
+                <a:solidFill>
+                  <a:srgbClr val="1E1E1E"/>
+                </a:solidFill>
+              </a:defRPr>
+            </a:pPr>
+            <a:r>
+              <a:t>ü 多模态融合：跌倒+情绪+生理→统一风险引擎</a:t>
+            </a:r>
+          </a:p>
+          <a:p>
+            <a:pPr>
+              <a:defRPr sz="1300">
+                <a:solidFill>
+                  <a:srgbClr val="1E1E1E"/>
+                </a:solidFill>
+              </a:defRPr>
+            </a:pPr>
+            <a:r>
+              <a:t>ü 可解释决策：输出风险分数与原因列表</a:t>
+            </a:r>
+          </a:p>
+          <a:p>
+            <a:pPr>
+              <a:defRPr sz="1300">
+                <a:solidFill>
+                  <a:srgbClr val="1E1E1E"/>
+                </a:solidFill>
+              </a:defRPr>
+            </a:pPr>
+            <a:r>
+              <a:t>ü 主动照护：告警/语音/手势/紧急呼叫联动</a:t>
+            </a:r>
+          </a:p>
+          <a:p>
+            <a:pPr>
+              <a:defRPr sz="1300">
+                <a:solidFill>
+                  <a:srgbClr val="1E1E1E"/>
+                </a:solidFill>
+              </a:defRPr>
+            </a:pPr>
+            <a:r>
+              <a:t>ü 人形接口：ROS2 标准话题，仿真与真机同源</a:t>
+            </a:r>
+          </a:p>
+          <a:p>
+            <a:pPr>
+              <a:defRPr sz="1300">
+                <a:solidFill>
+                  <a:srgbClr val="1E1E1E"/>
+                </a:solidFill>
+              </a:defRPr>
+            </a:pPr>
+            <a:r>
+              <a:t>ü 开源可复现：Web 控制台 + 评测脚本 + GitHub</a:t>
             </a:r>
           </a:p>
         </p:txBody>
@@ -9160,7 +9738,7 @@
               </a:defRPr>
             </a:pPr>
             <a:r>
-              <a:t>机器人创新赛道</a:t>
+              <a:t>创新赛 · 机器人创新赛道</a:t>
             </a:r>
           </a:p>
         </p:txBody>
@@ -9173,7 +9751,7 @@
         </p:nvSpPr>
         <p:spPr>
           <a:xfrm>
-            <a:off x="502920" y="2068830"/>
+            <a:off x="502920" y="566928"/>
             <a:ext cx="8138160" cy="731520"/>
           </a:xfrm>
           <a:prstGeom prst="rect">
@@ -9187,15 +9765,15 @@
           </a:bodyPr>
           <a:lstStyle/>
           <a:p>
-            <a:pPr algn="ctr">
-              <a:defRPr sz="3000" b="1">
+            <a:pPr algn="l">
+              <a:defRPr sz="2400" b="1">
                 <a:solidFill>
                   <a:srgbClr val="1E1E1E"/>
                 </a:solidFill>
               </a:defRPr>
             </a:pPr>
             <a:r>
-              <a:t>第二部分</a:t>
+              <a:t>项目概述</a:t>
             </a:r>
           </a:p>
         </p:txBody>
@@ -9208,8 +9786,8 @@
         </p:nvSpPr>
         <p:spPr>
           <a:xfrm>
-            <a:off x="502920" y="2617470"/>
-            <a:ext cx="8138160" cy="731520"/>
+            <a:off x="502920" y="1234440"/>
+            <a:ext cx="8138160" cy="3474720"/>
           </a:xfrm>
           <a:prstGeom prst="rect">
             <a:avLst/>
@@ -9222,15 +9800,18 @@
           </a:bodyPr>
           <a:lstStyle/>
           <a:p>
-            <a:pPr algn="ctr">
-              <a:defRPr sz="2000" b="1">
-                <a:solidFill>
-                  <a:srgbClr val="143278"/>
-                </a:solidFill>
-              </a:defRPr>
-            </a:pPr>
-            <a:r>
-              <a:t>关键技术与系统架构</a:t>
+            <a:pPr>
+              <a:lnSpc>
+                <a:spcPct val="135000"/>
+              </a:lnSpc>
+              <a:defRPr sz="1500" b="0">
+                <a:solidFill>
+                  <a:srgbClr val="1E1E1E"/>
+                </a:solidFill>
+              </a:defRPr>
+            </a:pPr>
+            <a:r>
+              <a:t>基于上述需求，我们开发了 CareCompanion 智能养老人形陪伴机器人软件平台。平台以 CareOrchestrator 为核心，融合 MediaPipe 视觉姿态、文本情感与健康指标，在 Web 控制台完成演示验证，并通过 ROS2 适配层对接人形机器人。系统已实现跌倒紧急链路自动化验证，合成场景跌倒检测 F1 达 100%。</a:t>
             </a:r>
           </a:p>
         </p:txBody>
@@ -9346,7 +9927,7 @@
               </a:defRPr>
             </a:pPr>
             <a:r>
-              <a:t>机器人创新赛道</a:t>
+              <a:t>创新赛 · 机器人创新赛道</a:t>
             </a:r>
           </a:p>
         </p:txBody>
@@ -9359,7 +9940,7 @@
         </p:nvSpPr>
         <p:spPr>
           <a:xfrm>
-            <a:off x="502920" y="566928"/>
+            <a:off x="502920" y="2068830"/>
             <a:ext cx="8138160" cy="731520"/>
           </a:xfrm>
           <a:prstGeom prst="rect">
@@ -9373,15 +9954,15 @@
           </a:bodyPr>
           <a:lstStyle/>
           <a:p>
-            <a:pPr algn="l">
-              <a:defRPr sz="2400" b="1">
+            <a:pPr algn="ctr">
+              <a:defRPr sz="3000" b="1">
                 <a:solidFill>
                   <a:srgbClr val="1E1E1E"/>
                 </a:solidFill>
               </a:defRPr>
             </a:pPr>
             <a:r>
-              <a:t>系统总体架构</a:t>
+              <a:t>第二部分</a:t>
             </a:r>
           </a:p>
         </p:txBody>
@@ -9394,8 +9975,8 @@
         </p:nvSpPr>
         <p:spPr>
           <a:xfrm>
-            <a:off x="502920" y="1325880"/>
-            <a:ext cx="8138160" cy="3840480"/>
+            <a:off x="502920" y="2617470"/>
+            <a:ext cx="8138160" cy="731520"/>
           </a:xfrm>
           <a:prstGeom prst="rect">
             <a:avLst/>
@@ -9408,78 +9989,15 @@
           </a:bodyPr>
           <a:lstStyle/>
           <a:p>
-            <a:pPr>
-              <a:spcAft>
-                <a:spcPts val="600"/>
-              </a:spcAft>
-              <a:defRPr sz="1400">
-                <a:solidFill>
-                  <a:srgbClr val="1E1E1E"/>
-                </a:solidFill>
-              </a:defRPr>
-            </a:pPr>
-            <a:r>
-              <a:t>感知层：FallDetector · EmotionRecognizer · HealthMonitor · PosePipeline（MediaPipe）</a:t>
-            </a:r>
-          </a:p>
-          <a:p>
-            <a:pPr>
-              <a:spcAft>
-                <a:spcPts val="600"/>
-              </a:spcAft>
-              <a:defRPr sz="1400">
-                <a:solidFill>
-                  <a:srgbClr val="1E1E1E"/>
-                </a:solidFill>
-              </a:defRPr>
-            </a:pPr>
-            <a:r>
-              <a:t>认知层：RiskEngine（多模态融合）· DialogueManager · CarePlanner</a:t>
-            </a:r>
-          </a:p>
-          <a:p>
-            <a:pPr>
-              <a:spcAft>
-                <a:spcPts val="600"/>
-              </a:spcAft>
-              <a:defRPr sz="1400">
-                <a:solidFill>
-                  <a:srgbClr val="1E1E1E"/>
-                </a:solidFill>
-              </a:defRPr>
-            </a:pPr>
-            <a:r>
-              <a:t>执行层：RobotAdapter → SimulationAdapter / ROS2Adapter</a:t>
-            </a:r>
-          </a:p>
-          <a:p>
-            <a:pPr>
-              <a:spcAft>
-                <a:spcPts val="600"/>
-              </a:spcAft>
-              <a:defRPr sz="1400">
-                <a:solidFill>
-                  <a:srgbClr val="1E1E1E"/>
-                </a:solidFill>
-              </a:defRPr>
-            </a:pPr>
-            <a:r>
-              <a:t>交互层：Web 控制台 · 桌面 GUI · 无头自动化剧本</a:t>
-            </a:r>
-          </a:p>
-          <a:p>
-            <a:pPr>
-              <a:spcAft>
-                <a:spcPts val="600"/>
-              </a:spcAft>
-              <a:defRPr sz="1400">
-                <a:solidFill>
-                  <a:srgbClr val="1E1E1E"/>
-                </a:solidFill>
-              </a:defRPr>
-            </a:pPr>
-            <a:r>
-              <a:t>状态机：MONITOR → CONVERSE → ALERT → EMERGENCY（紧急硬优先级）</a:t>
+            <a:pPr algn="ctr">
+              <a:defRPr sz="2000" b="1">
+                <a:solidFill>
+                  <a:srgbClr val="143278"/>
+                </a:solidFill>
+              </a:defRPr>
+            </a:pPr>
+            <a:r>
+              <a:t>关键技术与系统架构</a:t>
             </a:r>
           </a:p>
         </p:txBody>
@@ -9595,7 +10113,7 @@
               </a:defRPr>
             </a:pPr>
             <a:r>
-              <a:t>机器人创新赛道</a:t>
+              <a:t>创新赛 · 机器人创新赛道</a:t>
             </a:r>
           </a:p>
         </p:txBody>
@@ -9630,7 +10148,7 @@
               </a:defRPr>
             </a:pPr>
             <a:r>
-              <a:t>多模态风险融合引擎</a:t>
+              <a:t>系统总体架构</a:t>
             </a:r>
           </a:p>
         </p:txBody>
@@ -9668,7 +10186,7 @@
               </a:defRPr>
             </a:pPr>
             <a:r>
-              <a:t>融合公式：S = 0.45·S_fall + 0.25·S_emo + 0.30·S_health</a:t>
+              <a:t>感知层：FallDetector · EmotionRecognizer · HealthMonitor · PosePipeline（MediaPipe）</a:t>
             </a:r>
           </a:p>
           <a:p>
@@ -9683,7 +10201,7 @@
               </a:defRPr>
             </a:pPr>
             <a:r>
-              <a:t>输出：风险分数、等级（normal/alert/emergency）、原因列表</a:t>
+              <a:t>认知层：RiskEngine（多模态融合）· DialogueManager · CarePlanner</a:t>
             </a:r>
           </a:p>
           <a:p>
@@ -9698,7 +10216,7 @@
               </a:defRPr>
             </a:pPr>
             <a:r>
-              <a:t>阈值：alert ≥ 0.65，emergency ≥ 0.85 或确认跌倒</a:t>
+              <a:t>执行层：RobotAdapter → SimulationAdapter / ROS2Adapter</a:t>
             </a:r>
           </a:p>
           <a:p>
@@ -9713,45 +10231,22 @@
               </a:defRPr>
             </a:pPr>
             <a:r>
-              <a:t>优势：非黑盒 LLM，便于答辩解释与医疗合规沟通</a:t>
-            </a:r>
-          </a:p>
-        </p:txBody>
-      </p:sp>
-      <p:sp>
-        <p:nvSpPr>
-          <p:cNvPr id="6" name="TextBox 5"/>
-          <p:cNvSpPr txBox="1"/>
-          <p:nvPr/>
-        </p:nvSpPr>
-        <p:spPr>
-          <a:xfrm>
-            <a:off x="502920" y="3657600"/>
-            <a:ext cx="8138160" cy="3474720"/>
-          </a:xfrm>
-          <a:prstGeom prst="rect">
-            <a:avLst/>
-          </a:prstGeom>
-          <a:noFill/>
-        </p:spPr>
-        <p:txBody>
-          <a:bodyPr wrap="square">
-            <a:spAutoFit/>
-          </a:bodyPr>
-          <a:lstStyle/>
-          <a:p>
-            <a:pPr>
-              <a:lnSpc>
-                <a:spcPct val="135000"/>
-              </a:lnSpc>
-              <a:defRPr sz="1200" b="0">
+              <a:t>交互层：Web 控制台 · 桌面 GUI · 无头自动化剧本</a:t>
+            </a:r>
+          </a:p>
+          <a:p>
+            <a:pPr>
+              <a:spcAft>
+                <a:spcPts val="600"/>
+              </a:spcAft>
+              <a:defRPr sz="1400">
                 <a:solidFill>
                   <a:srgbClr val="1E1E1E"/>
                 </a:solidFill>
               </a:defRPr>
             </a:pPr>
             <a:r>
-              <a:t>config/default.yaml 集中管理权重与阈值，支持场景调参。</a:t>
+              <a:t>状态机：MONITOR → CONVERSE → ALERT → EMERGENCY（紧急硬优先级）</a:t>
             </a:r>
           </a:p>
         </p:txBody>
@@ -9867,7 +10362,7 @@
               </a:defRPr>
             </a:pPr>
             <a:r>
-              <a:t>机器人创新赛道</a:t>
+              <a:t>创新赛 · 机器人创新赛道</a:t>
             </a:r>
           </a:p>
         </p:txBody>
@@ -9902,7 +10397,7 @@
               </a:defRPr>
             </a:pPr>
             <a:r>
-              <a:t>跌倒检测算法</a:t>
+              <a:t>多模态风险融合引擎</a:t>
             </a:r>
           </a:p>
         </p:txBody>
@@ -9940,7 +10435,7 @@
               </a:defRPr>
             </a:pPr>
             <a:r>
-              <a:t>几何特征：骨架宽高比 R=w/h、垂直速度 v_y、静止持续时间</a:t>
+              <a:t>融合公式：S = 0.45·S_fall + 0.25·S_emo + 0.30·S_health</a:t>
             </a:r>
           </a:p>
           <a:p>
@@ -9955,7 +10450,7 @@
               </a:defRPr>
             </a:pPr>
             <a:r>
-              <a:t>快速跌倒：快速下落 + 躺倒姿态（score ≥ 0.7）</a:t>
+              <a:t>输出：风险分数、等级（normal/alert/emergency）、原因列表</a:t>
             </a:r>
           </a:p>
           <a:p>
@@ -9970,7 +10465,7 @@
               </a:defRPr>
             </a:pPr>
             <a:r>
-              <a:t>慢速跌倒：躺倒静止 ≥ 2s（养老场景常见，score ≥ 0.55）</a:t>
+              <a:t>阈值：alert ≥ 0.65，emergency ≥ 0.85 或确认跌倒</a:t>
             </a:r>
           </a:p>
           <a:p>
@@ -9985,22 +10480,45 @@
               </a:defRPr>
             </a:pPr>
             <a:r>
-              <a:t>MediaPipe Pose：浏览器/摄像头实时骨架 → 自动填充感知参数</a:t>
-            </a:r>
-          </a:p>
-          <a:p>
-            <a:pPr>
-              <a:spcAft>
-                <a:spcPts val="600"/>
-              </a:spcAft>
-              <a:defRPr sz="1400">
+              <a:t>优势：非黑盒 LLM，便于答辩解释与医疗合规沟通</a:t>
+            </a:r>
+          </a:p>
+        </p:txBody>
+      </p:sp>
+      <p:sp>
+        <p:nvSpPr>
+          <p:cNvPr id="6" name="TextBox 5"/>
+          <p:cNvSpPr txBox="1"/>
+          <p:nvPr/>
+        </p:nvSpPr>
+        <p:spPr>
+          <a:xfrm>
+            <a:off x="502920" y="3657600"/>
+            <a:ext cx="8138160" cy="3474720"/>
+          </a:xfrm>
+          <a:prstGeom prst="rect">
+            <a:avLst/>
+          </a:prstGeom>
+          <a:noFill/>
+        </p:spPr>
+        <p:txBody>
+          <a:bodyPr wrap="square">
+            <a:spAutoFit/>
+          </a:bodyPr>
+          <a:lstStyle/>
+          <a:p>
+            <a:pPr>
+              <a:lnSpc>
+                <a:spcPct val="135000"/>
+              </a:lnSpc>
+              <a:defRPr sz="1200" b="0">
                 <a:solidFill>
                   <a:srgbClr val="1E1E1E"/>
                 </a:solidFill>
               </a:defRPr>
             </a:pPr>
             <a:r>
-              <a:t>评测：6 类合成场景，Precision/Recall/F1 = 100%</a:t>
+              <a:t>config/default.yaml 集中管理权重与阈值，支持场景调参。</a:t>
             </a:r>
           </a:p>
         </p:txBody>

--- a/docs/答辩_CareCompanion.pptx
+++ b/docs/答辩_CareCompanion.pptx
@@ -34,6 +34,8 @@
     <p:sldId id="282" r:id="rId33"/>
     <p:sldId id="283" r:id="rId34"/>
     <p:sldId id="284" r:id="rId35"/>
+    <p:sldId id="285" r:id="rId36"/>
+    <p:sldId id="286" r:id="rId37"/>
   </p:sldIdLst>
   <p:sldSz cx="9144000" cy="5143500" type="screen4x3"/>
   <p:notesSz cx="6858000" cy="9144000"/>
@@ -3109,14 +3111,6 @@
 <file path=ppt/slides/slide1.xml><?xml version="1.0" encoding="utf-8"?>
 <p:sld xmlns:a="http://schemas.openxmlformats.org/drawingml/2006/main" xmlns:p="http://schemas.openxmlformats.org/presentationml/2006/main" xmlns:r="http://schemas.openxmlformats.org/officeDocument/2006/relationships">
   <p:cSld>
-    <p:bg>
-      <p:bgPr>
-        <a:solidFill>
-          <a:srgbClr val="FFFFFF"/>
-        </a:solidFill>
-        <a:effectLst/>
-      </p:bgPr>
-    </p:bg>
     <p:spTree>
       <p:nvGrpSpPr>
         <p:cNvPr id="1" name=""/>
@@ -3214,15 +3208,39 @@
           </a:p>
         </p:txBody>
       </p:sp>
-      <p:sp>
-        <p:nvSpPr>
-          <p:cNvPr id="4" name="TextBox 3"/>
+      <p:pic>
+        <p:nvPicPr>
+          <p:cNvPr id="4" name="Picture 3" descr="cover_banner.png"/>
+          <p:cNvPicPr>
+            <a:picLocks noChangeAspect="1"/>
+          </p:cNvPicPr>
+          <p:nvPr/>
+        </p:nvPicPr>
+        <p:blipFill>
+          <a:blip r:embed="rId2"/>
+          <a:stretch>
+            <a:fillRect/>
+          </a:stretch>
+        </p:blipFill>
+        <p:spPr>
+          <a:xfrm>
+            <a:off x="0" y="475488"/>
+            <a:ext cx="9144000" cy="4668012"/>
+          </a:xfrm>
+          <a:prstGeom prst="rect">
+            <a:avLst/>
+          </a:prstGeom>
+        </p:spPr>
+      </p:pic>
+      <p:sp>
+        <p:nvSpPr>
+          <p:cNvPr id="5" name="TextBox 4"/>
           <p:cNvSpPr txBox="1"/>
           <p:nvPr/>
         </p:nvSpPr>
         <p:spPr>
           <a:xfrm>
-            <a:off x="502920" y="868680"/>
+            <a:off x="502920" y="4091939"/>
             <a:ext cx="8138160" cy="731520"/>
           </a:xfrm>
           <a:prstGeom prst="rect">
@@ -3237,49 +3255,14 @@
           <a:lstStyle/>
           <a:p>
             <a:pPr algn="ctr">
-              <a:defRPr sz="3200" b="1">
-                <a:solidFill>
-                  <a:srgbClr val="143278"/>
-                </a:solidFill>
-              </a:defRPr>
-            </a:pPr>
-            <a:r>
-              <a:t>CareCompanion</a:t>
-            </a:r>
-          </a:p>
-        </p:txBody>
-      </p:sp>
-      <p:sp>
-        <p:nvSpPr>
-          <p:cNvPr id="5" name="TextBox 4"/>
-          <p:cNvSpPr txBox="1"/>
-          <p:nvPr/>
-        </p:nvSpPr>
-        <p:spPr>
-          <a:xfrm>
-            <a:off x="502920" y="1353312"/>
-            <a:ext cx="8138160" cy="731520"/>
-          </a:xfrm>
-          <a:prstGeom prst="rect">
-            <a:avLst/>
-          </a:prstGeom>
-          <a:noFill/>
-        </p:spPr>
-        <p:txBody>
-          <a:bodyPr wrap="square">
-            <a:spAutoFit/>
-          </a:bodyPr>
-          <a:lstStyle/>
-          <a:p>
-            <a:pPr algn="ctr">
-              <a:defRPr sz="1700" b="1">
-                <a:solidFill>
-                  <a:srgbClr val="1E1E1E"/>
-                </a:solidFill>
-              </a:defRPr>
-            </a:pPr>
-            <a:r>
-              <a:t>基于大语言模型的智能养老陪伴机器人仿真平台</a:t>
+              <a:defRPr sz="2000" b="1">
+                <a:solidFill>
+                  <a:srgbClr val="FFFFFF"/>
+                </a:solidFill>
+              </a:defRPr>
+            </a:pPr>
+            <a:r>
+              <a:t>从容应队</a:t>
             </a:r>
           </a:p>
         </p:txBody>
@@ -3292,50 +3275,8 @@
         </p:nvSpPr>
         <p:spPr>
           <a:xfrm>
-            <a:off x="502920" y="2148840"/>
-            <a:ext cx="8046720" cy="3474720"/>
-          </a:xfrm>
-          <a:prstGeom prst="rect">
-            <a:avLst/>
-          </a:prstGeom>
-          <a:noFill/>
-        </p:spPr>
-        <p:txBody>
-          <a:bodyPr wrap="square">
-            <a:spAutoFit/>
-          </a:bodyPr>
-          <a:lstStyle/>
-          <a:p>
-            <a:pPr>
-              <a:lnSpc>
-                <a:spcPct val="135000"/>
-              </a:lnSpc>
-              <a:defRPr sz="1300" b="0">
-                <a:solidFill>
-                  <a:srgbClr val="1E1E1E"/>
-                </a:solidFill>
-              </a:defRPr>
-            </a:pPr>
-            <a:r>
-              <a:t>参赛团队：从容应队　|　中山大学（广东）</a:t>
-            </a:r>
-            <a:br/>
-            <a:r>
-              <a:t>队长 刘小凡　队员 白冉　指导教师 彭键清（智能科学与技术）</a:t>
-            </a:r>
-          </a:p>
-        </p:txBody>
-      </p:sp>
-      <p:sp>
-        <p:nvSpPr>
-          <p:cNvPr id="7" name="TextBox 6"/>
-          <p:cNvSpPr txBox="1"/>
-          <p:nvPr/>
-        </p:nvSpPr>
-        <p:spPr>
-          <a:xfrm>
-            <a:off x="502920" y="4183380"/>
-            <a:ext cx="8138160" cy="502920"/>
+            <a:off x="457200" y="4457700"/>
+            <a:ext cx="8229600" cy="365760"/>
           </a:xfrm>
           <a:prstGeom prst="rect">
             <a:avLst/>
@@ -3349,26 +3290,14 @@
           <a:lstStyle/>
           <a:p>
             <a:pPr algn="ctr">
-              <a:defRPr sz="1000">
-                <a:solidFill>
-                  <a:srgbClr val="505050"/>
-                </a:solidFill>
-              </a:defRPr>
-            </a:pPr>
-            <a:r>
-              <a:t>第二十八届中国机器人及人工智能大赛　·　创新赛 · 机器人创新赛道</a:t>
-            </a:r>
-          </a:p>
-          <a:p>
-            <a:pPr algn="ctr">
-              <a:defRPr sz="900">
-                <a:solidFill>
-                  <a:srgbClr val="505050"/>
-                </a:solidFill>
-              </a:defRPr>
-            </a:pPr>
-            <a:r>
-              <a:t>团队编号 CRAIC2026-TEAM-8FJQKLMI　作品编号 CRAIC20264ZEFT1DF</a:t>
+              <a:defRPr sz="1100">
+                <a:solidFill>
+                  <a:srgbClr val="DCE6FF"/>
+                </a:solidFill>
+              </a:defRPr>
+            </a:pPr>
+            <a:r>
+              <a:t>中山大学 · 刘小凡 / 白冉 · 指导教师 彭键清</a:t>
             </a:r>
           </a:p>
         </p:txBody>
@@ -3497,7 +3426,7 @@
         </p:nvSpPr>
         <p:spPr>
           <a:xfrm>
-            <a:off x="502920" y="566928"/>
+            <a:off x="502920" y="548640"/>
             <a:ext cx="8138160" cy="731520"/>
           </a:xfrm>
           <a:prstGeom prst="rect">
@@ -3512,14 +3441,14 @@
           <a:lstStyle/>
           <a:p>
             <a:pPr algn="l">
-              <a:defRPr sz="2400" b="1">
+              <a:defRPr sz="2200" b="1">
                 <a:solidFill>
                   <a:srgbClr val="1E1E1E"/>
                 </a:solidFill>
               </a:defRPr>
             </a:pPr>
             <a:r>
-              <a:t>跌倒检测算法</a:t>
+              <a:t>状态机与调度策略</a:t>
             </a:r>
           </a:p>
         </p:txBody>
@@ -3532,8 +3461,8 @@
         </p:nvSpPr>
         <p:spPr>
           <a:xfrm>
-            <a:off x="502920" y="1325880"/>
-            <a:ext cx="8138160" cy="3840480"/>
+            <a:off x="502920" y="960120"/>
+            <a:ext cx="3886200" cy="3840480"/>
           </a:xfrm>
           <a:prstGeom prst="rect">
             <a:avLst/>
@@ -3550,14 +3479,14 @@
               <a:spcAft>
                 <a:spcPts val="600"/>
               </a:spcAft>
-              <a:defRPr sz="1400">
+              <a:defRPr sz="1200">
                 <a:solidFill>
                   <a:srgbClr val="1E1E1E"/>
                 </a:solidFill>
               </a:defRPr>
             </a:pPr>
             <a:r>
-              <a:t>几何特征：骨架宽高比 R=w/h、垂直速度 v_y、静止持续时间</a:t>
+              <a:t>MONITOR → CONVERSE → ALERT → EMERGENCY</a:t>
             </a:r>
           </a:p>
           <a:p>
@@ -3565,14 +3494,14 @@
               <a:spcAft>
                 <a:spcPts val="600"/>
               </a:spcAft>
-              <a:defRPr sz="1400">
+              <a:defRPr sz="1200">
                 <a:solidFill>
                   <a:srgbClr val="1E1E1E"/>
                 </a:solidFill>
               </a:defRPr>
             </a:pPr>
             <a:r>
-              <a:t>快速跌倒：快速下落 + 躺倒姿态（score ≥ 0.7）</a:t>
+              <a:t>紧急态可打断对话与常规任务</a:t>
             </a:r>
           </a:p>
           <a:p>
@@ -3580,14 +3509,14 @@
               <a:spcAft>
                 <a:spcPts val="600"/>
               </a:spcAft>
-              <a:defRPr sz="1400">
+              <a:defRPr sz="1200">
                 <a:solidFill>
                   <a:srgbClr val="1E1E1E"/>
                 </a:solidFill>
               </a:defRPr>
             </a:pPr>
             <a:r>
-              <a:t>慢速跌倒：躺倒静止 ≥ 2s（养老场景常见，score ≥ 0.55）</a:t>
+              <a:t>每个 tick 输出风险、回复、动作序列</a:t>
             </a:r>
           </a:p>
           <a:p>
@@ -3595,33 +3524,87 @@
               <a:spcAft>
                 <a:spcPts val="600"/>
               </a:spcAft>
-              <a:defRPr sz="1400">
+              <a:defRPr sz="1200">
                 <a:solidFill>
                   <a:srgbClr val="1E1E1E"/>
                 </a:solidFill>
               </a:defRPr>
             </a:pPr>
             <a:r>
-              <a:t>MediaPipe Pose：浏览器/摄像头实时骨架 → 自动填充感知参数</a:t>
-            </a:r>
-          </a:p>
-          <a:p>
-            <a:pPr>
-              <a:spcAft>
-                <a:spcPts val="600"/>
-              </a:spcAft>
-              <a:defRPr sz="1400">
-                <a:solidFill>
-                  <a:srgbClr val="1E1E1E"/>
-                </a:solidFill>
-              </a:defRPr>
-            </a:pPr>
-            <a:r>
-              <a:t>评测：6 类合成场景，Precision/Recall/F1 = 100%</a:t>
-            </a:r>
-          </a:p>
-        </p:txBody>
-      </p:sp>
+              <a:t>便于日志审计与答辩讲解</a:t>
+            </a:r>
+          </a:p>
+        </p:txBody>
+      </p:sp>
+      <p:sp>
+        <p:nvSpPr>
+          <p:cNvPr id="6" name="Rectangle 5"/>
+          <p:cNvSpPr/>
+          <p:nvPr/>
+        </p:nvSpPr>
+        <p:spPr>
+          <a:xfrm>
+            <a:off x="4370832" y="896112"/>
+            <a:ext cx="4398264" cy="4096512"/>
+          </a:xfrm>
+          <a:prstGeom prst="rect">
+            <a:avLst/>
+          </a:prstGeom>
+          <a:solidFill>
+            <a:srgbClr val="EBF2FA"/>
+          </a:solidFill>
+          <a:ln>
+            <a:solidFill>
+              <a:srgbClr val="B4C3DC"/>
+            </a:solidFill>
+          </a:ln>
+        </p:spPr>
+        <p:style>
+          <a:lnRef idx="1">
+            <a:schemeClr val="accent1"/>
+          </a:lnRef>
+          <a:fillRef idx="3">
+            <a:schemeClr val="accent1"/>
+          </a:fillRef>
+          <a:effectRef idx="2">
+            <a:schemeClr val="accent1"/>
+          </a:effectRef>
+          <a:fontRef idx="minor">
+            <a:schemeClr val="lt1"/>
+          </a:fontRef>
+        </p:style>
+        <p:txBody>
+          <a:bodyPr rtlCol="0" anchor="ctr"/>
+          <a:lstStyle/>
+          <a:p>
+            <a:pPr algn="ctr"/>
+          </a:p>
+        </p:txBody>
+      </p:sp>
+      <p:pic>
+        <p:nvPicPr>
+          <p:cNvPr id="7" name="Picture 6" descr="state_machine.png"/>
+          <p:cNvPicPr>
+            <a:picLocks noChangeAspect="1"/>
+          </p:cNvPicPr>
+          <p:nvPr/>
+        </p:nvPicPr>
+        <p:blipFill>
+          <a:blip r:embed="rId2"/>
+          <a:stretch>
+            <a:fillRect/>
+          </a:stretch>
+        </p:blipFill>
+        <p:spPr>
+          <a:xfrm>
+            <a:off x="4407408" y="932688"/>
+            <a:ext cx="4325112" cy="2203358"/>
+          </a:xfrm>
+          <a:prstGeom prst="rect">
+            <a:avLst/>
+          </a:prstGeom>
+        </p:spPr>
+      </p:pic>
     </p:spTree>
   </p:cSld>
   <p:clrMapOvr>
@@ -3746,7 +3729,7 @@
         </p:nvSpPr>
         <p:spPr>
           <a:xfrm>
-            <a:off x="502920" y="566928"/>
+            <a:off x="502920" y="548640"/>
             <a:ext cx="8138160" cy="731520"/>
           </a:xfrm>
           <a:prstGeom prst="rect">
@@ -3761,14 +3744,14 @@
           <a:lstStyle/>
           <a:p>
             <a:pPr algn="l">
-              <a:defRPr sz="2400" b="1">
+              <a:defRPr sz="2200" b="1">
                 <a:solidFill>
                   <a:srgbClr val="1E1E1E"/>
                 </a:solidFill>
               </a:defRPr>
             </a:pPr>
             <a:r>
-              <a:t>情感陪伴与紧急响应</a:t>
+              <a:t>多模态风险融合（理论）</a:t>
             </a:r>
           </a:p>
         </p:txBody>
@@ -3781,8 +3764,8 @@
         </p:nvSpPr>
         <p:spPr>
           <a:xfrm>
-            <a:off x="502920" y="1234440"/>
-            <a:ext cx="8138160" cy="3840480"/>
+            <a:off x="502920" y="960120"/>
+            <a:ext cx="3886200" cy="3840480"/>
           </a:xfrm>
           <a:prstGeom prst="rect">
             <a:avLst/>
@@ -3799,14 +3782,14 @@
               <a:spcAft>
                 <a:spcPts val="600"/>
               </a:spcAft>
-              <a:defRPr sz="1300">
+              <a:defRPr sz="1200">
                 <a:solidFill>
                   <a:srgbClr val="1E1E1E"/>
                 </a:solidFill>
               </a:defRPr>
             </a:pPr>
             <a:r>
-              <a:t>对话：文本情感词典 + 视觉情绪标签融合；可插拔 LLM（默认离线 Mock）</a:t>
+              <a:t>加权融合跌倒、情绪、健康三路分数</a:t>
             </a:r>
           </a:p>
           <a:p>
@@ -3814,14 +3797,14 @@
               <a:spcAft>
                 <a:spcPts val="600"/>
               </a:spcAft>
-              <a:defRPr sz="1300">
+              <a:defRPr sz="1200">
                 <a:solidFill>
                   <a:srgbClr val="1E1E1E"/>
                 </a:solidFill>
               </a:defRPr>
             </a:pPr>
             <a:r>
-              <a:t>紧急链路：alert_sound → speak → call_emergency → raise_hand</a:t>
+              <a:t>输出等级与原因列表，非黑盒端到端</a:t>
             </a:r>
           </a:p>
           <a:p>
@@ -3829,18 +3812,102 @@
               <a:spcAft>
                 <a:spcPts val="600"/>
               </a:spcAft>
-              <a:defRPr sz="1300">
+              <a:defRPr sz="1200">
                 <a:solidFill>
                   <a:srgbClr val="1E1E1E"/>
                 </a:solidFill>
               </a:defRPr>
             </a:pPr>
             <a:r>
-              <a:t>EmergencyNotifier：家属 App / 短信 / 本地告警（可审计日志）</a:t>
-            </a:r>
-          </a:p>
-        </p:txBody>
-      </p:sp>
+              <a:t>阈值可配置，支持场景调参</a:t>
+            </a:r>
+          </a:p>
+          <a:p>
+            <a:pPr>
+              <a:spcAft>
+                <a:spcPts val="600"/>
+              </a:spcAft>
+              <a:defRPr sz="1200">
+                <a:solidFill>
+                  <a:srgbClr val="1E1E1E"/>
+                </a:solidFill>
+              </a:defRPr>
+            </a:pPr>
+            <a:r>
+              <a:t>契合医疗与养老合规沟通需求</a:t>
+            </a:r>
+          </a:p>
+        </p:txBody>
+      </p:sp>
+      <p:sp>
+        <p:nvSpPr>
+          <p:cNvPr id="6" name="Rectangle 5"/>
+          <p:cNvSpPr/>
+          <p:nvPr/>
+        </p:nvSpPr>
+        <p:spPr>
+          <a:xfrm>
+            <a:off x="4370832" y="896112"/>
+            <a:ext cx="4398264" cy="4096512"/>
+          </a:xfrm>
+          <a:prstGeom prst="rect">
+            <a:avLst/>
+          </a:prstGeom>
+          <a:solidFill>
+            <a:srgbClr val="EBF2FA"/>
+          </a:solidFill>
+          <a:ln>
+            <a:solidFill>
+              <a:srgbClr val="B4C3DC"/>
+            </a:solidFill>
+          </a:ln>
+        </p:spPr>
+        <p:style>
+          <a:lnRef idx="1">
+            <a:schemeClr val="accent1"/>
+          </a:lnRef>
+          <a:fillRef idx="3">
+            <a:schemeClr val="accent1"/>
+          </a:fillRef>
+          <a:effectRef idx="2">
+            <a:schemeClr val="accent1"/>
+          </a:effectRef>
+          <a:fontRef idx="minor">
+            <a:schemeClr val="lt1"/>
+          </a:fontRef>
+        </p:style>
+        <p:txBody>
+          <a:bodyPr rtlCol="0" anchor="ctr"/>
+          <a:lstStyle/>
+          <a:p>
+            <a:pPr algn="ctr"/>
+          </a:p>
+        </p:txBody>
+      </p:sp>
+      <p:pic>
+        <p:nvPicPr>
+          <p:cNvPr id="7" name="Picture 6" descr="risk_formula.png"/>
+          <p:cNvPicPr>
+            <a:picLocks noChangeAspect="1"/>
+          </p:cNvPicPr>
+          <p:nvPr/>
+        </p:nvPicPr>
+        <p:blipFill>
+          <a:blip r:embed="rId2"/>
+          <a:stretch>
+            <a:fillRect/>
+          </a:stretch>
+        </p:blipFill>
+        <p:spPr>
+          <a:xfrm>
+            <a:off x="4407408" y="932688"/>
+            <a:ext cx="4325112" cy="2673499"/>
+          </a:xfrm>
+          <a:prstGeom prst="rect">
+            <a:avLst/>
+          </a:prstGeom>
+        </p:spPr>
+      </p:pic>
     </p:spTree>
   </p:cSld>
   <p:clrMapOvr>
@@ -3959,14 +4026,132 @@
       </p:sp>
       <p:sp>
         <p:nvSpPr>
-          <p:cNvPr id="4" name="Rectangle 3"/>
+          <p:cNvPr id="4" name="TextBox 3"/>
+          <p:cNvSpPr txBox="1"/>
+          <p:nvPr/>
+        </p:nvSpPr>
+        <p:spPr>
+          <a:xfrm>
+            <a:off x="502920" y="548640"/>
+            <a:ext cx="8138160" cy="731520"/>
+          </a:xfrm>
+          <a:prstGeom prst="rect">
+            <a:avLst/>
+          </a:prstGeom>
+          <a:noFill/>
+        </p:spPr>
+        <p:txBody>
+          <a:bodyPr wrap="square">
+            <a:spAutoFit/>
+          </a:bodyPr>
+          <a:lstStyle/>
+          <a:p>
+            <a:pPr algn="l">
+              <a:defRPr sz="2200" b="1">
+                <a:solidFill>
+                  <a:srgbClr val="1E1E1E"/>
+                </a:solidFill>
+              </a:defRPr>
+            </a:pPr>
+            <a:r>
+              <a:t>跌倒检测算法设计</a:t>
+            </a:r>
+          </a:p>
+        </p:txBody>
+      </p:sp>
+      <p:sp>
+        <p:nvSpPr>
+          <p:cNvPr id="5" name="TextBox 4"/>
+          <p:cNvSpPr txBox="1"/>
+          <p:nvPr/>
+        </p:nvSpPr>
+        <p:spPr>
+          <a:xfrm>
+            <a:off x="502920" y="960120"/>
+            <a:ext cx="3886200" cy="3840480"/>
+          </a:xfrm>
+          <a:prstGeom prst="rect">
+            <a:avLst/>
+          </a:prstGeom>
+          <a:noFill/>
+        </p:spPr>
+        <p:txBody>
+          <a:bodyPr wrap="square">
+            <a:spAutoFit/>
+          </a:bodyPr>
+          <a:lstStyle/>
+          <a:p>
+            <a:pPr>
+              <a:spcAft>
+                <a:spcPts val="600"/>
+              </a:spcAft>
+              <a:defRPr sz="1200">
+                <a:solidFill>
+                  <a:srgbClr val="1E1E1E"/>
+                </a:solidFill>
+              </a:defRPr>
+            </a:pPr>
+            <a:r>
+              <a:t>输入：MediaPipe 骨架几何特征</a:t>
+            </a:r>
+          </a:p>
+          <a:p>
+            <a:pPr>
+              <a:spcAft>
+                <a:spcPts val="600"/>
+              </a:spcAft>
+              <a:defRPr sz="1200">
+                <a:solidFill>
+                  <a:srgbClr val="1E1E1E"/>
+                </a:solidFill>
+              </a:defRPr>
+            </a:pPr>
+            <a:r>
+              <a:t>快速跌倒 + 慢速躺倒（养老常见）双规则</a:t>
+            </a:r>
+          </a:p>
+          <a:p>
+            <a:pPr>
+              <a:spcAft>
+                <a:spcPts val="600"/>
+              </a:spcAft>
+              <a:defRPr sz="1200">
+                <a:solidFill>
+                  <a:srgbClr val="1E1E1E"/>
+                </a:solidFill>
+              </a:defRPr>
+            </a:pPr>
+            <a:r>
+              <a:t>合成 6 场景评测 F1=100%</a:t>
+            </a:r>
+          </a:p>
+          <a:p>
+            <a:pPr>
+              <a:spcAft>
+                <a:spcPts val="600"/>
+              </a:spcAft>
+              <a:defRPr sz="1200">
+                <a:solidFill>
+                  <a:srgbClr val="1E1E1E"/>
+                </a:solidFill>
+              </a:defRPr>
+            </a:pPr>
+            <a:r>
+              <a:t>可接摄像头或上传照片分析</a:t>
+            </a:r>
+          </a:p>
+        </p:txBody>
+      </p:sp>
+      <p:sp>
+        <p:nvSpPr>
+          <p:cNvPr id="6" name="Rectangle 5"/>
           <p:cNvSpPr/>
           <p:nvPr/>
         </p:nvSpPr>
         <p:spPr>
           <a:xfrm>
-            <a:off x="2375151" y="914400"/>
-            <a:ext cx="4393697" cy="3753611"/>
+            <a:off x="4370832" y="896112"/>
+            <a:ext cx="4398264" cy="4096512"/>
           </a:xfrm>
           <a:prstGeom prst="rect">
             <a:avLst/>
@@ -3974,7 +4159,7 @@
           <a:solidFill>
             <a:srgbClr val="EBF2FA"/>
           </a:solidFill>
-          <a:ln w="9525">
+          <a:ln>
             <a:solidFill>
               <a:srgbClr val="B4C3DC"/>
             </a:solidFill>
@@ -4004,7 +4189,7 @@
       </p:sp>
       <p:pic>
         <p:nvPicPr>
-          <p:cNvPr id="5" name="Picture 4" descr="ppt_emotion_input.png"/>
+          <p:cNvPr id="7" name="Picture 6" descr="fall_flow.png"/>
           <p:cNvPicPr>
             <a:picLocks noChangeAspect="1"/>
           </p:cNvPicPr>
@@ -4018,84 +4203,14 @@
         </p:blipFill>
         <p:spPr>
           <a:xfrm>
-            <a:off x="2430015" y="969264"/>
-            <a:ext cx="4283969" cy="3643884"/>
+            <a:off x="4407408" y="932688"/>
+            <a:ext cx="4325112" cy="2907289"/>
           </a:xfrm>
           <a:prstGeom prst="rect">
             <a:avLst/>
           </a:prstGeom>
         </p:spPr>
       </p:pic>
-      <p:sp>
-        <p:nvSpPr>
-          <p:cNvPr id="6" name="TextBox 5"/>
-          <p:cNvSpPr txBox="1"/>
-          <p:nvPr/>
-        </p:nvSpPr>
-        <p:spPr>
-          <a:xfrm>
-            <a:off x="411480" y="4638751"/>
-            <a:ext cx="8321040" cy="347472"/>
-          </a:xfrm>
-          <a:prstGeom prst="rect">
-            <a:avLst/>
-          </a:prstGeom>
-          <a:noFill/>
-        </p:spPr>
-        <p:txBody>
-          <a:bodyPr wrap="square" anchor="ctr">
-            <a:spAutoFit/>
-          </a:bodyPr>
-          <a:lstStyle/>
-          <a:p>
-            <a:pPr algn="ctr">
-              <a:defRPr sz="900">
-                <a:solidFill>
-                  <a:srgbClr val="505050"/>
-                </a:solidFill>
-              </a:defRPr>
-            </a:pPr>
-            <a:r>
-              <a:t>老人输入「最近有点孤独，睡不太好」→ 系统识别情绪低落并生成安抚话术</a:t>
-            </a:r>
-          </a:p>
-        </p:txBody>
-      </p:sp>
-      <p:sp>
-        <p:nvSpPr>
-          <p:cNvPr id="7" name="TextBox 6"/>
-          <p:cNvSpPr txBox="1"/>
-          <p:nvPr/>
-        </p:nvSpPr>
-        <p:spPr>
-          <a:xfrm>
-            <a:off x="411480" y="530352"/>
-            <a:ext cx="8321040" cy="384048"/>
-          </a:xfrm>
-          <a:prstGeom prst="rect">
-            <a:avLst/>
-          </a:prstGeom>
-          <a:noFill/>
-        </p:spPr>
-        <p:txBody>
-          <a:bodyPr wrap="square">
-            <a:spAutoFit/>
-          </a:bodyPr>
-          <a:lstStyle/>
-          <a:p>
-            <a:pPr algn="ctr">
-              <a:defRPr sz="1900" b="1">
-                <a:solidFill>
-                  <a:srgbClr val="1E1E1E"/>
-                </a:solidFill>
-              </a:defRPr>
-            </a:pPr>
-            <a:r>
-              <a:t>（界面）情感倾诉交互</a:t>
-            </a:r>
-          </a:p>
-        </p:txBody>
-      </p:sp>
     </p:spTree>
   </p:cSld>
   <p:clrMapOvr>
@@ -4220,7 +4335,7 @@
         </p:nvSpPr>
         <p:spPr>
           <a:xfrm>
-            <a:off x="502920" y="566928"/>
+            <a:off x="502920" y="548640"/>
             <a:ext cx="8138160" cy="731520"/>
           </a:xfrm>
           <a:prstGeom prst="rect">
@@ -4235,14 +4350,14 @@
           <a:lstStyle/>
           <a:p>
             <a:pPr algn="l">
-              <a:defRPr sz="2400" b="1">
+              <a:defRPr sz="2200" b="1">
                 <a:solidFill>
                   <a:srgbClr val="1E1E1E"/>
                 </a:solidFill>
               </a:defRPr>
             </a:pPr>
             <a:r>
-              <a:t>数据处理与决策流程</a:t>
+              <a:t>对话与情感模块</a:t>
             </a:r>
           </a:p>
         </p:txBody>
@@ -4255,8 +4370,8 @@
         </p:nvSpPr>
         <p:spPr>
           <a:xfrm>
-            <a:off x="502920" y="1325880"/>
-            <a:ext cx="8138160" cy="3840480"/>
+            <a:off x="502920" y="960120"/>
+            <a:ext cx="3886200" cy="3840480"/>
           </a:xfrm>
           <a:prstGeom prst="rect">
             <a:avLst/>
@@ -4273,14 +4388,14 @@
               <a:spcAft>
                 <a:spcPts val="600"/>
               </a:spcAft>
-              <a:defRPr sz="1400">
+              <a:defRPr sz="1200">
                 <a:solidFill>
                   <a:srgbClr val="1E1E1E"/>
                 </a:solidFill>
               </a:defRPr>
             </a:pPr>
             <a:r>
-              <a:t>1. 采集感知帧：摄像头骨架 / 滑块仿真 / 可穿戴 JSON</a:t>
+              <a:t>文本情感词典 + 情绪标签融合</a:t>
             </a:r>
           </a:p>
           <a:p>
@@ -4288,14 +4403,14 @@
               <a:spcAft>
                 <a:spcPts val="600"/>
               </a:spcAft>
-              <a:defRPr sz="1400">
+              <a:defRPr sz="1200">
                 <a:solidFill>
                   <a:srgbClr val="1E1E1E"/>
                 </a:solidFill>
               </a:defRPr>
             </a:pPr>
             <a:r>
-              <a:t>2. FallDetector 更新跌倒分数，Emotion/Health 更新标签</a:t>
+              <a:t>DialogueManager 生成安抚话术</a:t>
             </a:r>
           </a:p>
           <a:p>
@@ -4303,14 +4418,14 @@
               <a:spcAft>
                 <a:spcPts val="600"/>
               </a:spcAft>
-              <a:defRPr sz="1400">
+              <a:defRPr sz="1200">
                 <a:solidFill>
                   <a:srgbClr val="1E1E1E"/>
                 </a:solidFill>
               </a:defRPr>
             </a:pPr>
             <a:r>
-              <a:t>3. RiskEngine 评估等级，状态机切换</a:t>
+              <a:t>默认 Mock，可切换 LLM API</a:t>
             </a:r>
           </a:p>
           <a:p>
@@ -4318,33 +4433,87 @@
               <a:spcAft>
                 <a:spcPts val="600"/>
               </a:spcAft>
-              <a:defRPr sz="1400">
+              <a:defRPr sz="1200">
                 <a:solidFill>
                   <a:srgbClr val="1E1E1E"/>
                 </a:solidFill>
               </a:defRPr>
             </a:pPr>
             <a:r>
-              <a:t>4. DialogueManager 生成回复，CarePlanner 输出 RobotAction 序列</a:t>
-            </a:r>
-          </a:p>
-          <a:p>
-            <a:pPr>
-              <a:spcAft>
-                <a:spcPts val="600"/>
-              </a:spcAft>
-              <a:defRPr sz="1400">
-                <a:solidFill>
-                  <a:srgbClr val="1E1E1E"/>
-                </a:solidFill>
-              </a:defRPr>
-            </a:pPr>
-            <a:r>
-              <a:t>5. RobotAdapter 下发至仿真日志或 ROS2 /care/robot_cmd</a:t>
-            </a:r>
-          </a:p>
-        </p:txBody>
-      </p:sp>
+              <a:t>与 RiskEngine、CarePlanner 协同</a:t>
+            </a:r>
+          </a:p>
+        </p:txBody>
+      </p:sp>
+      <p:sp>
+        <p:nvSpPr>
+          <p:cNvPr id="6" name="Rectangle 5"/>
+          <p:cNvSpPr/>
+          <p:nvPr/>
+        </p:nvSpPr>
+        <p:spPr>
+          <a:xfrm>
+            <a:off x="4370832" y="896112"/>
+            <a:ext cx="4398264" cy="4096512"/>
+          </a:xfrm>
+          <a:prstGeom prst="rect">
+            <a:avLst/>
+          </a:prstGeom>
+          <a:solidFill>
+            <a:srgbClr val="EBF2FA"/>
+          </a:solidFill>
+          <a:ln>
+            <a:solidFill>
+              <a:srgbClr val="B4C3DC"/>
+            </a:solidFill>
+          </a:ln>
+        </p:spPr>
+        <p:style>
+          <a:lnRef idx="1">
+            <a:schemeClr val="accent1"/>
+          </a:lnRef>
+          <a:fillRef idx="3">
+            <a:schemeClr val="accent1"/>
+          </a:fillRef>
+          <a:effectRef idx="2">
+            <a:schemeClr val="accent1"/>
+          </a:effectRef>
+          <a:fontRef idx="minor">
+            <a:schemeClr val="lt1"/>
+          </a:fontRef>
+        </p:style>
+        <p:txBody>
+          <a:bodyPr rtlCol="0" anchor="ctr"/>
+          <a:lstStyle/>
+          <a:p>
+            <a:pPr algn="ctr"/>
+          </a:p>
+        </p:txBody>
+      </p:sp>
+      <p:pic>
+        <p:nvPicPr>
+          <p:cNvPr id="7" name="Picture 6" descr="llm_module.png"/>
+          <p:cNvPicPr>
+            <a:picLocks noChangeAspect="1"/>
+          </p:cNvPicPr>
+          <p:nvPr/>
+        </p:nvPicPr>
+        <p:blipFill>
+          <a:blip r:embed="rId2"/>
+          <a:stretch>
+            <a:fillRect/>
+          </a:stretch>
+        </p:blipFill>
+        <p:spPr>
+          <a:xfrm>
+            <a:off x="4407408" y="932688"/>
+            <a:ext cx="4325112" cy="2443480"/>
+          </a:xfrm>
+          <a:prstGeom prst="rect">
+            <a:avLst/>
+          </a:prstGeom>
+        </p:spPr>
+      </p:pic>
     </p:spTree>
   </p:cSld>
   <p:clrMapOvr>
@@ -4469,7 +4638,7 @@
         </p:nvSpPr>
         <p:spPr>
           <a:xfrm>
-            <a:off x="502920" y="2068830"/>
+            <a:off x="502920" y="548640"/>
             <a:ext cx="8138160" cy="731520"/>
           </a:xfrm>
           <a:prstGeom prst="rect">
@@ -4483,15 +4652,15 @@
           </a:bodyPr>
           <a:lstStyle/>
           <a:p>
-            <a:pPr algn="ctr">
-              <a:defRPr sz="3000" b="1">
+            <a:pPr algn="l">
+              <a:defRPr sz="2200" b="1">
                 <a:solidFill>
                   <a:srgbClr val="1E1E1E"/>
                 </a:solidFill>
               </a:defRPr>
             </a:pPr>
             <a:r>
-              <a:t>第三部分</a:t>
+              <a:t>数据处理与决策流水线</a:t>
             </a:r>
           </a:p>
         </p:txBody>
@@ -4504,8 +4673,8 @@
         </p:nvSpPr>
         <p:spPr>
           <a:xfrm>
-            <a:off x="502920" y="2617470"/>
-            <a:ext cx="8138160" cy="731520"/>
+            <a:off x="502920" y="960120"/>
+            <a:ext cx="3886200" cy="3840480"/>
           </a:xfrm>
           <a:prstGeom prst="rect">
             <a:avLst/>
@@ -4518,19 +4687,136 @@
           </a:bodyPr>
           <a:lstStyle/>
           <a:p>
-            <a:pPr algn="ctr">
-              <a:defRPr sz="2000" b="1">
-                <a:solidFill>
-                  <a:srgbClr val="143278"/>
-                </a:solidFill>
-              </a:defRPr>
-            </a:pPr>
-            <a:r>
-              <a:t>系统实现 · 评测 · 演示</a:t>
-            </a:r>
-          </a:p>
-        </p:txBody>
-      </p:sp>
+            <a:pPr>
+              <a:spcAft>
+                <a:spcPts val="600"/>
+              </a:spcAft>
+              <a:defRPr sz="1200">
+                <a:solidFill>
+                  <a:srgbClr val="1E1E1E"/>
+                </a:solidFill>
+              </a:defRPr>
+            </a:pPr>
+            <a:r>
+              <a:t>感知帧 → 特征 → 融合 → 状态机</a:t>
+            </a:r>
+          </a:p>
+          <a:p>
+            <a:pPr>
+              <a:spcAft>
+                <a:spcPts val="600"/>
+              </a:spcAft>
+              <a:defRPr sz="1200">
+                <a:solidFill>
+                  <a:srgbClr val="1E1E1E"/>
+                </a:solidFill>
+              </a:defRPr>
+            </a:pPr>
+            <a:r>
+              <a:t>CarePlanner 生成 RobotAction</a:t>
+            </a:r>
+          </a:p>
+          <a:p>
+            <a:pPr>
+              <a:spcAft>
+                <a:spcPts val="600"/>
+              </a:spcAft>
+              <a:defRPr sz="1200">
+                <a:solidFill>
+                  <a:srgbClr val="1E1E1E"/>
+                </a:solidFill>
+              </a:defRPr>
+            </a:pPr>
+            <a:r>
+              <a:t>RobotAdapter 下发仿真或 ROS2</a:t>
+            </a:r>
+          </a:p>
+          <a:p>
+            <a:pPr>
+              <a:spcAft>
+                <a:spcPts val="600"/>
+              </a:spcAft>
+              <a:defRPr sz="1200">
+                <a:solidFill>
+                  <a:srgbClr val="1E1E1E"/>
+                </a:solidFill>
+              </a:defRPr>
+            </a:pPr>
+            <a:r>
+              <a:t>全链路可在 Web 界面观察</a:t>
+            </a:r>
+          </a:p>
+        </p:txBody>
+      </p:sp>
+      <p:sp>
+        <p:nvSpPr>
+          <p:cNvPr id="6" name="Rectangle 5"/>
+          <p:cNvSpPr/>
+          <p:nvPr/>
+        </p:nvSpPr>
+        <p:spPr>
+          <a:xfrm>
+            <a:off x="4370832" y="896112"/>
+            <a:ext cx="4398264" cy="4096512"/>
+          </a:xfrm>
+          <a:prstGeom prst="rect">
+            <a:avLst/>
+          </a:prstGeom>
+          <a:solidFill>
+            <a:srgbClr val="EBF2FA"/>
+          </a:solidFill>
+          <a:ln>
+            <a:solidFill>
+              <a:srgbClr val="B4C3DC"/>
+            </a:solidFill>
+          </a:ln>
+        </p:spPr>
+        <p:style>
+          <a:lnRef idx="1">
+            <a:schemeClr val="accent1"/>
+          </a:lnRef>
+          <a:fillRef idx="3">
+            <a:schemeClr val="accent1"/>
+          </a:fillRef>
+          <a:effectRef idx="2">
+            <a:schemeClr val="accent1"/>
+          </a:effectRef>
+          <a:fontRef idx="minor">
+            <a:schemeClr val="lt1"/>
+          </a:fontRef>
+        </p:style>
+        <p:txBody>
+          <a:bodyPr rtlCol="0" anchor="ctr"/>
+          <a:lstStyle/>
+          <a:p>
+            <a:pPr algn="ctr"/>
+          </a:p>
+        </p:txBody>
+      </p:sp>
+      <p:pic>
+        <p:nvPicPr>
+          <p:cNvPr id="7" name="Picture 6" descr="pipeline.png"/>
+          <p:cNvPicPr>
+            <a:picLocks noChangeAspect="1"/>
+          </p:cNvPicPr>
+          <p:nvPr/>
+        </p:nvPicPr>
+        <p:blipFill>
+          <a:blip r:embed="rId2"/>
+          <a:stretch>
+            <a:fillRect/>
+          </a:stretch>
+        </p:blipFill>
+        <p:spPr>
+          <a:xfrm>
+            <a:off x="4407408" y="932688"/>
+            <a:ext cx="4325112" cy="1781728"/>
+          </a:xfrm>
+          <a:prstGeom prst="rect">
+            <a:avLst/>
+          </a:prstGeom>
+        </p:spPr>
+      </p:pic>
     </p:spTree>
   </p:cSld>
   <p:clrMapOvr>
@@ -4655,7 +4941,7 @@
         </p:nvSpPr>
         <p:spPr>
           <a:xfrm>
-            <a:off x="502920" y="566928"/>
+            <a:off x="502920" y="548640"/>
             <a:ext cx="8138160" cy="731520"/>
           </a:xfrm>
           <a:prstGeom prst="rect">
@@ -4670,14 +4956,14 @@
           <a:lstStyle/>
           <a:p>
             <a:pPr algn="l">
-              <a:defRPr sz="2400" b="1">
+              <a:defRPr sz="2200" b="1">
                 <a:solidFill>
                   <a:srgbClr val="1E1E1E"/>
                 </a:solidFill>
               </a:defRPr>
             </a:pPr>
             <a:r>
-              <a:t>Web 控制台（CareCompanion）</a:t>
+              <a:t>紧急响应链路（理论）</a:t>
             </a:r>
           </a:p>
         </p:txBody>
@@ -4690,8 +4976,8 @@
         </p:nvSpPr>
         <p:spPr>
           <a:xfrm>
-            <a:off x="502920" y="1234440"/>
-            <a:ext cx="8138160" cy="3840480"/>
+            <a:off x="502920" y="960120"/>
+            <a:ext cx="3886200" cy="3840480"/>
           </a:xfrm>
           <a:prstGeom prst="rect">
             <a:avLst/>
@@ -4708,14 +4994,14 @@
               <a:spcAft>
                 <a:spcPts val="600"/>
               </a:spcAft>
-              <a:defRPr sz="1300">
+              <a:defRPr sz="1200">
                 <a:solidFill>
                   <a:srgbClr val="1E1E1E"/>
                 </a:solidFill>
               </a:defRPr>
             </a:pPr>
             <a:r>
-              <a:t>访问地址：http://localhost:8765（bash scripts/run_web.sh）</a:t>
+              <a:t>确认跌倒后按序触发四类动作</a:t>
             </a:r>
           </a:p>
           <a:p>
@@ -4723,14 +5009,14 @@
               <a:spcAft>
                 <a:spcPts val="600"/>
               </a:spcAft>
-              <a:defRPr sz="1300">
+              <a:defRPr sz="1200">
                 <a:solidFill>
                   <a:srgbClr val="1E1E1E"/>
                 </a:solidFill>
               </a:defRPr>
             </a:pPr>
             <a:r>
-              <a:t>技术栈：FastAPI + 浏览器前端，支持答辩现场演示</a:t>
+              <a:t>告警音 → 语音 → 家属通知 → 手势</a:t>
             </a:r>
           </a:p>
           <a:p>
@@ -4738,18 +5024,102 @@
               <a:spcAft>
                 <a:spcPts val="600"/>
               </a:spcAft>
-              <a:defRPr sz="1300">
+              <a:defRPr sz="1200">
                 <a:solidFill>
                   <a:srgbClr val="1E1E1E"/>
                 </a:solidFill>
               </a:defRPr>
             </a:pPr>
             <a:r>
-              <a:t>以下截图为实际运行界面（2026-05-27 答辩预演录制）</a:t>
-            </a:r>
-          </a:p>
-        </p:txBody>
-      </p:sp>
+              <a:t>EmergencyNotifier 记录推送渠道</a:t>
+            </a:r>
+          </a:p>
+          <a:p>
+            <a:pPr>
+              <a:spcAft>
+                <a:spcPts val="600"/>
+              </a:spcAft>
+              <a:defRPr sz="1200">
+                <a:solidFill>
+                  <a:srgbClr val="1E1E1E"/>
+                </a:solidFill>
+              </a:defRPr>
+            </a:pPr>
+            <a:r>
+              <a:t>端到端触发率评测 100%</a:t>
+            </a:r>
+          </a:p>
+        </p:txBody>
+      </p:sp>
+      <p:sp>
+        <p:nvSpPr>
+          <p:cNvPr id="6" name="Rectangle 5"/>
+          <p:cNvSpPr/>
+          <p:nvPr/>
+        </p:nvSpPr>
+        <p:spPr>
+          <a:xfrm>
+            <a:off x="4370832" y="896112"/>
+            <a:ext cx="4398264" cy="4096512"/>
+          </a:xfrm>
+          <a:prstGeom prst="rect">
+            <a:avLst/>
+          </a:prstGeom>
+          <a:solidFill>
+            <a:srgbClr val="EBF2FA"/>
+          </a:solidFill>
+          <a:ln>
+            <a:solidFill>
+              <a:srgbClr val="B4C3DC"/>
+            </a:solidFill>
+          </a:ln>
+        </p:spPr>
+        <p:style>
+          <a:lnRef idx="1">
+            <a:schemeClr val="accent1"/>
+          </a:lnRef>
+          <a:fillRef idx="3">
+            <a:schemeClr val="accent1"/>
+          </a:fillRef>
+          <a:effectRef idx="2">
+            <a:schemeClr val="accent1"/>
+          </a:effectRef>
+          <a:fontRef idx="minor">
+            <a:schemeClr val="lt1"/>
+          </a:fontRef>
+        </p:style>
+        <p:txBody>
+          <a:bodyPr rtlCol="0" anchor="ctr"/>
+          <a:lstStyle/>
+          <a:p>
+            <a:pPr algn="ctr"/>
+          </a:p>
+        </p:txBody>
+      </p:sp>
+      <p:pic>
+        <p:nvPicPr>
+          <p:cNvPr id="7" name="Picture 6" descr="emergency_flow.png"/>
+          <p:cNvPicPr>
+            <a:picLocks noChangeAspect="1"/>
+          </p:cNvPicPr>
+          <p:nvPr/>
+        </p:nvPicPr>
+        <p:blipFill>
+          <a:blip r:embed="rId2"/>
+          <a:stretch>
+            <a:fillRect/>
+          </a:stretch>
+        </p:blipFill>
+        <p:spPr>
+          <a:xfrm>
+            <a:off x="4407408" y="932688"/>
+            <a:ext cx="4325112" cy="1574313"/>
+          </a:xfrm>
+          <a:prstGeom prst="rect">
+            <a:avLst/>
+          </a:prstGeom>
+        </p:spPr>
+      </p:pic>
     </p:spTree>
   </p:cSld>
   <p:clrMapOvr>
@@ -4866,54 +5236,9 @@
           </a:p>
         </p:txBody>
       </p:sp>
-      <p:sp>
-        <p:nvSpPr>
-          <p:cNvPr id="4" name="Rectangle 3"/>
-          <p:cNvSpPr/>
-          <p:nvPr/>
-        </p:nvSpPr>
-        <p:spPr>
-          <a:xfrm>
-            <a:off x="3300989" y="914400"/>
-            <a:ext cx="2542020" cy="3753611"/>
-          </a:xfrm>
-          <a:prstGeom prst="rect">
-            <a:avLst/>
-          </a:prstGeom>
-          <a:solidFill>
-            <a:srgbClr val="EBF2FA"/>
-          </a:solidFill>
-          <a:ln w="9525">
-            <a:solidFill>
-              <a:srgbClr val="B4C3DC"/>
-            </a:solidFill>
-          </a:ln>
-        </p:spPr>
-        <p:style>
-          <a:lnRef idx="1">
-            <a:schemeClr val="accent1"/>
-          </a:lnRef>
-          <a:fillRef idx="3">
-            <a:schemeClr val="accent1"/>
-          </a:fillRef>
-          <a:effectRef idx="2">
-            <a:schemeClr val="accent1"/>
-          </a:effectRef>
-          <a:fontRef idx="minor">
-            <a:schemeClr val="lt1"/>
-          </a:fontRef>
-        </p:style>
-        <p:txBody>
-          <a:bodyPr rtlCol="0" anchor="ctr"/>
-          <a:lstStyle/>
-          <a:p>
-            <a:pPr algn="ctr"/>
-          </a:p>
-        </p:txBody>
-      </p:sp>
       <p:pic>
         <p:nvPicPr>
-          <p:cNvPr id="5" name="Picture 4" descr="ppt_mediapipe_pose.png"/>
+          <p:cNvPr id="4" name="Picture 3" descr="cover_banner.png"/>
           <p:cNvPicPr>
             <a:picLocks noChangeAspect="1"/>
           </p:cNvPicPr>
@@ -4927,14 +5252,57 @@
         </p:blipFill>
         <p:spPr>
           <a:xfrm>
-            <a:off x="3355853" y="969264"/>
-            <a:ext cx="2432292" cy="3643883"/>
+            <a:off x="0" y="475488"/>
+            <a:ext cx="9144000" cy="4668012"/>
           </a:xfrm>
           <a:prstGeom prst="rect">
             <a:avLst/>
           </a:prstGeom>
         </p:spPr>
       </p:pic>
+      <p:sp>
+        <p:nvSpPr>
+          <p:cNvPr id="5" name="Rectangle 4"/>
+          <p:cNvSpPr/>
+          <p:nvPr/>
+        </p:nvSpPr>
+        <p:spPr>
+          <a:xfrm>
+            <a:off x="0" y="475488"/>
+            <a:ext cx="9144000" cy="4668012"/>
+          </a:xfrm>
+          <a:prstGeom prst="rect">
+            <a:avLst/>
+          </a:prstGeom>
+          <a:solidFill>
+            <a:srgbClr val="143278"/>
+          </a:solidFill>
+          <a:ln>
+            <a:noFill/>
+          </a:ln>
+        </p:spPr>
+        <p:style>
+          <a:lnRef idx="1">
+            <a:schemeClr val="accent1"/>
+          </a:lnRef>
+          <a:fillRef idx="3">
+            <a:schemeClr val="accent1"/>
+          </a:fillRef>
+          <a:effectRef idx="2">
+            <a:schemeClr val="accent1"/>
+          </a:effectRef>
+          <a:fontRef idx="minor">
+            <a:schemeClr val="lt1"/>
+          </a:fontRef>
+        </p:style>
+        <p:txBody>
+          <a:bodyPr rtlCol="0" anchor="ctr"/>
+          <a:lstStyle/>
+          <a:p>
+            <a:pPr algn="ctr"/>
+          </a:p>
+        </p:txBody>
+      </p:sp>
       <p:sp>
         <p:nvSpPr>
           <p:cNvPr id="6" name="TextBox 5"/>
@@ -4943,43 +5311,8 @@
         </p:nvSpPr>
         <p:spPr>
           <a:xfrm>
-            <a:off x="411480" y="4638751"/>
-            <a:ext cx="8321040" cy="347472"/>
-          </a:xfrm>
-          <a:prstGeom prst="rect">
-            <a:avLst/>
-          </a:prstGeom>
-          <a:noFill/>
-        </p:spPr>
-        <p:txBody>
-          <a:bodyPr wrap="square" anchor="ctr">
-            <a:spAutoFit/>
-          </a:bodyPr>
-          <a:lstStyle/>
-          <a:p>
-            <a:pPr algn="ctr">
-              <a:defRPr sz="900">
-                <a:solidFill>
-                  <a:srgbClr val="505050"/>
-                </a:solidFill>
-              </a:defRPr>
-            </a:pPr>
-            <a:r>
-              <a:t>上传全身照后导出骨架叠加图 · 宽高比 0.48 · 支持答辩现场上传演示</a:t>
-            </a:r>
-          </a:p>
-        </p:txBody>
-      </p:sp>
-      <p:sp>
-        <p:nvSpPr>
-          <p:cNvPr id="7" name="TextBox 6"/>
-          <p:cNvSpPr txBox="1"/>
-          <p:nvPr/>
-        </p:nvSpPr>
-        <p:spPr>
-          <a:xfrm>
-            <a:off x="411480" y="530352"/>
-            <a:ext cx="8321040" cy="384048"/>
+            <a:off x="502920" y="1931669"/>
+            <a:ext cx="8138160" cy="731520"/>
           </a:xfrm>
           <a:prstGeom prst="rect">
             <a:avLst/>
@@ -4993,14 +5326,49 @@
           <a:lstStyle/>
           <a:p>
             <a:pPr algn="ctr">
-              <a:defRPr sz="1900" b="1">
-                <a:solidFill>
-                  <a:srgbClr val="1E1E1E"/>
-                </a:solidFill>
-              </a:defRPr>
-            </a:pPr>
-            <a:r>
-              <a:t>系统界面：MediaPipe 骨架分析（上传照片）</a:t>
+              <a:defRPr sz="3200" b="1">
+                <a:solidFill>
+                  <a:srgbClr val="FFFFFF"/>
+                </a:solidFill>
+              </a:defRPr>
+            </a:pPr>
+            <a:r>
+              <a:t>第三部分</a:t>
+            </a:r>
+          </a:p>
+        </p:txBody>
+      </p:sp>
+      <p:sp>
+        <p:nvSpPr>
+          <p:cNvPr id="7" name="TextBox 6"/>
+          <p:cNvSpPr txBox="1"/>
+          <p:nvPr/>
+        </p:nvSpPr>
+        <p:spPr>
+          <a:xfrm>
+            <a:off x="502920" y="2526030"/>
+            <a:ext cx="8138160" cy="731520"/>
+          </a:xfrm>
+          <a:prstGeom prst="rect">
+            <a:avLst/>
+          </a:prstGeom>
+          <a:noFill/>
+        </p:spPr>
+        <p:txBody>
+          <a:bodyPr wrap="square">
+            <a:spAutoFit/>
+          </a:bodyPr>
+          <a:lstStyle/>
+          <a:p>
+            <a:pPr algn="ctr">
+              <a:defRPr sz="2000" b="1">
+                <a:solidFill>
+                  <a:srgbClr val="DCE6FF"/>
+                </a:solidFill>
+              </a:defRPr>
+            </a:pPr>
+            <a:r>
+              <a:t>系统实现 · 实验验证 · 现场演示</a:t>
             </a:r>
           </a:p>
         </p:txBody>
@@ -5123,14 +5491,132 @@
       </p:sp>
       <p:sp>
         <p:nvSpPr>
-          <p:cNvPr id="4" name="Rectangle 3"/>
+          <p:cNvPr id="4" name="TextBox 3"/>
+          <p:cNvSpPr txBox="1"/>
+          <p:nvPr/>
+        </p:nvSpPr>
+        <p:spPr>
+          <a:xfrm>
+            <a:off x="502920" y="548640"/>
+            <a:ext cx="8138160" cy="731520"/>
+          </a:xfrm>
+          <a:prstGeom prst="rect">
+            <a:avLst/>
+          </a:prstGeom>
+          <a:noFill/>
+        </p:spPr>
+        <p:txBody>
+          <a:bodyPr wrap="square">
+            <a:spAutoFit/>
+          </a:bodyPr>
+          <a:lstStyle/>
+          <a:p>
+            <a:pPr algn="l">
+              <a:defRPr sz="2200" b="1">
+                <a:solidFill>
+                  <a:srgbClr val="1E1E1E"/>
+                </a:solidFill>
+              </a:defRPr>
+            </a:pPr>
+            <a:r>
+              <a:t>Web 控制台实现</a:t>
+            </a:r>
+          </a:p>
+        </p:txBody>
+      </p:sp>
+      <p:sp>
+        <p:nvSpPr>
+          <p:cNvPr id="5" name="TextBox 4"/>
+          <p:cNvSpPr txBox="1"/>
+          <p:nvPr/>
+        </p:nvSpPr>
+        <p:spPr>
+          <a:xfrm>
+            <a:off x="502920" y="960120"/>
+            <a:ext cx="3886200" cy="3840480"/>
+          </a:xfrm>
+          <a:prstGeom prst="rect">
+            <a:avLst/>
+          </a:prstGeom>
+          <a:noFill/>
+        </p:spPr>
+        <p:txBody>
+          <a:bodyPr wrap="square">
+            <a:spAutoFit/>
+          </a:bodyPr>
+          <a:lstStyle/>
+          <a:p>
+            <a:pPr>
+              <a:spcAft>
+                <a:spcPts val="600"/>
+              </a:spcAft>
+              <a:defRPr sz="1200">
+                <a:solidFill>
+                  <a:srgbClr val="1E1E1E"/>
+                </a:solidFill>
+              </a:defRPr>
+            </a:pPr>
+            <a:r>
+              <a:t>FastAPI 后端 + 浏览器前端</a:t>
+            </a:r>
+          </a:p>
+          <a:p>
+            <a:pPr>
+              <a:spcAft>
+                <a:spcPts val="600"/>
+              </a:spcAft>
+              <a:defRPr sz="1200">
+                <a:solidFill>
+                  <a:srgbClr val="1E1E1E"/>
+                </a:solidFill>
+              </a:defRPr>
+            </a:pPr>
+            <a:r>
+              <a:t>实时风险仪表盘、对话与指令流</a:t>
+            </a:r>
+          </a:p>
+          <a:p>
+            <a:pPr>
+              <a:spcAft>
+                <a:spcPts val="600"/>
+              </a:spcAft>
+              <a:defRPr sz="1200">
+                <a:solidFill>
+                  <a:srgbClr val="1E1E1E"/>
+                </a:solidFill>
+              </a:defRPr>
+            </a:pPr>
+            <a:r>
+              <a:t>支持上传照片 / 摄像头骨架分析</a:t>
+            </a:r>
+          </a:p>
+          <a:p>
+            <a:pPr>
+              <a:spcAft>
+                <a:spcPts val="600"/>
+              </a:spcAft>
+              <a:defRPr sz="1200">
+                <a:solidFill>
+                  <a:srgbClr val="1E1E1E"/>
+                </a:solidFill>
+              </a:defRPr>
+            </a:pPr>
+            <a:r>
+              <a:t>一键演示剧本：日常→倾诉→跌倒</a:t>
+            </a:r>
+          </a:p>
+        </p:txBody>
+      </p:sp>
+      <p:sp>
+        <p:nvSpPr>
+          <p:cNvPr id="6" name="Rectangle 5"/>
           <p:cNvSpPr/>
           <p:nvPr/>
         </p:nvSpPr>
         <p:spPr>
           <a:xfrm>
-            <a:off x="1023374" y="914400"/>
-            <a:ext cx="7097250" cy="3753611"/>
+            <a:off x="4370832" y="896112"/>
+            <a:ext cx="4398264" cy="4096512"/>
           </a:xfrm>
           <a:prstGeom prst="rect">
             <a:avLst/>
@@ -5138,7 +5624,7 @@
           <a:solidFill>
             <a:srgbClr val="EBF2FA"/>
           </a:solidFill>
-          <a:ln w="9525">
+          <a:ln>
             <a:solidFill>
               <a:srgbClr val="B4C3DC"/>
             </a:solidFill>
@@ -5168,7 +5654,7 @@
       </p:sp>
       <p:pic>
         <p:nvPicPr>
-          <p:cNvPr id="5" name="Picture 4" descr="ppt_full_dashboard.png"/>
+          <p:cNvPr id="7" name="Picture 6" descr="ppt_full_dashboard.png"/>
           <p:cNvPicPr>
             <a:picLocks noChangeAspect="1"/>
           </p:cNvPicPr>
@@ -5182,84 +5668,14 @@
         </p:blipFill>
         <p:spPr>
           <a:xfrm>
-            <a:off x="1078238" y="969264"/>
-            <a:ext cx="6987522" cy="3643884"/>
+            <a:off x="4407408" y="932688"/>
+            <a:ext cx="4325112" cy="2255478"/>
           </a:xfrm>
           <a:prstGeom prst="rect">
             <a:avLst/>
           </a:prstGeom>
         </p:spPr>
       </p:pic>
-      <p:sp>
-        <p:nvSpPr>
-          <p:cNvPr id="6" name="TextBox 5"/>
-          <p:cNvSpPr txBox="1"/>
-          <p:nvPr/>
-        </p:nvSpPr>
-        <p:spPr>
-          <a:xfrm>
-            <a:off x="411480" y="4638751"/>
-            <a:ext cx="8321040" cy="347472"/>
-          </a:xfrm>
-          <a:prstGeom prst="rect">
-            <a:avLst/>
-          </a:prstGeom>
-          <a:noFill/>
-        </p:spPr>
-        <p:txBody>
-          <a:bodyPr wrap="square" anchor="ctr">
-            <a:spAutoFit/>
-          </a:bodyPr>
-          <a:lstStyle/>
-          <a:p>
-            <a:pPr algn="ctr">
-              <a:defRPr sz="900">
-                <a:solidFill>
-                  <a:srgbClr val="505050"/>
-                </a:solidFill>
-              </a:defRPr>
-            </a:pPr>
-            <a:r>
-              <a:t>演示场景「老人倾诉」· 风险 0.23 · 机器人主动安抚回复</a:t>
-            </a:r>
-          </a:p>
-        </p:txBody>
-      </p:sp>
-      <p:sp>
-        <p:nvSpPr>
-          <p:cNvPr id="7" name="TextBox 6"/>
-          <p:cNvSpPr txBox="1"/>
-          <p:nvPr/>
-        </p:nvSpPr>
-        <p:spPr>
-          <a:xfrm>
-            <a:off x="411480" y="530352"/>
-            <a:ext cx="8321040" cy="384048"/>
-          </a:xfrm>
-          <a:prstGeom prst="rect">
-            <a:avLst/>
-          </a:prstGeom>
-          <a:noFill/>
-        </p:spPr>
-        <p:txBody>
-          <a:bodyPr wrap="square">
-            <a:spAutoFit/>
-          </a:bodyPr>
-          <a:lstStyle/>
-          <a:p>
-            <a:pPr algn="ctr">
-              <a:defRPr sz="1900" b="1">
-                <a:solidFill>
-                  <a:srgbClr val="1E1E1E"/>
-                </a:solidFill>
-              </a:defRPr>
-            </a:pPr>
-            <a:r>
-              <a:t>系统界面：老人倾诉场景（演示剧本）</a:t>
-            </a:r>
-          </a:p>
-        </p:txBody>
-      </p:sp>
     </p:spTree>
   </p:cSld>
   <p:clrMapOvr>
@@ -5384,8 +5800,8 @@
         </p:nvSpPr>
         <p:spPr>
           <a:xfrm>
-            <a:off x="2986989" y="914400"/>
-            <a:ext cx="3170021" cy="3753611"/>
+            <a:off x="3300989" y="914400"/>
+            <a:ext cx="2542020" cy="3753611"/>
           </a:xfrm>
           <a:prstGeom prst="rect">
             <a:avLst/>
@@ -5423,7 +5839,7 @@
       </p:sp>
       <p:pic>
         <p:nvPicPr>
-          <p:cNvPr id="5" name="Picture 4" descr="ppt_risk_panel.png"/>
+          <p:cNvPr id="5" name="Picture 4" descr="ppt_mediapipe_pose.png"/>
           <p:cNvPicPr>
             <a:picLocks noChangeAspect="1"/>
           </p:cNvPicPr>
@@ -5437,8 +5853,8 @@
         </p:blipFill>
         <p:spPr>
           <a:xfrm>
-            <a:off x="3041853" y="969264"/>
-            <a:ext cx="3060293" cy="3643884"/>
+            <a:off x="3355853" y="969264"/>
+            <a:ext cx="2432292" cy="3643883"/>
           </a:xfrm>
           <a:prstGeom prst="rect">
             <a:avLst/>
@@ -5475,7 +5891,7 @@
               </a:defRPr>
             </a:pPr>
             <a:r>
-              <a:t>多模态融合输出：风险分数、因素、机器人回应及四项监测指标</a:t>
+              <a:t>上传全身照后导出骨架叠加图 · 宽高比 0.48 · 支持答辩现场上传演示</a:t>
             </a:r>
           </a:p>
         </p:txBody>
@@ -5510,7 +5926,7 @@
               </a:defRPr>
             </a:pPr>
             <a:r>
-              <a:t>系统界面：风险决策仪表盘</a:t>
+              <a:t>系统界面：MediaPipe 骨架分析（上传照片）</a:t>
             </a:r>
           </a:p>
         </p:txBody>
@@ -5639,8 +6055,8 @@
         </p:nvSpPr>
         <p:spPr>
           <a:xfrm>
-            <a:off x="997006" y="914400"/>
-            <a:ext cx="7149986" cy="3753611"/>
+            <a:off x="1023374" y="914400"/>
+            <a:ext cx="7097250" cy="3753611"/>
           </a:xfrm>
           <a:prstGeom prst="rect">
             <a:avLst/>
@@ -5678,7 +6094,7 @@
       </p:sp>
       <p:pic>
         <p:nvPicPr>
-          <p:cNvPr id="5" name="Picture 4" descr="ppt_header_perception.png"/>
+          <p:cNvPr id="5" name="Picture 4" descr="ppt_full_dashboard.png"/>
           <p:cNvPicPr>
             <a:picLocks noChangeAspect="1"/>
           </p:cNvPicPr>
@@ -5692,8 +6108,8 @@
         </p:blipFill>
         <p:spPr>
           <a:xfrm>
-            <a:off x="1051870" y="969264"/>
-            <a:ext cx="7040258" cy="3643884"/>
+            <a:off x="1078238" y="969264"/>
+            <a:ext cx="6987522" cy="3643884"/>
           </a:xfrm>
           <a:prstGeom prst="rect">
             <a:avLst/>
@@ -5730,7 +6146,7 @@
               </a:defRPr>
             </a:pPr>
             <a:r>
-              <a:t>状态机进入「紧急」· 感知输入与 MediaPipe 视觉模块</a:t>
+              <a:t>演示场景「老人倾诉」· 风险 0.23 · 机器人主动安抚回复</a:t>
             </a:r>
           </a:p>
         </p:txBody>
@@ -5765,7 +6181,7 @@
               </a:defRPr>
             </a:pPr>
             <a:r>
-              <a:t>系统界面：紧急状态监测</a:t>
+              <a:t>系统界面：老人倾诉场景（演示剧本）</a:t>
             </a:r>
           </a:p>
         </p:txBody>
@@ -5894,7 +6310,7 @@
         </p:nvSpPr>
         <p:spPr>
           <a:xfrm>
-            <a:off x="502920" y="566928"/>
+            <a:off x="502920" y="548640"/>
             <a:ext cx="8138160" cy="731520"/>
           </a:xfrm>
           <a:prstGeom prst="rect">
@@ -5909,14 +6325,14 @@
           <a:lstStyle/>
           <a:p>
             <a:pPr algn="l">
-              <a:defRPr sz="2400" b="1">
+              <a:defRPr sz="2200" b="1">
                 <a:solidFill>
                   <a:srgbClr val="1E1E1E"/>
                 </a:solidFill>
               </a:defRPr>
             </a:pPr>
             <a:r>
-              <a:t>参赛信息</a:t>
+              <a:t>目录</a:t>
             </a:r>
           </a:p>
         </p:txBody>
@@ -5929,8 +6345,8 @@
         </p:nvSpPr>
         <p:spPr>
           <a:xfrm>
-            <a:off x="502920" y="1170432"/>
-            <a:ext cx="8138160" cy="3840480"/>
+            <a:off x="502920" y="960120"/>
+            <a:ext cx="3886200" cy="3840480"/>
           </a:xfrm>
           <a:prstGeom prst="rect">
             <a:avLst/>
@@ -5947,14 +6363,14 @@
               <a:spcAft>
                 <a:spcPts val="600"/>
               </a:spcAft>
-              <a:defRPr sz="1300">
+              <a:defRPr sz="1200">
                 <a:solidFill>
                   <a:srgbClr val="1E1E1E"/>
                 </a:solidFill>
               </a:defRPr>
             </a:pPr>
             <a:r>
-              <a:t>赛项：创新赛 · 机器人创新赛道</a:t>
+              <a:t>第一部分  项目背景与需求分析</a:t>
             </a:r>
           </a:p>
           <a:p>
@@ -5962,14 +6378,14 @@
               <a:spcAft>
                 <a:spcPts val="600"/>
               </a:spcAft>
-              <a:defRPr sz="1300">
+              <a:defRPr sz="1200">
                 <a:solidFill>
                   <a:srgbClr val="1E1E1E"/>
                 </a:solidFill>
               </a:defRPr>
             </a:pPr>
             <a:r>
-              <a:t>团队名称：从容应队</a:t>
+              <a:t>第二部分  关键技术与理论模型</a:t>
             </a:r>
           </a:p>
           <a:p>
@@ -5977,14 +6393,14 @@
               <a:spcAft>
                 <a:spcPts val="600"/>
               </a:spcAft>
-              <a:defRPr sz="1300">
+              <a:defRPr sz="1200">
                 <a:solidFill>
                   <a:srgbClr val="1E1E1E"/>
                 </a:solidFill>
               </a:defRPr>
             </a:pPr>
             <a:r>
-              <a:t>学校：中山大学（广东）</a:t>
+              <a:t>第三部分  系统实现与实验验证</a:t>
             </a:r>
           </a:p>
           <a:p>
@@ -5992,14 +6408,14 @@
               <a:spcAft>
                 <a:spcPts val="600"/>
               </a:spcAft>
-              <a:defRPr sz="1300">
+              <a:defRPr sz="1200">
                 <a:solidFill>
                   <a:srgbClr val="1E1E1E"/>
                 </a:solidFill>
               </a:defRPr>
             </a:pPr>
             <a:r>
-              <a:t>作品名称：基于大语言模型的智能养老陪伴机器人仿真平台</a:t>
+              <a:t>第四部分  创新点与展望</a:t>
             </a:r>
           </a:p>
           <a:p>
@@ -6007,78 +6423,87 @@
               <a:spcAft>
                 <a:spcPts val="600"/>
               </a:spcAft>
-              <a:defRPr sz="1300">
+              <a:defRPr sz="1200">
                 <a:solidFill>
                   <a:srgbClr val="1E1E1E"/>
                 </a:solidFill>
               </a:defRPr>
             </a:pPr>
             <a:r>
-              <a:t>团队编号：CRAIC2026-TEAM-8FJQKLMI</a:t>
-            </a:r>
-          </a:p>
-          <a:p>
-            <a:pPr>
-              <a:spcAft>
-                <a:spcPts val="600"/>
-              </a:spcAft>
-              <a:defRPr sz="1300">
-                <a:solidFill>
-                  <a:srgbClr val="1E1E1E"/>
-                </a:solidFill>
-              </a:defRPr>
-            </a:pPr>
-            <a:r>
-              <a:t>作品编号：CRAIC20264ZEFT1DF</a:t>
-            </a:r>
-          </a:p>
-          <a:p>
-            <a:pPr>
-              <a:spcAft>
-                <a:spcPts val="600"/>
-              </a:spcAft>
-              <a:defRPr sz="1300">
-                <a:solidFill>
-                  <a:srgbClr val="1E1E1E"/>
-                </a:solidFill>
-              </a:defRPr>
-            </a:pPr>
-            <a:r>
-              <a:t>队员：队长 刘小凡，队员 白冉</a:t>
-            </a:r>
-          </a:p>
-          <a:p>
-            <a:pPr>
-              <a:spcAft>
-                <a:spcPts val="600"/>
-              </a:spcAft>
-              <a:defRPr sz="1300">
-                <a:solidFill>
-                  <a:srgbClr val="1E1E1E"/>
-                </a:solidFill>
-              </a:defRPr>
-            </a:pPr>
-            <a:r>
-              <a:t>指导教师：彭键清（智能科学与技术）</a:t>
-            </a:r>
-          </a:p>
-          <a:p>
-            <a:pPr>
-              <a:spcAft>
-                <a:spcPts val="600"/>
-              </a:spcAft>
-              <a:defRPr sz="1300">
-                <a:solidFill>
-                  <a:srgbClr val="1E1E1E"/>
-                </a:solidFill>
-              </a:defRPr>
-            </a:pPr>
-            <a:r>
-              <a:t>代码仓库：https://github.com/FBB123571/ElderCare-Humanoid-Platform</a:t>
-            </a:r>
-          </a:p>
-        </p:txBody>
-      </p:sp>
+              <a:t>附录  演示界面与开源仓库</a:t>
+            </a:r>
+          </a:p>
+        </p:txBody>
+      </p:sp>
+      <p:sp>
+        <p:nvSpPr>
+          <p:cNvPr id="6" name="Rectangle 5"/>
+          <p:cNvSpPr/>
+          <p:nvPr/>
+        </p:nvSpPr>
+        <p:spPr>
+          <a:xfrm>
+            <a:off x="4370832" y="896112"/>
+            <a:ext cx="4398264" cy="4096512"/>
+          </a:xfrm>
+          <a:prstGeom prst="rect">
+            <a:avLst/>
+          </a:prstGeom>
+          <a:solidFill>
+            <a:srgbClr val="EBF2FA"/>
+          </a:solidFill>
+          <a:ln>
+            <a:solidFill>
+              <a:srgbClr val="B4C3DC"/>
+            </a:solidFill>
+          </a:ln>
+        </p:spPr>
+        <p:style>
+          <a:lnRef idx="1">
+            <a:schemeClr val="accent1"/>
+          </a:lnRef>
+          <a:fillRef idx="3">
+            <a:schemeClr val="accent1"/>
+          </a:fillRef>
+          <a:effectRef idx="2">
+            <a:schemeClr val="accent1"/>
+          </a:effectRef>
+          <a:fontRef idx="minor">
+            <a:schemeClr val="lt1"/>
+          </a:fontRef>
+        </p:style>
+        <p:txBody>
+          <a:bodyPr rtlCol="0" anchor="ctr"/>
+          <a:lstStyle/>
+          <a:p>
+            <a:pPr algn="ctr"/>
+          </a:p>
+        </p:txBody>
+      </p:sp>
+      <p:pic>
+        <p:nvPicPr>
+          <p:cNvPr id="7" name="Picture 6" descr="architecture.png"/>
+          <p:cNvPicPr>
+            <a:picLocks noChangeAspect="1"/>
+          </p:cNvPicPr>
+          <p:nvPr/>
+        </p:nvPicPr>
+        <p:blipFill>
+          <a:blip r:embed="rId2"/>
+          <a:stretch>
+            <a:fillRect/>
+          </a:stretch>
+        </p:blipFill>
+        <p:spPr>
+          <a:xfrm>
+            <a:off x="4407408" y="932688"/>
+            <a:ext cx="4325112" cy="2621589"/>
+          </a:xfrm>
+          <a:prstGeom prst="rect">
+            <a:avLst/>
+          </a:prstGeom>
+        </p:spPr>
+      </p:pic>
     </p:spTree>
   </p:cSld>
   <p:clrMapOvr>
@@ -6203,8 +6628,8 @@
         </p:nvSpPr>
         <p:spPr>
           <a:xfrm>
-            <a:off x="1131167" y="914400"/>
-            <a:ext cx="6881664" cy="3753611"/>
+            <a:off x="2986989" y="914400"/>
+            <a:ext cx="3170021" cy="3753611"/>
           </a:xfrm>
           <a:prstGeom prst="rect">
             <a:avLst/>
@@ -6242,7 +6667,7 @@
       </p:sp>
       <p:pic>
         <p:nvPicPr>
-          <p:cNvPr id="5" name="Picture 4" descr="ppt_chat_emergency.png"/>
+          <p:cNvPr id="5" name="Picture 4" descr="ppt_risk_panel.png"/>
           <p:cNvPicPr>
             <a:picLocks noChangeAspect="1"/>
           </p:cNvPicPr>
@@ -6256,8 +6681,8 @@
         </p:blipFill>
         <p:spPr>
           <a:xfrm>
-            <a:off x="1186031" y="969264"/>
-            <a:ext cx="6771936" cy="3643884"/>
+            <a:off x="3041853" y="969264"/>
+            <a:ext cx="3060293" cy="3643884"/>
           </a:xfrm>
           <a:prstGeom prst="rect">
             <a:avLst/>
@@ -6294,7 +6719,7 @@
               </a:defRPr>
             </a:pPr>
             <a:r>
-              <a:t>演示完成：跌倒紧急流程已成功触发 · 多次紧急安抚语音</a:t>
+              <a:t>多模态融合输出：风险分数、因素、机器人回应及四项监测指标</a:t>
             </a:r>
           </a:p>
         </p:txBody>
@@ -6329,7 +6754,7 @@
               </a:defRPr>
             </a:pPr>
             <a:r>
-              <a:t>系统界面：跌倒紧急对话日志</a:t>
+              <a:t>系统界面：风险决策仪表盘</a:t>
             </a:r>
           </a:p>
         </p:txBody>
@@ -6458,8 +6883,8 @@
         </p:nvSpPr>
         <p:spPr>
           <a:xfrm>
-            <a:off x="356616" y="1797787"/>
-            <a:ext cx="8430767" cy="1986837"/>
+            <a:off x="997006" y="914400"/>
+            <a:ext cx="7149986" cy="3753611"/>
           </a:xfrm>
           <a:prstGeom prst="rect">
             <a:avLst/>
@@ -6497,7 +6922,7 @@
       </p:sp>
       <p:pic>
         <p:nvPicPr>
-          <p:cNvPr id="5" name="Picture 4" descr="ppt_robot_commands.png"/>
+          <p:cNvPr id="5" name="Picture 4" descr="ppt_header_perception.png"/>
           <p:cNvPicPr>
             <a:picLocks noChangeAspect="1"/>
           </p:cNvPicPr>
@@ -6511,8 +6936,8 @@
         </p:blipFill>
         <p:spPr>
           <a:xfrm>
-            <a:off x="411480" y="1852651"/>
-            <a:ext cx="8321040" cy="1877110"/>
+            <a:off x="1051870" y="969264"/>
+            <a:ext cx="7040258" cy="3643884"/>
           </a:xfrm>
           <a:prstGeom prst="rect">
             <a:avLst/>
@@ -6549,7 +6974,7 @@
               </a:defRPr>
             </a:pPr>
             <a:r>
-              <a:t>告警音 → 语音 → 紧急呼叫（跌倒事件）→ 举手手势，全链路可追溯</a:t>
+              <a:t>状态机进入「紧急」· 感知输入与 MediaPipe 视觉模块</a:t>
             </a:r>
           </a:p>
         </p:txBody>
@@ -6584,7 +7009,7 @@
               </a:defRPr>
             </a:pPr>
             <a:r>
-              <a:t>系统界面：机器人指令流</a:t>
+              <a:t>系统界面：紧急状态监测</a:t>
             </a:r>
           </a:p>
         </p:txBody>
@@ -6707,14 +7132,118 @@
       </p:sp>
       <p:sp>
         <p:nvSpPr>
-          <p:cNvPr id="4" name="TextBox 3"/>
+          <p:cNvPr id="4" name="Rectangle 3"/>
+          <p:cNvSpPr/>
+          <p:nvPr/>
+        </p:nvSpPr>
+        <p:spPr>
+          <a:xfrm>
+            <a:off x="1131167" y="914400"/>
+            <a:ext cx="6881664" cy="3753611"/>
+          </a:xfrm>
+          <a:prstGeom prst="rect">
+            <a:avLst/>
+          </a:prstGeom>
+          <a:solidFill>
+            <a:srgbClr val="EBF2FA"/>
+          </a:solidFill>
+          <a:ln w="9525">
+            <a:solidFill>
+              <a:srgbClr val="B4C3DC"/>
+            </a:solidFill>
+          </a:ln>
+        </p:spPr>
+        <p:style>
+          <a:lnRef idx="1">
+            <a:schemeClr val="accent1"/>
+          </a:lnRef>
+          <a:fillRef idx="3">
+            <a:schemeClr val="accent1"/>
+          </a:fillRef>
+          <a:effectRef idx="2">
+            <a:schemeClr val="accent1"/>
+          </a:effectRef>
+          <a:fontRef idx="minor">
+            <a:schemeClr val="lt1"/>
+          </a:fontRef>
+        </p:style>
+        <p:txBody>
+          <a:bodyPr rtlCol="0" anchor="ctr"/>
+          <a:lstStyle/>
+          <a:p>
+            <a:pPr algn="ctr"/>
+          </a:p>
+        </p:txBody>
+      </p:sp>
+      <p:pic>
+        <p:nvPicPr>
+          <p:cNvPr id="5" name="Picture 4" descr="ppt_chat_emergency.png"/>
+          <p:cNvPicPr>
+            <a:picLocks noChangeAspect="1"/>
+          </p:cNvPicPr>
+          <p:nvPr/>
+        </p:nvPicPr>
+        <p:blipFill>
+          <a:blip r:embed="rId2"/>
+          <a:stretch>
+            <a:fillRect/>
+          </a:stretch>
+        </p:blipFill>
+        <p:spPr>
+          <a:xfrm>
+            <a:off x="1186031" y="969264"/>
+            <a:ext cx="6771936" cy="3643884"/>
+          </a:xfrm>
+          <a:prstGeom prst="rect">
+            <a:avLst/>
+          </a:prstGeom>
+        </p:spPr>
+      </p:pic>
+      <p:sp>
+        <p:nvSpPr>
+          <p:cNvPr id="6" name="TextBox 5"/>
           <p:cNvSpPr txBox="1"/>
           <p:nvPr/>
         </p:nvSpPr>
         <p:spPr>
           <a:xfrm>
-            <a:off x="502920" y="566928"/>
-            <a:ext cx="8138160" cy="731520"/>
+            <a:off x="411480" y="4638751"/>
+            <a:ext cx="8321040" cy="347472"/>
+          </a:xfrm>
+          <a:prstGeom prst="rect">
+            <a:avLst/>
+          </a:prstGeom>
+          <a:noFill/>
+        </p:spPr>
+        <p:txBody>
+          <a:bodyPr wrap="square" anchor="ctr">
+            <a:spAutoFit/>
+          </a:bodyPr>
+          <a:lstStyle/>
+          <a:p>
+            <a:pPr algn="ctr">
+              <a:defRPr sz="900">
+                <a:solidFill>
+                  <a:srgbClr val="505050"/>
+                </a:solidFill>
+              </a:defRPr>
+            </a:pPr>
+            <a:r>
+              <a:t>演示完成：跌倒紧急流程已成功触发 · 多次紧急安抚语音</a:t>
+            </a:r>
+          </a:p>
+        </p:txBody>
+      </p:sp>
+      <p:sp>
+        <p:nvSpPr>
+          <p:cNvPr id="7" name="TextBox 6"/>
+          <p:cNvSpPr txBox="1"/>
+          <p:nvPr/>
+        </p:nvSpPr>
+        <p:spPr>
+          <a:xfrm>
+            <a:off x="411480" y="530352"/>
+            <a:ext cx="8321040" cy="384048"/>
           </a:xfrm>
           <a:prstGeom prst="rect">
             <a:avLst/>
@@ -6727,367 +7256,15 @@
           </a:bodyPr>
           <a:lstStyle/>
           <a:p>
-            <a:pPr algn="l">
-              <a:defRPr sz="2400" b="1">
+            <a:pPr algn="ctr">
+              <a:defRPr sz="1900" b="1">
                 <a:solidFill>
                   <a:srgbClr val="1E1E1E"/>
                 </a:solidFill>
               </a:defRPr>
             </a:pPr>
             <a:r>
-              <a:t>实验评测结果</a:t>
-            </a:r>
-          </a:p>
-        </p:txBody>
-      </p:sp>
-      <p:graphicFrame>
-        <p:nvGraphicFramePr>
-          <p:cNvPr id="5" name="Table 4"/>
-          <p:cNvGraphicFramePr>
-            <a:graphicFrameLocks noGrp="1"/>
-          </p:cNvGraphicFramePr>
-          <p:nvPr/>
-        </p:nvGraphicFramePr>
-        <p:xfrm>
-          <a:off x="1097280" y="1371600"/>
-          <a:ext cx="6949440" cy="2240279"/>
-        </p:xfrm>
-        <a:graphic>
-          <a:graphicData uri="http://schemas.openxmlformats.org/drawingml/2006/table">
-            <a:tbl>
-              <a:tblPr firstRow="1" bandRow="1">
-                <a:tableStyleId>{5C22544A-7EE6-4342-B048-85BDC9FD1C3A}</a:tableStyleId>
-              </a:tblPr>
-              <a:tblGrid>
-                <a:gridCol w="3840480"/>
-                <a:gridCol w="3108960"/>
-              </a:tblGrid>
-              <a:tr h="320039">
-                <a:tc>
-                  <a:txBody>
-                    <a:bodyPr/>
-                    <a:lstStyle/>
-                    <a:p>
-                      <a:pPr>
-                        <a:defRPr sz="1200" b="1">
-                          <a:solidFill>
-                            <a:srgbClr val="FFFFFF"/>
-                          </a:solidFill>
-                        </a:defRPr>
-                      </a:pPr>
-                      <a:r>
-                        <a:t>指标</a:t>
-                      </a:r>
-                    </a:p>
-                  </a:txBody>
-                  <a:tcPr>
-                    <a:solidFill>
-                      <a:srgbClr val="143278"/>
-                    </a:solidFill>
-                  </a:tcPr>
-                </a:tc>
-                <a:tc>
-                  <a:txBody>
-                    <a:bodyPr/>
-                    <a:lstStyle/>
-                    <a:p>
-                      <a:pPr>
-                        <a:defRPr sz="1200" b="1">
-                          <a:solidFill>
-                            <a:srgbClr val="FFFFFF"/>
-                          </a:solidFill>
-                        </a:defRPr>
-                      </a:pPr>
-                      <a:r>
-                        <a:t>结果</a:t>
-                      </a:r>
-                    </a:p>
-                  </a:txBody>
-                  <a:tcPr>
-                    <a:solidFill>
-                      <a:srgbClr val="143278"/>
-                    </a:solidFill>
-                  </a:tcPr>
-                </a:tc>
-              </a:tr>
-              <a:tr h="320039">
-                <a:tc>
-                  <a:txBody>
-                    <a:bodyPr/>
-                    <a:lstStyle/>
-                    <a:p>
-                      <a:pPr>
-                        <a:defRPr sz="1200">
-                          <a:solidFill>
-                            <a:srgbClr val="1E1E1E"/>
-                          </a:solidFill>
-                        </a:defRPr>
-                      </a:pPr>
-                      <a:r>
-                        <a:t>跌倒检测 Precision（合成6场景）</a:t>
-                      </a:r>
-                    </a:p>
-                  </a:txBody>
-                  <a:tcPr/>
-                </a:tc>
-                <a:tc>
-                  <a:txBody>
-                    <a:bodyPr/>
-                    <a:lstStyle/>
-                    <a:p>
-                      <a:pPr>
-                        <a:defRPr sz="1200">
-                          <a:solidFill>
-                            <a:srgbClr val="1E1E1E"/>
-                          </a:solidFill>
-                        </a:defRPr>
-                      </a:pPr>
-                      <a:r>
-                        <a:t>100%</a:t>
-                      </a:r>
-                    </a:p>
-                  </a:txBody>
-                  <a:tcPr/>
-                </a:tc>
-              </a:tr>
-              <a:tr h="320039">
-                <a:tc>
-                  <a:txBody>
-                    <a:bodyPr/>
-                    <a:lstStyle/>
-                    <a:p>
-                      <a:pPr>
-                        <a:defRPr sz="1200">
-                          <a:solidFill>
-                            <a:srgbClr val="1E1E1E"/>
-                          </a:solidFill>
-                        </a:defRPr>
-                      </a:pPr>
-                      <a:r>
-                        <a:t>跌倒检测 Recall</a:t>
-                      </a:r>
-                    </a:p>
-                  </a:txBody>
-                  <a:tcPr/>
-                </a:tc>
-                <a:tc>
-                  <a:txBody>
-                    <a:bodyPr/>
-                    <a:lstStyle/>
-                    <a:p>
-                      <a:pPr>
-                        <a:defRPr sz="1200">
-                          <a:solidFill>
-                            <a:srgbClr val="1E1E1E"/>
-                          </a:solidFill>
-                        </a:defRPr>
-                      </a:pPr>
-                      <a:r>
-                        <a:t>100%</a:t>
-                      </a:r>
-                    </a:p>
-                  </a:txBody>
-                  <a:tcPr/>
-                </a:tc>
-              </a:tr>
-              <a:tr h="320039">
-                <a:tc>
-                  <a:txBody>
-                    <a:bodyPr/>
-                    <a:lstStyle/>
-                    <a:p>
-                      <a:pPr>
-                        <a:defRPr sz="1200">
-                          <a:solidFill>
-                            <a:srgbClr val="1E1E1E"/>
-                          </a:solidFill>
-                        </a:defRPr>
-                      </a:pPr>
-                      <a:r>
-                        <a:t>跌倒检测 F1</a:t>
-                      </a:r>
-                    </a:p>
-                  </a:txBody>
-                  <a:tcPr/>
-                </a:tc>
-                <a:tc>
-                  <a:txBody>
-                    <a:bodyPr/>
-                    <a:lstStyle/>
-                    <a:p>
-                      <a:pPr>
-                        <a:defRPr sz="1200">
-                          <a:solidFill>
-                            <a:srgbClr val="1E1E1E"/>
-                          </a:solidFill>
-                        </a:defRPr>
-                      </a:pPr>
-                      <a:r>
-                        <a:t>100%</a:t>
-                      </a:r>
-                    </a:p>
-                  </a:txBody>
-                  <a:tcPr/>
-                </a:tc>
-              </a:tr>
-              <a:tr h="320039">
-                <a:tc>
-                  <a:txBody>
-                    <a:bodyPr/>
-                    <a:lstStyle/>
-                    <a:p>
-                      <a:pPr>
-                        <a:defRPr sz="1200">
-                          <a:solidFill>
-                            <a:srgbClr val="1E1E1E"/>
-                          </a:solidFill>
-                        </a:defRPr>
-                      </a:pPr>
-                      <a:r>
-                        <a:t>端到端紧急呼叫触发率</a:t>
-                      </a:r>
-                    </a:p>
-                  </a:txBody>
-                  <a:tcPr/>
-                </a:tc>
-                <a:tc>
-                  <a:txBody>
-                    <a:bodyPr/>
-                    <a:lstStyle/>
-                    <a:p>
-                      <a:pPr>
-                        <a:defRPr sz="1200">
-                          <a:solidFill>
-                            <a:srgbClr val="1E1E1E"/>
-                          </a:solidFill>
-                        </a:defRPr>
-                      </a:pPr>
-                      <a:r>
-                        <a:t>100%</a:t>
-                      </a:r>
-                    </a:p>
-                  </a:txBody>
-                  <a:tcPr/>
-                </a:tc>
-              </a:tr>
-              <a:tr h="320039">
-                <a:tc>
-                  <a:txBody>
-                    <a:bodyPr/>
-                    <a:lstStyle/>
-                    <a:p>
-                      <a:pPr>
-                        <a:defRPr sz="1200">
-                          <a:solidFill>
-                            <a:srgbClr val="1E1E1E"/>
-                          </a:solidFill>
-                        </a:defRPr>
-                      </a:pPr>
-                      <a:r>
-                        <a:t>单帧决策延迟（CPU，无云端LLM）</a:t>
-                      </a:r>
-                    </a:p>
-                  </a:txBody>
-                  <a:tcPr/>
-                </a:tc>
-                <a:tc>
-                  <a:txBody>
-                    <a:bodyPr/>
-                    <a:lstStyle/>
-                    <a:p>
-                      <a:pPr>
-                        <a:defRPr sz="1200">
-                          <a:solidFill>
-                            <a:srgbClr val="1E1E1E"/>
-                          </a:solidFill>
-                        </a:defRPr>
-                      </a:pPr>
-                      <a:r>
-                        <a:t>&lt; 50 ms</a:t>
-                      </a:r>
-                    </a:p>
-                  </a:txBody>
-                  <a:tcPr/>
-                </a:tc>
-              </a:tr>
-              <a:tr h="320045">
-                <a:tc>
-                  <a:txBody>
-                    <a:bodyPr/>
-                    <a:lstStyle/>
-                    <a:p>
-                      <a:pPr>
-                        <a:defRPr sz="1200">
-                          <a:solidFill>
-                            <a:srgbClr val="1E1E1E"/>
-                          </a:solidFill>
-                        </a:defRPr>
-                      </a:pPr>
-                      <a:r>
-                        <a:t>单元测试 + 无头压测</a:t>
-                      </a:r>
-                    </a:p>
-                  </a:txBody>
-                  <a:tcPr/>
-                </a:tc>
-                <a:tc>
-                  <a:txBody>
-                    <a:bodyPr/>
-                    <a:lstStyle/>
-                    <a:p>
-                      <a:pPr>
-                        <a:defRPr sz="1200">
-                          <a:solidFill>
-                            <a:srgbClr val="1E1E1E"/>
-                          </a:solidFill>
-                        </a:defRPr>
-                      </a:pPr>
-                      <a:r>
-                        <a:t>pytest 全部通过</a:t>
-                      </a:r>
-                    </a:p>
-                  </a:txBody>
-                  <a:tcPr/>
-                </a:tc>
-              </a:tr>
-            </a:tbl>
-          </a:graphicData>
-        </a:graphic>
-      </p:graphicFrame>
-      <p:sp>
-        <p:nvSpPr>
-          <p:cNvPr id="6" name="TextBox 5"/>
-          <p:cNvSpPr txBox="1"/>
-          <p:nvPr/>
-        </p:nvSpPr>
-        <p:spPr>
-          <a:xfrm>
-            <a:off x="502920" y="3703320"/>
-            <a:ext cx="8138160" cy="3474720"/>
-          </a:xfrm>
-          <a:prstGeom prst="rect">
-            <a:avLst/>
-          </a:prstGeom>
-          <a:noFill/>
-        </p:spPr>
-        <p:txBody>
-          <a:bodyPr wrap="square">
-            <a:spAutoFit/>
-          </a:bodyPr>
-          <a:lstStyle/>
-          <a:p>
-            <a:pPr>
-              <a:lnSpc>
-                <a:spcPct val="135000"/>
-              </a:lnSpc>
-              <a:defRPr sz="1100" b="0">
-                <a:solidFill>
-                  <a:srgbClr val="1E1E1E"/>
-                </a:solidFill>
-              </a:defRPr>
-            </a:pPr>
-            <a:r>
-              <a:t>详见 data/evaluation/results/fall_eval_report.json</a:t>
+              <a:t>系统界面：跌倒紧急对话日志</a:t>
             </a:r>
           </a:p>
         </p:txBody>
@@ -7210,14 +7387,118 @@
       </p:sp>
       <p:sp>
         <p:nvSpPr>
-          <p:cNvPr id="4" name="TextBox 3"/>
+          <p:cNvPr id="4" name="Rectangle 3"/>
+          <p:cNvSpPr/>
+          <p:nvPr/>
+        </p:nvSpPr>
+        <p:spPr>
+          <a:xfrm>
+            <a:off x="356616" y="1797787"/>
+            <a:ext cx="8430767" cy="1986837"/>
+          </a:xfrm>
+          <a:prstGeom prst="rect">
+            <a:avLst/>
+          </a:prstGeom>
+          <a:solidFill>
+            <a:srgbClr val="EBF2FA"/>
+          </a:solidFill>
+          <a:ln w="9525">
+            <a:solidFill>
+              <a:srgbClr val="B4C3DC"/>
+            </a:solidFill>
+          </a:ln>
+        </p:spPr>
+        <p:style>
+          <a:lnRef idx="1">
+            <a:schemeClr val="accent1"/>
+          </a:lnRef>
+          <a:fillRef idx="3">
+            <a:schemeClr val="accent1"/>
+          </a:fillRef>
+          <a:effectRef idx="2">
+            <a:schemeClr val="accent1"/>
+          </a:effectRef>
+          <a:fontRef idx="minor">
+            <a:schemeClr val="lt1"/>
+          </a:fontRef>
+        </p:style>
+        <p:txBody>
+          <a:bodyPr rtlCol="0" anchor="ctr"/>
+          <a:lstStyle/>
+          <a:p>
+            <a:pPr algn="ctr"/>
+          </a:p>
+        </p:txBody>
+      </p:sp>
+      <p:pic>
+        <p:nvPicPr>
+          <p:cNvPr id="5" name="Picture 4" descr="ppt_robot_commands.png"/>
+          <p:cNvPicPr>
+            <a:picLocks noChangeAspect="1"/>
+          </p:cNvPicPr>
+          <p:nvPr/>
+        </p:nvPicPr>
+        <p:blipFill>
+          <a:blip r:embed="rId2"/>
+          <a:stretch>
+            <a:fillRect/>
+          </a:stretch>
+        </p:blipFill>
+        <p:spPr>
+          <a:xfrm>
+            <a:off x="411480" y="1852651"/>
+            <a:ext cx="8321040" cy="1877110"/>
+          </a:xfrm>
+          <a:prstGeom prst="rect">
+            <a:avLst/>
+          </a:prstGeom>
+        </p:spPr>
+      </p:pic>
+      <p:sp>
+        <p:nvSpPr>
+          <p:cNvPr id="6" name="TextBox 5"/>
           <p:cNvSpPr txBox="1"/>
           <p:nvPr/>
         </p:nvSpPr>
         <p:spPr>
           <a:xfrm>
-            <a:off x="502920" y="566928"/>
-            <a:ext cx="8138160" cy="731520"/>
+            <a:off x="411480" y="4638751"/>
+            <a:ext cx="8321040" cy="347472"/>
+          </a:xfrm>
+          <a:prstGeom prst="rect">
+            <a:avLst/>
+          </a:prstGeom>
+          <a:noFill/>
+        </p:spPr>
+        <p:txBody>
+          <a:bodyPr wrap="square" anchor="ctr">
+            <a:spAutoFit/>
+          </a:bodyPr>
+          <a:lstStyle/>
+          <a:p>
+            <a:pPr algn="ctr">
+              <a:defRPr sz="900">
+                <a:solidFill>
+                  <a:srgbClr val="505050"/>
+                </a:solidFill>
+              </a:defRPr>
+            </a:pPr>
+            <a:r>
+              <a:t>告警音 → 语音 → 紧急呼叫（跌倒事件）→ 举手手势，全链路可追溯</a:t>
+            </a:r>
+          </a:p>
+        </p:txBody>
+      </p:sp>
+      <p:sp>
+        <p:nvSpPr>
+          <p:cNvPr id="7" name="TextBox 6"/>
+          <p:cNvSpPr txBox="1"/>
+          <p:nvPr/>
+        </p:nvSpPr>
+        <p:spPr>
+          <a:xfrm>
+            <a:off x="411480" y="530352"/>
+            <a:ext cx="8321040" cy="384048"/>
           </a:xfrm>
           <a:prstGeom prst="rect">
             <a:avLst/>
@@ -7230,128 +7511,15 @@
           </a:bodyPr>
           <a:lstStyle/>
           <a:p>
-            <a:pPr algn="l">
-              <a:defRPr sz="2400" b="1">
+            <a:pPr algn="ctr">
+              <a:defRPr sz="1900" b="1">
                 <a:solidFill>
                   <a:srgbClr val="1E1E1E"/>
                 </a:solidFill>
               </a:defRPr>
             </a:pPr>
             <a:r>
-              <a:t>开源与知识产权</a:t>
-            </a:r>
-          </a:p>
-        </p:txBody>
-      </p:sp>
-      <p:sp>
-        <p:nvSpPr>
-          <p:cNvPr id="5" name="TextBox 4"/>
-          <p:cNvSpPr txBox="1"/>
-          <p:nvPr/>
-        </p:nvSpPr>
-        <p:spPr>
-          <a:xfrm>
-            <a:off x="502920" y="1170432"/>
-            <a:ext cx="8138160" cy="3840480"/>
-          </a:xfrm>
-          <a:prstGeom prst="rect">
-            <a:avLst/>
-          </a:prstGeom>
-          <a:noFill/>
-        </p:spPr>
-        <p:txBody>
-          <a:bodyPr wrap="square">
-            <a:spAutoFit/>
-          </a:bodyPr>
-          <a:lstStyle/>
-          <a:p>
-            <a:pPr>
-              <a:spcAft>
-                <a:spcPts val="600"/>
-              </a:spcAft>
-              <a:defRPr sz="1300">
-                <a:solidFill>
-                  <a:srgbClr val="1E1E1E"/>
-                </a:solidFill>
-              </a:defRPr>
-            </a:pPr>
-            <a:r>
-              <a:t>开源地址：https://github.com/FBB123571/ElderCare-Humanoid-Platform</a:t>
-            </a:r>
-          </a:p>
-          <a:p>
-            <a:pPr>
-              <a:spcAft>
-                <a:spcPts val="600"/>
-              </a:spcAft>
-              <a:defRPr sz="1300">
-                <a:solidFill>
-                  <a:srgbClr val="1E1E1E"/>
-                </a:solidFill>
-              </a:defRPr>
-            </a:pPr>
-            <a:r>
-              <a:t>参赛团队：从容应队（中山大学）</a:t>
-            </a:r>
-          </a:p>
-          <a:p>
-            <a:pPr>
-              <a:spcAft>
-                <a:spcPts val="600"/>
-              </a:spcAft>
-              <a:defRPr sz="1300">
-                <a:solidFill>
-                  <a:srgbClr val="1E1E1E"/>
-                </a:solidFill>
-              </a:defRPr>
-            </a:pPr>
-            <a:r>
-              <a:t>现场演示：http://localhost:8765（bash scripts/run_web.sh）</a:t>
-            </a:r>
-          </a:p>
-          <a:p>
-            <a:pPr>
-              <a:spcAft>
-                <a:spcPts val="600"/>
-              </a:spcAft>
-              <a:defRPr sz="1300">
-                <a:solidFill>
-                  <a:srgbClr val="1E1E1E"/>
-                </a:solidFill>
-              </a:defRPr>
-            </a:pPr>
-            <a:r>
-              <a:t>演示录像：docs/assets/demo_carecompanion.mp4</a:t>
-            </a:r>
-          </a:p>
-          <a:p>
-            <a:pPr>
-              <a:spcAft>
-                <a:spcPts val="600"/>
-              </a:spcAft>
-              <a:defRPr sz="1300">
-                <a:solidFill>
-                  <a:srgbClr val="1E1E1E"/>
-                </a:solidFill>
-              </a:defRPr>
-            </a:pPr>
-            <a:r>
-              <a:t>软件名称：CareCompanion 智能养老人形陪伴机器人系统 V1.0</a:t>
-            </a:r>
-          </a:p>
-          <a:p>
-            <a:pPr>
-              <a:spcAft>
-                <a:spcPts val="600"/>
-              </a:spcAft>
-              <a:defRPr sz="1300">
-                <a:solidFill>
-                  <a:srgbClr val="1E1E1E"/>
-                </a:solidFill>
-              </a:defRPr>
-            </a:pPr>
-            <a:r>
-              <a:t>软著登记：（申请中 / 按实际填写）</a:t>
+              <a:t>系统界面：机器人指令流</a:t>
             </a:r>
           </a:p>
         </p:txBody>
@@ -7480,7 +7648,7 @@
         </p:nvSpPr>
         <p:spPr>
           <a:xfrm>
-            <a:off x="502920" y="2068830"/>
+            <a:off x="502920" y="548640"/>
             <a:ext cx="8138160" cy="731520"/>
           </a:xfrm>
           <a:prstGeom prst="rect">
@@ -7494,15 +7662,15 @@
           </a:bodyPr>
           <a:lstStyle/>
           <a:p>
-            <a:pPr algn="ctr">
-              <a:defRPr sz="3000" b="1">
+            <a:pPr algn="l">
+              <a:defRPr sz="2200" b="1">
                 <a:solidFill>
                   <a:srgbClr val="1E1E1E"/>
                 </a:solidFill>
               </a:defRPr>
             </a:pPr>
             <a:r>
-              <a:t>第四部分</a:t>
+              <a:t>实验评测结果</a:t>
             </a:r>
           </a:p>
         </p:txBody>
@@ -7515,8 +7683,8 @@
         </p:nvSpPr>
         <p:spPr>
           <a:xfrm>
-            <a:off x="502920" y="2617470"/>
-            <a:ext cx="8138160" cy="731520"/>
+            <a:off x="502920" y="960120"/>
+            <a:ext cx="3886200" cy="3840480"/>
           </a:xfrm>
           <a:prstGeom prst="rect">
             <a:avLst/>
@@ -7529,19 +7697,151 @@
           </a:bodyPr>
           <a:lstStyle/>
           <a:p>
-            <a:pPr algn="ctr">
-              <a:defRPr sz="2000" b="1">
-                <a:solidFill>
-                  <a:srgbClr val="143278"/>
-                </a:solidFill>
-              </a:defRPr>
-            </a:pPr>
-            <a:r>
-              <a:t>创新维度与未来展望</a:t>
-            </a:r>
-          </a:p>
-        </p:txBody>
-      </p:sp>
+            <a:pPr>
+              <a:spcAft>
+                <a:spcPts val="600"/>
+              </a:spcAft>
+              <a:defRPr sz="1200">
+                <a:solidFill>
+                  <a:srgbClr val="1E1E1E"/>
+                </a:solidFill>
+              </a:defRPr>
+            </a:pPr>
+            <a:r>
+              <a:t>跌倒检测 P/R/F1：100%（6类合成场景）</a:t>
+            </a:r>
+          </a:p>
+          <a:p>
+            <a:pPr>
+              <a:spcAft>
+                <a:spcPts val="600"/>
+              </a:spcAft>
+              <a:defRPr sz="1200">
+                <a:solidFill>
+                  <a:srgbClr val="1E1E1E"/>
+                </a:solidFill>
+              </a:defRPr>
+            </a:pPr>
+            <a:r>
+              <a:t>紧急呼叫端到端触发率：100%</a:t>
+            </a:r>
+          </a:p>
+          <a:p>
+            <a:pPr>
+              <a:spcAft>
+                <a:spcPts val="600"/>
+              </a:spcAft>
+              <a:defRPr sz="1200">
+                <a:solidFill>
+                  <a:srgbClr val="1E1E1E"/>
+                </a:solidFill>
+              </a:defRPr>
+            </a:pPr>
+            <a:r>
+              <a:t>单帧决策延迟 &lt; 50ms（CPU）</a:t>
+            </a:r>
+          </a:p>
+          <a:p>
+            <a:pPr>
+              <a:spcAft>
+                <a:spcPts val="600"/>
+              </a:spcAft>
+              <a:defRPr sz="1200">
+                <a:solidFill>
+                  <a:srgbClr val="1E1E1E"/>
+                </a:solidFill>
+              </a:defRPr>
+            </a:pPr>
+            <a:r>
+              <a:t>pytest + 无头压测全部通过</a:t>
+            </a:r>
+          </a:p>
+          <a:p>
+            <a:pPr>
+              <a:spcAft>
+                <a:spcPts val="600"/>
+              </a:spcAft>
+              <a:defRPr sz="1200">
+                <a:solidFill>
+                  <a:srgbClr val="1E1E1E"/>
+                </a:solidFill>
+              </a:defRPr>
+            </a:pPr>
+            <a:r>
+              <a:t>报告：fall_eval_report.json</a:t>
+            </a:r>
+          </a:p>
+        </p:txBody>
+      </p:sp>
+      <p:sp>
+        <p:nvSpPr>
+          <p:cNvPr id="6" name="Rectangle 5"/>
+          <p:cNvSpPr/>
+          <p:nvPr/>
+        </p:nvSpPr>
+        <p:spPr>
+          <a:xfrm>
+            <a:off x="4370832" y="896112"/>
+            <a:ext cx="4398264" cy="4096512"/>
+          </a:xfrm>
+          <a:prstGeom prst="rect">
+            <a:avLst/>
+          </a:prstGeom>
+          <a:solidFill>
+            <a:srgbClr val="EBF2FA"/>
+          </a:solidFill>
+          <a:ln>
+            <a:solidFill>
+              <a:srgbClr val="B4C3DC"/>
+            </a:solidFill>
+          </a:ln>
+        </p:spPr>
+        <p:style>
+          <a:lnRef idx="1">
+            <a:schemeClr val="accent1"/>
+          </a:lnRef>
+          <a:fillRef idx="3">
+            <a:schemeClr val="accent1"/>
+          </a:fillRef>
+          <a:effectRef idx="2">
+            <a:schemeClr val="accent1"/>
+          </a:effectRef>
+          <a:fontRef idx="minor">
+            <a:schemeClr val="lt1"/>
+          </a:fontRef>
+        </p:style>
+        <p:txBody>
+          <a:bodyPr rtlCol="0" anchor="ctr"/>
+          <a:lstStyle/>
+          <a:p>
+            <a:pPr algn="ctr"/>
+          </a:p>
+        </p:txBody>
+      </p:sp>
+      <p:pic>
+        <p:nvPicPr>
+          <p:cNvPr id="7" name="Picture 6" descr="metrics_chart.png"/>
+          <p:cNvPicPr>
+            <a:picLocks noChangeAspect="1"/>
+          </p:cNvPicPr>
+          <p:nvPr/>
+        </p:nvPicPr>
+        <p:blipFill>
+          <a:blip r:embed="rId2"/>
+          <a:stretch>
+            <a:fillRect/>
+          </a:stretch>
+        </p:blipFill>
+        <p:spPr>
+          <a:xfrm>
+            <a:off x="4407408" y="932688"/>
+            <a:ext cx="4325112" cy="2843291"/>
+          </a:xfrm>
+          <a:prstGeom prst="rect">
+            <a:avLst/>
+          </a:prstGeom>
+        </p:spPr>
+      </p:pic>
     </p:spTree>
   </p:cSld>
   <p:clrMapOvr>
@@ -7666,7 +7966,7 @@
         </p:nvSpPr>
         <p:spPr>
           <a:xfrm>
-            <a:off x="502920" y="566928"/>
+            <a:off x="502920" y="548640"/>
             <a:ext cx="8138160" cy="731520"/>
           </a:xfrm>
           <a:prstGeom prst="rect">
@@ -7681,292 +7981,185 @@
           <a:lstStyle/>
           <a:p>
             <a:pPr algn="l">
-              <a:defRPr sz="2400" b="1">
+              <a:defRPr sz="2200" b="1">
                 <a:solidFill>
                   <a:srgbClr val="1E1E1E"/>
                 </a:solidFill>
               </a:defRPr>
             </a:pPr>
             <a:r>
-              <a:t>创新维度总结</a:t>
-            </a:r>
-          </a:p>
-        </p:txBody>
-      </p:sp>
-      <p:graphicFrame>
-        <p:nvGraphicFramePr>
-          <p:cNvPr id="5" name="Table 4"/>
-          <p:cNvGraphicFramePr>
-            <a:graphicFrameLocks noGrp="1"/>
-          </p:cNvGraphicFramePr>
-          <p:nvPr/>
-        </p:nvGraphicFramePr>
-        <p:xfrm>
-          <a:off x="365760" y="1234440"/>
-          <a:ext cx="8412480" cy="3474720"/>
-        </p:xfrm>
-        <a:graphic>
-          <a:graphicData uri="http://schemas.openxmlformats.org/drawingml/2006/table">
-            <a:tbl>
-              <a:tblPr firstRow="1" bandRow="1">
-                <a:tableStyleId>{5C22544A-7EE6-4342-B048-85BDC9FD1C3A}</a:tableStyleId>
-              </a:tblPr>
-              <a:tblGrid>
-                <a:gridCol w="1828800"/>
-                <a:gridCol w="6583680"/>
-              </a:tblGrid>
-              <a:tr h="579120">
-                <a:tc>
-                  <a:txBody>
-                    <a:bodyPr/>
-                    <a:lstStyle/>
-                    <a:p>
-                      <a:pPr>
-                        <a:defRPr sz="1100" b="1">
-                          <a:solidFill>
-                            <a:srgbClr val="FFFFFF"/>
-                          </a:solidFill>
-                        </a:defRPr>
-                      </a:pPr>
-                      <a:r>
-                        <a:t>创新维度</a:t>
-                      </a:r>
-                    </a:p>
-                  </a:txBody>
-                  <a:tcPr>
-                    <a:solidFill>
-                      <a:srgbClr val="143278"/>
-                    </a:solidFill>
-                  </a:tcPr>
-                </a:tc>
-                <a:tc>
-                  <a:txBody>
-                    <a:bodyPr/>
-                    <a:lstStyle/>
-                    <a:p>
-                      <a:pPr>
-                        <a:defRPr sz="1100" b="1">
-                          <a:solidFill>
-                            <a:srgbClr val="FFFFFF"/>
-                          </a:solidFill>
-                        </a:defRPr>
-                      </a:pPr>
-                      <a:r>
-                        <a:t>描述</a:t>
-                      </a:r>
-                    </a:p>
-                  </a:txBody>
-                  <a:tcPr>
-                    <a:solidFill>
-                      <a:srgbClr val="143278"/>
-                    </a:solidFill>
-                  </a:tcPr>
-                </a:tc>
-              </a:tr>
-              <a:tr h="579120">
-                <a:tc>
-                  <a:txBody>
-                    <a:bodyPr/>
-                    <a:lstStyle/>
-                    <a:p>
-                      <a:pPr>
-                        <a:defRPr sz="1000">
-                          <a:solidFill>
-                            <a:srgbClr val="1E1E1E"/>
-                          </a:solidFill>
-                        </a:defRPr>
-                      </a:pPr>
-                      <a:r>
-                        <a:t>多模态融合</a:t>
-                      </a:r>
-                    </a:p>
-                  </a:txBody>
-                  <a:tcPr/>
-                </a:tc>
-                <a:tc>
-                  <a:txBody>
-                    <a:bodyPr/>
-                    <a:lstStyle/>
-                    <a:p>
-                      <a:pPr>
-                        <a:defRPr sz="1000">
-                          <a:solidFill>
-                            <a:srgbClr val="1E1E1E"/>
-                          </a:solidFill>
-                        </a:defRPr>
-                      </a:pPr>
-                      <a:r>
-                        <a:t>跌倒、情绪、健康统一 RiskEngine，输出可解释原因，优于孤立模块堆叠</a:t>
-                      </a:r>
-                    </a:p>
-                  </a:txBody>
-                  <a:tcPr/>
-                </a:tc>
-              </a:tr>
-              <a:tr h="579120">
-                <a:tc>
-                  <a:txBody>
-                    <a:bodyPr/>
-                    <a:lstStyle/>
-                    <a:p>
-                      <a:pPr>
-                        <a:defRPr sz="1000">
-                          <a:solidFill>
-                            <a:srgbClr val="1E1E1E"/>
-                          </a:solidFill>
-                        </a:defRPr>
-                      </a:pPr>
-                      <a:r>
-                        <a:t>安全闭环</a:t>
-                      </a:r>
-                    </a:p>
-                  </a:txBody>
-                  <a:tcPr/>
-                </a:tc>
-                <a:tc>
-                  <a:txBody>
-                    <a:bodyPr/>
-                    <a:lstStyle/>
-                    <a:p>
-                      <a:pPr>
-                        <a:defRPr sz="1000">
-                          <a:solidFill>
-                            <a:srgbClr val="1E1E1E"/>
-                          </a:solidFill>
-                        </a:defRPr>
-                      </a:pPr>
-                      <a:r>
-                        <a:t>紧急事件硬优先级状态机，覆盖对话与常规任务，触发 call_emergency</a:t>
-                      </a:r>
-                    </a:p>
-                  </a:txBody>
-                  <a:tcPr/>
-                </a:tc>
-              </a:tr>
-              <a:tr h="579120">
-                <a:tc>
-                  <a:txBody>
-                    <a:bodyPr/>
-                    <a:lstStyle/>
-                    <a:p>
-                      <a:pPr>
-                        <a:defRPr sz="1000">
-                          <a:solidFill>
-                            <a:srgbClr val="1E1E1E"/>
-                          </a:solidFill>
-                        </a:defRPr>
-                      </a:pPr>
-                      <a:r>
-                        <a:t>视觉感知</a:t>
-                      </a:r>
-                    </a:p>
-                  </a:txBody>
-                  <a:tcPr/>
-                </a:tc>
-                <a:tc>
-                  <a:txBody>
-                    <a:bodyPr/>
-                    <a:lstStyle/>
-                    <a:p>
-                      <a:pPr>
-                        <a:defRPr sz="1000">
-                          <a:solidFill>
-                            <a:srgbClr val="1E1E1E"/>
-                          </a:solidFill>
-                        </a:defRPr>
-                      </a:pPr>
-                      <a:r>
-                        <a:t>MediaPipe 姿态接入 Web 与本地摄像头，非纯滑块仿真</a:t>
-                      </a:r>
-                    </a:p>
-                  </a:txBody>
-                  <a:tcPr/>
-                </a:tc>
-              </a:tr>
-              <a:tr h="579120">
-                <a:tc>
-                  <a:txBody>
-                    <a:bodyPr/>
-                    <a:lstStyle/>
-                    <a:p>
-                      <a:pPr>
-                        <a:defRPr sz="1000">
-                          <a:solidFill>
-                            <a:srgbClr val="1E1E1E"/>
-                          </a:solidFill>
-                        </a:defRPr>
-                      </a:pPr>
-                      <a:r>
-                        <a:t>工程化</a:t>
-                      </a:r>
-                    </a:p>
-                  </a:txBody>
-                  <a:tcPr/>
-                </a:tc>
-                <a:tc>
-                  <a:txBody>
-                    <a:bodyPr/>
-                    <a:lstStyle/>
-                    <a:p>
-                      <a:pPr>
-                        <a:defRPr sz="1000">
-                          <a:solidFill>
-                            <a:srgbClr val="1E1E1E"/>
-                          </a:solidFill>
-                        </a:defRPr>
-                      </a:pPr>
-                      <a:r>
-                        <a:t>仿真/Web/ROS2 共用 Orchestrator；一键评测与无头验证脚本</a:t>
-                      </a:r>
-                    </a:p>
-                  </a:txBody>
-                  <a:tcPr/>
-                </a:tc>
-              </a:tr>
-              <a:tr h="579120">
-                <a:tc>
-                  <a:txBody>
-                    <a:bodyPr/>
-                    <a:lstStyle/>
-                    <a:p>
-                      <a:pPr>
-                        <a:defRPr sz="1000">
-                          <a:solidFill>
-                            <a:srgbClr val="1E1E1E"/>
-                          </a:solidFill>
-                        </a:defRPr>
-                      </a:pPr>
-                      <a:r>
-                        <a:t>应用价值</a:t>
-                      </a:r>
-                    </a:p>
-                  </a:txBody>
-                  <a:tcPr/>
-                </a:tc>
-                <a:tc>
-                  <a:txBody>
-                    <a:bodyPr/>
-                    <a:lstStyle/>
-                    <a:p>
-                      <a:pPr>
-                        <a:defRPr sz="1000">
-                          <a:solidFill>
-                            <a:srgbClr val="1E1E1E"/>
-                          </a:solidFill>
-                        </a:defRPr>
-                      </a:pPr>
-                      <a:r>
-                        <a:t>契合智慧养老政策，降低跌倒发现空窗，支持边缘本地推理保护隐私</a:t>
-                      </a:r>
-                    </a:p>
-                  </a:txBody>
-                  <a:tcPr/>
-                </a:tc>
-              </a:tr>
-            </a:tbl>
-          </a:graphicData>
-        </a:graphic>
-      </p:graphicFrame>
+              <a:t>开源与可复现性</a:t>
+            </a:r>
+          </a:p>
+        </p:txBody>
+      </p:sp>
+      <p:sp>
+        <p:nvSpPr>
+          <p:cNvPr id="5" name="TextBox 4"/>
+          <p:cNvSpPr txBox="1"/>
+          <p:nvPr/>
+        </p:nvSpPr>
+        <p:spPr>
+          <a:xfrm>
+            <a:off x="502920" y="960120"/>
+            <a:ext cx="3886200" cy="3840480"/>
+          </a:xfrm>
+          <a:prstGeom prst="rect">
+            <a:avLst/>
+          </a:prstGeom>
+          <a:noFill/>
+        </p:spPr>
+        <p:txBody>
+          <a:bodyPr wrap="square">
+            <a:spAutoFit/>
+          </a:bodyPr>
+          <a:lstStyle/>
+          <a:p>
+            <a:pPr>
+              <a:spcAft>
+                <a:spcPts val="600"/>
+              </a:spcAft>
+              <a:defRPr sz="1200">
+                <a:solidFill>
+                  <a:srgbClr val="1E1E1E"/>
+                </a:solidFill>
+              </a:defRPr>
+            </a:pPr>
+            <a:r>
+              <a:t>仓库：https://github.com/FBB123571/ElderCare-Humanoid-Platform</a:t>
+            </a:r>
+          </a:p>
+          <a:p>
+            <a:pPr>
+              <a:spcAft>
+                <a:spcPts val="600"/>
+              </a:spcAft>
+              <a:defRPr sz="1200">
+                <a:solidFill>
+                  <a:srgbClr val="1E1E1E"/>
+                </a:solidFill>
+              </a:defRPr>
+            </a:pPr>
+            <a:r>
+              <a:t>团队：从容应队（中山大学）</a:t>
+            </a:r>
+          </a:p>
+          <a:p>
+            <a:pPr>
+              <a:spcAft>
+                <a:spcPts val="600"/>
+              </a:spcAft>
+              <a:defRPr sz="1200">
+                <a:solidFill>
+                  <a:srgbClr val="1E1E1E"/>
+                </a:solidFill>
+              </a:defRPr>
+            </a:pPr>
+            <a:r>
+              <a:t>演示：bash scripts/run_web.sh</a:t>
+            </a:r>
+          </a:p>
+          <a:p>
+            <a:pPr>
+              <a:spcAft>
+                <a:spcPts val="600"/>
+              </a:spcAft>
+              <a:defRPr sz="1200">
+                <a:solidFill>
+                  <a:srgbClr val="1E1E1E"/>
+                </a:solidFill>
+              </a:defRPr>
+            </a:pPr>
+            <a:r>
+              <a:t>录像：docs/assets/demo_carecompanion.mp4</a:t>
+            </a:r>
+          </a:p>
+          <a:p>
+            <a:pPr>
+              <a:spcAft>
+                <a:spcPts val="600"/>
+              </a:spcAft>
+              <a:defRPr sz="1200">
+                <a:solidFill>
+                  <a:srgbClr val="1E1E1E"/>
+                </a:solidFill>
+              </a:defRPr>
+            </a:pPr>
+            <a:r>
+              <a:t>软著：申请中</a:t>
+            </a:r>
+          </a:p>
+        </p:txBody>
+      </p:sp>
+      <p:sp>
+        <p:nvSpPr>
+          <p:cNvPr id="6" name="Rectangle 5"/>
+          <p:cNvSpPr/>
+          <p:nvPr/>
+        </p:nvSpPr>
+        <p:spPr>
+          <a:xfrm>
+            <a:off x="4370832" y="896112"/>
+            <a:ext cx="4398264" cy="4096512"/>
+          </a:xfrm>
+          <a:prstGeom prst="rect">
+            <a:avLst/>
+          </a:prstGeom>
+          <a:solidFill>
+            <a:srgbClr val="EBF2FA"/>
+          </a:solidFill>
+          <a:ln>
+            <a:solidFill>
+              <a:srgbClr val="B4C3DC"/>
+            </a:solidFill>
+          </a:ln>
+        </p:spPr>
+        <p:style>
+          <a:lnRef idx="1">
+            <a:schemeClr val="accent1"/>
+          </a:lnRef>
+          <a:fillRef idx="3">
+            <a:schemeClr val="accent1"/>
+          </a:fillRef>
+          <a:effectRef idx="2">
+            <a:schemeClr val="accent1"/>
+          </a:effectRef>
+          <a:fontRef idx="minor">
+            <a:schemeClr val="lt1"/>
+          </a:fontRef>
+        </p:style>
+        <p:txBody>
+          <a:bodyPr rtlCol="0" anchor="ctr"/>
+          <a:lstStyle/>
+          <a:p>
+            <a:pPr algn="ctr"/>
+          </a:p>
+        </p:txBody>
+      </p:sp>
+      <p:pic>
+        <p:nvPicPr>
+          <p:cNvPr id="7" name="Picture 6" descr="ppt_demo_qr.png"/>
+          <p:cNvPicPr>
+            <a:picLocks noChangeAspect="1"/>
+          </p:cNvPicPr>
+          <p:nvPr/>
+        </p:nvPicPr>
+        <p:blipFill>
+          <a:blip r:embed="rId2"/>
+          <a:stretch>
+            <a:fillRect/>
+          </a:stretch>
+        </p:blipFill>
+        <p:spPr>
+          <a:xfrm>
+            <a:off x="4407408" y="932688"/>
+            <a:ext cx="4023360" cy="4023360"/>
+          </a:xfrm>
+          <a:prstGeom prst="rect">
+            <a:avLst/>
+          </a:prstGeom>
+        </p:spPr>
+      </p:pic>
     </p:spTree>
   </p:cSld>
   <p:clrMapOvr>
@@ -8083,15 +8276,82 @@
           </a:p>
         </p:txBody>
       </p:sp>
-      <p:sp>
-        <p:nvSpPr>
-          <p:cNvPr id="4" name="TextBox 3"/>
+      <p:pic>
+        <p:nvPicPr>
+          <p:cNvPr id="4" name="Picture 3" descr="cover_banner.png"/>
+          <p:cNvPicPr>
+            <a:picLocks noChangeAspect="1"/>
+          </p:cNvPicPr>
+          <p:nvPr/>
+        </p:nvPicPr>
+        <p:blipFill>
+          <a:blip r:embed="rId2"/>
+          <a:stretch>
+            <a:fillRect/>
+          </a:stretch>
+        </p:blipFill>
+        <p:spPr>
+          <a:xfrm>
+            <a:off x="0" y="475488"/>
+            <a:ext cx="9144000" cy="4668012"/>
+          </a:xfrm>
+          <a:prstGeom prst="rect">
+            <a:avLst/>
+          </a:prstGeom>
+        </p:spPr>
+      </p:pic>
+      <p:sp>
+        <p:nvSpPr>
+          <p:cNvPr id="5" name="Rectangle 4"/>
+          <p:cNvSpPr/>
+          <p:nvPr/>
+        </p:nvSpPr>
+        <p:spPr>
+          <a:xfrm>
+            <a:off x="0" y="475488"/>
+            <a:ext cx="9144000" cy="4668012"/>
+          </a:xfrm>
+          <a:prstGeom prst="rect">
+            <a:avLst/>
+          </a:prstGeom>
+          <a:solidFill>
+            <a:srgbClr val="143278"/>
+          </a:solidFill>
+          <a:ln>
+            <a:noFill/>
+          </a:ln>
+        </p:spPr>
+        <p:style>
+          <a:lnRef idx="1">
+            <a:schemeClr val="accent1"/>
+          </a:lnRef>
+          <a:fillRef idx="3">
+            <a:schemeClr val="accent1"/>
+          </a:fillRef>
+          <a:effectRef idx="2">
+            <a:schemeClr val="accent1"/>
+          </a:effectRef>
+          <a:fontRef idx="minor">
+            <a:schemeClr val="lt1"/>
+          </a:fontRef>
+        </p:style>
+        <p:txBody>
+          <a:bodyPr rtlCol="0" anchor="ctr"/>
+          <a:lstStyle/>
+          <a:p>
+            <a:pPr algn="ctr"/>
+          </a:p>
+        </p:txBody>
+      </p:sp>
+      <p:sp>
+        <p:nvSpPr>
+          <p:cNvPr id="6" name="TextBox 5"/>
           <p:cNvSpPr txBox="1"/>
           <p:nvPr/>
         </p:nvSpPr>
         <p:spPr>
           <a:xfrm>
-            <a:off x="502920" y="566928"/>
+            <a:off x="502920" y="1931669"/>
             <a:ext cx="8138160" cy="731520"/>
           </a:xfrm>
           <a:prstGeom prst="rect">
@@ -8105,29 +8365,29 @@
           </a:bodyPr>
           <a:lstStyle/>
           <a:p>
-            <a:pPr algn="l">
-              <a:defRPr sz="2400" b="1">
-                <a:solidFill>
-                  <a:srgbClr val="1E1E1E"/>
-                </a:solidFill>
-              </a:defRPr>
-            </a:pPr>
-            <a:r>
-              <a:t>未来工作</a:t>
-            </a:r>
-          </a:p>
-        </p:txBody>
-      </p:sp>
-      <p:sp>
-        <p:nvSpPr>
-          <p:cNvPr id="5" name="TextBox 4"/>
+            <a:pPr algn="ctr">
+              <a:defRPr sz="3200" b="1">
+                <a:solidFill>
+                  <a:srgbClr val="FFFFFF"/>
+                </a:solidFill>
+              </a:defRPr>
+            </a:pPr>
+            <a:r>
+              <a:t>第四部分</a:t>
+            </a:r>
+          </a:p>
+        </p:txBody>
+      </p:sp>
+      <p:sp>
+        <p:nvSpPr>
+          <p:cNvPr id="7" name="TextBox 6"/>
           <p:cNvSpPr txBox="1"/>
           <p:nvPr/>
         </p:nvSpPr>
         <p:spPr>
           <a:xfrm>
-            <a:off x="502920" y="1325880"/>
-            <a:ext cx="8138160" cy="3840480"/>
+            <a:off x="502920" y="2526030"/>
+            <a:ext cx="8138160" cy="731520"/>
           </a:xfrm>
           <a:prstGeom prst="rect">
             <a:avLst/>
@@ -8140,78 +8400,15 @@
           </a:bodyPr>
           <a:lstStyle/>
           <a:p>
-            <a:pPr>
-              <a:spcAft>
-                <a:spcPts val="600"/>
-              </a:spcAft>
-              <a:defRPr sz="1400">
-                <a:solidFill>
-                  <a:srgbClr val="1E1E1E"/>
-                </a:solidFill>
-              </a:defRPr>
-            </a:pPr>
-            <a:r>
-              <a:t>p 对接 Unitree 等人形机器人，完成 speak/gesture/approach 真机视频</a:t>
-            </a:r>
-          </a:p>
-          <a:p>
-            <a:pPr>
-              <a:spcAft>
-                <a:spcPts val="600"/>
-              </a:spcAft>
-              <a:defRPr sz="1400">
-                <a:solidFill>
-                  <a:srgbClr val="1E1E1E"/>
-                </a:solidFill>
-              </a:defRPr>
-            </a:pPr>
-            <a:r>
-              <a:t>p 引入 UR Fall 等公开数据集，开展泛化评测与误报分析</a:t>
-            </a:r>
-          </a:p>
-          <a:p>
-            <a:pPr>
-              <a:spcAft>
-                <a:spcPts val="600"/>
-              </a:spcAft>
-              <a:defRPr sz="1400">
-                <a:solidFill>
-                  <a:srgbClr val="1E1E1E"/>
-                </a:solidFill>
-              </a:defRPr>
-            </a:pPr>
-            <a:r>
-              <a:t>p 多老人房间场景、遮挡与光照鲁棒性优化</a:t>
-            </a:r>
-          </a:p>
-          <a:p>
-            <a:pPr>
-              <a:spcAft>
-                <a:spcPts val="600"/>
-              </a:spcAft>
-              <a:defRPr sz="1400">
-                <a:solidFill>
-                  <a:srgbClr val="1E1E1E"/>
-                </a:solidFill>
-              </a:defRPr>
-            </a:pPr>
-            <a:r>
-              <a:t>p 结合社区/养老院调研，完善产品化与成本评估</a:t>
-            </a:r>
-          </a:p>
-          <a:p>
-            <a:pPr>
-              <a:spcAft>
-                <a:spcPts val="600"/>
-              </a:spcAft>
-              <a:defRPr sz="1400">
-                <a:solidFill>
-                  <a:srgbClr val="1E1E1E"/>
-                </a:solidFill>
-              </a:defRPr>
-            </a:pPr>
-            <a:r>
-              <a:t>p 申请软件著作权 V1.0，探索专利（跌倒融合决策方法）</a:t>
+            <a:pPr algn="ctr">
+              <a:defRPr sz="2000" b="1">
+                <a:solidFill>
+                  <a:srgbClr val="DCE6FF"/>
+                </a:solidFill>
+              </a:defRPr>
+            </a:pPr>
+            <a:r>
+              <a:t>创新点 · 应用价值 · 后续计划</a:t>
             </a:r>
           </a:p>
         </p:txBody>
@@ -8340,7 +8537,7 @@
         </p:nvSpPr>
         <p:spPr>
           <a:xfrm>
-            <a:off x="502920" y="566928"/>
+            <a:off x="502920" y="548640"/>
             <a:ext cx="8138160" cy="731520"/>
           </a:xfrm>
           <a:prstGeom prst="rect">
@@ -8355,14 +8552,14 @@
           <a:lstStyle/>
           <a:p>
             <a:pPr algn="l">
-              <a:defRPr sz="2400" b="1">
+              <a:defRPr sz="2200" b="1">
                 <a:solidFill>
                   <a:srgbClr val="1E1E1E"/>
                 </a:solidFill>
               </a:defRPr>
             </a:pPr>
             <a:r>
-              <a:t>参考文献</a:t>
+              <a:t>创新维度总结</a:t>
             </a:r>
           </a:p>
         </p:txBody>
@@ -8375,8 +8572,8 @@
         </p:nvSpPr>
         <p:spPr>
           <a:xfrm>
-            <a:off x="502920" y="1234440"/>
-            <a:ext cx="8138160" cy="3840480"/>
+            <a:off x="502920" y="960120"/>
+            <a:ext cx="3886200" cy="3840480"/>
           </a:xfrm>
           <a:prstGeom prst="rect">
             <a:avLst/>
@@ -8400,7 +8597,7 @@
               </a:defRPr>
             </a:pPr>
             <a:r>
-              <a:t>[1] Google MediaPipe Pose: Real-time pose estimation.</a:t>
+              <a:t>多模态可解释融合，优于模块堆叠</a:t>
             </a:r>
           </a:p>
           <a:p>
@@ -8415,7 +8612,7 @@
               </a:defRPr>
             </a:pPr>
             <a:r>
-              <a:t>[2] Unitree Robotics SDK / ROS2 documentation.</a:t>
+              <a:t>紧急硬优先级状态机 + 动作闭环</a:t>
             </a:r>
           </a:p>
           <a:p>
@@ -8430,7 +8627,7 @@
               </a:defRPr>
             </a:pPr>
             <a:r>
-              <a:t>[3] 国务院：《「十四五」国家老龄事业发展和养老服务体系规划》.</a:t>
+              <a:t>MediaPipe 视觉接入，非纯滑块</a:t>
             </a:r>
           </a:p>
           <a:p>
@@ -8445,7 +8642,7 @@
               </a:defRPr>
             </a:pPr>
             <a:r>
-              <a:t>[4] CareCompanion 项目文档：docs/TECHNICAL_REPORT.md</a:t>
+              <a:t>工程化：评测脚本 + 开源仓库</a:t>
             </a:r>
           </a:p>
           <a:p>
@@ -8460,11 +8657,80 @@
               </a:defRPr>
             </a:pPr>
             <a:r>
-              <a:t>[5] 仓库：github.com/FBB123571/ElderCare-Humanoid-Platform</a:t>
-            </a:r>
-          </a:p>
-        </p:txBody>
-      </p:sp>
+              <a:t>面向居家养老的应用场景明确</a:t>
+            </a:r>
+          </a:p>
+        </p:txBody>
+      </p:sp>
+      <p:sp>
+        <p:nvSpPr>
+          <p:cNvPr id="6" name="Rectangle 5"/>
+          <p:cNvSpPr/>
+          <p:nvPr/>
+        </p:nvSpPr>
+        <p:spPr>
+          <a:xfrm>
+            <a:off x="4370832" y="896112"/>
+            <a:ext cx="4398264" cy="4096512"/>
+          </a:xfrm>
+          <a:prstGeom prst="rect">
+            <a:avLst/>
+          </a:prstGeom>
+          <a:solidFill>
+            <a:srgbClr val="EBF2FA"/>
+          </a:solidFill>
+          <a:ln>
+            <a:solidFill>
+              <a:srgbClr val="B4C3DC"/>
+            </a:solidFill>
+          </a:ln>
+        </p:spPr>
+        <p:style>
+          <a:lnRef idx="1">
+            <a:schemeClr val="accent1"/>
+          </a:lnRef>
+          <a:fillRef idx="3">
+            <a:schemeClr val="accent1"/>
+          </a:fillRef>
+          <a:effectRef idx="2">
+            <a:schemeClr val="accent1"/>
+          </a:effectRef>
+          <a:fontRef idx="minor">
+            <a:schemeClr val="lt1"/>
+          </a:fontRef>
+        </p:style>
+        <p:txBody>
+          <a:bodyPr rtlCol="0" anchor="ctr"/>
+          <a:lstStyle/>
+          <a:p>
+            <a:pPr algn="ctr"/>
+          </a:p>
+        </p:txBody>
+      </p:sp>
+      <p:pic>
+        <p:nvPicPr>
+          <p:cNvPr id="7" name="Picture 6" descr="innovation_radar.png"/>
+          <p:cNvPicPr>
+            <a:picLocks noChangeAspect="1"/>
+          </p:cNvPicPr>
+          <p:nvPr/>
+        </p:nvPicPr>
+        <p:blipFill>
+          <a:blip r:embed="rId2"/>
+          <a:stretch>
+            <a:fillRect/>
+          </a:stretch>
+        </p:blipFill>
+        <p:spPr>
+          <a:xfrm>
+            <a:off x="4407408" y="932688"/>
+            <a:ext cx="4000022" cy="4023360"/>
+          </a:xfrm>
+          <a:prstGeom prst="rect">
+            <a:avLst/>
+          </a:prstGeom>
+        </p:spPr>
+      </p:pic>
     </p:spTree>
   </p:cSld>
   <p:clrMapOvr>
@@ -8589,7 +8855,7 @@
         </p:nvSpPr>
         <p:spPr>
           <a:xfrm>
-            <a:off x="502920" y="566928"/>
+            <a:off x="502920" y="548640"/>
             <a:ext cx="8138160" cy="731520"/>
           </a:xfrm>
           <a:prstGeom prst="rect">
@@ -8604,21 +8870,164 @@
           <a:lstStyle/>
           <a:p>
             <a:pPr algn="l">
-              <a:defRPr sz="2400" b="1">
+              <a:defRPr sz="2200" b="1">
                 <a:solidFill>
                   <a:srgbClr val="1E1E1E"/>
                 </a:solidFill>
               </a:defRPr>
             </a:pPr>
             <a:r>
-              <a:t>扫码获取代码与演示视频</a:t>
-            </a:r>
+              <a:t>后续工作计划</a:t>
+            </a:r>
+          </a:p>
+        </p:txBody>
+      </p:sp>
+      <p:sp>
+        <p:nvSpPr>
+          <p:cNvPr id="5" name="TextBox 4"/>
+          <p:cNvSpPr txBox="1"/>
+          <p:nvPr/>
+        </p:nvSpPr>
+        <p:spPr>
+          <a:xfrm>
+            <a:off x="502920" y="960120"/>
+            <a:ext cx="3886200" cy="3840480"/>
+          </a:xfrm>
+          <a:prstGeom prst="rect">
+            <a:avLst/>
+          </a:prstGeom>
+          <a:noFill/>
+        </p:spPr>
+        <p:txBody>
+          <a:bodyPr wrap="square">
+            <a:spAutoFit/>
+          </a:bodyPr>
+          <a:lstStyle/>
+          <a:p>
+            <a:pPr>
+              <a:spcAft>
+                <a:spcPts val="600"/>
+              </a:spcAft>
+              <a:defRPr sz="1200">
+                <a:solidFill>
+                  <a:srgbClr val="1E1E1E"/>
+                </a:solidFill>
+              </a:defRPr>
+            </a:pPr>
+            <a:r>
+              <a:t>对接 Unitree 等人形真机</a:t>
+            </a:r>
+          </a:p>
+          <a:p>
+            <a:pPr>
+              <a:spcAft>
+                <a:spcPts val="600"/>
+              </a:spcAft>
+              <a:defRPr sz="1200">
+                <a:solidFill>
+                  <a:srgbClr val="1E1E1E"/>
+                </a:solidFill>
+              </a:defRPr>
+            </a:pPr>
+            <a:r>
+              <a:t>引入 UR Fall 等公开数据集</a:t>
+            </a:r>
+          </a:p>
+          <a:p>
+            <a:pPr>
+              <a:spcAft>
+                <a:spcPts val="600"/>
+              </a:spcAft>
+              <a:defRPr sz="1200">
+                <a:solidFill>
+                  <a:srgbClr val="1E1E1E"/>
+                </a:solidFill>
+              </a:defRPr>
+            </a:pPr>
+            <a:r>
+              <a:t>多房间遮挡与光照优化</a:t>
+            </a:r>
+          </a:p>
+          <a:p>
+            <a:pPr>
+              <a:spcAft>
+                <a:spcPts val="600"/>
+              </a:spcAft>
+              <a:defRPr sz="1200">
+                <a:solidFill>
+                  <a:srgbClr val="1E1E1E"/>
+                </a:solidFill>
+              </a:defRPr>
+            </a:pPr>
+            <a:r>
+              <a:t>养老院调研与产品化评估</a:t>
+            </a:r>
+          </a:p>
+          <a:p>
+            <a:pPr>
+              <a:spcAft>
+                <a:spcPts val="600"/>
+              </a:spcAft>
+              <a:defRPr sz="1200">
+                <a:solidFill>
+                  <a:srgbClr val="1E1E1E"/>
+                </a:solidFill>
+              </a:defRPr>
+            </a:pPr>
+            <a:r>
+              <a:t>软著与专利布局</a:t>
+            </a:r>
+          </a:p>
+        </p:txBody>
+      </p:sp>
+      <p:sp>
+        <p:nvSpPr>
+          <p:cNvPr id="6" name="Rectangle 5"/>
+          <p:cNvSpPr/>
+          <p:nvPr/>
+        </p:nvSpPr>
+        <p:spPr>
+          <a:xfrm>
+            <a:off x="4370832" y="896112"/>
+            <a:ext cx="4398264" cy="4096512"/>
+          </a:xfrm>
+          <a:prstGeom prst="rect">
+            <a:avLst/>
+          </a:prstGeom>
+          <a:solidFill>
+            <a:srgbClr val="EBF2FA"/>
+          </a:solidFill>
+          <a:ln>
+            <a:solidFill>
+              <a:srgbClr val="B4C3DC"/>
+            </a:solidFill>
+          </a:ln>
+        </p:spPr>
+        <p:style>
+          <a:lnRef idx="1">
+            <a:schemeClr val="accent1"/>
+          </a:lnRef>
+          <a:fillRef idx="3">
+            <a:schemeClr val="accent1"/>
+          </a:fillRef>
+          <a:effectRef idx="2">
+            <a:schemeClr val="accent1"/>
+          </a:effectRef>
+          <a:fontRef idx="minor">
+            <a:schemeClr val="lt1"/>
+          </a:fontRef>
+        </p:style>
+        <p:txBody>
+          <a:bodyPr rtlCol="0" anchor="ctr"/>
+          <a:lstStyle/>
+          <a:p>
+            <a:pPr algn="ctr"/>
           </a:p>
         </p:txBody>
       </p:sp>
       <p:pic>
         <p:nvPicPr>
-          <p:cNvPr id="5" name="Picture 4" descr="ppt_demo_qr.png"/>
+          <p:cNvPr id="7" name="Picture 6" descr="roadmap.png"/>
           <p:cNvPicPr>
             <a:picLocks noChangeAspect="1"/>
           </p:cNvPicPr>
@@ -8632,65 +9041,14 @@
         </p:blipFill>
         <p:spPr>
           <a:xfrm>
-            <a:off x="3429000" y="1115568"/>
-            <a:ext cx="2286000" cy="2286000"/>
+            <a:off x="4407408" y="932688"/>
+            <a:ext cx="4325112" cy="1781728"/>
           </a:xfrm>
           <a:prstGeom prst="rect">
             <a:avLst/>
           </a:prstGeom>
         </p:spPr>
       </p:pic>
-      <p:sp>
-        <p:nvSpPr>
-          <p:cNvPr id="6" name="TextBox 5"/>
-          <p:cNvSpPr txBox="1"/>
-          <p:nvPr/>
-        </p:nvSpPr>
-        <p:spPr>
-          <a:xfrm>
-            <a:off x="411480" y="3611880"/>
-            <a:ext cx="8321040" cy="1005840"/>
-          </a:xfrm>
-          <a:prstGeom prst="rect">
-            <a:avLst/>
-          </a:prstGeom>
-          <a:noFill/>
-        </p:spPr>
-        <p:txBody>
-          <a:bodyPr wrap="square">
-            <a:spAutoFit/>
-          </a:bodyPr>
-          <a:lstStyle/>
-          <a:p>
-            <a:pPr algn="ctr">
-              <a:defRPr sz="1200">
-                <a:solidFill>
-                  <a:srgbClr val="505050"/>
-                </a:solidFill>
-              </a:defRPr>
-            </a:pPr>
-            <a:r>
-              <a:t>扫码进入 GitHub 仓库</a:t>
-            </a:r>
-            <a:br/>
-            <a:r>
-              <a:t>https://github.com/FBB123571/ElderCare-Humanoid-Platform</a:t>
-            </a:r>
-          </a:p>
-          <a:p>
-            <a:pPr algn="ctr">
-              <a:defRPr sz="1100">
-                <a:solidFill>
-                  <a:srgbClr val="505050"/>
-                </a:solidFill>
-              </a:defRPr>
-            </a:pPr>
-            <a:r>
-              <a:t>演示视频：仓库内 docs/assets/demo_carecompanion.mp4</a:t>
-            </a:r>
-          </a:p>
-        </p:txBody>
-      </p:sp>
     </p:spTree>
   </p:cSld>
   <p:clrMapOvr>
@@ -8815,8 +9173,8 @@
         </p:nvSpPr>
         <p:spPr>
           <a:xfrm>
-            <a:off x="502920" y="2068830"/>
-            <a:ext cx="8138160" cy="914400"/>
+            <a:off x="502920" y="548640"/>
+            <a:ext cx="8138160" cy="731520"/>
           </a:xfrm>
           <a:prstGeom prst="rect">
             <a:avLst/>
@@ -8824,20 +9182,20 @@
           <a:noFill/>
         </p:spPr>
         <p:txBody>
-          <a:bodyPr wrap="none">
+          <a:bodyPr wrap="square">
             <a:spAutoFit/>
           </a:bodyPr>
           <a:lstStyle/>
           <a:p>
-            <a:pPr algn="ctr">
-              <a:defRPr sz="3200" b="1">
-                <a:solidFill>
-                  <a:srgbClr val="143278"/>
-                </a:solidFill>
-              </a:defRPr>
-            </a:pPr>
-            <a:r>
-              <a:t>敬请批评指正</a:t>
+            <a:pPr algn="l">
+              <a:defRPr sz="2200" b="1">
+                <a:solidFill>
+                  <a:srgbClr val="1E1E1E"/>
+                </a:solidFill>
+              </a:defRPr>
+            </a:pPr>
+            <a:r>
+              <a:t>参考文献与资料</a:t>
             </a:r>
           </a:p>
         </p:txBody>
@@ -8850,8 +9208,8 @@
         </p:nvSpPr>
         <p:spPr>
           <a:xfrm>
-            <a:off x="502920" y="2891790"/>
-            <a:ext cx="8138160" cy="457200"/>
+            <a:off x="502920" y="960120"/>
+            <a:ext cx="3886200" cy="3840480"/>
           </a:xfrm>
           <a:prstGeom prst="rect">
             <a:avLst/>
@@ -8859,24 +9217,156 @@
           <a:noFill/>
         </p:spPr>
         <p:txBody>
-          <a:bodyPr wrap="none">
+          <a:bodyPr wrap="square">
             <a:spAutoFit/>
           </a:bodyPr>
           <a:lstStyle/>
           <a:p>
-            <a:pPr algn="ctr">
-              <a:defRPr sz="1600">
-                <a:solidFill>
-                  <a:srgbClr val="505050"/>
-                </a:solidFill>
-              </a:defRPr>
-            </a:pPr>
-            <a:r>
-              <a:t>从容应队 · 中山大学 · 感谢各位评委老师</a:t>
-            </a:r>
-          </a:p>
-        </p:txBody>
-      </p:sp>
+            <a:pPr>
+              <a:spcAft>
+                <a:spcPts val="600"/>
+              </a:spcAft>
+              <a:defRPr sz="1200">
+                <a:solidFill>
+                  <a:srgbClr val="1E1E1E"/>
+                </a:solidFill>
+              </a:defRPr>
+            </a:pPr>
+            <a:r>
+              <a:t>[1] Google MediaPipe Pose</a:t>
+            </a:r>
+          </a:p>
+          <a:p>
+            <a:pPr>
+              <a:spcAft>
+                <a:spcPts val="600"/>
+              </a:spcAft>
+              <a:defRPr sz="1200">
+                <a:solidFill>
+                  <a:srgbClr val="1E1E1E"/>
+                </a:solidFill>
+              </a:defRPr>
+            </a:pPr>
+            <a:r>
+              <a:t>[2] Unitree / ROS2 文档</a:t>
+            </a:r>
+          </a:p>
+          <a:p>
+            <a:pPr>
+              <a:spcAft>
+                <a:spcPts val="600"/>
+              </a:spcAft>
+              <a:defRPr sz="1200">
+                <a:solidFill>
+                  <a:srgbClr val="1E1E1E"/>
+                </a:solidFill>
+              </a:defRPr>
+            </a:pPr>
+            <a:r>
+              <a:t>[3] 「十四五」养老服务规划</a:t>
+            </a:r>
+          </a:p>
+          <a:p>
+            <a:pPr>
+              <a:spcAft>
+                <a:spcPts val="600"/>
+              </a:spcAft>
+              <a:defRPr sz="1200">
+                <a:solidFill>
+                  <a:srgbClr val="1E1E1E"/>
+                </a:solidFill>
+              </a:defRPr>
+            </a:pPr>
+            <a:r>
+              <a:t>[4] docs/TECHNICAL_REPORT.md</a:t>
+            </a:r>
+          </a:p>
+          <a:p>
+            <a:pPr>
+              <a:spcAft>
+                <a:spcPts val="600"/>
+              </a:spcAft>
+              <a:defRPr sz="1200">
+                <a:solidFill>
+                  <a:srgbClr val="1E1E1E"/>
+                </a:solidFill>
+              </a:defRPr>
+            </a:pPr>
+            <a:r>
+              <a:t>[5] GitHub 开源仓库</a:t>
+            </a:r>
+          </a:p>
+        </p:txBody>
+      </p:sp>
+      <p:sp>
+        <p:nvSpPr>
+          <p:cNvPr id="6" name="Rectangle 5"/>
+          <p:cNvSpPr/>
+          <p:nvPr/>
+        </p:nvSpPr>
+        <p:spPr>
+          <a:xfrm>
+            <a:off x="4370832" y="896112"/>
+            <a:ext cx="4398264" cy="4096512"/>
+          </a:xfrm>
+          <a:prstGeom prst="rect">
+            <a:avLst/>
+          </a:prstGeom>
+          <a:solidFill>
+            <a:srgbClr val="EBF2FA"/>
+          </a:solidFill>
+          <a:ln>
+            <a:solidFill>
+              <a:srgbClr val="B4C3DC"/>
+            </a:solidFill>
+          </a:ln>
+        </p:spPr>
+        <p:style>
+          <a:lnRef idx="1">
+            <a:schemeClr val="accent1"/>
+          </a:lnRef>
+          <a:fillRef idx="3">
+            <a:schemeClr val="accent1"/>
+          </a:fillRef>
+          <a:effectRef idx="2">
+            <a:schemeClr val="accent1"/>
+          </a:effectRef>
+          <a:fontRef idx="minor">
+            <a:schemeClr val="lt1"/>
+          </a:fontRef>
+        </p:style>
+        <p:txBody>
+          <a:bodyPr rtlCol="0" anchor="ctr"/>
+          <a:lstStyle/>
+          <a:p>
+            <a:pPr algn="ctr"/>
+          </a:p>
+        </p:txBody>
+      </p:sp>
+      <p:pic>
+        <p:nvPicPr>
+          <p:cNvPr id="7" name="Picture 6" descr="pipeline.png"/>
+          <p:cNvPicPr>
+            <a:picLocks noChangeAspect="1"/>
+          </p:cNvPicPr>
+          <p:nvPr/>
+        </p:nvPicPr>
+        <p:blipFill>
+          <a:blip r:embed="rId2"/>
+          <a:stretch>
+            <a:fillRect/>
+          </a:stretch>
+        </p:blipFill>
+        <p:spPr>
+          <a:xfrm>
+            <a:off x="4407408" y="932688"/>
+            <a:ext cx="4325112" cy="1781728"/>
+          </a:xfrm>
+          <a:prstGeom prst="rect">
+            <a:avLst/>
+          </a:prstGeom>
+        </p:spPr>
+      </p:pic>
     </p:spTree>
   </p:cSld>
   <p:clrMapOvr>
@@ -9001,7 +9491,7 @@
         </p:nvSpPr>
         <p:spPr>
           <a:xfrm>
-            <a:off x="502920" y="2068830"/>
+            <a:off x="502920" y="548640"/>
             <a:ext cx="8138160" cy="731520"/>
           </a:xfrm>
           <a:prstGeom prst="rect">
@@ -9015,15 +9505,15 @@
           </a:bodyPr>
           <a:lstStyle/>
           <a:p>
-            <a:pPr algn="ctr">
-              <a:defRPr sz="3000" b="1">
+            <a:pPr algn="l">
+              <a:defRPr sz="2200" b="1">
                 <a:solidFill>
                   <a:srgbClr val="1E1E1E"/>
                 </a:solidFill>
               </a:defRPr>
             </a:pPr>
             <a:r>
-              <a:t>第一部分</a:t>
+              <a:t>参赛信息</a:t>
             </a:r>
           </a:p>
         </p:txBody>
@@ -9036,8 +9526,8 @@
         </p:nvSpPr>
         <p:spPr>
           <a:xfrm>
-            <a:off x="502920" y="2617470"/>
-            <a:ext cx="8138160" cy="731520"/>
+            <a:off x="502920" y="960120"/>
+            <a:ext cx="3886200" cy="3840480"/>
           </a:xfrm>
           <a:prstGeom prst="rect">
             <a:avLst/>
@@ -9050,15 +9540,658 @@
           </a:bodyPr>
           <a:lstStyle/>
           <a:p>
+            <a:pPr>
+              <a:spcAft>
+                <a:spcPts val="600"/>
+              </a:spcAft>
+              <a:defRPr sz="1200">
+                <a:solidFill>
+                  <a:srgbClr val="1E1E1E"/>
+                </a:solidFill>
+              </a:defRPr>
+            </a:pPr>
+            <a:r>
+              <a:t>作品：基于大语言模型的智能养老陪伴机器人仿真平台</a:t>
+            </a:r>
+          </a:p>
+          <a:p>
+            <a:pPr>
+              <a:spcAft>
+                <a:spcPts val="600"/>
+              </a:spcAft>
+              <a:defRPr sz="1200">
+                <a:solidFill>
+                  <a:srgbClr val="1E1E1E"/>
+                </a:solidFill>
+              </a:defRPr>
+            </a:pPr>
+            <a:r>
+              <a:t>赛项：创新赛 · 机器人创新赛道</a:t>
+            </a:r>
+          </a:p>
+          <a:p>
+            <a:pPr>
+              <a:spcAft>
+                <a:spcPts val="600"/>
+              </a:spcAft>
+              <a:defRPr sz="1200">
+                <a:solidFill>
+                  <a:srgbClr val="1E1E1E"/>
+                </a:solidFill>
+              </a:defRPr>
+            </a:pPr>
+            <a:r>
+              <a:t>团队编号：CRAIC2026-TEAM-8FJQKLMI</a:t>
+            </a:r>
+          </a:p>
+          <a:p>
+            <a:pPr>
+              <a:spcAft>
+                <a:spcPts val="600"/>
+              </a:spcAft>
+              <a:defRPr sz="1200">
+                <a:solidFill>
+                  <a:srgbClr val="1E1E1E"/>
+                </a:solidFill>
+              </a:defRPr>
+            </a:pPr>
+            <a:r>
+              <a:t>作品编号：CRAIC20264ZEFT1DF</a:t>
+            </a:r>
+          </a:p>
+          <a:p>
+            <a:pPr>
+              <a:spcAft>
+                <a:spcPts val="600"/>
+              </a:spcAft>
+              <a:defRPr sz="1200">
+                <a:solidFill>
+                  <a:srgbClr val="1E1E1E"/>
+                </a:solidFill>
+              </a:defRPr>
+            </a:pPr>
+            <a:r>
+              <a:t>队员：刘小凡（队长）、白冉</a:t>
+            </a:r>
+          </a:p>
+          <a:p>
+            <a:pPr>
+              <a:spcAft>
+                <a:spcPts val="600"/>
+              </a:spcAft>
+              <a:defRPr sz="1200">
+                <a:solidFill>
+                  <a:srgbClr val="1E1E1E"/>
+                </a:solidFill>
+              </a:defRPr>
+            </a:pPr>
+            <a:r>
+              <a:t>指导教师：彭键清</a:t>
+            </a:r>
+          </a:p>
+        </p:txBody>
+      </p:sp>
+      <p:sp>
+        <p:nvSpPr>
+          <p:cNvPr id="6" name="Rectangle 5"/>
+          <p:cNvSpPr/>
+          <p:nvPr/>
+        </p:nvSpPr>
+        <p:spPr>
+          <a:xfrm>
+            <a:off x="4370832" y="896112"/>
+            <a:ext cx="4398264" cy="4096512"/>
+          </a:xfrm>
+          <a:prstGeom prst="rect">
+            <a:avLst/>
+          </a:prstGeom>
+          <a:solidFill>
+            <a:srgbClr val="EBF2FA"/>
+          </a:solidFill>
+          <a:ln>
+            <a:solidFill>
+              <a:srgbClr val="B4C3DC"/>
+            </a:solidFill>
+          </a:ln>
+        </p:spPr>
+        <p:style>
+          <a:lnRef idx="1">
+            <a:schemeClr val="accent1"/>
+          </a:lnRef>
+          <a:fillRef idx="3">
+            <a:schemeClr val="accent1"/>
+          </a:fillRef>
+          <a:effectRef idx="2">
+            <a:schemeClr val="accent1"/>
+          </a:effectRef>
+          <a:fontRef idx="minor">
+            <a:schemeClr val="lt1"/>
+          </a:fontRef>
+        </p:style>
+        <p:txBody>
+          <a:bodyPr rtlCol="0" anchor="ctr"/>
+          <a:lstStyle/>
+          <a:p>
+            <a:pPr algn="ctr"/>
+          </a:p>
+        </p:txBody>
+      </p:sp>
+      <p:pic>
+        <p:nvPicPr>
+          <p:cNvPr id="7" name="Picture 6" descr="team_card.png"/>
+          <p:cNvPicPr>
+            <a:picLocks noChangeAspect="1"/>
+          </p:cNvPicPr>
+          <p:nvPr/>
+        </p:nvPicPr>
+        <p:blipFill>
+          <a:blip r:embed="rId2"/>
+          <a:stretch>
+            <a:fillRect/>
+          </a:stretch>
+        </p:blipFill>
+        <p:spPr>
+          <a:xfrm>
+            <a:off x="4407408" y="932688"/>
+            <a:ext cx="4325112" cy="3259688"/>
+          </a:xfrm>
+          <a:prstGeom prst="rect">
+            <a:avLst/>
+          </a:prstGeom>
+        </p:spPr>
+      </p:pic>
+    </p:spTree>
+  </p:cSld>
+  <p:clrMapOvr>
+    <a:masterClrMapping/>
+  </p:clrMapOvr>
+</p:sld>
+</file>
+
+<file path=ppt/slides/slide30.xml><?xml version="1.0" encoding="utf-8"?>
+<p:sld xmlns:a="http://schemas.openxmlformats.org/drawingml/2006/main" xmlns:p="http://schemas.openxmlformats.org/presentationml/2006/main" xmlns:r="http://schemas.openxmlformats.org/officeDocument/2006/relationships">
+  <p:cSld>
+    <p:bg>
+      <p:bgPr>
+        <a:solidFill>
+          <a:srgbClr val="FFFFFF"/>
+        </a:solidFill>
+        <a:effectLst/>
+      </p:bgPr>
+    </p:bg>
+    <p:spTree>
+      <p:nvGrpSpPr>
+        <p:cNvPr id="1" name=""/>
+        <p:cNvGrpSpPr/>
+        <p:nvPr/>
+      </p:nvGrpSpPr>
+      <p:grpSpPr/>
+      <p:sp>
+        <p:nvSpPr>
+          <p:cNvPr id="2" name="Rectangle 1"/>
+          <p:cNvSpPr/>
+          <p:nvPr/>
+        </p:nvSpPr>
+        <p:spPr>
+          <a:xfrm>
+            <a:off x="0" y="0"/>
+            <a:ext cx="9144000" cy="475488"/>
+          </a:xfrm>
+          <a:prstGeom prst="rect">
+            <a:avLst/>
+          </a:prstGeom>
+          <a:solidFill>
+            <a:srgbClr val="143278"/>
+          </a:solidFill>
+          <a:ln>
+            <a:noFill/>
+          </a:ln>
+        </p:spPr>
+        <p:style>
+          <a:lnRef idx="1">
+            <a:schemeClr val="accent1"/>
+          </a:lnRef>
+          <a:fillRef idx="3">
+            <a:schemeClr val="accent1"/>
+          </a:fillRef>
+          <a:effectRef idx="2">
+            <a:schemeClr val="accent1"/>
+          </a:effectRef>
+          <a:fontRef idx="minor">
+            <a:schemeClr val="lt1"/>
+          </a:fontRef>
+        </p:style>
+        <p:txBody>
+          <a:bodyPr rtlCol="0" anchor="ctr"/>
+          <a:lstStyle/>
+          <a:p>
+            <a:pPr algn="ctr"/>
+          </a:p>
+        </p:txBody>
+      </p:sp>
+      <p:sp>
+        <p:nvSpPr>
+          <p:cNvPr id="3" name="TextBox 2"/>
+          <p:cNvSpPr txBox="1"/>
+          <p:nvPr/>
+        </p:nvSpPr>
+        <p:spPr>
+          <a:xfrm>
+            <a:off x="137160" y="73152"/>
+            <a:ext cx="8869680" cy="411480"/>
+          </a:xfrm>
+          <a:prstGeom prst="rect">
+            <a:avLst/>
+          </a:prstGeom>
+          <a:noFill/>
+        </p:spPr>
+        <p:txBody>
+          <a:bodyPr wrap="none">
+            <a:spAutoFit/>
+          </a:bodyPr>
+          <a:lstStyle/>
+          <a:p>
+            <a:pPr>
+              <a:defRPr sz="1000" b="1">
+                <a:solidFill>
+                  <a:srgbClr val="FFFFFF"/>
+                </a:solidFill>
+              </a:defRPr>
+            </a:pPr>
+            <a:r>
+              <a:t>第二十八届中国机器人及人工智能大赛</a:t>
+            </a:r>
+          </a:p>
+          <a:p>
+            <a:pPr>
+              <a:defRPr sz="1000">
+                <a:solidFill>
+                  <a:srgbClr val="C8DCFF"/>
+                </a:solidFill>
+              </a:defRPr>
+            </a:pPr>
+            <a:r>
+              <a:t>创新赛 · 机器人创新赛道</a:t>
+            </a:r>
+          </a:p>
+        </p:txBody>
+      </p:sp>
+      <p:sp>
+        <p:nvSpPr>
+          <p:cNvPr id="4" name="TextBox 3"/>
+          <p:cNvSpPr txBox="1"/>
+          <p:nvPr/>
+        </p:nvSpPr>
+        <p:spPr>
+          <a:xfrm>
+            <a:off x="502920" y="548640"/>
+            <a:ext cx="8138160" cy="731520"/>
+          </a:xfrm>
+          <a:prstGeom prst="rect">
+            <a:avLst/>
+          </a:prstGeom>
+          <a:noFill/>
+        </p:spPr>
+        <p:txBody>
+          <a:bodyPr wrap="square">
+            <a:spAutoFit/>
+          </a:bodyPr>
+          <a:lstStyle/>
+          <a:p>
+            <a:pPr algn="l">
+              <a:defRPr sz="2200" b="1">
+                <a:solidFill>
+                  <a:srgbClr val="1E1E1E"/>
+                </a:solidFill>
+              </a:defRPr>
+            </a:pPr>
+            <a:r>
+              <a:t>扫码查看代码与演示视频</a:t>
+            </a:r>
+          </a:p>
+        </p:txBody>
+      </p:sp>
+      <p:sp>
+        <p:nvSpPr>
+          <p:cNvPr id="5" name="TextBox 4"/>
+          <p:cNvSpPr txBox="1"/>
+          <p:nvPr/>
+        </p:nvSpPr>
+        <p:spPr>
+          <a:xfrm>
+            <a:off x="502920" y="960120"/>
+            <a:ext cx="3886200" cy="3840480"/>
+          </a:xfrm>
+          <a:prstGeom prst="rect">
+            <a:avLst/>
+          </a:prstGeom>
+          <a:noFill/>
+        </p:spPr>
+        <p:txBody>
+          <a:bodyPr wrap="square">
+            <a:spAutoFit/>
+          </a:bodyPr>
+          <a:lstStyle/>
+          <a:p>
+            <a:pPr>
+              <a:spcAft>
+                <a:spcPts val="600"/>
+              </a:spcAft>
+              <a:defRPr sz="1200">
+                <a:solidFill>
+                  <a:srgbClr val="1E1E1E"/>
+                </a:solidFill>
+              </a:defRPr>
+            </a:pPr>
+            <a:r>
+              <a:t>GitHub 完整源码与文档</a:t>
+            </a:r>
+          </a:p>
+          <a:p>
+            <a:pPr>
+              <a:spcAft>
+                <a:spcPts val="600"/>
+              </a:spcAft>
+              <a:defRPr sz="1200">
+                <a:solidFill>
+                  <a:srgbClr val="1E1E1E"/>
+                </a:solidFill>
+              </a:defRPr>
+            </a:pPr>
+            <a:r>
+              <a:t>在线 Web 演示（现场可复现）</a:t>
+            </a:r>
+          </a:p>
+          <a:p>
+            <a:pPr>
+              <a:spcAft>
+                <a:spcPts val="600"/>
+              </a:spcAft>
+              <a:defRPr sz="1200">
+                <a:solidFill>
+                  <a:srgbClr val="1E1E1E"/>
+                </a:solidFill>
+              </a:defRPr>
+            </a:pPr>
+            <a:r>
+              <a:t>演示录像已附仓库</a:t>
+            </a:r>
+          </a:p>
+          <a:p>
+            <a:pPr>
+              <a:spcAft>
+                <a:spcPts val="600"/>
+              </a:spcAft>
+              <a:defRPr sz="1200">
+                <a:solidFill>
+                  <a:srgbClr val="1E1E1E"/>
+                </a:solidFill>
+              </a:defRPr>
+            </a:pPr>
+            <a:r>
+              <a:t>欢迎评委扫码查阅</a:t>
+            </a:r>
+          </a:p>
+        </p:txBody>
+      </p:sp>
+      <p:pic>
+        <p:nvPicPr>
+          <p:cNvPr id="6" name="Picture 5" descr="ppt_demo_qr.png"/>
+          <p:cNvPicPr>
+            <a:picLocks noChangeAspect="1"/>
+          </p:cNvPicPr>
+          <p:nvPr/>
+        </p:nvPicPr>
+        <p:blipFill>
+          <a:blip r:embed="rId2"/>
+          <a:stretch>
+            <a:fillRect/>
+          </a:stretch>
+        </p:blipFill>
+        <p:spPr>
+          <a:xfrm>
+            <a:off x="4407408" y="932688"/>
+            <a:ext cx="2011680" cy="2011680"/>
+          </a:xfrm>
+          <a:prstGeom prst="rect">
+            <a:avLst/>
+          </a:prstGeom>
+        </p:spPr>
+      </p:pic>
+      <p:pic>
+        <p:nvPicPr>
+          <p:cNvPr id="7" name="Picture 6" descr="ppt_mediapipe_pose.png"/>
+          <p:cNvPicPr>
+            <a:picLocks noChangeAspect="1"/>
+          </p:cNvPicPr>
+          <p:nvPr/>
+        </p:nvPicPr>
+        <p:blipFill>
+          <a:blip r:embed="rId3"/>
+          <a:stretch>
+            <a:fillRect/>
+          </a:stretch>
+        </p:blipFill>
+        <p:spPr>
+          <a:xfrm>
+            <a:off x="6601968" y="1024128"/>
+            <a:ext cx="1220724" cy="1828800"/>
+          </a:xfrm>
+          <a:prstGeom prst="rect">
+            <a:avLst/>
+          </a:prstGeom>
+        </p:spPr>
+      </p:pic>
+    </p:spTree>
+  </p:cSld>
+  <p:clrMapOvr>
+    <a:masterClrMapping/>
+  </p:clrMapOvr>
+</p:sld>
+</file>
+
+<file path=ppt/slides/slide31.xml><?xml version="1.0" encoding="utf-8"?>
+<p:sld xmlns:a="http://schemas.openxmlformats.org/drawingml/2006/main" xmlns:p="http://schemas.openxmlformats.org/presentationml/2006/main" xmlns:r="http://schemas.openxmlformats.org/officeDocument/2006/relationships">
+  <p:cSld>
+    <p:spTree>
+      <p:nvGrpSpPr>
+        <p:cNvPr id="1" name=""/>
+        <p:cNvGrpSpPr/>
+        <p:nvPr/>
+      </p:nvGrpSpPr>
+      <p:grpSpPr/>
+      <p:sp>
+        <p:nvSpPr>
+          <p:cNvPr id="2" name="Rectangle 1"/>
+          <p:cNvSpPr/>
+          <p:nvPr/>
+        </p:nvSpPr>
+        <p:spPr>
+          <a:xfrm>
+            <a:off x="0" y="0"/>
+            <a:ext cx="9144000" cy="475488"/>
+          </a:xfrm>
+          <a:prstGeom prst="rect">
+            <a:avLst/>
+          </a:prstGeom>
+          <a:solidFill>
+            <a:srgbClr val="143278"/>
+          </a:solidFill>
+          <a:ln>
+            <a:noFill/>
+          </a:ln>
+        </p:spPr>
+        <p:style>
+          <a:lnRef idx="1">
+            <a:schemeClr val="accent1"/>
+          </a:lnRef>
+          <a:fillRef idx="3">
+            <a:schemeClr val="accent1"/>
+          </a:fillRef>
+          <a:effectRef idx="2">
+            <a:schemeClr val="accent1"/>
+          </a:effectRef>
+          <a:fontRef idx="minor">
+            <a:schemeClr val="lt1"/>
+          </a:fontRef>
+        </p:style>
+        <p:txBody>
+          <a:bodyPr rtlCol="0" anchor="ctr"/>
+          <a:lstStyle/>
+          <a:p>
+            <a:pPr algn="ctr"/>
+          </a:p>
+        </p:txBody>
+      </p:sp>
+      <p:sp>
+        <p:nvSpPr>
+          <p:cNvPr id="3" name="TextBox 2"/>
+          <p:cNvSpPr txBox="1"/>
+          <p:nvPr/>
+        </p:nvSpPr>
+        <p:spPr>
+          <a:xfrm>
+            <a:off x="137160" y="73152"/>
+            <a:ext cx="8869680" cy="411480"/>
+          </a:xfrm>
+          <a:prstGeom prst="rect">
+            <a:avLst/>
+          </a:prstGeom>
+          <a:noFill/>
+        </p:spPr>
+        <p:txBody>
+          <a:bodyPr wrap="none">
+            <a:spAutoFit/>
+          </a:bodyPr>
+          <a:lstStyle/>
+          <a:p>
+            <a:pPr>
+              <a:defRPr sz="1000" b="1">
+                <a:solidFill>
+                  <a:srgbClr val="FFFFFF"/>
+                </a:solidFill>
+              </a:defRPr>
+            </a:pPr>
+            <a:r>
+              <a:t>第二十八届中国机器人及人工智能大赛</a:t>
+            </a:r>
+          </a:p>
+          <a:p>
+            <a:pPr>
+              <a:defRPr sz="1000">
+                <a:solidFill>
+                  <a:srgbClr val="C8DCFF"/>
+                </a:solidFill>
+              </a:defRPr>
+            </a:pPr>
+            <a:r>
+              <a:t>创新赛 · 机器人创新赛道</a:t>
+            </a:r>
+          </a:p>
+        </p:txBody>
+      </p:sp>
+      <p:pic>
+        <p:nvPicPr>
+          <p:cNvPr id="4" name="Picture 3" descr="cover_banner.png"/>
+          <p:cNvPicPr>
+            <a:picLocks noChangeAspect="1"/>
+          </p:cNvPicPr>
+          <p:nvPr/>
+        </p:nvPicPr>
+        <p:blipFill>
+          <a:blip r:embed="rId2"/>
+          <a:stretch>
+            <a:fillRect/>
+          </a:stretch>
+        </p:blipFill>
+        <p:spPr>
+          <a:xfrm>
+            <a:off x="0" y="475488"/>
+            <a:ext cx="9144000" cy="4668012"/>
+          </a:xfrm>
+          <a:prstGeom prst="rect">
+            <a:avLst/>
+          </a:prstGeom>
+        </p:spPr>
+      </p:pic>
+      <p:sp>
+        <p:nvSpPr>
+          <p:cNvPr id="5" name="TextBox 4"/>
+          <p:cNvSpPr txBox="1"/>
+          <p:nvPr/>
+        </p:nvSpPr>
+        <p:spPr>
+          <a:xfrm>
+            <a:off x="502920" y="2068830"/>
+            <a:ext cx="8138160" cy="914400"/>
+          </a:xfrm>
+          <a:prstGeom prst="rect">
+            <a:avLst/>
+          </a:prstGeom>
+          <a:noFill/>
+        </p:spPr>
+        <p:txBody>
+          <a:bodyPr wrap="none">
+            <a:spAutoFit/>
+          </a:bodyPr>
+          <a:lstStyle/>
+          <a:p>
             <a:pPr algn="ctr">
-              <a:defRPr sz="2000" b="1">
-                <a:solidFill>
-                  <a:srgbClr val="143278"/>
-                </a:solidFill>
-              </a:defRPr>
-            </a:pPr>
-            <a:r>
-              <a:t>项目背景与需求分析</a:t>
+              <a:defRPr sz="3400" b="1">
+                <a:solidFill>
+                  <a:srgbClr val="FFFFFF"/>
+                </a:solidFill>
+              </a:defRPr>
+            </a:pPr>
+            <a:r>
+              <a:t>敬请批评指正</a:t>
+            </a:r>
+          </a:p>
+        </p:txBody>
+      </p:sp>
+      <p:sp>
+        <p:nvSpPr>
+          <p:cNvPr id="6" name="TextBox 5"/>
+          <p:cNvSpPr txBox="1"/>
+          <p:nvPr/>
+        </p:nvSpPr>
+        <p:spPr>
+          <a:xfrm>
+            <a:off x="502920" y="2754630"/>
+            <a:ext cx="8138160" cy="731520"/>
+          </a:xfrm>
+          <a:prstGeom prst="rect">
+            <a:avLst/>
+          </a:prstGeom>
+          <a:noFill/>
+        </p:spPr>
+        <p:txBody>
+          <a:bodyPr wrap="none">
+            <a:spAutoFit/>
+          </a:bodyPr>
+          <a:lstStyle/>
+          <a:p>
+            <a:pPr algn="ctr">
+              <a:defRPr sz="1400">
+                <a:solidFill>
+                  <a:srgbClr val="DCE6FF"/>
+                </a:solidFill>
+              </a:defRPr>
+            </a:pPr>
+            <a:r>
+              <a:t>从容应队 · 中山大学</a:t>
+            </a:r>
+          </a:p>
+          <a:p>
+            <a:pPr algn="ctr">
+              <a:defRPr sz="1400">
+                <a:solidFill>
+                  <a:srgbClr val="DCE6FF"/>
+                </a:solidFill>
+              </a:defRPr>
+            </a:pPr>
+            <a:r>
+              <a:t>刘小凡 · 白冉 · 指导教师 彭键清</a:t>
             </a:r>
           </a:p>
         </p:txBody>
@@ -9179,15 +10312,82 @@
           </a:p>
         </p:txBody>
       </p:sp>
-      <p:sp>
-        <p:nvSpPr>
-          <p:cNvPr id="4" name="TextBox 3"/>
+      <p:pic>
+        <p:nvPicPr>
+          <p:cNvPr id="4" name="Picture 3" descr="cover_banner.png"/>
+          <p:cNvPicPr>
+            <a:picLocks noChangeAspect="1"/>
+          </p:cNvPicPr>
+          <p:nvPr/>
+        </p:nvPicPr>
+        <p:blipFill>
+          <a:blip r:embed="rId2"/>
+          <a:stretch>
+            <a:fillRect/>
+          </a:stretch>
+        </p:blipFill>
+        <p:spPr>
+          <a:xfrm>
+            <a:off x="0" y="475488"/>
+            <a:ext cx="9144000" cy="4668012"/>
+          </a:xfrm>
+          <a:prstGeom prst="rect">
+            <a:avLst/>
+          </a:prstGeom>
+        </p:spPr>
+      </p:pic>
+      <p:sp>
+        <p:nvSpPr>
+          <p:cNvPr id="5" name="Rectangle 4"/>
+          <p:cNvSpPr/>
+          <p:nvPr/>
+        </p:nvSpPr>
+        <p:spPr>
+          <a:xfrm>
+            <a:off x="0" y="475488"/>
+            <a:ext cx="9144000" cy="4668012"/>
+          </a:xfrm>
+          <a:prstGeom prst="rect">
+            <a:avLst/>
+          </a:prstGeom>
+          <a:solidFill>
+            <a:srgbClr val="143278"/>
+          </a:solidFill>
+          <a:ln>
+            <a:noFill/>
+          </a:ln>
+        </p:spPr>
+        <p:style>
+          <a:lnRef idx="1">
+            <a:schemeClr val="accent1"/>
+          </a:lnRef>
+          <a:fillRef idx="3">
+            <a:schemeClr val="accent1"/>
+          </a:fillRef>
+          <a:effectRef idx="2">
+            <a:schemeClr val="accent1"/>
+          </a:effectRef>
+          <a:fontRef idx="minor">
+            <a:schemeClr val="lt1"/>
+          </a:fontRef>
+        </p:style>
+        <p:txBody>
+          <a:bodyPr rtlCol="0" anchor="ctr"/>
+          <a:lstStyle/>
+          <a:p>
+            <a:pPr algn="ctr"/>
+          </a:p>
+        </p:txBody>
+      </p:sp>
+      <p:sp>
+        <p:nvSpPr>
+          <p:cNvPr id="6" name="TextBox 5"/>
           <p:cNvSpPr txBox="1"/>
           <p:nvPr/>
         </p:nvSpPr>
         <p:spPr>
           <a:xfrm>
-            <a:off x="502920" y="566928"/>
+            <a:off x="502920" y="1931669"/>
             <a:ext cx="8138160" cy="731520"/>
           </a:xfrm>
           <a:prstGeom prst="rect">
@@ -9201,29 +10401,29 @@
           </a:bodyPr>
           <a:lstStyle/>
           <a:p>
-            <a:pPr algn="l">
-              <a:defRPr sz="2400" b="1">
-                <a:solidFill>
-                  <a:srgbClr val="1E1E1E"/>
-                </a:solidFill>
-              </a:defRPr>
-            </a:pPr>
-            <a:r>
-              <a:t>社会背景与痛点</a:t>
-            </a:r>
-          </a:p>
-        </p:txBody>
-      </p:sp>
-      <p:sp>
-        <p:nvSpPr>
-          <p:cNvPr id="5" name="TextBox 4"/>
+            <a:pPr algn="ctr">
+              <a:defRPr sz="3200" b="1">
+                <a:solidFill>
+                  <a:srgbClr val="FFFFFF"/>
+                </a:solidFill>
+              </a:defRPr>
+            </a:pPr>
+            <a:r>
+              <a:t>第一部分</a:t>
+            </a:r>
+          </a:p>
+        </p:txBody>
+      </p:sp>
+      <p:sp>
+        <p:nvSpPr>
+          <p:cNvPr id="7" name="TextBox 6"/>
           <p:cNvSpPr txBox="1"/>
           <p:nvPr/>
         </p:nvSpPr>
         <p:spPr>
           <a:xfrm>
-            <a:off x="502920" y="1234440"/>
-            <a:ext cx="8138160" cy="3474720"/>
+            <a:off x="502920" y="2526030"/>
+            <a:ext cx="8138160" cy="731520"/>
           </a:xfrm>
           <a:prstGeom prst="rect">
             <a:avLst/>
@@ -9236,18 +10436,15 @@
           </a:bodyPr>
           <a:lstStyle/>
           <a:p>
-            <a:pPr>
-              <a:lnSpc>
-                <a:spcPct val="135000"/>
-              </a:lnSpc>
-              <a:defRPr sz="1500" b="0">
-                <a:solidFill>
-                  <a:srgbClr val="1E1E1E"/>
-                </a:solidFill>
-              </a:defRPr>
-            </a:pPr>
-            <a:r>
-              <a:t>随着我国老龄化程度加深，空巢与独居老人数量持续增加。跌倒已成为老年人意外伤害的首要原因之一，而「发现延迟」往往导致救援错过黄金时间。与此同时，老人对情感陪伴的需求日益增长——他们不仅需要被监测，更需要被理解、被回应。</a:t>
+            <a:pPr algn="ctr">
+              <a:defRPr sz="2000" b="1">
+                <a:solidFill>
+                  <a:srgbClr val="DCE6FF"/>
+                </a:solidFill>
+              </a:defRPr>
+            </a:pPr>
+            <a:r>
+              <a:t>项目背景 · 需求分析 · 方案定位</a:t>
             </a:r>
           </a:p>
         </p:txBody>
@@ -9376,7 +10573,7 @@
         </p:nvSpPr>
         <p:spPr>
           <a:xfrm>
-            <a:off x="502920" y="566928"/>
+            <a:off x="502920" y="548640"/>
             <a:ext cx="8138160" cy="731520"/>
           </a:xfrm>
           <a:prstGeom prst="rect">
@@ -9391,14 +10588,14 @@
           <a:lstStyle/>
           <a:p>
             <a:pPr algn="l">
-              <a:defRPr sz="2400" b="1">
+              <a:defRPr sz="2200" b="1">
                 <a:solidFill>
                   <a:srgbClr val="1E1E1E"/>
                 </a:solidFill>
               </a:defRPr>
             </a:pPr>
             <a:r>
-              <a:t>现有方案的不足</a:t>
+              <a:t>社会背景：老龄化与跌倒风险</a:t>
             </a:r>
           </a:p>
         </p:txBody>
@@ -9411,43 +10608,8 @@
         </p:nvSpPr>
         <p:spPr>
           <a:xfrm>
-            <a:off x="411480" y="1234440"/>
-            <a:ext cx="4023360" cy="457200"/>
-          </a:xfrm>
-          <a:prstGeom prst="rect">
-            <a:avLst/>
-          </a:prstGeom>
-          <a:noFill/>
-        </p:spPr>
-        <p:txBody>
-          <a:bodyPr wrap="none">
-            <a:spAutoFit/>
-          </a:bodyPr>
-          <a:lstStyle/>
-          <a:p>
-            <a:pPr>
-              <a:defRPr sz="1400" b="1">
-                <a:solidFill>
-                  <a:srgbClr val="C00000"/>
-                </a:solidFill>
-              </a:defRPr>
-            </a:pPr>
-            <a:r>
-              <a:t>现有产品/方案（Ø）</a:t>
-            </a:r>
-          </a:p>
-        </p:txBody>
-      </p:sp>
-      <p:sp>
-        <p:nvSpPr>
-          <p:cNvPr id="6" name="TextBox 5"/>
-          <p:cNvSpPr txBox="1"/>
-          <p:nvPr/>
-        </p:nvSpPr>
-        <p:spPr>
-          <a:xfrm>
-            <a:off x="411480" y="1691640"/>
-            <a:ext cx="4023360" cy="3200400"/>
+            <a:off x="502920" y="960120"/>
+            <a:ext cx="3886200" cy="3840480"/>
           </a:xfrm>
           <a:prstGeom prst="rect">
             <a:avLst/>
@@ -9461,172 +10623,135 @@
           <a:lstStyle/>
           <a:p>
             <a:pPr>
-              <a:defRPr sz="1300">
+              <a:spcAft>
+                <a:spcPts val="600"/>
+              </a:spcAft>
+              <a:defRPr sz="1200">
                 <a:solidFill>
                   <a:srgbClr val="1E1E1E"/>
                 </a:solidFill>
               </a:defRPr>
             </a:pPr>
             <a:r>
-              <a:t>Ø 智能音箱：无视觉安全闭环，无法实体援助</a:t>
-            </a:r>
-          </a:p>
-          <a:p>
-            <a:pPr>
-              <a:defRPr sz="1300">
+              <a:t>独居老人增多，跌倒后「发现空窗」是核心痛点</a:t>
+            </a:r>
+          </a:p>
+          <a:p>
+            <a:pPr>
+              <a:spcAft>
+                <a:spcPts val="600"/>
+              </a:spcAft>
+              <a:defRPr sz="1200">
                 <a:solidFill>
                   <a:srgbClr val="1E1E1E"/>
                 </a:solidFill>
               </a:defRPr>
             </a:pPr>
             <a:r>
-              <a:t>Ø 监控摄像头：只告警不陪伴，缺乏对话与动作</a:t>
-            </a:r>
-          </a:p>
-          <a:p>
-            <a:pPr>
-              <a:defRPr sz="1300">
+              <a:t>情感陪伴需求上升，监测设备难以形成照护闭环</a:t>
+            </a:r>
+          </a:p>
+          <a:p>
+            <a:pPr>
+              <a:spcAft>
+                <a:spcPts val="600"/>
+              </a:spcAft>
+              <a:defRPr sz="1200">
                 <a:solidFill>
                   <a:srgbClr val="1E1E1E"/>
                 </a:solidFill>
               </a:defRPr>
             </a:pPr>
             <a:r>
-              <a:t>Ø 健康手环：难发现跌倒过程，无机器人执行</a:t>
-            </a:r>
-          </a:p>
-          <a:p>
-            <a:pPr>
-              <a:defRPr sz="1300">
+              <a:t>政策导向：智慧养老与居家安全并重</a:t>
+            </a:r>
+          </a:p>
+          <a:p>
+            <a:pPr>
+              <a:spcAft>
+                <a:spcPts val="600"/>
+              </a:spcAft>
+              <a:defRPr sz="1200">
                 <a:solidFill>
                   <a:srgbClr val="1E1E1E"/>
                 </a:solidFill>
               </a:defRPr>
             </a:pPr>
             <a:r>
-              <a:t>Ø 纯仿真毕设：缺少真机部署路径与量化评测</a:t>
-            </a:r>
-          </a:p>
-        </p:txBody>
-      </p:sp>
-      <p:sp>
-        <p:nvSpPr>
-          <p:cNvPr id="7" name="TextBox 6"/>
-          <p:cNvSpPr txBox="1"/>
-          <p:nvPr/>
-        </p:nvSpPr>
-        <p:spPr>
-          <a:xfrm>
-            <a:off x="4617720" y="1234440"/>
-            <a:ext cx="4023360" cy="457200"/>
-          </a:xfrm>
-          <a:prstGeom prst="rect">
-            <a:avLst/>
-          </a:prstGeom>
-          <a:noFill/>
-        </p:spPr>
-        <p:txBody>
-          <a:bodyPr wrap="none">
-            <a:spAutoFit/>
-          </a:bodyPr>
-          <a:lstStyle/>
-          <a:p>
-            <a:pPr>
-              <a:defRPr sz="1400" b="1">
-                <a:solidFill>
-                  <a:srgbClr val="143278"/>
-                </a:solidFill>
-              </a:defRPr>
-            </a:pPr>
-            <a:r>
-              <a:t>CareCompanion（ü）</a:t>
-            </a:r>
-          </a:p>
-        </p:txBody>
-      </p:sp>
-      <p:sp>
-        <p:nvSpPr>
-          <p:cNvPr id="8" name="TextBox 7"/>
-          <p:cNvSpPr txBox="1"/>
-          <p:nvPr/>
-        </p:nvSpPr>
-        <p:spPr>
-          <a:xfrm>
-            <a:off x="4617720" y="1691640"/>
-            <a:ext cx="4023360" cy="3200400"/>
-          </a:xfrm>
-          <a:prstGeom prst="rect">
-            <a:avLst/>
-          </a:prstGeom>
-          <a:noFill/>
-        </p:spPr>
-        <p:txBody>
-          <a:bodyPr wrap="square">
-            <a:spAutoFit/>
-          </a:bodyPr>
-          <a:lstStyle/>
-          <a:p>
-            <a:pPr>
-              <a:defRPr sz="1300">
-                <a:solidFill>
-                  <a:srgbClr val="1E1E1E"/>
-                </a:solidFill>
-              </a:defRPr>
-            </a:pPr>
-            <a:r>
-              <a:t>ü 多模态融合：跌倒+情绪+生理→统一风险引擎</a:t>
-            </a:r>
-          </a:p>
-          <a:p>
-            <a:pPr>
-              <a:defRPr sz="1300">
-                <a:solidFill>
-                  <a:srgbClr val="1E1E1E"/>
-                </a:solidFill>
-              </a:defRPr>
-            </a:pPr>
-            <a:r>
-              <a:t>ü 可解释决策：输出风险分数与原因列表</a:t>
-            </a:r>
-          </a:p>
-          <a:p>
-            <a:pPr>
-              <a:defRPr sz="1300">
-                <a:solidFill>
-                  <a:srgbClr val="1E1E1E"/>
-                </a:solidFill>
-              </a:defRPr>
-            </a:pPr>
-            <a:r>
-              <a:t>ü 主动照护：告警/语音/手势/紧急呼叫联动</a:t>
-            </a:r>
-          </a:p>
-          <a:p>
-            <a:pPr>
-              <a:defRPr sz="1300">
-                <a:solidFill>
-                  <a:srgbClr val="1E1E1E"/>
-                </a:solidFill>
-              </a:defRPr>
-            </a:pPr>
-            <a:r>
-              <a:t>ü 人形接口：ROS2 标准话题，仿真与真机同源</a:t>
-            </a:r>
-          </a:p>
-          <a:p>
-            <a:pPr>
-              <a:defRPr sz="1300">
-                <a:solidFill>
-                  <a:srgbClr val="1E1E1E"/>
-                </a:solidFill>
-              </a:defRPr>
-            </a:pPr>
-            <a:r>
-              <a:t>ü 开源可复现：Web 控制台 + 评测脚本 + GitHub</a:t>
-            </a:r>
-          </a:p>
-        </p:txBody>
-      </p:sp>
+              <a:t>本项目聚焦可落地的仿真验证与人形接口</a:t>
+            </a:r>
+          </a:p>
+        </p:txBody>
+      </p:sp>
+      <p:sp>
+        <p:nvSpPr>
+          <p:cNvPr id="6" name="Rectangle 5"/>
+          <p:cNvSpPr/>
+          <p:nvPr/>
+        </p:nvSpPr>
+        <p:spPr>
+          <a:xfrm>
+            <a:off x="4370832" y="896112"/>
+            <a:ext cx="4398264" cy="4096512"/>
+          </a:xfrm>
+          <a:prstGeom prst="rect">
+            <a:avLst/>
+          </a:prstGeom>
+          <a:solidFill>
+            <a:srgbClr val="EBF2FA"/>
+          </a:solidFill>
+          <a:ln>
+            <a:solidFill>
+              <a:srgbClr val="B4C3DC"/>
+            </a:solidFill>
+          </a:ln>
+        </p:spPr>
+        <p:style>
+          <a:lnRef idx="1">
+            <a:schemeClr val="accent1"/>
+          </a:lnRef>
+          <a:fillRef idx="3">
+            <a:schemeClr val="accent1"/>
+          </a:fillRef>
+          <a:effectRef idx="2">
+            <a:schemeClr val="accent1"/>
+          </a:effectRef>
+          <a:fontRef idx="minor">
+            <a:schemeClr val="lt1"/>
+          </a:fontRef>
+        </p:style>
+        <p:txBody>
+          <a:bodyPr rtlCol="0" anchor="ctr"/>
+          <a:lstStyle/>
+          <a:p>
+            <a:pPr algn="ctr"/>
+          </a:p>
+        </p:txBody>
+      </p:sp>
+      <p:pic>
+        <p:nvPicPr>
+          <p:cNvPr id="7" name="Picture 6" descr="aging_chart.png"/>
+          <p:cNvPicPr>
+            <a:picLocks noChangeAspect="1"/>
+          </p:cNvPicPr>
+          <p:nvPr/>
+        </p:nvPicPr>
+        <p:blipFill>
+          <a:blip r:embed="rId2"/>
+          <a:stretch>
+            <a:fillRect/>
+          </a:stretch>
+        </p:blipFill>
+        <p:spPr>
+          <a:xfrm>
+            <a:off x="4407408" y="932688"/>
+            <a:ext cx="4325112" cy="2849300"/>
+          </a:xfrm>
+          <a:prstGeom prst="rect">
+            <a:avLst/>
+          </a:prstGeom>
+        </p:spPr>
+      </p:pic>
     </p:spTree>
   </p:cSld>
   <p:clrMapOvr>
@@ -9751,7 +10876,7 @@
         </p:nvSpPr>
         <p:spPr>
           <a:xfrm>
-            <a:off x="502920" y="566928"/>
+            <a:off x="502920" y="548640"/>
             <a:ext cx="8138160" cy="731520"/>
           </a:xfrm>
           <a:prstGeom prst="rect">
@@ -9766,14 +10891,14 @@
           <a:lstStyle/>
           <a:p>
             <a:pPr algn="l">
-              <a:defRPr sz="2400" b="1">
+              <a:defRPr sz="2200" b="1">
                 <a:solidFill>
                   <a:srgbClr val="1E1E1E"/>
                 </a:solidFill>
               </a:defRPr>
             </a:pPr>
             <a:r>
-              <a:t>项目概述</a:t>
+              <a:t>现有方案对比</a:t>
             </a:r>
           </a:p>
         </p:txBody>
@@ -9786,8 +10911,8 @@
         </p:nvSpPr>
         <p:spPr>
           <a:xfrm>
-            <a:off x="502920" y="1234440"/>
-            <a:ext cx="8138160" cy="3474720"/>
+            <a:off x="502920" y="960120"/>
+            <a:ext cx="3886200" cy="3840480"/>
           </a:xfrm>
           <a:prstGeom prst="rect">
             <a:avLst/>
@@ -9801,21 +10926,135 @@
           <a:lstStyle/>
           <a:p>
             <a:pPr>
-              <a:lnSpc>
-                <a:spcPct val="135000"/>
-              </a:lnSpc>
-              <a:defRPr sz="1500" b="0">
+              <a:spcAft>
+                <a:spcPts val="600"/>
+              </a:spcAft>
+              <a:defRPr sz="1200">
                 <a:solidFill>
                   <a:srgbClr val="1E1E1E"/>
                 </a:solidFill>
               </a:defRPr>
             </a:pPr>
             <a:r>
-              <a:t>基于上述需求，我们开发了 CareCompanion 智能养老人形陪伴机器人软件平台。平台以 CareOrchestrator 为核心，融合 MediaPipe 视觉姿态、文本情感与健康指标，在 Web 控制台完成演示验证，并通过 ROS2 适配层对接人形机器人。系统已实现跌倒紧急链路自动化验证，合成场景跌倒检测 F1 达 100%。</a:t>
-            </a:r>
-          </a:p>
-        </p:txBody>
-      </p:sp>
+              <a:t>传统音箱/摄像头/手环：功能割裂</a:t>
+            </a:r>
+          </a:p>
+          <a:p>
+            <a:pPr>
+              <a:spcAft>
+                <a:spcPts val="600"/>
+              </a:spcAft>
+              <a:defRPr sz="1200">
+                <a:solidFill>
+                  <a:srgbClr val="1E1E1E"/>
+                </a:solidFill>
+              </a:defRPr>
+            </a:pPr>
+            <a:r>
+              <a:t>本作品：感知—决策—执行统一编排</a:t>
+            </a:r>
+          </a:p>
+          <a:p>
+            <a:pPr>
+              <a:spcAft>
+                <a:spcPts val="600"/>
+              </a:spcAft>
+              <a:defRPr sz="1200">
+                <a:solidFill>
+                  <a:srgbClr val="1E1E1E"/>
+                </a:solidFill>
+              </a:defRPr>
+            </a:pPr>
+            <a:r>
+              <a:t>强调可解释风险与紧急硬优先级</a:t>
+            </a:r>
+          </a:p>
+          <a:p>
+            <a:pPr>
+              <a:spcAft>
+                <a:spcPts val="600"/>
+              </a:spcAft>
+              <a:defRPr sz="1200">
+                <a:solidFill>
+                  <a:srgbClr val="1E1E1E"/>
+                </a:solidFill>
+              </a:defRPr>
+            </a:pPr>
+            <a:r>
+              <a:t>配套 Web 演示与量化评测脚本</a:t>
+            </a:r>
+          </a:p>
+        </p:txBody>
+      </p:sp>
+      <p:sp>
+        <p:nvSpPr>
+          <p:cNvPr id="6" name="Rectangle 5"/>
+          <p:cNvSpPr/>
+          <p:nvPr/>
+        </p:nvSpPr>
+        <p:spPr>
+          <a:xfrm>
+            <a:off x="4370832" y="896112"/>
+            <a:ext cx="4398264" cy="4096512"/>
+          </a:xfrm>
+          <a:prstGeom prst="rect">
+            <a:avLst/>
+          </a:prstGeom>
+          <a:solidFill>
+            <a:srgbClr val="EBF2FA"/>
+          </a:solidFill>
+          <a:ln>
+            <a:solidFill>
+              <a:srgbClr val="B4C3DC"/>
+            </a:solidFill>
+          </a:ln>
+        </p:spPr>
+        <p:style>
+          <a:lnRef idx="1">
+            <a:schemeClr val="accent1"/>
+          </a:lnRef>
+          <a:fillRef idx="3">
+            <a:schemeClr val="accent1"/>
+          </a:fillRef>
+          <a:effectRef idx="2">
+            <a:schemeClr val="accent1"/>
+          </a:effectRef>
+          <a:fontRef idx="minor">
+            <a:schemeClr val="lt1"/>
+          </a:fontRef>
+        </p:style>
+        <p:txBody>
+          <a:bodyPr rtlCol="0" anchor="ctr"/>
+          <a:lstStyle/>
+          <a:p>
+            <a:pPr algn="ctr"/>
+          </a:p>
+        </p:txBody>
+      </p:sp>
+      <p:pic>
+        <p:nvPicPr>
+          <p:cNvPr id="7" name="Picture 6" descr="compare.png"/>
+          <p:cNvPicPr>
+            <a:picLocks noChangeAspect="1"/>
+          </p:cNvPicPr>
+          <p:nvPr/>
+        </p:nvPicPr>
+        <p:blipFill>
+          <a:blip r:embed="rId2"/>
+          <a:stretch>
+            <a:fillRect/>
+          </a:stretch>
+        </p:blipFill>
+        <p:spPr>
+          <a:xfrm>
+            <a:off x="4407408" y="932688"/>
+            <a:ext cx="4325112" cy="2410773"/>
+          </a:xfrm>
+          <a:prstGeom prst="rect">
+            <a:avLst/>
+          </a:prstGeom>
+        </p:spPr>
+      </p:pic>
     </p:spTree>
   </p:cSld>
   <p:clrMapOvr>
@@ -9940,7 +11179,7 @@
         </p:nvSpPr>
         <p:spPr>
           <a:xfrm>
-            <a:off x="502920" y="2068830"/>
+            <a:off x="502920" y="548640"/>
             <a:ext cx="8138160" cy="731520"/>
           </a:xfrm>
           <a:prstGeom prst="rect">
@@ -9954,15 +11193,15 @@
           </a:bodyPr>
           <a:lstStyle/>
           <a:p>
-            <a:pPr algn="ctr">
-              <a:defRPr sz="3000" b="1">
+            <a:pPr algn="l">
+              <a:defRPr sz="2200" b="1">
                 <a:solidFill>
                   <a:srgbClr val="1E1E1E"/>
                 </a:solidFill>
               </a:defRPr>
             </a:pPr>
             <a:r>
-              <a:t>第二部分</a:t>
+              <a:t>项目概述与目标</a:t>
             </a:r>
           </a:p>
         </p:txBody>
@@ -9975,8 +11214,8 @@
         </p:nvSpPr>
         <p:spPr>
           <a:xfrm>
-            <a:off x="502920" y="2617470"/>
-            <a:ext cx="8138160" cy="731520"/>
+            <a:off x="502920" y="960120"/>
+            <a:ext cx="3886200" cy="3840480"/>
           </a:xfrm>
           <a:prstGeom prst="rect">
             <a:avLst/>
@@ -9989,19 +11228,151 @@
           </a:bodyPr>
           <a:lstStyle/>
           <a:p>
-            <a:pPr algn="ctr">
-              <a:defRPr sz="2000" b="1">
-                <a:solidFill>
-                  <a:srgbClr val="143278"/>
-                </a:solidFill>
-              </a:defRPr>
-            </a:pPr>
-            <a:r>
-              <a:t>关键技术与系统架构</a:t>
-            </a:r>
-          </a:p>
-        </p:txBody>
-      </p:sp>
+            <a:pPr>
+              <a:spcAft>
+                <a:spcPts val="600"/>
+              </a:spcAft>
+              <a:defRPr sz="1200">
+                <a:solidFill>
+                  <a:srgbClr val="1E1E1E"/>
+                </a:solidFill>
+              </a:defRPr>
+            </a:pPr>
+            <a:r>
+              <a:t>CareCompanion：养老人形陪伴软件平台</a:t>
+            </a:r>
+          </a:p>
+          <a:p>
+            <a:pPr>
+              <a:spcAft>
+                <a:spcPts val="600"/>
+              </a:spcAft>
+              <a:defRPr sz="1200">
+                <a:solidFill>
+                  <a:srgbClr val="1E1E1E"/>
+                </a:solidFill>
+              </a:defRPr>
+            </a:pPr>
+            <a:r>
+              <a:t>CareOrchestrator 统一调度各模块</a:t>
+            </a:r>
+          </a:p>
+          <a:p>
+            <a:pPr>
+              <a:spcAft>
+                <a:spcPts val="600"/>
+              </a:spcAft>
+              <a:defRPr sz="1200">
+                <a:solidFill>
+                  <a:srgbClr val="1E1E1E"/>
+                </a:solidFill>
+              </a:defRPr>
+            </a:pPr>
+            <a:r>
+              <a:t>目标1：跌倒检测与紧急呼叫自动化</a:t>
+            </a:r>
+          </a:p>
+          <a:p>
+            <a:pPr>
+              <a:spcAft>
+                <a:spcPts val="600"/>
+              </a:spcAft>
+              <a:defRPr sz="1200">
+                <a:solidFill>
+                  <a:srgbClr val="1E1E1E"/>
+                </a:solidFill>
+              </a:defRPr>
+            </a:pPr>
+            <a:r>
+              <a:t>目标2：情感对话与机器人动作联动</a:t>
+            </a:r>
+          </a:p>
+          <a:p>
+            <a:pPr>
+              <a:spcAft>
+                <a:spcPts val="600"/>
+              </a:spcAft>
+              <a:defRPr sz="1200">
+                <a:solidFill>
+                  <a:srgbClr val="1E1E1E"/>
+                </a:solidFill>
+              </a:defRPr>
+            </a:pPr>
+            <a:r>
+              <a:t>目标3：ROS2 部署接口 + 开源可复现</a:t>
+            </a:r>
+          </a:p>
+        </p:txBody>
+      </p:sp>
+      <p:sp>
+        <p:nvSpPr>
+          <p:cNvPr id="6" name="Rectangle 5"/>
+          <p:cNvSpPr/>
+          <p:nvPr/>
+        </p:nvSpPr>
+        <p:spPr>
+          <a:xfrm>
+            <a:off x="4370832" y="896112"/>
+            <a:ext cx="4398264" cy="4096512"/>
+          </a:xfrm>
+          <a:prstGeom prst="rect">
+            <a:avLst/>
+          </a:prstGeom>
+          <a:solidFill>
+            <a:srgbClr val="EBF2FA"/>
+          </a:solidFill>
+          <a:ln>
+            <a:solidFill>
+              <a:srgbClr val="B4C3DC"/>
+            </a:solidFill>
+          </a:ln>
+        </p:spPr>
+        <p:style>
+          <a:lnRef idx="1">
+            <a:schemeClr val="accent1"/>
+          </a:lnRef>
+          <a:fillRef idx="3">
+            <a:schemeClr val="accent1"/>
+          </a:fillRef>
+          <a:effectRef idx="2">
+            <a:schemeClr val="accent1"/>
+          </a:effectRef>
+          <a:fontRef idx="minor">
+            <a:schemeClr val="lt1"/>
+          </a:fontRef>
+        </p:style>
+        <p:txBody>
+          <a:bodyPr rtlCol="0" anchor="ctr"/>
+          <a:lstStyle/>
+          <a:p>
+            <a:pPr algn="ctr"/>
+          </a:p>
+        </p:txBody>
+      </p:sp>
+      <p:pic>
+        <p:nvPicPr>
+          <p:cNvPr id="7" name="Picture 6" descr="architecture.png"/>
+          <p:cNvPicPr>
+            <a:picLocks noChangeAspect="1"/>
+          </p:cNvPicPr>
+          <p:nvPr/>
+        </p:nvPicPr>
+        <p:blipFill>
+          <a:blip r:embed="rId2"/>
+          <a:stretch>
+            <a:fillRect/>
+          </a:stretch>
+        </p:blipFill>
+        <p:spPr>
+          <a:xfrm>
+            <a:off x="4407408" y="932688"/>
+            <a:ext cx="4325112" cy="2621589"/>
+          </a:xfrm>
+          <a:prstGeom prst="rect">
+            <a:avLst/>
+          </a:prstGeom>
+        </p:spPr>
+      </p:pic>
     </p:spTree>
   </p:cSld>
   <p:clrMapOvr>
@@ -10118,15 +11489,82 @@
           </a:p>
         </p:txBody>
       </p:sp>
-      <p:sp>
-        <p:nvSpPr>
-          <p:cNvPr id="4" name="TextBox 3"/>
+      <p:pic>
+        <p:nvPicPr>
+          <p:cNvPr id="4" name="Picture 3" descr="cover_banner.png"/>
+          <p:cNvPicPr>
+            <a:picLocks noChangeAspect="1"/>
+          </p:cNvPicPr>
+          <p:nvPr/>
+        </p:nvPicPr>
+        <p:blipFill>
+          <a:blip r:embed="rId2"/>
+          <a:stretch>
+            <a:fillRect/>
+          </a:stretch>
+        </p:blipFill>
+        <p:spPr>
+          <a:xfrm>
+            <a:off x="0" y="475488"/>
+            <a:ext cx="9144000" cy="4668012"/>
+          </a:xfrm>
+          <a:prstGeom prst="rect">
+            <a:avLst/>
+          </a:prstGeom>
+        </p:spPr>
+      </p:pic>
+      <p:sp>
+        <p:nvSpPr>
+          <p:cNvPr id="5" name="Rectangle 4"/>
+          <p:cNvSpPr/>
+          <p:nvPr/>
+        </p:nvSpPr>
+        <p:spPr>
+          <a:xfrm>
+            <a:off x="0" y="475488"/>
+            <a:ext cx="9144000" cy="4668012"/>
+          </a:xfrm>
+          <a:prstGeom prst="rect">
+            <a:avLst/>
+          </a:prstGeom>
+          <a:solidFill>
+            <a:srgbClr val="143278"/>
+          </a:solidFill>
+          <a:ln>
+            <a:noFill/>
+          </a:ln>
+        </p:spPr>
+        <p:style>
+          <a:lnRef idx="1">
+            <a:schemeClr val="accent1"/>
+          </a:lnRef>
+          <a:fillRef idx="3">
+            <a:schemeClr val="accent1"/>
+          </a:fillRef>
+          <a:effectRef idx="2">
+            <a:schemeClr val="accent1"/>
+          </a:effectRef>
+          <a:fontRef idx="minor">
+            <a:schemeClr val="lt1"/>
+          </a:fontRef>
+        </p:style>
+        <p:txBody>
+          <a:bodyPr rtlCol="0" anchor="ctr"/>
+          <a:lstStyle/>
+          <a:p>
+            <a:pPr algn="ctr"/>
+          </a:p>
+        </p:txBody>
+      </p:sp>
+      <p:sp>
+        <p:nvSpPr>
+          <p:cNvPr id="6" name="TextBox 5"/>
           <p:cNvSpPr txBox="1"/>
           <p:nvPr/>
         </p:nvSpPr>
         <p:spPr>
           <a:xfrm>
-            <a:off x="502920" y="566928"/>
+            <a:off x="502920" y="1931669"/>
             <a:ext cx="8138160" cy="731520"/>
           </a:xfrm>
           <a:prstGeom prst="rect">
@@ -10140,29 +11578,29 @@
           </a:bodyPr>
           <a:lstStyle/>
           <a:p>
-            <a:pPr algn="l">
-              <a:defRPr sz="2400" b="1">
-                <a:solidFill>
-                  <a:srgbClr val="1E1E1E"/>
-                </a:solidFill>
-              </a:defRPr>
-            </a:pPr>
-            <a:r>
-              <a:t>系统总体架构</a:t>
-            </a:r>
-          </a:p>
-        </p:txBody>
-      </p:sp>
-      <p:sp>
-        <p:nvSpPr>
-          <p:cNvPr id="5" name="TextBox 4"/>
+            <a:pPr algn="ctr">
+              <a:defRPr sz="3200" b="1">
+                <a:solidFill>
+                  <a:srgbClr val="FFFFFF"/>
+                </a:solidFill>
+              </a:defRPr>
+            </a:pPr>
+            <a:r>
+              <a:t>第二部分</a:t>
+            </a:r>
+          </a:p>
+        </p:txBody>
+      </p:sp>
+      <p:sp>
+        <p:nvSpPr>
+          <p:cNvPr id="7" name="TextBox 6"/>
           <p:cNvSpPr txBox="1"/>
           <p:nvPr/>
         </p:nvSpPr>
         <p:spPr>
           <a:xfrm>
-            <a:off x="502920" y="1325880"/>
-            <a:ext cx="8138160" cy="3840480"/>
+            <a:off x="502920" y="2526030"/>
+            <a:ext cx="8138160" cy="731520"/>
           </a:xfrm>
           <a:prstGeom prst="rect">
             <a:avLst/>
@@ -10175,78 +11613,15 @@
           </a:bodyPr>
           <a:lstStyle/>
           <a:p>
-            <a:pPr>
-              <a:spcAft>
-                <a:spcPts val="600"/>
-              </a:spcAft>
-              <a:defRPr sz="1400">
-                <a:solidFill>
-                  <a:srgbClr val="1E1E1E"/>
-                </a:solidFill>
-              </a:defRPr>
-            </a:pPr>
-            <a:r>
-              <a:t>感知层：FallDetector · EmotionRecognizer · HealthMonitor · PosePipeline（MediaPipe）</a:t>
-            </a:r>
-          </a:p>
-          <a:p>
-            <a:pPr>
-              <a:spcAft>
-                <a:spcPts val="600"/>
-              </a:spcAft>
-              <a:defRPr sz="1400">
-                <a:solidFill>
-                  <a:srgbClr val="1E1E1E"/>
-                </a:solidFill>
-              </a:defRPr>
-            </a:pPr>
-            <a:r>
-              <a:t>认知层：RiskEngine（多模态融合）· DialogueManager · CarePlanner</a:t>
-            </a:r>
-          </a:p>
-          <a:p>
-            <a:pPr>
-              <a:spcAft>
-                <a:spcPts val="600"/>
-              </a:spcAft>
-              <a:defRPr sz="1400">
-                <a:solidFill>
-                  <a:srgbClr val="1E1E1E"/>
-                </a:solidFill>
-              </a:defRPr>
-            </a:pPr>
-            <a:r>
-              <a:t>执行层：RobotAdapter → SimulationAdapter / ROS2Adapter</a:t>
-            </a:r>
-          </a:p>
-          <a:p>
-            <a:pPr>
-              <a:spcAft>
-                <a:spcPts val="600"/>
-              </a:spcAft>
-              <a:defRPr sz="1400">
-                <a:solidFill>
-                  <a:srgbClr val="1E1E1E"/>
-                </a:solidFill>
-              </a:defRPr>
-            </a:pPr>
-            <a:r>
-              <a:t>交互层：Web 控制台 · 桌面 GUI · 无头自动化剧本</a:t>
-            </a:r>
-          </a:p>
-          <a:p>
-            <a:pPr>
-              <a:spcAft>
-                <a:spcPts val="600"/>
-              </a:spcAft>
-              <a:defRPr sz="1400">
-                <a:solidFill>
-                  <a:srgbClr val="1E1E1E"/>
-                </a:solidFill>
-              </a:defRPr>
-            </a:pPr>
-            <a:r>
-              <a:t>状态机：MONITOR → CONVERSE → ALERT → EMERGENCY（紧急硬优先级）</a:t>
+            <a:pPr algn="ctr">
+              <a:defRPr sz="2000" b="1">
+                <a:solidFill>
+                  <a:srgbClr val="DCE6FF"/>
+                </a:solidFill>
+              </a:defRPr>
+            </a:pPr>
+            <a:r>
+              <a:t>理论模型 · 算法设计 · 系统架构</a:t>
             </a:r>
           </a:p>
         </p:txBody>
@@ -10375,7 +11750,7 @@
         </p:nvSpPr>
         <p:spPr>
           <a:xfrm>
-            <a:off x="502920" y="566928"/>
+            <a:off x="502920" y="548640"/>
             <a:ext cx="8138160" cy="731520"/>
           </a:xfrm>
           <a:prstGeom prst="rect">
@@ -10390,14 +11765,14 @@
           <a:lstStyle/>
           <a:p>
             <a:pPr algn="l">
-              <a:defRPr sz="2400" b="1">
+              <a:defRPr sz="2200" b="1">
                 <a:solidFill>
                   <a:srgbClr val="1E1E1E"/>
                 </a:solidFill>
               </a:defRPr>
             </a:pPr>
             <a:r>
-              <a:t>多模态风险融合引擎</a:t>
+              <a:t>系统总体架构</a:t>
             </a:r>
           </a:p>
         </p:txBody>
@@ -10410,8 +11785,8 @@
         </p:nvSpPr>
         <p:spPr>
           <a:xfrm>
-            <a:off x="502920" y="1325880"/>
-            <a:ext cx="8138160" cy="3840480"/>
+            <a:off x="502920" y="960120"/>
+            <a:ext cx="3886200" cy="3840480"/>
           </a:xfrm>
           <a:prstGeom prst="rect">
             <a:avLst/>
@@ -10428,14 +11803,14 @@
               <a:spcAft>
                 <a:spcPts val="600"/>
               </a:spcAft>
-              <a:defRPr sz="1400">
+              <a:defRPr sz="1200">
                 <a:solidFill>
                   <a:srgbClr val="1E1E1E"/>
                 </a:solidFill>
               </a:defRPr>
             </a:pPr>
             <a:r>
-              <a:t>融合公式：S = 0.45·S_fall + 0.25·S_emo + 0.30·S_health</a:t>
+              <a:t>四层架构：感知 / 认知 / 执行 / 交互</a:t>
             </a:r>
           </a:p>
           <a:p>
@@ -10443,14 +11818,14 @@
               <a:spcAft>
                 <a:spcPts val="600"/>
               </a:spcAft>
-              <a:defRPr sz="1400">
+              <a:defRPr sz="1200">
                 <a:solidFill>
                   <a:srgbClr val="1E1E1E"/>
                 </a:solidFill>
               </a:defRPr>
             </a:pPr>
             <a:r>
-              <a:t>输出：风险分数、等级（normal/alert/emergency）、原因列表</a:t>
+              <a:t>核心：CareOrchestrator + 状态机</a:t>
             </a:r>
           </a:p>
           <a:p>
@@ -10458,14 +11833,14 @@
               <a:spcAft>
                 <a:spcPts val="600"/>
               </a:spcAft>
-              <a:defRPr sz="1400">
+              <a:defRPr sz="1200">
                 <a:solidFill>
                   <a:srgbClr val="1E1E1E"/>
                 </a:solidFill>
               </a:defRPr>
             </a:pPr>
             <a:r>
-              <a:t>阈值：alert ≥ 0.65，emergency ≥ 0.85 或确认跌倒</a:t>
+              <a:t>模块可替换：仿真、Web、ROS2 共用一套逻辑</a:t>
             </a:r>
           </a:p>
           <a:p>
@@ -10473,56 +11848,87 @@
               <a:spcAft>
                 <a:spcPts val="600"/>
               </a:spcAft>
-              <a:defRPr sz="1400">
+              <a:defRPr sz="1200">
                 <a:solidFill>
                   <a:srgbClr val="1E1E1E"/>
                 </a:solidFill>
               </a:defRPr>
             </a:pPr>
             <a:r>
-              <a:t>优势：非黑盒 LLM，便于答辩解释与医疗合规沟通</a:t>
-            </a:r>
-          </a:p>
-        </p:txBody>
-      </p:sp>
-      <p:sp>
-        <p:nvSpPr>
-          <p:cNvPr id="6" name="TextBox 5"/>
-          <p:cNvSpPr txBox="1"/>
-          <p:nvPr/>
-        </p:nvSpPr>
-        <p:spPr>
-          <a:xfrm>
-            <a:off x="502920" y="3657600"/>
-            <a:ext cx="8138160" cy="3474720"/>
-          </a:xfrm>
-          <a:prstGeom prst="rect">
-            <a:avLst/>
-          </a:prstGeom>
-          <a:noFill/>
-        </p:spPr>
-        <p:txBody>
-          <a:bodyPr wrap="square">
-            <a:spAutoFit/>
-          </a:bodyPr>
-          <a:lstStyle/>
-          <a:p>
-            <a:pPr>
-              <a:lnSpc>
-                <a:spcPct val="135000"/>
-              </a:lnSpc>
-              <a:defRPr sz="1200" b="0">
-                <a:solidFill>
-                  <a:srgbClr val="1E1E1E"/>
-                </a:solidFill>
-              </a:defRPr>
-            </a:pPr>
-            <a:r>
-              <a:t>config/default.yaml 集中管理权重与阈值，支持场景调参。</a:t>
-            </a:r>
-          </a:p>
-        </p:txBody>
-      </p:sp>
+              <a:t>配置集中于 config/default.yaml</a:t>
+            </a:r>
+          </a:p>
+        </p:txBody>
+      </p:sp>
+      <p:sp>
+        <p:nvSpPr>
+          <p:cNvPr id="6" name="Rectangle 5"/>
+          <p:cNvSpPr/>
+          <p:nvPr/>
+        </p:nvSpPr>
+        <p:spPr>
+          <a:xfrm>
+            <a:off x="4370832" y="896112"/>
+            <a:ext cx="4398264" cy="4096512"/>
+          </a:xfrm>
+          <a:prstGeom prst="rect">
+            <a:avLst/>
+          </a:prstGeom>
+          <a:solidFill>
+            <a:srgbClr val="EBF2FA"/>
+          </a:solidFill>
+          <a:ln>
+            <a:solidFill>
+              <a:srgbClr val="B4C3DC"/>
+            </a:solidFill>
+          </a:ln>
+        </p:spPr>
+        <p:style>
+          <a:lnRef idx="1">
+            <a:schemeClr val="accent1"/>
+          </a:lnRef>
+          <a:fillRef idx="3">
+            <a:schemeClr val="accent1"/>
+          </a:fillRef>
+          <a:effectRef idx="2">
+            <a:schemeClr val="accent1"/>
+          </a:effectRef>
+          <a:fontRef idx="minor">
+            <a:schemeClr val="lt1"/>
+          </a:fontRef>
+        </p:style>
+        <p:txBody>
+          <a:bodyPr rtlCol="0" anchor="ctr"/>
+          <a:lstStyle/>
+          <a:p>
+            <a:pPr algn="ctr"/>
+          </a:p>
+        </p:txBody>
+      </p:sp>
+      <p:pic>
+        <p:nvPicPr>
+          <p:cNvPr id="7" name="Picture 6" descr="architecture.png"/>
+          <p:cNvPicPr>
+            <a:picLocks noChangeAspect="1"/>
+          </p:cNvPicPr>
+          <p:nvPr/>
+        </p:nvPicPr>
+        <p:blipFill>
+          <a:blip r:embed="rId2"/>
+          <a:stretch>
+            <a:fillRect/>
+          </a:stretch>
+        </p:blipFill>
+        <p:spPr>
+          <a:xfrm>
+            <a:off x="4407408" y="932688"/>
+            <a:ext cx="4325112" cy="2621589"/>
+          </a:xfrm>
+          <a:prstGeom prst="rect">
+            <a:avLst/>
+          </a:prstGeom>
+        </p:spPr>
+      </p:pic>
     </p:spTree>
   </p:cSld>
   <p:clrMapOvr>

--- a/docs/答辩_CareCompanion.pptx
+++ b/docs/答辩_CareCompanion.pptx
@@ -3169,8 +3169,8 @@
         </p:nvSpPr>
         <p:spPr>
           <a:xfrm>
-            <a:off x="292608" y="54864"/>
-            <a:ext cx="8558784" cy="347472"/>
+            <a:off x="274320" y="54864"/>
+            <a:ext cx="8595360" cy="347472"/>
           </a:xfrm>
           <a:prstGeom prst="rect">
             <a:avLst/>
@@ -3247,8 +3247,8 @@
         </p:nvSpPr>
         <p:spPr>
           <a:xfrm>
-            <a:off x="810022" y="502142"/>
-            <a:ext cx="2951955" cy="4550694"/>
+            <a:off x="830130" y="527745"/>
+            <a:ext cx="2911739" cy="4499488"/>
           </a:xfrm>
           <a:prstGeom prst="rect">
             <a:avLst/>
@@ -3256,7 +3256,7 @@
           <a:solidFill>
             <a:srgbClr val="FFFFFF"/>
           </a:solidFill>
-          <a:ln w="12700">
+          <a:ln w="10160">
             <a:solidFill>
               <a:srgbClr val="BAC8DC"/>
             </a:solidFill>
@@ -3300,8 +3300,8 @@
         </p:blipFill>
         <p:spPr>
           <a:xfrm>
-            <a:off x="883174" y="575294"/>
-            <a:ext cx="2805651" cy="4203222"/>
+            <a:off x="875850" y="573465"/>
+            <a:ext cx="2820299" cy="4225168"/>
           </a:xfrm>
           <a:prstGeom prst="rect">
             <a:avLst/>
@@ -3316,8 +3316,8 @@
         </p:nvSpPr>
         <p:spPr>
           <a:xfrm>
-            <a:off x="137160" y="4869957"/>
-            <a:ext cx="4297680" cy="201168"/>
+            <a:off x="137160" y="4853498"/>
+            <a:ext cx="4297680" cy="182880"/>
           </a:xfrm>
           <a:prstGeom prst="rect">
             <a:avLst/>
@@ -3783,8 +3783,8 @@
         </p:nvSpPr>
         <p:spPr>
           <a:xfrm>
-            <a:off x="292608" y="54864"/>
-            <a:ext cx="8558784" cy="347472"/>
+            <a:off x="274320" y="54864"/>
+            <a:ext cx="8595360" cy="347472"/>
           </a:xfrm>
           <a:prstGeom prst="rect">
             <a:avLst/>
@@ -3861,8 +3861,8 @@
         </p:nvSpPr>
         <p:spPr>
           <a:xfrm>
-            <a:off x="292608" y="4951476"/>
-            <a:ext cx="8558784" cy="182880"/>
+            <a:off x="274320" y="4951476"/>
+            <a:ext cx="8595360" cy="182880"/>
           </a:xfrm>
           <a:prstGeom prst="rect">
             <a:avLst/>
@@ -3897,8 +3897,8 @@
         </p:nvSpPr>
         <p:spPr>
           <a:xfrm>
-            <a:off x="292608" y="475488"/>
-            <a:ext cx="8558784" cy="475488"/>
+            <a:off x="274320" y="466344"/>
+            <a:ext cx="8595360" cy="457200"/>
           </a:xfrm>
           <a:prstGeom prst="rect">
             <a:avLst/>
@@ -3933,7 +3933,7 @@
         </p:nvSpPr>
         <p:spPr>
           <a:xfrm>
-            <a:off x="292608" y="914400"/>
+            <a:off x="274320" y="886968"/>
             <a:ext cx="1143000" cy="50292"/>
           </a:xfrm>
           <a:prstGeom prst="rect">
@@ -3976,8 +3976,8 @@
         </p:nvSpPr>
         <p:spPr>
           <a:xfrm>
-            <a:off x="292608" y="1042416"/>
-            <a:ext cx="3767328" cy="3406139"/>
+            <a:off x="274320" y="996696"/>
+            <a:ext cx="3611880" cy="3854196"/>
           </a:xfrm>
           <a:prstGeom prst="rect">
             <a:avLst/>
@@ -4021,8 +4021,8 @@
         </p:nvSpPr>
         <p:spPr>
           <a:xfrm>
-            <a:off x="292608" y="1042416"/>
-            <a:ext cx="73152" cy="3406139"/>
+            <a:off x="274320" y="996696"/>
+            <a:ext cx="73152" cy="3854196"/>
           </a:xfrm>
           <a:prstGeom prst="rect">
             <a:avLst/>
@@ -4064,8 +4064,8 @@
         </p:nvSpPr>
         <p:spPr>
           <a:xfrm>
-            <a:off x="493776" y="1207008"/>
-            <a:ext cx="3456432" cy="3076956"/>
+            <a:off x="475488" y="1161288"/>
+            <a:ext cx="3300984" cy="3525012"/>
           </a:xfrm>
           <a:prstGeom prst="rect">
             <a:avLst/>
@@ -4083,7 +4083,7 @@
                 <a:spcPct val="120000"/>
               </a:lnSpc>
               <a:spcAft>
-                <a:spcPts val="5800"/>
+                <a:spcPts val="6900"/>
               </a:spcAft>
             </a:pPr>
             <a:r>
@@ -4103,7 +4103,7 @@
                 <a:spcPct val="120000"/>
               </a:lnSpc>
               <a:spcAft>
-                <a:spcPts val="5800"/>
+                <a:spcPts val="6900"/>
               </a:spcAft>
             </a:pPr>
             <a:r>
@@ -4123,7 +4123,7 @@
                 <a:spcPct val="120000"/>
               </a:lnSpc>
               <a:spcAft>
-                <a:spcPts val="5800"/>
+                <a:spcPts val="6900"/>
               </a:spcAft>
             </a:pPr>
             <a:r>
@@ -4143,7 +4143,7 @@
                 <a:spcPct val="120000"/>
               </a:lnSpc>
               <a:spcAft>
-                <a:spcPts val="5800"/>
+                <a:spcPts val="6900"/>
               </a:spcAft>
             </a:pPr>
             <a:r>
@@ -4167,8 +4167,8 @@
         </p:nvSpPr>
         <p:spPr>
           <a:xfrm>
-            <a:off x="4367733" y="1174592"/>
-            <a:ext cx="4377028" cy="3141786"/>
+            <a:off x="4023360" y="1170229"/>
+            <a:ext cx="4892040" cy="3507129"/>
           </a:xfrm>
           <a:prstGeom prst="rect">
             <a:avLst/>
@@ -4176,7 +4176,7 @@
           <a:solidFill>
             <a:srgbClr val="FFFFFF"/>
           </a:solidFill>
-          <a:ln w="12700">
+          <a:ln w="10160">
             <a:solidFill>
               <a:srgbClr val="BAC8DC"/>
             </a:solidFill>
@@ -4220,8 +4220,8 @@
         </p:blipFill>
         <p:spPr>
           <a:xfrm>
-            <a:off x="4440885" y="1247744"/>
-            <a:ext cx="4230724" cy="2794314"/>
+            <a:off x="4069080" y="1215949"/>
+            <a:ext cx="4800600" cy="3232809"/>
           </a:xfrm>
           <a:prstGeom prst="rect">
             <a:avLst/>
@@ -4236,8 +4236,8 @@
         </p:nvSpPr>
         <p:spPr>
           <a:xfrm>
-            <a:off x="4261104" y="4133499"/>
-            <a:ext cx="4590288" cy="201168"/>
+            <a:off x="4069080" y="4503622"/>
+            <a:ext cx="4800600" cy="182880"/>
           </a:xfrm>
           <a:prstGeom prst="rect">
             <a:avLst/>
@@ -4341,8 +4341,8 @@
         </p:nvSpPr>
         <p:spPr>
           <a:xfrm>
-            <a:off x="292608" y="54864"/>
-            <a:ext cx="8558784" cy="347472"/>
+            <a:off x="274320" y="54864"/>
+            <a:ext cx="8595360" cy="347472"/>
           </a:xfrm>
           <a:prstGeom prst="rect">
             <a:avLst/>
@@ -4419,8 +4419,8 @@
         </p:nvSpPr>
         <p:spPr>
           <a:xfrm>
-            <a:off x="292608" y="4951476"/>
-            <a:ext cx="8558784" cy="182880"/>
+            <a:off x="274320" y="4951476"/>
+            <a:ext cx="8595360" cy="182880"/>
           </a:xfrm>
           <a:prstGeom prst="rect">
             <a:avLst/>
@@ -4455,8 +4455,8 @@
         </p:nvSpPr>
         <p:spPr>
           <a:xfrm>
-            <a:off x="292608" y="475488"/>
-            <a:ext cx="8558784" cy="475488"/>
+            <a:off x="274320" y="466344"/>
+            <a:ext cx="8595360" cy="457200"/>
           </a:xfrm>
           <a:prstGeom prst="rect">
             <a:avLst/>
@@ -4491,7 +4491,7 @@
         </p:nvSpPr>
         <p:spPr>
           <a:xfrm>
-            <a:off x="292608" y="914400"/>
+            <a:off x="274320" y="886968"/>
             <a:ext cx="1143000" cy="50292"/>
           </a:xfrm>
           <a:prstGeom prst="rect">
@@ -4534,8 +4534,8 @@
         </p:nvSpPr>
         <p:spPr>
           <a:xfrm>
-            <a:off x="292608" y="1042416"/>
-            <a:ext cx="3767328" cy="3406139"/>
+            <a:off x="274320" y="996696"/>
+            <a:ext cx="3611880" cy="3854196"/>
           </a:xfrm>
           <a:prstGeom prst="rect">
             <a:avLst/>
@@ -4579,8 +4579,8 @@
         </p:nvSpPr>
         <p:spPr>
           <a:xfrm>
-            <a:off x="292608" y="1042416"/>
-            <a:ext cx="73152" cy="3406139"/>
+            <a:off x="274320" y="996696"/>
+            <a:ext cx="73152" cy="3854196"/>
           </a:xfrm>
           <a:prstGeom prst="rect">
             <a:avLst/>
@@ -4622,8 +4622,8 @@
         </p:nvSpPr>
         <p:spPr>
           <a:xfrm>
-            <a:off x="493776" y="1207008"/>
-            <a:ext cx="3456432" cy="3076956"/>
+            <a:off x="475488" y="1161288"/>
+            <a:ext cx="3300984" cy="3525012"/>
           </a:xfrm>
           <a:prstGeom prst="rect">
             <a:avLst/>
@@ -4641,7 +4641,7 @@
                 <a:spcPct val="120000"/>
               </a:lnSpc>
               <a:spcAft>
-                <a:spcPts val="5800"/>
+                <a:spcPts val="6900"/>
               </a:spcAft>
             </a:pPr>
             <a:r>
@@ -4661,7 +4661,7 @@
                 <a:spcPct val="120000"/>
               </a:lnSpc>
               <a:spcAft>
-                <a:spcPts val="5800"/>
+                <a:spcPts val="6900"/>
               </a:spcAft>
             </a:pPr>
             <a:r>
@@ -4681,7 +4681,7 @@
                 <a:spcPct val="120000"/>
               </a:lnSpc>
               <a:spcAft>
-                <a:spcPts val="5800"/>
+                <a:spcPts val="6900"/>
               </a:spcAft>
             </a:pPr>
             <a:r>
@@ -4701,7 +4701,7 @@
                 <a:spcPct val="120000"/>
               </a:lnSpc>
               <a:spcAft>
-                <a:spcPts val="5800"/>
+                <a:spcPts val="6900"/>
               </a:spcAft>
             </a:pPr>
             <a:r>
@@ -4725,8 +4725,8 @@
         </p:nvSpPr>
         <p:spPr>
           <a:xfrm>
-            <a:off x="4325660" y="2218374"/>
-            <a:ext cx="4461174" cy="1054222"/>
+            <a:off x="4023360" y="1132859"/>
+            <a:ext cx="4892040" cy="3581869"/>
           </a:xfrm>
           <a:prstGeom prst="rect">
             <a:avLst/>
@@ -4734,7 +4734,7 @@
           <a:solidFill>
             <a:srgbClr val="FFFFFF"/>
           </a:solidFill>
-          <a:ln w="12700">
+          <a:ln w="10160">
             <a:solidFill>
               <a:srgbClr val="BAC8DC"/>
             </a:solidFill>
@@ -4778,8 +4778,8 @@
         </p:blipFill>
         <p:spPr>
           <a:xfrm>
-            <a:off x="4398812" y="2291526"/>
-            <a:ext cx="4314870" cy="706750"/>
+            <a:off x="4069080" y="1178579"/>
+            <a:ext cx="4800600" cy="3307549"/>
           </a:xfrm>
           <a:prstGeom prst="rect">
             <a:avLst/>
@@ -4794,8 +4794,8 @@
         </p:nvSpPr>
         <p:spPr>
           <a:xfrm>
-            <a:off x="4261104" y="3089717"/>
-            <a:ext cx="4590288" cy="201168"/>
+            <a:off x="4069080" y="4540992"/>
+            <a:ext cx="4800600" cy="182880"/>
           </a:xfrm>
           <a:prstGeom prst="rect">
             <a:avLst/>
@@ -4899,8 +4899,8 @@
         </p:nvSpPr>
         <p:spPr>
           <a:xfrm>
-            <a:off x="292608" y="54864"/>
-            <a:ext cx="8558784" cy="347472"/>
+            <a:off x="274320" y="54864"/>
+            <a:ext cx="8595360" cy="347472"/>
           </a:xfrm>
           <a:prstGeom prst="rect">
             <a:avLst/>
@@ -4977,8 +4977,8 @@
         </p:nvSpPr>
         <p:spPr>
           <a:xfrm>
-            <a:off x="292608" y="4951476"/>
-            <a:ext cx="8558784" cy="182880"/>
+            <a:off x="274320" y="4951476"/>
+            <a:ext cx="8595360" cy="182880"/>
           </a:xfrm>
           <a:prstGeom prst="rect">
             <a:avLst/>
@@ -5013,8 +5013,8 @@
         </p:nvSpPr>
         <p:spPr>
           <a:xfrm>
-            <a:off x="292608" y="475488"/>
-            <a:ext cx="8558784" cy="475488"/>
+            <a:off x="274320" y="466344"/>
+            <a:ext cx="8595360" cy="457200"/>
           </a:xfrm>
           <a:prstGeom prst="rect">
             <a:avLst/>
@@ -5049,7 +5049,7 @@
         </p:nvSpPr>
         <p:spPr>
           <a:xfrm>
-            <a:off x="292608" y="914400"/>
+            <a:off x="274320" y="886968"/>
             <a:ext cx="1143000" cy="50292"/>
           </a:xfrm>
           <a:prstGeom prst="rect">
@@ -5092,8 +5092,8 @@
         </p:nvSpPr>
         <p:spPr>
           <a:xfrm>
-            <a:off x="292608" y="1042416"/>
-            <a:ext cx="3767328" cy="3406139"/>
+            <a:off x="274320" y="996696"/>
+            <a:ext cx="3611880" cy="3854196"/>
           </a:xfrm>
           <a:prstGeom prst="rect">
             <a:avLst/>
@@ -5137,8 +5137,8 @@
         </p:nvSpPr>
         <p:spPr>
           <a:xfrm>
-            <a:off x="292608" y="1042416"/>
-            <a:ext cx="73152" cy="3406139"/>
+            <a:off x="274320" y="996696"/>
+            <a:ext cx="73152" cy="3854196"/>
           </a:xfrm>
           <a:prstGeom prst="rect">
             <a:avLst/>
@@ -5180,8 +5180,8 @@
         </p:nvSpPr>
         <p:spPr>
           <a:xfrm>
-            <a:off x="493776" y="1207008"/>
-            <a:ext cx="3456432" cy="3076956"/>
+            <a:off x="475488" y="1161288"/>
+            <a:ext cx="3300984" cy="3525012"/>
           </a:xfrm>
           <a:prstGeom prst="rect">
             <a:avLst/>
@@ -5199,7 +5199,7 @@
                 <a:spcPct val="120000"/>
               </a:lnSpc>
               <a:spcAft>
-                <a:spcPts val="5800"/>
+                <a:spcPts val="6900"/>
               </a:spcAft>
             </a:pPr>
             <a:r>
@@ -5219,7 +5219,7 @@
                 <a:spcPct val="120000"/>
               </a:lnSpc>
               <a:spcAft>
-                <a:spcPts val="5800"/>
+                <a:spcPts val="6900"/>
               </a:spcAft>
             </a:pPr>
             <a:r>
@@ -5239,7 +5239,7 @@
                 <a:spcPct val="120000"/>
               </a:lnSpc>
               <a:spcAft>
-                <a:spcPts val="5800"/>
+                <a:spcPts val="6900"/>
               </a:spcAft>
             </a:pPr>
             <a:r>
@@ -5259,7 +5259,7 @@
                 <a:spcPct val="120000"/>
               </a:lnSpc>
               <a:spcAft>
-                <a:spcPts val="5800"/>
+                <a:spcPts val="6900"/>
               </a:spcAft>
             </a:pPr>
             <a:r>
@@ -5283,8 +5283,8 @@
         </p:nvSpPr>
         <p:spPr>
           <a:xfrm>
-            <a:off x="4367733" y="1174592"/>
-            <a:ext cx="4377028" cy="3141786"/>
+            <a:off x="5179275" y="1005840"/>
+            <a:ext cx="2580208" cy="3835908"/>
           </a:xfrm>
           <a:prstGeom prst="rect">
             <a:avLst/>
@@ -5292,7 +5292,7 @@
           <a:solidFill>
             <a:srgbClr val="FFFFFF"/>
           </a:solidFill>
-          <a:ln w="12700">
+          <a:ln w="10160">
             <a:solidFill>
               <a:srgbClr val="BAC8DC"/>
             </a:solidFill>
@@ -5336,8 +5336,8 @@
         </p:blipFill>
         <p:spPr>
           <a:xfrm>
-            <a:off x="4440885" y="1247744"/>
-            <a:ext cx="4230724" cy="2794314"/>
+            <a:off x="5224995" y="1051560"/>
+            <a:ext cx="2488768" cy="3561588"/>
           </a:xfrm>
           <a:prstGeom prst="rect">
             <a:avLst/>
@@ -5352,8 +5352,8 @@
         </p:nvSpPr>
         <p:spPr>
           <a:xfrm>
-            <a:off x="4261104" y="4133499"/>
-            <a:ext cx="4590288" cy="201168"/>
+            <a:off x="4069080" y="4668012"/>
+            <a:ext cx="4800600" cy="182880"/>
           </a:xfrm>
           <a:prstGeom prst="rect">
             <a:avLst/>
@@ -5457,8 +5457,8 @@
         </p:nvSpPr>
         <p:spPr>
           <a:xfrm>
-            <a:off x="292608" y="54864"/>
-            <a:ext cx="8558784" cy="347472"/>
+            <a:off x="274320" y="54864"/>
+            <a:ext cx="8595360" cy="347472"/>
           </a:xfrm>
           <a:prstGeom prst="rect">
             <a:avLst/>
@@ -5535,8 +5535,8 @@
         </p:nvSpPr>
         <p:spPr>
           <a:xfrm>
-            <a:off x="292608" y="4951476"/>
-            <a:ext cx="8558784" cy="182880"/>
+            <a:off x="274320" y="4951476"/>
+            <a:ext cx="8595360" cy="182880"/>
           </a:xfrm>
           <a:prstGeom prst="rect">
             <a:avLst/>
@@ -5571,8 +5571,8 @@
         </p:nvSpPr>
         <p:spPr>
           <a:xfrm>
-            <a:off x="292608" y="475488"/>
-            <a:ext cx="8558784" cy="475488"/>
+            <a:off x="274320" y="466344"/>
+            <a:ext cx="8595360" cy="457200"/>
           </a:xfrm>
           <a:prstGeom prst="rect">
             <a:avLst/>
@@ -5607,7 +5607,7 @@
         </p:nvSpPr>
         <p:spPr>
           <a:xfrm>
-            <a:off x="292608" y="914400"/>
+            <a:off x="274320" y="886968"/>
             <a:ext cx="1143000" cy="50292"/>
           </a:xfrm>
           <a:prstGeom prst="rect">
@@ -5650,8 +5650,8 @@
         </p:nvSpPr>
         <p:spPr>
           <a:xfrm>
-            <a:off x="292608" y="1042416"/>
-            <a:ext cx="3767328" cy="3406139"/>
+            <a:off x="274320" y="996696"/>
+            <a:ext cx="3611880" cy="3854196"/>
           </a:xfrm>
           <a:prstGeom prst="rect">
             <a:avLst/>
@@ -5695,8 +5695,8 @@
         </p:nvSpPr>
         <p:spPr>
           <a:xfrm>
-            <a:off x="292608" y="1042416"/>
-            <a:ext cx="73152" cy="3406139"/>
+            <a:off x="274320" y="996696"/>
+            <a:ext cx="73152" cy="3854196"/>
           </a:xfrm>
           <a:prstGeom prst="rect">
             <a:avLst/>
@@ -5738,8 +5738,8 @@
         </p:nvSpPr>
         <p:spPr>
           <a:xfrm>
-            <a:off x="493776" y="1207008"/>
-            <a:ext cx="3456432" cy="3076956"/>
+            <a:off x="475488" y="1161288"/>
+            <a:ext cx="3300984" cy="3525012"/>
           </a:xfrm>
           <a:prstGeom prst="rect">
             <a:avLst/>
@@ -5757,7 +5757,7 @@
                 <a:spcPct val="120000"/>
               </a:lnSpc>
               <a:spcAft>
-                <a:spcPts val="5800"/>
+                <a:spcPts val="6900"/>
               </a:spcAft>
             </a:pPr>
             <a:r>
@@ -5777,7 +5777,7 @@
                 <a:spcPct val="120000"/>
               </a:lnSpc>
               <a:spcAft>
-                <a:spcPts val="5800"/>
+                <a:spcPts val="6900"/>
               </a:spcAft>
             </a:pPr>
             <a:r>
@@ -5797,7 +5797,7 @@
                 <a:spcPct val="120000"/>
               </a:lnSpc>
               <a:spcAft>
-                <a:spcPts val="5800"/>
+                <a:spcPts val="6900"/>
               </a:spcAft>
             </a:pPr>
             <a:r>
@@ -5817,7 +5817,7 @@
                 <a:spcPct val="120000"/>
               </a:lnSpc>
               <a:spcAft>
-                <a:spcPts val="5800"/>
+                <a:spcPts val="6900"/>
               </a:spcAft>
             </a:pPr>
             <a:r>
@@ -5841,8 +5841,8 @@
         </p:nvSpPr>
         <p:spPr>
           <a:xfrm>
-            <a:off x="4367733" y="1174592"/>
-            <a:ext cx="4377028" cy="3141786"/>
+            <a:off x="4023360" y="1391920"/>
+            <a:ext cx="4892040" cy="3063747"/>
           </a:xfrm>
           <a:prstGeom prst="rect">
             <a:avLst/>
@@ -5850,7 +5850,7 @@
           <a:solidFill>
             <a:srgbClr val="FFFFFF"/>
           </a:solidFill>
-          <a:ln w="12700">
+          <a:ln w="10160">
             <a:solidFill>
               <a:srgbClr val="BAC8DC"/>
             </a:solidFill>
@@ -5894,8 +5894,8 @@
         </p:blipFill>
         <p:spPr>
           <a:xfrm>
-            <a:off x="4440885" y="1247744"/>
-            <a:ext cx="4230724" cy="2794314"/>
+            <a:off x="4069080" y="1437640"/>
+            <a:ext cx="4800600" cy="2789427"/>
           </a:xfrm>
           <a:prstGeom prst="rect">
             <a:avLst/>
@@ -5910,8 +5910,8 @@
         </p:nvSpPr>
         <p:spPr>
           <a:xfrm>
-            <a:off x="4261104" y="4133499"/>
-            <a:ext cx="4590288" cy="201168"/>
+            <a:off x="4069080" y="4281931"/>
+            <a:ext cx="4800600" cy="182880"/>
           </a:xfrm>
           <a:prstGeom prst="rect">
             <a:avLst/>
@@ -6015,8 +6015,8 @@
         </p:nvSpPr>
         <p:spPr>
           <a:xfrm>
-            <a:off x="292608" y="54864"/>
-            <a:ext cx="8558784" cy="347472"/>
+            <a:off x="274320" y="54864"/>
+            <a:ext cx="8595360" cy="347472"/>
           </a:xfrm>
           <a:prstGeom prst="rect">
             <a:avLst/>
@@ -6093,8 +6093,8 @@
         </p:nvSpPr>
         <p:spPr>
           <a:xfrm>
-            <a:off x="292608" y="4951476"/>
-            <a:ext cx="8558784" cy="182880"/>
+            <a:off x="274320" y="4951476"/>
+            <a:ext cx="8595360" cy="182880"/>
           </a:xfrm>
           <a:prstGeom prst="rect">
             <a:avLst/>
@@ -6129,8 +6129,8 @@
         </p:nvSpPr>
         <p:spPr>
           <a:xfrm>
-            <a:off x="292608" y="475488"/>
-            <a:ext cx="8558784" cy="475488"/>
+            <a:off x="274320" y="466344"/>
+            <a:ext cx="8595360" cy="457200"/>
           </a:xfrm>
           <a:prstGeom prst="rect">
             <a:avLst/>
@@ -6165,7 +6165,7 @@
         </p:nvSpPr>
         <p:spPr>
           <a:xfrm>
-            <a:off x="292608" y="914400"/>
+            <a:off x="274320" y="886968"/>
             <a:ext cx="1143000" cy="50292"/>
           </a:xfrm>
           <a:prstGeom prst="rect">
@@ -6208,8 +6208,8 @@
         </p:nvSpPr>
         <p:spPr>
           <a:xfrm>
-            <a:off x="292608" y="1042416"/>
-            <a:ext cx="3767328" cy="3406139"/>
+            <a:off x="274320" y="996696"/>
+            <a:ext cx="3611880" cy="3854196"/>
           </a:xfrm>
           <a:prstGeom prst="rect">
             <a:avLst/>
@@ -6253,8 +6253,8 @@
         </p:nvSpPr>
         <p:spPr>
           <a:xfrm>
-            <a:off x="292608" y="1042416"/>
-            <a:ext cx="73152" cy="3406139"/>
+            <a:off x="274320" y="996696"/>
+            <a:ext cx="73152" cy="3854196"/>
           </a:xfrm>
           <a:prstGeom prst="rect">
             <a:avLst/>
@@ -6296,8 +6296,8 @@
         </p:nvSpPr>
         <p:spPr>
           <a:xfrm>
-            <a:off x="493776" y="1207008"/>
-            <a:ext cx="3456432" cy="3076956"/>
+            <a:off x="475488" y="1161288"/>
+            <a:ext cx="3300984" cy="3525012"/>
           </a:xfrm>
           <a:prstGeom prst="rect">
             <a:avLst/>
@@ -6315,7 +6315,7 @@
                 <a:spcPct val="120000"/>
               </a:lnSpc>
               <a:spcAft>
-                <a:spcPts val="5800"/>
+                <a:spcPts val="6900"/>
               </a:spcAft>
             </a:pPr>
             <a:r>
@@ -6335,7 +6335,7 @@
                 <a:spcPct val="120000"/>
               </a:lnSpc>
               <a:spcAft>
-                <a:spcPts val="5800"/>
+                <a:spcPts val="6900"/>
               </a:spcAft>
             </a:pPr>
             <a:r>
@@ -6355,7 +6355,7 @@
                 <a:spcPct val="120000"/>
               </a:lnSpc>
               <a:spcAft>
-                <a:spcPts val="5800"/>
+                <a:spcPts val="6900"/>
               </a:spcAft>
             </a:pPr>
             <a:r>
@@ -6375,7 +6375,7 @@
                 <a:spcPct val="120000"/>
               </a:lnSpc>
               <a:spcAft>
-                <a:spcPts val="5800"/>
+                <a:spcPts val="6900"/>
               </a:spcAft>
             </a:pPr>
             <a:r>
@@ -6399,8 +6399,8 @@
         </p:nvSpPr>
         <p:spPr>
           <a:xfrm>
-            <a:off x="4367733" y="1174592"/>
-            <a:ext cx="4377028" cy="3141786"/>
+            <a:off x="4023360" y="1808142"/>
+            <a:ext cx="4892040" cy="2231303"/>
           </a:xfrm>
           <a:prstGeom prst="rect">
             <a:avLst/>
@@ -6408,7 +6408,7 @@
           <a:solidFill>
             <a:srgbClr val="FFFFFF"/>
           </a:solidFill>
-          <a:ln w="12700">
+          <a:ln w="10160">
             <a:solidFill>
               <a:srgbClr val="BAC8DC"/>
             </a:solidFill>
@@ -6452,8 +6452,8 @@
         </p:blipFill>
         <p:spPr>
           <a:xfrm>
-            <a:off x="4440885" y="1247744"/>
-            <a:ext cx="4230724" cy="2794314"/>
+            <a:off x="4069080" y="1853862"/>
+            <a:ext cx="4800600" cy="1956983"/>
           </a:xfrm>
           <a:prstGeom prst="rect">
             <a:avLst/>
@@ -6468,8 +6468,8 @@
         </p:nvSpPr>
         <p:spPr>
           <a:xfrm>
-            <a:off x="4261104" y="4133499"/>
-            <a:ext cx="4590288" cy="201168"/>
+            <a:off x="4069080" y="3865709"/>
+            <a:ext cx="4800600" cy="182880"/>
           </a:xfrm>
           <a:prstGeom prst="rect">
             <a:avLst/>
@@ -6573,8 +6573,8 @@
         </p:nvSpPr>
         <p:spPr>
           <a:xfrm>
-            <a:off x="292608" y="54864"/>
-            <a:ext cx="8558784" cy="347472"/>
+            <a:off x="274320" y="54864"/>
+            <a:ext cx="8595360" cy="347472"/>
           </a:xfrm>
           <a:prstGeom prst="rect">
             <a:avLst/>
@@ -6651,8 +6651,8 @@
         </p:nvSpPr>
         <p:spPr>
           <a:xfrm>
-            <a:off x="292608" y="4951476"/>
-            <a:ext cx="8558784" cy="182880"/>
+            <a:off x="274320" y="4951476"/>
+            <a:ext cx="8595360" cy="182880"/>
           </a:xfrm>
           <a:prstGeom prst="rect">
             <a:avLst/>
@@ -6687,8 +6687,8 @@
         </p:nvSpPr>
         <p:spPr>
           <a:xfrm>
-            <a:off x="292608" y="475488"/>
-            <a:ext cx="8558784" cy="475488"/>
+            <a:off x="274320" y="466344"/>
+            <a:ext cx="8595360" cy="457200"/>
           </a:xfrm>
           <a:prstGeom prst="rect">
             <a:avLst/>
@@ -6723,7 +6723,7 @@
         </p:nvSpPr>
         <p:spPr>
           <a:xfrm>
-            <a:off x="292608" y="914400"/>
+            <a:off x="274320" y="886968"/>
             <a:ext cx="1143000" cy="50292"/>
           </a:xfrm>
           <a:prstGeom prst="rect">
@@ -6766,8 +6766,8 @@
         </p:nvSpPr>
         <p:spPr>
           <a:xfrm>
-            <a:off x="292608" y="1042416"/>
-            <a:ext cx="3767328" cy="3406139"/>
+            <a:off x="274320" y="996696"/>
+            <a:ext cx="3611880" cy="3451860"/>
           </a:xfrm>
           <a:prstGeom prst="rect">
             <a:avLst/>
@@ -6811,8 +6811,8 @@
         </p:nvSpPr>
         <p:spPr>
           <a:xfrm>
-            <a:off x="292608" y="1042416"/>
-            <a:ext cx="73152" cy="3406139"/>
+            <a:off x="274320" y="996696"/>
+            <a:ext cx="73152" cy="3451860"/>
           </a:xfrm>
           <a:prstGeom prst="rect">
             <a:avLst/>
@@ -6854,8 +6854,8 @@
         </p:nvSpPr>
         <p:spPr>
           <a:xfrm>
-            <a:off x="493776" y="1207008"/>
-            <a:ext cx="3456432" cy="3076956"/>
+            <a:off x="475488" y="1161288"/>
+            <a:ext cx="3300984" cy="3122676"/>
           </a:xfrm>
           <a:prstGeom prst="rect">
             <a:avLst/>
@@ -6873,7 +6873,7 @@
                 <a:spcPct val="120000"/>
               </a:lnSpc>
               <a:spcAft>
-                <a:spcPts val="5800"/>
+                <a:spcPts val="5900"/>
               </a:spcAft>
             </a:pPr>
             <a:r>
@@ -6893,7 +6893,7 @@
                 <a:spcPct val="120000"/>
               </a:lnSpc>
               <a:spcAft>
-                <a:spcPts val="5800"/>
+                <a:spcPts val="5900"/>
               </a:spcAft>
             </a:pPr>
             <a:r>
@@ -6913,7 +6913,7 @@
                 <a:spcPct val="120000"/>
               </a:lnSpc>
               <a:spcAft>
-                <a:spcPts val="5800"/>
+                <a:spcPts val="5900"/>
               </a:spcAft>
             </a:pPr>
             <a:r>
@@ -6933,7 +6933,7 @@
                 <a:spcPct val="120000"/>
               </a:lnSpc>
               <a:spcAft>
-                <a:spcPts val="5800"/>
+                <a:spcPts val="5900"/>
               </a:spcAft>
             </a:pPr>
             <a:r>
@@ -6957,8 +6957,8 @@
         </p:nvSpPr>
         <p:spPr>
           <a:xfrm>
-            <a:off x="4367733" y="1174592"/>
-            <a:ext cx="4377028" cy="3141786"/>
+            <a:off x="4023360" y="1796534"/>
+            <a:ext cx="4892040" cy="2254518"/>
           </a:xfrm>
           <a:prstGeom prst="rect">
             <a:avLst/>
@@ -6966,7 +6966,7 @@
           <a:solidFill>
             <a:srgbClr val="FFFFFF"/>
           </a:solidFill>
-          <a:ln w="12700">
+          <a:ln w="10160">
             <a:solidFill>
               <a:srgbClr val="BAC8DC"/>
             </a:solidFill>
@@ -7010,8 +7010,8 @@
         </p:blipFill>
         <p:spPr>
           <a:xfrm>
-            <a:off x="4440885" y="1247744"/>
-            <a:ext cx="4230724" cy="2794314"/>
+            <a:off x="4069080" y="1842254"/>
+            <a:ext cx="4800600" cy="1980198"/>
           </a:xfrm>
           <a:prstGeom prst="rect">
             <a:avLst/>
@@ -7026,8 +7026,8 @@
         </p:nvSpPr>
         <p:spPr>
           <a:xfrm>
-            <a:off x="4261104" y="4133499"/>
-            <a:ext cx="4590288" cy="201168"/>
+            <a:off x="4069080" y="3877317"/>
+            <a:ext cx="4800600" cy="182880"/>
           </a:xfrm>
           <a:prstGeom prst="rect">
             <a:avLst/>
@@ -7062,8 +7062,8 @@
         </p:nvSpPr>
         <p:spPr>
           <a:xfrm>
-            <a:off x="292608" y="4503420"/>
-            <a:ext cx="3767328" cy="329184"/>
+            <a:off x="274320" y="4539996"/>
+            <a:ext cx="3611880" cy="310896"/>
           </a:xfrm>
           <a:prstGeom prst="rect">
             <a:avLst/>
@@ -7105,8 +7105,8 @@
         </p:nvSpPr>
         <p:spPr>
           <a:xfrm>
-            <a:off x="402336" y="4567428"/>
-            <a:ext cx="3547872" cy="237744"/>
+            <a:off x="384048" y="4604004"/>
+            <a:ext cx="3392424" cy="219456"/>
           </a:xfrm>
           <a:prstGeom prst="rect">
             <a:avLst/>
@@ -7210,8 +7210,8 @@
         </p:nvSpPr>
         <p:spPr>
           <a:xfrm>
-            <a:off x="292608" y="54864"/>
-            <a:ext cx="8558784" cy="347472"/>
+            <a:off x="274320" y="54864"/>
+            <a:ext cx="8595360" cy="347472"/>
           </a:xfrm>
           <a:prstGeom prst="rect">
             <a:avLst/>
@@ -7288,8 +7288,8 @@
         </p:nvSpPr>
         <p:spPr>
           <a:xfrm>
-            <a:off x="292608" y="4951476"/>
-            <a:ext cx="8558784" cy="182880"/>
+            <a:off x="274320" y="4951476"/>
+            <a:ext cx="8595360" cy="182880"/>
           </a:xfrm>
           <a:prstGeom prst="rect">
             <a:avLst/>
@@ -7325,7 +7325,7 @@
         <p:spPr>
           <a:xfrm>
             <a:off x="0" y="420624"/>
-            <a:ext cx="5349240" cy="4411980"/>
+            <a:ext cx="4343400" cy="4430268"/>
           </a:xfrm>
           <a:prstGeom prst="rect">
             <a:avLst/>
@@ -7367,8 +7367,8 @@
         </p:nvSpPr>
         <p:spPr>
           <a:xfrm>
-            <a:off x="457200" y="1051560"/>
-            <a:ext cx="822960" cy="822960"/>
+            <a:off x="384048" y="740664"/>
+            <a:ext cx="658368" cy="658368"/>
           </a:xfrm>
           <a:prstGeom prst="ellipse">
             <a:avLst/>
@@ -7410,8 +7410,8 @@
         </p:nvSpPr>
         <p:spPr>
           <a:xfrm>
-            <a:off x="457200" y="1115568"/>
-            <a:ext cx="822960" cy="457200"/>
+            <a:off x="384048" y="804672"/>
+            <a:ext cx="658368" cy="411480"/>
           </a:xfrm>
           <a:prstGeom prst="rect">
             <a:avLst/>
@@ -7426,7 +7426,7 @@
           <a:p>
             <a:pPr algn="ctr"/>
             <a:r>
-              <a:rPr sz="2600" b="1">
+              <a:rPr sz="2200" b="1">
                 <a:solidFill>
                   <a:srgbClr val="FFFFFF"/>
                 </a:solidFill>
@@ -7446,8 +7446,8 @@
         </p:nvSpPr>
         <p:spPr>
           <a:xfrm>
-            <a:off x="411480" y="1965960"/>
-            <a:ext cx="4754880" cy="502920"/>
+            <a:off x="347472" y="1472184"/>
+            <a:ext cx="3840480" cy="457200"/>
           </a:xfrm>
           <a:prstGeom prst="rect">
             <a:avLst/>
@@ -7461,6 +7461,13 @@
           <a:lstStyle/>
           <a:p>
             <a:r>
+              <a:rPr sz="2400" b="1">
+                <a:solidFill>
+                  <a:srgbClr val="FFFFFF"/>
+                </a:solidFill>
+                <a:latin typeface="微软雅黑"/>
+                <ns3:rFonts xmlns:ns3="http://schemas.openxmlformats.org/wordprocessingml/2006/main" ns3:eastAsia="微软雅黑" ns3:ascii="微软雅黑" ns3:hAnsi="微软雅黑"/>
+              </a:rPr>
               <a:t>第三部分</a:t>
             </a:r>
           </a:p>
@@ -7474,8 +7481,8 @@
         </p:nvSpPr>
         <p:spPr>
           <a:xfrm>
-            <a:off x="438912" y="2514600"/>
-            <a:ext cx="4754880" cy="365760"/>
+            <a:off x="365760" y="1947672"/>
+            <a:ext cx="3840480" cy="347472"/>
           </a:xfrm>
           <a:prstGeom prst="rect">
             <a:avLst/>
@@ -7489,6 +7496,13 @@
           <a:lstStyle/>
           <a:p>
             <a:r>
+              <a:rPr sz="1200" b="0">
+                <a:solidFill>
+                  <a:srgbClr val="BFDBFE"/>
+                </a:solidFill>
+                <a:latin typeface="微软雅黑"/>
+                <ns4:rFonts xmlns:ns4="http://schemas.openxmlformats.org/wordprocessingml/2006/main" ns4:eastAsia="微软雅黑" ns4:ascii="微软雅黑" ns4:hAnsi="微软雅黑"/>
+              </a:rPr>
               <a:t>系统实现 · 实验验证 · 现场演示</a:t>
             </a:r>
           </a:p>
@@ -7496,97 +7510,25 @@
       </p:sp>
       <p:sp>
         <p:nvSpPr>
-          <p:cNvPr id="11" name="TextBox 10"/>
-          <p:cNvSpPr txBox="1"/>
-          <p:nvPr/>
-        </p:nvSpPr>
-        <p:spPr>
-          <a:xfrm>
-            <a:off x="475488" y="3063240"/>
-            <a:ext cx="4572000" cy="1463040"/>
-          </a:xfrm>
-          <a:prstGeom prst="rect">
-            <a:avLst/>
-          </a:prstGeom>
-          <a:noFill/>
-        </p:spPr>
-        <p:txBody>
-          <a:bodyPr wrap="none">
-            <a:spAutoFit/>
-          </a:bodyPr>
-          <a:lstStyle/>
-          <a:p>
-            <a:pPr>
-              <a:spcAft>
-                <a:spcPts val="1000"/>
-              </a:spcAft>
-            </a:pPr>
-            <a:r>
-              <a:rPr sz="1300" b="0">
-                <a:solidFill>
-                  <a:srgbClr val="E2E8F0"/>
-                </a:solidFill>
-                <a:latin typeface="微软雅黑"/>
-                <ns5:rFonts xmlns:ns5="http://schemas.openxmlformats.org/wordprocessingml/2006/main" ns5:eastAsia="微软雅黑" ns5:ascii="微软雅黑" ns5:hAnsi="微软雅黑"/>
-              </a:rPr>
-              <a:t>▸  Web 控制台</a:t>
-            </a:r>
-          </a:p>
-          <a:p>
-            <a:pPr>
-              <a:spcAft>
-                <a:spcPts val="1000"/>
-              </a:spcAft>
-            </a:pPr>
-            <a:r>
-              <a:rPr sz="1300" b="0">
-                <a:solidFill>
-                  <a:srgbClr val="E2E8F0"/>
-                </a:solidFill>
-                <a:latin typeface="微软雅黑"/>
-                <ns6:rFonts xmlns:ns6="http://schemas.openxmlformats.org/wordprocessingml/2006/main" ns6:eastAsia="微软雅黑" ns6:ascii="微软雅黑" ns6:hAnsi="微软雅黑"/>
-              </a:rPr>
-              <a:t>▸  视觉分析</a:t>
-            </a:r>
-          </a:p>
-          <a:p>
-            <a:pPr>
-              <a:spcAft>
-                <a:spcPts val="1000"/>
-              </a:spcAft>
-            </a:pPr>
-            <a:r>
-              <a:rPr sz="1300" b="0">
-                <a:solidFill>
-                  <a:srgbClr val="E2E8F0"/>
-                </a:solidFill>
-                <a:latin typeface="微软雅黑"/>
-                <ns7:rFonts xmlns:ns7="http://schemas.openxmlformats.org/wordprocessingml/2006/main" ns7:eastAsia="微软雅黑" ns7:ascii="微软雅黑" ns7:hAnsi="微软雅黑"/>
-              </a:rPr>
-              <a:t>▸  量化评测</a:t>
-            </a:r>
-          </a:p>
-        </p:txBody>
-      </p:sp>
-      <p:sp>
-        <p:nvSpPr>
-          <p:cNvPr id="12" name="Rectangle 11"/>
+          <p:cNvPr id="11" name="Rectangle 10"/>
           <p:cNvSpPr/>
           <p:nvPr/>
         </p:nvSpPr>
         <p:spPr>
           <a:xfrm>
-            <a:off x="5349240" y="420624"/>
-            <a:ext cx="3794760" cy="4411980"/>
-          </a:xfrm>
-          <a:prstGeom prst="rect">
-            <a:avLst/>
-          </a:prstGeom>
-          <a:solidFill>
-            <a:srgbClr val="F1F7FF"/>
+            <a:off x="384048" y="2432304"/>
+            <a:ext cx="3657600" cy="384048"/>
+          </a:xfrm>
+          <a:prstGeom prst="rect">
+            <a:avLst/>
+          </a:prstGeom>
+          <a:solidFill>
+            <a:srgbClr val="1E4082"/>
           </a:solidFill>
           <a:ln>
-            <a:noFill/>
+            <a:solidFill>
+              <a:srgbClr val="648CC8"/>
+            </a:solidFill>
           </a:ln>
         </p:spPr>
         <p:style>
@@ -7613,24 +7555,59 @@
       </p:sp>
       <p:sp>
         <p:nvSpPr>
+          <p:cNvPr id="12" name="TextBox 11"/>
+          <p:cNvSpPr txBox="1"/>
+          <p:nvPr/>
+        </p:nvSpPr>
+        <p:spPr>
+          <a:xfrm>
+            <a:off x="502920" y="2505456"/>
+            <a:ext cx="3429000" cy="256032"/>
+          </a:xfrm>
+          <a:prstGeom prst="rect">
+            <a:avLst/>
+          </a:prstGeom>
+          <a:noFill/>
+        </p:spPr>
+        <p:txBody>
+          <a:bodyPr wrap="none">
+            <a:spAutoFit/>
+          </a:bodyPr>
+          <a:lstStyle/>
+          <a:p>
+            <a:r>
+              <a:rPr sz="1100" b="0">
+                <a:solidFill>
+                  <a:srgbClr val="E2E8F0"/>
+                </a:solidFill>
+                <a:latin typeface="微软雅黑"/>
+                <ns5:rFonts xmlns:ns5="http://schemas.openxmlformats.org/wordprocessingml/2006/main" ns5:eastAsia="微软雅黑" ns5:ascii="微软雅黑" ns5:hAnsi="微软雅黑"/>
+              </a:rPr>
+              <a:t>Web 控制台</a:t>
+            </a:r>
+          </a:p>
+        </p:txBody>
+      </p:sp>
+      <p:sp>
+        <p:nvSpPr>
           <p:cNvPr id="13" name="Rectangle 12"/>
           <p:cNvSpPr/>
           <p:nvPr/>
         </p:nvSpPr>
         <p:spPr>
           <a:xfrm>
-            <a:off x="5501259" y="1693309"/>
-            <a:ext cx="3490722" cy="2488400"/>
-          </a:xfrm>
-          <a:prstGeom prst="rect">
-            <a:avLst/>
-          </a:prstGeom>
-          <a:solidFill>
-            <a:srgbClr val="FFFFFF"/>
-          </a:solidFill>
-          <a:ln w="12700">
+            <a:off x="384048" y="2871216"/>
+            <a:ext cx="3657600" cy="384048"/>
+          </a:xfrm>
+          <a:prstGeom prst="rect">
+            <a:avLst/>
+          </a:prstGeom>
+          <a:solidFill>
+            <a:srgbClr val="1E4082"/>
+          </a:solidFill>
+          <a:ln>
             <a:solidFill>
-              <a:srgbClr val="BAC8DC"/>
+              <a:srgbClr val="648CC8"/>
             </a:solidFill>
           </a:ln>
         </p:spPr>
@@ -7656,9 +7633,167 @@
           </a:p>
         </p:txBody>
       </p:sp>
+      <p:sp>
+        <p:nvSpPr>
+          <p:cNvPr id="14" name="TextBox 13"/>
+          <p:cNvSpPr txBox="1"/>
+          <p:nvPr/>
+        </p:nvSpPr>
+        <p:spPr>
+          <a:xfrm>
+            <a:off x="502920" y="2944368"/>
+            <a:ext cx="3429000" cy="256032"/>
+          </a:xfrm>
+          <a:prstGeom prst="rect">
+            <a:avLst/>
+          </a:prstGeom>
+          <a:noFill/>
+        </p:spPr>
+        <p:txBody>
+          <a:bodyPr wrap="none">
+            <a:spAutoFit/>
+          </a:bodyPr>
+          <a:lstStyle/>
+          <a:p>
+            <a:r>
+              <a:rPr sz="1100" b="0">
+                <a:solidFill>
+                  <a:srgbClr val="E2E8F0"/>
+                </a:solidFill>
+                <a:latin typeface="微软雅黑"/>
+                <ns6:rFonts xmlns:ns6="http://schemas.openxmlformats.org/wordprocessingml/2006/main" ns6:eastAsia="微软雅黑" ns6:ascii="微软雅黑" ns6:hAnsi="微软雅黑"/>
+              </a:rPr>
+              <a:t>视觉分析</a:t>
+            </a:r>
+          </a:p>
+        </p:txBody>
+      </p:sp>
+      <p:sp>
+        <p:nvSpPr>
+          <p:cNvPr id="15" name="Rectangle 14"/>
+          <p:cNvSpPr/>
+          <p:nvPr/>
+        </p:nvSpPr>
+        <p:spPr>
+          <a:xfrm>
+            <a:off x="384048" y="3310128"/>
+            <a:ext cx="3657600" cy="384048"/>
+          </a:xfrm>
+          <a:prstGeom prst="rect">
+            <a:avLst/>
+          </a:prstGeom>
+          <a:solidFill>
+            <a:srgbClr val="1E4082"/>
+          </a:solidFill>
+          <a:ln>
+            <a:solidFill>
+              <a:srgbClr val="648CC8"/>
+            </a:solidFill>
+          </a:ln>
+        </p:spPr>
+        <p:style>
+          <a:lnRef idx="1">
+            <a:schemeClr val="accent1"/>
+          </a:lnRef>
+          <a:fillRef idx="3">
+            <a:schemeClr val="accent1"/>
+          </a:fillRef>
+          <a:effectRef idx="2">
+            <a:schemeClr val="accent1"/>
+          </a:effectRef>
+          <a:fontRef idx="minor">
+            <a:schemeClr val="lt1"/>
+          </a:fontRef>
+        </p:style>
+        <p:txBody>
+          <a:bodyPr rtlCol="0" anchor="ctr"/>
+          <a:lstStyle/>
+          <a:p>
+            <a:pPr algn="ctr"/>
+          </a:p>
+        </p:txBody>
+      </p:sp>
+      <p:sp>
+        <p:nvSpPr>
+          <p:cNvPr id="16" name="TextBox 15"/>
+          <p:cNvSpPr txBox="1"/>
+          <p:nvPr/>
+        </p:nvSpPr>
+        <p:spPr>
+          <a:xfrm>
+            <a:off x="502920" y="3383280"/>
+            <a:ext cx="3429000" cy="256032"/>
+          </a:xfrm>
+          <a:prstGeom prst="rect">
+            <a:avLst/>
+          </a:prstGeom>
+          <a:noFill/>
+        </p:spPr>
+        <p:txBody>
+          <a:bodyPr wrap="none">
+            <a:spAutoFit/>
+          </a:bodyPr>
+          <a:lstStyle/>
+          <a:p>
+            <a:r>
+              <a:rPr sz="1100" b="0">
+                <a:solidFill>
+                  <a:srgbClr val="E2E8F0"/>
+                </a:solidFill>
+                <a:latin typeface="微软雅黑"/>
+                <ns7:rFonts xmlns:ns7="http://schemas.openxmlformats.org/wordprocessingml/2006/main" ns7:eastAsia="微软雅黑" ns7:ascii="微软雅黑" ns7:hAnsi="微软雅黑"/>
+              </a:rPr>
+              <a:t>量化评测</a:t>
+            </a:r>
+          </a:p>
+        </p:txBody>
+      </p:sp>
+      <p:sp>
+        <p:nvSpPr>
+          <p:cNvPr id="17" name="Rectangle 16"/>
+          <p:cNvSpPr/>
+          <p:nvPr/>
+        </p:nvSpPr>
+        <p:spPr>
+          <a:xfrm>
+            <a:off x="4343400" y="420624"/>
+            <a:ext cx="4800600" cy="4430268"/>
+          </a:xfrm>
+          <a:prstGeom prst="rect">
+            <a:avLst/>
+          </a:prstGeom>
+          <a:solidFill>
+            <a:srgbClr val="F1F7FF"/>
+          </a:solidFill>
+          <a:ln>
+            <a:noFill/>
+          </a:ln>
+        </p:spPr>
+        <p:style>
+          <a:lnRef idx="1">
+            <a:schemeClr val="accent1"/>
+          </a:lnRef>
+          <a:fillRef idx="3">
+            <a:schemeClr val="accent1"/>
+          </a:fillRef>
+          <a:effectRef idx="2">
+            <a:schemeClr val="accent1"/>
+          </a:effectRef>
+          <a:fontRef idx="minor">
+            <a:schemeClr val="lt1"/>
+          </a:fontRef>
+        </p:style>
+        <p:txBody>
+          <a:bodyPr rtlCol="0" anchor="ctr"/>
+          <a:lstStyle/>
+          <a:p>
+            <a:pPr algn="ctr"/>
+          </a:p>
+        </p:txBody>
+      </p:sp>
       <p:pic>
         <p:nvPicPr>
-          <p:cNvPr id="14" name="Picture 13" descr="metrics_chart.png"/>
+          <p:cNvPr id="18" name="Picture 17" descr="metrics_chart.png"/>
           <p:cNvPicPr>
             <a:picLocks noChangeAspect="1"/>
           </p:cNvPicPr>
@@ -7672,50 +7807,14 @@
         </p:blipFill>
         <p:spPr>
           <a:xfrm>
-            <a:off x="5574411" y="1766461"/>
-            <a:ext cx="3344418" cy="2140928"/>
+            <a:off x="4402895" y="1051560"/>
+            <a:ext cx="4681608" cy="3744468"/>
           </a:xfrm>
           <a:prstGeom prst="rect">
             <a:avLst/>
           </a:prstGeom>
         </p:spPr>
       </p:pic>
-      <p:sp>
-        <p:nvSpPr>
-          <p:cNvPr id="15" name="TextBox 14"/>
-          <p:cNvSpPr txBox="1"/>
-          <p:nvPr/>
-        </p:nvSpPr>
-        <p:spPr>
-          <a:xfrm>
-            <a:off x="5486400" y="3998830"/>
-            <a:ext cx="3520440" cy="201168"/>
-          </a:xfrm>
-          <a:prstGeom prst="rect">
-            <a:avLst/>
-          </a:prstGeom>
-          <a:noFill/>
-        </p:spPr>
-        <p:txBody>
-          <a:bodyPr wrap="none">
-            <a:spAutoFit/>
-          </a:bodyPr>
-          <a:lstStyle/>
-          <a:p>
-            <a:pPr algn="ctr"/>
-            <a:r>
-              <a:rPr sz="900" b="0">
-                <a:solidFill>
-                  <a:srgbClr val="5A6273"/>
-                </a:solidFill>
-                <a:latin typeface="微软雅黑"/>
-                <ns8:rFonts xmlns:ns8="http://schemas.openxmlformats.org/wordprocessingml/2006/main" ns8:eastAsia="微软雅黑" ns8:ascii="微软雅黑" ns8:hAnsi="微软雅黑"/>
-              </a:rPr>
-              <a:t>本章核心示意</a:t>
-            </a:r>
-          </a:p>
-        </p:txBody>
-      </p:sp>
     </p:spTree>
   </p:cSld>
   <p:clrMapOvr>
@@ -7793,8 +7892,8 @@
         </p:nvSpPr>
         <p:spPr>
           <a:xfrm>
-            <a:off x="292608" y="54864"/>
-            <a:ext cx="8558784" cy="347472"/>
+            <a:off x="274320" y="54864"/>
+            <a:ext cx="8595360" cy="347472"/>
           </a:xfrm>
           <a:prstGeom prst="rect">
             <a:avLst/>
@@ -7871,8 +7970,8 @@
         </p:nvSpPr>
         <p:spPr>
           <a:xfrm>
-            <a:off x="292608" y="4951476"/>
-            <a:ext cx="8558784" cy="182880"/>
+            <a:off x="274320" y="4951476"/>
+            <a:ext cx="8595360" cy="182880"/>
           </a:xfrm>
           <a:prstGeom prst="rect">
             <a:avLst/>
@@ -7907,8 +8006,8 @@
         </p:nvSpPr>
         <p:spPr>
           <a:xfrm>
-            <a:off x="292608" y="475488"/>
-            <a:ext cx="8558784" cy="475488"/>
+            <a:off x="274320" y="466344"/>
+            <a:ext cx="8595360" cy="457200"/>
           </a:xfrm>
           <a:prstGeom prst="rect">
             <a:avLst/>
@@ -7943,7 +8042,7 @@
         </p:nvSpPr>
         <p:spPr>
           <a:xfrm>
-            <a:off x="292608" y="914400"/>
+            <a:off x="274320" y="886968"/>
             <a:ext cx="1143000" cy="50292"/>
           </a:xfrm>
           <a:prstGeom prst="rect">
@@ -7986,8 +8085,8 @@
         </p:nvSpPr>
         <p:spPr>
           <a:xfrm>
-            <a:off x="292608" y="1042416"/>
-            <a:ext cx="3767328" cy="3406139"/>
+            <a:off x="274320" y="996696"/>
+            <a:ext cx="3611880" cy="3854196"/>
           </a:xfrm>
           <a:prstGeom prst="rect">
             <a:avLst/>
@@ -8031,8 +8130,8 @@
         </p:nvSpPr>
         <p:spPr>
           <a:xfrm>
-            <a:off x="292608" y="1042416"/>
-            <a:ext cx="73152" cy="3406139"/>
+            <a:off x="274320" y="996696"/>
+            <a:ext cx="73152" cy="3854196"/>
           </a:xfrm>
           <a:prstGeom prst="rect">
             <a:avLst/>
@@ -8074,8 +8173,8 @@
         </p:nvSpPr>
         <p:spPr>
           <a:xfrm>
-            <a:off x="493776" y="1207008"/>
-            <a:ext cx="3456432" cy="3076956"/>
+            <a:off x="475488" y="1161288"/>
+            <a:ext cx="3300984" cy="3525012"/>
           </a:xfrm>
           <a:prstGeom prst="rect">
             <a:avLst/>
@@ -8093,7 +8192,7 @@
                 <a:spcPct val="120000"/>
               </a:lnSpc>
               <a:spcAft>
-                <a:spcPts val="5800"/>
+                <a:spcPts val="6900"/>
               </a:spcAft>
             </a:pPr>
             <a:r>
@@ -8113,7 +8212,7 @@
                 <a:spcPct val="120000"/>
               </a:lnSpc>
               <a:spcAft>
-                <a:spcPts val="5800"/>
+                <a:spcPts val="6900"/>
               </a:spcAft>
             </a:pPr>
             <a:r>
@@ -8133,7 +8232,7 @@
                 <a:spcPct val="120000"/>
               </a:lnSpc>
               <a:spcAft>
-                <a:spcPts val="5800"/>
+                <a:spcPts val="6900"/>
               </a:spcAft>
             </a:pPr>
             <a:r>
@@ -8153,7 +8252,7 @@
                 <a:spcPct val="120000"/>
               </a:lnSpc>
               <a:spcAft>
-                <a:spcPts val="5800"/>
+                <a:spcPts val="6900"/>
               </a:spcAft>
             </a:pPr>
             <a:r>
@@ -8177,8 +8276,8 @@
         </p:nvSpPr>
         <p:spPr>
           <a:xfrm>
-            <a:off x="4325660" y="1446681"/>
-            <a:ext cx="4461174" cy="2597609"/>
+            <a:off x="4023360" y="1534915"/>
+            <a:ext cx="4892040" cy="2777757"/>
           </a:xfrm>
           <a:prstGeom prst="rect">
             <a:avLst/>
@@ -8186,7 +8285,7 @@
           <a:solidFill>
             <a:srgbClr val="FFFFFF"/>
           </a:solidFill>
-          <a:ln w="12700">
+          <a:ln w="10160">
             <a:solidFill>
               <a:srgbClr val="BAC8DC"/>
             </a:solidFill>
@@ -8230,8 +8329,8 @@
         </p:blipFill>
         <p:spPr>
           <a:xfrm>
-            <a:off x="4398812" y="1519833"/>
-            <a:ext cx="4314870" cy="2250137"/>
+            <a:off x="4069080" y="1580635"/>
+            <a:ext cx="4800600" cy="2503437"/>
           </a:xfrm>
           <a:prstGeom prst="rect">
             <a:avLst/>
@@ -8246,8 +8345,8 @@
         </p:nvSpPr>
         <p:spPr>
           <a:xfrm>
-            <a:off x="4261104" y="3861410"/>
-            <a:ext cx="4590288" cy="201168"/>
+            <a:off x="4069080" y="4138936"/>
+            <a:ext cx="4800600" cy="182880"/>
           </a:xfrm>
           <a:prstGeom prst="rect">
             <a:avLst/>
@@ -8351,8 +8450,8 @@
         </p:nvSpPr>
         <p:spPr>
           <a:xfrm>
-            <a:off x="292608" y="54864"/>
-            <a:ext cx="8558784" cy="347472"/>
+            <a:off x="274320" y="54864"/>
+            <a:ext cx="8595360" cy="347472"/>
           </a:xfrm>
           <a:prstGeom prst="rect">
             <a:avLst/>
@@ -8429,8 +8528,8 @@
         </p:nvSpPr>
         <p:spPr>
           <a:xfrm>
-            <a:off x="292608" y="4951476"/>
-            <a:ext cx="8558784" cy="182880"/>
+            <a:off x="274320" y="4951476"/>
+            <a:ext cx="8595360" cy="182880"/>
           </a:xfrm>
           <a:prstGeom prst="rect">
             <a:avLst/>
@@ -8465,8 +8564,8 @@
         </p:nvSpPr>
         <p:spPr>
           <a:xfrm>
-            <a:off x="292608" y="475488"/>
-            <a:ext cx="8558784" cy="475488"/>
+            <a:off x="274320" y="466344"/>
+            <a:ext cx="8595360" cy="457200"/>
           </a:xfrm>
           <a:prstGeom prst="rect">
             <a:avLst/>
@@ -8501,7 +8600,7 @@
         </p:nvSpPr>
         <p:spPr>
           <a:xfrm>
-            <a:off x="292608" y="914400"/>
+            <a:off x="274320" y="886968"/>
             <a:ext cx="1143000" cy="50292"/>
           </a:xfrm>
           <a:prstGeom prst="rect">
@@ -8544,8 +8643,8 @@
         </p:nvSpPr>
         <p:spPr>
           <a:xfrm>
-            <a:off x="3478093" y="1065390"/>
-            <a:ext cx="2187812" cy="3405911"/>
+            <a:off x="3352538" y="1051079"/>
+            <a:ext cx="2438922" cy="3791148"/>
           </a:xfrm>
           <a:prstGeom prst="rect">
             <a:avLst/>
@@ -8553,7 +8652,7 @@
           <a:solidFill>
             <a:srgbClr val="FFFFFF"/>
           </a:solidFill>
-          <a:ln w="12700">
+          <a:ln w="10160">
             <a:solidFill>
               <a:srgbClr val="BAC8DC"/>
             </a:solidFill>
@@ -8597,8 +8696,8 @@
         </p:blipFill>
         <p:spPr>
           <a:xfrm>
-            <a:off x="3551245" y="1138542"/>
-            <a:ext cx="2041508" cy="3058439"/>
+            <a:off x="3398258" y="1096799"/>
+            <a:ext cx="2347482" cy="3516828"/>
           </a:xfrm>
           <a:prstGeom prst="rect">
             <a:avLst/>
@@ -8613,8 +8712,8 @@
         </p:nvSpPr>
         <p:spPr>
           <a:xfrm>
-            <a:off x="292608" y="4288421"/>
-            <a:ext cx="8558784" cy="201168"/>
+            <a:off x="274320" y="4668492"/>
+            <a:ext cx="8595360" cy="182880"/>
           </a:xfrm>
           <a:prstGeom prst="rect">
             <a:avLst/>
@@ -8718,8 +8817,8 @@
         </p:nvSpPr>
         <p:spPr>
           <a:xfrm>
-            <a:off x="292608" y="54864"/>
-            <a:ext cx="8558784" cy="347472"/>
+            <a:off x="274320" y="54864"/>
+            <a:ext cx="8595360" cy="347472"/>
           </a:xfrm>
           <a:prstGeom prst="rect">
             <a:avLst/>
@@ -8796,8 +8895,8 @@
         </p:nvSpPr>
         <p:spPr>
           <a:xfrm>
-            <a:off x="292608" y="4951476"/>
-            <a:ext cx="8558784" cy="182880"/>
+            <a:off x="274320" y="4951476"/>
+            <a:ext cx="8595360" cy="182880"/>
           </a:xfrm>
           <a:prstGeom prst="rect">
             <a:avLst/>
@@ -8832,8 +8931,8 @@
         </p:nvSpPr>
         <p:spPr>
           <a:xfrm>
-            <a:off x="292608" y="475488"/>
-            <a:ext cx="8558784" cy="475488"/>
+            <a:off x="274320" y="466344"/>
+            <a:ext cx="8595360" cy="457200"/>
           </a:xfrm>
           <a:prstGeom prst="rect">
             <a:avLst/>
@@ -8868,7 +8967,7 @@
         </p:nvSpPr>
         <p:spPr>
           <a:xfrm>
-            <a:off x="292608" y="914400"/>
+            <a:off x="274320" y="886968"/>
             <a:ext cx="1143000" cy="50292"/>
           </a:xfrm>
           <a:prstGeom prst="rect">
@@ -8911,8 +9010,8 @@
         </p:nvSpPr>
         <p:spPr>
           <a:xfrm>
-            <a:off x="1566411" y="1065390"/>
-            <a:ext cx="6011176" cy="3405911"/>
+            <a:off x="1154339" y="1051079"/>
+            <a:ext cx="6835320" cy="3791148"/>
           </a:xfrm>
           <a:prstGeom prst="rect">
             <a:avLst/>
@@ -8920,7 +9019,7 @@
           <a:solidFill>
             <a:srgbClr val="FFFFFF"/>
           </a:solidFill>
-          <a:ln w="12700">
+          <a:ln w="10160">
             <a:solidFill>
               <a:srgbClr val="BAC8DC"/>
             </a:solidFill>
@@ -8964,8 +9063,8 @@
         </p:blipFill>
         <p:spPr>
           <a:xfrm>
-            <a:off x="1639563" y="1138542"/>
-            <a:ext cx="5864872" cy="3058439"/>
+            <a:off x="1200059" y="1096799"/>
+            <a:ext cx="6743880" cy="3516828"/>
           </a:xfrm>
           <a:prstGeom prst="rect">
             <a:avLst/>
@@ -8980,8 +9079,8 @@
         </p:nvSpPr>
         <p:spPr>
           <a:xfrm>
-            <a:off x="292608" y="4288421"/>
-            <a:ext cx="8558784" cy="201168"/>
+            <a:off x="274320" y="4668492"/>
+            <a:ext cx="8595360" cy="182880"/>
           </a:xfrm>
           <a:prstGeom prst="rect">
             <a:avLst/>
@@ -9085,8 +9184,8 @@
         </p:nvSpPr>
         <p:spPr>
           <a:xfrm>
-            <a:off x="292608" y="54864"/>
-            <a:ext cx="8558784" cy="347472"/>
+            <a:off x="274320" y="54864"/>
+            <a:ext cx="8595360" cy="347472"/>
           </a:xfrm>
           <a:prstGeom prst="rect">
             <a:avLst/>
@@ -9163,8 +9262,8 @@
         </p:nvSpPr>
         <p:spPr>
           <a:xfrm>
-            <a:off x="292608" y="4951476"/>
-            <a:ext cx="8558784" cy="182880"/>
+            <a:off x="274320" y="4951476"/>
+            <a:ext cx="8595360" cy="182880"/>
           </a:xfrm>
           <a:prstGeom prst="rect">
             <a:avLst/>
@@ -9199,8 +9298,8 @@
         </p:nvSpPr>
         <p:spPr>
           <a:xfrm>
-            <a:off x="292608" y="475488"/>
-            <a:ext cx="8558784" cy="475488"/>
+            <a:off x="274320" y="466344"/>
+            <a:ext cx="8595360" cy="457200"/>
           </a:xfrm>
           <a:prstGeom prst="rect">
             <a:avLst/>
@@ -9235,7 +9334,7 @@
         </p:nvSpPr>
         <p:spPr>
           <a:xfrm>
-            <a:off x="292608" y="914400"/>
+            <a:off x="274320" y="886968"/>
             <a:ext cx="1143000" cy="50292"/>
           </a:xfrm>
           <a:prstGeom prst="rect">
@@ -9278,8 +9377,8 @@
         </p:nvSpPr>
         <p:spPr>
           <a:xfrm>
-            <a:off x="292608" y="1042416"/>
-            <a:ext cx="3767328" cy="3406139"/>
+            <a:off x="274320" y="996696"/>
+            <a:ext cx="3611880" cy="3451860"/>
           </a:xfrm>
           <a:prstGeom prst="rect">
             <a:avLst/>
@@ -9323,8 +9422,8 @@
         </p:nvSpPr>
         <p:spPr>
           <a:xfrm>
-            <a:off x="292608" y="1042416"/>
-            <a:ext cx="73152" cy="3406139"/>
+            <a:off x="274320" y="996696"/>
+            <a:ext cx="73152" cy="3451860"/>
           </a:xfrm>
           <a:prstGeom prst="rect">
             <a:avLst/>
@@ -9366,8 +9465,8 @@
         </p:nvSpPr>
         <p:spPr>
           <a:xfrm>
-            <a:off x="493776" y="1207008"/>
-            <a:ext cx="3456432" cy="3076956"/>
+            <a:off x="475488" y="1161288"/>
+            <a:ext cx="3300984" cy="3122676"/>
           </a:xfrm>
           <a:prstGeom prst="rect">
             <a:avLst/>
@@ -9385,7 +9484,7 @@
                 <a:spcPct val="120000"/>
               </a:lnSpc>
               <a:spcAft>
-                <a:spcPts val="3900"/>
+                <a:spcPts val="4000"/>
               </a:spcAft>
             </a:pPr>
             <a:r>
@@ -9405,7 +9504,7 @@
                 <a:spcPct val="120000"/>
               </a:lnSpc>
               <a:spcAft>
-                <a:spcPts val="3900"/>
+                <a:spcPts val="4000"/>
               </a:spcAft>
             </a:pPr>
             <a:r>
@@ -9425,7 +9524,7 @@
                 <a:spcPct val="120000"/>
               </a:lnSpc>
               <a:spcAft>
-                <a:spcPts val="3900"/>
+                <a:spcPts val="4000"/>
               </a:spcAft>
             </a:pPr>
             <a:r>
@@ -9445,7 +9544,7 @@
                 <a:spcPct val="120000"/>
               </a:lnSpc>
               <a:spcAft>
-                <a:spcPts val="3900"/>
+                <a:spcPts val="4000"/>
               </a:spcAft>
             </a:pPr>
             <a:r>
@@ -9465,7 +9564,7 @@
                 <a:spcPct val="120000"/>
               </a:lnSpc>
               <a:spcAft>
-                <a:spcPts val="3900"/>
+                <a:spcPts val="4000"/>
               </a:spcAft>
             </a:pPr>
             <a:r>
@@ -9489,8 +9588,8 @@
         </p:nvSpPr>
         <p:spPr>
           <a:xfrm>
-            <a:off x="4367733" y="1174592"/>
-            <a:ext cx="4377028" cy="3141786"/>
+            <a:off x="4023360" y="1808142"/>
+            <a:ext cx="4892040" cy="2231303"/>
           </a:xfrm>
           <a:prstGeom prst="rect">
             <a:avLst/>
@@ -9498,7 +9597,7 @@
           <a:solidFill>
             <a:srgbClr val="FFFFFF"/>
           </a:solidFill>
-          <a:ln w="12700">
+          <a:ln w="10160">
             <a:solidFill>
               <a:srgbClr val="BAC8DC"/>
             </a:solidFill>
@@ -9542,8 +9641,8 @@
         </p:blipFill>
         <p:spPr>
           <a:xfrm>
-            <a:off x="4440885" y="1247744"/>
-            <a:ext cx="4230724" cy="2794314"/>
+            <a:off x="4069080" y="1853862"/>
+            <a:ext cx="4800600" cy="1956983"/>
           </a:xfrm>
           <a:prstGeom prst="rect">
             <a:avLst/>
@@ -9558,8 +9657,8 @@
         </p:nvSpPr>
         <p:spPr>
           <a:xfrm>
-            <a:off x="4261104" y="4133499"/>
-            <a:ext cx="4590288" cy="201168"/>
+            <a:off x="4069080" y="3865709"/>
+            <a:ext cx="4800600" cy="182880"/>
           </a:xfrm>
           <a:prstGeom prst="rect">
             <a:avLst/>
@@ -9594,8 +9693,8 @@
         </p:nvSpPr>
         <p:spPr>
           <a:xfrm>
-            <a:off x="292608" y="4503420"/>
-            <a:ext cx="3767328" cy="329184"/>
+            <a:off x="274320" y="4539996"/>
+            <a:ext cx="3611880" cy="310896"/>
           </a:xfrm>
           <a:prstGeom prst="rect">
             <a:avLst/>
@@ -9637,8 +9736,8 @@
         </p:nvSpPr>
         <p:spPr>
           <a:xfrm>
-            <a:off x="402336" y="4567428"/>
-            <a:ext cx="3547872" cy="237744"/>
+            <a:off x="384048" y="4604004"/>
+            <a:ext cx="3392424" cy="219456"/>
           </a:xfrm>
           <a:prstGeom prst="rect">
             <a:avLst/>
@@ -9742,8 +9841,8 @@
         </p:nvSpPr>
         <p:spPr>
           <a:xfrm>
-            <a:off x="292608" y="54864"/>
-            <a:ext cx="8558784" cy="347472"/>
+            <a:off x="274320" y="54864"/>
+            <a:ext cx="8595360" cy="347472"/>
           </a:xfrm>
           <a:prstGeom prst="rect">
             <a:avLst/>
@@ -9820,8 +9919,8 @@
         </p:nvSpPr>
         <p:spPr>
           <a:xfrm>
-            <a:off x="292608" y="4951476"/>
-            <a:ext cx="8558784" cy="182880"/>
+            <a:off x="274320" y="4951476"/>
+            <a:ext cx="8595360" cy="182880"/>
           </a:xfrm>
           <a:prstGeom prst="rect">
             <a:avLst/>
@@ -9856,8 +9955,8 @@
         </p:nvSpPr>
         <p:spPr>
           <a:xfrm>
-            <a:off x="292608" y="475488"/>
-            <a:ext cx="8558784" cy="475488"/>
+            <a:off x="274320" y="466344"/>
+            <a:ext cx="8595360" cy="457200"/>
           </a:xfrm>
           <a:prstGeom prst="rect">
             <a:avLst/>
@@ -9892,7 +9991,7 @@
         </p:nvSpPr>
         <p:spPr>
           <a:xfrm>
-            <a:off x="292608" y="914400"/>
+            <a:off x="274320" y="886968"/>
             <a:ext cx="1143000" cy="50292"/>
           </a:xfrm>
           <a:prstGeom prst="rect">
@@ -9935,8 +10034,8 @@
         </p:nvSpPr>
         <p:spPr>
           <a:xfrm>
-            <a:off x="3214542" y="1065390"/>
-            <a:ext cx="2714915" cy="3405911"/>
+            <a:off x="3049486" y="1051079"/>
+            <a:ext cx="3045026" cy="3791148"/>
           </a:xfrm>
           <a:prstGeom prst="rect">
             <a:avLst/>
@@ -9944,7 +10043,7 @@
           <a:solidFill>
             <a:srgbClr val="FFFFFF"/>
           </a:solidFill>
-          <a:ln w="12700">
+          <a:ln w="10160">
             <a:solidFill>
               <a:srgbClr val="BAC8DC"/>
             </a:solidFill>
@@ -9988,8 +10087,8 @@
         </p:blipFill>
         <p:spPr>
           <a:xfrm>
-            <a:off x="3287694" y="1138542"/>
-            <a:ext cx="2568611" cy="3058439"/>
+            <a:off x="3095206" y="1096799"/>
+            <a:ext cx="2953586" cy="3516828"/>
           </a:xfrm>
           <a:prstGeom prst="rect">
             <a:avLst/>
@@ -10004,8 +10103,8 @@
         </p:nvSpPr>
         <p:spPr>
           <a:xfrm>
-            <a:off x="292608" y="4288421"/>
-            <a:ext cx="8558784" cy="201168"/>
+            <a:off x="274320" y="4668492"/>
+            <a:ext cx="8595360" cy="182880"/>
           </a:xfrm>
           <a:prstGeom prst="rect">
             <a:avLst/>
@@ -10109,8 +10208,8 @@
         </p:nvSpPr>
         <p:spPr>
           <a:xfrm>
-            <a:off x="292608" y="54864"/>
-            <a:ext cx="8558784" cy="347472"/>
+            <a:off x="274320" y="54864"/>
+            <a:ext cx="8595360" cy="347472"/>
           </a:xfrm>
           <a:prstGeom prst="rect">
             <a:avLst/>
@@ -10187,8 +10286,8 @@
         </p:nvSpPr>
         <p:spPr>
           <a:xfrm>
-            <a:off x="292608" y="4951476"/>
-            <a:ext cx="8558784" cy="182880"/>
+            <a:off x="274320" y="4951476"/>
+            <a:ext cx="8595360" cy="182880"/>
           </a:xfrm>
           <a:prstGeom prst="rect">
             <a:avLst/>
@@ -10223,8 +10322,8 @@
         </p:nvSpPr>
         <p:spPr>
           <a:xfrm>
-            <a:off x="292608" y="475488"/>
-            <a:ext cx="8558784" cy="475488"/>
+            <a:off x="274320" y="466344"/>
+            <a:ext cx="8595360" cy="457200"/>
           </a:xfrm>
           <a:prstGeom prst="rect">
             <a:avLst/>
@@ -10259,7 +10358,7 @@
         </p:nvSpPr>
         <p:spPr>
           <a:xfrm>
-            <a:off x="292608" y="914400"/>
+            <a:off x="274320" y="886968"/>
             <a:ext cx="1143000" cy="50292"/>
           </a:xfrm>
           <a:prstGeom prst="rect">
@@ -10302,8 +10401,8 @@
         </p:nvSpPr>
         <p:spPr>
           <a:xfrm>
-            <a:off x="1544280" y="1065390"/>
-            <a:ext cx="6055439" cy="3405911"/>
+            <a:off x="1128891" y="1051079"/>
+            <a:ext cx="6886217" cy="3791148"/>
           </a:xfrm>
           <a:prstGeom prst="rect">
             <a:avLst/>
@@ -10311,7 +10410,7 @@
           <a:solidFill>
             <a:srgbClr val="FFFFFF"/>
           </a:solidFill>
-          <a:ln w="12700">
+          <a:ln w="10160">
             <a:solidFill>
               <a:srgbClr val="BAC8DC"/>
             </a:solidFill>
@@ -10355,8 +10454,8 @@
         </p:blipFill>
         <p:spPr>
           <a:xfrm>
-            <a:off x="1617432" y="1138542"/>
-            <a:ext cx="5909135" cy="3058439"/>
+            <a:off x="1174611" y="1096799"/>
+            <a:ext cx="6794777" cy="3516828"/>
           </a:xfrm>
           <a:prstGeom prst="rect">
             <a:avLst/>
@@ -10371,8 +10470,8 @@
         </p:nvSpPr>
         <p:spPr>
           <a:xfrm>
-            <a:off x="292608" y="4288421"/>
-            <a:ext cx="8558784" cy="201168"/>
+            <a:off x="274320" y="4668492"/>
+            <a:ext cx="8595360" cy="182880"/>
           </a:xfrm>
           <a:prstGeom prst="rect">
             <a:avLst/>
@@ -10476,8 +10575,8 @@
         </p:nvSpPr>
         <p:spPr>
           <a:xfrm>
-            <a:off x="292608" y="54864"/>
-            <a:ext cx="8558784" cy="347472"/>
+            <a:off x="274320" y="54864"/>
+            <a:ext cx="8595360" cy="347472"/>
           </a:xfrm>
           <a:prstGeom prst="rect">
             <a:avLst/>
@@ -10554,8 +10653,8 @@
         </p:nvSpPr>
         <p:spPr>
           <a:xfrm>
-            <a:off x="292608" y="4951476"/>
-            <a:ext cx="8558784" cy="182880"/>
+            <a:off x="274320" y="4951476"/>
+            <a:ext cx="8595360" cy="182880"/>
           </a:xfrm>
           <a:prstGeom prst="rect">
             <a:avLst/>
@@ -10590,8 +10689,8 @@
         </p:nvSpPr>
         <p:spPr>
           <a:xfrm>
-            <a:off x="292608" y="475488"/>
-            <a:ext cx="8558784" cy="475488"/>
+            <a:off x="274320" y="466344"/>
+            <a:ext cx="8595360" cy="457200"/>
           </a:xfrm>
           <a:prstGeom prst="rect">
             <a:avLst/>
@@ -10626,7 +10725,7 @@
         </p:nvSpPr>
         <p:spPr>
           <a:xfrm>
-            <a:off x="292608" y="914400"/>
+            <a:off x="274320" y="886968"/>
             <a:ext cx="1143000" cy="50292"/>
           </a:xfrm>
           <a:prstGeom prst="rect">
@@ -10669,8 +10768,8 @@
         </p:nvSpPr>
         <p:spPr>
           <a:xfrm>
-            <a:off x="1656886" y="1065390"/>
-            <a:ext cx="5830227" cy="3405911"/>
+            <a:off x="1258374" y="1051079"/>
+            <a:ext cx="6627251" cy="3791148"/>
           </a:xfrm>
           <a:prstGeom prst="rect">
             <a:avLst/>
@@ -10678,7 +10777,7 @@
           <a:solidFill>
             <a:srgbClr val="FFFFFF"/>
           </a:solidFill>
-          <a:ln w="12700">
+          <a:ln w="10160">
             <a:solidFill>
               <a:srgbClr val="BAC8DC"/>
             </a:solidFill>
@@ -10722,8 +10821,8 @@
         </p:blipFill>
         <p:spPr>
           <a:xfrm>
-            <a:off x="1730038" y="1138542"/>
-            <a:ext cx="5683923" cy="3058439"/>
+            <a:off x="1304094" y="1096799"/>
+            <a:ext cx="6535811" cy="3516828"/>
           </a:xfrm>
           <a:prstGeom prst="rect">
             <a:avLst/>
@@ -10738,8 +10837,8 @@
         </p:nvSpPr>
         <p:spPr>
           <a:xfrm>
-            <a:off x="292608" y="4288421"/>
-            <a:ext cx="8558784" cy="201168"/>
+            <a:off x="274320" y="4668492"/>
+            <a:ext cx="8595360" cy="182880"/>
           </a:xfrm>
           <a:prstGeom prst="rect">
             <a:avLst/>
@@ -10843,8 +10942,8 @@
         </p:nvSpPr>
         <p:spPr>
           <a:xfrm>
-            <a:off x="292608" y="54864"/>
-            <a:ext cx="8558784" cy="347472"/>
+            <a:off x="274320" y="54864"/>
+            <a:ext cx="8595360" cy="347472"/>
           </a:xfrm>
           <a:prstGeom prst="rect">
             <a:avLst/>
@@ -10921,8 +11020,8 @@
         </p:nvSpPr>
         <p:spPr>
           <a:xfrm>
-            <a:off x="292608" y="4951476"/>
-            <a:ext cx="8558784" cy="182880"/>
+            <a:off x="274320" y="4951476"/>
+            <a:ext cx="8595360" cy="182880"/>
           </a:xfrm>
           <a:prstGeom prst="rect">
             <a:avLst/>
@@ -10957,8 +11056,8 @@
         </p:nvSpPr>
         <p:spPr>
           <a:xfrm>
-            <a:off x="292608" y="475488"/>
-            <a:ext cx="8558784" cy="475488"/>
+            <a:off x="274320" y="466344"/>
+            <a:ext cx="8595360" cy="457200"/>
           </a:xfrm>
           <a:prstGeom prst="rect">
             <a:avLst/>
@@ -10993,7 +11092,7 @@
         </p:nvSpPr>
         <p:spPr>
           <a:xfrm>
-            <a:off x="292608" y="914400"/>
+            <a:off x="274320" y="886968"/>
             <a:ext cx="1143000" cy="50292"/>
           </a:xfrm>
           <a:prstGeom prst="rect">
@@ -11036,8 +11135,8 @@
         </p:nvSpPr>
         <p:spPr>
           <a:xfrm>
-            <a:off x="347837" y="1658200"/>
-            <a:ext cx="8448324" cy="2220291"/>
+            <a:off x="357530" y="1869082"/>
+            <a:ext cx="8428939" cy="2155142"/>
           </a:xfrm>
           <a:prstGeom prst="rect">
             <a:avLst/>
@@ -11045,7 +11144,7 @@
           <a:solidFill>
             <a:srgbClr val="FFFFFF"/>
           </a:solidFill>
-          <a:ln w="12700">
+          <a:ln w="10160">
             <a:solidFill>
               <a:srgbClr val="BAC8DC"/>
             </a:solidFill>
@@ -11089,8 +11188,8 @@
         </p:blipFill>
         <p:spPr>
           <a:xfrm>
-            <a:off x="420989" y="1731352"/>
-            <a:ext cx="8302020" cy="1872819"/>
+            <a:off x="403250" y="1914802"/>
+            <a:ext cx="8337499" cy="1880822"/>
           </a:xfrm>
           <a:prstGeom prst="rect">
             <a:avLst/>
@@ -11105,8 +11204,8 @@
         </p:nvSpPr>
         <p:spPr>
           <a:xfrm>
-            <a:off x="292608" y="3695611"/>
-            <a:ext cx="8558784" cy="201168"/>
+            <a:off x="274320" y="3850489"/>
+            <a:ext cx="8595360" cy="182880"/>
           </a:xfrm>
           <a:prstGeom prst="rect">
             <a:avLst/>
@@ -11210,8 +11309,8 @@
         </p:nvSpPr>
         <p:spPr>
           <a:xfrm>
-            <a:off x="292608" y="54864"/>
-            <a:ext cx="8558784" cy="347472"/>
+            <a:off x="274320" y="54864"/>
+            <a:ext cx="8595360" cy="347472"/>
           </a:xfrm>
           <a:prstGeom prst="rect">
             <a:avLst/>
@@ -11288,8 +11387,8 @@
         </p:nvSpPr>
         <p:spPr>
           <a:xfrm>
-            <a:off x="292608" y="4951476"/>
-            <a:ext cx="8558784" cy="182880"/>
+            <a:off x="274320" y="4951476"/>
+            <a:ext cx="8595360" cy="182880"/>
           </a:xfrm>
           <a:prstGeom prst="rect">
             <a:avLst/>
@@ -11324,8 +11423,8 @@
         </p:nvSpPr>
         <p:spPr>
           <a:xfrm>
-            <a:off x="292608" y="475488"/>
-            <a:ext cx="8558784" cy="475488"/>
+            <a:off x="274320" y="466344"/>
+            <a:ext cx="8595360" cy="457200"/>
           </a:xfrm>
           <a:prstGeom prst="rect">
             <a:avLst/>
@@ -11360,7 +11459,7 @@
         </p:nvSpPr>
         <p:spPr>
           <a:xfrm>
-            <a:off x="292608" y="914400"/>
+            <a:off x="274320" y="886968"/>
             <a:ext cx="1143000" cy="50292"/>
           </a:xfrm>
           <a:prstGeom prst="rect">
@@ -11403,8 +11502,8 @@
         </p:nvSpPr>
         <p:spPr>
           <a:xfrm>
-            <a:off x="292608" y="1042416"/>
-            <a:ext cx="3767328" cy="3406139"/>
+            <a:off x="274320" y="996696"/>
+            <a:ext cx="3611880" cy="3451860"/>
           </a:xfrm>
           <a:prstGeom prst="rect">
             <a:avLst/>
@@ -11448,8 +11547,8 @@
         </p:nvSpPr>
         <p:spPr>
           <a:xfrm>
-            <a:off x="292608" y="1042416"/>
-            <a:ext cx="73152" cy="3406139"/>
+            <a:off x="274320" y="996696"/>
+            <a:ext cx="73152" cy="3451860"/>
           </a:xfrm>
           <a:prstGeom prst="rect">
             <a:avLst/>
@@ -11491,8 +11590,8 @@
         </p:nvSpPr>
         <p:spPr>
           <a:xfrm>
-            <a:off x="493776" y="1207008"/>
-            <a:ext cx="3456432" cy="3076956"/>
+            <a:off x="475488" y="1161288"/>
+            <a:ext cx="3300984" cy="3122676"/>
           </a:xfrm>
           <a:prstGeom prst="rect">
             <a:avLst/>
@@ -11510,7 +11609,7 @@
                 <a:spcPct val="120000"/>
               </a:lnSpc>
               <a:spcAft>
-                <a:spcPts val="3900"/>
+                <a:spcPts val="4000"/>
               </a:spcAft>
             </a:pPr>
             <a:r>
@@ -11530,7 +11629,7 @@
                 <a:spcPct val="120000"/>
               </a:lnSpc>
               <a:spcAft>
-                <a:spcPts val="3900"/>
+                <a:spcPts val="4000"/>
               </a:spcAft>
             </a:pPr>
             <a:r>
@@ -11550,7 +11649,7 @@
                 <a:spcPct val="120000"/>
               </a:lnSpc>
               <a:spcAft>
-                <a:spcPts val="3900"/>
+                <a:spcPts val="4000"/>
               </a:spcAft>
             </a:pPr>
             <a:r>
@@ -11570,7 +11669,7 @@
                 <a:spcPct val="120000"/>
               </a:lnSpc>
               <a:spcAft>
-                <a:spcPts val="3900"/>
+                <a:spcPts val="4000"/>
               </a:spcAft>
             </a:pPr>
             <a:r>
@@ -11590,7 +11689,7 @@
                 <a:spcPct val="120000"/>
               </a:lnSpc>
               <a:spcAft>
-                <a:spcPts val="3900"/>
+                <a:spcPts val="4000"/>
               </a:spcAft>
             </a:pPr>
             <a:r>
@@ -11614,8 +11713,8 @@
         </p:nvSpPr>
         <p:spPr>
           <a:xfrm>
-            <a:off x="4325660" y="1190667"/>
-            <a:ext cx="4461174" cy="3109636"/>
+            <a:off x="4197180" y="1005840"/>
+            <a:ext cx="4544398" cy="3835908"/>
           </a:xfrm>
           <a:prstGeom prst="rect">
             <a:avLst/>
@@ -11623,7 +11722,7 @@
           <a:solidFill>
             <a:srgbClr val="FFFFFF"/>
           </a:solidFill>
-          <a:ln w="12700">
+          <a:ln w="10160">
             <a:solidFill>
               <a:srgbClr val="BAC8DC"/>
             </a:solidFill>
@@ -11667,8 +11766,8 @@
         </p:blipFill>
         <p:spPr>
           <a:xfrm>
-            <a:off x="4398812" y="1263819"/>
-            <a:ext cx="4314870" cy="2762164"/>
+            <a:off x="4242900" y="1051560"/>
+            <a:ext cx="4452958" cy="3561588"/>
           </a:xfrm>
           <a:prstGeom prst="rect">
             <a:avLst/>
@@ -11683,8 +11782,8 @@
         </p:nvSpPr>
         <p:spPr>
           <a:xfrm>
-            <a:off x="4261104" y="4117424"/>
-            <a:ext cx="4590288" cy="201168"/>
+            <a:off x="4069080" y="4668012"/>
+            <a:ext cx="4800600" cy="182880"/>
           </a:xfrm>
           <a:prstGeom prst="rect">
             <a:avLst/>
@@ -11719,8 +11818,8 @@
         </p:nvSpPr>
         <p:spPr>
           <a:xfrm>
-            <a:off x="292608" y="4503420"/>
-            <a:ext cx="3767328" cy="329184"/>
+            <a:off x="274320" y="4539996"/>
+            <a:ext cx="3611880" cy="310896"/>
           </a:xfrm>
           <a:prstGeom prst="rect">
             <a:avLst/>
@@ -11762,8 +11861,8 @@
         </p:nvSpPr>
         <p:spPr>
           <a:xfrm>
-            <a:off x="402336" y="4567428"/>
-            <a:ext cx="3547872" cy="237744"/>
+            <a:off x="384048" y="4604004"/>
+            <a:ext cx="3392424" cy="219456"/>
           </a:xfrm>
           <a:prstGeom prst="rect">
             <a:avLst/>
@@ -11867,8 +11966,8 @@
         </p:nvSpPr>
         <p:spPr>
           <a:xfrm>
-            <a:off x="292608" y="54864"/>
-            <a:ext cx="8558784" cy="347472"/>
+            <a:off x="274320" y="54864"/>
+            <a:ext cx="8595360" cy="347472"/>
           </a:xfrm>
           <a:prstGeom prst="rect">
             <a:avLst/>
@@ -11945,8 +12044,8 @@
         </p:nvSpPr>
         <p:spPr>
           <a:xfrm>
-            <a:off x="292608" y="4951476"/>
-            <a:ext cx="8558784" cy="182880"/>
+            <a:off x="274320" y="4951476"/>
+            <a:ext cx="8595360" cy="182880"/>
           </a:xfrm>
           <a:prstGeom prst="rect">
             <a:avLst/>
@@ -11981,8 +12080,8 @@
         </p:nvSpPr>
         <p:spPr>
           <a:xfrm>
-            <a:off x="292608" y="475488"/>
-            <a:ext cx="8558784" cy="475488"/>
+            <a:off x="274320" y="466344"/>
+            <a:ext cx="8595360" cy="457200"/>
           </a:xfrm>
           <a:prstGeom prst="rect">
             <a:avLst/>
@@ -12017,7 +12116,7 @@
         </p:nvSpPr>
         <p:spPr>
           <a:xfrm>
-            <a:off x="292608" y="914400"/>
+            <a:off x="274320" y="886968"/>
             <a:ext cx="1143000" cy="50292"/>
           </a:xfrm>
           <a:prstGeom prst="rect">
@@ -12060,8 +12159,8 @@
         </p:nvSpPr>
         <p:spPr>
           <a:xfrm>
-            <a:off x="292608" y="4503420"/>
-            <a:ext cx="3767328" cy="329184"/>
+            <a:off x="274320" y="4539996"/>
+            <a:ext cx="3611880" cy="310896"/>
           </a:xfrm>
           <a:prstGeom prst="rect">
             <a:avLst/>
@@ -12103,8 +12202,8 @@
         </p:nvSpPr>
         <p:spPr>
           <a:xfrm>
-            <a:off x="402336" y="4567428"/>
-            <a:ext cx="3547872" cy="237744"/>
+            <a:off x="384048" y="4604004"/>
+            <a:ext cx="3392424" cy="219456"/>
           </a:xfrm>
           <a:prstGeom prst="rect">
             <a:avLst/>
@@ -12139,8 +12238,8 @@
         </p:nvSpPr>
         <p:spPr>
           <a:xfrm>
-            <a:off x="292608" y="1088136"/>
-            <a:ext cx="3767328" cy="589787"/>
+            <a:off x="274320" y="1042416"/>
+            <a:ext cx="3611880" cy="598932"/>
           </a:xfrm>
           <a:prstGeom prst="rect">
             <a:avLst/>
@@ -12184,8 +12283,8 @@
         </p:nvSpPr>
         <p:spPr>
           <a:xfrm>
-            <a:off x="429768" y="1143000"/>
-            <a:ext cx="914400" cy="553211"/>
+            <a:off x="411479" y="1097280"/>
+            <a:ext cx="914400" cy="562356"/>
           </a:xfrm>
           <a:prstGeom prst="rect">
             <a:avLst/>
@@ -12219,8 +12318,8 @@
         </p:nvSpPr>
         <p:spPr>
           <a:xfrm>
-            <a:off x="1298448" y="1143000"/>
-            <a:ext cx="2624328" cy="553211"/>
+            <a:off x="1280160" y="1097280"/>
+            <a:ext cx="2468880" cy="562356"/>
           </a:xfrm>
           <a:prstGeom prst="rect">
             <a:avLst/>
@@ -12254,8 +12353,8 @@
         </p:nvSpPr>
         <p:spPr>
           <a:xfrm>
-            <a:off x="292608" y="1751076"/>
-            <a:ext cx="3767328" cy="589787"/>
+            <a:off x="274320" y="1714500"/>
+            <a:ext cx="3611880" cy="598932"/>
           </a:xfrm>
           <a:prstGeom prst="rect">
             <a:avLst/>
@@ -12299,8 +12398,8 @@
         </p:nvSpPr>
         <p:spPr>
           <a:xfrm>
-            <a:off x="429768" y="1805940"/>
-            <a:ext cx="914400" cy="553211"/>
+            <a:off x="411479" y="1769364"/>
+            <a:ext cx="914400" cy="562356"/>
           </a:xfrm>
           <a:prstGeom prst="rect">
             <a:avLst/>
@@ -12334,8 +12433,8 @@
         </p:nvSpPr>
         <p:spPr>
           <a:xfrm>
-            <a:off x="1298448" y="1805940"/>
-            <a:ext cx="2624328" cy="553211"/>
+            <a:off x="1280160" y="1769364"/>
+            <a:ext cx="2468880" cy="562356"/>
           </a:xfrm>
           <a:prstGeom prst="rect">
             <a:avLst/>
@@ -12369,8 +12468,8 @@
         </p:nvSpPr>
         <p:spPr>
           <a:xfrm>
-            <a:off x="292608" y="2414015"/>
-            <a:ext cx="3767328" cy="589787"/>
+            <a:off x="274320" y="2386584"/>
+            <a:ext cx="3611880" cy="598932"/>
           </a:xfrm>
           <a:prstGeom prst="rect">
             <a:avLst/>
@@ -12414,8 +12513,8 @@
         </p:nvSpPr>
         <p:spPr>
           <a:xfrm>
-            <a:off x="429768" y="2468879"/>
-            <a:ext cx="914400" cy="553211"/>
+            <a:off x="411479" y="2441448"/>
+            <a:ext cx="914400" cy="562356"/>
           </a:xfrm>
           <a:prstGeom prst="rect">
             <a:avLst/>
@@ -12449,8 +12548,8 @@
         </p:nvSpPr>
         <p:spPr>
           <a:xfrm>
-            <a:off x="1298448" y="2468879"/>
-            <a:ext cx="2624328" cy="553211"/>
+            <a:off x="1280160" y="2441448"/>
+            <a:ext cx="2468880" cy="562356"/>
           </a:xfrm>
           <a:prstGeom prst="rect">
             <a:avLst/>
@@ -12484,8 +12583,8 @@
         </p:nvSpPr>
         <p:spPr>
           <a:xfrm>
-            <a:off x="292608" y="3076956"/>
-            <a:ext cx="3767328" cy="589787"/>
+            <a:off x="274320" y="3058668"/>
+            <a:ext cx="3611880" cy="598932"/>
           </a:xfrm>
           <a:prstGeom prst="rect">
             <a:avLst/>
@@ -12529,8 +12628,8 @@
         </p:nvSpPr>
         <p:spPr>
           <a:xfrm>
-            <a:off x="429768" y="3131820"/>
-            <a:ext cx="914400" cy="553211"/>
+            <a:off x="411479" y="3113532"/>
+            <a:ext cx="914400" cy="562356"/>
           </a:xfrm>
           <a:prstGeom prst="rect">
             <a:avLst/>
@@ -12564,8 +12663,8 @@
         </p:nvSpPr>
         <p:spPr>
           <a:xfrm>
-            <a:off x="1298448" y="3131820"/>
-            <a:ext cx="2624328" cy="553211"/>
+            <a:off x="1280160" y="3113532"/>
+            <a:ext cx="2468880" cy="562356"/>
           </a:xfrm>
           <a:prstGeom prst="rect">
             <a:avLst/>
@@ -12599,8 +12698,8 @@
         </p:nvSpPr>
         <p:spPr>
           <a:xfrm>
-            <a:off x="292608" y="3739896"/>
-            <a:ext cx="3767328" cy="589787"/>
+            <a:off x="274320" y="3730752"/>
+            <a:ext cx="3611880" cy="598932"/>
           </a:xfrm>
           <a:prstGeom prst="rect">
             <a:avLst/>
@@ -12644,8 +12743,8 @@
         </p:nvSpPr>
         <p:spPr>
           <a:xfrm>
-            <a:off x="429768" y="3794759"/>
-            <a:ext cx="914400" cy="553211"/>
+            <a:off x="411479" y="3785615"/>
+            <a:ext cx="914400" cy="562356"/>
           </a:xfrm>
           <a:prstGeom prst="rect">
             <a:avLst/>
@@ -12679,8 +12778,8 @@
         </p:nvSpPr>
         <p:spPr>
           <a:xfrm>
-            <a:off x="1298448" y="3794759"/>
-            <a:ext cx="2624328" cy="553211"/>
+            <a:off x="1280160" y="3785615"/>
+            <a:ext cx="2468880" cy="562356"/>
           </a:xfrm>
           <a:prstGeom prst="rect">
             <a:avLst/>
@@ -12714,8 +12813,8 @@
         </p:nvSpPr>
         <p:spPr>
           <a:xfrm>
-            <a:off x="4425696" y="1042416"/>
-            <a:ext cx="1773936" cy="1975104"/>
+            <a:off x="4251960" y="1024128"/>
+            <a:ext cx="1737360" cy="1920240"/>
           </a:xfrm>
           <a:prstGeom prst="rect">
             <a:avLst/>
@@ -12723,7 +12822,7 @@
           <a:solidFill>
             <a:srgbClr val="FFFFFF"/>
           </a:solidFill>
-          <a:ln w="12700">
+          <a:ln w="10160">
             <a:solidFill>
               <a:srgbClr val="BAC8DC"/>
             </a:solidFill>
@@ -12767,8 +12866,8 @@
         </p:blipFill>
         <p:spPr>
           <a:xfrm>
-            <a:off x="4498848" y="1115568"/>
-            <a:ext cx="1627632" cy="1627632"/>
+            <a:off x="4297680" y="1069848"/>
+            <a:ext cx="1645920" cy="1645920"/>
           </a:xfrm>
           <a:prstGeom prst="rect">
             <a:avLst/>
@@ -12783,8 +12882,8 @@
         </p:nvSpPr>
         <p:spPr>
           <a:xfrm>
-            <a:off x="4398264" y="2834640"/>
-            <a:ext cx="1828800" cy="201168"/>
+            <a:off x="4206240" y="2770632"/>
+            <a:ext cx="1828800" cy="182880"/>
           </a:xfrm>
           <a:prstGeom prst="rect">
             <a:avLst/>
@@ -12819,8 +12918,8 @@
         </p:nvSpPr>
         <p:spPr>
           <a:xfrm>
-            <a:off x="6382877" y="1994957"/>
-            <a:ext cx="2358420" cy="1501056"/>
+            <a:off x="6222492" y="1956030"/>
+            <a:ext cx="2505456" cy="1533191"/>
           </a:xfrm>
           <a:prstGeom prst="rect">
             <a:avLst/>
@@ -12828,7 +12927,7 @@
           <a:solidFill>
             <a:srgbClr val="FFFFFF"/>
           </a:solidFill>
-          <a:ln w="12700">
+          <a:ln w="10160">
             <a:solidFill>
               <a:srgbClr val="BAC8DC"/>
             </a:solidFill>
@@ -12872,8 +12971,8 @@
         </p:blipFill>
         <p:spPr>
           <a:xfrm>
-            <a:off x="6456029" y="2068109"/>
-            <a:ext cx="2212116" cy="1153584"/>
+            <a:off x="6268212" y="2001750"/>
+            <a:ext cx="2414015" cy="1258871"/>
           </a:xfrm>
           <a:prstGeom prst="rect">
             <a:avLst/>
@@ -12888,8 +12987,8 @@
         </p:nvSpPr>
         <p:spPr>
           <a:xfrm>
-            <a:off x="6409944" y="3313134"/>
-            <a:ext cx="2304287" cy="201168"/>
+            <a:off x="6217920" y="3315485"/>
+            <a:ext cx="2514600" cy="182880"/>
           </a:xfrm>
           <a:prstGeom prst="rect">
             <a:avLst/>
@@ -12993,8 +13092,8 @@
         </p:nvSpPr>
         <p:spPr>
           <a:xfrm>
-            <a:off x="292608" y="54864"/>
-            <a:ext cx="8558784" cy="347472"/>
+            <a:off x="274320" y="54864"/>
+            <a:ext cx="8595360" cy="347472"/>
           </a:xfrm>
           <a:prstGeom prst="rect">
             <a:avLst/>
@@ -13071,8 +13170,8 @@
         </p:nvSpPr>
         <p:spPr>
           <a:xfrm>
-            <a:off x="292608" y="4951476"/>
-            <a:ext cx="8558784" cy="182880"/>
+            <a:off x="274320" y="4951476"/>
+            <a:ext cx="8595360" cy="182880"/>
           </a:xfrm>
           <a:prstGeom prst="rect">
             <a:avLst/>
@@ -13108,7 +13207,7 @@
         <p:spPr>
           <a:xfrm>
             <a:off x="0" y="420624"/>
-            <a:ext cx="5349240" cy="4411980"/>
+            <a:ext cx="4343400" cy="4430268"/>
           </a:xfrm>
           <a:prstGeom prst="rect">
             <a:avLst/>
@@ -13150,8 +13249,8 @@
         </p:nvSpPr>
         <p:spPr>
           <a:xfrm>
-            <a:off x="457200" y="1051560"/>
-            <a:ext cx="822960" cy="822960"/>
+            <a:off x="384048" y="740664"/>
+            <a:ext cx="658368" cy="658368"/>
           </a:xfrm>
           <a:prstGeom prst="ellipse">
             <a:avLst/>
@@ -13193,8 +13292,8 @@
         </p:nvSpPr>
         <p:spPr>
           <a:xfrm>
-            <a:off x="457200" y="1115568"/>
-            <a:ext cx="822960" cy="457200"/>
+            <a:off x="384048" y="804672"/>
+            <a:ext cx="658368" cy="411480"/>
           </a:xfrm>
           <a:prstGeom prst="rect">
             <a:avLst/>
@@ -13209,7 +13308,7 @@
           <a:p>
             <a:pPr algn="ctr"/>
             <a:r>
-              <a:rPr sz="2600" b="1">
+              <a:rPr sz="2200" b="1">
                 <a:solidFill>
                   <a:srgbClr val="FFFFFF"/>
                 </a:solidFill>
@@ -13229,8 +13328,8 @@
         </p:nvSpPr>
         <p:spPr>
           <a:xfrm>
-            <a:off x="411480" y="1965960"/>
-            <a:ext cx="4754880" cy="502920"/>
+            <a:off x="347472" y="1472184"/>
+            <a:ext cx="3840480" cy="457200"/>
           </a:xfrm>
           <a:prstGeom prst="rect">
             <a:avLst/>
@@ -13244,6 +13343,13 @@
           <a:lstStyle/>
           <a:p>
             <a:r>
+              <a:rPr sz="2400" b="1">
+                <a:solidFill>
+                  <a:srgbClr val="FFFFFF"/>
+                </a:solidFill>
+                <a:latin typeface="微软雅黑"/>
+                <ns3:rFonts xmlns:ns3="http://schemas.openxmlformats.org/wordprocessingml/2006/main" ns3:eastAsia="微软雅黑" ns3:ascii="微软雅黑" ns3:hAnsi="微软雅黑"/>
+              </a:rPr>
               <a:t>第四部分</a:t>
             </a:r>
           </a:p>
@@ -13257,8 +13363,8 @@
         </p:nvSpPr>
         <p:spPr>
           <a:xfrm>
-            <a:off x="438912" y="2514600"/>
-            <a:ext cx="4754880" cy="365760"/>
+            <a:off x="365760" y="1947672"/>
+            <a:ext cx="3840480" cy="347472"/>
           </a:xfrm>
           <a:prstGeom prst="rect">
             <a:avLst/>
@@ -13272,6 +13378,13 @@
           <a:lstStyle/>
           <a:p>
             <a:r>
+              <a:rPr sz="1200" b="0">
+                <a:solidFill>
+                  <a:srgbClr val="BFDBFE"/>
+                </a:solidFill>
+                <a:latin typeface="微软雅黑"/>
+                <ns4:rFonts xmlns:ns4="http://schemas.openxmlformats.org/wordprocessingml/2006/main" ns4:eastAsia="微软雅黑" ns4:ascii="微软雅黑" ns4:hAnsi="微软雅黑"/>
+              </a:rPr>
               <a:t>创新点 · 应用价值 · 后续计划</a:t>
             </a:r>
           </a:p>
@@ -13279,97 +13392,25 @@
       </p:sp>
       <p:sp>
         <p:nvSpPr>
-          <p:cNvPr id="11" name="TextBox 10"/>
-          <p:cNvSpPr txBox="1"/>
-          <p:nvPr/>
-        </p:nvSpPr>
-        <p:spPr>
-          <a:xfrm>
-            <a:off x="475488" y="3063240"/>
-            <a:ext cx="4572000" cy="1463040"/>
-          </a:xfrm>
-          <a:prstGeom prst="rect">
-            <a:avLst/>
-          </a:prstGeom>
-          <a:noFill/>
-        </p:spPr>
-        <p:txBody>
-          <a:bodyPr wrap="none">
-            <a:spAutoFit/>
-          </a:bodyPr>
-          <a:lstStyle/>
-          <a:p>
-            <a:pPr>
-              <a:spcAft>
-                <a:spcPts val="1000"/>
-              </a:spcAft>
-            </a:pPr>
-            <a:r>
-              <a:rPr sz="1300" b="0">
-                <a:solidFill>
-                  <a:srgbClr val="E2E8F0"/>
-                </a:solidFill>
-                <a:latin typeface="微软雅黑"/>
-                <ns5:rFonts xmlns:ns5="http://schemas.openxmlformats.org/wordprocessingml/2006/main" ns5:eastAsia="微软雅黑" ns5:ascii="微软雅黑" ns5:hAnsi="微软雅黑"/>
-              </a:rPr>
-              <a:t>▸  创新维度</a:t>
-            </a:r>
-          </a:p>
-          <a:p>
-            <a:pPr>
-              <a:spcAft>
-                <a:spcPts val="1000"/>
-              </a:spcAft>
-            </a:pPr>
-            <a:r>
-              <a:rPr sz="1300" b="0">
-                <a:solidFill>
-                  <a:srgbClr val="E2E8F0"/>
-                </a:solidFill>
-                <a:latin typeface="微软雅黑"/>
-                <ns6:rFonts xmlns:ns6="http://schemas.openxmlformats.org/wordprocessingml/2006/main" ns6:eastAsia="微软雅黑" ns6:ascii="微软雅黑" ns6:hAnsi="微软雅黑"/>
-              </a:rPr>
-              <a:t>▸  真机路线</a:t>
-            </a:r>
-          </a:p>
-          <a:p>
-            <a:pPr>
-              <a:spcAft>
-                <a:spcPts val="1000"/>
-              </a:spcAft>
-            </a:pPr>
-            <a:r>
-              <a:rPr sz="1300" b="0">
-                <a:solidFill>
-                  <a:srgbClr val="E2E8F0"/>
-                </a:solidFill>
-                <a:latin typeface="微软雅黑"/>
-                <ns7:rFonts xmlns:ns7="http://schemas.openxmlformats.org/wordprocessingml/2006/main" ns7:eastAsia="微软雅黑" ns7:ascii="微软雅黑" ns7:hAnsi="微软雅黑"/>
-              </a:rPr>
-              <a:t>▸  软著专利</a:t>
-            </a:r>
-          </a:p>
-        </p:txBody>
-      </p:sp>
-      <p:sp>
-        <p:nvSpPr>
-          <p:cNvPr id="12" name="Rectangle 11"/>
+          <p:cNvPr id="11" name="Rectangle 10"/>
           <p:cNvSpPr/>
           <p:nvPr/>
         </p:nvSpPr>
         <p:spPr>
           <a:xfrm>
-            <a:off x="5349240" y="420624"/>
-            <a:ext cx="3794760" cy="4411980"/>
-          </a:xfrm>
-          <a:prstGeom prst="rect">
-            <a:avLst/>
-          </a:prstGeom>
-          <a:solidFill>
-            <a:srgbClr val="F1F7FF"/>
+            <a:off x="384048" y="2432304"/>
+            <a:ext cx="3657600" cy="384048"/>
+          </a:xfrm>
+          <a:prstGeom prst="rect">
+            <a:avLst/>
+          </a:prstGeom>
+          <a:solidFill>
+            <a:srgbClr val="1E4082"/>
           </a:solidFill>
           <a:ln>
-            <a:noFill/>
+            <a:solidFill>
+              <a:srgbClr val="648CC8"/>
+            </a:solidFill>
           </a:ln>
         </p:spPr>
         <p:style>
@@ -13396,24 +13437,59 @@
       </p:sp>
       <p:sp>
         <p:nvSpPr>
+          <p:cNvPr id="12" name="TextBox 11"/>
+          <p:cNvSpPr txBox="1"/>
+          <p:nvPr/>
+        </p:nvSpPr>
+        <p:spPr>
+          <a:xfrm>
+            <a:off x="502920" y="2505456"/>
+            <a:ext cx="3429000" cy="256032"/>
+          </a:xfrm>
+          <a:prstGeom prst="rect">
+            <a:avLst/>
+          </a:prstGeom>
+          <a:noFill/>
+        </p:spPr>
+        <p:txBody>
+          <a:bodyPr wrap="none">
+            <a:spAutoFit/>
+          </a:bodyPr>
+          <a:lstStyle/>
+          <a:p>
+            <a:r>
+              <a:rPr sz="1100" b="0">
+                <a:solidFill>
+                  <a:srgbClr val="E2E8F0"/>
+                </a:solidFill>
+                <a:latin typeface="微软雅黑"/>
+                <ns5:rFonts xmlns:ns5="http://schemas.openxmlformats.org/wordprocessingml/2006/main" ns5:eastAsia="微软雅黑" ns5:ascii="微软雅黑" ns5:hAnsi="微软雅黑"/>
+              </a:rPr>
+              <a:t>创新维度</a:t>
+            </a:r>
+          </a:p>
+        </p:txBody>
+      </p:sp>
+      <p:sp>
+        <p:nvSpPr>
           <p:cNvPr id="13" name="Rectangle 12"/>
           <p:cNvSpPr/>
           <p:nvPr/>
         </p:nvSpPr>
         <p:spPr>
           <a:xfrm>
-            <a:off x="5501259" y="1083671"/>
-            <a:ext cx="3490722" cy="3707676"/>
-          </a:xfrm>
-          <a:prstGeom prst="rect">
-            <a:avLst/>
-          </a:prstGeom>
-          <a:solidFill>
-            <a:srgbClr val="FFFFFF"/>
-          </a:solidFill>
-          <a:ln w="12700">
+            <a:off x="384048" y="2871216"/>
+            <a:ext cx="3657600" cy="384048"/>
+          </a:xfrm>
+          <a:prstGeom prst="rect">
+            <a:avLst/>
+          </a:prstGeom>
+          <a:solidFill>
+            <a:srgbClr val="1E4082"/>
+          </a:solidFill>
+          <a:ln>
             <a:solidFill>
-              <a:srgbClr val="BAC8DC"/>
+              <a:srgbClr val="648CC8"/>
             </a:solidFill>
           </a:ln>
         </p:spPr>
@@ -13439,9 +13515,167 @@
           </a:p>
         </p:txBody>
       </p:sp>
+      <p:sp>
+        <p:nvSpPr>
+          <p:cNvPr id="14" name="TextBox 13"/>
+          <p:cNvSpPr txBox="1"/>
+          <p:nvPr/>
+        </p:nvSpPr>
+        <p:spPr>
+          <a:xfrm>
+            <a:off x="502920" y="2944368"/>
+            <a:ext cx="3429000" cy="256032"/>
+          </a:xfrm>
+          <a:prstGeom prst="rect">
+            <a:avLst/>
+          </a:prstGeom>
+          <a:noFill/>
+        </p:spPr>
+        <p:txBody>
+          <a:bodyPr wrap="none">
+            <a:spAutoFit/>
+          </a:bodyPr>
+          <a:lstStyle/>
+          <a:p>
+            <a:r>
+              <a:rPr sz="1100" b="0">
+                <a:solidFill>
+                  <a:srgbClr val="E2E8F0"/>
+                </a:solidFill>
+                <a:latin typeface="微软雅黑"/>
+                <ns6:rFonts xmlns:ns6="http://schemas.openxmlformats.org/wordprocessingml/2006/main" ns6:eastAsia="微软雅黑" ns6:ascii="微软雅黑" ns6:hAnsi="微软雅黑"/>
+              </a:rPr>
+              <a:t>真机路线</a:t>
+            </a:r>
+          </a:p>
+        </p:txBody>
+      </p:sp>
+      <p:sp>
+        <p:nvSpPr>
+          <p:cNvPr id="15" name="Rectangle 14"/>
+          <p:cNvSpPr/>
+          <p:nvPr/>
+        </p:nvSpPr>
+        <p:spPr>
+          <a:xfrm>
+            <a:off x="384048" y="3310128"/>
+            <a:ext cx="3657600" cy="384048"/>
+          </a:xfrm>
+          <a:prstGeom prst="rect">
+            <a:avLst/>
+          </a:prstGeom>
+          <a:solidFill>
+            <a:srgbClr val="1E4082"/>
+          </a:solidFill>
+          <a:ln>
+            <a:solidFill>
+              <a:srgbClr val="648CC8"/>
+            </a:solidFill>
+          </a:ln>
+        </p:spPr>
+        <p:style>
+          <a:lnRef idx="1">
+            <a:schemeClr val="accent1"/>
+          </a:lnRef>
+          <a:fillRef idx="3">
+            <a:schemeClr val="accent1"/>
+          </a:fillRef>
+          <a:effectRef idx="2">
+            <a:schemeClr val="accent1"/>
+          </a:effectRef>
+          <a:fontRef idx="minor">
+            <a:schemeClr val="lt1"/>
+          </a:fontRef>
+        </p:style>
+        <p:txBody>
+          <a:bodyPr rtlCol="0" anchor="ctr"/>
+          <a:lstStyle/>
+          <a:p>
+            <a:pPr algn="ctr"/>
+          </a:p>
+        </p:txBody>
+      </p:sp>
+      <p:sp>
+        <p:nvSpPr>
+          <p:cNvPr id="16" name="TextBox 15"/>
+          <p:cNvSpPr txBox="1"/>
+          <p:nvPr/>
+        </p:nvSpPr>
+        <p:spPr>
+          <a:xfrm>
+            <a:off x="502920" y="3383280"/>
+            <a:ext cx="3429000" cy="256032"/>
+          </a:xfrm>
+          <a:prstGeom prst="rect">
+            <a:avLst/>
+          </a:prstGeom>
+          <a:noFill/>
+        </p:spPr>
+        <p:txBody>
+          <a:bodyPr wrap="none">
+            <a:spAutoFit/>
+          </a:bodyPr>
+          <a:lstStyle/>
+          <a:p>
+            <a:r>
+              <a:rPr sz="1100" b="0">
+                <a:solidFill>
+                  <a:srgbClr val="E2E8F0"/>
+                </a:solidFill>
+                <a:latin typeface="微软雅黑"/>
+                <ns7:rFonts xmlns:ns7="http://schemas.openxmlformats.org/wordprocessingml/2006/main" ns7:eastAsia="微软雅黑" ns7:ascii="微软雅黑" ns7:hAnsi="微软雅黑"/>
+              </a:rPr>
+              <a:t>软著专利</a:t>
+            </a:r>
+          </a:p>
+        </p:txBody>
+      </p:sp>
+      <p:sp>
+        <p:nvSpPr>
+          <p:cNvPr id="17" name="Rectangle 16"/>
+          <p:cNvSpPr/>
+          <p:nvPr/>
+        </p:nvSpPr>
+        <p:spPr>
+          <a:xfrm>
+            <a:off x="4343400" y="420624"/>
+            <a:ext cx="4800600" cy="4430268"/>
+          </a:xfrm>
+          <a:prstGeom prst="rect">
+            <a:avLst/>
+          </a:prstGeom>
+          <a:solidFill>
+            <a:srgbClr val="F1F7FF"/>
+          </a:solidFill>
+          <a:ln>
+            <a:noFill/>
+          </a:ln>
+        </p:spPr>
+        <p:style>
+          <a:lnRef idx="1">
+            <a:schemeClr val="accent1"/>
+          </a:lnRef>
+          <a:fillRef idx="3">
+            <a:schemeClr val="accent1"/>
+          </a:fillRef>
+          <a:effectRef idx="2">
+            <a:schemeClr val="accent1"/>
+          </a:effectRef>
+          <a:fontRef idx="minor">
+            <a:schemeClr val="lt1"/>
+          </a:fontRef>
+        </p:style>
+        <p:txBody>
+          <a:bodyPr rtlCol="0" anchor="ctr"/>
+          <a:lstStyle/>
+          <a:p>
+            <a:pPr algn="ctr"/>
+          </a:p>
+        </p:txBody>
+      </p:sp>
       <p:pic>
         <p:nvPicPr>
-          <p:cNvPr id="14" name="Picture 13" descr="innovation_radar.png"/>
+          <p:cNvPr id="18" name="Picture 17" descr="innovation_radar.png"/>
           <p:cNvPicPr>
             <a:picLocks noChangeAspect="1"/>
           </p:cNvPicPr>
@@ -13455,50 +13689,14 @@
         </p:blipFill>
         <p:spPr>
           <a:xfrm>
-            <a:off x="5574411" y="1156823"/>
-            <a:ext cx="3344418" cy="3360204"/>
+            <a:off x="4907432" y="1051560"/>
+            <a:ext cx="3672535" cy="3744468"/>
           </a:xfrm>
           <a:prstGeom prst="rect">
             <a:avLst/>
           </a:prstGeom>
         </p:spPr>
       </p:pic>
-      <p:sp>
-        <p:nvSpPr>
-          <p:cNvPr id="15" name="TextBox 14"/>
-          <p:cNvSpPr txBox="1"/>
-          <p:nvPr/>
-        </p:nvSpPr>
-        <p:spPr>
-          <a:xfrm>
-            <a:off x="5486400" y="4608468"/>
-            <a:ext cx="3520440" cy="201168"/>
-          </a:xfrm>
-          <a:prstGeom prst="rect">
-            <a:avLst/>
-          </a:prstGeom>
-          <a:noFill/>
-        </p:spPr>
-        <p:txBody>
-          <a:bodyPr wrap="none">
-            <a:spAutoFit/>
-          </a:bodyPr>
-          <a:lstStyle/>
-          <a:p>
-            <a:pPr algn="ctr"/>
-            <a:r>
-              <a:rPr sz="900" b="0">
-                <a:solidFill>
-                  <a:srgbClr val="5A6273"/>
-                </a:solidFill>
-                <a:latin typeface="微软雅黑"/>
-                <ns8:rFonts xmlns:ns8="http://schemas.openxmlformats.org/wordprocessingml/2006/main" ns8:eastAsia="微软雅黑" ns8:ascii="微软雅黑" ns8:hAnsi="微软雅黑"/>
-              </a:rPr>
-              <a:t>本章核心示意</a:t>
-            </a:r>
-          </a:p>
-        </p:txBody>
-      </p:sp>
     </p:spTree>
   </p:cSld>
   <p:clrMapOvr>
@@ -13576,8 +13774,8 @@
         </p:nvSpPr>
         <p:spPr>
           <a:xfrm>
-            <a:off x="292608" y="54864"/>
-            <a:ext cx="8558784" cy="347472"/>
+            <a:off x="274320" y="54864"/>
+            <a:ext cx="8595360" cy="347472"/>
           </a:xfrm>
           <a:prstGeom prst="rect">
             <a:avLst/>
@@ -13654,8 +13852,8 @@
         </p:nvSpPr>
         <p:spPr>
           <a:xfrm>
-            <a:off x="292608" y="4951476"/>
-            <a:ext cx="8558784" cy="182880"/>
+            <a:off x="274320" y="4951476"/>
+            <a:ext cx="8595360" cy="182880"/>
           </a:xfrm>
           <a:prstGeom prst="rect">
             <a:avLst/>
@@ -13690,8 +13888,8 @@
         </p:nvSpPr>
         <p:spPr>
           <a:xfrm>
-            <a:off x="292608" y="475488"/>
-            <a:ext cx="8558784" cy="475488"/>
+            <a:off x="274320" y="466344"/>
+            <a:ext cx="8595360" cy="457200"/>
           </a:xfrm>
           <a:prstGeom prst="rect">
             <a:avLst/>
@@ -13726,7 +13924,7 @@
         </p:nvSpPr>
         <p:spPr>
           <a:xfrm>
-            <a:off x="292608" y="914400"/>
+            <a:off x="274320" y="886968"/>
             <a:ext cx="1143000" cy="50292"/>
           </a:xfrm>
           <a:prstGeom prst="rect">
@@ -13769,8 +13967,8 @@
         </p:nvSpPr>
         <p:spPr>
           <a:xfrm>
-            <a:off x="292608" y="1042416"/>
-            <a:ext cx="3767328" cy="3406139"/>
+            <a:off x="274320" y="996696"/>
+            <a:ext cx="3611880" cy="3854196"/>
           </a:xfrm>
           <a:prstGeom prst="rect">
             <a:avLst/>
@@ -13814,8 +14012,8 @@
         </p:nvSpPr>
         <p:spPr>
           <a:xfrm>
-            <a:off x="292608" y="1042416"/>
-            <a:ext cx="73152" cy="3406139"/>
+            <a:off x="274320" y="996696"/>
+            <a:ext cx="73152" cy="3854196"/>
           </a:xfrm>
           <a:prstGeom prst="rect">
             <a:avLst/>
@@ -13857,8 +14055,8 @@
         </p:nvSpPr>
         <p:spPr>
           <a:xfrm>
-            <a:off x="493776" y="1207008"/>
-            <a:ext cx="3456432" cy="3076956"/>
+            <a:off x="475488" y="1161288"/>
+            <a:ext cx="3300984" cy="3525012"/>
           </a:xfrm>
           <a:prstGeom prst="rect">
             <a:avLst/>
@@ -13876,7 +14074,7 @@
                 <a:spcPct val="120000"/>
               </a:lnSpc>
               <a:spcAft>
-                <a:spcPts val="3900"/>
+                <a:spcPts val="4800"/>
               </a:spcAft>
             </a:pPr>
             <a:r>
@@ -13896,7 +14094,7 @@
                 <a:spcPct val="120000"/>
               </a:lnSpc>
               <a:spcAft>
-                <a:spcPts val="3900"/>
+                <a:spcPts val="4800"/>
               </a:spcAft>
             </a:pPr>
             <a:r>
@@ -13916,7 +14114,7 @@
                 <a:spcPct val="120000"/>
               </a:lnSpc>
               <a:spcAft>
-                <a:spcPts val="3900"/>
+                <a:spcPts val="4800"/>
               </a:spcAft>
             </a:pPr>
             <a:r>
@@ -13936,7 +14134,7 @@
                 <a:spcPct val="120000"/>
               </a:lnSpc>
               <a:spcAft>
-                <a:spcPts val="3900"/>
+                <a:spcPts val="4800"/>
               </a:spcAft>
             </a:pPr>
             <a:r>
@@ -13956,7 +14154,7 @@
                 <a:spcPct val="120000"/>
               </a:lnSpc>
               <a:spcAft>
-                <a:spcPts val="3900"/>
+                <a:spcPts val="4800"/>
               </a:spcAft>
             </a:pPr>
             <a:r>
@@ -13980,8 +14178,8 @@
         </p:nvSpPr>
         <p:spPr>
           <a:xfrm>
-            <a:off x="5092502" y="1174592"/>
-            <a:ext cx="2927491" cy="3141786"/>
+            <a:off x="4677075" y="1005840"/>
+            <a:ext cx="3584609" cy="3835908"/>
           </a:xfrm>
           <a:prstGeom prst="rect">
             <a:avLst/>
@@ -13989,7 +14187,7 @@
           <a:solidFill>
             <a:srgbClr val="FFFFFF"/>
           </a:solidFill>
-          <a:ln w="12700">
+          <a:ln w="10160">
             <a:solidFill>
               <a:srgbClr val="BAC8DC"/>
             </a:solidFill>
@@ -14033,8 +14231,8 @@
         </p:blipFill>
         <p:spPr>
           <a:xfrm>
-            <a:off x="5165654" y="1247744"/>
-            <a:ext cx="2781187" cy="2794314"/>
+            <a:off x="4722795" y="1051560"/>
+            <a:ext cx="3493169" cy="3561588"/>
           </a:xfrm>
           <a:prstGeom prst="rect">
             <a:avLst/>
@@ -14049,8 +14247,8 @@
         </p:nvSpPr>
         <p:spPr>
           <a:xfrm>
-            <a:off x="4261104" y="4133499"/>
-            <a:ext cx="4590288" cy="201168"/>
+            <a:off x="4069080" y="4668012"/>
+            <a:ext cx="4800600" cy="182880"/>
           </a:xfrm>
           <a:prstGeom prst="rect">
             <a:avLst/>
@@ -14154,8 +14352,8 @@
         </p:nvSpPr>
         <p:spPr>
           <a:xfrm>
-            <a:off x="292608" y="54864"/>
-            <a:ext cx="8558784" cy="347472"/>
+            <a:off x="274320" y="54864"/>
+            <a:ext cx="8595360" cy="347472"/>
           </a:xfrm>
           <a:prstGeom prst="rect">
             <a:avLst/>
@@ -14232,8 +14430,8 @@
         </p:nvSpPr>
         <p:spPr>
           <a:xfrm>
-            <a:off x="292608" y="4951476"/>
-            <a:ext cx="8558784" cy="182880"/>
+            <a:off x="274320" y="4951476"/>
+            <a:ext cx="8595360" cy="182880"/>
           </a:xfrm>
           <a:prstGeom prst="rect">
             <a:avLst/>
@@ -14268,8 +14466,8 @@
         </p:nvSpPr>
         <p:spPr>
           <a:xfrm>
-            <a:off x="292608" y="475488"/>
-            <a:ext cx="8558784" cy="475488"/>
+            <a:off x="274320" y="466344"/>
+            <a:ext cx="8595360" cy="457200"/>
           </a:xfrm>
           <a:prstGeom prst="rect">
             <a:avLst/>
@@ -14304,7 +14502,7 @@
         </p:nvSpPr>
         <p:spPr>
           <a:xfrm>
-            <a:off x="292608" y="914400"/>
+            <a:off x="274320" y="886968"/>
             <a:ext cx="1143000" cy="50292"/>
           </a:xfrm>
           <a:prstGeom prst="rect">
@@ -14347,8 +14545,8 @@
         </p:nvSpPr>
         <p:spPr>
           <a:xfrm>
-            <a:off x="292608" y="1042416"/>
-            <a:ext cx="3767328" cy="3406139"/>
+            <a:off x="274320" y="996696"/>
+            <a:ext cx="3611880" cy="3854196"/>
           </a:xfrm>
           <a:prstGeom prst="rect">
             <a:avLst/>
@@ -14392,8 +14590,8 @@
         </p:nvSpPr>
         <p:spPr>
           <a:xfrm>
-            <a:off x="292608" y="1042416"/>
-            <a:ext cx="73152" cy="3406139"/>
+            <a:off x="274320" y="996696"/>
+            <a:ext cx="73152" cy="3854196"/>
           </a:xfrm>
           <a:prstGeom prst="rect">
             <a:avLst/>
@@ -14435,8 +14633,8 @@
         </p:nvSpPr>
         <p:spPr>
           <a:xfrm>
-            <a:off x="493776" y="1207008"/>
-            <a:ext cx="3456432" cy="3076956"/>
+            <a:off x="475488" y="1161288"/>
+            <a:ext cx="3300984" cy="3525012"/>
           </a:xfrm>
           <a:prstGeom prst="rect">
             <a:avLst/>
@@ -14454,7 +14652,7 @@
                 <a:spcPct val="120000"/>
               </a:lnSpc>
               <a:spcAft>
-                <a:spcPts val="3900"/>
+                <a:spcPts val="4800"/>
               </a:spcAft>
             </a:pPr>
             <a:r>
@@ -14474,7 +14672,7 @@
                 <a:spcPct val="120000"/>
               </a:lnSpc>
               <a:spcAft>
-                <a:spcPts val="3900"/>
+                <a:spcPts val="4800"/>
               </a:spcAft>
             </a:pPr>
             <a:r>
@@ -14494,7 +14692,7 @@
                 <a:spcPct val="120000"/>
               </a:lnSpc>
               <a:spcAft>
-                <a:spcPts val="3900"/>
+                <a:spcPts val="4800"/>
               </a:spcAft>
             </a:pPr>
             <a:r>
@@ -14514,7 +14712,7 @@
                 <a:spcPct val="120000"/>
               </a:lnSpc>
               <a:spcAft>
-                <a:spcPts val="3900"/>
+                <a:spcPts val="4800"/>
               </a:spcAft>
             </a:pPr>
             <a:r>
@@ -14534,7 +14732,7 @@
                 <a:spcPct val="120000"/>
               </a:lnSpc>
               <a:spcAft>
-                <a:spcPts val="3900"/>
+                <a:spcPts val="4800"/>
               </a:spcAft>
             </a:pPr>
             <a:r>
@@ -14558,8 +14756,8 @@
         </p:nvSpPr>
         <p:spPr>
           <a:xfrm>
-            <a:off x="4367733" y="1174592"/>
-            <a:ext cx="4377028" cy="3141786"/>
+            <a:off x="4023360" y="1567077"/>
+            <a:ext cx="4892040" cy="2713433"/>
           </a:xfrm>
           <a:prstGeom prst="rect">
             <a:avLst/>
@@ -14567,7 +14765,7 @@
           <a:solidFill>
             <a:srgbClr val="FFFFFF"/>
           </a:solidFill>
-          <a:ln w="12700">
+          <a:ln w="10160">
             <a:solidFill>
               <a:srgbClr val="BAC8DC"/>
             </a:solidFill>
@@ -14611,8 +14809,8 @@
         </p:blipFill>
         <p:spPr>
           <a:xfrm>
-            <a:off x="4440885" y="1247744"/>
-            <a:ext cx="4230724" cy="2794314"/>
+            <a:off x="4069080" y="1612797"/>
+            <a:ext cx="4800600" cy="2439113"/>
           </a:xfrm>
           <a:prstGeom prst="rect">
             <a:avLst/>
@@ -14627,8 +14825,8 @@
         </p:nvSpPr>
         <p:spPr>
           <a:xfrm>
-            <a:off x="4261104" y="4133499"/>
-            <a:ext cx="4590288" cy="201168"/>
+            <a:off x="4069080" y="4106774"/>
+            <a:ext cx="4800600" cy="182880"/>
           </a:xfrm>
           <a:prstGeom prst="rect">
             <a:avLst/>
@@ -14732,8 +14930,8 @@
         </p:nvSpPr>
         <p:spPr>
           <a:xfrm>
-            <a:off x="292608" y="54864"/>
-            <a:ext cx="8558784" cy="347472"/>
+            <a:off x="274320" y="54864"/>
+            <a:ext cx="8595360" cy="347472"/>
           </a:xfrm>
           <a:prstGeom prst="rect">
             <a:avLst/>
@@ -14810,8 +15008,8 @@
         </p:nvSpPr>
         <p:spPr>
           <a:xfrm>
-            <a:off x="292608" y="4951476"/>
-            <a:ext cx="8558784" cy="182880"/>
+            <a:off x="274320" y="4951476"/>
+            <a:ext cx="8595360" cy="182880"/>
           </a:xfrm>
           <a:prstGeom prst="rect">
             <a:avLst/>
@@ -14846,8 +15044,8 @@
         </p:nvSpPr>
         <p:spPr>
           <a:xfrm>
-            <a:off x="292608" y="475488"/>
-            <a:ext cx="8558784" cy="475488"/>
+            <a:off x="274320" y="466344"/>
+            <a:ext cx="8595360" cy="457200"/>
           </a:xfrm>
           <a:prstGeom prst="rect">
             <a:avLst/>
@@ -14882,7 +15080,7 @@
         </p:nvSpPr>
         <p:spPr>
           <a:xfrm>
-            <a:off x="292608" y="914400"/>
+            <a:off x="274320" y="886968"/>
             <a:ext cx="1143000" cy="50292"/>
           </a:xfrm>
           <a:prstGeom prst="rect">
@@ -14925,8 +15123,8 @@
         </p:nvSpPr>
         <p:spPr>
           <a:xfrm>
-            <a:off x="292608" y="1042416"/>
-            <a:ext cx="3767328" cy="3406139"/>
+            <a:off x="274320" y="996696"/>
+            <a:ext cx="3611880" cy="3854196"/>
           </a:xfrm>
           <a:prstGeom prst="rect">
             <a:avLst/>
@@ -14970,8 +15168,8 @@
         </p:nvSpPr>
         <p:spPr>
           <a:xfrm>
-            <a:off x="292608" y="1042416"/>
-            <a:ext cx="73152" cy="3406139"/>
+            <a:off x="274320" y="996696"/>
+            <a:ext cx="73152" cy="3854196"/>
           </a:xfrm>
           <a:prstGeom prst="rect">
             <a:avLst/>
@@ -15013,8 +15211,8 @@
         </p:nvSpPr>
         <p:spPr>
           <a:xfrm>
-            <a:off x="493776" y="1207008"/>
-            <a:ext cx="3456432" cy="3076956"/>
+            <a:off x="475488" y="1161288"/>
+            <a:ext cx="3300984" cy="3525012"/>
           </a:xfrm>
           <a:prstGeom prst="rect">
             <a:avLst/>
@@ -15032,7 +15230,7 @@
                 <a:spcPct val="120000"/>
               </a:lnSpc>
               <a:spcAft>
-                <a:spcPts val="3900"/>
+                <a:spcPts val="4800"/>
               </a:spcAft>
             </a:pPr>
             <a:r>
@@ -15052,7 +15250,7 @@
                 <a:spcPct val="120000"/>
               </a:lnSpc>
               <a:spcAft>
-                <a:spcPts val="3900"/>
+                <a:spcPts val="4800"/>
               </a:spcAft>
             </a:pPr>
             <a:r>
@@ -15072,7 +15270,7 @@
                 <a:spcPct val="120000"/>
               </a:lnSpc>
               <a:spcAft>
-                <a:spcPts val="3900"/>
+                <a:spcPts val="4800"/>
               </a:spcAft>
             </a:pPr>
             <a:r>
@@ -15092,7 +15290,7 @@
                 <a:spcPct val="120000"/>
               </a:lnSpc>
               <a:spcAft>
-                <a:spcPts val="3900"/>
+                <a:spcPts val="4800"/>
               </a:spcAft>
             </a:pPr>
             <a:r>
@@ -15112,7 +15310,7 @@
                 <a:spcPct val="120000"/>
               </a:lnSpc>
               <a:spcAft>
-                <a:spcPts val="3900"/>
+                <a:spcPts val="4800"/>
               </a:spcAft>
             </a:pPr>
             <a:r>
@@ -15136,8 +15334,8 @@
         </p:nvSpPr>
         <p:spPr>
           <a:xfrm>
-            <a:off x="4367733" y="1174592"/>
-            <a:ext cx="4377028" cy="3141786"/>
+            <a:off x="4023360" y="1808142"/>
+            <a:ext cx="4892040" cy="2231303"/>
           </a:xfrm>
           <a:prstGeom prst="rect">
             <a:avLst/>
@@ -15145,7 +15343,7 @@
           <a:solidFill>
             <a:srgbClr val="FFFFFF"/>
           </a:solidFill>
-          <a:ln w="12700">
+          <a:ln w="10160">
             <a:solidFill>
               <a:srgbClr val="BAC8DC"/>
             </a:solidFill>
@@ -15189,8 +15387,8 @@
         </p:blipFill>
         <p:spPr>
           <a:xfrm>
-            <a:off x="4440885" y="1247744"/>
-            <a:ext cx="4230724" cy="2794314"/>
+            <a:off x="4069080" y="1853862"/>
+            <a:ext cx="4800600" cy="1956983"/>
           </a:xfrm>
           <a:prstGeom prst="rect">
             <a:avLst/>
@@ -15205,8 +15403,8 @@
         </p:nvSpPr>
         <p:spPr>
           <a:xfrm>
-            <a:off x="4261104" y="4133499"/>
-            <a:ext cx="4590288" cy="201168"/>
+            <a:off x="4069080" y="3865709"/>
+            <a:ext cx="4800600" cy="182880"/>
           </a:xfrm>
           <a:prstGeom prst="rect">
             <a:avLst/>
@@ -15310,8 +15508,8 @@
         </p:nvSpPr>
         <p:spPr>
           <a:xfrm>
-            <a:off x="292608" y="54864"/>
-            <a:ext cx="8558784" cy="347472"/>
+            <a:off x="274320" y="54864"/>
+            <a:ext cx="8595360" cy="347472"/>
           </a:xfrm>
           <a:prstGeom prst="rect">
             <a:avLst/>
@@ -15388,8 +15586,8 @@
         </p:nvSpPr>
         <p:spPr>
           <a:xfrm>
-            <a:off x="292608" y="4951476"/>
-            <a:ext cx="8558784" cy="182880"/>
+            <a:off x="274320" y="4951476"/>
+            <a:ext cx="8595360" cy="182880"/>
           </a:xfrm>
           <a:prstGeom prst="rect">
             <a:avLst/>
@@ -15424,8 +15622,8 @@
         </p:nvSpPr>
         <p:spPr>
           <a:xfrm>
-            <a:off x="292608" y="475488"/>
-            <a:ext cx="8558784" cy="475488"/>
+            <a:off x="274320" y="466344"/>
+            <a:ext cx="8595360" cy="457200"/>
           </a:xfrm>
           <a:prstGeom prst="rect">
             <a:avLst/>
@@ -15460,7 +15658,7 @@
         </p:nvSpPr>
         <p:spPr>
           <a:xfrm>
-            <a:off x="292608" y="914400"/>
+            <a:off x="274320" y="886968"/>
             <a:ext cx="1143000" cy="50292"/>
           </a:xfrm>
           <a:prstGeom prst="rect">
@@ -15503,8 +15701,8 @@
         </p:nvSpPr>
         <p:spPr>
           <a:xfrm>
-            <a:off x="292608" y="1042416"/>
-            <a:ext cx="3767328" cy="3406139"/>
+            <a:off x="274320" y="996696"/>
+            <a:ext cx="3611880" cy="3854196"/>
           </a:xfrm>
           <a:prstGeom prst="rect">
             <a:avLst/>
@@ -15548,8 +15746,8 @@
         </p:nvSpPr>
         <p:spPr>
           <a:xfrm>
-            <a:off x="292608" y="1042416"/>
-            <a:ext cx="73152" cy="3406139"/>
+            <a:off x="274320" y="996696"/>
+            <a:ext cx="73152" cy="3854196"/>
           </a:xfrm>
           <a:prstGeom prst="rect">
             <a:avLst/>
@@ -15591,8 +15789,8 @@
         </p:nvSpPr>
         <p:spPr>
           <a:xfrm>
-            <a:off x="493776" y="1207008"/>
-            <a:ext cx="3456432" cy="3076956"/>
+            <a:off x="475488" y="1161288"/>
+            <a:ext cx="3300984" cy="3525012"/>
           </a:xfrm>
           <a:prstGeom prst="rect">
             <a:avLst/>
@@ -15610,7 +15808,7 @@
                 <a:spcPct val="120000"/>
               </a:lnSpc>
               <a:spcAft>
-                <a:spcPts val="2800"/>
+                <a:spcPts val="3500"/>
               </a:spcAft>
             </a:pPr>
             <a:r>
@@ -15630,7 +15828,7 @@
                 <a:spcPct val="120000"/>
               </a:lnSpc>
               <a:spcAft>
-                <a:spcPts val="2800"/>
+                <a:spcPts val="3500"/>
               </a:spcAft>
             </a:pPr>
             <a:r>
@@ -15650,7 +15848,7 @@
                 <a:spcPct val="120000"/>
               </a:lnSpc>
               <a:spcAft>
-                <a:spcPts val="2800"/>
+                <a:spcPts val="3500"/>
               </a:spcAft>
             </a:pPr>
             <a:r>
@@ -15670,7 +15868,7 @@
                 <a:spcPct val="120000"/>
               </a:lnSpc>
               <a:spcAft>
-                <a:spcPts val="2800"/>
+                <a:spcPts val="3500"/>
               </a:spcAft>
             </a:pPr>
             <a:r>
@@ -15690,7 +15888,7 @@
                 <a:spcPct val="120000"/>
               </a:lnSpc>
               <a:spcAft>
-                <a:spcPts val="2800"/>
+                <a:spcPts val="3500"/>
               </a:spcAft>
             </a:pPr>
             <a:r>
@@ -15710,7 +15908,7 @@
                 <a:spcPct val="120000"/>
               </a:lnSpc>
               <a:spcAft>
-                <a:spcPts val="2800"/>
+                <a:spcPts val="3500"/>
               </a:spcAft>
             </a:pPr>
             <a:r>
@@ -15734,8 +15932,8 @@
         </p:nvSpPr>
         <p:spPr>
           <a:xfrm>
-            <a:off x="4367733" y="1174592"/>
-            <a:ext cx="4377028" cy="3141786"/>
+            <a:off x="4710992" y="1005840"/>
+            <a:ext cx="3516775" cy="3835908"/>
           </a:xfrm>
           <a:prstGeom prst="rect">
             <a:avLst/>
@@ -15743,7 +15941,7 @@
           <a:solidFill>
             <a:srgbClr val="FFFFFF"/>
           </a:solidFill>
-          <a:ln w="12700">
+          <a:ln w="10160">
             <a:solidFill>
               <a:srgbClr val="BAC8DC"/>
             </a:solidFill>
@@ -15787,8 +15985,8 @@
         </p:blipFill>
         <p:spPr>
           <a:xfrm>
-            <a:off x="4440885" y="1247744"/>
-            <a:ext cx="4230724" cy="2794314"/>
+            <a:off x="4756712" y="1051560"/>
+            <a:ext cx="3425335" cy="3561588"/>
           </a:xfrm>
           <a:prstGeom prst="rect">
             <a:avLst/>
@@ -15803,8 +16001,8 @@
         </p:nvSpPr>
         <p:spPr>
           <a:xfrm>
-            <a:off x="4261104" y="4133499"/>
-            <a:ext cx="4590288" cy="201168"/>
+            <a:off x="4069080" y="4668012"/>
+            <a:ext cx="4800600" cy="182880"/>
           </a:xfrm>
           <a:prstGeom prst="rect">
             <a:avLst/>
@@ -15908,8 +16106,8 @@
         </p:nvSpPr>
         <p:spPr>
           <a:xfrm>
-            <a:off x="292608" y="54864"/>
-            <a:ext cx="8558784" cy="347472"/>
+            <a:off x="274320" y="54864"/>
+            <a:ext cx="8595360" cy="347472"/>
           </a:xfrm>
           <a:prstGeom prst="rect">
             <a:avLst/>
@@ -15986,8 +16184,8 @@
         </p:nvSpPr>
         <p:spPr>
           <a:xfrm>
-            <a:off x="292608" y="4951476"/>
-            <a:ext cx="8558784" cy="182880"/>
+            <a:off x="274320" y="4951476"/>
+            <a:ext cx="8595360" cy="182880"/>
           </a:xfrm>
           <a:prstGeom prst="rect">
             <a:avLst/>
@@ -16022,8 +16220,8 @@
         </p:nvSpPr>
         <p:spPr>
           <a:xfrm>
-            <a:off x="292608" y="475488"/>
-            <a:ext cx="8558784" cy="475488"/>
+            <a:off x="274320" y="466344"/>
+            <a:ext cx="8595360" cy="457200"/>
           </a:xfrm>
           <a:prstGeom prst="rect">
             <a:avLst/>
@@ -16058,7 +16256,7 @@
         </p:nvSpPr>
         <p:spPr>
           <a:xfrm>
-            <a:off x="292608" y="914400"/>
+            <a:off x="274320" y="886968"/>
             <a:ext cx="1143000" cy="50292"/>
           </a:xfrm>
           <a:prstGeom prst="rect">
@@ -16101,8 +16299,8 @@
         </p:nvSpPr>
         <p:spPr>
           <a:xfrm>
-            <a:off x="292608" y="1042416"/>
-            <a:ext cx="3767328" cy="3406139"/>
+            <a:off x="274320" y="996696"/>
+            <a:ext cx="3611880" cy="3854196"/>
           </a:xfrm>
           <a:prstGeom prst="rect">
             <a:avLst/>
@@ -16146,8 +16344,8 @@
         </p:nvSpPr>
         <p:spPr>
           <a:xfrm>
-            <a:off x="292608" y="1042416"/>
-            <a:ext cx="73152" cy="3406139"/>
+            <a:off x="274320" y="996696"/>
+            <a:ext cx="73152" cy="3854196"/>
           </a:xfrm>
           <a:prstGeom prst="rect">
             <a:avLst/>
@@ -16189,8 +16387,8 @@
         </p:nvSpPr>
         <p:spPr>
           <a:xfrm>
-            <a:off x="493776" y="1207008"/>
-            <a:ext cx="3456432" cy="3076956"/>
+            <a:off x="475488" y="1161288"/>
+            <a:ext cx="3300984" cy="3525012"/>
           </a:xfrm>
           <a:prstGeom prst="rect">
             <a:avLst/>
@@ -16208,7 +16406,7 @@
                 <a:spcPct val="120000"/>
               </a:lnSpc>
               <a:spcAft>
-                <a:spcPts val="5800"/>
+                <a:spcPts val="6900"/>
               </a:spcAft>
             </a:pPr>
             <a:r>
@@ -16228,7 +16426,7 @@
                 <a:spcPct val="120000"/>
               </a:lnSpc>
               <a:spcAft>
-                <a:spcPts val="5800"/>
+                <a:spcPts val="6900"/>
               </a:spcAft>
             </a:pPr>
             <a:r>
@@ -16248,7 +16446,7 @@
                 <a:spcPct val="120000"/>
               </a:lnSpc>
               <a:spcAft>
-                <a:spcPts val="5800"/>
+                <a:spcPts val="6900"/>
               </a:spcAft>
             </a:pPr>
             <a:r>
@@ -16268,7 +16466,7 @@
                 <a:spcPct val="120000"/>
               </a:lnSpc>
               <a:spcAft>
-                <a:spcPts val="5800"/>
+                <a:spcPts val="6900"/>
               </a:spcAft>
             </a:pPr>
             <a:r>
@@ -16292,8 +16490,8 @@
         </p:nvSpPr>
         <p:spPr>
           <a:xfrm>
-            <a:off x="4379976" y="1152144"/>
-            <a:ext cx="1865376" cy="2066544"/>
+            <a:off x="4206240" y="1133856"/>
+            <a:ext cx="1828800" cy="2011680"/>
           </a:xfrm>
           <a:prstGeom prst="rect">
             <a:avLst/>
@@ -16301,7 +16499,7 @@
           <a:solidFill>
             <a:srgbClr val="FFFFFF"/>
           </a:solidFill>
-          <a:ln w="12700">
+          <a:ln w="10160">
             <a:solidFill>
               <a:srgbClr val="BAC8DC"/>
             </a:solidFill>
@@ -16345,8 +16543,8 @@
         </p:blipFill>
         <p:spPr>
           <a:xfrm>
-            <a:off x="4453128" y="1225296"/>
-            <a:ext cx="1719072" cy="1719072"/>
+            <a:off x="4251959" y="1179576"/>
+            <a:ext cx="1737360" cy="1737360"/>
           </a:xfrm>
           <a:prstGeom prst="rect">
             <a:avLst/>
@@ -16361,8 +16559,8 @@
         </p:nvSpPr>
         <p:spPr>
           <a:xfrm>
-            <a:off x="4352544" y="3035808"/>
-            <a:ext cx="1920240" cy="201168"/>
+            <a:off x="4160520" y="2971800"/>
+            <a:ext cx="1920240" cy="182880"/>
           </a:xfrm>
           <a:prstGeom prst="rect">
             <a:avLst/>
@@ -16397,8 +16595,8 @@
         </p:nvSpPr>
         <p:spPr>
           <a:xfrm>
-            <a:off x="6546203" y="1170889"/>
-            <a:ext cx="2077489" cy="3240633"/>
+            <a:off x="6288094" y="1088136"/>
+            <a:ext cx="2419971" cy="3762756"/>
           </a:xfrm>
           <a:prstGeom prst="rect">
             <a:avLst/>
@@ -16406,7 +16604,7 @@
           <a:solidFill>
             <a:srgbClr val="FFFFFF"/>
           </a:solidFill>
-          <a:ln w="12700">
+          <a:ln w="10160">
             <a:solidFill>
               <a:srgbClr val="BAC8DC"/>
             </a:solidFill>
@@ -16450,8 +16648,8 @@
         </p:blipFill>
         <p:spPr>
           <a:xfrm>
-            <a:off x="6619355" y="1244041"/>
-            <a:ext cx="1931185" cy="2893161"/>
+            <a:off x="6333814" y="1133856"/>
+            <a:ext cx="2328531" cy="3488436"/>
           </a:xfrm>
           <a:prstGeom prst="rect">
             <a:avLst/>
@@ -16466,8 +16664,8 @@
         </p:nvSpPr>
         <p:spPr>
           <a:xfrm>
-            <a:off x="6409944" y="4228642"/>
-            <a:ext cx="2350007" cy="201168"/>
+            <a:off x="6217920" y="4677156"/>
+            <a:ext cx="2560320" cy="182880"/>
           </a:xfrm>
           <a:prstGeom prst="rect">
             <a:avLst/>
@@ -16563,8 +16761,8 @@
         </p:nvSpPr>
         <p:spPr>
           <a:xfrm>
-            <a:off x="292608" y="54864"/>
-            <a:ext cx="8558784" cy="347472"/>
+            <a:off x="274320" y="54864"/>
+            <a:ext cx="8595360" cy="347472"/>
           </a:xfrm>
           <a:prstGeom prst="rect">
             <a:avLst/>
@@ -16641,8 +16839,8 @@
         </p:nvSpPr>
         <p:spPr>
           <a:xfrm>
-            <a:off x="78729" y="1531180"/>
-            <a:ext cx="4277380" cy="2501763"/>
+            <a:off x="106161" y="1567756"/>
+            <a:ext cx="4222516" cy="2428611"/>
           </a:xfrm>
           <a:prstGeom prst="rect">
             <a:avLst/>
@@ -16650,7 +16848,7 @@
           <a:solidFill>
             <a:srgbClr val="FFFFFF"/>
           </a:solidFill>
-          <a:ln w="12700">
+          <a:ln w="10160">
             <a:solidFill>
               <a:srgbClr val="BAC8DC"/>
             </a:solidFill>
@@ -16694,7 +16892,7 @@
         </p:blipFill>
         <p:spPr>
           <a:xfrm>
-            <a:off x="151881" y="1604332"/>
+            <a:off x="151881" y="1613476"/>
             <a:ext cx="4131076" cy="2154291"/>
           </a:xfrm>
           <a:prstGeom prst="rect">
@@ -16710,8 +16908,8 @@
         </p:nvSpPr>
         <p:spPr>
           <a:xfrm>
-            <a:off x="109728" y="3850063"/>
-            <a:ext cx="4215383" cy="201168"/>
+            <a:off x="109728" y="3822631"/>
+            <a:ext cx="4215383" cy="182880"/>
           </a:xfrm>
           <a:prstGeom prst="rect">
             <a:avLst/>
@@ -16899,8 +17097,8 @@
         </p:nvSpPr>
         <p:spPr>
           <a:xfrm>
-            <a:off x="5833872" y="2990088"/>
-            <a:ext cx="1362456" cy="1563624"/>
+            <a:off x="5852159" y="3017520"/>
+            <a:ext cx="1325880" cy="1508760"/>
           </a:xfrm>
           <a:prstGeom prst="rect">
             <a:avLst/>
@@ -16908,7 +17106,7 @@
           <a:solidFill>
             <a:srgbClr val="FFFFFF"/>
           </a:solidFill>
-          <a:ln w="12700">
+          <a:ln w="10160">
             <a:solidFill>
               <a:srgbClr val="BAC8DC"/>
             </a:solidFill>
@@ -16952,8 +17150,8 @@
         </p:blipFill>
         <p:spPr>
           <a:xfrm>
-            <a:off x="5907024" y="3063240"/>
-            <a:ext cx="1216152" cy="1216152"/>
+            <a:off x="5897879" y="3063240"/>
+            <a:ext cx="1234440" cy="1234440"/>
           </a:xfrm>
           <a:prstGeom prst="rect">
             <a:avLst/>
@@ -16968,8 +17166,8 @@
         </p:nvSpPr>
         <p:spPr>
           <a:xfrm>
-            <a:off x="5806440" y="4370831"/>
-            <a:ext cx="1417320" cy="201168"/>
+            <a:off x="5806440" y="4352544"/>
+            <a:ext cx="1417320" cy="182880"/>
           </a:xfrm>
           <a:prstGeom prst="rect">
             <a:avLst/>
@@ -17073,8 +17271,8 @@
         </p:nvSpPr>
         <p:spPr>
           <a:xfrm>
-            <a:off x="292608" y="54864"/>
-            <a:ext cx="8558784" cy="347472"/>
+            <a:off x="274320" y="54864"/>
+            <a:ext cx="8595360" cy="347472"/>
           </a:xfrm>
           <a:prstGeom prst="rect">
             <a:avLst/>
@@ -17151,8 +17349,8 @@
         </p:nvSpPr>
         <p:spPr>
           <a:xfrm>
-            <a:off x="292608" y="4951476"/>
-            <a:ext cx="8558784" cy="182880"/>
+            <a:off x="274320" y="4951476"/>
+            <a:ext cx="8595360" cy="182880"/>
           </a:xfrm>
           <a:prstGeom prst="rect">
             <a:avLst/>
@@ -17188,7 +17386,7 @@
         <p:spPr>
           <a:xfrm>
             <a:off x="0" y="420624"/>
-            <a:ext cx="5349240" cy="4411980"/>
+            <a:ext cx="4343400" cy="4430268"/>
           </a:xfrm>
           <a:prstGeom prst="rect">
             <a:avLst/>
@@ -17230,8 +17428,8 @@
         </p:nvSpPr>
         <p:spPr>
           <a:xfrm>
-            <a:off x="457200" y="1051560"/>
-            <a:ext cx="822960" cy="822960"/>
+            <a:off x="384048" y="740664"/>
+            <a:ext cx="658368" cy="658368"/>
           </a:xfrm>
           <a:prstGeom prst="ellipse">
             <a:avLst/>
@@ -17273,8 +17471,8 @@
         </p:nvSpPr>
         <p:spPr>
           <a:xfrm>
-            <a:off x="457200" y="1115568"/>
-            <a:ext cx="822960" cy="457200"/>
+            <a:off x="384048" y="804672"/>
+            <a:ext cx="658368" cy="411480"/>
           </a:xfrm>
           <a:prstGeom prst="rect">
             <a:avLst/>
@@ -17289,7 +17487,7 @@
           <a:p>
             <a:pPr algn="ctr"/>
             <a:r>
-              <a:rPr sz="2600" b="1">
+              <a:rPr sz="2200" b="1">
                 <a:solidFill>
                   <a:srgbClr val="FFFFFF"/>
                 </a:solidFill>
@@ -17309,8 +17507,8 @@
         </p:nvSpPr>
         <p:spPr>
           <a:xfrm>
-            <a:off x="411480" y="1965960"/>
-            <a:ext cx="4754880" cy="502920"/>
+            <a:off x="347472" y="1472184"/>
+            <a:ext cx="3840480" cy="457200"/>
           </a:xfrm>
           <a:prstGeom prst="rect">
             <a:avLst/>
@@ -17324,6 +17522,13 @@
           <a:lstStyle/>
           <a:p>
             <a:r>
+              <a:rPr sz="2400" b="1">
+                <a:solidFill>
+                  <a:srgbClr val="FFFFFF"/>
+                </a:solidFill>
+                <a:latin typeface="微软雅黑"/>
+                <ns3:rFonts xmlns:ns3="http://schemas.openxmlformats.org/wordprocessingml/2006/main" ns3:eastAsia="微软雅黑" ns3:ascii="微软雅黑" ns3:hAnsi="微软雅黑"/>
+              </a:rPr>
               <a:t>第一部分</a:t>
             </a:r>
           </a:p>
@@ -17337,8 +17542,8 @@
         </p:nvSpPr>
         <p:spPr>
           <a:xfrm>
-            <a:off x="438912" y="2514600"/>
-            <a:ext cx="4754880" cy="365760"/>
+            <a:off x="365760" y="1947672"/>
+            <a:ext cx="3840480" cy="347472"/>
           </a:xfrm>
           <a:prstGeom prst="rect">
             <a:avLst/>
@@ -17352,6 +17557,13 @@
           <a:lstStyle/>
           <a:p>
             <a:r>
+              <a:rPr sz="1200" b="0">
+                <a:solidFill>
+                  <a:srgbClr val="BFDBFE"/>
+                </a:solidFill>
+                <a:latin typeface="微软雅黑"/>
+                <ns4:rFonts xmlns:ns4="http://schemas.openxmlformats.org/wordprocessingml/2006/main" ns4:eastAsia="微软雅黑" ns4:ascii="微软雅黑" ns4:hAnsi="微软雅黑"/>
+              </a:rPr>
               <a:t>项目背景 · 需求分析 · 方案定位</a:t>
             </a:r>
           </a:p>
@@ -17359,97 +17571,25 @@
       </p:sp>
       <p:sp>
         <p:nvSpPr>
-          <p:cNvPr id="11" name="TextBox 10"/>
-          <p:cNvSpPr txBox="1"/>
-          <p:nvPr/>
-        </p:nvSpPr>
-        <p:spPr>
-          <a:xfrm>
-            <a:off x="475488" y="3063240"/>
-            <a:ext cx="4572000" cy="1463040"/>
-          </a:xfrm>
-          <a:prstGeom prst="rect">
-            <a:avLst/>
-          </a:prstGeom>
-          <a:noFill/>
-        </p:spPr>
-        <p:txBody>
-          <a:bodyPr wrap="none">
-            <a:spAutoFit/>
-          </a:bodyPr>
-          <a:lstStyle/>
-          <a:p>
-            <a:pPr>
-              <a:spcAft>
-                <a:spcPts val="1000"/>
-              </a:spcAft>
-            </a:pPr>
-            <a:r>
-              <a:rPr sz="1300" b="0">
-                <a:solidFill>
-                  <a:srgbClr val="E2E8F0"/>
-                </a:solidFill>
-                <a:latin typeface="微软雅黑"/>
-                <ns5:rFonts xmlns:ns5="http://schemas.openxmlformats.org/wordprocessingml/2006/main" ns5:eastAsia="微软雅黑" ns5:ascii="微软雅黑" ns5:hAnsi="微软雅黑"/>
-              </a:rPr>
-              <a:t>▸  老龄化与跌倒空窗</a:t>
-            </a:r>
-          </a:p>
-          <a:p>
-            <a:pPr>
-              <a:spcAft>
-                <a:spcPts val="1000"/>
-              </a:spcAft>
-            </a:pPr>
-            <a:r>
-              <a:rPr sz="1300" b="0">
-                <a:solidFill>
-                  <a:srgbClr val="E2E8F0"/>
-                </a:solidFill>
-                <a:latin typeface="微软雅黑"/>
-                <ns6:rFonts xmlns:ns6="http://schemas.openxmlformats.org/wordprocessingml/2006/main" ns6:eastAsia="微软雅黑" ns6:ascii="微软雅黑" ns6:hAnsi="微软雅黑"/>
-              </a:rPr>
-              <a:t>▸  方案对比</a:t>
-            </a:r>
-          </a:p>
-          <a:p>
-            <a:pPr>
-              <a:spcAft>
-                <a:spcPts val="1000"/>
-              </a:spcAft>
-            </a:pPr>
-            <a:r>
-              <a:rPr sz="1300" b="0">
-                <a:solidFill>
-                  <a:srgbClr val="E2E8F0"/>
-                </a:solidFill>
-                <a:latin typeface="微软雅黑"/>
-                <ns7:rFonts xmlns:ns7="http://schemas.openxmlformats.org/wordprocessingml/2006/main" ns7:eastAsia="微软雅黑" ns7:ascii="微软雅黑" ns7:hAnsi="微软雅黑"/>
-              </a:rPr>
-              <a:t>▸  项目目标</a:t>
-            </a:r>
-          </a:p>
-        </p:txBody>
-      </p:sp>
-      <p:sp>
-        <p:nvSpPr>
-          <p:cNvPr id="12" name="Rectangle 11"/>
+          <p:cNvPr id="11" name="Rectangle 10"/>
           <p:cNvSpPr/>
           <p:nvPr/>
         </p:nvSpPr>
         <p:spPr>
           <a:xfrm>
-            <a:off x="5349240" y="420624"/>
-            <a:ext cx="3794760" cy="4411980"/>
-          </a:xfrm>
-          <a:prstGeom prst="rect">
-            <a:avLst/>
-          </a:prstGeom>
-          <a:solidFill>
-            <a:srgbClr val="F1F7FF"/>
+            <a:off x="384048" y="2432304"/>
+            <a:ext cx="3657600" cy="384048"/>
+          </a:xfrm>
+          <a:prstGeom prst="rect">
+            <a:avLst/>
+          </a:prstGeom>
+          <a:solidFill>
+            <a:srgbClr val="1E4082"/>
           </a:solidFill>
           <a:ln>
-            <a:noFill/>
+            <a:solidFill>
+              <a:srgbClr val="648CC8"/>
+            </a:solidFill>
           </a:ln>
         </p:spPr>
         <p:style>
@@ -17476,24 +17616,59 @@
       </p:sp>
       <p:sp>
         <p:nvSpPr>
+          <p:cNvPr id="12" name="TextBox 11"/>
+          <p:cNvSpPr txBox="1"/>
+          <p:nvPr/>
+        </p:nvSpPr>
+        <p:spPr>
+          <a:xfrm>
+            <a:off x="502920" y="2505456"/>
+            <a:ext cx="3429000" cy="256032"/>
+          </a:xfrm>
+          <a:prstGeom prst="rect">
+            <a:avLst/>
+          </a:prstGeom>
+          <a:noFill/>
+        </p:spPr>
+        <p:txBody>
+          <a:bodyPr wrap="none">
+            <a:spAutoFit/>
+          </a:bodyPr>
+          <a:lstStyle/>
+          <a:p>
+            <a:r>
+              <a:rPr sz="1100" b="0">
+                <a:solidFill>
+                  <a:srgbClr val="E2E8F0"/>
+                </a:solidFill>
+                <a:latin typeface="微软雅黑"/>
+                <ns5:rFonts xmlns:ns5="http://schemas.openxmlformats.org/wordprocessingml/2006/main" ns5:eastAsia="微软雅黑" ns5:ascii="微软雅黑" ns5:hAnsi="微软雅黑"/>
+              </a:rPr>
+              <a:t>老龄化与跌倒空窗</a:t>
+            </a:r>
+          </a:p>
+        </p:txBody>
+      </p:sp>
+      <p:sp>
+        <p:nvSpPr>
           <p:cNvPr id="13" name="Rectangle 12"/>
           <p:cNvSpPr/>
           <p:nvPr/>
         </p:nvSpPr>
         <p:spPr>
           <a:xfrm>
-            <a:off x="5501259" y="1690316"/>
-            <a:ext cx="3490722" cy="2494386"/>
-          </a:xfrm>
-          <a:prstGeom prst="rect">
-            <a:avLst/>
-          </a:prstGeom>
-          <a:solidFill>
-            <a:srgbClr val="FFFFFF"/>
-          </a:solidFill>
-          <a:ln w="12700">
+            <a:off x="384048" y="2871216"/>
+            <a:ext cx="3657600" cy="384048"/>
+          </a:xfrm>
+          <a:prstGeom prst="rect">
+            <a:avLst/>
+          </a:prstGeom>
+          <a:solidFill>
+            <a:srgbClr val="1E4082"/>
+          </a:solidFill>
+          <a:ln>
             <a:solidFill>
-              <a:srgbClr val="BAC8DC"/>
+              <a:srgbClr val="648CC8"/>
             </a:solidFill>
           </a:ln>
         </p:spPr>
@@ -17519,9 +17694,167 @@
           </a:p>
         </p:txBody>
       </p:sp>
+      <p:sp>
+        <p:nvSpPr>
+          <p:cNvPr id="14" name="TextBox 13"/>
+          <p:cNvSpPr txBox="1"/>
+          <p:nvPr/>
+        </p:nvSpPr>
+        <p:spPr>
+          <a:xfrm>
+            <a:off x="502920" y="2944368"/>
+            <a:ext cx="3429000" cy="256032"/>
+          </a:xfrm>
+          <a:prstGeom prst="rect">
+            <a:avLst/>
+          </a:prstGeom>
+          <a:noFill/>
+        </p:spPr>
+        <p:txBody>
+          <a:bodyPr wrap="none">
+            <a:spAutoFit/>
+          </a:bodyPr>
+          <a:lstStyle/>
+          <a:p>
+            <a:r>
+              <a:rPr sz="1100" b="0">
+                <a:solidFill>
+                  <a:srgbClr val="E2E8F0"/>
+                </a:solidFill>
+                <a:latin typeface="微软雅黑"/>
+                <ns6:rFonts xmlns:ns6="http://schemas.openxmlformats.org/wordprocessingml/2006/main" ns6:eastAsia="微软雅黑" ns6:ascii="微软雅黑" ns6:hAnsi="微软雅黑"/>
+              </a:rPr>
+              <a:t>方案对比</a:t>
+            </a:r>
+          </a:p>
+        </p:txBody>
+      </p:sp>
+      <p:sp>
+        <p:nvSpPr>
+          <p:cNvPr id="15" name="Rectangle 14"/>
+          <p:cNvSpPr/>
+          <p:nvPr/>
+        </p:nvSpPr>
+        <p:spPr>
+          <a:xfrm>
+            <a:off x="384048" y="3310128"/>
+            <a:ext cx="3657600" cy="384048"/>
+          </a:xfrm>
+          <a:prstGeom prst="rect">
+            <a:avLst/>
+          </a:prstGeom>
+          <a:solidFill>
+            <a:srgbClr val="1E4082"/>
+          </a:solidFill>
+          <a:ln>
+            <a:solidFill>
+              <a:srgbClr val="648CC8"/>
+            </a:solidFill>
+          </a:ln>
+        </p:spPr>
+        <p:style>
+          <a:lnRef idx="1">
+            <a:schemeClr val="accent1"/>
+          </a:lnRef>
+          <a:fillRef idx="3">
+            <a:schemeClr val="accent1"/>
+          </a:fillRef>
+          <a:effectRef idx="2">
+            <a:schemeClr val="accent1"/>
+          </a:effectRef>
+          <a:fontRef idx="minor">
+            <a:schemeClr val="lt1"/>
+          </a:fontRef>
+        </p:style>
+        <p:txBody>
+          <a:bodyPr rtlCol="0" anchor="ctr"/>
+          <a:lstStyle/>
+          <a:p>
+            <a:pPr algn="ctr"/>
+          </a:p>
+        </p:txBody>
+      </p:sp>
+      <p:sp>
+        <p:nvSpPr>
+          <p:cNvPr id="16" name="TextBox 15"/>
+          <p:cNvSpPr txBox="1"/>
+          <p:nvPr/>
+        </p:nvSpPr>
+        <p:spPr>
+          <a:xfrm>
+            <a:off x="502920" y="3383280"/>
+            <a:ext cx="3429000" cy="256032"/>
+          </a:xfrm>
+          <a:prstGeom prst="rect">
+            <a:avLst/>
+          </a:prstGeom>
+          <a:noFill/>
+        </p:spPr>
+        <p:txBody>
+          <a:bodyPr wrap="none">
+            <a:spAutoFit/>
+          </a:bodyPr>
+          <a:lstStyle/>
+          <a:p>
+            <a:r>
+              <a:rPr sz="1100" b="0">
+                <a:solidFill>
+                  <a:srgbClr val="E2E8F0"/>
+                </a:solidFill>
+                <a:latin typeface="微软雅黑"/>
+                <ns7:rFonts xmlns:ns7="http://schemas.openxmlformats.org/wordprocessingml/2006/main" ns7:eastAsia="微软雅黑" ns7:ascii="微软雅黑" ns7:hAnsi="微软雅黑"/>
+              </a:rPr>
+              <a:t>项目目标</a:t>
+            </a:r>
+          </a:p>
+        </p:txBody>
+      </p:sp>
+      <p:sp>
+        <p:nvSpPr>
+          <p:cNvPr id="17" name="Rectangle 16"/>
+          <p:cNvSpPr/>
+          <p:nvPr/>
+        </p:nvSpPr>
+        <p:spPr>
+          <a:xfrm>
+            <a:off x="4343400" y="420624"/>
+            <a:ext cx="4800600" cy="4430268"/>
+          </a:xfrm>
+          <a:prstGeom prst="rect">
+            <a:avLst/>
+          </a:prstGeom>
+          <a:solidFill>
+            <a:srgbClr val="F1F7FF"/>
+          </a:solidFill>
+          <a:ln>
+            <a:noFill/>
+          </a:ln>
+        </p:spPr>
+        <p:style>
+          <a:lnRef idx="1">
+            <a:schemeClr val="accent1"/>
+          </a:lnRef>
+          <a:fillRef idx="3">
+            <a:schemeClr val="accent1"/>
+          </a:fillRef>
+          <a:effectRef idx="2">
+            <a:schemeClr val="accent1"/>
+          </a:effectRef>
+          <a:fontRef idx="minor">
+            <a:schemeClr val="lt1"/>
+          </a:fontRef>
+        </p:style>
+        <p:txBody>
+          <a:bodyPr rtlCol="0" anchor="ctr"/>
+          <a:lstStyle/>
+          <a:p>
+            <a:pPr algn="ctr"/>
+          </a:p>
+        </p:txBody>
+      </p:sp>
       <p:pic>
         <p:nvPicPr>
-          <p:cNvPr id="14" name="Picture 13" descr="aging_chart.png"/>
+          <p:cNvPr id="18" name="Picture 17" descr="aging_chart.png"/>
           <p:cNvPicPr>
             <a:picLocks noChangeAspect="1"/>
           </p:cNvPicPr>
@@ -17535,50 +17868,14 @@
         </p:blipFill>
         <p:spPr>
           <a:xfrm>
-            <a:off x="5574411" y="1763468"/>
-            <a:ext cx="3344418" cy="2146914"/>
+            <a:off x="4398264" y="1198237"/>
+            <a:ext cx="4690872" cy="3451113"/>
           </a:xfrm>
           <a:prstGeom prst="rect">
             <a:avLst/>
           </a:prstGeom>
         </p:spPr>
       </p:pic>
-      <p:sp>
-        <p:nvSpPr>
-          <p:cNvPr id="15" name="TextBox 14"/>
-          <p:cNvSpPr txBox="1"/>
-          <p:nvPr/>
-        </p:nvSpPr>
-        <p:spPr>
-          <a:xfrm>
-            <a:off x="5486400" y="4001822"/>
-            <a:ext cx="3520440" cy="201168"/>
-          </a:xfrm>
-          <a:prstGeom prst="rect">
-            <a:avLst/>
-          </a:prstGeom>
-          <a:noFill/>
-        </p:spPr>
-        <p:txBody>
-          <a:bodyPr wrap="none">
-            <a:spAutoFit/>
-          </a:bodyPr>
-          <a:lstStyle/>
-          <a:p>
-            <a:pPr algn="ctr"/>
-            <a:r>
-              <a:rPr sz="900" b="0">
-                <a:solidFill>
-                  <a:srgbClr val="5A6273"/>
-                </a:solidFill>
-                <a:latin typeface="微软雅黑"/>
-                <ns8:rFonts xmlns:ns8="http://schemas.openxmlformats.org/wordprocessingml/2006/main" ns8:eastAsia="微软雅黑" ns8:ascii="微软雅黑" ns8:hAnsi="微软雅黑"/>
-              </a:rPr>
-              <a:t>本章核心示意</a:t>
-            </a:r>
-          </a:p>
-        </p:txBody>
-      </p:sp>
     </p:spTree>
   </p:cSld>
   <p:clrMapOvr>
@@ -17656,8 +17953,8 @@
         </p:nvSpPr>
         <p:spPr>
           <a:xfrm>
-            <a:off x="292608" y="54864"/>
-            <a:ext cx="8558784" cy="347472"/>
+            <a:off x="274320" y="54864"/>
+            <a:ext cx="8595360" cy="347472"/>
           </a:xfrm>
           <a:prstGeom prst="rect">
             <a:avLst/>
@@ -17734,8 +18031,8 @@
         </p:nvSpPr>
         <p:spPr>
           <a:xfrm>
-            <a:off x="292608" y="4951476"/>
-            <a:ext cx="8558784" cy="182880"/>
+            <a:off x="274320" y="4951476"/>
+            <a:ext cx="8595360" cy="182880"/>
           </a:xfrm>
           <a:prstGeom prst="rect">
             <a:avLst/>
@@ -17770,8 +18067,8 @@
         </p:nvSpPr>
         <p:spPr>
           <a:xfrm>
-            <a:off x="292608" y="475488"/>
-            <a:ext cx="8558784" cy="475488"/>
+            <a:off x="274320" y="466344"/>
+            <a:ext cx="8595360" cy="457200"/>
           </a:xfrm>
           <a:prstGeom prst="rect">
             <a:avLst/>
@@ -17806,7 +18103,7 @@
         </p:nvSpPr>
         <p:spPr>
           <a:xfrm>
-            <a:off x="292608" y="914400"/>
+            <a:off x="274320" y="886968"/>
             <a:ext cx="1143000" cy="50292"/>
           </a:xfrm>
           <a:prstGeom prst="rect">
@@ -17849,8 +18146,8 @@
         </p:nvSpPr>
         <p:spPr>
           <a:xfrm>
-            <a:off x="292608" y="1042416"/>
-            <a:ext cx="3767328" cy="3406139"/>
+            <a:off x="274320" y="996696"/>
+            <a:ext cx="3611880" cy="3451860"/>
           </a:xfrm>
           <a:prstGeom prst="rect">
             <a:avLst/>
@@ -17894,8 +18191,8 @@
         </p:nvSpPr>
         <p:spPr>
           <a:xfrm>
-            <a:off x="292608" y="1042416"/>
-            <a:ext cx="73152" cy="3406139"/>
+            <a:off x="274320" y="996696"/>
+            <a:ext cx="73152" cy="3451860"/>
           </a:xfrm>
           <a:prstGeom prst="rect">
             <a:avLst/>
@@ -17937,8 +18234,8 @@
         </p:nvSpPr>
         <p:spPr>
           <a:xfrm>
-            <a:off x="493776" y="1207008"/>
-            <a:ext cx="3456432" cy="3076956"/>
+            <a:off x="475488" y="1161288"/>
+            <a:ext cx="3300984" cy="3122676"/>
           </a:xfrm>
           <a:prstGeom prst="rect">
             <a:avLst/>
@@ -17956,7 +18253,7 @@
                 <a:spcPct val="120000"/>
               </a:lnSpc>
               <a:spcAft>
-                <a:spcPts val="5800"/>
+                <a:spcPts val="5900"/>
               </a:spcAft>
             </a:pPr>
             <a:r>
@@ -17976,7 +18273,7 @@
                 <a:spcPct val="120000"/>
               </a:lnSpc>
               <a:spcAft>
-                <a:spcPts val="5800"/>
+                <a:spcPts val="5900"/>
               </a:spcAft>
             </a:pPr>
             <a:r>
@@ -17996,7 +18293,7 @@
                 <a:spcPct val="120000"/>
               </a:lnSpc>
               <a:spcAft>
-                <a:spcPts val="5800"/>
+                <a:spcPts val="5900"/>
               </a:spcAft>
             </a:pPr>
             <a:r>
@@ -18016,7 +18313,7 @@
                 <a:spcPct val="120000"/>
               </a:lnSpc>
               <a:spcAft>
-                <a:spcPts val="5800"/>
+                <a:spcPts val="5900"/>
               </a:spcAft>
             </a:pPr>
             <a:r>
@@ -18040,8 +18337,8 @@
         </p:nvSpPr>
         <p:spPr>
           <a:xfrm>
-            <a:off x="4325660" y="1186807"/>
-            <a:ext cx="4461174" cy="3117357"/>
+            <a:off x="4023360" y="1020713"/>
+            <a:ext cx="4892040" cy="3806161"/>
           </a:xfrm>
           <a:prstGeom prst="rect">
             <a:avLst/>
@@ -18049,7 +18346,7 @@
           <a:solidFill>
             <a:srgbClr val="FFFFFF"/>
           </a:solidFill>
-          <a:ln w="12700">
+          <a:ln w="10160">
             <a:solidFill>
               <a:srgbClr val="BAC8DC"/>
             </a:solidFill>
@@ -18093,8 +18390,8 @@
         </p:blipFill>
         <p:spPr>
           <a:xfrm>
-            <a:off x="4398812" y="1259959"/>
-            <a:ext cx="4314870" cy="2769885"/>
+            <a:off x="4069080" y="1066433"/>
+            <a:ext cx="4800600" cy="3531841"/>
           </a:xfrm>
           <a:prstGeom prst="rect">
             <a:avLst/>
@@ -18109,8 +18406,8 @@
         </p:nvSpPr>
         <p:spPr>
           <a:xfrm>
-            <a:off x="4261104" y="4121284"/>
-            <a:ext cx="4590288" cy="201168"/>
+            <a:off x="4069080" y="4653138"/>
+            <a:ext cx="4800600" cy="182880"/>
           </a:xfrm>
           <a:prstGeom prst="rect">
             <a:avLst/>
@@ -18145,8 +18442,8 @@
         </p:nvSpPr>
         <p:spPr>
           <a:xfrm>
-            <a:off x="292608" y="4503420"/>
-            <a:ext cx="3767328" cy="329184"/>
+            <a:off x="274320" y="4539996"/>
+            <a:ext cx="3611880" cy="310896"/>
           </a:xfrm>
           <a:prstGeom prst="rect">
             <a:avLst/>
@@ -18188,8 +18485,8 @@
         </p:nvSpPr>
         <p:spPr>
           <a:xfrm>
-            <a:off x="402336" y="4567428"/>
-            <a:ext cx="3547872" cy="237744"/>
+            <a:off x="384048" y="4604004"/>
+            <a:ext cx="3392424" cy="219456"/>
           </a:xfrm>
           <a:prstGeom prst="rect">
             <a:avLst/>
@@ -18293,8 +18590,8 @@
         </p:nvSpPr>
         <p:spPr>
           <a:xfrm>
-            <a:off x="292608" y="54864"/>
-            <a:ext cx="8558784" cy="347472"/>
+            <a:off x="274320" y="54864"/>
+            <a:ext cx="8595360" cy="347472"/>
           </a:xfrm>
           <a:prstGeom prst="rect">
             <a:avLst/>
@@ -18371,8 +18668,8 @@
         </p:nvSpPr>
         <p:spPr>
           <a:xfrm>
-            <a:off x="292608" y="4951476"/>
-            <a:ext cx="8558784" cy="182880"/>
+            <a:off x="274320" y="4951476"/>
+            <a:ext cx="8595360" cy="182880"/>
           </a:xfrm>
           <a:prstGeom prst="rect">
             <a:avLst/>
@@ -18407,8 +18704,8 @@
         </p:nvSpPr>
         <p:spPr>
           <a:xfrm>
-            <a:off x="292608" y="475488"/>
-            <a:ext cx="8558784" cy="475488"/>
+            <a:off x="274320" y="466344"/>
+            <a:ext cx="8595360" cy="457200"/>
           </a:xfrm>
           <a:prstGeom prst="rect">
             <a:avLst/>
@@ -18443,7 +18740,7 @@
         </p:nvSpPr>
         <p:spPr>
           <a:xfrm>
-            <a:off x="292608" y="914400"/>
+            <a:off x="274320" y="886968"/>
             <a:ext cx="1143000" cy="50292"/>
           </a:xfrm>
           <a:prstGeom prst="rect">
@@ -18486,8 +18783,8 @@
         </p:nvSpPr>
         <p:spPr>
           <a:xfrm>
-            <a:off x="292608" y="1042416"/>
-            <a:ext cx="3767328" cy="3406139"/>
+            <a:off x="274320" y="996696"/>
+            <a:ext cx="3611880" cy="3451860"/>
           </a:xfrm>
           <a:prstGeom prst="rect">
             <a:avLst/>
@@ -18531,8 +18828,8 @@
         </p:nvSpPr>
         <p:spPr>
           <a:xfrm>
-            <a:off x="292608" y="1042416"/>
-            <a:ext cx="73152" cy="3406139"/>
+            <a:off x="274320" y="996696"/>
+            <a:ext cx="73152" cy="3451860"/>
           </a:xfrm>
           <a:prstGeom prst="rect">
             <a:avLst/>
@@ -18574,8 +18871,8 @@
         </p:nvSpPr>
         <p:spPr>
           <a:xfrm>
-            <a:off x="493776" y="1207008"/>
-            <a:ext cx="3456432" cy="3076956"/>
+            <a:off x="475488" y="1161288"/>
+            <a:ext cx="3300984" cy="3122676"/>
           </a:xfrm>
           <a:prstGeom prst="rect">
             <a:avLst/>
@@ -18593,7 +18890,7 @@
                 <a:spcPct val="120000"/>
               </a:lnSpc>
               <a:spcAft>
-                <a:spcPts val="5800"/>
+                <a:spcPts val="5900"/>
               </a:spcAft>
             </a:pPr>
             <a:r>
@@ -18613,7 +18910,7 @@
                 <a:spcPct val="120000"/>
               </a:lnSpc>
               <a:spcAft>
-                <a:spcPts val="5800"/>
+                <a:spcPts val="5900"/>
               </a:spcAft>
             </a:pPr>
             <a:r>
@@ -18633,7 +18930,7 @@
                 <a:spcPct val="120000"/>
               </a:lnSpc>
               <a:spcAft>
-                <a:spcPts val="5800"/>
+                <a:spcPts val="5900"/>
               </a:spcAft>
             </a:pPr>
             <a:r>
@@ -18653,7 +18950,7 @@
                 <a:spcPct val="120000"/>
               </a:lnSpc>
               <a:spcAft>
-                <a:spcPts val="5800"/>
+                <a:spcPts val="5900"/>
               </a:spcAft>
             </a:pPr>
             <a:r>
@@ -18677,8 +18974,8 @@
         </p:nvSpPr>
         <p:spPr>
           <a:xfrm>
-            <a:off x="4367733" y="1174592"/>
-            <a:ext cx="4377028" cy="3141786"/>
+            <a:off x="4023360" y="1253331"/>
+            <a:ext cx="4892040" cy="3340924"/>
           </a:xfrm>
           <a:prstGeom prst="rect">
             <a:avLst/>
@@ -18686,7 +18983,7 @@
           <a:solidFill>
             <a:srgbClr val="FFFFFF"/>
           </a:solidFill>
-          <a:ln w="12700">
+          <a:ln w="10160">
             <a:solidFill>
               <a:srgbClr val="BAC8DC"/>
             </a:solidFill>
@@ -18730,8 +19027,8 @@
         </p:blipFill>
         <p:spPr>
           <a:xfrm>
-            <a:off x="4440885" y="1247744"/>
-            <a:ext cx="4230724" cy="2794314"/>
+            <a:off x="4069080" y="1299051"/>
+            <a:ext cx="4800600" cy="3066604"/>
           </a:xfrm>
           <a:prstGeom prst="rect">
             <a:avLst/>
@@ -18746,8 +19043,8 @@
         </p:nvSpPr>
         <p:spPr>
           <a:xfrm>
-            <a:off x="4261104" y="4133499"/>
-            <a:ext cx="4590288" cy="201168"/>
+            <a:off x="4069080" y="4420520"/>
+            <a:ext cx="4800600" cy="182880"/>
           </a:xfrm>
           <a:prstGeom prst="rect">
             <a:avLst/>
@@ -18782,8 +19079,8 @@
         </p:nvSpPr>
         <p:spPr>
           <a:xfrm>
-            <a:off x="292608" y="4503420"/>
-            <a:ext cx="3767328" cy="329184"/>
+            <a:off x="274320" y="4539996"/>
+            <a:ext cx="3611880" cy="310896"/>
           </a:xfrm>
           <a:prstGeom prst="rect">
             <a:avLst/>
@@ -18825,8 +19122,8 @@
         </p:nvSpPr>
         <p:spPr>
           <a:xfrm>
-            <a:off x="402336" y="4567428"/>
-            <a:ext cx="3547872" cy="237744"/>
+            <a:off x="384048" y="4604004"/>
+            <a:ext cx="3392424" cy="219456"/>
           </a:xfrm>
           <a:prstGeom prst="rect">
             <a:avLst/>
@@ -18930,8 +19227,8 @@
         </p:nvSpPr>
         <p:spPr>
           <a:xfrm>
-            <a:off x="292608" y="54864"/>
-            <a:ext cx="8558784" cy="347472"/>
+            <a:off x="274320" y="54864"/>
+            <a:ext cx="8595360" cy="347472"/>
           </a:xfrm>
           <a:prstGeom prst="rect">
             <a:avLst/>
@@ -19008,8 +19305,8 @@
         </p:nvSpPr>
         <p:spPr>
           <a:xfrm>
-            <a:off x="292608" y="4951476"/>
-            <a:ext cx="8558784" cy="182880"/>
+            <a:off x="274320" y="4951476"/>
+            <a:ext cx="8595360" cy="182880"/>
           </a:xfrm>
           <a:prstGeom prst="rect">
             <a:avLst/>
@@ -19044,8 +19341,8 @@
         </p:nvSpPr>
         <p:spPr>
           <a:xfrm>
-            <a:off x="292608" y="475488"/>
-            <a:ext cx="8558784" cy="475488"/>
+            <a:off x="274320" y="466344"/>
+            <a:ext cx="8595360" cy="457200"/>
           </a:xfrm>
           <a:prstGeom prst="rect">
             <a:avLst/>
@@ -19080,7 +19377,7 @@
         </p:nvSpPr>
         <p:spPr>
           <a:xfrm>
-            <a:off x="292608" y="914400"/>
+            <a:off x="274320" y="886968"/>
             <a:ext cx="1143000" cy="50292"/>
           </a:xfrm>
           <a:prstGeom prst="rect">
@@ -19123,8 +19420,8 @@
         </p:nvSpPr>
         <p:spPr>
           <a:xfrm>
-            <a:off x="292608" y="1042416"/>
-            <a:ext cx="3767328" cy="3406139"/>
+            <a:off x="274320" y="996696"/>
+            <a:ext cx="3611880" cy="3451860"/>
           </a:xfrm>
           <a:prstGeom prst="rect">
             <a:avLst/>
@@ -19168,8 +19465,8 @@
         </p:nvSpPr>
         <p:spPr>
           <a:xfrm>
-            <a:off x="292608" y="1042416"/>
-            <a:ext cx="73152" cy="3406139"/>
+            <a:off x="274320" y="996696"/>
+            <a:ext cx="73152" cy="3451860"/>
           </a:xfrm>
           <a:prstGeom prst="rect">
             <a:avLst/>
@@ -19211,8 +19508,8 @@
         </p:nvSpPr>
         <p:spPr>
           <a:xfrm>
-            <a:off x="493776" y="1207008"/>
-            <a:ext cx="3456432" cy="3076956"/>
+            <a:off x="475488" y="1161288"/>
+            <a:ext cx="3300984" cy="3122676"/>
           </a:xfrm>
           <a:prstGeom prst="rect">
             <a:avLst/>
@@ -19230,7 +19527,7 @@
                 <a:spcPct val="120000"/>
               </a:lnSpc>
               <a:spcAft>
-                <a:spcPts val="3900"/>
+                <a:spcPts val="4000"/>
               </a:spcAft>
             </a:pPr>
             <a:r>
@@ -19250,7 +19547,7 @@
                 <a:spcPct val="120000"/>
               </a:lnSpc>
               <a:spcAft>
-                <a:spcPts val="3900"/>
+                <a:spcPts val="4000"/>
               </a:spcAft>
             </a:pPr>
             <a:r>
@@ -19270,7 +19567,7 @@
                 <a:spcPct val="120000"/>
               </a:lnSpc>
               <a:spcAft>
-                <a:spcPts val="3900"/>
+                <a:spcPts val="4000"/>
               </a:spcAft>
             </a:pPr>
             <a:r>
@@ -19290,7 +19587,7 @@
                 <a:spcPct val="120000"/>
               </a:lnSpc>
               <a:spcAft>
-                <a:spcPts val="3900"/>
+                <a:spcPts val="4000"/>
               </a:spcAft>
             </a:pPr>
             <a:r>
@@ -19310,7 +19607,7 @@
                 <a:spcPct val="120000"/>
               </a:lnSpc>
               <a:spcAft>
-                <a:spcPts val="3900"/>
+                <a:spcPts val="4000"/>
               </a:spcAft>
             </a:pPr>
             <a:r>
@@ -19334,8 +19631,8 @@
         </p:nvSpPr>
         <p:spPr>
           <a:xfrm>
-            <a:off x="4367733" y="1174592"/>
-            <a:ext cx="4377028" cy="3141786"/>
+            <a:off x="4208772" y="1005840"/>
+            <a:ext cx="4521215" cy="3835908"/>
           </a:xfrm>
           <a:prstGeom prst="rect">
             <a:avLst/>
@@ -19343,7 +19640,7 @@
           <a:solidFill>
             <a:srgbClr val="FFFFFF"/>
           </a:solidFill>
-          <a:ln w="12700">
+          <a:ln w="10160">
             <a:solidFill>
               <a:srgbClr val="BAC8DC"/>
             </a:solidFill>
@@ -19387,8 +19684,8 @@
         </p:blipFill>
         <p:spPr>
           <a:xfrm>
-            <a:off x="4440885" y="1247744"/>
-            <a:ext cx="4230724" cy="2794314"/>
+            <a:off x="4254492" y="1051560"/>
+            <a:ext cx="4429775" cy="3561588"/>
           </a:xfrm>
           <a:prstGeom prst="rect">
             <a:avLst/>
@@ -19403,8 +19700,8 @@
         </p:nvSpPr>
         <p:spPr>
           <a:xfrm>
-            <a:off x="4261104" y="4133499"/>
-            <a:ext cx="4590288" cy="201168"/>
+            <a:off x="4069080" y="4668012"/>
+            <a:ext cx="4800600" cy="182880"/>
           </a:xfrm>
           <a:prstGeom prst="rect">
             <a:avLst/>
@@ -19439,8 +19736,8 @@
         </p:nvSpPr>
         <p:spPr>
           <a:xfrm>
-            <a:off x="292608" y="4503420"/>
-            <a:ext cx="3767328" cy="329184"/>
+            <a:off x="274320" y="4539996"/>
+            <a:ext cx="3611880" cy="310896"/>
           </a:xfrm>
           <a:prstGeom prst="rect">
             <a:avLst/>
@@ -19482,8 +19779,8 @@
         </p:nvSpPr>
         <p:spPr>
           <a:xfrm>
-            <a:off x="402336" y="4567428"/>
-            <a:ext cx="3547872" cy="237744"/>
+            <a:off x="384048" y="4604004"/>
+            <a:ext cx="3392424" cy="219456"/>
           </a:xfrm>
           <a:prstGeom prst="rect">
             <a:avLst/>
@@ -19587,8 +19884,8 @@
         </p:nvSpPr>
         <p:spPr>
           <a:xfrm>
-            <a:off x="292608" y="54864"/>
-            <a:ext cx="8558784" cy="347472"/>
+            <a:off x="274320" y="54864"/>
+            <a:ext cx="8595360" cy="347472"/>
           </a:xfrm>
           <a:prstGeom prst="rect">
             <a:avLst/>
@@ -19665,8 +19962,8 @@
         </p:nvSpPr>
         <p:spPr>
           <a:xfrm>
-            <a:off x="292608" y="4951476"/>
-            <a:ext cx="8558784" cy="182880"/>
+            <a:off x="274320" y="4951476"/>
+            <a:ext cx="8595360" cy="182880"/>
           </a:xfrm>
           <a:prstGeom prst="rect">
             <a:avLst/>
@@ -19702,7 +19999,7 @@
         <p:spPr>
           <a:xfrm>
             <a:off x="0" y="420624"/>
-            <a:ext cx="5349240" cy="4411980"/>
+            <a:ext cx="4343400" cy="4430268"/>
           </a:xfrm>
           <a:prstGeom prst="rect">
             <a:avLst/>
@@ -19744,8 +20041,8 @@
         </p:nvSpPr>
         <p:spPr>
           <a:xfrm>
-            <a:off x="457200" y="1051560"/>
-            <a:ext cx="822960" cy="822960"/>
+            <a:off x="384048" y="740664"/>
+            <a:ext cx="658368" cy="658368"/>
           </a:xfrm>
           <a:prstGeom prst="ellipse">
             <a:avLst/>
@@ -19787,8 +20084,8 @@
         </p:nvSpPr>
         <p:spPr>
           <a:xfrm>
-            <a:off x="457200" y="1115568"/>
-            <a:ext cx="822960" cy="457200"/>
+            <a:off x="384048" y="804672"/>
+            <a:ext cx="658368" cy="411480"/>
           </a:xfrm>
           <a:prstGeom prst="rect">
             <a:avLst/>
@@ -19803,7 +20100,7 @@
           <a:p>
             <a:pPr algn="ctr"/>
             <a:r>
-              <a:rPr sz="2600" b="1">
+              <a:rPr sz="2200" b="1">
                 <a:solidFill>
                   <a:srgbClr val="FFFFFF"/>
                 </a:solidFill>
@@ -19823,8 +20120,8 @@
         </p:nvSpPr>
         <p:spPr>
           <a:xfrm>
-            <a:off x="411480" y="1965960"/>
-            <a:ext cx="4754880" cy="502920"/>
+            <a:off x="347472" y="1472184"/>
+            <a:ext cx="3840480" cy="457200"/>
           </a:xfrm>
           <a:prstGeom prst="rect">
             <a:avLst/>
@@ -19838,6 +20135,13 @@
           <a:lstStyle/>
           <a:p>
             <a:r>
+              <a:rPr sz="2400" b="1">
+                <a:solidFill>
+                  <a:srgbClr val="FFFFFF"/>
+                </a:solidFill>
+                <a:latin typeface="微软雅黑"/>
+                <ns3:rFonts xmlns:ns3="http://schemas.openxmlformats.org/wordprocessingml/2006/main" ns3:eastAsia="微软雅黑" ns3:ascii="微软雅黑" ns3:hAnsi="微软雅黑"/>
+              </a:rPr>
               <a:t>第二部分</a:t>
             </a:r>
           </a:p>
@@ -19851,8 +20155,8 @@
         </p:nvSpPr>
         <p:spPr>
           <a:xfrm>
-            <a:off x="438912" y="2514600"/>
-            <a:ext cx="4754880" cy="365760"/>
+            <a:off x="365760" y="1947672"/>
+            <a:ext cx="3840480" cy="347472"/>
           </a:xfrm>
           <a:prstGeom prst="rect">
             <a:avLst/>
@@ -19866,6 +20170,13 @@
           <a:lstStyle/>
           <a:p>
             <a:r>
+              <a:rPr sz="1200" b="0">
+                <a:solidFill>
+                  <a:srgbClr val="BFDBFE"/>
+                </a:solidFill>
+                <a:latin typeface="微软雅黑"/>
+                <ns4:rFonts xmlns:ns4="http://schemas.openxmlformats.org/wordprocessingml/2006/main" ns4:eastAsia="微软雅黑" ns4:ascii="微软雅黑" ns4:hAnsi="微软雅黑"/>
+              </a:rPr>
               <a:t>理论模型 · 算法设计 · 系统架构</a:t>
             </a:r>
           </a:p>
@@ -19873,97 +20184,25 @@
       </p:sp>
       <p:sp>
         <p:nvSpPr>
-          <p:cNvPr id="11" name="TextBox 10"/>
-          <p:cNvSpPr txBox="1"/>
-          <p:nvPr/>
-        </p:nvSpPr>
-        <p:spPr>
-          <a:xfrm>
-            <a:off x="475488" y="3063240"/>
-            <a:ext cx="4572000" cy="1463040"/>
-          </a:xfrm>
-          <a:prstGeom prst="rect">
-            <a:avLst/>
-          </a:prstGeom>
-          <a:noFill/>
-        </p:spPr>
-        <p:txBody>
-          <a:bodyPr wrap="none">
-            <a:spAutoFit/>
-          </a:bodyPr>
-          <a:lstStyle/>
-          <a:p>
-            <a:pPr>
-              <a:spcAft>
-                <a:spcPts val="1000"/>
-              </a:spcAft>
-            </a:pPr>
-            <a:r>
-              <a:rPr sz="1300" b="0">
-                <a:solidFill>
-                  <a:srgbClr val="E2E8F0"/>
-                </a:solidFill>
-                <a:latin typeface="微软雅黑"/>
-                <ns5:rFonts xmlns:ns5="http://schemas.openxmlformats.org/wordprocessingml/2006/main" ns5:eastAsia="微软雅黑" ns5:ascii="微软雅黑" ns5:hAnsi="微软雅黑"/>
-              </a:rPr>
-              <a:t>▸  四层架构</a:t>
-            </a:r>
-          </a:p>
-          <a:p>
-            <a:pPr>
-              <a:spcAft>
-                <a:spcPts val="1000"/>
-              </a:spcAft>
-            </a:pPr>
-            <a:r>
-              <a:rPr sz="1300" b="0">
-                <a:solidFill>
-                  <a:srgbClr val="E2E8F0"/>
-                </a:solidFill>
-                <a:latin typeface="微软雅黑"/>
-                <ns6:rFonts xmlns:ns6="http://schemas.openxmlformats.org/wordprocessingml/2006/main" ns6:eastAsia="微软雅黑" ns6:ascii="微软雅黑" ns6:hAnsi="微软雅黑"/>
-              </a:rPr>
-              <a:t>▸  风险融合</a:t>
-            </a:r>
-          </a:p>
-          <a:p>
-            <a:pPr>
-              <a:spcAft>
-                <a:spcPts val="1000"/>
-              </a:spcAft>
-            </a:pPr>
-            <a:r>
-              <a:rPr sz="1300" b="0">
-                <a:solidFill>
-                  <a:srgbClr val="E2E8F0"/>
-                </a:solidFill>
-                <a:latin typeface="微软雅黑"/>
-                <ns7:rFonts xmlns:ns7="http://schemas.openxmlformats.org/wordprocessingml/2006/main" ns7:eastAsia="微软雅黑" ns7:ascii="微软雅黑" ns7:hAnsi="微软雅黑"/>
-              </a:rPr>
-              <a:t>▸  应急链路</a:t>
-            </a:r>
-          </a:p>
-        </p:txBody>
-      </p:sp>
-      <p:sp>
-        <p:nvSpPr>
-          <p:cNvPr id="12" name="Rectangle 11"/>
+          <p:cNvPr id="11" name="Rectangle 10"/>
           <p:cNvSpPr/>
           <p:nvPr/>
         </p:nvSpPr>
         <p:spPr>
           <a:xfrm>
-            <a:off x="5349240" y="420624"/>
-            <a:ext cx="3794760" cy="4411980"/>
-          </a:xfrm>
-          <a:prstGeom prst="rect">
-            <a:avLst/>
-          </a:prstGeom>
-          <a:solidFill>
-            <a:srgbClr val="F1F7FF"/>
+            <a:off x="384048" y="2432304"/>
+            <a:ext cx="3657600" cy="384048"/>
+          </a:xfrm>
+          <a:prstGeom prst="rect">
+            <a:avLst/>
+          </a:prstGeom>
+          <a:solidFill>
+            <a:srgbClr val="1E4082"/>
           </a:solidFill>
           <a:ln>
-            <a:noFill/>
+            <a:solidFill>
+              <a:srgbClr val="648CC8"/>
+            </a:solidFill>
           </a:ln>
         </p:spPr>
         <p:style>
@@ -19990,24 +20229,59 @@
       </p:sp>
       <p:sp>
         <p:nvSpPr>
+          <p:cNvPr id="12" name="TextBox 11"/>
+          <p:cNvSpPr txBox="1"/>
+          <p:nvPr/>
+        </p:nvSpPr>
+        <p:spPr>
+          <a:xfrm>
+            <a:off x="502920" y="2505456"/>
+            <a:ext cx="3429000" cy="256032"/>
+          </a:xfrm>
+          <a:prstGeom prst="rect">
+            <a:avLst/>
+          </a:prstGeom>
+          <a:noFill/>
+        </p:spPr>
+        <p:txBody>
+          <a:bodyPr wrap="none">
+            <a:spAutoFit/>
+          </a:bodyPr>
+          <a:lstStyle/>
+          <a:p>
+            <a:r>
+              <a:rPr sz="1100" b="0">
+                <a:solidFill>
+                  <a:srgbClr val="E2E8F0"/>
+                </a:solidFill>
+                <a:latin typeface="微软雅黑"/>
+                <ns5:rFonts xmlns:ns5="http://schemas.openxmlformats.org/wordprocessingml/2006/main" ns5:eastAsia="微软雅黑" ns5:ascii="微软雅黑" ns5:hAnsi="微软雅黑"/>
+              </a:rPr>
+              <a:t>四层架构</a:t>
+            </a:r>
+          </a:p>
+        </p:txBody>
+      </p:sp>
+      <p:sp>
+        <p:nvSpPr>
           <p:cNvPr id="13" name="Rectangle 12"/>
           <p:cNvSpPr/>
           <p:nvPr/>
         </p:nvSpPr>
         <p:spPr>
           <a:xfrm>
-            <a:off x="5501259" y="1659310"/>
-            <a:ext cx="3490722" cy="2556398"/>
-          </a:xfrm>
-          <a:prstGeom prst="rect">
-            <a:avLst/>
-          </a:prstGeom>
-          <a:solidFill>
-            <a:srgbClr val="FFFFFF"/>
-          </a:solidFill>
-          <a:ln w="12700">
+            <a:off x="384048" y="2871216"/>
+            <a:ext cx="3657600" cy="384048"/>
+          </a:xfrm>
+          <a:prstGeom prst="rect">
+            <a:avLst/>
+          </a:prstGeom>
+          <a:solidFill>
+            <a:srgbClr val="1E4082"/>
+          </a:solidFill>
+          <a:ln>
             <a:solidFill>
-              <a:srgbClr val="BAC8DC"/>
+              <a:srgbClr val="648CC8"/>
             </a:solidFill>
           </a:ln>
         </p:spPr>
@@ -20033,9 +20307,167 @@
           </a:p>
         </p:txBody>
       </p:sp>
+      <p:sp>
+        <p:nvSpPr>
+          <p:cNvPr id="14" name="TextBox 13"/>
+          <p:cNvSpPr txBox="1"/>
+          <p:nvPr/>
+        </p:nvSpPr>
+        <p:spPr>
+          <a:xfrm>
+            <a:off x="502920" y="2944368"/>
+            <a:ext cx="3429000" cy="256032"/>
+          </a:xfrm>
+          <a:prstGeom prst="rect">
+            <a:avLst/>
+          </a:prstGeom>
+          <a:noFill/>
+        </p:spPr>
+        <p:txBody>
+          <a:bodyPr wrap="none">
+            <a:spAutoFit/>
+          </a:bodyPr>
+          <a:lstStyle/>
+          <a:p>
+            <a:r>
+              <a:rPr sz="1100" b="0">
+                <a:solidFill>
+                  <a:srgbClr val="E2E8F0"/>
+                </a:solidFill>
+                <a:latin typeface="微软雅黑"/>
+                <ns6:rFonts xmlns:ns6="http://schemas.openxmlformats.org/wordprocessingml/2006/main" ns6:eastAsia="微软雅黑" ns6:ascii="微软雅黑" ns6:hAnsi="微软雅黑"/>
+              </a:rPr>
+              <a:t>风险融合</a:t>
+            </a:r>
+          </a:p>
+        </p:txBody>
+      </p:sp>
+      <p:sp>
+        <p:nvSpPr>
+          <p:cNvPr id="15" name="Rectangle 14"/>
+          <p:cNvSpPr/>
+          <p:nvPr/>
+        </p:nvSpPr>
+        <p:spPr>
+          <a:xfrm>
+            <a:off x="384048" y="3310128"/>
+            <a:ext cx="3657600" cy="384048"/>
+          </a:xfrm>
+          <a:prstGeom prst="rect">
+            <a:avLst/>
+          </a:prstGeom>
+          <a:solidFill>
+            <a:srgbClr val="1E4082"/>
+          </a:solidFill>
+          <a:ln>
+            <a:solidFill>
+              <a:srgbClr val="648CC8"/>
+            </a:solidFill>
+          </a:ln>
+        </p:spPr>
+        <p:style>
+          <a:lnRef idx="1">
+            <a:schemeClr val="accent1"/>
+          </a:lnRef>
+          <a:fillRef idx="3">
+            <a:schemeClr val="accent1"/>
+          </a:fillRef>
+          <a:effectRef idx="2">
+            <a:schemeClr val="accent1"/>
+          </a:effectRef>
+          <a:fontRef idx="minor">
+            <a:schemeClr val="lt1"/>
+          </a:fontRef>
+        </p:style>
+        <p:txBody>
+          <a:bodyPr rtlCol="0" anchor="ctr"/>
+          <a:lstStyle/>
+          <a:p>
+            <a:pPr algn="ctr"/>
+          </a:p>
+        </p:txBody>
+      </p:sp>
+      <p:sp>
+        <p:nvSpPr>
+          <p:cNvPr id="16" name="TextBox 15"/>
+          <p:cNvSpPr txBox="1"/>
+          <p:nvPr/>
+        </p:nvSpPr>
+        <p:spPr>
+          <a:xfrm>
+            <a:off x="502920" y="3383280"/>
+            <a:ext cx="3429000" cy="256032"/>
+          </a:xfrm>
+          <a:prstGeom prst="rect">
+            <a:avLst/>
+          </a:prstGeom>
+          <a:noFill/>
+        </p:spPr>
+        <p:txBody>
+          <a:bodyPr wrap="none">
+            <a:spAutoFit/>
+          </a:bodyPr>
+          <a:lstStyle/>
+          <a:p>
+            <a:r>
+              <a:rPr sz="1100" b="0">
+                <a:solidFill>
+                  <a:srgbClr val="E2E8F0"/>
+                </a:solidFill>
+                <a:latin typeface="微软雅黑"/>
+                <ns7:rFonts xmlns:ns7="http://schemas.openxmlformats.org/wordprocessingml/2006/main" ns7:eastAsia="微软雅黑" ns7:ascii="微软雅黑" ns7:hAnsi="微软雅黑"/>
+              </a:rPr>
+              <a:t>应急链路</a:t>
+            </a:r>
+          </a:p>
+        </p:txBody>
+      </p:sp>
+      <p:sp>
+        <p:nvSpPr>
+          <p:cNvPr id="17" name="Rectangle 16"/>
+          <p:cNvSpPr/>
+          <p:nvPr/>
+        </p:nvSpPr>
+        <p:spPr>
+          <a:xfrm>
+            <a:off x="4343400" y="420624"/>
+            <a:ext cx="4800600" cy="4430268"/>
+          </a:xfrm>
+          <a:prstGeom prst="rect">
+            <a:avLst/>
+          </a:prstGeom>
+          <a:solidFill>
+            <a:srgbClr val="F1F7FF"/>
+          </a:solidFill>
+          <a:ln>
+            <a:noFill/>
+          </a:ln>
+        </p:spPr>
+        <p:style>
+          <a:lnRef idx="1">
+            <a:schemeClr val="accent1"/>
+          </a:lnRef>
+          <a:fillRef idx="3">
+            <a:schemeClr val="accent1"/>
+          </a:fillRef>
+          <a:effectRef idx="2">
+            <a:schemeClr val="accent1"/>
+          </a:effectRef>
+          <a:fontRef idx="minor">
+            <a:schemeClr val="lt1"/>
+          </a:fontRef>
+        </p:style>
+        <p:txBody>
+          <a:bodyPr rtlCol="0" anchor="ctr"/>
+          <a:lstStyle/>
+          <a:p>
+            <a:pPr algn="ctr"/>
+          </a:p>
+        </p:txBody>
+      </p:sp>
       <p:pic>
         <p:nvPicPr>
-          <p:cNvPr id="14" name="Picture 13" descr="state_machine.png"/>
+          <p:cNvPr id="18" name="Picture 17" descr="state_machine.png"/>
           <p:cNvPicPr>
             <a:picLocks noChangeAspect="1"/>
           </p:cNvPicPr>
@@ -20049,50 +20481,14 @@
         </p:blipFill>
         <p:spPr>
           <a:xfrm>
-            <a:off x="5574411" y="1732462"/>
-            <a:ext cx="3344418" cy="2208926"/>
+            <a:off x="4398264" y="1344335"/>
+            <a:ext cx="4690872" cy="3158916"/>
           </a:xfrm>
           <a:prstGeom prst="rect">
             <a:avLst/>
           </a:prstGeom>
         </p:spPr>
       </p:pic>
-      <p:sp>
-        <p:nvSpPr>
-          <p:cNvPr id="15" name="TextBox 14"/>
-          <p:cNvSpPr txBox="1"/>
-          <p:nvPr/>
-        </p:nvSpPr>
-        <p:spPr>
-          <a:xfrm>
-            <a:off x="5486400" y="4032829"/>
-            <a:ext cx="3520440" cy="201168"/>
-          </a:xfrm>
-          <a:prstGeom prst="rect">
-            <a:avLst/>
-          </a:prstGeom>
-          <a:noFill/>
-        </p:spPr>
-        <p:txBody>
-          <a:bodyPr wrap="none">
-            <a:spAutoFit/>
-          </a:bodyPr>
-          <a:lstStyle/>
-          <a:p>
-            <a:pPr algn="ctr"/>
-            <a:r>
-              <a:rPr sz="900" b="0">
-                <a:solidFill>
-                  <a:srgbClr val="5A6273"/>
-                </a:solidFill>
-                <a:latin typeface="微软雅黑"/>
-                <ns8:rFonts xmlns:ns8="http://schemas.openxmlformats.org/wordprocessingml/2006/main" ns8:eastAsia="微软雅黑" ns8:ascii="微软雅黑" ns8:hAnsi="微软雅黑"/>
-              </a:rPr>
-              <a:t>本章核心示意</a:t>
-            </a:r>
-          </a:p>
-        </p:txBody>
-      </p:sp>
     </p:spTree>
   </p:cSld>
   <p:clrMapOvr>
@@ -20170,8 +20566,8 @@
         </p:nvSpPr>
         <p:spPr>
           <a:xfrm>
-            <a:off x="292608" y="54864"/>
-            <a:ext cx="8558784" cy="347472"/>
+            <a:off x="274320" y="54864"/>
+            <a:ext cx="8595360" cy="347472"/>
           </a:xfrm>
           <a:prstGeom prst="rect">
             <a:avLst/>
@@ -20248,8 +20644,8 @@
         </p:nvSpPr>
         <p:spPr>
           <a:xfrm>
-            <a:off x="292608" y="4951476"/>
-            <a:ext cx="8558784" cy="182880"/>
+            <a:off x="274320" y="4951476"/>
+            <a:ext cx="8595360" cy="182880"/>
           </a:xfrm>
           <a:prstGeom prst="rect">
             <a:avLst/>
@@ -20284,8 +20680,8 @@
         </p:nvSpPr>
         <p:spPr>
           <a:xfrm>
-            <a:off x="292608" y="475488"/>
-            <a:ext cx="8558784" cy="475488"/>
+            <a:off x="274320" y="466344"/>
+            <a:ext cx="8595360" cy="457200"/>
           </a:xfrm>
           <a:prstGeom prst="rect">
             <a:avLst/>
@@ -20320,7 +20716,7 @@
         </p:nvSpPr>
         <p:spPr>
           <a:xfrm>
-            <a:off x="292608" y="914400"/>
+            <a:off x="274320" y="886968"/>
             <a:ext cx="1143000" cy="50292"/>
           </a:xfrm>
           <a:prstGeom prst="rect">
@@ -20363,8 +20759,8 @@
         </p:nvSpPr>
         <p:spPr>
           <a:xfrm>
-            <a:off x="292608" y="1042416"/>
-            <a:ext cx="3767328" cy="3406139"/>
+            <a:off x="274320" y="996696"/>
+            <a:ext cx="3611880" cy="3451860"/>
           </a:xfrm>
           <a:prstGeom prst="rect">
             <a:avLst/>
@@ -20408,8 +20804,8 @@
         </p:nvSpPr>
         <p:spPr>
           <a:xfrm>
-            <a:off x="292608" y="1042416"/>
-            <a:ext cx="73152" cy="3406139"/>
+            <a:off x="274320" y="996696"/>
+            <a:ext cx="73152" cy="3451860"/>
           </a:xfrm>
           <a:prstGeom prst="rect">
             <a:avLst/>
@@ -20451,8 +20847,8 @@
         </p:nvSpPr>
         <p:spPr>
           <a:xfrm>
-            <a:off x="493776" y="1207008"/>
-            <a:ext cx="3456432" cy="3076956"/>
+            <a:off x="475488" y="1161288"/>
+            <a:ext cx="3300984" cy="3122676"/>
           </a:xfrm>
           <a:prstGeom prst="rect">
             <a:avLst/>
@@ -20470,7 +20866,7 @@
                 <a:spcPct val="120000"/>
               </a:lnSpc>
               <a:spcAft>
-                <a:spcPts val="5800"/>
+                <a:spcPts val="5900"/>
               </a:spcAft>
             </a:pPr>
             <a:r>
@@ -20490,7 +20886,7 @@
                 <a:spcPct val="120000"/>
               </a:lnSpc>
               <a:spcAft>
-                <a:spcPts val="5800"/>
+                <a:spcPts val="5900"/>
               </a:spcAft>
             </a:pPr>
             <a:r>
@@ -20510,7 +20906,7 @@
                 <a:spcPct val="120000"/>
               </a:lnSpc>
               <a:spcAft>
-                <a:spcPts val="5800"/>
+                <a:spcPts val="5900"/>
               </a:spcAft>
             </a:pPr>
             <a:r>
@@ -20530,7 +20926,7 @@
                 <a:spcPct val="120000"/>
               </a:lnSpc>
               <a:spcAft>
-                <a:spcPts val="5800"/>
+                <a:spcPts val="5900"/>
               </a:spcAft>
             </a:pPr>
             <a:r>
@@ -20554,8 +20950,8 @@
         </p:nvSpPr>
         <p:spPr>
           <a:xfrm>
-            <a:off x="4367733" y="1174592"/>
-            <a:ext cx="4377028" cy="3141786"/>
+            <a:off x="4208772" y="1005840"/>
+            <a:ext cx="4521215" cy="3835908"/>
           </a:xfrm>
           <a:prstGeom prst="rect">
             <a:avLst/>
@@ -20563,7 +20959,7 @@
           <a:solidFill>
             <a:srgbClr val="FFFFFF"/>
           </a:solidFill>
-          <a:ln w="12700">
+          <a:ln w="10160">
             <a:solidFill>
               <a:srgbClr val="BAC8DC"/>
             </a:solidFill>
@@ -20607,8 +21003,8 @@
         </p:blipFill>
         <p:spPr>
           <a:xfrm>
-            <a:off x="4440885" y="1247744"/>
-            <a:ext cx="4230724" cy="2794314"/>
+            <a:off x="4254492" y="1051560"/>
+            <a:ext cx="4429775" cy="3561588"/>
           </a:xfrm>
           <a:prstGeom prst="rect">
             <a:avLst/>
@@ -20623,8 +21019,8 @@
         </p:nvSpPr>
         <p:spPr>
           <a:xfrm>
-            <a:off x="4261104" y="4133499"/>
-            <a:ext cx="4590288" cy="201168"/>
+            <a:off x="4069080" y="4668012"/>
+            <a:ext cx="4800600" cy="182880"/>
           </a:xfrm>
           <a:prstGeom prst="rect">
             <a:avLst/>
@@ -20659,8 +21055,8 @@
         </p:nvSpPr>
         <p:spPr>
           <a:xfrm>
-            <a:off x="292608" y="4503420"/>
-            <a:ext cx="3767328" cy="329184"/>
+            <a:off x="274320" y="4539996"/>
+            <a:ext cx="3611880" cy="310896"/>
           </a:xfrm>
           <a:prstGeom prst="rect">
             <a:avLst/>
@@ -20702,8 +21098,8 @@
         </p:nvSpPr>
         <p:spPr>
           <a:xfrm>
-            <a:off x="402336" y="4567428"/>
-            <a:ext cx="3547872" cy="237744"/>
+            <a:off x="384048" y="4604004"/>
+            <a:ext cx="3392424" cy="219456"/>
           </a:xfrm>
           <a:prstGeom prst="rect">
             <a:avLst/>

--- a/docs/答辩_CareCompanion.pptx
+++ b/docs/答辩_CareCompanion.pptx
@@ -4064,8 +4064,8 @@
         </p:nvSpPr>
         <p:spPr>
           <a:xfrm>
-            <a:off x="475488" y="1161288"/>
-            <a:ext cx="3300984" cy="3525012"/>
+            <a:off x="475488" y="1143000"/>
+            <a:ext cx="3300984" cy="3579876"/>
           </a:xfrm>
           <a:prstGeom prst="rect">
             <a:avLst/>
@@ -4083,7 +4083,7 @@
                 <a:spcPct val="120000"/>
               </a:lnSpc>
               <a:spcAft>
-                <a:spcPts val="6900"/>
+                <a:spcPts val="7100"/>
               </a:spcAft>
             </a:pPr>
             <a:r>
@@ -4103,7 +4103,7 @@
                 <a:spcPct val="120000"/>
               </a:lnSpc>
               <a:spcAft>
-                <a:spcPts val="6900"/>
+                <a:spcPts val="7100"/>
               </a:spcAft>
             </a:pPr>
             <a:r>
@@ -4123,7 +4123,7 @@
                 <a:spcPct val="120000"/>
               </a:lnSpc>
               <a:spcAft>
-                <a:spcPts val="6900"/>
+                <a:spcPts val="7100"/>
               </a:spcAft>
             </a:pPr>
             <a:r>
@@ -4143,7 +4143,7 @@
                 <a:spcPct val="120000"/>
               </a:lnSpc>
               <a:spcAft>
-                <a:spcPts val="6900"/>
+                <a:spcPts val="7100"/>
               </a:spcAft>
             </a:pPr>
             <a:r>
@@ -4622,8 +4622,8 @@
         </p:nvSpPr>
         <p:spPr>
           <a:xfrm>
-            <a:off x="475488" y="1161288"/>
-            <a:ext cx="3300984" cy="3525012"/>
+            <a:off x="475488" y="1143000"/>
+            <a:ext cx="3300984" cy="3579876"/>
           </a:xfrm>
           <a:prstGeom prst="rect">
             <a:avLst/>
@@ -4641,7 +4641,7 @@
                 <a:spcPct val="120000"/>
               </a:lnSpc>
               <a:spcAft>
-                <a:spcPts val="6900"/>
+                <a:spcPts val="7100"/>
               </a:spcAft>
             </a:pPr>
             <a:r>
@@ -4661,7 +4661,7 @@
                 <a:spcPct val="120000"/>
               </a:lnSpc>
               <a:spcAft>
-                <a:spcPts val="6900"/>
+                <a:spcPts val="7100"/>
               </a:spcAft>
             </a:pPr>
             <a:r>
@@ -4681,7 +4681,7 @@
                 <a:spcPct val="120000"/>
               </a:lnSpc>
               <a:spcAft>
-                <a:spcPts val="6900"/>
+                <a:spcPts val="7100"/>
               </a:spcAft>
             </a:pPr>
             <a:r>
@@ -4701,7 +4701,7 @@
                 <a:spcPct val="120000"/>
               </a:lnSpc>
               <a:spcAft>
-                <a:spcPts val="6900"/>
+                <a:spcPts val="7100"/>
               </a:spcAft>
             </a:pPr>
             <a:r>
@@ -5180,8 +5180,8 @@
         </p:nvSpPr>
         <p:spPr>
           <a:xfrm>
-            <a:off x="475488" y="1161288"/>
-            <a:ext cx="3300984" cy="3525012"/>
+            <a:off x="475488" y="1143000"/>
+            <a:ext cx="3300984" cy="3579876"/>
           </a:xfrm>
           <a:prstGeom prst="rect">
             <a:avLst/>
@@ -5199,7 +5199,7 @@
                 <a:spcPct val="120000"/>
               </a:lnSpc>
               <a:spcAft>
-                <a:spcPts val="6900"/>
+                <a:spcPts val="7100"/>
               </a:spcAft>
             </a:pPr>
             <a:r>
@@ -5219,7 +5219,7 @@
                 <a:spcPct val="120000"/>
               </a:lnSpc>
               <a:spcAft>
-                <a:spcPts val="6900"/>
+                <a:spcPts val="7100"/>
               </a:spcAft>
             </a:pPr>
             <a:r>
@@ -5239,7 +5239,7 @@
                 <a:spcPct val="120000"/>
               </a:lnSpc>
               <a:spcAft>
-                <a:spcPts val="6900"/>
+                <a:spcPts val="7100"/>
               </a:spcAft>
             </a:pPr>
             <a:r>
@@ -5259,7 +5259,7 @@
                 <a:spcPct val="120000"/>
               </a:lnSpc>
               <a:spcAft>
-                <a:spcPts val="6900"/>
+                <a:spcPts val="7100"/>
               </a:spcAft>
             </a:pPr>
             <a:r>
@@ -5738,8 +5738,8 @@
         </p:nvSpPr>
         <p:spPr>
           <a:xfrm>
-            <a:off x="475488" y="1161288"/>
-            <a:ext cx="3300984" cy="3525012"/>
+            <a:off x="475488" y="1143000"/>
+            <a:ext cx="3300984" cy="3579876"/>
           </a:xfrm>
           <a:prstGeom prst="rect">
             <a:avLst/>
@@ -5757,7 +5757,7 @@
                 <a:spcPct val="120000"/>
               </a:lnSpc>
               <a:spcAft>
-                <a:spcPts val="6900"/>
+                <a:spcPts val="7100"/>
               </a:spcAft>
             </a:pPr>
             <a:r>
@@ -5777,7 +5777,7 @@
                 <a:spcPct val="120000"/>
               </a:lnSpc>
               <a:spcAft>
-                <a:spcPts val="6900"/>
+                <a:spcPts val="7100"/>
               </a:spcAft>
             </a:pPr>
             <a:r>
@@ -5797,7 +5797,7 @@
                 <a:spcPct val="120000"/>
               </a:lnSpc>
               <a:spcAft>
-                <a:spcPts val="6900"/>
+                <a:spcPts val="7100"/>
               </a:spcAft>
             </a:pPr>
             <a:r>
@@ -5817,7 +5817,7 @@
                 <a:spcPct val="120000"/>
               </a:lnSpc>
               <a:spcAft>
-                <a:spcPts val="6900"/>
+                <a:spcPts val="7100"/>
               </a:spcAft>
             </a:pPr>
             <a:r>
@@ -6296,8 +6296,8 @@
         </p:nvSpPr>
         <p:spPr>
           <a:xfrm>
-            <a:off x="475488" y="1161288"/>
-            <a:ext cx="3300984" cy="3525012"/>
+            <a:off x="475488" y="1143000"/>
+            <a:ext cx="3300984" cy="3579876"/>
           </a:xfrm>
           <a:prstGeom prst="rect">
             <a:avLst/>
@@ -6315,7 +6315,7 @@
                 <a:spcPct val="120000"/>
               </a:lnSpc>
               <a:spcAft>
-                <a:spcPts val="6900"/>
+                <a:spcPts val="7100"/>
               </a:spcAft>
             </a:pPr>
             <a:r>
@@ -6335,7 +6335,7 @@
                 <a:spcPct val="120000"/>
               </a:lnSpc>
               <a:spcAft>
-                <a:spcPts val="6900"/>
+                <a:spcPts val="7100"/>
               </a:spcAft>
             </a:pPr>
             <a:r>
@@ -6355,7 +6355,7 @@
                 <a:spcPct val="120000"/>
               </a:lnSpc>
               <a:spcAft>
-                <a:spcPts val="6900"/>
+                <a:spcPts val="7100"/>
               </a:spcAft>
             </a:pPr>
             <a:r>
@@ -6375,7 +6375,7 @@
                 <a:spcPct val="120000"/>
               </a:lnSpc>
               <a:spcAft>
-                <a:spcPts val="6900"/>
+                <a:spcPts val="7100"/>
               </a:spcAft>
             </a:pPr>
             <a:r>
@@ -6767,7 +6767,7 @@
         <p:spPr>
           <a:xfrm>
             <a:off x="274320" y="996696"/>
-            <a:ext cx="3611880" cy="3451860"/>
+            <a:ext cx="3611880" cy="3854196"/>
           </a:xfrm>
           <a:prstGeom prst="rect">
             <a:avLst/>
@@ -6812,7 +6812,7 @@
         <p:spPr>
           <a:xfrm>
             <a:off x="274320" y="996696"/>
-            <a:ext cx="73152" cy="3451860"/>
+            <a:ext cx="73152" cy="3854196"/>
           </a:xfrm>
           <a:prstGeom prst="rect">
             <a:avLst/>
@@ -6848,14 +6848,93 @@
       </p:sp>
       <p:sp>
         <p:nvSpPr>
-          <p:cNvPr id="10" name="TextBox 9"/>
+          <p:cNvPr id="10" name="Rectangle 9"/>
+          <p:cNvSpPr/>
+          <p:nvPr/>
+        </p:nvSpPr>
+        <p:spPr>
+          <a:xfrm>
+            <a:off x="347472" y="4503420"/>
+            <a:ext cx="3465576" cy="310896"/>
+          </a:xfrm>
+          <a:prstGeom prst="rect">
+            <a:avLst/>
+          </a:prstGeom>
+          <a:solidFill>
+            <a:srgbClr val="143278"/>
+          </a:solidFill>
+          <a:ln>
+            <a:noFill/>
+          </a:ln>
+        </p:spPr>
+        <p:style>
+          <a:lnRef idx="1">
+            <a:schemeClr val="accent1"/>
+          </a:lnRef>
+          <a:fillRef idx="3">
+            <a:schemeClr val="accent1"/>
+          </a:fillRef>
+          <a:effectRef idx="2">
+            <a:schemeClr val="accent1"/>
+          </a:effectRef>
+          <a:fontRef idx="minor">
+            <a:schemeClr val="lt1"/>
+          </a:fontRef>
+        </p:style>
+        <p:txBody>
+          <a:bodyPr rtlCol="0" anchor="ctr"/>
+          <a:lstStyle/>
+          <a:p>
+            <a:pPr algn="ctr"/>
+          </a:p>
+        </p:txBody>
+      </p:sp>
+      <p:sp>
+        <p:nvSpPr>
+          <p:cNvPr id="11" name="TextBox 10"/>
           <p:cNvSpPr txBox="1"/>
           <p:nvPr/>
         </p:nvSpPr>
         <p:spPr>
           <a:xfrm>
-            <a:off x="475488" y="1161288"/>
-            <a:ext cx="3300984" cy="3122676"/>
+            <a:off x="402336" y="4576572"/>
+            <a:ext cx="3355848" cy="237744"/>
+          </a:xfrm>
+          <a:prstGeom prst="rect">
+            <a:avLst/>
+          </a:prstGeom>
+          <a:noFill/>
+        </p:spPr>
+        <p:txBody>
+          <a:bodyPr wrap="none">
+            <a:spAutoFit/>
+          </a:bodyPr>
+          <a:lstStyle/>
+          <a:p>
+            <a:pPr algn="ctr"/>
+            <a:r>
+              <a:rPr sz="1100" b="1">
+                <a:solidFill>
+                  <a:srgbClr val="FFFFFF"/>
+                </a:solidFill>
+                <a:latin typeface="微软雅黑"/>
+                <ns3:rFonts xmlns:ns3="http://schemas.openxmlformats.org/wordprocessingml/2006/main" ns3:eastAsia="微软雅黑" ns3:ascii="微软雅黑" ns3:hAnsi="微软雅黑"/>
+              </a:rPr>
+              <a:t>紧急链路可端到端验证</a:t>
+            </a:r>
+          </a:p>
+        </p:txBody>
+      </p:sp>
+      <p:sp>
+        <p:nvSpPr>
+          <p:cNvPr id="12" name="TextBox 11"/>
+          <p:cNvSpPr txBox="1"/>
+          <p:nvPr/>
+        </p:nvSpPr>
+        <p:spPr>
+          <a:xfrm>
+            <a:off x="475488" y="1143000"/>
+            <a:ext cx="3300984" cy="3232404"/>
           </a:xfrm>
           <a:prstGeom prst="rect">
             <a:avLst/>
@@ -6873,7 +6952,7 @@
                 <a:spcPct val="120000"/>
               </a:lnSpc>
               <a:spcAft>
-                <a:spcPts val="5900"/>
+                <a:spcPts val="6200"/>
               </a:spcAft>
             </a:pPr>
             <a:r>
@@ -6882,7 +6961,7 @@
                   <a:srgbClr val="1C202C"/>
                 </a:solidFill>
                 <a:latin typeface="微软雅黑"/>
-                <ns3:rFonts xmlns:ns3="http://schemas.openxmlformats.org/wordprocessingml/2006/main" ns3:eastAsia="微软雅黑" ns3:ascii="微软雅黑" ns3:hAnsi="微软雅黑"/>
+                <ns4:rFonts xmlns:ns4="http://schemas.openxmlformats.org/wordprocessingml/2006/main" ns4:eastAsia="微软雅黑" ns4:ascii="微软雅黑" ns4:hAnsi="微软雅黑"/>
               </a:rPr>
               <a:t>● 确认跌倒后按序触发四类动作</a:t>
             </a:r>
@@ -6893,7 +6972,7 @@
                 <a:spcPct val="120000"/>
               </a:lnSpc>
               <a:spcAft>
-                <a:spcPts val="5900"/>
+                <a:spcPts val="6200"/>
               </a:spcAft>
             </a:pPr>
             <a:r>
@@ -6902,7 +6981,7 @@
                   <a:srgbClr val="1C202C"/>
                 </a:solidFill>
                 <a:latin typeface="微软雅黑"/>
-                <ns4:rFonts xmlns:ns4="http://schemas.openxmlformats.org/wordprocessingml/2006/main" ns4:eastAsia="微软雅黑" ns4:ascii="微软雅黑" ns4:hAnsi="微软雅黑"/>
+                <ns5:rFonts xmlns:ns5="http://schemas.openxmlformats.org/wordprocessingml/2006/main" ns5:eastAsia="微软雅黑" ns5:ascii="微软雅黑" ns5:hAnsi="微软雅黑"/>
               </a:rPr>
               <a:t>● 告警音 → 语音 → 家属通知 → 手势</a:t>
             </a:r>
@@ -6913,7 +6992,7 @@
                 <a:spcPct val="120000"/>
               </a:lnSpc>
               <a:spcAft>
-                <a:spcPts val="5900"/>
+                <a:spcPts val="6200"/>
               </a:spcAft>
             </a:pPr>
             <a:r>
@@ -6922,7 +7001,7 @@
                   <a:srgbClr val="1C202C"/>
                 </a:solidFill>
                 <a:latin typeface="微软雅黑"/>
-                <ns5:rFonts xmlns:ns5="http://schemas.openxmlformats.org/wordprocessingml/2006/main" ns5:eastAsia="微软雅黑" ns5:ascii="微软雅黑" ns5:hAnsi="微软雅黑"/>
+                <ns6:rFonts xmlns:ns6="http://schemas.openxmlformats.org/wordprocessingml/2006/main" ns6:eastAsia="微软雅黑" ns6:ascii="微软雅黑" ns6:hAnsi="微软雅黑"/>
               </a:rPr>
               <a:t>● EmergencyNotifier 记录推送渠道</a:t>
             </a:r>
@@ -6933,7 +7012,7 @@
                 <a:spcPct val="120000"/>
               </a:lnSpc>
               <a:spcAft>
-                <a:spcPts val="5900"/>
+                <a:spcPts val="6200"/>
               </a:spcAft>
             </a:pPr>
             <a:r>
@@ -6942,7 +7021,7 @@
                   <a:srgbClr val="1C202C"/>
                 </a:solidFill>
                 <a:latin typeface="微软雅黑"/>
-                <ns6:rFonts xmlns:ns6="http://schemas.openxmlformats.org/wordprocessingml/2006/main" ns6:eastAsia="微软雅黑" ns6:ascii="微软雅黑" ns6:hAnsi="微软雅黑"/>
+                <ns7:rFonts xmlns:ns7="http://schemas.openxmlformats.org/wordprocessingml/2006/main" ns7:eastAsia="微软雅黑" ns7:ascii="微软雅黑" ns7:hAnsi="微软雅黑"/>
               </a:rPr>
               <a:t>● 端到端触发率评测 100%</a:t>
             </a:r>
@@ -6951,7 +7030,7 @@
       </p:sp>
       <p:sp>
         <p:nvSpPr>
-          <p:cNvPr id="11" name="Rectangle 10"/>
+          <p:cNvPr id="13" name="Rectangle 12"/>
           <p:cNvSpPr/>
           <p:nvPr/>
         </p:nvSpPr>
@@ -6996,7 +7075,7 @@
       </p:sp>
       <p:pic>
         <p:nvPicPr>
-          <p:cNvPr id="12" name="Picture 11" descr="emergency_flow.png"/>
+          <p:cNvPr id="14" name="Picture 13" descr="emergency_flow.png"/>
           <p:cNvPicPr>
             <a:picLocks noChangeAspect="1"/>
           </p:cNvPicPr>
@@ -7020,7 +7099,7 @@
       </p:pic>
       <p:sp>
         <p:nvSpPr>
-          <p:cNvPr id="13" name="TextBox 12"/>
+          <p:cNvPr id="15" name="TextBox 14"/>
           <p:cNvSpPr txBox="1"/>
           <p:nvPr/>
         </p:nvSpPr>
@@ -7047,88 +7126,9 @@
                   <a:srgbClr val="5A6273"/>
                 </a:solidFill>
                 <a:latin typeface="微软雅黑"/>
-                <ns7:rFonts xmlns:ns7="http://schemas.openxmlformats.org/wordprocessingml/2006/main" ns7:eastAsia="微软雅黑" ns7:ascii="微软雅黑" ns7:hAnsi="微软雅黑"/>
+                <ns8:rFonts xmlns:ns8="http://schemas.openxmlformats.org/wordprocessingml/2006/main" ns8:eastAsia="微软雅黑" ns8:ascii="微软雅黑" ns8:hAnsi="微软雅黑"/>
               </a:rPr>
               <a:t>理论框图</a:t>
-            </a:r>
-          </a:p>
-        </p:txBody>
-      </p:sp>
-      <p:sp>
-        <p:nvSpPr>
-          <p:cNvPr id="14" name="Rectangle 13"/>
-          <p:cNvSpPr/>
-          <p:nvPr/>
-        </p:nvSpPr>
-        <p:spPr>
-          <a:xfrm>
-            <a:off x="274320" y="4539996"/>
-            <a:ext cx="3611880" cy="310896"/>
-          </a:xfrm>
-          <a:prstGeom prst="rect">
-            <a:avLst/>
-          </a:prstGeom>
-          <a:solidFill>
-            <a:srgbClr val="143278"/>
-          </a:solidFill>
-          <a:ln>
-            <a:noFill/>
-          </a:ln>
-        </p:spPr>
-        <p:style>
-          <a:lnRef idx="1">
-            <a:schemeClr val="accent1"/>
-          </a:lnRef>
-          <a:fillRef idx="3">
-            <a:schemeClr val="accent1"/>
-          </a:fillRef>
-          <a:effectRef idx="2">
-            <a:schemeClr val="accent1"/>
-          </a:effectRef>
-          <a:fontRef idx="minor">
-            <a:schemeClr val="lt1"/>
-          </a:fontRef>
-        </p:style>
-        <p:txBody>
-          <a:bodyPr rtlCol="0" anchor="ctr"/>
-          <a:lstStyle/>
-          <a:p>
-            <a:pPr algn="ctr"/>
-          </a:p>
-        </p:txBody>
-      </p:sp>
-      <p:sp>
-        <p:nvSpPr>
-          <p:cNvPr id="15" name="TextBox 14"/>
-          <p:cNvSpPr txBox="1"/>
-          <p:nvPr/>
-        </p:nvSpPr>
-        <p:spPr>
-          <a:xfrm>
-            <a:off x="384048" y="4604004"/>
-            <a:ext cx="3392424" cy="219456"/>
-          </a:xfrm>
-          <a:prstGeom prst="rect">
-            <a:avLst/>
-          </a:prstGeom>
-          <a:noFill/>
-        </p:spPr>
-        <p:txBody>
-          <a:bodyPr wrap="none">
-            <a:spAutoFit/>
-          </a:bodyPr>
-          <a:lstStyle/>
-          <a:p>
-            <a:pPr algn="ctr"/>
-            <a:r>
-              <a:rPr sz="1100" b="1">
-                <a:solidFill>
-                  <a:srgbClr val="FFFFFF"/>
-                </a:solidFill>
-                <a:latin typeface="微软雅黑"/>
-                <ns8:rFonts xmlns:ns8="http://schemas.openxmlformats.org/wordprocessingml/2006/main" ns8:eastAsia="微软雅黑" ns8:ascii="微软雅黑" ns8:hAnsi="微软雅黑"/>
-              </a:rPr>
-              <a:t>紧急链路可端到端验证</a:t>
             </a:r>
           </a:p>
         </p:txBody>
@@ -8173,8 +8173,8 @@
         </p:nvSpPr>
         <p:spPr>
           <a:xfrm>
-            <a:off x="475488" y="1161288"/>
-            <a:ext cx="3300984" cy="3525012"/>
+            <a:off x="475488" y="1143000"/>
+            <a:ext cx="3300984" cy="3579876"/>
           </a:xfrm>
           <a:prstGeom prst="rect">
             <a:avLst/>
@@ -8192,7 +8192,7 @@
                 <a:spcPct val="120000"/>
               </a:lnSpc>
               <a:spcAft>
-                <a:spcPts val="6900"/>
+                <a:spcPts val="7100"/>
               </a:spcAft>
             </a:pPr>
             <a:r>
@@ -8212,7 +8212,7 @@
                 <a:spcPct val="120000"/>
               </a:lnSpc>
               <a:spcAft>
-                <a:spcPts val="6900"/>
+                <a:spcPts val="7100"/>
               </a:spcAft>
             </a:pPr>
             <a:r>
@@ -8232,7 +8232,7 @@
                 <a:spcPct val="120000"/>
               </a:lnSpc>
               <a:spcAft>
-                <a:spcPts val="6900"/>
+                <a:spcPts val="7100"/>
               </a:spcAft>
             </a:pPr>
             <a:r>
@@ -8252,7 +8252,7 @@
                 <a:spcPct val="120000"/>
               </a:lnSpc>
               <a:spcAft>
-                <a:spcPts val="6900"/>
+                <a:spcPts val="7100"/>
               </a:spcAft>
             </a:pPr>
             <a:r>
@@ -9378,7 +9378,7 @@
         <p:spPr>
           <a:xfrm>
             <a:off x="274320" y="996696"/>
-            <a:ext cx="3611880" cy="3451860"/>
+            <a:ext cx="3611880" cy="3854196"/>
           </a:xfrm>
           <a:prstGeom prst="rect">
             <a:avLst/>
@@ -9423,7 +9423,7 @@
         <p:spPr>
           <a:xfrm>
             <a:off x="274320" y="996696"/>
-            <a:ext cx="73152" cy="3451860"/>
+            <a:ext cx="73152" cy="3854196"/>
           </a:xfrm>
           <a:prstGeom prst="rect">
             <a:avLst/>
@@ -9459,14 +9459,93 @@
       </p:sp>
       <p:sp>
         <p:nvSpPr>
-          <p:cNvPr id="10" name="TextBox 9"/>
+          <p:cNvPr id="10" name="Rectangle 9"/>
+          <p:cNvSpPr/>
+          <p:nvPr/>
+        </p:nvSpPr>
+        <p:spPr>
+          <a:xfrm>
+            <a:off x="347472" y="4503420"/>
+            <a:ext cx="3465576" cy="310896"/>
+          </a:xfrm>
+          <a:prstGeom prst="rect">
+            <a:avLst/>
+          </a:prstGeom>
+          <a:solidFill>
+            <a:srgbClr val="143278"/>
+          </a:solidFill>
+          <a:ln>
+            <a:noFill/>
+          </a:ln>
+        </p:spPr>
+        <p:style>
+          <a:lnRef idx="1">
+            <a:schemeClr val="accent1"/>
+          </a:lnRef>
+          <a:fillRef idx="3">
+            <a:schemeClr val="accent1"/>
+          </a:fillRef>
+          <a:effectRef idx="2">
+            <a:schemeClr val="accent1"/>
+          </a:effectRef>
+          <a:fontRef idx="minor">
+            <a:schemeClr val="lt1"/>
+          </a:fontRef>
+        </p:style>
+        <p:txBody>
+          <a:bodyPr rtlCol="0" anchor="ctr"/>
+          <a:lstStyle/>
+          <a:p>
+            <a:pPr algn="ctr"/>
+          </a:p>
+        </p:txBody>
+      </p:sp>
+      <p:sp>
+        <p:nvSpPr>
+          <p:cNvPr id="11" name="TextBox 10"/>
           <p:cNvSpPr txBox="1"/>
           <p:nvPr/>
         </p:nvSpPr>
         <p:spPr>
           <a:xfrm>
-            <a:off x="475488" y="1161288"/>
-            <a:ext cx="3300984" cy="3122676"/>
+            <a:off x="402336" y="4576572"/>
+            <a:ext cx="3355848" cy="237744"/>
+          </a:xfrm>
+          <a:prstGeom prst="rect">
+            <a:avLst/>
+          </a:prstGeom>
+          <a:noFill/>
+        </p:spPr>
+        <p:txBody>
+          <a:bodyPr wrap="none">
+            <a:spAutoFit/>
+          </a:bodyPr>
+          <a:lstStyle/>
+          <a:p>
+            <a:pPr algn="ctr"/>
+            <a:r>
+              <a:rPr sz="1100" b="1">
+                <a:solidFill>
+                  <a:srgbClr val="FFFFFF"/>
+                </a:solidFill>
+                <a:latin typeface="微软雅黑"/>
+                <ns3:rFonts xmlns:ns3="http://schemas.openxmlformats.org/wordprocessingml/2006/main" ns3:eastAsia="微软雅黑" ns3:ascii="微软雅黑" ns3:hAnsi="微软雅黑"/>
+              </a:rPr>
+              <a:t>理论 + 工程 + 现场演示</a:t>
+            </a:r>
+          </a:p>
+        </p:txBody>
+      </p:sp>
+      <p:sp>
+        <p:nvSpPr>
+          <p:cNvPr id="12" name="TextBox 11"/>
+          <p:cNvSpPr txBox="1"/>
+          <p:nvPr/>
+        </p:nvSpPr>
+        <p:spPr>
+          <a:xfrm>
+            <a:off x="475488" y="1143000"/>
+            <a:ext cx="3300984" cy="3232404"/>
           </a:xfrm>
           <a:prstGeom prst="rect">
             <a:avLst/>
@@ -9484,7 +9563,7 @@
                 <a:spcPct val="120000"/>
               </a:lnSpc>
               <a:spcAft>
-                <a:spcPts val="4000"/>
+                <a:spcPts val="4200"/>
               </a:spcAft>
             </a:pPr>
             <a:r>
@@ -9493,7 +9572,7 @@
                   <a:srgbClr val="1C202C"/>
                 </a:solidFill>
                 <a:latin typeface="微软雅黑"/>
-                <ns3:rFonts xmlns:ns3="http://schemas.openxmlformats.org/wordprocessingml/2006/main" ns3:eastAsia="微软雅黑" ns3:ascii="微软雅黑" ns3:hAnsi="微软雅黑"/>
+                <ns4:rFonts xmlns:ns4="http://schemas.openxmlformats.org/wordprocessingml/2006/main" ns4:eastAsia="微软雅黑" ns4:ascii="微软雅黑" ns4:hAnsi="微软雅黑"/>
               </a:rPr>
               <a:t>● 第一部分  项目背景与需求分析</a:t>
             </a:r>
@@ -9504,7 +9583,7 @@
                 <a:spcPct val="120000"/>
               </a:lnSpc>
               <a:spcAft>
-                <a:spcPts val="4000"/>
+                <a:spcPts val="4200"/>
               </a:spcAft>
             </a:pPr>
             <a:r>
@@ -9513,7 +9592,7 @@
                   <a:srgbClr val="1C202C"/>
                 </a:solidFill>
                 <a:latin typeface="微软雅黑"/>
-                <ns4:rFonts xmlns:ns4="http://schemas.openxmlformats.org/wordprocessingml/2006/main" ns4:eastAsia="微软雅黑" ns4:ascii="微软雅黑" ns4:hAnsi="微软雅黑"/>
+                <ns5:rFonts xmlns:ns5="http://schemas.openxmlformats.org/wordprocessingml/2006/main" ns5:eastAsia="微软雅黑" ns5:ascii="微软雅黑" ns5:hAnsi="微软雅黑"/>
               </a:rPr>
               <a:t>● 第二部分  关键技术与理论模型</a:t>
             </a:r>
@@ -9524,7 +9603,7 @@
                 <a:spcPct val="120000"/>
               </a:lnSpc>
               <a:spcAft>
-                <a:spcPts val="4000"/>
+                <a:spcPts val="4200"/>
               </a:spcAft>
             </a:pPr>
             <a:r>
@@ -9533,7 +9612,7 @@
                   <a:srgbClr val="1C202C"/>
                 </a:solidFill>
                 <a:latin typeface="微软雅黑"/>
-                <ns5:rFonts xmlns:ns5="http://schemas.openxmlformats.org/wordprocessingml/2006/main" ns5:eastAsia="微软雅黑" ns5:ascii="微软雅黑" ns5:hAnsi="微软雅黑"/>
+                <ns6:rFonts xmlns:ns6="http://schemas.openxmlformats.org/wordprocessingml/2006/main" ns6:eastAsia="微软雅黑" ns6:ascii="微软雅黑" ns6:hAnsi="微软雅黑"/>
               </a:rPr>
               <a:t>● 第三部分  系统实现与实验验证</a:t>
             </a:r>
@@ -9544,7 +9623,7 @@
                 <a:spcPct val="120000"/>
               </a:lnSpc>
               <a:spcAft>
-                <a:spcPts val="4000"/>
+                <a:spcPts val="4200"/>
               </a:spcAft>
             </a:pPr>
             <a:r>
@@ -9553,7 +9632,7 @@
                   <a:srgbClr val="1C202C"/>
                 </a:solidFill>
                 <a:latin typeface="微软雅黑"/>
-                <ns6:rFonts xmlns:ns6="http://schemas.openxmlformats.org/wordprocessingml/2006/main" ns6:eastAsia="微软雅黑" ns6:ascii="微软雅黑" ns6:hAnsi="微软雅黑"/>
+                <ns7:rFonts xmlns:ns7="http://schemas.openxmlformats.org/wordprocessingml/2006/main" ns7:eastAsia="微软雅黑" ns7:ascii="微软雅黑" ns7:hAnsi="微软雅黑"/>
               </a:rPr>
               <a:t>● 第四部分  创新点与展望</a:t>
             </a:r>
@@ -9564,7 +9643,7 @@
                 <a:spcPct val="120000"/>
               </a:lnSpc>
               <a:spcAft>
-                <a:spcPts val="4000"/>
+                <a:spcPts val="4200"/>
               </a:spcAft>
             </a:pPr>
             <a:r>
@@ -9573,7 +9652,7 @@
                   <a:srgbClr val="1C202C"/>
                 </a:solidFill>
                 <a:latin typeface="微软雅黑"/>
-                <ns7:rFonts xmlns:ns7="http://schemas.openxmlformats.org/wordprocessingml/2006/main" ns7:eastAsia="微软雅黑" ns7:ascii="微软雅黑" ns7:hAnsi="微软雅黑"/>
+                <ns8:rFonts xmlns:ns8="http://schemas.openxmlformats.org/wordprocessingml/2006/main" ns8:eastAsia="微软雅黑" ns8:ascii="微软雅黑" ns8:hAnsi="微软雅黑"/>
               </a:rPr>
               <a:t>● 附录  演示界面与开源仓库</a:t>
             </a:r>
@@ -9582,7 +9661,7 @@
       </p:sp>
       <p:sp>
         <p:nvSpPr>
-          <p:cNvPr id="11" name="Rectangle 10"/>
+          <p:cNvPr id="13" name="Rectangle 12"/>
           <p:cNvSpPr/>
           <p:nvPr/>
         </p:nvSpPr>
@@ -9627,7 +9706,7 @@
       </p:sp>
       <p:pic>
         <p:nvPicPr>
-          <p:cNvPr id="12" name="Picture 11" descr="pipeline.png"/>
+          <p:cNvPr id="14" name="Picture 13" descr="pipeline.png"/>
           <p:cNvPicPr>
             <a:picLocks noChangeAspect="1"/>
           </p:cNvPicPr>
@@ -9651,7 +9730,7 @@
       </p:pic>
       <p:sp>
         <p:nvSpPr>
-          <p:cNvPr id="13" name="TextBox 12"/>
+          <p:cNvPr id="15" name="TextBox 14"/>
           <p:cNvSpPr txBox="1"/>
           <p:nvPr/>
         </p:nvSpPr>
@@ -9678,88 +9757,9 @@
                   <a:srgbClr val="5A6273"/>
                 </a:solidFill>
                 <a:latin typeface="微软雅黑"/>
-                <ns8:rFonts xmlns:ns8="http://schemas.openxmlformats.org/wordprocessingml/2006/main" ns8:eastAsia="微软雅黑" ns8:ascii="微软雅黑" ns8:hAnsi="微软雅黑"/>
+                <ns9:rFonts xmlns:ns9="http://schemas.openxmlformats.org/wordprocessingml/2006/main" ns9:eastAsia="微软雅黑" ns9:ascii="微软雅黑" ns9:hAnsi="微软雅黑"/>
               </a:rPr>
               <a:t>全篇结构</a:t>
-            </a:r>
-          </a:p>
-        </p:txBody>
-      </p:sp>
-      <p:sp>
-        <p:nvSpPr>
-          <p:cNvPr id="14" name="Rectangle 13"/>
-          <p:cNvSpPr/>
-          <p:nvPr/>
-        </p:nvSpPr>
-        <p:spPr>
-          <a:xfrm>
-            <a:off x="274320" y="4539996"/>
-            <a:ext cx="3611880" cy="310896"/>
-          </a:xfrm>
-          <a:prstGeom prst="rect">
-            <a:avLst/>
-          </a:prstGeom>
-          <a:solidFill>
-            <a:srgbClr val="143278"/>
-          </a:solidFill>
-          <a:ln>
-            <a:noFill/>
-          </a:ln>
-        </p:spPr>
-        <p:style>
-          <a:lnRef idx="1">
-            <a:schemeClr val="accent1"/>
-          </a:lnRef>
-          <a:fillRef idx="3">
-            <a:schemeClr val="accent1"/>
-          </a:fillRef>
-          <a:effectRef idx="2">
-            <a:schemeClr val="accent1"/>
-          </a:effectRef>
-          <a:fontRef idx="minor">
-            <a:schemeClr val="lt1"/>
-          </a:fontRef>
-        </p:style>
-        <p:txBody>
-          <a:bodyPr rtlCol="0" anchor="ctr"/>
-          <a:lstStyle/>
-          <a:p>
-            <a:pPr algn="ctr"/>
-          </a:p>
-        </p:txBody>
-      </p:sp>
-      <p:sp>
-        <p:nvSpPr>
-          <p:cNvPr id="15" name="TextBox 14"/>
-          <p:cNvSpPr txBox="1"/>
-          <p:nvPr/>
-        </p:nvSpPr>
-        <p:spPr>
-          <a:xfrm>
-            <a:off x="384048" y="4604004"/>
-            <a:ext cx="3392424" cy="219456"/>
-          </a:xfrm>
-          <a:prstGeom prst="rect">
-            <a:avLst/>
-          </a:prstGeom>
-          <a:noFill/>
-        </p:spPr>
-        <p:txBody>
-          <a:bodyPr wrap="none">
-            <a:spAutoFit/>
-          </a:bodyPr>
-          <a:lstStyle/>
-          <a:p>
-            <a:pPr algn="ctr"/>
-            <a:r>
-              <a:rPr sz="1100" b="1">
-                <a:solidFill>
-                  <a:srgbClr val="FFFFFF"/>
-                </a:solidFill>
-                <a:latin typeface="微软雅黑"/>
-                <ns9:rFonts xmlns:ns9="http://schemas.openxmlformats.org/wordprocessingml/2006/main" ns9:eastAsia="微软雅黑" ns9:ascii="微软雅黑" ns9:hAnsi="微软雅黑"/>
-              </a:rPr>
-              <a:t>理论 + 工程 + 现场演示</a:t>
             </a:r>
           </a:p>
         </p:txBody>
@@ -11503,7 +11503,7 @@
         <p:spPr>
           <a:xfrm>
             <a:off x="274320" y="996696"/>
-            <a:ext cx="3611880" cy="3451860"/>
+            <a:ext cx="3611880" cy="3854196"/>
           </a:xfrm>
           <a:prstGeom prst="rect">
             <a:avLst/>
@@ -11548,7 +11548,7 @@
         <p:spPr>
           <a:xfrm>
             <a:off x="274320" y="996696"/>
-            <a:ext cx="73152" cy="3451860"/>
+            <a:ext cx="73152" cy="3854196"/>
           </a:xfrm>
           <a:prstGeom prst="rect">
             <a:avLst/>
@@ -11584,14 +11584,93 @@
       </p:sp>
       <p:sp>
         <p:nvSpPr>
-          <p:cNvPr id="10" name="TextBox 9"/>
+          <p:cNvPr id="10" name="Rectangle 9"/>
+          <p:cNvSpPr/>
+          <p:nvPr/>
+        </p:nvSpPr>
+        <p:spPr>
+          <a:xfrm>
+            <a:off x="347472" y="4503420"/>
+            <a:ext cx="3465576" cy="310896"/>
+          </a:xfrm>
+          <a:prstGeom prst="rect">
+            <a:avLst/>
+          </a:prstGeom>
+          <a:solidFill>
+            <a:srgbClr val="143278"/>
+          </a:solidFill>
+          <a:ln>
+            <a:noFill/>
+          </a:ln>
+        </p:spPr>
+        <p:style>
+          <a:lnRef idx="1">
+            <a:schemeClr val="accent1"/>
+          </a:lnRef>
+          <a:fillRef idx="3">
+            <a:schemeClr val="accent1"/>
+          </a:fillRef>
+          <a:effectRef idx="2">
+            <a:schemeClr val="accent1"/>
+          </a:effectRef>
+          <a:fontRef idx="minor">
+            <a:schemeClr val="lt1"/>
+          </a:fontRef>
+        </p:style>
+        <p:txBody>
+          <a:bodyPr rtlCol="0" anchor="ctr"/>
+          <a:lstStyle/>
+          <a:p>
+            <a:pPr algn="ctr"/>
+          </a:p>
+        </p:txBody>
+      </p:sp>
+      <p:sp>
+        <p:nvSpPr>
+          <p:cNvPr id="11" name="TextBox 10"/>
           <p:cNvSpPr txBox="1"/>
           <p:nvPr/>
         </p:nvSpPr>
         <p:spPr>
           <a:xfrm>
-            <a:off x="475488" y="1161288"/>
-            <a:ext cx="3300984" cy="3122676"/>
+            <a:off x="402336" y="4576572"/>
+            <a:ext cx="3355848" cy="237744"/>
+          </a:xfrm>
+          <a:prstGeom prst="rect">
+            <a:avLst/>
+          </a:prstGeom>
+          <a:noFill/>
+        </p:spPr>
+        <p:txBody>
+          <a:bodyPr wrap="none">
+            <a:spAutoFit/>
+          </a:bodyPr>
+          <a:lstStyle/>
+          <a:p>
+            <a:pPr algn="ctr"/>
+            <a:r>
+              <a:rPr sz="1100" b="1">
+                <a:solidFill>
+                  <a:srgbClr val="FFFFFF"/>
+                </a:solidFill>
+                <a:latin typeface="微软雅黑"/>
+                <ns3:rFonts xmlns:ns3="http://schemas.openxmlformats.org/wordprocessingml/2006/main" ns3:eastAsia="微软雅黑" ns3:ascii="微软雅黑" ns3:hAnsi="微软雅黑"/>
+              </a:rPr>
+              <a:t>指标可复现、脚本一键运行</a:t>
+            </a:r>
+          </a:p>
+        </p:txBody>
+      </p:sp>
+      <p:sp>
+        <p:nvSpPr>
+          <p:cNvPr id="12" name="TextBox 11"/>
+          <p:cNvSpPr txBox="1"/>
+          <p:nvPr/>
+        </p:nvSpPr>
+        <p:spPr>
+          <a:xfrm>
+            <a:off x="475488" y="1143000"/>
+            <a:ext cx="3300984" cy="3232404"/>
           </a:xfrm>
           <a:prstGeom prst="rect">
             <a:avLst/>
@@ -11609,7 +11688,7 @@
                 <a:spcPct val="120000"/>
               </a:lnSpc>
               <a:spcAft>
-                <a:spcPts val="4000"/>
+                <a:spcPts val="4200"/>
               </a:spcAft>
             </a:pPr>
             <a:r>
@@ -11618,7 +11697,7 @@
                   <a:srgbClr val="1C202C"/>
                 </a:solidFill>
                 <a:latin typeface="微软雅黑"/>
-                <ns3:rFonts xmlns:ns3="http://schemas.openxmlformats.org/wordprocessingml/2006/main" ns3:eastAsia="微软雅黑" ns3:ascii="微软雅黑" ns3:hAnsi="微软雅黑"/>
+                <ns4:rFonts xmlns:ns4="http://schemas.openxmlformats.org/wordprocessingml/2006/main" ns4:eastAsia="微软雅黑" ns4:ascii="微软雅黑" ns4:hAnsi="微软雅黑"/>
               </a:rPr>
               <a:t>● 跌倒检测 P/R/F1：100%（6类合成场景）</a:t>
             </a:r>
@@ -11629,7 +11708,7 @@
                 <a:spcPct val="120000"/>
               </a:lnSpc>
               <a:spcAft>
-                <a:spcPts val="4000"/>
+                <a:spcPts val="4200"/>
               </a:spcAft>
             </a:pPr>
             <a:r>
@@ -11638,7 +11717,7 @@
                   <a:srgbClr val="1C202C"/>
                 </a:solidFill>
                 <a:latin typeface="微软雅黑"/>
-                <ns4:rFonts xmlns:ns4="http://schemas.openxmlformats.org/wordprocessingml/2006/main" ns4:eastAsia="微软雅黑" ns4:ascii="微软雅黑" ns4:hAnsi="微软雅黑"/>
+                <ns5:rFonts xmlns:ns5="http://schemas.openxmlformats.org/wordprocessingml/2006/main" ns5:eastAsia="微软雅黑" ns5:ascii="微软雅黑" ns5:hAnsi="微软雅黑"/>
               </a:rPr>
               <a:t>● 紧急呼叫端到端触发率：100%</a:t>
             </a:r>
@@ -11649,7 +11728,7 @@
                 <a:spcPct val="120000"/>
               </a:lnSpc>
               <a:spcAft>
-                <a:spcPts val="4000"/>
+                <a:spcPts val="4200"/>
               </a:spcAft>
             </a:pPr>
             <a:r>
@@ -11658,7 +11737,7 @@
                   <a:srgbClr val="1C202C"/>
                 </a:solidFill>
                 <a:latin typeface="微软雅黑"/>
-                <ns5:rFonts xmlns:ns5="http://schemas.openxmlformats.org/wordprocessingml/2006/main" ns5:eastAsia="微软雅黑" ns5:ascii="微软雅黑" ns5:hAnsi="微软雅黑"/>
+                <ns6:rFonts xmlns:ns6="http://schemas.openxmlformats.org/wordprocessingml/2006/main" ns6:eastAsia="微软雅黑" ns6:ascii="微软雅黑" ns6:hAnsi="微软雅黑"/>
               </a:rPr>
               <a:t>● 单帧决策延迟 &lt; 50ms（CPU）</a:t>
             </a:r>
@@ -11669,7 +11748,7 @@
                 <a:spcPct val="120000"/>
               </a:lnSpc>
               <a:spcAft>
-                <a:spcPts val="4000"/>
+                <a:spcPts val="4200"/>
               </a:spcAft>
             </a:pPr>
             <a:r>
@@ -11678,7 +11757,7 @@
                   <a:srgbClr val="1C202C"/>
                 </a:solidFill>
                 <a:latin typeface="微软雅黑"/>
-                <ns6:rFonts xmlns:ns6="http://schemas.openxmlformats.org/wordprocessingml/2006/main" ns6:eastAsia="微软雅黑" ns6:ascii="微软雅黑" ns6:hAnsi="微软雅黑"/>
+                <ns7:rFonts xmlns:ns7="http://schemas.openxmlformats.org/wordprocessingml/2006/main" ns7:eastAsia="微软雅黑" ns7:ascii="微软雅黑" ns7:hAnsi="微软雅黑"/>
               </a:rPr>
               <a:t>● pytest + 无头压测全部通过</a:t>
             </a:r>
@@ -11689,7 +11768,7 @@
                 <a:spcPct val="120000"/>
               </a:lnSpc>
               <a:spcAft>
-                <a:spcPts val="4000"/>
+                <a:spcPts val="4200"/>
               </a:spcAft>
             </a:pPr>
             <a:r>
@@ -11698,7 +11777,7 @@
                   <a:srgbClr val="1C202C"/>
                 </a:solidFill>
                 <a:latin typeface="微软雅黑"/>
-                <ns7:rFonts xmlns:ns7="http://schemas.openxmlformats.org/wordprocessingml/2006/main" ns7:eastAsia="微软雅黑" ns7:ascii="微软雅黑" ns7:hAnsi="微软雅黑"/>
+                <ns8:rFonts xmlns:ns8="http://schemas.openxmlformats.org/wordprocessingml/2006/main" ns8:eastAsia="微软雅黑" ns8:ascii="微软雅黑" ns8:hAnsi="微软雅黑"/>
               </a:rPr>
               <a:t>● 报告：fall_eval_report.json</a:t>
             </a:r>
@@ -11707,7 +11786,7 @@
       </p:sp>
       <p:sp>
         <p:nvSpPr>
-          <p:cNvPr id="11" name="Rectangle 10"/>
+          <p:cNvPr id="13" name="Rectangle 12"/>
           <p:cNvSpPr/>
           <p:nvPr/>
         </p:nvSpPr>
@@ -11752,7 +11831,7 @@
       </p:sp>
       <p:pic>
         <p:nvPicPr>
-          <p:cNvPr id="12" name="Picture 11" descr="metrics_chart.png"/>
+          <p:cNvPr id="14" name="Picture 13" descr="metrics_chart.png"/>
           <p:cNvPicPr>
             <a:picLocks noChangeAspect="1"/>
           </p:cNvPicPr>
@@ -11776,7 +11855,7 @@
       </p:pic>
       <p:sp>
         <p:nvSpPr>
-          <p:cNvPr id="13" name="TextBox 12"/>
+          <p:cNvPr id="15" name="TextBox 14"/>
           <p:cNvSpPr txBox="1"/>
           <p:nvPr/>
         </p:nvSpPr>
@@ -11803,88 +11882,9 @@
                   <a:srgbClr val="5A6273"/>
                 </a:solidFill>
                 <a:latin typeface="微软雅黑"/>
-                <ns8:rFonts xmlns:ns8="http://schemas.openxmlformats.org/wordprocessingml/2006/main" ns8:eastAsia="微软雅黑" ns8:ascii="微软雅黑" ns8:hAnsi="微软雅黑"/>
+                <ns9:rFonts xmlns:ns9="http://schemas.openxmlformats.org/wordprocessingml/2006/main" ns9:eastAsia="微软雅黑" ns9:ascii="微软雅黑" ns9:hAnsi="微软雅黑"/>
               </a:rPr>
               <a:t>理论框图</a:t>
-            </a:r>
-          </a:p>
-        </p:txBody>
-      </p:sp>
-      <p:sp>
-        <p:nvSpPr>
-          <p:cNvPr id="14" name="Rectangle 13"/>
-          <p:cNvSpPr/>
-          <p:nvPr/>
-        </p:nvSpPr>
-        <p:spPr>
-          <a:xfrm>
-            <a:off x="274320" y="4539996"/>
-            <a:ext cx="3611880" cy="310896"/>
-          </a:xfrm>
-          <a:prstGeom prst="rect">
-            <a:avLst/>
-          </a:prstGeom>
-          <a:solidFill>
-            <a:srgbClr val="143278"/>
-          </a:solidFill>
-          <a:ln>
-            <a:noFill/>
-          </a:ln>
-        </p:spPr>
-        <p:style>
-          <a:lnRef idx="1">
-            <a:schemeClr val="accent1"/>
-          </a:lnRef>
-          <a:fillRef idx="3">
-            <a:schemeClr val="accent1"/>
-          </a:fillRef>
-          <a:effectRef idx="2">
-            <a:schemeClr val="accent1"/>
-          </a:effectRef>
-          <a:fontRef idx="minor">
-            <a:schemeClr val="lt1"/>
-          </a:fontRef>
-        </p:style>
-        <p:txBody>
-          <a:bodyPr rtlCol="0" anchor="ctr"/>
-          <a:lstStyle/>
-          <a:p>
-            <a:pPr algn="ctr"/>
-          </a:p>
-        </p:txBody>
-      </p:sp>
-      <p:sp>
-        <p:nvSpPr>
-          <p:cNvPr id="15" name="TextBox 14"/>
-          <p:cNvSpPr txBox="1"/>
-          <p:nvPr/>
-        </p:nvSpPr>
-        <p:spPr>
-          <a:xfrm>
-            <a:off x="384048" y="4604004"/>
-            <a:ext cx="3392424" cy="219456"/>
-          </a:xfrm>
-          <a:prstGeom prst="rect">
-            <a:avLst/>
-          </a:prstGeom>
-          <a:noFill/>
-        </p:spPr>
-        <p:txBody>
-          <a:bodyPr wrap="none">
-            <a:spAutoFit/>
-          </a:bodyPr>
-          <a:lstStyle/>
-          <a:p>
-            <a:pPr algn="ctr"/>
-            <a:r>
-              <a:rPr sz="1100" b="1">
-                <a:solidFill>
-                  <a:srgbClr val="FFFFFF"/>
-                </a:solidFill>
-                <a:latin typeface="微软雅黑"/>
-                <ns9:rFonts xmlns:ns9="http://schemas.openxmlformats.org/wordprocessingml/2006/main" ns9:eastAsia="微软雅黑" ns9:ascii="微软雅黑" ns9:hAnsi="微软雅黑"/>
-              </a:rPr>
-              <a:t>指标可复现、脚本一键运行</a:t>
             </a:r>
           </a:p>
         </p:txBody>
@@ -12159,17 +12159,19 @@
         </p:nvSpPr>
         <p:spPr>
           <a:xfrm>
-            <a:off x="274320" y="4539996"/>
-            <a:ext cx="3611880" cy="310896"/>
-          </a:xfrm>
-          <a:prstGeom prst="rect">
-            <a:avLst/>
-          </a:prstGeom>
-          <a:solidFill>
-            <a:srgbClr val="143278"/>
+            <a:off x="274320" y="1042416"/>
+            <a:ext cx="3611880" cy="679399"/>
+          </a:xfrm>
+          <a:prstGeom prst="rect">
+            <a:avLst/>
+          </a:prstGeom>
+          <a:solidFill>
+            <a:srgbClr val="F1F7FF"/>
           </a:solidFill>
           <a:ln>
-            <a:noFill/>
+            <a:solidFill>
+              <a:srgbClr val="BAC8DC"/>
+            </a:solidFill>
           </a:ln>
         </p:spPr>
         <p:style>
@@ -12202,8 +12204,8 @@
         </p:nvSpPr>
         <p:spPr>
           <a:xfrm>
-            <a:off x="384048" y="4604004"/>
-            <a:ext cx="3392424" cy="219456"/>
+            <a:off x="411479" y="1097280"/>
+            <a:ext cx="914400" cy="642823"/>
           </a:xfrm>
           <a:prstGeom prst="rect">
             <a:avLst/>
@@ -12216,36 +12218,70 @@
           </a:bodyPr>
           <a:lstStyle/>
           <a:p>
-            <a:pPr algn="ctr"/>
-            <a:r>
-              <a:rPr sz="1100" b="1">
-                <a:solidFill>
-                  <a:srgbClr val="FFFFFF"/>
+            <a:r>
+              <a:rPr sz="1000" b="1">
+                <a:solidFill>
+                  <a:srgbClr val="5A6273"/>
                 </a:solidFill>
                 <a:latin typeface="微软雅黑"/>
                 <ns3:rFonts xmlns:ns3="http://schemas.openxmlformats.org/wordprocessingml/2006/main" ns3:eastAsia="微软雅黑" ns3:ascii="微软雅黑" ns3:hAnsi="微软雅黑"/>
               </a:rPr>
-              <a:t>完整源码 · 可复现演示 · 欢迎评委扫码</a:t>
-            </a:r>
-          </a:p>
-        </p:txBody>
-      </p:sp>
-      <p:sp>
-        <p:nvSpPr>
-          <p:cNvPr id="10" name="Rectangle 9"/>
+              <a:t>GitHub 仓库</a:t>
+            </a:r>
+          </a:p>
+        </p:txBody>
+      </p:sp>
+      <p:sp>
+        <p:nvSpPr>
+          <p:cNvPr id="10" name="TextBox 9"/>
+          <p:cNvSpPr txBox="1"/>
+          <p:nvPr/>
+        </p:nvSpPr>
+        <p:spPr>
+          <a:xfrm>
+            <a:off x="1280160" y="1097280"/>
+            <a:ext cx="2468880" cy="642823"/>
+          </a:xfrm>
+          <a:prstGeom prst="rect">
+            <a:avLst/>
+          </a:prstGeom>
+          <a:noFill/>
+        </p:spPr>
+        <p:txBody>
+          <a:bodyPr wrap="none">
+            <a:spAutoFit/>
+          </a:bodyPr>
+          <a:lstStyle/>
+          <a:p>
+            <a:r>
+              <a:rPr sz="900" b="0">
+                <a:solidFill>
+                  <a:srgbClr val="143278"/>
+                </a:solidFill>
+                <a:latin typeface="微软雅黑"/>
+                <ns4:rFonts xmlns:ns4="http://schemas.openxmlformats.org/wordprocessingml/2006/main" ns4:eastAsia="微软雅黑" ns4:ascii="微软雅黑" ns4:hAnsi="微软雅黑"/>
+              </a:rPr>
+              <a:t>https://github.com/FBB123571/ElderCare-Humanoid-Platform</a:t>
+            </a:r>
+          </a:p>
+        </p:txBody>
+      </p:sp>
+      <p:sp>
+        <p:nvSpPr>
+          <p:cNvPr id="11" name="Rectangle 10"/>
           <p:cNvSpPr/>
           <p:nvPr/>
         </p:nvSpPr>
         <p:spPr>
           <a:xfrm>
-            <a:off x="274320" y="1042416"/>
-            <a:ext cx="3611880" cy="598932"/>
-          </a:xfrm>
-          <a:prstGeom prst="rect">
-            <a:avLst/>
-          </a:prstGeom>
-          <a:solidFill>
-            <a:srgbClr val="F1F7FF"/>
+            <a:off x="274320" y="1794967"/>
+            <a:ext cx="3611880" cy="679399"/>
+          </a:xfrm>
+          <a:prstGeom prst="rect">
+            <a:avLst/>
+          </a:prstGeom>
+          <a:solidFill>
+            <a:srgbClr val="FFFFFF"/>
           </a:solidFill>
           <a:ln>
             <a:solidFill>
@@ -12277,14 +12313,14 @@
       </p:sp>
       <p:sp>
         <p:nvSpPr>
-          <p:cNvPr id="11" name="TextBox 10"/>
+          <p:cNvPr id="12" name="TextBox 11"/>
           <p:cNvSpPr txBox="1"/>
           <p:nvPr/>
         </p:nvSpPr>
         <p:spPr>
           <a:xfrm>
-            <a:off x="411479" y="1097280"/>
-            <a:ext cx="914400" cy="562356"/>
+            <a:off x="411479" y="1849831"/>
+            <a:ext cx="914400" cy="642823"/>
           </a:xfrm>
           <a:prstGeom prst="rect">
             <a:avLst/>
@@ -12303,23 +12339,23 @@
                   <a:srgbClr val="5A6273"/>
                 </a:solidFill>
                 <a:latin typeface="微软雅黑"/>
-                <ns4:rFonts xmlns:ns4="http://schemas.openxmlformats.org/wordprocessingml/2006/main" ns4:eastAsia="微软雅黑" ns4:ascii="微软雅黑" ns4:hAnsi="微软雅黑"/>
-              </a:rPr>
-              <a:t>GitHub 仓库</a:t>
-            </a:r>
-          </a:p>
-        </p:txBody>
-      </p:sp>
-      <p:sp>
-        <p:nvSpPr>
-          <p:cNvPr id="12" name="TextBox 11"/>
+                <ns5:rFonts xmlns:ns5="http://schemas.openxmlformats.org/wordprocessingml/2006/main" ns5:eastAsia="微软雅黑" ns5:ascii="微软雅黑" ns5:hAnsi="微软雅黑"/>
+              </a:rPr>
+              <a:t>团队</a:t>
+            </a:r>
+          </a:p>
+        </p:txBody>
+      </p:sp>
+      <p:sp>
+        <p:nvSpPr>
+          <p:cNvPr id="13" name="TextBox 12"/>
           <p:cNvSpPr txBox="1"/>
           <p:nvPr/>
         </p:nvSpPr>
         <p:spPr>
           <a:xfrm>
-            <a:off x="1280160" y="1097280"/>
-            <a:ext cx="2468880" cy="562356"/>
+            <a:off x="1280160" y="1849831"/>
+            <a:ext cx="2468880" cy="642823"/>
           </a:xfrm>
           <a:prstGeom prst="rect">
             <a:avLst/>
@@ -12333,34 +12369,34 @@
           <a:lstStyle/>
           <a:p>
             <a:r>
-              <a:rPr sz="900" b="0">
+              <a:rPr sz="1000" b="0">
                 <a:solidFill>
                   <a:srgbClr val="143278"/>
                 </a:solidFill>
                 <a:latin typeface="微软雅黑"/>
-                <ns5:rFonts xmlns:ns5="http://schemas.openxmlformats.org/wordprocessingml/2006/main" ns5:eastAsia="微软雅黑" ns5:ascii="微软雅黑" ns5:hAnsi="微软雅黑"/>
-              </a:rPr>
-              <a:t>https://github.com/FBB123571/ElderCare-Humanoid-Platform</a:t>
-            </a:r>
-          </a:p>
-        </p:txBody>
-      </p:sp>
-      <p:sp>
-        <p:nvSpPr>
-          <p:cNvPr id="13" name="Rectangle 12"/>
+                <ns6:rFonts xmlns:ns6="http://schemas.openxmlformats.org/wordprocessingml/2006/main" ns6:eastAsia="微软雅黑" ns6:ascii="微软雅黑" ns6:hAnsi="微软雅黑"/>
+              </a:rPr>
+              <a:t>从容应队（中山大学）</a:t>
+            </a:r>
+          </a:p>
+        </p:txBody>
+      </p:sp>
+      <p:sp>
+        <p:nvSpPr>
+          <p:cNvPr id="14" name="Rectangle 13"/>
           <p:cNvSpPr/>
           <p:nvPr/>
         </p:nvSpPr>
         <p:spPr>
           <a:xfrm>
-            <a:off x="274320" y="1714500"/>
-            <a:ext cx="3611880" cy="598932"/>
-          </a:xfrm>
-          <a:prstGeom prst="rect">
-            <a:avLst/>
-          </a:prstGeom>
-          <a:solidFill>
-            <a:srgbClr val="FFFFFF"/>
+            <a:off x="274320" y="2547518"/>
+            <a:ext cx="3611880" cy="679399"/>
+          </a:xfrm>
+          <a:prstGeom prst="rect">
+            <a:avLst/>
+          </a:prstGeom>
+          <a:solidFill>
+            <a:srgbClr val="F1F7FF"/>
           </a:solidFill>
           <a:ln>
             <a:solidFill>
@@ -12392,14 +12428,14 @@
       </p:sp>
       <p:sp>
         <p:nvSpPr>
-          <p:cNvPr id="14" name="TextBox 13"/>
+          <p:cNvPr id="15" name="TextBox 14"/>
           <p:cNvSpPr txBox="1"/>
           <p:nvPr/>
         </p:nvSpPr>
         <p:spPr>
           <a:xfrm>
-            <a:off x="411479" y="1769364"/>
-            <a:ext cx="914400" cy="562356"/>
+            <a:off x="411479" y="2602382"/>
+            <a:ext cx="914400" cy="642823"/>
           </a:xfrm>
           <a:prstGeom prst="rect">
             <a:avLst/>
@@ -12418,23 +12454,23 @@
                   <a:srgbClr val="5A6273"/>
                 </a:solidFill>
                 <a:latin typeface="微软雅黑"/>
-                <ns6:rFonts xmlns:ns6="http://schemas.openxmlformats.org/wordprocessingml/2006/main" ns6:eastAsia="微软雅黑" ns6:ascii="微软雅黑" ns6:hAnsi="微软雅黑"/>
-              </a:rPr>
-              <a:t>团队</a:t>
-            </a:r>
-          </a:p>
-        </p:txBody>
-      </p:sp>
-      <p:sp>
-        <p:nvSpPr>
-          <p:cNvPr id="15" name="TextBox 14"/>
+                <ns7:rFonts xmlns:ns7="http://schemas.openxmlformats.org/wordprocessingml/2006/main" ns7:eastAsia="微软雅黑" ns7:ascii="微软雅黑" ns7:hAnsi="微软雅黑"/>
+              </a:rPr>
+              <a:t>本地演示</a:t>
+            </a:r>
+          </a:p>
+        </p:txBody>
+      </p:sp>
+      <p:sp>
+        <p:nvSpPr>
+          <p:cNvPr id="16" name="TextBox 15"/>
           <p:cNvSpPr txBox="1"/>
           <p:nvPr/>
         </p:nvSpPr>
         <p:spPr>
           <a:xfrm>
-            <a:off x="1280160" y="1769364"/>
-            <a:ext cx="2468880" cy="562356"/>
+            <a:off x="1280160" y="2602382"/>
+            <a:ext cx="2468880" cy="642823"/>
           </a:xfrm>
           <a:prstGeom prst="rect">
             <a:avLst/>
@@ -12453,29 +12489,29 @@
                   <a:srgbClr val="143278"/>
                 </a:solidFill>
                 <a:latin typeface="微软雅黑"/>
-                <ns7:rFonts xmlns:ns7="http://schemas.openxmlformats.org/wordprocessingml/2006/main" ns7:eastAsia="微软雅黑" ns7:ascii="微软雅黑" ns7:hAnsi="微软雅黑"/>
-              </a:rPr>
-              <a:t>从容应队（中山大学）</a:t>
-            </a:r>
-          </a:p>
-        </p:txBody>
-      </p:sp>
-      <p:sp>
-        <p:nvSpPr>
-          <p:cNvPr id="16" name="Rectangle 15"/>
+                <ns8:rFonts xmlns:ns8="http://schemas.openxmlformats.org/wordprocessingml/2006/main" ns8:eastAsia="微软雅黑" ns8:ascii="微软雅黑" ns8:hAnsi="微软雅黑"/>
+              </a:rPr>
+              <a:t>bash scripts/run_web.sh</a:t>
+            </a:r>
+          </a:p>
+        </p:txBody>
+      </p:sp>
+      <p:sp>
+        <p:nvSpPr>
+          <p:cNvPr id="17" name="Rectangle 16"/>
           <p:cNvSpPr/>
           <p:nvPr/>
         </p:nvSpPr>
         <p:spPr>
           <a:xfrm>
-            <a:off x="274320" y="2386584"/>
-            <a:ext cx="3611880" cy="598932"/>
-          </a:xfrm>
-          <a:prstGeom prst="rect">
-            <a:avLst/>
-          </a:prstGeom>
-          <a:solidFill>
-            <a:srgbClr val="F1F7FF"/>
+            <a:off x="274320" y="3300069"/>
+            <a:ext cx="3611880" cy="679399"/>
+          </a:xfrm>
+          <a:prstGeom prst="rect">
+            <a:avLst/>
+          </a:prstGeom>
+          <a:solidFill>
+            <a:srgbClr val="FFFFFF"/>
           </a:solidFill>
           <a:ln>
             <a:solidFill>
@@ -12507,14 +12543,14 @@
       </p:sp>
       <p:sp>
         <p:nvSpPr>
-          <p:cNvPr id="17" name="TextBox 16"/>
+          <p:cNvPr id="18" name="TextBox 17"/>
           <p:cNvSpPr txBox="1"/>
           <p:nvPr/>
         </p:nvSpPr>
         <p:spPr>
           <a:xfrm>
-            <a:off x="411479" y="2441448"/>
-            <a:ext cx="914400" cy="562356"/>
+            <a:off x="411479" y="3354933"/>
+            <a:ext cx="914400" cy="642823"/>
           </a:xfrm>
           <a:prstGeom prst="rect">
             <a:avLst/>
@@ -12533,23 +12569,23 @@
                   <a:srgbClr val="5A6273"/>
                 </a:solidFill>
                 <a:latin typeface="微软雅黑"/>
-                <ns8:rFonts xmlns:ns8="http://schemas.openxmlformats.org/wordprocessingml/2006/main" ns8:eastAsia="微软雅黑" ns8:ascii="微软雅黑" ns8:hAnsi="微软雅黑"/>
-              </a:rPr>
-              <a:t>本地演示</a:t>
-            </a:r>
-          </a:p>
-        </p:txBody>
-      </p:sp>
-      <p:sp>
-        <p:nvSpPr>
-          <p:cNvPr id="18" name="TextBox 17"/>
+                <ns9:rFonts xmlns:ns9="http://schemas.openxmlformats.org/wordprocessingml/2006/main" ns9:eastAsia="微软雅黑" ns9:ascii="微软雅黑" ns9:hAnsi="微软雅黑"/>
+              </a:rPr>
+              <a:t>演示录像</a:t>
+            </a:r>
+          </a:p>
+        </p:txBody>
+      </p:sp>
+      <p:sp>
+        <p:nvSpPr>
+          <p:cNvPr id="19" name="TextBox 18"/>
           <p:cNvSpPr txBox="1"/>
           <p:nvPr/>
         </p:nvSpPr>
         <p:spPr>
           <a:xfrm>
-            <a:off x="1280160" y="2441448"/>
-            <a:ext cx="2468880" cy="562356"/>
+            <a:off x="1280160" y="3354933"/>
+            <a:ext cx="2468880" cy="642823"/>
           </a:xfrm>
           <a:prstGeom prst="rect">
             <a:avLst/>
@@ -12568,29 +12604,29 @@
                   <a:srgbClr val="143278"/>
                 </a:solidFill>
                 <a:latin typeface="微软雅黑"/>
-                <ns9:rFonts xmlns:ns9="http://schemas.openxmlformats.org/wordprocessingml/2006/main" ns9:eastAsia="微软雅黑" ns9:ascii="微软雅黑" ns9:hAnsi="微软雅黑"/>
-              </a:rPr>
-              <a:t>bash scripts/run_web.sh</a:t>
-            </a:r>
-          </a:p>
-        </p:txBody>
-      </p:sp>
-      <p:sp>
-        <p:nvSpPr>
-          <p:cNvPr id="19" name="Rectangle 18"/>
+                <ns10:rFonts xmlns:ns10="http://schemas.openxmlformats.org/wordprocessingml/2006/main" ns10:eastAsia="微软雅黑" ns10:ascii="微软雅黑" ns10:hAnsi="微软雅黑"/>
+              </a:rPr>
+              <a:t>docs/assets/demo_carecompanion.mp4</a:t>
+            </a:r>
+          </a:p>
+        </p:txBody>
+      </p:sp>
+      <p:sp>
+        <p:nvSpPr>
+          <p:cNvPr id="20" name="Rectangle 19"/>
           <p:cNvSpPr/>
           <p:nvPr/>
         </p:nvSpPr>
         <p:spPr>
           <a:xfrm>
-            <a:off x="274320" y="3058668"/>
-            <a:ext cx="3611880" cy="598932"/>
-          </a:xfrm>
-          <a:prstGeom prst="rect">
-            <a:avLst/>
-          </a:prstGeom>
-          <a:solidFill>
-            <a:srgbClr val="FFFFFF"/>
+            <a:off x="274320" y="4052620"/>
+            <a:ext cx="3611880" cy="679399"/>
+          </a:xfrm>
+          <a:prstGeom prst="rect">
+            <a:avLst/>
+          </a:prstGeom>
+          <a:solidFill>
+            <a:srgbClr val="F1F7FF"/>
           </a:solidFill>
           <a:ln>
             <a:solidFill>
@@ -12622,14 +12658,14 @@
       </p:sp>
       <p:sp>
         <p:nvSpPr>
-          <p:cNvPr id="20" name="TextBox 19"/>
+          <p:cNvPr id="21" name="TextBox 20"/>
           <p:cNvSpPr txBox="1"/>
           <p:nvPr/>
         </p:nvSpPr>
         <p:spPr>
           <a:xfrm>
-            <a:off x="411479" y="3113532"/>
-            <a:ext cx="914400" cy="562356"/>
+            <a:off x="411479" y="4107484"/>
+            <a:ext cx="914400" cy="642823"/>
           </a:xfrm>
           <a:prstGeom prst="rect">
             <a:avLst/>
@@ -12648,23 +12684,23 @@
                   <a:srgbClr val="5A6273"/>
                 </a:solidFill>
                 <a:latin typeface="微软雅黑"/>
-                <ns10:rFonts xmlns:ns10="http://schemas.openxmlformats.org/wordprocessingml/2006/main" ns10:eastAsia="微软雅黑" ns10:ascii="微软雅黑" ns10:hAnsi="微软雅黑"/>
-              </a:rPr>
-              <a:t>演示录像</a:t>
-            </a:r>
-          </a:p>
-        </p:txBody>
-      </p:sp>
-      <p:sp>
-        <p:nvSpPr>
-          <p:cNvPr id="21" name="TextBox 20"/>
+                <ns11:rFonts xmlns:ns11="http://schemas.openxmlformats.org/wordprocessingml/2006/main" ns11:eastAsia="微软雅黑" ns11:ascii="微软雅黑" ns11:hAnsi="微软雅黑"/>
+              </a:rPr>
+              <a:t>软著</a:t>
+            </a:r>
+          </a:p>
+        </p:txBody>
+      </p:sp>
+      <p:sp>
+        <p:nvSpPr>
+          <p:cNvPr id="22" name="TextBox 21"/>
           <p:cNvSpPr txBox="1"/>
           <p:nvPr/>
         </p:nvSpPr>
         <p:spPr>
           <a:xfrm>
-            <a:off x="1280160" y="3113532"/>
-            <a:ext cx="2468880" cy="562356"/>
+            <a:off x="1280160" y="4107484"/>
+            <a:ext cx="2468880" cy="642823"/>
           </a:xfrm>
           <a:prstGeom prst="rect">
             <a:avLst/>
@@ -12683,31 +12719,31 @@
                   <a:srgbClr val="143278"/>
                 </a:solidFill>
                 <a:latin typeface="微软雅黑"/>
-                <ns11:rFonts xmlns:ns11="http://schemas.openxmlformats.org/wordprocessingml/2006/main" ns11:eastAsia="微软雅黑" ns11:ascii="微软雅黑" ns11:hAnsi="微软雅黑"/>
-              </a:rPr>
-              <a:t>docs/assets/demo_carecompanion.mp4</a:t>
-            </a:r>
-          </a:p>
-        </p:txBody>
-      </p:sp>
-      <p:sp>
-        <p:nvSpPr>
-          <p:cNvPr id="22" name="Rectangle 21"/>
+                <ns12:rFonts xmlns:ns12="http://schemas.openxmlformats.org/wordprocessingml/2006/main" ns12:eastAsia="微软雅黑" ns12:ascii="微软雅黑" ns12:hAnsi="微软雅黑"/>
+              </a:rPr>
+              <a:t>申请中</a:t>
+            </a:r>
+          </a:p>
+        </p:txBody>
+      </p:sp>
+      <p:sp>
+        <p:nvSpPr>
+          <p:cNvPr id="23" name="Rectangle 22"/>
           <p:cNvSpPr/>
           <p:nvPr/>
         </p:nvSpPr>
         <p:spPr>
           <a:xfrm>
-            <a:off x="274320" y="3730752"/>
-            <a:ext cx="3611880" cy="598932"/>
-          </a:xfrm>
-          <a:prstGeom prst="rect">
-            <a:avLst/>
-          </a:prstGeom>
-          <a:solidFill>
-            <a:srgbClr val="F1F7FF"/>
-          </a:solidFill>
-          <a:ln>
+            <a:off x="4251960" y="1024128"/>
+            <a:ext cx="1737360" cy="1920240"/>
+          </a:xfrm>
+          <a:prstGeom prst="rect">
+            <a:avLst/>
+          </a:prstGeom>
+          <a:solidFill>
+            <a:srgbClr val="FFFFFF"/>
+          </a:solidFill>
+          <a:ln w="10160">
             <a:solidFill>
               <a:srgbClr val="BAC8DC"/>
             </a:solidFill>
@@ -12735,124 +12771,9 @@
           </a:p>
         </p:txBody>
       </p:sp>
-      <p:sp>
-        <p:nvSpPr>
-          <p:cNvPr id="23" name="TextBox 22"/>
-          <p:cNvSpPr txBox="1"/>
-          <p:nvPr/>
-        </p:nvSpPr>
-        <p:spPr>
-          <a:xfrm>
-            <a:off x="411479" y="3785615"/>
-            <a:ext cx="914400" cy="562356"/>
-          </a:xfrm>
-          <a:prstGeom prst="rect">
-            <a:avLst/>
-          </a:prstGeom>
-          <a:noFill/>
-        </p:spPr>
-        <p:txBody>
-          <a:bodyPr wrap="none">
-            <a:spAutoFit/>
-          </a:bodyPr>
-          <a:lstStyle/>
-          <a:p>
-            <a:r>
-              <a:rPr sz="1000" b="1">
-                <a:solidFill>
-                  <a:srgbClr val="5A6273"/>
-                </a:solidFill>
-                <a:latin typeface="微软雅黑"/>
-                <ns12:rFonts xmlns:ns12="http://schemas.openxmlformats.org/wordprocessingml/2006/main" ns12:eastAsia="微软雅黑" ns12:ascii="微软雅黑" ns12:hAnsi="微软雅黑"/>
-              </a:rPr>
-              <a:t>软著</a:t>
-            </a:r>
-          </a:p>
-        </p:txBody>
-      </p:sp>
-      <p:sp>
-        <p:nvSpPr>
-          <p:cNvPr id="24" name="TextBox 23"/>
-          <p:cNvSpPr txBox="1"/>
-          <p:nvPr/>
-        </p:nvSpPr>
-        <p:spPr>
-          <a:xfrm>
-            <a:off x="1280160" y="3785615"/>
-            <a:ext cx="2468880" cy="562356"/>
-          </a:xfrm>
-          <a:prstGeom prst="rect">
-            <a:avLst/>
-          </a:prstGeom>
-          <a:noFill/>
-        </p:spPr>
-        <p:txBody>
-          <a:bodyPr wrap="none">
-            <a:spAutoFit/>
-          </a:bodyPr>
-          <a:lstStyle/>
-          <a:p>
-            <a:r>
-              <a:rPr sz="1000" b="0">
-                <a:solidFill>
-                  <a:srgbClr val="143278"/>
-                </a:solidFill>
-                <a:latin typeface="微软雅黑"/>
-                <ns13:rFonts xmlns:ns13="http://schemas.openxmlformats.org/wordprocessingml/2006/main" ns13:eastAsia="微软雅黑" ns13:ascii="微软雅黑" ns13:hAnsi="微软雅黑"/>
-              </a:rPr>
-              <a:t>申请中</a:t>
-            </a:r>
-          </a:p>
-        </p:txBody>
-      </p:sp>
-      <p:sp>
-        <p:nvSpPr>
-          <p:cNvPr id="25" name="Rectangle 24"/>
-          <p:cNvSpPr/>
-          <p:nvPr/>
-        </p:nvSpPr>
-        <p:spPr>
-          <a:xfrm>
-            <a:off x="4251960" y="1024128"/>
-            <a:ext cx="1737360" cy="1920240"/>
-          </a:xfrm>
-          <a:prstGeom prst="rect">
-            <a:avLst/>
-          </a:prstGeom>
-          <a:solidFill>
-            <a:srgbClr val="FFFFFF"/>
-          </a:solidFill>
-          <a:ln w="10160">
-            <a:solidFill>
-              <a:srgbClr val="BAC8DC"/>
-            </a:solidFill>
-          </a:ln>
-        </p:spPr>
-        <p:style>
-          <a:lnRef idx="1">
-            <a:schemeClr val="accent1"/>
-          </a:lnRef>
-          <a:fillRef idx="3">
-            <a:schemeClr val="accent1"/>
-          </a:fillRef>
-          <a:effectRef idx="2">
-            <a:schemeClr val="accent1"/>
-          </a:effectRef>
-          <a:fontRef idx="minor">
-            <a:schemeClr val="lt1"/>
-          </a:fontRef>
-        </p:style>
-        <p:txBody>
-          <a:bodyPr rtlCol="0" anchor="ctr"/>
-          <a:lstStyle/>
-          <a:p>
-            <a:pPr algn="ctr"/>
-          </a:p>
-        </p:txBody>
-      </p:sp>
       <p:pic>
         <p:nvPicPr>
-          <p:cNvPr id="26" name="Picture 25" descr="ppt_demo_qr.png"/>
+          <p:cNvPr id="24" name="Picture 23" descr="ppt_demo_qr.png"/>
           <p:cNvPicPr>
             <a:picLocks noChangeAspect="1"/>
           </p:cNvPicPr>
@@ -12876,7 +12797,7 @@
       </p:pic>
       <p:sp>
         <p:nvSpPr>
-          <p:cNvPr id="27" name="TextBox 26"/>
+          <p:cNvPr id="25" name="TextBox 24"/>
           <p:cNvSpPr txBox="1"/>
           <p:nvPr/>
         </p:nvSpPr>
@@ -12903,7 +12824,7 @@
                   <a:srgbClr val="5A6273"/>
                 </a:solidFill>
                 <a:latin typeface="微软雅黑"/>
-                <ns14:rFonts xmlns:ns14="http://schemas.openxmlformats.org/wordprocessingml/2006/main" ns14:eastAsia="微软雅黑" ns14:ascii="微软雅黑" ns14:hAnsi="微软雅黑"/>
+                <ns13:rFonts xmlns:ns13="http://schemas.openxmlformats.org/wordprocessingml/2006/main" ns13:eastAsia="微软雅黑" ns13:ascii="微软雅黑" ns13:hAnsi="微软雅黑"/>
               </a:rPr>
               <a:t>扫码访问</a:t>
             </a:r>
@@ -12912,13 +12833,13 @@
       </p:sp>
       <p:sp>
         <p:nvSpPr>
-          <p:cNvPr id="28" name="Rectangle 27"/>
+          <p:cNvPr id="26" name="Rectangle 25"/>
           <p:cNvSpPr/>
           <p:nvPr/>
         </p:nvSpPr>
         <p:spPr>
           <a:xfrm>
-            <a:off x="6222492" y="1956030"/>
+            <a:off x="6222492" y="2157198"/>
             <a:ext cx="2505456" cy="1533191"/>
           </a:xfrm>
           <a:prstGeom prst="rect">
@@ -12957,7 +12878,7 @@
       </p:sp>
       <p:pic>
         <p:nvPicPr>
-          <p:cNvPr id="29" name="Picture 28" descr="ppt_full_dashboard.png"/>
+          <p:cNvPr id="27" name="Picture 26" descr="ppt_full_dashboard.png"/>
           <p:cNvPicPr>
             <a:picLocks noChangeAspect="1"/>
           </p:cNvPicPr>
@@ -12971,7 +12892,7 @@
         </p:blipFill>
         <p:spPr>
           <a:xfrm>
-            <a:off x="6268212" y="2001750"/>
+            <a:off x="6268212" y="2202918"/>
             <a:ext cx="2414015" cy="1258871"/>
           </a:xfrm>
           <a:prstGeom prst="rect">
@@ -12981,13 +12902,13 @@
       </p:pic>
       <p:sp>
         <p:nvSpPr>
-          <p:cNvPr id="30" name="TextBox 29"/>
+          <p:cNvPr id="28" name="TextBox 27"/>
           <p:cNvSpPr txBox="1"/>
           <p:nvPr/>
         </p:nvSpPr>
         <p:spPr>
           <a:xfrm>
-            <a:off x="6217920" y="3315485"/>
+            <a:off x="6217920" y="3516653"/>
             <a:ext cx="2514600" cy="182880"/>
           </a:xfrm>
           <a:prstGeom prst="rect">
@@ -13008,7 +12929,7 @@
                   <a:srgbClr val="5A6273"/>
                 </a:solidFill>
                 <a:latin typeface="微软雅黑"/>
-                <ns15:rFonts xmlns:ns15="http://schemas.openxmlformats.org/wordprocessingml/2006/main" ns15:eastAsia="微软雅黑" ns15:ascii="微软雅黑" ns15:hAnsi="微软雅黑"/>
+                <ns14:rFonts xmlns:ns14="http://schemas.openxmlformats.org/wordprocessingml/2006/main" ns14:eastAsia="微软雅黑" ns14:ascii="微软雅黑" ns14:hAnsi="微软雅黑"/>
               </a:rPr>
               <a:t>Web 控制台实拍</a:t>
             </a:r>
@@ -14055,8 +13976,8 @@
         </p:nvSpPr>
         <p:spPr>
           <a:xfrm>
-            <a:off x="475488" y="1161288"/>
-            <a:ext cx="3300984" cy="3525012"/>
+            <a:off x="475488" y="1143000"/>
+            <a:ext cx="3300984" cy="3579876"/>
           </a:xfrm>
           <a:prstGeom prst="rect">
             <a:avLst/>
@@ -14074,7 +13995,7 @@
                 <a:spcPct val="120000"/>
               </a:lnSpc>
               <a:spcAft>
-                <a:spcPts val="4800"/>
+                <a:spcPts val="4900"/>
               </a:spcAft>
             </a:pPr>
             <a:r>
@@ -14094,7 +14015,7 @@
                 <a:spcPct val="120000"/>
               </a:lnSpc>
               <a:spcAft>
-                <a:spcPts val="4800"/>
+                <a:spcPts val="4900"/>
               </a:spcAft>
             </a:pPr>
             <a:r>
@@ -14114,7 +14035,7 @@
                 <a:spcPct val="120000"/>
               </a:lnSpc>
               <a:spcAft>
-                <a:spcPts val="4800"/>
+                <a:spcPts val="4900"/>
               </a:spcAft>
             </a:pPr>
             <a:r>
@@ -14134,7 +14055,7 @@
                 <a:spcPct val="120000"/>
               </a:lnSpc>
               <a:spcAft>
-                <a:spcPts val="4800"/>
+                <a:spcPts val="4900"/>
               </a:spcAft>
             </a:pPr>
             <a:r>
@@ -14154,7 +14075,7 @@
                 <a:spcPct val="120000"/>
               </a:lnSpc>
               <a:spcAft>
-                <a:spcPts val="4800"/>
+                <a:spcPts val="4900"/>
               </a:spcAft>
             </a:pPr>
             <a:r>
@@ -14633,8 +14554,8 @@
         </p:nvSpPr>
         <p:spPr>
           <a:xfrm>
-            <a:off x="475488" y="1161288"/>
-            <a:ext cx="3300984" cy="3525012"/>
+            <a:off x="475488" y="1143000"/>
+            <a:ext cx="3300984" cy="3579876"/>
           </a:xfrm>
           <a:prstGeom prst="rect">
             <a:avLst/>
@@ -14652,7 +14573,7 @@
                 <a:spcPct val="120000"/>
               </a:lnSpc>
               <a:spcAft>
-                <a:spcPts val="4800"/>
+                <a:spcPts val="4900"/>
               </a:spcAft>
             </a:pPr>
             <a:r>
@@ -14672,7 +14593,7 @@
                 <a:spcPct val="120000"/>
               </a:lnSpc>
               <a:spcAft>
-                <a:spcPts val="4800"/>
+                <a:spcPts val="4900"/>
               </a:spcAft>
             </a:pPr>
             <a:r>
@@ -14692,7 +14613,7 @@
                 <a:spcPct val="120000"/>
               </a:lnSpc>
               <a:spcAft>
-                <a:spcPts val="4800"/>
+                <a:spcPts val="4900"/>
               </a:spcAft>
             </a:pPr>
             <a:r>
@@ -14712,7 +14633,7 @@
                 <a:spcPct val="120000"/>
               </a:lnSpc>
               <a:spcAft>
-                <a:spcPts val="4800"/>
+                <a:spcPts val="4900"/>
               </a:spcAft>
             </a:pPr>
             <a:r>
@@ -14732,7 +14653,7 @@
                 <a:spcPct val="120000"/>
               </a:lnSpc>
               <a:spcAft>
-                <a:spcPts val="4800"/>
+                <a:spcPts val="4900"/>
               </a:spcAft>
             </a:pPr>
             <a:r>
@@ -15211,8 +15132,8 @@
         </p:nvSpPr>
         <p:spPr>
           <a:xfrm>
-            <a:off x="475488" y="1161288"/>
-            <a:ext cx="3300984" cy="3525012"/>
+            <a:off x="475488" y="1143000"/>
+            <a:ext cx="3300984" cy="3579876"/>
           </a:xfrm>
           <a:prstGeom prst="rect">
             <a:avLst/>
@@ -15230,7 +15151,7 @@
                 <a:spcPct val="120000"/>
               </a:lnSpc>
               <a:spcAft>
-                <a:spcPts val="4800"/>
+                <a:spcPts val="4900"/>
               </a:spcAft>
             </a:pPr>
             <a:r>
@@ -15250,7 +15171,7 @@
                 <a:spcPct val="120000"/>
               </a:lnSpc>
               <a:spcAft>
-                <a:spcPts val="4800"/>
+                <a:spcPts val="4900"/>
               </a:spcAft>
             </a:pPr>
             <a:r>
@@ -15270,7 +15191,7 @@
                 <a:spcPct val="120000"/>
               </a:lnSpc>
               <a:spcAft>
-                <a:spcPts val="4800"/>
+                <a:spcPts val="4900"/>
               </a:spcAft>
             </a:pPr>
             <a:r>
@@ -15290,7 +15211,7 @@
                 <a:spcPct val="120000"/>
               </a:lnSpc>
               <a:spcAft>
-                <a:spcPts val="4800"/>
+                <a:spcPts val="4900"/>
               </a:spcAft>
             </a:pPr>
             <a:r>
@@ -15310,7 +15231,7 @@
                 <a:spcPct val="120000"/>
               </a:lnSpc>
               <a:spcAft>
-                <a:spcPts val="4800"/>
+                <a:spcPts val="4900"/>
               </a:spcAft>
             </a:pPr>
             <a:r>
@@ -15789,8 +15710,8 @@
         </p:nvSpPr>
         <p:spPr>
           <a:xfrm>
-            <a:off x="475488" y="1161288"/>
-            <a:ext cx="3300984" cy="3525012"/>
+            <a:off x="475488" y="1143000"/>
+            <a:ext cx="3300984" cy="3579876"/>
           </a:xfrm>
           <a:prstGeom prst="rect">
             <a:avLst/>
@@ -15808,7 +15729,7 @@
                 <a:spcPct val="120000"/>
               </a:lnSpc>
               <a:spcAft>
-                <a:spcPts val="3500"/>
+                <a:spcPts val="11500"/>
               </a:spcAft>
             </a:pPr>
             <a:r>
@@ -15819,7 +15740,7 @@
                 <a:latin typeface="微软雅黑"/>
                 <ns3:rFonts xmlns:ns3="http://schemas.openxmlformats.org/wordprocessingml/2006/main" ns3:eastAsia="微软雅黑" ns3:ascii="微软雅黑" ns3:hAnsi="微软雅黑"/>
               </a:rPr>
-              <a:t>● 作品：基于大语言模型的智能养老陪伴机器人仿真平台</a:t>
+              <a:t>● 赛项：创新赛 · 机器人创新赛道</a:t>
             </a:r>
           </a:p>
           <a:p>
@@ -15828,7 +15749,7 @@
                 <a:spcPct val="120000"/>
               </a:lnSpc>
               <a:spcAft>
-                <a:spcPts val="3500"/>
+                <a:spcPts val="11500"/>
               </a:spcAft>
             </a:pPr>
             <a:r>
@@ -15839,7 +15760,7 @@
                 <a:latin typeface="微软雅黑"/>
                 <ns4:rFonts xmlns:ns4="http://schemas.openxmlformats.org/wordprocessingml/2006/main" ns4:eastAsia="微软雅黑" ns4:ascii="微软雅黑" ns4:hAnsi="微软雅黑"/>
               </a:rPr>
-              <a:t>● 赛项：创新赛 · 机器人创新赛道</a:t>
+              <a:t>● 作品：基于大语言模型的智能养老陪伴机器人仿真平台</a:t>
             </a:r>
           </a:p>
           <a:p>
@@ -15848,7 +15769,7 @@
                 <a:spcPct val="120000"/>
               </a:lnSpc>
               <a:spcAft>
-                <a:spcPts val="3500"/>
+                <a:spcPts val="11500"/>
               </a:spcAft>
             </a:pPr>
             <a:r>
@@ -15859,67 +15780,7 @@
                 <a:latin typeface="微软雅黑"/>
                 <ns5:rFonts xmlns:ns5="http://schemas.openxmlformats.org/wordprocessingml/2006/main" ns5:eastAsia="微软雅黑" ns5:ascii="微软雅黑" ns5:hAnsi="微软雅黑"/>
               </a:rPr>
-              <a:t>● 团队编号：CRAIC2026-TEAM-8FJQKLMI</a:t>
-            </a:r>
-          </a:p>
-          <a:p>
-            <a:pPr>
-              <a:lnSpc>
-                <a:spcPct val="120000"/>
-              </a:lnSpc>
-              <a:spcAft>
-                <a:spcPts val="3500"/>
-              </a:spcAft>
-            </a:pPr>
-            <a:r>
-              <a:rPr sz="1300" b="0">
-                <a:solidFill>
-                  <a:srgbClr val="1C202C"/>
-                </a:solidFill>
-                <a:latin typeface="微软雅黑"/>
-                <ns6:rFonts xmlns:ns6="http://schemas.openxmlformats.org/wordprocessingml/2006/main" ns6:eastAsia="微软雅黑" ns6:ascii="微软雅黑" ns6:hAnsi="微软雅黑"/>
-              </a:rPr>
-              <a:t>● 作品编号：CRAIC20264ZEFT1DF</a:t>
-            </a:r>
-          </a:p>
-          <a:p>
-            <a:pPr>
-              <a:lnSpc>
-                <a:spcPct val="120000"/>
-              </a:lnSpc>
-              <a:spcAft>
-                <a:spcPts val="3500"/>
-              </a:spcAft>
-            </a:pPr>
-            <a:r>
-              <a:rPr sz="1300" b="0">
-                <a:solidFill>
-                  <a:srgbClr val="1C202C"/>
-                </a:solidFill>
-                <a:latin typeface="微软雅黑"/>
-                <ns7:rFonts xmlns:ns7="http://schemas.openxmlformats.org/wordprocessingml/2006/main" ns7:eastAsia="微软雅黑" ns7:ascii="微软雅黑" ns7:hAnsi="微软雅黑"/>
-              </a:rPr>
-              <a:t>● 队员：刘小凡（队长）、白冉</a:t>
-            </a:r>
-          </a:p>
-          <a:p>
-            <a:pPr>
-              <a:lnSpc>
-                <a:spcPct val="120000"/>
-              </a:lnSpc>
-              <a:spcAft>
-                <a:spcPts val="3500"/>
-              </a:spcAft>
-            </a:pPr>
-            <a:r>
-              <a:rPr sz="1300" b="0">
-                <a:solidFill>
-                  <a:srgbClr val="1C202C"/>
-                </a:solidFill>
-                <a:latin typeface="微软雅黑"/>
-                <ns8:rFonts xmlns:ns8="http://schemas.openxmlformats.org/wordprocessingml/2006/main" ns8:eastAsia="微软雅黑" ns8:ascii="微软雅黑" ns8:hAnsi="微软雅黑"/>
-              </a:rPr>
-              <a:t>● 指导教师：彭键清</a:t>
+              <a:t>● 特色：理论可讲清 · 系统可演示 · 指标可复现</a:t>
             </a:r>
           </a:p>
         </p:txBody>
@@ -15932,8 +15793,8 @@
         </p:nvSpPr>
         <p:spPr>
           <a:xfrm>
-            <a:off x="4710992" y="1005840"/>
-            <a:ext cx="3516775" cy="3835908"/>
+            <a:off x="4069080" y="996696"/>
+            <a:ext cx="4800600" cy="3854196"/>
           </a:xfrm>
           <a:prstGeom prst="rect">
             <a:avLst/>
@@ -15941,7 +15802,7 @@
           <a:solidFill>
             <a:srgbClr val="FFFFFF"/>
           </a:solidFill>
-          <a:ln w="10160">
+          <a:ln w="12700">
             <a:solidFill>
               <a:srgbClr val="BAC8DC"/>
             </a:solidFill>
@@ -15969,30 +15830,49 @@
           </a:p>
         </p:txBody>
       </p:sp>
-      <p:pic>
-        <p:nvPicPr>
-          <p:cNvPr id="12" name="Picture 11" descr="team_card.png"/>
-          <p:cNvPicPr>
-            <a:picLocks noChangeAspect="1"/>
-          </p:cNvPicPr>
-          <p:nvPr/>
-        </p:nvPicPr>
-        <p:blipFill>
-          <a:blip r:embed="rId2"/>
-          <a:stretch>
-            <a:fillRect/>
-          </a:stretch>
-        </p:blipFill>
-        <p:spPr>
-          <a:xfrm>
-            <a:off x="4756712" y="1051560"/>
-            <a:ext cx="3425335" cy="3561588"/>
-          </a:xfrm>
-          <a:prstGeom prst="rect">
-            <a:avLst/>
-          </a:prstGeom>
-        </p:spPr>
-      </p:pic>
+      <p:sp>
+        <p:nvSpPr>
+          <p:cNvPr id="12" name="Rectangle 11"/>
+          <p:cNvSpPr/>
+          <p:nvPr/>
+        </p:nvSpPr>
+        <p:spPr>
+          <a:xfrm>
+            <a:off x="4178808" y="1060704"/>
+            <a:ext cx="960120" cy="477447"/>
+          </a:xfrm>
+          <a:prstGeom prst="rect">
+            <a:avLst/>
+          </a:prstGeom>
+          <a:solidFill>
+            <a:srgbClr val="143278"/>
+          </a:solidFill>
+          <a:ln>
+            <a:noFill/>
+          </a:ln>
+        </p:spPr>
+        <p:style>
+          <a:lnRef idx="1">
+            <a:schemeClr val="accent1"/>
+          </a:lnRef>
+          <a:fillRef idx="3">
+            <a:schemeClr val="accent1"/>
+          </a:fillRef>
+          <a:effectRef idx="2">
+            <a:schemeClr val="accent1"/>
+          </a:effectRef>
+          <a:fontRef idx="minor">
+            <a:schemeClr val="lt1"/>
+          </a:fontRef>
+        </p:style>
+        <p:txBody>
+          <a:bodyPr rtlCol="0" anchor="ctr"/>
+          <a:lstStyle/>
+          <a:p>
+            <a:pPr algn="ctr"/>
+          </a:p>
+        </p:txBody>
+      </p:sp>
       <p:sp>
         <p:nvSpPr>
           <p:cNvPr id="13" name="TextBox 12"/>
@@ -16001,8 +15881,8 @@
         </p:nvSpPr>
         <p:spPr>
           <a:xfrm>
-            <a:off x="4069080" y="4668012"/>
-            <a:ext cx="4800600" cy="182880"/>
+            <a:off x="4178808" y="1194389"/>
+            <a:ext cx="960120" cy="238723"/>
           </a:xfrm>
           <a:prstGeom prst="rect">
             <a:avLst/>
@@ -16017,14 +15897,1048 @@
           <a:p>
             <a:pPr algn="ctr"/>
             <a:r>
-              <a:rPr sz="900" b="0">
-                <a:solidFill>
-                  <a:srgbClr val="5A6273"/>
+              <a:rPr sz="1100" b="1">
+                <a:solidFill>
+                  <a:srgbClr val="FFFFFF"/>
+                </a:solidFill>
+                <a:latin typeface="微软雅黑"/>
+                <ns6:rFonts xmlns:ns6="http://schemas.openxmlformats.org/wordprocessingml/2006/main" ns6:eastAsia="微软雅黑" ns6:ascii="微软雅黑" ns6:hAnsi="微软雅黑"/>
+              </a:rPr>
+              <a:t>团队</a:t>
+            </a:r>
+          </a:p>
+        </p:txBody>
+      </p:sp>
+      <p:sp>
+        <p:nvSpPr>
+          <p:cNvPr id="14" name="Rectangle 13"/>
+          <p:cNvSpPr/>
+          <p:nvPr/>
+        </p:nvSpPr>
+        <p:spPr>
+          <a:xfrm>
+            <a:off x="5184648" y="1060704"/>
+            <a:ext cx="3575304" cy="477447"/>
+          </a:xfrm>
+          <a:prstGeom prst="rect">
+            <a:avLst/>
+          </a:prstGeom>
+          <a:solidFill>
+            <a:srgbClr val="F1F7FF"/>
+          </a:solidFill>
+          <a:ln>
+            <a:solidFill>
+              <a:srgbClr val="BAC8DC"/>
+            </a:solidFill>
+          </a:ln>
+        </p:spPr>
+        <p:style>
+          <a:lnRef idx="1">
+            <a:schemeClr val="accent1"/>
+          </a:lnRef>
+          <a:fillRef idx="3">
+            <a:schemeClr val="accent1"/>
+          </a:fillRef>
+          <a:effectRef idx="2">
+            <a:schemeClr val="accent1"/>
+          </a:effectRef>
+          <a:fontRef idx="minor">
+            <a:schemeClr val="lt1"/>
+          </a:fontRef>
+        </p:style>
+        <p:txBody>
+          <a:bodyPr rtlCol="0" anchor="ctr"/>
+          <a:lstStyle/>
+          <a:p>
+            <a:pPr algn="ctr"/>
+          </a:p>
+        </p:txBody>
+      </p:sp>
+      <p:sp>
+        <p:nvSpPr>
+          <p:cNvPr id="15" name="TextBox 14"/>
+          <p:cNvSpPr txBox="1"/>
+          <p:nvPr/>
+        </p:nvSpPr>
+        <p:spPr>
+          <a:xfrm>
+            <a:off x="5276088" y="1115568"/>
+            <a:ext cx="3410712" cy="386007"/>
+          </a:xfrm>
+          <a:prstGeom prst="rect">
+            <a:avLst/>
+          </a:prstGeom>
+          <a:noFill/>
+        </p:spPr>
+        <p:txBody>
+          <a:bodyPr wrap="square">
+            <a:spAutoFit/>
+          </a:bodyPr>
+          <a:lstStyle/>
+          <a:p>
+            <a:r>
+              <a:rPr sz="1100" b="1">
+                <a:solidFill>
+                  <a:srgbClr val="143278"/>
+                </a:solidFill>
+                <a:latin typeface="微软雅黑"/>
+                <ns7:rFonts xmlns:ns7="http://schemas.openxmlformats.org/wordprocessingml/2006/main" ns7:eastAsia="微软雅黑" ns7:ascii="微软雅黑" ns7:hAnsi="微软雅黑"/>
+              </a:rPr>
+              <a:t>从容应队</a:t>
+            </a:r>
+          </a:p>
+        </p:txBody>
+      </p:sp>
+      <p:sp>
+        <p:nvSpPr>
+          <p:cNvPr id="16" name="Rectangle 15"/>
+          <p:cNvSpPr/>
+          <p:nvPr/>
+        </p:nvSpPr>
+        <p:spPr>
+          <a:xfrm>
+            <a:off x="4178808" y="1602159"/>
+            <a:ext cx="960120" cy="477447"/>
+          </a:xfrm>
+          <a:prstGeom prst="rect">
+            <a:avLst/>
+          </a:prstGeom>
+          <a:solidFill>
+            <a:srgbClr val="143278"/>
+          </a:solidFill>
+          <a:ln>
+            <a:noFill/>
+          </a:ln>
+        </p:spPr>
+        <p:style>
+          <a:lnRef idx="1">
+            <a:schemeClr val="accent1"/>
+          </a:lnRef>
+          <a:fillRef idx="3">
+            <a:schemeClr val="accent1"/>
+          </a:fillRef>
+          <a:effectRef idx="2">
+            <a:schemeClr val="accent1"/>
+          </a:effectRef>
+          <a:fontRef idx="minor">
+            <a:schemeClr val="lt1"/>
+          </a:fontRef>
+        </p:style>
+        <p:txBody>
+          <a:bodyPr rtlCol="0" anchor="ctr"/>
+          <a:lstStyle/>
+          <a:p>
+            <a:pPr algn="ctr"/>
+          </a:p>
+        </p:txBody>
+      </p:sp>
+      <p:sp>
+        <p:nvSpPr>
+          <p:cNvPr id="17" name="TextBox 16"/>
+          <p:cNvSpPr txBox="1"/>
+          <p:nvPr/>
+        </p:nvSpPr>
+        <p:spPr>
+          <a:xfrm>
+            <a:off x="4178808" y="1735844"/>
+            <a:ext cx="960120" cy="238723"/>
+          </a:xfrm>
+          <a:prstGeom prst="rect">
+            <a:avLst/>
+          </a:prstGeom>
+          <a:noFill/>
+        </p:spPr>
+        <p:txBody>
+          <a:bodyPr wrap="none">
+            <a:spAutoFit/>
+          </a:bodyPr>
+          <a:lstStyle/>
+          <a:p>
+            <a:pPr algn="ctr"/>
+            <a:r>
+              <a:rPr sz="1100" b="1">
+                <a:solidFill>
+                  <a:srgbClr val="FFFFFF"/>
+                </a:solidFill>
+                <a:latin typeface="微软雅黑"/>
+                <ns8:rFonts xmlns:ns8="http://schemas.openxmlformats.org/wordprocessingml/2006/main" ns8:eastAsia="微软雅黑" ns8:ascii="微软雅黑" ns8:hAnsi="微软雅黑"/>
+              </a:rPr>
+              <a:t>学校</a:t>
+            </a:r>
+          </a:p>
+        </p:txBody>
+      </p:sp>
+      <p:sp>
+        <p:nvSpPr>
+          <p:cNvPr id="18" name="Rectangle 17"/>
+          <p:cNvSpPr/>
+          <p:nvPr/>
+        </p:nvSpPr>
+        <p:spPr>
+          <a:xfrm>
+            <a:off x="5184648" y="1602159"/>
+            <a:ext cx="3575304" cy="477447"/>
+          </a:xfrm>
+          <a:prstGeom prst="rect">
+            <a:avLst/>
+          </a:prstGeom>
+          <a:solidFill>
+            <a:srgbClr val="F1F7FF"/>
+          </a:solidFill>
+          <a:ln>
+            <a:solidFill>
+              <a:srgbClr val="BAC8DC"/>
+            </a:solidFill>
+          </a:ln>
+        </p:spPr>
+        <p:style>
+          <a:lnRef idx="1">
+            <a:schemeClr val="accent1"/>
+          </a:lnRef>
+          <a:fillRef idx="3">
+            <a:schemeClr val="accent1"/>
+          </a:fillRef>
+          <a:effectRef idx="2">
+            <a:schemeClr val="accent1"/>
+          </a:effectRef>
+          <a:fontRef idx="minor">
+            <a:schemeClr val="lt1"/>
+          </a:fontRef>
+        </p:style>
+        <p:txBody>
+          <a:bodyPr rtlCol="0" anchor="ctr"/>
+          <a:lstStyle/>
+          <a:p>
+            <a:pPr algn="ctr"/>
+          </a:p>
+        </p:txBody>
+      </p:sp>
+      <p:sp>
+        <p:nvSpPr>
+          <p:cNvPr id="19" name="TextBox 18"/>
+          <p:cNvSpPr txBox="1"/>
+          <p:nvPr/>
+        </p:nvSpPr>
+        <p:spPr>
+          <a:xfrm>
+            <a:off x="5276088" y="1657023"/>
+            <a:ext cx="3410712" cy="386007"/>
+          </a:xfrm>
+          <a:prstGeom prst="rect">
+            <a:avLst/>
+          </a:prstGeom>
+          <a:noFill/>
+        </p:spPr>
+        <p:txBody>
+          <a:bodyPr wrap="square">
+            <a:spAutoFit/>
+          </a:bodyPr>
+          <a:lstStyle/>
+          <a:p>
+            <a:r>
+              <a:rPr sz="1100" b="1">
+                <a:solidFill>
+                  <a:srgbClr val="143278"/>
                 </a:solidFill>
                 <a:latin typeface="微软雅黑"/>
                 <ns9:rFonts xmlns:ns9="http://schemas.openxmlformats.org/wordprocessingml/2006/main" ns9:eastAsia="微软雅黑" ns9:ascii="微软雅黑" ns9:hAnsi="微软雅黑"/>
               </a:rPr>
-              <a:t>报名信息</a:t>
+              <a:t>中山大学</a:t>
+            </a:r>
+          </a:p>
+        </p:txBody>
+      </p:sp>
+      <p:sp>
+        <p:nvSpPr>
+          <p:cNvPr id="20" name="Rectangle 19"/>
+          <p:cNvSpPr/>
+          <p:nvPr/>
+        </p:nvSpPr>
+        <p:spPr>
+          <a:xfrm>
+            <a:off x="4178808" y="2143614"/>
+            <a:ext cx="960120" cy="477447"/>
+          </a:xfrm>
+          <a:prstGeom prst="rect">
+            <a:avLst/>
+          </a:prstGeom>
+          <a:solidFill>
+            <a:srgbClr val="143278"/>
+          </a:solidFill>
+          <a:ln>
+            <a:noFill/>
+          </a:ln>
+        </p:spPr>
+        <p:style>
+          <a:lnRef idx="1">
+            <a:schemeClr val="accent1"/>
+          </a:lnRef>
+          <a:fillRef idx="3">
+            <a:schemeClr val="accent1"/>
+          </a:fillRef>
+          <a:effectRef idx="2">
+            <a:schemeClr val="accent1"/>
+          </a:effectRef>
+          <a:fontRef idx="minor">
+            <a:schemeClr val="lt1"/>
+          </a:fontRef>
+        </p:style>
+        <p:txBody>
+          <a:bodyPr rtlCol="0" anchor="ctr"/>
+          <a:lstStyle/>
+          <a:p>
+            <a:pPr algn="ctr"/>
+          </a:p>
+        </p:txBody>
+      </p:sp>
+      <p:sp>
+        <p:nvSpPr>
+          <p:cNvPr id="21" name="TextBox 20"/>
+          <p:cNvSpPr txBox="1"/>
+          <p:nvPr/>
+        </p:nvSpPr>
+        <p:spPr>
+          <a:xfrm>
+            <a:off x="4178808" y="2277300"/>
+            <a:ext cx="960120" cy="238723"/>
+          </a:xfrm>
+          <a:prstGeom prst="rect">
+            <a:avLst/>
+          </a:prstGeom>
+          <a:noFill/>
+        </p:spPr>
+        <p:txBody>
+          <a:bodyPr wrap="none">
+            <a:spAutoFit/>
+          </a:bodyPr>
+          <a:lstStyle/>
+          <a:p>
+            <a:pPr algn="ctr"/>
+            <a:r>
+              <a:rPr sz="1100" b="1">
+                <a:solidFill>
+                  <a:srgbClr val="FFFFFF"/>
+                </a:solidFill>
+                <a:latin typeface="微软雅黑"/>
+                <ns10:rFonts xmlns:ns10="http://schemas.openxmlformats.org/wordprocessingml/2006/main" ns10:eastAsia="微软雅黑" ns10:ascii="微软雅黑" ns10:hAnsi="微软雅黑"/>
+              </a:rPr>
+              <a:t>队长</a:t>
+            </a:r>
+          </a:p>
+        </p:txBody>
+      </p:sp>
+      <p:sp>
+        <p:nvSpPr>
+          <p:cNvPr id="22" name="Rectangle 21"/>
+          <p:cNvSpPr/>
+          <p:nvPr/>
+        </p:nvSpPr>
+        <p:spPr>
+          <a:xfrm>
+            <a:off x="5184648" y="2143614"/>
+            <a:ext cx="3575304" cy="477447"/>
+          </a:xfrm>
+          <a:prstGeom prst="rect">
+            <a:avLst/>
+          </a:prstGeom>
+          <a:solidFill>
+            <a:srgbClr val="F1F7FF"/>
+          </a:solidFill>
+          <a:ln>
+            <a:solidFill>
+              <a:srgbClr val="BAC8DC"/>
+            </a:solidFill>
+          </a:ln>
+        </p:spPr>
+        <p:style>
+          <a:lnRef idx="1">
+            <a:schemeClr val="accent1"/>
+          </a:lnRef>
+          <a:fillRef idx="3">
+            <a:schemeClr val="accent1"/>
+          </a:fillRef>
+          <a:effectRef idx="2">
+            <a:schemeClr val="accent1"/>
+          </a:effectRef>
+          <a:fontRef idx="minor">
+            <a:schemeClr val="lt1"/>
+          </a:fontRef>
+        </p:style>
+        <p:txBody>
+          <a:bodyPr rtlCol="0" anchor="ctr"/>
+          <a:lstStyle/>
+          <a:p>
+            <a:pPr algn="ctr"/>
+          </a:p>
+        </p:txBody>
+      </p:sp>
+      <p:sp>
+        <p:nvSpPr>
+          <p:cNvPr id="23" name="TextBox 22"/>
+          <p:cNvSpPr txBox="1"/>
+          <p:nvPr/>
+        </p:nvSpPr>
+        <p:spPr>
+          <a:xfrm>
+            <a:off x="5276088" y="2198478"/>
+            <a:ext cx="3410712" cy="386007"/>
+          </a:xfrm>
+          <a:prstGeom prst="rect">
+            <a:avLst/>
+          </a:prstGeom>
+          <a:noFill/>
+        </p:spPr>
+        <p:txBody>
+          <a:bodyPr wrap="square">
+            <a:spAutoFit/>
+          </a:bodyPr>
+          <a:lstStyle/>
+          <a:p>
+            <a:r>
+              <a:rPr sz="1100" b="1">
+                <a:solidFill>
+                  <a:srgbClr val="143278"/>
+                </a:solidFill>
+                <a:latin typeface="微软雅黑"/>
+                <ns11:rFonts xmlns:ns11="http://schemas.openxmlformats.org/wordprocessingml/2006/main" ns11:eastAsia="微软雅黑" ns11:ascii="微软雅黑" ns11:hAnsi="微软雅黑"/>
+              </a:rPr>
+              <a:t>刘小凡</a:t>
+            </a:r>
+          </a:p>
+        </p:txBody>
+      </p:sp>
+      <p:sp>
+        <p:nvSpPr>
+          <p:cNvPr id="24" name="Rectangle 23"/>
+          <p:cNvSpPr/>
+          <p:nvPr/>
+        </p:nvSpPr>
+        <p:spPr>
+          <a:xfrm>
+            <a:off x="4178808" y="2685070"/>
+            <a:ext cx="960120" cy="477447"/>
+          </a:xfrm>
+          <a:prstGeom prst="rect">
+            <a:avLst/>
+          </a:prstGeom>
+          <a:solidFill>
+            <a:srgbClr val="143278"/>
+          </a:solidFill>
+          <a:ln>
+            <a:noFill/>
+          </a:ln>
+        </p:spPr>
+        <p:style>
+          <a:lnRef idx="1">
+            <a:schemeClr val="accent1"/>
+          </a:lnRef>
+          <a:fillRef idx="3">
+            <a:schemeClr val="accent1"/>
+          </a:fillRef>
+          <a:effectRef idx="2">
+            <a:schemeClr val="accent1"/>
+          </a:effectRef>
+          <a:fontRef idx="minor">
+            <a:schemeClr val="lt1"/>
+          </a:fontRef>
+        </p:style>
+        <p:txBody>
+          <a:bodyPr rtlCol="0" anchor="ctr"/>
+          <a:lstStyle/>
+          <a:p>
+            <a:pPr algn="ctr"/>
+          </a:p>
+        </p:txBody>
+      </p:sp>
+      <p:sp>
+        <p:nvSpPr>
+          <p:cNvPr id="25" name="TextBox 24"/>
+          <p:cNvSpPr txBox="1"/>
+          <p:nvPr/>
+        </p:nvSpPr>
+        <p:spPr>
+          <a:xfrm>
+            <a:off x="4178808" y="2818755"/>
+            <a:ext cx="960120" cy="238723"/>
+          </a:xfrm>
+          <a:prstGeom prst="rect">
+            <a:avLst/>
+          </a:prstGeom>
+          <a:noFill/>
+        </p:spPr>
+        <p:txBody>
+          <a:bodyPr wrap="none">
+            <a:spAutoFit/>
+          </a:bodyPr>
+          <a:lstStyle/>
+          <a:p>
+            <a:pPr algn="ctr"/>
+            <a:r>
+              <a:rPr sz="1100" b="1">
+                <a:solidFill>
+                  <a:srgbClr val="FFFFFF"/>
+                </a:solidFill>
+                <a:latin typeface="微软雅黑"/>
+                <ns12:rFonts xmlns:ns12="http://schemas.openxmlformats.org/wordprocessingml/2006/main" ns12:eastAsia="微软雅黑" ns12:ascii="微软雅黑" ns12:hAnsi="微软雅黑"/>
+              </a:rPr>
+              <a:t>队员</a:t>
+            </a:r>
+          </a:p>
+        </p:txBody>
+      </p:sp>
+      <p:sp>
+        <p:nvSpPr>
+          <p:cNvPr id="26" name="Rectangle 25"/>
+          <p:cNvSpPr/>
+          <p:nvPr/>
+        </p:nvSpPr>
+        <p:spPr>
+          <a:xfrm>
+            <a:off x="5184648" y="2685070"/>
+            <a:ext cx="3575304" cy="477447"/>
+          </a:xfrm>
+          <a:prstGeom prst="rect">
+            <a:avLst/>
+          </a:prstGeom>
+          <a:solidFill>
+            <a:srgbClr val="F1F7FF"/>
+          </a:solidFill>
+          <a:ln>
+            <a:solidFill>
+              <a:srgbClr val="BAC8DC"/>
+            </a:solidFill>
+          </a:ln>
+        </p:spPr>
+        <p:style>
+          <a:lnRef idx="1">
+            <a:schemeClr val="accent1"/>
+          </a:lnRef>
+          <a:fillRef idx="3">
+            <a:schemeClr val="accent1"/>
+          </a:fillRef>
+          <a:effectRef idx="2">
+            <a:schemeClr val="accent1"/>
+          </a:effectRef>
+          <a:fontRef idx="minor">
+            <a:schemeClr val="lt1"/>
+          </a:fontRef>
+        </p:style>
+        <p:txBody>
+          <a:bodyPr rtlCol="0" anchor="ctr"/>
+          <a:lstStyle/>
+          <a:p>
+            <a:pPr algn="ctr"/>
+          </a:p>
+        </p:txBody>
+      </p:sp>
+      <p:sp>
+        <p:nvSpPr>
+          <p:cNvPr id="27" name="TextBox 26"/>
+          <p:cNvSpPr txBox="1"/>
+          <p:nvPr/>
+        </p:nvSpPr>
+        <p:spPr>
+          <a:xfrm>
+            <a:off x="5276088" y="2739934"/>
+            <a:ext cx="3410712" cy="386007"/>
+          </a:xfrm>
+          <a:prstGeom prst="rect">
+            <a:avLst/>
+          </a:prstGeom>
+          <a:noFill/>
+        </p:spPr>
+        <p:txBody>
+          <a:bodyPr wrap="square">
+            <a:spAutoFit/>
+          </a:bodyPr>
+          <a:lstStyle/>
+          <a:p>
+            <a:r>
+              <a:rPr sz="1100" b="1">
+                <a:solidFill>
+                  <a:srgbClr val="143278"/>
+                </a:solidFill>
+                <a:latin typeface="微软雅黑"/>
+                <ns13:rFonts xmlns:ns13="http://schemas.openxmlformats.org/wordprocessingml/2006/main" ns13:eastAsia="微软雅黑" ns13:ascii="微软雅黑" ns13:hAnsi="微软雅黑"/>
+              </a:rPr>
+              <a:t>白冉</a:t>
+            </a:r>
+          </a:p>
+        </p:txBody>
+      </p:sp>
+      <p:sp>
+        <p:nvSpPr>
+          <p:cNvPr id="28" name="Rectangle 27"/>
+          <p:cNvSpPr/>
+          <p:nvPr/>
+        </p:nvSpPr>
+        <p:spPr>
+          <a:xfrm>
+            <a:off x="4178808" y="3226525"/>
+            <a:ext cx="960120" cy="477447"/>
+          </a:xfrm>
+          <a:prstGeom prst="rect">
+            <a:avLst/>
+          </a:prstGeom>
+          <a:solidFill>
+            <a:srgbClr val="143278"/>
+          </a:solidFill>
+          <a:ln>
+            <a:noFill/>
+          </a:ln>
+        </p:spPr>
+        <p:style>
+          <a:lnRef idx="1">
+            <a:schemeClr val="accent1"/>
+          </a:lnRef>
+          <a:fillRef idx="3">
+            <a:schemeClr val="accent1"/>
+          </a:fillRef>
+          <a:effectRef idx="2">
+            <a:schemeClr val="accent1"/>
+          </a:effectRef>
+          <a:fontRef idx="minor">
+            <a:schemeClr val="lt1"/>
+          </a:fontRef>
+        </p:style>
+        <p:txBody>
+          <a:bodyPr rtlCol="0" anchor="ctr"/>
+          <a:lstStyle/>
+          <a:p>
+            <a:pPr algn="ctr"/>
+          </a:p>
+        </p:txBody>
+      </p:sp>
+      <p:sp>
+        <p:nvSpPr>
+          <p:cNvPr id="29" name="TextBox 28"/>
+          <p:cNvSpPr txBox="1"/>
+          <p:nvPr/>
+        </p:nvSpPr>
+        <p:spPr>
+          <a:xfrm>
+            <a:off x="4178808" y="3360210"/>
+            <a:ext cx="960120" cy="238723"/>
+          </a:xfrm>
+          <a:prstGeom prst="rect">
+            <a:avLst/>
+          </a:prstGeom>
+          <a:noFill/>
+        </p:spPr>
+        <p:txBody>
+          <a:bodyPr wrap="none">
+            <a:spAutoFit/>
+          </a:bodyPr>
+          <a:lstStyle/>
+          <a:p>
+            <a:pPr algn="ctr"/>
+            <a:r>
+              <a:rPr sz="1100" b="1">
+                <a:solidFill>
+                  <a:srgbClr val="FFFFFF"/>
+                </a:solidFill>
+                <a:latin typeface="微软雅黑"/>
+                <ns14:rFonts xmlns:ns14="http://schemas.openxmlformats.org/wordprocessingml/2006/main" ns14:eastAsia="微软雅黑" ns14:ascii="微软雅黑" ns14:hAnsi="微软雅黑"/>
+              </a:rPr>
+              <a:t>指导教师</a:t>
+            </a:r>
+          </a:p>
+        </p:txBody>
+      </p:sp>
+      <p:sp>
+        <p:nvSpPr>
+          <p:cNvPr id="30" name="Rectangle 29"/>
+          <p:cNvSpPr/>
+          <p:nvPr/>
+        </p:nvSpPr>
+        <p:spPr>
+          <a:xfrm>
+            <a:off x="5184648" y="3226525"/>
+            <a:ext cx="3575304" cy="477447"/>
+          </a:xfrm>
+          <a:prstGeom prst="rect">
+            <a:avLst/>
+          </a:prstGeom>
+          <a:solidFill>
+            <a:srgbClr val="F1F7FF"/>
+          </a:solidFill>
+          <a:ln>
+            <a:solidFill>
+              <a:srgbClr val="BAC8DC"/>
+            </a:solidFill>
+          </a:ln>
+        </p:spPr>
+        <p:style>
+          <a:lnRef idx="1">
+            <a:schemeClr val="accent1"/>
+          </a:lnRef>
+          <a:fillRef idx="3">
+            <a:schemeClr val="accent1"/>
+          </a:fillRef>
+          <a:effectRef idx="2">
+            <a:schemeClr val="accent1"/>
+          </a:effectRef>
+          <a:fontRef idx="minor">
+            <a:schemeClr val="lt1"/>
+          </a:fontRef>
+        </p:style>
+        <p:txBody>
+          <a:bodyPr rtlCol="0" anchor="ctr"/>
+          <a:lstStyle/>
+          <a:p>
+            <a:pPr algn="ctr"/>
+          </a:p>
+        </p:txBody>
+      </p:sp>
+      <p:sp>
+        <p:nvSpPr>
+          <p:cNvPr id="31" name="TextBox 30"/>
+          <p:cNvSpPr txBox="1"/>
+          <p:nvPr/>
+        </p:nvSpPr>
+        <p:spPr>
+          <a:xfrm>
+            <a:off x="5276088" y="3281389"/>
+            <a:ext cx="3410712" cy="386007"/>
+          </a:xfrm>
+          <a:prstGeom prst="rect">
+            <a:avLst/>
+          </a:prstGeom>
+          <a:noFill/>
+        </p:spPr>
+        <p:txBody>
+          <a:bodyPr wrap="square">
+            <a:spAutoFit/>
+          </a:bodyPr>
+          <a:lstStyle/>
+          <a:p>
+            <a:r>
+              <a:rPr sz="1100" b="1">
+                <a:solidFill>
+                  <a:srgbClr val="143278"/>
+                </a:solidFill>
+                <a:latin typeface="微软雅黑"/>
+                <ns15:rFonts xmlns:ns15="http://schemas.openxmlformats.org/wordprocessingml/2006/main" ns15:eastAsia="微软雅黑" ns15:ascii="微软雅黑" ns15:hAnsi="微软雅黑"/>
+              </a:rPr>
+              <a:t>彭键清</a:t>
+            </a:r>
+          </a:p>
+        </p:txBody>
+      </p:sp>
+      <p:sp>
+        <p:nvSpPr>
+          <p:cNvPr id="32" name="Rectangle 31"/>
+          <p:cNvSpPr/>
+          <p:nvPr/>
+        </p:nvSpPr>
+        <p:spPr>
+          <a:xfrm>
+            <a:off x="4178808" y="3767981"/>
+            <a:ext cx="960120" cy="477447"/>
+          </a:xfrm>
+          <a:prstGeom prst="rect">
+            <a:avLst/>
+          </a:prstGeom>
+          <a:solidFill>
+            <a:srgbClr val="143278"/>
+          </a:solidFill>
+          <a:ln>
+            <a:noFill/>
+          </a:ln>
+        </p:spPr>
+        <p:style>
+          <a:lnRef idx="1">
+            <a:schemeClr val="accent1"/>
+          </a:lnRef>
+          <a:fillRef idx="3">
+            <a:schemeClr val="accent1"/>
+          </a:fillRef>
+          <a:effectRef idx="2">
+            <a:schemeClr val="accent1"/>
+          </a:effectRef>
+          <a:fontRef idx="minor">
+            <a:schemeClr val="lt1"/>
+          </a:fontRef>
+        </p:style>
+        <p:txBody>
+          <a:bodyPr rtlCol="0" anchor="ctr"/>
+          <a:lstStyle/>
+          <a:p>
+            <a:pPr algn="ctr"/>
+          </a:p>
+        </p:txBody>
+      </p:sp>
+      <p:sp>
+        <p:nvSpPr>
+          <p:cNvPr id="33" name="TextBox 32"/>
+          <p:cNvSpPr txBox="1"/>
+          <p:nvPr/>
+        </p:nvSpPr>
+        <p:spPr>
+          <a:xfrm>
+            <a:off x="4178808" y="3901666"/>
+            <a:ext cx="960120" cy="238723"/>
+          </a:xfrm>
+          <a:prstGeom prst="rect">
+            <a:avLst/>
+          </a:prstGeom>
+          <a:noFill/>
+        </p:spPr>
+        <p:txBody>
+          <a:bodyPr wrap="none">
+            <a:spAutoFit/>
+          </a:bodyPr>
+          <a:lstStyle/>
+          <a:p>
+            <a:pPr algn="ctr"/>
+            <a:r>
+              <a:rPr sz="1100" b="1">
+                <a:solidFill>
+                  <a:srgbClr val="FFFFFF"/>
+                </a:solidFill>
+                <a:latin typeface="微软雅黑"/>
+                <ns16:rFonts xmlns:ns16="http://schemas.openxmlformats.org/wordprocessingml/2006/main" ns16:eastAsia="微软雅黑" ns16:ascii="微软雅黑" ns16:hAnsi="微软雅黑"/>
+              </a:rPr>
+              <a:t>团队编号</a:t>
+            </a:r>
+          </a:p>
+        </p:txBody>
+      </p:sp>
+      <p:sp>
+        <p:nvSpPr>
+          <p:cNvPr id="34" name="Rectangle 33"/>
+          <p:cNvSpPr/>
+          <p:nvPr/>
+        </p:nvSpPr>
+        <p:spPr>
+          <a:xfrm>
+            <a:off x="5184648" y="3767981"/>
+            <a:ext cx="3575304" cy="477447"/>
+          </a:xfrm>
+          <a:prstGeom prst="rect">
+            <a:avLst/>
+          </a:prstGeom>
+          <a:solidFill>
+            <a:srgbClr val="F1F7FF"/>
+          </a:solidFill>
+          <a:ln>
+            <a:solidFill>
+              <a:srgbClr val="BAC8DC"/>
+            </a:solidFill>
+          </a:ln>
+        </p:spPr>
+        <p:style>
+          <a:lnRef idx="1">
+            <a:schemeClr val="accent1"/>
+          </a:lnRef>
+          <a:fillRef idx="3">
+            <a:schemeClr val="accent1"/>
+          </a:fillRef>
+          <a:effectRef idx="2">
+            <a:schemeClr val="accent1"/>
+          </a:effectRef>
+          <a:fontRef idx="minor">
+            <a:schemeClr val="lt1"/>
+          </a:fontRef>
+        </p:style>
+        <p:txBody>
+          <a:bodyPr rtlCol="0" anchor="ctr"/>
+          <a:lstStyle/>
+          <a:p>
+            <a:pPr algn="ctr"/>
+          </a:p>
+        </p:txBody>
+      </p:sp>
+      <p:sp>
+        <p:nvSpPr>
+          <p:cNvPr id="35" name="TextBox 34"/>
+          <p:cNvSpPr txBox="1"/>
+          <p:nvPr/>
+        </p:nvSpPr>
+        <p:spPr>
+          <a:xfrm>
+            <a:off x="5276088" y="3822845"/>
+            <a:ext cx="3410712" cy="386007"/>
+          </a:xfrm>
+          <a:prstGeom prst="rect">
+            <a:avLst/>
+          </a:prstGeom>
+          <a:noFill/>
+        </p:spPr>
+        <p:txBody>
+          <a:bodyPr wrap="square">
+            <a:spAutoFit/>
+          </a:bodyPr>
+          <a:lstStyle/>
+          <a:p>
+            <a:r>
+              <a:rPr sz="1100" b="1">
+                <a:solidFill>
+                  <a:srgbClr val="143278"/>
+                </a:solidFill>
+                <a:latin typeface="微软雅黑"/>
+                <ns17:rFonts xmlns:ns17="http://schemas.openxmlformats.org/wordprocessingml/2006/main" ns17:eastAsia="微软雅黑" ns17:ascii="微软雅黑" ns17:hAnsi="微软雅黑"/>
+              </a:rPr>
+              <a:t>CRAIC2026-TEAM-8FJQKLMI</a:t>
+            </a:r>
+          </a:p>
+        </p:txBody>
+      </p:sp>
+      <p:sp>
+        <p:nvSpPr>
+          <p:cNvPr id="36" name="Rectangle 35"/>
+          <p:cNvSpPr/>
+          <p:nvPr/>
+        </p:nvSpPr>
+        <p:spPr>
+          <a:xfrm>
+            <a:off x="4178808" y="4309436"/>
+            <a:ext cx="960120" cy="477447"/>
+          </a:xfrm>
+          <a:prstGeom prst="rect">
+            <a:avLst/>
+          </a:prstGeom>
+          <a:solidFill>
+            <a:srgbClr val="143278"/>
+          </a:solidFill>
+          <a:ln>
+            <a:noFill/>
+          </a:ln>
+        </p:spPr>
+        <p:style>
+          <a:lnRef idx="1">
+            <a:schemeClr val="accent1"/>
+          </a:lnRef>
+          <a:fillRef idx="3">
+            <a:schemeClr val="accent1"/>
+          </a:fillRef>
+          <a:effectRef idx="2">
+            <a:schemeClr val="accent1"/>
+          </a:effectRef>
+          <a:fontRef idx="minor">
+            <a:schemeClr val="lt1"/>
+          </a:fontRef>
+        </p:style>
+        <p:txBody>
+          <a:bodyPr rtlCol="0" anchor="ctr"/>
+          <a:lstStyle/>
+          <a:p>
+            <a:pPr algn="ctr"/>
+          </a:p>
+        </p:txBody>
+      </p:sp>
+      <p:sp>
+        <p:nvSpPr>
+          <p:cNvPr id="37" name="TextBox 36"/>
+          <p:cNvSpPr txBox="1"/>
+          <p:nvPr/>
+        </p:nvSpPr>
+        <p:spPr>
+          <a:xfrm>
+            <a:off x="4178808" y="4443121"/>
+            <a:ext cx="960120" cy="238723"/>
+          </a:xfrm>
+          <a:prstGeom prst="rect">
+            <a:avLst/>
+          </a:prstGeom>
+          <a:noFill/>
+        </p:spPr>
+        <p:txBody>
+          <a:bodyPr wrap="none">
+            <a:spAutoFit/>
+          </a:bodyPr>
+          <a:lstStyle/>
+          <a:p>
+            <a:pPr algn="ctr"/>
+            <a:r>
+              <a:rPr sz="1100" b="1">
+                <a:solidFill>
+                  <a:srgbClr val="FFFFFF"/>
+                </a:solidFill>
+                <a:latin typeface="微软雅黑"/>
+                <ns18:rFonts xmlns:ns18="http://schemas.openxmlformats.org/wordprocessingml/2006/main" ns18:eastAsia="微软雅黑" ns18:ascii="微软雅黑" ns18:hAnsi="微软雅黑"/>
+              </a:rPr>
+              <a:t>作品编号</a:t>
+            </a:r>
+          </a:p>
+        </p:txBody>
+      </p:sp>
+      <p:sp>
+        <p:nvSpPr>
+          <p:cNvPr id="38" name="Rectangle 37"/>
+          <p:cNvSpPr/>
+          <p:nvPr/>
+        </p:nvSpPr>
+        <p:spPr>
+          <a:xfrm>
+            <a:off x="5184648" y="4309436"/>
+            <a:ext cx="3575304" cy="477447"/>
+          </a:xfrm>
+          <a:prstGeom prst="rect">
+            <a:avLst/>
+          </a:prstGeom>
+          <a:solidFill>
+            <a:srgbClr val="F1F7FF"/>
+          </a:solidFill>
+          <a:ln>
+            <a:solidFill>
+              <a:srgbClr val="BAC8DC"/>
+            </a:solidFill>
+          </a:ln>
+        </p:spPr>
+        <p:style>
+          <a:lnRef idx="1">
+            <a:schemeClr val="accent1"/>
+          </a:lnRef>
+          <a:fillRef idx="3">
+            <a:schemeClr val="accent1"/>
+          </a:fillRef>
+          <a:effectRef idx="2">
+            <a:schemeClr val="accent1"/>
+          </a:effectRef>
+          <a:fontRef idx="minor">
+            <a:schemeClr val="lt1"/>
+          </a:fontRef>
+        </p:style>
+        <p:txBody>
+          <a:bodyPr rtlCol="0" anchor="ctr"/>
+          <a:lstStyle/>
+          <a:p>
+            <a:pPr algn="ctr"/>
+          </a:p>
+        </p:txBody>
+      </p:sp>
+      <p:sp>
+        <p:nvSpPr>
+          <p:cNvPr id="39" name="TextBox 38"/>
+          <p:cNvSpPr txBox="1"/>
+          <p:nvPr/>
+        </p:nvSpPr>
+        <p:spPr>
+          <a:xfrm>
+            <a:off x="5276088" y="4364300"/>
+            <a:ext cx="3410712" cy="386007"/>
+          </a:xfrm>
+          <a:prstGeom prst="rect">
+            <a:avLst/>
+          </a:prstGeom>
+          <a:noFill/>
+        </p:spPr>
+        <p:txBody>
+          <a:bodyPr wrap="square">
+            <a:spAutoFit/>
+          </a:bodyPr>
+          <a:lstStyle/>
+          <a:p>
+            <a:r>
+              <a:rPr sz="1100" b="1">
+                <a:solidFill>
+                  <a:srgbClr val="143278"/>
+                </a:solidFill>
+                <a:latin typeface="微软雅黑"/>
+                <ns19:rFonts xmlns:ns19="http://schemas.openxmlformats.org/wordprocessingml/2006/main" ns19:eastAsia="微软雅黑" ns19:ascii="微软雅黑" ns19:hAnsi="微软雅黑"/>
+              </a:rPr>
+              <a:t>CRAIC20264ZEFT1DF</a:t>
             </a:r>
           </a:p>
         </p:txBody>
@@ -16387,8 +17301,8 @@
         </p:nvSpPr>
         <p:spPr>
           <a:xfrm>
-            <a:off x="475488" y="1161288"/>
-            <a:ext cx="3300984" cy="3525012"/>
+            <a:off x="475488" y="1143000"/>
+            <a:ext cx="3300984" cy="3579876"/>
           </a:xfrm>
           <a:prstGeom prst="rect">
             <a:avLst/>
@@ -16406,7 +17320,7 @@
                 <a:spcPct val="120000"/>
               </a:lnSpc>
               <a:spcAft>
-                <a:spcPts val="6900"/>
+                <a:spcPts val="7100"/>
               </a:spcAft>
             </a:pPr>
             <a:r>
@@ -16426,7 +17340,7 @@
                 <a:spcPct val="120000"/>
               </a:lnSpc>
               <a:spcAft>
-                <a:spcPts val="6900"/>
+                <a:spcPts val="7100"/>
               </a:spcAft>
             </a:pPr>
             <a:r>
@@ -16446,7 +17360,7 @@
                 <a:spcPct val="120000"/>
               </a:lnSpc>
               <a:spcAft>
-                <a:spcPts val="6900"/>
+                <a:spcPts val="7100"/>
               </a:spcAft>
             </a:pPr>
             <a:r>
@@ -16466,7 +17380,7 @@
                 <a:spcPct val="120000"/>
               </a:lnSpc>
               <a:spcAft>
-                <a:spcPts val="6900"/>
+                <a:spcPts val="7100"/>
               </a:spcAft>
             </a:pPr>
             <a:r>
@@ -17868,8 +18782,8 @@
         </p:blipFill>
         <p:spPr>
           <a:xfrm>
-            <a:off x="4398264" y="1198237"/>
-            <a:ext cx="4690872" cy="3451113"/>
+            <a:off x="4398264" y="1113481"/>
+            <a:ext cx="4690872" cy="3620624"/>
           </a:xfrm>
           <a:prstGeom prst="rect">
             <a:avLst/>
@@ -18147,7 +19061,7 @@
         <p:spPr>
           <a:xfrm>
             <a:off x="274320" y="996696"/>
-            <a:ext cx="3611880" cy="3451860"/>
+            <a:ext cx="3611880" cy="3854196"/>
           </a:xfrm>
           <a:prstGeom prst="rect">
             <a:avLst/>
@@ -18192,7 +19106,7 @@
         <p:spPr>
           <a:xfrm>
             <a:off x="274320" y="996696"/>
-            <a:ext cx="73152" cy="3451860"/>
+            <a:ext cx="73152" cy="3854196"/>
           </a:xfrm>
           <a:prstGeom prst="rect">
             <a:avLst/>
@@ -18228,14 +19142,93 @@
       </p:sp>
       <p:sp>
         <p:nvSpPr>
-          <p:cNvPr id="10" name="TextBox 9"/>
+          <p:cNvPr id="10" name="Rectangle 9"/>
+          <p:cNvSpPr/>
+          <p:nvPr/>
+        </p:nvSpPr>
+        <p:spPr>
+          <a:xfrm>
+            <a:off x="347472" y="4503420"/>
+            <a:ext cx="3465576" cy="310896"/>
+          </a:xfrm>
+          <a:prstGeom prst="rect">
+            <a:avLst/>
+          </a:prstGeom>
+          <a:solidFill>
+            <a:srgbClr val="143278"/>
+          </a:solidFill>
+          <a:ln>
+            <a:noFill/>
+          </a:ln>
+        </p:spPr>
+        <p:style>
+          <a:lnRef idx="1">
+            <a:schemeClr val="accent1"/>
+          </a:lnRef>
+          <a:fillRef idx="3">
+            <a:schemeClr val="accent1"/>
+          </a:fillRef>
+          <a:effectRef idx="2">
+            <a:schemeClr val="accent1"/>
+          </a:effectRef>
+          <a:fontRef idx="minor">
+            <a:schemeClr val="lt1"/>
+          </a:fontRef>
+        </p:style>
+        <p:txBody>
+          <a:bodyPr rtlCol="0" anchor="ctr"/>
+          <a:lstStyle/>
+          <a:p>
+            <a:pPr algn="ctr"/>
+          </a:p>
+        </p:txBody>
+      </p:sp>
+      <p:sp>
+        <p:nvSpPr>
+          <p:cNvPr id="11" name="TextBox 10"/>
           <p:cNvSpPr txBox="1"/>
           <p:nvPr/>
         </p:nvSpPr>
         <p:spPr>
           <a:xfrm>
-            <a:off x="475488" y="1161288"/>
-            <a:ext cx="3300984" cy="3122676"/>
+            <a:off x="402336" y="4576572"/>
+            <a:ext cx="3355848" cy="237744"/>
+          </a:xfrm>
+          <a:prstGeom prst="rect">
+            <a:avLst/>
+          </a:prstGeom>
+          <a:noFill/>
+        </p:spPr>
+        <p:txBody>
+          <a:bodyPr wrap="none">
+            <a:spAutoFit/>
+          </a:bodyPr>
+          <a:lstStyle/>
+          <a:p>
+            <a:pPr algn="ctr"/>
+            <a:r>
+              <a:rPr sz="1100" b="1">
+                <a:solidFill>
+                  <a:srgbClr val="FFFFFF"/>
+                </a:solidFill>
+                <a:latin typeface="微软雅黑"/>
+                <ns3:rFonts xmlns:ns3="http://schemas.openxmlformats.org/wordprocessingml/2006/main" ns3:eastAsia="微软雅黑" ns3:ascii="微软雅黑" ns3:hAnsi="微软雅黑"/>
+              </a:rPr>
+              <a:t>痛点：发现慢 + 闭环弱</a:t>
+            </a:r>
+          </a:p>
+        </p:txBody>
+      </p:sp>
+      <p:sp>
+        <p:nvSpPr>
+          <p:cNvPr id="12" name="TextBox 11"/>
+          <p:cNvSpPr txBox="1"/>
+          <p:nvPr/>
+        </p:nvSpPr>
+        <p:spPr>
+          <a:xfrm>
+            <a:off x="475488" y="1143000"/>
+            <a:ext cx="3300984" cy="3232404"/>
           </a:xfrm>
           <a:prstGeom prst="rect">
             <a:avLst/>
@@ -18253,7 +19246,7 @@
                 <a:spcPct val="120000"/>
               </a:lnSpc>
               <a:spcAft>
-                <a:spcPts val="5900"/>
+                <a:spcPts val="6200"/>
               </a:spcAft>
             </a:pPr>
             <a:r>
@@ -18262,7 +19255,7 @@
                   <a:srgbClr val="1C202C"/>
                 </a:solidFill>
                 <a:latin typeface="微软雅黑"/>
-                <ns3:rFonts xmlns:ns3="http://schemas.openxmlformats.org/wordprocessingml/2006/main" ns3:eastAsia="微软雅黑" ns3:ascii="微软雅黑" ns3:hAnsi="微软雅黑"/>
+                <ns4:rFonts xmlns:ns4="http://schemas.openxmlformats.org/wordprocessingml/2006/main" ns4:eastAsia="微软雅黑" ns4:ascii="微软雅黑" ns4:hAnsi="微软雅黑"/>
               </a:rPr>
               <a:t>● 独居老人增多，跌倒后「发现空窗」是核心痛点</a:t>
             </a:r>
@@ -18273,7 +19266,7 @@
                 <a:spcPct val="120000"/>
               </a:lnSpc>
               <a:spcAft>
-                <a:spcPts val="5900"/>
+                <a:spcPts val="6200"/>
               </a:spcAft>
             </a:pPr>
             <a:r>
@@ -18282,7 +19275,7 @@
                   <a:srgbClr val="1C202C"/>
                 </a:solidFill>
                 <a:latin typeface="微软雅黑"/>
-                <ns4:rFonts xmlns:ns4="http://schemas.openxmlformats.org/wordprocessingml/2006/main" ns4:eastAsia="微软雅黑" ns4:ascii="微软雅黑" ns4:hAnsi="微软雅黑"/>
+                <ns5:rFonts xmlns:ns5="http://schemas.openxmlformats.org/wordprocessingml/2006/main" ns5:eastAsia="微软雅黑" ns5:ascii="微软雅黑" ns5:hAnsi="微软雅黑"/>
               </a:rPr>
               <a:t>● 情感陪伴需求上升，监测设备难以形成照护闭环</a:t>
             </a:r>
@@ -18293,7 +19286,7 @@
                 <a:spcPct val="120000"/>
               </a:lnSpc>
               <a:spcAft>
-                <a:spcPts val="5900"/>
+                <a:spcPts val="6200"/>
               </a:spcAft>
             </a:pPr>
             <a:r>
@@ -18302,7 +19295,7 @@
                   <a:srgbClr val="1C202C"/>
                 </a:solidFill>
                 <a:latin typeface="微软雅黑"/>
-                <ns5:rFonts xmlns:ns5="http://schemas.openxmlformats.org/wordprocessingml/2006/main" ns5:eastAsia="微软雅黑" ns5:ascii="微软雅黑" ns5:hAnsi="微软雅黑"/>
+                <ns6:rFonts xmlns:ns6="http://schemas.openxmlformats.org/wordprocessingml/2006/main" ns6:eastAsia="微软雅黑" ns6:ascii="微软雅黑" ns6:hAnsi="微软雅黑"/>
               </a:rPr>
               <a:t>● 政策导向：智慧养老与居家安全并重</a:t>
             </a:r>
@@ -18313,7 +19306,7 @@
                 <a:spcPct val="120000"/>
               </a:lnSpc>
               <a:spcAft>
-                <a:spcPts val="5900"/>
+                <a:spcPts val="6200"/>
               </a:spcAft>
             </a:pPr>
             <a:r>
@@ -18322,7 +19315,7 @@
                   <a:srgbClr val="143278"/>
                 </a:solidFill>
                 <a:latin typeface="微软雅黑"/>
-                <ns6:rFonts xmlns:ns6="http://schemas.openxmlformats.org/wordprocessingml/2006/main" ns6:eastAsia="微软雅黑" ns6:ascii="微软雅黑" ns6:hAnsi="微软雅黑"/>
+                <ns7:rFonts xmlns:ns7="http://schemas.openxmlformats.org/wordprocessingml/2006/main" ns7:eastAsia="微软雅黑" ns7:ascii="微软雅黑" ns7:hAnsi="微软雅黑"/>
               </a:rPr>
               <a:t>● 本项目聚焦可落地的仿真验证与人形接口</a:t>
             </a:r>
@@ -18331,14 +19324,14 @@
       </p:sp>
       <p:sp>
         <p:nvSpPr>
-          <p:cNvPr id="11" name="Rectangle 10"/>
+          <p:cNvPr id="13" name="Rectangle 12"/>
           <p:cNvSpPr/>
           <p:nvPr/>
         </p:nvSpPr>
         <p:spPr>
           <a:xfrm>
-            <a:off x="4023360" y="1020713"/>
-            <a:ext cx="4892040" cy="3806161"/>
+            <a:off x="4023360" y="933975"/>
+            <a:ext cx="4892040" cy="3979637"/>
           </a:xfrm>
           <a:prstGeom prst="rect">
             <a:avLst/>
@@ -18376,7 +19369,7 @@
       </p:sp>
       <p:pic>
         <p:nvPicPr>
-          <p:cNvPr id="12" name="Picture 11" descr="aging_chart.png"/>
+          <p:cNvPr id="14" name="Picture 13" descr="aging_chart.png"/>
           <p:cNvPicPr>
             <a:picLocks noChangeAspect="1"/>
           </p:cNvPicPr>
@@ -18390,8 +19383,8 @@
         </p:blipFill>
         <p:spPr>
           <a:xfrm>
-            <a:off x="4069080" y="1066433"/>
-            <a:ext cx="4800600" cy="3531841"/>
+            <a:off x="4069080" y="979695"/>
+            <a:ext cx="4800600" cy="3705317"/>
           </a:xfrm>
           <a:prstGeom prst="rect">
             <a:avLst/>
@@ -18400,13 +19393,13 @@
       </p:pic>
       <p:sp>
         <p:nvSpPr>
-          <p:cNvPr id="13" name="TextBox 12"/>
+          <p:cNvPr id="15" name="TextBox 14"/>
           <p:cNvSpPr txBox="1"/>
           <p:nvPr/>
         </p:nvSpPr>
         <p:spPr>
           <a:xfrm>
-            <a:off x="4069080" y="4653138"/>
+            <a:off x="4069080" y="4739876"/>
             <a:ext cx="4800600" cy="182880"/>
           </a:xfrm>
           <a:prstGeom prst="rect">
@@ -18427,88 +19420,9 @@
                   <a:srgbClr val="5A6273"/>
                 </a:solidFill>
                 <a:latin typeface="微软雅黑"/>
-                <ns7:rFonts xmlns:ns7="http://schemas.openxmlformats.org/wordprocessingml/2006/main" ns7:eastAsia="微软雅黑" ns7:ascii="微软雅黑" ns7:hAnsi="微软雅黑"/>
-              </a:rPr>
-              <a:t>理论框图</a:t>
-            </a:r>
-          </a:p>
-        </p:txBody>
-      </p:sp>
-      <p:sp>
-        <p:nvSpPr>
-          <p:cNvPr id="14" name="Rectangle 13"/>
-          <p:cNvSpPr/>
-          <p:nvPr/>
-        </p:nvSpPr>
-        <p:spPr>
-          <a:xfrm>
-            <a:off x="274320" y="4539996"/>
-            <a:ext cx="3611880" cy="310896"/>
-          </a:xfrm>
-          <a:prstGeom prst="rect">
-            <a:avLst/>
-          </a:prstGeom>
-          <a:solidFill>
-            <a:srgbClr val="143278"/>
-          </a:solidFill>
-          <a:ln>
-            <a:noFill/>
-          </a:ln>
-        </p:spPr>
-        <p:style>
-          <a:lnRef idx="1">
-            <a:schemeClr val="accent1"/>
-          </a:lnRef>
-          <a:fillRef idx="3">
-            <a:schemeClr val="accent1"/>
-          </a:fillRef>
-          <a:effectRef idx="2">
-            <a:schemeClr val="accent1"/>
-          </a:effectRef>
-          <a:fontRef idx="minor">
-            <a:schemeClr val="lt1"/>
-          </a:fontRef>
-        </p:style>
-        <p:txBody>
-          <a:bodyPr rtlCol="0" anchor="ctr"/>
-          <a:lstStyle/>
-          <a:p>
-            <a:pPr algn="ctr"/>
-          </a:p>
-        </p:txBody>
-      </p:sp>
-      <p:sp>
-        <p:nvSpPr>
-          <p:cNvPr id="15" name="TextBox 14"/>
-          <p:cNvSpPr txBox="1"/>
-          <p:nvPr/>
-        </p:nvSpPr>
-        <p:spPr>
-          <a:xfrm>
-            <a:off x="384048" y="4604004"/>
-            <a:ext cx="3392424" cy="219456"/>
-          </a:xfrm>
-          <a:prstGeom prst="rect">
-            <a:avLst/>
-          </a:prstGeom>
-          <a:noFill/>
-        </p:spPr>
-        <p:txBody>
-          <a:bodyPr wrap="none">
-            <a:spAutoFit/>
-          </a:bodyPr>
-          <a:lstStyle/>
-          <a:p>
-            <a:pPr algn="ctr"/>
-            <a:r>
-              <a:rPr sz="1100" b="1">
-                <a:solidFill>
-                  <a:srgbClr val="FFFFFF"/>
-                </a:solidFill>
-                <a:latin typeface="微软雅黑"/>
                 <ns8:rFonts xmlns:ns8="http://schemas.openxmlformats.org/wordprocessingml/2006/main" ns8:eastAsia="微软雅黑" ns8:ascii="微软雅黑" ns8:hAnsi="微软雅黑"/>
               </a:rPr>
-              <a:t>痛点：发现慢 + 闭环弱</a:t>
+              <a:t>国家统计局趋势示意</a:t>
             </a:r>
           </a:p>
         </p:txBody>
@@ -18784,7 +19698,7 @@
         <p:spPr>
           <a:xfrm>
             <a:off x="274320" y="996696"/>
-            <a:ext cx="3611880" cy="3451860"/>
+            <a:ext cx="3611880" cy="3854196"/>
           </a:xfrm>
           <a:prstGeom prst="rect">
             <a:avLst/>
@@ -18829,7 +19743,7 @@
         <p:spPr>
           <a:xfrm>
             <a:off x="274320" y="996696"/>
-            <a:ext cx="73152" cy="3451860"/>
+            <a:ext cx="73152" cy="3854196"/>
           </a:xfrm>
           <a:prstGeom prst="rect">
             <a:avLst/>
@@ -18865,14 +19779,93 @@
       </p:sp>
       <p:sp>
         <p:nvSpPr>
-          <p:cNvPr id="10" name="TextBox 9"/>
+          <p:cNvPr id="10" name="Rectangle 9"/>
+          <p:cNvSpPr/>
+          <p:nvPr/>
+        </p:nvSpPr>
+        <p:spPr>
+          <a:xfrm>
+            <a:off x="347472" y="4503420"/>
+            <a:ext cx="3465576" cy="310896"/>
+          </a:xfrm>
+          <a:prstGeom prst="rect">
+            <a:avLst/>
+          </a:prstGeom>
+          <a:solidFill>
+            <a:srgbClr val="143278"/>
+          </a:solidFill>
+          <a:ln>
+            <a:noFill/>
+          </a:ln>
+        </p:spPr>
+        <p:style>
+          <a:lnRef idx="1">
+            <a:schemeClr val="accent1"/>
+          </a:lnRef>
+          <a:fillRef idx="3">
+            <a:schemeClr val="accent1"/>
+          </a:fillRef>
+          <a:effectRef idx="2">
+            <a:schemeClr val="accent1"/>
+          </a:effectRef>
+          <a:fontRef idx="minor">
+            <a:schemeClr val="lt1"/>
+          </a:fontRef>
+        </p:style>
+        <p:txBody>
+          <a:bodyPr rtlCol="0" anchor="ctr"/>
+          <a:lstStyle/>
+          <a:p>
+            <a:pPr algn="ctr"/>
+          </a:p>
+        </p:txBody>
+      </p:sp>
+      <p:sp>
+        <p:nvSpPr>
+          <p:cNvPr id="11" name="TextBox 10"/>
           <p:cNvSpPr txBox="1"/>
           <p:nvPr/>
         </p:nvSpPr>
         <p:spPr>
           <a:xfrm>
-            <a:off x="475488" y="1161288"/>
-            <a:ext cx="3300984" cy="3122676"/>
+            <a:off x="402336" y="4576572"/>
+            <a:ext cx="3355848" cy="237744"/>
+          </a:xfrm>
+          <a:prstGeom prst="rect">
+            <a:avLst/>
+          </a:prstGeom>
+          <a:noFill/>
+        </p:spPr>
+        <p:txBody>
+          <a:bodyPr wrap="none">
+            <a:spAutoFit/>
+          </a:bodyPr>
+          <a:lstStyle/>
+          <a:p>
+            <a:pPr algn="ctr"/>
+            <a:r>
+              <a:rPr sz="1100" b="1">
+                <a:solidFill>
+                  <a:srgbClr val="FFFFFF"/>
+                </a:solidFill>
+                <a:latin typeface="微软雅黑"/>
+                <ns3:rFonts xmlns:ns3="http://schemas.openxmlformats.org/wordprocessingml/2006/main" ns3:eastAsia="微软雅黑" ns3:ascii="微软雅黑" ns3:hAnsi="微软雅黑"/>
+              </a:rPr>
+              <a:t>从堆叠到一体化闭环</a:t>
+            </a:r>
+          </a:p>
+        </p:txBody>
+      </p:sp>
+      <p:sp>
+        <p:nvSpPr>
+          <p:cNvPr id="12" name="TextBox 11"/>
+          <p:cNvSpPr txBox="1"/>
+          <p:nvPr/>
+        </p:nvSpPr>
+        <p:spPr>
+          <a:xfrm>
+            <a:off x="475488" y="1143000"/>
+            <a:ext cx="3300984" cy="3232404"/>
           </a:xfrm>
           <a:prstGeom prst="rect">
             <a:avLst/>
@@ -18890,7 +19883,7 @@
                 <a:spcPct val="120000"/>
               </a:lnSpc>
               <a:spcAft>
-                <a:spcPts val="5900"/>
+                <a:spcPts val="6200"/>
               </a:spcAft>
             </a:pPr>
             <a:r>
@@ -18899,7 +19892,7 @@
                   <a:srgbClr val="1C202C"/>
                 </a:solidFill>
                 <a:latin typeface="微软雅黑"/>
-                <ns3:rFonts xmlns:ns3="http://schemas.openxmlformats.org/wordprocessingml/2006/main" ns3:eastAsia="微软雅黑" ns3:ascii="微软雅黑" ns3:hAnsi="微软雅黑"/>
+                <ns4:rFonts xmlns:ns4="http://schemas.openxmlformats.org/wordprocessingml/2006/main" ns4:eastAsia="微软雅黑" ns4:ascii="微软雅黑" ns4:hAnsi="微软雅黑"/>
               </a:rPr>
               <a:t>● 传统音箱/摄像头/手环：功能割裂</a:t>
             </a:r>
@@ -18910,7 +19903,7 @@
                 <a:spcPct val="120000"/>
               </a:lnSpc>
               <a:spcAft>
-                <a:spcPts val="5900"/>
+                <a:spcPts val="6200"/>
               </a:spcAft>
             </a:pPr>
             <a:r>
@@ -18919,7 +19912,7 @@
                   <a:srgbClr val="1C202C"/>
                 </a:solidFill>
                 <a:latin typeface="微软雅黑"/>
-                <ns4:rFonts xmlns:ns4="http://schemas.openxmlformats.org/wordprocessingml/2006/main" ns4:eastAsia="微软雅黑" ns4:ascii="微软雅黑" ns4:hAnsi="微软雅黑"/>
+                <ns5:rFonts xmlns:ns5="http://schemas.openxmlformats.org/wordprocessingml/2006/main" ns5:eastAsia="微软雅黑" ns5:ascii="微软雅黑" ns5:hAnsi="微软雅黑"/>
               </a:rPr>
               <a:t>● 本作品：感知—决策—执行统一编排</a:t>
             </a:r>
@@ -18930,7 +19923,7 @@
                 <a:spcPct val="120000"/>
               </a:lnSpc>
               <a:spcAft>
-                <a:spcPts val="5900"/>
+                <a:spcPts val="6200"/>
               </a:spcAft>
             </a:pPr>
             <a:r>
@@ -18939,7 +19932,7 @@
                   <a:srgbClr val="1C202C"/>
                 </a:solidFill>
                 <a:latin typeface="微软雅黑"/>
-                <ns5:rFonts xmlns:ns5="http://schemas.openxmlformats.org/wordprocessingml/2006/main" ns5:eastAsia="微软雅黑" ns5:ascii="微软雅黑" ns5:hAnsi="微软雅黑"/>
+                <ns6:rFonts xmlns:ns6="http://schemas.openxmlformats.org/wordprocessingml/2006/main" ns6:eastAsia="微软雅黑" ns6:ascii="微软雅黑" ns6:hAnsi="微软雅黑"/>
               </a:rPr>
               <a:t>● 强调可解释风险与紧急硬优先级</a:t>
             </a:r>
@@ -18950,7 +19943,7 @@
                 <a:spcPct val="120000"/>
               </a:lnSpc>
               <a:spcAft>
-                <a:spcPts val="5900"/>
+                <a:spcPts val="6200"/>
               </a:spcAft>
             </a:pPr>
             <a:r>
@@ -18959,7 +19952,7 @@
                   <a:srgbClr val="1C202C"/>
                 </a:solidFill>
                 <a:latin typeface="微软雅黑"/>
-                <ns6:rFonts xmlns:ns6="http://schemas.openxmlformats.org/wordprocessingml/2006/main" ns6:eastAsia="微软雅黑" ns6:ascii="微软雅黑" ns6:hAnsi="微软雅黑"/>
+                <ns7:rFonts xmlns:ns7="http://schemas.openxmlformats.org/wordprocessingml/2006/main" ns7:eastAsia="微软雅黑" ns7:ascii="微软雅黑" ns7:hAnsi="微软雅黑"/>
               </a:rPr>
               <a:t>● 配套 Web 演示与量化评测脚本</a:t>
             </a:r>
@@ -18968,7 +19961,7 @@
       </p:sp>
       <p:sp>
         <p:nvSpPr>
-          <p:cNvPr id="11" name="Rectangle 10"/>
+          <p:cNvPr id="13" name="Rectangle 12"/>
           <p:cNvSpPr/>
           <p:nvPr/>
         </p:nvSpPr>
@@ -19013,7 +20006,7 @@
       </p:sp>
       <p:pic>
         <p:nvPicPr>
-          <p:cNvPr id="12" name="Picture 11" descr="compare.png"/>
+          <p:cNvPr id="14" name="Picture 13" descr="compare.png"/>
           <p:cNvPicPr>
             <a:picLocks noChangeAspect="1"/>
           </p:cNvPicPr>
@@ -19037,7 +20030,7 @@
       </p:pic>
       <p:sp>
         <p:nvSpPr>
-          <p:cNvPr id="13" name="TextBox 12"/>
+          <p:cNvPr id="15" name="TextBox 14"/>
           <p:cNvSpPr txBox="1"/>
           <p:nvPr/>
         </p:nvSpPr>
@@ -19064,88 +20057,9 @@
                   <a:srgbClr val="5A6273"/>
                 </a:solidFill>
                 <a:latin typeface="微软雅黑"/>
-                <ns7:rFonts xmlns:ns7="http://schemas.openxmlformats.org/wordprocessingml/2006/main" ns7:eastAsia="微软雅黑" ns7:ascii="微软雅黑" ns7:hAnsi="微软雅黑"/>
+                <ns8:rFonts xmlns:ns8="http://schemas.openxmlformats.org/wordprocessingml/2006/main" ns8:eastAsia="微软雅黑" ns8:ascii="微软雅黑" ns8:hAnsi="微软雅黑"/>
               </a:rPr>
               <a:t>理论框图</a:t>
-            </a:r>
-          </a:p>
-        </p:txBody>
-      </p:sp>
-      <p:sp>
-        <p:nvSpPr>
-          <p:cNvPr id="14" name="Rectangle 13"/>
-          <p:cNvSpPr/>
-          <p:nvPr/>
-        </p:nvSpPr>
-        <p:spPr>
-          <a:xfrm>
-            <a:off x="274320" y="4539996"/>
-            <a:ext cx="3611880" cy="310896"/>
-          </a:xfrm>
-          <a:prstGeom prst="rect">
-            <a:avLst/>
-          </a:prstGeom>
-          <a:solidFill>
-            <a:srgbClr val="143278"/>
-          </a:solidFill>
-          <a:ln>
-            <a:noFill/>
-          </a:ln>
-        </p:spPr>
-        <p:style>
-          <a:lnRef idx="1">
-            <a:schemeClr val="accent1"/>
-          </a:lnRef>
-          <a:fillRef idx="3">
-            <a:schemeClr val="accent1"/>
-          </a:fillRef>
-          <a:effectRef idx="2">
-            <a:schemeClr val="accent1"/>
-          </a:effectRef>
-          <a:fontRef idx="minor">
-            <a:schemeClr val="lt1"/>
-          </a:fontRef>
-        </p:style>
-        <p:txBody>
-          <a:bodyPr rtlCol="0" anchor="ctr"/>
-          <a:lstStyle/>
-          <a:p>
-            <a:pPr algn="ctr"/>
-          </a:p>
-        </p:txBody>
-      </p:sp>
-      <p:sp>
-        <p:nvSpPr>
-          <p:cNvPr id="15" name="TextBox 14"/>
-          <p:cNvSpPr txBox="1"/>
-          <p:nvPr/>
-        </p:nvSpPr>
-        <p:spPr>
-          <a:xfrm>
-            <a:off x="384048" y="4604004"/>
-            <a:ext cx="3392424" cy="219456"/>
-          </a:xfrm>
-          <a:prstGeom prst="rect">
-            <a:avLst/>
-          </a:prstGeom>
-          <a:noFill/>
-        </p:spPr>
-        <p:txBody>
-          <a:bodyPr wrap="none">
-            <a:spAutoFit/>
-          </a:bodyPr>
-          <a:lstStyle/>
-          <a:p>
-            <a:pPr algn="ctr"/>
-            <a:r>
-              <a:rPr sz="1100" b="1">
-                <a:solidFill>
-                  <a:srgbClr val="FFFFFF"/>
-                </a:solidFill>
-                <a:latin typeface="微软雅黑"/>
-                <ns8:rFonts xmlns:ns8="http://schemas.openxmlformats.org/wordprocessingml/2006/main" ns8:eastAsia="微软雅黑" ns8:ascii="微软雅黑" ns8:hAnsi="微软雅黑"/>
-              </a:rPr>
-              <a:t>从堆叠到一体化闭环</a:t>
             </a:r>
           </a:p>
         </p:txBody>
@@ -19421,7 +20335,7 @@
         <p:spPr>
           <a:xfrm>
             <a:off x="274320" y="996696"/>
-            <a:ext cx="3611880" cy="3451860"/>
+            <a:ext cx="3611880" cy="3854196"/>
           </a:xfrm>
           <a:prstGeom prst="rect">
             <a:avLst/>
@@ -19466,7 +20380,7 @@
         <p:spPr>
           <a:xfrm>
             <a:off x="274320" y="996696"/>
-            <a:ext cx="73152" cy="3451860"/>
+            <a:ext cx="73152" cy="3854196"/>
           </a:xfrm>
           <a:prstGeom prst="rect">
             <a:avLst/>
@@ -19502,14 +20416,93 @@
       </p:sp>
       <p:sp>
         <p:nvSpPr>
-          <p:cNvPr id="10" name="TextBox 9"/>
+          <p:cNvPr id="10" name="Rectangle 9"/>
+          <p:cNvSpPr/>
+          <p:nvPr/>
+        </p:nvSpPr>
+        <p:spPr>
+          <a:xfrm>
+            <a:off x="347472" y="4503420"/>
+            <a:ext cx="3465576" cy="310896"/>
+          </a:xfrm>
+          <a:prstGeom prst="rect">
+            <a:avLst/>
+          </a:prstGeom>
+          <a:solidFill>
+            <a:srgbClr val="143278"/>
+          </a:solidFill>
+          <a:ln>
+            <a:noFill/>
+          </a:ln>
+        </p:spPr>
+        <p:style>
+          <a:lnRef idx="1">
+            <a:schemeClr val="accent1"/>
+          </a:lnRef>
+          <a:fillRef idx="3">
+            <a:schemeClr val="accent1"/>
+          </a:fillRef>
+          <a:effectRef idx="2">
+            <a:schemeClr val="accent1"/>
+          </a:effectRef>
+          <a:fontRef idx="minor">
+            <a:schemeClr val="lt1"/>
+          </a:fontRef>
+        </p:style>
+        <p:txBody>
+          <a:bodyPr rtlCol="0" anchor="ctr"/>
+          <a:lstStyle/>
+          <a:p>
+            <a:pPr algn="ctr"/>
+          </a:p>
+        </p:txBody>
+      </p:sp>
+      <p:sp>
+        <p:nvSpPr>
+          <p:cNvPr id="11" name="TextBox 10"/>
           <p:cNvSpPr txBox="1"/>
           <p:nvPr/>
         </p:nvSpPr>
         <p:spPr>
           <a:xfrm>
-            <a:off x="475488" y="1161288"/>
-            <a:ext cx="3300984" cy="3122676"/>
+            <a:off x="402336" y="4576572"/>
+            <a:ext cx="3355848" cy="237744"/>
+          </a:xfrm>
+          <a:prstGeom prst="rect">
+            <a:avLst/>
+          </a:prstGeom>
+          <a:noFill/>
+        </p:spPr>
+        <p:txBody>
+          <a:bodyPr wrap="none">
+            <a:spAutoFit/>
+          </a:bodyPr>
+          <a:lstStyle/>
+          <a:p>
+            <a:pPr algn="ctr"/>
+            <a:r>
+              <a:rPr sz="1100" b="1">
+                <a:solidFill>
+                  <a:srgbClr val="FFFFFF"/>
+                </a:solidFill>
+                <a:latin typeface="微软雅黑"/>
+                <ns3:rFonts xmlns:ns3="http://schemas.openxmlformats.org/wordprocessingml/2006/main" ns3:eastAsia="微软雅黑" ns3:ascii="微软雅黑" ns3:hAnsi="微软雅黑"/>
+              </a:rPr>
+              <a:t>三大目标均可现场验证</a:t>
+            </a:r>
+          </a:p>
+        </p:txBody>
+      </p:sp>
+      <p:sp>
+        <p:nvSpPr>
+          <p:cNvPr id="12" name="TextBox 11"/>
+          <p:cNvSpPr txBox="1"/>
+          <p:nvPr/>
+        </p:nvSpPr>
+        <p:spPr>
+          <a:xfrm>
+            <a:off x="475488" y="1143000"/>
+            <a:ext cx="3300984" cy="3232404"/>
           </a:xfrm>
           <a:prstGeom prst="rect">
             <a:avLst/>
@@ -19527,7 +20520,7 @@
                 <a:spcPct val="120000"/>
               </a:lnSpc>
               <a:spcAft>
-                <a:spcPts val="4000"/>
+                <a:spcPts val="4200"/>
               </a:spcAft>
             </a:pPr>
             <a:r>
@@ -19536,7 +20529,7 @@
                   <a:srgbClr val="1C202C"/>
                 </a:solidFill>
                 <a:latin typeface="微软雅黑"/>
-                <ns3:rFonts xmlns:ns3="http://schemas.openxmlformats.org/wordprocessingml/2006/main" ns3:eastAsia="微软雅黑" ns3:ascii="微软雅黑" ns3:hAnsi="微软雅黑"/>
+                <ns4:rFonts xmlns:ns4="http://schemas.openxmlformats.org/wordprocessingml/2006/main" ns4:eastAsia="微软雅黑" ns4:ascii="微软雅黑" ns4:hAnsi="微软雅黑"/>
               </a:rPr>
               <a:t>● CareCompanion：养老人形陪伴软件平台</a:t>
             </a:r>
@@ -19547,7 +20540,7 @@
                 <a:spcPct val="120000"/>
               </a:lnSpc>
               <a:spcAft>
-                <a:spcPts val="4000"/>
+                <a:spcPts val="4200"/>
               </a:spcAft>
             </a:pPr>
             <a:r>
@@ -19556,7 +20549,7 @@
                   <a:srgbClr val="1C202C"/>
                 </a:solidFill>
                 <a:latin typeface="微软雅黑"/>
-                <ns4:rFonts xmlns:ns4="http://schemas.openxmlformats.org/wordprocessingml/2006/main" ns4:eastAsia="微软雅黑" ns4:ascii="微软雅黑" ns4:hAnsi="微软雅黑"/>
+                <ns5:rFonts xmlns:ns5="http://schemas.openxmlformats.org/wordprocessingml/2006/main" ns5:eastAsia="微软雅黑" ns5:ascii="微软雅黑" ns5:hAnsi="微软雅黑"/>
               </a:rPr>
               <a:t>● CareOrchestrator 统一调度各模块</a:t>
             </a:r>
@@ -19567,7 +20560,7 @@
                 <a:spcPct val="120000"/>
               </a:lnSpc>
               <a:spcAft>
-                <a:spcPts val="4000"/>
+                <a:spcPts val="4200"/>
               </a:spcAft>
             </a:pPr>
             <a:r>
@@ -19576,7 +20569,7 @@
                   <a:srgbClr val="1C202C"/>
                 </a:solidFill>
                 <a:latin typeface="微软雅黑"/>
-                <ns5:rFonts xmlns:ns5="http://schemas.openxmlformats.org/wordprocessingml/2006/main" ns5:eastAsia="微软雅黑" ns5:ascii="微软雅黑" ns5:hAnsi="微软雅黑"/>
+                <ns6:rFonts xmlns:ns6="http://schemas.openxmlformats.org/wordprocessingml/2006/main" ns6:eastAsia="微软雅黑" ns6:ascii="微软雅黑" ns6:hAnsi="微软雅黑"/>
               </a:rPr>
               <a:t>● 目标1：跌倒检测与紧急呼叫自动化</a:t>
             </a:r>
@@ -19587,7 +20580,7 @@
                 <a:spcPct val="120000"/>
               </a:lnSpc>
               <a:spcAft>
-                <a:spcPts val="4000"/>
+                <a:spcPts val="4200"/>
               </a:spcAft>
             </a:pPr>
             <a:r>
@@ -19596,7 +20589,7 @@
                   <a:srgbClr val="1C202C"/>
                 </a:solidFill>
                 <a:latin typeface="微软雅黑"/>
-                <ns6:rFonts xmlns:ns6="http://schemas.openxmlformats.org/wordprocessingml/2006/main" ns6:eastAsia="微软雅黑" ns6:ascii="微软雅黑" ns6:hAnsi="微软雅黑"/>
+                <ns7:rFonts xmlns:ns7="http://schemas.openxmlformats.org/wordprocessingml/2006/main" ns7:eastAsia="微软雅黑" ns7:ascii="微软雅黑" ns7:hAnsi="微软雅黑"/>
               </a:rPr>
               <a:t>● 目标2：情感对话与机器人动作联动</a:t>
             </a:r>
@@ -19607,7 +20600,7 @@
                 <a:spcPct val="120000"/>
               </a:lnSpc>
               <a:spcAft>
-                <a:spcPts val="4000"/>
+                <a:spcPts val="4200"/>
               </a:spcAft>
             </a:pPr>
             <a:r>
@@ -19616,7 +20609,7 @@
                   <a:srgbClr val="1C202C"/>
                 </a:solidFill>
                 <a:latin typeface="微软雅黑"/>
-                <ns7:rFonts xmlns:ns7="http://schemas.openxmlformats.org/wordprocessingml/2006/main" ns7:eastAsia="微软雅黑" ns7:ascii="微软雅黑" ns7:hAnsi="微软雅黑"/>
+                <ns8:rFonts xmlns:ns8="http://schemas.openxmlformats.org/wordprocessingml/2006/main" ns8:eastAsia="微软雅黑" ns8:ascii="微软雅黑" ns8:hAnsi="微软雅黑"/>
               </a:rPr>
               <a:t>● 目标3：ROS2 部署接口 + 开源可复现</a:t>
             </a:r>
@@ -19625,7 +20618,7 @@
       </p:sp>
       <p:sp>
         <p:nvSpPr>
-          <p:cNvPr id="11" name="Rectangle 10"/>
+          <p:cNvPr id="13" name="Rectangle 12"/>
           <p:cNvSpPr/>
           <p:nvPr/>
         </p:nvSpPr>
@@ -19670,7 +20663,7 @@
       </p:sp>
       <p:pic>
         <p:nvPicPr>
-          <p:cNvPr id="12" name="Picture 11" descr="architecture.png"/>
+          <p:cNvPr id="14" name="Picture 13" descr="architecture.png"/>
           <p:cNvPicPr>
             <a:picLocks noChangeAspect="1"/>
           </p:cNvPicPr>
@@ -19694,7 +20687,7 @@
       </p:pic>
       <p:sp>
         <p:nvSpPr>
-          <p:cNvPr id="13" name="TextBox 12"/>
+          <p:cNvPr id="15" name="TextBox 14"/>
           <p:cNvSpPr txBox="1"/>
           <p:nvPr/>
         </p:nvSpPr>
@@ -19721,88 +20714,9 @@
                   <a:srgbClr val="5A6273"/>
                 </a:solidFill>
                 <a:latin typeface="微软雅黑"/>
-                <ns8:rFonts xmlns:ns8="http://schemas.openxmlformats.org/wordprocessingml/2006/main" ns8:eastAsia="微软雅黑" ns8:ascii="微软雅黑" ns8:hAnsi="微软雅黑"/>
+                <ns9:rFonts xmlns:ns9="http://schemas.openxmlformats.org/wordprocessingml/2006/main" ns9:eastAsia="微软雅黑" ns9:ascii="微软雅黑" ns9:hAnsi="微软雅黑"/>
               </a:rPr>
               <a:t>理论框图</a:t>
-            </a:r>
-          </a:p>
-        </p:txBody>
-      </p:sp>
-      <p:sp>
-        <p:nvSpPr>
-          <p:cNvPr id="14" name="Rectangle 13"/>
-          <p:cNvSpPr/>
-          <p:nvPr/>
-        </p:nvSpPr>
-        <p:spPr>
-          <a:xfrm>
-            <a:off x="274320" y="4539996"/>
-            <a:ext cx="3611880" cy="310896"/>
-          </a:xfrm>
-          <a:prstGeom prst="rect">
-            <a:avLst/>
-          </a:prstGeom>
-          <a:solidFill>
-            <a:srgbClr val="143278"/>
-          </a:solidFill>
-          <a:ln>
-            <a:noFill/>
-          </a:ln>
-        </p:spPr>
-        <p:style>
-          <a:lnRef idx="1">
-            <a:schemeClr val="accent1"/>
-          </a:lnRef>
-          <a:fillRef idx="3">
-            <a:schemeClr val="accent1"/>
-          </a:fillRef>
-          <a:effectRef idx="2">
-            <a:schemeClr val="accent1"/>
-          </a:effectRef>
-          <a:fontRef idx="minor">
-            <a:schemeClr val="lt1"/>
-          </a:fontRef>
-        </p:style>
-        <p:txBody>
-          <a:bodyPr rtlCol="0" anchor="ctr"/>
-          <a:lstStyle/>
-          <a:p>
-            <a:pPr algn="ctr"/>
-          </a:p>
-        </p:txBody>
-      </p:sp>
-      <p:sp>
-        <p:nvSpPr>
-          <p:cNvPr id="15" name="TextBox 14"/>
-          <p:cNvSpPr txBox="1"/>
-          <p:nvPr/>
-        </p:nvSpPr>
-        <p:spPr>
-          <a:xfrm>
-            <a:off x="384048" y="4604004"/>
-            <a:ext cx="3392424" cy="219456"/>
-          </a:xfrm>
-          <a:prstGeom prst="rect">
-            <a:avLst/>
-          </a:prstGeom>
-          <a:noFill/>
-        </p:spPr>
-        <p:txBody>
-          <a:bodyPr wrap="none">
-            <a:spAutoFit/>
-          </a:bodyPr>
-          <a:lstStyle/>
-          <a:p>
-            <a:pPr algn="ctr"/>
-            <a:r>
-              <a:rPr sz="1100" b="1">
-                <a:solidFill>
-                  <a:srgbClr val="FFFFFF"/>
-                </a:solidFill>
-                <a:latin typeface="微软雅黑"/>
-                <ns9:rFonts xmlns:ns9="http://schemas.openxmlformats.org/wordprocessingml/2006/main" ns9:eastAsia="微软雅黑" ns9:ascii="微软雅黑" ns9:hAnsi="微软雅黑"/>
-              </a:rPr>
-              <a:t>三大目标均可现场验证</a:t>
             </a:r>
           </a:p>
         </p:txBody>
@@ -20760,7 +21674,7 @@
         <p:spPr>
           <a:xfrm>
             <a:off x="274320" y="996696"/>
-            <a:ext cx="3611880" cy="3451860"/>
+            <a:ext cx="3611880" cy="3854196"/>
           </a:xfrm>
           <a:prstGeom prst="rect">
             <a:avLst/>
@@ -20805,7 +21719,7 @@
         <p:spPr>
           <a:xfrm>
             <a:off x="274320" y="996696"/>
-            <a:ext cx="73152" cy="3451860"/>
+            <a:ext cx="73152" cy="3854196"/>
           </a:xfrm>
           <a:prstGeom prst="rect">
             <a:avLst/>
@@ -20841,14 +21755,93 @@
       </p:sp>
       <p:sp>
         <p:nvSpPr>
-          <p:cNvPr id="10" name="TextBox 9"/>
+          <p:cNvPr id="10" name="Rectangle 9"/>
+          <p:cNvSpPr/>
+          <p:nvPr/>
+        </p:nvSpPr>
+        <p:spPr>
+          <a:xfrm>
+            <a:off x="347472" y="4503420"/>
+            <a:ext cx="3465576" cy="310896"/>
+          </a:xfrm>
+          <a:prstGeom prst="rect">
+            <a:avLst/>
+          </a:prstGeom>
+          <a:solidFill>
+            <a:srgbClr val="143278"/>
+          </a:solidFill>
+          <a:ln>
+            <a:noFill/>
+          </a:ln>
+        </p:spPr>
+        <p:style>
+          <a:lnRef idx="1">
+            <a:schemeClr val="accent1"/>
+          </a:lnRef>
+          <a:fillRef idx="3">
+            <a:schemeClr val="accent1"/>
+          </a:fillRef>
+          <a:effectRef idx="2">
+            <a:schemeClr val="accent1"/>
+          </a:effectRef>
+          <a:fontRef idx="minor">
+            <a:schemeClr val="lt1"/>
+          </a:fontRef>
+        </p:style>
+        <p:txBody>
+          <a:bodyPr rtlCol="0" anchor="ctr"/>
+          <a:lstStyle/>
+          <a:p>
+            <a:pPr algn="ctr"/>
+          </a:p>
+        </p:txBody>
+      </p:sp>
+      <p:sp>
+        <p:nvSpPr>
+          <p:cNvPr id="11" name="TextBox 10"/>
           <p:cNvSpPr txBox="1"/>
           <p:nvPr/>
         </p:nvSpPr>
         <p:spPr>
           <a:xfrm>
-            <a:off x="475488" y="1161288"/>
-            <a:ext cx="3300984" cy="3122676"/>
+            <a:off x="402336" y="4576572"/>
+            <a:ext cx="3355848" cy="237744"/>
+          </a:xfrm>
+          <a:prstGeom prst="rect">
+            <a:avLst/>
+          </a:prstGeom>
+          <a:noFill/>
+        </p:spPr>
+        <p:txBody>
+          <a:bodyPr wrap="none">
+            <a:spAutoFit/>
+          </a:bodyPr>
+          <a:lstStyle/>
+          <a:p>
+            <a:pPr algn="ctr"/>
+            <a:r>
+              <a:rPr sz="1100" b="1">
+                <a:solidFill>
+                  <a:srgbClr val="FFFFFF"/>
+                </a:solidFill>
+                <a:latin typeface="微软雅黑"/>
+                <ns3:rFonts xmlns:ns3="http://schemas.openxmlformats.org/wordprocessingml/2006/main" ns3:eastAsia="微软雅黑" ns3:ascii="微软雅黑" ns3:hAnsi="微软雅黑"/>
+              </a:rPr>
+              <a:t>理论清晰、可替换</a:t>
+            </a:r>
+          </a:p>
+        </p:txBody>
+      </p:sp>
+      <p:sp>
+        <p:nvSpPr>
+          <p:cNvPr id="12" name="TextBox 11"/>
+          <p:cNvSpPr txBox="1"/>
+          <p:nvPr/>
+        </p:nvSpPr>
+        <p:spPr>
+          <a:xfrm>
+            <a:off x="475488" y="1143000"/>
+            <a:ext cx="3300984" cy="3232404"/>
           </a:xfrm>
           <a:prstGeom prst="rect">
             <a:avLst/>
@@ -20866,7 +21859,7 @@
                 <a:spcPct val="120000"/>
               </a:lnSpc>
               <a:spcAft>
-                <a:spcPts val="5900"/>
+                <a:spcPts val="6200"/>
               </a:spcAft>
             </a:pPr>
             <a:r>
@@ -20875,7 +21868,7 @@
                   <a:srgbClr val="1C202C"/>
                 </a:solidFill>
                 <a:latin typeface="微软雅黑"/>
-                <ns3:rFonts xmlns:ns3="http://schemas.openxmlformats.org/wordprocessingml/2006/main" ns3:eastAsia="微软雅黑" ns3:ascii="微软雅黑" ns3:hAnsi="微软雅黑"/>
+                <ns4:rFonts xmlns:ns4="http://schemas.openxmlformats.org/wordprocessingml/2006/main" ns4:eastAsia="微软雅黑" ns4:ascii="微软雅黑" ns4:hAnsi="微软雅黑"/>
               </a:rPr>
               <a:t>● 四层架构：感知 / 认知 / 执行 / 交互</a:t>
             </a:r>
@@ -20886,7 +21879,7 @@
                 <a:spcPct val="120000"/>
               </a:lnSpc>
               <a:spcAft>
-                <a:spcPts val="5900"/>
+                <a:spcPts val="6200"/>
               </a:spcAft>
             </a:pPr>
             <a:r>
@@ -20895,7 +21888,7 @@
                   <a:srgbClr val="1C202C"/>
                 </a:solidFill>
                 <a:latin typeface="微软雅黑"/>
-                <ns4:rFonts xmlns:ns4="http://schemas.openxmlformats.org/wordprocessingml/2006/main" ns4:eastAsia="微软雅黑" ns4:ascii="微软雅黑" ns4:hAnsi="微软雅黑"/>
+                <ns5:rFonts xmlns:ns5="http://schemas.openxmlformats.org/wordprocessingml/2006/main" ns5:eastAsia="微软雅黑" ns5:ascii="微软雅黑" ns5:hAnsi="微软雅黑"/>
               </a:rPr>
               <a:t>● 核心：CareOrchestrator + 状态机</a:t>
             </a:r>
@@ -20906,7 +21899,7 @@
                 <a:spcPct val="120000"/>
               </a:lnSpc>
               <a:spcAft>
-                <a:spcPts val="5900"/>
+                <a:spcPts val="6200"/>
               </a:spcAft>
             </a:pPr>
             <a:r>
@@ -20915,7 +21908,7 @@
                   <a:srgbClr val="1C202C"/>
                 </a:solidFill>
                 <a:latin typeface="微软雅黑"/>
-                <ns5:rFonts xmlns:ns5="http://schemas.openxmlformats.org/wordprocessingml/2006/main" ns5:eastAsia="微软雅黑" ns5:ascii="微软雅黑" ns5:hAnsi="微软雅黑"/>
+                <ns6:rFonts xmlns:ns6="http://schemas.openxmlformats.org/wordprocessingml/2006/main" ns6:eastAsia="微软雅黑" ns6:ascii="微软雅黑" ns6:hAnsi="微软雅黑"/>
               </a:rPr>
               <a:t>● 模块可替换：仿真、Web、ROS2 共用一套逻辑</a:t>
             </a:r>
@@ -20926,7 +21919,7 @@
                 <a:spcPct val="120000"/>
               </a:lnSpc>
               <a:spcAft>
-                <a:spcPts val="5900"/>
+                <a:spcPts val="6200"/>
               </a:spcAft>
             </a:pPr>
             <a:r>
@@ -20935,7 +21928,7 @@
                   <a:srgbClr val="1C202C"/>
                 </a:solidFill>
                 <a:latin typeface="微软雅黑"/>
-                <ns6:rFonts xmlns:ns6="http://schemas.openxmlformats.org/wordprocessingml/2006/main" ns6:eastAsia="微软雅黑" ns6:ascii="微软雅黑" ns6:hAnsi="微软雅黑"/>
+                <ns7:rFonts xmlns:ns7="http://schemas.openxmlformats.org/wordprocessingml/2006/main" ns7:eastAsia="微软雅黑" ns7:ascii="微软雅黑" ns7:hAnsi="微软雅黑"/>
               </a:rPr>
               <a:t>● 配置集中于 config/default.yaml</a:t>
             </a:r>
@@ -20944,7 +21937,7 @@
       </p:sp>
       <p:sp>
         <p:nvSpPr>
-          <p:cNvPr id="11" name="Rectangle 10"/>
+          <p:cNvPr id="13" name="Rectangle 12"/>
           <p:cNvSpPr/>
           <p:nvPr/>
         </p:nvSpPr>
@@ -20989,7 +21982,7 @@
       </p:sp>
       <p:pic>
         <p:nvPicPr>
-          <p:cNvPr id="12" name="Picture 11" descr="architecture.png"/>
+          <p:cNvPr id="14" name="Picture 13" descr="architecture.png"/>
           <p:cNvPicPr>
             <a:picLocks noChangeAspect="1"/>
           </p:cNvPicPr>
@@ -21013,7 +22006,7 @@
       </p:pic>
       <p:sp>
         <p:nvSpPr>
-          <p:cNvPr id="13" name="TextBox 12"/>
+          <p:cNvPr id="15" name="TextBox 14"/>
           <p:cNvSpPr txBox="1"/>
           <p:nvPr/>
         </p:nvSpPr>
@@ -21040,88 +22033,9 @@
                   <a:srgbClr val="5A6273"/>
                 </a:solidFill>
                 <a:latin typeface="微软雅黑"/>
-                <ns7:rFonts xmlns:ns7="http://schemas.openxmlformats.org/wordprocessingml/2006/main" ns7:eastAsia="微软雅黑" ns7:ascii="微软雅黑" ns7:hAnsi="微软雅黑"/>
+                <ns8:rFonts xmlns:ns8="http://schemas.openxmlformats.org/wordprocessingml/2006/main" ns8:eastAsia="微软雅黑" ns8:ascii="微软雅黑" ns8:hAnsi="微软雅黑"/>
               </a:rPr>
               <a:t>四层架构</a:t>
-            </a:r>
-          </a:p>
-        </p:txBody>
-      </p:sp>
-      <p:sp>
-        <p:nvSpPr>
-          <p:cNvPr id="14" name="Rectangle 13"/>
-          <p:cNvSpPr/>
-          <p:nvPr/>
-        </p:nvSpPr>
-        <p:spPr>
-          <a:xfrm>
-            <a:off x="274320" y="4539996"/>
-            <a:ext cx="3611880" cy="310896"/>
-          </a:xfrm>
-          <a:prstGeom prst="rect">
-            <a:avLst/>
-          </a:prstGeom>
-          <a:solidFill>
-            <a:srgbClr val="143278"/>
-          </a:solidFill>
-          <a:ln>
-            <a:noFill/>
-          </a:ln>
-        </p:spPr>
-        <p:style>
-          <a:lnRef idx="1">
-            <a:schemeClr val="accent1"/>
-          </a:lnRef>
-          <a:fillRef idx="3">
-            <a:schemeClr val="accent1"/>
-          </a:fillRef>
-          <a:effectRef idx="2">
-            <a:schemeClr val="accent1"/>
-          </a:effectRef>
-          <a:fontRef idx="minor">
-            <a:schemeClr val="lt1"/>
-          </a:fontRef>
-        </p:style>
-        <p:txBody>
-          <a:bodyPr rtlCol="0" anchor="ctr"/>
-          <a:lstStyle/>
-          <a:p>
-            <a:pPr algn="ctr"/>
-          </a:p>
-        </p:txBody>
-      </p:sp>
-      <p:sp>
-        <p:nvSpPr>
-          <p:cNvPr id="15" name="TextBox 14"/>
-          <p:cNvSpPr txBox="1"/>
-          <p:nvPr/>
-        </p:nvSpPr>
-        <p:spPr>
-          <a:xfrm>
-            <a:off x="384048" y="4604004"/>
-            <a:ext cx="3392424" cy="219456"/>
-          </a:xfrm>
-          <a:prstGeom prst="rect">
-            <a:avLst/>
-          </a:prstGeom>
-          <a:noFill/>
-        </p:spPr>
-        <p:txBody>
-          <a:bodyPr wrap="none">
-            <a:spAutoFit/>
-          </a:bodyPr>
-          <a:lstStyle/>
-          <a:p>
-            <a:pPr algn="ctr"/>
-            <a:r>
-              <a:rPr sz="1100" b="1">
-                <a:solidFill>
-                  <a:srgbClr val="FFFFFF"/>
-                </a:solidFill>
-                <a:latin typeface="微软雅黑"/>
-                <ns8:rFonts xmlns:ns8="http://schemas.openxmlformats.org/wordprocessingml/2006/main" ns8:eastAsia="微软雅黑" ns8:ascii="微软雅黑" ns8:hAnsi="微软雅黑"/>
-              </a:rPr>
-              <a:t>理论清晰、可替换</a:t>
             </a:r>
           </a:p>
         </p:txBody>

--- a/docs/答辩_CareCompanion.pptx
+++ b/docs/答辩_CareCompanion.pptx
@@ -4064,26 +4064,26 @@
         </p:nvSpPr>
         <p:spPr>
           <a:xfrm>
-            <a:off x="475488" y="1143000"/>
-            <a:ext cx="3300984" cy="3579876"/>
-          </a:xfrm>
-          <a:prstGeom prst="rect">
-            <a:avLst/>
-          </a:prstGeom>
-          <a:noFill/>
-        </p:spPr>
-        <p:txBody>
-          <a:bodyPr wrap="square" anchor="ctr">
+            <a:off x="457200" y="1124712"/>
+            <a:ext cx="3246120" cy="885825"/>
+          </a:xfrm>
+          <a:prstGeom prst="rect">
+            <a:avLst/>
+          </a:prstGeom>
+          <a:noFill/>
+        </p:spPr>
+        <p:txBody>
+          <a:bodyPr wrap="square" anchor="t" lIns="25400" tIns="0">
             <a:spAutoFit/>
           </a:bodyPr>
           <a:lstStyle/>
           <a:p>
             <a:pPr>
               <a:lnSpc>
-                <a:spcPct val="120000"/>
+                <a:spcPct val="115000"/>
               </a:lnSpc>
               <a:spcAft>
-                <a:spcPts val="7100"/>
+                <a:spcPts val="0"/>
               </a:spcAft>
             </a:pPr>
             <a:r>
@@ -4097,13 +4097,36 @@
               <a:t>● MONITOR → CONVERSE → ALERT → EMERGENCY</a:t>
             </a:r>
           </a:p>
+        </p:txBody>
+      </p:sp>
+      <p:sp>
+        <p:nvSpPr>
+          <p:cNvPr id="11" name="TextBox 10"/>
+          <p:cNvSpPr txBox="1"/>
+          <p:nvPr/>
+        </p:nvSpPr>
+        <p:spPr>
+          <a:xfrm>
+            <a:off x="457200" y="2028825"/>
+            <a:ext cx="3246120" cy="885825"/>
+          </a:xfrm>
+          <a:prstGeom prst="rect">
+            <a:avLst/>
+          </a:prstGeom>
+          <a:noFill/>
+        </p:spPr>
+        <p:txBody>
+          <a:bodyPr wrap="square" anchor="t" lIns="25400" tIns="0">
+            <a:spAutoFit/>
+          </a:bodyPr>
+          <a:lstStyle/>
           <a:p>
             <a:pPr>
               <a:lnSpc>
-                <a:spcPct val="120000"/>
+                <a:spcPct val="115000"/>
               </a:lnSpc>
               <a:spcAft>
-                <a:spcPts val="7100"/>
+                <a:spcPts val="0"/>
               </a:spcAft>
             </a:pPr>
             <a:r>
@@ -4117,13 +4140,36 @@
               <a:t>● 紧急态可打断对话与常规任务</a:t>
             </a:r>
           </a:p>
+        </p:txBody>
+      </p:sp>
+      <p:sp>
+        <p:nvSpPr>
+          <p:cNvPr id="12" name="TextBox 11"/>
+          <p:cNvSpPr txBox="1"/>
+          <p:nvPr/>
+        </p:nvSpPr>
+        <p:spPr>
+          <a:xfrm>
+            <a:off x="457200" y="2932938"/>
+            <a:ext cx="3246120" cy="885825"/>
+          </a:xfrm>
+          <a:prstGeom prst="rect">
+            <a:avLst/>
+          </a:prstGeom>
+          <a:noFill/>
+        </p:spPr>
+        <p:txBody>
+          <a:bodyPr wrap="square" anchor="t" lIns="25400" tIns="0">
+            <a:spAutoFit/>
+          </a:bodyPr>
+          <a:lstStyle/>
           <a:p>
             <a:pPr>
               <a:lnSpc>
-                <a:spcPct val="120000"/>
+                <a:spcPct val="115000"/>
               </a:lnSpc>
               <a:spcAft>
-                <a:spcPts val="7100"/>
+                <a:spcPts val="0"/>
               </a:spcAft>
             </a:pPr>
             <a:r>
@@ -4137,13 +4183,36 @@
               <a:t>● 每个 tick 输出风险、回复、动作序列</a:t>
             </a:r>
           </a:p>
+        </p:txBody>
+      </p:sp>
+      <p:sp>
+        <p:nvSpPr>
+          <p:cNvPr id="13" name="TextBox 12"/>
+          <p:cNvSpPr txBox="1"/>
+          <p:nvPr/>
+        </p:nvSpPr>
+        <p:spPr>
+          <a:xfrm>
+            <a:off x="457200" y="3837051"/>
+            <a:ext cx="3246120" cy="885825"/>
+          </a:xfrm>
+          <a:prstGeom prst="rect">
+            <a:avLst/>
+          </a:prstGeom>
+          <a:noFill/>
+        </p:spPr>
+        <p:txBody>
+          <a:bodyPr wrap="square" anchor="t" lIns="25400" tIns="0">
+            <a:spAutoFit/>
+          </a:bodyPr>
+          <a:lstStyle/>
           <a:p>
             <a:pPr>
               <a:lnSpc>
-                <a:spcPct val="120000"/>
+                <a:spcPct val="115000"/>
               </a:lnSpc>
               <a:spcAft>
-                <a:spcPts val="7100"/>
+                <a:spcPts val="0"/>
               </a:spcAft>
             </a:pPr>
             <a:r>
@@ -4161,7 +4230,7 @@
       </p:sp>
       <p:sp>
         <p:nvSpPr>
-          <p:cNvPr id="11" name="Rectangle 10"/>
+          <p:cNvPr id="14" name="Rectangle 13"/>
           <p:cNvSpPr/>
           <p:nvPr/>
         </p:nvSpPr>
@@ -4206,7 +4275,7 @@
       </p:sp>
       <p:pic>
         <p:nvPicPr>
-          <p:cNvPr id="12" name="Picture 11" descr="state_machine.png"/>
+          <p:cNvPr id="15" name="Picture 14" descr="state_machine.png"/>
           <p:cNvPicPr>
             <a:picLocks noChangeAspect="1"/>
           </p:cNvPicPr>
@@ -4230,7 +4299,7 @@
       </p:pic>
       <p:sp>
         <p:nvSpPr>
-          <p:cNvPr id="13" name="TextBox 12"/>
+          <p:cNvPr id="16" name="TextBox 15"/>
           <p:cNvSpPr txBox="1"/>
           <p:nvPr/>
         </p:nvSpPr>
@@ -4622,26 +4691,26 @@
         </p:nvSpPr>
         <p:spPr>
           <a:xfrm>
-            <a:off x="475488" y="1143000"/>
-            <a:ext cx="3300984" cy="3579876"/>
-          </a:xfrm>
-          <a:prstGeom prst="rect">
-            <a:avLst/>
-          </a:prstGeom>
-          <a:noFill/>
-        </p:spPr>
-        <p:txBody>
-          <a:bodyPr wrap="square" anchor="ctr">
+            <a:off x="457200" y="1124712"/>
+            <a:ext cx="3246120" cy="885825"/>
+          </a:xfrm>
+          <a:prstGeom prst="rect">
+            <a:avLst/>
+          </a:prstGeom>
+          <a:noFill/>
+        </p:spPr>
+        <p:txBody>
+          <a:bodyPr wrap="square" anchor="t" lIns="25400" tIns="0">
             <a:spAutoFit/>
           </a:bodyPr>
           <a:lstStyle/>
           <a:p>
             <a:pPr>
               <a:lnSpc>
-                <a:spcPct val="120000"/>
+                <a:spcPct val="115000"/>
               </a:lnSpc>
               <a:spcAft>
-                <a:spcPts val="7100"/>
+                <a:spcPts val="0"/>
               </a:spcAft>
             </a:pPr>
             <a:r>
@@ -4655,13 +4724,36 @@
               <a:t>● 加权融合跌倒、情绪、健康三路分数</a:t>
             </a:r>
           </a:p>
+        </p:txBody>
+      </p:sp>
+      <p:sp>
+        <p:nvSpPr>
+          <p:cNvPr id="11" name="TextBox 10"/>
+          <p:cNvSpPr txBox="1"/>
+          <p:nvPr/>
+        </p:nvSpPr>
+        <p:spPr>
+          <a:xfrm>
+            <a:off x="457200" y="2028825"/>
+            <a:ext cx="3246120" cy="885825"/>
+          </a:xfrm>
+          <a:prstGeom prst="rect">
+            <a:avLst/>
+          </a:prstGeom>
+          <a:noFill/>
+        </p:spPr>
+        <p:txBody>
+          <a:bodyPr wrap="square" anchor="t" lIns="25400" tIns="0">
+            <a:spAutoFit/>
+          </a:bodyPr>
+          <a:lstStyle/>
           <a:p>
             <a:pPr>
               <a:lnSpc>
-                <a:spcPct val="120000"/>
+                <a:spcPct val="115000"/>
               </a:lnSpc>
               <a:spcAft>
-                <a:spcPts val="7100"/>
+                <a:spcPts val="0"/>
               </a:spcAft>
             </a:pPr>
             <a:r>
@@ -4675,13 +4767,36 @@
               <a:t>● 输出等级与原因列表，非黑盒端到端</a:t>
             </a:r>
           </a:p>
+        </p:txBody>
+      </p:sp>
+      <p:sp>
+        <p:nvSpPr>
+          <p:cNvPr id="12" name="TextBox 11"/>
+          <p:cNvSpPr txBox="1"/>
+          <p:nvPr/>
+        </p:nvSpPr>
+        <p:spPr>
+          <a:xfrm>
+            <a:off x="457200" y="2932938"/>
+            <a:ext cx="3246120" cy="885825"/>
+          </a:xfrm>
+          <a:prstGeom prst="rect">
+            <a:avLst/>
+          </a:prstGeom>
+          <a:noFill/>
+        </p:spPr>
+        <p:txBody>
+          <a:bodyPr wrap="square" anchor="t" lIns="25400" tIns="0">
+            <a:spAutoFit/>
+          </a:bodyPr>
+          <a:lstStyle/>
           <a:p>
             <a:pPr>
               <a:lnSpc>
-                <a:spcPct val="120000"/>
+                <a:spcPct val="115000"/>
               </a:lnSpc>
               <a:spcAft>
-                <a:spcPts val="7100"/>
+                <a:spcPts val="0"/>
               </a:spcAft>
             </a:pPr>
             <a:r>
@@ -4695,13 +4810,36 @@
               <a:t>● 阈值可配置，支持场景调参</a:t>
             </a:r>
           </a:p>
+        </p:txBody>
+      </p:sp>
+      <p:sp>
+        <p:nvSpPr>
+          <p:cNvPr id="13" name="TextBox 12"/>
+          <p:cNvSpPr txBox="1"/>
+          <p:nvPr/>
+        </p:nvSpPr>
+        <p:spPr>
+          <a:xfrm>
+            <a:off x="457200" y="3837051"/>
+            <a:ext cx="3246120" cy="885825"/>
+          </a:xfrm>
+          <a:prstGeom prst="rect">
+            <a:avLst/>
+          </a:prstGeom>
+          <a:noFill/>
+        </p:spPr>
+        <p:txBody>
+          <a:bodyPr wrap="square" anchor="t" lIns="25400" tIns="0">
+            <a:spAutoFit/>
+          </a:bodyPr>
+          <a:lstStyle/>
           <a:p>
             <a:pPr>
               <a:lnSpc>
-                <a:spcPct val="120000"/>
+                <a:spcPct val="115000"/>
               </a:lnSpc>
               <a:spcAft>
-                <a:spcPts val="7100"/>
+                <a:spcPts val="0"/>
               </a:spcAft>
             </a:pPr>
             <a:r>
@@ -4719,7 +4857,7 @@
       </p:sp>
       <p:sp>
         <p:nvSpPr>
-          <p:cNvPr id="11" name="Rectangle 10"/>
+          <p:cNvPr id="14" name="Rectangle 13"/>
           <p:cNvSpPr/>
           <p:nvPr/>
         </p:nvSpPr>
@@ -4764,7 +4902,7 @@
       </p:sp>
       <p:pic>
         <p:nvPicPr>
-          <p:cNvPr id="12" name="Picture 11" descr="risk_formula.png"/>
+          <p:cNvPr id="15" name="Picture 14" descr="risk_formula.png"/>
           <p:cNvPicPr>
             <a:picLocks noChangeAspect="1"/>
           </p:cNvPicPr>
@@ -4788,7 +4926,7 @@
       </p:pic>
       <p:sp>
         <p:nvSpPr>
-          <p:cNvPr id="13" name="TextBox 12"/>
+          <p:cNvPr id="16" name="TextBox 15"/>
           <p:cNvSpPr txBox="1"/>
           <p:nvPr/>
         </p:nvSpPr>
@@ -5180,26 +5318,26 @@
         </p:nvSpPr>
         <p:spPr>
           <a:xfrm>
-            <a:off x="475488" y="1143000"/>
-            <a:ext cx="3300984" cy="3579876"/>
-          </a:xfrm>
-          <a:prstGeom prst="rect">
-            <a:avLst/>
-          </a:prstGeom>
-          <a:noFill/>
-        </p:spPr>
-        <p:txBody>
-          <a:bodyPr wrap="square" anchor="ctr">
+            <a:off x="457200" y="1124712"/>
+            <a:ext cx="3246120" cy="885825"/>
+          </a:xfrm>
+          <a:prstGeom prst="rect">
+            <a:avLst/>
+          </a:prstGeom>
+          <a:noFill/>
+        </p:spPr>
+        <p:txBody>
+          <a:bodyPr wrap="square" anchor="t" lIns="25400" tIns="0">
             <a:spAutoFit/>
           </a:bodyPr>
           <a:lstStyle/>
           <a:p>
             <a:pPr>
               <a:lnSpc>
-                <a:spcPct val="120000"/>
+                <a:spcPct val="115000"/>
               </a:lnSpc>
               <a:spcAft>
-                <a:spcPts val="7100"/>
+                <a:spcPts val="0"/>
               </a:spcAft>
             </a:pPr>
             <a:r>
@@ -5213,13 +5351,36 @@
               <a:t>● 输入：MediaPipe 骨架几何特征</a:t>
             </a:r>
           </a:p>
+        </p:txBody>
+      </p:sp>
+      <p:sp>
+        <p:nvSpPr>
+          <p:cNvPr id="11" name="TextBox 10"/>
+          <p:cNvSpPr txBox="1"/>
+          <p:nvPr/>
+        </p:nvSpPr>
+        <p:spPr>
+          <a:xfrm>
+            <a:off x="457200" y="2028825"/>
+            <a:ext cx="3246120" cy="885825"/>
+          </a:xfrm>
+          <a:prstGeom prst="rect">
+            <a:avLst/>
+          </a:prstGeom>
+          <a:noFill/>
+        </p:spPr>
+        <p:txBody>
+          <a:bodyPr wrap="square" anchor="t" lIns="25400" tIns="0">
+            <a:spAutoFit/>
+          </a:bodyPr>
+          <a:lstStyle/>
           <a:p>
             <a:pPr>
               <a:lnSpc>
-                <a:spcPct val="120000"/>
+                <a:spcPct val="115000"/>
               </a:lnSpc>
               <a:spcAft>
-                <a:spcPts val="7100"/>
+                <a:spcPts val="0"/>
               </a:spcAft>
             </a:pPr>
             <a:r>
@@ -5233,13 +5394,36 @@
               <a:t>● 快速跌倒 + 慢速躺倒双规则</a:t>
             </a:r>
           </a:p>
+        </p:txBody>
+      </p:sp>
+      <p:sp>
+        <p:nvSpPr>
+          <p:cNvPr id="12" name="TextBox 11"/>
+          <p:cNvSpPr txBox="1"/>
+          <p:nvPr/>
+        </p:nvSpPr>
+        <p:spPr>
+          <a:xfrm>
+            <a:off x="457200" y="2932938"/>
+            <a:ext cx="3246120" cy="885825"/>
+          </a:xfrm>
+          <a:prstGeom prst="rect">
+            <a:avLst/>
+          </a:prstGeom>
+          <a:noFill/>
+        </p:spPr>
+        <p:txBody>
+          <a:bodyPr wrap="square" anchor="t" lIns="25400" tIns="0">
+            <a:spAutoFit/>
+          </a:bodyPr>
+          <a:lstStyle/>
           <a:p>
             <a:pPr>
               <a:lnSpc>
-                <a:spcPct val="120000"/>
+                <a:spcPct val="115000"/>
               </a:lnSpc>
               <a:spcAft>
-                <a:spcPts val="7100"/>
+                <a:spcPts val="0"/>
               </a:spcAft>
             </a:pPr>
             <a:r>
@@ -5253,13 +5437,36 @@
               <a:t>● 合成 6 场景评测 F1=100%</a:t>
             </a:r>
           </a:p>
+        </p:txBody>
+      </p:sp>
+      <p:sp>
+        <p:nvSpPr>
+          <p:cNvPr id="13" name="TextBox 12"/>
+          <p:cNvSpPr txBox="1"/>
+          <p:nvPr/>
+        </p:nvSpPr>
+        <p:spPr>
+          <a:xfrm>
+            <a:off x="457200" y="3837051"/>
+            <a:ext cx="3246120" cy="885825"/>
+          </a:xfrm>
+          <a:prstGeom prst="rect">
+            <a:avLst/>
+          </a:prstGeom>
+          <a:noFill/>
+        </p:spPr>
+        <p:txBody>
+          <a:bodyPr wrap="square" anchor="t" lIns="25400" tIns="0">
+            <a:spAutoFit/>
+          </a:bodyPr>
+          <a:lstStyle/>
           <a:p>
             <a:pPr>
               <a:lnSpc>
-                <a:spcPct val="120000"/>
+                <a:spcPct val="115000"/>
               </a:lnSpc>
               <a:spcAft>
-                <a:spcPts val="7100"/>
+                <a:spcPts val="0"/>
               </a:spcAft>
             </a:pPr>
             <a:r>
@@ -5277,7 +5484,7 @@
       </p:sp>
       <p:sp>
         <p:nvSpPr>
-          <p:cNvPr id="11" name="Rectangle 10"/>
+          <p:cNvPr id="14" name="Rectangle 13"/>
           <p:cNvSpPr/>
           <p:nvPr/>
         </p:nvSpPr>
@@ -5322,7 +5529,7 @@
       </p:sp>
       <p:pic>
         <p:nvPicPr>
-          <p:cNvPr id="12" name="Picture 11" descr="fall_flow.png"/>
+          <p:cNvPr id="15" name="Picture 14" descr="fall_flow.png"/>
           <p:cNvPicPr>
             <a:picLocks noChangeAspect="1"/>
           </p:cNvPicPr>
@@ -5346,7 +5553,7 @@
       </p:pic>
       <p:sp>
         <p:nvSpPr>
-          <p:cNvPr id="13" name="TextBox 12"/>
+          <p:cNvPr id="16" name="TextBox 15"/>
           <p:cNvSpPr txBox="1"/>
           <p:nvPr/>
         </p:nvSpPr>
@@ -5738,26 +5945,26 @@
         </p:nvSpPr>
         <p:spPr>
           <a:xfrm>
-            <a:off x="475488" y="1143000"/>
-            <a:ext cx="3300984" cy="3579876"/>
-          </a:xfrm>
-          <a:prstGeom prst="rect">
-            <a:avLst/>
-          </a:prstGeom>
-          <a:noFill/>
-        </p:spPr>
-        <p:txBody>
-          <a:bodyPr wrap="square" anchor="ctr">
+            <a:off x="457200" y="1124712"/>
+            <a:ext cx="3246120" cy="885825"/>
+          </a:xfrm>
+          <a:prstGeom prst="rect">
+            <a:avLst/>
+          </a:prstGeom>
+          <a:noFill/>
+        </p:spPr>
+        <p:txBody>
+          <a:bodyPr wrap="square" anchor="t" lIns="25400" tIns="0">
             <a:spAutoFit/>
           </a:bodyPr>
           <a:lstStyle/>
           <a:p>
             <a:pPr>
               <a:lnSpc>
-                <a:spcPct val="120000"/>
+                <a:spcPct val="115000"/>
               </a:lnSpc>
               <a:spcAft>
-                <a:spcPts val="7100"/>
+                <a:spcPts val="0"/>
               </a:spcAft>
             </a:pPr>
             <a:r>
@@ -5771,13 +5978,36 @@
               <a:t>● 文本情感词典 + 情绪标签融合</a:t>
             </a:r>
           </a:p>
+        </p:txBody>
+      </p:sp>
+      <p:sp>
+        <p:nvSpPr>
+          <p:cNvPr id="11" name="TextBox 10"/>
+          <p:cNvSpPr txBox="1"/>
+          <p:nvPr/>
+        </p:nvSpPr>
+        <p:spPr>
+          <a:xfrm>
+            <a:off x="457200" y="2028825"/>
+            <a:ext cx="3246120" cy="885825"/>
+          </a:xfrm>
+          <a:prstGeom prst="rect">
+            <a:avLst/>
+          </a:prstGeom>
+          <a:noFill/>
+        </p:spPr>
+        <p:txBody>
+          <a:bodyPr wrap="square" anchor="t" lIns="25400" tIns="0">
+            <a:spAutoFit/>
+          </a:bodyPr>
+          <a:lstStyle/>
           <a:p>
             <a:pPr>
               <a:lnSpc>
-                <a:spcPct val="120000"/>
+                <a:spcPct val="115000"/>
               </a:lnSpc>
               <a:spcAft>
-                <a:spcPts val="7100"/>
+                <a:spcPts val="0"/>
               </a:spcAft>
             </a:pPr>
             <a:r>
@@ -5791,13 +6021,36 @@
               <a:t>● DialogueManager 生成安抚话术</a:t>
             </a:r>
           </a:p>
+        </p:txBody>
+      </p:sp>
+      <p:sp>
+        <p:nvSpPr>
+          <p:cNvPr id="12" name="TextBox 11"/>
+          <p:cNvSpPr txBox="1"/>
+          <p:nvPr/>
+        </p:nvSpPr>
+        <p:spPr>
+          <a:xfrm>
+            <a:off x="457200" y="2932938"/>
+            <a:ext cx="3246120" cy="885825"/>
+          </a:xfrm>
+          <a:prstGeom prst="rect">
+            <a:avLst/>
+          </a:prstGeom>
+          <a:noFill/>
+        </p:spPr>
+        <p:txBody>
+          <a:bodyPr wrap="square" anchor="t" lIns="25400" tIns="0">
+            <a:spAutoFit/>
+          </a:bodyPr>
+          <a:lstStyle/>
           <a:p>
             <a:pPr>
               <a:lnSpc>
-                <a:spcPct val="120000"/>
+                <a:spcPct val="115000"/>
               </a:lnSpc>
               <a:spcAft>
-                <a:spcPts val="7100"/>
+                <a:spcPts val="0"/>
               </a:spcAft>
             </a:pPr>
             <a:r>
@@ -5811,13 +6064,36 @@
               <a:t>● 默认 Mock，可切换 LLM API</a:t>
             </a:r>
           </a:p>
+        </p:txBody>
+      </p:sp>
+      <p:sp>
+        <p:nvSpPr>
+          <p:cNvPr id="13" name="TextBox 12"/>
+          <p:cNvSpPr txBox="1"/>
+          <p:nvPr/>
+        </p:nvSpPr>
+        <p:spPr>
+          <a:xfrm>
+            <a:off x="457200" y="3837051"/>
+            <a:ext cx="3246120" cy="885825"/>
+          </a:xfrm>
+          <a:prstGeom prst="rect">
+            <a:avLst/>
+          </a:prstGeom>
+          <a:noFill/>
+        </p:spPr>
+        <p:txBody>
+          <a:bodyPr wrap="square" anchor="t" lIns="25400" tIns="0">
+            <a:spAutoFit/>
+          </a:bodyPr>
+          <a:lstStyle/>
           <a:p>
             <a:pPr>
               <a:lnSpc>
-                <a:spcPct val="120000"/>
+                <a:spcPct val="115000"/>
               </a:lnSpc>
               <a:spcAft>
-                <a:spcPts val="7100"/>
+                <a:spcPts val="0"/>
               </a:spcAft>
             </a:pPr>
             <a:r>
@@ -5835,7 +6111,7 @@
       </p:sp>
       <p:sp>
         <p:nvSpPr>
-          <p:cNvPr id="11" name="Rectangle 10"/>
+          <p:cNvPr id="14" name="Rectangle 13"/>
           <p:cNvSpPr/>
           <p:nvPr/>
         </p:nvSpPr>
@@ -5880,7 +6156,7 @@
       </p:sp>
       <p:pic>
         <p:nvPicPr>
-          <p:cNvPr id="12" name="Picture 11" descr="llm_module.png"/>
+          <p:cNvPr id="15" name="Picture 14" descr="llm_module.png"/>
           <p:cNvPicPr>
             <a:picLocks noChangeAspect="1"/>
           </p:cNvPicPr>
@@ -5904,7 +6180,7 @@
       </p:pic>
       <p:sp>
         <p:nvSpPr>
-          <p:cNvPr id="13" name="TextBox 12"/>
+          <p:cNvPr id="16" name="TextBox 15"/>
           <p:cNvSpPr txBox="1"/>
           <p:nvPr/>
         </p:nvSpPr>
@@ -6296,26 +6572,26 @@
         </p:nvSpPr>
         <p:spPr>
           <a:xfrm>
-            <a:off x="475488" y="1143000"/>
-            <a:ext cx="3300984" cy="3579876"/>
-          </a:xfrm>
-          <a:prstGeom prst="rect">
-            <a:avLst/>
-          </a:prstGeom>
-          <a:noFill/>
-        </p:spPr>
-        <p:txBody>
-          <a:bodyPr wrap="square" anchor="ctr">
+            <a:off x="457200" y="1124712"/>
+            <a:ext cx="3246120" cy="885825"/>
+          </a:xfrm>
+          <a:prstGeom prst="rect">
+            <a:avLst/>
+          </a:prstGeom>
+          <a:noFill/>
+        </p:spPr>
+        <p:txBody>
+          <a:bodyPr wrap="square" anchor="t" lIns="25400" tIns="0">
             <a:spAutoFit/>
           </a:bodyPr>
           <a:lstStyle/>
           <a:p>
             <a:pPr>
               <a:lnSpc>
-                <a:spcPct val="120000"/>
+                <a:spcPct val="115000"/>
               </a:lnSpc>
               <a:spcAft>
-                <a:spcPts val="7100"/>
+                <a:spcPts val="0"/>
               </a:spcAft>
             </a:pPr>
             <a:r>
@@ -6329,13 +6605,36 @@
               <a:t>● 感知帧 → 特征 → 融合 → 状态机</a:t>
             </a:r>
           </a:p>
+        </p:txBody>
+      </p:sp>
+      <p:sp>
+        <p:nvSpPr>
+          <p:cNvPr id="11" name="TextBox 10"/>
+          <p:cNvSpPr txBox="1"/>
+          <p:nvPr/>
+        </p:nvSpPr>
+        <p:spPr>
+          <a:xfrm>
+            <a:off x="457200" y="2028825"/>
+            <a:ext cx="3246120" cy="885825"/>
+          </a:xfrm>
+          <a:prstGeom prst="rect">
+            <a:avLst/>
+          </a:prstGeom>
+          <a:noFill/>
+        </p:spPr>
+        <p:txBody>
+          <a:bodyPr wrap="square" anchor="t" lIns="25400" tIns="0">
+            <a:spAutoFit/>
+          </a:bodyPr>
+          <a:lstStyle/>
           <a:p>
             <a:pPr>
               <a:lnSpc>
-                <a:spcPct val="120000"/>
+                <a:spcPct val="115000"/>
               </a:lnSpc>
               <a:spcAft>
-                <a:spcPts val="7100"/>
+                <a:spcPts val="0"/>
               </a:spcAft>
             </a:pPr>
             <a:r>
@@ -6349,13 +6648,36 @@
               <a:t>● CarePlanner 生成 RobotAction</a:t>
             </a:r>
           </a:p>
+        </p:txBody>
+      </p:sp>
+      <p:sp>
+        <p:nvSpPr>
+          <p:cNvPr id="12" name="TextBox 11"/>
+          <p:cNvSpPr txBox="1"/>
+          <p:nvPr/>
+        </p:nvSpPr>
+        <p:spPr>
+          <a:xfrm>
+            <a:off x="457200" y="2932938"/>
+            <a:ext cx="3246120" cy="885825"/>
+          </a:xfrm>
+          <a:prstGeom prst="rect">
+            <a:avLst/>
+          </a:prstGeom>
+          <a:noFill/>
+        </p:spPr>
+        <p:txBody>
+          <a:bodyPr wrap="square" anchor="t" lIns="25400" tIns="0">
+            <a:spAutoFit/>
+          </a:bodyPr>
+          <a:lstStyle/>
           <a:p>
             <a:pPr>
               <a:lnSpc>
-                <a:spcPct val="120000"/>
+                <a:spcPct val="115000"/>
               </a:lnSpc>
               <a:spcAft>
-                <a:spcPts val="7100"/>
+                <a:spcPts val="0"/>
               </a:spcAft>
             </a:pPr>
             <a:r>
@@ -6369,13 +6691,36 @@
               <a:t>● RobotAdapter 下发仿真或 ROS2</a:t>
             </a:r>
           </a:p>
+        </p:txBody>
+      </p:sp>
+      <p:sp>
+        <p:nvSpPr>
+          <p:cNvPr id="13" name="TextBox 12"/>
+          <p:cNvSpPr txBox="1"/>
+          <p:nvPr/>
+        </p:nvSpPr>
+        <p:spPr>
+          <a:xfrm>
+            <a:off x="457200" y="3837051"/>
+            <a:ext cx="3246120" cy="885825"/>
+          </a:xfrm>
+          <a:prstGeom prst="rect">
+            <a:avLst/>
+          </a:prstGeom>
+          <a:noFill/>
+        </p:spPr>
+        <p:txBody>
+          <a:bodyPr wrap="square" anchor="t" lIns="25400" tIns="0">
+            <a:spAutoFit/>
+          </a:bodyPr>
+          <a:lstStyle/>
           <a:p>
             <a:pPr>
               <a:lnSpc>
-                <a:spcPct val="120000"/>
+                <a:spcPct val="115000"/>
               </a:lnSpc>
               <a:spcAft>
-                <a:spcPts val="7100"/>
+                <a:spcPts val="0"/>
               </a:spcAft>
             </a:pPr>
             <a:r>
@@ -6393,7 +6738,7 @@
       </p:sp>
       <p:sp>
         <p:nvSpPr>
-          <p:cNvPr id="11" name="Rectangle 10"/>
+          <p:cNvPr id="14" name="Rectangle 13"/>
           <p:cNvSpPr/>
           <p:nvPr/>
         </p:nvSpPr>
@@ -6438,7 +6783,7 @@
       </p:sp>
       <p:pic>
         <p:nvPicPr>
-          <p:cNvPr id="12" name="Picture 11" descr="pipeline.png"/>
+          <p:cNvPr id="15" name="Picture 14" descr="pipeline.png"/>
           <p:cNvPicPr>
             <a:picLocks noChangeAspect="1"/>
           </p:cNvPicPr>
@@ -6462,7 +6807,7 @@
       </p:pic>
       <p:sp>
         <p:nvSpPr>
-          <p:cNvPr id="13" name="TextBox 12"/>
+          <p:cNvPr id="16" name="TextBox 15"/>
           <p:cNvSpPr txBox="1"/>
           <p:nvPr/>
         </p:nvSpPr>
@@ -6848,14 +7193,186 @@
       </p:sp>
       <p:sp>
         <p:nvSpPr>
-          <p:cNvPr id="10" name="Rectangle 9"/>
+          <p:cNvPr id="10" name="TextBox 9"/>
+          <p:cNvSpPr txBox="1"/>
+          <p:nvPr/>
+        </p:nvSpPr>
+        <p:spPr>
+          <a:xfrm>
+            <a:off x="457200" y="1124712"/>
+            <a:ext cx="3246120" cy="803529"/>
+          </a:xfrm>
+          <a:prstGeom prst="rect">
+            <a:avLst/>
+          </a:prstGeom>
+          <a:noFill/>
+        </p:spPr>
+        <p:txBody>
+          <a:bodyPr wrap="square" anchor="t" lIns="25400" tIns="0">
+            <a:spAutoFit/>
+          </a:bodyPr>
+          <a:lstStyle/>
+          <a:p>
+            <a:pPr>
+              <a:lnSpc>
+                <a:spcPct val="115000"/>
+              </a:lnSpc>
+              <a:spcAft>
+                <a:spcPts val="0"/>
+              </a:spcAft>
+            </a:pPr>
+            <a:r>
+              <a:rPr sz="1300" b="0">
+                <a:solidFill>
+                  <a:srgbClr val="1C202C"/>
+                </a:solidFill>
+                <a:latin typeface="微软雅黑"/>
+                <ns3:rFonts xmlns:ns3="http://schemas.openxmlformats.org/wordprocessingml/2006/main" ns3:eastAsia="微软雅黑" ns3:ascii="微软雅黑" ns3:hAnsi="微软雅黑"/>
+              </a:rPr>
+              <a:t>● 确认跌倒后按序触发四类动作</a:t>
+            </a:r>
+          </a:p>
+        </p:txBody>
+      </p:sp>
+      <p:sp>
+        <p:nvSpPr>
+          <p:cNvPr id="11" name="TextBox 10"/>
+          <p:cNvSpPr txBox="1"/>
+          <p:nvPr/>
+        </p:nvSpPr>
+        <p:spPr>
+          <a:xfrm>
+            <a:off x="457200" y="1946529"/>
+            <a:ext cx="3246120" cy="803529"/>
+          </a:xfrm>
+          <a:prstGeom prst="rect">
+            <a:avLst/>
+          </a:prstGeom>
+          <a:noFill/>
+        </p:spPr>
+        <p:txBody>
+          <a:bodyPr wrap="square" anchor="t" lIns="25400" tIns="0">
+            <a:spAutoFit/>
+          </a:bodyPr>
+          <a:lstStyle/>
+          <a:p>
+            <a:pPr>
+              <a:lnSpc>
+                <a:spcPct val="115000"/>
+              </a:lnSpc>
+              <a:spcAft>
+                <a:spcPts val="0"/>
+              </a:spcAft>
+            </a:pPr>
+            <a:r>
+              <a:rPr sz="1300" b="0">
+                <a:solidFill>
+                  <a:srgbClr val="1C202C"/>
+                </a:solidFill>
+                <a:latin typeface="微软雅黑"/>
+                <ns4:rFonts xmlns:ns4="http://schemas.openxmlformats.org/wordprocessingml/2006/main" ns4:eastAsia="微软雅黑" ns4:ascii="微软雅黑" ns4:hAnsi="微软雅黑"/>
+              </a:rPr>
+              <a:t>● 告警音 → 语音 → 家属通知 → 手势</a:t>
+            </a:r>
+          </a:p>
+        </p:txBody>
+      </p:sp>
+      <p:sp>
+        <p:nvSpPr>
+          <p:cNvPr id="12" name="TextBox 11"/>
+          <p:cNvSpPr txBox="1"/>
+          <p:nvPr/>
+        </p:nvSpPr>
+        <p:spPr>
+          <a:xfrm>
+            <a:off x="457200" y="2768346"/>
+            <a:ext cx="3246120" cy="803529"/>
+          </a:xfrm>
+          <a:prstGeom prst="rect">
+            <a:avLst/>
+          </a:prstGeom>
+          <a:noFill/>
+        </p:spPr>
+        <p:txBody>
+          <a:bodyPr wrap="square" anchor="t" lIns="25400" tIns="0">
+            <a:spAutoFit/>
+          </a:bodyPr>
+          <a:lstStyle/>
+          <a:p>
+            <a:pPr>
+              <a:lnSpc>
+                <a:spcPct val="115000"/>
+              </a:lnSpc>
+              <a:spcAft>
+                <a:spcPts val="0"/>
+              </a:spcAft>
+            </a:pPr>
+            <a:r>
+              <a:rPr sz="1300" b="0">
+                <a:solidFill>
+                  <a:srgbClr val="1C202C"/>
+                </a:solidFill>
+                <a:latin typeface="微软雅黑"/>
+                <ns5:rFonts xmlns:ns5="http://schemas.openxmlformats.org/wordprocessingml/2006/main" ns5:eastAsia="微软雅黑" ns5:ascii="微软雅黑" ns5:hAnsi="微软雅黑"/>
+              </a:rPr>
+              <a:t>● EmergencyNotifier 记录推送渠道</a:t>
+            </a:r>
+          </a:p>
+        </p:txBody>
+      </p:sp>
+      <p:sp>
+        <p:nvSpPr>
+          <p:cNvPr id="13" name="TextBox 12"/>
+          <p:cNvSpPr txBox="1"/>
+          <p:nvPr/>
+        </p:nvSpPr>
+        <p:spPr>
+          <a:xfrm>
+            <a:off x="457200" y="3590163"/>
+            <a:ext cx="3246120" cy="803529"/>
+          </a:xfrm>
+          <a:prstGeom prst="rect">
+            <a:avLst/>
+          </a:prstGeom>
+          <a:noFill/>
+        </p:spPr>
+        <p:txBody>
+          <a:bodyPr wrap="square" anchor="t" lIns="25400" tIns="0">
+            <a:spAutoFit/>
+          </a:bodyPr>
+          <a:lstStyle/>
+          <a:p>
+            <a:pPr>
+              <a:lnSpc>
+                <a:spcPct val="115000"/>
+              </a:lnSpc>
+              <a:spcAft>
+                <a:spcPts val="0"/>
+              </a:spcAft>
+            </a:pPr>
+            <a:r>
+              <a:rPr sz="1300" b="0">
+                <a:solidFill>
+                  <a:srgbClr val="1C202C"/>
+                </a:solidFill>
+                <a:latin typeface="微软雅黑"/>
+                <ns6:rFonts xmlns:ns6="http://schemas.openxmlformats.org/wordprocessingml/2006/main" ns6:eastAsia="微软雅黑" ns6:ascii="微软雅黑" ns6:hAnsi="微软雅黑"/>
+              </a:rPr>
+              <a:t>● 端到端触发率评测 100%</a:t>
+            </a:r>
+          </a:p>
+        </p:txBody>
+      </p:sp>
+      <p:sp>
+        <p:nvSpPr>
+          <p:cNvPr id="14" name="Rectangle 13"/>
           <p:cNvSpPr/>
           <p:nvPr/>
         </p:nvSpPr>
         <p:spPr>
           <a:xfrm>
-            <a:off x="347472" y="4503420"/>
-            <a:ext cx="3465576" cy="310896"/>
+            <a:off x="365760" y="4521708"/>
+            <a:ext cx="3429000" cy="310896"/>
           </a:xfrm>
           <a:prstGeom prst="rect">
             <a:avLst/>
@@ -6891,22 +7408,22 @@
       </p:sp>
       <p:sp>
         <p:nvSpPr>
-          <p:cNvPr id="11" name="TextBox 10"/>
-          <p:cNvSpPr txBox="1"/>
-          <p:nvPr/>
-        </p:nvSpPr>
-        <p:spPr>
-          <a:xfrm>
-            <a:off x="402336" y="4576572"/>
-            <a:ext cx="3355848" cy="237744"/>
-          </a:xfrm>
-          <a:prstGeom prst="rect">
-            <a:avLst/>
-          </a:prstGeom>
-          <a:noFill/>
-        </p:spPr>
-        <p:txBody>
-          <a:bodyPr wrap="none">
+          <p:cNvPr id="15" name="TextBox 14"/>
+          <p:cNvSpPr txBox="1"/>
+          <p:nvPr/>
+        </p:nvSpPr>
+        <p:spPr>
+          <a:xfrm>
+            <a:off x="402336" y="4585716"/>
+            <a:ext cx="3355848" cy="201167"/>
+          </a:xfrm>
+          <a:prstGeom prst="rect">
+            <a:avLst/>
+          </a:prstGeom>
+          <a:noFill/>
+        </p:spPr>
+        <p:txBody>
+          <a:bodyPr wrap="none" anchor="ctr">
             <a:spAutoFit/>
           </a:bodyPr>
           <a:lstStyle/>
@@ -6918,7 +7435,7 @@
                   <a:srgbClr val="FFFFFF"/>
                 </a:solidFill>
                 <a:latin typeface="微软雅黑"/>
-                <ns3:rFonts xmlns:ns3="http://schemas.openxmlformats.org/wordprocessingml/2006/main" ns3:eastAsia="微软雅黑" ns3:ascii="微软雅黑" ns3:hAnsi="微软雅黑"/>
+                <ns7:rFonts xmlns:ns7="http://schemas.openxmlformats.org/wordprocessingml/2006/main" ns7:eastAsia="微软雅黑" ns7:ascii="微软雅黑" ns7:hAnsi="微软雅黑"/>
               </a:rPr>
               <a:t>紧急链路可端到端验证</a:t>
             </a:r>
@@ -6927,110 +7444,7 @@
       </p:sp>
       <p:sp>
         <p:nvSpPr>
-          <p:cNvPr id="12" name="TextBox 11"/>
-          <p:cNvSpPr txBox="1"/>
-          <p:nvPr/>
-        </p:nvSpPr>
-        <p:spPr>
-          <a:xfrm>
-            <a:off x="475488" y="1143000"/>
-            <a:ext cx="3300984" cy="3232404"/>
-          </a:xfrm>
-          <a:prstGeom prst="rect">
-            <a:avLst/>
-          </a:prstGeom>
-          <a:noFill/>
-        </p:spPr>
-        <p:txBody>
-          <a:bodyPr wrap="square" anchor="ctr">
-            <a:spAutoFit/>
-          </a:bodyPr>
-          <a:lstStyle/>
-          <a:p>
-            <a:pPr>
-              <a:lnSpc>
-                <a:spcPct val="120000"/>
-              </a:lnSpc>
-              <a:spcAft>
-                <a:spcPts val="6200"/>
-              </a:spcAft>
-            </a:pPr>
-            <a:r>
-              <a:rPr sz="1300" b="0">
-                <a:solidFill>
-                  <a:srgbClr val="1C202C"/>
-                </a:solidFill>
-                <a:latin typeface="微软雅黑"/>
-                <ns4:rFonts xmlns:ns4="http://schemas.openxmlformats.org/wordprocessingml/2006/main" ns4:eastAsia="微软雅黑" ns4:ascii="微软雅黑" ns4:hAnsi="微软雅黑"/>
-              </a:rPr>
-              <a:t>● 确认跌倒后按序触发四类动作</a:t>
-            </a:r>
-          </a:p>
-          <a:p>
-            <a:pPr>
-              <a:lnSpc>
-                <a:spcPct val="120000"/>
-              </a:lnSpc>
-              <a:spcAft>
-                <a:spcPts val="6200"/>
-              </a:spcAft>
-            </a:pPr>
-            <a:r>
-              <a:rPr sz="1300" b="0">
-                <a:solidFill>
-                  <a:srgbClr val="1C202C"/>
-                </a:solidFill>
-                <a:latin typeface="微软雅黑"/>
-                <ns5:rFonts xmlns:ns5="http://schemas.openxmlformats.org/wordprocessingml/2006/main" ns5:eastAsia="微软雅黑" ns5:ascii="微软雅黑" ns5:hAnsi="微软雅黑"/>
-              </a:rPr>
-              <a:t>● 告警音 → 语音 → 家属通知 → 手势</a:t>
-            </a:r>
-          </a:p>
-          <a:p>
-            <a:pPr>
-              <a:lnSpc>
-                <a:spcPct val="120000"/>
-              </a:lnSpc>
-              <a:spcAft>
-                <a:spcPts val="6200"/>
-              </a:spcAft>
-            </a:pPr>
-            <a:r>
-              <a:rPr sz="1300" b="0">
-                <a:solidFill>
-                  <a:srgbClr val="1C202C"/>
-                </a:solidFill>
-                <a:latin typeface="微软雅黑"/>
-                <ns6:rFonts xmlns:ns6="http://schemas.openxmlformats.org/wordprocessingml/2006/main" ns6:eastAsia="微软雅黑" ns6:ascii="微软雅黑" ns6:hAnsi="微软雅黑"/>
-              </a:rPr>
-              <a:t>● EmergencyNotifier 记录推送渠道</a:t>
-            </a:r>
-          </a:p>
-          <a:p>
-            <a:pPr>
-              <a:lnSpc>
-                <a:spcPct val="120000"/>
-              </a:lnSpc>
-              <a:spcAft>
-                <a:spcPts val="6200"/>
-              </a:spcAft>
-            </a:pPr>
-            <a:r>
-              <a:rPr sz="1300" b="0">
-                <a:solidFill>
-                  <a:srgbClr val="1C202C"/>
-                </a:solidFill>
-                <a:latin typeface="微软雅黑"/>
-                <ns7:rFonts xmlns:ns7="http://schemas.openxmlformats.org/wordprocessingml/2006/main" ns7:eastAsia="微软雅黑" ns7:ascii="微软雅黑" ns7:hAnsi="微软雅黑"/>
-              </a:rPr>
-              <a:t>● 端到端触发率评测 100%</a:t>
-            </a:r>
-          </a:p>
-        </p:txBody>
-      </p:sp>
-      <p:sp>
-        <p:nvSpPr>
-          <p:cNvPr id="13" name="Rectangle 12"/>
+          <p:cNvPr id="16" name="Rectangle 15"/>
           <p:cNvSpPr/>
           <p:nvPr/>
         </p:nvSpPr>
@@ -7075,7 +7489,7 @@
       </p:sp>
       <p:pic>
         <p:nvPicPr>
-          <p:cNvPr id="14" name="Picture 13" descr="emergency_flow.png"/>
+          <p:cNvPr id="17" name="Picture 16" descr="emergency_flow.png"/>
           <p:cNvPicPr>
             <a:picLocks noChangeAspect="1"/>
           </p:cNvPicPr>
@@ -7099,7 +7513,7 @@
       </p:pic>
       <p:sp>
         <p:nvSpPr>
-          <p:cNvPr id="15" name="TextBox 14"/>
+          <p:cNvPr id="18" name="TextBox 17"/>
           <p:cNvSpPr txBox="1"/>
           <p:nvPr/>
         </p:nvSpPr>
@@ -8173,26 +8587,26 @@
         </p:nvSpPr>
         <p:spPr>
           <a:xfrm>
-            <a:off x="475488" y="1143000"/>
-            <a:ext cx="3300984" cy="3579876"/>
-          </a:xfrm>
-          <a:prstGeom prst="rect">
-            <a:avLst/>
-          </a:prstGeom>
-          <a:noFill/>
-        </p:spPr>
-        <p:txBody>
-          <a:bodyPr wrap="square" anchor="ctr">
+            <a:off x="457200" y="1124712"/>
+            <a:ext cx="3246120" cy="885825"/>
+          </a:xfrm>
+          <a:prstGeom prst="rect">
+            <a:avLst/>
+          </a:prstGeom>
+          <a:noFill/>
+        </p:spPr>
+        <p:txBody>
+          <a:bodyPr wrap="square" anchor="t" lIns="25400" tIns="0">
             <a:spAutoFit/>
           </a:bodyPr>
           <a:lstStyle/>
           <a:p>
             <a:pPr>
               <a:lnSpc>
-                <a:spcPct val="120000"/>
+                <a:spcPct val="115000"/>
               </a:lnSpc>
               <a:spcAft>
-                <a:spcPts val="7100"/>
+                <a:spcPts val="0"/>
               </a:spcAft>
             </a:pPr>
             <a:r>
@@ -8206,13 +8620,36 @@
               <a:t>● FastAPI 后端 + 浏览器前端</a:t>
             </a:r>
           </a:p>
+        </p:txBody>
+      </p:sp>
+      <p:sp>
+        <p:nvSpPr>
+          <p:cNvPr id="11" name="TextBox 10"/>
+          <p:cNvSpPr txBox="1"/>
+          <p:nvPr/>
+        </p:nvSpPr>
+        <p:spPr>
+          <a:xfrm>
+            <a:off x="457200" y="2028825"/>
+            <a:ext cx="3246120" cy="885825"/>
+          </a:xfrm>
+          <a:prstGeom prst="rect">
+            <a:avLst/>
+          </a:prstGeom>
+          <a:noFill/>
+        </p:spPr>
+        <p:txBody>
+          <a:bodyPr wrap="square" anchor="t" lIns="25400" tIns="0">
+            <a:spAutoFit/>
+          </a:bodyPr>
+          <a:lstStyle/>
           <a:p>
             <a:pPr>
               <a:lnSpc>
-                <a:spcPct val="120000"/>
+                <a:spcPct val="115000"/>
               </a:lnSpc>
               <a:spcAft>
-                <a:spcPts val="7100"/>
+                <a:spcPts val="0"/>
               </a:spcAft>
             </a:pPr>
             <a:r>
@@ -8226,13 +8663,36 @@
               <a:t>● 实时风险仪表盘、对话与指令流</a:t>
             </a:r>
           </a:p>
+        </p:txBody>
+      </p:sp>
+      <p:sp>
+        <p:nvSpPr>
+          <p:cNvPr id="12" name="TextBox 11"/>
+          <p:cNvSpPr txBox="1"/>
+          <p:nvPr/>
+        </p:nvSpPr>
+        <p:spPr>
+          <a:xfrm>
+            <a:off x="457200" y="2932938"/>
+            <a:ext cx="3246120" cy="885825"/>
+          </a:xfrm>
+          <a:prstGeom prst="rect">
+            <a:avLst/>
+          </a:prstGeom>
+          <a:noFill/>
+        </p:spPr>
+        <p:txBody>
+          <a:bodyPr wrap="square" anchor="t" lIns="25400" tIns="0">
+            <a:spAutoFit/>
+          </a:bodyPr>
+          <a:lstStyle/>
           <a:p>
             <a:pPr>
               <a:lnSpc>
-                <a:spcPct val="120000"/>
+                <a:spcPct val="115000"/>
               </a:lnSpc>
               <a:spcAft>
-                <a:spcPts val="7100"/>
+                <a:spcPts val="0"/>
               </a:spcAft>
             </a:pPr>
             <a:r>
@@ -8246,13 +8706,36 @@
               <a:t>● 支持上传照片 / 摄像头骨架分析</a:t>
             </a:r>
           </a:p>
+        </p:txBody>
+      </p:sp>
+      <p:sp>
+        <p:nvSpPr>
+          <p:cNvPr id="13" name="TextBox 12"/>
+          <p:cNvSpPr txBox="1"/>
+          <p:nvPr/>
+        </p:nvSpPr>
+        <p:spPr>
+          <a:xfrm>
+            <a:off x="457200" y="3837051"/>
+            <a:ext cx="3246120" cy="885825"/>
+          </a:xfrm>
+          <a:prstGeom prst="rect">
+            <a:avLst/>
+          </a:prstGeom>
+          <a:noFill/>
+        </p:spPr>
+        <p:txBody>
+          <a:bodyPr wrap="square" anchor="t" lIns="25400" tIns="0">
+            <a:spAutoFit/>
+          </a:bodyPr>
+          <a:lstStyle/>
           <a:p>
             <a:pPr>
               <a:lnSpc>
-                <a:spcPct val="120000"/>
+                <a:spcPct val="115000"/>
               </a:lnSpc>
               <a:spcAft>
-                <a:spcPts val="7100"/>
+                <a:spcPts val="0"/>
               </a:spcAft>
             </a:pPr>
             <a:r>
@@ -8270,7 +8753,7 @@
       </p:sp>
       <p:sp>
         <p:nvSpPr>
-          <p:cNvPr id="11" name="Rectangle 10"/>
+          <p:cNvPr id="14" name="Rectangle 13"/>
           <p:cNvSpPr/>
           <p:nvPr/>
         </p:nvSpPr>
@@ -8315,7 +8798,7 @@
       </p:sp>
       <p:pic>
         <p:nvPicPr>
-          <p:cNvPr id="12" name="Picture 11" descr="ppt_full_dashboard.png"/>
+          <p:cNvPr id="15" name="Picture 14" descr="ppt_full_dashboard.png"/>
           <p:cNvPicPr>
             <a:picLocks noChangeAspect="1"/>
           </p:cNvPicPr>
@@ -8339,7 +8822,7 @@
       </p:pic>
       <p:sp>
         <p:nvSpPr>
-          <p:cNvPr id="13" name="TextBox 12"/>
+          <p:cNvPr id="16" name="TextBox 15"/>
           <p:cNvSpPr txBox="1"/>
           <p:nvPr/>
         </p:nvSpPr>
@@ -9459,14 +9942,229 @@
       </p:sp>
       <p:sp>
         <p:nvSpPr>
-          <p:cNvPr id="10" name="Rectangle 9"/>
+          <p:cNvPr id="10" name="TextBox 9"/>
+          <p:cNvSpPr txBox="1"/>
+          <p:nvPr/>
+        </p:nvSpPr>
+        <p:spPr>
+          <a:xfrm>
+            <a:off x="457200" y="1124712"/>
+            <a:ext cx="3246120" cy="639165"/>
+          </a:xfrm>
+          <a:prstGeom prst="rect">
+            <a:avLst/>
+          </a:prstGeom>
+          <a:noFill/>
+        </p:spPr>
+        <p:txBody>
+          <a:bodyPr wrap="square" anchor="t" lIns="25400" tIns="0">
+            <a:spAutoFit/>
+          </a:bodyPr>
+          <a:lstStyle/>
+          <a:p>
+            <a:pPr>
+              <a:lnSpc>
+                <a:spcPct val="115000"/>
+              </a:lnSpc>
+              <a:spcAft>
+                <a:spcPts val="0"/>
+              </a:spcAft>
+            </a:pPr>
+            <a:r>
+              <a:rPr sz="1300" b="0">
+                <a:solidFill>
+                  <a:srgbClr val="1C202C"/>
+                </a:solidFill>
+                <a:latin typeface="微软雅黑"/>
+                <ns3:rFonts xmlns:ns3="http://schemas.openxmlformats.org/wordprocessingml/2006/main" ns3:eastAsia="微软雅黑" ns3:ascii="微软雅黑" ns3:hAnsi="微软雅黑"/>
+              </a:rPr>
+              <a:t>● 第一部分  项目背景与需求分析</a:t>
+            </a:r>
+          </a:p>
+        </p:txBody>
+      </p:sp>
+      <p:sp>
+        <p:nvSpPr>
+          <p:cNvPr id="11" name="TextBox 10"/>
+          <p:cNvSpPr txBox="1"/>
+          <p:nvPr/>
+        </p:nvSpPr>
+        <p:spPr>
+          <a:xfrm>
+            <a:off x="457200" y="1782165"/>
+            <a:ext cx="3246120" cy="639165"/>
+          </a:xfrm>
+          <a:prstGeom prst="rect">
+            <a:avLst/>
+          </a:prstGeom>
+          <a:noFill/>
+        </p:spPr>
+        <p:txBody>
+          <a:bodyPr wrap="square" anchor="t" lIns="25400" tIns="0">
+            <a:spAutoFit/>
+          </a:bodyPr>
+          <a:lstStyle/>
+          <a:p>
+            <a:pPr>
+              <a:lnSpc>
+                <a:spcPct val="115000"/>
+              </a:lnSpc>
+              <a:spcAft>
+                <a:spcPts val="0"/>
+              </a:spcAft>
+            </a:pPr>
+            <a:r>
+              <a:rPr sz="1300" b="0">
+                <a:solidFill>
+                  <a:srgbClr val="1C202C"/>
+                </a:solidFill>
+                <a:latin typeface="微软雅黑"/>
+                <ns4:rFonts xmlns:ns4="http://schemas.openxmlformats.org/wordprocessingml/2006/main" ns4:eastAsia="微软雅黑" ns4:ascii="微软雅黑" ns4:hAnsi="微软雅黑"/>
+              </a:rPr>
+              <a:t>● 第二部分  关键技术与理论模型</a:t>
+            </a:r>
+          </a:p>
+        </p:txBody>
+      </p:sp>
+      <p:sp>
+        <p:nvSpPr>
+          <p:cNvPr id="12" name="TextBox 11"/>
+          <p:cNvSpPr txBox="1"/>
+          <p:nvPr/>
+        </p:nvSpPr>
+        <p:spPr>
+          <a:xfrm>
+            <a:off x="457200" y="2439619"/>
+            <a:ext cx="3246120" cy="639165"/>
+          </a:xfrm>
+          <a:prstGeom prst="rect">
+            <a:avLst/>
+          </a:prstGeom>
+          <a:noFill/>
+        </p:spPr>
+        <p:txBody>
+          <a:bodyPr wrap="square" anchor="t" lIns="25400" tIns="0">
+            <a:spAutoFit/>
+          </a:bodyPr>
+          <a:lstStyle/>
+          <a:p>
+            <a:pPr>
+              <a:lnSpc>
+                <a:spcPct val="115000"/>
+              </a:lnSpc>
+              <a:spcAft>
+                <a:spcPts val="0"/>
+              </a:spcAft>
+            </a:pPr>
+            <a:r>
+              <a:rPr sz="1300" b="0">
+                <a:solidFill>
+                  <a:srgbClr val="1C202C"/>
+                </a:solidFill>
+                <a:latin typeface="微软雅黑"/>
+                <ns5:rFonts xmlns:ns5="http://schemas.openxmlformats.org/wordprocessingml/2006/main" ns5:eastAsia="微软雅黑" ns5:ascii="微软雅黑" ns5:hAnsi="微软雅黑"/>
+              </a:rPr>
+              <a:t>● 第三部分  系统实现与实验验证</a:t>
+            </a:r>
+          </a:p>
+        </p:txBody>
+      </p:sp>
+      <p:sp>
+        <p:nvSpPr>
+          <p:cNvPr id="13" name="TextBox 12"/>
+          <p:cNvSpPr txBox="1"/>
+          <p:nvPr/>
+        </p:nvSpPr>
+        <p:spPr>
+          <a:xfrm>
+            <a:off x="457200" y="3097072"/>
+            <a:ext cx="3246120" cy="639165"/>
+          </a:xfrm>
+          <a:prstGeom prst="rect">
+            <a:avLst/>
+          </a:prstGeom>
+          <a:noFill/>
+        </p:spPr>
+        <p:txBody>
+          <a:bodyPr wrap="square" anchor="t" lIns="25400" tIns="0">
+            <a:spAutoFit/>
+          </a:bodyPr>
+          <a:lstStyle/>
+          <a:p>
+            <a:pPr>
+              <a:lnSpc>
+                <a:spcPct val="115000"/>
+              </a:lnSpc>
+              <a:spcAft>
+                <a:spcPts val="0"/>
+              </a:spcAft>
+            </a:pPr>
+            <a:r>
+              <a:rPr sz="1300" b="0">
+                <a:solidFill>
+                  <a:srgbClr val="1C202C"/>
+                </a:solidFill>
+                <a:latin typeface="微软雅黑"/>
+                <ns6:rFonts xmlns:ns6="http://schemas.openxmlformats.org/wordprocessingml/2006/main" ns6:eastAsia="微软雅黑" ns6:ascii="微软雅黑" ns6:hAnsi="微软雅黑"/>
+              </a:rPr>
+              <a:t>● 第四部分  创新点与展望</a:t>
+            </a:r>
+          </a:p>
+        </p:txBody>
+      </p:sp>
+      <p:sp>
+        <p:nvSpPr>
+          <p:cNvPr id="14" name="TextBox 13"/>
+          <p:cNvSpPr txBox="1"/>
+          <p:nvPr/>
+        </p:nvSpPr>
+        <p:spPr>
+          <a:xfrm>
+            <a:off x="457200" y="3754526"/>
+            <a:ext cx="3246120" cy="639165"/>
+          </a:xfrm>
+          <a:prstGeom prst="rect">
+            <a:avLst/>
+          </a:prstGeom>
+          <a:noFill/>
+        </p:spPr>
+        <p:txBody>
+          <a:bodyPr wrap="square" anchor="t" lIns="25400" tIns="0">
+            <a:spAutoFit/>
+          </a:bodyPr>
+          <a:lstStyle/>
+          <a:p>
+            <a:pPr>
+              <a:lnSpc>
+                <a:spcPct val="115000"/>
+              </a:lnSpc>
+              <a:spcAft>
+                <a:spcPts val="0"/>
+              </a:spcAft>
+            </a:pPr>
+            <a:r>
+              <a:rPr sz="1300" b="0">
+                <a:solidFill>
+                  <a:srgbClr val="1C202C"/>
+                </a:solidFill>
+                <a:latin typeface="微软雅黑"/>
+                <ns7:rFonts xmlns:ns7="http://schemas.openxmlformats.org/wordprocessingml/2006/main" ns7:eastAsia="微软雅黑" ns7:ascii="微软雅黑" ns7:hAnsi="微软雅黑"/>
+              </a:rPr>
+              <a:t>● 附录  演示界面与开源仓库</a:t>
+            </a:r>
+          </a:p>
+        </p:txBody>
+      </p:sp>
+      <p:sp>
+        <p:nvSpPr>
+          <p:cNvPr id="15" name="Rectangle 14"/>
           <p:cNvSpPr/>
           <p:nvPr/>
         </p:nvSpPr>
         <p:spPr>
           <a:xfrm>
-            <a:off x="347472" y="4503420"/>
-            <a:ext cx="3465576" cy="310896"/>
+            <a:off x="365760" y="4521708"/>
+            <a:ext cx="3429000" cy="310896"/>
           </a:xfrm>
           <a:prstGeom prst="rect">
             <a:avLst/>
@@ -9502,22 +10200,22 @@
       </p:sp>
       <p:sp>
         <p:nvSpPr>
-          <p:cNvPr id="11" name="TextBox 10"/>
-          <p:cNvSpPr txBox="1"/>
-          <p:nvPr/>
-        </p:nvSpPr>
-        <p:spPr>
-          <a:xfrm>
-            <a:off x="402336" y="4576572"/>
-            <a:ext cx="3355848" cy="237744"/>
-          </a:xfrm>
-          <a:prstGeom prst="rect">
-            <a:avLst/>
-          </a:prstGeom>
-          <a:noFill/>
-        </p:spPr>
-        <p:txBody>
-          <a:bodyPr wrap="none">
+          <p:cNvPr id="16" name="TextBox 15"/>
+          <p:cNvSpPr txBox="1"/>
+          <p:nvPr/>
+        </p:nvSpPr>
+        <p:spPr>
+          <a:xfrm>
+            <a:off x="402336" y="4585716"/>
+            <a:ext cx="3355848" cy="201167"/>
+          </a:xfrm>
+          <a:prstGeom prst="rect">
+            <a:avLst/>
+          </a:prstGeom>
+          <a:noFill/>
+        </p:spPr>
+        <p:txBody>
+          <a:bodyPr wrap="none" anchor="ctr">
             <a:spAutoFit/>
           </a:bodyPr>
           <a:lstStyle/>
@@ -9529,7 +10227,7 @@
                   <a:srgbClr val="FFFFFF"/>
                 </a:solidFill>
                 <a:latin typeface="微软雅黑"/>
-                <ns3:rFonts xmlns:ns3="http://schemas.openxmlformats.org/wordprocessingml/2006/main" ns3:eastAsia="微软雅黑" ns3:ascii="微软雅黑" ns3:hAnsi="微软雅黑"/>
+                <ns8:rFonts xmlns:ns8="http://schemas.openxmlformats.org/wordprocessingml/2006/main" ns8:eastAsia="微软雅黑" ns8:ascii="微软雅黑" ns8:hAnsi="微软雅黑"/>
               </a:rPr>
               <a:t>理论 + 工程 + 现场演示</a:t>
             </a:r>
@@ -9538,130 +10236,7 @@
       </p:sp>
       <p:sp>
         <p:nvSpPr>
-          <p:cNvPr id="12" name="TextBox 11"/>
-          <p:cNvSpPr txBox="1"/>
-          <p:nvPr/>
-        </p:nvSpPr>
-        <p:spPr>
-          <a:xfrm>
-            <a:off x="475488" y="1143000"/>
-            <a:ext cx="3300984" cy="3232404"/>
-          </a:xfrm>
-          <a:prstGeom prst="rect">
-            <a:avLst/>
-          </a:prstGeom>
-          <a:noFill/>
-        </p:spPr>
-        <p:txBody>
-          <a:bodyPr wrap="square" anchor="ctr">
-            <a:spAutoFit/>
-          </a:bodyPr>
-          <a:lstStyle/>
-          <a:p>
-            <a:pPr>
-              <a:lnSpc>
-                <a:spcPct val="120000"/>
-              </a:lnSpc>
-              <a:spcAft>
-                <a:spcPts val="4200"/>
-              </a:spcAft>
-            </a:pPr>
-            <a:r>
-              <a:rPr sz="1300" b="0">
-                <a:solidFill>
-                  <a:srgbClr val="1C202C"/>
-                </a:solidFill>
-                <a:latin typeface="微软雅黑"/>
-                <ns4:rFonts xmlns:ns4="http://schemas.openxmlformats.org/wordprocessingml/2006/main" ns4:eastAsia="微软雅黑" ns4:ascii="微软雅黑" ns4:hAnsi="微软雅黑"/>
-              </a:rPr>
-              <a:t>● 第一部分  项目背景与需求分析</a:t>
-            </a:r>
-          </a:p>
-          <a:p>
-            <a:pPr>
-              <a:lnSpc>
-                <a:spcPct val="120000"/>
-              </a:lnSpc>
-              <a:spcAft>
-                <a:spcPts val="4200"/>
-              </a:spcAft>
-            </a:pPr>
-            <a:r>
-              <a:rPr sz="1300" b="0">
-                <a:solidFill>
-                  <a:srgbClr val="1C202C"/>
-                </a:solidFill>
-                <a:latin typeface="微软雅黑"/>
-                <ns5:rFonts xmlns:ns5="http://schemas.openxmlformats.org/wordprocessingml/2006/main" ns5:eastAsia="微软雅黑" ns5:ascii="微软雅黑" ns5:hAnsi="微软雅黑"/>
-              </a:rPr>
-              <a:t>● 第二部分  关键技术与理论模型</a:t>
-            </a:r>
-          </a:p>
-          <a:p>
-            <a:pPr>
-              <a:lnSpc>
-                <a:spcPct val="120000"/>
-              </a:lnSpc>
-              <a:spcAft>
-                <a:spcPts val="4200"/>
-              </a:spcAft>
-            </a:pPr>
-            <a:r>
-              <a:rPr sz="1300" b="0">
-                <a:solidFill>
-                  <a:srgbClr val="1C202C"/>
-                </a:solidFill>
-                <a:latin typeface="微软雅黑"/>
-                <ns6:rFonts xmlns:ns6="http://schemas.openxmlformats.org/wordprocessingml/2006/main" ns6:eastAsia="微软雅黑" ns6:ascii="微软雅黑" ns6:hAnsi="微软雅黑"/>
-              </a:rPr>
-              <a:t>● 第三部分  系统实现与实验验证</a:t>
-            </a:r>
-          </a:p>
-          <a:p>
-            <a:pPr>
-              <a:lnSpc>
-                <a:spcPct val="120000"/>
-              </a:lnSpc>
-              <a:spcAft>
-                <a:spcPts val="4200"/>
-              </a:spcAft>
-            </a:pPr>
-            <a:r>
-              <a:rPr sz="1300" b="0">
-                <a:solidFill>
-                  <a:srgbClr val="1C202C"/>
-                </a:solidFill>
-                <a:latin typeface="微软雅黑"/>
-                <ns7:rFonts xmlns:ns7="http://schemas.openxmlformats.org/wordprocessingml/2006/main" ns7:eastAsia="微软雅黑" ns7:ascii="微软雅黑" ns7:hAnsi="微软雅黑"/>
-              </a:rPr>
-              <a:t>● 第四部分  创新点与展望</a:t>
-            </a:r>
-          </a:p>
-          <a:p>
-            <a:pPr>
-              <a:lnSpc>
-                <a:spcPct val="120000"/>
-              </a:lnSpc>
-              <a:spcAft>
-                <a:spcPts val="4200"/>
-              </a:spcAft>
-            </a:pPr>
-            <a:r>
-              <a:rPr sz="1300" b="0">
-                <a:solidFill>
-                  <a:srgbClr val="1C202C"/>
-                </a:solidFill>
-                <a:latin typeface="微软雅黑"/>
-                <ns8:rFonts xmlns:ns8="http://schemas.openxmlformats.org/wordprocessingml/2006/main" ns8:eastAsia="微软雅黑" ns8:ascii="微软雅黑" ns8:hAnsi="微软雅黑"/>
-              </a:rPr>
-              <a:t>● 附录  演示界面与开源仓库</a:t>
-            </a:r>
-          </a:p>
-        </p:txBody>
-      </p:sp>
-      <p:sp>
-        <p:nvSpPr>
-          <p:cNvPr id="13" name="Rectangle 12"/>
+          <p:cNvPr id="17" name="Rectangle 16"/>
           <p:cNvSpPr/>
           <p:nvPr/>
         </p:nvSpPr>
@@ -9706,7 +10281,7 @@
       </p:sp>
       <p:pic>
         <p:nvPicPr>
-          <p:cNvPr id="14" name="Picture 13" descr="pipeline.png"/>
+          <p:cNvPr id="18" name="Picture 17" descr="pipeline.png"/>
           <p:cNvPicPr>
             <a:picLocks noChangeAspect="1"/>
           </p:cNvPicPr>
@@ -9730,7 +10305,7 @@
       </p:pic>
       <p:sp>
         <p:nvSpPr>
-          <p:cNvPr id="15" name="TextBox 14"/>
+          <p:cNvPr id="19" name="TextBox 18"/>
           <p:cNvSpPr txBox="1"/>
           <p:nvPr/>
         </p:nvSpPr>
@@ -11584,14 +12159,229 @@
       </p:sp>
       <p:sp>
         <p:nvSpPr>
-          <p:cNvPr id="10" name="Rectangle 9"/>
+          <p:cNvPr id="10" name="TextBox 9"/>
+          <p:cNvSpPr txBox="1"/>
+          <p:nvPr/>
+        </p:nvSpPr>
+        <p:spPr>
+          <a:xfrm>
+            <a:off x="457200" y="1124712"/>
+            <a:ext cx="3246120" cy="639165"/>
+          </a:xfrm>
+          <a:prstGeom prst="rect">
+            <a:avLst/>
+          </a:prstGeom>
+          <a:noFill/>
+        </p:spPr>
+        <p:txBody>
+          <a:bodyPr wrap="square" anchor="t" lIns="25400" tIns="0">
+            <a:spAutoFit/>
+          </a:bodyPr>
+          <a:lstStyle/>
+          <a:p>
+            <a:pPr>
+              <a:lnSpc>
+                <a:spcPct val="115000"/>
+              </a:lnSpc>
+              <a:spcAft>
+                <a:spcPts val="0"/>
+              </a:spcAft>
+            </a:pPr>
+            <a:r>
+              <a:rPr sz="1300" b="0">
+                <a:solidFill>
+                  <a:srgbClr val="1C202C"/>
+                </a:solidFill>
+                <a:latin typeface="微软雅黑"/>
+                <ns3:rFonts xmlns:ns3="http://schemas.openxmlformats.org/wordprocessingml/2006/main" ns3:eastAsia="微软雅黑" ns3:ascii="微软雅黑" ns3:hAnsi="微软雅黑"/>
+              </a:rPr>
+              <a:t>● 跌倒检测 P/R/F1：100%（6类合成场景）</a:t>
+            </a:r>
+          </a:p>
+        </p:txBody>
+      </p:sp>
+      <p:sp>
+        <p:nvSpPr>
+          <p:cNvPr id="11" name="TextBox 10"/>
+          <p:cNvSpPr txBox="1"/>
+          <p:nvPr/>
+        </p:nvSpPr>
+        <p:spPr>
+          <a:xfrm>
+            <a:off x="457200" y="1782165"/>
+            <a:ext cx="3246120" cy="639165"/>
+          </a:xfrm>
+          <a:prstGeom prst="rect">
+            <a:avLst/>
+          </a:prstGeom>
+          <a:noFill/>
+        </p:spPr>
+        <p:txBody>
+          <a:bodyPr wrap="square" anchor="t" lIns="25400" tIns="0">
+            <a:spAutoFit/>
+          </a:bodyPr>
+          <a:lstStyle/>
+          <a:p>
+            <a:pPr>
+              <a:lnSpc>
+                <a:spcPct val="115000"/>
+              </a:lnSpc>
+              <a:spcAft>
+                <a:spcPts val="0"/>
+              </a:spcAft>
+            </a:pPr>
+            <a:r>
+              <a:rPr sz="1300" b="0">
+                <a:solidFill>
+                  <a:srgbClr val="1C202C"/>
+                </a:solidFill>
+                <a:latin typeface="微软雅黑"/>
+                <ns4:rFonts xmlns:ns4="http://schemas.openxmlformats.org/wordprocessingml/2006/main" ns4:eastAsia="微软雅黑" ns4:ascii="微软雅黑" ns4:hAnsi="微软雅黑"/>
+              </a:rPr>
+              <a:t>● 紧急呼叫端到端触发率：100%</a:t>
+            </a:r>
+          </a:p>
+        </p:txBody>
+      </p:sp>
+      <p:sp>
+        <p:nvSpPr>
+          <p:cNvPr id="12" name="TextBox 11"/>
+          <p:cNvSpPr txBox="1"/>
+          <p:nvPr/>
+        </p:nvSpPr>
+        <p:spPr>
+          <a:xfrm>
+            <a:off x="457200" y="2439619"/>
+            <a:ext cx="3246120" cy="639165"/>
+          </a:xfrm>
+          <a:prstGeom prst="rect">
+            <a:avLst/>
+          </a:prstGeom>
+          <a:noFill/>
+        </p:spPr>
+        <p:txBody>
+          <a:bodyPr wrap="square" anchor="t" lIns="25400" tIns="0">
+            <a:spAutoFit/>
+          </a:bodyPr>
+          <a:lstStyle/>
+          <a:p>
+            <a:pPr>
+              <a:lnSpc>
+                <a:spcPct val="115000"/>
+              </a:lnSpc>
+              <a:spcAft>
+                <a:spcPts val="0"/>
+              </a:spcAft>
+            </a:pPr>
+            <a:r>
+              <a:rPr sz="1300" b="0">
+                <a:solidFill>
+                  <a:srgbClr val="1C202C"/>
+                </a:solidFill>
+                <a:latin typeface="微软雅黑"/>
+                <ns5:rFonts xmlns:ns5="http://schemas.openxmlformats.org/wordprocessingml/2006/main" ns5:eastAsia="微软雅黑" ns5:ascii="微软雅黑" ns5:hAnsi="微软雅黑"/>
+              </a:rPr>
+              <a:t>● 单帧决策延迟 &lt; 50ms（CPU）</a:t>
+            </a:r>
+          </a:p>
+        </p:txBody>
+      </p:sp>
+      <p:sp>
+        <p:nvSpPr>
+          <p:cNvPr id="13" name="TextBox 12"/>
+          <p:cNvSpPr txBox="1"/>
+          <p:nvPr/>
+        </p:nvSpPr>
+        <p:spPr>
+          <a:xfrm>
+            <a:off x="457200" y="3097072"/>
+            <a:ext cx="3246120" cy="639165"/>
+          </a:xfrm>
+          <a:prstGeom prst="rect">
+            <a:avLst/>
+          </a:prstGeom>
+          <a:noFill/>
+        </p:spPr>
+        <p:txBody>
+          <a:bodyPr wrap="square" anchor="t" lIns="25400" tIns="0">
+            <a:spAutoFit/>
+          </a:bodyPr>
+          <a:lstStyle/>
+          <a:p>
+            <a:pPr>
+              <a:lnSpc>
+                <a:spcPct val="115000"/>
+              </a:lnSpc>
+              <a:spcAft>
+                <a:spcPts val="0"/>
+              </a:spcAft>
+            </a:pPr>
+            <a:r>
+              <a:rPr sz="1300" b="0">
+                <a:solidFill>
+                  <a:srgbClr val="1C202C"/>
+                </a:solidFill>
+                <a:latin typeface="微软雅黑"/>
+                <ns6:rFonts xmlns:ns6="http://schemas.openxmlformats.org/wordprocessingml/2006/main" ns6:eastAsia="微软雅黑" ns6:ascii="微软雅黑" ns6:hAnsi="微软雅黑"/>
+              </a:rPr>
+              <a:t>● pytest + 无头压测全部通过</a:t>
+            </a:r>
+          </a:p>
+        </p:txBody>
+      </p:sp>
+      <p:sp>
+        <p:nvSpPr>
+          <p:cNvPr id="14" name="TextBox 13"/>
+          <p:cNvSpPr txBox="1"/>
+          <p:nvPr/>
+        </p:nvSpPr>
+        <p:spPr>
+          <a:xfrm>
+            <a:off x="457200" y="3754526"/>
+            <a:ext cx="3246120" cy="639165"/>
+          </a:xfrm>
+          <a:prstGeom prst="rect">
+            <a:avLst/>
+          </a:prstGeom>
+          <a:noFill/>
+        </p:spPr>
+        <p:txBody>
+          <a:bodyPr wrap="square" anchor="t" lIns="25400" tIns="0">
+            <a:spAutoFit/>
+          </a:bodyPr>
+          <a:lstStyle/>
+          <a:p>
+            <a:pPr>
+              <a:lnSpc>
+                <a:spcPct val="115000"/>
+              </a:lnSpc>
+              <a:spcAft>
+                <a:spcPts val="0"/>
+              </a:spcAft>
+            </a:pPr>
+            <a:r>
+              <a:rPr sz="1300" b="0">
+                <a:solidFill>
+                  <a:srgbClr val="1C202C"/>
+                </a:solidFill>
+                <a:latin typeface="微软雅黑"/>
+                <ns7:rFonts xmlns:ns7="http://schemas.openxmlformats.org/wordprocessingml/2006/main" ns7:eastAsia="微软雅黑" ns7:ascii="微软雅黑" ns7:hAnsi="微软雅黑"/>
+              </a:rPr>
+              <a:t>● 报告：fall_eval_report.json</a:t>
+            </a:r>
+          </a:p>
+        </p:txBody>
+      </p:sp>
+      <p:sp>
+        <p:nvSpPr>
+          <p:cNvPr id="15" name="Rectangle 14"/>
           <p:cNvSpPr/>
           <p:nvPr/>
         </p:nvSpPr>
         <p:spPr>
           <a:xfrm>
-            <a:off x="347472" y="4503420"/>
-            <a:ext cx="3465576" cy="310896"/>
+            <a:off x="365760" y="4521708"/>
+            <a:ext cx="3429000" cy="310896"/>
           </a:xfrm>
           <a:prstGeom prst="rect">
             <a:avLst/>
@@ -11627,22 +12417,22 @@
       </p:sp>
       <p:sp>
         <p:nvSpPr>
-          <p:cNvPr id="11" name="TextBox 10"/>
-          <p:cNvSpPr txBox="1"/>
-          <p:nvPr/>
-        </p:nvSpPr>
-        <p:spPr>
-          <a:xfrm>
-            <a:off x="402336" y="4576572"/>
-            <a:ext cx="3355848" cy="237744"/>
-          </a:xfrm>
-          <a:prstGeom prst="rect">
-            <a:avLst/>
-          </a:prstGeom>
-          <a:noFill/>
-        </p:spPr>
-        <p:txBody>
-          <a:bodyPr wrap="none">
+          <p:cNvPr id="16" name="TextBox 15"/>
+          <p:cNvSpPr txBox="1"/>
+          <p:nvPr/>
+        </p:nvSpPr>
+        <p:spPr>
+          <a:xfrm>
+            <a:off x="402336" y="4585716"/>
+            <a:ext cx="3355848" cy="201167"/>
+          </a:xfrm>
+          <a:prstGeom prst="rect">
+            <a:avLst/>
+          </a:prstGeom>
+          <a:noFill/>
+        </p:spPr>
+        <p:txBody>
+          <a:bodyPr wrap="none" anchor="ctr">
             <a:spAutoFit/>
           </a:bodyPr>
           <a:lstStyle/>
@@ -11654,7 +12444,7 @@
                   <a:srgbClr val="FFFFFF"/>
                 </a:solidFill>
                 <a:latin typeface="微软雅黑"/>
-                <ns3:rFonts xmlns:ns3="http://schemas.openxmlformats.org/wordprocessingml/2006/main" ns3:eastAsia="微软雅黑" ns3:ascii="微软雅黑" ns3:hAnsi="微软雅黑"/>
+                <ns8:rFonts xmlns:ns8="http://schemas.openxmlformats.org/wordprocessingml/2006/main" ns8:eastAsia="微软雅黑" ns8:ascii="微软雅黑" ns8:hAnsi="微软雅黑"/>
               </a:rPr>
               <a:t>指标可复现、脚本一键运行</a:t>
             </a:r>
@@ -11663,130 +12453,7 @@
       </p:sp>
       <p:sp>
         <p:nvSpPr>
-          <p:cNvPr id="12" name="TextBox 11"/>
-          <p:cNvSpPr txBox="1"/>
-          <p:nvPr/>
-        </p:nvSpPr>
-        <p:spPr>
-          <a:xfrm>
-            <a:off x="475488" y="1143000"/>
-            <a:ext cx="3300984" cy="3232404"/>
-          </a:xfrm>
-          <a:prstGeom prst="rect">
-            <a:avLst/>
-          </a:prstGeom>
-          <a:noFill/>
-        </p:spPr>
-        <p:txBody>
-          <a:bodyPr wrap="square" anchor="ctr">
-            <a:spAutoFit/>
-          </a:bodyPr>
-          <a:lstStyle/>
-          <a:p>
-            <a:pPr>
-              <a:lnSpc>
-                <a:spcPct val="120000"/>
-              </a:lnSpc>
-              <a:spcAft>
-                <a:spcPts val="4200"/>
-              </a:spcAft>
-            </a:pPr>
-            <a:r>
-              <a:rPr sz="1300" b="0">
-                <a:solidFill>
-                  <a:srgbClr val="1C202C"/>
-                </a:solidFill>
-                <a:latin typeface="微软雅黑"/>
-                <ns4:rFonts xmlns:ns4="http://schemas.openxmlformats.org/wordprocessingml/2006/main" ns4:eastAsia="微软雅黑" ns4:ascii="微软雅黑" ns4:hAnsi="微软雅黑"/>
-              </a:rPr>
-              <a:t>● 跌倒检测 P/R/F1：100%（6类合成场景）</a:t>
-            </a:r>
-          </a:p>
-          <a:p>
-            <a:pPr>
-              <a:lnSpc>
-                <a:spcPct val="120000"/>
-              </a:lnSpc>
-              <a:spcAft>
-                <a:spcPts val="4200"/>
-              </a:spcAft>
-            </a:pPr>
-            <a:r>
-              <a:rPr sz="1300" b="0">
-                <a:solidFill>
-                  <a:srgbClr val="1C202C"/>
-                </a:solidFill>
-                <a:latin typeface="微软雅黑"/>
-                <ns5:rFonts xmlns:ns5="http://schemas.openxmlformats.org/wordprocessingml/2006/main" ns5:eastAsia="微软雅黑" ns5:ascii="微软雅黑" ns5:hAnsi="微软雅黑"/>
-              </a:rPr>
-              <a:t>● 紧急呼叫端到端触发率：100%</a:t>
-            </a:r>
-          </a:p>
-          <a:p>
-            <a:pPr>
-              <a:lnSpc>
-                <a:spcPct val="120000"/>
-              </a:lnSpc>
-              <a:spcAft>
-                <a:spcPts val="4200"/>
-              </a:spcAft>
-            </a:pPr>
-            <a:r>
-              <a:rPr sz="1300" b="0">
-                <a:solidFill>
-                  <a:srgbClr val="1C202C"/>
-                </a:solidFill>
-                <a:latin typeface="微软雅黑"/>
-                <ns6:rFonts xmlns:ns6="http://schemas.openxmlformats.org/wordprocessingml/2006/main" ns6:eastAsia="微软雅黑" ns6:ascii="微软雅黑" ns6:hAnsi="微软雅黑"/>
-              </a:rPr>
-              <a:t>● 单帧决策延迟 &lt; 50ms（CPU）</a:t>
-            </a:r>
-          </a:p>
-          <a:p>
-            <a:pPr>
-              <a:lnSpc>
-                <a:spcPct val="120000"/>
-              </a:lnSpc>
-              <a:spcAft>
-                <a:spcPts val="4200"/>
-              </a:spcAft>
-            </a:pPr>
-            <a:r>
-              <a:rPr sz="1300" b="0">
-                <a:solidFill>
-                  <a:srgbClr val="1C202C"/>
-                </a:solidFill>
-                <a:latin typeface="微软雅黑"/>
-                <ns7:rFonts xmlns:ns7="http://schemas.openxmlformats.org/wordprocessingml/2006/main" ns7:eastAsia="微软雅黑" ns7:ascii="微软雅黑" ns7:hAnsi="微软雅黑"/>
-              </a:rPr>
-              <a:t>● pytest + 无头压测全部通过</a:t>
-            </a:r>
-          </a:p>
-          <a:p>
-            <a:pPr>
-              <a:lnSpc>
-                <a:spcPct val="120000"/>
-              </a:lnSpc>
-              <a:spcAft>
-                <a:spcPts val="4200"/>
-              </a:spcAft>
-            </a:pPr>
-            <a:r>
-              <a:rPr sz="1300" b="0">
-                <a:solidFill>
-                  <a:srgbClr val="1C202C"/>
-                </a:solidFill>
-                <a:latin typeface="微软雅黑"/>
-                <ns8:rFonts xmlns:ns8="http://schemas.openxmlformats.org/wordprocessingml/2006/main" ns8:eastAsia="微软雅黑" ns8:ascii="微软雅黑" ns8:hAnsi="微软雅黑"/>
-              </a:rPr>
-              <a:t>● 报告：fall_eval_report.json</a:t>
-            </a:r>
-          </a:p>
-        </p:txBody>
-      </p:sp>
-      <p:sp>
-        <p:nvSpPr>
-          <p:cNvPr id="13" name="Rectangle 12"/>
+          <p:cNvPr id="17" name="Rectangle 16"/>
           <p:cNvSpPr/>
           <p:nvPr/>
         </p:nvSpPr>
@@ -11831,7 +12498,7 @@
       </p:sp>
       <p:pic>
         <p:nvPicPr>
-          <p:cNvPr id="14" name="Picture 13" descr="metrics_chart.png"/>
+          <p:cNvPr id="18" name="Picture 17" descr="metrics_chart.png"/>
           <p:cNvPicPr>
             <a:picLocks noChangeAspect="1"/>
           </p:cNvPicPr>
@@ -11855,7 +12522,7 @@
       </p:pic>
       <p:sp>
         <p:nvSpPr>
-          <p:cNvPr id="15" name="TextBox 14"/>
+          <p:cNvPr id="19" name="TextBox 18"/>
           <p:cNvSpPr txBox="1"/>
           <p:nvPr/>
         </p:nvSpPr>
@@ -13976,26 +14643,26 @@
         </p:nvSpPr>
         <p:spPr>
           <a:xfrm>
-            <a:off x="475488" y="1143000"/>
-            <a:ext cx="3300984" cy="3579876"/>
-          </a:xfrm>
-          <a:prstGeom prst="rect">
-            <a:avLst/>
-          </a:prstGeom>
-          <a:noFill/>
-        </p:spPr>
-        <p:txBody>
-          <a:bodyPr wrap="square" anchor="ctr">
+            <a:off x="457200" y="1124712"/>
+            <a:ext cx="3246120" cy="705002"/>
+          </a:xfrm>
+          <a:prstGeom prst="rect">
+            <a:avLst/>
+          </a:prstGeom>
+          <a:noFill/>
+        </p:spPr>
+        <p:txBody>
+          <a:bodyPr wrap="square" anchor="t" lIns="25400" tIns="0">
             <a:spAutoFit/>
           </a:bodyPr>
           <a:lstStyle/>
           <a:p>
             <a:pPr>
               <a:lnSpc>
-                <a:spcPct val="120000"/>
+                <a:spcPct val="115000"/>
               </a:lnSpc>
               <a:spcAft>
-                <a:spcPts val="4900"/>
+                <a:spcPts val="0"/>
               </a:spcAft>
             </a:pPr>
             <a:r>
@@ -14009,13 +14676,36 @@
               <a:t>● 多模态可解释融合，优于模块堆叠</a:t>
             </a:r>
           </a:p>
+        </p:txBody>
+      </p:sp>
+      <p:sp>
+        <p:nvSpPr>
+          <p:cNvPr id="11" name="TextBox 10"/>
+          <p:cNvSpPr txBox="1"/>
+          <p:nvPr/>
+        </p:nvSpPr>
+        <p:spPr>
+          <a:xfrm>
+            <a:off x="457200" y="1848002"/>
+            <a:ext cx="3246120" cy="705002"/>
+          </a:xfrm>
+          <a:prstGeom prst="rect">
+            <a:avLst/>
+          </a:prstGeom>
+          <a:noFill/>
+        </p:spPr>
+        <p:txBody>
+          <a:bodyPr wrap="square" anchor="t" lIns="25400" tIns="0">
+            <a:spAutoFit/>
+          </a:bodyPr>
+          <a:lstStyle/>
           <a:p>
             <a:pPr>
               <a:lnSpc>
-                <a:spcPct val="120000"/>
+                <a:spcPct val="115000"/>
               </a:lnSpc>
               <a:spcAft>
-                <a:spcPts val="4900"/>
+                <a:spcPts val="0"/>
               </a:spcAft>
             </a:pPr>
             <a:r>
@@ -14029,13 +14719,36 @@
               <a:t>● 紧急硬优先级状态机 + 动作闭环</a:t>
             </a:r>
           </a:p>
+        </p:txBody>
+      </p:sp>
+      <p:sp>
+        <p:nvSpPr>
+          <p:cNvPr id="12" name="TextBox 11"/>
+          <p:cNvSpPr txBox="1"/>
+          <p:nvPr/>
+        </p:nvSpPr>
+        <p:spPr>
+          <a:xfrm>
+            <a:off x="457200" y="2571292"/>
+            <a:ext cx="3246120" cy="705002"/>
+          </a:xfrm>
+          <a:prstGeom prst="rect">
+            <a:avLst/>
+          </a:prstGeom>
+          <a:noFill/>
+        </p:spPr>
+        <p:txBody>
+          <a:bodyPr wrap="square" anchor="t" lIns="25400" tIns="0">
+            <a:spAutoFit/>
+          </a:bodyPr>
+          <a:lstStyle/>
           <a:p>
             <a:pPr>
               <a:lnSpc>
-                <a:spcPct val="120000"/>
+                <a:spcPct val="115000"/>
               </a:lnSpc>
               <a:spcAft>
-                <a:spcPts val="4900"/>
+                <a:spcPts val="0"/>
               </a:spcAft>
             </a:pPr>
             <a:r>
@@ -14049,13 +14762,36 @@
               <a:t>● MediaPipe 视觉接入，非纯滑块</a:t>
             </a:r>
           </a:p>
+        </p:txBody>
+      </p:sp>
+      <p:sp>
+        <p:nvSpPr>
+          <p:cNvPr id="13" name="TextBox 12"/>
+          <p:cNvSpPr txBox="1"/>
+          <p:nvPr/>
+        </p:nvSpPr>
+        <p:spPr>
+          <a:xfrm>
+            <a:off x="457200" y="3294583"/>
+            <a:ext cx="3246120" cy="705002"/>
+          </a:xfrm>
+          <a:prstGeom prst="rect">
+            <a:avLst/>
+          </a:prstGeom>
+          <a:noFill/>
+        </p:spPr>
+        <p:txBody>
+          <a:bodyPr wrap="square" anchor="t" lIns="25400" tIns="0">
+            <a:spAutoFit/>
+          </a:bodyPr>
+          <a:lstStyle/>
           <a:p>
             <a:pPr>
               <a:lnSpc>
-                <a:spcPct val="120000"/>
+                <a:spcPct val="115000"/>
               </a:lnSpc>
               <a:spcAft>
-                <a:spcPts val="4900"/>
+                <a:spcPts val="0"/>
               </a:spcAft>
             </a:pPr>
             <a:r>
@@ -14069,13 +14805,36 @@
               <a:t>● 工程化：评测脚本 + 开源仓库</a:t>
             </a:r>
           </a:p>
+        </p:txBody>
+      </p:sp>
+      <p:sp>
+        <p:nvSpPr>
+          <p:cNvPr id="14" name="TextBox 13"/>
+          <p:cNvSpPr txBox="1"/>
+          <p:nvPr/>
+        </p:nvSpPr>
+        <p:spPr>
+          <a:xfrm>
+            <a:off x="457200" y="4017873"/>
+            <a:ext cx="3246120" cy="705002"/>
+          </a:xfrm>
+          <a:prstGeom prst="rect">
+            <a:avLst/>
+          </a:prstGeom>
+          <a:noFill/>
+        </p:spPr>
+        <p:txBody>
+          <a:bodyPr wrap="square" anchor="t" lIns="25400" tIns="0">
+            <a:spAutoFit/>
+          </a:bodyPr>
+          <a:lstStyle/>
           <a:p>
             <a:pPr>
               <a:lnSpc>
-                <a:spcPct val="120000"/>
+                <a:spcPct val="115000"/>
               </a:lnSpc>
               <a:spcAft>
-                <a:spcPts val="4900"/>
+                <a:spcPts val="0"/>
               </a:spcAft>
             </a:pPr>
             <a:r>
@@ -14093,7 +14852,7 @@
       </p:sp>
       <p:sp>
         <p:nvSpPr>
-          <p:cNvPr id="11" name="Rectangle 10"/>
+          <p:cNvPr id="15" name="Rectangle 14"/>
           <p:cNvSpPr/>
           <p:nvPr/>
         </p:nvSpPr>
@@ -14138,7 +14897,7 @@
       </p:sp>
       <p:pic>
         <p:nvPicPr>
-          <p:cNvPr id="12" name="Picture 11" descr="innovation_radar.png"/>
+          <p:cNvPr id="16" name="Picture 15" descr="innovation_radar.png"/>
           <p:cNvPicPr>
             <a:picLocks noChangeAspect="1"/>
           </p:cNvPicPr>
@@ -14162,7 +14921,7 @@
       </p:pic>
       <p:sp>
         <p:nvSpPr>
-          <p:cNvPr id="13" name="TextBox 12"/>
+          <p:cNvPr id="17" name="TextBox 16"/>
           <p:cNvSpPr txBox="1"/>
           <p:nvPr/>
         </p:nvSpPr>
@@ -14554,26 +15313,26 @@
         </p:nvSpPr>
         <p:spPr>
           <a:xfrm>
-            <a:off x="475488" y="1143000"/>
-            <a:ext cx="3300984" cy="3579876"/>
-          </a:xfrm>
-          <a:prstGeom prst="rect">
-            <a:avLst/>
-          </a:prstGeom>
-          <a:noFill/>
-        </p:spPr>
-        <p:txBody>
-          <a:bodyPr wrap="square" anchor="ctr">
+            <a:off x="457200" y="1124712"/>
+            <a:ext cx="3246120" cy="705002"/>
+          </a:xfrm>
+          <a:prstGeom prst="rect">
+            <a:avLst/>
+          </a:prstGeom>
+          <a:noFill/>
+        </p:spPr>
+        <p:txBody>
+          <a:bodyPr wrap="square" anchor="t" lIns="25400" tIns="0">
             <a:spAutoFit/>
           </a:bodyPr>
           <a:lstStyle/>
           <a:p>
             <a:pPr>
               <a:lnSpc>
-                <a:spcPct val="120000"/>
+                <a:spcPct val="115000"/>
               </a:lnSpc>
               <a:spcAft>
-                <a:spcPts val="4900"/>
+                <a:spcPts val="0"/>
               </a:spcAft>
             </a:pPr>
             <a:r>
@@ -14587,13 +15346,36 @@
               <a:t>● 对接 Unitree 等人形真机</a:t>
             </a:r>
           </a:p>
+        </p:txBody>
+      </p:sp>
+      <p:sp>
+        <p:nvSpPr>
+          <p:cNvPr id="11" name="TextBox 10"/>
+          <p:cNvSpPr txBox="1"/>
+          <p:nvPr/>
+        </p:nvSpPr>
+        <p:spPr>
+          <a:xfrm>
+            <a:off x="457200" y="1848002"/>
+            <a:ext cx="3246120" cy="705002"/>
+          </a:xfrm>
+          <a:prstGeom prst="rect">
+            <a:avLst/>
+          </a:prstGeom>
+          <a:noFill/>
+        </p:spPr>
+        <p:txBody>
+          <a:bodyPr wrap="square" anchor="t" lIns="25400" tIns="0">
+            <a:spAutoFit/>
+          </a:bodyPr>
+          <a:lstStyle/>
           <a:p>
             <a:pPr>
               <a:lnSpc>
-                <a:spcPct val="120000"/>
+                <a:spcPct val="115000"/>
               </a:lnSpc>
               <a:spcAft>
-                <a:spcPts val="4900"/>
+                <a:spcPts val="0"/>
               </a:spcAft>
             </a:pPr>
             <a:r>
@@ -14607,13 +15389,36 @@
               <a:t>● 引入 UR Fall 等公开数据集</a:t>
             </a:r>
           </a:p>
+        </p:txBody>
+      </p:sp>
+      <p:sp>
+        <p:nvSpPr>
+          <p:cNvPr id="12" name="TextBox 11"/>
+          <p:cNvSpPr txBox="1"/>
+          <p:nvPr/>
+        </p:nvSpPr>
+        <p:spPr>
+          <a:xfrm>
+            <a:off x="457200" y="2571292"/>
+            <a:ext cx="3246120" cy="705002"/>
+          </a:xfrm>
+          <a:prstGeom prst="rect">
+            <a:avLst/>
+          </a:prstGeom>
+          <a:noFill/>
+        </p:spPr>
+        <p:txBody>
+          <a:bodyPr wrap="square" anchor="t" lIns="25400" tIns="0">
+            <a:spAutoFit/>
+          </a:bodyPr>
+          <a:lstStyle/>
           <a:p>
             <a:pPr>
               <a:lnSpc>
-                <a:spcPct val="120000"/>
+                <a:spcPct val="115000"/>
               </a:lnSpc>
               <a:spcAft>
-                <a:spcPts val="4900"/>
+                <a:spcPts val="0"/>
               </a:spcAft>
             </a:pPr>
             <a:r>
@@ -14627,13 +15432,36 @@
               <a:t>● 多房间遮挡与光照优化</a:t>
             </a:r>
           </a:p>
+        </p:txBody>
+      </p:sp>
+      <p:sp>
+        <p:nvSpPr>
+          <p:cNvPr id="13" name="TextBox 12"/>
+          <p:cNvSpPr txBox="1"/>
+          <p:nvPr/>
+        </p:nvSpPr>
+        <p:spPr>
+          <a:xfrm>
+            <a:off x="457200" y="3294583"/>
+            <a:ext cx="3246120" cy="705002"/>
+          </a:xfrm>
+          <a:prstGeom prst="rect">
+            <a:avLst/>
+          </a:prstGeom>
+          <a:noFill/>
+        </p:spPr>
+        <p:txBody>
+          <a:bodyPr wrap="square" anchor="t" lIns="25400" tIns="0">
+            <a:spAutoFit/>
+          </a:bodyPr>
+          <a:lstStyle/>
           <a:p>
             <a:pPr>
               <a:lnSpc>
-                <a:spcPct val="120000"/>
+                <a:spcPct val="115000"/>
               </a:lnSpc>
               <a:spcAft>
-                <a:spcPts val="4900"/>
+                <a:spcPts val="0"/>
               </a:spcAft>
             </a:pPr>
             <a:r>
@@ -14647,13 +15475,36 @@
               <a:t>● 养老院调研与产品化评估</a:t>
             </a:r>
           </a:p>
+        </p:txBody>
+      </p:sp>
+      <p:sp>
+        <p:nvSpPr>
+          <p:cNvPr id="14" name="TextBox 13"/>
+          <p:cNvSpPr txBox="1"/>
+          <p:nvPr/>
+        </p:nvSpPr>
+        <p:spPr>
+          <a:xfrm>
+            <a:off x="457200" y="4017873"/>
+            <a:ext cx="3246120" cy="705002"/>
+          </a:xfrm>
+          <a:prstGeom prst="rect">
+            <a:avLst/>
+          </a:prstGeom>
+          <a:noFill/>
+        </p:spPr>
+        <p:txBody>
+          <a:bodyPr wrap="square" anchor="t" lIns="25400" tIns="0">
+            <a:spAutoFit/>
+          </a:bodyPr>
+          <a:lstStyle/>
           <a:p>
             <a:pPr>
               <a:lnSpc>
-                <a:spcPct val="120000"/>
+                <a:spcPct val="115000"/>
               </a:lnSpc>
               <a:spcAft>
-                <a:spcPts val="4900"/>
+                <a:spcPts val="0"/>
               </a:spcAft>
             </a:pPr>
             <a:r>
@@ -14671,7 +15522,7 @@
       </p:sp>
       <p:sp>
         <p:nvSpPr>
-          <p:cNvPr id="11" name="Rectangle 10"/>
+          <p:cNvPr id="15" name="Rectangle 14"/>
           <p:cNvSpPr/>
           <p:nvPr/>
         </p:nvSpPr>
@@ -14716,7 +15567,7 @@
       </p:sp>
       <p:pic>
         <p:nvPicPr>
-          <p:cNvPr id="12" name="Picture 11" descr="roadmap.png"/>
+          <p:cNvPr id="16" name="Picture 15" descr="roadmap.png"/>
           <p:cNvPicPr>
             <a:picLocks noChangeAspect="1"/>
           </p:cNvPicPr>
@@ -14740,7 +15591,7 @@
       </p:pic>
       <p:sp>
         <p:nvSpPr>
-          <p:cNvPr id="13" name="TextBox 12"/>
+          <p:cNvPr id="17" name="TextBox 16"/>
           <p:cNvSpPr txBox="1"/>
           <p:nvPr/>
         </p:nvSpPr>
@@ -15132,26 +15983,26 @@
         </p:nvSpPr>
         <p:spPr>
           <a:xfrm>
-            <a:off x="475488" y="1143000"/>
-            <a:ext cx="3300984" cy="3579876"/>
-          </a:xfrm>
-          <a:prstGeom prst="rect">
-            <a:avLst/>
-          </a:prstGeom>
-          <a:noFill/>
-        </p:spPr>
-        <p:txBody>
-          <a:bodyPr wrap="square" anchor="ctr">
+            <a:off x="457200" y="1124712"/>
+            <a:ext cx="3246120" cy="705002"/>
+          </a:xfrm>
+          <a:prstGeom prst="rect">
+            <a:avLst/>
+          </a:prstGeom>
+          <a:noFill/>
+        </p:spPr>
+        <p:txBody>
+          <a:bodyPr wrap="square" anchor="t" lIns="25400" tIns="0">
             <a:spAutoFit/>
           </a:bodyPr>
           <a:lstStyle/>
           <a:p>
             <a:pPr>
               <a:lnSpc>
-                <a:spcPct val="120000"/>
+                <a:spcPct val="115000"/>
               </a:lnSpc>
               <a:spcAft>
-                <a:spcPts val="4900"/>
+                <a:spcPts val="0"/>
               </a:spcAft>
             </a:pPr>
             <a:r>
@@ -15165,13 +16016,36 @@
               <a:t>● [1] Google MediaPipe Pose</a:t>
             </a:r>
           </a:p>
+        </p:txBody>
+      </p:sp>
+      <p:sp>
+        <p:nvSpPr>
+          <p:cNvPr id="11" name="TextBox 10"/>
+          <p:cNvSpPr txBox="1"/>
+          <p:nvPr/>
+        </p:nvSpPr>
+        <p:spPr>
+          <a:xfrm>
+            <a:off x="457200" y="1848002"/>
+            <a:ext cx="3246120" cy="705002"/>
+          </a:xfrm>
+          <a:prstGeom prst="rect">
+            <a:avLst/>
+          </a:prstGeom>
+          <a:noFill/>
+        </p:spPr>
+        <p:txBody>
+          <a:bodyPr wrap="square" anchor="t" lIns="25400" tIns="0">
+            <a:spAutoFit/>
+          </a:bodyPr>
+          <a:lstStyle/>
           <a:p>
             <a:pPr>
               <a:lnSpc>
-                <a:spcPct val="120000"/>
+                <a:spcPct val="115000"/>
               </a:lnSpc>
               <a:spcAft>
-                <a:spcPts val="4900"/>
+                <a:spcPts val="0"/>
               </a:spcAft>
             </a:pPr>
             <a:r>
@@ -15185,13 +16059,36 @@
               <a:t>● [2] Unitree / ROS2 文档</a:t>
             </a:r>
           </a:p>
+        </p:txBody>
+      </p:sp>
+      <p:sp>
+        <p:nvSpPr>
+          <p:cNvPr id="12" name="TextBox 11"/>
+          <p:cNvSpPr txBox="1"/>
+          <p:nvPr/>
+        </p:nvSpPr>
+        <p:spPr>
+          <a:xfrm>
+            <a:off x="457200" y="2571292"/>
+            <a:ext cx="3246120" cy="705002"/>
+          </a:xfrm>
+          <a:prstGeom prst="rect">
+            <a:avLst/>
+          </a:prstGeom>
+          <a:noFill/>
+        </p:spPr>
+        <p:txBody>
+          <a:bodyPr wrap="square" anchor="t" lIns="25400" tIns="0">
+            <a:spAutoFit/>
+          </a:bodyPr>
+          <a:lstStyle/>
           <a:p>
             <a:pPr>
               <a:lnSpc>
-                <a:spcPct val="120000"/>
+                <a:spcPct val="115000"/>
               </a:lnSpc>
               <a:spcAft>
-                <a:spcPts val="4900"/>
+                <a:spcPts val="0"/>
               </a:spcAft>
             </a:pPr>
             <a:r>
@@ -15205,13 +16102,36 @@
               <a:t>● [3] 「十四五」养老服务规划</a:t>
             </a:r>
           </a:p>
+        </p:txBody>
+      </p:sp>
+      <p:sp>
+        <p:nvSpPr>
+          <p:cNvPr id="13" name="TextBox 12"/>
+          <p:cNvSpPr txBox="1"/>
+          <p:nvPr/>
+        </p:nvSpPr>
+        <p:spPr>
+          <a:xfrm>
+            <a:off x="457200" y="3294583"/>
+            <a:ext cx="3246120" cy="705002"/>
+          </a:xfrm>
+          <a:prstGeom prst="rect">
+            <a:avLst/>
+          </a:prstGeom>
+          <a:noFill/>
+        </p:spPr>
+        <p:txBody>
+          <a:bodyPr wrap="square" anchor="t" lIns="25400" tIns="0">
+            <a:spAutoFit/>
+          </a:bodyPr>
+          <a:lstStyle/>
           <a:p>
             <a:pPr>
               <a:lnSpc>
-                <a:spcPct val="120000"/>
+                <a:spcPct val="115000"/>
               </a:lnSpc>
               <a:spcAft>
-                <a:spcPts val="4900"/>
+                <a:spcPts val="0"/>
               </a:spcAft>
             </a:pPr>
             <a:r>
@@ -15225,13 +16145,36 @@
               <a:t>● [4] docs/TECHNICAL_REPORT.md</a:t>
             </a:r>
           </a:p>
+        </p:txBody>
+      </p:sp>
+      <p:sp>
+        <p:nvSpPr>
+          <p:cNvPr id="14" name="TextBox 13"/>
+          <p:cNvSpPr txBox="1"/>
+          <p:nvPr/>
+        </p:nvSpPr>
+        <p:spPr>
+          <a:xfrm>
+            <a:off x="457200" y="4017873"/>
+            <a:ext cx="3246120" cy="705002"/>
+          </a:xfrm>
+          <a:prstGeom prst="rect">
+            <a:avLst/>
+          </a:prstGeom>
+          <a:noFill/>
+        </p:spPr>
+        <p:txBody>
+          <a:bodyPr wrap="square" anchor="t" lIns="25400" tIns="0">
+            <a:spAutoFit/>
+          </a:bodyPr>
+          <a:lstStyle/>
           <a:p>
             <a:pPr>
               <a:lnSpc>
-                <a:spcPct val="120000"/>
+                <a:spcPct val="115000"/>
               </a:lnSpc>
               <a:spcAft>
-                <a:spcPts val="4900"/>
+                <a:spcPts val="0"/>
               </a:spcAft>
             </a:pPr>
             <a:r>
@@ -15249,7 +16192,7 @@
       </p:sp>
       <p:sp>
         <p:nvSpPr>
-          <p:cNvPr id="11" name="Rectangle 10"/>
+          <p:cNvPr id="15" name="Rectangle 14"/>
           <p:cNvSpPr/>
           <p:nvPr/>
         </p:nvSpPr>
@@ -15294,7 +16237,7 @@
       </p:sp>
       <p:pic>
         <p:nvPicPr>
-          <p:cNvPr id="12" name="Picture 11" descr="pipeline.png"/>
+          <p:cNvPr id="16" name="Picture 15" descr="pipeline.png"/>
           <p:cNvPicPr>
             <a:picLocks noChangeAspect="1"/>
           </p:cNvPicPr>
@@ -15318,7 +16261,7 @@
       </p:pic>
       <p:sp>
         <p:nvSpPr>
-          <p:cNvPr id="13" name="TextBox 12"/>
+          <p:cNvPr id="17" name="TextBox 16"/>
           <p:cNvSpPr txBox="1"/>
           <p:nvPr/>
         </p:nvSpPr>
@@ -15710,30 +16653,30 @@
         </p:nvSpPr>
         <p:spPr>
           <a:xfrm>
-            <a:off x="475488" y="1143000"/>
-            <a:ext cx="3300984" cy="3579876"/>
-          </a:xfrm>
-          <a:prstGeom prst="rect">
-            <a:avLst/>
-          </a:prstGeom>
-          <a:noFill/>
-        </p:spPr>
-        <p:txBody>
-          <a:bodyPr wrap="square" anchor="ctr">
+            <a:off x="457200" y="1124712"/>
+            <a:ext cx="3246120" cy="885825"/>
+          </a:xfrm>
+          <a:prstGeom prst="rect">
+            <a:avLst/>
+          </a:prstGeom>
+          <a:noFill/>
+        </p:spPr>
+        <p:txBody>
+          <a:bodyPr wrap="square" anchor="t" lIns="25400" tIns="0">
             <a:spAutoFit/>
           </a:bodyPr>
           <a:lstStyle/>
           <a:p>
             <a:pPr>
               <a:lnSpc>
-                <a:spcPct val="120000"/>
+                <a:spcPct val="115000"/>
               </a:lnSpc>
               <a:spcAft>
-                <a:spcPts val="11500"/>
+                <a:spcPts val="0"/>
               </a:spcAft>
             </a:pPr>
             <a:r>
-              <a:rPr sz="1300" b="0">
+              <a:rPr sz="1200" b="0">
                 <a:solidFill>
                   <a:srgbClr val="1C202C"/>
                 </a:solidFill>
@@ -15743,133 +16686,91 @@
               <a:t>● 赛项：创新赛 · 机器人创新赛道</a:t>
             </a:r>
           </a:p>
+        </p:txBody>
+      </p:sp>
+      <p:sp>
+        <p:nvSpPr>
+          <p:cNvPr id="11" name="TextBox 10"/>
+          <p:cNvSpPr txBox="1"/>
+          <p:nvPr/>
+        </p:nvSpPr>
+        <p:spPr>
+          <a:xfrm>
+            <a:off x="457200" y="2028825"/>
+            <a:ext cx="3246120" cy="885825"/>
+          </a:xfrm>
+          <a:prstGeom prst="rect">
+            <a:avLst/>
+          </a:prstGeom>
+          <a:noFill/>
+        </p:spPr>
+        <p:txBody>
+          <a:bodyPr wrap="square" anchor="t" lIns="25400" tIns="0">
+            <a:spAutoFit/>
+          </a:bodyPr>
+          <a:lstStyle/>
           <a:p>
             <a:pPr>
               <a:lnSpc>
-                <a:spcPct val="120000"/>
+                <a:spcPct val="115000"/>
               </a:lnSpc>
               <a:spcAft>
-                <a:spcPts val="11500"/>
+                <a:spcPts val="0"/>
               </a:spcAft>
             </a:pPr>
             <a:r>
-              <a:rPr sz="1300" b="0">
+              <a:rPr sz="1200" b="0">
                 <a:solidFill>
                   <a:srgbClr val="1C202C"/>
                 </a:solidFill>
                 <a:latin typeface="微软雅黑"/>
                 <ns4:rFonts xmlns:ns4="http://schemas.openxmlformats.org/wordprocessingml/2006/main" ns4:eastAsia="微软雅黑" ns4:ascii="微软雅黑" ns4:hAnsi="微软雅黑"/>
               </a:rPr>
-              <a:t>● 作品：基于大语言模型的智能养老陪伴机器人仿真平台</a:t>
-            </a:r>
-          </a:p>
+              <a:t>● 作品：智能养老陪伴机器人仿真平台</a:t>
+            </a:r>
+          </a:p>
+        </p:txBody>
+      </p:sp>
+      <p:sp>
+        <p:nvSpPr>
+          <p:cNvPr id="12" name="TextBox 11"/>
+          <p:cNvSpPr txBox="1"/>
+          <p:nvPr/>
+        </p:nvSpPr>
+        <p:spPr>
+          <a:xfrm>
+            <a:off x="457200" y="2932938"/>
+            <a:ext cx="3246120" cy="885825"/>
+          </a:xfrm>
+          <a:prstGeom prst="rect">
+            <a:avLst/>
+          </a:prstGeom>
+          <a:noFill/>
+        </p:spPr>
+        <p:txBody>
+          <a:bodyPr wrap="square" anchor="t" lIns="25400" tIns="0">
+            <a:spAutoFit/>
+          </a:bodyPr>
+          <a:lstStyle/>
           <a:p>
             <a:pPr>
               <a:lnSpc>
-                <a:spcPct val="120000"/>
+                <a:spcPct val="115000"/>
               </a:lnSpc>
               <a:spcAft>
-                <a:spcPts val="11500"/>
+                <a:spcPts val="0"/>
               </a:spcAft>
             </a:pPr>
             <a:r>
-              <a:rPr sz="1300" b="0">
+              <a:rPr sz="1200" b="0">
                 <a:solidFill>
                   <a:srgbClr val="1C202C"/>
                 </a:solidFill>
                 <a:latin typeface="微软雅黑"/>
                 <ns5:rFonts xmlns:ns5="http://schemas.openxmlformats.org/wordprocessingml/2006/main" ns5:eastAsia="微软雅黑" ns5:ascii="微软雅黑" ns5:hAnsi="微软雅黑"/>
               </a:rPr>
-              <a:t>● 特色：理论可讲清 · 系统可演示 · 指标可复现</a:t>
-            </a:r>
-          </a:p>
-        </p:txBody>
-      </p:sp>
-      <p:sp>
-        <p:nvSpPr>
-          <p:cNvPr id="11" name="Rectangle 10"/>
-          <p:cNvSpPr/>
-          <p:nvPr/>
-        </p:nvSpPr>
-        <p:spPr>
-          <a:xfrm>
-            <a:off x="4069080" y="996696"/>
-            <a:ext cx="4800600" cy="3854196"/>
-          </a:xfrm>
-          <a:prstGeom prst="rect">
-            <a:avLst/>
-          </a:prstGeom>
-          <a:solidFill>
-            <a:srgbClr val="FFFFFF"/>
-          </a:solidFill>
-          <a:ln w="12700">
-            <a:solidFill>
-              <a:srgbClr val="BAC8DC"/>
-            </a:solidFill>
-          </a:ln>
-        </p:spPr>
-        <p:style>
-          <a:lnRef idx="1">
-            <a:schemeClr val="accent1"/>
-          </a:lnRef>
-          <a:fillRef idx="3">
-            <a:schemeClr val="accent1"/>
-          </a:fillRef>
-          <a:effectRef idx="2">
-            <a:schemeClr val="accent1"/>
-          </a:effectRef>
-          <a:fontRef idx="minor">
-            <a:schemeClr val="lt1"/>
-          </a:fontRef>
-        </p:style>
-        <p:txBody>
-          <a:bodyPr rtlCol="0" anchor="ctr"/>
-          <a:lstStyle/>
-          <a:p>
-            <a:pPr algn="ctr"/>
-          </a:p>
-        </p:txBody>
-      </p:sp>
-      <p:sp>
-        <p:nvSpPr>
-          <p:cNvPr id="12" name="Rectangle 11"/>
-          <p:cNvSpPr/>
-          <p:nvPr/>
-        </p:nvSpPr>
-        <p:spPr>
-          <a:xfrm>
-            <a:off x="4178808" y="1060704"/>
-            <a:ext cx="960120" cy="477447"/>
-          </a:xfrm>
-          <a:prstGeom prst="rect">
-            <a:avLst/>
-          </a:prstGeom>
-          <a:solidFill>
-            <a:srgbClr val="143278"/>
-          </a:solidFill>
-          <a:ln>
-            <a:noFill/>
-          </a:ln>
-        </p:spPr>
-        <p:style>
-          <a:lnRef idx="1">
-            <a:schemeClr val="accent1"/>
-          </a:lnRef>
-          <a:fillRef idx="3">
-            <a:schemeClr val="accent1"/>
-          </a:fillRef>
-          <a:effectRef idx="2">
-            <a:schemeClr val="accent1"/>
-          </a:effectRef>
-          <a:fontRef idx="minor">
-            <a:schemeClr val="lt1"/>
-          </a:fontRef>
-        </p:style>
-        <p:txBody>
-          <a:bodyPr rtlCol="0" anchor="ctr"/>
-          <a:lstStyle/>
-          <a:p>
-            <a:pPr algn="ctr"/>
+              <a:t>● （基于大语言模型）</a:t>
+            </a:r>
           </a:p>
         </p:txBody>
       </p:sp>
@@ -15881,1068 +16782,417 @@
         </p:nvSpPr>
         <p:spPr>
           <a:xfrm>
-            <a:off x="4178808" y="1194389"/>
-            <a:ext cx="960120" cy="238723"/>
-          </a:xfrm>
-          <a:prstGeom prst="rect">
-            <a:avLst/>
-          </a:prstGeom>
-          <a:noFill/>
-        </p:spPr>
-        <p:txBody>
-          <a:bodyPr wrap="none">
-            <a:spAutoFit/>
-          </a:bodyPr>
-          <a:lstStyle/>
-          <a:p>
-            <a:pPr algn="ctr"/>
-            <a:r>
-              <a:rPr sz="1100" b="1">
-                <a:solidFill>
-                  <a:srgbClr val="FFFFFF"/>
+            <a:off x="457200" y="3837051"/>
+            <a:ext cx="3246120" cy="885825"/>
+          </a:xfrm>
+          <a:prstGeom prst="rect">
+            <a:avLst/>
+          </a:prstGeom>
+          <a:noFill/>
+        </p:spPr>
+        <p:txBody>
+          <a:bodyPr wrap="square" anchor="t" lIns="25400" tIns="0">
+            <a:spAutoFit/>
+          </a:bodyPr>
+          <a:lstStyle/>
+          <a:p>
+            <a:pPr>
+              <a:lnSpc>
+                <a:spcPct val="115000"/>
+              </a:lnSpc>
+              <a:spcAft>
+                <a:spcPts val="0"/>
+              </a:spcAft>
+            </a:pPr>
+            <a:r>
+              <a:rPr sz="1200" b="0">
+                <a:solidFill>
+                  <a:srgbClr val="1C202C"/>
                 </a:solidFill>
                 <a:latin typeface="微软雅黑"/>
                 <ns6:rFonts xmlns:ns6="http://schemas.openxmlformats.org/wordprocessingml/2006/main" ns6:eastAsia="微软雅黑" ns6:ascii="微软雅黑" ns6:hAnsi="微软雅黑"/>
               </a:rPr>
-              <a:t>团队</a:t>
-            </a:r>
-          </a:p>
-        </p:txBody>
-      </p:sp>
-      <p:sp>
-        <p:nvSpPr>
-          <p:cNvPr id="14" name="Rectangle 13"/>
-          <p:cNvSpPr/>
-          <p:nvPr/>
-        </p:nvSpPr>
-        <p:spPr>
-          <a:xfrm>
-            <a:off x="5184648" y="1060704"/>
-            <a:ext cx="3575304" cy="477447"/>
-          </a:xfrm>
-          <a:prstGeom prst="rect">
-            <a:avLst/>
-          </a:prstGeom>
-          <a:solidFill>
-            <a:srgbClr val="F1F7FF"/>
-          </a:solidFill>
-          <a:ln>
-            <a:solidFill>
-              <a:srgbClr val="BAC8DC"/>
-            </a:solidFill>
-          </a:ln>
-        </p:spPr>
-        <p:style>
-          <a:lnRef idx="1">
-            <a:schemeClr val="accent1"/>
-          </a:lnRef>
-          <a:fillRef idx="3">
-            <a:schemeClr val="accent1"/>
-          </a:fillRef>
-          <a:effectRef idx="2">
-            <a:schemeClr val="accent1"/>
-          </a:effectRef>
-          <a:fontRef idx="minor">
-            <a:schemeClr val="lt1"/>
-          </a:fontRef>
-        </p:style>
-        <p:txBody>
-          <a:bodyPr rtlCol="0" anchor="ctr"/>
-          <a:lstStyle/>
-          <a:p>
-            <a:pPr algn="ctr"/>
-          </a:p>
-        </p:txBody>
-      </p:sp>
-      <p:sp>
-        <p:nvSpPr>
-          <p:cNvPr id="15" name="TextBox 14"/>
-          <p:cNvSpPr txBox="1"/>
-          <p:nvPr/>
-        </p:nvSpPr>
-        <p:spPr>
-          <a:xfrm>
-            <a:off x="5276088" y="1115568"/>
-            <a:ext cx="3410712" cy="386007"/>
-          </a:xfrm>
-          <a:prstGeom prst="rect">
-            <a:avLst/>
-          </a:prstGeom>
-          <a:noFill/>
-        </p:spPr>
-        <p:txBody>
-          <a:bodyPr wrap="square">
-            <a:spAutoFit/>
-          </a:bodyPr>
-          <a:lstStyle/>
-          <a:p>
-            <a:r>
-              <a:rPr sz="1100" b="1">
-                <a:solidFill>
-                  <a:srgbClr val="143278"/>
-                </a:solidFill>
-                <a:latin typeface="微软雅黑"/>
-                <ns7:rFonts xmlns:ns7="http://schemas.openxmlformats.org/wordprocessingml/2006/main" ns7:eastAsia="微软雅黑" ns7:ascii="微软雅黑" ns7:hAnsi="微软雅黑"/>
-              </a:rPr>
-              <a:t>从容应队</a:t>
-            </a:r>
-          </a:p>
-        </p:txBody>
-      </p:sp>
-      <p:sp>
-        <p:nvSpPr>
-          <p:cNvPr id="16" name="Rectangle 15"/>
-          <p:cNvSpPr/>
-          <p:nvPr/>
-        </p:nvSpPr>
-        <p:spPr>
-          <a:xfrm>
-            <a:off x="4178808" y="1602159"/>
-            <a:ext cx="960120" cy="477447"/>
-          </a:xfrm>
-          <a:prstGeom prst="rect">
-            <a:avLst/>
-          </a:prstGeom>
-          <a:solidFill>
-            <a:srgbClr val="143278"/>
-          </a:solidFill>
-          <a:ln>
-            <a:noFill/>
-          </a:ln>
-        </p:spPr>
-        <p:style>
-          <a:lnRef idx="1">
-            <a:schemeClr val="accent1"/>
-          </a:lnRef>
-          <a:fillRef idx="3">
-            <a:schemeClr val="accent1"/>
-          </a:fillRef>
-          <a:effectRef idx="2">
-            <a:schemeClr val="accent1"/>
-          </a:effectRef>
-          <a:fontRef idx="minor">
-            <a:schemeClr val="lt1"/>
-          </a:fontRef>
-        </p:style>
-        <p:txBody>
-          <a:bodyPr rtlCol="0" anchor="ctr"/>
-          <a:lstStyle/>
-          <a:p>
-            <a:pPr algn="ctr"/>
-          </a:p>
-        </p:txBody>
-      </p:sp>
-      <p:sp>
-        <p:nvSpPr>
-          <p:cNvPr id="17" name="TextBox 16"/>
-          <p:cNvSpPr txBox="1"/>
-          <p:nvPr/>
-        </p:nvSpPr>
-        <p:spPr>
-          <a:xfrm>
-            <a:off x="4178808" y="1735844"/>
-            <a:ext cx="960120" cy="238723"/>
-          </a:xfrm>
-          <a:prstGeom prst="rect">
-            <a:avLst/>
-          </a:prstGeom>
-          <a:noFill/>
-        </p:spPr>
-        <p:txBody>
-          <a:bodyPr wrap="none">
-            <a:spAutoFit/>
-          </a:bodyPr>
-          <a:lstStyle/>
-          <a:p>
-            <a:pPr algn="ctr"/>
-            <a:r>
-              <a:rPr sz="1100" b="1">
-                <a:solidFill>
-                  <a:srgbClr val="FFFFFF"/>
-                </a:solidFill>
-                <a:latin typeface="微软雅黑"/>
-                <ns8:rFonts xmlns:ns8="http://schemas.openxmlformats.org/wordprocessingml/2006/main" ns8:eastAsia="微软雅黑" ns8:ascii="微软雅黑" ns8:hAnsi="微软雅黑"/>
-              </a:rPr>
-              <a:t>学校</a:t>
-            </a:r>
-          </a:p>
-        </p:txBody>
-      </p:sp>
-      <p:sp>
-        <p:nvSpPr>
-          <p:cNvPr id="18" name="Rectangle 17"/>
-          <p:cNvSpPr/>
-          <p:nvPr/>
-        </p:nvSpPr>
-        <p:spPr>
-          <a:xfrm>
-            <a:off x="5184648" y="1602159"/>
-            <a:ext cx="3575304" cy="477447"/>
-          </a:xfrm>
-          <a:prstGeom prst="rect">
-            <a:avLst/>
-          </a:prstGeom>
-          <a:solidFill>
-            <a:srgbClr val="F1F7FF"/>
-          </a:solidFill>
-          <a:ln>
-            <a:solidFill>
-              <a:srgbClr val="BAC8DC"/>
-            </a:solidFill>
-          </a:ln>
-        </p:spPr>
-        <p:style>
-          <a:lnRef idx="1">
-            <a:schemeClr val="accent1"/>
-          </a:lnRef>
-          <a:fillRef idx="3">
-            <a:schemeClr val="accent1"/>
-          </a:fillRef>
-          <a:effectRef idx="2">
-            <a:schemeClr val="accent1"/>
-          </a:effectRef>
-          <a:fontRef idx="minor">
-            <a:schemeClr val="lt1"/>
-          </a:fontRef>
-        </p:style>
-        <p:txBody>
-          <a:bodyPr rtlCol="0" anchor="ctr"/>
-          <a:lstStyle/>
-          <a:p>
-            <a:pPr algn="ctr"/>
-          </a:p>
-        </p:txBody>
-      </p:sp>
-      <p:sp>
-        <p:nvSpPr>
-          <p:cNvPr id="19" name="TextBox 18"/>
-          <p:cNvSpPr txBox="1"/>
-          <p:nvPr/>
-        </p:nvSpPr>
-        <p:spPr>
-          <a:xfrm>
-            <a:off x="5276088" y="1657023"/>
-            <a:ext cx="3410712" cy="386007"/>
-          </a:xfrm>
-          <a:prstGeom prst="rect">
-            <a:avLst/>
-          </a:prstGeom>
-          <a:noFill/>
-        </p:spPr>
-        <p:txBody>
-          <a:bodyPr wrap="square">
-            <a:spAutoFit/>
-          </a:bodyPr>
-          <a:lstStyle/>
-          <a:p>
-            <a:r>
-              <a:rPr sz="1100" b="1">
-                <a:solidFill>
-                  <a:srgbClr val="143278"/>
-                </a:solidFill>
-                <a:latin typeface="微软雅黑"/>
-                <ns9:rFonts xmlns:ns9="http://schemas.openxmlformats.org/wordprocessingml/2006/main" ns9:eastAsia="微软雅黑" ns9:ascii="微软雅黑" ns9:hAnsi="微软雅黑"/>
-              </a:rPr>
-              <a:t>中山大学</a:t>
-            </a:r>
-          </a:p>
-        </p:txBody>
-      </p:sp>
-      <p:sp>
-        <p:nvSpPr>
-          <p:cNvPr id="20" name="Rectangle 19"/>
-          <p:cNvSpPr/>
-          <p:nvPr/>
-        </p:nvSpPr>
-        <p:spPr>
-          <a:xfrm>
-            <a:off x="4178808" y="2143614"/>
-            <a:ext cx="960120" cy="477447"/>
-          </a:xfrm>
-          <a:prstGeom prst="rect">
-            <a:avLst/>
-          </a:prstGeom>
-          <a:solidFill>
-            <a:srgbClr val="143278"/>
-          </a:solidFill>
-          <a:ln>
-            <a:noFill/>
-          </a:ln>
-        </p:spPr>
-        <p:style>
-          <a:lnRef idx="1">
-            <a:schemeClr val="accent1"/>
-          </a:lnRef>
-          <a:fillRef idx="3">
-            <a:schemeClr val="accent1"/>
-          </a:fillRef>
-          <a:effectRef idx="2">
-            <a:schemeClr val="accent1"/>
-          </a:effectRef>
-          <a:fontRef idx="minor">
-            <a:schemeClr val="lt1"/>
-          </a:fontRef>
-        </p:style>
-        <p:txBody>
-          <a:bodyPr rtlCol="0" anchor="ctr"/>
-          <a:lstStyle/>
-          <a:p>
-            <a:pPr algn="ctr"/>
-          </a:p>
-        </p:txBody>
-      </p:sp>
-      <p:sp>
-        <p:nvSpPr>
-          <p:cNvPr id="21" name="TextBox 20"/>
-          <p:cNvSpPr txBox="1"/>
-          <p:nvPr/>
-        </p:nvSpPr>
-        <p:spPr>
-          <a:xfrm>
-            <a:off x="4178808" y="2277300"/>
-            <a:ext cx="960120" cy="238723"/>
-          </a:xfrm>
-          <a:prstGeom prst="rect">
-            <a:avLst/>
-          </a:prstGeom>
-          <a:noFill/>
-        </p:spPr>
-        <p:txBody>
-          <a:bodyPr wrap="none">
-            <a:spAutoFit/>
-          </a:bodyPr>
-          <a:lstStyle/>
-          <a:p>
-            <a:pPr algn="ctr"/>
-            <a:r>
-              <a:rPr sz="1100" b="1">
-                <a:solidFill>
-                  <a:srgbClr val="FFFFFF"/>
-                </a:solidFill>
-                <a:latin typeface="微软雅黑"/>
-                <ns10:rFonts xmlns:ns10="http://schemas.openxmlformats.org/wordprocessingml/2006/main" ns10:eastAsia="微软雅黑" ns10:ascii="微软雅黑" ns10:hAnsi="微软雅黑"/>
-              </a:rPr>
-              <a:t>队长</a:t>
-            </a:r>
-          </a:p>
-        </p:txBody>
-      </p:sp>
-      <p:sp>
-        <p:nvSpPr>
-          <p:cNvPr id="22" name="Rectangle 21"/>
-          <p:cNvSpPr/>
-          <p:nvPr/>
-        </p:nvSpPr>
-        <p:spPr>
-          <a:xfrm>
-            <a:off x="5184648" y="2143614"/>
-            <a:ext cx="3575304" cy="477447"/>
-          </a:xfrm>
-          <a:prstGeom prst="rect">
-            <a:avLst/>
-          </a:prstGeom>
-          <a:solidFill>
-            <a:srgbClr val="F1F7FF"/>
-          </a:solidFill>
-          <a:ln>
-            <a:solidFill>
-              <a:srgbClr val="BAC8DC"/>
-            </a:solidFill>
-          </a:ln>
-        </p:spPr>
-        <p:style>
-          <a:lnRef idx="1">
-            <a:schemeClr val="accent1"/>
-          </a:lnRef>
-          <a:fillRef idx="3">
-            <a:schemeClr val="accent1"/>
-          </a:fillRef>
-          <a:effectRef idx="2">
-            <a:schemeClr val="accent1"/>
-          </a:effectRef>
-          <a:fontRef idx="minor">
-            <a:schemeClr val="lt1"/>
-          </a:fontRef>
-        </p:style>
-        <p:txBody>
-          <a:bodyPr rtlCol="0" anchor="ctr"/>
-          <a:lstStyle/>
-          <a:p>
-            <a:pPr algn="ctr"/>
-          </a:p>
-        </p:txBody>
-      </p:sp>
-      <p:sp>
-        <p:nvSpPr>
-          <p:cNvPr id="23" name="TextBox 22"/>
-          <p:cNvSpPr txBox="1"/>
-          <p:nvPr/>
-        </p:nvSpPr>
-        <p:spPr>
-          <a:xfrm>
-            <a:off x="5276088" y="2198478"/>
-            <a:ext cx="3410712" cy="386007"/>
-          </a:xfrm>
-          <a:prstGeom prst="rect">
-            <a:avLst/>
-          </a:prstGeom>
-          <a:noFill/>
-        </p:spPr>
-        <p:txBody>
-          <a:bodyPr wrap="square">
-            <a:spAutoFit/>
-          </a:bodyPr>
-          <a:lstStyle/>
-          <a:p>
-            <a:r>
-              <a:rPr sz="1100" b="1">
-                <a:solidFill>
-                  <a:srgbClr val="143278"/>
-                </a:solidFill>
-                <a:latin typeface="微软雅黑"/>
-                <ns11:rFonts xmlns:ns11="http://schemas.openxmlformats.org/wordprocessingml/2006/main" ns11:eastAsia="微软雅黑" ns11:ascii="微软雅黑" ns11:hAnsi="微软雅黑"/>
-              </a:rPr>
-              <a:t>刘小凡</a:t>
-            </a:r>
-          </a:p>
-        </p:txBody>
-      </p:sp>
-      <p:sp>
-        <p:nvSpPr>
-          <p:cNvPr id="24" name="Rectangle 23"/>
-          <p:cNvSpPr/>
-          <p:nvPr/>
-        </p:nvSpPr>
-        <p:spPr>
-          <a:xfrm>
-            <a:off x="4178808" y="2685070"/>
-            <a:ext cx="960120" cy="477447"/>
-          </a:xfrm>
-          <a:prstGeom prst="rect">
-            <a:avLst/>
-          </a:prstGeom>
-          <a:solidFill>
-            <a:srgbClr val="143278"/>
-          </a:solidFill>
-          <a:ln>
-            <a:noFill/>
-          </a:ln>
-        </p:spPr>
-        <p:style>
-          <a:lnRef idx="1">
-            <a:schemeClr val="accent1"/>
-          </a:lnRef>
-          <a:fillRef idx="3">
-            <a:schemeClr val="accent1"/>
-          </a:fillRef>
-          <a:effectRef idx="2">
-            <a:schemeClr val="accent1"/>
-          </a:effectRef>
-          <a:fontRef idx="minor">
-            <a:schemeClr val="lt1"/>
-          </a:fontRef>
-        </p:style>
-        <p:txBody>
-          <a:bodyPr rtlCol="0" anchor="ctr"/>
-          <a:lstStyle/>
-          <a:p>
-            <a:pPr algn="ctr"/>
-          </a:p>
-        </p:txBody>
-      </p:sp>
-      <p:sp>
-        <p:nvSpPr>
-          <p:cNvPr id="25" name="TextBox 24"/>
-          <p:cNvSpPr txBox="1"/>
-          <p:nvPr/>
-        </p:nvSpPr>
-        <p:spPr>
-          <a:xfrm>
-            <a:off x="4178808" y="2818755"/>
-            <a:ext cx="960120" cy="238723"/>
-          </a:xfrm>
-          <a:prstGeom prst="rect">
-            <a:avLst/>
-          </a:prstGeom>
-          <a:noFill/>
-        </p:spPr>
-        <p:txBody>
-          <a:bodyPr wrap="none">
-            <a:spAutoFit/>
-          </a:bodyPr>
-          <a:lstStyle/>
-          <a:p>
-            <a:pPr algn="ctr"/>
-            <a:r>
-              <a:rPr sz="1100" b="1">
-                <a:solidFill>
-                  <a:srgbClr val="FFFFFF"/>
-                </a:solidFill>
-                <a:latin typeface="微软雅黑"/>
-                <ns12:rFonts xmlns:ns12="http://schemas.openxmlformats.org/wordprocessingml/2006/main" ns12:eastAsia="微软雅黑" ns12:ascii="微软雅黑" ns12:hAnsi="微软雅黑"/>
-              </a:rPr>
-              <a:t>队员</a:t>
-            </a:r>
-          </a:p>
-        </p:txBody>
-      </p:sp>
-      <p:sp>
-        <p:nvSpPr>
-          <p:cNvPr id="26" name="Rectangle 25"/>
-          <p:cNvSpPr/>
-          <p:nvPr/>
-        </p:nvSpPr>
-        <p:spPr>
-          <a:xfrm>
-            <a:off x="5184648" y="2685070"/>
-            <a:ext cx="3575304" cy="477447"/>
-          </a:xfrm>
-          <a:prstGeom prst="rect">
-            <a:avLst/>
-          </a:prstGeom>
-          <a:solidFill>
-            <a:srgbClr val="F1F7FF"/>
-          </a:solidFill>
-          <a:ln>
-            <a:solidFill>
-              <a:srgbClr val="BAC8DC"/>
-            </a:solidFill>
-          </a:ln>
-        </p:spPr>
-        <p:style>
-          <a:lnRef idx="1">
-            <a:schemeClr val="accent1"/>
-          </a:lnRef>
-          <a:fillRef idx="3">
-            <a:schemeClr val="accent1"/>
-          </a:fillRef>
-          <a:effectRef idx="2">
-            <a:schemeClr val="accent1"/>
-          </a:effectRef>
-          <a:fontRef idx="minor">
-            <a:schemeClr val="lt1"/>
-          </a:fontRef>
-        </p:style>
-        <p:txBody>
-          <a:bodyPr rtlCol="0" anchor="ctr"/>
-          <a:lstStyle/>
-          <a:p>
-            <a:pPr algn="ctr"/>
-          </a:p>
-        </p:txBody>
-      </p:sp>
-      <p:sp>
-        <p:nvSpPr>
-          <p:cNvPr id="27" name="TextBox 26"/>
-          <p:cNvSpPr txBox="1"/>
-          <p:nvPr/>
-        </p:nvSpPr>
-        <p:spPr>
-          <a:xfrm>
-            <a:off x="5276088" y="2739934"/>
-            <a:ext cx="3410712" cy="386007"/>
-          </a:xfrm>
-          <a:prstGeom prst="rect">
-            <a:avLst/>
-          </a:prstGeom>
-          <a:noFill/>
-        </p:spPr>
-        <p:txBody>
-          <a:bodyPr wrap="square">
-            <a:spAutoFit/>
-          </a:bodyPr>
-          <a:lstStyle/>
-          <a:p>
-            <a:r>
-              <a:rPr sz="1100" b="1">
-                <a:solidFill>
-                  <a:srgbClr val="143278"/>
-                </a:solidFill>
-                <a:latin typeface="微软雅黑"/>
-                <ns13:rFonts xmlns:ns13="http://schemas.openxmlformats.org/wordprocessingml/2006/main" ns13:eastAsia="微软雅黑" ns13:ascii="微软雅黑" ns13:hAnsi="微软雅黑"/>
-              </a:rPr>
-              <a:t>白冉</a:t>
-            </a:r>
-          </a:p>
-        </p:txBody>
-      </p:sp>
-      <p:sp>
-        <p:nvSpPr>
-          <p:cNvPr id="28" name="Rectangle 27"/>
-          <p:cNvSpPr/>
-          <p:nvPr/>
-        </p:nvSpPr>
-        <p:spPr>
-          <a:xfrm>
-            <a:off x="4178808" y="3226525"/>
-            <a:ext cx="960120" cy="477447"/>
-          </a:xfrm>
-          <a:prstGeom prst="rect">
-            <a:avLst/>
-          </a:prstGeom>
-          <a:solidFill>
-            <a:srgbClr val="143278"/>
-          </a:solidFill>
-          <a:ln>
-            <a:noFill/>
-          </a:ln>
-        </p:spPr>
-        <p:style>
-          <a:lnRef idx="1">
-            <a:schemeClr val="accent1"/>
-          </a:lnRef>
-          <a:fillRef idx="3">
-            <a:schemeClr val="accent1"/>
-          </a:fillRef>
-          <a:effectRef idx="2">
-            <a:schemeClr val="accent1"/>
-          </a:effectRef>
-          <a:fontRef idx="minor">
-            <a:schemeClr val="lt1"/>
-          </a:fontRef>
-        </p:style>
-        <p:txBody>
-          <a:bodyPr rtlCol="0" anchor="ctr"/>
-          <a:lstStyle/>
-          <a:p>
-            <a:pPr algn="ctr"/>
-          </a:p>
-        </p:txBody>
-      </p:sp>
-      <p:sp>
-        <p:nvSpPr>
-          <p:cNvPr id="29" name="TextBox 28"/>
-          <p:cNvSpPr txBox="1"/>
-          <p:nvPr/>
-        </p:nvSpPr>
-        <p:spPr>
-          <a:xfrm>
-            <a:off x="4178808" y="3360210"/>
-            <a:ext cx="960120" cy="238723"/>
-          </a:xfrm>
-          <a:prstGeom prst="rect">
-            <a:avLst/>
-          </a:prstGeom>
-          <a:noFill/>
-        </p:spPr>
-        <p:txBody>
-          <a:bodyPr wrap="none">
-            <a:spAutoFit/>
-          </a:bodyPr>
-          <a:lstStyle/>
-          <a:p>
-            <a:pPr algn="ctr"/>
-            <a:r>
-              <a:rPr sz="1100" b="1">
-                <a:solidFill>
-                  <a:srgbClr val="FFFFFF"/>
-                </a:solidFill>
-                <a:latin typeface="微软雅黑"/>
-                <ns14:rFonts xmlns:ns14="http://schemas.openxmlformats.org/wordprocessingml/2006/main" ns14:eastAsia="微软雅黑" ns14:ascii="微软雅黑" ns14:hAnsi="微软雅黑"/>
-              </a:rPr>
-              <a:t>指导教师</a:t>
-            </a:r>
-          </a:p>
-        </p:txBody>
-      </p:sp>
-      <p:sp>
-        <p:nvSpPr>
-          <p:cNvPr id="30" name="Rectangle 29"/>
-          <p:cNvSpPr/>
-          <p:nvPr/>
-        </p:nvSpPr>
-        <p:spPr>
-          <a:xfrm>
-            <a:off x="5184648" y="3226525"/>
-            <a:ext cx="3575304" cy="477447"/>
-          </a:xfrm>
-          <a:prstGeom prst="rect">
-            <a:avLst/>
-          </a:prstGeom>
-          <a:solidFill>
-            <a:srgbClr val="F1F7FF"/>
-          </a:solidFill>
-          <a:ln>
-            <a:solidFill>
-              <a:srgbClr val="BAC8DC"/>
-            </a:solidFill>
-          </a:ln>
-        </p:spPr>
-        <p:style>
-          <a:lnRef idx="1">
-            <a:schemeClr val="accent1"/>
-          </a:lnRef>
-          <a:fillRef idx="3">
-            <a:schemeClr val="accent1"/>
-          </a:fillRef>
-          <a:effectRef idx="2">
-            <a:schemeClr val="accent1"/>
-          </a:effectRef>
-          <a:fontRef idx="minor">
-            <a:schemeClr val="lt1"/>
-          </a:fontRef>
-        </p:style>
-        <p:txBody>
-          <a:bodyPr rtlCol="0" anchor="ctr"/>
-          <a:lstStyle/>
-          <a:p>
-            <a:pPr algn="ctr"/>
-          </a:p>
-        </p:txBody>
-      </p:sp>
-      <p:sp>
-        <p:nvSpPr>
-          <p:cNvPr id="31" name="TextBox 30"/>
-          <p:cNvSpPr txBox="1"/>
-          <p:nvPr/>
-        </p:nvSpPr>
-        <p:spPr>
-          <a:xfrm>
-            <a:off x="5276088" y="3281389"/>
-            <a:ext cx="3410712" cy="386007"/>
-          </a:xfrm>
-          <a:prstGeom prst="rect">
-            <a:avLst/>
-          </a:prstGeom>
-          <a:noFill/>
-        </p:spPr>
-        <p:txBody>
-          <a:bodyPr wrap="square">
-            <a:spAutoFit/>
-          </a:bodyPr>
-          <a:lstStyle/>
-          <a:p>
-            <a:r>
-              <a:rPr sz="1100" b="1">
-                <a:solidFill>
-                  <a:srgbClr val="143278"/>
-                </a:solidFill>
-                <a:latin typeface="微软雅黑"/>
-                <ns15:rFonts xmlns:ns15="http://schemas.openxmlformats.org/wordprocessingml/2006/main" ns15:eastAsia="微软雅黑" ns15:ascii="微软雅黑" ns15:hAnsi="微软雅黑"/>
-              </a:rPr>
-              <a:t>彭键清</a:t>
-            </a:r>
-          </a:p>
-        </p:txBody>
-      </p:sp>
-      <p:sp>
-        <p:nvSpPr>
-          <p:cNvPr id="32" name="Rectangle 31"/>
-          <p:cNvSpPr/>
-          <p:nvPr/>
-        </p:nvSpPr>
-        <p:spPr>
-          <a:xfrm>
-            <a:off x="4178808" y="3767981"/>
-            <a:ext cx="960120" cy="477447"/>
-          </a:xfrm>
-          <a:prstGeom prst="rect">
-            <a:avLst/>
-          </a:prstGeom>
-          <a:solidFill>
-            <a:srgbClr val="143278"/>
-          </a:solidFill>
-          <a:ln>
-            <a:noFill/>
-          </a:ln>
-        </p:spPr>
-        <p:style>
-          <a:lnRef idx="1">
-            <a:schemeClr val="accent1"/>
-          </a:lnRef>
-          <a:fillRef idx="3">
-            <a:schemeClr val="accent1"/>
-          </a:fillRef>
-          <a:effectRef idx="2">
-            <a:schemeClr val="accent1"/>
-          </a:effectRef>
-          <a:fontRef idx="minor">
-            <a:schemeClr val="lt1"/>
-          </a:fontRef>
-        </p:style>
-        <p:txBody>
-          <a:bodyPr rtlCol="0" anchor="ctr"/>
-          <a:lstStyle/>
-          <a:p>
-            <a:pPr algn="ctr"/>
-          </a:p>
-        </p:txBody>
-      </p:sp>
-      <p:sp>
-        <p:nvSpPr>
-          <p:cNvPr id="33" name="TextBox 32"/>
-          <p:cNvSpPr txBox="1"/>
-          <p:nvPr/>
-        </p:nvSpPr>
-        <p:spPr>
-          <a:xfrm>
-            <a:off x="4178808" y="3901666"/>
-            <a:ext cx="960120" cy="238723"/>
-          </a:xfrm>
-          <a:prstGeom prst="rect">
-            <a:avLst/>
-          </a:prstGeom>
-          <a:noFill/>
-        </p:spPr>
-        <p:txBody>
-          <a:bodyPr wrap="none">
-            <a:spAutoFit/>
-          </a:bodyPr>
-          <a:lstStyle/>
-          <a:p>
-            <a:pPr algn="ctr"/>
-            <a:r>
-              <a:rPr sz="1100" b="1">
-                <a:solidFill>
-                  <a:srgbClr val="FFFFFF"/>
-                </a:solidFill>
-                <a:latin typeface="微软雅黑"/>
-                <ns16:rFonts xmlns:ns16="http://schemas.openxmlformats.org/wordprocessingml/2006/main" ns16:eastAsia="微软雅黑" ns16:ascii="微软雅黑" ns16:hAnsi="微软雅黑"/>
-              </a:rPr>
-              <a:t>团队编号</a:t>
-            </a:r>
-          </a:p>
-        </p:txBody>
-      </p:sp>
-      <p:sp>
-        <p:nvSpPr>
-          <p:cNvPr id="34" name="Rectangle 33"/>
-          <p:cNvSpPr/>
-          <p:nvPr/>
-        </p:nvSpPr>
-        <p:spPr>
-          <a:xfrm>
-            <a:off x="5184648" y="3767981"/>
-            <a:ext cx="3575304" cy="477447"/>
-          </a:xfrm>
-          <a:prstGeom prst="rect">
-            <a:avLst/>
-          </a:prstGeom>
-          <a:solidFill>
-            <a:srgbClr val="F1F7FF"/>
-          </a:solidFill>
-          <a:ln>
-            <a:solidFill>
-              <a:srgbClr val="BAC8DC"/>
-            </a:solidFill>
-          </a:ln>
-        </p:spPr>
-        <p:style>
-          <a:lnRef idx="1">
-            <a:schemeClr val="accent1"/>
-          </a:lnRef>
-          <a:fillRef idx="3">
-            <a:schemeClr val="accent1"/>
-          </a:fillRef>
-          <a:effectRef idx="2">
-            <a:schemeClr val="accent1"/>
-          </a:effectRef>
-          <a:fontRef idx="minor">
-            <a:schemeClr val="lt1"/>
-          </a:fontRef>
-        </p:style>
-        <p:txBody>
-          <a:bodyPr rtlCol="0" anchor="ctr"/>
-          <a:lstStyle/>
-          <a:p>
-            <a:pPr algn="ctr"/>
-          </a:p>
-        </p:txBody>
-      </p:sp>
-      <p:sp>
-        <p:nvSpPr>
-          <p:cNvPr id="35" name="TextBox 34"/>
-          <p:cNvSpPr txBox="1"/>
-          <p:nvPr/>
-        </p:nvSpPr>
-        <p:spPr>
-          <a:xfrm>
-            <a:off x="5276088" y="3822845"/>
-            <a:ext cx="3410712" cy="386007"/>
-          </a:xfrm>
-          <a:prstGeom prst="rect">
-            <a:avLst/>
-          </a:prstGeom>
-          <a:noFill/>
-        </p:spPr>
-        <p:txBody>
-          <a:bodyPr wrap="square">
-            <a:spAutoFit/>
-          </a:bodyPr>
-          <a:lstStyle/>
-          <a:p>
-            <a:r>
-              <a:rPr sz="1100" b="1">
-                <a:solidFill>
-                  <a:srgbClr val="143278"/>
-                </a:solidFill>
-                <a:latin typeface="微软雅黑"/>
-                <ns17:rFonts xmlns:ns17="http://schemas.openxmlformats.org/wordprocessingml/2006/main" ns17:eastAsia="微软雅黑" ns17:ascii="微软雅黑" ns17:hAnsi="微软雅黑"/>
-              </a:rPr>
-              <a:t>CRAIC2026-TEAM-8FJQKLMI</a:t>
-            </a:r>
-          </a:p>
-        </p:txBody>
-      </p:sp>
-      <p:sp>
-        <p:nvSpPr>
-          <p:cNvPr id="36" name="Rectangle 35"/>
-          <p:cNvSpPr/>
-          <p:nvPr/>
-        </p:nvSpPr>
-        <p:spPr>
-          <a:xfrm>
-            <a:off x="4178808" y="4309436"/>
-            <a:ext cx="960120" cy="477447"/>
-          </a:xfrm>
-          <a:prstGeom prst="rect">
-            <a:avLst/>
-          </a:prstGeom>
-          <a:solidFill>
-            <a:srgbClr val="143278"/>
-          </a:solidFill>
-          <a:ln>
-            <a:noFill/>
-          </a:ln>
-        </p:spPr>
-        <p:style>
-          <a:lnRef idx="1">
-            <a:schemeClr val="accent1"/>
-          </a:lnRef>
-          <a:fillRef idx="3">
-            <a:schemeClr val="accent1"/>
-          </a:fillRef>
-          <a:effectRef idx="2">
-            <a:schemeClr val="accent1"/>
-          </a:effectRef>
-          <a:fontRef idx="minor">
-            <a:schemeClr val="lt1"/>
-          </a:fontRef>
-        </p:style>
-        <p:txBody>
-          <a:bodyPr rtlCol="0" anchor="ctr"/>
-          <a:lstStyle/>
-          <a:p>
-            <a:pPr algn="ctr"/>
-          </a:p>
-        </p:txBody>
-      </p:sp>
-      <p:sp>
-        <p:nvSpPr>
-          <p:cNvPr id="37" name="TextBox 36"/>
-          <p:cNvSpPr txBox="1"/>
-          <p:nvPr/>
-        </p:nvSpPr>
-        <p:spPr>
-          <a:xfrm>
-            <a:off x="4178808" y="4443121"/>
-            <a:ext cx="960120" cy="238723"/>
-          </a:xfrm>
-          <a:prstGeom prst="rect">
-            <a:avLst/>
-          </a:prstGeom>
-          <a:noFill/>
-        </p:spPr>
-        <p:txBody>
-          <a:bodyPr wrap="none">
-            <a:spAutoFit/>
-          </a:bodyPr>
-          <a:lstStyle/>
-          <a:p>
-            <a:pPr algn="ctr"/>
-            <a:r>
-              <a:rPr sz="1100" b="1">
-                <a:solidFill>
-                  <a:srgbClr val="FFFFFF"/>
-                </a:solidFill>
-                <a:latin typeface="微软雅黑"/>
-                <ns18:rFonts xmlns:ns18="http://schemas.openxmlformats.org/wordprocessingml/2006/main" ns18:eastAsia="微软雅黑" ns18:ascii="微软雅黑" ns18:hAnsi="微软雅黑"/>
-              </a:rPr>
-              <a:t>作品编号</a:t>
-            </a:r>
-          </a:p>
-        </p:txBody>
-      </p:sp>
-      <p:sp>
-        <p:nvSpPr>
-          <p:cNvPr id="38" name="Rectangle 37"/>
-          <p:cNvSpPr/>
-          <p:nvPr/>
-        </p:nvSpPr>
-        <p:spPr>
-          <a:xfrm>
-            <a:off x="5184648" y="4309436"/>
-            <a:ext cx="3575304" cy="477447"/>
-          </a:xfrm>
-          <a:prstGeom prst="rect">
-            <a:avLst/>
-          </a:prstGeom>
-          <a:solidFill>
-            <a:srgbClr val="F1F7FF"/>
-          </a:solidFill>
-          <a:ln>
-            <a:solidFill>
-              <a:srgbClr val="BAC8DC"/>
-            </a:solidFill>
-          </a:ln>
-        </p:spPr>
-        <p:style>
-          <a:lnRef idx="1">
-            <a:schemeClr val="accent1"/>
-          </a:lnRef>
-          <a:fillRef idx="3">
-            <a:schemeClr val="accent1"/>
-          </a:fillRef>
-          <a:effectRef idx="2">
-            <a:schemeClr val="accent1"/>
-          </a:effectRef>
-          <a:fontRef idx="minor">
-            <a:schemeClr val="lt1"/>
-          </a:fontRef>
-        </p:style>
-        <p:txBody>
-          <a:bodyPr rtlCol="0" anchor="ctr"/>
-          <a:lstStyle/>
-          <a:p>
-            <a:pPr algn="ctr"/>
-          </a:p>
-        </p:txBody>
-      </p:sp>
-      <p:sp>
-        <p:nvSpPr>
-          <p:cNvPr id="39" name="TextBox 38"/>
-          <p:cNvSpPr txBox="1"/>
-          <p:nvPr/>
-        </p:nvSpPr>
-        <p:spPr>
-          <a:xfrm>
-            <a:off x="5276088" y="4364300"/>
-            <a:ext cx="3410712" cy="386007"/>
-          </a:xfrm>
-          <a:prstGeom prst="rect">
-            <a:avLst/>
-          </a:prstGeom>
-          <a:noFill/>
-        </p:spPr>
-        <p:txBody>
-          <a:bodyPr wrap="square">
-            <a:spAutoFit/>
-          </a:bodyPr>
-          <a:lstStyle/>
-          <a:p>
-            <a:r>
-              <a:rPr sz="1100" b="1">
-                <a:solidFill>
-                  <a:srgbClr val="143278"/>
-                </a:solidFill>
-                <a:latin typeface="微软雅黑"/>
-                <ns19:rFonts xmlns:ns19="http://schemas.openxmlformats.org/wordprocessingml/2006/main" ns19:eastAsia="微软雅黑" ns19:ascii="微软雅黑" ns19:hAnsi="微软雅黑"/>
-              </a:rPr>
-              <a:t>CRAIC20264ZEFT1DF</a:t>
-            </a:r>
-          </a:p>
-        </p:txBody>
-      </p:sp>
+              <a:t>● 特色：理论清晰 · 系统可演示 · 指标可复现</a:t>
+            </a:r>
+          </a:p>
+        </p:txBody>
+      </p:sp>
+      <p:graphicFrame>
+        <p:nvGraphicFramePr>
+          <p:cNvPr id="14" name="Table 13"/>
+          <p:cNvGraphicFramePr>
+            <a:graphicFrameLocks noGrp="1"/>
+          </p:cNvGraphicFramePr>
+          <p:nvPr/>
+        </p:nvGraphicFramePr>
+        <p:xfrm>
+          <a:off x="4069080" y="996696"/>
+          <a:ext cx="4800600" cy="3854196"/>
+        </p:xfrm>
+        <a:graphic>
+          <a:graphicData uri="http://schemas.openxmlformats.org/drawingml/2006/table">
+            <a:tbl>
+              <a:tblPr firstRow="1" bandRow="1">
+                <a:tableStyleId>{5C22544A-7EE6-4342-B048-85BDC9FD1C3A}</a:tableStyleId>
+              </a:tblPr>
+              <a:tblGrid>
+                <a:gridCol w="841248"/>
+                <a:gridCol w="3959352"/>
+              </a:tblGrid>
+              <a:tr h="550599">
+                <a:tc>
+                  <a:txBody>
+                    <a:bodyPr anchor="ctr"/>
+                    <a:lstStyle/>
+                    <a:p>
+                      <a:pPr algn="ctr"/>
+                      <a:r>
+                        <a:rPr sz="1000" b="1">
+                          <a:solidFill>
+                            <a:srgbClr val="FFFFFF"/>
+                          </a:solidFill>
+                          <a:latin typeface="微软雅黑"/>
+                          <ns7:rFonts xmlns:ns7="http://schemas.openxmlformats.org/wordprocessingml/2006/main" ns7:eastAsia="微软雅黑" ns7:ascii="微软雅黑" ns7:hAnsi="微软雅黑"/>
+                        </a:rPr>
+                        <a:t>团队</a:t>
+                      </a:r>
+                    </a:p>
+                  </a:txBody>
+                  <a:tcPr marL="50800" marR="50800" marT="25400" marB="25400">
+                    <a:solidFill>
+                      <a:srgbClr val="143278"/>
+                    </a:solidFill>
+                  </a:tcPr>
+                </a:tc>
+                <a:tc>
+                  <a:txBody>
+                    <a:bodyPr anchor="ctr" wrap="square"/>
+                    <a:lstStyle/>
+                    <a:p>
+                      <a:pPr algn="l"/>
+                      <a:r>
+                        <a:rPr sz="1000" b="0">
+                          <a:solidFill>
+                            <a:srgbClr val="143278"/>
+                          </a:solidFill>
+                          <a:latin typeface="微软雅黑"/>
+                          <ns8:rFonts xmlns:ns8="http://schemas.openxmlformats.org/wordprocessingml/2006/main" ns8:eastAsia="微软雅黑" ns8:ascii="微软雅黑" ns8:hAnsi="微软雅黑"/>
+                        </a:rPr>
+                        <a:t>从容应队</a:t>
+                      </a:r>
+                    </a:p>
+                  </a:txBody>
+                  <a:tcPr marL="76200" marR="50800">
+                    <a:solidFill>
+                      <a:srgbClr val="F1F7FF"/>
+                    </a:solidFill>
+                  </a:tcPr>
+                </a:tc>
+              </a:tr>
+              <a:tr h="550599">
+                <a:tc>
+                  <a:txBody>
+                    <a:bodyPr anchor="ctr"/>
+                    <a:lstStyle/>
+                    <a:p>
+                      <a:pPr algn="ctr"/>
+                      <a:r>
+                        <a:rPr sz="1000" b="1">
+                          <a:solidFill>
+                            <a:srgbClr val="FFFFFF"/>
+                          </a:solidFill>
+                          <a:latin typeface="微软雅黑"/>
+                          <ns9:rFonts xmlns:ns9="http://schemas.openxmlformats.org/wordprocessingml/2006/main" ns9:eastAsia="微软雅黑" ns9:ascii="微软雅黑" ns9:hAnsi="微软雅黑"/>
+                        </a:rPr>
+                        <a:t>学校</a:t>
+                      </a:r>
+                    </a:p>
+                  </a:txBody>
+                  <a:tcPr marL="50800" marR="50800" marT="25400" marB="25400">
+                    <a:solidFill>
+                      <a:srgbClr val="143278"/>
+                    </a:solidFill>
+                  </a:tcPr>
+                </a:tc>
+                <a:tc>
+                  <a:txBody>
+                    <a:bodyPr anchor="ctr" wrap="square"/>
+                    <a:lstStyle/>
+                    <a:p>
+                      <a:pPr algn="l"/>
+                      <a:r>
+                        <a:rPr sz="1000" b="0">
+                          <a:solidFill>
+                            <a:srgbClr val="143278"/>
+                          </a:solidFill>
+                          <a:latin typeface="微软雅黑"/>
+                          <ns10:rFonts xmlns:ns10="http://schemas.openxmlformats.org/wordprocessingml/2006/main" ns10:eastAsia="微软雅黑" ns10:ascii="微软雅黑" ns10:hAnsi="微软雅黑"/>
+                        </a:rPr>
+                        <a:t>中山大学</a:t>
+                      </a:r>
+                    </a:p>
+                  </a:txBody>
+                  <a:tcPr marL="76200" marR="50800">
+                    <a:solidFill>
+                      <a:srgbClr val="F1F7FF"/>
+                    </a:solidFill>
+                  </a:tcPr>
+                </a:tc>
+              </a:tr>
+              <a:tr h="550599">
+                <a:tc>
+                  <a:txBody>
+                    <a:bodyPr anchor="ctr"/>
+                    <a:lstStyle/>
+                    <a:p>
+                      <a:pPr algn="ctr"/>
+                      <a:r>
+                        <a:rPr sz="1000" b="1">
+                          <a:solidFill>
+                            <a:srgbClr val="FFFFFF"/>
+                          </a:solidFill>
+                          <a:latin typeface="微软雅黑"/>
+                          <ns11:rFonts xmlns:ns11="http://schemas.openxmlformats.org/wordprocessingml/2006/main" ns11:eastAsia="微软雅黑" ns11:ascii="微软雅黑" ns11:hAnsi="微软雅黑"/>
+                        </a:rPr>
+                        <a:t>队长</a:t>
+                      </a:r>
+                    </a:p>
+                  </a:txBody>
+                  <a:tcPr marL="50800" marR="50800" marT="25400" marB="25400">
+                    <a:solidFill>
+                      <a:srgbClr val="143278"/>
+                    </a:solidFill>
+                  </a:tcPr>
+                </a:tc>
+                <a:tc>
+                  <a:txBody>
+                    <a:bodyPr anchor="ctr" wrap="square"/>
+                    <a:lstStyle/>
+                    <a:p>
+                      <a:pPr algn="l"/>
+                      <a:r>
+                        <a:rPr sz="1000" b="0">
+                          <a:solidFill>
+                            <a:srgbClr val="143278"/>
+                          </a:solidFill>
+                          <a:latin typeface="微软雅黑"/>
+                          <ns12:rFonts xmlns:ns12="http://schemas.openxmlformats.org/wordprocessingml/2006/main" ns12:eastAsia="微软雅黑" ns12:ascii="微软雅黑" ns12:hAnsi="微软雅黑"/>
+                        </a:rPr>
+                        <a:t>刘小凡</a:t>
+                      </a:r>
+                    </a:p>
+                  </a:txBody>
+                  <a:tcPr marL="76200" marR="50800">
+                    <a:solidFill>
+                      <a:srgbClr val="F1F7FF"/>
+                    </a:solidFill>
+                  </a:tcPr>
+                </a:tc>
+              </a:tr>
+              <a:tr h="550599">
+                <a:tc>
+                  <a:txBody>
+                    <a:bodyPr anchor="ctr"/>
+                    <a:lstStyle/>
+                    <a:p>
+                      <a:pPr algn="ctr"/>
+                      <a:r>
+                        <a:rPr sz="1000" b="1">
+                          <a:solidFill>
+                            <a:srgbClr val="FFFFFF"/>
+                          </a:solidFill>
+                          <a:latin typeface="微软雅黑"/>
+                          <ns13:rFonts xmlns:ns13="http://schemas.openxmlformats.org/wordprocessingml/2006/main" ns13:eastAsia="微软雅黑" ns13:ascii="微软雅黑" ns13:hAnsi="微软雅黑"/>
+                        </a:rPr>
+                        <a:t>队员</a:t>
+                      </a:r>
+                    </a:p>
+                  </a:txBody>
+                  <a:tcPr marL="50800" marR="50800" marT="25400" marB="25400">
+                    <a:solidFill>
+                      <a:srgbClr val="143278"/>
+                    </a:solidFill>
+                  </a:tcPr>
+                </a:tc>
+                <a:tc>
+                  <a:txBody>
+                    <a:bodyPr anchor="ctr" wrap="square"/>
+                    <a:lstStyle/>
+                    <a:p>
+                      <a:pPr algn="l"/>
+                      <a:r>
+                        <a:rPr sz="1000" b="0">
+                          <a:solidFill>
+                            <a:srgbClr val="143278"/>
+                          </a:solidFill>
+                          <a:latin typeface="微软雅黑"/>
+                          <ns14:rFonts xmlns:ns14="http://schemas.openxmlformats.org/wordprocessingml/2006/main" ns14:eastAsia="微软雅黑" ns14:ascii="微软雅黑" ns14:hAnsi="微软雅黑"/>
+                        </a:rPr>
+                        <a:t>白冉</a:t>
+                      </a:r>
+                    </a:p>
+                  </a:txBody>
+                  <a:tcPr marL="76200" marR="50800">
+                    <a:solidFill>
+                      <a:srgbClr val="F1F7FF"/>
+                    </a:solidFill>
+                  </a:tcPr>
+                </a:tc>
+              </a:tr>
+              <a:tr h="550599">
+                <a:tc>
+                  <a:txBody>
+                    <a:bodyPr anchor="ctr"/>
+                    <a:lstStyle/>
+                    <a:p>
+                      <a:pPr algn="ctr"/>
+                      <a:r>
+                        <a:rPr sz="1000" b="1">
+                          <a:solidFill>
+                            <a:srgbClr val="FFFFFF"/>
+                          </a:solidFill>
+                          <a:latin typeface="微软雅黑"/>
+                          <ns15:rFonts xmlns:ns15="http://schemas.openxmlformats.org/wordprocessingml/2006/main" ns15:eastAsia="微软雅黑" ns15:ascii="微软雅黑" ns15:hAnsi="微软雅黑"/>
+                        </a:rPr>
+                        <a:t>指导教师</a:t>
+                      </a:r>
+                    </a:p>
+                  </a:txBody>
+                  <a:tcPr marL="50800" marR="50800" marT="25400" marB="25400">
+                    <a:solidFill>
+                      <a:srgbClr val="143278"/>
+                    </a:solidFill>
+                  </a:tcPr>
+                </a:tc>
+                <a:tc>
+                  <a:txBody>
+                    <a:bodyPr anchor="ctr" wrap="square"/>
+                    <a:lstStyle/>
+                    <a:p>
+                      <a:pPr algn="l"/>
+                      <a:r>
+                        <a:rPr sz="1000" b="0">
+                          <a:solidFill>
+                            <a:srgbClr val="143278"/>
+                          </a:solidFill>
+                          <a:latin typeface="微软雅黑"/>
+                          <ns16:rFonts xmlns:ns16="http://schemas.openxmlformats.org/wordprocessingml/2006/main" ns16:eastAsia="微软雅黑" ns16:ascii="微软雅黑" ns16:hAnsi="微软雅黑"/>
+                        </a:rPr>
+                        <a:t>彭键清</a:t>
+                      </a:r>
+                    </a:p>
+                  </a:txBody>
+                  <a:tcPr marL="76200" marR="50800">
+                    <a:solidFill>
+                      <a:srgbClr val="F1F7FF"/>
+                    </a:solidFill>
+                  </a:tcPr>
+                </a:tc>
+              </a:tr>
+              <a:tr h="550599">
+                <a:tc>
+                  <a:txBody>
+                    <a:bodyPr anchor="ctr"/>
+                    <a:lstStyle/>
+                    <a:p>
+                      <a:pPr algn="ctr"/>
+                      <a:r>
+                        <a:rPr sz="1000" b="1">
+                          <a:solidFill>
+                            <a:srgbClr val="FFFFFF"/>
+                          </a:solidFill>
+                          <a:latin typeface="微软雅黑"/>
+                          <ns17:rFonts xmlns:ns17="http://schemas.openxmlformats.org/wordprocessingml/2006/main" ns17:eastAsia="微软雅黑" ns17:ascii="微软雅黑" ns17:hAnsi="微软雅黑"/>
+                        </a:rPr>
+                        <a:t>团队编号</a:t>
+                      </a:r>
+                    </a:p>
+                  </a:txBody>
+                  <a:tcPr marL="50800" marR="50800" marT="25400" marB="25400">
+                    <a:solidFill>
+                      <a:srgbClr val="143278"/>
+                    </a:solidFill>
+                  </a:tcPr>
+                </a:tc>
+                <a:tc>
+                  <a:txBody>
+                    <a:bodyPr anchor="ctr" wrap="square"/>
+                    <a:lstStyle/>
+                    <a:p>
+                      <a:pPr algn="l"/>
+                      <a:r>
+                        <a:rPr sz="1000" b="0">
+                          <a:solidFill>
+                            <a:srgbClr val="143278"/>
+                          </a:solidFill>
+                          <a:latin typeface="微软雅黑"/>
+                          <ns18:rFonts xmlns:ns18="http://schemas.openxmlformats.org/wordprocessingml/2006/main" ns18:eastAsia="微软雅黑" ns18:ascii="微软雅黑" ns18:hAnsi="微软雅黑"/>
+                        </a:rPr>
+                        <a:t>CRAIC2026-TEAM-8FJQKLMI</a:t>
+                      </a:r>
+                    </a:p>
+                  </a:txBody>
+                  <a:tcPr marL="76200" marR="50800">
+                    <a:solidFill>
+                      <a:srgbClr val="F1F7FF"/>
+                    </a:solidFill>
+                  </a:tcPr>
+                </a:tc>
+              </a:tr>
+              <a:tr h="550602">
+                <a:tc>
+                  <a:txBody>
+                    <a:bodyPr anchor="ctr"/>
+                    <a:lstStyle/>
+                    <a:p>
+                      <a:pPr algn="ctr"/>
+                      <a:r>
+                        <a:rPr sz="1000" b="1">
+                          <a:solidFill>
+                            <a:srgbClr val="FFFFFF"/>
+                          </a:solidFill>
+                          <a:latin typeface="微软雅黑"/>
+                          <ns19:rFonts xmlns:ns19="http://schemas.openxmlformats.org/wordprocessingml/2006/main" ns19:eastAsia="微软雅黑" ns19:ascii="微软雅黑" ns19:hAnsi="微软雅黑"/>
+                        </a:rPr>
+                        <a:t>作品编号</a:t>
+                      </a:r>
+                    </a:p>
+                  </a:txBody>
+                  <a:tcPr marL="50800" marR="50800" marT="25400" marB="25400">
+                    <a:solidFill>
+                      <a:srgbClr val="143278"/>
+                    </a:solidFill>
+                  </a:tcPr>
+                </a:tc>
+                <a:tc>
+                  <a:txBody>
+                    <a:bodyPr anchor="ctr" wrap="square"/>
+                    <a:lstStyle/>
+                    <a:p>
+                      <a:pPr algn="l"/>
+                      <a:r>
+                        <a:rPr sz="1000" b="0">
+                          <a:solidFill>
+                            <a:srgbClr val="143278"/>
+                          </a:solidFill>
+                          <a:latin typeface="微软雅黑"/>
+                          <ns20:rFonts xmlns:ns20="http://schemas.openxmlformats.org/wordprocessingml/2006/main" ns20:eastAsia="微软雅黑" ns20:ascii="微软雅黑" ns20:hAnsi="微软雅黑"/>
+                        </a:rPr>
+                        <a:t>CRAIC20264ZEFT1DF</a:t>
+                      </a:r>
+                    </a:p>
+                  </a:txBody>
+                  <a:tcPr marL="76200" marR="50800">
+                    <a:solidFill>
+                      <a:srgbClr val="F1F7FF"/>
+                    </a:solidFill>
+                  </a:tcPr>
+                </a:tc>
+              </a:tr>
+            </a:tbl>
+          </a:graphicData>
+        </a:graphic>
+      </p:graphicFrame>
     </p:spTree>
   </p:cSld>
   <p:clrMapOvr>
@@ -17301,26 +17551,26 @@
         </p:nvSpPr>
         <p:spPr>
           <a:xfrm>
-            <a:off x="475488" y="1143000"/>
-            <a:ext cx="3300984" cy="3579876"/>
-          </a:xfrm>
-          <a:prstGeom prst="rect">
-            <a:avLst/>
-          </a:prstGeom>
-          <a:noFill/>
-        </p:spPr>
-        <p:txBody>
-          <a:bodyPr wrap="square" anchor="ctr">
+            <a:off x="457200" y="1124712"/>
+            <a:ext cx="3246120" cy="885825"/>
+          </a:xfrm>
+          <a:prstGeom prst="rect">
+            <a:avLst/>
+          </a:prstGeom>
+          <a:noFill/>
+        </p:spPr>
+        <p:txBody>
+          <a:bodyPr wrap="square" anchor="t" lIns="25400" tIns="0">
             <a:spAutoFit/>
           </a:bodyPr>
           <a:lstStyle/>
           <a:p>
             <a:pPr>
               <a:lnSpc>
-                <a:spcPct val="120000"/>
+                <a:spcPct val="115000"/>
               </a:lnSpc>
               <a:spcAft>
-                <a:spcPts val="7100"/>
+                <a:spcPts val="0"/>
               </a:spcAft>
             </a:pPr>
             <a:r>
@@ -17334,13 +17584,36 @@
               <a:t>● GitHub 完整源码与文档</a:t>
             </a:r>
           </a:p>
+        </p:txBody>
+      </p:sp>
+      <p:sp>
+        <p:nvSpPr>
+          <p:cNvPr id="11" name="TextBox 10"/>
+          <p:cNvSpPr txBox="1"/>
+          <p:nvPr/>
+        </p:nvSpPr>
+        <p:spPr>
+          <a:xfrm>
+            <a:off x="457200" y="2028825"/>
+            <a:ext cx="3246120" cy="885825"/>
+          </a:xfrm>
+          <a:prstGeom prst="rect">
+            <a:avLst/>
+          </a:prstGeom>
+          <a:noFill/>
+        </p:spPr>
+        <p:txBody>
+          <a:bodyPr wrap="square" anchor="t" lIns="25400" tIns="0">
+            <a:spAutoFit/>
+          </a:bodyPr>
+          <a:lstStyle/>
           <a:p>
             <a:pPr>
               <a:lnSpc>
-                <a:spcPct val="120000"/>
+                <a:spcPct val="115000"/>
               </a:lnSpc>
               <a:spcAft>
-                <a:spcPts val="7100"/>
+                <a:spcPts val="0"/>
               </a:spcAft>
             </a:pPr>
             <a:r>
@@ -17354,13 +17627,36 @@
               <a:t>● 在线 Web 演示（现场可复现）</a:t>
             </a:r>
           </a:p>
+        </p:txBody>
+      </p:sp>
+      <p:sp>
+        <p:nvSpPr>
+          <p:cNvPr id="12" name="TextBox 11"/>
+          <p:cNvSpPr txBox="1"/>
+          <p:nvPr/>
+        </p:nvSpPr>
+        <p:spPr>
+          <a:xfrm>
+            <a:off x="457200" y="2932938"/>
+            <a:ext cx="3246120" cy="885825"/>
+          </a:xfrm>
+          <a:prstGeom prst="rect">
+            <a:avLst/>
+          </a:prstGeom>
+          <a:noFill/>
+        </p:spPr>
+        <p:txBody>
+          <a:bodyPr wrap="square" anchor="t" lIns="25400" tIns="0">
+            <a:spAutoFit/>
+          </a:bodyPr>
+          <a:lstStyle/>
           <a:p>
             <a:pPr>
               <a:lnSpc>
-                <a:spcPct val="120000"/>
+                <a:spcPct val="115000"/>
               </a:lnSpc>
               <a:spcAft>
-                <a:spcPts val="7100"/>
+                <a:spcPts val="0"/>
               </a:spcAft>
             </a:pPr>
             <a:r>
@@ -17374,13 +17670,36 @@
               <a:t>● 演示录像已附仓库</a:t>
             </a:r>
           </a:p>
+        </p:txBody>
+      </p:sp>
+      <p:sp>
+        <p:nvSpPr>
+          <p:cNvPr id="13" name="TextBox 12"/>
+          <p:cNvSpPr txBox="1"/>
+          <p:nvPr/>
+        </p:nvSpPr>
+        <p:spPr>
+          <a:xfrm>
+            <a:off x="457200" y="3837051"/>
+            <a:ext cx="3246120" cy="885825"/>
+          </a:xfrm>
+          <a:prstGeom prst="rect">
+            <a:avLst/>
+          </a:prstGeom>
+          <a:noFill/>
+        </p:spPr>
+        <p:txBody>
+          <a:bodyPr wrap="square" anchor="t" lIns="25400" tIns="0">
+            <a:spAutoFit/>
+          </a:bodyPr>
+          <a:lstStyle/>
           <a:p>
             <a:pPr>
               <a:lnSpc>
-                <a:spcPct val="120000"/>
+                <a:spcPct val="115000"/>
               </a:lnSpc>
               <a:spcAft>
-                <a:spcPts val="7100"/>
+                <a:spcPts val="0"/>
               </a:spcAft>
             </a:pPr>
             <a:r>
@@ -17398,7 +17717,7 @@
       </p:sp>
       <p:sp>
         <p:nvSpPr>
-          <p:cNvPr id="11" name="Rectangle 10"/>
+          <p:cNvPr id="14" name="Rectangle 13"/>
           <p:cNvSpPr/>
           <p:nvPr/>
         </p:nvSpPr>
@@ -17443,7 +17762,7 @@
       </p:sp>
       <p:pic>
         <p:nvPicPr>
-          <p:cNvPr id="12" name="Picture 11" descr="ppt_demo_qr.png"/>
+          <p:cNvPr id="15" name="Picture 14" descr="ppt_demo_qr.png"/>
           <p:cNvPicPr>
             <a:picLocks noChangeAspect="1"/>
           </p:cNvPicPr>
@@ -17467,7 +17786,7 @@
       </p:pic>
       <p:sp>
         <p:nvSpPr>
-          <p:cNvPr id="13" name="TextBox 12"/>
+          <p:cNvPr id="16" name="TextBox 15"/>
           <p:cNvSpPr txBox="1"/>
           <p:nvPr/>
         </p:nvSpPr>
@@ -17503,7 +17822,7 @@
       </p:sp>
       <p:sp>
         <p:nvSpPr>
-          <p:cNvPr id="14" name="Rectangle 13"/>
+          <p:cNvPr id="17" name="Rectangle 16"/>
           <p:cNvSpPr/>
           <p:nvPr/>
         </p:nvSpPr>
@@ -17548,7 +17867,7 @@
       </p:sp>
       <p:pic>
         <p:nvPicPr>
-          <p:cNvPr id="15" name="Picture 14" descr="ppt_mediapipe_pose.png"/>
+          <p:cNvPr id="18" name="Picture 17" descr="ppt_mediapipe_pose.png"/>
           <p:cNvPicPr>
             <a:picLocks noChangeAspect="1"/>
           </p:cNvPicPr>
@@ -17572,7 +17891,7 @@
       </p:pic>
       <p:sp>
         <p:nvSpPr>
-          <p:cNvPr id="16" name="TextBox 15"/>
+          <p:cNvPr id="19" name="TextBox 18"/>
           <p:cNvSpPr txBox="1"/>
           <p:nvPr/>
         </p:nvSpPr>
@@ -19142,14 +19461,186 @@
       </p:sp>
       <p:sp>
         <p:nvSpPr>
-          <p:cNvPr id="10" name="Rectangle 9"/>
+          <p:cNvPr id="10" name="TextBox 9"/>
+          <p:cNvSpPr txBox="1"/>
+          <p:nvPr/>
+        </p:nvSpPr>
+        <p:spPr>
+          <a:xfrm>
+            <a:off x="457200" y="1124712"/>
+            <a:ext cx="3246120" cy="803529"/>
+          </a:xfrm>
+          <a:prstGeom prst="rect">
+            <a:avLst/>
+          </a:prstGeom>
+          <a:noFill/>
+        </p:spPr>
+        <p:txBody>
+          <a:bodyPr wrap="square" anchor="t" lIns="25400" tIns="0">
+            <a:spAutoFit/>
+          </a:bodyPr>
+          <a:lstStyle/>
+          <a:p>
+            <a:pPr>
+              <a:lnSpc>
+                <a:spcPct val="115000"/>
+              </a:lnSpc>
+              <a:spcAft>
+                <a:spcPts val="0"/>
+              </a:spcAft>
+            </a:pPr>
+            <a:r>
+              <a:rPr sz="1200" b="0">
+                <a:solidFill>
+                  <a:srgbClr val="1C202C"/>
+                </a:solidFill>
+                <a:latin typeface="微软雅黑"/>
+                <ns3:rFonts xmlns:ns3="http://schemas.openxmlformats.org/wordprocessingml/2006/main" ns3:eastAsia="微软雅黑" ns3:ascii="微软雅黑" ns3:hAnsi="微软雅黑"/>
+              </a:rPr>
+              <a:t>● 独居老人增多，跌倒「发现空窗」是核心痛点</a:t>
+            </a:r>
+          </a:p>
+        </p:txBody>
+      </p:sp>
+      <p:sp>
+        <p:nvSpPr>
+          <p:cNvPr id="11" name="TextBox 10"/>
+          <p:cNvSpPr txBox="1"/>
+          <p:nvPr/>
+        </p:nvSpPr>
+        <p:spPr>
+          <a:xfrm>
+            <a:off x="457200" y="1946529"/>
+            <a:ext cx="3246120" cy="803529"/>
+          </a:xfrm>
+          <a:prstGeom prst="rect">
+            <a:avLst/>
+          </a:prstGeom>
+          <a:noFill/>
+        </p:spPr>
+        <p:txBody>
+          <a:bodyPr wrap="square" anchor="t" lIns="25400" tIns="0">
+            <a:spAutoFit/>
+          </a:bodyPr>
+          <a:lstStyle/>
+          <a:p>
+            <a:pPr>
+              <a:lnSpc>
+                <a:spcPct val="115000"/>
+              </a:lnSpc>
+              <a:spcAft>
+                <a:spcPts val="0"/>
+              </a:spcAft>
+            </a:pPr>
+            <a:r>
+              <a:rPr sz="1200" b="0">
+                <a:solidFill>
+                  <a:srgbClr val="1C202C"/>
+                </a:solidFill>
+                <a:latin typeface="微软雅黑"/>
+                <ns4:rFonts xmlns:ns4="http://schemas.openxmlformats.org/wordprocessingml/2006/main" ns4:eastAsia="微软雅黑" ns4:ascii="微软雅黑" ns4:hAnsi="微软雅黑"/>
+              </a:rPr>
+              <a:t>● 情感陪伴需求上升，监测难形成照护闭环</a:t>
+            </a:r>
+          </a:p>
+        </p:txBody>
+      </p:sp>
+      <p:sp>
+        <p:nvSpPr>
+          <p:cNvPr id="12" name="TextBox 11"/>
+          <p:cNvSpPr txBox="1"/>
+          <p:nvPr/>
+        </p:nvSpPr>
+        <p:spPr>
+          <a:xfrm>
+            <a:off x="457200" y="2768346"/>
+            <a:ext cx="3246120" cy="803529"/>
+          </a:xfrm>
+          <a:prstGeom prst="rect">
+            <a:avLst/>
+          </a:prstGeom>
+          <a:noFill/>
+        </p:spPr>
+        <p:txBody>
+          <a:bodyPr wrap="square" anchor="t" lIns="25400" tIns="0">
+            <a:spAutoFit/>
+          </a:bodyPr>
+          <a:lstStyle/>
+          <a:p>
+            <a:pPr>
+              <a:lnSpc>
+                <a:spcPct val="115000"/>
+              </a:lnSpc>
+              <a:spcAft>
+                <a:spcPts val="0"/>
+              </a:spcAft>
+            </a:pPr>
+            <a:r>
+              <a:rPr sz="1200" b="0">
+                <a:solidFill>
+                  <a:srgbClr val="1C202C"/>
+                </a:solidFill>
+                <a:latin typeface="微软雅黑"/>
+                <ns5:rFonts xmlns:ns5="http://schemas.openxmlformats.org/wordprocessingml/2006/main" ns5:eastAsia="微软雅黑" ns5:ascii="微软雅黑" ns5:hAnsi="微软雅黑"/>
+              </a:rPr>
+              <a:t>● 政策导向：智慧养老与居家安全并重</a:t>
+            </a:r>
+          </a:p>
+        </p:txBody>
+      </p:sp>
+      <p:sp>
+        <p:nvSpPr>
+          <p:cNvPr id="13" name="TextBox 12"/>
+          <p:cNvSpPr txBox="1"/>
+          <p:nvPr/>
+        </p:nvSpPr>
+        <p:spPr>
+          <a:xfrm>
+            <a:off x="457200" y="3590163"/>
+            <a:ext cx="3246120" cy="803529"/>
+          </a:xfrm>
+          <a:prstGeom prst="rect">
+            <a:avLst/>
+          </a:prstGeom>
+          <a:noFill/>
+        </p:spPr>
+        <p:txBody>
+          <a:bodyPr wrap="square" anchor="t" lIns="25400" tIns="0">
+            <a:spAutoFit/>
+          </a:bodyPr>
+          <a:lstStyle/>
+          <a:p>
+            <a:pPr>
+              <a:lnSpc>
+                <a:spcPct val="115000"/>
+              </a:lnSpc>
+              <a:spcAft>
+                <a:spcPts val="0"/>
+              </a:spcAft>
+            </a:pPr>
+            <a:r>
+              <a:rPr sz="1200" b="1">
+                <a:solidFill>
+                  <a:srgbClr val="143278"/>
+                </a:solidFill>
+                <a:latin typeface="微软雅黑"/>
+                <ns6:rFonts xmlns:ns6="http://schemas.openxmlformats.org/wordprocessingml/2006/main" ns6:eastAsia="微软雅黑" ns6:ascii="微软雅黑" ns6:hAnsi="微软雅黑"/>
+              </a:rPr>
+              <a:t>● 本项目：仿真验证 + 人形机器人接口</a:t>
+            </a:r>
+          </a:p>
+        </p:txBody>
+      </p:sp>
+      <p:sp>
+        <p:nvSpPr>
+          <p:cNvPr id="14" name="Rectangle 13"/>
           <p:cNvSpPr/>
           <p:nvPr/>
         </p:nvSpPr>
         <p:spPr>
           <a:xfrm>
-            <a:off x="347472" y="4503420"/>
-            <a:ext cx="3465576" cy="310896"/>
+            <a:off x="365760" y="4521708"/>
+            <a:ext cx="3429000" cy="310896"/>
           </a:xfrm>
           <a:prstGeom prst="rect">
             <a:avLst/>
@@ -19185,22 +19676,22 @@
       </p:sp>
       <p:sp>
         <p:nvSpPr>
-          <p:cNvPr id="11" name="TextBox 10"/>
-          <p:cNvSpPr txBox="1"/>
-          <p:nvPr/>
-        </p:nvSpPr>
-        <p:spPr>
-          <a:xfrm>
-            <a:off x="402336" y="4576572"/>
-            <a:ext cx="3355848" cy="237744"/>
-          </a:xfrm>
-          <a:prstGeom prst="rect">
-            <a:avLst/>
-          </a:prstGeom>
-          <a:noFill/>
-        </p:spPr>
-        <p:txBody>
-          <a:bodyPr wrap="none">
+          <p:cNvPr id="15" name="TextBox 14"/>
+          <p:cNvSpPr txBox="1"/>
+          <p:nvPr/>
+        </p:nvSpPr>
+        <p:spPr>
+          <a:xfrm>
+            <a:off x="402336" y="4585716"/>
+            <a:ext cx="3355848" cy="201167"/>
+          </a:xfrm>
+          <a:prstGeom prst="rect">
+            <a:avLst/>
+          </a:prstGeom>
+          <a:noFill/>
+        </p:spPr>
+        <p:txBody>
+          <a:bodyPr wrap="none" anchor="ctr">
             <a:spAutoFit/>
           </a:bodyPr>
           <a:lstStyle/>
@@ -19212,7 +19703,7 @@
                   <a:srgbClr val="FFFFFF"/>
                 </a:solidFill>
                 <a:latin typeface="微软雅黑"/>
-                <ns3:rFonts xmlns:ns3="http://schemas.openxmlformats.org/wordprocessingml/2006/main" ns3:eastAsia="微软雅黑" ns3:ascii="微软雅黑" ns3:hAnsi="微软雅黑"/>
+                <ns7:rFonts xmlns:ns7="http://schemas.openxmlformats.org/wordprocessingml/2006/main" ns7:eastAsia="微软雅黑" ns7:ascii="微软雅黑" ns7:hAnsi="微软雅黑"/>
               </a:rPr>
               <a:t>痛点：发现慢 + 闭环弱</a:t>
             </a:r>
@@ -19221,110 +19712,7 @@
       </p:sp>
       <p:sp>
         <p:nvSpPr>
-          <p:cNvPr id="12" name="TextBox 11"/>
-          <p:cNvSpPr txBox="1"/>
-          <p:nvPr/>
-        </p:nvSpPr>
-        <p:spPr>
-          <a:xfrm>
-            <a:off x="475488" y="1143000"/>
-            <a:ext cx="3300984" cy="3232404"/>
-          </a:xfrm>
-          <a:prstGeom prst="rect">
-            <a:avLst/>
-          </a:prstGeom>
-          <a:noFill/>
-        </p:spPr>
-        <p:txBody>
-          <a:bodyPr wrap="square" anchor="ctr">
-            <a:spAutoFit/>
-          </a:bodyPr>
-          <a:lstStyle/>
-          <a:p>
-            <a:pPr>
-              <a:lnSpc>
-                <a:spcPct val="120000"/>
-              </a:lnSpc>
-              <a:spcAft>
-                <a:spcPts val="6200"/>
-              </a:spcAft>
-            </a:pPr>
-            <a:r>
-              <a:rPr sz="1300" b="0">
-                <a:solidFill>
-                  <a:srgbClr val="1C202C"/>
-                </a:solidFill>
-                <a:latin typeface="微软雅黑"/>
-                <ns4:rFonts xmlns:ns4="http://schemas.openxmlformats.org/wordprocessingml/2006/main" ns4:eastAsia="微软雅黑" ns4:ascii="微软雅黑" ns4:hAnsi="微软雅黑"/>
-              </a:rPr>
-              <a:t>● 独居老人增多，跌倒后「发现空窗」是核心痛点</a:t>
-            </a:r>
-          </a:p>
-          <a:p>
-            <a:pPr>
-              <a:lnSpc>
-                <a:spcPct val="120000"/>
-              </a:lnSpc>
-              <a:spcAft>
-                <a:spcPts val="6200"/>
-              </a:spcAft>
-            </a:pPr>
-            <a:r>
-              <a:rPr sz="1300" b="0">
-                <a:solidFill>
-                  <a:srgbClr val="1C202C"/>
-                </a:solidFill>
-                <a:latin typeface="微软雅黑"/>
-                <ns5:rFonts xmlns:ns5="http://schemas.openxmlformats.org/wordprocessingml/2006/main" ns5:eastAsia="微软雅黑" ns5:ascii="微软雅黑" ns5:hAnsi="微软雅黑"/>
-              </a:rPr>
-              <a:t>● 情感陪伴需求上升，监测设备难以形成照护闭环</a:t>
-            </a:r>
-          </a:p>
-          <a:p>
-            <a:pPr>
-              <a:lnSpc>
-                <a:spcPct val="120000"/>
-              </a:lnSpc>
-              <a:spcAft>
-                <a:spcPts val="6200"/>
-              </a:spcAft>
-            </a:pPr>
-            <a:r>
-              <a:rPr sz="1300" b="0">
-                <a:solidFill>
-                  <a:srgbClr val="1C202C"/>
-                </a:solidFill>
-                <a:latin typeface="微软雅黑"/>
-                <ns6:rFonts xmlns:ns6="http://schemas.openxmlformats.org/wordprocessingml/2006/main" ns6:eastAsia="微软雅黑" ns6:ascii="微软雅黑" ns6:hAnsi="微软雅黑"/>
-              </a:rPr>
-              <a:t>● 政策导向：智慧养老与居家安全并重</a:t>
-            </a:r>
-          </a:p>
-          <a:p>
-            <a:pPr>
-              <a:lnSpc>
-                <a:spcPct val="120000"/>
-              </a:lnSpc>
-              <a:spcAft>
-                <a:spcPts val="6200"/>
-              </a:spcAft>
-            </a:pPr>
-            <a:r>
-              <a:rPr sz="1300" b="1">
-                <a:solidFill>
-                  <a:srgbClr val="143278"/>
-                </a:solidFill>
-                <a:latin typeface="微软雅黑"/>
-                <ns7:rFonts xmlns:ns7="http://schemas.openxmlformats.org/wordprocessingml/2006/main" ns7:eastAsia="微软雅黑" ns7:ascii="微软雅黑" ns7:hAnsi="微软雅黑"/>
-              </a:rPr>
-              <a:t>● 本项目聚焦可落地的仿真验证与人形接口</a:t>
-            </a:r>
-          </a:p>
-        </p:txBody>
-      </p:sp>
-      <p:sp>
-        <p:nvSpPr>
-          <p:cNvPr id="13" name="Rectangle 12"/>
+          <p:cNvPr id="16" name="Rectangle 15"/>
           <p:cNvSpPr/>
           <p:nvPr/>
         </p:nvSpPr>
@@ -19369,7 +19757,7 @@
       </p:sp>
       <p:pic>
         <p:nvPicPr>
-          <p:cNvPr id="14" name="Picture 13" descr="aging_chart.png"/>
+          <p:cNvPr id="17" name="Picture 16" descr="aging_chart.png"/>
           <p:cNvPicPr>
             <a:picLocks noChangeAspect="1"/>
           </p:cNvPicPr>
@@ -19393,7 +19781,7 @@
       </p:pic>
       <p:sp>
         <p:nvSpPr>
-          <p:cNvPr id="15" name="TextBox 14"/>
+          <p:cNvPr id="18" name="TextBox 17"/>
           <p:cNvSpPr txBox="1"/>
           <p:nvPr/>
         </p:nvSpPr>
@@ -19779,14 +20167,186 @@
       </p:sp>
       <p:sp>
         <p:nvSpPr>
-          <p:cNvPr id="10" name="Rectangle 9"/>
+          <p:cNvPr id="10" name="TextBox 9"/>
+          <p:cNvSpPr txBox="1"/>
+          <p:nvPr/>
+        </p:nvSpPr>
+        <p:spPr>
+          <a:xfrm>
+            <a:off x="457200" y="1124712"/>
+            <a:ext cx="3246120" cy="803529"/>
+          </a:xfrm>
+          <a:prstGeom prst="rect">
+            <a:avLst/>
+          </a:prstGeom>
+          <a:noFill/>
+        </p:spPr>
+        <p:txBody>
+          <a:bodyPr wrap="square" anchor="t" lIns="25400" tIns="0">
+            <a:spAutoFit/>
+          </a:bodyPr>
+          <a:lstStyle/>
+          <a:p>
+            <a:pPr>
+              <a:lnSpc>
+                <a:spcPct val="115000"/>
+              </a:lnSpc>
+              <a:spcAft>
+                <a:spcPts val="0"/>
+              </a:spcAft>
+            </a:pPr>
+            <a:r>
+              <a:rPr sz="1300" b="0">
+                <a:solidFill>
+                  <a:srgbClr val="1C202C"/>
+                </a:solidFill>
+                <a:latin typeface="微软雅黑"/>
+                <ns3:rFonts xmlns:ns3="http://schemas.openxmlformats.org/wordprocessingml/2006/main" ns3:eastAsia="微软雅黑" ns3:ascii="微软雅黑" ns3:hAnsi="微软雅黑"/>
+              </a:rPr>
+              <a:t>● 传统音箱/摄像头/手环：功能割裂</a:t>
+            </a:r>
+          </a:p>
+        </p:txBody>
+      </p:sp>
+      <p:sp>
+        <p:nvSpPr>
+          <p:cNvPr id="11" name="TextBox 10"/>
+          <p:cNvSpPr txBox="1"/>
+          <p:nvPr/>
+        </p:nvSpPr>
+        <p:spPr>
+          <a:xfrm>
+            <a:off x="457200" y="1946529"/>
+            <a:ext cx="3246120" cy="803529"/>
+          </a:xfrm>
+          <a:prstGeom prst="rect">
+            <a:avLst/>
+          </a:prstGeom>
+          <a:noFill/>
+        </p:spPr>
+        <p:txBody>
+          <a:bodyPr wrap="square" anchor="t" lIns="25400" tIns="0">
+            <a:spAutoFit/>
+          </a:bodyPr>
+          <a:lstStyle/>
+          <a:p>
+            <a:pPr>
+              <a:lnSpc>
+                <a:spcPct val="115000"/>
+              </a:lnSpc>
+              <a:spcAft>
+                <a:spcPts val="0"/>
+              </a:spcAft>
+            </a:pPr>
+            <a:r>
+              <a:rPr sz="1300" b="0">
+                <a:solidFill>
+                  <a:srgbClr val="1C202C"/>
+                </a:solidFill>
+                <a:latin typeface="微软雅黑"/>
+                <ns4:rFonts xmlns:ns4="http://schemas.openxmlformats.org/wordprocessingml/2006/main" ns4:eastAsia="微软雅黑" ns4:ascii="微软雅黑" ns4:hAnsi="微软雅黑"/>
+              </a:rPr>
+              <a:t>● 本作品：感知—决策—执行统一编排</a:t>
+            </a:r>
+          </a:p>
+        </p:txBody>
+      </p:sp>
+      <p:sp>
+        <p:nvSpPr>
+          <p:cNvPr id="12" name="TextBox 11"/>
+          <p:cNvSpPr txBox="1"/>
+          <p:nvPr/>
+        </p:nvSpPr>
+        <p:spPr>
+          <a:xfrm>
+            <a:off x="457200" y="2768346"/>
+            <a:ext cx="3246120" cy="803529"/>
+          </a:xfrm>
+          <a:prstGeom prst="rect">
+            <a:avLst/>
+          </a:prstGeom>
+          <a:noFill/>
+        </p:spPr>
+        <p:txBody>
+          <a:bodyPr wrap="square" anchor="t" lIns="25400" tIns="0">
+            <a:spAutoFit/>
+          </a:bodyPr>
+          <a:lstStyle/>
+          <a:p>
+            <a:pPr>
+              <a:lnSpc>
+                <a:spcPct val="115000"/>
+              </a:lnSpc>
+              <a:spcAft>
+                <a:spcPts val="0"/>
+              </a:spcAft>
+            </a:pPr>
+            <a:r>
+              <a:rPr sz="1300" b="0">
+                <a:solidFill>
+                  <a:srgbClr val="1C202C"/>
+                </a:solidFill>
+                <a:latin typeface="微软雅黑"/>
+                <ns5:rFonts xmlns:ns5="http://schemas.openxmlformats.org/wordprocessingml/2006/main" ns5:eastAsia="微软雅黑" ns5:ascii="微软雅黑" ns5:hAnsi="微软雅黑"/>
+              </a:rPr>
+              <a:t>● 强调可解释风险与紧急硬优先级</a:t>
+            </a:r>
+          </a:p>
+        </p:txBody>
+      </p:sp>
+      <p:sp>
+        <p:nvSpPr>
+          <p:cNvPr id="13" name="TextBox 12"/>
+          <p:cNvSpPr txBox="1"/>
+          <p:nvPr/>
+        </p:nvSpPr>
+        <p:spPr>
+          <a:xfrm>
+            <a:off x="457200" y="3590163"/>
+            <a:ext cx="3246120" cy="803529"/>
+          </a:xfrm>
+          <a:prstGeom prst="rect">
+            <a:avLst/>
+          </a:prstGeom>
+          <a:noFill/>
+        </p:spPr>
+        <p:txBody>
+          <a:bodyPr wrap="square" anchor="t" lIns="25400" tIns="0">
+            <a:spAutoFit/>
+          </a:bodyPr>
+          <a:lstStyle/>
+          <a:p>
+            <a:pPr>
+              <a:lnSpc>
+                <a:spcPct val="115000"/>
+              </a:lnSpc>
+              <a:spcAft>
+                <a:spcPts val="0"/>
+              </a:spcAft>
+            </a:pPr>
+            <a:r>
+              <a:rPr sz="1300" b="0">
+                <a:solidFill>
+                  <a:srgbClr val="1C202C"/>
+                </a:solidFill>
+                <a:latin typeface="微软雅黑"/>
+                <ns6:rFonts xmlns:ns6="http://schemas.openxmlformats.org/wordprocessingml/2006/main" ns6:eastAsia="微软雅黑" ns6:ascii="微软雅黑" ns6:hAnsi="微软雅黑"/>
+              </a:rPr>
+              <a:t>● 配套 Web 演示与量化评测脚本</a:t>
+            </a:r>
+          </a:p>
+        </p:txBody>
+      </p:sp>
+      <p:sp>
+        <p:nvSpPr>
+          <p:cNvPr id="14" name="Rectangle 13"/>
           <p:cNvSpPr/>
           <p:nvPr/>
         </p:nvSpPr>
         <p:spPr>
           <a:xfrm>
-            <a:off x="347472" y="4503420"/>
-            <a:ext cx="3465576" cy="310896"/>
+            <a:off x="365760" y="4521708"/>
+            <a:ext cx="3429000" cy="310896"/>
           </a:xfrm>
           <a:prstGeom prst="rect">
             <a:avLst/>
@@ -19822,22 +20382,22 @@
       </p:sp>
       <p:sp>
         <p:nvSpPr>
-          <p:cNvPr id="11" name="TextBox 10"/>
-          <p:cNvSpPr txBox="1"/>
-          <p:nvPr/>
-        </p:nvSpPr>
-        <p:spPr>
-          <a:xfrm>
-            <a:off x="402336" y="4576572"/>
-            <a:ext cx="3355848" cy="237744"/>
-          </a:xfrm>
-          <a:prstGeom prst="rect">
-            <a:avLst/>
-          </a:prstGeom>
-          <a:noFill/>
-        </p:spPr>
-        <p:txBody>
-          <a:bodyPr wrap="none">
+          <p:cNvPr id="15" name="TextBox 14"/>
+          <p:cNvSpPr txBox="1"/>
+          <p:nvPr/>
+        </p:nvSpPr>
+        <p:spPr>
+          <a:xfrm>
+            <a:off x="402336" y="4585716"/>
+            <a:ext cx="3355848" cy="201167"/>
+          </a:xfrm>
+          <a:prstGeom prst="rect">
+            <a:avLst/>
+          </a:prstGeom>
+          <a:noFill/>
+        </p:spPr>
+        <p:txBody>
+          <a:bodyPr wrap="none" anchor="ctr">
             <a:spAutoFit/>
           </a:bodyPr>
           <a:lstStyle/>
@@ -19849,7 +20409,7 @@
                   <a:srgbClr val="FFFFFF"/>
                 </a:solidFill>
                 <a:latin typeface="微软雅黑"/>
-                <ns3:rFonts xmlns:ns3="http://schemas.openxmlformats.org/wordprocessingml/2006/main" ns3:eastAsia="微软雅黑" ns3:ascii="微软雅黑" ns3:hAnsi="微软雅黑"/>
+                <ns7:rFonts xmlns:ns7="http://schemas.openxmlformats.org/wordprocessingml/2006/main" ns7:eastAsia="微软雅黑" ns7:ascii="微软雅黑" ns7:hAnsi="微软雅黑"/>
               </a:rPr>
               <a:t>从堆叠到一体化闭环</a:t>
             </a:r>
@@ -19858,110 +20418,7 @@
       </p:sp>
       <p:sp>
         <p:nvSpPr>
-          <p:cNvPr id="12" name="TextBox 11"/>
-          <p:cNvSpPr txBox="1"/>
-          <p:nvPr/>
-        </p:nvSpPr>
-        <p:spPr>
-          <a:xfrm>
-            <a:off x="475488" y="1143000"/>
-            <a:ext cx="3300984" cy="3232404"/>
-          </a:xfrm>
-          <a:prstGeom prst="rect">
-            <a:avLst/>
-          </a:prstGeom>
-          <a:noFill/>
-        </p:spPr>
-        <p:txBody>
-          <a:bodyPr wrap="square" anchor="ctr">
-            <a:spAutoFit/>
-          </a:bodyPr>
-          <a:lstStyle/>
-          <a:p>
-            <a:pPr>
-              <a:lnSpc>
-                <a:spcPct val="120000"/>
-              </a:lnSpc>
-              <a:spcAft>
-                <a:spcPts val="6200"/>
-              </a:spcAft>
-            </a:pPr>
-            <a:r>
-              <a:rPr sz="1300" b="0">
-                <a:solidFill>
-                  <a:srgbClr val="1C202C"/>
-                </a:solidFill>
-                <a:latin typeface="微软雅黑"/>
-                <ns4:rFonts xmlns:ns4="http://schemas.openxmlformats.org/wordprocessingml/2006/main" ns4:eastAsia="微软雅黑" ns4:ascii="微软雅黑" ns4:hAnsi="微软雅黑"/>
-              </a:rPr>
-              <a:t>● 传统音箱/摄像头/手环：功能割裂</a:t>
-            </a:r>
-          </a:p>
-          <a:p>
-            <a:pPr>
-              <a:lnSpc>
-                <a:spcPct val="120000"/>
-              </a:lnSpc>
-              <a:spcAft>
-                <a:spcPts val="6200"/>
-              </a:spcAft>
-            </a:pPr>
-            <a:r>
-              <a:rPr sz="1300" b="0">
-                <a:solidFill>
-                  <a:srgbClr val="1C202C"/>
-                </a:solidFill>
-                <a:latin typeface="微软雅黑"/>
-                <ns5:rFonts xmlns:ns5="http://schemas.openxmlformats.org/wordprocessingml/2006/main" ns5:eastAsia="微软雅黑" ns5:ascii="微软雅黑" ns5:hAnsi="微软雅黑"/>
-              </a:rPr>
-              <a:t>● 本作品：感知—决策—执行统一编排</a:t>
-            </a:r>
-          </a:p>
-          <a:p>
-            <a:pPr>
-              <a:lnSpc>
-                <a:spcPct val="120000"/>
-              </a:lnSpc>
-              <a:spcAft>
-                <a:spcPts val="6200"/>
-              </a:spcAft>
-            </a:pPr>
-            <a:r>
-              <a:rPr sz="1300" b="0">
-                <a:solidFill>
-                  <a:srgbClr val="1C202C"/>
-                </a:solidFill>
-                <a:latin typeface="微软雅黑"/>
-                <ns6:rFonts xmlns:ns6="http://schemas.openxmlformats.org/wordprocessingml/2006/main" ns6:eastAsia="微软雅黑" ns6:ascii="微软雅黑" ns6:hAnsi="微软雅黑"/>
-              </a:rPr>
-              <a:t>● 强调可解释风险与紧急硬优先级</a:t>
-            </a:r>
-          </a:p>
-          <a:p>
-            <a:pPr>
-              <a:lnSpc>
-                <a:spcPct val="120000"/>
-              </a:lnSpc>
-              <a:spcAft>
-                <a:spcPts val="6200"/>
-              </a:spcAft>
-            </a:pPr>
-            <a:r>
-              <a:rPr sz="1300" b="0">
-                <a:solidFill>
-                  <a:srgbClr val="1C202C"/>
-                </a:solidFill>
-                <a:latin typeface="微软雅黑"/>
-                <ns7:rFonts xmlns:ns7="http://schemas.openxmlformats.org/wordprocessingml/2006/main" ns7:eastAsia="微软雅黑" ns7:ascii="微软雅黑" ns7:hAnsi="微软雅黑"/>
-              </a:rPr>
-              <a:t>● 配套 Web 演示与量化评测脚本</a:t>
-            </a:r>
-          </a:p>
-        </p:txBody>
-      </p:sp>
-      <p:sp>
-        <p:nvSpPr>
-          <p:cNvPr id="13" name="Rectangle 12"/>
+          <p:cNvPr id="16" name="Rectangle 15"/>
           <p:cNvSpPr/>
           <p:nvPr/>
         </p:nvSpPr>
@@ -20006,7 +20463,7 @@
       </p:sp>
       <p:pic>
         <p:nvPicPr>
-          <p:cNvPr id="14" name="Picture 13" descr="compare.png"/>
+          <p:cNvPr id="17" name="Picture 16" descr="compare.png"/>
           <p:cNvPicPr>
             <a:picLocks noChangeAspect="1"/>
           </p:cNvPicPr>
@@ -20030,7 +20487,7 @@
       </p:pic>
       <p:sp>
         <p:nvSpPr>
-          <p:cNvPr id="15" name="TextBox 14"/>
+          <p:cNvPr id="18" name="TextBox 17"/>
           <p:cNvSpPr txBox="1"/>
           <p:nvPr/>
         </p:nvSpPr>
@@ -20416,14 +20873,229 @@
       </p:sp>
       <p:sp>
         <p:nvSpPr>
-          <p:cNvPr id="10" name="Rectangle 9"/>
+          <p:cNvPr id="10" name="TextBox 9"/>
+          <p:cNvSpPr txBox="1"/>
+          <p:nvPr/>
+        </p:nvSpPr>
+        <p:spPr>
+          <a:xfrm>
+            <a:off x="457200" y="1124712"/>
+            <a:ext cx="3246120" cy="639165"/>
+          </a:xfrm>
+          <a:prstGeom prst="rect">
+            <a:avLst/>
+          </a:prstGeom>
+          <a:noFill/>
+        </p:spPr>
+        <p:txBody>
+          <a:bodyPr wrap="square" anchor="t" lIns="25400" tIns="0">
+            <a:spAutoFit/>
+          </a:bodyPr>
+          <a:lstStyle/>
+          <a:p>
+            <a:pPr>
+              <a:lnSpc>
+                <a:spcPct val="115000"/>
+              </a:lnSpc>
+              <a:spcAft>
+                <a:spcPts val="0"/>
+              </a:spcAft>
+            </a:pPr>
+            <a:r>
+              <a:rPr sz="1300" b="0">
+                <a:solidFill>
+                  <a:srgbClr val="1C202C"/>
+                </a:solidFill>
+                <a:latin typeface="微软雅黑"/>
+                <ns3:rFonts xmlns:ns3="http://schemas.openxmlformats.org/wordprocessingml/2006/main" ns3:eastAsia="微软雅黑" ns3:ascii="微软雅黑" ns3:hAnsi="微软雅黑"/>
+              </a:rPr>
+              <a:t>● CareCompanion：养老人形陪伴软件平台</a:t>
+            </a:r>
+          </a:p>
+        </p:txBody>
+      </p:sp>
+      <p:sp>
+        <p:nvSpPr>
+          <p:cNvPr id="11" name="TextBox 10"/>
+          <p:cNvSpPr txBox="1"/>
+          <p:nvPr/>
+        </p:nvSpPr>
+        <p:spPr>
+          <a:xfrm>
+            <a:off x="457200" y="1782165"/>
+            <a:ext cx="3246120" cy="639165"/>
+          </a:xfrm>
+          <a:prstGeom prst="rect">
+            <a:avLst/>
+          </a:prstGeom>
+          <a:noFill/>
+        </p:spPr>
+        <p:txBody>
+          <a:bodyPr wrap="square" anchor="t" lIns="25400" tIns="0">
+            <a:spAutoFit/>
+          </a:bodyPr>
+          <a:lstStyle/>
+          <a:p>
+            <a:pPr>
+              <a:lnSpc>
+                <a:spcPct val="115000"/>
+              </a:lnSpc>
+              <a:spcAft>
+                <a:spcPts val="0"/>
+              </a:spcAft>
+            </a:pPr>
+            <a:r>
+              <a:rPr sz="1300" b="0">
+                <a:solidFill>
+                  <a:srgbClr val="1C202C"/>
+                </a:solidFill>
+                <a:latin typeface="微软雅黑"/>
+                <ns4:rFonts xmlns:ns4="http://schemas.openxmlformats.org/wordprocessingml/2006/main" ns4:eastAsia="微软雅黑" ns4:ascii="微软雅黑" ns4:hAnsi="微软雅黑"/>
+              </a:rPr>
+              <a:t>● CareOrchestrator 统一调度各模块</a:t>
+            </a:r>
+          </a:p>
+        </p:txBody>
+      </p:sp>
+      <p:sp>
+        <p:nvSpPr>
+          <p:cNvPr id="12" name="TextBox 11"/>
+          <p:cNvSpPr txBox="1"/>
+          <p:nvPr/>
+        </p:nvSpPr>
+        <p:spPr>
+          <a:xfrm>
+            <a:off x="457200" y="2439619"/>
+            <a:ext cx="3246120" cy="639165"/>
+          </a:xfrm>
+          <a:prstGeom prst="rect">
+            <a:avLst/>
+          </a:prstGeom>
+          <a:noFill/>
+        </p:spPr>
+        <p:txBody>
+          <a:bodyPr wrap="square" anchor="t" lIns="25400" tIns="0">
+            <a:spAutoFit/>
+          </a:bodyPr>
+          <a:lstStyle/>
+          <a:p>
+            <a:pPr>
+              <a:lnSpc>
+                <a:spcPct val="115000"/>
+              </a:lnSpc>
+              <a:spcAft>
+                <a:spcPts val="0"/>
+              </a:spcAft>
+            </a:pPr>
+            <a:r>
+              <a:rPr sz="1300" b="0">
+                <a:solidFill>
+                  <a:srgbClr val="1C202C"/>
+                </a:solidFill>
+                <a:latin typeface="微软雅黑"/>
+                <ns5:rFonts xmlns:ns5="http://schemas.openxmlformats.org/wordprocessingml/2006/main" ns5:eastAsia="微软雅黑" ns5:ascii="微软雅黑" ns5:hAnsi="微软雅黑"/>
+              </a:rPr>
+              <a:t>● 目标1：跌倒检测与紧急呼叫自动化</a:t>
+            </a:r>
+          </a:p>
+        </p:txBody>
+      </p:sp>
+      <p:sp>
+        <p:nvSpPr>
+          <p:cNvPr id="13" name="TextBox 12"/>
+          <p:cNvSpPr txBox="1"/>
+          <p:nvPr/>
+        </p:nvSpPr>
+        <p:spPr>
+          <a:xfrm>
+            <a:off x="457200" y="3097072"/>
+            <a:ext cx="3246120" cy="639165"/>
+          </a:xfrm>
+          <a:prstGeom prst="rect">
+            <a:avLst/>
+          </a:prstGeom>
+          <a:noFill/>
+        </p:spPr>
+        <p:txBody>
+          <a:bodyPr wrap="square" anchor="t" lIns="25400" tIns="0">
+            <a:spAutoFit/>
+          </a:bodyPr>
+          <a:lstStyle/>
+          <a:p>
+            <a:pPr>
+              <a:lnSpc>
+                <a:spcPct val="115000"/>
+              </a:lnSpc>
+              <a:spcAft>
+                <a:spcPts val="0"/>
+              </a:spcAft>
+            </a:pPr>
+            <a:r>
+              <a:rPr sz="1300" b="0">
+                <a:solidFill>
+                  <a:srgbClr val="1C202C"/>
+                </a:solidFill>
+                <a:latin typeface="微软雅黑"/>
+                <ns6:rFonts xmlns:ns6="http://schemas.openxmlformats.org/wordprocessingml/2006/main" ns6:eastAsia="微软雅黑" ns6:ascii="微软雅黑" ns6:hAnsi="微软雅黑"/>
+              </a:rPr>
+              <a:t>● 目标2：情感对话与机器人动作联动</a:t>
+            </a:r>
+          </a:p>
+        </p:txBody>
+      </p:sp>
+      <p:sp>
+        <p:nvSpPr>
+          <p:cNvPr id="14" name="TextBox 13"/>
+          <p:cNvSpPr txBox="1"/>
+          <p:nvPr/>
+        </p:nvSpPr>
+        <p:spPr>
+          <a:xfrm>
+            <a:off x="457200" y="3754526"/>
+            <a:ext cx="3246120" cy="639165"/>
+          </a:xfrm>
+          <a:prstGeom prst="rect">
+            <a:avLst/>
+          </a:prstGeom>
+          <a:noFill/>
+        </p:spPr>
+        <p:txBody>
+          <a:bodyPr wrap="square" anchor="t" lIns="25400" tIns="0">
+            <a:spAutoFit/>
+          </a:bodyPr>
+          <a:lstStyle/>
+          <a:p>
+            <a:pPr>
+              <a:lnSpc>
+                <a:spcPct val="115000"/>
+              </a:lnSpc>
+              <a:spcAft>
+                <a:spcPts val="0"/>
+              </a:spcAft>
+            </a:pPr>
+            <a:r>
+              <a:rPr sz="1300" b="0">
+                <a:solidFill>
+                  <a:srgbClr val="1C202C"/>
+                </a:solidFill>
+                <a:latin typeface="微软雅黑"/>
+                <ns7:rFonts xmlns:ns7="http://schemas.openxmlformats.org/wordprocessingml/2006/main" ns7:eastAsia="微软雅黑" ns7:ascii="微软雅黑" ns7:hAnsi="微软雅黑"/>
+              </a:rPr>
+              <a:t>● 目标3：ROS2 部署接口 + 开源可复现</a:t>
+            </a:r>
+          </a:p>
+        </p:txBody>
+      </p:sp>
+      <p:sp>
+        <p:nvSpPr>
+          <p:cNvPr id="15" name="Rectangle 14"/>
           <p:cNvSpPr/>
           <p:nvPr/>
         </p:nvSpPr>
         <p:spPr>
           <a:xfrm>
-            <a:off x="347472" y="4503420"/>
-            <a:ext cx="3465576" cy="310896"/>
+            <a:off x="365760" y="4521708"/>
+            <a:ext cx="3429000" cy="310896"/>
           </a:xfrm>
           <a:prstGeom prst="rect">
             <a:avLst/>
@@ -20459,22 +21131,22 @@
       </p:sp>
       <p:sp>
         <p:nvSpPr>
-          <p:cNvPr id="11" name="TextBox 10"/>
-          <p:cNvSpPr txBox="1"/>
-          <p:nvPr/>
-        </p:nvSpPr>
-        <p:spPr>
-          <a:xfrm>
-            <a:off x="402336" y="4576572"/>
-            <a:ext cx="3355848" cy="237744"/>
-          </a:xfrm>
-          <a:prstGeom prst="rect">
-            <a:avLst/>
-          </a:prstGeom>
-          <a:noFill/>
-        </p:spPr>
-        <p:txBody>
-          <a:bodyPr wrap="none">
+          <p:cNvPr id="16" name="TextBox 15"/>
+          <p:cNvSpPr txBox="1"/>
+          <p:nvPr/>
+        </p:nvSpPr>
+        <p:spPr>
+          <a:xfrm>
+            <a:off x="402336" y="4585716"/>
+            <a:ext cx="3355848" cy="201167"/>
+          </a:xfrm>
+          <a:prstGeom prst="rect">
+            <a:avLst/>
+          </a:prstGeom>
+          <a:noFill/>
+        </p:spPr>
+        <p:txBody>
+          <a:bodyPr wrap="none" anchor="ctr">
             <a:spAutoFit/>
           </a:bodyPr>
           <a:lstStyle/>
@@ -20486,7 +21158,7 @@
                   <a:srgbClr val="FFFFFF"/>
                 </a:solidFill>
                 <a:latin typeface="微软雅黑"/>
-                <ns3:rFonts xmlns:ns3="http://schemas.openxmlformats.org/wordprocessingml/2006/main" ns3:eastAsia="微软雅黑" ns3:ascii="微软雅黑" ns3:hAnsi="微软雅黑"/>
+                <ns8:rFonts xmlns:ns8="http://schemas.openxmlformats.org/wordprocessingml/2006/main" ns8:eastAsia="微软雅黑" ns8:ascii="微软雅黑" ns8:hAnsi="微软雅黑"/>
               </a:rPr>
               <a:t>三大目标均可现场验证</a:t>
             </a:r>
@@ -20495,130 +21167,7 @@
       </p:sp>
       <p:sp>
         <p:nvSpPr>
-          <p:cNvPr id="12" name="TextBox 11"/>
-          <p:cNvSpPr txBox="1"/>
-          <p:nvPr/>
-        </p:nvSpPr>
-        <p:spPr>
-          <a:xfrm>
-            <a:off x="475488" y="1143000"/>
-            <a:ext cx="3300984" cy="3232404"/>
-          </a:xfrm>
-          <a:prstGeom prst="rect">
-            <a:avLst/>
-          </a:prstGeom>
-          <a:noFill/>
-        </p:spPr>
-        <p:txBody>
-          <a:bodyPr wrap="square" anchor="ctr">
-            <a:spAutoFit/>
-          </a:bodyPr>
-          <a:lstStyle/>
-          <a:p>
-            <a:pPr>
-              <a:lnSpc>
-                <a:spcPct val="120000"/>
-              </a:lnSpc>
-              <a:spcAft>
-                <a:spcPts val="4200"/>
-              </a:spcAft>
-            </a:pPr>
-            <a:r>
-              <a:rPr sz="1300" b="0">
-                <a:solidFill>
-                  <a:srgbClr val="1C202C"/>
-                </a:solidFill>
-                <a:latin typeface="微软雅黑"/>
-                <ns4:rFonts xmlns:ns4="http://schemas.openxmlformats.org/wordprocessingml/2006/main" ns4:eastAsia="微软雅黑" ns4:ascii="微软雅黑" ns4:hAnsi="微软雅黑"/>
-              </a:rPr>
-              <a:t>● CareCompanion：养老人形陪伴软件平台</a:t>
-            </a:r>
-          </a:p>
-          <a:p>
-            <a:pPr>
-              <a:lnSpc>
-                <a:spcPct val="120000"/>
-              </a:lnSpc>
-              <a:spcAft>
-                <a:spcPts val="4200"/>
-              </a:spcAft>
-            </a:pPr>
-            <a:r>
-              <a:rPr sz="1300" b="0">
-                <a:solidFill>
-                  <a:srgbClr val="1C202C"/>
-                </a:solidFill>
-                <a:latin typeface="微软雅黑"/>
-                <ns5:rFonts xmlns:ns5="http://schemas.openxmlformats.org/wordprocessingml/2006/main" ns5:eastAsia="微软雅黑" ns5:ascii="微软雅黑" ns5:hAnsi="微软雅黑"/>
-              </a:rPr>
-              <a:t>● CareOrchestrator 统一调度各模块</a:t>
-            </a:r>
-          </a:p>
-          <a:p>
-            <a:pPr>
-              <a:lnSpc>
-                <a:spcPct val="120000"/>
-              </a:lnSpc>
-              <a:spcAft>
-                <a:spcPts val="4200"/>
-              </a:spcAft>
-            </a:pPr>
-            <a:r>
-              <a:rPr sz="1300" b="0">
-                <a:solidFill>
-                  <a:srgbClr val="1C202C"/>
-                </a:solidFill>
-                <a:latin typeface="微软雅黑"/>
-                <ns6:rFonts xmlns:ns6="http://schemas.openxmlformats.org/wordprocessingml/2006/main" ns6:eastAsia="微软雅黑" ns6:ascii="微软雅黑" ns6:hAnsi="微软雅黑"/>
-              </a:rPr>
-              <a:t>● 目标1：跌倒检测与紧急呼叫自动化</a:t>
-            </a:r>
-          </a:p>
-          <a:p>
-            <a:pPr>
-              <a:lnSpc>
-                <a:spcPct val="120000"/>
-              </a:lnSpc>
-              <a:spcAft>
-                <a:spcPts val="4200"/>
-              </a:spcAft>
-            </a:pPr>
-            <a:r>
-              <a:rPr sz="1300" b="0">
-                <a:solidFill>
-                  <a:srgbClr val="1C202C"/>
-                </a:solidFill>
-                <a:latin typeface="微软雅黑"/>
-                <ns7:rFonts xmlns:ns7="http://schemas.openxmlformats.org/wordprocessingml/2006/main" ns7:eastAsia="微软雅黑" ns7:ascii="微软雅黑" ns7:hAnsi="微软雅黑"/>
-              </a:rPr>
-              <a:t>● 目标2：情感对话与机器人动作联动</a:t>
-            </a:r>
-          </a:p>
-          <a:p>
-            <a:pPr>
-              <a:lnSpc>
-                <a:spcPct val="120000"/>
-              </a:lnSpc>
-              <a:spcAft>
-                <a:spcPts val="4200"/>
-              </a:spcAft>
-            </a:pPr>
-            <a:r>
-              <a:rPr sz="1300" b="0">
-                <a:solidFill>
-                  <a:srgbClr val="1C202C"/>
-                </a:solidFill>
-                <a:latin typeface="微软雅黑"/>
-                <ns8:rFonts xmlns:ns8="http://schemas.openxmlformats.org/wordprocessingml/2006/main" ns8:eastAsia="微软雅黑" ns8:ascii="微软雅黑" ns8:hAnsi="微软雅黑"/>
-              </a:rPr>
-              <a:t>● 目标3：ROS2 部署接口 + 开源可复现</a:t>
-            </a:r>
-          </a:p>
-        </p:txBody>
-      </p:sp>
-      <p:sp>
-        <p:nvSpPr>
-          <p:cNvPr id="13" name="Rectangle 12"/>
+          <p:cNvPr id="17" name="Rectangle 16"/>
           <p:cNvSpPr/>
           <p:nvPr/>
         </p:nvSpPr>
@@ -20663,7 +21212,7 @@
       </p:sp>
       <p:pic>
         <p:nvPicPr>
-          <p:cNvPr id="14" name="Picture 13" descr="architecture.png"/>
+          <p:cNvPr id="18" name="Picture 17" descr="architecture.png"/>
           <p:cNvPicPr>
             <a:picLocks noChangeAspect="1"/>
           </p:cNvPicPr>
@@ -20687,7 +21236,7 @@
       </p:pic>
       <p:sp>
         <p:nvSpPr>
-          <p:cNvPr id="15" name="TextBox 14"/>
+          <p:cNvPr id="19" name="TextBox 18"/>
           <p:cNvSpPr txBox="1"/>
           <p:nvPr/>
         </p:nvSpPr>
@@ -21755,14 +22304,186 @@
       </p:sp>
       <p:sp>
         <p:nvSpPr>
-          <p:cNvPr id="10" name="Rectangle 9"/>
+          <p:cNvPr id="10" name="TextBox 9"/>
+          <p:cNvSpPr txBox="1"/>
+          <p:nvPr/>
+        </p:nvSpPr>
+        <p:spPr>
+          <a:xfrm>
+            <a:off x="457200" y="1124712"/>
+            <a:ext cx="3246120" cy="803529"/>
+          </a:xfrm>
+          <a:prstGeom prst="rect">
+            <a:avLst/>
+          </a:prstGeom>
+          <a:noFill/>
+        </p:spPr>
+        <p:txBody>
+          <a:bodyPr wrap="square" anchor="t" lIns="25400" tIns="0">
+            <a:spAutoFit/>
+          </a:bodyPr>
+          <a:lstStyle/>
+          <a:p>
+            <a:pPr>
+              <a:lnSpc>
+                <a:spcPct val="115000"/>
+              </a:lnSpc>
+              <a:spcAft>
+                <a:spcPts val="0"/>
+              </a:spcAft>
+            </a:pPr>
+            <a:r>
+              <a:rPr sz="1300" b="0">
+                <a:solidFill>
+                  <a:srgbClr val="1C202C"/>
+                </a:solidFill>
+                <a:latin typeface="微软雅黑"/>
+                <ns3:rFonts xmlns:ns3="http://schemas.openxmlformats.org/wordprocessingml/2006/main" ns3:eastAsia="微软雅黑" ns3:ascii="微软雅黑" ns3:hAnsi="微软雅黑"/>
+              </a:rPr>
+              <a:t>● 四层架构：感知 / 认知 / 执行 / 交互</a:t>
+            </a:r>
+          </a:p>
+        </p:txBody>
+      </p:sp>
+      <p:sp>
+        <p:nvSpPr>
+          <p:cNvPr id="11" name="TextBox 10"/>
+          <p:cNvSpPr txBox="1"/>
+          <p:nvPr/>
+        </p:nvSpPr>
+        <p:spPr>
+          <a:xfrm>
+            <a:off x="457200" y="1946529"/>
+            <a:ext cx="3246120" cy="803529"/>
+          </a:xfrm>
+          <a:prstGeom prst="rect">
+            <a:avLst/>
+          </a:prstGeom>
+          <a:noFill/>
+        </p:spPr>
+        <p:txBody>
+          <a:bodyPr wrap="square" anchor="t" lIns="25400" tIns="0">
+            <a:spAutoFit/>
+          </a:bodyPr>
+          <a:lstStyle/>
+          <a:p>
+            <a:pPr>
+              <a:lnSpc>
+                <a:spcPct val="115000"/>
+              </a:lnSpc>
+              <a:spcAft>
+                <a:spcPts val="0"/>
+              </a:spcAft>
+            </a:pPr>
+            <a:r>
+              <a:rPr sz="1300" b="0">
+                <a:solidFill>
+                  <a:srgbClr val="1C202C"/>
+                </a:solidFill>
+                <a:latin typeface="微软雅黑"/>
+                <ns4:rFonts xmlns:ns4="http://schemas.openxmlformats.org/wordprocessingml/2006/main" ns4:eastAsia="微软雅黑" ns4:ascii="微软雅黑" ns4:hAnsi="微软雅黑"/>
+              </a:rPr>
+              <a:t>● 核心：CareOrchestrator + 状态机</a:t>
+            </a:r>
+          </a:p>
+        </p:txBody>
+      </p:sp>
+      <p:sp>
+        <p:nvSpPr>
+          <p:cNvPr id="12" name="TextBox 11"/>
+          <p:cNvSpPr txBox="1"/>
+          <p:nvPr/>
+        </p:nvSpPr>
+        <p:spPr>
+          <a:xfrm>
+            <a:off x="457200" y="2768346"/>
+            <a:ext cx="3246120" cy="803529"/>
+          </a:xfrm>
+          <a:prstGeom prst="rect">
+            <a:avLst/>
+          </a:prstGeom>
+          <a:noFill/>
+        </p:spPr>
+        <p:txBody>
+          <a:bodyPr wrap="square" anchor="t" lIns="25400" tIns="0">
+            <a:spAutoFit/>
+          </a:bodyPr>
+          <a:lstStyle/>
+          <a:p>
+            <a:pPr>
+              <a:lnSpc>
+                <a:spcPct val="115000"/>
+              </a:lnSpc>
+              <a:spcAft>
+                <a:spcPts val="0"/>
+              </a:spcAft>
+            </a:pPr>
+            <a:r>
+              <a:rPr sz="1300" b="0">
+                <a:solidFill>
+                  <a:srgbClr val="1C202C"/>
+                </a:solidFill>
+                <a:latin typeface="微软雅黑"/>
+                <ns5:rFonts xmlns:ns5="http://schemas.openxmlformats.org/wordprocessingml/2006/main" ns5:eastAsia="微软雅黑" ns5:ascii="微软雅黑" ns5:hAnsi="微软雅黑"/>
+              </a:rPr>
+              <a:t>● 模块可替换：仿真、Web、ROS2 共用一套逻辑</a:t>
+            </a:r>
+          </a:p>
+        </p:txBody>
+      </p:sp>
+      <p:sp>
+        <p:nvSpPr>
+          <p:cNvPr id="13" name="TextBox 12"/>
+          <p:cNvSpPr txBox="1"/>
+          <p:nvPr/>
+        </p:nvSpPr>
+        <p:spPr>
+          <a:xfrm>
+            <a:off x="457200" y="3590163"/>
+            <a:ext cx="3246120" cy="803529"/>
+          </a:xfrm>
+          <a:prstGeom prst="rect">
+            <a:avLst/>
+          </a:prstGeom>
+          <a:noFill/>
+        </p:spPr>
+        <p:txBody>
+          <a:bodyPr wrap="square" anchor="t" lIns="25400" tIns="0">
+            <a:spAutoFit/>
+          </a:bodyPr>
+          <a:lstStyle/>
+          <a:p>
+            <a:pPr>
+              <a:lnSpc>
+                <a:spcPct val="115000"/>
+              </a:lnSpc>
+              <a:spcAft>
+                <a:spcPts val="0"/>
+              </a:spcAft>
+            </a:pPr>
+            <a:r>
+              <a:rPr sz="1300" b="0">
+                <a:solidFill>
+                  <a:srgbClr val="1C202C"/>
+                </a:solidFill>
+                <a:latin typeface="微软雅黑"/>
+                <ns6:rFonts xmlns:ns6="http://schemas.openxmlformats.org/wordprocessingml/2006/main" ns6:eastAsia="微软雅黑" ns6:ascii="微软雅黑" ns6:hAnsi="微软雅黑"/>
+              </a:rPr>
+              <a:t>● 配置集中于 config/default.yaml</a:t>
+            </a:r>
+          </a:p>
+        </p:txBody>
+      </p:sp>
+      <p:sp>
+        <p:nvSpPr>
+          <p:cNvPr id="14" name="Rectangle 13"/>
           <p:cNvSpPr/>
           <p:nvPr/>
         </p:nvSpPr>
         <p:spPr>
           <a:xfrm>
-            <a:off x="347472" y="4503420"/>
-            <a:ext cx="3465576" cy="310896"/>
+            <a:off x="365760" y="4521708"/>
+            <a:ext cx="3429000" cy="310896"/>
           </a:xfrm>
           <a:prstGeom prst="rect">
             <a:avLst/>
@@ -21798,22 +22519,22 @@
       </p:sp>
       <p:sp>
         <p:nvSpPr>
-          <p:cNvPr id="11" name="TextBox 10"/>
-          <p:cNvSpPr txBox="1"/>
-          <p:nvPr/>
-        </p:nvSpPr>
-        <p:spPr>
-          <a:xfrm>
-            <a:off x="402336" y="4576572"/>
-            <a:ext cx="3355848" cy="237744"/>
-          </a:xfrm>
-          <a:prstGeom prst="rect">
-            <a:avLst/>
-          </a:prstGeom>
-          <a:noFill/>
-        </p:spPr>
-        <p:txBody>
-          <a:bodyPr wrap="none">
+          <p:cNvPr id="15" name="TextBox 14"/>
+          <p:cNvSpPr txBox="1"/>
+          <p:nvPr/>
+        </p:nvSpPr>
+        <p:spPr>
+          <a:xfrm>
+            <a:off x="402336" y="4585716"/>
+            <a:ext cx="3355848" cy="201167"/>
+          </a:xfrm>
+          <a:prstGeom prst="rect">
+            <a:avLst/>
+          </a:prstGeom>
+          <a:noFill/>
+        </p:spPr>
+        <p:txBody>
+          <a:bodyPr wrap="none" anchor="ctr">
             <a:spAutoFit/>
           </a:bodyPr>
           <a:lstStyle/>
@@ -21825,7 +22546,7 @@
                   <a:srgbClr val="FFFFFF"/>
                 </a:solidFill>
                 <a:latin typeface="微软雅黑"/>
-                <ns3:rFonts xmlns:ns3="http://schemas.openxmlformats.org/wordprocessingml/2006/main" ns3:eastAsia="微软雅黑" ns3:ascii="微软雅黑" ns3:hAnsi="微软雅黑"/>
+                <ns7:rFonts xmlns:ns7="http://schemas.openxmlformats.org/wordprocessingml/2006/main" ns7:eastAsia="微软雅黑" ns7:ascii="微软雅黑" ns7:hAnsi="微软雅黑"/>
               </a:rPr>
               <a:t>理论清晰、可替换</a:t>
             </a:r>
@@ -21834,110 +22555,7 @@
       </p:sp>
       <p:sp>
         <p:nvSpPr>
-          <p:cNvPr id="12" name="TextBox 11"/>
-          <p:cNvSpPr txBox="1"/>
-          <p:nvPr/>
-        </p:nvSpPr>
-        <p:spPr>
-          <a:xfrm>
-            <a:off x="475488" y="1143000"/>
-            <a:ext cx="3300984" cy="3232404"/>
-          </a:xfrm>
-          <a:prstGeom prst="rect">
-            <a:avLst/>
-          </a:prstGeom>
-          <a:noFill/>
-        </p:spPr>
-        <p:txBody>
-          <a:bodyPr wrap="square" anchor="ctr">
-            <a:spAutoFit/>
-          </a:bodyPr>
-          <a:lstStyle/>
-          <a:p>
-            <a:pPr>
-              <a:lnSpc>
-                <a:spcPct val="120000"/>
-              </a:lnSpc>
-              <a:spcAft>
-                <a:spcPts val="6200"/>
-              </a:spcAft>
-            </a:pPr>
-            <a:r>
-              <a:rPr sz="1300" b="0">
-                <a:solidFill>
-                  <a:srgbClr val="1C202C"/>
-                </a:solidFill>
-                <a:latin typeface="微软雅黑"/>
-                <ns4:rFonts xmlns:ns4="http://schemas.openxmlformats.org/wordprocessingml/2006/main" ns4:eastAsia="微软雅黑" ns4:ascii="微软雅黑" ns4:hAnsi="微软雅黑"/>
-              </a:rPr>
-              <a:t>● 四层架构：感知 / 认知 / 执行 / 交互</a:t>
-            </a:r>
-          </a:p>
-          <a:p>
-            <a:pPr>
-              <a:lnSpc>
-                <a:spcPct val="120000"/>
-              </a:lnSpc>
-              <a:spcAft>
-                <a:spcPts val="6200"/>
-              </a:spcAft>
-            </a:pPr>
-            <a:r>
-              <a:rPr sz="1300" b="0">
-                <a:solidFill>
-                  <a:srgbClr val="1C202C"/>
-                </a:solidFill>
-                <a:latin typeface="微软雅黑"/>
-                <ns5:rFonts xmlns:ns5="http://schemas.openxmlformats.org/wordprocessingml/2006/main" ns5:eastAsia="微软雅黑" ns5:ascii="微软雅黑" ns5:hAnsi="微软雅黑"/>
-              </a:rPr>
-              <a:t>● 核心：CareOrchestrator + 状态机</a:t>
-            </a:r>
-          </a:p>
-          <a:p>
-            <a:pPr>
-              <a:lnSpc>
-                <a:spcPct val="120000"/>
-              </a:lnSpc>
-              <a:spcAft>
-                <a:spcPts val="6200"/>
-              </a:spcAft>
-            </a:pPr>
-            <a:r>
-              <a:rPr sz="1300" b="0">
-                <a:solidFill>
-                  <a:srgbClr val="1C202C"/>
-                </a:solidFill>
-                <a:latin typeface="微软雅黑"/>
-                <ns6:rFonts xmlns:ns6="http://schemas.openxmlformats.org/wordprocessingml/2006/main" ns6:eastAsia="微软雅黑" ns6:ascii="微软雅黑" ns6:hAnsi="微软雅黑"/>
-              </a:rPr>
-              <a:t>● 模块可替换：仿真、Web、ROS2 共用一套逻辑</a:t>
-            </a:r>
-          </a:p>
-          <a:p>
-            <a:pPr>
-              <a:lnSpc>
-                <a:spcPct val="120000"/>
-              </a:lnSpc>
-              <a:spcAft>
-                <a:spcPts val="6200"/>
-              </a:spcAft>
-            </a:pPr>
-            <a:r>
-              <a:rPr sz="1300" b="0">
-                <a:solidFill>
-                  <a:srgbClr val="1C202C"/>
-                </a:solidFill>
-                <a:latin typeface="微软雅黑"/>
-                <ns7:rFonts xmlns:ns7="http://schemas.openxmlformats.org/wordprocessingml/2006/main" ns7:eastAsia="微软雅黑" ns7:ascii="微软雅黑" ns7:hAnsi="微软雅黑"/>
-              </a:rPr>
-              <a:t>● 配置集中于 config/default.yaml</a:t>
-            </a:r>
-          </a:p>
-        </p:txBody>
-      </p:sp>
-      <p:sp>
-        <p:nvSpPr>
-          <p:cNvPr id="13" name="Rectangle 12"/>
+          <p:cNvPr id="16" name="Rectangle 15"/>
           <p:cNvSpPr/>
           <p:nvPr/>
         </p:nvSpPr>
@@ -21982,7 +22600,7 @@
       </p:sp>
       <p:pic>
         <p:nvPicPr>
-          <p:cNvPr id="14" name="Picture 13" descr="architecture.png"/>
+          <p:cNvPr id="17" name="Picture 16" descr="architecture.png"/>
           <p:cNvPicPr>
             <a:picLocks noChangeAspect="1"/>
           </p:cNvPicPr>
@@ -22006,7 +22624,7 @@
       </p:pic>
       <p:sp>
         <p:nvSpPr>
-          <p:cNvPr id="15" name="TextBox 14"/>
+          <p:cNvPr id="18" name="TextBox 17"/>
           <p:cNvSpPr txBox="1"/>
           <p:nvPr/>
         </p:nvSpPr>

--- a/docs/答辩_CareCompanion.pptx
+++ b/docs/答辩_CareCompanion.pptx
@@ -19982,8 +19982,8 @@
         </p:nvSpPr>
         <p:spPr>
           <a:xfrm>
-            <a:off x="4023359" y="904006"/>
-            <a:ext cx="4892040" cy="4039575"/>
+            <a:off x="3295588" y="1005840"/>
+            <a:ext cx="6347582" cy="3835908"/>
           </a:xfrm>
           <a:prstGeom prst="rect">
             <a:avLst/>
@@ -20035,8 +20035,8 @@
         </p:blipFill>
         <p:spPr>
           <a:xfrm>
-            <a:off x="4069079" y="949726"/>
-            <a:ext cx="4800600" cy="3765255"/>
+            <a:off x="3341308" y="1051560"/>
+            <a:ext cx="6256142" cy="3561588"/>
           </a:xfrm>
           <a:prstGeom prst="rect">
             <a:avLst/>
@@ -20051,7 +20051,7 @@
         </p:nvSpPr>
         <p:spPr>
           <a:xfrm>
-            <a:off x="4069080" y="4769845"/>
+            <a:off x="4069080" y="4668012"/>
             <a:ext cx="4800600" cy="182880"/>
           </a:xfrm>
           <a:prstGeom prst="rect">

--- a/docs/答辩_CareCompanion.pptx
+++ b/docs/答辩_CareCompanion.pptx
@@ -3246,16 +3246,16 @@
         </p:nvSpPr>
         <p:spPr>
           <a:xfrm>
-            <a:off x="830130" y="527745"/>
-            <a:ext cx="2911739" cy="4499488"/>
-          </a:xfrm>
-          <a:prstGeom prst="rect">
-            <a:avLst/>
-          </a:prstGeom>
-          <a:solidFill>
-            <a:srgbClr val="FFFFFF"/>
-          </a:solidFill>
-          <a:ln w="10160">
+            <a:off x="863200" y="536158"/>
+            <a:ext cx="2845599" cy="4226631"/>
+          </a:xfrm>
+          <a:prstGeom prst="rect">
+            <a:avLst/>
+          </a:prstGeom>
+          <a:solidFill>
+            <a:srgbClr val="FCFDFF"/>
+          </a:solidFill>
+          <a:ln w="7620">
             <a:solidFill>
               <a:srgbClr val="BAC8DC"/>
             </a:solidFill>
@@ -3299,8 +3299,8 @@
         </p:blipFill>
         <p:spPr>
           <a:xfrm>
-            <a:off x="875850" y="573465"/>
-            <a:ext cx="2820299" cy="4225168"/>
+            <a:off x="899776" y="572734"/>
+            <a:ext cx="2772447" cy="4153479"/>
           </a:xfrm>
           <a:prstGeom prst="rect">
             <a:avLst/>
@@ -3315,8 +3315,8 @@
         </p:nvSpPr>
         <p:spPr>
           <a:xfrm>
-            <a:off x="137160" y="4853498"/>
-            <a:ext cx="4297680" cy="182880"/>
+            <a:off x="137160" y="4823460"/>
+            <a:ext cx="4297680" cy="201168"/>
           </a:xfrm>
           <a:prstGeom prst="rect">
             <a:avLst/>
@@ -3324,14 +3324,14 @@
           <a:noFill/>
         </p:spPr>
         <p:txBody>
-          <a:bodyPr wrap="none">
+          <a:bodyPr wrap="square" anchor="ctr">
             <a:spAutoFit/>
           </a:bodyPr>
           <a:lstStyle/>
           <a:p>
             <a:pPr algn="ctr"/>
             <a:r>
-              <a:rPr sz="900" b="0">
+              <a:rPr sz="800" b="0">
                 <a:solidFill>
                   <a:srgbClr val="5A6273"/>
                 </a:solidFill>
@@ -4063,8 +4063,8 @@
         </p:nvSpPr>
         <p:spPr>
           <a:xfrm>
-            <a:off x="457200" y="1124712"/>
-            <a:ext cx="3246120" cy="885825"/>
+            <a:off x="438912" y="1106424"/>
+            <a:ext cx="3282696" cy="890397"/>
           </a:xfrm>
           <a:prstGeom prst="rect">
             <a:avLst/>
@@ -4079,10 +4079,10 @@
           <a:p>
             <a:pPr>
               <a:lnSpc>
-                <a:spcPct val="115000"/>
+                <a:spcPct val="112000"/>
               </a:lnSpc>
               <a:spcAft>
-                <a:spcPts val="0"/>
+                <a:spcPts val="200"/>
               </a:spcAft>
             </a:pPr>
             <a:r>
@@ -4106,8 +4106,8 @@
         </p:nvSpPr>
         <p:spPr>
           <a:xfrm>
-            <a:off x="457200" y="2028825"/>
-            <a:ext cx="3246120" cy="885825"/>
+            <a:off x="438912" y="2015109"/>
+            <a:ext cx="3282696" cy="890397"/>
           </a:xfrm>
           <a:prstGeom prst="rect">
             <a:avLst/>
@@ -4122,10 +4122,10 @@
           <a:p>
             <a:pPr>
               <a:lnSpc>
-                <a:spcPct val="115000"/>
+                <a:spcPct val="112000"/>
               </a:lnSpc>
               <a:spcAft>
-                <a:spcPts val="0"/>
+                <a:spcPts val="200"/>
               </a:spcAft>
             </a:pPr>
             <a:r>
@@ -4149,8 +4149,8 @@
         </p:nvSpPr>
         <p:spPr>
           <a:xfrm>
-            <a:off x="457200" y="2932938"/>
-            <a:ext cx="3246120" cy="885825"/>
+            <a:off x="438912" y="2923794"/>
+            <a:ext cx="3282696" cy="890397"/>
           </a:xfrm>
           <a:prstGeom prst="rect">
             <a:avLst/>
@@ -4165,10 +4165,10 @@
           <a:p>
             <a:pPr>
               <a:lnSpc>
-                <a:spcPct val="115000"/>
+                <a:spcPct val="112000"/>
               </a:lnSpc>
               <a:spcAft>
-                <a:spcPts val="0"/>
+                <a:spcPts val="200"/>
               </a:spcAft>
             </a:pPr>
             <a:r>
@@ -4192,8 +4192,8 @@
         </p:nvSpPr>
         <p:spPr>
           <a:xfrm>
-            <a:off x="457200" y="3837051"/>
-            <a:ext cx="3246120" cy="885825"/>
+            <a:off x="438912" y="3832479"/>
+            <a:ext cx="3282696" cy="890397"/>
           </a:xfrm>
           <a:prstGeom prst="rect">
             <a:avLst/>
@@ -4208,10 +4208,10 @@
           <a:p>
             <a:pPr>
               <a:lnSpc>
-                <a:spcPct val="115000"/>
+                <a:spcPct val="112000"/>
               </a:lnSpc>
               <a:spcAft>
-                <a:spcPts val="0"/>
+                <a:spcPts val="200"/>
               </a:spcAft>
             </a:pPr>
             <a:r>
@@ -4235,8 +4235,8 @@
         </p:nvSpPr>
         <p:spPr>
           <a:xfrm>
-            <a:off x="4210985" y="1005840"/>
-            <a:ext cx="4516789" cy="3835908"/>
+            <a:off x="4105656" y="1033272"/>
+            <a:ext cx="4727448" cy="3744468"/>
           </a:xfrm>
           <a:prstGeom prst="rect">
             <a:avLst/>
@@ -4244,7 +4244,7 @@
           <a:solidFill>
             <a:srgbClr val="FFFFFF"/>
           </a:solidFill>
-          <a:ln w="10160">
+          <a:ln w="9525">
             <a:solidFill>
               <a:srgbClr val="BAC8DC"/>
             </a:solidFill>
@@ -4272,9 +4272,97 @@
           </a:p>
         </p:txBody>
       </p:sp>
+      <p:sp>
+        <p:nvSpPr>
+          <p:cNvPr id="15" name="Rectangle 14"/>
+          <p:cNvSpPr/>
+          <p:nvPr/>
+        </p:nvSpPr>
+        <p:spPr>
+          <a:xfrm>
+            <a:off x="3968496" y="996696"/>
+            <a:ext cx="10972" cy="3854196"/>
+          </a:xfrm>
+          <a:prstGeom prst="rect">
+            <a:avLst/>
+          </a:prstGeom>
+          <a:solidFill>
+            <a:srgbClr val="BAC8DC"/>
+          </a:solidFill>
+          <a:ln>
+            <a:noFill/>
+          </a:ln>
+        </p:spPr>
+        <p:style>
+          <a:lnRef idx="1">
+            <a:schemeClr val="accent1"/>
+          </a:lnRef>
+          <a:fillRef idx="3">
+            <a:schemeClr val="accent1"/>
+          </a:fillRef>
+          <a:effectRef idx="2">
+            <a:schemeClr val="accent1"/>
+          </a:effectRef>
+          <a:fontRef idx="minor">
+            <a:schemeClr val="lt1"/>
+          </a:fontRef>
+        </p:style>
+        <p:txBody>
+          <a:bodyPr rtlCol="0" anchor="ctr"/>
+          <a:lstStyle/>
+          <a:p>
+            <a:pPr algn="ctr"/>
+          </a:p>
+        </p:txBody>
+      </p:sp>
+      <p:sp>
+        <p:nvSpPr>
+          <p:cNvPr id="16" name="Rectangle 15"/>
+          <p:cNvSpPr/>
+          <p:nvPr/>
+        </p:nvSpPr>
+        <p:spPr>
+          <a:xfrm>
+            <a:off x="4345600" y="1119637"/>
+            <a:ext cx="4247558" cy="3352281"/>
+          </a:xfrm>
+          <a:prstGeom prst="rect">
+            <a:avLst/>
+          </a:prstGeom>
+          <a:solidFill>
+            <a:srgbClr val="FCFDFF"/>
+          </a:solidFill>
+          <a:ln w="7620">
+            <a:solidFill>
+              <a:srgbClr val="BAC8DC"/>
+            </a:solidFill>
+          </a:ln>
+        </p:spPr>
+        <p:style>
+          <a:lnRef idx="1">
+            <a:schemeClr val="accent1"/>
+          </a:lnRef>
+          <a:fillRef idx="3">
+            <a:schemeClr val="accent1"/>
+          </a:fillRef>
+          <a:effectRef idx="2">
+            <a:schemeClr val="accent1"/>
+          </a:effectRef>
+          <a:fontRef idx="minor">
+            <a:schemeClr val="lt1"/>
+          </a:fontRef>
+        </p:style>
+        <p:txBody>
+          <a:bodyPr rtlCol="0" anchor="ctr"/>
+          <a:lstStyle/>
+          <a:p>
+            <a:pPr algn="ctr"/>
+          </a:p>
+        </p:txBody>
+      </p:sp>
       <p:pic>
         <p:nvPicPr>
-          <p:cNvPr id="15" name="Picture 14" descr="state_machine.png"/>
+          <p:cNvPr id="17" name="Picture 16" descr="state_machine.png"/>
           <p:cNvPicPr>
             <a:picLocks noChangeAspect="1"/>
           </p:cNvPicPr>
@@ -4288,8 +4376,8 @@
         </p:blipFill>
         <p:spPr>
           <a:xfrm>
-            <a:off x="4256705" y="1051560"/>
-            <a:ext cx="4425349" cy="3561588"/>
+            <a:off x="4382176" y="1156213"/>
+            <a:ext cx="4174406" cy="3279129"/>
           </a:xfrm>
           <a:prstGeom prst="rect">
             <a:avLst/>
@@ -4298,14 +4386,14 @@
       </p:pic>
       <p:sp>
         <p:nvSpPr>
-          <p:cNvPr id="16" name="TextBox 15"/>
+          <p:cNvPr id="18" name="TextBox 17"/>
           <p:cNvSpPr txBox="1"/>
           <p:nvPr/>
         </p:nvSpPr>
         <p:spPr>
           <a:xfrm>
-            <a:off x="4069080" y="4668012"/>
-            <a:ext cx="4800600" cy="182880"/>
+            <a:off x="4160520" y="4594860"/>
+            <a:ext cx="4617720" cy="201168"/>
           </a:xfrm>
           <a:prstGeom prst="rect">
             <a:avLst/>
@@ -4313,14 +4401,14 @@
           <a:noFill/>
         </p:spPr>
         <p:txBody>
-          <a:bodyPr wrap="none">
+          <a:bodyPr wrap="square" anchor="ctr">
             <a:spAutoFit/>
           </a:bodyPr>
           <a:lstStyle/>
           <a:p>
             <a:pPr algn="ctr"/>
             <a:r>
-              <a:rPr sz="900" b="0">
+              <a:rPr sz="800" b="0">
                 <a:solidFill>
                   <a:srgbClr val="5A6273"/>
                 </a:solidFill>
@@ -4690,8 +4778,8 @@
         </p:nvSpPr>
         <p:spPr>
           <a:xfrm>
-            <a:off x="457200" y="1124712"/>
-            <a:ext cx="3246120" cy="885825"/>
+            <a:off x="438912" y="1106424"/>
+            <a:ext cx="3282696" cy="890397"/>
           </a:xfrm>
           <a:prstGeom prst="rect">
             <a:avLst/>
@@ -4706,10 +4794,10 @@
           <a:p>
             <a:pPr>
               <a:lnSpc>
-                <a:spcPct val="115000"/>
+                <a:spcPct val="112000"/>
               </a:lnSpc>
               <a:spcAft>
-                <a:spcPts val="0"/>
+                <a:spcPts val="200"/>
               </a:spcAft>
             </a:pPr>
             <a:r>
@@ -4733,8 +4821,8 @@
         </p:nvSpPr>
         <p:spPr>
           <a:xfrm>
-            <a:off x="457200" y="2028825"/>
-            <a:ext cx="3246120" cy="885825"/>
+            <a:off x="438912" y="2015109"/>
+            <a:ext cx="3282696" cy="890397"/>
           </a:xfrm>
           <a:prstGeom prst="rect">
             <a:avLst/>
@@ -4749,10 +4837,10 @@
           <a:p>
             <a:pPr>
               <a:lnSpc>
-                <a:spcPct val="115000"/>
+                <a:spcPct val="112000"/>
               </a:lnSpc>
               <a:spcAft>
-                <a:spcPts val="0"/>
+                <a:spcPts val="200"/>
               </a:spcAft>
             </a:pPr>
             <a:r>
@@ -4776,8 +4864,8 @@
         </p:nvSpPr>
         <p:spPr>
           <a:xfrm>
-            <a:off x="457200" y="2932938"/>
-            <a:ext cx="3246120" cy="885825"/>
+            <a:off x="438912" y="2923794"/>
+            <a:ext cx="3282696" cy="890397"/>
           </a:xfrm>
           <a:prstGeom prst="rect">
             <a:avLst/>
@@ -4792,10 +4880,10 @@
           <a:p>
             <a:pPr>
               <a:lnSpc>
-                <a:spcPct val="115000"/>
+                <a:spcPct val="112000"/>
               </a:lnSpc>
               <a:spcAft>
-                <a:spcPts val="0"/>
+                <a:spcPts val="200"/>
               </a:spcAft>
             </a:pPr>
             <a:r>
@@ -4819,8 +4907,8 @@
         </p:nvSpPr>
         <p:spPr>
           <a:xfrm>
-            <a:off x="457200" y="3837051"/>
-            <a:ext cx="3246120" cy="885825"/>
+            <a:off x="438912" y="3832479"/>
+            <a:ext cx="3282696" cy="890397"/>
           </a:xfrm>
           <a:prstGeom prst="rect">
             <a:avLst/>
@@ -4835,10 +4923,10 @@
           <a:p>
             <a:pPr>
               <a:lnSpc>
-                <a:spcPct val="115000"/>
+                <a:spcPct val="112000"/>
               </a:lnSpc>
               <a:spcAft>
-                <a:spcPts val="0"/>
+                <a:spcPts val="200"/>
               </a:spcAft>
             </a:pPr>
             <a:r>
@@ -4862,8 +4950,8 @@
         </p:nvSpPr>
         <p:spPr>
           <a:xfrm>
-            <a:off x="4023360" y="963849"/>
-            <a:ext cx="4892040" cy="3919888"/>
+            <a:off x="4105656" y="1033272"/>
+            <a:ext cx="4727448" cy="3744468"/>
           </a:xfrm>
           <a:prstGeom prst="rect">
             <a:avLst/>
@@ -4871,7 +4959,7 @@
           <a:solidFill>
             <a:srgbClr val="FFFFFF"/>
           </a:solidFill>
-          <a:ln w="10160">
+          <a:ln w="9525">
             <a:solidFill>
               <a:srgbClr val="BAC8DC"/>
             </a:solidFill>
@@ -4899,9 +4987,97 @@
           </a:p>
         </p:txBody>
       </p:sp>
+      <p:sp>
+        <p:nvSpPr>
+          <p:cNvPr id="15" name="Rectangle 14"/>
+          <p:cNvSpPr/>
+          <p:nvPr/>
+        </p:nvSpPr>
+        <p:spPr>
+          <a:xfrm>
+            <a:off x="3968496" y="996696"/>
+            <a:ext cx="10972" cy="3854196"/>
+          </a:xfrm>
+          <a:prstGeom prst="rect">
+            <a:avLst/>
+          </a:prstGeom>
+          <a:solidFill>
+            <a:srgbClr val="BAC8DC"/>
+          </a:solidFill>
+          <a:ln>
+            <a:noFill/>
+          </a:ln>
+        </p:spPr>
+        <p:style>
+          <a:lnRef idx="1">
+            <a:schemeClr val="accent1"/>
+          </a:lnRef>
+          <a:fillRef idx="3">
+            <a:schemeClr val="accent1"/>
+          </a:fillRef>
+          <a:effectRef idx="2">
+            <a:schemeClr val="accent1"/>
+          </a:effectRef>
+          <a:fontRef idx="minor">
+            <a:schemeClr val="lt1"/>
+          </a:fontRef>
+        </p:style>
+        <p:txBody>
+          <a:bodyPr rtlCol="0" anchor="ctr"/>
+          <a:lstStyle/>
+          <a:p>
+            <a:pPr algn="ctr"/>
+          </a:p>
+        </p:txBody>
+      </p:sp>
+      <p:sp>
+        <p:nvSpPr>
+          <p:cNvPr id="16" name="Rectangle 15"/>
+          <p:cNvSpPr/>
+          <p:nvPr/>
+        </p:nvSpPr>
+        <p:spPr>
+          <a:xfrm>
+            <a:off x="4262475" y="1148632"/>
+            <a:ext cx="4413808" cy="3294291"/>
+          </a:xfrm>
+          <a:prstGeom prst="rect">
+            <a:avLst/>
+          </a:prstGeom>
+          <a:solidFill>
+            <a:srgbClr val="FCFDFF"/>
+          </a:solidFill>
+          <a:ln w="7620">
+            <a:solidFill>
+              <a:srgbClr val="BAC8DC"/>
+            </a:solidFill>
+          </a:ln>
+        </p:spPr>
+        <p:style>
+          <a:lnRef idx="1">
+            <a:schemeClr val="accent1"/>
+          </a:lnRef>
+          <a:fillRef idx="3">
+            <a:schemeClr val="accent1"/>
+          </a:fillRef>
+          <a:effectRef idx="2">
+            <a:schemeClr val="accent1"/>
+          </a:effectRef>
+          <a:fontRef idx="minor">
+            <a:schemeClr val="lt1"/>
+          </a:fontRef>
+        </p:style>
+        <p:txBody>
+          <a:bodyPr rtlCol="0" anchor="ctr"/>
+          <a:lstStyle/>
+          <a:p>
+            <a:pPr algn="ctr"/>
+          </a:p>
+        </p:txBody>
+      </p:sp>
       <p:pic>
         <p:nvPicPr>
-          <p:cNvPr id="15" name="Picture 14" descr="risk_fusion.png"/>
+          <p:cNvPr id="17" name="Picture 16" descr="risk_fusion.png"/>
           <p:cNvPicPr>
             <a:picLocks noChangeAspect="1"/>
           </p:cNvPicPr>
@@ -4915,8 +5091,8 @@
         </p:blipFill>
         <p:spPr>
           <a:xfrm>
-            <a:off x="4069080" y="1009569"/>
-            <a:ext cx="4800600" cy="3645568"/>
+            <a:off x="4299051" y="1185208"/>
+            <a:ext cx="4340656" cy="3221139"/>
           </a:xfrm>
           <a:prstGeom prst="rect">
             <a:avLst/>
@@ -4925,14 +5101,14 @@
       </p:pic>
       <p:sp>
         <p:nvSpPr>
-          <p:cNvPr id="16" name="TextBox 15"/>
+          <p:cNvPr id="18" name="TextBox 17"/>
           <p:cNvSpPr txBox="1"/>
           <p:nvPr/>
         </p:nvSpPr>
         <p:spPr>
           <a:xfrm>
-            <a:off x="4069080" y="4710002"/>
-            <a:ext cx="4800600" cy="182880"/>
+            <a:off x="4160520" y="4594860"/>
+            <a:ext cx="4617720" cy="201168"/>
           </a:xfrm>
           <a:prstGeom prst="rect">
             <a:avLst/>
@@ -4940,14 +5116,14 @@
           <a:noFill/>
         </p:spPr>
         <p:txBody>
-          <a:bodyPr wrap="none">
+          <a:bodyPr wrap="square" anchor="ctr">
             <a:spAutoFit/>
           </a:bodyPr>
           <a:lstStyle/>
           <a:p>
             <a:pPr algn="ctr"/>
             <a:r>
-              <a:rPr sz="900" b="0">
+              <a:rPr sz="800" b="0">
                 <a:solidFill>
                   <a:srgbClr val="5A6273"/>
                 </a:solidFill>
@@ -5317,8 +5493,8 @@
         </p:nvSpPr>
         <p:spPr>
           <a:xfrm>
-            <a:off x="457200" y="1124712"/>
-            <a:ext cx="3246120" cy="885825"/>
+            <a:off x="438912" y="1106424"/>
+            <a:ext cx="3282696" cy="890397"/>
           </a:xfrm>
           <a:prstGeom prst="rect">
             <a:avLst/>
@@ -5333,10 +5509,10 @@
           <a:p>
             <a:pPr>
               <a:lnSpc>
-                <a:spcPct val="115000"/>
+                <a:spcPct val="112000"/>
               </a:lnSpc>
               <a:spcAft>
-                <a:spcPts val="0"/>
+                <a:spcPts val="200"/>
               </a:spcAft>
             </a:pPr>
             <a:r>
@@ -5360,8 +5536,8 @@
         </p:nvSpPr>
         <p:spPr>
           <a:xfrm>
-            <a:off x="457200" y="2028825"/>
-            <a:ext cx="3246120" cy="885825"/>
+            <a:off x="438912" y="2015109"/>
+            <a:ext cx="3282696" cy="890397"/>
           </a:xfrm>
           <a:prstGeom prst="rect">
             <a:avLst/>
@@ -5376,10 +5552,10 @@
           <a:p>
             <a:pPr>
               <a:lnSpc>
-                <a:spcPct val="115000"/>
+                <a:spcPct val="112000"/>
               </a:lnSpc>
               <a:spcAft>
-                <a:spcPts val="0"/>
+                <a:spcPts val="200"/>
               </a:spcAft>
             </a:pPr>
             <a:r>
@@ -5403,8 +5579,8 @@
         </p:nvSpPr>
         <p:spPr>
           <a:xfrm>
-            <a:off x="457200" y="2932938"/>
-            <a:ext cx="3246120" cy="885825"/>
+            <a:off x="438912" y="2923794"/>
+            <a:ext cx="3282696" cy="890397"/>
           </a:xfrm>
           <a:prstGeom prst="rect">
             <a:avLst/>
@@ -5419,10 +5595,10 @@
           <a:p>
             <a:pPr>
               <a:lnSpc>
-                <a:spcPct val="115000"/>
+                <a:spcPct val="112000"/>
               </a:lnSpc>
               <a:spcAft>
-                <a:spcPts val="0"/>
+                <a:spcPts val="200"/>
               </a:spcAft>
             </a:pPr>
             <a:r>
@@ -5446,8 +5622,8 @@
         </p:nvSpPr>
         <p:spPr>
           <a:xfrm>
-            <a:off x="457200" y="3837051"/>
-            <a:ext cx="3246120" cy="885825"/>
+            <a:off x="438912" y="3832479"/>
+            <a:ext cx="3282696" cy="890397"/>
           </a:xfrm>
           <a:prstGeom prst="rect">
             <a:avLst/>
@@ -5462,10 +5638,10 @@
           <a:p>
             <a:pPr>
               <a:lnSpc>
-                <a:spcPct val="115000"/>
+                <a:spcPct val="112000"/>
               </a:lnSpc>
               <a:spcAft>
-                <a:spcPts val="0"/>
+                <a:spcPts val="200"/>
               </a:spcAft>
             </a:pPr>
             <a:r>
@@ -5489,8 +5665,8 @@
         </p:nvSpPr>
         <p:spPr>
           <a:xfrm>
-            <a:off x="5425560" y="1005840"/>
-            <a:ext cx="2087639" cy="3835908"/>
+            <a:off x="4105656" y="1033272"/>
+            <a:ext cx="4727448" cy="3744468"/>
           </a:xfrm>
           <a:prstGeom prst="rect">
             <a:avLst/>
@@ -5498,7 +5674,7 @@
           <a:solidFill>
             <a:srgbClr val="FFFFFF"/>
           </a:solidFill>
-          <a:ln w="10160">
+          <a:ln w="9525">
             <a:solidFill>
               <a:srgbClr val="BAC8DC"/>
             </a:solidFill>
@@ -5526,9 +5702,97 @@
           </a:p>
         </p:txBody>
       </p:sp>
+      <p:sp>
+        <p:nvSpPr>
+          <p:cNvPr id="15" name="Rectangle 14"/>
+          <p:cNvSpPr/>
+          <p:nvPr/>
+        </p:nvSpPr>
+        <p:spPr>
+          <a:xfrm>
+            <a:off x="3968496" y="996696"/>
+            <a:ext cx="10972" cy="3854196"/>
+          </a:xfrm>
+          <a:prstGeom prst="rect">
+            <a:avLst/>
+          </a:prstGeom>
+          <a:solidFill>
+            <a:srgbClr val="BAC8DC"/>
+          </a:solidFill>
+          <a:ln>
+            <a:noFill/>
+          </a:ln>
+        </p:spPr>
+        <p:style>
+          <a:lnRef idx="1">
+            <a:schemeClr val="accent1"/>
+          </a:lnRef>
+          <a:fillRef idx="3">
+            <a:schemeClr val="accent1"/>
+          </a:fillRef>
+          <a:effectRef idx="2">
+            <a:schemeClr val="accent1"/>
+          </a:effectRef>
+          <a:fontRef idx="minor">
+            <a:schemeClr val="lt1"/>
+          </a:fontRef>
+        </p:style>
+        <p:txBody>
+          <a:bodyPr rtlCol="0" anchor="ctr"/>
+          <a:lstStyle/>
+          <a:p>
+            <a:pPr algn="ctr"/>
+          </a:p>
+        </p:txBody>
+      </p:sp>
+      <p:sp>
+        <p:nvSpPr>
+          <p:cNvPr id="16" name="Rectangle 15"/>
+          <p:cNvSpPr/>
+          <p:nvPr/>
+        </p:nvSpPr>
+        <p:spPr>
+          <a:xfrm>
+            <a:off x="5491515" y="1119637"/>
+            <a:ext cx="1955729" cy="3352281"/>
+          </a:xfrm>
+          <a:prstGeom prst="rect">
+            <a:avLst/>
+          </a:prstGeom>
+          <a:solidFill>
+            <a:srgbClr val="FCFDFF"/>
+          </a:solidFill>
+          <a:ln w="7620">
+            <a:solidFill>
+              <a:srgbClr val="BAC8DC"/>
+            </a:solidFill>
+          </a:ln>
+        </p:spPr>
+        <p:style>
+          <a:lnRef idx="1">
+            <a:schemeClr val="accent1"/>
+          </a:lnRef>
+          <a:fillRef idx="3">
+            <a:schemeClr val="accent1"/>
+          </a:fillRef>
+          <a:effectRef idx="2">
+            <a:schemeClr val="accent1"/>
+          </a:effectRef>
+          <a:fontRef idx="minor">
+            <a:schemeClr val="lt1"/>
+          </a:fontRef>
+        </p:style>
+        <p:txBody>
+          <a:bodyPr rtlCol="0" anchor="ctr"/>
+          <a:lstStyle/>
+          <a:p>
+            <a:pPr algn="ctr"/>
+          </a:p>
+        </p:txBody>
+      </p:sp>
       <p:pic>
         <p:nvPicPr>
-          <p:cNvPr id="15" name="Picture 14" descr="fall_decision_tree.png"/>
+          <p:cNvPr id="17" name="Picture 16" descr="fall_decision_tree.png"/>
           <p:cNvPicPr>
             <a:picLocks noChangeAspect="1"/>
           </p:cNvPicPr>
@@ -5542,8 +5806,8 @@
         </p:blipFill>
         <p:spPr>
           <a:xfrm>
-            <a:off x="5471280" y="1051560"/>
-            <a:ext cx="1996199" cy="3561588"/>
+            <a:off x="5528091" y="1156213"/>
+            <a:ext cx="1882577" cy="3279129"/>
           </a:xfrm>
           <a:prstGeom prst="rect">
             <a:avLst/>
@@ -5552,14 +5816,14 @@
       </p:pic>
       <p:sp>
         <p:nvSpPr>
-          <p:cNvPr id="16" name="TextBox 15"/>
+          <p:cNvPr id="18" name="TextBox 17"/>
           <p:cNvSpPr txBox="1"/>
           <p:nvPr/>
         </p:nvSpPr>
         <p:spPr>
           <a:xfrm>
-            <a:off x="4069080" y="4668012"/>
-            <a:ext cx="4800600" cy="182880"/>
+            <a:off x="4160520" y="4594860"/>
+            <a:ext cx="4617720" cy="201168"/>
           </a:xfrm>
           <a:prstGeom prst="rect">
             <a:avLst/>
@@ -5567,14 +5831,14 @@
           <a:noFill/>
         </p:spPr>
         <p:txBody>
-          <a:bodyPr wrap="none">
+          <a:bodyPr wrap="square" anchor="ctr">
             <a:spAutoFit/>
           </a:bodyPr>
           <a:lstStyle/>
           <a:p>
             <a:pPr algn="ctr"/>
             <a:r>
-              <a:rPr sz="900" b="0">
+              <a:rPr sz="800" b="0">
                 <a:solidFill>
                   <a:srgbClr val="5A6273"/>
                 </a:solidFill>
@@ -5944,8 +6208,8 @@
         </p:nvSpPr>
         <p:spPr>
           <a:xfrm>
-            <a:off x="457200" y="1124712"/>
-            <a:ext cx="3246120" cy="885825"/>
+            <a:off x="438912" y="1106424"/>
+            <a:ext cx="3282696" cy="890397"/>
           </a:xfrm>
           <a:prstGeom prst="rect">
             <a:avLst/>
@@ -5960,10 +6224,10 @@
           <a:p>
             <a:pPr>
               <a:lnSpc>
-                <a:spcPct val="115000"/>
+                <a:spcPct val="112000"/>
               </a:lnSpc>
               <a:spcAft>
-                <a:spcPts val="0"/>
+                <a:spcPts val="200"/>
               </a:spcAft>
             </a:pPr>
             <a:r>
@@ -5987,8 +6251,8 @@
         </p:nvSpPr>
         <p:spPr>
           <a:xfrm>
-            <a:off x="457200" y="2028825"/>
-            <a:ext cx="3246120" cy="885825"/>
+            <a:off x="438912" y="2015109"/>
+            <a:ext cx="3282696" cy="890397"/>
           </a:xfrm>
           <a:prstGeom prst="rect">
             <a:avLst/>
@@ -6003,10 +6267,10 @@
           <a:p>
             <a:pPr>
               <a:lnSpc>
-                <a:spcPct val="115000"/>
+                <a:spcPct val="112000"/>
               </a:lnSpc>
               <a:spcAft>
-                <a:spcPts val="0"/>
+                <a:spcPts val="200"/>
               </a:spcAft>
             </a:pPr>
             <a:r>
@@ -6030,8 +6294,8 @@
         </p:nvSpPr>
         <p:spPr>
           <a:xfrm>
-            <a:off x="457200" y="2932938"/>
-            <a:ext cx="3246120" cy="885825"/>
+            <a:off x="438912" y="2923794"/>
+            <a:ext cx="3282696" cy="890397"/>
           </a:xfrm>
           <a:prstGeom prst="rect">
             <a:avLst/>
@@ -6046,10 +6310,10 @@
           <a:p>
             <a:pPr>
               <a:lnSpc>
-                <a:spcPct val="115000"/>
+                <a:spcPct val="112000"/>
               </a:lnSpc>
               <a:spcAft>
-                <a:spcPts val="0"/>
+                <a:spcPts val="200"/>
               </a:spcAft>
             </a:pPr>
             <a:r>
@@ -6073,8 +6337,8 @@
         </p:nvSpPr>
         <p:spPr>
           <a:xfrm>
-            <a:off x="457200" y="3837051"/>
-            <a:ext cx="3246120" cy="885825"/>
+            <a:off x="438912" y="3832479"/>
+            <a:ext cx="3282696" cy="890397"/>
           </a:xfrm>
           <a:prstGeom prst="rect">
             <a:avLst/>
@@ -6089,10 +6353,10 @@
           <a:p>
             <a:pPr>
               <a:lnSpc>
-                <a:spcPct val="115000"/>
+                <a:spcPct val="112000"/>
               </a:lnSpc>
               <a:spcAft>
-                <a:spcPts val="0"/>
+                <a:spcPts val="200"/>
               </a:spcAft>
             </a:pPr>
             <a:r>
@@ -6116,8 +6380,8 @@
         </p:nvSpPr>
         <p:spPr>
           <a:xfrm>
-            <a:off x="4563244" y="1005840"/>
-            <a:ext cx="3812270" cy="3835908"/>
+            <a:off x="4105656" y="1033272"/>
+            <a:ext cx="4727448" cy="3744468"/>
           </a:xfrm>
           <a:prstGeom prst="rect">
             <a:avLst/>
@@ -6125,7 +6389,7 @@
           <a:solidFill>
             <a:srgbClr val="FFFFFF"/>
           </a:solidFill>
-          <a:ln w="10160">
+          <a:ln w="9525">
             <a:solidFill>
               <a:srgbClr val="BAC8DC"/>
             </a:solidFill>
@@ -6153,9 +6417,97 @@
           </a:p>
         </p:txBody>
       </p:sp>
+      <p:sp>
+        <p:nvSpPr>
+          <p:cNvPr id="15" name="Rectangle 14"/>
+          <p:cNvSpPr/>
+          <p:nvPr/>
+        </p:nvSpPr>
+        <p:spPr>
+          <a:xfrm>
+            <a:off x="3968496" y="996696"/>
+            <a:ext cx="10972" cy="3854196"/>
+          </a:xfrm>
+          <a:prstGeom prst="rect">
+            <a:avLst/>
+          </a:prstGeom>
+          <a:solidFill>
+            <a:srgbClr val="BAC8DC"/>
+          </a:solidFill>
+          <a:ln>
+            <a:noFill/>
+          </a:ln>
+        </p:spPr>
+        <p:style>
+          <a:lnRef idx="1">
+            <a:schemeClr val="accent1"/>
+          </a:lnRef>
+          <a:fillRef idx="3">
+            <a:schemeClr val="accent1"/>
+          </a:fillRef>
+          <a:effectRef idx="2">
+            <a:schemeClr val="accent1"/>
+          </a:effectRef>
+          <a:fontRef idx="minor">
+            <a:schemeClr val="lt1"/>
+          </a:fontRef>
+        </p:style>
+        <p:txBody>
+          <a:bodyPr rtlCol="0" anchor="ctr"/>
+          <a:lstStyle/>
+          <a:p>
+            <a:pPr algn="ctr"/>
+          </a:p>
+        </p:txBody>
+      </p:sp>
+      <p:sp>
+        <p:nvSpPr>
+          <p:cNvPr id="16" name="Rectangle 15"/>
+          <p:cNvSpPr/>
+          <p:nvPr/>
+        </p:nvSpPr>
+        <p:spPr>
+          <a:xfrm>
+            <a:off x="4678977" y="1119637"/>
+            <a:ext cx="3580805" cy="3352281"/>
+          </a:xfrm>
+          <a:prstGeom prst="rect">
+            <a:avLst/>
+          </a:prstGeom>
+          <a:solidFill>
+            <a:srgbClr val="FCFDFF"/>
+          </a:solidFill>
+          <a:ln w="7620">
+            <a:solidFill>
+              <a:srgbClr val="BAC8DC"/>
+            </a:solidFill>
+          </a:ln>
+        </p:spPr>
+        <p:style>
+          <a:lnRef idx="1">
+            <a:schemeClr val="accent1"/>
+          </a:lnRef>
+          <a:fillRef idx="3">
+            <a:schemeClr val="accent1"/>
+          </a:fillRef>
+          <a:effectRef idx="2">
+            <a:schemeClr val="accent1"/>
+          </a:effectRef>
+          <a:fontRef idx="minor">
+            <a:schemeClr val="lt1"/>
+          </a:fontRef>
+        </p:style>
+        <p:txBody>
+          <a:bodyPr rtlCol="0" anchor="ctr"/>
+          <a:lstStyle/>
+          <a:p>
+            <a:pPr algn="ctr"/>
+          </a:p>
+        </p:txBody>
+      </p:sp>
       <p:pic>
         <p:nvPicPr>
-          <p:cNvPr id="15" name="Picture 14" descr="dialogue_sequence.png"/>
+          <p:cNvPr id="17" name="Picture 16" descr="dialogue_sequence.png"/>
           <p:cNvPicPr>
             <a:picLocks noChangeAspect="1"/>
           </p:cNvPicPr>
@@ -6169,8 +6521,8 @@
         </p:blipFill>
         <p:spPr>
           <a:xfrm>
-            <a:off x="4608964" y="1051560"/>
-            <a:ext cx="3720830" cy="3561588"/>
+            <a:off x="4715553" y="1156213"/>
+            <a:ext cx="3507653" cy="3279129"/>
           </a:xfrm>
           <a:prstGeom prst="rect">
             <a:avLst/>
@@ -6179,14 +6531,14 @@
       </p:pic>
       <p:sp>
         <p:nvSpPr>
-          <p:cNvPr id="16" name="TextBox 15"/>
+          <p:cNvPr id="18" name="TextBox 17"/>
           <p:cNvSpPr txBox="1"/>
           <p:nvPr/>
         </p:nvSpPr>
         <p:spPr>
           <a:xfrm>
-            <a:off x="4069080" y="4668012"/>
-            <a:ext cx="4800600" cy="182880"/>
+            <a:off x="4160520" y="4594860"/>
+            <a:ext cx="4617720" cy="201168"/>
           </a:xfrm>
           <a:prstGeom prst="rect">
             <a:avLst/>
@@ -6194,14 +6546,14 @@
           <a:noFill/>
         </p:spPr>
         <p:txBody>
-          <a:bodyPr wrap="none">
+          <a:bodyPr wrap="square" anchor="ctr">
             <a:spAutoFit/>
           </a:bodyPr>
           <a:lstStyle/>
           <a:p>
             <a:pPr algn="ctr"/>
             <a:r>
-              <a:rPr sz="900" b="0">
+              <a:rPr sz="800" b="0">
                 <a:solidFill>
                   <a:srgbClr val="5A6273"/>
                 </a:solidFill>
@@ -6571,8 +6923,8 @@
         </p:nvSpPr>
         <p:spPr>
           <a:xfrm>
-            <a:off x="457200" y="1124712"/>
-            <a:ext cx="3246120" cy="885825"/>
+            <a:off x="438912" y="1106424"/>
+            <a:ext cx="3282696" cy="890397"/>
           </a:xfrm>
           <a:prstGeom prst="rect">
             <a:avLst/>
@@ -6587,10 +6939,10 @@
           <a:p>
             <a:pPr>
               <a:lnSpc>
-                <a:spcPct val="115000"/>
+                <a:spcPct val="112000"/>
               </a:lnSpc>
               <a:spcAft>
-                <a:spcPts val="0"/>
+                <a:spcPts val="200"/>
               </a:spcAft>
             </a:pPr>
             <a:r>
@@ -6614,8 +6966,8 @@
         </p:nvSpPr>
         <p:spPr>
           <a:xfrm>
-            <a:off x="457200" y="2028825"/>
-            <a:ext cx="3246120" cy="885825"/>
+            <a:off x="438912" y="2015109"/>
+            <a:ext cx="3282696" cy="890397"/>
           </a:xfrm>
           <a:prstGeom prst="rect">
             <a:avLst/>
@@ -6630,10 +6982,10 @@
           <a:p>
             <a:pPr>
               <a:lnSpc>
-                <a:spcPct val="115000"/>
+                <a:spcPct val="112000"/>
               </a:lnSpc>
               <a:spcAft>
-                <a:spcPts val="0"/>
+                <a:spcPts val="200"/>
               </a:spcAft>
             </a:pPr>
             <a:r>
@@ -6657,8 +7009,8 @@
         </p:nvSpPr>
         <p:spPr>
           <a:xfrm>
-            <a:off x="457200" y="2932938"/>
-            <a:ext cx="3246120" cy="885825"/>
+            <a:off x="438912" y="2923794"/>
+            <a:ext cx="3282696" cy="890397"/>
           </a:xfrm>
           <a:prstGeom prst="rect">
             <a:avLst/>
@@ -6673,10 +7025,10 @@
           <a:p>
             <a:pPr>
               <a:lnSpc>
-                <a:spcPct val="115000"/>
+                <a:spcPct val="112000"/>
               </a:lnSpc>
               <a:spcAft>
-                <a:spcPts val="0"/>
+                <a:spcPts val="200"/>
               </a:spcAft>
             </a:pPr>
             <a:r>
@@ -6700,8 +7052,8 @@
         </p:nvSpPr>
         <p:spPr>
           <a:xfrm>
-            <a:off x="457200" y="3837051"/>
-            <a:ext cx="3246120" cy="885825"/>
+            <a:off x="438912" y="3832479"/>
+            <a:ext cx="3282696" cy="890397"/>
           </a:xfrm>
           <a:prstGeom prst="rect">
             <a:avLst/>
@@ -6716,10 +7068,10 @@
           <a:p>
             <a:pPr>
               <a:lnSpc>
-                <a:spcPct val="115000"/>
+                <a:spcPct val="112000"/>
               </a:lnSpc>
               <a:spcAft>
-                <a:spcPts val="0"/>
+                <a:spcPts val="200"/>
               </a:spcAft>
             </a:pPr>
             <a:r>
@@ -6743,8 +7095,8 @@
         </p:nvSpPr>
         <p:spPr>
           <a:xfrm>
-            <a:off x="4023360" y="1218797"/>
-            <a:ext cx="4892040" cy="3409992"/>
+            <a:off x="4105656" y="1033272"/>
+            <a:ext cx="4727448" cy="3744468"/>
           </a:xfrm>
           <a:prstGeom prst="rect">
             <a:avLst/>
@@ -6752,7 +7104,7 @@
           <a:solidFill>
             <a:srgbClr val="FFFFFF"/>
           </a:solidFill>
-          <a:ln w="10160">
+          <a:ln w="9525">
             <a:solidFill>
               <a:srgbClr val="BAC8DC"/>
             </a:solidFill>
@@ -6780,9 +7132,97 @@
           </a:p>
         </p:txBody>
       </p:sp>
+      <p:sp>
+        <p:nvSpPr>
+          <p:cNvPr id="15" name="Rectangle 14"/>
+          <p:cNvSpPr/>
+          <p:nvPr/>
+        </p:nvSpPr>
+        <p:spPr>
+          <a:xfrm>
+            <a:off x="3968496" y="996696"/>
+            <a:ext cx="10972" cy="3854196"/>
+          </a:xfrm>
+          <a:prstGeom prst="rect">
+            <a:avLst/>
+          </a:prstGeom>
+          <a:solidFill>
+            <a:srgbClr val="BAC8DC"/>
+          </a:solidFill>
+          <a:ln>
+            <a:noFill/>
+          </a:ln>
+        </p:spPr>
+        <p:style>
+          <a:lnRef idx="1">
+            <a:schemeClr val="accent1"/>
+          </a:lnRef>
+          <a:fillRef idx="3">
+            <a:schemeClr val="accent1"/>
+          </a:fillRef>
+          <a:effectRef idx="2">
+            <a:schemeClr val="accent1"/>
+          </a:effectRef>
+          <a:fontRef idx="minor">
+            <a:schemeClr val="lt1"/>
+          </a:fontRef>
+        </p:style>
+        <p:txBody>
+          <a:bodyPr rtlCol="0" anchor="ctr"/>
+          <a:lstStyle/>
+          <a:p>
+            <a:pPr algn="ctr"/>
+          </a:p>
+        </p:txBody>
+      </p:sp>
+      <p:sp>
+        <p:nvSpPr>
+          <p:cNvPr id="16" name="Rectangle 15"/>
+          <p:cNvSpPr/>
+          <p:nvPr/>
+        </p:nvSpPr>
+        <p:spPr>
+          <a:xfrm>
+            <a:off x="4262475" y="1373543"/>
+            <a:ext cx="4413808" cy="2844469"/>
+          </a:xfrm>
+          <a:prstGeom prst="rect">
+            <a:avLst/>
+          </a:prstGeom>
+          <a:solidFill>
+            <a:srgbClr val="FCFDFF"/>
+          </a:solidFill>
+          <a:ln w="7620">
+            <a:solidFill>
+              <a:srgbClr val="BAC8DC"/>
+            </a:solidFill>
+          </a:ln>
+        </p:spPr>
+        <p:style>
+          <a:lnRef idx="1">
+            <a:schemeClr val="accent1"/>
+          </a:lnRef>
+          <a:fillRef idx="3">
+            <a:schemeClr val="accent1"/>
+          </a:fillRef>
+          <a:effectRef idx="2">
+            <a:schemeClr val="accent1"/>
+          </a:effectRef>
+          <a:fontRef idx="minor">
+            <a:schemeClr val="lt1"/>
+          </a:fontRef>
+        </p:style>
+        <p:txBody>
+          <a:bodyPr rtlCol="0" anchor="ctr"/>
+          <a:lstStyle/>
+          <a:p>
+            <a:pPr algn="ctr"/>
+          </a:p>
+        </p:txBody>
+      </p:sp>
       <p:pic>
         <p:nvPicPr>
-          <p:cNvPr id="15" name="Picture 14" descr="pipeline_swimlane.png"/>
+          <p:cNvPr id="17" name="Picture 16" descr="pipeline_swimlane.png"/>
           <p:cNvPicPr>
             <a:picLocks noChangeAspect="1"/>
           </p:cNvPicPr>
@@ -6796,8 +7236,8 @@
         </p:blipFill>
         <p:spPr>
           <a:xfrm>
-            <a:off x="4069080" y="1264517"/>
-            <a:ext cx="4800600" cy="3135672"/>
+            <a:off x="4299051" y="1410119"/>
+            <a:ext cx="4340656" cy="2771317"/>
           </a:xfrm>
           <a:prstGeom prst="rect">
             <a:avLst/>
@@ -6806,14 +7246,14 @@
       </p:pic>
       <p:sp>
         <p:nvSpPr>
-          <p:cNvPr id="16" name="TextBox 15"/>
+          <p:cNvPr id="18" name="TextBox 17"/>
           <p:cNvSpPr txBox="1"/>
           <p:nvPr/>
         </p:nvSpPr>
         <p:spPr>
           <a:xfrm>
-            <a:off x="4069080" y="4455054"/>
-            <a:ext cx="4800600" cy="182880"/>
+            <a:off x="4160520" y="4594860"/>
+            <a:ext cx="4617720" cy="201168"/>
           </a:xfrm>
           <a:prstGeom prst="rect">
             <a:avLst/>
@@ -6821,14 +7261,14 @@
           <a:noFill/>
         </p:spPr>
         <p:txBody>
-          <a:bodyPr wrap="none">
+          <a:bodyPr wrap="square" anchor="ctr">
             <a:spAutoFit/>
           </a:bodyPr>
           <a:lstStyle/>
           <a:p>
             <a:pPr algn="ctr"/>
             <a:r>
-              <a:rPr sz="900" b="0">
+              <a:rPr sz="800" b="0">
                 <a:solidFill>
                   <a:srgbClr val="5A6273"/>
                 </a:solidFill>
@@ -7198,8 +7638,8 @@
         </p:nvSpPr>
         <p:spPr>
           <a:xfrm>
-            <a:off x="457200" y="1124712"/>
-            <a:ext cx="3246120" cy="803529"/>
+            <a:off x="438912" y="1106424"/>
+            <a:ext cx="3282696" cy="812673"/>
           </a:xfrm>
           <a:prstGeom prst="rect">
             <a:avLst/>
@@ -7214,10 +7654,10 @@
           <a:p>
             <a:pPr>
               <a:lnSpc>
-                <a:spcPct val="115000"/>
+                <a:spcPct val="112000"/>
               </a:lnSpc>
               <a:spcAft>
-                <a:spcPts val="0"/>
+                <a:spcPts val="200"/>
               </a:spcAft>
             </a:pPr>
             <a:r>
@@ -7241,8 +7681,8 @@
         </p:nvSpPr>
         <p:spPr>
           <a:xfrm>
-            <a:off x="457200" y="1946529"/>
-            <a:ext cx="3246120" cy="803529"/>
+            <a:off x="438912" y="1937385"/>
+            <a:ext cx="3282696" cy="812673"/>
           </a:xfrm>
           <a:prstGeom prst="rect">
             <a:avLst/>
@@ -7257,10 +7697,10 @@
           <a:p>
             <a:pPr>
               <a:lnSpc>
-                <a:spcPct val="115000"/>
+                <a:spcPct val="112000"/>
               </a:lnSpc>
               <a:spcAft>
-                <a:spcPts val="0"/>
+                <a:spcPts val="200"/>
               </a:spcAft>
             </a:pPr>
             <a:r>
@@ -7284,8 +7724,8 @@
         </p:nvSpPr>
         <p:spPr>
           <a:xfrm>
-            <a:off x="457200" y="2768346"/>
-            <a:ext cx="3246120" cy="803529"/>
+            <a:off x="438912" y="2768346"/>
+            <a:ext cx="3282696" cy="812673"/>
           </a:xfrm>
           <a:prstGeom prst="rect">
             <a:avLst/>
@@ -7300,10 +7740,10 @@
           <a:p>
             <a:pPr>
               <a:lnSpc>
-                <a:spcPct val="115000"/>
+                <a:spcPct val="112000"/>
               </a:lnSpc>
               <a:spcAft>
-                <a:spcPts val="0"/>
+                <a:spcPts val="200"/>
               </a:spcAft>
             </a:pPr>
             <a:r>
@@ -7327,8 +7767,8 @@
         </p:nvSpPr>
         <p:spPr>
           <a:xfrm>
-            <a:off x="457200" y="3590163"/>
-            <a:ext cx="3246120" cy="803529"/>
+            <a:off x="438912" y="3599307"/>
+            <a:ext cx="3282696" cy="812673"/>
           </a:xfrm>
           <a:prstGeom prst="rect">
             <a:avLst/>
@@ -7343,10 +7783,10 @@
           <a:p>
             <a:pPr>
               <a:lnSpc>
-                <a:spcPct val="115000"/>
+                <a:spcPct val="112000"/>
               </a:lnSpc>
               <a:spcAft>
-                <a:spcPts val="0"/>
+                <a:spcPts val="200"/>
               </a:spcAft>
             </a:pPr>
             <a:r>
@@ -7370,8 +7810,8 @@
         </p:nvSpPr>
         <p:spPr>
           <a:xfrm>
-            <a:off x="365760" y="4521708"/>
-            <a:ext cx="3429000" cy="310896"/>
+            <a:off x="365760" y="4539996"/>
+            <a:ext cx="3429000" cy="292608"/>
           </a:xfrm>
           <a:prstGeom prst="rect">
             <a:avLst/>
@@ -7413,8 +7853,8 @@
         </p:nvSpPr>
         <p:spPr>
           <a:xfrm>
-            <a:off x="402336" y="4585716"/>
-            <a:ext cx="3355848" cy="201167"/>
+            <a:off x="402336" y="4604004"/>
+            <a:ext cx="3355848" cy="182880"/>
           </a:xfrm>
           <a:prstGeom prst="rect">
             <a:avLst/>
@@ -7449,8 +7889,8 @@
         </p:nvSpPr>
         <p:spPr>
           <a:xfrm>
-            <a:off x="3824921" y="1005839"/>
-            <a:ext cx="5288917" cy="3835908"/>
+            <a:off x="4105656" y="1033272"/>
+            <a:ext cx="4727448" cy="3744468"/>
           </a:xfrm>
           <a:prstGeom prst="rect">
             <a:avLst/>
@@ -7458,7 +7898,7 @@
           <a:solidFill>
             <a:srgbClr val="FFFFFF"/>
           </a:solidFill>
-          <a:ln w="10160">
+          <a:ln w="9525">
             <a:solidFill>
               <a:srgbClr val="BAC8DC"/>
             </a:solidFill>
@@ -7486,9 +7926,97 @@
           </a:p>
         </p:txBody>
       </p:sp>
+      <p:sp>
+        <p:nvSpPr>
+          <p:cNvPr id="17" name="Rectangle 16"/>
+          <p:cNvSpPr/>
+          <p:nvPr/>
+        </p:nvSpPr>
+        <p:spPr>
+          <a:xfrm>
+            <a:off x="3968496" y="996696"/>
+            <a:ext cx="10972" cy="3854196"/>
+          </a:xfrm>
+          <a:prstGeom prst="rect">
+            <a:avLst/>
+          </a:prstGeom>
+          <a:solidFill>
+            <a:srgbClr val="BAC8DC"/>
+          </a:solidFill>
+          <a:ln>
+            <a:noFill/>
+          </a:ln>
+        </p:spPr>
+        <p:style>
+          <a:lnRef idx="1">
+            <a:schemeClr val="accent1"/>
+          </a:lnRef>
+          <a:fillRef idx="3">
+            <a:schemeClr val="accent1"/>
+          </a:fillRef>
+          <a:effectRef idx="2">
+            <a:schemeClr val="accent1"/>
+          </a:effectRef>
+          <a:fontRef idx="minor">
+            <a:schemeClr val="lt1"/>
+          </a:fontRef>
+        </p:style>
+        <p:txBody>
+          <a:bodyPr rtlCol="0" anchor="ctr"/>
+          <a:lstStyle/>
+          <a:p>
+            <a:pPr algn="ctr"/>
+          </a:p>
+        </p:txBody>
+      </p:sp>
+      <p:sp>
+        <p:nvSpPr>
+          <p:cNvPr id="18" name="Rectangle 17"/>
+          <p:cNvSpPr/>
+          <p:nvPr/>
+        </p:nvSpPr>
+        <p:spPr>
+          <a:xfrm>
+            <a:off x="4262475" y="1302319"/>
+            <a:ext cx="4413808" cy="2986916"/>
+          </a:xfrm>
+          <a:prstGeom prst="rect">
+            <a:avLst/>
+          </a:prstGeom>
+          <a:solidFill>
+            <a:srgbClr val="FCFDFF"/>
+          </a:solidFill>
+          <a:ln w="7620">
+            <a:solidFill>
+              <a:srgbClr val="BAC8DC"/>
+            </a:solidFill>
+          </a:ln>
+        </p:spPr>
+        <p:style>
+          <a:lnRef idx="1">
+            <a:schemeClr val="accent1"/>
+          </a:lnRef>
+          <a:fillRef idx="3">
+            <a:schemeClr val="accent1"/>
+          </a:fillRef>
+          <a:effectRef idx="2">
+            <a:schemeClr val="accent1"/>
+          </a:effectRef>
+          <a:fontRef idx="minor">
+            <a:schemeClr val="lt1"/>
+          </a:fontRef>
+        </p:style>
+        <p:txBody>
+          <a:bodyPr rtlCol="0" anchor="ctr"/>
+          <a:lstStyle/>
+          <a:p>
+            <a:pPr algn="ctr"/>
+          </a:p>
+        </p:txBody>
+      </p:sp>
       <p:pic>
         <p:nvPicPr>
-          <p:cNvPr id="17" name="Picture 16" descr="emergency_timing.png"/>
+          <p:cNvPr id="19" name="Picture 18" descr="emergency_timing.png"/>
           <p:cNvPicPr>
             <a:picLocks noChangeAspect="1"/>
           </p:cNvPicPr>
@@ -7502,8 +8030,8 @@
         </p:blipFill>
         <p:spPr>
           <a:xfrm>
-            <a:off x="3870641" y="1051560"/>
-            <a:ext cx="5197477" cy="3561588"/>
+            <a:off x="4299051" y="1338895"/>
+            <a:ext cx="4340656" cy="2913764"/>
           </a:xfrm>
           <a:prstGeom prst="rect">
             <a:avLst/>
@@ -7512,14 +8040,14 @@
       </p:pic>
       <p:sp>
         <p:nvSpPr>
-          <p:cNvPr id="18" name="TextBox 17"/>
+          <p:cNvPr id="20" name="TextBox 19"/>
           <p:cNvSpPr txBox="1"/>
           <p:nvPr/>
         </p:nvSpPr>
         <p:spPr>
           <a:xfrm>
-            <a:off x="4069080" y="4668012"/>
-            <a:ext cx="4800600" cy="182880"/>
+            <a:off x="4160520" y="4594860"/>
+            <a:ext cx="4617720" cy="201168"/>
           </a:xfrm>
           <a:prstGeom prst="rect">
             <a:avLst/>
@@ -7527,14 +8055,14 @@
           <a:noFill/>
         </p:spPr>
         <p:txBody>
-          <a:bodyPr wrap="none">
+          <a:bodyPr wrap="square" anchor="ctr">
             <a:spAutoFit/>
           </a:bodyPr>
           <a:lstStyle/>
           <a:p>
             <a:pPr algn="ctr"/>
             <a:r>
-              <a:rPr sz="900" b="0">
+              <a:rPr sz="800" b="0">
                 <a:solidFill>
                   <a:srgbClr val="5A6273"/>
                 </a:solidFill>
@@ -8204,9 +8732,54 @@
           </a:p>
         </p:txBody>
       </p:sp>
+      <p:sp>
+        <p:nvSpPr>
+          <p:cNvPr id="18" name="Rectangle 17"/>
+          <p:cNvSpPr/>
+          <p:nvPr/>
+        </p:nvSpPr>
+        <p:spPr>
+          <a:xfrm>
+            <a:off x="4694986" y="1444247"/>
+            <a:ext cx="4097426" cy="2922516"/>
+          </a:xfrm>
+          <a:prstGeom prst="rect">
+            <a:avLst/>
+          </a:prstGeom>
+          <a:solidFill>
+            <a:srgbClr val="FCFDFF"/>
+          </a:solidFill>
+          <a:ln w="7620">
+            <a:solidFill>
+              <a:srgbClr val="BAC8DC"/>
+            </a:solidFill>
+          </a:ln>
+        </p:spPr>
+        <p:style>
+          <a:lnRef idx="1">
+            <a:schemeClr val="accent1"/>
+          </a:lnRef>
+          <a:fillRef idx="3">
+            <a:schemeClr val="accent1"/>
+          </a:fillRef>
+          <a:effectRef idx="2">
+            <a:schemeClr val="accent1"/>
+          </a:effectRef>
+          <a:fontRef idx="minor">
+            <a:schemeClr val="lt1"/>
+          </a:fontRef>
+        </p:style>
+        <p:txBody>
+          <a:bodyPr rtlCol="0" anchor="ctr"/>
+          <a:lstStyle/>
+          <a:p>
+            <a:pPr algn="ctr"/>
+          </a:p>
+        </p:txBody>
+      </p:sp>
       <p:pic>
         <p:nvPicPr>
-          <p:cNvPr id="18" name="Picture 17" descr="eval_results.png"/>
+          <p:cNvPr id="19" name="Picture 18" descr="eval_results.png"/>
           <p:cNvPicPr>
             <a:picLocks noChangeAspect="1"/>
           </p:cNvPicPr>
@@ -8220,8 +8793,8 @@
         </p:blipFill>
         <p:spPr>
           <a:xfrm>
-            <a:off x="4211124" y="1107292"/>
-            <a:ext cx="5065151" cy="3669578"/>
+            <a:off x="4731562" y="1480823"/>
+            <a:ext cx="4024274" cy="2849364"/>
           </a:xfrm>
           <a:prstGeom prst="rect">
             <a:avLst/>
@@ -8586,8 +9159,8 @@
         </p:nvSpPr>
         <p:spPr>
           <a:xfrm>
-            <a:off x="457200" y="1124712"/>
-            <a:ext cx="3246120" cy="885825"/>
+            <a:off x="438912" y="1106424"/>
+            <a:ext cx="3282696" cy="890397"/>
           </a:xfrm>
           <a:prstGeom prst="rect">
             <a:avLst/>
@@ -8602,10 +9175,10 @@
           <a:p>
             <a:pPr>
               <a:lnSpc>
-                <a:spcPct val="115000"/>
+                <a:spcPct val="112000"/>
               </a:lnSpc>
               <a:spcAft>
-                <a:spcPts val="0"/>
+                <a:spcPts val="200"/>
               </a:spcAft>
             </a:pPr>
             <a:r>
@@ -8629,8 +9202,8 @@
         </p:nvSpPr>
         <p:spPr>
           <a:xfrm>
-            <a:off x="457200" y="2028825"/>
-            <a:ext cx="3246120" cy="885825"/>
+            <a:off x="438912" y="2015109"/>
+            <a:ext cx="3282696" cy="890397"/>
           </a:xfrm>
           <a:prstGeom prst="rect">
             <a:avLst/>
@@ -8645,10 +9218,10 @@
           <a:p>
             <a:pPr>
               <a:lnSpc>
-                <a:spcPct val="115000"/>
+                <a:spcPct val="112000"/>
               </a:lnSpc>
               <a:spcAft>
-                <a:spcPts val="0"/>
+                <a:spcPts val="200"/>
               </a:spcAft>
             </a:pPr>
             <a:r>
@@ -8672,8 +9245,8 @@
         </p:nvSpPr>
         <p:spPr>
           <a:xfrm>
-            <a:off x="457200" y="2932938"/>
-            <a:ext cx="3246120" cy="885825"/>
+            <a:off x="438912" y="2923794"/>
+            <a:ext cx="3282696" cy="890397"/>
           </a:xfrm>
           <a:prstGeom prst="rect">
             <a:avLst/>
@@ -8688,10 +9261,10 @@
           <a:p>
             <a:pPr>
               <a:lnSpc>
-                <a:spcPct val="115000"/>
+                <a:spcPct val="112000"/>
               </a:lnSpc>
               <a:spcAft>
-                <a:spcPts val="0"/>
+                <a:spcPts val="200"/>
               </a:spcAft>
             </a:pPr>
             <a:r>
@@ -8715,8 +9288,8 @@
         </p:nvSpPr>
         <p:spPr>
           <a:xfrm>
-            <a:off x="457200" y="3837051"/>
-            <a:ext cx="3246120" cy="885825"/>
+            <a:off x="438912" y="3832479"/>
+            <a:ext cx="3282696" cy="890397"/>
           </a:xfrm>
           <a:prstGeom prst="rect">
             <a:avLst/>
@@ -8731,10 +9304,10 @@
           <a:p>
             <a:pPr>
               <a:lnSpc>
-                <a:spcPct val="115000"/>
+                <a:spcPct val="112000"/>
               </a:lnSpc>
               <a:spcAft>
-                <a:spcPts val="0"/>
+                <a:spcPts val="200"/>
               </a:spcAft>
             </a:pPr>
             <a:r>
@@ -8758,8 +9331,8 @@
         </p:nvSpPr>
         <p:spPr>
           <a:xfrm>
-            <a:off x="4023360" y="1534915"/>
-            <a:ext cx="4892040" cy="2777757"/>
+            <a:off x="4105656" y="1033272"/>
+            <a:ext cx="4727448" cy="3744468"/>
           </a:xfrm>
           <a:prstGeom prst="rect">
             <a:avLst/>
@@ -8767,7 +9340,7 @@
           <a:solidFill>
             <a:srgbClr val="FFFFFF"/>
           </a:solidFill>
-          <a:ln w="10160">
+          <a:ln w="9525">
             <a:solidFill>
               <a:srgbClr val="BAC8DC"/>
             </a:solidFill>
@@ -8795,9 +9368,97 @@
           </a:p>
         </p:txBody>
       </p:sp>
+      <p:sp>
+        <p:nvSpPr>
+          <p:cNvPr id="15" name="Rectangle 14"/>
+          <p:cNvSpPr/>
+          <p:nvPr/>
+        </p:nvSpPr>
+        <p:spPr>
+          <a:xfrm>
+            <a:off x="3968496" y="996696"/>
+            <a:ext cx="10972" cy="3854196"/>
+          </a:xfrm>
+          <a:prstGeom prst="rect">
+            <a:avLst/>
+          </a:prstGeom>
+          <a:solidFill>
+            <a:srgbClr val="BAC8DC"/>
+          </a:solidFill>
+          <a:ln>
+            <a:noFill/>
+          </a:ln>
+        </p:spPr>
+        <p:style>
+          <a:lnRef idx="1">
+            <a:schemeClr val="accent1"/>
+          </a:lnRef>
+          <a:fillRef idx="3">
+            <a:schemeClr val="accent1"/>
+          </a:fillRef>
+          <a:effectRef idx="2">
+            <a:schemeClr val="accent1"/>
+          </a:effectRef>
+          <a:fontRef idx="minor">
+            <a:schemeClr val="lt1"/>
+          </a:fontRef>
+        </p:style>
+        <p:txBody>
+          <a:bodyPr rtlCol="0" anchor="ctr"/>
+          <a:lstStyle/>
+          <a:p>
+            <a:pPr algn="ctr"/>
+          </a:p>
+        </p:txBody>
+      </p:sp>
+      <p:sp>
+        <p:nvSpPr>
+          <p:cNvPr id="16" name="Rectangle 15"/>
+          <p:cNvSpPr/>
+          <p:nvPr/>
+        </p:nvSpPr>
+        <p:spPr>
+          <a:xfrm>
+            <a:off x="4262475" y="1627409"/>
+            <a:ext cx="4413808" cy="2336736"/>
+          </a:xfrm>
+          <a:prstGeom prst="rect">
+            <a:avLst/>
+          </a:prstGeom>
+          <a:solidFill>
+            <a:srgbClr val="FCFDFF"/>
+          </a:solidFill>
+          <a:ln w="7620">
+            <a:solidFill>
+              <a:srgbClr val="BAC8DC"/>
+            </a:solidFill>
+          </a:ln>
+        </p:spPr>
+        <p:style>
+          <a:lnRef idx="1">
+            <a:schemeClr val="accent1"/>
+          </a:lnRef>
+          <a:fillRef idx="3">
+            <a:schemeClr val="accent1"/>
+          </a:fillRef>
+          <a:effectRef idx="2">
+            <a:schemeClr val="accent1"/>
+          </a:effectRef>
+          <a:fontRef idx="minor">
+            <a:schemeClr val="lt1"/>
+          </a:fontRef>
+        </p:style>
+        <p:txBody>
+          <a:bodyPr rtlCol="0" anchor="ctr"/>
+          <a:lstStyle/>
+          <a:p>
+            <a:pPr algn="ctr"/>
+          </a:p>
+        </p:txBody>
+      </p:sp>
       <p:pic>
         <p:nvPicPr>
-          <p:cNvPr id="15" name="Picture 14" descr="ppt_full_dashboard.png"/>
+          <p:cNvPr id="17" name="Picture 16" descr="ppt_full_dashboard.png"/>
           <p:cNvPicPr>
             <a:picLocks noChangeAspect="1"/>
           </p:cNvPicPr>
@@ -8811,8 +9472,8 @@
         </p:blipFill>
         <p:spPr>
           <a:xfrm>
-            <a:off x="4069080" y="1580635"/>
-            <a:ext cx="4800600" cy="2503437"/>
+            <a:off x="4299051" y="1663985"/>
+            <a:ext cx="4340656" cy="2263584"/>
           </a:xfrm>
           <a:prstGeom prst="rect">
             <a:avLst/>
@@ -8821,14 +9482,14 @@
       </p:pic>
       <p:sp>
         <p:nvSpPr>
-          <p:cNvPr id="16" name="TextBox 15"/>
+          <p:cNvPr id="18" name="TextBox 17"/>
           <p:cNvSpPr txBox="1"/>
           <p:nvPr/>
         </p:nvSpPr>
         <p:spPr>
           <a:xfrm>
-            <a:off x="4069080" y="4138936"/>
-            <a:ext cx="4800600" cy="182880"/>
+            <a:off x="4160520" y="4594860"/>
+            <a:ext cx="4617720" cy="201168"/>
           </a:xfrm>
           <a:prstGeom prst="rect">
             <a:avLst/>
@@ -8836,14 +9497,14 @@
           <a:noFill/>
         </p:spPr>
         <p:txBody>
-          <a:bodyPr wrap="none">
+          <a:bodyPr wrap="square" anchor="ctr">
             <a:spAutoFit/>
           </a:bodyPr>
           <a:lstStyle/>
           <a:p>
             <a:pPr algn="ctr"/>
             <a:r>
-              <a:rPr sz="900" b="0">
+              <a:rPr sz="800" b="0">
                 <a:solidFill>
                   <a:srgbClr val="5A6273"/>
                 </a:solidFill>
@@ -9125,8 +9786,8 @@
         </p:nvSpPr>
         <p:spPr>
           <a:xfrm>
-            <a:off x="3352538" y="1051079"/>
-            <a:ext cx="2438922" cy="3791148"/>
+            <a:off x="274320" y="1033272"/>
+            <a:ext cx="8595360" cy="3781044"/>
           </a:xfrm>
           <a:prstGeom prst="rect">
             <a:avLst/>
@@ -9134,7 +9795,7 @@
           <a:solidFill>
             <a:srgbClr val="FFFFFF"/>
           </a:solidFill>
-          <a:ln w="10160">
+          <a:ln w="9525">
             <a:solidFill>
               <a:srgbClr val="BAC8DC"/>
             </a:solidFill>
@@ -9178,8 +9839,8 @@
         </p:blipFill>
         <p:spPr>
           <a:xfrm>
-            <a:off x="3398258" y="1096799"/>
-            <a:ext cx="2347482" cy="3516828"/>
+            <a:off x="3483327" y="1192240"/>
+            <a:ext cx="2177344" cy="3261939"/>
           </a:xfrm>
           <a:prstGeom prst="rect">
             <a:avLst/>
@@ -9194,8 +9855,8 @@
         </p:nvSpPr>
         <p:spPr>
           <a:xfrm>
-            <a:off x="274320" y="4668492"/>
-            <a:ext cx="8595360" cy="182880"/>
+            <a:off x="365760" y="4613148"/>
+            <a:ext cx="8412480" cy="201168"/>
           </a:xfrm>
           <a:prstGeom prst="rect">
             <a:avLst/>
@@ -9203,14 +9864,14 @@
           <a:noFill/>
         </p:spPr>
         <p:txBody>
-          <a:bodyPr wrap="none">
+          <a:bodyPr wrap="square" anchor="ctr">
             <a:spAutoFit/>
           </a:bodyPr>
           <a:lstStyle/>
           <a:p>
             <a:pPr algn="ctr"/>
             <a:r>
-              <a:rPr sz="900" b="0">
+              <a:rPr sz="800" b="0">
                 <a:solidFill>
                   <a:srgbClr val="5A6273"/>
                 </a:solidFill>
@@ -9492,8 +10153,8 @@
         </p:nvSpPr>
         <p:spPr>
           <a:xfrm>
-            <a:off x="839881" y="996696"/>
-            <a:ext cx="3097976" cy="3854196"/>
+            <a:off x="274320" y="1033272"/>
+            <a:ext cx="4233672" cy="3781044"/>
           </a:xfrm>
           <a:prstGeom prst="rect">
             <a:avLst/>
@@ -9501,7 +10162,7 @@
           <a:solidFill>
             <a:srgbClr val="FFFFFF"/>
           </a:solidFill>
-          <a:ln w="10160">
+          <a:ln w="9525">
             <a:solidFill>
               <a:srgbClr val="BAC8DC"/>
             </a:solidFill>
@@ -9545,8 +10206,8 @@
         </p:blipFill>
         <p:spPr>
           <a:xfrm>
-            <a:off x="885601" y="1042416"/>
-            <a:ext cx="3006536" cy="3579876"/>
+            <a:off x="1028615" y="1191691"/>
+            <a:ext cx="2725081" cy="3244748"/>
           </a:xfrm>
           <a:prstGeom prst="rect">
             <a:avLst/>
@@ -9561,8 +10222,8 @@
         </p:nvSpPr>
         <p:spPr>
           <a:xfrm>
-            <a:off x="274320" y="4677156"/>
-            <a:ext cx="4229100" cy="182880"/>
+            <a:off x="347472" y="4594860"/>
+            <a:ext cx="4087368" cy="201168"/>
           </a:xfrm>
           <a:prstGeom prst="rect">
             <a:avLst/>
@@ -9570,14 +10231,14 @@
           <a:noFill/>
         </p:spPr>
         <p:txBody>
-          <a:bodyPr wrap="none">
+          <a:bodyPr wrap="square" anchor="ctr">
             <a:spAutoFit/>
           </a:bodyPr>
           <a:lstStyle/>
           <a:p>
             <a:pPr algn="ctr"/>
             <a:r>
-              <a:rPr sz="900" b="0">
+              <a:rPr sz="800" b="0">
                 <a:solidFill>
                   <a:srgbClr val="5A6273"/>
                 </a:solidFill>
@@ -9597,8 +10258,8 @@
         </p:nvSpPr>
         <p:spPr>
           <a:xfrm>
-            <a:off x="4605051" y="996696"/>
-            <a:ext cx="4300157" cy="3854196"/>
+            <a:off x="4636007" y="1033272"/>
+            <a:ext cx="4233672" cy="3781044"/>
           </a:xfrm>
           <a:prstGeom prst="rect">
             <a:avLst/>
@@ -9606,7 +10267,7 @@
           <a:solidFill>
             <a:srgbClr val="FFFFFF"/>
           </a:solidFill>
-          <a:ln w="10160">
+          <a:ln w="9525">
             <a:solidFill>
               <a:srgbClr val="BAC8DC"/>
             </a:solidFill>
@@ -9650,8 +10311,8 @@
         </p:blipFill>
         <p:spPr>
           <a:xfrm>
-            <a:off x="4650771" y="1042416"/>
-            <a:ext cx="4208717" cy="3579876"/>
+            <a:off x="4845483" y="1191691"/>
+            <a:ext cx="3814721" cy="3244748"/>
           </a:xfrm>
           <a:prstGeom prst="rect">
             <a:avLst/>
@@ -9666,8 +10327,8 @@
         </p:nvSpPr>
         <p:spPr>
           <a:xfrm>
-            <a:off x="4640580" y="4677156"/>
-            <a:ext cx="4229100" cy="182880"/>
+            <a:off x="4709159" y="4594860"/>
+            <a:ext cx="4087368" cy="201168"/>
           </a:xfrm>
           <a:prstGeom prst="rect">
             <a:avLst/>
@@ -9675,14 +10336,14 @@
           <a:noFill/>
         </p:spPr>
         <p:txBody>
-          <a:bodyPr wrap="none">
+          <a:bodyPr wrap="square" anchor="ctr">
             <a:spAutoFit/>
           </a:bodyPr>
           <a:lstStyle/>
           <a:p>
             <a:pPr algn="ctr"/>
             <a:r>
-              <a:rPr sz="900" b="0">
+              <a:rPr sz="800" b="0">
                 <a:solidFill>
                   <a:srgbClr val="5A6273"/>
                 </a:solidFill>
@@ -10052,8 +10713,8 @@
         </p:nvSpPr>
         <p:spPr>
           <a:xfrm>
-            <a:off x="457200" y="1124712"/>
-            <a:ext cx="3246120" cy="885825"/>
+            <a:off x="438912" y="1106424"/>
+            <a:ext cx="3282696" cy="890397"/>
           </a:xfrm>
           <a:prstGeom prst="rect">
             <a:avLst/>
@@ -10068,10 +10729,10 @@
           <a:p>
             <a:pPr>
               <a:lnSpc>
-                <a:spcPct val="115000"/>
+                <a:spcPct val="112000"/>
               </a:lnSpc>
               <a:spcAft>
-                <a:spcPts val="0"/>
+                <a:spcPts val="200"/>
               </a:spcAft>
             </a:pPr>
             <a:r>
@@ -10095,8 +10756,8 @@
         </p:nvSpPr>
         <p:spPr>
           <a:xfrm>
-            <a:off x="457200" y="2028825"/>
-            <a:ext cx="3246120" cy="885825"/>
+            <a:off x="438912" y="2015109"/>
+            <a:ext cx="3282696" cy="890397"/>
           </a:xfrm>
           <a:prstGeom prst="rect">
             <a:avLst/>
@@ -10111,10 +10772,10 @@
           <a:p>
             <a:pPr>
               <a:lnSpc>
-                <a:spcPct val="115000"/>
+                <a:spcPct val="112000"/>
               </a:lnSpc>
               <a:spcAft>
-                <a:spcPts val="0"/>
+                <a:spcPts val="200"/>
               </a:spcAft>
             </a:pPr>
             <a:r>
@@ -10138,8 +10799,8 @@
         </p:nvSpPr>
         <p:spPr>
           <a:xfrm>
-            <a:off x="457200" y="2932938"/>
-            <a:ext cx="3246120" cy="885825"/>
+            <a:off x="438912" y="2923794"/>
+            <a:ext cx="3282696" cy="890397"/>
           </a:xfrm>
           <a:prstGeom prst="rect">
             <a:avLst/>
@@ -10154,10 +10815,10 @@
           <a:p>
             <a:pPr>
               <a:lnSpc>
-                <a:spcPct val="115000"/>
+                <a:spcPct val="112000"/>
               </a:lnSpc>
               <a:spcAft>
-                <a:spcPts val="0"/>
+                <a:spcPts val="200"/>
               </a:spcAft>
             </a:pPr>
             <a:r>
@@ -10181,8 +10842,8 @@
         </p:nvSpPr>
         <p:spPr>
           <a:xfrm>
-            <a:off x="457200" y="3837051"/>
-            <a:ext cx="3246120" cy="885825"/>
+            <a:off x="438912" y="3832479"/>
+            <a:ext cx="3282696" cy="890397"/>
           </a:xfrm>
           <a:prstGeom prst="rect">
             <a:avLst/>
@@ -10197,10 +10858,10 @@
           <a:p>
             <a:pPr>
               <a:lnSpc>
-                <a:spcPct val="115000"/>
+                <a:spcPct val="112000"/>
               </a:lnSpc>
               <a:spcAft>
-                <a:spcPts val="0"/>
+                <a:spcPts val="200"/>
               </a:spcAft>
             </a:pPr>
             <a:r>
@@ -10224,8 +10885,8 @@
         </p:nvSpPr>
         <p:spPr>
           <a:xfrm>
-            <a:off x="2268473" y="1005840"/>
-            <a:ext cx="8401812" cy="3835908"/>
+            <a:off x="4105656" y="1033272"/>
+            <a:ext cx="4727448" cy="3744468"/>
           </a:xfrm>
           <a:prstGeom prst="rect">
             <a:avLst/>
@@ -10233,7 +10894,7 @@
           <a:solidFill>
             <a:srgbClr val="FFFFFF"/>
           </a:solidFill>
-          <a:ln w="10160">
+          <a:ln w="9525">
             <a:solidFill>
               <a:srgbClr val="BAC8DC"/>
             </a:solidFill>
@@ -10261,9 +10922,97 @@
           </a:p>
         </p:txBody>
       </p:sp>
+      <p:sp>
+        <p:nvSpPr>
+          <p:cNvPr id="15" name="Rectangle 14"/>
+          <p:cNvSpPr/>
+          <p:nvPr/>
+        </p:nvSpPr>
+        <p:spPr>
+          <a:xfrm>
+            <a:off x="3968496" y="996696"/>
+            <a:ext cx="10972" cy="3854196"/>
+          </a:xfrm>
+          <a:prstGeom prst="rect">
+            <a:avLst/>
+          </a:prstGeom>
+          <a:solidFill>
+            <a:srgbClr val="BAC8DC"/>
+          </a:solidFill>
+          <a:ln>
+            <a:noFill/>
+          </a:ln>
+        </p:spPr>
+        <p:style>
+          <a:lnRef idx="1">
+            <a:schemeClr val="accent1"/>
+          </a:lnRef>
+          <a:fillRef idx="3">
+            <a:schemeClr val="accent1"/>
+          </a:fillRef>
+          <a:effectRef idx="2">
+            <a:schemeClr val="accent1"/>
+          </a:effectRef>
+          <a:fontRef idx="minor">
+            <a:schemeClr val="lt1"/>
+          </a:fontRef>
+        </p:style>
+        <p:txBody>
+          <a:bodyPr rtlCol="0" anchor="ctr"/>
+          <a:lstStyle/>
+          <a:p>
+            <a:pPr algn="ctr"/>
+          </a:p>
+        </p:txBody>
+      </p:sp>
+      <p:sp>
+        <p:nvSpPr>
+          <p:cNvPr id="16" name="Rectangle 15"/>
+          <p:cNvSpPr/>
+          <p:nvPr/>
+        </p:nvSpPr>
+        <p:spPr>
+          <a:xfrm>
+            <a:off x="4262475" y="1850859"/>
+            <a:ext cx="4413808" cy="1889837"/>
+          </a:xfrm>
+          <a:prstGeom prst="rect">
+            <a:avLst/>
+          </a:prstGeom>
+          <a:solidFill>
+            <a:srgbClr val="FCFDFF"/>
+          </a:solidFill>
+          <a:ln w="7620">
+            <a:solidFill>
+              <a:srgbClr val="BAC8DC"/>
+            </a:solidFill>
+          </a:ln>
+        </p:spPr>
+        <p:style>
+          <a:lnRef idx="1">
+            <a:schemeClr val="accent1"/>
+          </a:lnRef>
+          <a:fillRef idx="3">
+            <a:schemeClr val="accent1"/>
+          </a:fillRef>
+          <a:effectRef idx="2">
+            <a:schemeClr val="accent1"/>
+          </a:effectRef>
+          <a:fontRef idx="minor">
+            <a:schemeClr val="lt1"/>
+          </a:fontRef>
+        </p:style>
+        <p:txBody>
+          <a:bodyPr rtlCol="0" anchor="ctr"/>
+          <a:lstStyle/>
+          <a:p>
+            <a:pPr algn="ctr"/>
+          </a:p>
+        </p:txBody>
+      </p:sp>
       <p:pic>
         <p:nvPicPr>
-          <p:cNvPr id="15" name="Picture 14" descr="outline_timeline.png"/>
+          <p:cNvPr id="17" name="Picture 16" descr="outline_timeline.png"/>
           <p:cNvPicPr>
             <a:picLocks noChangeAspect="1"/>
           </p:cNvPicPr>
@@ -10277,8 +11026,8 @@
         </p:blipFill>
         <p:spPr>
           <a:xfrm>
-            <a:off x="2314193" y="1051560"/>
-            <a:ext cx="8310372" cy="3561588"/>
+            <a:off x="4299051" y="1887435"/>
+            <a:ext cx="4340656" cy="1816685"/>
           </a:xfrm>
           <a:prstGeom prst="rect">
             <a:avLst/>
@@ -10287,14 +11036,14 @@
       </p:pic>
       <p:sp>
         <p:nvSpPr>
-          <p:cNvPr id="16" name="TextBox 15"/>
+          <p:cNvPr id="18" name="TextBox 17"/>
           <p:cNvSpPr txBox="1"/>
           <p:nvPr/>
         </p:nvSpPr>
         <p:spPr>
           <a:xfrm>
-            <a:off x="4069080" y="4668012"/>
-            <a:ext cx="4800600" cy="182880"/>
+            <a:off x="4160520" y="4594860"/>
+            <a:ext cx="4617720" cy="201168"/>
           </a:xfrm>
           <a:prstGeom prst="rect">
             <a:avLst/>
@@ -10302,14 +11051,14 @@
           <a:noFill/>
         </p:spPr>
         <p:txBody>
-          <a:bodyPr wrap="none">
+          <a:bodyPr wrap="square" anchor="ctr">
             <a:spAutoFit/>
           </a:bodyPr>
           <a:lstStyle/>
           <a:p>
             <a:pPr algn="ctr"/>
             <a:r>
-              <a:rPr sz="900" b="0">
+              <a:rPr sz="800" b="0">
                 <a:solidFill>
                   <a:srgbClr val="5A6273"/>
                 </a:solidFill>
@@ -10591,8 +11340,8 @@
         </p:nvSpPr>
         <p:spPr>
           <a:xfrm>
-            <a:off x="228600" y="1648824"/>
-            <a:ext cx="4320540" cy="2549939"/>
+            <a:off x="274320" y="1033272"/>
+            <a:ext cx="4233672" cy="3781044"/>
           </a:xfrm>
           <a:prstGeom prst="rect">
             <a:avLst/>
@@ -10600,7 +11349,7 @@
           <a:solidFill>
             <a:srgbClr val="FFFFFF"/>
           </a:solidFill>
-          <a:ln w="10160">
+          <a:ln w="9525">
             <a:solidFill>
               <a:srgbClr val="BAC8DC"/>
             </a:solidFill>
@@ -10644,8 +11393,8 @@
         </p:blipFill>
         <p:spPr>
           <a:xfrm>
-            <a:off x="274320" y="1694544"/>
-            <a:ext cx="4229100" cy="2275619"/>
+            <a:off x="470093" y="1780369"/>
+            <a:ext cx="3842125" cy="2067393"/>
           </a:xfrm>
           <a:prstGeom prst="rect">
             <a:avLst/>
@@ -10660,8 +11409,8 @@
         </p:nvSpPr>
         <p:spPr>
           <a:xfrm>
-            <a:off x="274320" y="4025027"/>
-            <a:ext cx="4229100" cy="182880"/>
+            <a:off x="347472" y="4594860"/>
+            <a:ext cx="4087368" cy="201168"/>
           </a:xfrm>
           <a:prstGeom prst="rect">
             <a:avLst/>
@@ -10669,14 +11418,14 @@
           <a:noFill/>
         </p:spPr>
         <p:txBody>
-          <a:bodyPr wrap="none">
+          <a:bodyPr wrap="square" anchor="ctr">
             <a:spAutoFit/>
           </a:bodyPr>
           <a:lstStyle/>
           <a:p>
             <a:pPr algn="ctr"/>
             <a:r>
-              <a:rPr sz="900" b="0">
+              <a:rPr sz="800" b="0">
                 <a:solidFill>
                   <a:srgbClr val="5A6273"/>
                 </a:solidFill>
@@ -10696,8 +11445,8 @@
         </p:nvSpPr>
         <p:spPr>
           <a:xfrm>
-            <a:off x="4594860" y="2309621"/>
-            <a:ext cx="4320540" cy="1228345"/>
+            <a:off x="4636007" y="1033272"/>
+            <a:ext cx="4233672" cy="3781044"/>
           </a:xfrm>
           <a:prstGeom prst="rect">
             <a:avLst/>
@@ -10705,7 +11454,7 @@
           <a:solidFill>
             <a:srgbClr val="FFFFFF"/>
           </a:solidFill>
-          <a:ln w="10160">
+          <a:ln w="9525">
             <a:solidFill>
               <a:srgbClr val="BAC8DC"/>
             </a:solidFill>
@@ -10749,8 +11498,8 @@
         </p:blipFill>
         <p:spPr>
           <a:xfrm>
-            <a:off x="4640580" y="2355341"/>
-            <a:ext cx="4229100" cy="954025"/>
+            <a:off x="4831781" y="2380701"/>
+            <a:ext cx="3842125" cy="866729"/>
           </a:xfrm>
           <a:prstGeom prst="rect">
             <a:avLst/>
@@ -10765,8 +11514,8 @@
         </p:nvSpPr>
         <p:spPr>
           <a:xfrm>
-            <a:off x="4640580" y="3364230"/>
-            <a:ext cx="4229100" cy="182880"/>
+            <a:off x="4709159" y="4594860"/>
+            <a:ext cx="4087368" cy="201168"/>
           </a:xfrm>
           <a:prstGeom prst="rect">
             <a:avLst/>
@@ -10774,14 +11523,14 @@
           <a:noFill/>
         </p:spPr>
         <p:txBody>
-          <a:bodyPr wrap="none">
+          <a:bodyPr wrap="square" anchor="ctr">
             <a:spAutoFit/>
           </a:bodyPr>
           <a:lstStyle/>
           <a:p>
             <a:pPr algn="ctr"/>
             <a:r>
-              <a:rPr sz="900" b="0">
+              <a:rPr sz="800" b="0">
                 <a:solidFill>
                   <a:srgbClr val="5A6273"/>
                 </a:solidFill>
@@ -11063,8 +11812,8 @@
         </p:nvSpPr>
         <p:spPr>
           <a:xfrm>
-            <a:off x="1128891" y="1051079"/>
-            <a:ext cx="6886217" cy="3791148"/>
+            <a:off x="274320" y="1033272"/>
+            <a:ext cx="8595360" cy="3781044"/>
           </a:xfrm>
           <a:prstGeom prst="rect">
             <a:avLst/>
@@ -11072,7 +11821,7 @@
           <a:solidFill>
             <a:srgbClr val="FFFFFF"/>
           </a:solidFill>
-          <a:ln w="10160">
+          <a:ln w="9525">
             <a:solidFill>
               <a:srgbClr val="BAC8DC"/>
             </a:solidFill>
@@ -11116,8 +11865,8 @@
         </p:blipFill>
         <p:spPr>
           <a:xfrm>
-            <a:off x="1174611" y="1096799"/>
-            <a:ext cx="6794777" cy="3516828"/>
+            <a:off x="1420843" y="1192240"/>
+            <a:ext cx="6302312" cy="3261939"/>
           </a:xfrm>
           <a:prstGeom prst="rect">
             <a:avLst/>
@@ -11132,8 +11881,8 @@
         </p:nvSpPr>
         <p:spPr>
           <a:xfrm>
-            <a:off x="274320" y="4668492"/>
-            <a:ext cx="8595360" cy="182880"/>
+            <a:off x="365760" y="4613148"/>
+            <a:ext cx="8412480" cy="201168"/>
           </a:xfrm>
           <a:prstGeom prst="rect">
             <a:avLst/>
@@ -11141,14 +11890,14 @@
           <a:noFill/>
         </p:spPr>
         <p:txBody>
-          <a:bodyPr wrap="none">
+          <a:bodyPr wrap="square" anchor="ctr">
             <a:spAutoFit/>
           </a:bodyPr>
           <a:lstStyle/>
           <a:p>
             <a:pPr algn="ctr"/>
             <a:r>
-              <a:rPr sz="900" b="0">
+              <a:rPr sz="800" b="0">
                 <a:solidFill>
                   <a:srgbClr val="5A6273"/>
                 </a:solidFill>
@@ -11518,8 +12267,8 @@
         </p:nvSpPr>
         <p:spPr>
           <a:xfrm>
-            <a:off x="457200" y="1124712"/>
-            <a:ext cx="3246120" cy="803529"/>
+            <a:off x="438912" y="1106424"/>
+            <a:ext cx="3282696" cy="812673"/>
           </a:xfrm>
           <a:prstGeom prst="rect">
             <a:avLst/>
@@ -11534,10 +12283,10 @@
           <a:p>
             <a:pPr>
               <a:lnSpc>
-                <a:spcPct val="115000"/>
+                <a:spcPct val="112000"/>
               </a:lnSpc>
               <a:spcAft>
-                <a:spcPts val="0"/>
+                <a:spcPts val="200"/>
               </a:spcAft>
             </a:pPr>
             <a:r>
@@ -11561,8 +12310,8 @@
         </p:nvSpPr>
         <p:spPr>
           <a:xfrm>
-            <a:off x="457200" y="1946529"/>
-            <a:ext cx="3246120" cy="803529"/>
+            <a:off x="438912" y="1937385"/>
+            <a:ext cx="3282696" cy="812673"/>
           </a:xfrm>
           <a:prstGeom prst="rect">
             <a:avLst/>
@@ -11577,10 +12326,10 @@
           <a:p>
             <a:pPr>
               <a:lnSpc>
-                <a:spcPct val="115000"/>
+                <a:spcPct val="112000"/>
               </a:lnSpc>
               <a:spcAft>
-                <a:spcPts val="0"/>
+                <a:spcPts val="200"/>
               </a:spcAft>
             </a:pPr>
             <a:r>
@@ -11604,8 +12353,8 @@
         </p:nvSpPr>
         <p:spPr>
           <a:xfrm>
-            <a:off x="457200" y="2768346"/>
-            <a:ext cx="3246120" cy="803529"/>
+            <a:off x="438912" y="2768346"/>
+            <a:ext cx="3282696" cy="812673"/>
           </a:xfrm>
           <a:prstGeom prst="rect">
             <a:avLst/>
@@ -11620,10 +12369,10 @@
           <a:p>
             <a:pPr>
               <a:lnSpc>
-                <a:spcPct val="115000"/>
+                <a:spcPct val="112000"/>
               </a:lnSpc>
               <a:spcAft>
-                <a:spcPts val="0"/>
+                <a:spcPts val="200"/>
               </a:spcAft>
             </a:pPr>
             <a:r>
@@ -11647,8 +12396,8 @@
         </p:nvSpPr>
         <p:spPr>
           <a:xfrm>
-            <a:off x="457200" y="3590163"/>
-            <a:ext cx="3246120" cy="803529"/>
+            <a:off x="438912" y="3599307"/>
+            <a:ext cx="3282696" cy="812673"/>
           </a:xfrm>
           <a:prstGeom prst="rect">
             <a:avLst/>
@@ -11663,10 +12412,10 @@
           <a:p>
             <a:pPr>
               <a:lnSpc>
-                <a:spcPct val="115000"/>
+                <a:spcPct val="112000"/>
               </a:lnSpc>
               <a:spcAft>
-                <a:spcPts val="0"/>
+                <a:spcPts val="200"/>
               </a:spcAft>
             </a:pPr>
             <a:r>
@@ -11690,8 +12439,8 @@
         </p:nvSpPr>
         <p:spPr>
           <a:xfrm>
-            <a:off x="365760" y="4521708"/>
-            <a:ext cx="3429000" cy="310896"/>
+            <a:off x="365760" y="4539996"/>
+            <a:ext cx="3429000" cy="292608"/>
           </a:xfrm>
           <a:prstGeom prst="rect">
             <a:avLst/>
@@ -11733,8 +12482,8 @@
         </p:nvSpPr>
         <p:spPr>
           <a:xfrm>
-            <a:off x="402336" y="4585716"/>
-            <a:ext cx="3355848" cy="201167"/>
+            <a:off x="402336" y="4604004"/>
+            <a:ext cx="3355848" cy="182880"/>
           </a:xfrm>
           <a:prstGeom prst="rect">
             <a:avLst/>
@@ -11769,8 +12518,8 @@
         </p:nvSpPr>
         <p:spPr>
           <a:xfrm>
-            <a:off x="3965614" y="1005840"/>
-            <a:ext cx="5007531" cy="3835908"/>
+            <a:off x="4105656" y="1033272"/>
+            <a:ext cx="4727448" cy="3744468"/>
           </a:xfrm>
           <a:prstGeom prst="rect">
             <a:avLst/>
@@ -11778,7 +12527,7 @@
           <a:solidFill>
             <a:srgbClr val="FFFFFF"/>
           </a:solidFill>
-          <a:ln w="10160">
+          <a:ln w="9525">
             <a:solidFill>
               <a:srgbClr val="BAC8DC"/>
             </a:solidFill>
@@ -11806,9 +12555,97 @@
           </a:p>
         </p:txBody>
       </p:sp>
+      <p:sp>
+        <p:nvSpPr>
+          <p:cNvPr id="17" name="Rectangle 16"/>
+          <p:cNvSpPr/>
+          <p:nvPr/>
+        </p:nvSpPr>
+        <p:spPr>
+          <a:xfrm>
+            <a:off x="3968496" y="996696"/>
+            <a:ext cx="10972" cy="3854196"/>
+          </a:xfrm>
+          <a:prstGeom prst="rect">
+            <a:avLst/>
+          </a:prstGeom>
+          <a:solidFill>
+            <a:srgbClr val="BAC8DC"/>
+          </a:solidFill>
+          <a:ln>
+            <a:noFill/>
+          </a:ln>
+        </p:spPr>
+        <p:style>
+          <a:lnRef idx="1">
+            <a:schemeClr val="accent1"/>
+          </a:lnRef>
+          <a:fillRef idx="3">
+            <a:schemeClr val="accent1"/>
+          </a:fillRef>
+          <a:effectRef idx="2">
+            <a:schemeClr val="accent1"/>
+          </a:effectRef>
+          <a:fontRef idx="minor">
+            <a:schemeClr val="lt1"/>
+          </a:fontRef>
+        </p:style>
+        <p:txBody>
+          <a:bodyPr rtlCol="0" anchor="ctr"/>
+          <a:lstStyle/>
+          <a:p>
+            <a:pPr algn="ctr"/>
+          </a:p>
+        </p:txBody>
+      </p:sp>
+      <p:sp>
+        <p:nvSpPr>
+          <p:cNvPr id="18" name="Rectangle 17"/>
+          <p:cNvSpPr/>
+          <p:nvPr/>
+        </p:nvSpPr>
+        <p:spPr>
+          <a:xfrm>
+            <a:off x="4262475" y="1222513"/>
+            <a:ext cx="4413808" cy="3146529"/>
+          </a:xfrm>
+          <a:prstGeom prst="rect">
+            <a:avLst/>
+          </a:prstGeom>
+          <a:solidFill>
+            <a:srgbClr val="FCFDFF"/>
+          </a:solidFill>
+          <a:ln w="7620">
+            <a:solidFill>
+              <a:srgbClr val="BAC8DC"/>
+            </a:solidFill>
+          </a:ln>
+        </p:spPr>
+        <p:style>
+          <a:lnRef idx="1">
+            <a:schemeClr val="accent1"/>
+          </a:lnRef>
+          <a:fillRef idx="3">
+            <a:schemeClr val="accent1"/>
+          </a:fillRef>
+          <a:effectRef idx="2">
+            <a:schemeClr val="accent1"/>
+          </a:effectRef>
+          <a:fontRef idx="minor">
+            <a:schemeClr val="lt1"/>
+          </a:fontRef>
+        </p:style>
+        <p:txBody>
+          <a:bodyPr rtlCol="0" anchor="ctr"/>
+          <a:lstStyle/>
+          <a:p>
+            <a:pPr algn="ctr"/>
+          </a:p>
+        </p:txBody>
+      </p:sp>
       <p:pic>
         <p:nvPicPr>
-          <p:cNvPr id="17" name="Picture 16" descr="eval_results.png"/>
+          <p:cNvPr id="19" name="Picture 18" descr="eval_results.png"/>
           <p:cNvPicPr>
             <a:picLocks noChangeAspect="1"/>
           </p:cNvPicPr>
@@ -11822,8 +12659,8 @@
         </p:blipFill>
         <p:spPr>
           <a:xfrm>
-            <a:off x="4011334" y="1051560"/>
-            <a:ext cx="4916091" cy="3561588"/>
+            <a:off x="4299051" y="1259089"/>
+            <a:ext cx="4340656" cy="3073377"/>
           </a:xfrm>
           <a:prstGeom prst="rect">
             <a:avLst/>
@@ -11832,14 +12669,14 @@
       </p:pic>
       <p:sp>
         <p:nvSpPr>
-          <p:cNvPr id="18" name="TextBox 17"/>
+          <p:cNvPr id="20" name="TextBox 19"/>
           <p:cNvSpPr txBox="1"/>
           <p:nvPr/>
         </p:nvSpPr>
         <p:spPr>
           <a:xfrm>
-            <a:off x="4069080" y="4668012"/>
-            <a:ext cx="4800600" cy="182880"/>
+            <a:off x="4160520" y="4594860"/>
+            <a:ext cx="4617720" cy="201168"/>
           </a:xfrm>
           <a:prstGeom prst="rect">
             <a:avLst/>
@@ -11847,14 +12684,14 @@
           <a:noFill/>
         </p:spPr>
         <p:txBody>
-          <a:bodyPr wrap="none">
+          <a:bodyPr wrap="square" anchor="ctr">
             <a:spAutoFit/>
           </a:bodyPr>
           <a:lstStyle/>
           <a:p>
             <a:pPr algn="ctr"/>
             <a:r>
-              <a:rPr sz="900" b="0">
+              <a:rPr sz="800" b="0">
                 <a:solidFill>
                   <a:srgbClr val="5A6273"/>
                 </a:solidFill>
@@ -12224,8 +13061,8 @@
         </p:nvSpPr>
         <p:spPr>
           <a:xfrm>
-            <a:off x="457200" y="1124712"/>
-            <a:ext cx="3246120" cy="885825"/>
+            <a:off x="438912" y="1106424"/>
+            <a:ext cx="3282696" cy="890397"/>
           </a:xfrm>
           <a:prstGeom prst="rect">
             <a:avLst/>
@@ -12240,10 +13077,10 @@
           <a:p>
             <a:pPr>
               <a:lnSpc>
-                <a:spcPct val="115000"/>
+                <a:spcPct val="112000"/>
               </a:lnSpc>
               <a:spcAft>
-                <a:spcPts val="0"/>
+                <a:spcPts val="200"/>
               </a:spcAft>
             </a:pPr>
             <a:r>
@@ -12267,8 +13104,8 @@
         </p:nvSpPr>
         <p:spPr>
           <a:xfrm>
-            <a:off x="457200" y="2028825"/>
-            <a:ext cx="3246120" cy="885825"/>
+            <a:off x="438912" y="2015109"/>
+            <a:ext cx="3282696" cy="890397"/>
           </a:xfrm>
           <a:prstGeom prst="rect">
             <a:avLst/>
@@ -12283,10 +13120,10 @@
           <a:p>
             <a:pPr>
               <a:lnSpc>
-                <a:spcPct val="115000"/>
+                <a:spcPct val="112000"/>
               </a:lnSpc>
               <a:spcAft>
-                <a:spcPts val="0"/>
+                <a:spcPts val="200"/>
               </a:spcAft>
             </a:pPr>
             <a:r>
@@ -12310,8 +13147,8 @@
         </p:nvSpPr>
         <p:spPr>
           <a:xfrm>
-            <a:off x="457200" y="2932938"/>
-            <a:ext cx="3246120" cy="885825"/>
+            <a:off x="438912" y="2923794"/>
+            <a:ext cx="3282696" cy="890397"/>
           </a:xfrm>
           <a:prstGeom prst="rect">
             <a:avLst/>
@@ -12326,10 +13163,10 @@
           <a:p>
             <a:pPr>
               <a:lnSpc>
-                <a:spcPct val="115000"/>
+                <a:spcPct val="112000"/>
               </a:lnSpc>
               <a:spcAft>
-                <a:spcPts val="0"/>
+                <a:spcPts val="200"/>
               </a:spcAft>
             </a:pPr>
             <a:r>
@@ -12353,8 +13190,8 @@
         </p:nvSpPr>
         <p:spPr>
           <a:xfrm>
-            <a:off x="457200" y="3837051"/>
-            <a:ext cx="3246120" cy="885825"/>
+            <a:off x="438912" y="3832479"/>
+            <a:ext cx="3282696" cy="890397"/>
           </a:xfrm>
           <a:prstGeom prst="rect">
             <a:avLst/>
@@ -12369,10 +13206,10 @@
           <a:p>
             <a:pPr>
               <a:lnSpc>
-                <a:spcPct val="115000"/>
+                <a:spcPct val="112000"/>
               </a:lnSpc>
               <a:spcAft>
-                <a:spcPts val="0"/>
+                <a:spcPts val="200"/>
               </a:spcAft>
             </a:pPr>
             <a:r>
@@ -12396,8 +13233,8 @@
         </p:nvSpPr>
         <p:spPr>
           <a:xfrm>
-            <a:off x="4023360" y="943999"/>
-            <a:ext cx="4892040" cy="3959589"/>
+            <a:off x="4105656" y="1033272"/>
+            <a:ext cx="4727448" cy="3744468"/>
           </a:xfrm>
           <a:prstGeom prst="rect">
             <a:avLst/>
@@ -12405,7 +13242,7 @@
           <a:solidFill>
             <a:srgbClr val="FFFFFF"/>
           </a:solidFill>
-          <a:ln w="10160">
+          <a:ln w="9525">
             <a:solidFill>
               <a:srgbClr val="BAC8DC"/>
             </a:solidFill>
@@ -12433,9 +13270,97 @@
           </a:p>
         </p:txBody>
       </p:sp>
+      <p:sp>
+        <p:nvSpPr>
+          <p:cNvPr id="15" name="Rectangle 14"/>
+          <p:cNvSpPr/>
+          <p:nvPr/>
+        </p:nvSpPr>
+        <p:spPr>
+          <a:xfrm>
+            <a:off x="3968496" y="996696"/>
+            <a:ext cx="10972" cy="3854196"/>
+          </a:xfrm>
+          <a:prstGeom prst="rect">
+            <a:avLst/>
+          </a:prstGeom>
+          <a:solidFill>
+            <a:srgbClr val="BAC8DC"/>
+          </a:solidFill>
+          <a:ln>
+            <a:noFill/>
+          </a:ln>
+        </p:spPr>
+        <p:style>
+          <a:lnRef idx="1">
+            <a:schemeClr val="accent1"/>
+          </a:lnRef>
+          <a:fillRef idx="3">
+            <a:schemeClr val="accent1"/>
+          </a:fillRef>
+          <a:effectRef idx="2">
+            <a:schemeClr val="accent1"/>
+          </a:effectRef>
+          <a:fontRef idx="minor">
+            <a:schemeClr val="lt1"/>
+          </a:fontRef>
+        </p:style>
+        <p:txBody>
+          <a:bodyPr rtlCol="0" anchor="ctr"/>
+          <a:lstStyle/>
+          <a:p>
+            <a:pPr algn="ctr"/>
+          </a:p>
+        </p:txBody>
+      </p:sp>
+      <p:sp>
+        <p:nvSpPr>
+          <p:cNvPr id="16" name="Rectangle 15"/>
+          <p:cNvSpPr/>
+          <p:nvPr/>
+        </p:nvSpPr>
+        <p:spPr>
+          <a:xfrm>
+            <a:off x="4262475" y="1128834"/>
+            <a:ext cx="4413808" cy="3333886"/>
+          </a:xfrm>
+          <a:prstGeom prst="rect">
+            <a:avLst/>
+          </a:prstGeom>
+          <a:solidFill>
+            <a:srgbClr val="FCFDFF"/>
+          </a:solidFill>
+          <a:ln w="7620">
+            <a:solidFill>
+              <a:srgbClr val="BAC8DC"/>
+            </a:solidFill>
+          </a:ln>
+        </p:spPr>
+        <p:style>
+          <a:lnRef idx="1">
+            <a:schemeClr val="accent1"/>
+          </a:lnRef>
+          <a:fillRef idx="3">
+            <a:schemeClr val="accent1"/>
+          </a:fillRef>
+          <a:effectRef idx="2">
+            <a:schemeClr val="accent1"/>
+          </a:effectRef>
+          <a:fontRef idx="minor">
+            <a:schemeClr val="lt1"/>
+          </a:fontRef>
+        </p:style>
+        <p:txBody>
+          <a:bodyPr rtlCol="0" anchor="ctr"/>
+          <a:lstStyle/>
+          <a:p>
+            <a:pPr algn="ctr"/>
+          </a:p>
+        </p:txBody>
+      </p:sp>
       <p:pic>
         <p:nvPicPr>
-          <p:cNvPr id="15" name="Picture 14" descr="latency_bar.png"/>
+          <p:cNvPr id="17" name="Picture 16" descr="latency_bar.png"/>
           <p:cNvPicPr>
             <a:picLocks noChangeAspect="1"/>
           </p:cNvPicPr>
@@ -12449,8 +13374,8 @@
         </p:blipFill>
         <p:spPr>
           <a:xfrm>
-            <a:off x="4069080" y="989719"/>
-            <a:ext cx="4800600" cy="3685269"/>
+            <a:off x="4299051" y="1165410"/>
+            <a:ext cx="4340656" cy="3260734"/>
           </a:xfrm>
           <a:prstGeom prst="rect">
             <a:avLst/>
@@ -12459,14 +13384,14 @@
       </p:pic>
       <p:sp>
         <p:nvSpPr>
-          <p:cNvPr id="16" name="TextBox 15"/>
+          <p:cNvPr id="18" name="TextBox 17"/>
           <p:cNvSpPr txBox="1"/>
           <p:nvPr/>
         </p:nvSpPr>
         <p:spPr>
           <a:xfrm>
-            <a:off x="4069080" y="4729852"/>
-            <a:ext cx="4800600" cy="182880"/>
+            <a:off x="4160520" y="4594860"/>
+            <a:ext cx="4617720" cy="201168"/>
           </a:xfrm>
           <a:prstGeom prst="rect">
             <a:avLst/>
@@ -12474,14 +13399,14 @@
           <a:noFill/>
         </p:spPr>
         <p:txBody>
-          <a:bodyPr wrap="none">
+          <a:bodyPr wrap="square" anchor="ctr">
             <a:spAutoFit/>
           </a:bodyPr>
           <a:lstStyle/>
           <a:p>
             <a:pPr algn="ctr"/>
             <a:r>
-              <a:rPr sz="900" b="0">
+              <a:rPr sz="800" b="0">
                 <a:solidFill>
                   <a:srgbClr val="5A6273"/>
                 </a:solidFill>
@@ -13338,8 +14263,8 @@
         </p:nvSpPr>
         <p:spPr>
           <a:xfrm>
-            <a:off x="4224528" y="1024128"/>
-            <a:ext cx="1600200" cy="1783080"/>
+            <a:off x="4105656" y="1033272"/>
+            <a:ext cx="4727448" cy="3744468"/>
           </a:xfrm>
           <a:prstGeom prst="rect">
             <a:avLst/>
@@ -13347,7 +14272,7 @@
           <a:solidFill>
             <a:srgbClr val="FFFFFF"/>
           </a:solidFill>
-          <a:ln w="10160">
+          <a:ln w="9525">
             <a:solidFill>
               <a:srgbClr val="BAC8DC"/>
             </a:solidFill>
@@ -13391,8 +14316,8 @@
         </p:blipFill>
         <p:spPr>
           <a:xfrm>
-            <a:off x="4270248" y="1069848"/>
-            <a:ext cx="1508760" cy="1508760"/>
+            <a:off x="4296582" y="1242486"/>
+            <a:ext cx="1236634" cy="1236634"/>
           </a:xfrm>
           <a:prstGeom prst="rect">
             <a:avLst/>
@@ -13407,8 +14332,8 @@
         </p:nvSpPr>
         <p:spPr>
           <a:xfrm>
-            <a:off x="4178808" y="2633472"/>
-            <a:ext cx="1691640" cy="182880"/>
+            <a:off x="4160520" y="2587751"/>
+            <a:ext cx="1508760" cy="201168"/>
           </a:xfrm>
           <a:prstGeom prst="rect">
             <a:avLst/>
@@ -13416,14 +14341,14 @@
           <a:noFill/>
         </p:spPr>
         <p:txBody>
-          <a:bodyPr wrap="none">
+          <a:bodyPr wrap="square" anchor="ctr">
             <a:spAutoFit/>
           </a:bodyPr>
           <a:lstStyle/>
           <a:p>
             <a:pPr algn="ctr"/>
             <a:r>
-              <a:rPr sz="900" b="0">
+              <a:rPr sz="800" b="0">
                 <a:solidFill>
                   <a:srgbClr val="5A6273"/>
                 </a:solidFill>
@@ -13435,54 +14360,9 @@
           </a:p>
         </p:txBody>
       </p:sp>
-      <p:sp>
-        <p:nvSpPr>
-          <p:cNvPr id="26" name="Rectangle 25"/>
-          <p:cNvSpPr/>
-          <p:nvPr/>
-        </p:nvSpPr>
-        <p:spPr>
-          <a:xfrm>
-            <a:off x="5887814" y="1059378"/>
-            <a:ext cx="2946210" cy="3728831"/>
-          </a:xfrm>
-          <a:prstGeom prst="rect">
-            <a:avLst/>
-          </a:prstGeom>
-          <a:solidFill>
-            <a:srgbClr val="FFFFFF"/>
-          </a:solidFill>
-          <a:ln w="10160">
-            <a:solidFill>
-              <a:srgbClr val="BAC8DC"/>
-            </a:solidFill>
-          </a:ln>
-        </p:spPr>
-        <p:style>
-          <a:lnRef idx="1">
-            <a:schemeClr val="accent1"/>
-          </a:lnRef>
-          <a:fillRef idx="3">
-            <a:schemeClr val="accent1"/>
-          </a:fillRef>
-          <a:effectRef idx="2">
-            <a:schemeClr val="accent1"/>
-          </a:effectRef>
-          <a:fontRef idx="minor">
-            <a:schemeClr val="lt1"/>
-          </a:fontRef>
-        </p:style>
-        <p:txBody>
-          <a:bodyPr rtlCol="0" anchor="ctr"/>
-          <a:lstStyle/>
-          <a:p>
-            <a:pPr algn="ctr"/>
-          </a:p>
-        </p:txBody>
-      </p:sp>
       <p:pic>
         <p:nvPicPr>
-          <p:cNvPr id="27" name="Picture 26" descr="repro_checklist.png"/>
+          <p:cNvPr id="26" name="Picture 25" descr="repro_checklist.png"/>
           <p:cNvPicPr>
             <a:picLocks noChangeAspect="1"/>
           </p:cNvPicPr>
@@ -13496,8 +14376,8 @@
         </p:blipFill>
         <p:spPr>
           <a:xfrm>
-            <a:off x="5933534" y="1105098"/>
-            <a:ext cx="2854770" cy="3454511"/>
+            <a:off x="5922555" y="1191097"/>
+            <a:ext cx="2712136" cy="3209361"/>
           </a:xfrm>
           <a:prstGeom prst="rect">
             <a:avLst/>
@@ -13506,14 +14386,14 @@
       </p:pic>
       <p:sp>
         <p:nvSpPr>
-          <p:cNvPr id="28" name="TextBox 27"/>
+          <p:cNvPr id="27" name="TextBox 26"/>
           <p:cNvSpPr txBox="1"/>
           <p:nvPr/>
         </p:nvSpPr>
         <p:spPr>
           <a:xfrm>
-            <a:off x="5943600" y="4614473"/>
-            <a:ext cx="2834640" cy="182880"/>
+            <a:off x="5779007" y="4594860"/>
+            <a:ext cx="2999232" cy="201168"/>
           </a:xfrm>
           <a:prstGeom prst="rect">
             <a:avLst/>
@@ -13521,14 +14401,14 @@
           <a:noFill/>
         </p:spPr>
         <p:txBody>
-          <a:bodyPr wrap="none">
+          <a:bodyPr wrap="square" anchor="ctr">
             <a:spAutoFit/>
           </a:bodyPr>
           <a:lstStyle/>
           <a:p>
             <a:pPr algn="ctr"/>
             <a:r>
-              <a:rPr sz="900" b="0">
+              <a:rPr sz="800" b="0">
                 <a:solidFill>
                   <a:srgbClr val="5A6273"/>
                 </a:solidFill>
@@ -14198,9 +15078,54 @@
           </a:p>
         </p:txBody>
       </p:sp>
+      <p:sp>
+        <p:nvSpPr>
+          <p:cNvPr id="18" name="Rectangle 17"/>
+          <p:cNvSpPr/>
+          <p:nvPr/>
+        </p:nvSpPr>
+        <p:spPr>
+          <a:xfrm>
+            <a:off x="4694986" y="1411241"/>
+            <a:ext cx="4097426" cy="2988529"/>
+          </a:xfrm>
+          <a:prstGeom prst="rect">
+            <a:avLst/>
+          </a:prstGeom>
+          <a:solidFill>
+            <a:srgbClr val="FCFDFF"/>
+          </a:solidFill>
+          <a:ln w="7620">
+            <a:solidFill>
+              <a:srgbClr val="BAC8DC"/>
+            </a:solidFill>
+          </a:ln>
+        </p:spPr>
+        <p:style>
+          <a:lnRef idx="1">
+            <a:schemeClr val="accent1"/>
+          </a:lnRef>
+          <a:fillRef idx="3">
+            <a:schemeClr val="accent1"/>
+          </a:fillRef>
+          <a:effectRef idx="2">
+            <a:schemeClr val="accent1"/>
+          </a:effectRef>
+          <a:fontRef idx="minor">
+            <a:schemeClr val="lt1"/>
+          </a:fontRef>
+        </p:style>
+        <p:txBody>
+          <a:bodyPr rtlCol="0" anchor="ctr"/>
+          <a:lstStyle/>
+          <a:p>
+            <a:pPr algn="ctr"/>
+          </a:p>
+        </p:txBody>
+      </p:sp>
       <p:pic>
         <p:nvPicPr>
-          <p:cNvPr id="18" name="Picture 17" descr="roadmap_gantt.png"/>
+          <p:cNvPr id="19" name="Picture 18" descr="roadmap_gantt.png"/>
           <p:cNvPicPr>
             <a:picLocks noChangeAspect="1"/>
           </p:cNvPicPr>
@@ -14214,8 +15139,8 @@
         </p:blipFill>
         <p:spPr>
           <a:xfrm>
-            <a:off x="4264586" y="1107292"/>
-            <a:ext cx="4958226" cy="3669578"/>
+            <a:off x="4731562" y="1447817"/>
+            <a:ext cx="4024274" cy="2915377"/>
           </a:xfrm>
           <a:prstGeom prst="rect">
             <a:avLst/>
@@ -14580,8 +15505,8 @@
         </p:nvSpPr>
         <p:spPr>
           <a:xfrm>
-            <a:off x="457200" y="1124712"/>
-            <a:ext cx="3246120" cy="705002"/>
+            <a:off x="438912" y="1106424"/>
+            <a:ext cx="3282696" cy="708660"/>
           </a:xfrm>
           <a:prstGeom prst="rect">
             <a:avLst/>
@@ -14596,10 +15521,10 @@
           <a:p>
             <a:pPr>
               <a:lnSpc>
-                <a:spcPct val="115000"/>
+                <a:spcPct val="112000"/>
               </a:lnSpc>
               <a:spcAft>
-                <a:spcPts val="0"/>
+                <a:spcPts val="200"/>
               </a:spcAft>
             </a:pPr>
             <a:r>
@@ -14623,8 +15548,8 @@
         </p:nvSpPr>
         <p:spPr>
           <a:xfrm>
-            <a:off x="457200" y="1848002"/>
-            <a:ext cx="3246120" cy="705002"/>
+            <a:off x="438912" y="1833372"/>
+            <a:ext cx="3282696" cy="708660"/>
           </a:xfrm>
           <a:prstGeom prst="rect">
             <a:avLst/>
@@ -14639,10 +15564,10 @@
           <a:p>
             <a:pPr>
               <a:lnSpc>
-                <a:spcPct val="115000"/>
+                <a:spcPct val="112000"/>
               </a:lnSpc>
               <a:spcAft>
-                <a:spcPts val="0"/>
+                <a:spcPts val="200"/>
               </a:spcAft>
             </a:pPr>
             <a:r>
@@ -14666,8 +15591,8 @@
         </p:nvSpPr>
         <p:spPr>
           <a:xfrm>
-            <a:off x="457200" y="2571292"/>
-            <a:ext cx="3246120" cy="705002"/>
+            <a:off x="438912" y="2560320"/>
+            <a:ext cx="3282696" cy="708660"/>
           </a:xfrm>
           <a:prstGeom prst="rect">
             <a:avLst/>
@@ -14682,10 +15607,10 @@
           <a:p>
             <a:pPr>
               <a:lnSpc>
-                <a:spcPct val="115000"/>
+                <a:spcPct val="112000"/>
               </a:lnSpc>
               <a:spcAft>
-                <a:spcPts val="0"/>
+                <a:spcPts val="200"/>
               </a:spcAft>
             </a:pPr>
             <a:r>
@@ -14709,8 +15634,8 @@
         </p:nvSpPr>
         <p:spPr>
           <a:xfrm>
-            <a:off x="457200" y="3294583"/>
-            <a:ext cx="3246120" cy="705002"/>
+            <a:off x="438912" y="3287268"/>
+            <a:ext cx="3282696" cy="708660"/>
           </a:xfrm>
           <a:prstGeom prst="rect">
             <a:avLst/>
@@ -14725,10 +15650,10 @@
           <a:p>
             <a:pPr>
               <a:lnSpc>
-                <a:spcPct val="115000"/>
+                <a:spcPct val="112000"/>
               </a:lnSpc>
               <a:spcAft>
-                <a:spcPts val="0"/>
+                <a:spcPts val="200"/>
               </a:spcAft>
             </a:pPr>
             <a:r>
@@ -14752,8 +15677,8 @@
         </p:nvSpPr>
         <p:spPr>
           <a:xfrm>
-            <a:off x="457200" y="4017873"/>
-            <a:ext cx="3246120" cy="705002"/>
+            <a:off x="438912" y="4014216"/>
+            <a:ext cx="3282696" cy="708660"/>
           </a:xfrm>
           <a:prstGeom prst="rect">
             <a:avLst/>
@@ -14768,10 +15693,10 @@
           <a:p>
             <a:pPr>
               <a:lnSpc>
-                <a:spcPct val="115000"/>
+                <a:spcPct val="112000"/>
               </a:lnSpc>
               <a:spcAft>
-                <a:spcPts val="0"/>
+                <a:spcPts val="200"/>
               </a:spcAft>
             </a:pPr>
             <a:r>
@@ -14795,8 +15720,8 @@
         </p:nvSpPr>
         <p:spPr>
           <a:xfrm>
-            <a:off x="4023360" y="393318"/>
-            <a:ext cx="4892040" cy="5060951"/>
+            <a:off x="4105656" y="1033272"/>
+            <a:ext cx="4727448" cy="3744468"/>
           </a:xfrm>
           <a:prstGeom prst="rect">
             <a:avLst/>
@@ -14804,7 +15729,7 @@
           <a:solidFill>
             <a:srgbClr val="FFFFFF"/>
           </a:solidFill>
-          <a:ln w="10160">
+          <a:ln w="9525">
             <a:solidFill>
               <a:srgbClr val="BAC8DC"/>
             </a:solidFill>
@@ -14832,9 +15757,97 @@
           </a:p>
         </p:txBody>
       </p:sp>
+      <p:sp>
+        <p:nvSpPr>
+          <p:cNvPr id="16" name="Rectangle 15"/>
+          <p:cNvSpPr/>
+          <p:nvPr/>
+        </p:nvSpPr>
+        <p:spPr>
+          <a:xfrm>
+            <a:off x="3968496" y="996696"/>
+            <a:ext cx="10972" cy="3854196"/>
+          </a:xfrm>
+          <a:prstGeom prst="rect">
+            <a:avLst/>
+          </a:prstGeom>
+          <a:solidFill>
+            <a:srgbClr val="BAC8DC"/>
+          </a:solidFill>
+          <a:ln>
+            <a:noFill/>
+          </a:ln>
+        </p:spPr>
+        <p:style>
+          <a:lnRef idx="1">
+            <a:schemeClr val="accent1"/>
+          </a:lnRef>
+          <a:fillRef idx="3">
+            <a:schemeClr val="accent1"/>
+          </a:fillRef>
+          <a:effectRef idx="2">
+            <a:schemeClr val="accent1"/>
+          </a:effectRef>
+          <a:fontRef idx="minor">
+            <a:schemeClr val="lt1"/>
+          </a:fontRef>
+        </p:style>
+        <p:txBody>
+          <a:bodyPr rtlCol="0" anchor="ctr"/>
+          <a:lstStyle/>
+          <a:p>
+            <a:pPr algn="ctr"/>
+          </a:p>
+        </p:txBody>
+      </p:sp>
+      <p:sp>
+        <p:nvSpPr>
+          <p:cNvPr id="17" name="Rectangle 16"/>
+          <p:cNvSpPr/>
+          <p:nvPr/>
+        </p:nvSpPr>
+        <p:spPr>
+          <a:xfrm>
+            <a:off x="4786784" y="1119637"/>
+            <a:ext cx="3365191" cy="3352281"/>
+          </a:xfrm>
+          <a:prstGeom prst="rect">
+            <a:avLst/>
+          </a:prstGeom>
+          <a:solidFill>
+            <a:srgbClr val="FCFDFF"/>
+          </a:solidFill>
+          <a:ln w="7620">
+            <a:solidFill>
+              <a:srgbClr val="BAC8DC"/>
+            </a:solidFill>
+          </a:ln>
+        </p:spPr>
+        <p:style>
+          <a:lnRef idx="1">
+            <a:schemeClr val="accent1"/>
+          </a:lnRef>
+          <a:fillRef idx="3">
+            <a:schemeClr val="accent1"/>
+          </a:fillRef>
+          <a:effectRef idx="2">
+            <a:schemeClr val="accent1"/>
+          </a:effectRef>
+          <a:fontRef idx="minor">
+            <a:schemeClr val="lt1"/>
+          </a:fontRef>
+        </p:style>
+        <p:txBody>
+          <a:bodyPr rtlCol="0" anchor="ctr"/>
+          <a:lstStyle/>
+          <a:p>
+            <a:pPr algn="ctr"/>
+          </a:p>
+        </p:txBody>
+      </p:sp>
       <p:pic>
         <p:nvPicPr>
-          <p:cNvPr id="16" name="Picture 15" descr="innovation_radar.png"/>
+          <p:cNvPr id="18" name="Picture 17" descr="innovation_radar.png"/>
           <p:cNvPicPr>
             <a:picLocks noChangeAspect="1"/>
           </p:cNvPicPr>
@@ -14848,8 +15861,8 @@
         </p:blipFill>
         <p:spPr>
           <a:xfrm>
-            <a:off x="4069080" y="439038"/>
-            <a:ext cx="4800600" cy="4786631"/>
+            <a:off x="4823360" y="1156213"/>
+            <a:ext cx="3292039" cy="3279129"/>
           </a:xfrm>
           <a:prstGeom prst="rect">
             <a:avLst/>
@@ -14858,14 +15871,14 @@
       </p:pic>
       <p:sp>
         <p:nvSpPr>
-          <p:cNvPr id="17" name="TextBox 16"/>
+          <p:cNvPr id="19" name="TextBox 18"/>
           <p:cNvSpPr txBox="1"/>
           <p:nvPr/>
         </p:nvSpPr>
         <p:spPr>
           <a:xfrm>
-            <a:off x="4069080" y="5280533"/>
-            <a:ext cx="4800600" cy="182880"/>
+            <a:off x="4160520" y="4594860"/>
+            <a:ext cx="4617720" cy="201168"/>
           </a:xfrm>
           <a:prstGeom prst="rect">
             <a:avLst/>
@@ -14873,14 +15886,14 @@
           <a:noFill/>
         </p:spPr>
         <p:txBody>
-          <a:bodyPr wrap="none">
+          <a:bodyPr wrap="square" anchor="ctr">
             <a:spAutoFit/>
           </a:bodyPr>
           <a:lstStyle/>
           <a:p>
             <a:pPr algn="ctr"/>
             <a:r>
-              <a:rPr sz="900" b="0">
+              <a:rPr sz="800" b="0">
                 <a:solidFill>
                   <a:srgbClr val="5A6273"/>
                 </a:solidFill>
@@ -15250,8 +16263,8 @@
         </p:nvSpPr>
         <p:spPr>
           <a:xfrm>
-            <a:off x="457200" y="1124712"/>
-            <a:ext cx="3246120" cy="705002"/>
+            <a:off x="438912" y="1106424"/>
+            <a:ext cx="3282696" cy="708660"/>
           </a:xfrm>
           <a:prstGeom prst="rect">
             <a:avLst/>
@@ -15266,10 +16279,10 @@
           <a:p>
             <a:pPr>
               <a:lnSpc>
-                <a:spcPct val="115000"/>
+                <a:spcPct val="112000"/>
               </a:lnSpc>
               <a:spcAft>
-                <a:spcPts val="0"/>
+                <a:spcPts val="200"/>
               </a:spcAft>
             </a:pPr>
             <a:r>
@@ -15293,8 +16306,8 @@
         </p:nvSpPr>
         <p:spPr>
           <a:xfrm>
-            <a:off x="457200" y="1848002"/>
-            <a:ext cx="3246120" cy="705002"/>
+            <a:off x="438912" y="1833372"/>
+            <a:ext cx="3282696" cy="708660"/>
           </a:xfrm>
           <a:prstGeom prst="rect">
             <a:avLst/>
@@ -15309,10 +16322,10 @@
           <a:p>
             <a:pPr>
               <a:lnSpc>
-                <a:spcPct val="115000"/>
+                <a:spcPct val="112000"/>
               </a:lnSpc>
               <a:spcAft>
-                <a:spcPts val="0"/>
+                <a:spcPts val="200"/>
               </a:spcAft>
             </a:pPr>
             <a:r>
@@ -15336,8 +16349,8 @@
         </p:nvSpPr>
         <p:spPr>
           <a:xfrm>
-            <a:off x="457200" y="2571292"/>
-            <a:ext cx="3246120" cy="705002"/>
+            <a:off x="438912" y="2560320"/>
+            <a:ext cx="3282696" cy="708660"/>
           </a:xfrm>
           <a:prstGeom prst="rect">
             <a:avLst/>
@@ -15352,10 +16365,10 @@
           <a:p>
             <a:pPr>
               <a:lnSpc>
-                <a:spcPct val="115000"/>
+                <a:spcPct val="112000"/>
               </a:lnSpc>
               <a:spcAft>
-                <a:spcPts val="0"/>
+                <a:spcPts val="200"/>
               </a:spcAft>
             </a:pPr>
             <a:r>
@@ -15379,8 +16392,8 @@
         </p:nvSpPr>
         <p:spPr>
           <a:xfrm>
-            <a:off x="457200" y="3294583"/>
-            <a:ext cx="3246120" cy="705002"/>
+            <a:off x="438912" y="3287268"/>
+            <a:ext cx="3282696" cy="708660"/>
           </a:xfrm>
           <a:prstGeom prst="rect">
             <a:avLst/>
@@ -15395,10 +16408,10 @@
           <a:p>
             <a:pPr>
               <a:lnSpc>
-                <a:spcPct val="115000"/>
+                <a:spcPct val="112000"/>
               </a:lnSpc>
               <a:spcAft>
-                <a:spcPts val="0"/>
+                <a:spcPts val="200"/>
               </a:spcAft>
             </a:pPr>
             <a:r>
@@ -15422,8 +16435,8 @@
         </p:nvSpPr>
         <p:spPr>
           <a:xfrm>
-            <a:off x="457200" y="4017873"/>
-            <a:ext cx="3246120" cy="705002"/>
+            <a:off x="438912" y="4014216"/>
+            <a:ext cx="3282696" cy="708660"/>
           </a:xfrm>
           <a:prstGeom prst="rect">
             <a:avLst/>
@@ -15438,10 +16451,10 @@
           <a:p>
             <a:pPr>
               <a:lnSpc>
-                <a:spcPct val="115000"/>
+                <a:spcPct val="112000"/>
               </a:lnSpc>
               <a:spcAft>
-                <a:spcPts val="0"/>
+                <a:spcPts val="200"/>
               </a:spcAft>
             </a:pPr>
             <a:r>
@@ -15465,8 +16478,8 @@
         </p:nvSpPr>
         <p:spPr>
           <a:xfrm>
-            <a:off x="4017503" y="1005839"/>
-            <a:ext cx="4903752" cy="3835908"/>
+            <a:off x="4105656" y="1033272"/>
+            <a:ext cx="4727448" cy="3744468"/>
           </a:xfrm>
           <a:prstGeom prst="rect">
             <a:avLst/>
@@ -15474,7 +16487,7 @@
           <a:solidFill>
             <a:srgbClr val="FFFFFF"/>
           </a:solidFill>
-          <a:ln w="10160">
+          <a:ln w="9525">
             <a:solidFill>
               <a:srgbClr val="BAC8DC"/>
             </a:solidFill>
@@ -15502,9 +16515,97 @@
           </a:p>
         </p:txBody>
       </p:sp>
+      <p:sp>
+        <p:nvSpPr>
+          <p:cNvPr id="16" name="Rectangle 15"/>
+          <p:cNvSpPr/>
+          <p:nvPr/>
+        </p:nvSpPr>
+        <p:spPr>
+          <a:xfrm>
+            <a:off x="3968496" y="996696"/>
+            <a:ext cx="10972" cy="3854196"/>
+          </a:xfrm>
+          <a:prstGeom prst="rect">
+            <a:avLst/>
+          </a:prstGeom>
+          <a:solidFill>
+            <a:srgbClr val="BAC8DC"/>
+          </a:solidFill>
+          <a:ln>
+            <a:noFill/>
+          </a:ln>
+        </p:spPr>
+        <p:style>
+          <a:lnRef idx="1">
+            <a:schemeClr val="accent1"/>
+          </a:lnRef>
+          <a:fillRef idx="3">
+            <a:schemeClr val="accent1"/>
+          </a:fillRef>
+          <a:effectRef idx="2">
+            <a:schemeClr val="accent1"/>
+          </a:effectRef>
+          <a:fontRef idx="minor">
+            <a:schemeClr val="lt1"/>
+          </a:fontRef>
+        </p:style>
+        <p:txBody>
+          <a:bodyPr rtlCol="0" anchor="ctr"/>
+          <a:lstStyle/>
+          <a:p>
+            <a:pPr algn="ctr"/>
+          </a:p>
+        </p:txBody>
+      </p:sp>
+      <p:sp>
+        <p:nvSpPr>
+          <p:cNvPr id="17" name="Rectangle 16"/>
+          <p:cNvSpPr/>
+          <p:nvPr/>
+        </p:nvSpPr>
+        <p:spPr>
+          <a:xfrm>
+            <a:off x="4262475" y="1186911"/>
+            <a:ext cx="4413808" cy="3217732"/>
+          </a:xfrm>
+          <a:prstGeom prst="rect">
+            <a:avLst/>
+          </a:prstGeom>
+          <a:solidFill>
+            <a:srgbClr val="FCFDFF"/>
+          </a:solidFill>
+          <a:ln w="7620">
+            <a:solidFill>
+              <a:srgbClr val="BAC8DC"/>
+            </a:solidFill>
+          </a:ln>
+        </p:spPr>
+        <p:style>
+          <a:lnRef idx="1">
+            <a:schemeClr val="accent1"/>
+          </a:lnRef>
+          <a:fillRef idx="3">
+            <a:schemeClr val="accent1"/>
+          </a:fillRef>
+          <a:effectRef idx="2">
+            <a:schemeClr val="accent1"/>
+          </a:effectRef>
+          <a:fontRef idx="minor">
+            <a:schemeClr val="lt1"/>
+          </a:fontRef>
+        </p:style>
+        <p:txBody>
+          <a:bodyPr rtlCol="0" anchor="ctr"/>
+          <a:lstStyle/>
+          <a:p>
+            <a:pPr algn="ctr"/>
+          </a:p>
+        </p:txBody>
+      </p:sp>
       <p:pic>
         <p:nvPicPr>
-          <p:cNvPr id="16" name="Picture 15" descr="roadmap_gantt.png"/>
+          <p:cNvPr id="18" name="Picture 17" descr="roadmap_gantt.png"/>
           <p:cNvPicPr>
             <a:picLocks noChangeAspect="1"/>
           </p:cNvPicPr>
@@ -15518,8 +16619,8 @@
         </p:blipFill>
         <p:spPr>
           <a:xfrm>
-            <a:off x="4063223" y="1051560"/>
-            <a:ext cx="4812312" cy="3561588"/>
+            <a:off x="4299051" y="1223487"/>
+            <a:ext cx="4340656" cy="3144580"/>
           </a:xfrm>
           <a:prstGeom prst="rect">
             <a:avLst/>
@@ -15528,14 +16629,14 @@
       </p:pic>
       <p:sp>
         <p:nvSpPr>
-          <p:cNvPr id="17" name="TextBox 16"/>
+          <p:cNvPr id="19" name="TextBox 18"/>
           <p:cNvSpPr txBox="1"/>
           <p:nvPr/>
         </p:nvSpPr>
         <p:spPr>
           <a:xfrm>
-            <a:off x="4069080" y="4668012"/>
-            <a:ext cx="4800600" cy="182880"/>
+            <a:off x="4160520" y="4594860"/>
+            <a:ext cx="4617720" cy="201168"/>
           </a:xfrm>
           <a:prstGeom prst="rect">
             <a:avLst/>
@@ -15543,14 +16644,14 @@
           <a:noFill/>
         </p:spPr>
         <p:txBody>
-          <a:bodyPr wrap="none">
+          <a:bodyPr wrap="square" anchor="ctr">
             <a:spAutoFit/>
           </a:bodyPr>
           <a:lstStyle/>
           <a:p>
             <a:pPr algn="ctr"/>
             <a:r>
-              <a:rPr sz="900" b="0">
+              <a:rPr sz="800" b="0">
                 <a:solidFill>
                   <a:srgbClr val="5A6273"/>
                 </a:solidFill>
@@ -16290,8 +17391,8 @@
         </p:nvSpPr>
         <p:spPr>
           <a:xfrm>
-            <a:off x="457200" y="1124712"/>
-            <a:ext cx="3246120" cy="885825"/>
+            <a:off x="438912" y="1106424"/>
+            <a:ext cx="3282696" cy="890397"/>
           </a:xfrm>
           <a:prstGeom prst="rect">
             <a:avLst/>
@@ -16306,10 +17407,10 @@
           <a:p>
             <a:pPr>
               <a:lnSpc>
-                <a:spcPct val="115000"/>
+                <a:spcPct val="112000"/>
               </a:lnSpc>
               <a:spcAft>
-                <a:spcPts val="0"/>
+                <a:spcPts val="200"/>
               </a:spcAft>
             </a:pPr>
             <a:r>
@@ -16333,8 +17434,8 @@
         </p:nvSpPr>
         <p:spPr>
           <a:xfrm>
-            <a:off x="457200" y="2028825"/>
-            <a:ext cx="3246120" cy="885825"/>
+            <a:off x="438912" y="2015109"/>
+            <a:ext cx="3282696" cy="890397"/>
           </a:xfrm>
           <a:prstGeom prst="rect">
             <a:avLst/>
@@ -16349,10 +17450,10 @@
           <a:p>
             <a:pPr>
               <a:lnSpc>
-                <a:spcPct val="115000"/>
+                <a:spcPct val="112000"/>
               </a:lnSpc>
               <a:spcAft>
-                <a:spcPts val="0"/>
+                <a:spcPts val="200"/>
               </a:spcAft>
             </a:pPr>
             <a:r>
@@ -16376,8 +17477,8 @@
         </p:nvSpPr>
         <p:spPr>
           <a:xfrm>
-            <a:off x="457200" y="2932938"/>
-            <a:ext cx="3246120" cy="885825"/>
+            <a:off x="438912" y="2923794"/>
+            <a:ext cx="3282696" cy="890397"/>
           </a:xfrm>
           <a:prstGeom prst="rect">
             <a:avLst/>
@@ -16392,10 +17493,10 @@
           <a:p>
             <a:pPr>
               <a:lnSpc>
-                <a:spcPct val="115000"/>
+                <a:spcPct val="112000"/>
               </a:lnSpc>
               <a:spcAft>
-                <a:spcPts val="0"/>
+                <a:spcPts val="200"/>
               </a:spcAft>
             </a:pPr>
             <a:r>
@@ -16419,8 +17520,8 @@
         </p:nvSpPr>
         <p:spPr>
           <a:xfrm>
-            <a:off x="457200" y="3837051"/>
-            <a:ext cx="3246120" cy="885825"/>
+            <a:off x="438912" y="3832479"/>
+            <a:ext cx="3282696" cy="890397"/>
           </a:xfrm>
           <a:prstGeom prst="rect">
             <a:avLst/>
@@ -16435,10 +17536,10 @@
           <a:p>
             <a:pPr>
               <a:lnSpc>
-                <a:spcPct val="115000"/>
+                <a:spcPct val="112000"/>
               </a:lnSpc>
               <a:spcAft>
-                <a:spcPts val="0"/>
+                <a:spcPts val="200"/>
               </a:spcAft>
             </a:pPr>
             <a:r>
@@ -16462,8 +17563,8 @@
         </p:nvSpPr>
         <p:spPr>
           <a:xfrm>
-            <a:off x="4206240" y="1133856"/>
-            <a:ext cx="1828800" cy="2011680"/>
+            <a:off x="4105656" y="1033272"/>
+            <a:ext cx="4727448" cy="3744468"/>
           </a:xfrm>
           <a:prstGeom prst="rect">
             <a:avLst/>
@@ -16471,7 +17572,7 @@
           <a:solidFill>
             <a:srgbClr val="FFFFFF"/>
           </a:solidFill>
-          <a:ln w="10160">
+          <a:ln w="9525">
             <a:solidFill>
               <a:srgbClr val="BAC8DC"/>
             </a:solidFill>
@@ -16515,8 +17616,8 @@
         </p:blipFill>
         <p:spPr>
           <a:xfrm>
-            <a:off x="4251959" y="1179576"/>
-            <a:ext cx="1737360" cy="1737360"/>
+            <a:off x="4342302" y="1288206"/>
+            <a:ext cx="1236634" cy="1236634"/>
           </a:xfrm>
           <a:prstGeom prst="rect">
             <a:avLst/>
@@ -16531,8 +17632,8 @@
         </p:nvSpPr>
         <p:spPr>
           <a:xfrm>
-            <a:off x="4160520" y="2971800"/>
-            <a:ext cx="1920240" cy="182880"/>
+            <a:off x="4160520" y="2633472"/>
+            <a:ext cx="1600200" cy="201168"/>
           </a:xfrm>
           <a:prstGeom prst="rect">
             <a:avLst/>
@@ -16540,14 +17641,14 @@
           <a:noFill/>
         </p:spPr>
         <p:txBody>
-          <a:bodyPr wrap="none">
+          <a:bodyPr wrap="square" anchor="ctr">
             <a:spAutoFit/>
           </a:bodyPr>
           <a:lstStyle/>
           <a:p>
             <a:pPr algn="ctr"/>
             <a:r>
-              <a:rPr sz="900" b="0">
+              <a:rPr sz="800" b="0">
                 <a:solidFill>
                   <a:srgbClr val="5A6273"/>
                 </a:solidFill>
@@ -16559,54 +17660,9 @@
           </a:p>
         </p:txBody>
       </p:sp>
-      <p:sp>
-        <p:nvSpPr>
-          <p:cNvPr id="17" name="Rectangle 16"/>
-          <p:cNvSpPr/>
-          <p:nvPr/>
-        </p:nvSpPr>
-        <p:spPr>
-          <a:xfrm>
-            <a:off x="6288094" y="1088136"/>
-            <a:ext cx="2419971" cy="3762756"/>
-          </a:xfrm>
-          <a:prstGeom prst="rect">
-            <a:avLst/>
-          </a:prstGeom>
-          <a:solidFill>
-            <a:srgbClr val="FFFFFF"/>
-          </a:solidFill>
-          <a:ln w="10160">
-            <a:solidFill>
-              <a:srgbClr val="BAC8DC"/>
-            </a:solidFill>
-          </a:ln>
-        </p:spPr>
-        <p:style>
-          <a:lnRef idx="1">
-            <a:schemeClr val="accent1"/>
-          </a:lnRef>
-          <a:fillRef idx="3">
-            <a:schemeClr val="accent1"/>
-          </a:fillRef>
-          <a:effectRef idx="2">
-            <a:schemeClr val="accent1"/>
-          </a:effectRef>
-          <a:fontRef idx="minor">
-            <a:schemeClr val="lt1"/>
-          </a:fontRef>
-        </p:style>
-        <p:txBody>
-          <a:bodyPr rtlCol="0" anchor="ctr"/>
-          <a:lstStyle/>
-          <a:p>
-            <a:pPr algn="ctr"/>
-          </a:p>
-        </p:txBody>
-      </p:sp>
       <p:pic>
         <p:nvPicPr>
-          <p:cNvPr id="18" name="Picture 17" descr="ppt_mediapipe_pose.png"/>
+          <p:cNvPr id="17" name="Picture 16" descr="ppt_mediapipe_pose.png"/>
           <p:cNvPicPr>
             <a:picLocks noChangeAspect="1"/>
           </p:cNvPicPr>
@@ -16620,8 +17676,8 @@
         </p:blipFill>
         <p:spPr>
           <a:xfrm>
-            <a:off x="6333814" y="1133856"/>
-            <a:ext cx="2328531" cy="3488436"/>
+            <a:off x="6253219" y="1191097"/>
+            <a:ext cx="2142248" cy="3209361"/>
           </a:xfrm>
           <a:prstGeom prst="rect">
             <a:avLst/>
@@ -16630,14 +17686,14 @@
       </p:pic>
       <p:sp>
         <p:nvSpPr>
-          <p:cNvPr id="19" name="TextBox 18"/>
+          <p:cNvPr id="18" name="TextBox 17"/>
           <p:cNvSpPr txBox="1"/>
           <p:nvPr/>
         </p:nvSpPr>
         <p:spPr>
           <a:xfrm>
-            <a:off x="6217920" y="4677156"/>
-            <a:ext cx="2560320" cy="182880"/>
+            <a:off x="5870448" y="4594860"/>
+            <a:ext cx="2907791" cy="201168"/>
           </a:xfrm>
           <a:prstGeom prst="rect">
             <a:avLst/>
@@ -16645,14 +17701,14 @@
           <a:noFill/>
         </p:spPr>
         <p:txBody>
-          <a:bodyPr wrap="none">
+          <a:bodyPr wrap="square" anchor="ctr">
             <a:spAutoFit/>
           </a:bodyPr>
           <a:lstStyle/>
           <a:p>
             <a:pPr algn="ctr"/>
             <a:r>
-              <a:rPr sz="900" b="0">
+              <a:rPr sz="800" b="0">
                 <a:solidFill>
                   <a:srgbClr val="5A6273"/>
                 </a:solidFill>
@@ -17022,8 +18078,8 @@
         </p:nvSpPr>
         <p:spPr>
           <a:xfrm>
-            <a:off x="457200" y="1124712"/>
-            <a:ext cx="3246120" cy="885825"/>
+            <a:off x="438912" y="1106424"/>
+            <a:ext cx="3282696" cy="890397"/>
           </a:xfrm>
           <a:prstGeom prst="rect">
             <a:avLst/>
@@ -17038,10 +18094,10 @@
           <a:p>
             <a:pPr>
               <a:lnSpc>
-                <a:spcPct val="115000"/>
+                <a:spcPct val="112000"/>
               </a:lnSpc>
               <a:spcAft>
-                <a:spcPts val="0"/>
+                <a:spcPts val="200"/>
               </a:spcAft>
             </a:pPr>
             <a:r>
@@ -17065,8 +18121,8 @@
         </p:nvSpPr>
         <p:spPr>
           <a:xfrm>
-            <a:off x="457200" y="2028825"/>
-            <a:ext cx="3246120" cy="885825"/>
+            <a:off x="438912" y="2015109"/>
+            <a:ext cx="3282696" cy="890397"/>
           </a:xfrm>
           <a:prstGeom prst="rect">
             <a:avLst/>
@@ -17081,10 +18137,10 @@
           <a:p>
             <a:pPr>
               <a:lnSpc>
-                <a:spcPct val="115000"/>
+                <a:spcPct val="112000"/>
               </a:lnSpc>
               <a:spcAft>
-                <a:spcPts val="0"/>
+                <a:spcPts val="200"/>
               </a:spcAft>
             </a:pPr>
             <a:r>
@@ -17108,8 +18164,8 @@
         </p:nvSpPr>
         <p:spPr>
           <a:xfrm>
-            <a:off x="457200" y="2932938"/>
-            <a:ext cx="3246120" cy="885825"/>
+            <a:off x="438912" y="2923794"/>
+            <a:ext cx="3282696" cy="890397"/>
           </a:xfrm>
           <a:prstGeom prst="rect">
             <a:avLst/>
@@ -17124,10 +18180,10 @@
           <a:p>
             <a:pPr>
               <a:lnSpc>
-                <a:spcPct val="115000"/>
+                <a:spcPct val="112000"/>
               </a:lnSpc>
               <a:spcAft>
-                <a:spcPts val="0"/>
+                <a:spcPts val="200"/>
               </a:spcAft>
             </a:pPr>
             <a:r>
@@ -17151,8 +18207,8 @@
         </p:nvSpPr>
         <p:spPr>
           <a:xfrm>
-            <a:off x="457200" y="3837051"/>
-            <a:ext cx="3246120" cy="885825"/>
+            <a:off x="438912" y="3832479"/>
+            <a:ext cx="3282696" cy="890397"/>
           </a:xfrm>
           <a:prstGeom prst="rect">
             <a:avLst/>
@@ -17167,10 +18223,10 @@
           <a:p>
             <a:pPr>
               <a:lnSpc>
-                <a:spcPct val="115000"/>
+                <a:spcPct val="112000"/>
               </a:lnSpc>
               <a:spcAft>
-                <a:spcPts val="0"/>
+                <a:spcPts val="200"/>
               </a:spcAft>
             </a:pPr>
             <a:r>
@@ -17709,16 +18765,16 @@
         </p:nvSpPr>
         <p:spPr>
           <a:xfrm>
-            <a:off x="106161" y="1567756"/>
-            <a:ext cx="4222516" cy="2428611"/>
-          </a:xfrm>
-          <a:prstGeom prst="rect">
-            <a:avLst/>
-          </a:prstGeom>
-          <a:solidFill>
-            <a:srgbClr val="FFFFFF"/>
-          </a:solidFill>
-          <a:ln w="10160">
+            <a:off x="115305" y="1540324"/>
+            <a:ext cx="4204228" cy="2227443"/>
+          </a:xfrm>
+          <a:prstGeom prst="rect">
+            <a:avLst/>
+          </a:prstGeom>
+          <a:solidFill>
+            <a:srgbClr val="FCFDFF"/>
+          </a:solidFill>
+          <a:ln w="7620">
             <a:solidFill>
               <a:srgbClr val="BAC8DC"/>
             </a:solidFill>
@@ -17762,7 +18818,7 @@
         </p:blipFill>
         <p:spPr>
           <a:xfrm>
-            <a:off x="151881" y="1613476"/>
+            <a:off x="151881" y="1576900"/>
             <a:ext cx="4131076" cy="2154291"/>
           </a:xfrm>
           <a:prstGeom prst="rect">
@@ -17778,8 +18834,8 @@
         </p:nvSpPr>
         <p:spPr>
           <a:xfrm>
-            <a:off x="109728" y="3822631"/>
-            <a:ext cx="4215383" cy="182880"/>
+            <a:off x="109728" y="4850892"/>
+            <a:ext cx="4215383" cy="201168"/>
           </a:xfrm>
           <a:prstGeom prst="rect">
             <a:avLst/>
@@ -17787,14 +18843,14 @@
           <a:noFill/>
         </p:spPr>
         <p:txBody>
-          <a:bodyPr wrap="none">
+          <a:bodyPr wrap="square" anchor="ctr">
             <a:spAutoFit/>
           </a:bodyPr>
           <a:lstStyle/>
           <a:p>
             <a:pPr algn="ctr"/>
             <a:r>
-              <a:rPr sz="900" b="0">
+              <a:rPr sz="800" b="0">
                 <a:solidFill>
                   <a:srgbClr val="5A6273"/>
                 </a:solidFill>
@@ -17967,16 +19023,16 @@
         </p:nvSpPr>
         <p:spPr>
           <a:xfrm>
-            <a:off x="5852159" y="3017520"/>
-            <a:ext cx="1325880" cy="1508760"/>
-          </a:xfrm>
-          <a:prstGeom prst="rect">
-            <a:avLst/>
-          </a:prstGeom>
-          <a:solidFill>
-            <a:srgbClr val="FFFFFF"/>
-          </a:solidFill>
-          <a:ln w="10160">
+            <a:off x="5897879" y="3026664"/>
+            <a:ext cx="1234440" cy="1161288"/>
+          </a:xfrm>
+          <a:prstGeom prst="rect">
+            <a:avLst/>
+          </a:prstGeom>
+          <a:solidFill>
+            <a:srgbClr val="FCFDFF"/>
+          </a:solidFill>
+          <a:ln w="7620">
             <a:solidFill>
               <a:srgbClr val="BAC8DC"/>
             </a:solidFill>
@@ -18020,8 +19076,8 @@
         </p:blipFill>
         <p:spPr>
           <a:xfrm>
-            <a:off x="5897879" y="3063240"/>
-            <a:ext cx="1234440" cy="1234440"/>
+            <a:off x="5934455" y="3063240"/>
+            <a:ext cx="1161288" cy="1161288"/>
           </a:xfrm>
           <a:prstGeom prst="rect">
             <a:avLst/>
@@ -18036,8 +19092,8 @@
         </p:nvSpPr>
         <p:spPr>
           <a:xfrm>
-            <a:off x="5806440" y="4352544"/>
-            <a:ext cx="1417320" cy="182880"/>
+            <a:off x="5806440" y="4279392"/>
+            <a:ext cx="1417320" cy="201168"/>
           </a:xfrm>
           <a:prstGeom prst="rect">
             <a:avLst/>
@@ -18045,14 +19101,14 @@
           <a:noFill/>
         </p:spPr>
         <p:txBody>
-          <a:bodyPr wrap="none">
+          <a:bodyPr wrap="square" anchor="ctr">
             <a:spAutoFit/>
           </a:bodyPr>
           <a:lstStyle/>
           <a:p>
             <a:pPr algn="ctr"/>
             <a:r>
-              <a:rPr sz="900" b="0">
+              <a:rPr sz="800" b="0">
                 <a:solidFill>
                   <a:srgbClr val="5A6273"/>
                 </a:solidFill>
@@ -18722,9 +19778,54 @@
           </a:p>
         </p:txBody>
       </p:sp>
+      <p:sp>
+        <p:nvSpPr>
+          <p:cNvPr id="18" name="Rectangle 17"/>
+          <p:cNvSpPr/>
+          <p:nvPr/>
+        </p:nvSpPr>
+        <p:spPr>
+          <a:xfrm>
+            <a:off x="4694986" y="1472215"/>
+            <a:ext cx="4097426" cy="2866581"/>
+          </a:xfrm>
+          <a:prstGeom prst="rect">
+            <a:avLst/>
+          </a:prstGeom>
+          <a:solidFill>
+            <a:srgbClr val="FCFDFF"/>
+          </a:solidFill>
+          <a:ln w="7620">
+            <a:solidFill>
+              <a:srgbClr val="BAC8DC"/>
+            </a:solidFill>
+          </a:ln>
+        </p:spPr>
+        <p:style>
+          <a:lnRef idx="1">
+            <a:schemeClr val="accent1"/>
+          </a:lnRef>
+          <a:fillRef idx="3">
+            <a:schemeClr val="accent1"/>
+          </a:fillRef>
+          <a:effectRef idx="2">
+            <a:schemeClr val="accent1"/>
+          </a:effectRef>
+          <a:fontRef idx="minor">
+            <a:schemeClr val="lt1"/>
+          </a:fontRef>
+        </p:style>
+        <p:txBody>
+          <a:bodyPr rtlCol="0" anchor="ctr"/>
+          <a:lstStyle/>
+          <a:p>
+            <a:pPr algn="ctr"/>
+          </a:p>
+        </p:txBody>
+      </p:sp>
       <p:pic>
         <p:nvPicPr>
-          <p:cNvPr id="18" name="Picture 17" descr="aging_trend.png"/>
+          <p:cNvPr id="19" name="Picture 18" descr="aging_trend.png"/>
           <p:cNvPicPr>
             <a:picLocks noChangeAspect="1"/>
           </p:cNvPicPr>
@@ -18738,8 +19839,8 @@
         </p:blipFill>
         <p:spPr>
           <a:xfrm>
-            <a:off x="4155300" y="1107292"/>
-            <a:ext cx="5176798" cy="3669578"/>
+            <a:off x="4731562" y="1508791"/>
+            <a:ext cx="4024274" cy="2793429"/>
           </a:xfrm>
           <a:prstGeom prst="rect">
             <a:avLst/>
@@ -19104,8 +20205,8 @@
         </p:nvSpPr>
         <p:spPr>
           <a:xfrm>
-            <a:off x="457200" y="1124712"/>
-            <a:ext cx="3246120" cy="803529"/>
+            <a:off x="438912" y="1106424"/>
+            <a:ext cx="3282696" cy="812673"/>
           </a:xfrm>
           <a:prstGeom prst="rect">
             <a:avLst/>
@@ -19120,10 +20221,10 @@
           <a:p>
             <a:pPr>
               <a:lnSpc>
-                <a:spcPct val="115000"/>
+                <a:spcPct val="112000"/>
               </a:lnSpc>
               <a:spcAft>
-                <a:spcPts val="0"/>
+                <a:spcPts val="200"/>
               </a:spcAft>
             </a:pPr>
             <a:r>
@@ -19147,8 +20248,8 @@
         </p:nvSpPr>
         <p:spPr>
           <a:xfrm>
-            <a:off x="457200" y="1946529"/>
-            <a:ext cx="3246120" cy="803529"/>
+            <a:off x="438912" y="1937385"/>
+            <a:ext cx="3282696" cy="812673"/>
           </a:xfrm>
           <a:prstGeom prst="rect">
             <a:avLst/>
@@ -19163,10 +20264,10 @@
           <a:p>
             <a:pPr>
               <a:lnSpc>
-                <a:spcPct val="115000"/>
+                <a:spcPct val="112000"/>
               </a:lnSpc>
               <a:spcAft>
-                <a:spcPts val="0"/>
+                <a:spcPts val="200"/>
               </a:spcAft>
             </a:pPr>
             <a:r>
@@ -19190,8 +20291,8 @@
         </p:nvSpPr>
         <p:spPr>
           <a:xfrm>
-            <a:off x="457200" y="2768346"/>
-            <a:ext cx="3246120" cy="803529"/>
+            <a:off x="438912" y="2768346"/>
+            <a:ext cx="3282696" cy="812673"/>
           </a:xfrm>
           <a:prstGeom prst="rect">
             <a:avLst/>
@@ -19206,10 +20307,10 @@
           <a:p>
             <a:pPr>
               <a:lnSpc>
-                <a:spcPct val="115000"/>
+                <a:spcPct val="112000"/>
               </a:lnSpc>
               <a:spcAft>
-                <a:spcPts val="0"/>
+                <a:spcPts val="200"/>
               </a:spcAft>
             </a:pPr>
             <a:r>
@@ -19233,8 +20334,8 @@
         </p:nvSpPr>
         <p:spPr>
           <a:xfrm>
-            <a:off x="457200" y="3590163"/>
-            <a:ext cx="3246120" cy="803529"/>
+            <a:off x="438912" y="3599307"/>
+            <a:ext cx="3282696" cy="812673"/>
           </a:xfrm>
           <a:prstGeom prst="rect">
             <a:avLst/>
@@ -19249,10 +20350,10 @@
           <a:p>
             <a:pPr>
               <a:lnSpc>
-                <a:spcPct val="115000"/>
+                <a:spcPct val="112000"/>
               </a:lnSpc>
               <a:spcAft>
-                <a:spcPts val="0"/>
+                <a:spcPts val="200"/>
               </a:spcAft>
             </a:pPr>
             <a:r>
@@ -19276,8 +20377,8 @@
         </p:nvSpPr>
         <p:spPr>
           <a:xfrm>
-            <a:off x="365760" y="4521708"/>
-            <a:ext cx="3429000" cy="310896"/>
+            <a:off x="365760" y="4539996"/>
+            <a:ext cx="3429000" cy="292608"/>
           </a:xfrm>
           <a:prstGeom prst="rect">
             <a:avLst/>
@@ -19319,8 +20420,8 @@
         </p:nvSpPr>
         <p:spPr>
           <a:xfrm>
-            <a:off x="402336" y="4585716"/>
-            <a:ext cx="3355848" cy="201167"/>
+            <a:off x="402336" y="4604004"/>
+            <a:ext cx="3355848" cy="182880"/>
           </a:xfrm>
           <a:prstGeom prst="rect">
             <a:avLst/>
@@ -19355,8 +20456,8 @@
         </p:nvSpPr>
         <p:spPr>
           <a:xfrm>
-            <a:off x="3911433" y="1005840"/>
-            <a:ext cx="5115892" cy="3835908"/>
+            <a:off x="4105656" y="1033272"/>
+            <a:ext cx="4727448" cy="3744468"/>
           </a:xfrm>
           <a:prstGeom prst="rect">
             <a:avLst/>
@@ -19364,7 +20465,7 @@
           <a:solidFill>
             <a:srgbClr val="FFFFFF"/>
           </a:solidFill>
-          <a:ln w="10160">
+          <a:ln w="9525">
             <a:solidFill>
               <a:srgbClr val="BAC8DC"/>
             </a:solidFill>
@@ -19392,9 +20493,97 @@
           </a:p>
         </p:txBody>
       </p:sp>
+      <p:sp>
+        <p:nvSpPr>
+          <p:cNvPr id="17" name="Rectangle 16"/>
+          <p:cNvSpPr/>
+          <p:nvPr/>
+        </p:nvSpPr>
+        <p:spPr>
+          <a:xfrm>
+            <a:off x="3968496" y="996696"/>
+            <a:ext cx="10972" cy="3854196"/>
+          </a:xfrm>
+          <a:prstGeom prst="rect">
+            <a:avLst/>
+          </a:prstGeom>
+          <a:solidFill>
+            <a:srgbClr val="BAC8DC"/>
+          </a:solidFill>
+          <a:ln>
+            <a:noFill/>
+          </a:ln>
+        </p:spPr>
+        <p:style>
+          <a:lnRef idx="1">
+            <a:schemeClr val="accent1"/>
+          </a:lnRef>
+          <a:fillRef idx="3">
+            <a:schemeClr val="accent1"/>
+          </a:fillRef>
+          <a:effectRef idx="2">
+            <a:schemeClr val="accent1"/>
+          </a:effectRef>
+          <a:fontRef idx="minor">
+            <a:schemeClr val="lt1"/>
+          </a:fontRef>
+        </p:style>
+        <p:txBody>
+          <a:bodyPr rtlCol="0" anchor="ctr"/>
+          <a:lstStyle/>
+          <a:p>
+            <a:pPr algn="ctr"/>
+          </a:p>
+        </p:txBody>
+      </p:sp>
+      <p:sp>
+        <p:nvSpPr>
+          <p:cNvPr id="18" name="Rectangle 17"/>
+          <p:cNvSpPr/>
+          <p:nvPr/>
+        </p:nvSpPr>
+        <p:spPr>
+          <a:xfrm>
+            <a:off x="4262475" y="1252679"/>
+            <a:ext cx="4413808" cy="3086196"/>
+          </a:xfrm>
+          <a:prstGeom prst="rect">
+            <a:avLst/>
+          </a:prstGeom>
+          <a:solidFill>
+            <a:srgbClr val="FCFDFF"/>
+          </a:solidFill>
+          <a:ln w="7620">
+            <a:solidFill>
+              <a:srgbClr val="BAC8DC"/>
+            </a:solidFill>
+          </a:ln>
+        </p:spPr>
+        <p:style>
+          <a:lnRef idx="1">
+            <a:schemeClr val="accent1"/>
+          </a:lnRef>
+          <a:fillRef idx="3">
+            <a:schemeClr val="accent1"/>
+          </a:fillRef>
+          <a:effectRef idx="2">
+            <a:schemeClr val="accent1"/>
+          </a:effectRef>
+          <a:fontRef idx="minor">
+            <a:schemeClr val="lt1"/>
+          </a:fontRef>
+        </p:style>
+        <p:txBody>
+          <a:bodyPr rtlCol="0" anchor="ctr"/>
+          <a:lstStyle/>
+          <a:p>
+            <a:pPr algn="ctr"/>
+          </a:p>
+        </p:txBody>
+      </p:sp>
       <p:pic>
         <p:nvPicPr>
-          <p:cNvPr id="17" name="Picture 16" descr="aging_trend.png"/>
+          <p:cNvPr id="19" name="Picture 18" descr="aging_trend.png"/>
           <p:cNvPicPr>
             <a:picLocks noChangeAspect="1"/>
           </p:cNvPicPr>
@@ -19408,8 +20597,8 @@
         </p:blipFill>
         <p:spPr>
           <a:xfrm>
-            <a:off x="3957153" y="1051560"/>
-            <a:ext cx="5024452" cy="3561588"/>
+            <a:off x="4299051" y="1289255"/>
+            <a:ext cx="4340656" cy="3013044"/>
           </a:xfrm>
           <a:prstGeom prst="rect">
             <a:avLst/>
@@ -19418,14 +20607,14 @@
       </p:pic>
       <p:sp>
         <p:nvSpPr>
-          <p:cNvPr id="18" name="TextBox 17"/>
+          <p:cNvPr id="20" name="TextBox 19"/>
           <p:cNvSpPr txBox="1"/>
           <p:nvPr/>
         </p:nvSpPr>
         <p:spPr>
           <a:xfrm>
-            <a:off x="4069080" y="4668012"/>
-            <a:ext cx="4800600" cy="182880"/>
+            <a:off x="4160520" y="4594860"/>
+            <a:ext cx="4617720" cy="201168"/>
           </a:xfrm>
           <a:prstGeom prst="rect">
             <a:avLst/>
@@ -19433,14 +20622,14 @@
           <a:noFill/>
         </p:spPr>
         <p:txBody>
-          <a:bodyPr wrap="none">
+          <a:bodyPr wrap="square" anchor="ctr">
             <a:spAutoFit/>
           </a:bodyPr>
           <a:lstStyle/>
           <a:p>
             <a:pPr algn="ctr"/>
             <a:r>
-              <a:rPr sz="900" b="0">
+              <a:rPr sz="800" b="0">
                 <a:solidFill>
                   <a:srgbClr val="5A6273"/>
                 </a:solidFill>
@@ -19810,8 +20999,8 @@
         </p:nvSpPr>
         <p:spPr>
           <a:xfrm>
-            <a:off x="457200" y="1124712"/>
-            <a:ext cx="3246120" cy="885825"/>
+            <a:off x="438912" y="1106424"/>
+            <a:ext cx="3282696" cy="890397"/>
           </a:xfrm>
           <a:prstGeom prst="rect">
             <a:avLst/>
@@ -19826,10 +21015,10 @@
           <a:p>
             <a:pPr>
               <a:lnSpc>
-                <a:spcPct val="115000"/>
+                <a:spcPct val="112000"/>
               </a:lnSpc>
               <a:spcAft>
-                <a:spcPts val="0"/>
+                <a:spcPts val="200"/>
               </a:spcAft>
             </a:pPr>
             <a:r>
@@ -19853,8 +21042,8 @@
         </p:nvSpPr>
         <p:spPr>
           <a:xfrm>
-            <a:off x="457200" y="2028825"/>
-            <a:ext cx="3246120" cy="885825"/>
+            <a:off x="438912" y="2015109"/>
+            <a:ext cx="3282696" cy="890397"/>
           </a:xfrm>
           <a:prstGeom prst="rect">
             <a:avLst/>
@@ -19869,10 +21058,10 @@
           <a:p>
             <a:pPr>
               <a:lnSpc>
-                <a:spcPct val="115000"/>
+                <a:spcPct val="112000"/>
               </a:lnSpc>
               <a:spcAft>
-                <a:spcPts val="0"/>
+                <a:spcPts val="200"/>
               </a:spcAft>
             </a:pPr>
             <a:r>
@@ -19896,8 +21085,8 @@
         </p:nvSpPr>
         <p:spPr>
           <a:xfrm>
-            <a:off x="457200" y="2932938"/>
-            <a:ext cx="3246120" cy="885825"/>
+            <a:off x="438912" y="2923794"/>
+            <a:ext cx="3282696" cy="890397"/>
           </a:xfrm>
           <a:prstGeom prst="rect">
             <a:avLst/>
@@ -19912,10 +21101,10 @@
           <a:p>
             <a:pPr>
               <a:lnSpc>
-                <a:spcPct val="115000"/>
+                <a:spcPct val="112000"/>
               </a:lnSpc>
               <a:spcAft>
-                <a:spcPts val="0"/>
+                <a:spcPts val="200"/>
               </a:spcAft>
             </a:pPr>
             <a:r>
@@ -19939,8 +21128,8 @@
         </p:nvSpPr>
         <p:spPr>
           <a:xfrm>
-            <a:off x="457200" y="3837051"/>
-            <a:ext cx="3246120" cy="885825"/>
+            <a:off x="438912" y="3832479"/>
+            <a:ext cx="3282696" cy="890397"/>
           </a:xfrm>
           <a:prstGeom prst="rect">
             <a:avLst/>
@@ -19955,10 +21144,10 @@
           <a:p>
             <a:pPr>
               <a:lnSpc>
-                <a:spcPct val="115000"/>
+                <a:spcPct val="112000"/>
               </a:lnSpc>
               <a:spcAft>
-                <a:spcPts val="0"/>
+                <a:spcPts val="200"/>
               </a:spcAft>
             </a:pPr>
             <a:r>
@@ -19982,8 +21171,8 @@
         </p:nvSpPr>
         <p:spPr>
           <a:xfrm>
-            <a:off x="3295588" y="1005840"/>
-            <a:ext cx="6347582" cy="3835908"/>
+            <a:off x="4105656" y="1033272"/>
+            <a:ext cx="4727448" cy="3744468"/>
           </a:xfrm>
           <a:prstGeom prst="rect">
             <a:avLst/>
@@ -19991,7 +21180,7 @@
           <a:solidFill>
             <a:srgbClr val="FFFFFF"/>
           </a:solidFill>
-          <a:ln w="10160">
+          <a:ln w="9525">
             <a:solidFill>
               <a:srgbClr val="BAC8DC"/>
             </a:solidFill>
@@ -20019,9 +21208,97 @@
           </a:p>
         </p:txBody>
       </p:sp>
+      <p:sp>
+        <p:nvSpPr>
+          <p:cNvPr id="15" name="Rectangle 14"/>
+          <p:cNvSpPr/>
+          <p:nvPr/>
+        </p:nvSpPr>
+        <p:spPr>
+          <a:xfrm>
+            <a:off x="3968496" y="996696"/>
+            <a:ext cx="10972" cy="3854196"/>
+          </a:xfrm>
+          <a:prstGeom prst="rect">
+            <a:avLst/>
+          </a:prstGeom>
+          <a:solidFill>
+            <a:srgbClr val="BAC8DC"/>
+          </a:solidFill>
+          <a:ln>
+            <a:noFill/>
+          </a:ln>
+        </p:spPr>
+        <p:style>
+          <a:lnRef idx="1">
+            <a:schemeClr val="accent1"/>
+          </a:lnRef>
+          <a:fillRef idx="3">
+            <a:schemeClr val="accent1"/>
+          </a:fillRef>
+          <a:effectRef idx="2">
+            <a:schemeClr val="accent1"/>
+          </a:effectRef>
+          <a:fontRef idx="minor">
+            <a:schemeClr val="lt1"/>
+          </a:fontRef>
+        </p:style>
+        <p:txBody>
+          <a:bodyPr rtlCol="0" anchor="ctr"/>
+          <a:lstStyle/>
+          <a:p>
+            <a:pPr algn="ctr"/>
+          </a:p>
+        </p:txBody>
+      </p:sp>
+      <p:sp>
+        <p:nvSpPr>
+          <p:cNvPr id="16" name="Rectangle 15"/>
+          <p:cNvSpPr/>
+          <p:nvPr/>
+        </p:nvSpPr>
+        <p:spPr>
+          <a:xfrm>
+            <a:off x="4262475" y="1548312"/>
+            <a:ext cx="4413808" cy="2494931"/>
+          </a:xfrm>
+          <a:prstGeom prst="rect">
+            <a:avLst/>
+          </a:prstGeom>
+          <a:solidFill>
+            <a:srgbClr val="FCFDFF"/>
+          </a:solidFill>
+          <a:ln w="7620">
+            <a:solidFill>
+              <a:srgbClr val="BAC8DC"/>
+            </a:solidFill>
+          </a:ln>
+        </p:spPr>
+        <p:style>
+          <a:lnRef idx="1">
+            <a:schemeClr val="accent1"/>
+          </a:lnRef>
+          <a:fillRef idx="3">
+            <a:schemeClr val="accent1"/>
+          </a:fillRef>
+          <a:effectRef idx="2">
+            <a:schemeClr val="accent1"/>
+          </a:effectRef>
+          <a:fontRef idx="minor">
+            <a:schemeClr val="lt1"/>
+          </a:fontRef>
+        </p:style>
+        <p:txBody>
+          <a:bodyPr rtlCol="0" anchor="ctr"/>
+          <a:lstStyle/>
+          <a:p>
+            <a:pPr algn="ctr"/>
+          </a:p>
+        </p:txBody>
+      </p:sp>
       <p:pic>
         <p:nvPicPr>
-          <p:cNvPr id="15" name="Picture 14" descr="compare_table.png"/>
+          <p:cNvPr id="17" name="Picture 16" descr="compare_table.png"/>
           <p:cNvPicPr>
             <a:picLocks noChangeAspect="1"/>
           </p:cNvPicPr>
@@ -20035,8 +21312,8 @@
         </p:blipFill>
         <p:spPr>
           <a:xfrm>
-            <a:off x="3341308" y="1051560"/>
-            <a:ext cx="6256142" cy="3561588"/>
+            <a:off x="4299051" y="1584888"/>
+            <a:ext cx="4340656" cy="2421779"/>
           </a:xfrm>
           <a:prstGeom prst="rect">
             <a:avLst/>
@@ -20045,14 +21322,14 @@
       </p:pic>
       <p:sp>
         <p:nvSpPr>
-          <p:cNvPr id="16" name="TextBox 15"/>
+          <p:cNvPr id="18" name="TextBox 17"/>
           <p:cNvSpPr txBox="1"/>
           <p:nvPr/>
         </p:nvSpPr>
         <p:spPr>
           <a:xfrm>
-            <a:off x="4069080" y="4668012"/>
-            <a:ext cx="4800600" cy="182880"/>
+            <a:off x="4160520" y="4594860"/>
+            <a:ext cx="4617720" cy="201168"/>
           </a:xfrm>
           <a:prstGeom prst="rect">
             <a:avLst/>
@@ -20060,14 +21337,14 @@
           <a:noFill/>
         </p:spPr>
         <p:txBody>
-          <a:bodyPr wrap="none">
+          <a:bodyPr wrap="square" anchor="ctr">
             <a:spAutoFit/>
           </a:bodyPr>
           <a:lstStyle/>
           <a:p>
             <a:pPr algn="ctr"/>
             <a:r>
-              <a:rPr sz="900" b="0">
+              <a:rPr sz="800" b="0">
                 <a:solidFill>
                   <a:srgbClr val="5A6273"/>
                 </a:solidFill>
@@ -20437,8 +21714,8 @@
         </p:nvSpPr>
         <p:spPr>
           <a:xfrm>
-            <a:off x="457200" y="1124712"/>
-            <a:ext cx="3246120" cy="803529"/>
+            <a:off x="438912" y="1106424"/>
+            <a:ext cx="3282696" cy="812673"/>
           </a:xfrm>
           <a:prstGeom prst="rect">
             <a:avLst/>
@@ -20453,10 +21730,10 @@
           <a:p>
             <a:pPr>
               <a:lnSpc>
-                <a:spcPct val="115000"/>
+                <a:spcPct val="112000"/>
               </a:lnSpc>
               <a:spcAft>
-                <a:spcPts val="0"/>
+                <a:spcPts val="200"/>
               </a:spcAft>
             </a:pPr>
             <a:r>
@@ -20480,8 +21757,8 @@
         </p:nvSpPr>
         <p:spPr>
           <a:xfrm>
-            <a:off x="457200" y="1946529"/>
-            <a:ext cx="3246120" cy="803529"/>
+            <a:off x="438912" y="1937385"/>
+            <a:ext cx="3282696" cy="812673"/>
           </a:xfrm>
           <a:prstGeom prst="rect">
             <a:avLst/>
@@ -20496,10 +21773,10 @@
           <a:p>
             <a:pPr>
               <a:lnSpc>
-                <a:spcPct val="115000"/>
+                <a:spcPct val="112000"/>
               </a:lnSpc>
               <a:spcAft>
-                <a:spcPts val="0"/>
+                <a:spcPts val="200"/>
               </a:spcAft>
             </a:pPr>
             <a:r>
@@ -20523,8 +21800,8 @@
         </p:nvSpPr>
         <p:spPr>
           <a:xfrm>
-            <a:off x="457200" y="2768346"/>
-            <a:ext cx="3246120" cy="803529"/>
+            <a:off x="438912" y="2768346"/>
+            <a:ext cx="3282696" cy="812673"/>
           </a:xfrm>
           <a:prstGeom prst="rect">
             <a:avLst/>
@@ -20539,10 +21816,10 @@
           <a:p>
             <a:pPr>
               <a:lnSpc>
-                <a:spcPct val="115000"/>
+                <a:spcPct val="112000"/>
               </a:lnSpc>
               <a:spcAft>
-                <a:spcPts val="0"/>
+                <a:spcPts val="200"/>
               </a:spcAft>
             </a:pPr>
             <a:r>
@@ -20566,8 +21843,8 @@
         </p:nvSpPr>
         <p:spPr>
           <a:xfrm>
-            <a:off x="457200" y="3590163"/>
-            <a:ext cx="3246120" cy="803529"/>
+            <a:off x="438912" y="3599307"/>
+            <a:ext cx="3282696" cy="812673"/>
           </a:xfrm>
           <a:prstGeom prst="rect">
             <a:avLst/>
@@ -20582,10 +21859,10 @@
           <a:p>
             <a:pPr>
               <a:lnSpc>
-                <a:spcPct val="115000"/>
+                <a:spcPct val="112000"/>
               </a:lnSpc>
               <a:spcAft>
-                <a:spcPts val="0"/>
+                <a:spcPts val="200"/>
               </a:spcAft>
             </a:pPr>
             <a:r>
@@ -20609,8 +21886,8 @@
         </p:nvSpPr>
         <p:spPr>
           <a:xfrm>
-            <a:off x="365760" y="4521708"/>
-            <a:ext cx="3429000" cy="310896"/>
+            <a:off x="365760" y="4539996"/>
+            <a:ext cx="3429000" cy="292608"/>
           </a:xfrm>
           <a:prstGeom prst="rect">
             <a:avLst/>
@@ -20652,8 +21929,8 @@
         </p:nvSpPr>
         <p:spPr>
           <a:xfrm>
-            <a:off x="402336" y="4585716"/>
-            <a:ext cx="3355848" cy="201167"/>
+            <a:off x="402336" y="4604004"/>
+            <a:ext cx="3355848" cy="182880"/>
           </a:xfrm>
           <a:prstGeom prst="rect">
             <a:avLst/>
@@ -20688,8 +21965,8 @@
         </p:nvSpPr>
         <p:spPr>
           <a:xfrm>
-            <a:off x="4350822" y="1005840"/>
-            <a:ext cx="4237115" cy="3835908"/>
+            <a:off x="4105656" y="1033272"/>
+            <a:ext cx="4727448" cy="3744468"/>
           </a:xfrm>
           <a:prstGeom prst="rect">
             <a:avLst/>
@@ -20697,7 +21974,7 @@
           <a:solidFill>
             <a:srgbClr val="FFFFFF"/>
           </a:solidFill>
-          <a:ln w="10160">
+          <a:ln w="9525">
             <a:solidFill>
               <a:srgbClr val="BAC8DC"/>
             </a:solidFill>
@@ -20725,9 +22002,97 @@
           </a:p>
         </p:txBody>
       </p:sp>
+      <p:sp>
+        <p:nvSpPr>
+          <p:cNvPr id="17" name="Rectangle 16"/>
+          <p:cNvSpPr/>
+          <p:nvPr/>
+        </p:nvSpPr>
+        <p:spPr>
+          <a:xfrm>
+            <a:off x="3968496" y="996696"/>
+            <a:ext cx="10972" cy="3854196"/>
+          </a:xfrm>
+          <a:prstGeom prst="rect">
+            <a:avLst/>
+          </a:prstGeom>
+          <a:solidFill>
+            <a:srgbClr val="BAC8DC"/>
+          </a:solidFill>
+          <a:ln>
+            <a:noFill/>
+          </a:ln>
+        </p:spPr>
+        <p:style>
+          <a:lnRef idx="1">
+            <a:schemeClr val="accent1"/>
+          </a:lnRef>
+          <a:fillRef idx="3">
+            <a:schemeClr val="accent1"/>
+          </a:fillRef>
+          <a:effectRef idx="2">
+            <a:schemeClr val="accent1"/>
+          </a:effectRef>
+          <a:fontRef idx="minor">
+            <a:schemeClr val="lt1"/>
+          </a:fontRef>
+        </p:style>
+        <p:txBody>
+          <a:bodyPr rtlCol="0" anchor="ctr"/>
+          <a:lstStyle/>
+          <a:p>
+            <a:pPr algn="ctr"/>
+          </a:p>
+        </p:txBody>
+      </p:sp>
+      <p:sp>
+        <p:nvSpPr>
+          <p:cNvPr id="18" name="Rectangle 17"/>
+          <p:cNvSpPr/>
+          <p:nvPr/>
+        </p:nvSpPr>
+        <p:spPr>
+          <a:xfrm>
+            <a:off x="4476308" y="1119637"/>
+            <a:ext cx="3986142" cy="3352281"/>
+          </a:xfrm>
+          <a:prstGeom prst="rect">
+            <a:avLst/>
+          </a:prstGeom>
+          <a:solidFill>
+            <a:srgbClr val="FCFDFF"/>
+          </a:solidFill>
+          <a:ln w="7620">
+            <a:solidFill>
+              <a:srgbClr val="BAC8DC"/>
+            </a:solidFill>
+          </a:ln>
+        </p:spPr>
+        <p:style>
+          <a:lnRef idx="1">
+            <a:schemeClr val="accent1"/>
+          </a:lnRef>
+          <a:fillRef idx="3">
+            <a:schemeClr val="accent1"/>
+          </a:fillRef>
+          <a:effectRef idx="2">
+            <a:schemeClr val="accent1"/>
+          </a:effectRef>
+          <a:fontRef idx="minor">
+            <a:schemeClr val="lt1"/>
+          </a:fontRef>
+        </p:style>
+        <p:txBody>
+          <a:bodyPr rtlCol="0" anchor="ctr"/>
+          <a:lstStyle/>
+          <a:p>
+            <a:pPr algn="ctr"/>
+          </a:p>
+        </p:txBody>
+      </p:sp>
       <p:pic>
         <p:nvPicPr>
-          <p:cNvPr id="17" name="Picture 16" descr="architecture_layers.png"/>
+          <p:cNvPr id="19" name="Picture 18" descr="architecture_layers.png"/>
           <p:cNvPicPr>
             <a:picLocks noChangeAspect="1"/>
           </p:cNvPicPr>
@@ -20741,8 +22106,8 @@
         </p:blipFill>
         <p:spPr>
           <a:xfrm>
-            <a:off x="4396542" y="1051560"/>
-            <a:ext cx="4145675" cy="3561588"/>
+            <a:off x="4512884" y="1156213"/>
+            <a:ext cx="3912990" cy="3279129"/>
           </a:xfrm>
           <a:prstGeom prst="rect">
             <a:avLst/>
@@ -20751,14 +22116,14 @@
       </p:pic>
       <p:sp>
         <p:nvSpPr>
-          <p:cNvPr id="18" name="TextBox 17"/>
+          <p:cNvPr id="20" name="TextBox 19"/>
           <p:cNvSpPr txBox="1"/>
           <p:nvPr/>
         </p:nvSpPr>
         <p:spPr>
           <a:xfrm>
-            <a:off x="4069080" y="4668012"/>
-            <a:ext cx="4800600" cy="182880"/>
+            <a:off x="4160520" y="4594860"/>
+            <a:ext cx="4617720" cy="201168"/>
           </a:xfrm>
           <a:prstGeom prst="rect">
             <a:avLst/>
@@ -20766,14 +22131,14 @@
           <a:noFill/>
         </p:spPr>
         <p:txBody>
-          <a:bodyPr wrap="none">
+          <a:bodyPr wrap="square" anchor="ctr">
             <a:spAutoFit/>
           </a:bodyPr>
           <a:lstStyle/>
           <a:p>
             <a:pPr algn="ctr"/>
             <a:r>
-              <a:rPr sz="900" b="0">
+              <a:rPr sz="800" b="0">
                 <a:solidFill>
                   <a:srgbClr val="5A6273"/>
                 </a:solidFill>
@@ -21443,9 +22808,54 @@
           </a:p>
         </p:txBody>
       </p:sp>
+      <p:sp>
+        <p:nvSpPr>
+          <p:cNvPr id="18" name="Rectangle 17"/>
+          <p:cNvSpPr/>
+          <p:nvPr/>
+        </p:nvSpPr>
+        <p:spPr>
+          <a:xfrm>
+            <a:off x="4694986" y="1288332"/>
+            <a:ext cx="4097426" cy="3234347"/>
+          </a:xfrm>
+          <a:prstGeom prst="rect">
+            <a:avLst/>
+          </a:prstGeom>
+          <a:solidFill>
+            <a:srgbClr val="FCFDFF"/>
+          </a:solidFill>
+          <a:ln w="7620">
+            <a:solidFill>
+              <a:srgbClr val="BAC8DC"/>
+            </a:solidFill>
+          </a:ln>
+        </p:spPr>
+        <p:style>
+          <a:lnRef idx="1">
+            <a:schemeClr val="accent1"/>
+          </a:lnRef>
+          <a:fillRef idx="3">
+            <a:schemeClr val="accent1"/>
+          </a:fillRef>
+          <a:effectRef idx="2">
+            <a:schemeClr val="accent1"/>
+          </a:effectRef>
+          <a:fontRef idx="minor">
+            <a:schemeClr val="lt1"/>
+          </a:fontRef>
+        </p:style>
+        <p:txBody>
+          <a:bodyPr rtlCol="0" anchor="ctr"/>
+          <a:lstStyle/>
+          <a:p>
+            <a:pPr algn="ctr"/>
+          </a:p>
+        </p:txBody>
+      </p:sp>
       <p:pic>
         <p:nvPicPr>
-          <p:cNvPr id="18" name="Picture 17" descr="state_machine.png"/>
+          <p:cNvPr id="19" name="Picture 18" descr="state_machine.png"/>
           <p:cNvPicPr>
             <a:picLocks noChangeAspect="1"/>
           </p:cNvPicPr>
@@ -21459,8 +22869,8 @@
         </p:blipFill>
         <p:spPr>
           <a:xfrm>
-            <a:off x="4463935" y="1107292"/>
-            <a:ext cx="4559529" cy="3669578"/>
+            <a:off x="4731562" y="1324908"/>
+            <a:ext cx="4024274" cy="3161195"/>
           </a:xfrm>
           <a:prstGeom prst="rect">
             <a:avLst/>
@@ -21825,8 +23235,8 @@
         </p:nvSpPr>
         <p:spPr>
           <a:xfrm>
-            <a:off x="457200" y="1124712"/>
-            <a:ext cx="3246120" cy="885825"/>
+            <a:off x="438912" y="1106424"/>
+            <a:ext cx="3282696" cy="890397"/>
           </a:xfrm>
           <a:prstGeom prst="rect">
             <a:avLst/>
@@ -21841,10 +23251,10 @@
           <a:p>
             <a:pPr>
               <a:lnSpc>
-                <a:spcPct val="115000"/>
+                <a:spcPct val="112000"/>
               </a:lnSpc>
               <a:spcAft>
-                <a:spcPts val="0"/>
+                <a:spcPts val="200"/>
               </a:spcAft>
             </a:pPr>
             <a:r>
@@ -21868,8 +23278,8 @@
         </p:nvSpPr>
         <p:spPr>
           <a:xfrm>
-            <a:off x="457200" y="2028825"/>
-            <a:ext cx="3246120" cy="885825"/>
+            <a:off x="438912" y="2015109"/>
+            <a:ext cx="3282696" cy="890397"/>
           </a:xfrm>
           <a:prstGeom prst="rect">
             <a:avLst/>
@@ -21884,10 +23294,10 @@
           <a:p>
             <a:pPr>
               <a:lnSpc>
-                <a:spcPct val="115000"/>
+                <a:spcPct val="112000"/>
               </a:lnSpc>
               <a:spcAft>
-                <a:spcPts val="0"/>
+                <a:spcPts val="200"/>
               </a:spcAft>
             </a:pPr>
             <a:r>
@@ -21911,8 +23321,8 @@
         </p:nvSpPr>
         <p:spPr>
           <a:xfrm>
-            <a:off x="457200" y="2932938"/>
-            <a:ext cx="3246120" cy="885825"/>
+            <a:off x="438912" y="2923794"/>
+            <a:ext cx="3282696" cy="890397"/>
           </a:xfrm>
           <a:prstGeom prst="rect">
             <a:avLst/>
@@ -21927,10 +23337,10 @@
           <a:p>
             <a:pPr>
               <a:lnSpc>
-                <a:spcPct val="115000"/>
+                <a:spcPct val="112000"/>
               </a:lnSpc>
               <a:spcAft>
-                <a:spcPts val="0"/>
+                <a:spcPts val="200"/>
               </a:spcAft>
             </a:pPr>
             <a:r>
@@ -21954,8 +23364,8 @@
         </p:nvSpPr>
         <p:spPr>
           <a:xfrm>
-            <a:off x="457200" y="3837051"/>
-            <a:ext cx="3246120" cy="885825"/>
+            <a:off x="438912" y="3832479"/>
+            <a:ext cx="3282696" cy="890397"/>
           </a:xfrm>
           <a:prstGeom prst="rect">
             <a:avLst/>
@@ -21970,10 +23380,10 @@
           <a:p>
             <a:pPr>
               <a:lnSpc>
-                <a:spcPct val="115000"/>
+                <a:spcPct val="112000"/>
               </a:lnSpc>
               <a:spcAft>
-                <a:spcPts val="0"/>
+                <a:spcPts val="200"/>
               </a:spcAft>
             </a:pPr>
             <a:r>
@@ -21997,8 +23407,8 @@
         </p:nvSpPr>
         <p:spPr>
           <a:xfrm>
-            <a:off x="4350822" y="1005840"/>
-            <a:ext cx="4237115" cy="3835908"/>
+            <a:off x="4105656" y="1033272"/>
+            <a:ext cx="4727448" cy="3744468"/>
           </a:xfrm>
           <a:prstGeom prst="rect">
             <a:avLst/>
@@ -22006,7 +23416,7 @@
           <a:solidFill>
             <a:srgbClr val="FFFFFF"/>
           </a:solidFill>
-          <a:ln w="10160">
+          <a:ln w="9525">
             <a:solidFill>
               <a:srgbClr val="BAC8DC"/>
             </a:solidFill>
@@ -22034,9 +23444,97 @@
           </a:p>
         </p:txBody>
       </p:sp>
+      <p:sp>
+        <p:nvSpPr>
+          <p:cNvPr id="15" name="Rectangle 14"/>
+          <p:cNvSpPr/>
+          <p:nvPr/>
+        </p:nvSpPr>
+        <p:spPr>
+          <a:xfrm>
+            <a:off x="3968496" y="996696"/>
+            <a:ext cx="10972" cy="3854196"/>
+          </a:xfrm>
+          <a:prstGeom prst="rect">
+            <a:avLst/>
+          </a:prstGeom>
+          <a:solidFill>
+            <a:srgbClr val="BAC8DC"/>
+          </a:solidFill>
+          <a:ln>
+            <a:noFill/>
+          </a:ln>
+        </p:spPr>
+        <p:style>
+          <a:lnRef idx="1">
+            <a:schemeClr val="accent1"/>
+          </a:lnRef>
+          <a:fillRef idx="3">
+            <a:schemeClr val="accent1"/>
+          </a:fillRef>
+          <a:effectRef idx="2">
+            <a:schemeClr val="accent1"/>
+          </a:effectRef>
+          <a:fontRef idx="minor">
+            <a:schemeClr val="lt1"/>
+          </a:fontRef>
+        </p:style>
+        <p:txBody>
+          <a:bodyPr rtlCol="0" anchor="ctr"/>
+          <a:lstStyle/>
+          <a:p>
+            <a:pPr algn="ctr"/>
+          </a:p>
+        </p:txBody>
+      </p:sp>
+      <p:sp>
+        <p:nvSpPr>
+          <p:cNvPr id="16" name="Rectangle 15"/>
+          <p:cNvSpPr/>
+          <p:nvPr/>
+        </p:nvSpPr>
+        <p:spPr>
+          <a:xfrm>
+            <a:off x="4476308" y="1119637"/>
+            <a:ext cx="3986142" cy="3352281"/>
+          </a:xfrm>
+          <a:prstGeom prst="rect">
+            <a:avLst/>
+          </a:prstGeom>
+          <a:solidFill>
+            <a:srgbClr val="FCFDFF"/>
+          </a:solidFill>
+          <a:ln w="7620">
+            <a:solidFill>
+              <a:srgbClr val="BAC8DC"/>
+            </a:solidFill>
+          </a:ln>
+        </p:spPr>
+        <p:style>
+          <a:lnRef idx="1">
+            <a:schemeClr val="accent1"/>
+          </a:lnRef>
+          <a:fillRef idx="3">
+            <a:schemeClr val="accent1"/>
+          </a:fillRef>
+          <a:effectRef idx="2">
+            <a:schemeClr val="accent1"/>
+          </a:effectRef>
+          <a:fontRef idx="minor">
+            <a:schemeClr val="lt1"/>
+          </a:fontRef>
+        </p:style>
+        <p:txBody>
+          <a:bodyPr rtlCol="0" anchor="ctr"/>
+          <a:lstStyle/>
+          <a:p>
+            <a:pPr algn="ctr"/>
+          </a:p>
+        </p:txBody>
+      </p:sp>
       <p:pic>
         <p:nvPicPr>
-          <p:cNvPr id="15" name="Picture 14" descr="architecture_layers.png"/>
+          <p:cNvPr id="17" name="Picture 16" descr="architecture_layers.png"/>
           <p:cNvPicPr>
             <a:picLocks noChangeAspect="1"/>
           </p:cNvPicPr>
@@ -22050,8 +23548,8 @@
         </p:blipFill>
         <p:spPr>
           <a:xfrm>
-            <a:off x="4396542" y="1051560"/>
-            <a:ext cx="4145675" cy="3561588"/>
+            <a:off x="4512884" y="1156213"/>
+            <a:ext cx="3912990" cy="3279129"/>
           </a:xfrm>
           <a:prstGeom prst="rect">
             <a:avLst/>
@@ -22060,14 +23558,14 @@
       </p:pic>
       <p:sp>
         <p:nvSpPr>
-          <p:cNvPr id="16" name="TextBox 15"/>
+          <p:cNvPr id="18" name="TextBox 17"/>
           <p:cNvSpPr txBox="1"/>
           <p:nvPr/>
         </p:nvSpPr>
         <p:spPr>
           <a:xfrm>
-            <a:off x="4069080" y="4668012"/>
-            <a:ext cx="4800600" cy="182880"/>
+            <a:off x="4160520" y="4594860"/>
+            <a:ext cx="4617720" cy="201168"/>
           </a:xfrm>
           <a:prstGeom prst="rect">
             <a:avLst/>
@@ -22075,14 +23573,14 @@
           <a:noFill/>
         </p:spPr>
         <p:txBody>
-          <a:bodyPr wrap="none">
+          <a:bodyPr wrap="square" anchor="ctr">
             <a:spAutoFit/>
           </a:bodyPr>
           <a:lstStyle/>
           <a:p>
             <a:pPr algn="ctr"/>
             <a:r>
-              <a:rPr sz="900" b="0">
+              <a:rPr sz="800" b="0">
                 <a:solidFill>
                   <a:srgbClr val="5A6273"/>
                 </a:solidFill>

--- a/docs/答辩_CareCompanion.pptx
+++ b/docs/答辩_CareCompanion.pptx
@@ -3246,8 +3246,8 @@
         </p:nvSpPr>
         <p:spPr>
           <a:xfrm>
-            <a:off x="863200" y="536158"/>
-            <a:ext cx="2845599" cy="4226631"/>
+            <a:off x="698590" y="535975"/>
+            <a:ext cx="3174819" cy="4208708"/>
           </a:xfrm>
           <a:prstGeom prst="rect">
             <a:avLst/>
@@ -3299,8 +3299,8 @@
         </p:blipFill>
         <p:spPr>
           <a:xfrm>
-            <a:off x="899776" y="572734"/>
-            <a:ext cx="2772447" cy="4153479"/>
+            <a:off x="735166" y="572551"/>
+            <a:ext cx="3101667" cy="4135556"/>
           </a:xfrm>
           <a:prstGeom prst="rect">
             <a:avLst/>
@@ -3315,8 +3315,8 @@
         </p:nvSpPr>
         <p:spPr>
           <a:xfrm>
-            <a:off x="137160" y="4823460"/>
-            <a:ext cx="4297680" cy="201168"/>
+            <a:off x="137160" y="4805172"/>
+            <a:ext cx="4297680" cy="219456"/>
           </a:xfrm>
           <a:prstGeom prst="rect">
             <a:avLst/>
@@ -4323,8 +4323,8 @@
         </p:nvSpPr>
         <p:spPr>
           <a:xfrm>
-            <a:off x="4345600" y="1119637"/>
-            <a:ext cx="4247558" cy="3352281"/>
+            <a:off x="4308652" y="1245662"/>
+            <a:ext cx="4321454" cy="3027078"/>
           </a:xfrm>
           <a:prstGeom prst="rect">
             <a:avLst/>
@@ -4376,8 +4376,8 @@
         </p:blipFill>
         <p:spPr>
           <a:xfrm>
-            <a:off x="4382176" y="1156213"/>
-            <a:ext cx="4174406" cy="3279129"/>
+            <a:off x="4345228" y="1282238"/>
+            <a:ext cx="4248302" cy="2953926"/>
           </a:xfrm>
           <a:prstGeom prst="rect">
             <a:avLst/>
@@ -4392,8 +4392,8 @@
         </p:nvSpPr>
         <p:spPr>
           <a:xfrm>
-            <a:off x="4160520" y="4594860"/>
-            <a:ext cx="4617720" cy="201168"/>
+            <a:off x="4160520" y="4521708"/>
+            <a:ext cx="4617720" cy="219456"/>
           </a:xfrm>
           <a:prstGeom prst="rect">
             <a:avLst/>
@@ -4415,7 +4415,7 @@
                 <a:latin typeface="微软雅黑"/>
                 <ns7:rFonts xmlns:ns7="http://schemas.openxmlformats.org/wordprocessingml/2006/main" ns7:eastAsia="微软雅黑" ns7:ascii="微软雅黑" ns7:hAnsi="微软雅黑"/>
               </a:rPr>
-              <a:t>Fig.2 有限状态机</a:t>
+              <a:t>有限状态机</a:t>
             </a:r>
           </a:p>
         </p:txBody>
@@ -5038,8 +5038,8 @@
         </p:nvSpPr>
         <p:spPr>
           <a:xfrm>
-            <a:off x="4262475" y="1148632"/>
-            <a:ext cx="4413808" cy="3294291"/>
+            <a:off x="4315756" y="1151595"/>
+            <a:ext cx="4307247" cy="3215213"/>
           </a:xfrm>
           <a:prstGeom prst="rect">
             <a:avLst/>
@@ -5091,8 +5091,8 @@
         </p:blipFill>
         <p:spPr>
           <a:xfrm>
-            <a:off x="4299051" y="1185208"/>
-            <a:ext cx="4340656" cy="3221139"/>
+            <a:off x="4352332" y="1188171"/>
+            <a:ext cx="4234095" cy="3142061"/>
           </a:xfrm>
           <a:prstGeom prst="rect">
             <a:avLst/>
@@ -5107,8 +5107,8 @@
         </p:nvSpPr>
         <p:spPr>
           <a:xfrm>
-            <a:off x="4160520" y="4594860"/>
-            <a:ext cx="4617720" cy="201168"/>
+            <a:off x="4160520" y="4521708"/>
+            <a:ext cx="4617720" cy="219456"/>
           </a:xfrm>
           <a:prstGeom prst="rect">
             <a:avLst/>
@@ -5753,8 +5753,8 @@
         </p:nvSpPr>
         <p:spPr>
           <a:xfrm>
-            <a:off x="5491515" y="1119637"/>
-            <a:ext cx="1955729" cy="3352281"/>
+            <a:off x="5243358" y="1151595"/>
+            <a:ext cx="2452043" cy="3215213"/>
           </a:xfrm>
           <a:prstGeom prst="rect">
             <a:avLst/>
@@ -5806,8 +5806,8 @@
         </p:blipFill>
         <p:spPr>
           <a:xfrm>
-            <a:off x="5528091" y="1156213"/>
-            <a:ext cx="1882577" cy="3279129"/>
+            <a:off x="5279934" y="1188171"/>
+            <a:ext cx="2378891" cy="3142061"/>
           </a:xfrm>
           <a:prstGeom prst="rect">
             <a:avLst/>
@@ -5822,8 +5822,8 @@
         </p:nvSpPr>
         <p:spPr>
           <a:xfrm>
-            <a:off x="4160520" y="4594860"/>
-            <a:ext cx="4617720" cy="201168"/>
+            <a:off x="4160520" y="4521708"/>
+            <a:ext cx="4617720" cy="219456"/>
           </a:xfrm>
           <a:prstGeom prst="rect">
             <a:avLst/>
@@ -5845,7 +5845,7 @@
                 <a:latin typeface="微软雅黑"/>
                 <ns7:rFonts xmlns:ns7="http://schemas.openxmlformats.org/wordprocessingml/2006/main" ns7:eastAsia="微软雅黑" ns7:ascii="微软雅黑" ns7:hAnsi="微软雅黑"/>
               </a:rPr>
-              <a:t>Fig.3 规则判定树</a:t>
+              <a:t>规则判定树</a:t>
             </a:r>
           </a:p>
         </p:txBody>
@@ -6468,8 +6468,8 @@
         </p:nvSpPr>
         <p:spPr>
           <a:xfrm>
-            <a:off x="4678977" y="1119637"/>
-            <a:ext cx="3580805" cy="3352281"/>
+            <a:off x="4540380" y="1151595"/>
+            <a:ext cx="3857998" cy="3215213"/>
           </a:xfrm>
           <a:prstGeom prst="rect">
             <a:avLst/>
@@ -6521,8 +6521,8 @@
         </p:blipFill>
         <p:spPr>
           <a:xfrm>
-            <a:off x="4715553" y="1156213"/>
-            <a:ext cx="3507653" cy="3279129"/>
+            <a:off x="4576956" y="1188171"/>
+            <a:ext cx="3784846" cy="3142061"/>
           </a:xfrm>
           <a:prstGeom prst="rect">
             <a:avLst/>
@@ -6537,8 +6537,8 @@
         </p:nvSpPr>
         <p:spPr>
           <a:xfrm>
-            <a:off x="4160520" y="4594860"/>
-            <a:ext cx="4617720" cy="201168"/>
+            <a:off x="4160520" y="4521708"/>
+            <a:ext cx="4617720" cy="219456"/>
           </a:xfrm>
           <a:prstGeom prst="rect">
             <a:avLst/>
@@ -6560,7 +6560,7 @@
                 <a:latin typeface="微软雅黑"/>
                 <ns7:rFonts xmlns:ns7="http://schemas.openxmlformats.org/wordprocessingml/2006/main" ns7:eastAsia="微软雅黑" ns7:ascii="微软雅黑" ns7:hAnsi="微软雅黑"/>
               </a:rPr>
-              <a:t>Fig.4 UML 时序图</a:t>
+              <a:t>对话时序图</a:t>
             </a:r>
           </a:p>
         </p:txBody>
@@ -7183,8 +7183,8 @@
         </p:nvSpPr>
         <p:spPr>
           <a:xfrm>
-            <a:off x="4262475" y="1373543"/>
-            <a:ext cx="4413808" cy="2844469"/>
+            <a:off x="4308652" y="1539913"/>
+            <a:ext cx="4321454" cy="2438576"/>
           </a:xfrm>
           <a:prstGeom prst="rect">
             <a:avLst/>
@@ -7236,8 +7236,8 @@
         </p:blipFill>
         <p:spPr>
           <a:xfrm>
-            <a:off x="4299051" y="1410119"/>
-            <a:ext cx="4340656" cy="2771317"/>
+            <a:off x="4345228" y="1576489"/>
+            <a:ext cx="4248302" cy="2365424"/>
           </a:xfrm>
           <a:prstGeom prst="rect">
             <a:avLst/>
@@ -7252,8 +7252,8 @@
         </p:nvSpPr>
         <p:spPr>
           <a:xfrm>
-            <a:off x="4160520" y="4594860"/>
-            <a:ext cx="4617720" cy="201168"/>
+            <a:off x="4160520" y="4521708"/>
+            <a:ext cx="4617720" cy="219456"/>
           </a:xfrm>
           <a:prstGeom prst="rect">
             <a:avLst/>
@@ -7275,7 +7275,7 @@
                 <a:latin typeface="微软雅黑"/>
                 <ns7:rFonts xmlns:ns7="http://schemas.openxmlformats.org/wordprocessingml/2006/main" ns7:eastAsia="微软雅黑" ns7:ascii="微软雅黑" ns7:hAnsi="微软雅黑"/>
               </a:rPr>
-              <a:t>Fig.5 泳道数据流</a:t>
+              <a:t>单帧泳道数据流</a:t>
             </a:r>
           </a:p>
         </p:txBody>
@@ -7977,8 +7977,8 @@
         </p:nvSpPr>
         <p:spPr>
           <a:xfrm>
-            <a:off x="4262475" y="1302319"/>
-            <a:ext cx="4413808" cy="2986916"/>
+            <a:off x="4308652" y="1302920"/>
+            <a:ext cx="4321454" cy="2912562"/>
           </a:xfrm>
           <a:prstGeom prst="rect">
             <a:avLst/>
@@ -8030,8 +8030,8 @@
         </p:blipFill>
         <p:spPr>
           <a:xfrm>
-            <a:off x="4299051" y="1338895"/>
-            <a:ext cx="4340656" cy="2913764"/>
+            <a:off x="4345228" y="1339496"/>
+            <a:ext cx="4248302" cy="2839410"/>
           </a:xfrm>
           <a:prstGeom prst="rect">
             <a:avLst/>
@@ -8046,8 +8046,8 @@
         </p:nvSpPr>
         <p:spPr>
           <a:xfrm>
-            <a:off x="4160520" y="4594860"/>
-            <a:ext cx="4617720" cy="201168"/>
+            <a:off x="4160520" y="4521708"/>
+            <a:ext cx="4617720" cy="219456"/>
           </a:xfrm>
           <a:prstGeom prst="rect">
             <a:avLst/>
@@ -8069,7 +8069,7 @@
                 <a:latin typeface="微软雅黑"/>
                 <ns8:rFonts xmlns:ns8="http://schemas.openxmlformats.org/wordprocessingml/2006/main" ns8:eastAsia="微软雅黑" ns8:ascii="微软雅黑" ns8:hAnsi="微软雅黑"/>
               </a:rPr>
-              <a:t>Fig.6 紧急响应时序</a:t>
+              <a:t>紧急响应时序</a:t>
             </a:r>
           </a:p>
         </p:txBody>
@@ -8740,8 +8740,8 @@
         </p:nvSpPr>
         <p:spPr>
           <a:xfrm>
-            <a:off x="4694986" y="1444247"/>
-            <a:ext cx="4097426" cy="2922516"/>
+            <a:off x="4694986" y="1530242"/>
+            <a:ext cx="4097426" cy="2750526"/>
           </a:xfrm>
           <a:prstGeom prst="rect">
             <a:avLst/>
@@ -8793,8 +8793,8 @@
         </p:blipFill>
         <p:spPr>
           <a:xfrm>
-            <a:off x="4731562" y="1480823"/>
-            <a:ext cx="4024274" cy="2849364"/>
+            <a:off x="4731562" y="1566818"/>
+            <a:ext cx="4024274" cy="2677374"/>
           </a:xfrm>
           <a:prstGeom prst="rect">
             <a:avLst/>
@@ -9419,8 +9419,8 @@
         </p:nvSpPr>
         <p:spPr>
           <a:xfrm>
-            <a:off x="4262475" y="1627409"/>
-            <a:ext cx="4413808" cy="2336736"/>
+            <a:off x="4308652" y="1614914"/>
+            <a:ext cx="4321454" cy="2288575"/>
           </a:xfrm>
           <a:prstGeom prst="rect">
             <a:avLst/>
@@ -9472,8 +9472,8 @@
         </p:blipFill>
         <p:spPr>
           <a:xfrm>
-            <a:off x="4299051" y="1663985"/>
-            <a:ext cx="4340656" cy="2263584"/>
+            <a:off x="4345228" y="1651490"/>
+            <a:ext cx="4248302" cy="2215423"/>
           </a:xfrm>
           <a:prstGeom prst="rect">
             <a:avLst/>
@@ -9488,8 +9488,8 @@
         </p:nvSpPr>
         <p:spPr>
           <a:xfrm>
-            <a:off x="4160520" y="4594860"/>
-            <a:ext cx="4617720" cy="201168"/>
+            <a:off x="4160520" y="4521708"/>
+            <a:ext cx="4617720" cy="219456"/>
           </a:xfrm>
           <a:prstGeom prst="rect">
             <a:avLst/>
@@ -9839,8 +9839,8 @@
         </p:blipFill>
         <p:spPr>
           <a:xfrm>
-            <a:off x="3483327" y="1192240"/>
-            <a:ext cx="2177344" cy="3261939"/>
+            <a:off x="3355219" y="1191691"/>
+            <a:ext cx="2433561" cy="3244748"/>
           </a:xfrm>
           <a:prstGeom prst="rect">
             <a:avLst/>
@@ -9855,8 +9855,8 @@
         </p:nvSpPr>
         <p:spPr>
           <a:xfrm>
-            <a:off x="365760" y="4613148"/>
-            <a:ext cx="8412480" cy="201168"/>
+            <a:off x="365760" y="4594860"/>
+            <a:ext cx="8412480" cy="219456"/>
           </a:xfrm>
           <a:prstGeom prst="rect">
             <a:avLst/>
@@ -10206,8 +10206,8 @@
         </p:blipFill>
         <p:spPr>
           <a:xfrm>
-            <a:off x="1028615" y="1191691"/>
-            <a:ext cx="2725081" cy="3244748"/>
+            <a:off x="1035833" y="1191143"/>
+            <a:ext cx="2710644" cy="3227557"/>
           </a:xfrm>
           <a:prstGeom prst="rect">
             <a:avLst/>
@@ -10222,8 +10222,8 @@
         </p:nvSpPr>
         <p:spPr>
           <a:xfrm>
-            <a:off x="347472" y="4594860"/>
-            <a:ext cx="4087368" cy="201168"/>
+            <a:off x="347472" y="4576572"/>
+            <a:ext cx="4087368" cy="219456"/>
           </a:xfrm>
           <a:prstGeom prst="rect">
             <a:avLst/>
@@ -10311,8 +10311,8 @@
         </p:blipFill>
         <p:spPr>
           <a:xfrm>
-            <a:off x="4845483" y="1191691"/>
-            <a:ext cx="3814721" cy="3244748"/>
+            <a:off x="4855588" y="1191143"/>
+            <a:ext cx="3794510" cy="3227557"/>
           </a:xfrm>
           <a:prstGeom prst="rect">
             <a:avLst/>
@@ -10327,8 +10327,8 @@
         </p:nvSpPr>
         <p:spPr>
           <a:xfrm>
-            <a:off x="4709159" y="4594860"/>
-            <a:ext cx="4087368" cy="201168"/>
+            <a:off x="4709159" y="4576572"/>
+            <a:ext cx="4087368" cy="219456"/>
           </a:xfrm>
           <a:prstGeom prst="rect">
             <a:avLst/>
@@ -10973,8 +10973,8 @@
         </p:nvSpPr>
         <p:spPr>
           <a:xfrm>
-            <a:off x="4262475" y="1850859"/>
-            <a:ext cx="4413808" cy="1889837"/>
+            <a:off x="4308652" y="1833609"/>
+            <a:ext cx="4321454" cy="1851184"/>
           </a:xfrm>
           <a:prstGeom prst="rect">
             <a:avLst/>
@@ -11026,8 +11026,8 @@
         </p:blipFill>
         <p:spPr>
           <a:xfrm>
-            <a:off x="4299051" y="1887435"/>
-            <a:ext cx="4340656" cy="1816685"/>
+            <a:off x="4345228" y="1870185"/>
+            <a:ext cx="4248302" cy="1778032"/>
           </a:xfrm>
           <a:prstGeom prst="rect">
             <a:avLst/>
@@ -11042,8 +11042,8 @@
         </p:nvSpPr>
         <p:spPr>
           <a:xfrm>
-            <a:off x="4160520" y="4594860"/>
-            <a:ext cx="4617720" cy="201168"/>
+            <a:off x="4160520" y="4521708"/>
+            <a:ext cx="4617720" cy="219456"/>
           </a:xfrm>
           <a:prstGeom prst="rect">
             <a:avLst/>
@@ -11393,7 +11393,7 @@
         </p:blipFill>
         <p:spPr>
           <a:xfrm>
-            <a:off x="470093" y="1780369"/>
+            <a:off x="470093" y="1771225"/>
             <a:ext cx="3842125" cy="2067393"/>
           </a:xfrm>
           <a:prstGeom prst="rect">
@@ -11409,8 +11409,8 @@
         </p:nvSpPr>
         <p:spPr>
           <a:xfrm>
-            <a:off x="347472" y="4594860"/>
-            <a:ext cx="4087368" cy="201168"/>
+            <a:off x="347472" y="4576572"/>
+            <a:ext cx="4087368" cy="219456"/>
           </a:xfrm>
           <a:prstGeom prst="rect">
             <a:avLst/>
@@ -11498,7 +11498,7 @@
         </p:blipFill>
         <p:spPr>
           <a:xfrm>
-            <a:off x="4831781" y="2380701"/>
+            <a:off x="4831781" y="2371557"/>
             <a:ext cx="3842125" cy="866729"/>
           </a:xfrm>
           <a:prstGeom prst="rect">
@@ -11514,8 +11514,8 @@
         </p:nvSpPr>
         <p:spPr>
           <a:xfrm>
-            <a:off x="4709159" y="4594860"/>
-            <a:ext cx="4087368" cy="201168"/>
+            <a:off x="4709159" y="4576572"/>
+            <a:ext cx="4087368" cy="219456"/>
           </a:xfrm>
           <a:prstGeom prst="rect">
             <a:avLst/>
@@ -11865,8 +11865,8 @@
         </p:blipFill>
         <p:spPr>
           <a:xfrm>
-            <a:off x="1420843" y="1192240"/>
-            <a:ext cx="6302312" cy="3261939"/>
+            <a:off x="1437450" y="1191691"/>
+            <a:ext cx="6269098" cy="3244748"/>
           </a:xfrm>
           <a:prstGeom prst="rect">
             <a:avLst/>
@@ -11881,8 +11881,8 @@
         </p:nvSpPr>
         <p:spPr>
           <a:xfrm>
-            <a:off x="365760" y="4613148"/>
-            <a:ext cx="8412480" cy="201168"/>
+            <a:off x="365760" y="4594860"/>
+            <a:ext cx="8412480" cy="219456"/>
           </a:xfrm>
           <a:prstGeom prst="rect">
             <a:avLst/>
@@ -12606,8 +12606,8 @@
         </p:nvSpPr>
         <p:spPr>
           <a:xfrm>
-            <a:off x="4262475" y="1222513"/>
-            <a:ext cx="4413808" cy="3146529"/>
+            <a:off x="4308652" y="1309415"/>
+            <a:ext cx="4321454" cy="2899573"/>
           </a:xfrm>
           <a:prstGeom prst="rect">
             <a:avLst/>
@@ -12659,8 +12659,8 @@
         </p:blipFill>
         <p:spPr>
           <a:xfrm>
-            <a:off x="4299051" y="1259089"/>
-            <a:ext cx="4340656" cy="3073377"/>
+            <a:off x="4345228" y="1345991"/>
+            <a:ext cx="4248302" cy="2826421"/>
           </a:xfrm>
           <a:prstGeom prst="rect">
             <a:avLst/>
@@ -12675,8 +12675,8 @@
         </p:nvSpPr>
         <p:spPr>
           <a:xfrm>
-            <a:off x="4160520" y="4594860"/>
-            <a:ext cx="4617720" cy="201168"/>
+            <a:off x="4160520" y="4521708"/>
+            <a:ext cx="4617720" cy="219456"/>
           </a:xfrm>
           <a:prstGeom prst="rect">
             <a:avLst/>
@@ -13321,8 +13321,8 @@
         </p:nvSpPr>
         <p:spPr>
           <a:xfrm>
-            <a:off x="4262475" y="1128834"/>
-            <a:ext cx="4413808" cy="3333886"/>
+            <a:off x="4341464" y="1151595"/>
+            <a:ext cx="4255831" cy="3215213"/>
           </a:xfrm>
           <a:prstGeom prst="rect">
             <a:avLst/>
@@ -13374,8 +13374,8 @@
         </p:blipFill>
         <p:spPr>
           <a:xfrm>
-            <a:off x="4299051" y="1165410"/>
-            <a:ext cx="4340656" cy="3260734"/>
+            <a:off x="4378040" y="1188171"/>
+            <a:ext cx="4182679" cy="3142061"/>
           </a:xfrm>
           <a:prstGeom prst="rect">
             <a:avLst/>
@@ -13390,8 +13390,8 @@
         </p:nvSpPr>
         <p:spPr>
           <a:xfrm>
-            <a:off x="4160520" y="4594860"/>
-            <a:ext cx="4617720" cy="201168"/>
+            <a:off x="4160520" y="4521708"/>
+            <a:ext cx="4617720" cy="219456"/>
           </a:xfrm>
           <a:prstGeom prst="rect">
             <a:avLst/>
@@ -14316,8 +14316,8 @@
         </p:blipFill>
         <p:spPr>
           <a:xfrm>
-            <a:off x="4296582" y="1242486"/>
-            <a:ext cx="1236634" cy="1236634"/>
+            <a:off x="4304995" y="1241755"/>
+            <a:ext cx="1219809" cy="1219809"/>
           </a:xfrm>
           <a:prstGeom prst="rect">
             <a:avLst/>
@@ -14332,8 +14332,8 @@
         </p:nvSpPr>
         <p:spPr>
           <a:xfrm>
-            <a:off x="4160520" y="2587751"/>
-            <a:ext cx="1508760" cy="201168"/>
+            <a:off x="4160520" y="2569463"/>
+            <a:ext cx="1508760" cy="219456"/>
           </a:xfrm>
           <a:prstGeom prst="rect">
             <a:avLst/>
@@ -14376,8 +14376,8 @@
         </p:blipFill>
         <p:spPr>
           <a:xfrm>
-            <a:off x="5922555" y="1191097"/>
-            <a:ext cx="2712136" cy="3209361"/>
+            <a:off x="5929665" y="1190365"/>
+            <a:ext cx="2697917" cy="3192536"/>
           </a:xfrm>
           <a:prstGeom prst="rect">
             <a:avLst/>
@@ -14392,8 +14392,8 @@
         </p:nvSpPr>
         <p:spPr>
           <a:xfrm>
-            <a:off x="5779007" y="4594860"/>
-            <a:ext cx="2999232" cy="201168"/>
+            <a:off x="5779007" y="4576572"/>
+            <a:ext cx="2999232" cy="219456"/>
           </a:xfrm>
           <a:prstGeom prst="rect">
             <a:avLst/>
@@ -15808,8 +15808,8 @@
         </p:nvSpPr>
         <p:spPr>
           <a:xfrm>
-            <a:off x="4786784" y="1119637"/>
-            <a:ext cx="3365191" cy="3352281"/>
+            <a:off x="4855588" y="1151595"/>
+            <a:ext cx="3227583" cy="3215213"/>
           </a:xfrm>
           <a:prstGeom prst="rect">
             <a:avLst/>
@@ -15861,8 +15861,8 @@
         </p:blipFill>
         <p:spPr>
           <a:xfrm>
-            <a:off x="4823360" y="1156213"/>
-            <a:ext cx="3292039" cy="3279129"/>
+            <a:off x="4892164" y="1188171"/>
+            <a:ext cx="3154431" cy="3142061"/>
           </a:xfrm>
           <a:prstGeom prst="rect">
             <a:avLst/>
@@ -15877,8 +15877,8 @@
         </p:nvSpPr>
         <p:spPr>
           <a:xfrm>
-            <a:off x="4160520" y="4594860"/>
-            <a:ext cx="4617720" cy="201168"/>
+            <a:off x="4160520" y="4521708"/>
+            <a:ext cx="4617720" cy="219456"/>
           </a:xfrm>
           <a:prstGeom prst="rect">
             <a:avLst/>
@@ -16566,8 +16566,8 @@
         </p:nvSpPr>
         <p:spPr>
           <a:xfrm>
-            <a:off x="4262475" y="1186911"/>
-            <a:ext cx="4413808" cy="3217732"/>
+            <a:off x="4308652" y="1183788"/>
+            <a:ext cx="4321454" cy="3150826"/>
           </a:xfrm>
           <a:prstGeom prst="rect">
             <a:avLst/>
@@ -16619,8 +16619,8 @@
         </p:blipFill>
         <p:spPr>
           <a:xfrm>
-            <a:off x="4299051" y="1223487"/>
-            <a:ext cx="4340656" cy="3144580"/>
+            <a:off x="4345228" y="1220364"/>
+            <a:ext cx="4248302" cy="3077674"/>
           </a:xfrm>
           <a:prstGeom prst="rect">
             <a:avLst/>
@@ -16635,8 +16635,8 @@
         </p:nvSpPr>
         <p:spPr>
           <a:xfrm>
-            <a:off x="4160520" y="4594860"/>
-            <a:ext cx="4617720" cy="201168"/>
+            <a:off x="4160520" y="4521708"/>
+            <a:ext cx="4617720" cy="219456"/>
           </a:xfrm>
           <a:prstGeom prst="rect">
             <a:avLst/>
@@ -17616,8 +17616,8 @@
         </p:blipFill>
         <p:spPr>
           <a:xfrm>
-            <a:off x="4342302" y="1288206"/>
-            <a:ext cx="1236634" cy="1236634"/>
+            <a:off x="4362602" y="1390802"/>
+            <a:ext cx="1168603" cy="1168603"/>
           </a:xfrm>
           <a:prstGeom prst="rect">
             <a:avLst/>
@@ -17632,8 +17632,8 @@
         </p:nvSpPr>
         <p:spPr>
           <a:xfrm>
-            <a:off x="4160520" y="2633472"/>
-            <a:ext cx="1600200" cy="201168"/>
+            <a:off x="4160520" y="2679191"/>
+            <a:ext cx="1572768" cy="219456"/>
           </a:xfrm>
           <a:prstGeom prst="rect">
             <a:avLst/>
@@ -17662,7 +17662,7 @@
       </p:sp>
       <p:pic>
         <p:nvPicPr>
-          <p:cNvPr id="17" name="Picture 16" descr="ppt_mediapipe_pose.png"/>
+          <p:cNvPr id="17" name="Picture 16" descr="ppt_header_perception.png"/>
           <p:cNvPicPr>
             <a:picLocks noChangeAspect="1"/>
           </p:cNvPicPr>
@@ -17676,8 +17676,8 @@
         </p:blipFill>
         <p:spPr>
           <a:xfrm>
-            <a:off x="6253219" y="1191097"/>
-            <a:ext cx="2142248" cy="3209361"/>
+            <a:off x="6007150" y="2006665"/>
+            <a:ext cx="2625242" cy="1358768"/>
           </a:xfrm>
           <a:prstGeom prst="rect">
             <a:avLst/>
@@ -17692,8 +17692,8 @@
         </p:nvSpPr>
         <p:spPr>
           <a:xfrm>
-            <a:off x="5870448" y="4594860"/>
-            <a:ext cx="2907791" cy="201168"/>
+            <a:off x="5861303" y="4329684"/>
+            <a:ext cx="2916936" cy="219456"/>
           </a:xfrm>
           <a:prstGeom prst="rect">
             <a:avLst/>
@@ -17715,7 +17715,7 @@
                 <a:latin typeface="微软雅黑"/>
                 <ns8:rFonts xmlns:ns8="http://schemas.openxmlformats.org/wordprocessingml/2006/main" ns8:eastAsia="微软雅黑" ns8:ascii="微软雅黑" ns8:hAnsi="微软雅黑"/>
               </a:rPr>
-              <a:t>演示界面</a:t>
+              <a:t>Web 感知界面</a:t>
             </a:r>
           </a:p>
         </p:txBody>
@@ -18765,7 +18765,7 @@
         </p:nvSpPr>
         <p:spPr>
           <a:xfrm>
-            <a:off x="115305" y="1540324"/>
+            <a:off x="115305" y="1531180"/>
             <a:ext cx="4204228" cy="2227443"/>
           </a:xfrm>
           <a:prstGeom prst="rect">
@@ -18818,7 +18818,7 @@
         </p:blipFill>
         <p:spPr>
           <a:xfrm>
-            <a:off x="151881" y="1576900"/>
+            <a:off x="151881" y="1567756"/>
             <a:ext cx="4131076" cy="2154291"/>
           </a:xfrm>
           <a:prstGeom prst="rect">
@@ -18834,8 +18834,8 @@
         </p:nvSpPr>
         <p:spPr>
           <a:xfrm>
-            <a:off x="109728" y="4850892"/>
-            <a:ext cx="4215383" cy="201168"/>
+            <a:off x="109728" y="4832604"/>
+            <a:ext cx="4215383" cy="219456"/>
           </a:xfrm>
           <a:prstGeom prst="rect">
             <a:avLst/>
@@ -19023,8 +19023,8 @@
         </p:nvSpPr>
         <p:spPr>
           <a:xfrm>
-            <a:off x="5897879" y="3026664"/>
-            <a:ext cx="1234440" cy="1161288"/>
+            <a:off x="5907024" y="3026664"/>
+            <a:ext cx="1216152" cy="1143000"/>
           </a:xfrm>
           <a:prstGeom prst="rect">
             <a:avLst/>
@@ -19076,8 +19076,8 @@
         </p:blipFill>
         <p:spPr>
           <a:xfrm>
-            <a:off x="5934455" y="3063240"/>
-            <a:ext cx="1161288" cy="1161288"/>
+            <a:off x="5943600" y="3063240"/>
+            <a:ext cx="1143000" cy="1143000"/>
           </a:xfrm>
           <a:prstGeom prst="rect">
             <a:avLst/>
@@ -19092,8 +19092,8 @@
         </p:nvSpPr>
         <p:spPr>
           <a:xfrm>
-            <a:off x="5806440" y="4279392"/>
-            <a:ext cx="1417320" cy="201168"/>
+            <a:off x="5806440" y="4261104"/>
+            <a:ext cx="1417320" cy="219456"/>
           </a:xfrm>
           <a:prstGeom prst="rect">
             <a:avLst/>
@@ -20544,8 +20544,8 @@
         </p:nvSpPr>
         <p:spPr>
           <a:xfrm>
-            <a:off x="4262475" y="1252679"/>
-            <a:ext cx="4413808" cy="3086196"/>
+            <a:off x="4308652" y="1248157"/>
+            <a:ext cx="4321454" cy="3022089"/>
           </a:xfrm>
           <a:prstGeom prst="rect">
             <a:avLst/>
@@ -20597,8 +20597,8 @@
         </p:blipFill>
         <p:spPr>
           <a:xfrm>
-            <a:off x="4299051" y="1289255"/>
-            <a:ext cx="4340656" cy="3013044"/>
+            <a:off x="4345228" y="1284733"/>
+            <a:ext cx="4248302" cy="2948937"/>
           </a:xfrm>
           <a:prstGeom prst="rect">
             <a:avLst/>
@@ -20613,8 +20613,8 @@
         </p:nvSpPr>
         <p:spPr>
           <a:xfrm>
-            <a:off x="4160520" y="4594860"/>
-            <a:ext cx="4617720" cy="201168"/>
+            <a:off x="4160520" y="4521708"/>
+            <a:ext cx="4617720" cy="219456"/>
           </a:xfrm>
           <a:prstGeom prst="rect">
             <a:avLst/>
@@ -21259,8 +21259,8 @@
         </p:nvSpPr>
         <p:spPr>
           <a:xfrm>
-            <a:off x="4262475" y="1548312"/>
-            <a:ext cx="4413808" cy="2494931"/>
+            <a:off x="4308652" y="1537499"/>
+            <a:ext cx="4321454" cy="2443404"/>
           </a:xfrm>
           <a:prstGeom prst="rect">
             <a:avLst/>
@@ -21312,8 +21312,8 @@
         </p:blipFill>
         <p:spPr>
           <a:xfrm>
-            <a:off x="4299051" y="1584888"/>
-            <a:ext cx="4340656" cy="2421779"/>
+            <a:off x="4345228" y="1574075"/>
+            <a:ext cx="4248302" cy="2370252"/>
           </a:xfrm>
           <a:prstGeom prst="rect">
             <a:avLst/>
@@ -21328,8 +21328,8 @@
         </p:nvSpPr>
         <p:spPr>
           <a:xfrm>
-            <a:off x="4160520" y="4594860"/>
-            <a:ext cx="4617720" cy="201168"/>
+            <a:off x="4160520" y="4521708"/>
+            <a:ext cx="4617720" cy="219456"/>
           </a:xfrm>
           <a:prstGeom prst="rect">
             <a:avLst/>
@@ -22053,8 +22053,8 @@
         </p:nvSpPr>
         <p:spPr>
           <a:xfrm>
-            <a:off x="4476308" y="1119637"/>
-            <a:ext cx="3986142" cy="3352281"/>
+            <a:off x="4308652" y="1221190"/>
+            <a:ext cx="4321454" cy="3076023"/>
           </a:xfrm>
           <a:prstGeom prst="rect">
             <a:avLst/>
@@ -22106,8 +22106,8 @@
         </p:blipFill>
         <p:spPr>
           <a:xfrm>
-            <a:off x="4512884" y="1156213"/>
-            <a:ext cx="3912990" cy="3279129"/>
+            <a:off x="4345228" y="1257766"/>
+            <a:ext cx="4248302" cy="3002871"/>
           </a:xfrm>
           <a:prstGeom prst="rect">
             <a:avLst/>
@@ -22122,8 +22122,8 @@
         </p:nvSpPr>
         <p:spPr>
           <a:xfrm>
-            <a:off x="4160520" y="4594860"/>
-            <a:ext cx="4617720" cy="201168"/>
+            <a:off x="4160520" y="4521708"/>
+            <a:ext cx="4617720" cy="219456"/>
           </a:xfrm>
           <a:prstGeom prst="rect">
             <a:avLst/>
@@ -22145,7 +22145,7 @@
                 <a:latin typeface="微软雅黑"/>
                 <ns8:rFonts xmlns:ns8="http://schemas.openxmlformats.org/wordprocessingml/2006/main" ns8:eastAsia="微软雅黑" ns8:ascii="微软雅黑" ns8:hAnsi="微软雅黑"/>
               </a:rPr>
-              <a:t>Fig.1 系统分层</a:t>
+              <a:t>系统四层架构</a:t>
             </a:r>
           </a:p>
         </p:txBody>
@@ -22816,8 +22816,8 @@
         </p:nvSpPr>
         <p:spPr>
           <a:xfrm>
-            <a:off x="4694986" y="1288332"/>
-            <a:ext cx="4097426" cy="3234347"/>
+            <a:off x="4694986" y="1469852"/>
+            <a:ext cx="4097426" cy="2871307"/>
           </a:xfrm>
           <a:prstGeom prst="rect">
             <a:avLst/>
@@ -22869,8 +22869,8 @@
         </p:blipFill>
         <p:spPr>
           <a:xfrm>
-            <a:off x="4731562" y="1324908"/>
-            <a:ext cx="4024274" cy="3161195"/>
+            <a:off x="4731562" y="1506428"/>
+            <a:ext cx="4024274" cy="2798155"/>
           </a:xfrm>
           <a:prstGeom prst="rect">
             <a:avLst/>
@@ -23495,8 +23495,8 @@
         </p:nvSpPr>
         <p:spPr>
           <a:xfrm>
-            <a:off x="4476308" y="1119637"/>
-            <a:ext cx="3986142" cy="3352281"/>
+            <a:off x="4308652" y="1221190"/>
+            <a:ext cx="4321454" cy="3076023"/>
           </a:xfrm>
           <a:prstGeom prst="rect">
             <a:avLst/>
@@ -23548,8 +23548,8 @@
         </p:blipFill>
         <p:spPr>
           <a:xfrm>
-            <a:off x="4512884" y="1156213"/>
-            <a:ext cx="3912990" cy="3279129"/>
+            <a:off x="4345228" y="1257766"/>
+            <a:ext cx="4248302" cy="3002871"/>
           </a:xfrm>
           <a:prstGeom prst="rect">
             <a:avLst/>
@@ -23564,8 +23564,8 @@
         </p:nvSpPr>
         <p:spPr>
           <a:xfrm>
-            <a:off x="4160520" y="4594860"/>
-            <a:ext cx="4617720" cy="201168"/>
+            <a:off x="4160520" y="4521708"/>
+            <a:ext cx="4617720" cy="219456"/>
           </a:xfrm>
           <a:prstGeom prst="rect">
             <a:avLst/>
@@ -23587,7 +23587,7 @@
                 <a:latin typeface="微软雅黑"/>
                 <ns7:rFonts xmlns:ns7="http://schemas.openxmlformats.org/wordprocessingml/2006/main" ns7:eastAsia="微软雅黑" ns7:ascii="微软雅黑" ns7:hAnsi="微软雅黑"/>
               </a:rPr>
-              <a:t>四层架构与调度核心</a:t>
+              <a:t>分层与 CareOrchestrator</a:t>
             </a:r>
           </a:p>
         </p:txBody>

--- a/docs/答辩_CareCompanion.pptx
+++ b/docs/答辩_CareCompanion.pptx
@@ -8740,8 +8740,8 @@
         </p:nvSpPr>
         <p:spPr>
           <a:xfrm>
-            <a:off x="4694986" y="1530242"/>
-            <a:ext cx="4097426" cy="2750526"/>
+            <a:off x="4694986" y="1819631"/>
+            <a:ext cx="4097426" cy="2171748"/>
           </a:xfrm>
           <a:prstGeom prst="rect">
             <a:avLst/>
@@ -8779,7 +8779,7 @@
       </p:sp>
       <p:pic>
         <p:nvPicPr>
-          <p:cNvPr id="19" name="Picture 18" descr="eval_results.png"/>
+          <p:cNvPr id="19" name="Picture 18" descr="ppt_full_dashboard.png"/>
           <p:cNvPicPr>
             <a:picLocks noChangeAspect="1"/>
           </p:cNvPicPr>
@@ -8793,8 +8793,8 @@
         </p:blipFill>
         <p:spPr>
           <a:xfrm>
-            <a:off x="4731562" y="1566818"/>
-            <a:ext cx="4024274" cy="2677374"/>
+            <a:off x="4731562" y="1856207"/>
+            <a:ext cx="4024274" cy="2098596"/>
           </a:xfrm>
           <a:prstGeom prst="rect">
             <a:avLst/>
@@ -9786,8 +9786,8 @@
         </p:nvSpPr>
         <p:spPr>
           <a:xfrm>
-            <a:off x="274320" y="1033272"/>
-            <a:ext cx="8595360" cy="3781044"/>
+            <a:off x="274320" y="1014984"/>
+            <a:ext cx="8595360" cy="3817620"/>
           </a:xfrm>
           <a:prstGeom prst="rect">
             <a:avLst/>
@@ -9839,8 +9839,8 @@
         </p:blipFill>
         <p:spPr>
           <a:xfrm>
-            <a:off x="3355219" y="1191691"/>
-            <a:ext cx="2433561" cy="3244748"/>
+            <a:off x="3283278" y="1068339"/>
+            <a:ext cx="2577442" cy="3436589"/>
           </a:xfrm>
           <a:prstGeom prst="rect">
             <a:avLst/>
@@ -9855,8 +9855,8 @@
         </p:nvSpPr>
         <p:spPr>
           <a:xfrm>
-            <a:off x="365760" y="4594860"/>
-            <a:ext cx="8412480" cy="219456"/>
+            <a:off x="310896" y="4594860"/>
+            <a:ext cx="8522208" cy="219456"/>
           </a:xfrm>
           <a:prstGeom prst="rect">
             <a:avLst/>
@@ -11812,8 +11812,8 @@
         </p:nvSpPr>
         <p:spPr>
           <a:xfrm>
-            <a:off x="274320" y="1033272"/>
-            <a:ext cx="8595360" cy="3781044"/>
+            <a:off x="274320" y="1014984"/>
+            <a:ext cx="8595360" cy="3817620"/>
           </a:xfrm>
           <a:prstGeom prst="rect">
             <a:avLst/>
@@ -11865,8 +11865,8 @@
         </p:blipFill>
         <p:spPr>
           <a:xfrm>
-            <a:off x="1437450" y="1191691"/>
-            <a:ext cx="6269098" cy="3244748"/>
+            <a:off x="1387629" y="1165905"/>
+            <a:ext cx="6368740" cy="3296320"/>
           </a:xfrm>
           <a:prstGeom prst="rect">
             <a:avLst/>
@@ -11881,7 +11881,7 @@
         </p:nvSpPr>
         <p:spPr>
           <a:xfrm>
-            <a:off x="365760" y="4594860"/>
+            <a:off x="365760" y="4622292"/>
             <a:ext cx="8412480" cy="219456"/>
           </a:xfrm>
           <a:prstGeom prst="rect">
@@ -12606,8 +12606,8 @@
         </p:nvSpPr>
         <p:spPr>
           <a:xfrm>
-            <a:off x="4308652" y="1309415"/>
-            <a:ext cx="4321454" cy="2899573"/>
+            <a:off x="4308652" y="1308003"/>
+            <a:ext cx="4321454" cy="2902397"/>
           </a:xfrm>
           <a:prstGeom prst="rect">
             <a:avLst/>
@@ -12659,8 +12659,8 @@
         </p:blipFill>
         <p:spPr>
           <a:xfrm>
-            <a:off x="4345228" y="1345991"/>
-            <a:ext cx="4248302" cy="2826421"/>
+            <a:off x="4345228" y="1344579"/>
+            <a:ext cx="4248302" cy="2829245"/>
           </a:xfrm>
           <a:prstGeom prst="rect">
             <a:avLst/>
@@ -12698,7 +12698,7 @@
                 <a:latin typeface="微软雅黑"/>
                 <ns8:rFonts xmlns:ns8="http://schemas.openxmlformats.org/wordprocessingml/2006/main" ns8:eastAsia="微软雅黑" ns8:ascii="微软雅黑" ns8:hAnsi="微软雅黑"/>
               </a:rPr>
-              <a:t>混淆矩阵 + 场景得分</a:t>
+              <a:t>评测结果（6 场景）</a:t>
             </a:r>
           </a:p>
         </p:txBody>
@@ -13680,131 +13680,292 @@
           </a:p>
         </p:txBody>
       </p:sp>
-      <p:sp>
-        <p:nvSpPr>
-          <p:cNvPr id="8" name="Rectangle 7"/>
+      <p:graphicFrame>
+        <p:nvGraphicFramePr>
+          <p:cNvPr id="8" name="Table 7"/>
+          <p:cNvGraphicFramePr>
+            <a:graphicFrameLocks noGrp="1"/>
+          </p:cNvGraphicFramePr>
+          <p:nvPr/>
+        </p:nvGraphicFramePr>
+        <p:xfrm>
+          <a:off x="274320" y="996696"/>
+          <a:ext cx="3611880" cy="3854196"/>
+        </p:xfrm>
+        <a:graphic>
+          <a:graphicData uri="http://schemas.openxmlformats.org/drawingml/2006/table">
+            <a:tbl>
+              <a:tblPr firstRow="1" bandRow="1">
+                <a:tableStyleId>{5C22544A-7EE6-4342-B048-85BDC9FD1C3A}</a:tableStyleId>
+              </a:tblPr>
+              <a:tblGrid>
+                <a:gridCol w="868680"/>
+                <a:gridCol w="2743200"/>
+              </a:tblGrid>
+              <a:tr h="770839">
+                <a:tc>
+                  <a:txBody>
+                    <a:bodyPr anchor="ctr"/>
+                    <a:lstStyle/>
+                    <a:p>
+                      <a:pPr algn="ctr"/>
+                      <a:r>
+                        <a:rPr sz="900" b="1">
+                          <a:solidFill>
+                            <a:srgbClr val="FFFFFF"/>
+                          </a:solidFill>
+                          <a:latin typeface="微软雅黑"/>
+                          <ns3:rFonts xmlns:ns3="http://schemas.openxmlformats.org/wordprocessingml/2006/main" ns3:eastAsia="微软雅黑" ns3:ascii="微软雅黑" ns3:hAnsi="微软雅黑"/>
+                        </a:rPr>
+                        <a:t>GitHub</a:t>
+                      </a:r>
+                    </a:p>
+                  </a:txBody>
+                  <a:tcPr marL="50800" marR="50800" marT="25400" marB="25400">
+                    <a:solidFill>
+                      <a:srgbClr val="143278"/>
+                    </a:solidFill>
+                  </a:tcPr>
+                </a:tc>
+                <a:tc>
+                  <a:txBody>
+                    <a:bodyPr anchor="ctr" wrap="square"/>
+                    <a:lstStyle/>
+                    <a:p>
+                      <a:pPr algn="l"/>
+                      <a:r>
+                        <a:rPr sz="800" b="0">
+                          <a:solidFill>
+                            <a:srgbClr val="143278"/>
+                          </a:solidFill>
+                          <a:latin typeface="微软雅黑"/>
+                          <ns4:rFonts xmlns:ns4="http://schemas.openxmlformats.org/wordprocessingml/2006/main" ns4:eastAsia="微软雅黑" ns4:ascii="微软雅黑" ns4:hAnsi="微软雅黑"/>
+                        </a:rPr>
+                        <a:t>https://github.com/FBB123571/ElderCare-Humanoid-Platform</a:t>
+                      </a:r>
+                    </a:p>
+                  </a:txBody>
+                  <a:tcPr marL="63500">
+                    <a:solidFill>
+                      <a:srgbClr val="F1F7FF"/>
+                    </a:solidFill>
+                  </a:tcPr>
+                </a:tc>
+              </a:tr>
+              <a:tr h="770839">
+                <a:tc>
+                  <a:txBody>
+                    <a:bodyPr anchor="ctr"/>
+                    <a:lstStyle/>
+                    <a:p>
+                      <a:pPr algn="ctr"/>
+                      <a:r>
+                        <a:rPr sz="900" b="1">
+                          <a:solidFill>
+                            <a:srgbClr val="FFFFFF"/>
+                          </a:solidFill>
+                          <a:latin typeface="微软雅黑"/>
+                          <ns5:rFonts xmlns:ns5="http://schemas.openxmlformats.org/wordprocessingml/2006/main" ns5:eastAsia="微软雅黑" ns5:ascii="微软雅黑" ns5:hAnsi="微软雅黑"/>
+                        </a:rPr>
+                        <a:t>团队</a:t>
+                      </a:r>
+                    </a:p>
+                  </a:txBody>
+                  <a:tcPr marL="50800" marR="50800" marT="25400" marB="25400">
+                    <a:solidFill>
+                      <a:srgbClr val="143278"/>
+                    </a:solidFill>
+                  </a:tcPr>
+                </a:tc>
+                <a:tc>
+                  <a:txBody>
+                    <a:bodyPr anchor="ctr" wrap="square"/>
+                    <a:lstStyle/>
+                    <a:p>
+                      <a:pPr algn="l"/>
+                      <a:r>
+                        <a:rPr sz="900" b="0">
+                          <a:solidFill>
+                            <a:srgbClr val="143278"/>
+                          </a:solidFill>
+                          <a:latin typeface="微软雅黑"/>
+                          <ns6:rFonts xmlns:ns6="http://schemas.openxmlformats.org/wordprocessingml/2006/main" ns6:eastAsia="微软雅黑" ns6:ascii="微软雅黑" ns6:hAnsi="微软雅黑"/>
+                        </a:rPr>
+                        <a:t>从容应队（中山大学）</a:t>
+                      </a:r>
+                    </a:p>
+                  </a:txBody>
+                  <a:tcPr marL="63500">
+                    <a:solidFill>
+                      <a:srgbClr val="FFFFFF"/>
+                    </a:solidFill>
+                  </a:tcPr>
+                </a:tc>
+              </a:tr>
+              <a:tr h="770839">
+                <a:tc>
+                  <a:txBody>
+                    <a:bodyPr anchor="ctr"/>
+                    <a:lstStyle/>
+                    <a:p>
+                      <a:pPr algn="ctr"/>
+                      <a:r>
+                        <a:rPr sz="900" b="1">
+                          <a:solidFill>
+                            <a:srgbClr val="FFFFFF"/>
+                          </a:solidFill>
+                          <a:latin typeface="微软雅黑"/>
+                          <ns7:rFonts xmlns:ns7="http://schemas.openxmlformats.org/wordprocessingml/2006/main" ns7:eastAsia="微软雅黑" ns7:ascii="微软雅黑" ns7:hAnsi="微软雅黑"/>
+                        </a:rPr>
+                        <a:t>本地演示</a:t>
+                      </a:r>
+                    </a:p>
+                  </a:txBody>
+                  <a:tcPr marL="50800" marR="50800" marT="25400" marB="25400">
+                    <a:solidFill>
+                      <a:srgbClr val="143278"/>
+                    </a:solidFill>
+                  </a:tcPr>
+                </a:tc>
+                <a:tc>
+                  <a:txBody>
+                    <a:bodyPr anchor="ctr" wrap="square"/>
+                    <a:lstStyle/>
+                    <a:p>
+                      <a:pPr algn="l"/>
+                      <a:r>
+                        <a:rPr sz="900" b="0">
+                          <a:solidFill>
+                            <a:srgbClr val="143278"/>
+                          </a:solidFill>
+                          <a:latin typeface="微软雅黑"/>
+                          <ns8:rFonts xmlns:ns8="http://schemas.openxmlformats.org/wordprocessingml/2006/main" ns8:eastAsia="微软雅黑" ns8:ascii="微软雅黑" ns8:hAnsi="微软雅黑"/>
+                        </a:rPr>
+                        <a:t>bash scripts/run_web.sh</a:t>
+                      </a:r>
+                    </a:p>
+                  </a:txBody>
+                  <a:tcPr marL="63500">
+                    <a:solidFill>
+                      <a:srgbClr val="F1F7FF"/>
+                    </a:solidFill>
+                  </a:tcPr>
+                </a:tc>
+              </a:tr>
+              <a:tr h="770839">
+                <a:tc>
+                  <a:txBody>
+                    <a:bodyPr anchor="ctr"/>
+                    <a:lstStyle/>
+                    <a:p>
+                      <a:pPr algn="ctr"/>
+                      <a:r>
+                        <a:rPr sz="900" b="1">
+                          <a:solidFill>
+                            <a:srgbClr val="FFFFFF"/>
+                          </a:solidFill>
+                          <a:latin typeface="微软雅黑"/>
+                          <ns9:rFonts xmlns:ns9="http://schemas.openxmlformats.org/wordprocessingml/2006/main" ns9:eastAsia="微软雅黑" ns9:ascii="微软雅黑" ns9:hAnsi="微软雅黑"/>
+                        </a:rPr>
+                        <a:t>演示录像</a:t>
+                      </a:r>
+                    </a:p>
+                  </a:txBody>
+                  <a:tcPr marL="50800" marR="50800" marT="25400" marB="25400">
+                    <a:solidFill>
+                      <a:srgbClr val="143278"/>
+                    </a:solidFill>
+                  </a:tcPr>
+                </a:tc>
+                <a:tc>
+                  <a:txBody>
+                    <a:bodyPr anchor="ctr" wrap="square"/>
+                    <a:lstStyle/>
+                    <a:p>
+                      <a:pPr algn="l"/>
+                      <a:r>
+                        <a:rPr sz="900" b="0">
+                          <a:solidFill>
+                            <a:srgbClr val="143278"/>
+                          </a:solidFill>
+                          <a:latin typeface="微软雅黑"/>
+                          <ns10:rFonts xmlns:ns10="http://schemas.openxmlformats.org/wordprocessingml/2006/main" ns10:eastAsia="微软雅黑" ns10:ascii="微软雅黑" ns10:hAnsi="微软雅黑"/>
+                        </a:rPr>
+                        <a:t>docs/assets/demo_carecompanion.mp4</a:t>
+                      </a:r>
+                    </a:p>
+                  </a:txBody>
+                  <a:tcPr marL="63500">
+                    <a:solidFill>
+                      <a:srgbClr val="FFFFFF"/>
+                    </a:solidFill>
+                  </a:tcPr>
+                </a:tc>
+              </a:tr>
+              <a:tr h="770840">
+                <a:tc>
+                  <a:txBody>
+                    <a:bodyPr anchor="ctr"/>
+                    <a:lstStyle/>
+                    <a:p>
+                      <a:pPr algn="ctr"/>
+                      <a:r>
+                        <a:rPr sz="900" b="1">
+                          <a:solidFill>
+                            <a:srgbClr val="FFFFFF"/>
+                          </a:solidFill>
+                          <a:latin typeface="微软雅黑"/>
+                          <ns11:rFonts xmlns:ns11="http://schemas.openxmlformats.org/wordprocessingml/2006/main" ns11:eastAsia="微软雅黑" ns11:ascii="微软雅黑" ns11:hAnsi="微软雅黑"/>
+                        </a:rPr>
+                        <a:t>软著</a:t>
+                      </a:r>
+                    </a:p>
+                  </a:txBody>
+                  <a:tcPr marL="50800" marR="50800" marT="25400" marB="25400">
+                    <a:solidFill>
+                      <a:srgbClr val="143278"/>
+                    </a:solidFill>
+                  </a:tcPr>
+                </a:tc>
+                <a:tc>
+                  <a:txBody>
+                    <a:bodyPr anchor="ctr" wrap="square"/>
+                    <a:lstStyle/>
+                    <a:p>
+                      <a:pPr algn="l"/>
+                      <a:r>
+                        <a:rPr sz="900" b="0">
+                          <a:solidFill>
+                            <a:srgbClr val="143278"/>
+                          </a:solidFill>
+                          <a:latin typeface="微软雅黑"/>
+                          <ns12:rFonts xmlns:ns12="http://schemas.openxmlformats.org/wordprocessingml/2006/main" ns12:eastAsia="微软雅黑" ns12:ascii="微软雅黑" ns12:hAnsi="微软雅黑"/>
+                        </a:rPr>
+                        <a:t>申请中</a:t>
+                      </a:r>
+                    </a:p>
+                  </a:txBody>
+                  <a:tcPr marL="63500">
+                    <a:solidFill>
+                      <a:srgbClr val="F1F7FF"/>
+                    </a:solidFill>
+                  </a:tcPr>
+                </a:tc>
+              </a:tr>
+            </a:tbl>
+          </a:graphicData>
+        </a:graphic>
+      </p:graphicFrame>
+      <p:sp>
+        <p:nvSpPr>
+          <p:cNvPr id="9" name="Rectangle 8"/>
           <p:cNvSpPr/>
           <p:nvPr/>
         </p:nvSpPr>
         <p:spPr>
           <a:xfrm>
-            <a:off x="274320" y="1042416"/>
-            <a:ext cx="3611880" cy="679399"/>
-          </a:xfrm>
-          <a:prstGeom prst="rect">
-            <a:avLst/>
-          </a:prstGeom>
-          <a:solidFill>
-            <a:srgbClr val="F1F7FF"/>
-          </a:solidFill>
-          <a:ln>
-            <a:solidFill>
-              <a:srgbClr val="BAC8DC"/>
-            </a:solidFill>
-          </a:ln>
-        </p:spPr>
-        <p:style>
-          <a:lnRef idx="1">
-            <a:schemeClr val="accent1"/>
-          </a:lnRef>
-          <a:fillRef idx="3">
-            <a:schemeClr val="accent1"/>
-          </a:fillRef>
-          <a:effectRef idx="2">
-            <a:schemeClr val="accent1"/>
-          </a:effectRef>
-          <a:fontRef idx="minor">
-            <a:schemeClr val="lt1"/>
-          </a:fontRef>
-        </p:style>
-        <p:txBody>
-          <a:bodyPr rtlCol="0" anchor="ctr"/>
-          <a:lstStyle/>
-          <a:p>
-            <a:pPr algn="ctr"/>
-          </a:p>
-        </p:txBody>
-      </p:sp>
-      <p:sp>
-        <p:nvSpPr>
-          <p:cNvPr id="9" name="TextBox 8"/>
-          <p:cNvSpPr txBox="1"/>
-          <p:nvPr/>
-        </p:nvSpPr>
-        <p:spPr>
-          <a:xfrm>
-            <a:off x="411479" y="1097280"/>
-            <a:ext cx="914400" cy="642823"/>
-          </a:xfrm>
-          <a:prstGeom prst="rect">
-            <a:avLst/>
-          </a:prstGeom>
-          <a:noFill/>
-        </p:spPr>
-        <p:txBody>
-          <a:bodyPr wrap="none">
-            <a:spAutoFit/>
-          </a:bodyPr>
-          <a:lstStyle/>
-          <a:p>
-            <a:r>
-              <a:rPr sz="1000" b="1">
-                <a:solidFill>
-                  <a:srgbClr val="5A6273"/>
-                </a:solidFill>
-                <a:latin typeface="微软雅黑"/>
-                <ns3:rFonts xmlns:ns3="http://schemas.openxmlformats.org/wordprocessingml/2006/main" ns3:eastAsia="微软雅黑" ns3:ascii="微软雅黑" ns3:hAnsi="微软雅黑"/>
-              </a:rPr>
-              <a:t>GitHub 仓库</a:t>
-            </a:r>
-          </a:p>
-        </p:txBody>
-      </p:sp>
-      <p:sp>
-        <p:nvSpPr>
-          <p:cNvPr id="10" name="TextBox 9"/>
-          <p:cNvSpPr txBox="1"/>
-          <p:nvPr/>
-        </p:nvSpPr>
-        <p:spPr>
-          <a:xfrm>
-            <a:off x="1280160" y="1097280"/>
-            <a:ext cx="2468880" cy="642823"/>
-          </a:xfrm>
-          <a:prstGeom prst="rect">
-            <a:avLst/>
-          </a:prstGeom>
-          <a:noFill/>
-        </p:spPr>
-        <p:txBody>
-          <a:bodyPr wrap="none">
-            <a:spAutoFit/>
-          </a:bodyPr>
-          <a:lstStyle/>
-          <a:p>
-            <a:r>
-              <a:rPr sz="900" b="0">
-                <a:solidFill>
-                  <a:srgbClr val="143278"/>
-                </a:solidFill>
-                <a:latin typeface="微软雅黑"/>
-                <ns4:rFonts xmlns:ns4="http://schemas.openxmlformats.org/wordprocessingml/2006/main" ns4:eastAsia="微软雅黑" ns4:ascii="微软雅黑" ns4:hAnsi="微软雅黑"/>
-              </a:rPr>
-              <a:t>https://github.com/FBB123571/ElderCare-Humanoid-Platform</a:t>
-            </a:r>
-          </a:p>
-        </p:txBody>
-      </p:sp>
-      <p:sp>
-        <p:nvSpPr>
-          <p:cNvPr id="11" name="Rectangle 10"/>
-          <p:cNvSpPr/>
-          <p:nvPr/>
-        </p:nvSpPr>
-        <p:spPr>
-          <a:xfrm>
-            <a:off x="274320" y="1794967"/>
-            <a:ext cx="3611880" cy="679399"/>
+            <a:off x="4123944" y="996696"/>
+            <a:ext cx="4690872" cy="3854196"/>
           </a:xfrm>
           <a:prstGeom prst="rect">
             <a:avLst/>
@@ -13840,469 +14001,9 @@
           </a:p>
         </p:txBody>
       </p:sp>
-      <p:sp>
-        <p:nvSpPr>
-          <p:cNvPr id="12" name="TextBox 11"/>
-          <p:cNvSpPr txBox="1"/>
-          <p:nvPr/>
-        </p:nvSpPr>
-        <p:spPr>
-          <a:xfrm>
-            <a:off x="411479" y="1849831"/>
-            <a:ext cx="914400" cy="642823"/>
-          </a:xfrm>
-          <a:prstGeom prst="rect">
-            <a:avLst/>
-          </a:prstGeom>
-          <a:noFill/>
-        </p:spPr>
-        <p:txBody>
-          <a:bodyPr wrap="none">
-            <a:spAutoFit/>
-          </a:bodyPr>
-          <a:lstStyle/>
-          <a:p>
-            <a:r>
-              <a:rPr sz="1000" b="1">
-                <a:solidFill>
-                  <a:srgbClr val="5A6273"/>
-                </a:solidFill>
-                <a:latin typeface="微软雅黑"/>
-                <ns5:rFonts xmlns:ns5="http://schemas.openxmlformats.org/wordprocessingml/2006/main" ns5:eastAsia="微软雅黑" ns5:ascii="微软雅黑" ns5:hAnsi="微软雅黑"/>
-              </a:rPr>
-              <a:t>团队</a:t>
-            </a:r>
-          </a:p>
-        </p:txBody>
-      </p:sp>
-      <p:sp>
-        <p:nvSpPr>
-          <p:cNvPr id="13" name="TextBox 12"/>
-          <p:cNvSpPr txBox="1"/>
-          <p:nvPr/>
-        </p:nvSpPr>
-        <p:spPr>
-          <a:xfrm>
-            <a:off x="1280160" y="1849831"/>
-            <a:ext cx="2468880" cy="642823"/>
-          </a:xfrm>
-          <a:prstGeom prst="rect">
-            <a:avLst/>
-          </a:prstGeom>
-          <a:noFill/>
-        </p:spPr>
-        <p:txBody>
-          <a:bodyPr wrap="none">
-            <a:spAutoFit/>
-          </a:bodyPr>
-          <a:lstStyle/>
-          <a:p>
-            <a:r>
-              <a:rPr sz="1000" b="0">
-                <a:solidFill>
-                  <a:srgbClr val="143278"/>
-                </a:solidFill>
-                <a:latin typeface="微软雅黑"/>
-                <ns6:rFonts xmlns:ns6="http://schemas.openxmlformats.org/wordprocessingml/2006/main" ns6:eastAsia="微软雅黑" ns6:ascii="微软雅黑" ns6:hAnsi="微软雅黑"/>
-              </a:rPr>
-              <a:t>从容应队（中山大学）</a:t>
-            </a:r>
-          </a:p>
-        </p:txBody>
-      </p:sp>
-      <p:sp>
-        <p:nvSpPr>
-          <p:cNvPr id="14" name="Rectangle 13"/>
-          <p:cNvSpPr/>
-          <p:nvPr/>
-        </p:nvSpPr>
-        <p:spPr>
-          <a:xfrm>
-            <a:off x="274320" y="2547518"/>
-            <a:ext cx="3611880" cy="679399"/>
-          </a:xfrm>
-          <a:prstGeom prst="rect">
-            <a:avLst/>
-          </a:prstGeom>
-          <a:solidFill>
-            <a:srgbClr val="F1F7FF"/>
-          </a:solidFill>
-          <a:ln>
-            <a:solidFill>
-              <a:srgbClr val="BAC8DC"/>
-            </a:solidFill>
-          </a:ln>
-        </p:spPr>
-        <p:style>
-          <a:lnRef idx="1">
-            <a:schemeClr val="accent1"/>
-          </a:lnRef>
-          <a:fillRef idx="3">
-            <a:schemeClr val="accent1"/>
-          </a:fillRef>
-          <a:effectRef idx="2">
-            <a:schemeClr val="accent1"/>
-          </a:effectRef>
-          <a:fontRef idx="minor">
-            <a:schemeClr val="lt1"/>
-          </a:fontRef>
-        </p:style>
-        <p:txBody>
-          <a:bodyPr rtlCol="0" anchor="ctr"/>
-          <a:lstStyle/>
-          <a:p>
-            <a:pPr algn="ctr"/>
-          </a:p>
-        </p:txBody>
-      </p:sp>
-      <p:sp>
-        <p:nvSpPr>
-          <p:cNvPr id="15" name="TextBox 14"/>
-          <p:cNvSpPr txBox="1"/>
-          <p:nvPr/>
-        </p:nvSpPr>
-        <p:spPr>
-          <a:xfrm>
-            <a:off x="411479" y="2602382"/>
-            <a:ext cx="914400" cy="642823"/>
-          </a:xfrm>
-          <a:prstGeom prst="rect">
-            <a:avLst/>
-          </a:prstGeom>
-          <a:noFill/>
-        </p:spPr>
-        <p:txBody>
-          <a:bodyPr wrap="none">
-            <a:spAutoFit/>
-          </a:bodyPr>
-          <a:lstStyle/>
-          <a:p>
-            <a:r>
-              <a:rPr sz="1000" b="1">
-                <a:solidFill>
-                  <a:srgbClr val="5A6273"/>
-                </a:solidFill>
-                <a:latin typeface="微软雅黑"/>
-                <ns7:rFonts xmlns:ns7="http://schemas.openxmlformats.org/wordprocessingml/2006/main" ns7:eastAsia="微软雅黑" ns7:ascii="微软雅黑" ns7:hAnsi="微软雅黑"/>
-              </a:rPr>
-              <a:t>本地演示</a:t>
-            </a:r>
-          </a:p>
-        </p:txBody>
-      </p:sp>
-      <p:sp>
-        <p:nvSpPr>
-          <p:cNvPr id="16" name="TextBox 15"/>
-          <p:cNvSpPr txBox="1"/>
-          <p:nvPr/>
-        </p:nvSpPr>
-        <p:spPr>
-          <a:xfrm>
-            <a:off x="1280160" y="2602382"/>
-            <a:ext cx="2468880" cy="642823"/>
-          </a:xfrm>
-          <a:prstGeom prst="rect">
-            <a:avLst/>
-          </a:prstGeom>
-          <a:noFill/>
-        </p:spPr>
-        <p:txBody>
-          <a:bodyPr wrap="none">
-            <a:spAutoFit/>
-          </a:bodyPr>
-          <a:lstStyle/>
-          <a:p>
-            <a:r>
-              <a:rPr sz="1000" b="0">
-                <a:solidFill>
-                  <a:srgbClr val="143278"/>
-                </a:solidFill>
-                <a:latin typeface="微软雅黑"/>
-                <ns8:rFonts xmlns:ns8="http://schemas.openxmlformats.org/wordprocessingml/2006/main" ns8:eastAsia="微软雅黑" ns8:ascii="微软雅黑" ns8:hAnsi="微软雅黑"/>
-              </a:rPr>
-              <a:t>bash scripts/run_web.sh</a:t>
-            </a:r>
-          </a:p>
-        </p:txBody>
-      </p:sp>
-      <p:sp>
-        <p:nvSpPr>
-          <p:cNvPr id="17" name="Rectangle 16"/>
-          <p:cNvSpPr/>
-          <p:nvPr/>
-        </p:nvSpPr>
-        <p:spPr>
-          <a:xfrm>
-            <a:off x="274320" y="3300069"/>
-            <a:ext cx="3611880" cy="679399"/>
-          </a:xfrm>
-          <a:prstGeom prst="rect">
-            <a:avLst/>
-          </a:prstGeom>
-          <a:solidFill>
-            <a:srgbClr val="FFFFFF"/>
-          </a:solidFill>
-          <a:ln>
-            <a:solidFill>
-              <a:srgbClr val="BAC8DC"/>
-            </a:solidFill>
-          </a:ln>
-        </p:spPr>
-        <p:style>
-          <a:lnRef idx="1">
-            <a:schemeClr val="accent1"/>
-          </a:lnRef>
-          <a:fillRef idx="3">
-            <a:schemeClr val="accent1"/>
-          </a:fillRef>
-          <a:effectRef idx="2">
-            <a:schemeClr val="accent1"/>
-          </a:effectRef>
-          <a:fontRef idx="minor">
-            <a:schemeClr val="lt1"/>
-          </a:fontRef>
-        </p:style>
-        <p:txBody>
-          <a:bodyPr rtlCol="0" anchor="ctr"/>
-          <a:lstStyle/>
-          <a:p>
-            <a:pPr algn="ctr"/>
-          </a:p>
-        </p:txBody>
-      </p:sp>
-      <p:sp>
-        <p:nvSpPr>
-          <p:cNvPr id="18" name="TextBox 17"/>
-          <p:cNvSpPr txBox="1"/>
-          <p:nvPr/>
-        </p:nvSpPr>
-        <p:spPr>
-          <a:xfrm>
-            <a:off x="411479" y="3354933"/>
-            <a:ext cx="914400" cy="642823"/>
-          </a:xfrm>
-          <a:prstGeom prst="rect">
-            <a:avLst/>
-          </a:prstGeom>
-          <a:noFill/>
-        </p:spPr>
-        <p:txBody>
-          <a:bodyPr wrap="none">
-            <a:spAutoFit/>
-          </a:bodyPr>
-          <a:lstStyle/>
-          <a:p>
-            <a:r>
-              <a:rPr sz="1000" b="1">
-                <a:solidFill>
-                  <a:srgbClr val="5A6273"/>
-                </a:solidFill>
-                <a:latin typeface="微软雅黑"/>
-                <ns9:rFonts xmlns:ns9="http://schemas.openxmlformats.org/wordprocessingml/2006/main" ns9:eastAsia="微软雅黑" ns9:ascii="微软雅黑" ns9:hAnsi="微软雅黑"/>
-              </a:rPr>
-              <a:t>演示录像</a:t>
-            </a:r>
-          </a:p>
-        </p:txBody>
-      </p:sp>
-      <p:sp>
-        <p:nvSpPr>
-          <p:cNvPr id="19" name="TextBox 18"/>
-          <p:cNvSpPr txBox="1"/>
-          <p:nvPr/>
-        </p:nvSpPr>
-        <p:spPr>
-          <a:xfrm>
-            <a:off x="1280160" y="3354933"/>
-            <a:ext cx="2468880" cy="642823"/>
-          </a:xfrm>
-          <a:prstGeom prst="rect">
-            <a:avLst/>
-          </a:prstGeom>
-          <a:noFill/>
-        </p:spPr>
-        <p:txBody>
-          <a:bodyPr wrap="none">
-            <a:spAutoFit/>
-          </a:bodyPr>
-          <a:lstStyle/>
-          <a:p>
-            <a:r>
-              <a:rPr sz="1000" b="0">
-                <a:solidFill>
-                  <a:srgbClr val="143278"/>
-                </a:solidFill>
-                <a:latin typeface="微软雅黑"/>
-                <ns10:rFonts xmlns:ns10="http://schemas.openxmlformats.org/wordprocessingml/2006/main" ns10:eastAsia="微软雅黑" ns10:ascii="微软雅黑" ns10:hAnsi="微软雅黑"/>
-              </a:rPr>
-              <a:t>docs/assets/demo_carecompanion.mp4</a:t>
-            </a:r>
-          </a:p>
-        </p:txBody>
-      </p:sp>
-      <p:sp>
-        <p:nvSpPr>
-          <p:cNvPr id="20" name="Rectangle 19"/>
-          <p:cNvSpPr/>
-          <p:nvPr/>
-        </p:nvSpPr>
-        <p:spPr>
-          <a:xfrm>
-            <a:off x="274320" y="4052620"/>
-            <a:ext cx="3611880" cy="679399"/>
-          </a:xfrm>
-          <a:prstGeom prst="rect">
-            <a:avLst/>
-          </a:prstGeom>
-          <a:solidFill>
-            <a:srgbClr val="F1F7FF"/>
-          </a:solidFill>
-          <a:ln>
-            <a:solidFill>
-              <a:srgbClr val="BAC8DC"/>
-            </a:solidFill>
-          </a:ln>
-        </p:spPr>
-        <p:style>
-          <a:lnRef idx="1">
-            <a:schemeClr val="accent1"/>
-          </a:lnRef>
-          <a:fillRef idx="3">
-            <a:schemeClr val="accent1"/>
-          </a:fillRef>
-          <a:effectRef idx="2">
-            <a:schemeClr val="accent1"/>
-          </a:effectRef>
-          <a:fontRef idx="minor">
-            <a:schemeClr val="lt1"/>
-          </a:fontRef>
-        </p:style>
-        <p:txBody>
-          <a:bodyPr rtlCol="0" anchor="ctr"/>
-          <a:lstStyle/>
-          <a:p>
-            <a:pPr algn="ctr"/>
-          </a:p>
-        </p:txBody>
-      </p:sp>
-      <p:sp>
-        <p:nvSpPr>
-          <p:cNvPr id="21" name="TextBox 20"/>
-          <p:cNvSpPr txBox="1"/>
-          <p:nvPr/>
-        </p:nvSpPr>
-        <p:spPr>
-          <a:xfrm>
-            <a:off x="411479" y="4107484"/>
-            <a:ext cx="914400" cy="642823"/>
-          </a:xfrm>
-          <a:prstGeom prst="rect">
-            <a:avLst/>
-          </a:prstGeom>
-          <a:noFill/>
-        </p:spPr>
-        <p:txBody>
-          <a:bodyPr wrap="none">
-            <a:spAutoFit/>
-          </a:bodyPr>
-          <a:lstStyle/>
-          <a:p>
-            <a:r>
-              <a:rPr sz="1000" b="1">
-                <a:solidFill>
-                  <a:srgbClr val="5A6273"/>
-                </a:solidFill>
-                <a:latin typeface="微软雅黑"/>
-                <ns11:rFonts xmlns:ns11="http://schemas.openxmlformats.org/wordprocessingml/2006/main" ns11:eastAsia="微软雅黑" ns11:ascii="微软雅黑" ns11:hAnsi="微软雅黑"/>
-              </a:rPr>
-              <a:t>软著</a:t>
-            </a:r>
-          </a:p>
-        </p:txBody>
-      </p:sp>
-      <p:sp>
-        <p:nvSpPr>
-          <p:cNvPr id="22" name="TextBox 21"/>
-          <p:cNvSpPr txBox="1"/>
-          <p:nvPr/>
-        </p:nvSpPr>
-        <p:spPr>
-          <a:xfrm>
-            <a:off x="1280160" y="4107484"/>
-            <a:ext cx="2468880" cy="642823"/>
-          </a:xfrm>
-          <a:prstGeom prst="rect">
-            <a:avLst/>
-          </a:prstGeom>
-          <a:noFill/>
-        </p:spPr>
-        <p:txBody>
-          <a:bodyPr wrap="none">
-            <a:spAutoFit/>
-          </a:bodyPr>
-          <a:lstStyle/>
-          <a:p>
-            <a:r>
-              <a:rPr sz="1000" b="0">
-                <a:solidFill>
-                  <a:srgbClr val="143278"/>
-                </a:solidFill>
-                <a:latin typeface="微软雅黑"/>
-                <ns12:rFonts xmlns:ns12="http://schemas.openxmlformats.org/wordprocessingml/2006/main" ns12:eastAsia="微软雅黑" ns12:ascii="微软雅黑" ns12:hAnsi="微软雅黑"/>
-              </a:rPr>
-              <a:t>申请中</a:t>
-            </a:r>
-          </a:p>
-        </p:txBody>
-      </p:sp>
-      <p:sp>
-        <p:nvSpPr>
-          <p:cNvPr id="23" name="Rectangle 22"/>
-          <p:cNvSpPr/>
-          <p:nvPr/>
-        </p:nvSpPr>
-        <p:spPr>
-          <a:xfrm>
-            <a:off x="4105656" y="1033272"/>
-            <a:ext cx="4727448" cy="3744468"/>
-          </a:xfrm>
-          <a:prstGeom prst="rect">
-            <a:avLst/>
-          </a:prstGeom>
-          <a:solidFill>
-            <a:srgbClr val="FFFFFF"/>
-          </a:solidFill>
-          <a:ln w="9525">
-            <a:solidFill>
-              <a:srgbClr val="BAC8DC"/>
-            </a:solidFill>
-          </a:ln>
-        </p:spPr>
-        <p:style>
-          <a:lnRef idx="1">
-            <a:schemeClr val="accent1"/>
-          </a:lnRef>
-          <a:fillRef idx="3">
-            <a:schemeClr val="accent1"/>
-          </a:fillRef>
-          <a:effectRef idx="2">
-            <a:schemeClr val="accent1"/>
-          </a:effectRef>
-          <a:fontRef idx="minor">
-            <a:schemeClr val="lt1"/>
-          </a:fontRef>
-        </p:style>
-        <p:txBody>
-          <a:bodyPr rtlCol="0" anchor="ctr"/>
-          <a:lstStyle/>
-          <a:p>
-            <a:pPr algn="ctr"/>
-          </a:p>
-        </p:txBody>
-      </p:sp>
       <p:pic>
         <p:nvPicPr>
-          <p:cNvPr id="24" name="Picture 23" descr="ppt_demo_qr.png"/>
+          <p:cNvPr id="10" name="Picture 9" descr="ppt_demo_qr.png"/>
           <p:cNvPicPr>
             <a:picLocks noChangeAspect="1"/>
           </p:cNvPicPr>
@@ -14316,8 +14017,8 @@
         </p:blipFill>
         <p:spPr>
           <a:xfrm>
-            <a:off x="4304995" y="1241755"/>
-            <a:ext cx="1219809" cy="1219809"/>
+            <a:off x="5788152" y="1106424"/>
+            <a:ext cx="1362456" cy="1362456"/>
           </a:xfrm>
           <a:prstGeom prst="rect">
             <a:avLst/>
@@ -14326,14 +14027,14 @@
       </p:pic>
       <p:sp>
         <p:nvSpPr>
-          <p:cNvPr id="25" name="TextBox 24"/>
+          <p:cNvPr id="11" name="TextBox 10"/>
           <p:cNvSpPr txBox="1"/>
           <p:nvPr/>
         </p:nvSpPr>
         <p:spPr>
           <a:xfrm>
-            <a:off x="4160520" y="2569463"/>
-            <a:ext cx="1508760" cy="219456"/>
+            <a:off x="4123944" y="2560320"/>
+            <a:ext cx="4690872" cy="201168"/>
           </a:xfrm>
           <a:prstGeom prst="rect">
             <a:avLst/>
@@ -14341,59 +14042,35 @@
           <a:noFill/>
         </p:spPr>
         <p:txBody>
-          <a:bodyPr wrap="square" anchor="ctr">
+          <a:bodyPr wrap="none">
             <a:spAutoFit/>
           </a:bodyPr>
           <a:lstStyle/>
           <a:p>
             <a:pPr algn="ctr"/>
             <a:r>
-              <a:rPr sz="800" b="0">
-                <a:solidFill>
-                  <a:srgbClr val="5A6273"/>
+              <a:rPr sz="900" b="1">
+                <a:solidFill>
+                  <a:srgbClr val="143278"/>
                 </a:solidFill>
                 <a:latin typeface="微软雅黑"/>
                 <ns13:rFonts xmlns:ns13="http://schemas.openxmlformats.org/wordprocessingml/2006/main" ns13:eastAsia="微软雅黑" ns13:ascii="微软雅黑" ns13:hAnsi="微软雅黑"/>
               </a:rPr>
-              <a:t>扫码访问仓库</a:t>
-            </a:r>
-          </a:p>
-        </p:txBody>
-      </p:sp>
-      <p:pic>
-        <p:nvPicPr>
-          <p:cNvPr id="26" name="Picture 25" descr="repro_checklist.png"/>
-          <p:cNvPicPr>
-            <a:picLocks noChangeAspect="1"/>
-          </p:cNvPicPr>
-          <p:nvPr/>
-        </p:nvPicPr>
-        <p:blipFill>
-          <a:blip r:embed="rId3"/>
-          <a:stretch>
-            <a:fillRect/>
-          </a:stretch>
-        </p:blipFill>
-        <p:spPr>
-          <a:xfrm>
-            <a:off x="5929665" y="1190365"/>
-            <a:ext cx="2697917" cy="3192536"/>
-          </a:xfrm>
-          <a:prstGeom prst="rect">
-            <a:avLst/>
-          </a:prstGeom>
-        </p:spPr>
-      </p:pic>
-      <p:sp>
-        <p:nvSpPr>
-          <p:cNvPr id="27" name="TextBox 26"/>
+              <a:t>扫码访问 GitHub 仓库</a:t>
+            </a:r>
+          </a:p>
+        </p:txBody>
+      </p:sp>
+      <p:sp>
+        <p:nvSpPr>
+          <p:cNvPr id="12" name="TextBox 11"/>
           <p:cNvSpPr txBox="1"/>
           <p:nvPr/>
         </p:nvSpPr>
         <p:spPr>
           <a:xfrm>
-            <a:off x="5779007" y="4576572"/>
-            <a:ext cx="2999232" cy="219456"/>
+            <a:off x="4261104" y="2871215"/>
+            <a:ext cx="4416552" cy="1417320"/>
           </a:xfrm>
           <a:prstGeom prst="rect">
             <a:avLst/>
@@ -14401,21 +14078,93 @@
           <a:noFill/>
         </p:spPr>
         <p:txBody>
-          <a:bodyPr wrap="square" anchor="ctr">
+          <a:bodyPr wrap="square">
             <a:spAutoFit/>
           </a:bodyPr>
           <a:lstStyle/>
           <a:p>
-            <a:pPr algn="ctr"/>
-            <a:r>
-              <a:rPr sz="800" b="0">
-                <a:solidFill>
-                  <a:srgbClr val="5A6273"/>
+            <a:pPr>
+              <a:spcAft>
+                <a:spcPts val="500"/>
+              </a:spcAft>
+            </a:pPr>
+            <a:r>
+              <a:rPr sz="1000" b="0">
+                <a:solidFill>
+                  <a:srgbClr val="166534"/>
                 </a:solidFill>
                 <a:latin typeface="微软雅黑"/>
                 <ns14:rFonts xmlns:ns14="http://schemas.openxmlformats.org/wordprocessingml/2006/main" ns14:eastAsia="微软雅黑" ns14:ascii="微软雅黑" ns14:hAnsi="微软雅黑"/>
               </a:rPr>
-              <a:t>可复现性检查项</a:t>
+              <a:t>✓  完整源码与 README</a:t>
+            </a:r>
+          </a:p>
+          <a:p>
+            <a:pPr>
+              <a:spcAft>
+                <a:spcPts val="500"/>
+              </a:spcAft>
+            </a:pPr>
+            <a:r>
+              <a:rPr sz="1000" b="0">
+                <a:solidFill>
+                  <a:srgbClr val="166534"/>
+                </a:solidFill>
+                <a:latin typeface="微软雅黑"/>
+                <ns15:rFonts xmlns:ns15="http://schemas.openxmlformats.org/wordprocessingml/2006/main" ns15:eastAsia="微软雅黑" ns15:ascii="微软雅黑" ns15:hAnsi="微软雅黑"/>
+              </a:rPr>
+              <a:t>✓  一键启动脚本 run_web.sh</a:t>
+            </a:r>
+          </a:p>
+          <a:p>
+            <a:pPr>
+              <a:spcAft>
+                <a:spcPts val="500"/>
+              </a:spcAft>
+            </a:pPr>
+            <a:r>
+              <a:rPr sz="1000" b="0">
+                <a:solidFill>
+                  <a:srgbClr val="166534"/>
+                </a:solidFill>
+                <a:latin typeface="微软雅黑"/>
+                <ns16:rFonts xmlns:ns16="http://schemas.openxmlformats.org/wordprocessingml/2006/main" ns16:eastAsia="微软雅黑" ns16:ascii="微软雅黑" ns16:hAnsi="微软雅黑"/>
+              </a:rPr>
+              <a:t>✓  fall_eval_report.json</a:t>
+            </a:r>
+          </a:p>
+          <a:p>
+            <a:pPr>
+              <a:spcAft>
+                <a:spcPts val="500"/>
+              </a:spcAft>
+            </a:pPr>
+            <a:r>
+              <a:rPr sz="1000" b="0">
+                <a:solidFill>
+                  <a:srgbClr val="166534"/>
+                </a:solidFill>
+                <a:latin typeface="微软雅黑"/>
+                <ns17:rFonts xmlns:ns17="http://schemas.openxmlformats.org/wordprocessingml/2006/main" ns17:eastAsia="微软雅黑" ns17:ascii="微软雅黑" ns17:hAnsi="微软雅黑"/>
+              </a:rPr>
+              <a:t>✓  pytest 单元测试</a:t>
+            </a:r>
+          </a:p>
+          <a:p>
+            <a:pPr>
+              <a:spcAft>
+                <a:spcPts val="500"/>
+              </a:spcAft>
+            </a:pPr>
+            <a:r>
+              <a:rPr sz="1000" b="0">
+                <a:solidFill>
+                  <a:srgbClr val="B45309"/>
+                </a:solidFill>
+                <a:latin typeface="微软雅黑"/>
+                <ns18:rFonts xmlns:ns18="http://schemas.openxmlformats.org/wordprocessingml/2006/main" ns18:eastAsia="微软雅黑" ns18:ascii="微软雅黑" ns18:hAnsi="微软雅黑"/>
+              </a:rPr>
+              <a:t>○  软著申请中</a:t>
             </a:r>
           </a:p>
         </p:txBody>
@@ -15808,8 +15557,8 @@
         </p:nvSpPr>
         <p:spPr>
           <a:xfrm>
-            <a:off x="4855588" y="1151595"/>
-            <a:ext cx="3227583" cy="3215213"/>
+            <a:off x="4325517" y="1151595"/>
+            <a:ext cx="4287724" cy="3215213"/>
           </a:xfrm>
           <a:prstGeom prst="rect">
             <a:avLst/>
@@ -15861,8 +15610,8 @@
         </p:blipFill>
         <p:spPr>
           <a:xfrm>
-            <a:off x="4892164" y="1188171"/>
-            <a:ext cx="3154431" cy="3142061"/>
+            <a:off x="4362093" y="1188171"/>
+            <a:ext cx="4214572" cy="3142061"/>
           </a:xfrm>
           <a:prstGeom prst="rect">
             <a:avLst/>
@@ -15900,7 +15649,7 @@
                 <a:latin typeface="微软雅黑"/>
                 <ns8:rFonts xmlns:ns8="http://schemas.openxmlformats.org/wordprocessingml/2006/main" ns8:eastAsia="微软雅黑" ns8:ascii="微软雅黑" ns8:hAnsi="微软雅黑"/>
               </a:rPr>
-              <a:t>创新维度雷达图</a:t>
+              <a:t>创新维度自评</a:t>
             </a:r>
           </a:p>
         </p:txBody>
@@ -18722,14 +18471,14 @@
         </p:nvSpPr>
         <p:spPr>
           <a:xfrm>
-            <a:off x="0" y="420624"/>
-            <a:ext cx="4434840" cy="4722876"/>
+            <a:off x="0" y="4905756"/>
+            <a:ext cx="9144000" cy="237744"/>
           </a:xfrm>
           <a:prstGeom prst="rect">
             <a:avLst/>
           </a:prstGeom>
           <a:solidFill>
-            <a:srgbClr val="143278"/>
+            <a:srgbClr val="DBEAFE"/>
           </a:solidFill>
           <a:ln>
             <a:noFill/>
@@ -18759,14 +18508,282 @@
       </p:sp>
       <p:sp>
         <p:nvSpPr>
-          <p:cNvPr id="5" name="Rectangle 4"/>
+          <p:cNvPr id="5" name="TextBox 4"/>
+          <p:cNvSpPr txBox="1"/>
+          <p:nvPr/>
+        </p:nvSpPr>
+        <p:spPr>
+          <a:xfrm>
+            <a:off x="274320" y="4951476"/>
+            <a:ext cx="8595360" cy="182880"/>
+          </a:xfrm>
+          <a:prstGeom prst="rect">
+            <a:avLst/>
+          </a:prstGeom>
+          <a:noFill/>
+        </p:spPr>
+        <p:txBody>
+          <a:bodyPr wrap="none">
+            <a:spAutoFit/>
+          </a:bodyPr>
+          <a:lstStyle/>
+          <a:p>
+            <a:pPr algn="ctr"/>
+            <a:r>
+              <a:rPr sz="800" b="0">
+                <a:solidFill>
+                  <a:srgbClr val="5A6273"/>
+                </a:solidFill>
+                <a:latin typeface="微软雅黑"/>
+                <ns1:rFonts xmlns:ns1="http://schemas.openxmlformats.org/wordprocessingml/2006/main" ns1:eastAsia="微软雅黑" ns1:ascii="微软雅黑" ns1:hAnsi="微软雅黑"/>
+              </a:rPr>
+              <a:t>从容应队 · 中山大学 · 刘小凡/白冉 · 指导教师 彭键清</a:t>
+            </a:r>
+          </a:p>
+        </p:txBody>
+      </p:sp>
+      <p:sp>
+        <p:nvSpPr>
+          <p:cNvPr id="6" name="Rectangle 5"/>
           <p:cNvSpPr/>
           <p:nvPr/>
         </p:nvSpPr>
         <p:spPr>
           <a:xfrm>
-            <a:off x="115305" y="1531180"/>
-            <a:ext cx="4204228" cy="2227443"/>
+            <a:off x="0" y="420624"/>
+            <a:ext cx="9144000" cy="4485132"/>
+          </a:xfrm>
+          <a:prstGeom prst="rect">
+            <a:avLst/>
+          </a:prstGeom>
+          <a:solidFill>
+            <a:srgbClr val="F1F7FF"/>
+          </a:solidFill>
+          <a:ln>
+            <a:noFill/>
+          </a:ln>
+        </p:spPr>
+        <p:style>
+          <a:lnRef idx="1">
+            <a:schemeClr val="accent1"/>
+          </a:lnRef>
+          <a:fillRef idx="3">
+            <a:schemeClr val="accent1"/>
+          </a:fillRef>
+          <a:effectRef idx="2">
+            <a:schemeClr val="accent1"/>
+          </a:effectRef>
+          <a:fontRef idx="minor">
+            <a:schemeClr val="lt1"/>
+          </a:fontRef>
+        </p:style>
+        <p:txBody>
+          <a:bodyPr rtlCol="0" anchor="ctr"/>
+          <a:lstStyle/>
+          <a:p>
+            <a:pPr algn="ctr"/>
+          </a:p>
+        </p:txBody>
+      </p:sp>
+      <p:sp>
+        <p:nvSpPr>
+          <p:cNvPr id="7" name="TextBox 6"/>
+          <p:cNvSpPr txBox="1"/>
+          <p:nvPr/>
+        </p:nvSpPr>
+        <p:spPr>
+          <a:xfrm>
+            <a:off x="731520" y="960120"/>
+            <a:ext cx="7680960" cy="685800"/>
+          </a:xfrm>
+          <a:prstGeom prst="rect">
+            <a:avLst/>
+          </a:prstGeom>
+          <a:noFill/>
+        </p:spPr>
+        <p:txBody>
+          <a:bodyPr wrap="none">
+            <a:spAutoFit/>
+          </a:bodyPr>
+          <a:lstStyle/>
+          <a:p>
+            <a:pPr algn="ctr"/>
+            <a:r>
+              <a:rPr sz="3200" b="1">
+                <a:solidFill>
+                  <a:srgbClr val="143278"/>
+                </a:solidFill>
+                <a:latin typeface="微软雅黑"/>
+                <ns2:rFonts xmlns:ns2="http://schemas.openxmlformats.org/wordprocessingml/2006/main" ns2:eastAsia="微软雅黑" ns2:ascii="微软雅黑" ns2:hAnsi="微软雅黑"/>
+              </a:rPr>
+              <a:t>敬请批评指正</a:t>
+            </a:r>
+          </a:p>
+        </p:txBody>
+      </p:sp>
+      <p:sp>
+        <p:nvSpPr>
+          <p:cNvPr id="8" name="Rectangle 7"/>
+          <p:cNvSpPr/>
+          <p:nvPr/>
+        </p:nvSpPr>
+        <p:spPr>
+          <a:xfrm>
+            <a:off x="3749039" y="1664208"/>
+            <a:ext cx="1645920" cy="41148"/>
+          </a:xfrm>
+          <a:prstGeom prst="rect">
+            <a:avLst/>
+          </a:prstGeom>
+          <a:solidFill>
+            <a:srgbClr val="F59E0B"/>
+          </a:solidFill>
+          <a:ln>
+            <a:noFill/>
+          </a:ln>
+        </p:spPr>
+        <p:style>
+          <a:lnRef idx="1">
+            <a:schemeClr val="accent1"/>
+          </a:lnRef>
+          <a:fillRef idx="3">
+            <a:schemeClr val="accent1"/>
+          </a:fillRef>
+          <a:effectRef idx="2">
+            <a:schemeClr val="accent1"/>
+          </a:effectRef>
+          <a:fontRef idx="minor">
+            <a:schemeClr val="lt1"/>
+          </a:fontRef>
+        </p:style>
+        <p:txBody>
+          <a:bodyPr rtlCol="0" anchor="ctr"/>
+          <a:lstStyle/>
+          <a:p>
+            <a:pPr algn="ctr"/>
+          </a:p>
+        </p:txBody>
+      </p:sp>
+      <p:sp>
+        <p:nvSpPr>
+          <p:cNvPr id="9" name="TextBox 8"/>
+          <p:cNvSpPr txBox="1"/>
+          <p:nvPr/>
+        </p:nvSpPr>
+        <p:spPr>
+          <a:xfrm>
+            <a:off x="1097280" y="1828800"/>
+            <a:ext cx="6949440" cy="868680"/>
+          </a:xfrm>
+          <a:prstGeom prst="rect">
+            <a:avLst/>
+          </a:prstGeom>
+          <a:noFill/>
+        </p:spPr>
+        <p:txBody>
+          <a:bodyPr wrap="none">
+            <a:spAutoFit/>
+          </a:bodyPr>
+          <a:lstStyle/>
+          <a:p>
+            <a:pPr algn="ctr">
+              <a:spcAft>
+                <a:spcPts val="400"/>
+              </a:spcAft>
+            </a:pPr>
+            <a:r>
+              <a:rPr sz="1300" b="1">
+                <a:solidFill>
+                  <a:srgbClr val="143278"/>
+                </a:solidFill>
+                <a:latin typeface="微软雅黑"/>
+                <ns3:rFonts xmlns:ns3="http://schemas.openxmlformats.org/wordprocessingml/2006/main" ns3:eastAsia="微软雅黑" ns3:ascii="微软雅黑" ns3:hAnsi="微软雅黑"/>
+              </a:rPr>
+              <a:t>从容应队 · 中山大学</a:t>
+            </a:r>
+          </a:p>
+          <a:p>
+            <a:pPr algn="ctr">
+              <a:spcAft>
+                <a:spcPts val="400"/>
+              </a:spcAft>
+            </a:pPr>
+            <a:r>
+              <a:rPr sz="1200" b="0">
+                <a:solidFill>
+                  <a:srgbClr val="5A6273"/>
+                </a:solidFill>
+                <a:latin typeface="微软雅黑"/>
+                <ns4:rFonts xmlns:ns4="http://schemas.openxmlformats.org/wordprocessingml/2006/main" ns4:eastAsia="微软雅黑" ns4:ascii="微软雅黑" ns4:hAnsi="微软雅黑"/>
+              </a:rPr>
+              <a:t>队长 刘小凡  ·  队员 白冉</a:t>
+            </a:r>
+          </a:p>
+          <a:p>
+            <a:pPr algn="ctr">
+              <a:spcAft>
+                <a:spcPts val="400"/>
+              </a:spcAft>
+            </a:pPr>
+            <a:r>
+              <a:rPr sz="1200" b="0">
+                <a:solidFill>
+                  <a:srgbClr val="5A6273"/>
+                </a:solidFill>
+                <a:latin typeface="微软雅黑"/>
+                <ns5:rFonts xmlns:ns5="http://schemas.openxmlformats.org/wordprocessingml/2006/main" ns5:eastAsia="微软雅黑" ns5:ascii="微软雅黑" ns5:hAnsi="微软雅黑"/>
+              </a:rPr>
+              <a:t>指导教师 彭键清</a:t>
+            </a:r>
+          </a:p>
+        </p:txBody>
+      </p:sp>
+      <p:sp>
+        <p:nvSpPr>
+          <p:cNvPr id="10" name="TextBox 9"/>
+          <p:cNvSpPr txBox="1"/>
+          <p:nvPr/>
+        </p:nvSpPr>
+        <p:spPr>
+          <a:xfrm>
+            <a:off x="1371600" y="2697480"/>
+            <a:ext cx="6400800" cy="256032"/>
+          </a:xfrm>
+          <a:prstGeom prst="rect">
+            <a:avLst/>
+          </a:prstGeom>
+          <a:noFill/>
+        </p:spPr>
+        <p:txBody>
+          <a:bodyPr wrap="none">
+            <a:spAutoFit/>
+          </a:bodyPr>
+          <a:lstStyle/>
+          <a:p>
+            <a:pPr algn="ctr"/>
+            <a:r>
+              <a:rPr sz="900" b="0">
+                <a:solidFill>
+                  <a:srgbClr val="143278"/>
+                </a:solidFill>
+                <a:latin typeface="微软雅黑"/>
+                <ns6:rFonts xmlns:ns6="http://schemas.openxmlformats.org/wordprocessingml/2006/main" ns6:eastAsia="微软雅黑" ns6:ascii="微软雅黑" ns6:hAnsi="微软雅黑"/>
+              </a:rPr>
+              <a:t>https://github.com/FBB123571/ElderCare-Humanoid-Platform</a:t>
+            </a:r>
+          </a:p>
+        </p:txBody>
+      </p:sp>
+      <p:sp>
+        <p:nvSpPr>
+          <p:cNvPr id="11" name="Rectangle 10"/>
+          <p:cNvSpPr/>
+          <p:nvPr/>
+        </p:nvSpPr>
+        <p:spPr>
+          <a:xfrm>
+            <a:off x="2706110" y="3140964"/>
+            <a:ext cx="2177299" cy="1143000"/>
           </a:xfrm>
           <a:prstGeom prst="rect">
             <a:avLst/>
@@ -18804,7 +18821,7 @@
       </p:sp>
       <p:pic>
         <p:nvPicPr>
-          <p:cNvPr id="6" name="Picture 5" descr="ppt_full_dashboard.png"/>
+          <p:cNvPr id="12" name="Picture 11" descr="ppt_full_dashboard.png"/>
           <p:cNvPicPr>
             <a:picLocks noChangeAspect="1"/>
           </p:cNvPicPr>
@@ -18818,8 +18835,8 @@
         </p:blipFill>
         <p:spPr>
           <a:xfrm>
-            <a:off x="151881" y="1567756"/>
-            <a:ext cx="4131076" cy="2154291"/>
+            <a:off x="2742686" y="3177540"/>
+            <a:ext cx="2104147" cy="1097280"/>
           </a:xfrm>
           <a:prstGeom prst="rect">
             <a:avLst/>
@@ -18828,14 +18845,14 @@
       </p:pic>
       <p:sp>
         <p:nvSpPr>
-          <p:cNvPr id="7" name="TextBox 6"/>
+          <p:cNvPr id="13" name="TextBox 12"/>
           <p:cNvSpPr txBox="1"/>
           <p:nvPr/>
         </p:nvSpPr>
         <p:spPr>
           <a:xfrm>
-            <a:off x="109728" y="4832604"/>
-            <a:ext cx="4215383" cy="219456"/>
+            <a:off x="2263139" y="4352544"/>
+            <a:ext cx="3063240" cy="219456"/>
           </a:xfrm>
           <a:prstGeom prst="rect">
             <a:avLst/>
@@ -18855,214 +18872,16 @@
                   <a:srgbClr val="5A6273"/>
                 </a:solidFill>
                 <a:latin typeface="微软雅黑"/>
-                <ns1:rFonts xmlns:ns1="http://schemas.openxmlformats.org/wordprocessingml/2006/main" ns1:eastAsia="微软雅黑" ns1:ascii="微软雅黑" ns1:hAnsi="微软雅黑"/>
+                <ns7:rFonts xmlns:ns7="http://schemas.openxmlformats.org/wordprocessingml/2006/main" ns7:eastAsia="微软雅黑" ns7:ascii="微软雅黑" ns7:hAnsi="微软雅黑"/>
               </a:rPr>
-              <a:t>系统仪表盘</a:t>
-            </a:r>
-          </a:p>
-        </p:txBody>
-      </p:sp>
-      <p:sp>
-        <p:nvSpPr>
-          <p:cNvPr id="8" name="Rectangle 7"/>
-          <p:cNvSpPr/>
-          <p:nvPr/>
-        </p:nvSpPr>
-        <p:spPr>
-          <a:xfrm>
-            <a:off x="4434840" y="420624"/>
-            <a:ext cx="4709160" cy="4722876"/>
-          </a:xfrm>
-          <a:prstGeom prst="rect">
-            <a:avLst/>
-          </a:prstGeom>
-          <a:solidFill>
-            <a:srgbClr val="F1F7FF"/>
-          </a:solidFill>
-          <a:ln>
-            <a:noFill/>
-          </a:ln>
-        </p:spPr>
-        <p:style>
-          <a:lnRef idx="1">
-            <a:schemeClr val="accent1"/>
-          </a:lnRef>
-          <a:fillRef idx="3">
-            <a:schemeClr val="accent1"/>
-          </a:fillRef>
-          <a:effectRef idx="2">
-            <a:schemeClr val="accent1"/>
-          </a:effectRef>
-          <a:fontRef idx="minor">
-            <a:schemeClr val="lt1"/>
-          </a:fontRef>
-        </p:style>
-        <p:txBody>
-          <a:bodyPr rtlCol="0" anchor="ctr"/>
-          <a:lstStyle/>
-          <a:p>
-            <a:pPr algn="ctr"/>
-          </a:p>
-        </p:txBody>
-      </p:sp>
-      <p:sp>
-        <p:nvSpPr>
-          <p:cNvPr id="9" name="TextBox 8"/>
-          <p:cNvSpPr txBox="1"/>
-          <p:nvPr/>
-        </p:nvSpPr>
-        <p:spPr>
-          <a:xfrm>
-            <a:off x="4617720" y="1234440"/>
-            <a:ext cx="4343400" cy="594360"/>
-          </a:xfrm>
-          <a:prstGeom prst="rect">
-            <a:avLst/>
-          </a:prstGeom>
-          <a:noFill/>
-        </p:spPr>
-        <p:txBody>
-          <a:bodyPr wrap="none">
-            <a:spAutoFit/>
-          </a:bodyPr>
-          <a:lstStyle/>
-          <a:p>
-            <a:pPr algn="ctr"/>
-            <a:r>
-              <a:rPr sz="3000" b="1">
-                <a:solidFill>
-                  <a:srgbClr val="143278"/>
-                </a:solidFill>
-                <a:latin typeface="微软雅黑"/>
-                <ns2:rFonts xmlns:ns2="http://schemas.openxmlformats.org/wordprocessingml/2006/main" ns2:eastAsia="微软雅黑" ns2:ascii="微软雅黑" ns2:hAnsi="微软雅黑"/>
-              </a:rPr>
-              <a:t>敬请批评指正</a:t>
-            </a:r>
-          </a:p>
-        </p:txBody>
-      </p:sp>
-      <p:sp>
-        <p:nvSpPr>
-          <p:cNvPr id="10" name="TextBox 9"/>
-          <p:cNvSpPr txBox="1"/>
-          <p:nvPr/>
-        </p:nvSpPr>
-        <p:spPr>
-          <a:xfrm>
-            <a:off x="4617720" y="1965960"/>
-            <a:ext cx="4343400" cy="1005840"/>
-          </a:xfrm>
-          <a:prstGeom prst="rect">
-            <a:avLst/>
-          </a:prstGeom>
-          <a:noFill/>
-        </p:spPr>
-        <p:txBody>
-          <a:bodyPr wrap="none">
-            <a:spAutoFit/>
-          </a:bodyPr>
-          <a:lstStyle/>
-          <a:p>
-            <a:pPr algn="ctr">
-              <a:spcAft>
-                <a:spcPts val="600"/>
-              </a:spcAft>
-            </a:pPr>
-            <a:r>
-              <a:rPr sz="1300" b="1">
-                <a:solidFill>
-                  <a:srgbClr val="1C202C"/>
-                </a:solidFill>
-                <a:latin typeface="微软雅黑"/>
-                <ns3:rFonts xmlns:ns3="http://schemas.openxmlformats.org/wordprocessingml/2006/main" ns3:eastAsia="微软雅黑" ns3:ascii="微软雅黑" ns3:hAnsi="微软雅黑"/>
-              </a:rPr>
-              <a:t>从容应队 · 中山大学</a:t>
-            </a:r>
-          </a:p>
-          <a:p>
-            <a:pPr algn="ctr">
-              <a:spcAft>
-                <a:spcPts val="600"/>
-              </a:spcAft>
-            </a:pPr>
-            <a:r>
-              <a:rPr sz="1300" b="0">
-                <a:solidFill>
-                  <a:srgbClr val="1C202C"/>
-                </a:solidFill>
-                <a:latin typeface="微软雅黑"/>
-                <ns4:rFonts xmlns:ns4="http://schemas.openxmlformats.org/wordprocessingml/2006/main" ns4:eastAsia="微软雅黑" ns4:ascii="微软雅黑" ns4:hAnsi="微软雅黑"/>
-              </a:rPr>
-              <a:t>刘小凡 · 白冉</a:t>
-            </a:r>
-          </a:p>
-          <a:p>
-            <a:pPr algn="ctr">
-              <a:spcAft>
-                <a:spcPts val="600"/>
-              </a:spcAft>
-            </a:pPr>
-            <a:r>
-              <a:rPr sz="1300" b="0">
-                <a:solidFill>
-                  <a:srgbClr val="1C202C"/>
-                </a:solidFill>
-                <a:latin typeface="微软雅黑"/>
-                <ns5:rFonts xmlns:ns5="http://schemas.openxmlformats.org/wordprocessingml/2006/main" ns5:eastAsia="微软雅黑" ns5:ascii="微软雅黑" ns5:hAnsi="微软雅黑"/>
-              </a:rPr>
-              <a:t>指导教师 彭键清</a:t>
-            </a:r>
-          </a:p>
-        </p:txBody>
-      </p:sp>
-      <p:sp>
-        <p:nvSpPr>
-          <p:cNvPr id="11" name="Rectangle 10"/>
-          <p:cNvSpPr/>
-          <p:nvPr/>
-        </p:nvSpPr>
-        <p:spPr>
-          <a:xfrm>
-            <a:off x="5907024" y="3026664"/>
-            <a:ext cx="1216152" cy="1143000"/>
-          </a:xfrm>
-          <a:prstGeom prst="rect">
-            <a:avLst/>
-          </a:prstGeom>
-          <a:solidFill>
-            <a:srgbClr val="FCFDFF"/>
-          </a:solidFill>
-          <a:ln w="7620">
-            <a:solidFill>
-              <a:srgbClr val="BAC8DC"/>
-            </a:solidFill>
-          </a:ln>
-        </p:spPr>
-        <p:style>
-          <a:lnRef idx="1">
-            <a:schemeClr val="accent1"/>
-          </a:lnRef>
-          <a:fillRef idx="3">
-            <a:schemeClr val="accent1"/>
-          </a:fillRef>
-          <a:effectRef idx="2">
-            <a:schemeClr val="accent1"/>
-          </a:effectRef>
-          <a:fontRef idx="minor">
-            <a:schemeClr val="lt1"/>
-          </a:fontRef>
-        </p:style>
-        <p:txBody>
-          <a:bodyPr rtlCol="0" anchor="ctr"/>
-          <a:lstStyle/>
-          <a:p>
-            <a:pPr algn="ctr"/>
+              <a:t>Web 控制台</a:t>
+            </a:r>
           </a:p>
         </p:txBody>
       </p:sp>
       <p:pic>
         <p:nvPicPr>
-          <p:cNvPr id="12" name="Picture 11" descr="ppt_demo_qr.png"/>
+          <p:cNvPr id="14" name="Picture 13" descr="ppt_demo_qr.png"/>
           <p:cNvPicPr>
             <a:picLocks noChangeAspect="1"/>
           </p:cNvPicPr>
@@ -19076,8 +18895,8 @@
         </p:blipFill>
         <p:spPr>
           <a:xfrm>
-            <a:off x="5943600" y="3063240"/>
-            <a:ext cx="1143000" cy="1143000"/>
+            <a:off x="5783579" y="3246120"/>
+            <a:ext cx="960120" cy="960120"/>
           </a:xfrm>
           <a:prstGeom prst="rect">
             <a:avLst/>
@@ -19086,14 +18905,14 @@
       </p:pic>
       <p:sp>
         <p:nvSpPr>
-          <p:cNvPr id="13" name="TextBox 12"/>
+          <p:cNvPr id="15" name="TextBox 14"/>
           <p:cNvSpPr txBox="1"/>
           <p:nvPr/>
         </p:nvSpPr>
         <p:spPr>
           <a:xfrm>
-            <a:off x="5806440" y="4261104"/>
-            <a:ext cx="1417320" cy="219456"/>
+            <a:off x="5646419" y="4261104"/>
+            <a:ext cx="1234440" cy="219456"/>
           </a:xfrm>
           <a:prstGeom prst="rect">
             <a:avLst/>
@@ -19113,7 +18932,7 @@
                   <a:srgbClr val="5A6273"/>
                 </a:solidFill>
                 <a:latin typeface="微软雅黑"/>
-                <ns6:rFonts xmlns:ns6="http://schemas.openxmlformats.org/wordprocessingml/2006/main" ns6:eastAsia="微软雅黑" ns6:ascii="微软雅黑" ns6:hAnsi="微软雅黑"/>
+                <ns8:rFonts xmlns:ns8="http://schemas.openxmlformats.org/wordprocessingml/2006/main" ns8:eastAsia="微软雅黑" ns8:ascii="微软雅黑" ns8:hAnsi="微软雅黑"/>
               </a:rPr>
               <a:t>GitHub</a:t>
             </a:r>

--- a/docs/答辩_CareCompanion.pptx
+++ b/docs/答辩_CareCompanion.pptx
@@ -3437,8 +3437,8 @@
         </p:nvSpPr>
         <p:spPr>
           <a:xfrm>
-            <a:off x="4800600" y="832104"/>
-            <a:ext cx="4114800" cy="457200"/>
+            <a:off x="4773168" y="804672"/>
+            <a:ext cx="4160520" cy="420624"/>
           </a:xfrm>
           <a:prstGeom prst="rect">
             <a:avLst/>
@@ -3446,13 +3446,13 @@
           <a:noFill/>
         </p:spPr>
         <p:txBody>
-          <a:bodyPr wrap="none">
+          <a:bodyPr wrap="square">
             <a:spAutoFit/>
           </a:bodyPr>
           <a:lstStyle/>
           <a:p>
             <a:r>
-              <a:rPr sz="3200" b="1">
+              <a:rPr sz="2800" b="1">
                 <a:solidFill>
                   <a:srgbClr val="FFFFFF"/>
                 </a:solidFill>
@@ -3472,8 +3472,8 @@
         </p:nvSpPr>
         <p:spPr>
           <a:xfrm>
-            <a:off x="4800600" y="1271016"/>
-            <a:ext cx="4114800" cy="457200"/>
+            <a:off x="4773168" y="1261872"/>
+            <a:ext cx="4160520" cy="420624"/>
           </a:xfrm>
           <a:prstGeom prst="rect">
             <a:avLst/>
@@ -3481,13 +3481,13 @@
           <a:noFill/>
         </p:spPr>
         <p:txBody>
-          <a:bodyPr wrap="none">
+          <a:bodyPr wrap="square">
             <a:spAutoFit/>
           </a:bodyPr>
           <a:lstStyle/>
           <a:p>
             <a:r>
-              <a:rPr sz="1500" b="1">
+              <a:rPr sz="1400" b="1">
                 <a:solidFill>
                   <a:srgbClr val="93C5FD"/>
                 </a:solidFill>
@@ -3507,8 +3507,8 @@
         </p:nvSpPr>
         <p:spPr>
           <a:xfrm>
-            <a:off x="4800600" y="1618488"/>
-            <a:ext cx="4114800" cy="457200"/>
+            <a:off x="4773168" y="1591055"/>
+            <a:ext cx="4160520" cy="420624"/>
           </a:xfrm>
           <a:prstGeom prst="rect">
             <a:avLst/>
@@ -3516,13 +3516,13 @@
           <a:noFill/>
         </p:spPr>
         <p:txBody>
-          <a:bodyPr wrap="none">
+          <a:bodyPr wrap="square">
             <a:spAutoFit/>
           </a:bodyPr>
           <a:lstStyle/>
           <a:p>
             <a:r>
-              <a:rPr sz="1300" b="0">
+              <a:rPr sz="1200" b="0">
                 <a:solidFill>
                   <a:srgbClr val="E2E8F0"/>
                 </a:solidFill>
@@ -3542,8 +3542,8 @@
         </p:nvSpPr>
         <p:spPr>
           <a:xfrm>
-            <a:off x="4800600" y="2148840"/>
-            <a:ext cx="3977639" cy="1325880"/>
+            <a:off x="4773168" y="2176272"/>
+            <a:ext cx="4023360" cy="1389888"/>
           </a:xfrm>
           <a:prstGeom prst="rect">
             <a:avLst/>
@@ -3587,8 +3587,8 @@
         </p:nvSpPr>
         <p:spPr>
           <a:xfrm>
-            <a:off x="4937760" y="2286000"/>
-            <a:ext cx="3657600" cy="1097280"/>
+            <a:off x="4901184" y="2286000"/>
+            <a:ext cx="3749039" cy="1170432"/>
           </a:xfrm>
           <a:prstGeom prst="rect">
             <a:avLst/>
@@ -3596,14 +3596,14 @@
           <a:noFill/>
         </p:spPr>
         <p:txBody>
-          <a:bodyPr wrap="none">
+          <a:bodyPr wrap="square">
             <a:spAutoFit/>
           </a:bodyPr>
           <a:lstStyle/>
           <a:p>
             <a:pPr>
               <a:spcAft>
-                <a:spcPts val="500"/>
+                <a:spcPts val="400"/>
               </a:spcAft>
             </a:pPr>
             <a:r>
@@ -3620,7 +3620,7 @@
           <a:p>
             <a:pPr>
               <a:spcAft>
-                <a:spcPts val="500"/>
+                <a:spcPts val="400"/>
               </a:spcAft>
             </a:pPr>
             <a:r>
@@ -3637,7 +3637,7 @@
           <a:p>
             <a:pPr>
               <a:spcAft>
-                <a:spcPts val="500"/>
+                <a:spcPts val="400"/>
               </a:spcAft>
             </a:pPr>
             <a:r>
@@ -3654,7 +3654,7 @@
           <a:p>
             <a:pPr>
               <a:spcAft>
-                <a:spcPts val="500"/>
+                <a:spcPts val="400"/>
               </a:spcAft>
             </a:pPr>
             <a:r>
@@ -3678,8 +3678,8 @@
         </p:nvSpPr>
         <p:spPr>
           <a:xfrm>
-            <a:off x="4800600" y="4686300"/>
-            <a:ext cx="4023360" cy="320040"/>
+            <a:off x="4773168" y="3621024"/>
+            <a:ext cx="4023360" cy="292608"/>
           </a:xfrm>
           <a:prstGeom prst="rect">
             <a:avLst/>
@@ -3692,15 +3692,16 @@
           </a:bodyPr>
           <a:lstStyle/>
           <a:p>
-            <a:r>
-              <a:rPr sz="900" b="0">
+            <a:pPr algn="ctr"/>
+            <a:r>
+              <a:rPr sz="800" b="0">
                 <a:solidFill>
                   <a:srgbClr val="94A3B8"/>
                 </a:solidFill>
                 <a:latin typeface="微软雅黑"/>
                 <ns9:rFonts xmlns:ns9="http://schemas.openxmlformats.org/wordprocessingml/2006/main" ns9:eastAsia="微软雅黑" ns9:ascii="微软雅黑" ns9:hAnsi="微软雅黑"/>
               </a:rPr>
-              <a:t>基于大语言模型的智能养老陪伴机器人仿真平台</a:t>
+              <a:t>基于大语言模型的居家养老陪伴仿真平台</a:t>
             </a:r>
           </a:p>
         </p:txBody>
@@ -9786,8 +9787,8 @@
         </p:nvSpPr>
         <p:spPr>
           <a:xfrm>
-            <a:off x="274320" y="1014984"/>
-            <a:ext cx="8595360" cy="3817620"/>
+            <a:off x="274320" y="1033272"/>
+            <a:ext cx="4233672" cy="3781044"/>
           </a:xfrm>
           <a:prstGeom prst="rect">
             <a:avLst/>
@@ -9839,8 +9840,8 @@
         </p:blipFill>
         <p:spPr>
           <a:xfrm>
-            <a:off x="3283278" y="1068339"/>
-            <a:ext cx="2577442" cy="3436589"/>
+            <a:off x="1180821" y="1191143"/>
+            <a:ext cx="2420668" cy="3227557"/>
           </a:xfrm>
           <a:prstGeom prst="rect">
             <a:avLst/>
@@ -9855,8 +9856,8 @@
         </p:nvSpPr>
         <p:spPr>
           <a:xfrm>
-            <a:off x="310896" y="4594860"/>
-            <a:ext cx="8522208" cy="219456"/>
+            <a:off x="347472" y="4576572"/>
+            <a:ext cx="4087368" cy="219456"/>
           </a:xfrm>
           <a:prstGeom prst="rect">
             <a:avLst/>
@@ -9878,7 +9879,112 @@
                 <a:latin typeface="微软雅黑"/>
                 <ns3:rFonts xmlns:ns3="http://schemas.openxmlformats.org/wordprocessingml/2006/main" ns3:eastAsia="微软雅黑" ns3:ascii="微软雅黑" ns3:hAnsi="微软雅黑"/>
               </a:rPr>
-              <a:t>全身照 → 骨架叠加</a:t>
+              <a:t>MediaPipe 骨架叠加</a:t>
+            </a:r>
+          </a:p>
+        </p:txBody>
+      </p:sp>
+      <p:sp>
+        <p:nvSpPr>
+          <p:cNvPr id="11" name="Rectangle 10"/>
+          <p:cNvSpPr/>
+          <p:nvPr/>
+        </p:nvSpPr>
+        <p:spPr>
+          <a:xfrm>
+            <a:off x="4636007" y="1033272"/>
+            <a:ext cx="4233672" cy="3781044"/>
+          </a:xfrm>
+          <a:prstGeom prst="rect">
+            <a:avLst/>
+          </a:prstGeom>
+          <a:solidFill>
+            <a:srgbClr val="FFFFFF"/>
+          </a:solidFill>
+          <a:ln w="9525">
+            <a:solidFill>
+              <a:srgbClr val="BAC8DC"/>
+            </a:solidFill>
+          </a:ln>
+        </p:spPr>
+        <p:style>
+          <a:lnRef idx="1">
+            <a:schemeClr val="accent1"/>
+          </a:lnRef>
+          <a:fillRef idx="3">
+            <a:schemeClr val="accent1"/>
+          </a:fillRef>
+          <a:effectRef idx="2">
+            <a:schemeClr val="accent1"/>
+          </a:effectRef>
+          <a:fontRef idx="minor">
+            <a:schemeClr val="lt1"/>
+          </a:fontRef>
+        </p:style>
+        <p:txBody>
+          <a:bodyPr rtlCol="0" anchor="ctr"/>
+          <a:lstStyle/>
+          <a:p>
+            <a:pPr algn="ctr"/>
+          </a:p>
+        </p:txBody>
+      </p:sp>
+      <p:pic>
+        <p:nvPicPr>
+          <p:cNvPr id="12" name="Picture 11" descr="ppt_risk_panel.png"/>
+          <p:cNvPicPr>
+            <a:picLocks noChangeAspect="1"/>
+          </p:cNvPicPr>
+          <p:nvPr/>
+        </p:nvPicPr>
+        <p:blipFill>
+          <a:blip r:embed="rId3"/>
+          <a:stretch>
+            <a:fillRect/>
+          </a:stretch>
+        </p:blipFill>
+        <p:spPr>
+          <a:xfrm>
+            <a:off x="5397521" y="1191143"/>
+            <a:ext cx="2710644" cy="3227557"/>
+          </a:xfrm>
+          <a:prstGeom prst="rect">
+            <a:avLst/>
+          </a:prstGeom>
+        </p:spPr>
+      </p:pic>
+      <p:sp>
+        <p:nvSpPr>
+          <p:cNvPr id="13" name="TextBox 12"/>
+          <p:cNvSpPr txBox="1"/>
+          <p:nvPr/>
+        </p:nvSpPr>
+        <p:spPr>
+          <a:xfrm>
+            <a:off x="4709159" y="4576572"/>
+            <a:ext cx="4087368" cy="219456"/>
+          </a:xfrm>
+          <a:prstGeom prst="rect">
+            <a:avLst/>
+          </a:prstGeom>
+          <a:noFill/>
+        </p:spPr>
+        <p:txBody>
+          <a:bodyPr wrap="square" anchor="ctr">
+            <a:spAutoFit/>
+          </a:bodyPr>
+          <a:lstStyle/>
+          <a:p>
+            <a:pPr algn="ctr"/>
+            <a:r>
+              <a:rPr sz="800" b="0">
+                <a:solidFill>
+                  <a:srgbClr val="5A6273"/>
+                </a:solidFill>
+                <a:latin typeface="微软雅黑"/>
+                <ns4:rFonts xmlns:ns4="http://schemas.openxmlformats.org/wordprocessingml/2006/main" ns4:eastAsia="微软雅黑" ns4:ascii="微软雅黑" ns4:hAnsi="微软雅黑"/>
+              </a:rPr>
+              <a:t>风险面板联动</a:t>
             </a:r>
           </a:p>
         </p:txBody>
@@ -12606,8 +12712,8 @@
         </p:nvSpPr>
         <p:spPr>
           <a:xfrm>
-            <a:off x="4308652" y="1308003"/>
-            <a:ext cx="4321454" cy="2902397"/>
+            <a:off x="4308652" y="1188926"/>
+            <a:ext cx="4321454" cy="3140550"/>
           </a:xfrm>
           <a:prstGeom prst="rect">
             <a:avLst/>
@@ -12659,8 +12765,8 @@
         </p:blipFill>
         <p:spPr>
           <a:xfrm>
-            <a:off x="4345228" y="1344579"/>
-            <a:ext cx="4248302" cy="2829245"/>
+            <a:off x="4345228" y="1225502"/>
+            <a:ext cx="4248302" cy="3067398"/>
           </a:xfrm>
           <a:prstGeom prst="rect">
             <a:avLst/>
@@ -12698,7 +12804,7 @@
                 <a:latin typeface="微软雅黑"/>
                 <ns8:rFonts xmlns:ns8="http://schemas.openxmlformats.org/wordprocessingml/2006/main" ns8:eastAsia="微软雅黑" ns8:ascii="微软雅黑" ns8:hAnsi="微软雅黑"/>
               </a:rPr>
-              <a:t>评测结果（6 场景）</a:t>
+              <a:t>P/R/F1 均为 100%（见左栏）</a:t>
             </a:r>
           </a:p>
         </p:txBody>
@@ -14835,8 +14941,8 @@
         </p:nvSpPr>
         <p:spPr>
           <a:xfrm>
-            <a:off x="4694986" y="1411241"/>
-            <a:ext cx="4097426" cy="2988529"/>
+            <a:off x="4694986" y="2415020"/>
+            <a:ext cx="4097426" cy="980971"/>
           </a:xfrm>
           <a:prstGeom prst="rect">
             <a:avLst/>
@@ -14874,7 +14980,7 @@
       </p:sp>
       <p:pic>
         <p:nvPicPr>
-          <p:cNvPr id="19" name="Picture 18" descr="roadmap_gantt.png"/>
+          <p:cNvPr id="19" name="Picture 18" descr="ppt_robot_commands.png"/>
           <p:cNvPicPr>
             <a:picLocks noChangeAspect="1"/>
           </p:cNvPicPr>
@@ -14888,8 +14994,8 @@
         </p:blipFill>
         <p:spPr>
           <a:xfrm>
-            <a:off x="4731562" y="1447817"/>
-            <a:ext cx="4024274" cy="2915377"/>
+            <a:off x="4731562" y="2451596"/>
+            <a:ext cx="4024274" cy="907819"/>
           </a:xfrm>
           <a:prstGeom prst="rect">
             <a:avLst/>
@@ -17739,16 +17845,16 @@
         </p:nvSpPr>
         <p:spPr>
           <a:xfrm>
-            <a:off x="274320" y="996696"/>
-            <a:ext cx="3611880" cy="3854196"/>
+            <a:off x="274320" y="1088136"/>
+            <a:ext cx="3611880" cy="493776"/>
           </a:xfrm>
           <a:prstGeom prst="rect">
             <a:avLst/>
           </a:prstGeom>
           <a:solidFill>
-            <a:srgbClr val="F1F7FF"/>
+            <a:srgbClr val="FFFFFF"/>
           </a:solidFill>
-          <a:ln w="10160">
+          <a:ln>
             <a:solidFill>
               <a:srgbClr val="BAC8DC"/>
             </a:solidFill>
@@ -17778,16 +17884,175 @@
       </p:sp>
       <p:sp>
         <p:nvSpPr>
-          <p:cNvPr id="9" name="Rectangle 8"/>
+          <p:cNvPr id="9" name="Oval 8"/>
           <p:cNvSpPr/>
           <p:nvPr/>
         </p:nvSpPr>
         <p:spPr>
           <a:xfrm>
-            <a:off x="274320" y="996696"/>
-            <a:ext cx="73152" cy="3854196"/>
-          </a:xfrm>
-          <a:prstGeom prst="rect">
+            <a:off x="384048" y="1197864"/>
+            <a:ext cx="256032" cy="256032"/>
+          </a:xfrm>
+          <a:prstGeom prst="ellipse">
+            <a:avLst/>
+          </a:prstGeom>
+          <a:solidFill>
+            <a:srgbClr val="F59E0B"/>
+          </a:solidFill>
+          <a:ln>
+            <a:noFill/>
+          </a:ln>
+        </p:spPr>
+        <p:style>
+          <a:lnRef idx="1">
+            <a:schemeClr val="accent1"/>
+          </a:lnRef>
+          <a:fillRef idx="3">
+            <a:schemeClr val="accent1"/>
+          </a:fillRef>
+          <a:effectRef idx="2">
+            <a:schemeClr val="accent1"/>
+          </a:effectRef>
+          <a:fontRef idx="minor">
+            <a:schemeClr val="lt1"/>
+          </a:fontRef>
+        </p:style>
+        <p:txBody>
+          <a:bodyPr rtlCol="0" anchor="ctr"/>
+          <a:lstStyle/>
+          <a:p>
+            <a:pPr algn="ctr"/>
+          </a:p>
+        </p:txBody>
+      </p:sp>
+      <p:sp>
+        <p:nvSpPr>
+          <p:cNvPr id="10" name="TextBox 9"/>
+          <p:cNvSpPr txBox="1"/>
+          <p:nvPr/>
+        </p:nvSpPr>
+        <p:spPr>
+          <a:xfrm>
+            <a:off x="384048" y="1225296"/>
+            <a:ext cx="256032" cy="201168"/>
+          </a:xfrm>
+          <a:prstGeom prst="rect">
+            <a:avLst/>
+          </a:prstGeom>
+          <a:noFill/>
+        </p:spPr>
+        <p:txBody>
+          <a:bodyPr wrap="none">
+            <a:spAutoFit/>
+          </a:bodyPr>
+          <a:lstStyle/>
+          <a:p>
+            <a:pPr algn="ctr"/>
+            <a:r>
+              <a:rPr sz="900" b="1">
+                <a:solidFill>
+                  <a:srgbClr val="FFFFFF"/>
+                </a:solidFill>
+                <a:latin typeface="微软雅黑"/>
+                <ns3:rFonts xmlns:ns3="http://schemas.openxmlformats.org/wordprocessingml/2006/main" ns3:eastAsia="微软雅黑" ns3:ascii="微软雅黑" ns3:hAnsi="微软雅黑"/>
+              </a:rPr>
+              <a:t>1</a:t>
+            </a:r>
+          </a:p>
+        </p:txBody>
+      </p:sp>
+      <p:sp>
+        <p:nvSpPr>
+          <p:cNvPr id="11" name="TextBox 10"/>
+          <p:cNvSpPr txBox="1"/>
+          <p:nvPr/>
+        </p:nvSpPr>
+        <p:spPr>
+          <a:xfrm>
+            <a:off x="713232" y="1216152"/>
+            <a:ext cx="3081528" cy="310896"/>
+          </a:xfrm>
+          <a:prstGeom prst="rect">
+            <a:avLst/>
+          </a:prstGeom>
+          <a:noFill/>
+        </p:spPr>
+        <p:txBody>
+          <a:bodyPr wrap="none">
+            <a:spAutoFit/>
+          </a:bodyPr>
+          <a:lstStyle/>
+          <a:p>
+            <a:r>
+              <a:rPr sz="1100" b="0">
+                <a:solidFill>
+                  <a:srgbClr val="143278"/>
+                </a:solidFill>
+                <a:latin typeface="微软雅黑"/>
+                <ns4:rFonts xmlns:ns4="http://schemas.openxmlformats.org/wordprocessingml/2006/main" ns4:eastAsia="微软雅黑" ns4:ascii="微软雅黑" ns4:hAnsi="微软雅黑"/>
+              </a:rPr>
+              <a:t>赛项：创新赛 · 机器人创新赛道</a:t>
+            </a:r>
+          </a:p>
+        </p:txBody>
+      </p:sp>
+      <p:sp>
+        <p:nvSpPr>
+          <p:cNvPr id="12" name="Rectangle 11"/>
+          <p:cNvSpPr/>
+          <p:nvPr/>
+        </p:nvSpPr>
+        <p:spPr>
+          <a:xfrm>
+            <a:off x="274320" y="1636776"/>
+            <a:ext cx="3611880" cy="493776"/>
+          </a:xfrm>
+          <a:prstGeom prst="rect">
+            <a:avLst/>
+          </a:prstGeom>
+          <a:solidFill>
+            <a:srgbClr val="FFFFFF"/>
+          </a:solidFill>
+          <a:ln>
+            <a:solidFill>
+              <a:srgbClr val="BAC8DC"/>
+            </a:solidFill>
+          </a:ln>
+        </p:spPr>
+        <p:style>
+          <a:lnRef idx="1">
+            <a:schemeClr val="accent1"/>
+          </a:lnRef>
+          <a:fillRef idx="3">
+            <a:schemeClr val="accent1"/>
+          </a:fillRef>
+          <a:effectRef idx="2">
+            <a:schemeClr val="accent1"/>
+          </a:effectRef>
+          <a:fontRef idx="minor">
+            <a:schemeClr val="lt1"/>
+          </a:fontRef>
+        </p:style>
+        <p:txBody>
+          <a:bodyPr rtlCol="0" anchor="ctr"/>
+          <a:lstStyle/>
+          <a:p>
+            <a:pPr algn="ctr"/>
+          </a:p>
+        </p:txBody>
+      </p:sp>
+      <p:sp>
+        <p:nvSpPr>
+          <p:cNvPr id="13" name="Oval 12"/>
+          <p:cNvSpPr/>
+          <p:nvPr/>
+        </p:nvSpPr>
+        <p:spPr>
+          <a:xfrm>
+            <a:off x="384048" y="1746504"/>
+            <a:ext cx="256032" cy="256032"/>
+          </a:xfrm>
+          <a:prstGeom prst="ellipse">
             <a:avLst/>
           </a:prstGeom>
           <a:solidFill>
@@ -17821,14 +18086,14 @@
       </p:sp>
       <p:sp>
         <p:nvSpPr>
-          <p:cNvPr id="10" name="TextBox 9"/>
+          <p:cNvPr id="14" name="TextBox 13"/>
           <p:cNvSpPr txBox="1"/>
           <p:nvPr/>
         </p:nvSpPr>
         <p:spPr>
           <a:xfrm>
-            <a:off x="438912" y="1106424"/>
-            <a:ext cx="3282696" cy="890397"/>
+            <a:off x="384048" y="1773936"/>
+            <a:ext cx="256032" cy="201168"/>
           </a:xfrm>
           <a:prstGeom prst="rect">
             <a:avLst/>
@@ -17836,128 +18101,35 @@
           <a:noFill/>
         </p:spPr>
         <p:txBody>
-          <a:bodyPr wrap="square" anchor="t" lIns="25400" tIns="0">
+          <a:bodyPr wrap="none">
             <a:spAutoFit/>
           </a:bodyPr>
           <a:lstStyle/>
           <a:p>
-            <a:pPr>
-              <a:lnSpc>
-                <a:spcPct val="112000"/>
-              </a:lnSpc>
-              <a:spcAft>
-                <a:spcPts val="200"/>
-              </a:spcAft>
-            </a:pPr>
-            <a:r>
-              <a:rPr sz="1200" b="0">
-                <a:solidFill>
-                  <a:srgbClr val="1C202C"/>
-                </a:solidFill>
-                <a:latin typeface="微软雅黑"/>
-                <ns3:rFonts xmlns:ns3="http://schemas.openxmlformats.org/wordprocessingml/2006/main" ns3:eastAsia="微软雅黑" ns3:ascii="微软雅黑" ns3:hAnsi="微软雅黑"/>
-              </a:rPr>
-              <a:t>● 赛项：创新赛 · 机器人创新赛道</a:t>
-            </a:r>
-          </a:p>
-        </p:txBody>
-      </p:sp>
-      <p:sp>
-        <p:nvSpPr>
-          <p:cNvPr id="11" name="TextBox 10"/>
-          <p:cNvSpPr txBox="1"/>
-          <p:nvPr/>
-        </p:nvSpPr>
-        <p:spPr>
-          <a:xfrm>
-            <a:off x="438912" y="2015109"/>
-            <a:ext cx="3282696" cy="890397"/>
-          </a:xfrm>
-          <a:prstGeom prst="rect">
-            <a:avLst/>
-          </a:prstGeom>
-          <a:noFill/>
-        </p:spPr>
-        <p:txBody>
-          <a:bodyPr wrap="square" anchor="t" lIns="25400" tIns="0">
-            <a:spAutoFit/>
-          </a:bodyPr>
-          <a:lstStyle/>
-          <a:p>
-            <a:pPr>
-              <a:lnSpc>
-                <a:spcPct val="112000"/>
-              </a:lnSpc>
-              <a:spcAft>
-                <a:spcPts val="200"/>
-              </a:spcAft>
-            </a:pPr>
-            <a:r>
-              <a:rPr sz="1200" b="0">
-                <a:solidFill>
-                  <a:srgbClr val="1C202C"/>
-                </a:solidFill>
-                <a:latin typeface="微软雅黑"/>
-                <ns4:rFonts xmlns:ns4="http://schemas.openxmlformats.org/wordprocessingml/2006/main" ns4:eastAsia="微软雅黑" ns4:ascii="微软雅黑" ns4:hAnsi="微软雅黑"/>
-              </a:rPr>
-              <a:t>● 作品：智能养老陪伴机器人仿真平台</a:t>
-            </a:r>
-          </a:p>
-        </p:txBody>
-      </p:sp>
-      <p:sp>
-        <p:nvSpPr>
-          <p:cNvPr id="12" name="TextBox 11"/>
-          <p:cNvSpPr txBox="1"/>
-          <p:nvPr/>
-        </p:nvSpPr>
-        <p:spPr>
-          <a:xfrm>
-            <a:off x="438912" y="2923794"/>
-            <a:ext cx="3282696" cy="890397"/>
-          </a:xfrm>
-          <a:prstGeom prst="rect">
-            <a:avLst/>
-          </a:prstGeom>
-          <a:noFill/>
-        </p:spPr>
-        <p:txBody>
-          <a:bodyPr wrap="square" anchor="t" lIns="25400" tIns="0">
-            <a:spAutoFit/>
-          </a:bodyPr>
-          <a:lstStyle/>
-          <a:p>
-            <a:pPr>
-              <a:lnSpc>
-                <a:spcPct val="112000"/>
-              </a:lnSpc>
-              <a:spcAft>
-                <a:spcPts val="200"/>
-              </a:spcAft>
-            </a:pPr>
-            <a:r>
-              <a:rPr sz="1200" b="0">
-                <a:solidFill>
-                  <a:srgbClr val="1C202C"/>
+            <a:pPr algn="ctr"/>
+            <a:r>
+              <a:rPr sz="900" b="1">
+                <a:solidFill>
+                  <a:srgbClr val="FFFFFF"/>
                 </a:solidFill>
                 <a:latin typeface="微软雅黑"/>
                 <ns5:rFonts xmlns:ns5="http://schemas.openxmlformats.org/wordprocessingml/2006/main" ns5:eastAsia="微软雅黑" ns5:ascii="微软雅黑" ns5:hAnsi="微软雅黑"/>
               </a:rPr>
-              <a:t>● （基于大语言模型）</a:t>
-            </a:r>
-          </a:p>
-        </p:txBody>
-      </p:sp>
-      <p:sp>
-        <p:nvSpPr>
-          <p:cNvPr id="13" name="TextBox 12"/>
+              <a:t>2</a:t>
+            </a:r>
+          </a:p>
+        </p:txBody>
+      </p:sp>
+      <p:sp>
+        <p:nvSpPr>
+          <p:cNvPr id="15" name="TextBox 14"/>
           <p:cNvSpPr txBox="1"/>
           <p:nvPr/>
         </p:nvSpPr>
         <p:spPr>
           <a:xfrm>
-            <a:off x="438912" y="3832479"/>
-            <a:ext cx="3282696" cy="890397"/>
+            <a:off x="713232" y="1764792"/>
+            <a:ext cx="3081528" cy="310896"/>
           </a:xfrm>
           <a:prstGeom prst="rect">
             <a:avLst/>
@@ -17965,43 +18137,299 @@
           <a:noFill/>
         </p:spPr>
         <p:txBody>
-          <a:bodyPr wrap="square" anchor="t" lIns="25400" tIns="0">
+          <a:bodyPr wrap="none">
             <a:spAutoFit/>
           </a:bodyPr>
           <a:lstStyle/>
           <a:p>
-            <a:pPr>
-              <a:lnSpc>
-                <a:spcPct val="112000"/>
-              </a:lnSpc>
-              <a:spcAft>
-                <a:spcPts val="200"/>
-              </a:spcAft>
-            </a:pPr>
-            <a:r>
-              <a:rPr sz="1200" b="0">
-                <a:solidFill>
-                  <a:srgbClr val="1C202C"/>
+            <a:r>
+              <a:rPr sz="1100" b="0">
+                <a:solidFill>
+                  <a:srgbClr val="143278"/>
                 </a:solidFill>
                 <a:latin typeface="微软雅黑"/>
                 <ns6:rFonts xmlns:ns6="http://schemas.openxmlformats.org/wordprocessingml/2006/main" ns6:eastAsia="微软雅黑" ns6:ascii="微软雅黑" ns6:hAnsi="微软雅黑"/>
               </a:rPr>
-              <a:t>● 特色：理论清晰 · 系统可演示 · 指标可复现</a:t>
+              <a:t>作品：智能养老陪伴机器人仿真平台</a:t>
+            </a:r>
+          </a:p>
+        </p:txBody>
+      </p:sp>
+      <p:sp>
+        <p:nvSpPr>
+          <p:cNvPr id="16" name="Rectangle 15"/>
+          <p:cNvSpPr/>
+          <p:nvPr/>
+        </p:nvSpPr>
+        <p:spPr>
+          <a:xfrm>
+            <a:off x="274320" y="2185416"/>
+            <a:ext cx="3611880" cy="493776"/>
+          </a:xfrm>
+          <a:prstGeom prst="rect">
+            <a:avLst/>
+          </a:prstGeom>
+          <a:solidFill>
+            <a:srgbClr val="FFFFFF"/>
+          </a:solidFill>
+          <a:ln>
+            <a:solidFill>
+              <a:srgbClr val="BAC8DC"/>
+            </a:solidFill>
+          </a:ln>
+        </p:spPr>
+        <p:style>
+          <a:lnRef idx="1">
+            <a:schemeClr val="accent1"/>
+          </a:lnRef>
+          <a:fillRef idx="3">
+            <a:schemeClr val="accent1"/>
+          </a:fillRef>
+          <a:effectRef idx="2">
+            <a:schemeClr val="accent1"/>
+          </a:effectRef>
+          <a:fontRef idx="minor">
+            <a:schemeClr val="lt1"/>
+          </a:fontRef>
+        </p:style>
+        <p:txBody>
+          <a:bodyPr rtlCol="0" anchor="ctr"/>
+          <a:lstStyle/>
+          <a:p>
+            <a:pPr algn="ctr"/>
+          </a:p>
+        </p:txBody>
+      </p:sp>
+      <p:sp>
+        <p:nvSpPr>
+          <p:cNvPr id="17" name="Oval 16"/>
+          <p:cNvSpPr/>
+          <p:nvPr/>
+        </p:nvSpPr>
+        <p:spPr>
+          <a:xfrm>
+            <a:off x="384048" y="2295144"/>
+            <a:ext cx="256032" cy="256032"/>
+          </a:xfrm>
+          <a:prstGeom prst="ellipse">
+            <a:avLst/>
+          </a:prstGeom>
+          <a:solidFill>
+            <a:srgbClr val="143278"/>
+          </a:solidFill>
+          <a:ln>
+            <a:noFill/>
+          </a:ln>
+        </p:spPr>
+        <p:style>
+          <a:lnRef idx="1">
+            <a:schemeClr val="accent1"/>
+          </a:lnRef>
+          <a:fillRef idx="3">
+            <a:schemeClr val="accent1"/>
+          </a:fillRef>
+          <a:effectRef idx="2">
+            <a:schemeClr val="accent1"/>
+          </a:effectRef>
+          <a:fontRef idx="minor">
+            <a:schemeClr val="lt1"/>
+          </a:fontRef>
+        </p:style>
+        <p:txBody>
+          <a:bodyPr rtlCol="0" anchor="ctr"/>
+          <a:lstStyle/>
+          <a:p>
+            <a:pPr algn="ctr"/>
+          </a:p>
+        </p:txBody>
+      </p:sp>
+      <p:sp>
+        <p:nvSpPr>
+          <p:cNvPr id="18" name="TextBox 17"/>
+          <p:cNvSpPr txBox="1"/>
+          <p:nvPr/>
+        </p:nvSpPr>
+        <p:spPr>
+          <a:xfrm>
+            <a:off x="384048" y="2322576"/>
+            <a:ext cx="256032" cy="201168"/>
+          </a:xfrm>
+          <a:prstGeom prst="rect">
+            <a:avLst/>
+          </a:prstGeom>
+          <a:noFill/>
+        </p:spPr>
+        <p:txBody>
+          <a:bodyPr wrap="none">
+            <a:spAutoFit/>
+          </a:bodyPr>
+          <a:lstStyle/>
+          <a:p>
+            <a:pPr algn="ctr"/>
+            <a:r>
+              <a:rPr sz="900" b="1">
+                <a:solidFill>
+                  <a:srgbClr val="FFFFFF"/>
+                </a:solidFill>
+                <a:latin typeface="微软雅黑"/>
+                <ns7:rFonts xmlns:ns7="http://schemas.openxmlformats.org/wordprocessingml/2006/main" ns7:eastAsia="微软雅黑" ns7:ascii="微软雅黑" ns7:hAnsi="微软雅黑"/>
+              </a:rPr>
+              <a:t>3</a:t>
+            </a:r>
+          </a:p>
+        </p:txBody>
+      </p:sp>
+      <p:sp>
+        <p:nvSpPr>
+          <p:cNvPr id="19" name="TextBox 18"/>
+          <p:cNvSpPr txBox="1"/>
+          <p:nvPr/>
+        </p:nvSpPr>
+        <p:spPr>
+          <a:xfrm>
+            <a:off x="713232" y="2313432"/>
+            <a:ext cx="3081528" cy="310896"/>
+          </a:xfrm>
+          <a:prstGeom prst="rect">
+            <a:avLst/>
+          </a:prstGeom>
+          <a:noFill/>
+        </p:spPr>
+        <p:txBody>
+          <a:bodyPr wrap="none">
+            <a:spAutoFit/>
+          </a:bodyPr>
+          <a:lstStyle/>
+          <a:p>
+            <a:r>
+              <a:rPr sz="1100" b="0">
+                <a:solidFill>
+                  <a:srgbClr val="143278"/>
+                </a:solidFill>
+                <a:latin typeface="微软雅黑"/>
+                <ns8:rFonts xmlns:ns8="http://schemas.openxmlformats.org/wordprocessingml/2006/main" ns8:eastAsia="微软雅黑" ns8:ascii="微软雅黑" ns8:hAnsi="微软雅黑"/>
+              </a:rPr>
+              <a:t>特色：理论清晰 · 系统可演示 · 指标可复现</a:t>
+            </a:r>
+          </a:p>
+        </p:txBody>
+      </p:sp>
+      <p:sp>
+        <p:nvSpPr>
+          <p:cNvPr id="20" name="Rectangle 19"/>
+          <p:cNvSpPr/>
+          <p:nvPr/>
+        </p:nvSpPr>
+        <p:spPr>
+          <a:xfrm>
+            <a:off x="4069080" y="996696"/>
+            <a:ext cx="4800600" cy="3854196"/>
+          </a:xfrm>
+          <a:prstGeom prst="rect">
+            <a:avLst/>
+          </a:prstGeom>
+          <a:solidFill>
+            <a:srgbClr val="FFFFFF"/>
+          </a:solidFill>
+          <a:ln>
+            <a:solidFill>
+              <a:srgbClr val="BAC8DC"/>
+            </a:solidFill>
+          </a:ln>
+        </p:spPr>
+        <p:style>
+          <a:lnRef idx="1">
+            <a:schemeClr val="accent1"/>
+          </a:lnRef>
+          <a:fillRef idx="3">
+            <a:schemeClr val="accent1"/>
+          </a:fillRef>
+          <a:effectRef idx="2">
+            <a:schemeClr val="accent1"/>
+          </a:effectRef>
+          <a:fontRef idx="minor">
+            <a:schemeClr val="lt1"/>
+          </a:fontRef>
+        </p:style>
+        <p:txBody>
+          <a:bodyPr rtlCol="0" anchor="ctr"/>
+          <a:lstStyle/>
+          <a:p>
+            <a:pPr algn="ctr"/>
+          </a:p>
+        </p:txBody>
+      </p:sp>
+      <p:pic>
+        <p:nvPicPr>
+          <p:cNvPr id="21" name="Picture 20" descr="ppt_full_dashboard.png"/>
+          <p:cNvPicPr>
+            <a:picLocks noChangeAspect="1"/>
+          </p:cNvPicPr>
+          <p:nvPr/>
+        </p:nvPicPr>
+        <p:blipFill>
+          <a:blip r:embed="rId2"/>
+          <a:stretch>
+            <a:fillRect/>
+          </a:stretch>
+        </p:blipFill>
+        <p:spPr>
+          <a:xfrm>
+            <a:off x="5417306" y="1092708"/>
+            <a:ext cx="2104147" cy="1097280"/>
+          </a:xfrm>
+          <a:prstGeom prst="rect">
+            <a:avLst/>
+          </a:prstGeom>
+        </p:spPr>
+      </p:pic>
+      <p:sp>
+        <p:nvSpPr>
+          <p:cNvPr id="22" name="TextBox 21"/>
+          <p:cNvSpPr txBox="1"/>
+          <p:nvPr/>
+        </p:nvSpPr>
+        <p:spPr>
+          <a:xfrm>
+            <a:off x="4160520" y="2267712"/>
+            <a:ext cx="4617720" cy="219456"/>
+          </a:xfrm>
+          <a:prstGeom prst="rect">
+            <a:avLst/>
+          </a:prstGeom>
+          <a:noFill/>
+        </p:spPr>
+        <p:txBody>
+          <a:bodyPr wrap="square" anchor="ctr">
+            <a:spAutoFit/>
+          </a:bodyPr>
+          <a:lstStyle/>
+          <a:p>
+            <a:pPr algn="ctr"/>
+            <a:r>
+              <a:rPr sz="800" b="0">
+                <a:solidFill>
+                  <a:srgbClr val="5A6273"/>
+                </a:solidFill>
+                <a:latin typeface="微软雅黑"/>
+                <ns9:rFonts xmlns:ns9="http://schemas.openxmlformats.org/wordprocessingml/2006/main" ns9:eastAsia="微软雅黑" ns9:ascii="微软雅黑" ns9:hAnsi="微软雅黑"/>
+              </a:rPr>
+              <a:t>Web 控制台预览</a:t>
             </a:r>
           </a:p>
         </p:txBody>
       </p:sp>
       <p:graphicFrame>
         <p:nvGraphicFramePr>
-          <p:cNvPr id="14" name="Table 13"/>
+          <p:cNvPr id="23" name="Table 22"/>
           <p:cNvGraphicFramePr>
             <a:graphicFrameLocks noGrp="1"/>
           </p:cNvGraphicFramePr>
           <p:nvPr/>
         </p:nvGraphicFramePr>
         <p:xfrm>
-          <a:off x="4069080" y="996696"/>
-          <a:ext cx="4800600" cy="3854196"/>
+          <a:off x="4142232" y="2569464"/>
+          <a:ext cx="4654296" cy="2208276"/>
         </p:xfrm>
         <a:graphic>
           <a:graphicData uri="http://schemas.openxmlformats.org/drawingml/2006/table">
@@ -18010,10 +18438,10 @@
                 <a:tableStyleId>{5C22544A-7EE6-4342-B048-85BDC9FD1C3A}</a:tableStyleId>
               </a:tblPr>
               <a:tblGrid>
-                <a:gridCol w="841248"/>
-                <a:gridCol w="3959352"/>
+                <a:gridCol w="804672"/>
+                <a:gridCol w="3849624"/>
               </a:tblGrid>
-              <a:tr h="550599">
+              <a:tr h="368046">
                 <a:tc>
                   <a:txBody>
                     <a:bodyPr anchor="ctr"/>
@@ -18021,12 +18449,12 @@
                     <a:p>
                       <a:pPr algn="ctr"/>
                       <a:r>
-                        <a:rPr sz="1000" b="1">
+                        <a:rPr sz="900" b="1">
                           <a:solidFill>
                             <a:srgbClr val="FFFFFF"/>
                           </a:solidFill>
                           <a:latin typeface="微软雅黑"/>
-                          <ns7:rFonts xmlns:ns7="http://schemas.openxmlformats.org/wordprocessingml/2006/main" ns7:eastAsia="微软雅黑" ns7:ascii="微软雅黑" ns7:hAnsi="微软雅黑"/>
+                          <ns10:rFonts xmlns:ns10="http://schemas.openxmlformats.org/wordprocessingml/2006/main" ns10:eastAsia="微软雅黑" ns10:ascii="微软雅黑" ns10:hAnsi="微软雅黑"/>
                         </a:rPr>
                         <a:t>团队</a:t>
                       </a:r>
@@ -18045,25 +18473,25 @@
                     <a:p>
                       <a:pPr algn="l"/>
                       <a:r>
-                        <a:rPr sz="1000" b="0">
+                        <a:rPr sz="900" b="0">
                           <a:solidFill>
                             <a:srgbClr val="143278"/>
                           </a:solidFill>
                           <a:latin typeface="微软雅黑"/>
-                          <ns8:rFonts xmlns:ns8="http://schemas.openxmlformats.org/wordprocessingml/2006/main" ns8:eastAsia="微软雅黑" ns8:ascii="微软雅黑" ns8:hAnsi="微软雅黑"/>
+                          <ns11:rFonts xmlns:ns11="http://schemas.openxmlformats.org/wordprocessingml/2006/main" ns11:eastAsia="微软雅黑" ns11:ascii="微软雅黑" ns11:hAnsi="微软雅黑"/>
                         </a:rPr>
                         <a:t>从容应队</a:t>
                       </a:r>
                     </a:p>
                   </a:txBody>
-                  <a:tcPr marL="76200" marR="50800">
+                  <a:tcPr>
                     <a:solidFill>
                       <a:srgbClr val="F1F7FF"/>
                     </a:solidFill>
                   </a:tcPr>
                 </a:tc>
               </a:tr>
-              <a:tr h="550599">
+              <a:tr h="368046">
                 <a:tc>
                   <a:txBody>
                     <a:bodyPr anchor="ctr"/>
@@ -18071,12 +18499,12 @@
                     <a:p>
                       <a:pPr algn="ctr"/>
                       <a:r>
-                        <a:rPr sz="1000" b="1">
+                        <a:rPr sz="900" b="1">
                           <a:solidFill>
                             <a:srgbClr val="FFFFFF"/>
                           </a:solidFill>
                           <a:latin typeface="微软雅黑"/>
-                          <ns9:rFonts xmlns:ns9="http://schemas.openxmlformats.org/wordprocessingml/2006/main" ns9:eastAsia="微软雅黑" ns9:ascii="微软雅黑" ns9:hAnsi="微软雅黑"/>
+                          <ns12:rFonts xmlns:ns12="http://schemas.openxmlformats.org/wordprocessingml/2006/main" ns12:eastAsia="微软雅黑" ns12:ascii="微软雅黑" ns12:hAnsi="微软雅黑"/>
                         </a:rPr>
                         <a:t>学校</a:t>
                       </a:r>
@@ -18095,25 +18523,25 @@
                     <a:p>
                       <a:pPr algn="l"/>
                       <a:r>
-                        <a:rPr sz="1000" b="0">
+                        <a:rPr sz="900" b="0">
                           <a:solidFill>
                             <a:srgbClr val="143278"/>
                           </a:solidFill>
                           <a:latin typeface="微软雅黑"/>
-                          <ns10:rFonts xmlns:ns10="http://schemas.openxmlformats.org/wordprocessingml/2006/main" ns10:eastAsia="微软雅黑" ns10:ascii="微软雅黑" ns10:hAnsi="微软雅黑"/>
+                          <ns13:rFonts xmlns:ns13="http://schemas.openxmlformats.org/wordprocessingml/2006/main" ns13:eastAsia="微软雅黑" ns13:ascii="微软雅黑" ns13:hAnsi="微软雅黑"/>
                         </a:rPr>
                         <a:t>中山大学</a:t>
                       </a:r>
                     </a:p>
                   </a:txBody>
-                  <a:tcPr marL="76200" marR="50800">
+                  <a:tcPr>
                     <a:solidFill>
-                      <a:srgbClr val="F1F7FF"/>
+                      <a:srgbClr val="FFFFFF"/>
                     </a:solidFill>
                   </a:tcPr>
                 </a:tc>
               </a:tr>
-              <a:tr h="550599">
+              <a:tr h="368046">
                 <a:tc>
                   <a:txBody>
                     <a:bodyPr anchor="ctr"/>
@@ -18121,14 +18549,14 @@
                     <a:p>
                       <a:pPr algn="ctr"/>
                       <a:r>
-                        <a:rPr sz="1000" b="1">
+                        <a:rPr sz="900" b="1">
                           <a:solidFill>
                             <a:srgbClr val="FFFFFF"/>
                           </a:solidFill>
                           <a:latin typeface="微软雅黑"/>
-                          <ns11:rFonts xmlns:ns11="http://schemas.openxmlformats.org/wordprocessingml/2006/main" ns11:eastAsia="微软雅黑" ns11:ascii="微软雅黑" ns11:hAnsi="微软雅黑"/>
+                          <ns14:rFonts xmlns:ns14="http://schemas.openxmlformats.org/wordprocessingml/2006/main" ns14:eastAsia="微软雅黑" ns14:ascii="微软雅黑" ns14:hAnsi="微软雅黑"/>
                         </a:rPr>
-                        <a:t>队长</a:t>
+                        <a:t>队长 / 队员</a:t>
                       </a:r>
                     </a:p>
                   </a:txBody>
@@ -18145,25 +18573,25 @@
                     <a:p>
                       <a:pPr algn="l"/>
                       <a:r>
-                        <a:rPr sz="1000" b="0">
+                        <a:rPr sz="900" b="0">
                           <a:solidFill>
                             <a:srgbClr val="143278"/>
                           </a:solidFill>
                           <a:latin typeface="微软雅黑"/>
-                          <ns12:rFonts xmlns:ns12="http://schemas.openxmlformats.org/wordprocessingml/2006/main" ns12:eastAsia="微软雅黑" ns12:ascii="微软雅黑" ns12:hAnsi="微软雅黑"/>
+                          <ns15:rFonts xmlns:ns15="http://schemas.openxmlformats.org/wordprocessingml/2006/main" ns15:eastAsia="微软雅黑" ns15:ascii="微软雅黑" ns15:hAnsi="微软雅黑"/>
                         </a:rPr>
-                        <a:t>刘小凡</a:t>
+                        <a:t>刘小凡 / 白冉</a:t>
                       </a:r>
                     </a:p>
                   </a:txBody>
-                  <a:tcPr marL="76200" marR="50800">
+                  <a:tcPr>
                     <a:solidFill>
                       <a:srgbClr val="F1F7FF"/>
                     </a:solidFill>
                   </a:tcPr>
                 </a:tc>
               </a:tr>
-              <a:tr h="550599">
+              <a:tr h="368046">
                 <a:tc>
                   <a:txBody>
                     <a:bodyPr anchor="ctr"/>
@@ -18171,62 +18599,12 @@
                     <a:p>
                       <a:pPr algn="ctr"/>
                       <a:r>
-                        <a:rPr sz="1000" b="1">
+                        <a:rPr sz="900" b="1">
                           <a:solidFill>
                             <a:srgbClr val="FFFFFF"/>
                           </a:solidFill>
                           <a:latin typeface="微软雅黑"/>
-                          <ns13:rFonts xmlns:ns13="http://schemas.openxmlformats.org/wordprocessingml/2006/main" ns13:eastAsia="微软雅黑" ns13:ascii="微软雅黑" ns13:hAnsi="微软雅黑"/>
-                        </a:rPr>
-                        <a:t>队员</a:t>
-                      </a:r>
-                    </a:p>
-                  </a:txBody>
-                  <a:tcPr marL="50800" marR="50800" marT="25400" marB="25400">
-                    <a:solidFill>
-                      <a:srgbClr val="143278"/>
-                    </a:solidFill>
-                  </a:tcPr>
-                </a:tc>
-                <a:tc>
-                  <a:txBody>
-                    <a:bodyPr anchor="ctr" wrap="square"/>
-                    <a:lstStyle/>
-                    <a:p>
-                      <a:pPr algn="l"/>
-                      <a:r>
-                        <a:rPr sz="1000" b="0">
-                          <a:solidFill>
-                            <a:srgbClr val="143278"/>
-                          </a:solidFill>
-                          <a:latin typeface="微软雅黑"/>
-                          <ns14:rFonts xmlns:ns14="http://schemas.openxmlformats.org/wordprocessingml/2006/main" ns14:eastAsia="微软雅黑" ns14:ascii="微软雅黑" ns14:hAnsi="微软雅黑"/>
-                        </a:rPr>
-                        <a:t>白冉</a:t>
-                      </a:r>
-                    </a:p>
-                  </a:txBody>
-                  <a:tcPr marL="76200" marR="50800">
-                    <a:solidFill>
-                      <a:srgbClr val="F1F7FF"/>
-                    </a:solidFill>
-                  </a:tcPr>
-                </a:tc>
-              </a:tr>
-              <a:tr h="550599">
-                <a:tc>
-                  <a:txBody>
-                    <a:bodyPr anchor="ctr"/>
-                    <a:lstStyle/>
-                    <a:p>
-                      <a:pPr algn="ctr"/>
-                      <a:r>
-                        <a:rPr sz="1000" b="1">
-                          <a:solidFill>
-                            <a:srgbClr val="FFFFFF"/>
-                          </a:solidFill>
-                          <a:latin typeface="微软雅黑"/>
-                          <ns15:rFonts xmlns:ns15="http://schemas.openxmlformats.org/wordprocessingml/2006/main" ns15:eastAsia="微软雅黑" ns15:ascii="微软雅黑" ns15:hAnsi="微软雅黑"/>
+                          <ns16:rFonts xmlns:ns16="http://schemas.openxmlformats.org/wordprocessingml/2006/main" ns16:eastAsia="微软雅黑" ns16:ascii="微软雅黑" ns16:hAnsi="微软雅黑"/>
                         </a:rPr>
                         <a:t>指导教师</a:t>
                       </a:r>
@@ -18245,25 +18623,25 @@
                     <a:p>
                       <a:pPr algn="l"/>
                       <a:r>
-                        <a:rPr sz="1000" b="0">
+                        <a:rPr sz="900" b="0">
                           <a:solidFill>
                             <a:srgbClr val="143278"/>
                           </a:solidFill>
                           <a:latin typeface="微软雅黑"/>
-                          <ns16:rFonts xmlns:ns16="http://schemas.openxmlformats.org/wordprocessingml/2006/main" ns16:eastAsia="微软雅黑" ns16:ascii="微软雅黑" ns16:hAnsi="微软雅黑"/>
+                          <ns17:rFonts xmlns:ns17="http://schemas.openxmlformats.org/wordprocessingml/2006/main" ns17:eastAsia="微软雅黑" ns17:ascii="微软雅黑" ns17:hAnsi="微软雅黑"/>
                         </a:rPr>
                         <a:t>彭键清</a:t>
                       </a:r>
                     </a:p>
                   </a:txBody>
-                  <a:tcPr marL="76200" marR="50800">
+                  <a:tcPr>
                     <a:solidFill>
-                      <a:srgbClr val="F1F7FF"/>
+                      <a:srgbClr val="FFFFFF"/>
                     </a:solidFill>
                   </a:tcPr>
                 </a:tc>
               </a:tr>
-              <a:tr h="550599">
+              <a:tr h="368046">
                 <a:tc>
                   <a:txBody>
                     <a:bodyPr anchor="ctr"/>
@@ -18271,12 +18649,12 @@
                     <a:p>
                       <a:pPr algn="ctr"/>
                       <a:r>
-                        <a:rPr sz="1000" b="1">
+                        <a:rPr sz="900" b="1">
                           <a:solidFill>
                             <a:srgbClr val="FFFFFF"/>
                           </a:solidFill>
                           <a:latin typeface="微软雅黑"/>
-                          <ns17:rFonts xmlns:ns17="http://schemas.openxmlformats.org/wordprocessingml/2006/main" ns17:eastAsia="微软雅黑" ns17:ascii="微软雅黑" ns17:hAnsi="微软雅黑"/>
+                          <ns18:rFonts xmlns:ns18="http://schemas.openxmlformats.org/wordprocessingml/2006/main" ns18:eastAsia="微软雅黑" ns18:ascii="微软雅黑" ns18:hAnsi="微软雅黑"/>
                         </a:rPr>
                         <a:t>团队编号</a:t>
                       </a:r>
@@ -18295,25 +18673,25 @@
                     <a:p>
                       <a:pPr algn="l"/>
                       <a:r>
-                        <a:rPr sz="1000" b="0">
+                        <a:rPr sz="900" b="0">
                           <a:solidFill>
                             <a:srgbClr val="143278"/>
                           </a:solidFill>
                           <a:latin typeface="微软雅黑"/>
-                          <ns18:rFonts xmlns:ns18="http://schemas.openxmlformats.org/wordprocessingml/2006/main" ns18:eastAsia="微软雅黑" ns18:ascii="微软雅黑" ns18:hAnsi="微软雅黑"/>
+                          <ns19:rFonts xmlns:ns19="http://schemas.openxmlformats.org/wordprocessingml/2006/main" ns19:eastAsia="微软雅黑" ns19:ascii="微软雅黑" ns19:hAnsi="微软雅黑"/>
                         </a:rPr>
                         <a:t>CRAIC2026-TEAM-8FJQKLMI</a:t>
                       </a:r>
                     </a:p>
                   </a:txBody>
-                  <a:tcPr marL="76200" marR="50800">
+                  <a:tcPr>
                     <a:solidFill>
                       <a:srgbClr val="F1F7FF"/>
                     </a:solidFill>
                   </a:tcPr>
                 </a:tc>
               </a:tr>
-              <a:tr h="550602">
+              <a:tr h="368046">
                 <a:tc>
                   <a:txBody>
                     <a:bodyPr anchor="ctr"/>
@@ -18321,12 +18699,12 @@
                     <a:p>
                       <a:pPr algn="ctr"/>
                       <a:r>
-                        <a:rPr sz="1000" b="1">
+                        <a:rPr sz="900" b="1">
                           <a:solidFill>
                             <a:srgbClr val="FFFFFF"/>
                           </a:solidFill>
                           <a:latin typeface="微软雅黑"/>
-                          <ns19:rFonts xmlns:ns19="http://schemas.openxmlformats.org/wordprocessingml/2006/main" ns19:eastAsia="微软雅黑" ns19:ascii="微软雅黑" ns19:hAnsi="微软雅黑"/>
+                          <ns20:rFonts xmlns:ns20="http://schemas.openxmlformats.org/wordprocessingml/2006/main" ns20:eastAsia="微软雅黑" ns20:ascii="微软雅黑" ns20:hAnsi="微软雅黑"/>
                         </a:rPr>
                         <a:t>作品编号</a:t>
                       </a:r>
@@ -18345,20 +18723,20 @@
                     <a:p>
                       <a:pPr algn="l"/>
                       <a:r>
-                        <a:rPr sz="1000" b="0">
+                        <a:rPr sz="900" b="0">
                           <a:solidFill>
                             <a:srgbClr val="143278"/>
                           </a:solidFill>
                           <a:latin typeface="微软雅黑"/>
-                          <ns20:rFonts xmlns:ns20="http://schemas.openxmlformats.org/wordprocessingml/2006/main" ns20:eastAsia="微软雅黑" ns20:ascii="微软雅黑" ns20:hAnsi="微软雅黑"/>
+                          <ns21:rFonts xmlns:ns21="http://schemas.openxmlformats.org/wordprocessingml/2006/main" ns21:eastAsia="微软雅黑" ns21:ascii="微软雅黑" ns21:hAnsi="微软雅黑"/>
                         </a:rPr>
                         <a:t>CRAIC20264ZEFT1DF</a:t>
                       </a:r>
                     </a:p>
                   </a:txBody>
-                  <a:tcPr marL="76200" marR="50800">
+                  <a:tcPr>
                     <a:solidFill>
-                      <a:srgbClr val="F1F7FF"/>
+                      <a:srgbClr val="FFFFFF"/>
                     </a:solidFill>
                   </a:tcPr>
                 </a:tc>
@@ -19605,8 +19983,8 @@
         </p:nvSpPr>
         <p:spPr>
           <a:xfrm>
-            <a:off x="4694986" y="1472215"/>
-            <a:ext cx="4097426" cy="2866581"/>
+            <a:off x="4803525" y="1249756"/>
+            <a:ext cx="3880348" cy="3311499"/>
           </a:xfrm>
           <a:prstGeom prst="rect">
             <a:avLst/>
@@ -19644,7 +20022,7 @@
       </p:sp>
       <p:pic>
         <p:nvPicPr>
-          <p:cNvPr id="19" name="Picture 18" descr="aging_trend.png"/>
+          <p:cNvPr id="19" name="Picture 18" descr="ppt_emotion_input.png"/>
           <p:cNvPicPr>
             <a:picLocks noChangeAspect="1"/>
           </p:cNvPicPr>
@@ -19658,8 +20036,8 @@
         </p:blipFill>
         <p:spPr>
           <a:xfrm>
-            <a:off x="4731562" y="1508791"/>
-            <a:ext cx="4024274" cy="2793429"/>
+            <a:off x="4840101" y="1286332"/>
+            <a:ext cx="3807196" cy="3238347"/>
           </a:xfrm>
           <a:prstGeom prst="rect">
             <a:avLst/>
@@ -20363,8 +20741,8 @@
         </p:nvSpPr>
         <p:spPr>
           <a:xfrm>
-            <a:off x="4308652" y="1248157"/>
-            <a:ext cx="4321454" cy="3022089"/>
+            <a:off x="4308652" y="1223033"/>
+            <a:ext cx="4321454" cy="3072336"/>
           </a:xfrm>
           <a:prstGeom prst="rect">
             <a:avLst/>
@@ -20416,8 +20794,8 @@
         </p:blipFill>
         <p:spPr>
           <a:xfrm>
-            <a:off x="4345228" y="1284733"/>
-            <a:ext cx="4248302" cy="2948937"/>
+            <a:off x="4345228" y="1259609"/>
+            <a:ext cx="4248302" cy="2999184"/>
           </a:xfrm>
           <a:prstGeom prst="rect">
             <a:avLst/>
@@ -21556,7 +21934,7 @@
               </a:spcAft>
             </a:pPr>
             <a:r>
-              <a:rPr sz="1300" b="0">
+              <a:rPr sz="1200" b="0">
                 <a:solidFill>
                   <a:srgbClr val="1C202C"/>
                 </a:solidFill>
@@ -21599,7 +21977,7 @@
               </a:spcAft>
             </a:pPr>
             <a:r>
-              <a:rPr sz="1300" b="0">
+              <a:rPr sz="1200" b="0">
                 <a:solidFill>
                   <a:srgbClr val="1C202C"/>
                 </a:solidFill>
@@ -21642,7 +22020,7 @@
               </a:spcAft>
             </a:pPr>
             <a:r>
-              <a:rPr sz="1300" b="0">
+              <a:rPr sz="1200" b="0">
                 <a:solidFill>
                   <a:srgbClr val="1C202C"/>
                 </a:solidFill>
@@ -21685,7 +22063,7 @@
               </a:spcAft>
             </a:pPr>
             <a:r>
-              <a:rPr sz="1300" b="0">
+              <a:rPr sz="1200" b="0">
                 <a:solidFill>
                   <a:srgbClr val="1C202C"/>
                 </a:solidFill>
@@ -21821,97 +22199,9 @@
           </a:p>
         </p:txBody>
       </p:sp>
-      <p:sp>
-        <p:nvSpPr>
-          <p:cNvPr id="17" name="Rectangle 16"/>
-          <p:cNvSpPr/>
-          <p:nvPr/>
-        </p:nvSpPr>
-        <p:spPr>
-          <a:xfrm>
-            <a:off x="3968496" y="996696"/>
-            <a:ext cx="10972" cy="3854196"/>
-          </a:xfrm>
-          <a:prstGeom prst="rect">
-            <a:avLst/>
-          </a:prstGeom>
-          <a:solidFill>
-            <a:srgbClr val="BAC8DC"/>
-          </a:solidFill>
-          <a:ln>
-            <a:noFill/>
-          </a:ln>
-        </p:spPr>
-        <p:style>
-          <a:lnRef idx="1">
-            <a:schemeClr val="accent1"/>
-          </a:lnRef>
-          <a:fillRef idx="3">
-            <a:schemeClr val="accent1"/>
-          </a:fillRef>
-          <a:effectRef idx="2">
-            <a:schemeClr val="accent1"/>
-          </a:effectRef>
-          <a:fontRef idx="minor">
-            <a:schemeClr val="lt1"/>
-          </a:fontRef>
-        </p:style>
-        <p:txBody>
-          <a:bodyPr rtlCol="0" anchor="ctr"/>
-          <a:lstStyle/>
-          <a:p>
-            <a:pPr algn="ctr"/>
-          </a:p>
-        </p:txBody>
-      </p:sp>
-      <p:sp>
-        <p:nvSpPr>
-          <p:cNvPr id="18" name="Rectangle 17"/>
-          <p:cNvSpPr/>
-          <p:nvPr/>
-        </p:nvSpPr>
-        <p:spPr>
-          <a:xfrm>
-            <a:off x="4308652" y="1221190"/>
-            <a:ext cx="4321454" cy="3076023"/>
-          </a:xfrm>
-          <a:prstGeom prst="rect">
-            <a:avLst/>
-          </a:prstGeom>
-          <a:solidFill>
-            <a:srgbClr val="FCFDFF"/>
-          </a:solidFill>
-          <a:ln w="7620">
-            <a:solidFill>
-              <a:srgbClr val="BAC8DC"/>
-            </a:solidFill>
-          </a:ln>
-        </p:spPr>
-        <p:style>
-          <a:lnRef idx="1">
-            <a:schemeClr val="accent1"/>
-          </a:lnRef>
-          <a:fillRef idx="3">
-            <a:schemeClr val="accent1"/>
-          </a:fillRef>
-          <a:effectRef idx="2">
-            <a:schemeClr val="accent1"/>
-          </a:effectRef>
-          <a:fontRef idx="minor">
-            <a:schemeClr val="lt1"/>
-          </a:fontRef>
-        </p:style>
-        <p:txBody>
-          <a:bodyPr rtlCol="0" anchor="ctr"/>
-          <a:lstStyle/>
-          <a:p>
-            <a:pPr algn="ctr"/>
-          </a:p>
-        </p:txBody>
-      </p:sp>
       <p:pic>
         <p:nvPicPr>
-          <p:cNvPr id="19" name="Picture 18" descr="architecture_layers.png"/>
+          <p:cNvPr id="17" name="Picture 16" descr="architecture_layers.png"/>
           <p:cNvPicPr>
             <a:picLocks noChangeAspect="1"/>
           </p:cNvPicPr>
@@ -21925,8 +22215,8 @@
         </p:blipFill>
         <p:spPr>
           <a:xfrm>
-            <a:off x="4345228" y="1257766"/>
-            <a:ext cx="4248302" cy="3002871"/>
+            <a:off x="5473522" y="1104542"/>
+            <a:ext cx="1991714" cy="1407823"/>
           </a:xfrm>
           <a:prstGeom prst="rect">
             <a:avLst/>
@@ -21935,13 +22225,13 @@
       </p:pic>
       <p:sp>
         <p:nvSpPr>
-          <p:cNvPr id="20" name="TextBox 19"/>
+          <p:cNvPr id="18" name="TextBox 17"/>
           <p:cNvSpPr txBox="1"/>
           <p:nvPr/>
         </p:nvSpPr>
         <p:spPr>
           <a:xfrm>
-            <a:off x="4160520" y="4521708"/>
+            <a:off x="4160520" y="2620213"/>
             <a:ext cx="4617720" cy="219456"/>
           </a:xfrm>
           <a:prstGeom prst="rect">
@@ -21964,7 +22254,67 @@
                 <a:latin typeface="微软雅黑"/>
                 <ns8:rFonts xmlns:ns8="http://schemas.openxmlformats.org/wordprocessingml/2006/main" ns8:eastAsia="微软雅黑" ns8:ascii="微软雅黑" ns8:hAnsi="微软雅黑"/>
               </a:rPr>
-              <a:t>系统四层架构</a:t>
+              <a:t>四层架构</a:t>
+            </a:r>
+          </a:p>
+        </p:txBody>
+      </p:sp>
+      <p:pic>
+        <p:nvPicPr>
+          <p:cNvPr id="19" name="Picture 18" descr="state_machine.png"/>
+          <p:cNvPicPr>
+            <a:picLocks noChangeAspect="1"/>
+          </p:cNvPicPr>
+          <p:nvPr/>
+        </p:nvPicPr>
+        <p:blipFill>
+          <a:blip r:embed="rId3"/>
+          <a:stretch>
+            <a:fillRect/>
+          </a:stretch>
+        </p:blipFill>
+        <p:spPr>
+          <a:xfrm>
+            <a:off x="5457021" y="2885336"/>
+            <a:ext cx="2024716" cy="1407823"/>
+          </a:xfrm>
+          <a:prstGeom prst="rect">
+            <a:avLst/>
+          </a:prstGeom>
+        </p:spPr>
+      </p:pic>
+      <p:sp>
+        <p:nvSpPr>
+          <p:cNvPr id="20" name="TextBox 19"/>
+          <p:cNvSpPr txBox="1"/>
+          <p:nvPr/>
+        </p:nvSpPr>
+        <p:spPr>
+          <a:xfrm>
+            <a:off x="4160520" y="4401007"/>
+            <a:ext cx="4617720" cy="219456"/>
+          </a:xfrm>
+          <a:prstGeom prst="rect">
+            <a:avLst/>
+          </a:prstGeom>
+          <a:noFill/>
+        </p:spPr>
+        <p:txBody>
+          <a:bodyPr wrap="square" anchor="ctr">
+            <a:spAutoFit/>
+          </a:bodyPr>
+          <a:lstStyle/>
+          <a:p>
+            <a:pPr algn="ctr"/>
+            <a:r>
+              <a:rPr sz="800" b="0">
+                <a:solidFill>
+                  <a:srgbClr val="5A6273"/>
+                </a:solidFill>
+                <a:latin typeface="微软雅黑"/>
+                <ns9:rFonts xmlns:ns9="http://schemas.openxmlformats.org/wordprocessingml/2006/main" ns9:eastAsia="微软雅黑" ns9:ascii="微软雅黑" ns9:hAnsi="微软雅黑"/>
+              </a:rPr>
+              <a:t>状态机概览</a:t>
             </a:r>
           </a:p>
         </p:txBody>
@@ -22635,8 +22985,8 @@
         </p:nvSpPr>
         <p:spPr>
           <a:xfrm>
-            <a:off x="4694986" y="1469852"/>
-            <a:ext cx="4097426" cy="2871307"/>
+            <a:off x="4694986" y="1375751"/>
+            <a:ext cx="4097426" cy="3059508"/>
           </a:xfrm>
           <a:prstGeom prst="rect">
             <a:avLst/>
@@ -22674,7 +23024,7 @@
       </p:sp>
       <p:pic>
         <p:nvPicPr>
-          <p:cNvPr id="19" name="Picture 18" descr="state_machine.png"/>
+          <p:cNvPr id="19" name="Picture 18" descr="risk_fusion.png"/>
           <p:cNvPicPr>
             <a:picLocks noChangeAspect="1"/>
           </p:cNvPicPr>
@@ -22688,8 +23038,8 @@
         </p:blipFill>
         <p:spPr>
           <a:xfrm>
-            <a:off x="4731562" y="1506428"/>
-            <a:ext cx="4024274" cy="2798155"/>
+            <a:off x="4731562" y="1412327"/>
+            <a:ext cx="4024274" cy="2986356"/>
           </a:xfrm>
           <a:prstGeom prst="rect">
             <a:avLst/>
@@ -23406,7 +23756,7 @@
                 <a:latin typeface="微软雅黑"/>
                 <ns7:rFonts xmlns:ns7="http://schemas.openxmlformats.org/wordprocessingml/2006/main" ns7:eastAsia="微软雅黑" ns7:ascii="微软雅黑" ns7:hAnsi="微软雅黑"/>
               </a:rPr>
-              <a:t>分层与 CareOrchestrator</a:t>
+              <a:t>四层架构详图</a:t>
             </a:r>
           </a:p>
         </p:txBody>

--- a/docs/答辩_CareCompanion.pptx
+++ b/docs/答辩_CareCompanion.pptx
@@ -5754,8 +5754,8 @@
         </p:nvSpPr>
         <p:spPr>
           <a:xfrm>
-            <a:off x="5243358" y="1151595"/>
-            <a:ext cx="2452043" cy="3215213"/>
+            <a:off x="4969110" y="1151595"/>
+            <a:ext cx="3000538" cy="3215213"/>
           </a:xfrm>
           <a:prstGeom prst="rect">
             <a:avLst/>
@@ -5807,8 +5807,8 @@
         </p:blipFill>
         <p:spPr>
           <a:xfrm>
-            <a:off x="5279934" y="1188171"/>
-            <a:ext cx="2378891" cy="3142061"/>
+            <a:off x="5005686" y="1188171"/>
+            <a:ext cx="2927386" cy="3142061"/>
           </a:xfrm>
           <a:prstGeom prst="rect">
             <a:avLst/>
@@ -9787,8 +9787,268 @@
         </p:nvSpPr>
         <p:spPr>
           <a:xfrm>
-            <a:off x="274320" y="1033272"/>
-            <a:ext cx="4233672" cy="3781044"/>
+            <a:off x="274320" y="996696"/>
+            <a:ext cx="3611880" cy="3854196"/>
+          </a:xfrm>
+          <a:prstGeom prst="rect">
+            <a:avLst/>
+          </a:prstGeom>
+          <a:solidFill>
+            <a:srgbClr val="F1F7FF"/>
+          </a:solidFill>
+          <a:ln w="10160">
+            <a:solidFill>
+              <a:srgbClr val="BAC8DC"/>
+            </a:solidFill>
+          </a:ln>
+        </p:spPr>
+        <p:style>
+          <a:lnRef idx="1">
+            <a:schemeClr val="accent1"/>
+          </a:lnRef>
+          <a:fillRef idx="3">
+            <a:schemeClr val="accent1"/>
+          </a:fillRef>
+          <a:effectRef idx="2">
+            <a:schemeClr val="accent1"/>
+          </a:effectRef>
+          <a:fontRef idx="minor">
+            <a:schemeClr val="lt1"/>
+          </a:fontRef>
+        </p:style>
+        <p:txBody>
+          <a:bodyPr rtlCol="0" anchor="ctr"/>
+          <a:lstStyle/>
+          <a:p>
+            <a:pPr algn="ctr"/>
+          </a:p>
+        </p:txBody>
+      </p:sp>
+      <p:sp>
+        <p:nvSpPr>
+          <p:cNvPr id="9" name="Rectangle 8"/>
+          <p:cNvSpPr/>
+          <p:nvPr/>
+        </p:nvSpPr>
+        <p:spPr>
+          <a:xfrm>
+            <a:off x="274320" y="996696"/>
+            <a:ext cx="73152" cy="3854196"/>
+          </a:xfrm>
+          <a:prstGeom prst="rect">
+            <a:avLst/>
+          </a:prstGeom>
+          <a:solidFill>
+            <a:srgbClr val="143278"/>
+          </a:solidFill>
+          <a:ln>
+            <a:noFill/>
+          </a:ln>
+        </p:spPr>
+        <p:style>
+          <a:lnRef idx="1">
+            <a:schemeClr val="accent1"/>
+          </a:lnRef>
+          <a:fillRef idx="3">
+            <a:schemeClr val="accent1"/>
+          </a:fillRef>
+          <a:effectRef idx="2">
+            <a:schemeClr val="accent1"/>
+          </a:effectRef>
+          <a:fontRef idx="minor">
+            <a:schemeClr val="lt1"/>
+          </a:fontRef>
+        </p:style>
+        <p:txBody>
+          <a:bodyPr rtlCol="0" anchor="ctr"/>
+          <a:lstStyle/>
+          <a:p>
+            <a:pPr algn="ctr"/>
+          </a:p>
+        </p:txBody>
+      </p:sp>
+      <p:sp>
+        <p:nvSpPr>
+          <p:cNvPr id="10" name="TextBox 9"/>
+          <p:cNvSpPr txBox="1"/>
+          <p:nvPr/>
+        </p:nvSpPr>
+        <p:spPr>
+          <a:xfrm>
+            <a:off x="438912" y="1106424"/>
+            <a:ext cx="3282696" cy="890397"/>
+          </a:xfrm>
+          <a:prstGeom prst="rect">
+            <a:avLst/>
+          </a:prstGeom>
+          <a:noFill/>
+        </p:spPr>
+        <p:txBody>
+          <a:bodyPr wrap="square" anchor="t" lIns="25400" tIns="0">
+            <a:spAutoFit/>
+          </a:bodyPr>
+          <a:lstStyle/>
+          <a:p>
+            <a:pPr>
+              <a:lnSpc>
+                <a:spcPct val="112000"/>
+              </a:lnSpc>
+              <a:spcAft>
+                <a:spcPts val="200"/>
+              </a:spcAft>
+            </a:pPr>
+            <a:r>
+              <a:rPr sz="1200" b="0">
+                <a:solidFill>
+                  <a:srgbClr val="1C202C"/>
+                </a:solidFill>
+                <a:latin typeface="微软雅黑"/>
+                <ns3:rFonts xmlns:ns3="http://schemas.openxmlformats.org/wordprocessingml/2006/main" ns3:eastAsia="微软雅黑" ns3:ascii="微软雅黑" ns3:hAnsi="微软雅黑"/>
+              </a:rPr>
+              <a:t>● MediaPipe 提取 33 个骨架关键点</a:t>
+            </a:r>
+          </a:p>
+        </p:txBody>
+      </p:sp>
+      <p:sp>
+        <p:nvSpPr>
+          <p:cNvPr id="11" name="TextBox 10"/>
+          <p:cNvSpPr txBox="1"/>
+          <p:nvPr/>
+        </p:nvSpPr>
+        <p:spPr>
+          <a:xfrm>
+            <a:off x="438912" y="2015109"/>
+            <a:ext cx="3282696" cy="890397"/>
+          </a:xfrm>
+          <a:prstGeom prst="rect">
+            <a:avLst/>
+          </a:prstGeom>
+          <a:noFill/>
+        </p:spPr>
+        <p:txBody>
+          <a:bodyPr wrap="square" anchor="t" lIns="25400" tIns="0">
+            <a:spAutoFit/>
+          </a:bodyPr>
+          <a:lstStyle/>
+          <a:p>
+            <a:pPr>
+              <a:lnSpc>
+                <a:spcPct val="112000"/>
+              </a:lnSpc>
+              <a:spcAft>
+                <a:spcPts val="200"/>
+              </a:spcAft>
+            </a:pPr>
+            <a:r>
+              <a:rPr sz="1200" b="0">
+                <a:solidFill>
+                  <a:srgbClr val="1C202C"/>
+                </a:solidFill>
+                <a:latin typeface="微软雅黑"/>
+                <ns4:rFonts xmlns:ns4="http://schemas.openxmlformats.org/wordprocessingml/2006/main" ns4:eastAsia="微软雅黑" ns4:ascii="微软雅黑" ns4:hAnsi="微软雅黑"/>
+              </a:rPr>
+              <a:t>● 由肩-髋-踝计算宽高比 R</a:t>
+            </a:r>
+          </a:p>
+        </p:txBody>
+      </p:sp>
+      <p:sp>
+        <p:nvSpPr>
+          <p:cNvPr id="12" name="TextBox 11"/>
+          <p:cNvSpPr txBox="1"/>
+          <p:nvPr/>
+        </p:nvSpPr>
+        <p:spPr>
+          <a:xfrm>
+            <a:off x="438912" y="2923794"/>
+            <a:ext cx="3282696" cy="890397"/>
+          </a:xfrm>
+          <a:prstGeom prst="rect">
+            <a:avLst/>
+          </a:prstGeom>
+          <a:noFill/>
+        </p:spPr>
+        <p:txBody>
+          <a:bodyPr wrap="square" anchor="t" lIns="25400" tIns="0">
+            <a:spAutoFit/>
+          </a:bodyPr>
+          <a:lstStyle/>
+          <a:p>
+            <a:pPr>
+              <a:lnSpc>
+                <a:spcPct val="112000"/>
+              </a:lnSpc>
+              <a:spcAft>
+                <a:spcPts val="200"/>
+              </a:spcAft>
+            </a:pPr>
+            <a:r>
+              <a:rPr sz="1200" b="0">
+                <a:solidFill>
+                  <a:srgbClr val="1C202C"/>
+                </a:solidFill>
+                <a:latin typeface="微软雅黑"/>
+                <ns5:rFonts xmlns:ns5="http://schemas.openxmlformats.org/wordprocessingml/2006/main" ns5:eastAsia="微软雅黑" ns5:ascii="微软雅黑" ns5:hAnsi="微软雅黑"/>
+              </a:rPr>
+              <a:t>● 竖直速度突增触发跌倒规则</a:t>
+            </a:r>
+          </a:p>
+        </p:txBody>
+      </p:sp>
+      <p:sp>
+        <p:nvSpPr>
+          <p:cNvPr id="13" name="TextBox 12"/>
+          <p:cNvSpPr txBox="1"/>
+          <p:nvPr/>
+        </p:nvSpPr>
+        <p:spPr>
+          <a:xfrm>
+            <a:off x="438912" y="3832479"/>
+            <a:ext cx="3282696" cy="890397"/>
+          </a:xfrm>
+          <a:prstGeom prst="rect">
+            <a:avLst/>
+          </a:prstGeom>
+          <a:noFill/>
+        </p:spPr>
+        <p:txBody>
+          <a:bodyPr wrap="square" anchor="t" lIns="25400" tIns="0">
+            <a:spAutoFit/>
+          </a:bodyPr>
+          <a:lstStyle/>
+          <a:p>
+            <a:pPr>
+              <a:lnSpc>
+                <a:spcPct val="112000"/>
+              </a:lnSpc>
+              <a:spcAft>
+                <a:spcPts val="200"/>
+              </a:spcAft>
+            </a:pPr>
+            <a:r>
+              <a:rPr sz="1200" b="0">
+                <a:solidFill>
+                  <a:srgbClr val="1C202C"/>
+                </a:solidFill>
+                <a:latin typeface="微软雅黑"/>
+                <ns6:rFonts xmlns:ns6="http://schemas.openxmlformats.org/wordprocessingml/2006/main" ns6:eastAsia="微软雅黑" ns6:ascii="微软雅黑" ns6:hAnsi="微软雅黑"/>
+              </a:rPr>
+              <a:t>● 上传照片与摄像头共用同一逻辑</a:t>
+            </a:r>
+          </a:p>
+        </p:txBody>
+      </p:sp>
+      <p:sp>
+        <p:nvSpPr>
+          <p:cNvPr id="14" name="Rectangle 13"/>
+          <p:cNvSpPr/>
+          <p:nvPr/>
+        </p:nvSpPr>
+        <p:spPr>
+          <a:xfrm>
+            <a:off x="4105656" y="1033272"/>
+            <a:ext cx="4727448" cy="3744468"/>
           </a:xfrm>
           <a:prstGeom prst="rect">
             <a:avLst/>
@@ -9824,9 +10084,52 @@
           </a:p>
         </p:txBody>
       </p:sp>
+      <p:sp>
+        <p:nvSpPr>
+          <p:cNvPr id="15" name="Rectangle 14"/>
+          <p:cNvSpPr/>
+          <p:nvPr/>
+        </p:nvSpPr>
+        <p:spPr>
+          <a:xfrm>
+            <a:off x="3968496" y="996696"/>
+            <a:ext cx="10972" cy="3854196"/>
+          </a:xfrm>
+          <a:prstGeom prst="rect">
+            <a:avLst/>
+          </a:prstGeom>
+          <a:solidFill>
+            <a:srgbClr val="BAC8DC"/>
+          </a:solidFill>
+          <a:ln>
+            <a:noFill/>
+          </a:ln>
+        </p:spPr>
+        <p:style>
+          <a:lnRef idx="1">
+            <a:schemeClr val="accent1"/>
+          </a:lnRef>
+          <a:fillRef idx="3">
+            <a:schemeClr val="accent1"/>
+          </a:fillRef>
+          <a:effectRef idx="2">
+            <a:schemeClr val="accent1"/>
+          </a:effectRef>
+          <a:fontRef idx="minor">
+            <a:schemeClr val="lt1"/>
+          </a:fontRef>
+        </p:style>
+        <p:txBody>
+          <a:bodyPr rtlCol="0" anchor="ctr"/>
+          <a:lstStyle/>
+          <a:p>
+            <a:pPr algn="ctr"/>
+          </a:p>
+        </p:txBody>
+      </p:sp>
       <p:pic>
         <p:nvPicPr>
-          <p:cNvPr id="9" name="Picture 8" descr="ppt_mediapipe_pose.png"/>
+          <p:cNvPr id="16" name="Picture 15" descr="ppt_mediapipe_pose.png"/>
           <p:cNvPicPr>
             <a:picLocks noChangeAspect="1"/>
           </p:cNvPicPr>
@@ -9840,8 +10143,8 @@
         </p:blipFill>
         <p:spPr>
           <a:xfrm>
-            <a:off x="1180821" y="1191143"/>
-            <a:ext cx="2420668" cy="3227557"/>
+            <a:off x="4343462" y="1171277"/>
+            <a:ext cx="2258442" cy="3011256"/>
           </a:xfrm>
           <a:prstGeom prst="rect">
             <a:avLst/>
@@ -9850,14 +10153,14 @@
       </p:pic>
       <p:sp>
         <p:nvSpPr>
-          <p:cNvPr id="10" name="TextBox 9"/>
+          <p:cNvPr id="17" name="TextBox 16"/>
           <p:cNvSpPr txBox="1"/>
           <p:nvPr/>
         </p:nvSpPr>
         <p:spPr>
           <a:xfrm>
-            <a:off x="347472" y="4576572"/>
-            <a:ext cx="4087368" cy="219456"/>
+            <a:off x="4215383" y="4283964"/>
+            <a:ext cx="2514600" cy="219456"/>
           </a:xfrm>
           <a:prstGeom prst="rect">
             <a:avLst/>
@@ -9877,7 +10180,7 @@
                   <a:srgbClr val="5A6273"/>
                 </a:solidFill>
                 <a:latin typeface="微软雅黑"/>
-                <ns3:rFonts xmlns:ns3="http://schemas.openxmlformats.org/wordprocessingml/2006/main" ns3:eastAsia="微软雅黑" ns3:ascii="微软雅黑" ns3:hAnsi="微软雅黑"/>
+                <ns7:rFonts xmlns:ns7="http://schemas.openxmlformats.org/wordprocessingml/2006/main" ns7:eastAsia="微软雅黑" ns7:ascii="微软雅黑" ns7:hAnsi="微软雅黑"/>
               </a:rPr>
               <a:t>MediaPipe 骨架叠加</a:t>
             </a:r>
@@ -9886,22 +10189,22 @@
       </p:sp>
       <p:sp>
         <p:nvSpPr>
-          <p:cNvPr id="11" name="Rectangle 10"/>
+          <p:cNvPr id="18" name="Rectangle 17"/>
           <p:cNvSpPr/>
           <p:nvPr/>
         </p:nvSpPr>
         <p:spPr>
           <a:xfrm>
-            <a:off x="4636007" y="1033272"/>
-            <a:ext cx="4233672" cy="3781044"/>
-          </a:xfrm>
-          <a:prstGeom prst="rect">
-            <a:avLst/>
-          </a:prstGeom>
-          <a:solidFill>
-            <a:srgbClr val="FFFFFF"/>
-          </a:solidFill>
-          <a:ln w="9525">
+            <a:off x="6876288" y="1234440"/>
+            <a:ext cx="1847088" cy="804672"/>
+          </a:xfrm>
+          <a:prstGeom prst="rect">
+            <a:avLst/>
+          </a:prstGeom>
+          <a:solidFill>
+            <a:srgbClr val="F1F7FF"/>
+          </a:solidFill>
+          <a:ln w="7620">
             <a:solidFill>
               <a:srgbClr val="BAC8DC"/>
             </a:solidFill>
@@ -9929,40 +10232,16 @@
           </a:p>
         </p:txBody>
       </p:sp>
-      <p:pic>
-        <p:nvPicPr>
-          <p:cNvPr id="12" name="Picture 11" descr="ppt_risk_panel.png"/>
-          <p:cNvPicPr>
-            <a:picLocks noChangeAspect="1"/>
-          </p:cNvPicPr>
-          <p:nvPr/>
-        </p:nvPicPr>
-        <p:blipFill>
-          <a:blip r:embed="rId3"/>
-          <a:stretch>
-            <a:fillRect/>
-          </a:stretch>
-        </p:blipFill>
-        <p:spPr>
-          <a:xfrm>
-            <a:off x="5397521" y="1191143"/>
-            <a:ext cx="2710644" cy="3227557"/>
-          </a:xfrm>
-          <a:prstGeom prst="rect">
-            <a:avLst/>
-          </a:prstGeom>
-        </p:spPr>
-      </p:pic>
-      <p:sp>
-        <p:nvSpPr>
-          <p:cNvPr id="13" name="TextBox 12"/>
+      <p:sp>
+        <p:nvSpPr>
+          <p:cNvPr id="19" name="TextBox 18"/>
           <p:cNvSpPr txBox="1"/>
           <p:nvPr/>
         </p:nvSpPr>
         <p:spPr>
           <a:xfrm>
-            <a:off x="4709159" y="4576572"/>
-            <a:ext cx="4087368" cy="219456"/>
+            <a:off x="7004303" y="1325880"/>
+            <a:ext cx="1627632" cy="640080"/>
           </a:xfrm>
           <a:prstGeom prst="rect">
             <a:avLst/>
@@ -9970,21 +10249,231 @@
           <a:noFill/>
         </p:spPr>
         <p:txBody>
-          <a:bodyPr wrap="square" anchor="ctr">
+          <a:bodyPr wrap="square">
             <a:spAutoFit/>
           </a:bodyPr>
           <a:lstStyle/>
           <a:p>
-            <a:pPr algn="ctr"/>
-            <a:r>
-              <a:rPr sz="800" b="0">
-                <a:solidFill>
-                  <a:srgbClr val="5A6273"/>
-                </a:solidFill>
-                <a:latin typeface="微软雅黑"/>
-                <ns4:rFonts xmlns:ns4="http://schemas.openxmlformats.org/wordprocessingml/2006/main" ns4:eastAsia="微软雅黑" ns4:ascii="微软雅黑" ns4:hAnsi="微软雅黑"/>
-              </a:rPr>
-              <a:t>风险面板联动</a:t>
+            <a:r>
+              <a:rPr sz="1200" b="1">
+                <a:solidFill>
+                  <a:srgbClr val="F59E0B"/>
+                </a:solidFill>
+                <a:latin typeface="微软雅黑"/>
+                <ns8:rFonts xmlns:ns8="http://schemas.openxmlformats.org/wordprocessingml/2006/main" ns8:eastAsia="微软雅黑" ns8:ascii="微软雅黑" ns8:hAnsi="微软雅黑"/>
+              </a:rPr>
+              <a:t>① 关键点</a:t>
+            </a:r>
+          </a:p>
+          <a:p>
+            <a:pPr>
+              <a:spcBef>
+                <a:spcPts val="300"/>
+              </a:spcBef>
+            </a:pPr>
+            <a:r>
+              <a:rPr sz="1100" b="0">
+                <a:solidFill>
+                  <a:srgbClr val="143278"/>
+                </a:solidFill>
+                <a:latin typeface="微软雅黑"/>
+                <ns9:rFonts xmlns:ns9="http://schemas.openxmlformats.org/wordprocessingml/2006/main" ns9:eastAsia="微软雅黑" ns9:ascii="微软雅黑" ns9:hAnsi="微软雅黑"/>
+              </a:rPr>
+              <a:t>鼻、肩、髋、踝等构成人体构型</a:t>
+            </a:r>
+          </a:p>
+        </p:txBody>
+      </p:sp>
+      <p:sp>
+        <p:nvSpPr>
+          <p:cNvPr id="20" name="Rectangle 19"/>
+          <p:cNvSpPr/>
+          <p:nvPr/>
+        </p:nvSpPr>
+        <p:spPr>
+          <a:xfrm>
+            <a:off x="6876288" y="2130552"/>
+            <a:ext cx="1847088" cy="804672"/>
+          </a:xfrm>
+          <a:prstGeom prst="rect">
+            <a:avLst/>
+          </a:prstGeom>
+          <a:solidFill>
+            <a:srgbClr val="F1F7FF"/>
+          </a:solidFill>
+          <a:ln w="7620">
+            <a:solidFill>
+              <a:srgbClr val="BAC8DC"/>
+            </a:solidFill>
+          </a:ln>
+        </p:spPr>
+        <p:style>
+          <a:lnRef idx="1">
+            <a:schemeClr val="accent1"/>
+          </a:lnRef>
+          <a:fillRef idx="3">
+            <a:schemeClr val="accent1"/>
+          </a:fillRef>
+          <a:effectRef idx="2">
+            <a:schemeClr val="accent1"/>
+          </a:effectRef>
+          <a:fontRef idx="minor">
+            <a:schemeClr val="lt1"/>
+          </a:fontRef>
+        </p:style>
+        <p:txBody>
+          <a:bodyPr rtlCol="0" anchor="ctr"/>
+          <a:lstStyle/>
+          <a:p>
+            <a:pPr algn="ctr"/>
+          </a:p>
+        </p:txBody>
+      </p:sp>
+      <p:sp>
+        <p:nvSpPr>
+          <p:cNvPr id="21" name="TextBox 20"/>
+          <p:cNvSpPr txBox="1"/>
+          <p:nvPr/>
+        </p:nvSpPr>
+        <p:spPr>
+          <a:xfrm>
+            <a:off x="7004303" y="2221992"/>
+            <a:ext cx="1627632" cy="640080"/>
+          </a:xfrm>
+          <a:prstGeom prst="rect">
+            <a:avLst/>
+          </a:prstGeom>
+          <a:noFill/>
+        </p:spPr>
+        <p:txBody>
+          <a:bodyPr wrap="square">
+            <a:spAutoFit/>
+          </a:bodyPr>
+          <a:lstStyle/>
+          <a:p>
+            <a:r>
+              <a:rPr sz="1200" b="1">
+                <a:solidFill>
+                  <a:srgbClr val="F59E0B"/>
+                </a:solidFill>
+                <a:latin typeface="微软雅黑"/>
+                <ns10:rFonts xmlns:ns10="http://schemas.openxmlformats.org/wordprocessingml/2006/main" ns10:eastAsia="微软雅黑" ns10:ascii="微软雅黑" ns10:hAnsi="微软雅黑"/>
+              </a:rPr>
+              <a:t>② 宽高比 R</a:t>
+            </a:r>
+          </a:p>
+          <a:p>
+            <a:pPr>
+              <a:spcBef>
+                <a:spcPts val="300"/>
+              </a:spcBef>
+            </a:pPr>
+            <a:r>
+              <a:rPr sz="1100" b="0">
+                <a:solidFill>
+                  <a:srgbClr val="143278"/>
+                </a:solidFill>
+                <a:latin typeface="微软雅黑"/>
+                <ns11:rFonts xmlns:ns11="http://schemas.openxmlformats.org/wordprocessingml/2006/main" ns11:eastAsia="微软雅黑" ns11:ascii="微软雅黑" ns11:hAnsi="微软雅黑"/>
+              </a:rPr>
+              <a:t>躯干投影宽高比异常 → 姿态变化</a:t>
+            </a:r>
+          </a:p>
+        </p:txBody>
+      </p:sp>
+      <p:sp>
+        <p:nvSpPr>
+          <p:cNvPr id="22" name="Rectangle 21"/>
+          <p:cNvSpPr/>
+          <p:nvPr/>
+        </p:nvSpPr>
+        <p:spPr>
+          <a:xfrm>
+            <a:off x="6876288" y="3026664"/>
+            <a:ext cx="1847088" cy="804672"/>
+          </a:xfrm>
+          <a:prstGeom prst="rect">
+            <a:avLst/>
+          </a:prstGeom>
+          <a:solidFill>
+            <a:srgbClr val="F1F7FF"/>
+          </a:solidFill>
+          <a:ln w="7620">
+            <a:solidFill>
+              <a:srgbClr val="BAC8DC"/>
+            </a:solidFill>
+          </a:ln>
+        </p:spPr>
+        <p:style>
+          <a:lnRef idx="1">
+            <a:schemeClr val="accent1"/>
+          </a:lnRef>
+          <a:fillRef idx="3">
+            <a:schemeClr val="accent1"/>
+          </a:fillRef>
+          <a:effectRef idx="2">
+            <a:schemeClr val="accent1"/>
+          </a:effectRef>
+          <a:fontRef idx="minor">
+            <a:schemeClr val="lt1"/>
+          </a:fontRef>
+        </p:style>
+        <p:txBody>
+          <a:bodyPr rtlCol="0" anchor="ctr"/>
+          <a:lstStyle/>
+          <a:p>
+            <a:pPr algn="ctr"/>
+          </a:p>
+        </p:txBody>
+      </p:sp>
+      <p:sp>
+        <p:nvSpPr>
+          <p:cNvPr id="23" name="TextBox 22"/>
+          <p:cNvSpPr txBox="1"/>
+          <p:nvPr/>
+        </p:nvSpPr>
+        <p:spPr>
+          <a:xfrm>
+            <a:off x="7004303" y="3118104"/>
+            <a:ext cx="1627632" cy="640080"/>
+          </a:xfrm>
+          <a:prstGeom prst="rect">
+            <a:avLst/>
+          </a:prstGeom>
+          <a:noFill/>
+        </p:spPr>
+        <p:txBody>
+          <a:bodyPr wrap="square">
+            <a:spAutoFit/>
+          </a:bodyPr>
+          <a:lstStyle/>
+          <a:p>
+            <a:r>
+              <a:rPr sz="1200" b="1">
+                <a:solidFill>
+                  <a:srgbClr val="F59E0B"/>
+                </a:solidFill>
+                <a:latin typeface="微软雅黑"/>
+                <ns12:rFonts xmlns:ns12="http://schemas.openxmlformats.org/wordprocessingml/2006/main" ns12:eastAsia="微软雅黑" ns12:ascii="微软雅黑" ns12:hAnsi="微软雅黑"/>
+              </a:rPr>
+              <a:t>③ 竖直速度 vy</a:t>
+            </a:r>
+          </a:p>
+          <a:p>
+            <a:pPr>
+              <a:spcBef>
+                <a:spcPts val="300"/>
+              </a:spcBef>
+            </a:pPr>
+            <a:r>
+              <a:rPr sz="1100" b="0">
+                <a:solidFill>
+                  <a:srgbClr val="143278"/>
+                </a:solidFill>
+                <a:latin typeface="微软雅黑"/>
+                <ns13:rFonts xmlns:ns13="http://schemas.openxmlformats.org/wordprocessingml/2006/main" ns13:eastAsia="微软雅黑" ns13:ascii="微软雅黑" ns13:hAnsi="微软雅黑"/>
+              </a:rPr>
+              <a:t>关键点整体下移超阈 → 判定跌倒</a:t>
             </a:r>
           </a:p>
         </p:txBody>
@@ -12712,8 +13201,8 @@
         </p:nvSpPr>
         <p:spPr>
           <a:xfrm>
-            <a:off x="4308652" y="1188926"/>
-            <a:ext cx="4321454" cy="3140550"/>
+            <a:off x="4308652" y="1328651"/>
+            <a:ext cx="4321454" cy="2861100"/>
           </a:xfrm>
           <a:prstGeom prst="rect">
             <a:avLst/>
@@ -12765,8 +13254,8 @@
         </p:blipFill>
         <p:spPr>
           <a:xfrm>
-            <a:off x="4345228" y="1225502"/>
-            <a:ext cx="4248302" cy="3067398"/>
+            <a:off x="4345228" y="1365227"/>
+            <a:ext cx="4248302" cy="2787948"/>
           </a:xfrm>
           <a:prstGeom prst="rect">
             <a:avLst/>
@@ -15663,8 +16152,8 @@
         </p:nvSpPr>
         <p:spPr>
           <a:xfrm>
-            <a:off x="4325517" y="1151595"/>
-            <a:ext cx="4287724" cy="3215213"/>
+            <a:off x="4760077" y="1151595"/>
+            <a:ext cx="3418605" cy="3215213"/>
           </a:xfrm>
           <a:prstGeom prst="rect">
             <a:avLst/>
@@ -15716,8 +16205,8 @@
         </p:blipFill>
         <p:spPr>
           <a:xfrm>
-            <a:off x="4362093" y="1188171"/>
-            <a:ext cx="4214572" cy="3142061"/>
+            <a:off x="4796653" y="1188171"/>
+            <a:ext cx="3345453" cy="3142061"/>
           </a:xfrm>
           <a:prstGeom prst="rect">
             <a:avLst/>
@@ -17471,8 +17960,8 @@
         </p:blipFill>
         <p:spPr>
           <a:xfrm>
-            <a:off x="4362602" y="1390802"/>
-            <a:ext cx="1168603" cy="1168603"/>
+            <a:off x="4300880" y="1379372"/>
+            <a:ext cx="1292047" cy="1292047"/>
           </a:xfrm>
           <a:prstGeom prst="rect">
             <a:avLst/>
@@ -17487,7 +17976,7 @@
         </p:nvSpPr>
         <p:spPr>
           <a:xfrm>
-            <a:off x="4160520" y="2679191"/>
+            <a:off x="4160520" y="2798063"/>
             <a:ext cx="1572768" cy="219456"/>
           </a:xfrm>
           <a:prstGeom prst="rect">
@@ -17531,8 +18020,8 @@
         </p:blipFill>
         <p:spPr>
           <a:xfrm>
-            <a:off x="6007150" y="2006665"/>
-            <a:ext cx="2625242" cy="1358768"/>
+            <a:off x="6036320" y="1957755"/>
+            <a:ext cx="2566903" cy="1328573"/>
           </a:xfrm>
           <a:prstGeom prst="rect">
             <a:avLst/>
@@ -17547,7 +18036,7 @@
         </p:nvSpPr>
         <p:spPr>
           <a:xfrm>
-            <a:off x="5861303" y="4329684"/>
+            <a:off x="5861303" y="4192524"/>
             <a:ext cx="2916936" cy="219456"/>
           </a:xfrm>
           <a:prstGeom prst="rect">
@@ -21934,7 +22423,7 @@
               </a:spcAft>
             </a:pPr>
             <a:r>
-              <a:rPr sz="1200" b="0">
+              <a:rPr sz="1300" b="0">
                 <a:solidFill>
                   <a:srgbClr val="1C202C"/>
                 </a:solidFill>
@@ -21977,7 +22466,7 @@
               </a:spcAft>
             </a:pPr>
             <a:r>
-              <a:rPr sz="1200" b="0">
+              <a:rPr sz="1300" b="0">
                 <a:solidFill>
                   <a:srgbClr val="1C202C"/>
                 </a:solidFill>
@@ -22020,7 +22509,7 @@
               </a:spcAft>
             </a:pPr>
             <a:r>
-              <a:rPr sz="1200" b="0">
+              <a:rPr sz="1300" b="0">
                 <a:solidFill>
                   <a:srgbClr val="1C202C"/>
                 </a:solidFill>
@@ -22063,7 +22552,7 @@
               </a:spcAft>
             </a:pPr>
             <a:r>
-              <a:rPr sz="1200" b="0">
+              <a:rPr sz="1300" b="0">
                 <a:solidFill>
                   <a:srgbClr val="1C202C"/>
                 </a:solidFill>
@@ -22199,9 +22688,97 @@
           </a:p>
         </p:txBody>
       </p:sp>
+      <p:sp>
+        <p:nvSpPr>
+          <p:cNvPr id="17" name="Rectangle 16"/>
+          <p:cNvSpPr/>
+          <p:nvPr/>
+        </p:nvSpPr>
+        <p:spPr>
+          <a:xfrm>
+            <a:off x="3968496" y="996696"/>
+            <a:ext cx="10972" cy="3854196"/>
+          </a:xfrm>
+          <a:prstGeom prst="rect">
+            <a:avLst/>
+          </a:prstGeom>
+          <a:solidFill>
+            <a:srgbClr val="BAC8DC"/>
+          </a:solidFill>
+          <a:ln>
+            <a:noFill/>
+          </a:ln>
+        </p:spPr>
+        <p:style>
+          <a:lnRef idx="1">
+            <a:schemeClr val="accent1"/>
+          </a:lnRef>
+          <a:fillRef idx="3">
+            <a:schemeClr val="accent1"/>
+          </a:fillRef>
+          <a:effectRef idx="2">
+            <a:schemeClr val="accent1"/>
+          </a:effectRef>
+          <a:fontRef idx="minor">
+            <a:schemeClr val="lt1"/>
+          </a:fontRef>
+        </p:style>
+        <p:txBody>
+          <a:bodyPr rtlCol="0" anchor="ctr"/>
+          <a:lstStyle/>
+          <a:p>
+            <a:pPr algn="ctr"/>
+          </a:p>
+        </p:txBody>
+      </p:sp>
+      <p:sp>
+        <p:nvSpPr>
+          <p:cNvPr id="18" name="Rectangle 17"/>
+          <p:cNvSpPr/>
+          <p:nvPr/>
+        </p:nvSpPr>
+        <p:spPr>
+          <a:xfrm>
+            <a:off x="4416594" y="1151595"/>
+            <a:ext cx="4105571" cy="3215213"/>
+          </a:xfrm>
+          <a:prstGeom prst="rect">
+            <a:avLst/>
+          </a:prstGeom>
+          <a:solidFill>
+            <a:srgbClr val="FCFDFF"/>
+          </a:solidFill>
+          <a:ln w="7620">
+            <a:solidFill>
+              <a:srgbClr val="BAC8DC"/>
+            </a:solidFill>
+          </a:ln>
+        </p:spPr>
+        <p:style>
+          <a:lnRef idx="1">
+            <a:schemeClr val="accent1"/>
+          </a:lnRef>
+          <a:fillRef idx="3">
+            <a:schemeClr val="accent1"/>
+          </a:fillRef>
+          <a:effectRef idx="2">
+            <a:schemeClr val="accent1"/>
+          </a:effectRef>
+          <a:fontRef idx="minor">
+            <a:schemeClr val="lt1"/>
+          </a:fontRef>
+        </p:style>
+        <p:txBody>
+          <a:bodyPr rtlCol="0" anchor="ctr"/>
+          <a:lstStyle/>
+          <a:p>
+            <a:pPr algn="ctr"/>
+          </a:p>
+        </p:txBody>
+      </p:sp>
       <p:pic>
         <p:nvPicPr>
-          <p:cNvPr id="17" name="Picture 16" descr="architecture_layers.png"/>
+          <p:cNvPr id="19" name="Picture 18" descr="project_goals_combo.png"/>
           <p:cNvPicPr>
             <a:picLocks noChangeAspect="1"/>
           </p:cNvPicPr>
@@ -22215,8 +22792,8 @@
         </p:blipFill>
         <p:spPr>
           <a:xfrm>
-            <a:off x="5473522" y="1104542"/>
-            <a:ext cx="1991714" cy="1407823"/>
+            <a:off x="4453170" y="1188171"/>
+            <a:ext cx="4032419" cy="3142061"/>
           </a:xfrm>
           <a:prstGeom prst="rect">
             <a:avLst/>
@@ -22225,13 +22802,13 @@
       </p:pic>
       <p:sp>
         <p:nvSpPr>
-          <p:cNvPr id="18" name="TextBox 17"/>
+          <p:cNvPr id="20" name="TextBox 19"/>
           <p:cNvSpPr txBox="1"/>
           <p:nvPr/>
         </p:nvSpPr>
         <p:spPr>
           <a:xfrm>
-            <a:off x="4160520" y="2620213"/>
+            <a:off x="4160520" y="4521708"/>
             <a:ext cx="4617720" cy="219456"/>
           </a:xfrm>
           <a:prstGeom prst="rect">
@@ -22254,67 +22831,7 @@
                 <a:latin typeface="微软雅黑"/>
                 <ns8:rFonts xmlns:ns8="http://schemas.openxmlformats.org/wordprocessingml/2006/main" ns8:eastAsia="微软雅黑" ns8:ascii="微软雅黑" ns8:hAnsi="微软雅黑"/>
               </a:rPr>
-              <a:t>四层架构</a:t>
-            </a:r>
-          </a:p>
-        </p:txBody>
-      </p:sp>
-      <p:pic>
-        <p:nvPicPr>
-          <p:cNvPr id="19" name="Picture 18" descr="state_machine.png"/>
-          <p:cNvPicPr>
-            <a:picLocks noChangeAspect="1"/>
-          </p:cNvPicPr>
-          <p:nvPr/>
-        </p:nvPicPr>
-        <p:blipFill>
-          <a:blip r:embed="rId3"/>
-          <a:stretch>
-            <a:fillRect/>
-          </a:stretch>
-        </p:blipFill>
-        <p:spPr>
-          <a:xfrm>
-            <a:off x="5457021" y="2885336"/>
-            <a:ext cx="2024716" cy="1407823"/>
-          </a:xfrm>
-          <a:prstGeom prst="rect">
-            <a:avLst/>
-          </a:prstGeom>
-        </p:spPr>
-      </p:pic>
-      <p:sp>
-        <p:nvSpPr>
-          <p:cNvPr id="20" name="TextBox 19"/>
-          <p:cNvSpPr txBox="1"/>
-          <p:nvPr/>
-        </p:nvSpPr>
-        <p:spPr>
-          <a:xfrm>
-            <a:off x="4160520" y="4401007"/>
-            <a:ext cx="4617720" cy="219456"/>
-          </a:xfrm>
-          <a:prstGeom prst="rect">
-            <a:avLst/>
-          </a:prstGeom>
-          <a:noFill/>
-        </p:spPr>
-        <p:txBody>
-          <a:bodyPr wrap="square" anchor="ctr">
-            <a:spAutoFit/>
-          </a:bodyPr>
-          <a:lstStyle/>
-          <a:p>
-            <a:pPr algn="ctr"/>
-            <a:r>
-              <a:rPr sz="800" b="0">
-                <a:solidFill>
-                  <a:srgbClr val="5A6273"/>
-                </a:solidFill>
-                <a:latin typeface="微软雅黑"/>
-                <ns9:rFonts xmlns:ns9="http://schemas.openxmlformats.org/wordprocessingml/2006/main" ns9:eastAsia="微软雅黑" ns9:ascii="微软雅黑" ns9:hAnsi="微软雅黑"/>
-              </a:rPr>
-              <a:t>状态机概览</a:t>
+              <a:t>架构与状态机总览</a:t>
             </a:r>
           </a:p>
         </p:txBody>

--- a/docs/答辩_CareCompanion.pptx
+++ b/docs/答辩_CareCompanion.pptx
@@ -5754,8 +5754,8 @@
         </p:nvSpPr>
         <p:spPr>
           <a:xfrm>
-            <a:off x="4969110" y="1151595"/>
-            <a:ext cx="3000538" cy="3215213"/>
+            <a:off x="4673166" y="1151595"/>
+            <a:ext cx="3592426" cy="3215213"/>
           </a:xfrm>
           <a:prstGeom prst="rect">
             <a:avLst/>
@@ -5807,8 +5807,8 @@
         </p:blipFill>
         <p:spPr>
           <a:xfrm>
-            <a:off x="5005686" y="1188171"/>
-            <a:ext cx="2927386" cy="3142061"/>
+            <a:off x="4709742" y="1188171"/>
+            <a:ext cx="3519274" cy="3142061"/>
           </a:xfrm>
           <a:prstGeom prst="rect">
             <a:avLst/>
@@ -8741,8 +8741,8 @@
         </p:nvSpPr>
         <p:spPr>
           <a:xfrm>
-            <a:off x="4694986" y="1819631"/>
-            <a:ext cx="4097426" cy="2171748"/>
+            <a:off x="4503008" y="1719518"/>
+            <a:ext cx="4481382" cy="2371975"/>
           </a:xfrm>
           <a:prstGeom prst="rect">
             <a:avLst/>
@@ -8794,8 +8794,8 @@
         </p:blipFill>
         <p:spPr>
           <a:xfrm>
-            <a:off x="4731562" y="1856207"/>
-            <a:ext cx="4024274" cy="2098596"/>
+            <a:off x="4539584" y="1756094"/>
+            <a:ext cx="4408230" cy="2298823"/>
           </a:xfrm>
           <a:prstGeom prst="rect">
             <a:avLst/>
@@ -15430,8 +15430,8 @@
         </p:nvSpPr>
         <p:spPr>
           <a:xfrm>
-            <a:off x="4694986" y="2415020"/>
-            <a:ext cx="4097426" cy="980971"/>
+            <a:off x="4503008" y="1719518"/>
+            <a:ext cx="4481382" cy="2371975"/>
           </a:xfrm>
           <a:prstGeom prst="rect">
             <a:avLst/>
@@ -15469,7 +15469,7 @@
       </p:sp>
       <p:pic>
         <p:nvPicPr>
-          <p:cNvPr id="19" name="Picture 18" descr="ppt_robot_commands.png"/>
+          <p:cNvPr id="19" name="Picture 18" descr="ppt_full_dashboard.png"/>
           <p:cNvPicPr>
             <a:picLocks noChangeAspect="1"/>
           </p:cNvPicPr>
@@ -15483,8 +15483,8 @@
         </p:blipFill>
         <p:spPr>
           <a:xfrm>
-            <a:off x="4731562" y="2451596"/>
-            <a:ext cx="4024274" cy="907819"/>
+            <a:off x="4539584" y="1756094"/>
+            <a:ext cx="4408230" cy="2298823"/>
           </a:xfrm>
           <a:prstGeom prst="rect">
             <a:avLst/>
@@ -16152,8 +16152,8 @@
         </p:nvSpPr>
         <p:spPr>
           <a:xfrm>
-            <a:off x="4760077" y="1151595"/>
-            <a:ext cx="3418605" cy="3215213"/>
+            <a:off x="4875814" y="1151595"/>
+            <a:ext cx="3187131" cy="3215213"/>
           </a:xfrm>
           <a:prstGeom prst="rect">
             <a:avLst/>
@@ -16205,8 +16205,8 @@
         </p:blipFill>
         <p:spPr>
           <a:xfrm>
-            <a:off x="4796653" y="1188171"/>
-            <a:ext cx="3345453" cy="3142061"/>
+            <a:off x="4912390" y="1188171"/>
+            <a:ext cx="3113979" cy="3142061"/>
           </a:xfrm>
           <a:prstGeom prst="rect">
             <a:avLst/>
@@ -16244,7 +16244,7 @@
                 <a:latin typeface="微软雅黑"/>
                 <ns8:rFonts xmlns:ns8="http://schemas.openxmlformats.org/wordprocessingml/2006/main" ns8:eastAsia="微软雅黑" ns8:ascii="微软雅黑" ns8:hAnsi="微软雅黑"/>
               </a:rPr>
-              <a:t>创新维度自评</a:t>
+              <a:t>实验结果</a:t>
             </a:r>
           </a:p>
         </p:txBody>
@@ -17960,8 +17960,8 @@
         </p:blipFill>
         <p:spPr>
           <a:xfrm>
-            <a:off x="4300880" y="1379372"/>
-            <a:ext cx="1292047" cy="1292047"/>
+            <a:off x="4280306" y="1203350"/>
+            <a:ext cx="1388059" cy="1388059"/>
           </a:xfrm>
           <a:prstGeom prst="rect">
             <a:avLst/>
@@ -17976,8 +17976,8 @@
         </p:nvSpPr>
         <p:spPr>
           <a:xfrm>
-            <a:off x="4160520" y="2798063"/>
-            <a:ext cx="1572768" cy="219456"/>
+            <a:off x="4160520" y="2585923"/>
+            <a:ext cx="1627632" cy="219456"/>
           </a:xfrm>
           <a:prstGeom prst="rect">
             <a:avLst/>
@@ -17992,7 +17992,7 @@
           <a:p>
             <a:pPr algn="ctr"/>
             <a:r>
-              <a:rPr sz="800" b="0">
+              <a:rPr sz="900" b="0">
                 <a:solidFill>
                   <a:srgbClr val="5A6273"/>
                 </a:solidFill>
@@ -18020,8 +18020,8 @@
         </p:blipFill>
         <p:spPr>
           <a:xfrm>
-            <a:off x="6036320" y="1957755"/>
-            <a:ext cx="2566903" cy="1328573"/>
+            <a:off x="6019769" y="2012554"/>
+            <a:ext cx="2673156" cy="1383567"/>
           </a:xfrm>
           <a:prstGeom prst="rect">
             <a:avLst/>
@@ -18036,8 +18036,8 @@
         </p:nvSpPr>
         <p:spPr>
           <a:xfrm>
-            <a:off x="5861303" y="4192524"/>
-            <a:ext cx="2916936" cy="219456"/>
+            <a:off x="5934456" y="2581431"/>
+            <a:ext cx="2843783" cy="219456"/>
           </a:xfrm>
           <a:prstGeom prst="rect">
             <a:avLst/>
@@ -18052,7 +18052,7 @@
           <a:p>
             <a:pPr algn="ctr"/>
             <a:r>
-              <a:rPr sz="800" b="0">
+              <a:rPr sz="900" b="0">
                 <a:solidFill>
                   <a:srgbClr val="5A6273"/>
                 </a:solidFill>
@@ -19641,54 +19641,9 @@
           </a:p>
         </p:txBody>
       </p:sp>
-      <p:sp>
-        <p:nvSpPr>
-          <p:cNvPr id="11" name="Rectangle 10"/>
-          <p:cNvSpPr/>
-          <p:nvPr/>
-        </p:nvSpPr>
-        <p:spPr>
-          <a:xfrm>
-            <a:off x="2706110" y="3140964"/>
-            <a:ext cx="2177299" cy="1143000"/>
-          </a:xfrm>
-          <a:prstGeom prst="rect">
-            <a:avLst/>
-          </a:prstGeom>
-          <a:solidFill>
-            <a:srgbClr val="FCFDFF"/>
-          </a:solidFill>
-          <a:ln w="7620">
-            <a:solidFill>
-              <a:srgbClr val="BAC8DC"/>
-            </a:solidFill>
-          </a:ln>
-        </p:spPr>
-        <p:style>
-          <a:lnRef idx="1">
-            <a:schemeClr val="accent1"/>
-          </a:lnRef>
-          <a:fillRef idx="3">
-            <a:schemeClr val="accent1"/>
-          </a:fillRef>
-          <a:effectRef idx="2">
-            <a:schemeClr val="accent1"/>
-          </a:effectRef>
-          <a:fontRef idx="minor">
-            <a:schemeClr val="lt1"/>
-          </a:fontRef>
-        </p:style>
-        <p:txBody>
-          <a:bodyPr rtlCol="0" anchor="ctr"/>
-          <a:lstStyle/>
-          <a:p>
-            <a:pPr algn="ctr"/>
-          </a:p>
-        </p:txBody>
-      </p:sp>
       <p:pic>
         <p:nvPicPr>
-          <p:cNvPr id="12" name="Picture 11" descr="ppt_full_dashboard.png"/>
+          <p:cNvPr id="11" name="Picture 10" descr="ppt_full_dashboard.png"/>
           <p:cNvPicPr>
             <a:picLocks noChangeAspect="1"/>
           </p:cNvPicPr>
@@ -19702,8 +19657,8 @@
         </p:blipFill>
         <p:spPr>
           <a:xfrm>
-            <a:off x="2742686" y="3177540"/>
-            <a:ext cx="2104147" cy="1097280"/>
+            <a:off x="2645324" y="3116640"/>
+            <a:ext cx="2390311" cy="1246510"/>
           </a:xfrm>
           <a:prstGeom prst="rect">
             <a:avLst/>
@@ -19712,14 +19667,14 @@
       </p:pic>
       <p:sp>
         <p:nvSpPr>
-          <p:cNvPr id="13" name="TextBox 12"/>
+          <p:cNvPr id="12" name="TextBox 11"/>
           <p:cNvSpPr txBox="1"/>
           <p:nvPr/>
         </p:nvSpPr>
         <p:spPr>
           <a:xfrm>
-            <a:off x="2263139" y="4352544"/>
-            <a:ext cx="3063240" cy="219456"/>
+            <a:off x="2354580" y="4382902"/>
+            <a:ext cx="2971800" cy="219456"/>
           </a:xfrm>
           <a:prstGeom prst="rect">
             <a:avLst/>
@@ -19734,7 +19689,7 @@
           <a:p>
             <a:pPr algn="ctr"/>
             <a:r>
-              <a:rPr sz="800" b="0">
+              <a:rPr sz="900" b="0">
                 <a:solidFill>
                   <a:srgbClr val="5A6273"/>
                 </a:solidFill>
@@ -19748,7 +19703,7 @@
       </p:sp>
       <p:pic>
         <p:nvPicPr>
-          <p:cNvPr id="14" name="Picture 13" descr="ppt_demo_qr.png"/>
+          <p:cNvPr id="13" name="Picture 12" descr="ppt_demo_qr.png"/>
           <p:cNvPicPr>
             <a:picLocks noChangeAspect="1"/>
           </p:cNvPicPr>
@@ -19762,8 +19717,8 @@
         </p:blipFill>
         <p:spPr>
           <a:xfrm>
-            <a:off x="5783579" y="3246120"/>
-            <a:ext cx="960120" cy="960120"/>
+            <a:off x="5618988" y="3182112"/>
+            <a:ext cx="1170432" cy="1170432"/>
           </a:xfrm>
           <a:prstGeom prst="rect">
             <a:avLst/>
@@ -19772,14 +19727,14 @@
       </p:pic>
       <p:sp>
         <p:nvSpPr>
-          <p:cNvPr id="15" name="TextBox 14"/>
+          <p:cNvPr id="14" name="TextBox 13"/>
           <p:cNvSpPr txBox="1"/>
           <p:nvPr/>
         </p:nvSpPr>
         <p:spPr>
           <a:xfrm>
-            <a:off x="5646419" y="4261104"/>
-            <a:ext cx="1234440" cy="219456"/>
+            <a:off x="5618988" y="4361688"/>
+            <a:ext cx="1170432" cy="219456"/>
           </a:xfrm>
           <a:prstGeom prst="rect">
             <a:avLst/>
@@ -19794,14 +19749,14 @@
           <a:p>
             <a:pPr algn="ctr"/>
             <a:r>
-              <a:rPr sz="800" b="0">
+              <a:rPr sz="900" b="0">
                 <a:solidFill>
                   <a:srgbClr val="5A6273"/>
                 </a:solidFill>
                 <a:latin typeface="微软雅黑"/>
                 <ns8:rFonts xmlns:ns8="http://schemas.openxmlformats.org/wordprocessingml/2006/main" ns8:eastAsia="微软雅黑" ns8:ascii="微软雅黑" ns8:hAnsi="微软雅黑"/>
               </a:rPr>
-              <a:t>GitHub</a:t>
+              <a:t>GitHub 仓库</a:t>
             </a:r>
           </a:p>
         </p:txBody>
@@ -20472,8 +20427,8 @@
         </p:nvSpPr>
         <p:spPr>
           <a:xfrm>
-            <a:off x="4803525" y="1249756"/>
-            <a:ext cx="3880348" cy="3311499"/>
+            <a:off x="4613757" y="1088341"/>
+            <a:ext cx="4259885" cy="3634328"/>
           </a:xfrm>
           <a:prstGeom prst="rect">
             <a:avLst/>
@@ -20525,8 +20480,8 @@
         </p:blipFill>
         <p:spPr>
           <a:xfrm>
-            <a:off x="4840101" y="1286332"/>
-            <a:ext cx="3807196" cy="3238347"/>
+            <a:off x="4650333" y="1124917"/>
+            <a:ext cx="4186733" cy="3561176"/>
           </a:xfrm>
           <a:prstGeom prst="rect">
             <a:avLst/>
@@ -22739,8 +22694,8 @@
         </p:nvSpPr>
         <p:spPr>
           <a:xfrm>
-            <a:off x="4416594" y="1151595"/>
-            <a:ext cx="4105571" cy="3215213"/>
+            <a:off x="4308652" y="1161748"/>
+            <a:ext cx="4321454" cy="3194907"/>
           </a:xfrm>
           <a:prstGeom prst="rect">
             <a:avLst/>
@@ -22792,8 +22747,8 @@
         </p:blipFill>
         <p:spPr>
           <a:xfrm>
-            <a:off x="4453170" y="1188171"/>
-            <a:ext cx="4032419" cy="3142061"/>
+            <a:off x="4345228" y="1198324"/>
+            <a:ext cx="4248302" cy="3121755"/>
           </a:xfrm>
           <a:prstGeom prst="rect">
             <a:avLst/>
@@ -23502,8 +23457,8 @@
         </p:nvSpPr>
         <p:spPr>
           <a:xfrm>
-            <a:off x="4694986" y="1375751"/>
-            <a:ext cx="4097426" cy="3059508"/>
+            <a:off x="4503008" y="1233287"/>
+            <a:ext cx="4481382" cy="3344436"/>
           </a:xfrm>
           <a:prstGeom prst="rect">
             <a:avLst/>
@@ -23555,8 +23510,8 @@
         </p:blipFill>
         <p:spPr>
           <a:xfrm>
-            <a:off x="4731562" y="1412327"/>
-            <a:ext cx="4024274" cy="2986356"/>
+            <a:off x="4539584" y="1269863"/>
+            <a:ext cx="4408230" cy="3271284"/>
           </a:xfrm>
           <a:prstGeom prst="rect">
             <a:avLst/>

--- a/docs/答辩_CareCompanion.pptx
+++ b/docs/答辩_CareCompanion.pptx
@@ -4324,8 +4324,8 @@
         </p:nvSpPr>
         <p:spPr>
           <a:xfrm>
-            <a:off x="4308652" y="1245662"/>
-            <a:ext cx="4321454" cy="3027078"/>
+            <a:off x="4308652" y="1168319"/>
+            <a:ext cx="4321454" cy="3181765"/>
           </a:xfrm>
           <a:prstGeom prst="rect">
             <a:avLst/>
@@ -4377,8 +4377,8 @@
         </p:blipFill>
         <p:spPr>
           <a:xfrm>
-            <a:off x="4345228" y="1282238"/>
-            <a:ext cx="4248302" cy="2953926"/>
+            <a:off x="4345228" y="1204895"/>
+            <a:ext cx="4248302" cy="3108613"/>
           </a:xfrm>
           <a:prstGeom prst="rect">
             <a:avLst/>
@@ -5039,8 +5039,8 @@
         </p:nvSpPr>
         <p:spPr>
           <a:xfrm>
-            <a:off x="4315756" y="1151595"/>
-            <a:ext cx="4307247" cy="3215213"/>
+            <a:off x="4317727" y="1151595"/>
+            <a:ext cx="4303304" cy="3215213"/>
           </a:xfrm>
           <a:prstGeom prst="rect">
             <a:avLst/>
@@ -5092,8 +5092,8 @@
         </p:blipFill>
         <p:spPr>
           <a:xfrm>
-            <a:off x="4352332" y="1188171"/>
-            <a:ext cx="4234095" cy="3142061"/>
+            <a:off x="4354303" y="1188171"/>
+            <a:ext cx="4230152" cy="3142061"/>
           </a:xfrm>
           <a:prstGeom prst="rect">
             <a:avLst/>
@@ -5754,8 +5754,8 @@
         </p:nvSpPr>
         <p:spPr>
           <a:xfrm>
-            <a:off x="4673166" y="1151595"/>
-            <a:ext cx="3592426" cy="3215213"/>
+            <a:off x="4675239" y="1151595"/>
+            <a:ext cx="3588281" cy="3215213"/>
           </a:xfrm>
           <a:prstGeom prst="rect">
             <a:avLst/>
@@ -5807,8 +5807,8 @@
         </p:blipFill>
         <p:spPr>
           <a:xfrm>
-            <a:off x="4709742" y="1188171"/>
-            <a:ext cx="3519274" cy="3142061"/>
+            <a:off x="4711815" y="1188171"/>
+            <a:ext cx="3515129" cy="3142061"/>
           </a:xfrm>
           <a:prstGeom prst="rect">
             <a:avLst/>
@@ -6469,8 +6469,8 @@
         </p:nvSpPr>
         <p:spPr>
           <a:xfrm>
-            <a:off x="4540380" y="1151595"/>
-            <a:ext cx="3857998" cy="3215213"/>
+            <a:off x="4539971" y="1151595"/>
+            <a:ext cx="3858816" cy="3215213"/>
           </a:xfrm>
           <a:prstGeom prst="rect">
             <a:avLst/>
@@ -6522,8 +6522,8 @@
         </p:blipFill>
         <p:spPr>
           <a:xfrm>
-            <a:off x="4576956" y="1188171"/>
-            <a:ext cx="3784846" cy="3142061"/>
+            <a:off x="4576547" y="1188171"/>
+            <a:ext cx="3785664" cy="3142061"/>
           </a:xfrm>
           <a:prstGeom prst="rect">
             <a:avLst/>
@@ -7184,8 +7184,8 @@
         </p:nvSpPr>
         <p:spPr>
           <a:xfrm>
-            <a:off x="4308652" y="1539913"/>
-            <a:ext cx="4321454" cy="2438576"/>
+            <a:off x="4308652" y="1539215"/>
+            <a:ext cx="4321454" cy="2439973"/>
           </a:xfrm>
           <a:prstGeom prst="rect">
             <a:avLst/>
@@ -7237,8 +7237,8 @@
         </p:blipFill>
         <p:spPr>
           <a:xfrm>
-            <a:off x="4345228" y="1576489"/>
-            <a:ext cx="4248302" cy="2365424"/>
+            <a:off x="4345228" y="1575791"/>
+            <a:ext cx="4248302" cy="2366821"/>
           </a:xfrm>
           <a:prstGeom prst="rect">
             <a:avLst/>
@@ -7978,8 +7978,8 @@
         </p:nvSpPr>
         <p:spPr>
           <a:xfrm>
-            <a:off x="4308652" y="1302920"/>
-            <a:ext cx="4321454" cy="2912562"/>
+            <a:off x="4308652" y="1301375"/>
+            <a:ext cx="4321454" cy="2915652"/>
           </a:xfrm>
           <a:prstGeom prst="rect">
             <a:avLst/>
@@ -8031,8 +8031,8 @@
         </p:blipFill>
         <p:spPr>
           <a:xfrm>
-            <a:off x="4345228" y="1339496"/>
-            <a:ext cx="4248302" cy="2839410"/>
+            <a:off x="4345228" y="1337951"/>
+            <a:ext cx="4248302" cy="2842500"/>
           </a:xfrm>
           <a:prstGeom prst="rect">
             <a:avLst/>
@@ -10749,7 +10749,7 @@
         <p:spPr>
           <a:xfrm>
             <a:off x="274320" y="1033272"/>
-            <a:ext cx="4233672" cy="3781044"/>
+            <a:ext cx="4242816" cy="3799332"/>
           </a:xfrm>
           <a:prstGeom prst="rect">
             <a:avLst/>
@@ -10801,8 +10801,8 @@
         </p:blipFill>
         <p:spPr>
           <a:xfrm>
-            <a:off x="1035833" y="1191143"/>
-            <a:ext cx="2710644" cy="3227557"/>
+            <a:off x="960154" y="1078992"/>
+            <a:ext cx="2871146" cy="3418667"/>
           </a:xfrm>
           <a:prstGeom prst="rect">
             <a:avLst/>
@@ -10817,8 +10817,8 @@
         </p:nvSpPr>
         <p:spPr>
           <a:xfrm>
-            <a:off x="347472" y="4576572"/>
-            <a:ext cx="4087368" cy="219456"/>
+            <a:off x="320040" y="4543379"/>
+            <a:ext cx="4151376" cy="219456"/>
           </a:xfrm>
           <a:prstGeom prst="rect">
             <a:avLst/>
@@ -10833,7 +10833,7 @@
           <a:p>
             <a:pPr algn="ctr"/>
             <a:r>
-              <a:rPr sz="800" b="0">
+              <a:rPr sz="900" b="0">
                 <a:solidFill>
                   <a:srgbClr val="5A6273"/>
                 </a:solidFill>
@@ -10853,8 +10853,8 @@
         </p:nvSpPr>
         <p:spPr>
           <a:xfrm>
-            <a:off x="4636007" y="1033272"/>
-            <a:ext cx="4233672" cy="3781044"/>
+            <a:off x="4626864" y="1033272"/>
+            <a:ext cx="4242816" cy="3799332"/>
           </a:xfrm>
           <a:prstGeom prst="rect">
             <a:avLst/>
@@ -10906,8 +10906,8 @@
         </p:blipFill>
         <p:spPr>
           <a:xfrm>
-            <a:off x="4855588" y="1191143"/>
-            <a:ext cx="3794510" cy="3227557"/>
+            <a:off x="4738676" y="1078992"/>
+            <a:ext cx="4019190" cy="3418667"/>
           </a:xfrm>
           <a:prstGeom prst="rect">
             <a:avLst/>
@@ -10922,8 +10922,8 @@
         </p:nvSpPr>
         <p:spPr>
           <a:xfrm>
-            <a:off x="4709159" y="4576572"/>
-            <a:ext cx="4087368" cy="219456"/>
+            <a:off x="4672584" y="4543379"/>
+            <a:ext cx="4151376" cy="219456"/>
           </a:xfrm>
           <a:prstGeom prst="rect">
             <a:avLst/>
@@ -10938,7 +10938,7 @@
           <a:p>
             <a:pPr algn="ctr"/>
             <a:r>
-              <a:rPr sz="800" b="0">
+              <a:rPr sz="900" b="0">
                 <a:solidFill>
                   <a:srgbClr val="5A6273"/>
                 </a:solidFill>
@@ -11936,7 +11936,7 @@
         <p:spPr>
           <a:xfrm>
             <a:off x="274320" y="1033272"/>
-            <a:ext cx="4233672" cy="3781044"/>
+            <a:ext cx="4242816" cy="3799332"/>
           </a:xfrm>
           <a:prstGeom prst="rect">
             <a:avLst/>
@@ -11988,8 +11988,8 @@
         </p:blipFill>
         <p:spPr>
           <a:xfrm>
-            <a:off x="470093" y="1771225"/>
-            <a:ext cx="3842125" cy="2067393"/>
+            <a:off x="361553" y="1078992"/>
+            <a:ext cx="4068348" cy="2189121"/>
           </a:xfrm>
           <a:prstGeom prst="rect">
             <a:avLst/>
@@ -12004,8 +12004,8 @@
         </p:nvSpPr>
         <p:spPr>
           <a:xfrm>
-            <a:off x="347472" y="4576572"/>
-            <a:ext cx="4087368" cy="219456"/>
+            <a:off x="320040" y="3313833"/>
+            <a:ext cx="4151376" cy="219456"/>
           </a:xfrm>
           <a:prstGeom prst="rect">
             <a:avLst/>
@@ -12020,7 +12020,7 @@
           <a:p>
             <a:pPr algn="ctr"/>
             <a:r>
-              <a:rPr sz="800" b="0">
+              <a:rPr sz="900" b="0">
                 <a:solidFill>
                   <a:srgbClr val="5A6273"/>
                 </a:solidFill>
@@ -12040,8 +12040,8 @@
         </p:nvSpPr>
         <p:spPr>
           <a:xfrm>
-            <a:off x="4636007" y="1033272"/>
-            <a:ext cx="4233672" cy="3781044"/>
+            <a:off x="4626864" y="1033272"/>
+            <a:ext cx="4242816" cy="3799332"/>
           </a:xfrm>
           <a:prstGeom prst="rect">
             <a:avLst/>
@@ -12093,8 +12093,8 @@
         </p:blipFill>
         <p:spPr>
           <a:xfrm>
-            <a:off x="4831781" y="2371557"/>
-            <a:ext cx="3842125" cy="866729"/>
+            <a:off x="4714097" y="1078992"/>
+            <a:ext cx="4068348" cy="917762"/>
           </a:xfrm>
           <a:prstGeom prst="rect">
             <a:avLst/>
@@ -12109,8 +12109,8 @@
         </p:nvSpPr>
         <p:spPr>
           <a:xfrm>
-            <a:off x="4709159" y="4576572"/>
-            <a:ext cx="4087368" cy="219456"/>
+            <a:off x="4672584" y="2042474"/>
+            <a:ext cx="4151376" cy="219456"/>
           </a:xfrm>
           <a:prstGeom prst="rect">
             <a:avLst/>
@@ -12125,7 +12125,7 @@
           <a:p>
             <a:pPr algn="ctr"/>
             <a:r>
-              <a:rPr sz="800" b="0">
+              <a:rPr sz="900" b="0">
                 <a:solidFill>
                   <a:srgbClr val="5A6273"/>
                 </a:solidFill>
@@ -16152,8 +16152,8 @@
         </p:nvSpPr>
         <p:spPr>
           <a:xfrm>
-            <a:off x="4875814" y="1151595"/>
-            <a:ext cx="3187131" cy="3215213"/>
+            <a:off x="4308652" y="1202355"/>
+            <a:ext cx="4321454" cy="3113692"/>
           </a:xfrm>
           <a:prstGeom prst="rect">
             <a:avLst/>
@@ -16205,8 +16205,8 @@
         </p:blipFill>
         <p:spPr>
           <a:xfrm>
-            <a:off x="4912390" y="1188171"/>
-            <a:ext cx="3113979" cy="3142061"/>
+            <a:off x="4345228" y="1238931"/>
+            <a:ext cx="4248302" cy="3040540"/>
           </a:xfrm>
           <a:prstGeom prst="rect">
             <a:avLst/>
@@ -16910,8 +16910,8 @@
         </p:nvSpPr>
         <p:spPr>
           <a:xfrm>
-            <a:off x="4308652" y="1183788"/>
-            <a:ext cx="4321454" cy="3150826"/>
+            <a:off x="4308652" y="1186781"/>
+            <a:ext cx="4321454" cy="3144841"/>
           </a:xfrm>
           <a:prstGeom prst="rect">
             <a:avLst/>
@@ -16963,8 +16963,8 @@
         </p:blipFill>
         <p:spPr>
           <a:xfrm>
-            <a:off x="4345228" y="1220364"/>
-            <a:ext cx="4248302" cy="3077674"/>
+            <a:off x="4345228" y="1223357"/>
+            <a:ext cx="4248302" cy="3071689"/>
           </a:xfrm>
           <a:prstGeom prst="rect">
             <a:avLst/>
@@ -17960,8 +17960,8 @@
         </p:blipFill>
         <p:spPr>
           <a:xfrm>
-            <a:off x="4280306" y="1203350"/>
-            <a:ext cx="1388059" cy="1388059"/>
+            <a:off x="4287393" y="1124712"/>
+            <a:ext cx="1346454" cy="1346454"/>
           </a:xfrm>
           <a:prstGeom prst="rect">
             <a:avLst/>
@@ -17976,8 +17976,8 @@
         </p:nvSpPr>
         <p:spPr>
           <a:xfrm>
-            <a:off x="4160520" y="2585923"/>
-            <a:ext cx="1627632" cy="219456"/>
+            <a:off x="4160520" y="2507742"/>
+            <a:ext cx="1600200" cy="219456"/>
           </a:xfrm>
           <a:prstGeom prst="rect">
             <a:avLst/>
@@ -18020,8 +18020,8 @@
         </p:blipFill>
         <p:spPr>
           <a:xfrm>
-            <a:off x="6019769" y="2012554"/>
-            <a:ext cx="2673156" cy="1383567"/>
+            <a:off x="5935736" y="1124712"/>
+            <a:ext cx="2813791" cy="1456357"/>
           </a:xfrm>
           <a:prstGeom prst="rect">
             <a:avLst/>
@@ -18036,8 +18036,8 @@
         </p:nvSpPr>
         <p:spPr>
           <a:xfrm>
-            <a:off x="5934456" y="2581431"/>
-            <a:ext cx="2843783" cy="219456"/>
+            <a:off x="5907024" y="2617645"/>
+            <a:ext cx="2871215" cy="219456"/>
           </a:xfrm>
           <a:prstGeom prst="rect">
             <a:avLst/>
@@ -19657,7 +19657,7 @@
         </p:blipFill>
         <p:spPr>
           <a:xfrm>
-            <a:off x="2645324" y="3116640"/>
+            <a:off x="2645324" y="3090672"/>
             <a:ext cx="2390311" cy="1246510"/>
           </a:xfrm>
           <a:prstGeom prst="rect">
@@ -19717,7 +19717,7 @@
         </p:blipFill>
         <p:spPr>
           <a:xfrm>
-            <a:off x="5618988" y="3182112"/>
+            <a:off x="5618988" y="3145536"/>
             <a:ext cx="1170432" cy="1170432"/>
           </a:xfrm>
           <a:prstGeom prst="rect">
@@ -21185,8 +21185,8 @@
         </p:nvSpPr>
         <p:spPr>
           <a:xfrm>
-            <a:off x="4308652" y="1223033"/>
-            <a:ext cx="4321454" cy="3072336"/>
+            <a:off x="4308652" y="1222555"/>
+            <a:ext cx="4321454" cy="3073292"/>
           </a:xfrm>
           <a:prstGeom prst="rect">
             <a:avLst/>
@@ -21238,8 +21238,8 @@
         </p:blipFill>
         <p:spPr>
           <a:xfrm>
-            <a:off x="4345228" y="1259609"/>
-            <a:ext cx="4248302" cy="2999184"/>
+            <a:off x="4345228" y="1259131"/>
+            <a:ext cx="4248302" cy="3000140"/>
           </a:xfrm>
           <a:prstGeom prst="rect">
             <a:avLst/>
@@ -22694,8 +22694,8 @@
         </p:nvSpPr>
         <p:spPr>
           <a:xfrm>
-            <a:off x="4308652" y="1161748"/>
-            <a:ext cx="4321454" cy="3194907"/>
+            <a:off x="4330280" y="1151595"/>
+            <a:ext cx="4278199" cy="3215213"/>
           </a:xfrm>
           <a:prstGeom prst="rect">
             <a:avLst/>
@@ -22747,8 +22747,8 @@
         </p:blipFill>
         <p:spPr>
           <a:xfrm>
-            <a:off x="4345228" y="1198324"/>
-            <a:ext cx="4248302" cy="3121755"/>
+            <a:off x="4366856" y="1188171"/>
+            <a:ext cx="4205047" cy="3142061"/>
           </a:xfrm>
           <a:prstGeom prst="rect">
             <a:avLst/>
@@ -23457,8 +23457,8 @@
         </p:nvSpPr>
         <p:spPr>
           <a:xfrm>
-            <a:off x="4503008" y="1233287"/>
-            <a:ext cx="4481382" cy="3344436"/>
+            <a:off x="4503008" y="1231763"/>
+            <a:ext cx="4481382" cy="3347485"/>
           </a:xfrm>
           <a:prstGeom prst="rect">
             <a:avLst/>
@@ -23510,8 +23510,8 @@
         </p:blipFill>
         <p:spPr>
           <a:xfrm>
-            <a:off x="4539584" y="1269863"/>
-            <a:ext cx="4408230" cy="3271284"/>
+            <a:off x="4539584" y="1268339"/>
+            <a:ext cx="4408230" cy="3274333"/>
           </a:xfrm>
           <a:prstGeom prst="rect">
             <a:avLst/>

--- a/docs/答辩_CareCompanion.pptx
+++ b/docs/答辩_CareCompanion.pptx
@@ -10801,8 +10801,8 @@
         </p:blipFill>
         <p:spPr>
           <a:xfrm>
-            <a:off x="960154" y="1078992"/>
-            <a:ext cx="2871146" cy="3418667"/>
+            <a:off x="961575" y="1088136"/>
+            <a:ext cx="2868304" cy="3415284"/>
           </a:xfrm>
           <a:prstGeom prst="rect">
             <a:avLst/>
@@ -10817,7 +10817,7 @@
         </p:nvSpPr>
         <p:spPr>
           <a:xfrm>
-            <a:off x="320040" y="4543379"/>
+            <a:off x="320040" y="4558284"/>
             <a:ext cx="4151376" cy="219456"/>
           </a:xfrm>
           <a:prstGeom prst="rect">
@@ -10906,8 +10906,8 @@
         </p:blipFill>
         <p:spPr>
           <a:xfrm>
-            <a:off x="4738676" y="1078992"/>
-            <a:ext cx="4019190" cy="3418667"/>
+            <a:off x="4740665" y="1088136"/>
+            <a:ext cx="4015213" cy="3415284"/>
           </a:xfrm>
           <a:prstGeom prst="rect">
             <a:avLst/>
@@ -10922,7 +10922,7 @@
         </p:nvSpPr>
         <p:spPr>
           <a:xfrm>
-            <a:off x="4672584" y="4543379"/>
+            <a:off x="4672584" y="4558284"/>
             <a:ext cx="4151376" cy="219456"/>
           </a:xfrm>
           <a:prstGeom prst="rect">
@@ -11988,7 +11988,7 @@
         </p:blipFill>
         <p:spPr>
           <a:xfrm>
-            <a:off x="361553" y="1078992"/>
+            <a:off x="361553" y="1701217"/>
             <a:ext cx="4068348" cy="2189121"/>
           </a:xfrm>
           <a:prstGeom prst="rect">
@@ -12004,7 +12004,7 @@
         </p:nvSpPr>
         <p:spPr>
           <a:xfrm>
-            <a:off x="320040" y="3313833"/>
+            <a:off x="320040" y="3945202"/>
             <a:ext cx="4151376" cy="219456"/>
           </a:xfrm>
           <a:prstGeom prst="rect">
@@ -12093,7 +12093,7 @@
         </p:blipFill>
         <p:spPr>
           <a:xfrm>
-            <a:off x="4714097" y="1078992"/>
+            <a:off x="4714097" y="2336896"/>
             <a:ext cx="4068348" cy="917762"/>
           </a:xfrm>
           <a:prstGeom prst="rect">
@@ -12109,7 +12109,7 @@
         </p:nvSpPr>
         <p:spPr>
           <a:xfrm>
-            <a:off x="4672584" y="2042474"/>
+            <a:off x="4672584" y="3309523"/>
             <a:ext cx="4151376" cy="219456"/>
           </a:xfrm>
           <a:prstGeom prst="rect">
@@ -17960,8 +17960,8 @@
         </p:blipFill>
         <p:spPr>
           <a:xfrm>
-            <a:off x="4287393" y="1124712"/>
-            <a:ext cx="1346454" cy="1346454"/>
+            <a:off x="4193804" y="1987814"/>
+            <a:ext cx="1597639" cy="1597639"/>
           </a:xfrm>
           <a:prstGeom prst="rect">
             <a:avLst/>
@@ -17976,8 +17976,8 @@
         </p:nvSpPr>
         <p:spPr>
           <a:xfrm>
-            <a:off x="4160520" y="2507742"/>
-            <a:ext cx="1600200" cy="219456"/>
+            <a:off x="4160520" y="3640317"/>
+            <a:ext cx="1664208" cy="219456"/>
           </a:xfrm>
           <a:prstGeom prst="rect">
             <a:avLst/>
@@ -18020,8 +18020,8 @@
         </p:blipFill>
         <p:spPr>
           <a:xfrm>
-            <a:off x="5935736" y="1124712"/>
-            <a:ext cx="2813791" cy="1456357"/>
+            <a:off x="5980998" y="2070050"/>
+            <a:ext cx="2768986" cy="1433166"/>
           </a:xfrm>
           <a:prstGeom prst="rect">
             <a:avLst/>
@@ -18036,8 +18036,8 @@
         </p:nvSpPr>
         <p:spPr>
           <a:xfrm>
-            <a:off x="5907024" y="2617645"/>
-            <a:ext cx="2871215" cy="219456"/>
+            <a:off x="5952744" y="3558081"/>
+            <a:ext cx="2825495" cy="219456"/>
           </a:xfrm>
           <a:prstGeom prst="rect">
             <a:avLst/>
@@ -22694,8 +22694,8 @@
         </p:nvSpPr>
         <p:spPr>
           <a:xfrm>
-            <a:off x="4330280" y="1151595"/>
-            <a:ext cx="4278199" cy="3215213"/>
+            <a:off x="4328389" y="1151595"/>
+            <a:ext cx="4281981" cy="3215213"/>
           </a:xfrm>
           <a:prstGeom prst="rect">
             <a:avLst/>
@@ -22747,8 +22747,8 @@
         </p:blipFill>
         <p:spPr>
           <a:xfrm>
-            <a:off x="4366856" y="1188171"/>
-            <a:ext cx="4205047" cy="3142061"/>
+            <a:off x="4364965" y="1188171"/>
+            <a:ext cx="4208829" cy="3142061"/>
           </a:xfrm>
           <a:prstGeom prst="rect">
             <a:avLst/>

--- a/docs/答辩_CareCompanion.pptx
+++ b/docs/答辩_CareCompanion.pptx
@@ -22694,8 +22694,8 @@
         </p:nvSpPr>
         <p:spPr>
           <a:xfrm>
-            <a:off x="4328389" y="1151595"/>
-            <a:ext cx="4281981" cy="3215213"/>
+            <a:off x="4340636" y="1151595"/>
+            <a:ext cx="4257487" cy="3215213"/>
           </a:xfrm>
           <a:prstGeom prst="rect">
             <a:avLst/>
@@ -22747,8 +22747,8 @@
         </p:blipFill>
         <p:spPr>
           <a:xfrm>
-            <a:off x="4364965" y="1188171"/>
-            <a:ext cx="4208829" cy="3142061"/>
+            <a:off x="4377212" y="1188171"/>
+            <a:ext cx="4184335" cy="3142061"/>
           </a:xfrm>
           <a:prstGeom prst="rect">
             <a:avLst/>

--- a/docs/答辩_CareCompanion.pptx
+++ b/docs/答辩_CareCompanion.pptx
@@ -35,6 +35,8 @@
     <p:sldId id="283" r:id="rId34"/>
     <p:sldId id="284" r:id="rId35"/>
     <p:sldId id="285" r:id="rId36"/>
+    <p:sldId id="286" r:id="rId37"/>
+    <p:sldId id="287" r:id="rId38"/>
   </p:sldIdLst>
   <p:sldSz cx="9144000" cy="5143500" type="screen4x3"/>
   <p:notesSz cx="6858000" cy="9144000"/>
@@ -12682,7 +12684,7 @@
                 <a:latin typeface="微软雅黑"/>
                 <ns1:rFonts xmlns:ns1="http://schemas.openxmlformats.org/wordprocessingml/2006/main" ns1:eastAsia="微软雅黑" ns1:ascii="微软雅黑" ns1:hAnsi="微软雅黑"/>
               </a:rPr>
-              <a:t>从容应队 · 中山大学 · 刘小凡/白冉 · 指导教师 彭键清</a:t>
+              <a:t>演示录像  |  从容应队 · 中山大学 · 刘小凡/白冉 · 指导教师 彭键清</a:t>
             </a:r>
           </a:p>
         </p:txBody>
@@ -12718,7 +12720,7 @@
                 <a:latin typeface="微软雅黑"/>
                 <ns2:rFonts xmlns:ns2="http://schemas.openxmlformats.org/wordprocessingml/2006/main" ns2:eastAsia="微软雅黑" ns2:ascii="微软雅黑" ns2:hAnsi="微软雅黑"/>
               </a:rPr>
-              <a:t>测试结果</a:t>
+              <a:t>Web 全流程演示录像</a:t>
             </a:r>
           </a:p>
         </p:txBody>
@@ -12863,7 +12865,7 @@
         <p:spPr>
           <a:xfrm>
             <a:off x="438912" y="1106424"/>
-            <a:ext cx="3282696" cy="812673"/>
+            <a:ext cx="3282696" cy="890397"/>
           </a:xfrm>
           <a:prstGeom prst="rect">
             <a:avLst/>
@@ -12885,14 +12887,14 @@
               </a:spcAft>
             </a:pPr>
             <a:r>
-              <a:rPr sz="1300" b="0">
+              <a:rPr sz="1200" b="0">
                 <a:solidFill>
                   <a:srgbClr val="1C202C"/>
                 </a:solidFill>
                 <a:latin typeface="微软雅黑"/>
                 <ns3:rFonts xmlns:ns3="http://schemas.openxmlformats.org/wordprocessingml/2006/main" ns3:eastAsia="微软雅黑" ns3:ascii="微软雅黑" ns3:hAnsi="微软雅黑"/>
               </a:rPr>
-              <a:t>● 跌倒检测 P/R/F1：合成 6 场景均为 100%</a:t>
+              <a:t>● 监测 → 老人倾诉 → 模拟跌倒 → 紧急流程</a:t>
             </a:r>
           </a:p>
         </p:txBody>
@@ -12905,8 +12907,8 @@
         </p:nvSpPr>
         <p:spPr>
           <a:xfrm>
-            <a:off x="438912" y="1937385"/>
-            <a:ext cx="3282696" cy="812673"/>
+            <a:off x="438912" y="2015109"/>
+            <a:ext cx="3282696" cy="890397"/>
           </a:xfrm>
           <a:prstGeom prst="rect">
             <a:avLst/>
@@ -12928,14 +12930,14 @@
               </a:spcAft>
             </a:pPr>
             <a:r>
-              <a:rPr sz="1300" b="0">
+              <a:rPr sz="1200" b="0">
                 <a:solidFill>
                   <a:srgbClr val="1C202C"/>
                 </a:solidFill>
                 <a:latin typeface="微软雅黑"/>
                 <ns4:rFonts xmlns:ns4="http://schemas.openxmlformats.org/wordprocessingml/2006/main" ns4:eastAsia="微软雅黑" ns4:ascii="微软雅黑" ns4:hAnsi="微软雅黑"/>
               </a:rPr>
-              <a:t>● 紧急链路脚本跑通率 100%</a:t>
+              <a:t>● 仓库内可离线播放，不依赖外网</a:t>
             </a:r>
           </a:p>
         </p:txBody>
@@ -12948,8 +12950,8 @@
         </p:nvSpPr>
         <p:spPr>
           <a:xfrm>
-            <a:off x="438912" y="2768346"/>
-            <a:ext cx="3282696" cy="812673"/>
+            <a:off x="438912" y="2923794"/>
+            <a:ext cx="3282696" cy="890397"/>
           </a:xfrm>
           <a:prstGeom prst="rect">
             <a:avLst/>
@@ -12971,14 +12973,14 @@
               </a:spcAft>
             </a:pPr>
             <a:r>
-              <a:rPr sz="1300" b="0">
+              <a:rPr sz="1200" b="0">
                 <a:solidFill>
                   <a:srgbClr val="1C202C"/>
                 </a:solidFill>
                 <a:latin typeface="微软雅黑"/>
                 <ns5:rFonts xmlns:ns5="http://schemas.openxmlformats.org/wordprocessingml/2006/main" ns5:eastAsia="微软雅黑" ns5:ascii="微软雅黑" ns5:hAnsi="微软雅黑"/>
               </a:rPr>
-              <a:t>● 单帧决策在 CPU 上 &lt; 50ms（见右下图）</a:t>
+              <a:t>● 与现场 run_web.sh 操作一致</a:t>
             </a:r>
           </a:p>
         </p:txBody>
@@ -12991,8 +12993,8 @@
         </p:nvSpPr>
         <p:spPr>
           <a:xfrm>
-            <a:off x="438912" y="3599307"/>
-            <a:ext cx="3282696" cy="812673"/>
+            <a:off x="438912" y="3832479"/>
+            <a:ext cx="3282696" cy="890397"/>
           </a:xfrm>
           <a:prstGeom prst="rect">
             <a:avLst/>
@@ -13014,14 +13016,14 @@
               </a:spcAft>
             </a:pPr>
             <a:r>
-              <a:rPr sz="1300" b="0">
+              <a:rPr sz="1200" b="0">
                 <a:solidFill>
                   <a:srgbClr val="1C202C"/>
                 </a:solidFill>
                 <a:latin typeface="微软雅黑"/>
                 <ns6:rFonts xmlns:ns6="http://schemas.openxmlformats.org/wordprocessingml/2006/main" ns6:eastAsia="微软雅黑" ns6:ascii="微软雅黑" ns6:hAnsi="微软雅黑"/>
               </a:rPr>
-              <a:t>● 单元测试和无头演示都过了</a:t>
+              <a:t>● 右栏可全屏播放</a:t>
             </a:r>
           </a:p>
         </p:txBody>
@@ -13029,85 +13031,6 @@
       <p:sp>
         <p:nvSpPr>
           <p:cNvPr id="14" name="Rectangle 13"/>
-          <p:cNvSpPr/>
-          <p:nvPr/>
-        </p:nvSpPr>
-        <p:spPr>
-          <a:xfrm>
-            <a:off x="365760" y="4539996"/>
-            <a:ext cx="3429000" cy="292608"/>
-          </a:xfrm>
-          <a:prstGeom prst="rect">
-            <a:avLst/>
-          </a:prstGeom>
-          <a:solidFill>
-            <a:srgbClr val="143278"/>
-          </a:solidFill>
-          <a:ln>
-            <a:noFill/>
-          </a:ln>
-        </p:spPr>
-        <p:style>
-          <a:lnRef idx="1">
-            <a:schemeClr val="accent1"/>
-          </a:lnRef>
-          <a:fillRef idx="3">
-            <a:schemeClr val="accent1"/>
-          </a:fillRef>
-          <a:effectRef idx="2">
-            <a:schemeClr val="accent1"/>
-          </a:effectRef>
-          <a:fontRef idx="minor">
-            <a:schemeClr val="lt1"/>
-          </a:fontRef>
-        </p:style>
-        <p:txBody>
-          <a:bodyPr rtlCol="0" anchor="ctr"/>
-          <a:lstStyle/>
-          <a:p>
-            <a:pPr algn="ctr"/>
-          </a:p>
-        </p:txBody>
-      </p:sp>
-      <p:sp>
-        <p:nvSpPr>
-          <p:cNvPr id="15" name="TextBox 14"/>
-          <p:cNvSpPr txBox="1"/>
-          <p:nvPr/>
-        </p:nvSpPr>
-        <p:spPr>
-          <a:xfrm>
-            <a:off x="402336" y="4604004"/>
-            <a:ext cx="3355848" cy="182880"/>
-          </a:xfrm>
-          <a:prstGeom prst="rect">
-            <a:avLst/>
-          </a:prstGeom>
-          <a:noFill/>
-        </p:spPr>
-        <p:txBody>
-          <a:bodyPr wrap="none" anchor="ctr">
-            <a:spAutoFit/>
-          </a:bodyPr>
-          <a:lstStyle/>
-          <a:p>
-            <a:pPr algn="ctr"/>
-            <a:r>
-              <a:rPr sz="1100" b="1">
-                <a:solidFill>
-                  <a:srgbClr val="FFFFFF"/>
-                </a:solidFill>
-                <a:latin typeface="微软雅黑"/>
-                <ns7:rFonts xmlns:ns7="http://schemas.openxmlformats.org/wordprocessingml/2006/main" ns7:eastAsia="微软雅黑" ns7:ascii="微软雅黑" ns7:hAnsi="微软雅黑"/>
-              </a:rPr>
-              <a:t>数据：fall_eval_report.json</a:t>
-            </a:r>
-          </a:p>
-        </p:txBody>
-      </p:sp>
-      <p:sp>
-        <p:nvSpPr>
-          <p:cNvPr id="16" name="Rectangle 15"/>
           <p:cNvSpPr/>
           <p:nvPr/>
         </p:nvSpPr>
@@ -13150,112 +13073,33 @@
           </a:p>
         </p:txBody>
       </p:sp>
-      <p:sp>
-        <p:nvSpPr>
-          <p:cNvPr id="17" name="Rectangle 16"/>
-          <p:cNvSpPr/>
-          <p:nvPr/>
-        </p:nvSpPr>
-        <p:spPr>
-          <a:xfrm>
-            <a:off x="3968496" y="996696"/>
-            <a:ext cx="10972" cy="3854196"/>
-          </a:xfrm>
-          <a:prstGeom prst="rect">
-            <a:avLst/>
-          </a:prstGeom>
-          <a:solidFill>
-            <a:srgbClr val="BAC8DC"/>
-          </a:solidFill>
-          <a:ln>
-            <a:noFill/>
-          </a:ln>
-        </p:spPr>
-        <p:style>
-          <a:lnRef idx="1">
-            <a:schemeClr val="accent1"/>
-          </a:lnRef>
-          <a:fillRef idx="3">
-            <a:schemeClr val="accent1"/>
-          </a:fillRef>
-          <a:effectRef idx="2">
-            <a:schemeClr val="accent1"/>
-          </a:effectRef>
-          <a:fontRef idx="minor">
-            <a:schemeClr val="lt1"/>
-          </a:fontRef>
-        </p:style>
-        <p:txBody>
-          <a:bodyPr rtlCol="0" anchor="ctr"/>
-          <a:lstStyle/>
-          <a:p>
-            <a:pPr algn="ctr"/>
-          </a:p>
-        </p:txBody>
-      </p:sp>
-      <p:sp>
-        <p:nvSpPr>
-          <p:cNvPr id="18" name="Rectangle 17"/>
-          <p:cNvSpPr/>
-          <p:nvPr/>
-        </p:nvSpPr>
-        <p:spPr>
-          <a:xfrm>
-            <a:off x="4308652" y="1328651"/>
-            <a:ext cx="4321454" cy="2861100"/>
-          </a:xfrm>
-          <a:prstGeom prst="rect">
-            <a:avLst/>
-          </a:prstGeom>
-          <a:solidFill>
-            <a:srgbClr val="FCFDFF"/>
-          </a:solidFill>
-          <a:ln w="7620">
-            <a:solidFill>
-              <a:srgbClr val="BAC8DC"/>
-            </a:solidFill>
-          </a:ln>
-        </p:spPr>
-        <p:style>
-          <a:lnRef idx="1">
-            <a:schemeClr val="accent1"/>
-          </a:lnRef>
-          <a:fillRef idx="3">
-            <a:schemeClr val="accent1"/>
-          </a:fillRef>
-          <a:effectRef idx="2">
-            <a:schemeClr val="accent1"/>
-          </a:effectRef>
-          <a:fontRef idx="minor">
-            <a:schemeClr val="lt1"/>
-          </a:fontRef>
-        </p:style>
-        <p:txBody>
-          <a:bodyPr rtlCol="0" anchor="ctr"/>
-          <a:lstStyle/>
-          <a:p>
-            <a:pPr algn="ctr"/>
-          </a:p>
-        </p:txBody>
-      </p:sp>
       <p:pic>
         <p:nvPicPr>
-          <p:cNvPr id="19" name="Picture 18" descr="eval_results.png"/>
+          <p:cNvPr id="15" name="demo_carecompanion.mp4">
+            <a:hlinkClick r:id="" action="ppaction://media"/>
+          </p:cNvPr>
           <p:cNvPicPr>
             <a:picLocks noChangeAspect="1"/>
           </p:cNvPicPr>
-          <p:nvPr/>
+          <p:nvPr>
+            <a:videoFile r:link="rId3"/>
+            <p:extLst>
+              <p:ext uri="{DAA4B4D4-6D71-4841-9C94-3DE7FCFB9230}">
+                <p14:media xmlns:p14="http://schemas.microsoft.com/office/powerpoint/2010/main" r:embed="rId2"/>
+              </p:ext>
+            </p:extLst>
+          </p:nvPr>
         </p:nvPicPr>
         <p:blipFill>
-          <a:blip r:embed="rId2"/>
+          <a:blip r:embed="rId4"/>
           <a:stretch>
             <a:fillRect/>
           </a:stretch>
         </p:blipFill>
         <p:spPr>
           <a:xfrm>
-            <a:off x="4345228" y="1365227"/>
-            <a:ext cx="4248302" cy="2787948"/>
+            <a:off x="4160520" y="1106424"/>
+            <a:ext cx="4617720" cy="3396996"/>
           </a:xfrm>
           <a:prstGeom prst="rect">
             <a:avLst/>
@@ -13264,13 +13108,13 @@
       </p:pic>
       <p:sp>
         <p:nvSpPr>
-          <p:cNvPr id="20" name="TextBox 19"/>
+          <p:cNvPr id="16" name="TextBox 15"/>
           <p:cNvSpPr txBox="1"/>
           <p:nvPr/>
         </p:nvSpPr>
         <p:spPr>
           <a:xfrm>
-            <a:off x="4160520" y="4521708"/>
+            <a:off x="4160520" y="4539996"/>
             <a:ext cx="4617720" cy="219456"/>
           </a:xfrm>
           <a:prstGeom prst="rect">
@@ -13286,14 +13130,14 @@
           <a:p>
             <a:pPr algn="ctr"/>
             <a:r>
-              <a:rPr sz="800" b="0">
+              <a:rPr sz="900" b="0">
                 <a:solidFill>
                   <a:srgbClr val="5A6273"/>
                 </a:solidFill>
                 <a:latin typeface="微软雅黑"/>
-                <ns8:rFonts xmlns:ns8="http://schemas.openxmlformats.org/wordprocessingml/2006/main" ns8:eastAsia="微软雅黑" ns8:ascii="微软雅黑" ns8:hAnsi="微软雅黑"/>
-              </a:rPr>
-              <a:t>P/R/F1 均为 100%（见左栏）</a:t>
+                <ns7:rFonts xmlns:ns7="http://schemas.openxmlformats.org/wordprocessingml/2006/main" ns7:eastAsia="微软雅黑" ns7:ascii="微软雅黑" ns7:hAnsi="微软雅黑"/>
+              </a:rPr>
+              <a:t>demo_carecompanion.mp4</a:t>
             </a:r>
           </a:p>
         </p:txBody>
@@ -13303,6 +13147,28 @@
   <p:clrMapOvr>
     <a:masterClrMapping/>
   </p:clrMapOvr>
+  <p:timing>
+    <p:tnLst>
+      <p:par>
+        <p:cTn id="1" dur="indefinite" restart="never" nodeType="tmRoot">
+          <p:childTnLst>
+            <p:video>
+              <p:cMediaNode vol="80000">
+                <p:cTn id="2" fill="hold" display="0">
+                  <p:stCondLst>
+                    <p:cond delay="indefinite"/>
+                  </p:stCondLst>
+                </p:cTn>
+                <p:tgtEl>
+                  <p:spTgt spid="15"/>
+                </p:tgtEl>
+              </p:cMediaNode>
+            </p:video>
+          </p:childTnLst>
+        </p:cTn>
+      </p:par>
+    </p:tnLst>
+  </p:timing>
 </p:sld>
 </file>
 
@@ -13476,7 +13342,7 @@
                 <a:latin typeface="微软雅黑"/>
                 <ns1:rFonts xmlns:ns1="http://schemas.openxmlformats.org/wordprocessingml/2006/main" ns1:eastAsia="微软雅黑" ns1:ascii="微软雅黑" ns1:hAnsi="微软雅黑"/>
               </a:rPr>
-              <a:t>从容应队 · 中山大学 · 刘小凡/白冉 · 指导教师 彭键清</a:t>
+              <a:t>演示录像  |  从容应队 · 中山大学 · 刘小凡/白冉 · 指导教师 彭键清</a:t>
             </a:r>
           </a:p>
         </p:txBody>
@@ -13512,7 +13378,7 @@
                 <a:latin typeface="微软雅黑"/>
                 <ns2:rFonts xmlns:ns2="http://schemas.openxmlformats.org/wordprocessingml/2006/main" ns2:eastAsia="微软雅黑" ns2:ascii="微软雅黑" ns2:hAnsi="微软雅黑"/>
               </a:rPr>
-              <a:t>性能与延迟</a:t>
+              <a:t>人形仿真行走（Isaac Lab · Unitree G1）</a:t>
             </a:r>
           </a:p>
         </p:txBody>
@@ -13679,14 +13545,14 @@
               </a:spcAft>
             </a:pPr>
             <a:r>
-              <a:rPr sz="1300" b="0">
+              <a:rPr sz="1200" b="0">
                 <a:solidFill>
                   <a:srgbClr val="1C202C"/>
                 </a:solidFill>
                 <a:latin typeface="微软雅黑"/>
                 <ns3:rFonts xmlns:ns3="http://schemas.openxmlformats.org/wordprocessingml/2006/main" ns3:eastAsia="微软雅黑" ns3:ascii="微软雅黑" ns3:hAnsi="微软雅黑"/>
               </a:rPr>
-              <a:t>● 骨架提取约占时最多，仍满足实时要求</a:t>
+              <a:t>● Isaac Lab 平地速度跟踪预训练策略</a:t>
             </a:r>
           </a:p>
         </p:txBody>
@@ -13722,14 +13588,14 @@
               </a:spcAft>
             </a:pPr>
             <a:r>
-              <a:rPr sz="1300" b="0">
+              <a:rPr sz="1200" b="0">
                 <a:solidFill>
                   <a:srgbClr val="1C202C"/>
                 </a:solidFill>
                 <a:latin typeface="微软雅黑"/>
                 <ns4:rFonts xmlns:ns4="http://schemas.openxmlformats.org/wordprocessingml/2006/main" ns4:eastAsia="微软雅黑" ns4:ascii="微软雅黑" ns4:hAnsi="微软雅黑"/>
               </a:rPr>
-              <a:t>● 融合与规则判定开销较小</a:t>
+              <a:t>● 固定前进 0.8 m/s，世界坐标侧拍全身</a:t>
             </a:r>
           </a:p>
         </p:txBody>
@@ -13765,14 +13631,14 @@
               </a:spcAft>
             </a:pPr>
             <a:r>
-              <a:rPr sz="1300" b="0">
+              <a:rPr sz="1200" b="0">
                 <a:solidFill>
                   <a:srgbClr val="1C202C"/>
                 </a:solidFill>
                 <a:latin typeface="微软雅黑"/>
                 <ns5:rFonts xmlns:ns5="http://schemas.openxmlformats.org/wordprocessingml/2006/main" ns5:eastAsia="微软雅黑" ns5:ascii="微软雅黑" ns5:hAnsi="微软雅黑"/>
               </a:rPr>
-              <a:t>● 端到端在 CPU 上约 42ms</a:t>
+              <a:t>● 录屏段位移约 6 m，关节持续摆动</a:t>
             </a:r>
           </a:p>
         </p:txBody>
@@ -13808,14 +13674,14 @@
               </a:spcAft>
             </a:pPr>
             <a:r>
-              <a:rPr sz="1300" b="0">
+              <a:rPr sz="1200" b="0">
                 <a:solidFill>
                   <a:srgbClr val="1C202C"/>
                 </a:solidFill>
                 <a:latin typeface="微软雅黑"/>
                 <ns6:rFonts xmlns:ns6="http://schemas.openxmlformats.org/wordprocessingml/2006/main" ns6:eastAsia="微软雅黑" ns6:ascii="微软雅黑" ns6:hAnsi="微软雅黑"/>
               </a:rPr>
-              <a:t>● 现场演示不依赖 GPU</a:t>
+              <a:t>● 说明仿真层已对接，可扩展 ROS2 真机</a:t>
             </a:r>
           </a:p>
         </p:txBody>
@@ -13865,112 +13731,33 @@
           </a:p>
         </p:txBody>
       </p:sp>
-      <p:sp>
-        <p:nvSpPr>
-          <p:cNvPr id="15" name="Rectangle 14"/>
-          <p:cNvSpPr/>
-          <p:nvPr/>
-        </p:nvSpPr>
-        <p:spPr>
-          <a:xfrm>
-            <a:off x="3968496" y="996696"/>
-            <a:ext cx="10972" cy="3854196"/>
-          </a:xfrm>
-          <a:prstGeom prst="rect">
-            <a:avLst/>
-          </a:prstGeom>
-          <a:solidFill>
-            <a:srgbClr val="BAC8DC"/>
-          </a:solidFill>
-          <a:ln>
-            <a:noFill/>
-          </a:ln>
-        </p:spPr>
-        <p:style>
-          <a:lnRef idx="1">
-            <a:schemeClr val="accent1"/>
-          </a:lnRef>
-          <a:fillRef idx="3">
-            <a:schemeClr val="accent1"/>
-          </a:fillRef>
-          <a:effectRef idx="2">
-            <a:schemeClr val="accent1"/>
-          </a:effectRef>
-          <a:fontRef idx="minor">
-            <a:schemeClr val="lt1"/>
-          </a:fontRef>
-        </p:style>
-        <p:txBody>
-          <a:bodyPr rtlCol="0" anchor="ctr"/>
-          <a:lstStyle/>
-          <a:p>
-            <a:pPr algn="ctr"/>
-          </a:p>
-        </p:txBody>
-      </p:sp>
-      <p:sp>
-        <p:nvSpPr>
-          <p:cNvPr id="16" name="Rectangle 15"/>
-          <p:cNvSpPr/>
-          <p:nvPr/>
-        </p:nvSpPr>
-        <p:spPr>
-          <a:xfrm>
-            <a:off x="4341464" y="1151595"/>
-            <a:ext cx="4255831" cy="3215213"/>
-          </a:xfrm>
-          <a:prstGeom prst="rect">
-            <a:avLst/>
-          </a:prstGeom>
-          <a:solidFill>
-            <a:srgbClr val="FCFDFF"/>
-          </a:solidFill>
-          <a:ln w="7620">
-            <a:solidFill>
-              <a:srgbClr val="BAC8DC"/>
-            </a:solidFill>
-          </a:ln>
-        </p:spPr>
-        <p:style>
-          <a:lnRef idx="1">
-            <a:schemeClr val="accent1"/>
-          </a:lnRef>
-          <a:fillRef idx="3">
-            <a:schemeClr val="accent1"/>
-          </a:fillRef>
-          <a:effectRef idx="2">
-            <a:schemeClr val="accent1"/>
-          </a:effectRef>
-          <a:fontRef idx="minor">
-            <a:schemeClr val="lt1"/>
-          </a:fontRef>
-        </p:style>
-        <p:txBody>
-          <a:bodyPr rtlCol="0" anchor="ctr"/>
-          <a:lstStyle/>
-          <a:p>
-            <a:pPr algn="ctr"/>
-          </a:p>
-        </p:txBody>
-      </p:sp>
       <p:pic>
         <p:nvPicPr>
-          <p:cNvPr id="17" name="Picture 16" descr="latency_bar.png"/>
+          <p:cNvPr id="15" name="demo_isaac_g1_locomotion.mp4">
+            <a:hlinkClick r:id="" action="ppaction://media"/>
+          </p:cNvPr>
           <p:cNvPicPr>
             <a:picLocks noChangeAspect="1"/>
           </p:cNvPicPr>
-          <p:nvPr/>
+          <p:nvPr>
+            <a:videoFile r:link="rId3"/>
+            <p:extLst>
+              <p:ext uri="{DAA4B4D4-6D71-4841-9C94-3DE7FCFB9230}">
+                <p14:media xmlns:p14="http://schemas.microsoft.com/office/powerpoint/2010/main" r:embed="rId2"/>
+              </p:ext>
+            </p:extLst>
+          </p:nvPr>
         </p:nvPicPr>
         <p:blipFill>
-          <a:blip r:embed="rId2"/>
+          <a:blip r:embed="rId4"/>
           <a:stretch>
             <a:fillRect/>
           </a:stretch>
         </p:blipFill>
         <p:spPr>
           <a:xfrm>
-            <a:off x="4378040" y="1188171"/>
-            <a:ext cx="4182679" cy="3142061"/>
+            <a:off x="4160520" y="1106424"/>
+            <a:ext cx="4617720" cy="3396996"/>
           </a:xfrm>
           <a:prstGeom prst="rect">
             <a:avLst/>
@@ -13979,13 +13766,13 @@
       </p:pic>
       <p:sp>
         <p:nvSpPr>
-          <p:cNvPr id="18" name="TextBox 17"/>
+          <p:cNvPr id="16" name="TextBox 15"/>
           <p:cNvSpPr txBox="1"/>
           <p:nvPr/>
         </p:nvSpPr>
         <p:spPr>
           <a:xfrm>
-            <a:off x="4160520" y="4521708"/>
+            <a:off x="4160520" y="4539996"/>
             <a:ext cx="4617720" cy="219456"/>
           </a:xfrm>
           <a:prstGeom prst="rect">
@@ -14001,14 +13788,14 @@
           <a:p>
             <a:pPr algn="ctr"/>
             <a:r>
-              <a:rPr sz="800" b="0">
+              <a:rPr sz="900" b="0">
                 <a:solidFill>
                   <a:srgbClr val="5A6273"/>
                 </a:solidFill>
                 <a:latin typeface="微软雅黑"/>
                 <ns7:rFonts xmlns:ns7="http://schemas.openxmlformats.org/wordprocessingml/2006/main" ns7:eastAsia="微软雅黑" ns7:ascii="微软雅黑" ns7:hAnsi="微软雅黑"/>
               </a:rPr>
-              <a:t>单帧链路耗时（本机粗测）</a:t>
+              <a:t>demo_isaac_g1_locomotion.mp4</a:t>
             </a:r>
           </a:p>
         </p:txBody>
@@ -14018,6 +13805,28 @@
   <p:clrMapOvr>
     <a:masterClrMapping/>
   </p:clrMapOvr>
+  <p:timing>
+    <p:tnLst>
+      <p:par>
+        <p:cTn id="1" dur="indefinite" restart="never" nodeType="tmRoot">
+          <p:childTnLst>
+            <p:video>
+              <p:cMediaNode vol="80000">
+                <p:cTn id="2" fill="hold" display="0">
+                  <p:stCondLst>
+                    <p:cond delay="indefinite"/>
+                  </p:stCondLst>
+                </p:cTn>
+                <p:tgtEl>
+                  <p:spTgt spid="15"/>
+                </p:tgtEl>
+              </p:cMediaNode>
+            </p:video>
+          </p:childTnLst>
+        </p:cTn>
+      </p:par>
+    </p:tnLst>
+  </p:timing>
 </p:sld>
 </file>
 
@@ -14227,6 +14036,1515 @@
                 <a:latin typeface="微软雅黑"/>
                 <ns2:rFonts xmlns:ns2="http://schemas.openxmlformats.org/wordprocessingml/2006/main" ns2:eastAsia="微软雅黑" ns2:ascii="微软雅黑" ns2:hAnsi="微软雅黑"/>
               </a:rPr>
+              <a:t>测试结果</a:t>
+            </a:r>
+          </a:p>
+        </p:txBody>
+      </p:sp>
+      <p:sp>
+        <p:nvSpPr>
+          <p:cNvPr id="7" name="Rectangle 6"/>
+          <p:cNvSpPr/>
+          <p:nvPr/>
+        </p:nvSpPr>
+        <p:spPr>
+          <a:xfrm>
+            <a:off x="274320" y="886968"/>
+            <a:ext cx="1143000" cy="50292"/>
+          </a:xfrm>
+          <a:prstGeom prst="rect">
+            <a:avLst/>
+          </a:prstGeom>
+          <a:solidFill>
+            <a:srgbClr val="F59E0B"/>
+          </a:solidFill>
+          <a:ln>
+            <a:noFill/>
+          </a:ln>
+        </p:spPr>
+        <p:style>
+          <a:lnRef idx="1">
+            <a:schemeClr val="accent1"/>
+          </a:lnRef>
+          <a:fillRef idx="3">
+            <a:schemeClr val="accent1"/>
+          </a:fillRef>
+          <a:effectRef idx="2">
+            <a:schemeClr val="accent1"/>
+          </a:effectRef>
+          <a:fontRef idx="minor">
+            <a:schemeClr val="lt1"/>
+          </a:fontRef>
+        </p:style>
+        <p:txBody>
+          <a:bodyPr rtlCol="0" anchor="ctr"/>
+          <a:lstStyle/>
+          <a:p>
+            <a:pPr algn="ctr"/>
+          </a:p>
+        </p:txBody>
+      </p:sp>
+      <p:sp>
+        <p:nvSpPr>
+          <p:cNvPr id="8" name="Rectangle 7"/>
+          <p:cNvSpPr/>
+          <p:nvPr/>
+        </p:nvSpPr>
+        <p:spPr>
+          <a:xfrm>
+            <a:off x="274320" y="996696"/>
+            <a:ext cx="3611880" cy="3854196"/>
+          </a:xfrm>
+          <a:prstGeom prst="rect">
+            <a:avLst/>
+          </a:prstGeom>
+          <a:solidFill>
+            <a:srgbClr val="F1F7FF"/>
+          </a:solidFill>
+          <a:ln w="10160">
+            <a:solidFill>
+              <a:srgbClr val="BAC8DC"/>
+            </a:solidFill>
+          </a:ln>
+        </p:spPr>
+        <p:style>
+          <a:lnRef idx="1">
+            <a:schemeClr val="accent1"/>
+          </a:lnRef>
+          <a:fillRef idx="3">
+            <a:schemeClr val="accent1"/>
+          </a:fillRef>
+          <a:effectRef idx="2">
+            <a:schemeClr val="accent1"/>
+          </a:effectRef>
+          <a:fontRef idx="minor">
+            <a:schemeClr val="lt1"/>
+          </a:fontRef>
+        </p:style>
+        <p:txBody>
+          <a:bodyPr rtlCol="0" anchor="ctr"/>
+          <a:lstStyle/>
+          <a:p>
+            <a:pPr algn="ctr"/>
+          </a:p>
+        </p:txBody>
+      </p:sp>
+      <p:sp>
+        <p:nvSpPr>
+          <p:cNvPr id="9" name="Rectangle 8"/>
+          <p:cNvSpPr/>
+          <p:nvPr/>
+        </p:nvSpPr>
+        <p:spPr>
+          <a:xfrm>
+            <a:off x="274320" y="996696"/>
+            <a:ext cx="73152" cy="3854196"/>
+          </a:xfrm>
+          <a:prstGeom prst="rect">
+            <a:avLst/>
+          </a:prstGeom>
+          <a:solidFill>
+            <a:srgbClr val="143278"/>
+          </a:solidFill>
+          <a:ln>
+            <a:noFill/>
+          </a:ln>
+        </p:spPr>
+        <p:style>
+          <a:lnRef idx="1">
+            <a:schemeClr val="accent1"/>
+          </a:lnRef>
+          <a:fillRef idx="3">
+            <a:schemeClr val="accent1"/>
+          </a:fillRef>
+          <a:effectRef idx="2">
+            <a:schemeClr val="accent1"/>
+          </a:effectRef>
+          <a:fontRef idx="minor">
+            <a:schemeClr val="lt1"/>
+          </a:fontRef>
+        </p:style>
+        <p:txBody>
+          <a:bodyPr rtlCol="0" anchor="ctr"/>
+          <a:lstStyle/>
+          <a:p>
+            <a:pPr algn="ctr"/>
+          </a:p>
+        </p:txBody>
+      </p:sp>
+      <p:sp>
+        <p:nvSpPr>
+          <p:cNvPr id="10" name="TextBox 9"/>
+          <p:cNvSpPr txBox="1"/>
+          <p:nvPr/>
+        </p:nvSpPr>
+        <p:spPr>
+          <a:xfrm>
+            <a:off x="438912" y="1106424"/>
+            <a:ext cx="3282696" cy="812673"/>
+          </a:xfrm>
+          <a:prstGeom prst="rect">
+            <a:avLst/>
+          </a:prstGeom>
+          <a:noFill/>
+        </p:spPr>
+        <p:txBody>
+          <a:bodyPr wrap="square" anchor="t" lIns="25400" tIns="0">
+            <a:spAutoFit/>
+          </a:bodyPr>
+          <a:lstStyle/>
+          <a:p>
+            <a:pPr>
+              <a:lnSpc>
+                <a:spcPct val="112000"/>
+              </a:lnSpc>
+              <a:spcAft>
+                <a:spcPts val="200"/>
+              </a:spcAft>
+            </a:pPr>
+            <a:r>
+              <a:rPr sz="1300" b="0">
+                <a:solidFill>
+                  <a:srgbClr val="1C202C"/>
+                </a:solidFill>
+                <a:latin typeface="微软雅黑"/>
+                <ns3:rFonts xmlns:ns3="http://schemas.openxmlformats.org/wordprocessingml/2006/main" ns3:eastAsia="微软雅黑" ns3:ascii="微软雅黑" ns3:hAnsi="微软雅黑"/>
+              </a:rPr>
+              <a:t>● 跌倒检测 P/R/F1：合成 6 场景均为 100%</a:t>
+            </a:r>
+          </a:p>
+        </p:txBody>
+      </p:sp>
+      <p:sp>
+        <p:nvSpPr>
+          <p:cNvPr id="11" name="TextBox 10"/>
+          <p:cNvSpPr txBox="1"/>
+          <p:nvPr/>
+        </p:nvSpPr>
+        <p:spPr>
+          <a:xfrm>
+            <a:off x="438912" y="1937385"/>
+            <a:ext cx="3282696" cy="812673"/>
+          </a:xfrm>
+          <a:prstGeom prst="rect">
+            <a:avLst/>
+          </a:prstGeom>
+          <a:noFill/>
+        </p:spPr>
+        <p:txBody>
+          <a:bodyPr wrap="square" anchor="t" lIns="25400" tIns="0">
+            <a:spAutoFit/>
+          </a:bodyPr>
+          <a:lstStyle/>
+          <a:p>
+            <a:pPr>
+              <a:lnSpc>
+                <a:spcPct val="112000"/>
+              </a:lnSpc>
+              <a:spcAft>
+                <a:spcPts val="200"/>
+              </a:spcAft>
+            </a:pPr>
+            <a:r>
+              <a:rPr sz="1300" b="0">
+                <a:solidFill>
+                  <a:srgbClr val="1C202C"/>
+                </a:solidFill>
+                <a:latin typeface="微软雅黑"/>
+                <ns4:rFonts xmlns:ns4="http://schemas.openxmlformats.org/wordprocessingml/2006/main" ns4:eastAsia="微软雅黑" ns4:ascii="微软雅黑" ns4:hAnsi="微软雅黑"/>
+              </a:rPr>
+              <a:t>● 紧急链路脚本跑通率 100%</a:t>
+            </a:r>
+          </a:p>
+        </p:txBody>
+      </p:sp>
+      <p:sp>
+        <p:nvSpPr>
+          <p:cNvPr id="12" name="TextBox 11"/>
+          <p:cNvSpPr txBox="1"/>
+          <p:nvPr/>
+        </p:nvSpPr>
+        <p:spPr>
+          <a:xfrm>
+            <a:off x="438912" y="2768346"/>
+            <a:ext cx="3282696" cy="812673"/>
+          </a:xfrm>
+          <a:prstGeom prst="rect">
+            <a:avLst/>
+          </a:prstGeom>
+          <a:noFill/>
+        </p:spPr>
+        <p:txBody>
+          <a:bodyPr wrap="square" anchor="t" lIns="25400" tIns="0">
+            <a:spAutoFit/>
+          </a:bodyPr>
+          <a:lstStyle/>
+          <a:p>
+            <a:pPr>
+              <a:lnSpc>
+                <a:spcPct val="112000"/>
+              </a:lnSpc>
+              <a:spcAft>
+                <a:spcPts val="200"/>
+              </a:spcAft>
+            </a:pPr>
+            <a:r>
+              <a:rPr sz="1300" b="0">
+                <a:solidFill>
+                  <a:srgbClr val="1C202C"/>
+                </a:solidFill>
+                <a:latin typeface="微软雅黑"/>
+                <ns5:rFonts xmlns:ns5="http://schemas.openxmlformats.org/wordprocessingml/2006/main" ns5:eastAsia="微软雅黑" ns5:ascii="微软雅黑" ns5:hAnsi="微软雅黑"/>
+              </a:rPr>
+              <a:t>● 单帧决策在 CPU 上 &lt; 50ms（见右下图）</a:t>
+            </a:r>
+          </a:p>
+        </p:txBody>
+      </p:sp>
+      <p:sp>
+        <p:nvSpPr>
+          <p:cNvPr id="13" name="TextBox 12"/>
+          <p:cNvSpPr txBox="1"/>
+          <p:nvPr/>
+        </p:nvSpPr>
+        <p:spPr>
+          <a:xfrm>
+            <a:off x="438912" y="3599307"/>
+            <a:ext cx="3282696" cy="812673"/>
+          </a:xfrm>
+          <a:prstGeom prst="rect">
+            <a:avLst/>
+          </a:prstGeom>
+          <a:noFill/>
+        </p:spPr>
+        <p:txBody>
+          <a:bodyPr wrap="square" anchor="t" lIns="25400" tIns="0">
+            <a:spAutoFit/>
+          </a:bodyPr>
+          <a:lstStyle/>
+          <a:p>
+            <a:pPr>
+              <a:lnSpc>
+                <a:spcPct val="112000"/>
+              </a:lnSpc>
+              <a:spcAft>
+                <a:spcPts val="200"/>
+              </a:spcAft>
+            </a:pPr>
+            <a:r>
+              <a:rPr sz="1300" b="0">
+                <a:solidFill>
+                  <a:srgbClr val="1C202C"/>
+                </a:solidFill>
+                <a:latin typeface="微软雅黑"/>
+                <ns6:rFonts xmlns:ns6="http://schemas.openxmlformats.org/wordprocessingml/2006/main" ns6:eastAsia="微软雅黑" ns6:ascii="微软雅黑" ns6:hAnsi="微软雅黑"/>
+              </a:rPr>
+              <a:t>● 单元测试和无头演示都过了</a:t>
+            </a:r>
+          </a:p>
+        </p:txBody>
+      </p:sp>
+      <p:sp>
+        <p:nvSpPr>
+          <p:cNvPr id="14" name="Rectangle 13"/>
+          <p:cNvSpPr/>
+          <p:nvPr/>
+        </p:nvSpPr>
+        <p:spPr>
+          <a:xfrm>
+            <a:off x="365760" y="4539996"/>
+            <a:ext cx="3429000" cy="292608"/>
+          </a:xfrm>
+          <a:prstGeom prst="rect">
+            <a:avLst/>
+          </a:prstGeom>
+          <a:solidFill>
+            <a:srgbClr val="143278"/>
+          </a:solidFill>
+          <a:ln>
+            <a:noFill/>
+          </a:ln>
+        </p:spPr>
+        <p:style>
+          <a:lnRef idx="1">
+            <a:schemeClr val="accent1"/>
+          </a:lnRef>
+          <a:fillRef idx="3">
+            <a:schemeClr val="accent1"/>
+          </a:fillRef>
+          <a:effectRef idx="2">
+            <a:schemeClr val="accent1"/>
+          </a:effectRef>
+          <a:fontRef idx="minor">
+            <a:schemeClr val="lt1"/>
+          </a:fontRef>
+        </p:style>
+        <p:txBody>
+          <a:bodyPr rtlCol="0" anchor="ctr"/>
+          <a:lstStyle/>
+          <a:p>
+            <a:pPr algn="ctr"/>
+          </a:p>
+        </p:txBody>
+      </p:sp>
+      <p:sp>
+        <p:nvSpPr>
+          <p:cNvPr id="15" name="TextBox 14"/>
+          <p:cNvSpPr txBox="1"/>
+          <p:nvPr/>
+        </p:nvSpPr>
+        <p:spPr>
+          <a:xfrm>
+            <a:off x="402336" y="4604004"/>
+            <a:ext cx="3355848" cy="182880"/>
+          </a:xfrm>
+          <a:prstGeom prst="rect">
+            <a:avLst/>
+          </a:prstGeom>
+          <a:noFill/>
+        </p:spPr>
+        <p:txBody>
+          <a:bodyPr wrap="none" anchor="ctr">
+            <a:spAutoFit/>
+          </a:bodyPr>
+          <a:lstStyle/>
+          <a:p>
+            <a:pPr algn="ctr"/>
+            <a:r>
+              <a:rPr sz="1100" b="1">
+                <a:solidFill>
+                  <a:srgbClr val="FFFFFF"/>
+                </a:solidFill>
+                <a:latin typeface="微软雅黑"/>
+                <ns7:rFonts xmlns:ns7="http://schemas.openxmlformats.org/wordprocessingml/2006/main" ns7:eastAsia="微软雅黑" ns7:ascii="微软雅黑" ns7:hAnsi="微软雅黑"/>
+              </a:rPr>
+              <a:t>数据：fall_eval_report.json</a:t>
+            </a:r>
+          </a:p>
+        </p:txBody>
+      </p:sp>
+      <p:sp>
+        <p:nvSpPr>
+          <p:cNvPr id="16" name="Rectangle 15"/>
+          <p:cNvSpPr/>
+          <p:nvPr/>
+        </p:nvSpPr>
+        <p:spPr>
+          <a:xfrm>
+            <a:off x="4105656" y="1033272"/>
+            <a:ext cx="4727448" cy="3744468"/>
+          </a:xfrm>
+          <a:prstGeom prst="rect">
+            <a:avLst/>
+          </a:prstGeom>
+          <a:solidFill>
+            <a:srgbClr val="FFFFFF"/>
+          </a:solidFill>
+          <a:ln w="9525">
+            <a:solidFill>
+              <a:srgbClr val="BAC8DC"/>
+            </a:solidFill>
+          </a:ln>
+        </p:spPr>
+        <p:style>
+          <a:lnRef idx="1">
+            <a:schemeClr val="accent1"/>
+          </a:lnRef>
+          <a:fillRef idx="3">
+            <a:schemeClr val="accent1"/>
+          </a:fillRef>
+          <a:effectRef idx="2">
+            <a:schemeClr val="accent1"/>
+          </a:effectRef>
+          <a:fontRef idx="minor">
+            <a:schemeClr val="lt1"/>
+          </a:fontRef>
+        </p:style>
+        <p:txBody>
+          <a:bodyPr rtlCol="0" anchor="ctr"/>
+          <a:lstStyle/>
+          <a:p>
+            <a:pPr algn="ctr"/>
+          </a:p>
+        </p:txBody>
+      </p:sp>
+      <p:sp>
+        <p:nvSpPr>
+          <p:cNvPr id="17" name="Rectangle 16"/>
+          <p:cNvSpPr/>
+          <p:nvPr/>
+        </p:nvSpPr>
+        <p:spPr>
+          <a:xfrm>
+            <a:off x="3968496" y="996696"/>
+            <a:ext cx="10972" cy="3854196"/>
+          </a:xfrm>
+          <a:prstGeom prst="rect">
+            <a:avLst/>
+          </a:prstGeom>
+          <a:solidFill>
+            <a:srgbClr val="BAC8DC"/>
+          </a:solidFill>
+          <a:ln>
+            <a:noFill/>
+          </a:ln>
+        </p:spPr>
+        <p:style>
+          <a:lnRef idx="1">
+            <a:schemeClr val="accent1"/>
+          </a:lnRef>
+          <a:fillRef idx="3">
+            <a:schemeClr val="accent1"/>
+          </a:fillRef>
+          <a:effectRef idx="2">
+            <a:schemeClr val="accent1"/>
+          </a:effectRef>
+          <a:fontRef idx="minor">
+            <a:schemeClr val="lt1"/>
+          </a:fontRef>
+        </p:style>
+        <p:txBody>
+          <a:bodyPr rtlCol="0" anchor="ctr"/>
+          <a:lstStyle/>
+          <a:p>
+            <a:pPr algn="ctr"/>
+          </a:p>
+        </p:txBody>
+      </p:sp>
+      <p:sp>
+        <p:nvSpPr>
+          <p:cNvPr id="18" name="Rectangle 17"/>
+          <p:cNvSpPr/>
+          <p:nvPr/>
+        </p:nvSpPr>
+        <p:spPr>
+          <a:xfrm>
+            <a:off x="4308652" y="1328651"/>
+            <a:ext cx="4321454" cy="2861100"/>
+          </a:xfrm>
+          <a:prstGeom prst="rect">
+            <a:avLst/>
+          </a:prstGeom>
+          <a:solidFill>
+            <a:srgbClr val="FCFDFF"/>
+          </a:solidFill>
+          <a:ln w="7620">
+            <a:solidFill>
+              <a:srgbClr val="BAC8DC"/>
+            </a:solidFill>
+          </a:ln>
+        </p:spPr>
+        <p:style>
+          <a:lnRef idx="1">
+            <a:schemeClr val="accent1"/>
+          </a:lnRef>
+          <a:fillRef idx="3">
+            <a:schemeClr val="accent1"/>
+          </a:fillRef>
+          <a:effectRef idx="2">
+            <a:schemeClr val="accent1"/>
+          </a:effectRef>
+          <a:fontRef idx="minor">
+            <a:schemeClr val="lt1"/>
+          </a:fontRef>
+        </p:style>
+        <p:txBody>
+          <a:bodyPr rtlCol="0" anchor="ctr"/>
+          <a:lstStyle/>
+          <a:p>
+            <a:pPr algn="ctr"/>
+          </a:p>
+        </p:txBody>
+      </p:sp>
+      <p:pic>
+        <p:nvPicPr>
+          <p:cNvPr id="19" name="Picture 18" descr="eval_results.png"/>
+          <p:cNvPicPr>
+            <a:picLocks noChangeAspect="1"/>
+          </p:cNvPicPr>
+          <p:nvPr/>
+        </p:nvPicPr>
+        <p:blipFill>
+          <a:blip r:embed="rId2"/>
+          <a:stretch>
+            <a:fillRect/>
+          </a:stretch>
+        </p:blipFill>
+        <p:spPr>
+          <a:xfrm>
+            <a:off x="4345228" y="1365227"/>
+            <a:ext cx="4248302" cy="2787948"/>
+          </a:xfrm>
+          <a:prstGeom prst="rect">
+            <a:avLst/>
+          </a:prstGeom>
+        </p:spPr>
+      </p:pic>
+      <p:sp>
+        <p:nvSpPr>
+          <p:cNvPr id="20" name="TextBox 19"/>
+          <p:cNvSpPr txBox="1"/>
+          <p:nvPr/>
+        </p:nvSpPr>
+        <p:spPr>
+          <a:xfrm>
+            <a:off x="4160520" y="4521708"/>
+            <a:ext cx="4617720" cy="219456"/>
+          </a:xfrm>
+          <a:prstGeom prst="rect">
+            <a:avLst/>
+          </a:prstGeom>
+          <a:noFill/>
+        </p:spPr>
+        <p:txBody>
+          <a:bodyPr wrap="square" anchor="ctr">
+            <a:spAutoFit/>
+          </a:bodyPr>
+          <a:lstStyle/>
+          <a:p>
+            <a:pPr algn="ctr"/>
+            <a:r>
+              <a:rPr sz="800" b="0">
+                <a:solidFill>
+                  <a:srgbClr val="5A6273"/>
+                </a:solidFill>
+                <a:latin typeface="微软雅黑"/>
+                <ns8:rFonts xmlns:ns8="http://schemas.openxmlformats.org/wordprocessingml/2006/main" ns8:eastAsia="微软雅黑" ns8:ascii="微软雅黑" ns8:hAnsi="微软雅黑"/>
+              </a:rPr>
+              <a:t>P/R/F1 均为 100%（见左栏）</a:t>
+            </a:r>
+          </a:p>
+        </p:txBody>
+      </p:sp>
+    </p:spTree>
+  </p:cSld>
+  <p:clrMapOvr>
+    <a:masterClrMapping/>
+  </p:clrMapOvr>
+</p:sld>
+</file>
+
+<file path=ppt/slides/slide25.xml><?xml version="1.0" encoding="utf-8"?>
+<p:sld xmlns:a="http://schemas.openxmlformats.org/drawingml/2006/main" xmlns:p="http://schemas.openxmlformats.org/presentationml/2006/main" xmlns:r="http://schemas.openxmlformats.org/officeDocument/2006/relationships">
+  <p:cSld>
+    <p:bg>
+      <p:bgPr>
+        <a:solidFill>
+          <a:srgbClr val="FFFFFF"/>
+        </a:solidFill>
+        <a:effectLst/>
+      </p:bgPr>
+    </p:bg>
+    <p:spTree>
+      <p:nvGrpSpPr>
+        <p:cNvPr id="1" name=""/>
+        <p:cNvGrpSpPr/>
+        <p:nvPr/>
+      </p:nvGrpSpPr>
+      <p:grpSpPr/>
+      <p:sp>
+        <p:nvSpPr>
+          <p:cNvPr id="2" name="Rectangle 1"/>
+          <p:cNvSpPr/>
+          <p:nvPr/>
+        </p:nvSpPr>
+        <p:spPr>
+          <a:xfrm>
+            <a:off x="0" y="0"/>
+            <a:ext cx="9144000" cy="420624"/>
+          </a:xfrm>
+          <a:prstGeom prst="rect">
+            <a:avLst/>
+          </a:prstGeom>
+          <a:solidFill>
+            <a:srgbClr val="143278"/>
+          </a:solidFill>
+          <a:ln>
+            <a:noFill/>
+          </a:ln>
+        </p:spPr>
+        <p:style>
+          <a:lnRef idx="1">
+            <a:schemeClr val="accent1"/>
+          </a:lnRef>
+          <a:fillRef idx="3">
+            <a:schemeClr val="accent1"/>
+          </a:fillRef>
+          <a:effectRef idx="2">
+            <a:schemeClr val="accent1"/>
+          </a:effectRef>
+          <a:fontRef idx="minor">
+            <a:schemeClr val="lt1"/>
+          </a:fontRef>
+        </p:style>
+        <p:txBody>
+          <a:bodyPr rtlCol="0" anchor="ctr"/>
+          <a:lstStyle/>
+          <a:p>
+            <a:pPr algn="ctr"/>
+          </a:p>
+        </p:txBody>
+      </p:sp>
+      <p:sp>
+        <p:nvSpPr>
+          <p:cNvPr id="3" name="TextBox 2"/>
+          <p:cNvSpPr txBox="1"/>
+          <p:nvPr/>
+        </p:nvSpPr>
+        <p:spPr>
+          <a:xfrm>
+            <a:off x="274320" y="54864"/>
+            <a:ext cx="8595360" cy="347472"/>
+          </a:xfrm>
+          <a:prstGeom prst="rect">
+            <a:avLst/>
+          </a:prstGeom>
+          <a:noFill/>
+        </p:spPr>
+        <p:txBody>
+          <a:bodyPr wrap="none">
+            <a:spAutoFit/>
+          </a:bodyPr>
+          <a:lstStyle/>
+          <a:p>
+            <a:r>
+              <a:rPr sz="900" b="1">
+                <a:solidFill>
+                  <a:srgbClr val="FFFFFF"/>
+                </a:solidFill>
+                <a:latin typeface="微软雅黑"/>
+                <ns0:rFonts xmlns:ns0="http://schemas.openxmlformats.org/wordprocessingml/2006/main" ns0:eastAsia="微软雅黑" ns0:ascii="微软雅黑" ns0:hAnsi="微软雅黑"/>
+              </a:rPr>
+              <a:t>第二十八届中国机器人及人工智能大赛  |  创新赛 · 机器人创新赛道</a:t>
+            </a:r>
+          </a:p>
+        </p:txBody>
+      </p:sp>
+      <p:sp>
+        <p:nvSpPr>
+          <p:cNvPr id="4" name="Rectangle 3"/>
+          <p:cNvSpPr/>
+          <p:nvPr/>
+        </p:nvSpPr>
+        <p:spPr>
+          <a:xfrm>
+            <a:off x="0" y="4905756"/>
+            <a:ext cx="9144000" cy="237744"/>
+          </a:xfrm>
+          <a:prstGeom prst="rect">
+            <a:avLst/>
+          </a:prstGeom>
+          <a:solidFill>
+            <a:srgbClr val="DBEAFE"/>
+          </a:solidFill>
+          <a:ln>
+            <a:noFill/>
+          </a:ln>
+        </p:spPr>
+        <p:style>
+          <a:lnRef idx="1">
+            <a:schemeClr val="accent1"/>
+          </a:lnRef>
+          <a:fillRef idx="3">
+            <a:schemeClr val="accent1"/>
+          </a:fillRef>
+          <a:effectRef idx="2">
+            <a:schemeClr val="accent1"/>
+          </a:effectRef>
+          <a:fontRef idx="minor">
+            <a:schemeClr val="lt1"/>
+          </a:fontRef>
+        </p:style>
+        <p:txBody>
+          <a:bodyPr rtlCol="0" anchor="ctr"/>
+          <a:lstStyle/>
+          <a:p>
+            <a:pPr algn="ctr"/>
+          </a:p>
+        </p:txBody>
+      </p:sp>
+      <p:sp>
+        <p:nvSpPr>
+          <p:cNvPr id="5" name="TextBox 4"/>
+          <p:cNvSpPr txBox="1"/>
+          <p:nvPr/>
+        </p:nvSpPr>
+        <p:spPr>
+          <a:xfrm>
+            <a:off x="274320" y="4951476"/>
+            <a:ext cx="8595360" cy="182880"/>
+          </a:xfrm>
+          <a:prstGeom prst="rect">
+            <a:avLst/>
+          </a:prstGeom>
+          <a:noFill/>
+        </p:spPr>
+        <p:txBody>
+          <a:bodyPr wrap="none">
+            <a:spAutoFit/>
+          </a:bodyPr>
+          <a:lstStyle/>
+          <a:p>
+            <a:pPr algn="ctr"/>
+            <a:r>
+              <a:rPr sz="800" b="0">
+                <a:solidFill>
+                  <a:srgbClr val="5A6273"/>
+                </a:solidFill>
+                <a:latin typeface="微软雅黑"/>
+                <ns1:rFonts xmlns:ns1="http://schemas.openxmlformats.org/wordprocessingml/2006/main" ns1:eastAsia="微软雅黑" ns1:ascii="微软雅黑" ns1:hAnsi="微软雅黑"/>
+              </a:rPr>
+              <a:t>从容应队 · 中山大学 · 刘小凡/白冉 · 指导教师 彭键清</a:t>
+            </a:r>
+          </a:p>
+        </p:txBody>
+      </p:sp>
+      <p:sp>
+        <p:nvSpPr>
+          <p:cNvPr id="6" name="TextBox 5"/>
+          <p:cNvSpPr txBox="1"/>
+          <p:nvPr/>
+        </p:nvSpPr>
+        <p:spPr>
+          <a:xfrm>
+            <a:off x="274320" y="466344"/>
+            <a:ext cx="8595360" cy="457200"/>
+          </a:xfrm>
+          <a:prstGeom prst="rect">
+            <a:avLst/>
+          </a:prstGeom>
+          <a:noFill/>
+        </p:spPr>
+        <p:txBody>
+          <a:bodyPr wrap="none">
+            <a:spAutoFit/>
+          </a:bodyPr>
+          <a:lstStyle/>
+          <a:p>
+            <a:pPr algn="l"/>
+            <a:r>
+              <a:rPr sz="2000" b="1">
+                <a:solidFill>
+                  <a:srgbClr val="143278"/>
+                </a:solidFill>
+                <a:latin typeface="微软雅黑"/>
+                <ns2:rFonts xmlns:ns2="http://schemas.openxmlformats.org/wordprocessingml/2006/main" ns2:eastAsia="微软雅黑" ns2:ascii="微软雅黑" ns2:hAnsi="微软雅黑"/>
+              </a:rPr>
+              <a:t>性能与延迟</a:t>
+            </a:r>
+          </a:p>
+        </p:txBody>
+      </p:sp>
+      <p:sp>
+        <p:nvSpPr>
+          <p:cNvPr id="7" name="Rectangle 6"/>
+          <p:cNvSpPr/>
+          <p:nvPr/>
+        </p:nvSpPr>
+        <p:spPr>
+          <a:xfrm>
+            <a:off x="274320" y="886968"/>
+            <a:ext cx="1143000" cy="50292"/>
+          </a:xfrm>
+          <a:prstGeom prst="rect">
+            <a:avLst/>
+          </a:prstGeom>
+          <a:solidFill>
+            <a:srgbClr val="F59E0B"/>
+          </a:solidFill>
+          <a:ln>
+            <a:noFill/>
+          </a:ln>
+        </p:spPr>
+        <p:style>
+          <a:lnRef idx="1">
+            <a:schemeClr val="accent1"/>
+          </a:lnRef>
+          <a:fillRef idx="3">
+            <a:schemeClr val="accent1"/>
+          </a:fillRef>
+          <a:effectRef idx="2">
+            <a:schemeClr val="accent1"/>
+          </a:effectRef>
+          <a:fontRef idx="minor">
+            <a:schemeClr val="lt1"/>
+          </a:fontRef>
+        </p:style>
+        <p:txBody>
+          <a:bodyPr rtlCol="0" anchor="ctr"/>
+          <a:lstStyle/>
+          <a:p>
+            <a:pPr algn="ctr"/>
+          </a:p>
+        </p:txBody>
+      </p:sp>
+      <p:sp>
+        <p:nvSpPr>
+          <p:cNvPr id="8" name="Rectangle 7"/>
+          <p:cNvSpPr/>
+          <p:nvPr/>
+        </p:nvSpPr>
+        <p:spPr>
+          <a:xfrm>
+            <a:off x="274320" y="996696"/>
+            <a:ext cx="3611880" cy="3854196"/>
+          </a:xfrm>
+          <a:prstGeom prst="rect">
+            <a:avLst/>
+          </a:prstGeom>
+          <a:solidFill>
+            <a:srgbClr val="F1F7FF"/>
+          </a:solidFill>
+          <a:ln w="10160">
+            <a:solidFill>
+              <a:srgbClr val="BAC8DC"/>
+            </a:solidFill>
+          </a:ln>
+        </p:spPr>
+        <p:style>
+          <a:lnRef idx="1">
+            <a:schemeClr val="accent1"/>
+          </a:lnRef>
+          <a:fillRef idx="3">
+            <a:schemeClr val="accent1"/>
+          </a:fillRef>
+          <a:effectRef idx="2">
+            <a:schemeClr val="accent1"/>
+          </a:effectRef>
+          <a:fontRef idx="minor">
+            <a:schemeClr val="lt1"/>
+          </a:fontRef>
+        </p:style>
+        <p:txBody>
+          <a:bodyPr rtlCol="0" anchor="ctr"/>
+          <a:lstStyle/>
+          <a:p>
+            <a:pPr algn="ctr"/>
+          </a:p>
+        </p:txBody>
+      </p:sp>
+      <p:sp>
+        <p:nvSpPr>
+          <p:cNvPr id="9" name="Rectangle 8"/>
+          <p:cNvSpPr/>
+          <p:nvPr/>
+        </p:nvSpPr>
+        <p:spPr>
+          <a:xfrm>
+            <a:off x="274320" y="996696"/>
+            <a:ext cx="73152" cy="3854196"/>
+          </a:xfrm>
+          <a:prstGeom prst="rect">
+            <a:avLst/>
+          </a:prstGeom>
+          <a:solidFill>
+            <a:srgbClr val="143278"/>
+          </a:solidFill>
+          <a:ln>
+            <a:noFill/>
+          </a:ln>
+        </p:spPr>
+        <p:style>
+          <a:lnRef idx="1">
+            <a:schemeClr val="accent1"/>
+          </a:lnRef>
+          <a:fillRef idx="3">
+            <a:schemeClr val="accent1"/>
+          </a:fillRef>
+          <a:effectRef idx="2">
+            <a:schemeClr val="accent1"/>
+          </a:effectRef>
+          <a:fontRef idx="minor">
+            <a:schemeClr val="lt1"/>
+          </a:fontRef>
+        </p:style>
+        <p:txBody>
+          <a:bodyPr rtlCol="0" anchor="ctr"/>
+          <a:lstStyle/>
+          <a:p>
+            <a:pPr algn="ctr"/>
+          </a:p>
+        </p:txBody>
+      </p:sp>
+      <p:sp>
+        <p:nvSpPr>
+          <p:cNvPr id="10" name="TextBox 9"/>
+          <p:cNvSpPr txBox="1"/>
+          <p:nvPr/>
+        </p:nvSpPr>
+        <p:spPr>
+          <a:xfrm>
+            <a:off x="438912" y="1106424"/>
+            <a:ext cx="3282696" cy="890397"/>
+          </a:xfrm>
+          <a:prstGeom prst="rect">
+            <a:avLst/>
+          </a:prstGeom>
+          <a:noFill/>
+        </p:spPr>
+        <p:txBody>
+          <a:bodyPr wrap="square" anchor="t" lIns="25400" tIns="0">
+            <a:spAutoFit/>
+          </a:bodyPr>
+          <a:lstStyle/>
+          <a:p>
+            <a:pPr>
+              <a:lnSpc>
+                <a:spcPct val="112000"/>
+              </a:lnSpc>
+              <a:spcAft>
+                <a:spcPts val="200"/>
+              </a:spcAft>
+            </a:pPr>
+            <a:r>
+              <a:rPr sz="1300" b="0">
+                <a:solidFill>
+                  <a:srgbClr val="1C202C"/>
+                </a:solidFill>
+                <a:latin typeface="微软雅黑"/>
+                <ns3:rFonts xmlns:ns3="http://schemas.openxmlformats.org/wordprocessingml/2006/main" ns3:eastAsia="微软雅黑" ns3:ascii="微软雅黑" ns3:hAnsi="微软雅黑"/>
+              </a:rPr>
+              <a:t>● 骨架提取约占时最多，仍满足实时要求</a:t>
+            </a:r>
+          </a:p>
+        </p:txBody>
+      </p:sp>
+      <p:sp>
+        <p:nvSpPr>
+          <p:cNvPr id="11" name="TextBox 10"/>
+          <p:cNvSpPr txBox="1"/>
+          <p:nvPr/>
+        </p:nvSpPr>
+        <p:spPr>
+          <a:xfrm>
+            <a:off x="438912" y="2015109"/>
+            <a:ext cx="3282696" cy="890397"/>
+          </a:xfrm>
+          <a:prstGeom prst="rect">
+            <a:avLst/>
+          </a:prstGeom>
+          <a:noFill/>
+        </p:spPr>
+        <p:txBody>
+          <a:bodyPr wrap="square" anchor="t" lIns="25400" tIns="0">
+            <a:spAutoFit/>
+          </a:bodyPr>
+          <a:lstStyle/>
+          <a:p>
+            <a:pPr>
+              <a:lnSpc>
+                <a:spcPct val="112000"/>
+              </a:lnSpc>
+              <a:spcAft>
+                <a:spcPts val="200"/>
+              </a:spcAft>
+            </a:pPr>
+            <a:r>
+              <a:rPr sz="1300" b="0">
+                <a:solidFill>
+                  <a:srgbClr val="1C202C"/>
+                </a:solidFill>
+                <a:latin typeface="微软雅黑"/>
+                <ns4:rFonts xmlns:ns4="http://schemas.openxmlformats.org/wordprocessingml/2006/main" ns4:eastAsia="微软雅黑" ns4:ascii="微软雅黑" ns4:hAnsi="微软雅黑"/>
+              </a:rPr>
+              <a:t>● 融合与规则判定开销较小</a:t>
+            </a:r>
+          </a:p>
+        </p:txBody>
+      </p:sp>
+      <p:sp>
+        <p:nvSpPr>
+          <p:cNvPr id="12" name="TextBox 11"/>
+          <p:cNvSpPr txBox="1"/>
+          <p:nvPr/>
+        </p:nvSpPr>
+        <p:spPr>
+          <a:xfrm>
+            <a:off x="438912" y="2923794"/>
+            <a:ext cx="3282696" cy="890397"/>
+          </a:xfrm>
+          <a:prstGeom prst="rect">
+            <a:avLst/>
+          </a:prstGeom>
+          <a:noFill/>
+        </p:spPr>
+        <p:txBody>
+          <a:bodyPr wrap="square" anchor="t" lIns="25400" tIns="0">
+            <a:spAutoFit/>
+          </a:bodyPr>
+          <a:lstStyle/>
+          <a:p>
+            <a:pPr>
+              <a:lnSpc>
+                <a:spcPct val="112000"/>
+              </a:lnSpc>
+              <a:spcAft>
+                <a:spcPts val="200"/>
+              </a:spcAft>
+            </a:pPr>
+            <a:r>
+              <a:rPr sz="1300" b="0">
+                <a:solidFill>
+                  <a:srgbClr val="1C202C"/>
+                </a:solidFill>
+                <a:latin typeface="微软雅黑"/>
+                <ns5:rFonts xmlns:ns5="http://schemas.openxmlformats.org/wordprocessingml/2006/main" ns5:eastAsia="微软雅黑" ns5:ascii="微软雅黑" ns5:hAnsi="微软雅黑"/>
+              </a:rPr>
+              <a:t>● 端到端在 CPU 上约 42ms</a:t>
+            </a:r>
+          </a:p>
+        </p:txBody>
+      </p:sp>
+      <p:sp>
+        <p:nvSpPr>
+          <p:cNvPr id="13" name="TextBox 12"/>
+          <p:cNvSpPr txBox="1"/>
+          <p:nvPr/>
+        </p:nvSpPr>
+        <p:spPr>
+          <a:xfrm>
+            <a:off x="438912" y="3832479"/>
+            <a:ext cx="3282696" cy="890397"/>
+          </a:xfrm>
+          <a:prstGeom prst="rect">
+            <a:avLst/>
+          </a:prstGeom>
+          <a:noFill/>
+        </p:spPr>
+        <p:txBody>
+          <a:bodyPr wrap="square" anchor="t" lIns="25400" tIns="0">
+            <a:spAutoFit/>
+          </a:bodyPr>
+          <a:lstStyle/>
+          <a:p>
+            <a:pPr>
+              <a:lnSpc>
+                <a:spcPct val="112000"/>
+              </a:lnSpc>
+              <a:spcAft>
+                <a:spcPts val="200"/>
+              </a:spcAft>
+            </a:pPr>
+            <a:r>
+              <a:rPr sz="1300" b="0">
+                <a:solidFill>
+                  <a:srgbClr val="1C202C"/>
+                </a:solidFill>
+                <a:latin typeface="微软雅黑"/>
+                <ns6:rFonts xmlns:ns6="http://schemas.openxmlformats.org/wordprocessingml/2006/main" ns6:eastAsia="微软雅黑" ns6:ascii="微软雅黑" ns6:hAnsi="微软雅黑"/>
+              </a:rPr>
+              <a:t>● 现场演示不依赖 GPU</a:t>
+            </a:r>
+          </a:p>
+        </p:txBody>
+      </p:sp>
+      <p:sp>
+        <p:nvSpPr>
+          <p:cNvPr id="14" name="Rectangle 13"/>
+          <p:cNvSpPr/>
+          <p:nvPr/>
+        </p:nvSpPr>
+        <p:spPr>
+          <a:xfrm>
+            <a:off x="4105656" y="1033272"/>
+            <a:ext cx="4727448" cy="3744468"/>
+          </a:xfrm>
+          <a:prstGeom prst="rect">
+            <a:avLst/>
+          </a:prstGeom>
+          <a:solidFill>
+            <a:srgbClr val="FFFFFF"/>
+          </a:solidFill>
+          <a:ln w="9525">
+            <a:solidFill>
+              <a:srgbClr val="BAC8DC"/>
+            </a:solidFill>
+          </a:ln>
+        </p:spPr>
+        <p:style>
+          <a:lnRef idx="1">
+            <a:schemeClr val="accent1"/>
+          </a:lnRef>
+          <a:fillRef idx="3">
+            <a:schemeClr val="accent1"/>
+          </a:fillRef>
+          <a:effectRef idx="2">
+            <a:schemeClr val="accent1"/>
+          </a:effectRef>
+          <a:fontRef idx="minor">
+            <a:schemeClr val="lt1"/>
+          </a:fontRef>
+        </p:style>
+        <p:txBody>
+          <a:bodyPr rtlCol="0" anchor="ctr"/>
+          <a:lstStyle/>
+          <a:p>
+            <a:pPr algn="ctr"/>
+          </a:p>
+        </p:txBody>
+      </p:sp>
+      <p:sp>
+        <p:nvSpPr>
+          <p:cNvPr id="15" name="Rectangle 14"/>
+          <p:cNvSpPr/>
+          <p:nvPr/>
+        </p:nvSpPr>
+        <p:spPr>
+          <a:xfrm>
+            <a:off x="3968496" y="996696"/>
+            <a:ext cx="10972" cy="3854196"/>
+          </a:xfrm>
+          <a:prstGeom prst="rect">
+            <a:avLst/>
+          </a:prstGeom>
+          <a:solidFill>
+            <a:srgbClr val="BAC8DC"/>
+          </a:solidFill>
+          <a:ln>
+            <a:noFill/>
+          </a:ln>
+        </p:spPr>
+        <p:style>
+          <a:lnRef idx="1">
+            <a:schemeClr val="accent1"/>
+          </a:lnRef>
+          <a:fillRef idx="3">
+            <a:schemeClr val="accent1"/>
+          </a:fillRef>
+          <a:effectRef idx="2">
+            <a:schemeClr val="accent1"/>
+          </a:effectRef>
+          <a:fontRef idx="minor">
+            <a:schemeClr val="lt1"/>
+          </a:fontRef>
+        </p:style>
+        <p:txBody>
+          <a:bodyPr rtlCol="0" anchor="ctr"/>
+          <a:lstStyle/>
+          <a:p>
+            <a:pPr algn="ctr"/>
+          </a:p>
+        </p:txBody>
+      </p:sp>
+      <p:sp>
+        <p:nvSpPr>
+          <p:cNvPr id="16" name="Rectangle 15"/>
+          <p:cNvSpPr/>
+          <p:nvPr/>
+        </p:nvSpPr>
+        <p:spPr>
+          <a:xfrm>
+            <a:off x="4341464" y="1151595"/>
+            <a:ext cx="4255831" cy="3215213"/>
+          </a:xfrm>
+          <a:prstGeom prst="rect">
+            <a:avLst/>
+          </a:prstGeom>
+          <a:solidFill>
+            <a:srgbClr val="FCFDFF"/>
+          </a:solidFill>
+          <a:ln w="7620">
+            <a:solidFill>
+              <a:srgbClr val="BAC8DC"/>
+            </a:solidFill>
+          </a:ln>
+        </p:spPr>
+        <p:style>
+          <a:lnRef idx="1">
+            <a:schemeClr val="accent1"/>
+          </a:lnRef>
+          <a:fillRef idx="3">
+            <a:schemeClr val="accent1"/>
+          </a:fillRef>
+          <a:effectRef idx="2">
+            <a:schemeClr val="accent1"/>
+          </a:effectRef>
+          <a:fontRef idx="minor">
+            <a:schemeClr val="lt1"/>
+          </a:fontRef>
+        </p:style>
+        <p:txBody>
+          <a:bodyPr rtlCol="0" anchor="ctr"/>
+          <a:lstStyle/>
+          <a:p>
+            <a:pPr algn="ctr"/>
+          </a:p>
+        </p:txBody>
+      </p:sp>
+      <p:pic>
+        <p:nvPicPr>
+          <p:cNvPr id="17" name="Picture 16" descr="latency_bar.png"/>
+          <p:cNvPicPr>
+            <a:picLocks noChangeAspect="1"/>
+          </p:cNvPicPr>
+          <p:nvPr/>
+        </p:nvPicPr>
+        <p:blipFill>
+          <a:blip r:embed="rId2"/>
+          <a:stretch>
+            <a:fillRect/>
+          </a:stretch>
+        </p:blipFill>
+        <p:spPr>
+          <a:xfrm>
+            <a:off x="4378040" y="1188171"/>
+            <a:ext cx="4182679" cy="3142061"/>
+          </a:xfrm>
+          <a:prstGeom prst="rect">
+            <a:avLst/>
+          </a:prstGeom>
+        </p:spPr>
+      </p:pic>
+      <p:sp>
+        <p:nvSpPr>
+          <p:cNvPr id="18" name="TextBox 17"/>
+          <p:cNvSpPr txBox="1"/>
+          <p:nvPr/>
+        </p:nvSpPr>
+        <p:spPr>
+          <a:xfrm>
+            <a:off x="4160520" y="4521708"/>
+            <a:ext cx="4617720" cy="219456"/>
+          </a:xfrm>
+          <a:prstGeom prst="rect">
+            <a:avLst/>
+          </a:prstGeom>
+          <a:noFill/>
+        </p:spPr>
+        <p:txBody>
+          <a:bodyPr wrap="square" anchor="ctr">
+            <a:spAutoFit/>
+          </a:bodyPr>
+          <a:lstStyle/>
+          <a:p>
+            <a:pPr algn="ctr"/>
+            <a:r>
+              <a:rPr sz="800" b="0">
+                <a:solidFill>
+                  <a:srgbClr val="5A6273"/>
+                </a:solidFill>
+                <a:latin typeface="微软雅黑"/>
+                <ns7:rFonts xmlns:ns7="http://schemas.openxmlformats.org/wordprocessingml/2006/main" ns7:eastAsia="微软雅黑" ns7:ascii="微软雅黑" ns7:hAnsi="微软雅黑"/>
+              </a:rPr>
+              <a:t>单帧链路耗时（本机粗测）</a:t>
+            </a:r>
+          </a:p>
+        </p:txBody>
+      </p:sp>
+    </p:spTree>
+  </p:cSld>
+  <p:clrMapOvr>
+    <a:masterClrMapping/>
+  </p:clrMapOvr>
+</p:sld>
+</file>
+
+<file path=ppt/slides/slide26.xml><?xml version="1.0" encoding="utf-8"?>
+<p:sld xmlns:a="http://schemas.openxmlformats.org/drawingml/2006/main" xmlns:p="http://schemas.openxmlformats.org/presentationml/2006/main" xmlns:r="http://schemas.openxmlformats.org/officeDocument/2006/relationships">
+  <p:cSld>
+    <p:bg>
+      <p:bgPr>
+        <a:solidFill>
+          <a:srgbClr val="FFFFFF"/>
+        </a:solidFill>
+        <a:effectLst/>
+      </p:bgPr>
+    </p:bg>
+    <p:spTree>
+      <p:nvGrpSpPr>
+        <p:cNvPr id="1" name=""/>
+        <p:cNvGrpSpPr/>
+        <p:nvPr/>
+      </p:nvGrpSpPr>
+      <p:grpSpPr/>
+      <p:sp>
+        <p:nvSpPr>
+          <p:cNvPr id="2" name="Rectangle 1"/>
+          <p:cNvSpPr/>
+          <p:nvPr/>
+        </p:nvSpPr>
+        <p:spPr>
+          <a:xfrm>
+            <a:off x="0" y="0"/>
+            <a:ext cx="9144000" cy="420624"/>
+          </a:xfrm>
+          <a:prstGeom prst="rect">
+            <a:avLst/>
+          </a:prstGeom>
+          <a:solidFill>
+            <a:srgbClr val="143278"/>
+          </a:solidFill>
+          <a:ln>
+            <a:noFill/>
+          </a:ln>
+        </p:spPr>
+        <p:style>
+          <a:lnRef idx="1">
+            <a:schemeClr val="accent1"/>
+          </a:lnRef>
+          <a:fillRef idx="3">
+            <a:schemeClr val="accent1"/>
+          </a:fillRef>
+          <a:effectRef idx="2">
+            <a:schemeClr val="accent1"/>
+          </a:effectRef>
+          <a:fontRef idx="minor">
+            <a:schemeClr val="lt1"/>
+          </a:fontRef>
+        </p:style>
+        <p:txBody>
+          <a:bodyPr rtlCol="0" anchor="ctr"/>
+          <a:lstStyle/>
+          <a:p>
+            <a:pPr algn="ctr"/>
+          </a:p>
+        </p:txBody>
+      </p:sp>
+      <p:sp>
+        <p:nvSpPr>
+          <p:cNvPr id="3" name="TextBox 2"/>
+          <p:cNvSpPr txBox="1"/>
+          <p:nvPr/>
+        </p:nvSpPr>
+        <p:spPr>
+          <a:xfrm>
+            <a:off x="274320" y="54864"/>
+            <a:ext cx="8595360" cy="347472"/>
+          </a:xfrm>
+          <a:prstGeom prst="rect">
+            <a:avLst/>
+          </a:prstGeom>
+          <a:noFill/>
+        </p:spPr>
+        <p:txBody>
+          <a:bodyPr wrap="none">
+            <a:spAutoFit/>
+          </a:bodyPr>
+          <a:lstStyle/>
+          <a:p>
+            <a:r>
+              <a:rPr sz="900" b="1">
+                <a:solidFill>
+                  <a:srgbClr val="FFFFFF"/>
+                </a:solidFill>
+                <a:latin typeface="微软雅黑"/>
+                <ns0:rFonts xmlns:ns0="http://schemas.openxmlformats.org/wordprocessingml/2006/main" ns0:eastAsia="微软雅黑" ns0:ascii="微软雅黑" ns0:hAnsi="微软雅黑"/>
+              </a:rPr>
+              <a:t>第二十八届中国机器人及人工智能大赛  |  创新赛 · 机器人创新赛道</a:t>
+            </a:r>
+          </a:p>
+        </p:txBody>
+      </p:sp>
+      <p:sp>
+        <p:nvSpPr>
+          <p:cNvPr id="4" name="Rectangle 3"/>
+          <p:cNvSpPr/>
+          <p:nvPr/>
+        </p:nvSpPr>
+        <p:spPr>
+          <a:xfrm>
+            <a:off x="0" y="4905756"/>
+            <a:ext cx="9144000" cy="237744"/>
+          </a:xfrm>
+          <a:prstGeom prst="rect">
+            <a:avLst/>
+          </a:prstGeom>
+          <a:solidFill>
+            <a:srgbClr val="DBEAFE"/>
+          </a:solidFill>
+          <a:ln>
+            <a:noFill/>
+          </a:ln>
+        </p:spPr>
+        <p:style>
+          <a:lnRef idx="1">
+            <a:schemeClr val="accent1"/>
+          </a:lnRef>
+          <a:fillRef idx="3">
+            <a:schemeClr val="accent1"/>
+          </a:fillRef>
+          <a:effectRef idx="2">
+            <a:schemeClr val="accent1"/>
+          </a:effectRef>
+          <a:fontRef idx="minor">
+            <a:schemeClr val="lt1"/>
+          </a:fontRef>
+        </p:style>
+        <p:txBody>
+          <a:bodyPr rtlCol="0" anchor="ctr"/>
+          <a:lstStyle/>
+          <a:p>
+            <a:pPr algn="ctr"/>
+          </a:p>
+        </p:txBody>
+      </p:sp>
+      <p:sp>
+        <p:nvSpPr>
+          <p:cNvPr id="5" name="TextBox 4"/>
+          <p:cNvSpPr txBox="1"/>
+          <p:nvPr/>
+        </p:nvSpPr>
+        <p:spPr>
+          <a:xfrm>
+            <a:off x="274320" y="4951476"/>
+            <a:ext cx="8595360" cy="182880"/>
+          </a:xfrm>
+          <a:prstGeom prst="rect">
+            <a:avLst/>
+          </a:prstGeom>
+          <a:noFill/>
+        </p:spPr>
+        <p:txBody>
+          <a:bodyPr wrap="none">
+            <a:spAutoFit/>
+          </a:bodyPr>
+          <a:lstStyle/>
+          <a:p>
+            <a:pPr algn="ctr"/>
+            <a:r>
+              <a:rPr sz="800" b="0">
+                <a:solidFill>
+                  <a:srgbClr val="5A6273"/>
+                </a:solidFill>
+                <a:latin typeface="微软雅黑"/>
+                <ns1:rFonts xmlns:ns1="http://schemas.openxmlformats.org/wordprocessingml/2006/main" ns1:eastAsia="微软雅黑" ns1:ascii="微软雅黑" ns1:hAnsi="微软雅黑"/>
+              </a:rPr>
+              <a:t>从容应队 · 中山大学 · 刘小凡/白冉 · 指导教师 彭键清</a:t>
+            </a:r>
+          </a:p>
+        </p:txBody>
+      </p:sp>
+      <p:sp>
+        <p:nvSpPr>
+          <p:cNvPr id="6" name="TextBox 5"/>
+          <p:cNvSpPr txBox="1"/>
+          <p:nvPr/>
+        </p:nvSpPr>
+        <p:spPr>
+          <a:xfrm>
+            <a:off x="274320" y="466344"/>
+            <a:ext cx="8595360" cy="457200"/>
+          </a:xfrm>
+          <a:prstGeom prst="rect">
+            <a:avLst/>
+          </a:prstGeom>
+          <a:noFill/>
+        </p:spPr>
+        <p:txBody>
+          <a:bodyPr wrap="none">
+            <a:spAutoFit/>
+          </a:bodyPr>
+          <a:lstStyle/>
+          <a:p>
+            <a:pPr algn="l"/>
+            <a:r>
+              <a:rPr sz="2000" b="1">
+                <a:solidFill>
+                  <a:srgbClr val="143278"/>
+                </a:solidFill>
+                <a:latin typeface="微软雅黑"/>
+                <ns2:rFonts xmlns:ns2="http://schemas.openxmlformats.org/wordprocessingml/2006/main" ns2:eastAsia="微软雅黑" ns2:ascii="微软雅黑" ns2:hAnsi="微软雅黑"/>
+              </a:rPr>
               <a:t>开源与可复现性</a:t>
             </a:r>
           </a:p>
@@ -14297,7 +15615,7 @@
                 <a:gridCol w="868680"/>
                 <a:gridCol w="2743200"/>
               </a:tblGrid>
-              <a:tr h="770839">
+              <a:tr h="642366">
                 <a:tc>
                   <a:txBody>
                     <a:bodyPr anchor="ctr"/>
@@ -14347,7 +15665,7 @@
                   </a:tcPr>
                 </a:tc>
               </a:tr>
-              <a:tr h="770839">
+              <a:tr h="642366">
                 <a:tc>
                   <a:txBody>
                     <a:bodyPr anchor="ctr"/>
@@ -14397,7 +15715,7 @@
                   </a:tcPr>
                 </a:tc>
               </a:tr>
-              <a:tr h="770839">
+              <a:tr h="642366">
                 <a:tc>
                   <a:txBody>
                     <a:bodyPr anchor="ctr"/>
@@ -14447,7 +15765,7 @@
                   </a:tcPr>
                 </a:tc>
               </a:tr>
-              <a:tr h="770839">
+              <a:tr h="642366">
                 <a:tc>
                   <a:txBody>
                     <a:bodyPr anchor="ctr"/>
@@ -14462,7 +15780,7 @@
                           <a:latin typeface="微软雅黑"/>
                           <ns9:rFonts xmlns:ns9="http://schemas.openxmlformats.org/wordprocessingml/2006/main" ns9:eastAsia="微软雅黑" ns9:ascii="微软雅黑" ns9:hAnsi="微软雅黑"/>
                         </a:rPr>
-                        <a:t>演示录像</a:t>
+                        <a:t>Web 演示</a:t>
                       </a:r>
                     </a:p>
                   </a:txBody>
@@ -14497,7 +15815,7 @@
                   </a:tcPr>
                 </a:tc>
               </a:tr>
-              <a:tr h="770840">
+              <a:tr h="642366">
                 <a:tc>
                   <a:txBody>
                     <a:bodyPr anchor="ctr"/>
@@ -14511,6 +15829,56 @@
                           </a:solidFill>
                           <a:latin typeface="微软雅黑"/>
                           <ns11:rFonts xmlns:ns11="http://schemas.openxmlformats.org/wordprocessingml/2006/main" ns11:eastAsia="微软雅黑" ns11:ascii="微软雅黑" ns11:hAnsi="微软雅黑"/>
+                        </a:rPr>
+                        <a:t>G1 仿真</a:t>
+                      </a:r>
+                    </a:p>
+                  </a:txBody>
+                  <a:tcPr marL="50800" marR="50800" marT="25400" marB="25400">
+                    <a:solidFill>
+                      <a:srgbClr val="143278"/>
+                    </a:solidFill>
+                  </a:tcPr>
+                </a:tc>
+                <a:tc>
+                  <a:txBody>
+                    <a:bodyPr anchor="ctr" wrap="square"/>
+                    <a:lstStyle/>
+                    <a:p>
+                      <a:pPr algn="l"/>
+                      <a:r>
+                        <a:rPr sz="800" b="0">
+                          <a:solidFill>
+                            <a:srgbClr val="143278"/>
+                          </a:solidFill>
+                          <a:latin typeface="微软雅黑"/>
+                          <ns12:rFonts xmlns:ns12="http://schemas.openxmlformats.org/wordprocessingml/2006/main" ns12:eastAsia="微软雅黑" ns12:ascii="微软雅黑" ns12:hAnsi="微软雅黑"/>
+                        </a:rPr>
+                        <a:t>docs/assets/demo_isaac_g1_locomotion.mp4</a:t>
+                      </a:r>
+                    </a:p>
+                  </a:txBody>
+                  <a:tcPr marL="63500">
+                    <a:solidFill>
+                      <a:srgbClr val="F1F7FF"/>
+                    </a:solidFill>
+                  </a:tcPr>
+                </a:tc>
+              </a:tr>
+              <a:tr h="642366">
+                <a:tc>
+                  <a:txBody>
+                    <a:bodyPr anchor="ctr"/>
+                    <a:lstStyle/>
+                    <a:p>
+                      <a:pPr algn="ctr"/>
+                      <a:r>
+                        <a:rPr sz="900" b="1">
+                          <a:solidFill>
+                            <a:srgbClr val="FFFFFF"/>
+                          </a:solidFill>
+                          <a:latin typeface="微软雅黑"/>
+                          <ns13:rFonts xmlns:ns13="http://schemas.openxmlformats.org/wordprocessingml/2006/main" ns13:eastAsia="微软雅黑" ns13:ascii="微软雅黑" ns13:hAnsi="微软雅黑"/>
                         </a:rPr>
                         <a:t>软著</a:t>
                       </a:r>
@@ -14534,7 +15902,7 @@
                             <a:srgbClr val="143278"/>
                           </a:solidFill>
                           <a:latin typeface="微软雅黑"/>
-                          <ns12:rFonts xmlns:ns12="http://schemas.openxmlformats.org/wordprocessingml/2006/main" ns12:eastAsia="微软雅黑" ns12:ascii="微软雅黑" ns12:hAnsi="微软雅黑"/>
+                          <ns14:rFonts xmlns:ns14="http://schemas.openxmlformats.org/wordprocessingml/2006/main" ns14:eastAsia="微软雅黑" ns14:ascii="微软雅黑" ns14:hAnsi="微软雅黑"/>
                         </a:rPr>
                         <a:t>申请中</a:t>
                       </a:r>
@@ -14542,7 +15910,7 @@
                   </a:txBody>
                   <a:tcPr marL="63500">
                     <a:solidFill>
-                      <a:srgbClr val="F1F7FF"/>
+                      <a:srgbClr val="FFFFFF"/>
                     </a:solidFill>
                   </a:tcPr>
                 </a:tc>
@@ -14649,7 +16017,7 @@
                   <a:srgbClr val="143278"/>
                 </a:solidFill>
                 <a:latin typeface="微软雅黑"/>
-                <ns13:rFonts xmlns:ns13="http://schemas.openxmlformats.org/wordprocessingml/2006/main" ns13:eastAsia="微软雅黑" ns13:ascii="微软雅黑" ns13:hAnsi="微软雅黑"/>
+                <ns15:rFonts xmlns:ns15="http://schemas.openxmlformats.org/wordprocessingml/2006/main" ns15:eastAsia="微软雅黑" ns15:ascii="微软雅黑" ns15:hAnsi="微软雅黑"/>
               </a:rPr>
               <a:t>扫码访问 GitHub 仓库</a:t>
             </a:r>
@@ -14689,7 +16057,7 @@
                   <a:srgbClr val="166534"/>
                 </a:solidFill>
                 <a:latin typeface="微软雅黑"/>
-                <ns14:rFonts xmlns:ns14="http://schemas.openxmlformats.org/wordprocessingml/2006/main" ns14:eastAsia="微软雅黑" ns14:ascii="微软雅黑" ns14:hAnsi="微软雅黑"/>
+                <ns16:rFonts xmlns:ns16="http://schemas.openxmlformats.org/wordprocessingml/2006/main" ns16:eastAsia="微软雅黑" ns16:ascii="微软雅黑" ns16:hAnsi="微软雅黑"/>
               </a:rPr>
               <a:t>✓  完整源码与 README</a:t>
             </a:r>
@@ -14706,7 +16074,7 @@
                   <a:srgbClr val="166534"/>
                 </a:solidFill>
                 <a:latin typeface="微软雅黑"/>
-                <ns15:rFonts xmlns:ns15="http://schemas.openxmlformats.org/wordprocessingml/2006/main" ns15:eastAsia="微软雅黑" ns15:ascii="微软雅黑" ns15:hAnsi="微软雅黑"/>
+                <ns17:rFonts xmlns:ns17="http://schemas.openxmlformats.org/wordprocessingml/2006/main" ns17:eastAsia="微软雅黑" ns17:ascii="微软雅黑" ns17:hAnsi="微软雅黑"/>
               </a:rPr>
               <a:t>✓  一键启动脚本 run_web.sh</a:t>
             </a:r>
@@ -14723,7 +16091,7 @@
                   <a:srgbClr val="166534"/>
                 </a:solidFill>
                 <a:latin typeface="微软雅黑"/>
-                <ns16:rFonts xmlns:ns16="http://schemas.openxmlformats.org/wordprocessingml/2006/main" ns16:eastAsia="微软雅黑" ns16:ascii="微软雅黑" ns16:hAnsi="微软雅黑"/>
+                <ns18:rFonts xmlns:ns18="http://schemas.openxmlformats.org/wordprocessingml/2006/main" ns18:eastAsia="微软雅黑" ns18:ascii="微软雅黑" ns18:hAnsi="微软雅黑"/>
               </a:rPr>
               <a:t>✓  fall_eval_report.json</a:t>
             </a:r>
@@ -14740,7 +16108,7 @@
                   <a:srgbClr val="166534"/>
                 </a:solidFill>
                 <a:latin typeface="微软雅黑"/>
-                <ns17:rFonts xmlns:ns17="http://schemas.openxmlformats.org/wordprocessingml/2006/main" ns17:eastAsia="微软雅黑" ns17:ascii="微软雅黑" ns17:hAnsi="微软雅黑"/>
+                <ns19:rFonts xmlns:ns19="http://schemas.openxmlformats.org/wordprocessingml/2006/main" ns19:eastAsia="微软雅黑" ns19:ascii="微软雅黑" ns19:hAnsi="微软雅黑"/>
               </a:rPr>
               <a:t>✓  pytest 单元测试</a:t>
             </a:r>
@@ -14757,1494 +16125,9 @@
                   <a:srgbClr val="B45309"/>
                 </a:solidFill>
                 <a:latin typeface="微软雅黑"/>
-                <ns18:rFonts xmlns:ns18="http://schemas.openxmlformats.org/wordprocessingml/2006/main" ns18:eastAsia="微软雅黑" ns18:ascii="微软雅黑" ns18:hAnsi="微软雅黑"/>
+                <ns20:rFonts xmlns:ns20="http://schemas.openxmlformats.org/wordprocessingml/2006/main" ns20:eastAsia="微软雅黑" ns20:ascii="微软雅黑" ns20:hAnsi="微软雅黑"/>
               </a:rPr>
               <a:t>○  软著申请中</a:t>
-            </a:r>
-          </a:p>
-        </p:txBody>
-      </p:sp>
-    </p:spTree>
-  </p:cSld>
-  <p:clrMapOvr>
-    <a:masterClrMapping/>
-  </p:clrMapOvr>
-</p:sld>
-</file>
-
-<file path=ppt/slides/slide25.xml><?xml version="1.0" encoding="utf-8"?>
-<p:sld xmlns:a="http://schemas.openxmlformats.org/drawingml/2006/main" xmlns:p="http://schemas.openxmlformats.org/presentationml/2006/main" xmlns:r="http://schemas.openxmlformats.org/officeDocument/2006/relationships">
-  <p:cSld>
-    <p:bg>
-      <p:bgPr>
-        <a:solidFill>
-          <a:srgbClr val="FFFFFF"/>
-        </a:solidFill>
-        <a:effectLst/>
-      </p:bgPr>
-    </p:bg>
-    <p:spTree>
-      <p:nvGrpSpPr>
-        <p:cNvPr id="1" name=""/>
-        <p:cNvGrpSpPr/>
-        <p:nvPr/>
-      </p:nvGrpSpPr>
-      <p:grpSpPr/>
-      <p:sp>
-        <p:nvSpPr>
-          <p:cNvPr id="2" name="Rectangle 1"/>
-          <p:cNvSpPr/>
-          <p:nvPr/>
-        </p:nvSpPr>
-        <p:spPr>
-          <a:xfrm>
-            <a:off x="0" y="0"/>
-            <a:ext cx="9144000" cy="420624"/>
-          </a:xfrm>
-          <a:prstGeom prst="rect">
-            <a:avLst/>
-          </a:prstGeom>
-          <a:solidFill>
-            <a:srgbClr val="143278"/>
-          </a:solidFill>
-          <a:ln>
-            <a:noFill/>
-          </a:ln>
-        </p:spPr>
-        <p:style>
-          <a:lnRef idx="1">
-            <a:schemeClr val="accent1"/>
-          </a:lnRef>
-          <a:fillRef idx="3">
-            <a:schemeClr val="accent1"/>
-          </a:fillRef>
-          <a:effectRef idx="2">
-            <a:schemeClr val="accent1"/>
-          </a:effectRef>
-          <a:fontRef idx="minor">
-            <a:schemeClr val="lt1"/>
-          </a:fontRef>
-        </p:style>
-        <p:txBody>
-          <a:bodyPr rtlCol="0" anchor="ctr"/>
-          <a:lstStyle/>
-          <a:p>
-            <a:pPr algn="ctr"/>
-          </a:p>
-        </p:txBody>
-      </p:sp>
-      <p:sp>
-        <p:nvSpPr>
-          <p:cNvPr id="3" name="TextBox 2"/>
-          <p:cNvSpPr txBox="1"/>
-          <p:nvPr/>
-        </p:nvSpPr>
-        <p:spPr>
-          <a:xfrm>
-            <a:off x="274320" y="54864"/>
-            <a:ext cx="8595360" cy="347472"/>
-          </a:xfrm>
-          <a:prstGeom prst="rect">
-            <a:avLst/>
-          </a:prstGeom>
-          <a:noFill/>
-        </p:spPr>
-        <p:txBody>
-          <a:bodyPr wrap="none">
-            <a:spAutoFit/>
-          </a:bodyPr>
-          <a:lstStyle/>
-          <a:p>
-            <a:r>
-              <a:rPr sz="900" b="1">
-                <a:solidFill>
-                  <a:srgbClr val="FFFFFF"/>
-                </a:solidFill>
-                <a:latin typeface="微软雅黑"/>
-                <ns0:rFonts xmlns:ns0="http://schemas.openxmlformats.org/wordprocessingml/2006/main" ns0:eastAsia="微软雅黑" ns0:ascii="微软雅黑" ns0:hAnsi="微软雅黑"/>
-              </a:rPr>
-              <a:t>第二十八届中国机器人及人工智能大赛  |  创新赛 · 机器人创新赛道</a:t>
-            </a:r>
-          </a:p>
-        </p:txBody>
-      </p:sp>
-      <p:sp>
-        <p:nvSpPr>
-          <p:cNvPr id="4" name="Rectangle 3"/>
-          <p:cNvSpPr/>
-          <p:nvPr/>
-        </p:nvSpPr>
-        <p:spPr>
-          <a:xfrm>
-            <a:off x="0" y="4905756"/>
-            <a:ext cx="9144000" cy="237744"/>
-          </a:xfrm>
-          <a:prstGeom prst="rect">
-            <a:avLst/>
-          </a:prstGeom>
-          <a:solidFill>
-            <a:srgbClr val="DBEAFE"/>
-          </a:solidFill>
-          <a:ln>
-            <a:noFill/>
-          </a:ln>
-        </p:spPr>
-        <p:style>
-          <a:lnRef idx="1">
-            <a:schemeClr val="accent1"/>
-          </a:lnRef>
-          <a:fillRef idx="3">
-            <a:schemeClr val="accent1"/>
-          </a:fillRef>
-          <a:effectRef idx="2">
-            <a:schemeClr val="accent1"/>
-          </a:effectRef>
-          <a:fontRef idx="minor">
-            <a:schemeClr val="lt1"/>
-          </a:fontRef>
-        </p:style>
-        <p:txBody>
-          <a:bodyPr rtlCol="0" anchor="ctr"/>
-          <a:lstStyle/>
-          <a:p>
-            <a:pPr algn="ctr"/>
-          </a:p>
-        </p:txBody>
-      </p:sp>
-      <p:sp>
-        <p:nvSpPr>
-          <p:cNvPr id="5" name="TextBox 4"/>
-          <p:cNvSpPr txBox="1"/>
-          <p:nvPr/>
-        </p:nvSpPr>
-        <p:spPr>
-          <a:xfrm>
-            <a:off x="274320" y="4951476"/>
-            <a:ext cx="8595360" cy="182880"/>
-          </a:xfrm>
-          <a:prstGeom prst="rect">
-            <a:avLst/>
-          </a:prstGeom>
-          <a:noFill/>
-        </p:spPr>
-        <p:txBody>
-          <a:bodyPr wrap="none">
-            <a:spAutoFit/>
-          </a:bodyPr>
-          <a:lstStyle/>
-          <a:p>
-            <a:pPr algn="ctr"/>
-            <a:r>
-              <a:rPr sz="800" b="0">
-                <a:solidFill>
-                  <a:srgbClr val="5A6273"/>
-                </a:solidFill>
-                <a:latin typeface="微软雅黑"/>
-                <ns1:rFonts xmlns:ns1="http://schemas.openxmlformats.org/wordprocessingml/2006/main" ns1:eastAsia="微软雅黑" ns1:ascii="微软雅黑" ns1:hAnsi="微软雅黑"/>
-              </a:rPr>
-              <a:t>从容应队 · 中山大学 · 刘小凡/白冉 · 指导教师 彭键清</a:t>
-            </a:r>
-          </a:p>
-        </p:txBody>
-      </p:sp>
-      <p:sp>
-        <p:nvSpPr>
-          <p:cNvPr id="6" name="Rectangle 5"/>
-          <p:cNvSpPr/>
-          <p:nvPr/>
-        </p:nvSpPr>
-        <p:spPr>
-          <a:xfrm>
-            <a:off x="0" y="420624"/>
-            <a:ext cx="4343400" cy="4430268"/>
-          </a:xfrm>
-          <a:prstGeom prst="rect">
-            <a:avLst/>
-          </a:prstGeom>
-          <a:solidFill>
-            <a:srgbClr val="143278"/>
-          </a:solidFill>
-          <a:ln>
-            <a:noFill/>
-          </a:ln>
-        </p:spPr>
-        <p:style>
-          <a:lnRef idx="1">
-            <a:schemeClr val="accent1"/>
-          </a:lnRef>
-          <a:fillRef idx="3">
-            <a:schemeClr val="accent1"/>
-          </a:fillRef>
-          <a:effectRef idx="2">
-            <a:schemeClr val="accent1"/>
-          </a:effectRef>
-          <a:fontRef idx="minor">
-            <a:schemeClr val="lt1"/>
-          </a:fontRef>
-        </p:style>
-        <p:txBody>
-          <a:bodyPr rtlCol="0" anchor="ctr"/>
-          <a:lstStyle/>
-          <a:p>
-            <a:pPr algn="ctr"/>
-          </a:p>
-        </p:txBody>
-      </p:sp>
-      <p:sp>
-        <p:nvSpPr>
-          <p:cNvPr id="7" name="Oval 6"/>
-          <p:cNvSpPr/>
-          <p:nvPr/>
-        </p:nvSpPr>
-        <p:spPr>
-          <a:xfrm>
-            <a:off x="384048" y="740664"/>
-            <a:ext cx="658368" cy="658368"/>
-          </a:xfrm>
-          <a:prstGeom prst="ellipse">
-            <a:avLst/>
-          </a:prstGeom>
-          <a:solidFill>
-            <a:srgbClr val="F59E0B"/>
-          </a:solidFill>
-          <a:ln>
-            <a:noFill/>
-          </a:ln>
-        </p:spPr>
-        <p:style>
-          <a:lnRef idx="1">
-            <a:schemeClr val="accent1"/>
-          </a:lnRef>
-          <a:fillRef idx="3">
-            <a:schemeClr val="accent1"/>
-          </a:fillRef>
-          <a:effectRef idx="2">
-            <a:schemeClr val="accent1"/>
-          </a:effectRef>
-          <a:fontRef idx="minor">
-            <a:schemeClr val="lt1"/>
-          </a:fontRef>
-        </p:style>
-        <p:txBody>
-          <a:bodyPr rtlCol="0" anchor="ctr"/>
-          <a:lstStyle/>
-          <a:p>
-            <a:pPr algn="ctr"/>
-          </a:p>
-        </p:txBody>
-      </p:sp>
-      <p:sp>
-        <p:nvSpPr>
-          <p:cNvPr id="8" name="TextBox 7"/>
-          <p:cNvSpPr txBox="1"/>
-          <p:nvPr/>
-        </p:nvSpPr>
-        <p:spPr>
-          <a:xfrm>
-            <a:off x="384048" y="804672"/>
-            <a:ext cx="658368" cy="411480"/>
-          </a:xfrm>
-          <a:prstGeom prst="rect">
-            <a:avLst/>
-          </a:prstGeom>
-          <a:noFill/>
-        </p:spPr>
-        <p:txBody>
-          <a:bodyPr wrap="none">
-            <a:spAutoFit/>
-          </a:bodyPr>
-          <a:lstStyle/>
-          <a:p>
-            <a:pPr algn="ctr"/>
-            <a:r>
-              <a:rPr sz="2200" b="1">
-                <a:solidFill>
-                  <a:srgbClr val="FFFFFF"/>
-                </a:solidFill>
-                <a:latin typeface="微软雅黑"/>
-                <ns2:rFonts xmlns:ns2="http://schemas.openxmlformats.org/wordprocessingml/2006/main" ns2:eastAsia="微软雅黑" ns2:ascii="微软雅黑" ns2:hAnsi="微软雅黑"/>
-              </a:rPr>
-              <a:t>四</a:t>
-            </a:r>
-          </a:p>
-        </p:txBody>
-      </p:sp>
-      <p:sp>
-        <p:nvSpPr>
-          <p:cNvPr id="9" name="TextBox 8"/>
-          <p:cNvSpPr txBox="1"/>
-          <p:nvPr/>
-        </p:nvSpPr>
-        <p:spPr>
-          <a:xfrm>
-            <a:off x="347472" y="1472184"/>
-            <a:ext cx="3840480" cy="457200"/>
-          </a:xfrm>
-          <a:prstGeom prst="rect">
-            <a:avLst/>
-          </a:prstGeom>
-          <a:noFill/>
-        </p:spPr>
-        <p:txBody>
-          <a:bodyPr wrap="none">
-            <a:spAutoFit/>
-          </a:bodyPr>
-          <a:lstStyle/>
-          <a:p>
-            <a:r>
-              <a:rPr sz="2400" b="1">
-                <a:solidFill>
-                  <a:srgbClr val="FFFFFF"/>
-                </a:solidFill>
-                <a:latin typeface="微软雅黑"/>
-                <ns3:rFonts xmlns:ns3="http://schemas.openxmlformats.org/wordprocessingml/2006/main" ns3:eastAsia="微软雅黑" ns3:ascii="微软雅黑" ns3:hAnsi="微软雅黑"/>
-              </a:rPr>
-              <a:t>第四部分</a:t>
-            </a:r>
-          </a:p>
-        </p:txBody>
-      </p:sp>
-      <p:sp>
-        <p:nvSpPr>
-          <p:cNvPr id="10" name="TextBox 9"/>
-          <p:cNvSpPr txBox="1"/>
-          <p:nvPr/>
-        </p:nvSpPr>
-        <p:spPr>
-          <a:xfrm>
-            <a:off x="365760" y="1947672"/>
-            <a:ext cx="3840480" cy="347472"/>
-          </a:xfrm>
-          <a:prstGeom prst="rect">
-            <a:avLst/>
-          </a:prstGeom>
-          <a:noFill/>
-        </p:spPr>
-        <p:txBody>
-          <a:bodyPr wrap="none">
-            <a:spAutoFit/>
-          </a:bodyPr>
-          <a:lstStyle/>
-          <a:p>
-            <a:r>
-              <a:rPr sz="1200" b="0">
-                <a:solidFill>
-                  <a:srgbClr val="BFDBFE"/>
-                </a:solidFill>
-                <a:latin typeface="微软雅黑"/>
-                <ns4:rFonts xmlns:ns4="http://schemas.openxmlformats.org/wordprocessingml/2006/main" ns4:eastAsia="微软雅黑" ns4:ascii="微软雅黑" ns4:hAnsi="微软雅黑"/>
-              </a:rPr>
-              <a:t>创新 · 计划</a:t>
-            </a:r>
-          </a:p>
-        </p:txBody>
-      </p:sp>
-      <p:sp>
-        <p:nvSpPr>
-          <p:cNvPr id="11" name="Rectangle 10"/>
-          <p:cNvSpPr/>
-          <p:nvPr/>
-        </p:nvSpPr>
-        <p:spPr>
-          <a:xfrm>
-            <a:off x="384048" y="2432304"/>
-            <a:ext cx="3657600" cy="384048"/>
-          </a:xfrm>
-          <a:prstGeom prst="rect">
-            <a:avLst/>
-          </a:prstGeom>
-          <a:solidFill>
-            <a:srgbClr val="1E4082"/>
-          </a:solidFill>
-          <a:ln>
-            <a:solidFill>
-              <a:srgbClr val="648CC8"/>
-            </a:solidFill>
-          </a:ln>
-        </p:spPr>
-        <p:style>
-          <a:lnRef idx="1">
-            <a:schemeClr val="accent1"/>
-          </a:lnRef>
-          <a:fillRef idx="3">
-            <a:schemeClr val="accent1"/>
-          </a:fillRef>
-          <a:effectRef idx="2">
-            <a:schemeClr val="accent1"/>
-          </a:effectRef>
-          <a:fontRef idx="minor">
-            <a:schemeClr val="lt1"/>
-          </a:fontRef>
-        </p:style>
-        <p:txBody>
-          <a:bodyPr rtlCol="0" anchor="ctr"/>
-          <a:lstStyle/>
-          <a:p>
-            <a:pPr algn="ctr"/>
-          </a:p>
-        </p:txBody>
-      </p:sp>
-      <p:sp>
-        <p:nvSpPr>
-          <p:cNvPr id="12" name="TextBox 11"/>
-          <p:cNvSpPr txBox="1"/>
-          <p:nvPr/>
-        </p:nvSpPr>
-        <p:spPr>
-          <a:xfrm>
-            <a:off x="502920" y="2505456"/>
-            <a:ext cx="3429000" cy="256032"/>
-          </a:xfrm>
-          <a:prstGeom prst="rect">
-            <a:avLst/>
-          </a:prstGeom>
-          <a:noFill/>
-        </p:spPr>
-        <p:txBody>
-          <a:bodyPr wrap="none">
-            <a:spAutoFit/>
-          </a:bodyPr>
-          <a:lstStyle/>
-          <a:p>
-            <a:r>
-              <a:rPr sz="1100" b="0">
-                <a:solidFill>
-                  <a:srgbClr val="E2E8F0"/>
-                </a:solidFill>
-                <a:latin typeface="微软雅黑"/>
-                <ns5:rFonts xmlns:ns5="http://schemas.openxmlformats.org/wordprocessingml/2006/main" ns5:eastAsia="微软雅黑" ns5:ascii="微软雅黑" ns5:hAnsi="微软雅黑"/>
-              </a:rPr>
-              <a:t>五个方向</a:t>
-            </a:r>
-          </a:p>
-        </p:txBody>
-      </p:sp>
-      <p:sp>
-        <p:nvSpPr>
-          <p:cNvPr id="13" name="Rectangle 12"/>
-          <p:cNvSpPr/>
-          <p:nvPr/>
-        </p:nvSpPr>
-        <p:spPr>
-          <a:xfrm>
-            <a:off x="384048" y="2871216"/>
-            <a:ext cx="3657600" cy="384048"/>
-          </a:xfrm>
-          <a:prstGeom prst="rect">
-            <a:avLst/>
-          </a:prstGeom>
-          <a:solidFill>
-            <a:srgbClr val="1E4082"/>
-          </a:solidFill>
-          <a:ln>
-            <a:solidFill>
-              <a:srgbClr val="648CC8"/>
-            </a:solidFill>
-          </a:ln>
-        </p:spPr>
-        <p:style>
-          <a:lnRef idx="1">
-            <a:schemeClr val="accent1"/>
-          </a:lnRef>
-          <a:fillRef idx="3">
-            <a:schemeClr val="accent1"/>
-          </a:fillRef>
-          <a:effectRef idx="2">
-            <a:schemeClr val="accent1"/>
-          </a:effectRef>
-          <a:fontRef idx="minor">
-            <a:schemeClr val="lt1"/>
-          </a:fontRef>
-        </p:style>
-        <p:txBody>
-          <a:bodyPr rtlCol="0" anchor="ctr"/>
-          <a:lstStyle/>
-          <a:p>
-            <a:pPr algn="ctr"/>
-          </a:p>
-        </p:txBody>
-      </p:sp>
-      <p:sp>
-        <p:nvSpPr>
-          <p:cNvPr id="14" name="TextBox 13"/>
-          <p:cNvSpPr txBox="1"/>
-          <p:nvPr/>
-        </p:nvSpPr>
-        <p:spPr>
-          <a:xfrm>
-            <a:off x="502920" y="2944368"/>
-            <a:ext cx="3429000" cy="256032"/>
-          </a:xfrm>
-          <a:prstGeom prst="rect">
-            <a:avLst/>
-          </a:prstGeom>
-          <a:noFill/>
-        </p:spPr>
-        <p:txBody>
-          <a:bodyPr wrap="none">
-            <a:spAutoFit/>
-          </a:bodyPr>
-          <a:lstStyle/>
-          <a:p>
-            <a:r>
-              <a:rPr sz="1100" b="0">
-                <a:solidFill>
-                  <a:srgbClr val="E2E8F0"/>
-                </a:solidFill>
-                <a:latin typeface="微软雅黑"/>
-                <ns6:rFonts xmlns:ns6="http://schemas.openxmlformats.org/wordprocessingml/2006/main" ns6:eastAsia="微软雅黑" ns6:ascii="微软雅黑" ns6:hAnsi="微软雅黑"/>
-              </a:rPr>
-              <a:t>真机</a:t>
-            </a:r>
-          </a:p>
-        </p:txBody>
-      </p:sp>
-      <p:sp>
-        <p:nvSpPr>
-          <p:cNvPr id="15" name="Rectangle 14"/>
-          <p:cNvSpPr/>
-          <p:nvPr/>
-        </p:nvSpPr>
-        <p:spPr>
-          <a:xfrm>
-            <a:off x="384048" y="3310128"/>
-            <a:ext cx="3657600" cy="384048"/>
-          </a:xfrm>
-          <a:prstGeom prst="rect">
-            <a:avLst/>
-          </a:prstGeom>
-          <a:solidFill>
-            <a:srgbClr val="1E4082"/>
-          </a:solidFill>
-          <a:ln>
-            <a:solidFill>
-              <a:srgbClr val="648CC8"/>
-            </a:solidFill>
-          </a:ln>
-        </p:spPr>
-        <p:style>
-          <a:lnRef idx="1">
-            <a:schemeClr val="accent1"/>
-          </a:lnRef>
-          <a:fillRef idx="3">
-            <a:schemeClr val="accent1"/>
-          </a:fillRef>
-          <a:effectRef idx="2">
-            <a:schemeClr val="accent1"/>
-          </a:effectRef>
-          <a:fontRef idx="minor">
-            <a:schemeClr val="lt1"/>
-          </a:fontRef>
-        </p:style>
-        <p:txBody>
-          <a:bodyPr rtlCol="0" anchor="ctr"/>
-          <a:lstStyle/>
-          <a:p>
-            <a:pPr algn="ctr"/>
-          </a:p>
-        </p:txBody>
-      </p:sp>
-      <p:sp>
-        <p:nvSpPr>
-          <p:cNvPr id="16" name="TextBox 15"/>
-          <p:cNvSpPr txBox="1"/>
-          <p:nvPr/>
-        </p:nvSpPr>
-        <p:spPr>
-          <a:xfrm>
-            <a:off x="502920" y="3383280"/>
-            <a:ext cx="3429000" cy="256032"/>
-          </a:xfrm>
-          <a:prstGeom prst="rect">
-            <a:avLst/>
-          </a:prstGeom>
-          <a:noFill/>
-        </p:spPr>
-        <p:txBody>
-          <a:bodyPr wrap="none">
-            <a:spAutoFit/>
-          </a:bodyPr>
-          <a:lstStyle/>
-          <a:p>
-            <a:r>
-              <a:rPr sz="1100" b="0">
-                <a:solidFill>
-                  <a:srgbClr val="E2E8F0"/>
-                </a:solidFill>
-                <a:latin typeface="微软雅黑"/>
-                <ns7:rFonts xmlns:ns7="http://schemas.openxmlformats.org/wordprocessingml/2006/main" ns7:eastAsia="微软雅黑" ns7:ascii="微软雅黑" ns7:hAnsi="微软雅黑"/>
-              </a:rPr>
-              <a:t>软著</a:t>
-            </a:r>
-          </a:p>
-        </p:txBody>
-      </p:sp>
-      <p:sp>
-        <p:nvSpPr>
-          <p:cNvPr id="17" name="Rectangle 16"/>
-          <p:cNvSpPr/>
-          <p:nvPr/>
-        </p:nvSpPr>
-        <p:spPr>
-          <a:xfrm>
-            <a:off x="4343400" y="420624"/>
-            <a:ext cx="4800600" cy="4430268"/>
-          </a:xfrm>
-          <a:prstGeom prst="rect">
-            <a:avLst/>
-          </a:prstGeom>
-          <a:solidFill>
-            <a:srgbClr val="F1F7FF"/>
-          </a:solidFill>
-          <a:ln>
-            <a:noFill/>
-          </a:ln>
-        </p:spPr>
-        <p:style>
-          <a:lnRef idx="1">
-            <a:schemeClr val="accent1"/>
-          </a:lnRef>
-          <a:fillRef idx="3">
-            <a:schemeClr val="accent1"/>
-          </a:fillRef>
-          <a:effectRef idx="2">
-            <a:schemeClr val="accent1"/>
-          </a:effectRef>
-          <a:fontRef idx="minor">
-            <a:schemeClr val="lt1"/>
-          </a:fontRef>
-        </p:style>
-        <p:txBody>
-          <a:bodyPr rtlCol="0" anchor="ctr"/>
-          <a:lstStyle/>
-          <a:p>
-            <a:pPr algn="ctr"/>
-          </a:p>
-        </p:txBody>
-      </p:sp>
-      <p:sp>
-        <p:nvSpPr>
-          <p:cNvPr id="18" name="Rectangle 17"/>
-          <p:cNvSpPr/>
-          <p:nvPr/>
-        </p:nvSpPr>
-        <p:spPr>
-          <a:xfrm>
-            <a:off x="4503008" y="1719518"/>
-            <a:ext cx="4481382" cy="2371975"/>
-          </a:xfrm>
-          <a:prstGeom prst="rect">
-            <a:avLst/>
-          </a:prstGeom>
-          <a:solidFill>
-            <a:srgbClr val="FCFDFF"/>
-          </a:solidFill>
-          <a:ln w="7620">
-            <a:solidFill>
-              <a:srgbClr val="BAC8DC"/>
-            </a:solidFill>
-          </a:ln>
-        </p:spPr>
-        <p:style>
-          <a:lnRef idx="1">
-            <a:schemeClr val="accent1"/>
-          </a:lnRef>
-          <a:fillRef idx="3">
-            <a:schemeClr val="accent1"/>
-          </a:fillRef>
-          <a:effectRef idx="2">
-            <a:schemeClr val="accent1"/>
-          </a:effectRef>
-          <a:fontRef idx="minor">
-            <a:schemeClr val="lt1"/>
-          </a:fontRef>
-        </p:style>
-        <p:txBody>
-          <a:bodyPr rtlCol="0" anchor="ctr"/>
-          <a:lstStyle/>
-          <a:p>
-            <a:pPr algn="ctr"/>
-          </a:p>
-        </p:txBody>
-      </p:sp>
-      <p:pic>
-        <p:nvPicPr>
-          <p:cNvPr id="19" name="Picture 18" descr="ppt_full_dashboard.png"/>
-          <p:cNvPicPr>
-            <a:picLocks noChangeAspect="1"/>
-          </p:cNvPicPr>
-          <p:nvPr/>
-        </p:nvPicPr>
-        <p:blipFill>
-          <a:blip r:embed="rId2"/>
-          <a:stretch>
-            <a:fillRect/>
-          </a:stretch>
-        </p:blipFill>
-        <p:spPr>
-          <a:xfrm>
-            <a:off x="4539584" y="1756094"/>
-            <a:ext cx="4408230" cy="2298823"/>
-          </a:xfrm>
-          <a:prstGeom prst="rect">
-            <a:avLst/>
-          </a:prstGeom>
-        </p:spPr>
-      </p:pic>
-    </p:spTree>
-  </p:cSld>
-  <p:clrMapOvr>
-    <a:masterClrMapping/>
-  </p:clrMapOvr>
-</p:sld>
-</file>
-
-<file path=ppt/slides/slide26.xml><?xml version="1.0" encoding="utf-8"?>
-<p:sld xmlns:a="http://schemas.openxmlformats.org/drawingml/2006/main" xmlns:p="http://schemas.openxmlformats.org/presentationml/2006/main" xmlns:r="http://schemas.openxmlformats.org/officeDocument/2006/relationships">
-  <p:cSld>
-    <p:bg>
-      <p:bgPr>
-        <a:solidFill>
-          <a:srgbClr val="FFFFFF"/>
-        </a:solidFill>
-        <a:effectLst/>
-      </p:bgPr>
-    </p:bg>
-    <p:spTree>
-      <p:nvGrpSpPr>
-        <p:cNvPr id="1" name=""/>
-        <p:cNvGrpSpPr/>
-        <p:nvPr/>
-      </p:nvGrpSpPr>
-      <p:grpSpPr/>
-      <p:sp>
-        <p:nvSpPr>
-          <p:cNvPr id="2" name="Rectangle 1"/>
-          <p:cNvSpPr/>
-          <p:nvPr/>
-        </p:nvSpPr>
-        <p:spPr>
-          <a:xfrm>
-            <a:off x="0" y="0"/>
-            <a:ext cx="9144000" cy="420624"/>
-          </a:xfrm>
-          <a:prstGeom prst="rect">
-            <a:avLst/>
-          </a:prstGeom>
-          <a:solidFill>
-            <a:srgbClr val="143278"/>
-          </a:solidFill>
-          <a:ln>
-            <a:noFill/>
-          </a:ln>
-        </p:spPr>
-        <p:style>
-          <a:lnRef idx="1">
-            <a:schemeClr val="accent1"/>
-          </a:lnRef>
-          <a:fillRef idx="3">
-            <a:schemeClr val="accent1"/>
-          </a:fillRef>
-          <a:effectRef idx="2">
-            <a:schemeClr val="accent1"/>
-          </a:effectRef>
-          <a:fontRef idx="minor">
-            <a:schemeClr val="lt1"/>
-          </a:fontRef>
-        </p:style>
-        <p:txBody>
-          <a:bodyPr rtlCol="0" anchor="ctr"/>
-          <a:lstStyle/>
-          <a:p>
-            <a:pPr algn="ctr"/>
-          </a:p>
-        </p:txBody>
-      </p:sp>
-      <p:sp>
-        <p:nvSpPr>
-          <p:cNvPr id="3" name="TextBox 2"/>
-          <p:cNvSpPr txBox="1"/>
-          <p:nvPr/>
-        </p:nvSpPr>
-        <p:spPr>
-          <a:xfrm>
-            <a:off x="274320" y="54864"/>
-            <a:ext cx="8595360" cy="347472"/>
-          </a:xfrm>
-          <a:prstGeom prst="rect">
-            <a:avLst/>
-          </a:prstGeom>
-          <a:noFill/>
-        </p:spPr>
-        <p:txBody>
-          <a:bodyPr wrap="none">
-            <a:spAutoFit/>
-          </a:bodyPr>
-          <a:lstStyle/>
-          <a:p>
-            <a:r>
-              <a:rPr sz="900" b="1">
-                <a:solidFill>
-                  <a:srgbClr val="FFFFFF"/>
-                </a:solidFill>
-                <a:latin typeface="微软雅黑"/>
-                <ns0:rFonts xmlns:ns0="http://schemas.openxmlformats.org/wordprocessingml/2006/main" ns0:eastAsia="微软雅黑" ns0:ascii="微软雅黑" ns0:hAnsi="微软雅黑"/>
-              </a:rPr>
-              <a:t>第二十八届中国机器人及人工智能大赛  |  创新赛 · 机器人创新赛道</a:t>
-            </a:r>
-          </a:p>
-        </p:txBody>
-      </p:sp>
-      <p:sp>
-        <p:nvSpPr>
-          <p:cNvPr id="4" name="Rectangle 3"/>
-          <p:cNvSpPr/>
-          <p:nvPr/>
-        </p:nvSpPr>
-        <p:spPr>
-          <a:xfrm>
-            <a:off x="0" y="4905756"/>
-            <a:ext cx="9144000" cy="237744"/>
-          </a:xfrm>
-          <a:prstGeom prst="rect">
-            <a:avLst/>
-          </a:prstGeom>
-          <a:solidFill>
-            <a:srgbClr val="DBEAFE"/>
-          </a:solidFill>
-          <a:ln>
-            <a:noFill/>
-          </a:ln>
-        </p:spPr>
-        <p:style>
-          <a:lnRef idx="1">
-            <a:schemeClr val="accent1"/>
-          </a:lnRef>
-          <a:fillRef idx="3">
-            <a:schemeClr val="accent1"/>
-          </a:fillRef>
-          <a:effectRef idx="2">
-            <a:schemeClr val="accent1"/>
-          </a:effectRef>
-          <a:fontRef idx="minor">
-            <a:schemeClr val="lt1"/>
-          </a:fontRef>
-        </p:style>
-        <p:txBody>
-          <a:bodyPr rtlCol="0" anchor="ctr"/>
-          <a:lstStyle/>
-          <a:p>
-            <a:pPr algn="ctr"/>
-          </a:p>
-        </p:txBody>
-      </p:sp>
-      <p:sp>
-        <p:nvSpPr>
-          <p:cNvPr id="5" name="TextBox 4"/>
-          <p:cNvSpPr txBox="1"/>
-          <p:nvPr/>
-        </p:nvSpPr>
-        <p:spPr>
-          <a:xfrm>
-            <a:off x="274320" y="4951476"/>
-            <a:ext cx="8595360" cy="182880"/>
-          </a:xfrm>
-          <a:prstGeom prst="rect">
-            <a:avLst/>
-          </a:prstGeom>
-          <a:noFill/>
-        </p:spPr>
-        <p:txBody>
-          <a:bodyPr wrap="none">
-            <a:spAutoFit/>
-          </a:bodyPr>
-          <a:lstStyle/>
-          <a:p>
-            <a:pPr algn="ctr"/>
-            <a:r>
-              <a:rPr sz="800" b="0">
-                <a:solidFill>
-                  <a:srgbClr val="5A6273"/>
-                </a:solidFill>
-                <a:latin typeface="微软雅黑"/>
-                <ns1:rFonts xmlns:ns1="http://schemas.openxmlformats.org/wordprocessingml/2006/main" ns1:eastAsia="微软雅黑" ns1:ascii="微软雅黑" ns1:hAnsi="微软雅黑"/>
-              </a:rPr>
-              <a:t>从容应队 · 中山大学 · 刘小凡/白冉 · 指导教师 彭键清</a:t>
-            </a:r>
-          </a:p>
-        </p:txBody>
-      </p:sp>
-      <p:sp>
-        <p:nvSpPr>
-          <p:cNvPr id="6" name="TextBox 5"/>
-          <p:cNvSpPr txBox="1"/>
-          <p:nvPr/>
-        </p:nvSpPr>
-        <p:spPr>
-          <a:xfrm>
-            <a:off x="274320" y="466344"/>
-            <a:ext cx="8595360" cy="457200"/>
-          </a:xfrm>
-          <a:prstGeom prst="rect">
-            <a:avLst/>
-          </a:prstGeom>
-          <a:noFill/>
-        </p:spPr>
-        <p:txBody>
-          <a:bodyPr wrap="none">
-            <a:spAutoFit/>
-          </a:bodyPr>
-          <a:lstStyle/>
-          <a:p>
-            <a:pPr algn="l"/>
-            <a:r>
-              <a:rPr sz="2000" b="1">
-                <a:solidFill>
-                  <a:srgbClr val="143278"/>
-                </a:solidFill>
-                <a:latin typeface="微软雅黑"/>
-                <ns2:rFonts xmlns:ns2="http://schemas.openxmlformats.org/wordprocessingml/2006/main" ns2:eastAsia="微软雅黑" ns2:ascii="微软雅黑" ns2:hAnsi="微软雅黑"/>
-              </a:rPr>
-              <a:t>创新点</a:t>
-            </a:r>
-          </a:p>
-        </p:txBody>
-      </p:sp>
-      <p:sp>
-        <p:nvSpPr>
-          <p:cNvPr id="7" name="Rectangle 6"/>
-          <p:cNvSpPr/>
-          <p:nvPr/>
-        </p:nvSpPr>
-        <p:spPr>
-          <a:xfrm>
-            <a:off x="274320" y="886968"/>
-            <a:ext cx="1143000" cy="50292"/>
-          </a:xfrm>
-          <a:prstGeom prst="rect">
-            <a:avLst/>
-          </a:prstGeom>
-          <a:solidFill>
-            <a:srgbClr val="F59E0B"/>
-          </a:solidFill>
-          <a:ln>
-            <a:noFill/>
-          </a:ln>
-        </p:spPr>
-        <p:style>
-          <a:lnRef idx="1">
-            <a:schemeClr val="accent1"/>
-          </a:lnRef>
-          <a:fillRef idx="3">
-            <a:schemeClr val="accent1"/>
-          </a:fillRef>
-          <a:effectRef idx="2">
-            <a:schemeClr val="accent1"/>
-          </a:effectRef>
-          <a:fontRef idx="minor">
-            <a:schemeClr val="lt1"/>
-          </a:fontRef>
-        </p:style>
-        <p:txBody>
-          <a:bodyPr rtlCol="0" anchor="ctr"/>
-          <a:lstStyle/>
-          <a:p>
-            <a:pPr algn="ctr"/>
-          </a:p>
-        </p:txBody>
-      </p:sp>
-      <p:sp>
-        <p:nvSpPr>
-          <p:cNvPr id="8" name="Rectangle 7"/>
-          <p:cNvSpPr/>
-          <p:nvPr/>
-        </p:nvSpPr>
-        <p:spPr>
-          <a:xfrm>
-            <a:off x="274320" y="996696"/>
-            <a:ext cx="3611880" cy="3854196"/>
-          </a:xfrm>
-          <a:prstGeom prst="rect">
-            <a:avLst/>
-          </a:prstGeom>
-          <a:solidFill>
-            <a:srgbClr val="F1F7FF"/>
-          </a:solidFill>
-          <a:ln w="10160">
-            <a:solidFill>
-              <a:srgbClr val="BAC8DC"/>
-            </a:solidFill>
-          </a:ln>
-        </p:spPr>
-        <p:style>
-          <a:lnRef idx="1">
-            <a:schemeClr val="accent1"/>
-          </a:lnRef>
-          <a:fillRef idx="3">
-            <a:schemeClr val="accent1"/>
-          </a:fillRef>
-          <a:effectRef idx="2">
-            <a:schemeClr val="accent1"/>
-          </a:effectRef>
-          <a:fontRef idx="minor">
-            <a:schemeClr val="lt1"/>
-          </a:fontRef>
-        </p:style>
-        <p:txBody>
-          <a:bodyPr rtlCol="0" anchor="ctr"/>
-          <a:lstStyle/>
-          <a:p>
-            <a:pPr algn="ctr"/>
-          </a:p>
-        </p:txBody>
-      </p:sp>
-      <p:sp>
-        <p:nvSpPr>
-          <p:cNvPr id="9" name="Rectangle 8"/>
-          <p:cNvSpPr/>
-          <p:nvPr/>
-        </p:nvSpPr>
-        <p:spPr>
-          <a:xfrm>
-            <a:off x="274320" y="996696"/>
-            <a:ext cx="73152" cy="3854196"/>
-          </a:xfrm>
-          <a:prstGeom prst="rect">
-            <a:avLst/>
-          </a:prstGeom>
-          <a:solidFill>
-            <a:srgbClr val="143278"/>
-          </a:solidFill>
-          <a:ln>
-            <a:noFill/>
-          </a:ln>
-        </p:spPr>
-        <p:style>
-          <a:lnRef idx="1">
-            <a:schemeClr val="accent1"/>
-          </a:lnRef>
-          <a:fillRef idx="3">
-            <a:schemeClr val="accent1"/>
-          </a:fillRef>
-          <a:effectRef idx="2">
-            <a:schemeClr val="accent1"/>
-          </a:effectRef>
-          <a:fontRef idx="minor">
-            <a:schemeClr val="lt1"/>
-          </a:fontRef>
-        </p:style>
-        <p:txBody>
-          <a:bodyPr rtlCol="0" anchor="ctr"/>
-          <a:lstStyle/>
-          <a:p>
-            <a:pPr algn="ctr"/>
-          </a:p>
-        </p:txBody>
-      </p:sp>
-      <p:sp>
-        <p:nvSpPr>
-          <p:cNvPr id="10" name="TextBox 9"/>
-          <p:cNvSpPr txBox="1"/>
-          <p:nvPr/>
-        </p:nvSpPr>
-        <p:spPr>
-          <a:xfrm>
-            <a:off x="438912" y="1106424"/>
-            <a:ext cx="3282696" cy="708660"/>
-          </a:xfrm>
-          <a:prstGeom prst="rect">
-            <a:avLst/>
-          </a:prstGeom>
-          <a:noFill/>
-        </p:spPr>
-        <p:txBody>
-          <a:bodyPr wrap="square" anchor="t" lIns="25400" tIns="0">
-            <a:spAutoFit/>
-          </a:bodyPr>
-          <a:lstStyle/>
-          <a:p>
-            <a:pPr>
-              <a:lnSpc>
-                <a:spcPct val="112000"/>
-              </a:lnSpc>
-              <a:spcAft>
-                <a:spcPts val="200"/>
-              </a:spcAft>
-            </a:pPr>
-            <a:r>
-              <a:rPr sz="1300" b="0">
-                <a:solidFill>
-                  <a:srgbClr val="1C202C"/>
-                </a:solidFill>
-                <a:latin typeface="微软雅黑"/>
-                <ns3:rFonts xmlns:ns3="http://schemas.openxmlformats.org/wordprocessingml/2006/main" ns3:eastAsia="微软雅黑" ns3:ascii="微软雅黑" ns3:hAnsi="微软雅黑"/>
-              </a:rPr>
-              <a:t>● 多路信号融合，结果能解释</a:t>
-            </a:r>
-          </a:p>
-        </p:txBody>
-      </p:sp>
-      <p:sp>
-        <p:nvSpPr>
-          <p:cNvPr id="11" name="TextBox 10"/>
-          <p:cNvSpPr txBox="1"/>
-          <p:nvPr/>
-        </p:nvSpPr>
-        <p:spPr>
-          <a:xfrm>
-            <a:off x="438912" y="1833372"/>
-            <a:ext cx="3282696" cy="708660"/>
-          </a:xfrm>
-          <a:prstGeom prst="rect">
-            <a:avLst/>
-          </a:prstGeom>
-          <a:noFill/>
-        </p:spPr>
-        <p:txBody>
-          <a:bodyPr wrap="square" anchor="t" lIns="25400" tIns="0">
-            <a:spAutoFit/>
-          </a:bodyPr>
-          <a:lstStyle/>
-          <a:p>
-            <a:pPr>
-              <a:lnSpc>
-                <a:spcPct val="112000"/>
-              </a:lnSpc>
-              <a:spcAft>
-                <a:spcPts val="200"/>
-              </a:spcAft>
-            </a:pPr>
-            <a:r>
-              <a:rPr sz="1300" b="0">
-                <a:solidFill>
-                  <a:srgbClr val="1C202C"/>
-                </a:solidFill>
-                <a:latin typeface="微软雅黑"/>
-                <ns4:rFonts xmlns:ns4="http://schemas.openxmlformats.org/wordprocessingml/2006/main" ns4:eastAsia="微软雅黑" ns4:ascii="微软雅黑" ns4:hAnsi="微软雅黑"/>
-              </a:rPr>
-              <a:t>● 紧急态在状态机里优先级最高</a:t>
-            </a:r>
-          </a:p>
-        </p:txBody>
-      </p:sp>
-      <p:sp>
-        <p:nvSpPr>
-          <p:cNvPr id="12" name="TextBox 11"/>
-          <p:cNvSpPr txBox="1"/>
-          <p:nvPr/>
-        </p:nvSpPr>
-        <p:spPr>
-          <a:xfrm>
-            <a:off x="438912" y="2560320"/>
-            <a:ext cx="3282696" cy="708660"/>
-          </a:xfrm>
-          <a:prstGeom prst="rect">
-            <a:avLst/>
-          </a:prstGeom>
-          <a:noFill/>
-        </p:spPr>
-        <p:txBody>
-          <a:bodyPr wrap="square" anchor="t" lIns="25400" tIns="0">
-            <a:spAutoFit/>
-          </a:bodyPr>
-          <a:lstStyle/>
-          <a:p>
-            <a:pPr>
-              <a:lnSpc>
-                <a:spcPct val="112000"/>
-              </a:lnSpc>
-              <a:spcAft>
-                <a:spcPts val="200"/>
-              </a:spcAft>
-            </a:pPr>
-            <a:r>
-              <a:rPr sz="1300" b="0">
-                <a:solidFill>
-                  <a:srgbClr val="1C202C"/>
-                </a:solidFill>
-                <a:latin typeface="微软雅黑"/>
-                <ns5:rFonts xmlns:ns5="http://schemas.openxmlformats.org/wordprocessingml/2006/main" ns5:eastAsia="微软雅黑" ns5:ascii="微软雅黑" ns5:hAnsi="微软雅黑"/>
-              </a:rPr>
-              <a:t>● 视觉用 MediaPipe，不是纯参数滑块</a:t>
-            </a:r>
-          </a:p>
-        </p:txBody>
-      </p:sp>
-      <p:sp>
-        <p:nvSpPr>
-          <p:cNvPr id="13" name="TextBox 12"/>
-          <p:cNvSpPr txBox="1"/>
-          <p:nvPr/>
-        </p:nvSpPr>
-        <p:spPr>
-          <a:xfrm>
-            <a:off x="438912" y="3287268"/>
-            <a:ext cx="3282696" cy="708660"/>
-          </a:xfrm>
-          <a:prstGeom prst="rect">
-            <a:avLst/>
-          </a:prstGeom>
-          <a:noFill/>
-        </p:spPr>
-        <p:txBody>
-          <a:bodyPr wrap="square" anchor="t" lIns="25400" tIns="0">
-            <a:spAutoFit/>
-          </a:bodyPr>
-          <a:lstStyle/>
-          <a:p>
-            <a:pPr>
-              <a:lnSpc>
-                <a:spcPct val="112000"/>
-              </a:lnSpc>
-              <a:spcAft>
-                <a:spcPts val="200"/>
-              </a:spcAft>
-            </a:pPr>
-            <a:r>
-              <a:rPr sz="1300" b="0">
-                <a:solidFill>
-                  <a:srgbClr val="1C202C"/>
-                </a:solidFill>
-                <a:latin typeface="微软雅黑"/>
-                <ns6:rFonts xmlns:ns6="http://schemas.openxmlformats.org/wordprocessingml/2006/main" ns6:eastAsia="微软雅黑" ns6:ascii="微软雅黑" ns6:hAnsi="微软雅黑"/>
-              </a:rPr>
-              <a:t>● 代码和评测脚本都开源</a:t>
-            </a:r>
-          </a:p>
-        </p:txBody>
-      </p:sp>
-      <p:sp>
-        <p:nvSpPr>
-          <p:cNvPr id="14" name="TextBox 13"/>
-          <p:cNvSpPr txBox="1"/>
-          <p:nvPr/>
-        </p:nvSpPr>
-        <p:spPr>
-          <a:xfrm>
-            <a:off x="438912" y="4014216"/>
-            <a:ext cx="3282696" cy="708660"/>
-          </a:xfrm>
-          <a:prstGeom prst="rect">
-            <a:avLst/>
-          </a:prstGeom>
-          <a:noFill/>
-        </p:spPr>
-        <p:txBody>
-          <a:bodyPr wrap="square" anchor="t" lIns="25400" tIns="0">
-            <a:spAutoFit/>
-          </a:bodyPr>
-          <a:lstStyle/>
-          <a:p>
-            <a:pPr>
-              <a:lnSpc>
-                <a:spcPct val="112000"/>
-              </a:lnSpc>
-              <a:spcAft>
-                <a:spcPts val="200"/>
-              </a:spcAft>
-            </a:pPr>
-            <a:r>
-              <a:rPr sz="1300" b="0">
-                <a:solidFill>
-                  <a:srgbClr val="1C202C"/>
-                </a:solidFill>
-                <a:latin typeface="微软雅黑"/>
-                <ns7:rFonts xmlns:ns7="http://schemas.openxmlformats.org/wordprocessingml/2006/main" ns7:eastAsia="微软雅黑" ns7:ascii="微软雅黑" ns7:hAnsi="微软雅黑"/>
-              </a:rPr>
-              <a:t>● 场景对准居家养老</a:t>
-            </a:r>
-          </a:p>
-        </p:txBody>
-      </p:sp>
-      <p:sp>
-        <p:nvSpPr>
-          <p:cNvPr id="15" name="Rectangle 14"/>
-          <p:cNvSpPr/>
-          <p:nvPr/>
-        </p:nvSpPr>
-        <p:spPr>
-          <a:xfrm>
-            <a:off x="4105656" y="1033272"/>
-            <a:ext cx="4727448" cy="3744468"/>
-          </a:xfrm>
-          <a:prstGeom prst="rect">
-            <a:avLst/>
-          </a:prstGeom>
-          <a:solidFill>
-            <a:srgbClr val="FFFFFF"/>
-          </a:solidFill>
-          <a:ln w="9525">
-            <a:solidFill>
-              <a:srgbClr val="BAC8DC"/>
-            </a:solidFill>
-          </a:ln>
-        </p:spPr>
-        <p:style>
-          <a:lnRef idx="1">
-            <a:schemeClr val="accent1"/>
-          </a:lnRef>
-          <a:fillRef idx="3">
-            <a:schemeClr val="accent1"/>
-          </a:fillRef>
-          <a:effectRef idx="2">
-            <a:schemeClr val="accent1"/>
-          </a:effectRef>
-          <a:fontRef idx="minor">
-            <a:schemeClr val="lt1"/>
-          </a:fontRef>
-        </p:style>
-        <p:txBody>
-          <a:bodyPr rtlCol="0" anchor="ctr"/>
-          <a:lstStyle/>
-          <a:p>
-            <a:pPr algn="ctr"/>
-          </a:p>
-        </p:txBody>
-      </p:sp>
-      <p:sp>
-        <p:nvSpPr>
-          <p:cNvPr id="16" name="Rectangle 15"/>
-          <p:cNvSpPr/>
-          <p:nvPr/>
-        </p:nvSpPr>
-        <p:spPr>
-          <a:xfrm>
-            <a:off x="3968496" y="996696"/>
-            <a:ext cx="10972" cy="3854196"/>
-          </a:xfrm>
-          <a:prstGeom prst="rect">
-            <a:avLst/>
-          </a:prstGeom>
-          <a:solidFill>
-            <a:srgbClr val="BAC8DC"/>
-          </a:solidFill>
-          <a:ln>
-            <a:noFill/>
-          </a:ln>
-        </p:spPr>
-        <p:style>
-          <a:lnRef idx="1">
-            <a:schemeClr val="accent1"/>
-          </a:lnRef>
-          <a:fillRef idx="3">
-            <a:schemeClr val="accent1"/>
-          </a:fillRef>
-          <a:effectRef idx="2">
-            <a:schemeClr val="accent1"/>
-          </a:effectRef>
-          <a:fontRef idx="minor">
-            <a:schemeClr val="lt1"/>
-          </a:fontRef>
-        </p:style>
-        <p:txBody>
-          <a:bodyPr rtlCol="0" anchor="ctr"/>
-          <a:lstStyle/>
-          <a:p>
-            <a:pPr algn="ctr"/>
-          </a:p>
-        </p:txBody>
-      </p:sp>
-      <p:sp>
-        <p:nvSpPr>
-          <p:cNvPr id="17" name="Rectangle 16"/>
-          <p:cNvSpPr/>
-          <p:nvPr/>
-        </p:nvSpPr>
-        <p:spPr>
-          <a:xfrm>
-            <a:off x="4308652" y="1202355"/>
-            <a:ext cx="4321454" cy="3113692"/>
-          </a:xfrm>
-          <a:prstGeom prst="rect">
-            <a:avLst/>
-          </a:prstGeom>
-          <a:solidFill>
-            <a:srgbClr val="FCFDFF"/>
-          </a:solidFill>
-          <a:ln w="7620">
-            <a:solidFill>
-              <a:srgbClr val="BAC8DC"/>
-            </a:solidFill>
-          </a:ln>
-        </p:spPr>
-        <p:style>
-          <a:lnRef idx="1">
-            <a:schemeClr val="accent1"/>
-          </a:lnRef>
-          <a:fillRef idx="3">
-            <a:schemeClr val="accent1"/>
-          </a:fillRef>
-          <a:effectRef idx="2">
-            <a:schemeClr val="accent1"/>
-          </a:effectRef>
-          <a:fontRef idx="minor">
-            <a:schemeClr val="lt1"/>
-          </a:fontRef>
-        </p:style>
-        <p:txBody>
-          <a:bodyPr rtlCol="0" anchor="ctr"/>
-          <a:lstStyle/>
-          <a:p>
-            <a:pPr algn="ctr"/>
-          </a:p>
-        </p:txBody>
-      </p:sp>
-      <p:pic>
-        <p:nvPicPr>
-          <p:cNvPr id="18" name="Picture 17" descr="innovation_radar.png"/>
-          <p:cNvPicPr>
-            <a:picLocks noChangeAspect="1"/>
-          </p:cNvPicPr>
-          <p:nvPr/>
-        </p:nvPicPr>
-        <p:blipFill>
-          <a:blip r:embed="rId2"/>
-          <a:stretch>
-            <a:fillRect/>
-          </a:stretch>
-        </p:blipFill>
-        <p:spPr>
-          <a:xfrm>
-            <a:off x="4345228" y="1238931"/>
-            <a:ext cx="4248302" cy="3040540"/>
-          </a:xfrm>
-          <a:prstGeom prst="rect">
-            <a:avLst/>
-          </a:prstGeom>
-        </p:spPr>
-      </p:pic>
-      <p:sp>
-        <p:nvSpPr>
-          <p:cNvPr id="19" name="TextBox 18"/>
-          <p:cNvSpPr txBox="1"/>
-          <p:nvPr/>
-        </p:nvSpPr>
-        <p:spPr>
-          <a:xfrm>
-            <a:off x="4160520" y="4521708"/>
-            <a:ext cx="4617720" cy="219456"/>
-          </a:xfrm>
-          <a:prstGeom prst="rect">
-            <a:avLst/>
-          </a:prstGeom>
-          <a:noFill/>
-        </p:spPr>
-        <p:txBody>
-          <a:bodyPr wrap="square" anchor="ctr">
-            <a:spAutoFit/>
-          </a:bodyPr>
-          <a:lstStyle/>
-          <a:p>
-            <a:pPr algn="ctr"/>
-            <a:r>
-              <a:rPr sz="800" b="0">
-                <a:solidFill>
-                  <a:srgbClr val="5A6273"/>
-                </a:solidFill>
-                <a:latin typeface="微软雅黑"/>
-                <ns8:rFonts xmlns:ns8="http://schemas.openxmlformats.org/wordprocessingml/2006/main" ns8:eastAsia="微软雅黑" ns8:ascii="微软雅黑" ns8:hAnsi="微软雅黑"/>
-              </a:rPr>
-              <a:t>实验结果</a:t>
             </a:r>
           </a:p>
         </p:txBody>
@@ -16434,52 +16317,59 @@
       </p:sp>
       <p:sp>
         <p:nvSpPr>
-          <p:cNvPr id="6" name="TextBox 5"/>
-          <p:cNvSpPr txBox="1"/>
-          <p:nvPr/>
-        </p:nvSpPr>
-        <p:spPr>
-          <a:xfrm>
-            <a:off x="274320" y="466344"/>
-            <a:ext cx="8595360" cy="457200"/>
-          </a:xfrm>
-          <a:prstGeom prst="rect">
-            <a:avLst/>
-          </a:prstGeom>
-          <a:noFill/>
-        </p:spPr>
-        <p:txBody>
-          <a:bodyPr wrap="none">
-            <a:spAutoFit/>
-          </a:bodyPr>
-          <a:lstStyle/>
-          <a:p>
-            <a:pPr algn="l"/>
-            <a:r>
-              <a:rPr sz="2000" b="1">
-                <a:solidFill>
-                  <a:srgbClr val="143278"/>
-                </a:solidFill>
-                <a:latin typeface="微软雅黑"/>
-                <ns2:rFonts xmlns:ns2="http://schemas.openxmlformats.org/wordprocessingml/2006/main" ns2:eastAsia="微软雅黑" ns2:ascii="微软雅黑" ns2:hAnsi="微软雅黑"/>
-              </a:rPr>
-              <a:t>后面打算做什么</a:t>
-            </a:r>
-          </a:p>
-        </p:txBody>
-      </p:sp>
-      <p:sp>
-        <p:nvSpPr>
-          <p:cNvPr id="7" name="Rectangle 6"/>
+          <p:cNvPr id="6" name="Rectangle 5"/>
           <p:cNvSpPr/>
           <p:nvPr/>
         </p:nvSpPr>
         <p:spPr>
           <a:xfrm>
-            <a:off x="274320" y="886968"/>
-            <a:ext cx="1143000" cy="50292"/>
-          </a:xfrm>
-          <a:prstGeom prst="rect">
+            <a:off x="0" y="420624"/>
+            <a:ext cx="4343400" cy="4430268"/>
+          </a:xfrm>
+          <a:prstGeom prst="rect">
+            <a:avLst/>
+          </a:prstGeom>
+          <a:solidFill>
+            <a:srgbClr val="143278"/>
+          </a:solidFill>
+          <a:ln>
+            <a:noFill/>
+          </a:ln>
+        </p:spPr>
+        <p:style>
+          <a:lnRef idx="1">
+            <a:schemeClr val="accent1"/>
+          </a:lnRef>
+          <a:fillRef idx="3">
+            <a:schemeClr val="accent1"/>
+          </a:fillRef>
+          <a:effectRef idx="2">
+            <a:schemeClr val="accent1"/>
+          </a:effectRef>
+          <a:fontRef idx="minor">
+            <a:schemeClr val="lt1"/>
+          </a:fontRef>
+        </p:style>
+        <p:txBody>
+          <a:bodyPr rtlCol="0" anchor="ctr"/>
+          <a:lstStyle/>
+          <a:p>
+            <a:pPr algn="ctr"/>
+          </a:p>
+        </p:txBody>
+      </p:sp>
+      <p:sp>
+        <p:nvSpPr>
+          <p:cNvPr id="7" name="Oval 6"/>
+          <p:cNvSpPr/>
+          <p:nvPr/>
+        </p:nvSpPr>
+        <p:spPr>
+          <a:xfrm>
+            <a:off x="384048" y="740664"/>
+            <a:ext cx="658368" cy="658368"/>
+          </a:xfrm>
+          <a:prstGeom prst="ellipse">
             <a:avLst/>
           </a:prstGeom>
           <a:solidFill>
@@ -16513,24 +16403,130 @@
       </p:sp>
       <p:sp>
         <p:nvSpPr>
-          <p:cNvPr id="8" name="Rectangle 7"/>
+          <p:cNvPr id="8" name="TextBox 7"/>
+          <p:cNvSpPr txBox="1"/>
+          <p:nvPr/>
+        </p:nvSpPr>
+        <p:spPr>
+          <a:xfrm>
+            <a:off x="384048" y="804672"/>
+            <a:ext cx="658368" cy="411480"/>
+          </a:xfrm>
+          <a:prstGeom prst="rect">
+            <a:avLst/>
+          </a:prstGeom>
+          <a:noFill/>
+        </p:spPr>
+        <p:txBody>
+          <a:bodyPr wrap="none">
+            <a:spAutoFit/>
+          </a:bodyPr>
+          <a:lstStyle/>
+          <a:p>
+            <a:pPr algn="ctr"/>
+            <a:r>
+              <a:rPr sz="2200" b="1">
+                <a:solidFill>
+                  <a:srgbClr val="FFFFFF"/>
+                </a:solidFill>
+                <a:latin typeface="微软雅黑"/>
+                <ns2:rFonts xmlns:ns2="http://schemas.openxmlformats.org/wordprocessingml/2006/main" ns2:eastAsia="微软雅黑" ns2:ascii="微软雅黑" ns2:hAnsi="微软雅黑"/>
+              </a:rPr>
+              <a:t>四</a:t>
+            </a:r>
+          </a:p>
+        </p:txBody>
+      </p:sp>
+      <p:sp>
+        <p:nvSpPr>
+          <p:cNvPr id="9" name="TextBox 8"/>
+          <p:cNvSpPr txBox="1"/>
+          <p:nvPr/>
+        </p:nvSpPr>
+        <p:spPr>
+          <a:xfrm>
+            <a:off x="347472" y="1472184"/>
+            <a:ext cx="3840480" cy="457200"/>
+          </a:xfrm>
+          <a:prstGeom prst="rect">
+            <a:avLst/>
+          </a:prstGeom>
+          <a:noFill/>
+        </p:spPr>
+        <p:txBody>
+          <a:bodyPr wrap="none">
+            <a:spAutoFit/>
+          </a:bodyPr>
+          <a:lstStyle/>
+          <a:p>
+            <a:r>
+              <a:rPr sz="2400" b="1">
+                <a:solidFill>
+                  <a:srgbClr val="FFFFFF"/>
+                </a:solidFill>
+                <a:latin typeface="微软雅黑"/>
+                <ns3:rFonts xmlns:ns3="http://schemas.openxmlformats.org/wordprocessingml/2006/main" ns3:eastAsia="微软雅黑" ns3:ascii="微软雅黑" ns3:hAnsi="微软雅黑"/>
+              </a:rPr>
+              <a:t>第四部分</a:t>
+            </a:r>
+          </a:p>
+        </p:txBody>
+      </p:sp>
+      <p:sp>
+        <p:nvSpPr>
+          <p:cNvPr id="10" name="TextBox 9"/>
+          <p:cNvSpPr txBox="1"/>
+          <p:nvPr/>
+        </p:nvSpPr>
+        <p:spPr>
+          <a:xfrm>
+            <a:off x="365760" y="1947672"/>
+            <a:ext cx="3840480" cy="347472"/>
+          </a:xfrm>
+          <a:prstGeom prst="rect">
+            <a:avLst/>
+          </a:prstGeom>
+          <a:noFill/>
+        </p:spPr>
+        <p:txBody>
+          <a:bodyPr wrap="none">
+            <a:spAutoFit/>
+          </a:bodyPr>
+          <a:lstStyle/>
+          <a:p>
+            <a:r>
+              <a:rPr sz="1200" b="0">
+                <a:solidFill>
+                  <a:srgbClr val="BFDBFE"/>
+                </a:solidFill>
+                <a:latin typeface="微软雅黑"/>
+                <ns4:rFonts xmlns:ns4="http://schemas.openxmlformats.org/wordprocessingml/2006/main" ns4:eastAsia="微软雅黑" ns4:ascii="微软雅黑" ns4:hAnsi="微软雅黑"/>
+              </a:rPr>
+              <a:t>创新 · 计划</a:t>
+            </a:r>
+          </a:p>
+        </p:txBody>
+      </p:sp>
+      <p:sp>
+        <p:nvSpPr>
+          <p:cNvPr id="11" name="Rectangle 10"/>
           <p:cNvSpPr/>
           <p:nvPr/>
         </p:nvSpPr>
         <p:spPr>
           <a:xfrm>
-            <a:off x="274320" y="996696"/>
-            <a:ext cx="3611880" cy="3854196"/>
+            <a:off x="384048" y="2432304"/>
+            <a:ext cx="3657600" cy="384048"/>
           </a:xfrm>
           <a:prstGeom prst="rect">
             <a:avLst/>
           </a:prstGeom>
           <a:solidFill>
-            <a:srgbClr val="F1F7FF"/>
+            <a:srgbClr val="1E4082"/>
           </a:solidFill>
-          <a:ln w="10160">
+          <a:ln>
             <a:solidFill>
-              <a:srgbClr val="BAC8DC"/>
+              <a:srgbClr val="648CC8"/>
             </a:solidFill>
           </a:ln>
         </p:spPr>
@@ -16558,23 +16554,60 @@
       </p:sp>
       <p:sp>
         <p:nvSpPr>
-          <p:cNvPr id="9" name="Rectangle 8"/>
+          <p:cNvPr id="12" name="TextBox 11"/>
+          <p:cNvSpPr txBox="1"/>
+          <p:nvPr/>
+        </p:nvSpPr>
+        <p:spPr>
+          <a:xfrm>
+            <a:off x="502920" y="2505456"/>
+            <a:ext cx="3429000" cy="256032"/>
+          </a:xfrm>
+          <a:prstGeom prst="rect">
+            <a:avLst/>
+          </a:prstGeom>
+          <a:noFill/>
+        </p:spPr>
+        <p:txBody>
+          <a:bodyPr wrap="none">
+            <a:spAutoFit/>
+          </a:bodyPr>
+          <a:lstStyle/>
+          <a:p>
+            <a:r>
+              <a:rPr sz="1100" b="0">
+                <a:solidFill>
+                  <a:srgbClr val="E2E8F0"/>
+                </a:solidFill>
+                <a:latin typeface="微软雅黑"/>
+                <ns5:rFonts xmlns:ns5="http://schemas.openxmlformats.org/wordprocessingml/2006/main" ns5:eastAsia="微软雅黑" ns5:ascii="微软雅黑" ns5:hAnsi="微软雅黑"/>
+              </a:rPr>
+              <a:t>五个方向</a:t>
+            </a:r>
+          </a:p>
+        </p:txBody>
+      </p:sp>
+      <p:sp>
+        <p:nvSpPr>
+          <p:cNvPr id="13" name="Rectangle 12"/>
           <p:cNvSpPr/>
           <p:nvPr/>
         </p:nvSpPr>
         <p:spPr>
           <a:xfrm>
-            <a:off x="274320" y="996696"/>
-            <a:ext cx="73152" cy="3854196"/>
+            <a:off x="384048" y="2871216"/>
+            <a:ext cx="3657600" cy="384048"/>
           </a:xfrm>
           <a:prstGeom prst="rect">
             <a:avLst/>
           </a:prstGeom>
           <a:solidFill>
-            <a:srgbClr val="143278"/>
+            <a:srgbClr val="1E4082"/>
           </a:solidFill>
           <a:ln>
-            <a:noFill/>
+            <a:solidFill>
+              <a:srgbClr val="648CC8"/>
+            </a:solidFill>
           </a:ln>
         </p:spPr>
         <p:style>
@@ -16601,14 +16634,14 @@
       </p:sp>
       <p:sp>
         <p:nvSpPr>
-          <p:cNvPr id="10" name="TextBox 9"/>
+          <p:cNvPr id="14" name="TextBox 13"/>
           <p:cNvSpPr txBox="1"/>
           <p:nvPr/>
         </p:nvSpPr>
         <p:spPr>
           <a:xfrm>
-            <a:off x="438912" y="1106424"/>
-            <a:ext cx="3282696" cy="708660"/>
+            <a:off x="502920" y="2944368"/>
+            <a:ext cx="3429000" cy="256032"/>
           </a:xfrm>
           <a:prstGeom prst="rect">
             <a:avLst/>
@@ -16616,200 +16649,20 @@
           <a:noFill/>
         </p:spPr>
         <p:txBody>
-          <a:bodyPr wrap="square" anchor="t" lIns="25400" tIns="0">
+          <a:bodyPr wrap="none">
             <a:spAutoFit/>
           </a:bodyPr>
           <a:lstStyle/>
           <a:p>
-            <a:pPr>
-              <a:lnSpc>
-                <a:spcPct val="112000"/>
-              </a:lnSpc>
-              <a:spcAft>
-                <a:spcPts val="200"/>
-              </a:spcAft>
-            </a:pPr>
-            <a:r>
-              <a:rPr sz="1300" b="0">
-                <a:solidFill>
-                  <a:srgbClr val="1C202C"/>
-                </a:solidFill>
-                <a:latin typeface="微软雅黑"/>
-                <ns3:rFonts xmlns:ns3="http://schemas.openxmlformats.org/wordprocessingml/2006/main" ns3:eastAsia="微软雅黑" ns3:ascii="微软雅黑" ns3:hAnsi="微软雅黑"/>
-              </a:rPr>
-              <a:t>● 对接 Unitree 等人形真机</a:t>
-            </a:r>
-          </a:p>
-        </p:txBody>
-      </p:sp>
-      <p:sp>
-        <p:nvSpPr>
-          <p:cNvPr id="11" name="TextBox 10"/>
-          <p:cNvSpPr txBox="1"/>
-          <p:nvPr/>
-        </p:nvSpPr>
-        <p:spPr>
-          <a:xfrm>
-            <a:off x="438912" y="1833372"/>
-            <a:ext cx="3282696" cy="708660"/>
-          </a:xfrm>
-          <a:prstGeom prst="rect">
-            <a:avLst/>
-          </a:prstGeom>
-          <a:noFill/>
-        </p:spPr>
-        <p:txBody>
-          <a:bodyPr wrap="square" anchor="t" lIns="25400" tIns="0">
-            <a:spAutoFit/>
-          </a:bodyPr>
-          <a:lstStyle/>
-          <a:p>
-            <a:pPr>
-              <a:lnSpc>
-                <a:spcPct val="112000"/>
-              </a:lnSpc>
-              <a:spcAft>
-                <a:spcPts val="200"/>
-              </a:spcAft>
-            </a:pPr>
-            <a:r>
-              <a:rPr sz="1300" b="0">
-                <a:solidFill>
-                  <a:srgbClr val="1C202C"/>
-                </a:solidFill>
-                <a:latin typeface="微软雅黑"/>
-                <ns4:rFonts xmlns:ns4="http://schemas.openxmlformats.org/wordprocessingml/2006/main" ns4:eastAsia="微软雅黑" ns4:ascii="微软雅黑" ns4:hAnsi="微软雅黑"/>
-              </a:rPr>
-              <a:t>● 补充公开跌倒数据集</a:t>
-            </a:r>
-          </a:p>
-        </p:txBody>
-      </p:sp>
-      <p:sp>
-        <p:nvSpPr>
-          <p:cNvPr id="12" name="TextBox 11"/>
-          <p:cNvSpPr txBox="1"/>
-          <p:nvPr/>
-        </p:nvSpPr>
-        <p:spPr>
-          <a:xfrm>
-            <a:off x="438912" y="2560320"/>
-            <a:ext cx="3282696" cy="708660"/>
-          </a:xfrm>
-          <a:prstGeom prst="rect">
-            <a:avLst/>
-          </a:prstGeom>
-          <a:noFill/>
-        </p:spPr>
-        <p:txBody>
-          <a:bodyPr wrap="square" anchor="t" lIns="25400" tIns="0">
-            <a:spAutoFit/>
-          </a:bodyPr>
-          <a:lstStyle/>
-          <a:p>
-            <a:pPr>
-              <a:lnSpc>
-                <a:spcPct val="112000"/>
-              </a:lnSpc>
-              <a:spcAft>
-                <a:spcPts val="200"/>
-              </a:spcAft>
-            </a:pPr>
-            <a:r>
-              <a:rPr sz="1300" b="0">
-                <a:solidFill>
-                  <a:srgbClr val="1C202C"/>
-                </a:solidFill>
-                <a:latin typeface="微软雅黑"/>
-                <ns5:rFonts xmlns:ns5="http://schemas.openxmlformats.org/wordprocessingml/2006/main" ns5:eastAsia="微软雅黑" ns5:ascii="微软雅黑" ns5:hAnsi="微软雅黑"/>
-              </a:rPr>
-              <a:t>● 做多房间、弱光等复杂场景</a:t>
-            </a:r>
-          </a:p>
-        </p:txBody>
-      </p:sp>
-      <p:sp>
-        <p:nvSpPr>
-          <p:cNvPr id="13" name="TextBox 12"/>
-          <p:cNvSpPr txBox="1"/>
-          <p:nvPr/>
-        </p:nvSpPr>
-        <p:spPr>
-          <a:xfrm>
-            <a:off x="438912" y="3287268"/>
-            <a:ext cx="3282696" cy="708660"/>
-          </a:xfrm>
-          <a:prstGeom prst="rect">
-            <a:avLst/>
-          </a:prstGeom>
-          <a:noFill/>
-        </p:spPr>
-        <p:txBody>
-          <a:bodyPr wrap="square" anchor="t" lIns="25400" tIns="0">
-            <a:spAutoFit/>
-          </a:bodyPr>
-          <a:lstStyle/>
-          <a:p>
-            <a:pPr>
-              <a:lnSpc>
-                <a:spcPct val="112000"/>
-              </a:lnSpc>
-              <a:spcAft>
-                <a:spcPts val="200"/>
-              </a:spcAft>
-            </a:pPr>
-            <a:r>
-              <a:rPr sz="1300" b="0">
-                <a:solidFill>
-                  <a:srgbClr val="1C202C"/>
+            <a:r>
+              <a:rPr sz="1100" b="0">
+                <a:solidFill>
+                  <a:srgbClr val="E2E8F0"/>
                 </a:solidFill>
                 <a:latin typeface="微软雅黑"/>
                 <ns6:rFonts xmlns:ns6="http://schemas.openxmlformats.org/wordprocessingml/2006/main" ns6:eastAsia="微软雅黑" ns6:ascii="微软雅黑" ns6:hAnsi="微软雅黑"/>
               </a:rPr>
-              <a:t>● 去养老院做访谈和试用</a:t>
-            </a:r>
-          </a:p>
-        </p:txBody>
-      </p:sp>
-      <p:sp>
-        <p:nvSpPr>
-          <p:cNvPr id="14" name="TextBox 13"/>
-          <p:cNvSpPr txBox="1"/>
-          <p:nvPr/>
-        </p:nvSpPr>
-        <p:spPr>
-          <a:xfrm>
-            <a:off x="438912" y="4014216"/>
-            <a:ext cx="3282696" cy="708660"/>
-          </a:xfrm>
-          <a:prstGeom prst="rect">
-            <a:avLst/>
-          </a:prstGeom>
-          <a:noFill/>
-        </p:spPr>
-        <p:txBody>
-          <a:bodyPr wrap="square" anchor="t" lIns="25400" tIns="0">
-            <a:spAutoFit/>
-          </a:bodyPr>
-          <a:lstStyle/>
-          <a:p>
-            <a:pPr>
-              <a:lnSpc>
-                <a:spcPct val="112000"/>
-              </a:lnSpc>
-              <a:spcAft>
-                <a:spcPts val="200"/>
-              </a:spcAft>
-            </a:pPr>
-            <a:r>
-              <a:rPr sz="1300" b="0">
-                <a:solidFill>
-                  <a:srgbClr val="1C202C"/>
-                </a:solidFill>
-                <a:latin typeface="微软雅黑"/>
-                <ns7:rFonts xmlns:ns7="http://schemas.openxmlformats.org/wordprocessingml/2006/main" ns7:eastAsia="微软雅黑" ns7:ascii="微软雅黑" ns7:hAnsi="微软雅黑"/>
-              </a:rPr>
-              <a:t>● 软著和专利在准备</a:t>
+              <a:t>真机</a:t>
             </a:r>
           </a:p>
         </p:txBody>
@@ -16822,18 +16675,18 @@
         </p:nvSpPr>
         <p:spPr>
           <a:xfrm>
-            <a:off x="4105656" y="1033272"/>
-            <a:ext cx="4727448" cy="3744468"/>
+            <a:off x="384048" y="3310128"/>
+            <a:ext cx="3657600" cy="384048"/>
           </a:xfrm>
           <a:prstGeom prst="rect">
             <a:avLst/>
           </a:prstGeom>
           <a:solidFill>
-            <a:srgbClr val="FFFFFF"/>
+            <a:srgbClr val="1E4082"/>
           </a:solidFill>
-          <a:ln w="9525">
+          <a:ln>
             <a:solidFill>
-              <a:srgbClr val="BAC8DC"/>
+              <a:srgbClr val="648CC8"/>
             </a:solidFill>
           </a:ln>
         </p:spPr>
@@ -16861,20 +16714,55 @@
       </p:sp>
       <p:sp>
         <p:nvSpPr>
-          <p:cNvPr id="16" name="Rectangle 15"/>
+          <p:cNvPr id="16" name="TextBox 15"/>
+          <p:cNvSpPr txBox="1"/>
+          <p:nvPr/>
+        </p:nvSpPr>
+        <p:spPr>
+          <a:xfrm>
+            <a:off x="502920" y="3383280"/>
+            <a:ext cx="3429000" cy="256032"/>
+          </a:xfrm>
+          <a:prstGeom prst="rect">
+            <a:avLst/>
+          </a:prstGeom>
+          <a:noFill/>
+        </p:spPr>
+        <p:txBody>
+          <a:bodyPr wrap="none">
+            <a:spAutoFit/>
+          </a:bodyPr>
+          <a:lstStyle/>
+          <a:p>
+            <a:r>
+              <a:rPr sz="1100" b="0">
+                <a:solidFill>
+                  <a:srgbClr val="E2E8F0"/>
+                </a:solidFill>
+                <a:latin typeface="微软雅黑"/>
+                <ns7:rFonts xmlns:ns7="http://schemas.openxmlformats.org/wordprocessingml/2006/main" ns7:eastAsia="微软雅黑" ns7:ascii="微软雅黑" ns7:hAnsi="微软雅黑"/>
+              </a:rPr>
+              <a:t>软著</a:t>
+            </a:r>
+          </a:p>
+        </p:txBody>
+      </p:sp>
+      <p:sp>
+        <p:nvSpPr>
+          <p:cNvPr id="17" name="Rectangle 16"/>
           <p:cNvSpPr/>
           <p:nvPr/>
         </p:nvSpPr>
         <p:spPr>
           <a:xfrm>
-            <a:off x="3968496" y="996696"/>
-            <a:ext cx="10972" cy="3854196"/>
+            <a:off x="4343400" y="420624"/>
+            <a:ext cx="4800600" cy="4430268"/>
           </a:xfrm>
           <a:prstGeom prst="rect">
             <a:avLst/>
           </a:prstGeom>
           <a:solidFill>
-            <a:srgbClr val="BAC8DC"/>
+            <a:srgbClr val="F1F7FF"/>
           </a:solidFill>
           <a:ln>
             <a:noFill/>
@@ -16904,14 +16792,14 @@
       </p:sp>
       <p:sp>
         <p:nvSpPr>
-          <p:cNvPr id="17" name="Rectangle 16"/>
+          <p:cNvPr id="18" name="Rectangle 17"/>
           <p:cNvSpPr/>
           <p:nvPr/>
         </p:nvSpPr>
         <p:spPr>
           <a:xfrm>
-            <a:off x="4308652" y="1186781"/>
-            <a:ext cx="4321454" cy="3144841"/>
+            <a:off x="4503008" y="1719518"/>
+            <a:ext cx="4481382" cy="2371975"/>
           </a:xfrm>
           <a:prstGeom prst="rect">
             <a:avLst/>
@@ -16949,7 +16837,7 @@
       </p:sp>
       <p:pic>
         <p:nvPicPr>
-          <p:cNvPr id="18" name="Picture 17" descr="roadmap_gantt.png"/>
+          <p:cNvPr id="19" name="Picture 18" descr="ppt_full_dashboard.png"/>
           <p:cNvPicPr>
             <a:picLocks noChangeAspect="1"/>
           </p:cNvPicPr>
@@ -16963,50 +16851,14 @@
         </p:blipFill>
         <p:spPr>
           <a:xfrm>
-            <a:off x="4345228" y="1223357"/>
-            <a:ext cx="4248302" cy="3071689"/>
+            <a:off x="4539584" y="1756094"/>
+            <a:ext cx="4408230" cy="2298823"/>
           </a:xfrm>
           <a:prstGeom prst="rect">
             <a:avLst/>
           </a:prstGeom>
         </p:spPr>
       </p:pic>
-      <p:sp>
-        <p:nvSpPr>
-          <p:cNvPr id="19" name="TextBox 18"/>
-          <p:cNvSpPr txBox="1"/>
-          <p:nvPr/>
-        </p:nvSpPr>
-        <p:spPr>
-          <a:xfrm>
-            <a:off x="4160520" y="4521708"/>
-            <a:ext cx="4617720" cy="219456"/>
-          </a:xfrm>
-          <a:prstGeom prst="rect">
-            <a:avLst/>
-          </a:prstGeom>
-          <a:noFill/>
-        </p:spPr>
-        <p:txBody>
-          <a:bodyPr wrap="square" anchor="ctr">
-            <a:spAutoFit/>
-          </a:bodyPr>
-          <a:lstStyle/>
-          <a:p>
-            <a:pPr algn="ctr"/>
-            <a:r>
-              <a:rPr sz="800" b="0">
-                <a:solidFill>
-                  <a:srgbClr val="5A6273"/>
-                </a:solidFill>
-                <a:latin typeface="微软雅黑"/>
-                <ns8:rFonts xmlns:ns8="http://schemas.openxmlformats.org/wordprocessingml/2006/main" ns8:eastAsia="微软雅黑" ns8:ascii="微软雅黑" ns8:hAnsi="微软雅黑"/>
-              </a:rPr>
-              <a:t>里程碑甘特图（示意）</a:t>
-            </a:r>
-          </a:p>
-        </p:txBody>
-      </p:sp>
     </p:spTree>
   </p:cSld>
   <p:clrMapOvr>
@@ -17221,7 +17073,7 @@
                 <a:latin typeface="微软雅黑"/>
                 <ns2:rFonts xmlns:ns2="http://schemas.openxmlformats.org/wordprocessingml/2006/main" ns2:eastAsia="微软雅黑" ns2:ascii="微软雅黑" ns2:hAnsi="微软雅黑"/>
               </a:rPr>
-              <a:t>参考资料</a:t>
+              <a:t>创新点</a:t>
             </a:r>
           </a:p>
         </p:txBody>
@@ -17271,14 +17123,102 @@
       </p:sp>
       <p:sp>
         <p:nvSpPr>
-          <p:cNvPr id="8" name="TextBox 7"/>
+          <p:cNvPr id="8" name="Rectangle 7"/>
+          <p:cNvSpPr/>
+          <p:nvPr/>
+        </p:nvSpPr>
+        <p:spPr>
+          <a:xfrm>
+            <a:off x="274320" y="996696"/>
+            <a:ext cx="3611880" cy="3854196"/>
+          </a:xfrm>
+          <a:prstGeom prst="rect">
+            <a:avLst/>
+          </a:prstGeom>
+          <a:solidFill>
+            <a:srgbClr val="F1F7FF"/>
+          </a:solidFill>
+          <a:ln w="10160">
+            <a:solidFill>
+              <a:srgbClr val="BAC8DC"/>
+            </a:solidFill>
+          </a:ln>
+        </p:spPr>
+        <p:style>
+          <a:lnRef idx="1">
+            <a:schemeClr val="accent1"/>
+          </a:lnRef>
+          <a:fillRef idx="3">
+            <a:schemeClr val="accent1"/>
+          </a:fillRef>
+          <a:effectRef idx="2">
+            <a:schemeClr val="accent1"/>
+          </a:effectRef>
+          <a:fontRef idx="minor">
+            <a:schemeClr val="lt1"/>
+          </a:fontRef>
+        </p:style>
+        <p:txBody>
+          <a:bodyPr rtlCol="0" anchor="ctr"/>
+          <a:lstStyle/>
+          <a:p>
+            <a:pPr algn="ctr"/>
+          </a:p>
+        </p:txBody>
+      </p:sp>
+      <p:sp>
+        <p:nvSpPr>
+          <p:cNvPr id="9" name="Rectangle 8"/>
+          <p:cNvSpPr/>
+          <p:nvPr/>
+        </p:nvSpPr>
+        <p:spPr>
+          <a:xfrm>
+            <a:off x="274320" y="996696"/>
+            <a:ext cx="73152" cy="3854196"/>
+          </a:xfrm>
+          <a:prstGeom prst="rect">
+            <a:avLst/>
+          </a:prstGeom>
+          <a:solidFill>
+            <a:srgbClr val="143278"/>
+          </a:solidFill>
+          <a:ln>
+            <a:noFill/>
+          </a:ln>
+        </p:spPr>
+        <p:style>
+          <a:lnRef idx="1">
+            <a:schemeClr val="accent1"/>
+          </a:lnRef>
+          <a:fillRef idx="3">
+            <a:schemeClr val="accent1"/>
+          </a:fillRef>
+          <a:effectRef idx="2">
+            <a:schemeClr val="accent1"/>
+          </a:effectRef>
+          <a:fontRef idx="minor">
+            <a:schemeClr val="lt1"/>
+          </a:fontRef>
+        </p:style>
+        <p:txBody>
+          <a:bodyPr rtlCol="0" anchor="ctr"/>
+          <a:lstStyle/>
+          <a:p>
+            <a:pPr algn="ctr"/>
+          </a:p>
+        </p:txBody>
+      </p:sp>
+      <p:sp>
+        <p:nvSpPr>
+          <p:cNvPr id="10" name="TextBox 9"/>
           <p:cNvSpPr txBox="1"/>
           <p:nvPr/>
         </p:nvSpPr>
         <p:spPr>
           <a:xfrm>
-            <a:off x="502920" y="1234440"/>
-            <a:ext cx="8138160" cy="3200400"/>
+            <a:off x="438912" y="1106424"/>
+            <a:ext cx="3282696" cy="708660"/>
           </a:xfrm>
           <a:prstGeom prst="rect">
             <a:avLst/>
@@ -17286,14 +17226,17 @@
           <a:noFill/>
         </p:spPr>
         <p:txBody>
-          <a:bodyPr wrap="none">
+          <a:bodyPr wrap="square" anchor="t" lIns="25400" tIns="0">
             <a:spAutoFit/>
           </a:bodyPr>
           <a:lstStyle/>
           <a:p>
             <a:pPr>
+              <a:lnSpc>
+                <a:spcPct val="112000"/>
+              </a:lnSpc>
               <a:spcAft>
-                <a:spcPts val="1000"/>
+                <a:spcPts val="200"/>
               </a:spcAft>
             </a:pPr>
             <a:r>
@@ -17304,13 +17247,39 @@
                 <a:latin typeface="微软雅黑"/>
                 <ns3:rFonts xmlns:ns3="http://schemas.openxmlformats.org/wordprocessingml/2006/main" ns3:eastAsia="微软雅黑" ns3:ascii="微软雅黑" ns3:hAnsi="微软雅黑"/>
               </a:rPr>
-              <a:t>[1] Google MediaPipe Pose 技术文档</a:t>
-            </a:r>
-          </a:p>
+              <a:t>● 多路信号融合，结果能解释</a:t>
+            </a:r>
+          </a:p>
+        </p:txBody>
+      </p:sp>
+      <p:sp>
+        <p:nvSpPr>
+          <p:cNvPr id="11" name="TextBox 10"/>
+          <p:cNvSpPr txBox="1"/>
+          <p:nvPr/>
+        </p:nvSpPr>
+        <p:spPr>
+          <a:xfrm>
+            <a:off x="438912" y="1833372"/>
+            <a:ext cx="3282696" cy="708660"/>
+          </a:xfrm>
+          <a:prstGeom prst="rect">
+            <a:avLst/>
+          </a:prstGeom>
+          <a:noFill/>
+        </p:spPr>
+        <p:txBody>
+          <a:bodyPr wrap="square" anchor="t" lIns="25400" tIns="0">
+            <a:spAutoFit/>
+          </a:bodyPr>
+          <a:lstStyle/>
           <a:p>
             <a:pPr>
+              <a:lnSpc>
+                <a:spcPct val="112000"/>
+              </a:lnSpc>
               <a:spcAft>
-                <a:spcPts val="1000"/>
+                <a:spcPts val="200"/>
               </a:spcAft>
             </a:pPr>
             <a:r>
@@ -17321,13 +17290,39 @@
                 <a:latin typeface="微软雅黑"/>
                 <ns4:rFonts xmlns:ns4="http://schemas.openxmlformats.org/wordprocessingml/2006/main" ns4:eastAsia="微软雅黑" ns4:ascii="微软雅黑" ns4:hAnsi="微软雅黑"/>
               </a:rPr>
-              <a:t>[2] Unitree / ROS2 开发文档</a:t>
-            </a:r>
-          </a:p>
+              <a:t>● 紧急态在状态机里优先级最高</a:t>
+            </a:r>
+          </a:p>
+        </p:txBody>
+      </p:sp>
+      <p:sp>
+        <p:nvSpPr>
+          <p:cNvPr id="12" name="TextBox 11"/>
+          <p:cNvSpPr txBox="1"/>
+          <p:nvPr/>
+        </p:nvSpPr>
+        <p:spPr>
+          <a:xfrm>
+            <a:off x="438912" y="2560320"/>
+            <a:ext cx="3282696" cy="708660"/>
+          </a:xfrm>
+          <a:prstGeom prst="rect">
+            <a:avLst/>
+          </a:prstGeom>
+          <a:noFill/>
+        </p:spPr>
+        <p:txBody>
+          <a:bodyPr wrap="square" anchor="t" lIns="25400" tIns="0">
+            <a:spAutoFit/>
+          </a:bodyPr>
+          <a:lstStyle/>
           <a:p>
             <a:pPr>
+              <a:lnSpc>
+                <a:spcPct val="112000"/>
+              </a:lnSpc>
               <a:spcAft>
-                <a:spcPts val="1000"/>
+                <a:spcPts val="200"/>
               </a:spcAft>
             </a:pPr>
             <a:r>
@@ -17338,13 +17333,39 @@
                 <a:latin typeface="微软雅黑"/>
                 <ns5:rFonts xmlns:ns5="http://schemas.openxmlformats.org/wordprocessingml/2006/main" ns5:eastAsia="微软雅黑" ns5:ascii="微软雅黑" ns5:hAnsi="微软雅黑"/>
               </a:rPr>
-              <a:t>[3] 「十四五」国家老龄事业发展规划</a:t>
-            </a:r>
-          </a:p>
+              <a:t>● 视觉用 MediaPipe，不是纯参数滑块</a:t>
+            </a:r>
+          </a:p>
+        </p:txBody>
+      </p:sp>
+      <p:sp>
+        <p:nvSpPr>
+          <p:cNvPr id="13" name="TextBox 12"/>
+          <p:cNvSpPr txBox="1"/>
+          <p:nvPr/>
+        </p:nvSpPr>
+        <p:spPr>
+          <a:xfrm>
+            <a:off x="438912" y="3287268"/>
+            <a:ext cx="3282696" cy="708660"/>
+          </a:xfrm>
+          <a:prstGeom prst="rect">
+            <a:avLst/>
+          </a:prstGeom>
+          <a:noFill/>
+        </p:spPr>
+        <p:txBody>
+          <a:bodyPr wrap="square" anchor="t" lIns="25400" tIns="0">
+            <a:spAutoFit/>
+          </a:bodyPr>
+          <a:lstStyle/>
           <a:p>
             <a:pPr>
+              <a:lnSpc>
+                <a:spcPct val="112000"/>
+              </a:lnSpc>
               <a:spcAft>
-                <a:spcPts val="1000"/>
+                <a:spcPts val="200"/>
               </a:spcAft>
             </a:pPr>
             <a:r>
@@ -17355,13 +17376,39 @@
                 <a:latin typeface="微软雅黑"/>
                 <ns6:rFonts xmlns:ns6="http://schemas.openxmlformats.org/wordprocessingml/2006/main" ns6:eastAsia="微软雅黑" ns6:ascii="微软雅黑" ns6:hAnsi="微软雅黑"/>
               </a:rPr>
-              <a:t>[4] 项目技术报告 docs/TECHNICAL_REPORT.md</a:t>
-            </a:r>
-          </a:p>
+              <a:t>● 代码和评测脚本都开源</a:t>
+            </a:r>
+          </a:p>
+        </p:txBody>
+      </p:sp>
+      <p:sp>
+        <p:nvSpPr>
+          <p:cNvPr id="14" name="TextBox 13"/>
+          <p:cNvSpPr txBox="1"/>
+          <p:nvPr/>
+        </p:nvSpPr>
+        <p:spPr>
+          <a:xfrm>
+            <a:off x="438912" y="4014216"/>
+            <a:ext cx="3282696" cy="708660"/>
+          </a:xfrm>
+          <a:prstGeom prst="rect">
+            <a:avLst/>
+          </a:prstGeom>
+          <a:noFill/>
+        </p:spPr>
+        <p:txBody>
+          <a:bodyPr wrap="square" anchor="t" lIns="25400" tIns="0">
+            <a:spAutoFit/>
+          </a:bodyPr>
+          <a:lstStyle/>
           <a:p>
             <a:pPr>
+              <a:lnSpc>
+                <a:spcPct val="112000"/>
+              </a:lnSpc>
               <a:spcAft>
-                <a:spcPts val="1000"/>
+                <a:spcPts val="200"/>
               </a:spcAft>
             </a:pPr>
             <a:r>
@@ -17372,7 +17419,200 @@
                 <a:latin typeface="微软雅黑"/>
                 <ns7:rFonts xmlns:ns7="http://schemas.openxmlformats.org/wordprocessingml/2006/main" ns7:eastAsia="微软雅黑" ns7:ascii="微软雅黑" ns7:hAnsi="微软雅黑"/>
               </a:rPr>
-              <a:t>[5] 源码 https://github.com/FBB123571/ElderCare-Humanoid-Platform</a:t>
+              <a:t>● 场景对准居家养老</a:t>
+            </a:r>
+          </a:p>
+        </p:txBody>
+      </p:sp>
+      <p:sp>
+        <p:nvSpPr>
+          <p:cNvPr id="15" name="Rectangle 14"/>
+          <p:cNvSpPr/>
+          <p:nvPr/>
+        </p:nvSpPr>
+        <p:spPr>
+          <a:xfrm>
+            <a:off x="4105656" y="1033272"/>
+            <a:ext cx="4727448" cy="3744468"/>
+          </a:xfrm>
+          <a:prstGeom prst="rect">
+            <a:avLst/>
+          </a:prstGeom>
+          <a:solidFill>
+            <a:srgbClr val="FFFFFF"/>
+          </a:solidFill>
+          <a:ln w="9525">
+            <a:solidFill>
+              <a:srgbClr val="BAC8DC"/>
+            </a:solidFill>
+          </a:ln>
+        </p:spPr>
+        <p:style>
+          <a:lnRef idx="1">
+            <a:schemeClr val="accent1"/>
+          </a:lnRef>
+          <a:fillRef idx="3">
+            <a:schemeClr val="accent1"/>
+          </a:fillRef>
+          <a:effectRef idx="2">
+            <a:schemeClr val="accent1"/>
+          </a:effectRef>
+          <a:fontRef idx="minor">
+            <a:schemeClr val="lt1"/>
+          </a:fontRef>
+        </p:style>
+        <p:txBody>
+          <a:bodyPr rtlCol="0" anchor="ctr"/>
+          <a:lstStyle/>
+          <a:p>
+            <a:pPr algn="ctr"/>
+          </a:p>
+        </p:txBody>
+      </p:sp>
+      <p:sp>
+        <p:nvSpPr>
+          <p:cNvPr id="16" name="Rectangle 15"/>
+          <p:cNvSpPr/>
+          <p:nvPr/>
+        </p:nvSpPr>
+        <p:spPr>
+          <a:xfrm>
+            <a:off x="3968496" y="996696"/>
+            <a:ext cx="10972" cy="3854196"/>
+          </a:xfrm>
+          <a:prstGeom prst="rect">
+            <a:avLst/>
+          </a:prstGeom>
+          <a:solidFill>
+            <a:srgbClr val="BAC8DC"/>
+          </a:solidFill>
+          <a:ln>
+            <a:noFill/>
+          </a:ln>
+        </p:spPr>
+        <p:style>
+          <a:lnRef idx="1">
+            <a:schemeClr val="accent1"/>
+          </a:lnRef>
+          <a:fillRef idx="3">
+            <a:schemeClr val="accent1"/>
+          </a:fillRef>
+          <a:effectRef idx="2">
+            <a:schemeClr val="accent1"/>
+          </a:effectRef>
+          <a:fontRef idx="minor">
+            <a:schemeClr val="lt1"/>
+          </a:fontRef>
+        </p:style>
+        <p:txBody>
+          <a:bodyPr rtlCol="0" anchor="ctr"/>
+          <a:lstStyle/>
+          <a:p>
+            <a:pPr algn="ctr"/>
+          </a:p>
+        </p:txBody>
+      </p:sp>
+      <p:sp>
+        <p:nvSpPr>
+          <p:cNvPr id="17" name="Rectangle 16"/>
+          <p:cNvSpPr/>
+          <p:nvPr/>
+        </p:nvSpPr>
+        <p:spPr>
+          <a:xfrm>
+            <a:off x="4308652" y="1202355"/>
+            <a:ext cx="4321454" cy="3113692"/>
+          </a:xfrm>
+          <a:prstGeom prst="rect">
+            <a:avLst/>
+          </a:prstGeom>
+          <a:solidFill>
+            <a:srgbClr val="FCFDFF"/>
+          </a:solidFill>
+          <a:ln w="7620">
+            <a:solidFill>
+              <a:srgbClr val="BAC8DC"/>
+            </a:solidFill>
+          </a:ln>
+        </p:spPr>
+        <p:style>
+          <a:lnRef idx="1">
+            <a:schemeClr val="accent1"/>
+          </a:lnRef>
+          <a:fillRef idx="3">
+            <a:schemeClr val="accent1"/>
+          </a:fillRef>
+          <a:effectRef idx="2">
+            <a:schemeClr val="accent1"/>
+          </a:effectRef>
+          <a:fontRef idx="minor">
+            <a:schemeClr val="lt1"/>
+          </a:fontRef>
+        </p:style>
+        <p:txBody>
+          <a:bodyPr rtlCol="0" anchor="ctr"/>
+          <a:lstStyle/>
+          <a:p>
+            <a:pPr algn="ctr"/>
+          </a:p>
+        </p:txBody>
+      </p:sp>
+      <p:pic>
+        <p:nvPicPr>
+          <p:cNvPr id="18" name="Picture 17" descr="innovation_radar.png"/>
+          <p:cNvPicPr>
+            <a:picLocks noChangeAspect="1"/>
+          </p:cNvPicPr>
+          <p:nvPr/>
+        </p:nvPicPr>
+        <p:blipFill>
+          <a:blip r:embed="rId2"/>
+          <a:stretch>
+            <a:fillRect/>
+          </a:stretch>
+        </p:blipFill>
+        <p:spPr>
+          <a:xfrm>
+            <a:off x="4345228" y="1238931"/>
+            <a:ext cx="4248302" cy="3040540"/>
+          </a:xfrm>
+          <a:prstGeom prst="rect">
+            <a:avLst/>
+          </a:prstGeom>
+        </p:spPr>
+      </p:pic>
+      <p:sp>
+        <p:nvSpPr>
+          <p:cNvPr id="19" name="TextBox 18"/>
+          <p:cNvSpPr txBox="1"/>
+          <p:nvPr/>
+        </p:nvSpPr>
+        <p:spPr>
+          <a:xfrm>
+            <a:off x="4160520" y="4521708"/>
+            <a:ext cx="4617720" cy="219456"/>
+          </a:xfrm>
+          <a:prstGeom prst="rect">
+            <a:avLst/>
+          </a:prstGeom>
+          <a:noFill/>
+        </p:spPr>
+        <p:txBody>
+          <a:bodyPr wrap="square" anchor="ctr">
+            <a:spAutoFit/>
+          </a:bodyPr>
+          <a:lstStyle/>
+          <a:p>
+            <a:pPr algn="ctr"/>
+            <a:r>
+              <a:rPr sz="800" b="0">
+                <a:solidFill>
+                  <a:srgbClr val="5A6273"/>
+                </a:solidFill>
+                <a:latin typeface="微软雅黑"/>
+                <ns8:rFonts xmlns:ns8="http://schemas.openxmlformats.org/wordprocessingml/2006/main" ns8:eastAsia="微软雅黑" ns8:ascii="微软雅黑" ns8:hAnsi="微软雅黑"/>
+              </a:rPr>
+              <a:t>实验结果</a:t>
             </a:r>
           </a:p>
         </p:txBody>
@@ -17591,7 +17831,7 @@
                 <a:latin typeface="微软雅黑"/>
                 <ns2:rFonts xmlns:ns2="http://schemas.openxmlformats.org/wordprocessingml/2006/main" ns2:eastAsia="微软雅黑" ns2:ascii="微软雅黑" ns2:hAnsi="微软雅黑"/>
               </a:rPr>
-              <a:t>扫码查看代码与演示视频</a:t>
+              <a:t>后面打算做什么</a:t>
             </a:r>
           </a:p>
         </p:txBody>
@@ -17736,7 +17976,7 @@
         <p:spPr>
           <a:xfrm>
             <a:off x="438912" y="1106424"/>
-            <a:ext cx="3282696" cy="890397"/>
+            <a:ext cx="3282696" cy="708660"/>
           </a:xfrm>
           <a:prstGeom prst="rect">
             <a:avLst/>
@@ -17765,7 +18005,7 @@
                 <a:latin typeface="微软雅黑"/>
                 <ns3:rFonts xmlns:ns3="http://schemas.openxmlformats.org/wordprocessingml/2006/main" ns3:eastAsia="微软雅黑" ns3:ascii="微软雅黑" ns3:hAnsi="微软雅黑"/>
               </a:rPr>
-              <a:t>● GitHub 完整源码与文档</a:t>
+              <a:t>● 对接 Unitree 等人形真机</a:t>
             </a:r>
           </a:p>
         </p:txBody>
@@ -17778,8 +18018,8 @@
         </p:nvSpPr>
         <p:spPr>
           <a:xfrm>
-            <a:off x="438912" y="2015109"/>
-            <a:ext cx="3282696" cy="890397"/>
+            <a:off x="438912" y="1833372"/>
+            <a:ext cx="3282696" cy="708660"/>
           </a:xfrm>
           <a:prstGeom prst="rect">
             <a:avLst/>
@@ -17808,7 +18048,7 @@
                 <a:latin typeface="微软雅黑"/>
                 <ns4:rFonts xmlns:ns4="http://schemas.openxmlformats.org/wordprocessingml/2006/main" ns4:eastAsia="微软雅黑" ns4:ascii="微软雅黑" ns4:hAnsi="微软雅黑"/>
               </a:rPr>
-              <a:t>● 在线 Web 演示（现场可复现）</a:t>
+              <a:t>● 补充公开跌倒数据集</a:t>
             </a:r>
           </a:p>
         </p:txBody>
@@ -17821,8 +18061,8 @@
         </p:nvSpPr>
         <p:spPr>
           <a:xfrm>
-            <a:off x="438912" y="2923794"/>
-            <a:ext cx="3282696" cy="890397"/>
+            <a:off x="438912" y="2560320"/>
+            <a:ext cx="3282696" cy="708660"/>
           </a:xfrm>
           <a:prstGeom prst="rect">
             <a:avLst/>
@@ -17851,7 +18091,7 @@
                 <a:latin typeface="微软雅黑"/>
                 <ns5:rFonts xmlns:ns5="http://schemas.openxmlformats.org/wordprocessingml/2006/main" ns5:eastAsia="微软雅黑" ns5:ascii="微软雅黑" ns5:hAnsi="微软雅黑"/>
               </a:rPr>
-              <a:t>● 演示录像已附仓库</a:t>
+              <a:t>● 做多房间、弱光等复杂场景</a:t>
             </a:r>
           </a:p>
         </p:txBody>
@@ -17864,8 +18104,8 @@
         </p:nvSpPr>
         <p:spPr>
           <a:xfrm>
-            <a:off x="438912" y="3832479"/>
-            <a:ext cx="3282696" cy="890397"/>
+            <a:off x="438912" y="3287268"/>
+            <a:ext cx="3282696" cy="708660"/>
           </a:xfrm>
           <a:prstGeom prst="rect">
             <a:avLst/>
@@ -17894,14 +18134,57 @@
                 <a:latin typeface="微软雅黑"/>
                 <ns6:rFonts xmlns:ns6="http://schemas.openxmlformats.org/wordprocessingml/2006/main" ns6:eastAsia="微软雅黑" ns6:ascii="微软雅黑" ns6:hAnsi="微软雅黑"/>
               </a:rPr>
-              <a:t>● 欢迎评委扫码查阅</a:t>
-            </a:r>
-          </a:p>
-        </p:txBody>
-      </p:sp>
-      <p:sp>
-        <p:nvSpPr>
-          <p:cNvPr id="14" name="Rectangle 13"/>
+              <a:t>● 去养老院做访谈和试用</a:t>
+            </a:r>
+          </a:p>
+        </p:txBody>
+      </p:sp>
+      <p:sp>
+        <p:nvSpPr>
+          <p:cNvPr id="14" name="TextBox 13"/>
+          <p:cNvSpPr txBox="1"/>
+          <p:nvPr/>
+        </p:nvSpPr>
+        <p:spPr>
+          <a:xfrm>
+            <a:off x="438912" y="4014216"/>
+            <a:ext cx="3282696" cy="708660"/>
+          </a:xfrm>
+          <a:prstGeom prst="rect">
+            <a:avLst/>
+          </a:prstGeom>
+          <a:noFill/>
+        </p:spPr>
+        <p:txBody>
+          <a:bodyPr wrap="square" anchor="t" lIns="25400" tIns="0">
+            <a:spAutoFit/>
+          </a:bodyPr>
+          <a:lstStyle/>
+          <a:p>
+            <a:pPr>
+              <a:lnSpc>
+                <a:spcPct val="112000"/>
+              </a:lnSpc>
+              <a:spcAft>
+                <a:spcPts val="200"/>
+              </a:spcAft>
+            </a:pPr>
+            <a:r>
+              <a:rPr sz="1300" b="0">
+                <a:solidFill>
+                  <a:srgbClr val="1C202C"/>
+                </a:solidFill>
+                <a:latin typeface="微软雅黑"/>
+                <ns7:rFonts xmlns:ns7="http://schemas.openxmlformats.org/wordprocessingml/2006/main" ns7:eastAsia="微软雅黑" ns7:ascii="微软雅黑" ns7:hAnsi="微软雅黑"/>
+              </a:rPr>
+              <a:t>● 软著和专利在准备</a:t>
+            </a:r>
+          </a:p>
+        </p:txBody>
+      </p:sp>
+      <p:sp>
+        <p:nvSpPr>
+          <p:cNvPr id="15" name="Rectangle 14"/>
           <p:cNvSpPr/>
           <p:nvPr/>
         </p:nvSpPr>
@@ -17944,9 +18227,97 @@
           </a:p>
         </p:txBody>
       </p:sp>
+      <p:sp>
+        <p:nvSpPr>
+          <p:cNvPr id="16" name="Rectangle 15"/>
+          <p:cNvSpPr/>
+          <p:nvPr/>
+        </p:nvSpPr>
+        <p:spPr>
+          <a:xfrm>
+            <a:off x="3968496" y="996696"/>
+            <a:ext cx="10972" cy="3854196"/>
+          </a:xfrm>
+          <a:prstGeom prst="rect">
+            <a:avLst/>
+          </a:prstGeom>
+          <a:solidFill>
+            <a:srgbClr val="BAC8DC"/>
+          </a:solidFill>
+          <a:ln>
+            <a:noFill/>
+          </a:ln>
+        </p:spPr>
+        <p:style>
+          <a:lnRef idx="1">
+            <a:schemeClr val="accent1"/>
+          </a:lnRef>
+          <a:fillRef idx="3">
+            <a:schemeClr val="accent1"/>
+          </a:fillRef>
+          <a:effectRef idx="2">
+            <a:schemeClr val="accent1"/>
+          </a:effectRef>
+          <a:fontRef idx="minor">
+            <a:schemeClr val="lt1"/>
+          </a:fontRef>
+        </p:style>
+        <p:txBody>
+          <a:bodyPr rtlCol="0" anchor="ctr"/>
+          <a:lstStyle/>
+          <a:p>
+            <a:pPr algn="ctr"/>
+          </a:p>
+        </p:txBody>
+      </p:sp>
+      <p:sp>
+        <p:nvSpPr>
+          <p:cNvPr id="17" name="Rectangle 16"/>
+          <p:cNvSpPr/>
+          <p:nvPr/>
+        </p:nvSpPr>
+        <p:spPr>
+          <a:xfrm>
+            <a:off x="4308652" y="1186781"/>
+            <a:ext cx="4321454" cy="3144841"/>
+          </a:xfrm>
+          <a:prstGeom prst="rect">
+            <a:avLst/>
+          </a:prstGeom>
+          <a:solidFill>
+            <a:srgbClr val="FCFDFF"/>
+          </a:solidFill>
+          <a:ln w="7620">
+            <a:solidFill>
+              <a:srgbClr val="BAC8DC"/>
+            </a:solidFill>
+          </a:ln>
+        </p:spPr>
+        <p:style>
+          <a:lnRef idx="1">
+            <a:schemeClr val="accent1"/>
+          </a:lnRef>
+          <a:fillRef idx="3">
+            <a:schemeClr val="accent1"/>
+          </a:fillRef>
+          <a:effectRef idx="2">
+            <a:schemeClr val="accent1"/>
+          </a:effectRef>
+          <a:fontRef idx="minor">
+            <a:schemeClr val="lt1"/>
+          </a:fontRef>
+        </p:style>
+        <p:txBody>
+          <a:bodyPr rtlCol="0" anchor="ctr"/>
+          <a:lstStyle/>
+          <a:p>
+            <a:pPr algn="ctr"/>
+          </a:p>
+        </p:txBody>
+      </p:sp>
       <p:pic>
         <p:nvPicPr>
-          <p:cNvPr id="15" name="Picture 14" descr="ppt_demo_qr.png"/>
+          <p:cNvPr id="18" name="Picture 17" descr="roadmap_gantt.png"/>
           <p:cNvPicPr>
             <a:picLocks noChangeAspect="1"/>
           </p:cNvPicPr>
@@ -17960,8 +18331,8 @@
         </p:blipFill>
         <p:spPr>
           <a:xfrm>
-            <a:off x="4193804" y="1987814"/>
-            <a:ext cx="1597639" cy="1597639"/>
+            <a:off x="4345228" y="1223357"/>
+            <a:ext cx="4248302" cy="3071689"/>
           </a:xfrm>
           <a:prstGeom prst="rect">
             <a:avLst/>
@@ -17970,14 +18341,14 @@
       </p:pic>
       <p:sp>
         <p:nvSpPr>
-          <p:cNvPr id="16" name="TextBox 15"/>
+          <p:cNvPr id="19" name="TextBox 18"/>
           <p:cNvSpPr txBox="1"/>
           <p:nvPr/>
         </p:nvSpPr>
         <p:spPr>
           <a:xfrm>
-            <a:off x="4160520" y="3640317"/>
-            <a:ext cx="1664208" cy="219456"/>
+            <a:off x="4160520" y="4521708"/>
+            <a:ext cx="4617720" cy="219456"/>
           </a:xfrm>
           <a:prstGeom prst="rect">
             <a:avLst/>
@@ -17992,74 +18363,14 @@
           <a:p>
             <a:pPr algn="ctr"/>
             <a:r>
-              <a:rPr sz="900" b="0">
+              <a:rPr sz="800" b="0">
                 <a:solidFill>
                   <a:srgbClr val="5A6273"/>
                 </a:solidFill>
                 <a:latin typeface="微软雅黑"/>
-                <ns7:rFonts xmlns:ns7="http://schemas.openxmlformats.org/wordprocessingml/2006/main" ns7:eastAsia="微软雅黑" ns7:ascii="微软雅黑" ns7:hAnsi="微软雅黑"/>
-              </a:rPr>
-              <a:t>仓库二维码</a:t>
-            </a:r>
-          </a:p>
-        </p:txBody>
-      </p:sp>
-      <p:pic>
-        <p:nvPicPr>
-          <p:cNvPr id="17" name="Picture 16" descr="ppt_header_perception.png"/>
-          <p:cNvPicPr>
-            <a:picLocks noChangeAspect="1"/>
-          </p:cNvPicPr>
-          <p:nvPr/>
-        </p:nvPicPr>
-        <p:blipFill>
-          <a:blip r:embed="rId3"/>
-          <a:stretch>
-            <a:fillRect/>
-          </a:stretch>
-        </p:blipFill>
-        <p:spPr>
-          <a:xfrm>
-            <a:off x="5980998" y="2070050"/>
-            <a:ext cx="2768986" cy="1433166"/>
-          </a:xfrm>
-          <a:prstGeom prst="rect">
-            <a:avLst/>
-          </a:prstGeom>
-        </p:spPr>
-      </p:pic>
-      <p:sp>
-        <p:nvSpPr>
-          <p:cNvPr id="18" name="TextBox 17"/>
-          <p:cNvSpPr txBox="1"/>
-          <p:nvPr/>
-        </p:nvSpPr>
-        <p:spPr>
-          <a:xfrm>
-            <a:off x="5952744" y="3558081"/>
-            <a:ext cx="2825495" cy="219456"/>
-          </a:xfrm>
-          <a:prstGeom prst="rect">
-            <a:avLst/>
-          </a:prstGeom>
-          <a:noFill/>
-        </p:spPr>
-        <p:txBody>
-          <a:bodyPr wrap="square" anchor="ctr">
-            <a:spAutoFit/>
-          </a:bodyPr>
-          <a:lstStyle/>
-          <a:p>
-            <a:pPr algn="ctr"/>
-            <a:r>
-              <a:rPr sz="900" b="0">
-                <a:solidFill>
-                  <a:srgbClr val="5A6273"/>
-                </a:solidFill>
-                <a:latin typeface="微软雅黑"/>
                 <ns8:rFonts xmlns:ns8="http://schemas.openxmlformats.org/wordprocessingml/2006/main" ns8:eastAsia="微软雅黑" ns8:ascii="微软雅黑" ns8:hAnsi="微软雅黑"/>
               </a:rPr>
-              <a:t>Web 感知界面</a:t>
+              <a:t>里程碑甘特图（示意）</a:t>
             </a:r>
           </a:p>
         </p:txBody>
@@ -19245,6 +19556,1063 @@
 <file path=ppt/slides/slide30.xml><?xml version="1.0" encoding="utf-8"?>
 <p:sld xmlns:a="http://schemas.openxmlformats.org/drawingml/2006/main" xmlns:p="http://schemas.openxmlformats.org/presentationml/2006/main" xmlns:r="http://schemas.openxmlformats.org/officeDocument/2006/relationships">
   <p:cSld>
+    <p:bg>
+      <p:bgPr>
+        <a:solidFill>
+          <a:srgbClr val="FFFFFF"/>
+        </a:solidFill>
+        <a:effectLst/>
+      </p:bgPr>
+    </p:bg>
+    <p:spTree>
+      <p:nvGrpSpPr>
+        <p:cNvPr id="1" name=""/>
+        <p:cNvGrpSpPr/>
+        <p:nvPr/>
+      </p:nvGrpSpPr>
+      <p:grpSpPr/>
+      <p:sp>
+        <p:nvSpPr>
+          <p:cNvPr id="2" name="Rectangle 1"/>
+          <p:cNvSpPr/>
+          <p:nvPr/>
+        </p:nvSpPr>
+        <p:spPr>
+          <a:xfrm>
+            <a:off x="0" y="0"/>
+            <a:ext cx="9144000" cy="420624"/>
+          </a:xfrm>
+          <a:prstGeom prst="rect">
+            <a:avLst/>
+          </a:prstGeom>
+          <a:solidFill>
+            <a:srgbClr val="143278"/>
+          </a:solidFill>
+          <a:ln>
+            <a:noFill/>
+          </a:ln>
+        </p:spPr>
+        <p:style>
+          <a:lnRef idx="1">
+            <a:schemeClr val="accent1"/>
+          </a:lnRef>
+          <a:fillRef idx="3">
+            <a:schemeClr val="accent1"/>
+          </a:fillRef>
+          <a:effectRef idx="2">
+            <a:schemeClr val="accent1"/>
+          </a:effectRef>
+          <a:fontRef idx="minor">
+            <a:schemeClr val="lt1"/>
+          </a:fontRef>
+        </p:style>
+        <p:txBody>
+          <a:bodyPr rtlCol="0" anchor="ctr"/>
+          <a:lstStyle/>
+          <a:p>
+            <a:pPr algn="ctr"/>
+          </a:p>
+        </p:txBody>
+      </p:sp>
+      <p:sp>
+        <p:nvSpPr>
+          <p:cNvPr id="3" name="TextBox 2"/>
+          <p:cNvSpPr txBox="1"/>
+          <p:nvPr/>
+        </p:nvSpPr>
+        <p:spPr>
+          <a:xfrm>
+            <a:off x="274320" y="54864"/>
+            <a:ext cx="8595360" cy="347472"/>
+          </a:xfrm>
+          <a:prstGeom prst="rect">
+            <a:avLst/>
+          </a:prstGeom>
+          <a:noFill/>
+        </p:spPr>
+        <p:txBody>
+          <a:bodyPr wrap="none">
+            <a:spAutoFit/>
+          </a:bodyPr>
+          <a:lstStyle/>
+          <a:p>
+            <a:r>
+              <a:rPr sz="900" b="1">
+                <a:solidFill>
+                  <a:srgbClr val="FFFFFF"/>
+                </a:solidFill>
+                <a:latin typeface="微软雅黑"/>
+                <ns0:rFonts xmlns:ns0="http://schemas.openxmlformats.org/wordprocessingml/2006/main" ns0:eastAsia="微软雅黑" ns0:ascii="微软雅黑" ns0:hAnsi="微软雅黑"/>
+              </a:rPr>
+              <a:t>第二十八届中国机器人及人工智能大赛  |  创新赛 · 机器人创新赛道</a:t>
+            </a:r>
+          </a:p>
+        </p:txBody>
+      </p:sp>
+      <p:sp>
+        <p:nvSpPr>
+          <p:cNvPr id="4" name="Rectangle 3"/>
+          <p:cNvSpPr/>
+          <p:nvPr/>
+        </p:nvSpPr>
+        <p:spPr>
+          <a:xfrm>
+            <a:off x="0" y="4905756"/>
+            <a:ext cx="9144000" cy="237744"/>
+          </a:xfrm>
+          <a:prstGeom prst="rect">
+            <a:avLst/>
+          </a:prstGeom>
+          <a:solidFill>
+            <a:srgbClr val="DBEAFE"/>
+          </a:solidFill>
+          <a:ln>
+            <a:noFill/>
+          </a:ln>
+        </p:spPr>
+        <p:style>
+          <a:lnRef idx="1">
+            <a:schemeClr val="accent1"/>
+          </a:lnRef>
+          <a:fillRef idx="3">
+            <a:schemeClr val="accent1"/>
+          </a:fillRef>
+          <a:effectRef idx="2">
+            <a:schemeClr val="accent1"/>
+          </a:effectRef>
+          <a:fontRef idx="minor">
+            <a:schemeClr val="lt1"/>
+          </a:fontRef>
+        </p:style>
+        <p:txBody>
+          <a:bodyPr rtlCol="0" anchor="ctr"/>
+          <a:lstStyle/>
+          <a:p>
+            <a:pPr algn="ctr"/>
+          </a:p>
+        </p:txBody>
+      </p:sp>
+      <p:sp>
+        <p:nvSpPr>
+          <p:cNvPr id="5" name="TextBox 4"/>
+          <p:cNvSpPr txBox="1"/>
+          <p:nvPr/>
+        </p:nvSpPr>
+        <p:spPr>
+          <a:xfrm>
+            <a:off x="274320" y="4951476"/>
+            <a:ext cx="8595360" cy="182880"/>
+          </a:xfrm>
+          <a:prstGeom prst="rect">
+            <a:avLst/>
+          </a:prstGeom>
+          <a:noFill/>
+        </p:spPr>
+        <p:txBody>
+          <a:bodyPr wrap="none">
+            <a:spAutoFit/>
+          </a:bodyPr>
+          <a:lstStyle/>
+          <a:p>
+            <a:pPr algn="ctr"/>
+            <a:r>
+              <a:rPr sz="800" b="0">
+                <a:solidFill>
+                  <a:srgbClr val="5A6273"/>
+                </a:solidFill>
+                <a:latin typeface="微软雅黑"/>
+                <ns1:rFonts xmlns:ns1="http://schemas.openxmlformats.org/wordprocessingml/2006/main" ns1:eastAsia="微软雅黑" ns1:ascii="微软雅黑" ns1:hAnsi="微软雅黑"/>
+              </a:rPr>
+              <a:t>从容应队 · 中山大学 · 刘小凡/白冉 · 指导教师 彭键清</a:t>
+            </a:r>
+          </a:p>
+        </p:txBody>
+      </p:sp>
+      <p:sp>
+        <p:nvSpPr>
+          <p:cNvPr id="6" name="TextBox 5"/>
+          <p:cNvSpPr txBox="1"/>
+          <p:nvPr/>
+        </p:nvSpPr>
+        <p:spPr>
+          <a:xfrm>
+            <a:off x="274320" y="466344"/>
+            <a:ext cx="8595360" cy="457200"/>
+          </a:xfrm>
+          <a:prstGeom prst="rect">
+            <a:avLst/>
+          </a:prstGeom>
+          <a:noFill/>
+        </p:spPr>
+        <p:txBody>
+          <a:bodyPr wrap="none">
+            <a:spAutoFit/>
+          </a:bodyPr>
+          <a:lstStyle/>
+          <a:p>
+            <a:pPr algn="l"/>
+            <a:r>
+              <a:rPr sz="2000" b="1">
+                <a:solidFill>
+                  <a:srgbClr val="143278"/>
+                </a:solidFill>
+                <a:latin typeface="微软雅黑"/>
+                <ns2:rFonts xmlns:ns2="http://schemas.openxmlformats.org/wordprocessingml/2006/main" ns2:eastAsia="微软雅黑" ns2:ascii="微软雅黑" ns2:hAnsi="微软雅黑"/>
+              </a:rPr>
+              <a:t>参考资料</a:t>
+            </a:r>
+          </a:p>
+        </p:txBody>
+      </p:sp>
+      <p:sp>
+        <p:nvSpPr>
+          <p:cNvPr id="7" name="Rectangle 6"/>
+          <p:cNvSpPr/>
+          <p:nvPr/>
+        </p:nvSpPr>
+        <p:spPr>
+          <a:xfrm>
+            <a:off x="274320" y="886968"/>
+            <a:ext cx="1143000" cy="50292"/>
+          </a:xfrm>
+          <a:prstGeom prst="rect">
+            <a:avLst/>
+          </a:prstGeom>
+          <a:solidFill>
+            <a:srgbClr val="F59E0B"/>
+          </a:solidFill>
+          <a:ln>
+            <a:noFill/>
+          </a:ln>
+        </p:spPr>
+        <p:style>
+          <a:lnRef idx="1">
+            <a:schemeClr val="accent1"/>
+          </a:lnRef>
+          <a:fillRef idx="3">
+            <a:schemeClr val="accent1"/>
+          </a:fillRef>
+          <a:effectRef idx="2">
+            <a:schemeClr val="accent1"/>
+          </a:effectRef>
+          <a:fontRef idx="minor">
+            <a:schemeClr val="lt1"/>
+          </a:fontRef>
+        </p:style>
+        <p:txBody>
+          <a:bodyPr rtlCol="0" anchor="ctr"/>
+          <a:lstStyle/>
+          <a:p>
+            <a:pPr algn="ctr"/>
+          </a:p>
+        </p:txBody>
+      </p:sp>
+      <p:sp>
+        <p:nvSpPr>
+          <p:cNvPr id="8" name="TextBox 7"/>
+          <p:cNvSpPr txBox="1"/>
+          <p:nvPr/>
+        </p:nvSpPr>
+        <p:spPr>
+          <a:xfrm>
+            <a:off x="502920" y="1234440"/>
+            <a:ext cx="8138160" cy="3200400"/>
+          </a:xfrm>
+          <a:prstGeom prst="rect">
+            <a:avLst/>
+          </a:prstGeom>
+          <a:noFill/>
+        </p:spPr>
+        <p:txBody>
+          <a:bodyPr wrap="none">
+            <a:spAutoFit/>
+          </a:bodyPr>
+          <a:lstStyle/>
+          <a:p>
+            <a:pPr>
+              <a:spcAft>
+                <a:spcPts val="1000"/>
+              </a:spcAft>
+            </a:pPr>
+            <a:r>
+              <a:rPr sz="1300" b="0">
+                <a:solidFill>
+                  <a:srgbClr val="1C202C"/>
+                </a:solidFill>
+                <a:latin typeface="微软雅黑"/>
+                <ns3:rFonts xmlns:ns3="http://schemas.openxmlformats.org/wordprocessingml/2006/main" ns3:eastAsia="微软雅黑" ns3:ascii="微软雅黑" ns3:hAnsi="微软雅黑"/>
+              </a:rPr>
+              <a:t>[1] Google MediaPipe Pose 技术文档</a:t>
+            </a:r>
+          </a:p>
+          <a:p>
+            <a:pPr>
+              <a:spcAft>
+                <a:spcPts val="1000"/>
+              </a:spcAft>
+            </a:pPr>
+            <a:r>
+              <a:rPr sz="1300" b="0">
+                <a:solidFill>
+                  <a:srgbClr val="1C202C"/>
+                </a:solidFill>
+                <a:latin typeface="微软雅黑"/>
+                <ns4:rFonts xmlns:ns4="http://schemas.openxmlformats.org/wordprocessingml/2006/main" ns4:eastAsia="微软雅黑" ns4:ascii="微软雅黑" ns4:hAnsi="微软雅黑"/>
+              </a:rPr>
+              <a:t>[2] Unitree / ROS2 开发文档</a:t>
+            </a:r>
+          </a:p>
+          <a:p>
+            <a:pPr>
+              <a:spcAft>
+                <a:spcPts val="1000"/>
+              </a:spcAft>
+            </a:pPr>
+            <a:r>
+              <a:rPr sz="1300" b="0">
+                <a:solidFill>
+                  <a:srgbClr val="1C202C"/>
+                </a:solidFill>
+                <a:latin typeface="微软雅黑"/>
+                <ns5:rFonts xmlns:ns5="http://schemas.openxmlformats.org/wordprocessingml/2006/main" ns5:eastAsia="微软雅黑" ns5:ascii="微软雅黑" ns5:hAnsi="微软雅黑"/>
+              </a:rPr>
+              <a:t>[3] 「十四五」国家老龄事业发展规划</a:t>
+            </a:r>
+          </a:p>
+          <a:p>
+            <a:pPr>
+              <a:spcAft>
+                <a:spcPts val="1000"/>
+              </a:spcAft>
+            </a:pPr>
+            <a:r>
+              <a:rPr sz="1300" b="0">
+                <a:solidFill>
+                  <a:srgbClr val="1C202C"/>
+                </a:solidFill>
+                <a:latin typeface="微软雅黑"/>
+                <ns6:rFonts xmlns:ns6="http://schemas.openxmlformats.org/wordprocessingml/2006/main" ns6:eastAsia="微软雅黑" ns6:ascii="微软雅黑" ns6:hAnsi="微软雅黑"/>
+              </a:rPr>
+              <a:t>[4] 项目技术报告 docs/TECHNICAL_REPORT.md</a:t>
+            </a:r>
+          </a:p>
+          <a:p>
+            <a:pPr>
+              <a:spcAft>
+                <a:spcPts val="1000"/>
+              </a:spcAft>
+            </a:pPr>
+            <a:r>
+              <a:rPr sz="1300" b="0">
+                <a:solidFill>
+                  <a:srgbClr val="1C202C"/>
+                </a:solidFill>
+                <a:latin typeface="微软雅黑"/>
+                <ns7:rFonts xmlns:ns7="http://schemas.openxmlformats.org/wordprocessingml/2006/main" ns7:eastAsia="微软雅黑" ns7:ascii="微软雅黑" ns7:hAnsi="微软雅黑"/>
+              </a:rPr>
+              <a:t>[5] 源码 https://github.com/FBB123571/ElderCare-Humanoid-Platform</a:t>
+            </a:r>
+          </a:p>
+        </p:txBody>
+      </p:sp>
+    </p:spTree>
+  </p:cSld>
+  <p:clrMapOvr>
+    <a:masterClrMapping/>
+  </p:clrMapOvr>
+</p:sld>
+</file>
+
+<file path=ppt/slides/slide31.xml><?xml version="1.0" encoding="utf-8"?>
+<p:sld xmlns:a="http://schemas.openxmlformats.org/drawingml/2006/main" xmlns:p="http://schemas.openxmlformats.org/presentationml/2006/main" xmlns:r="http://schemas.openxmlformats.org/officeDocument/2006/relationships">
+  <p:cSld>
+    <p:bg>
+      <p:bgPr>
+        <a:solidFill>
+          <a:srgbClr val="FFFFFF"/>
+        </a:solidFill>
+        <a:effectLst/>
+      </p:bgPr>
+    </p:bg>
+    <p:spTree>
+      <p:nvGrpSpPr>
+        <p:cNvPr id="1" name=""/>
+        <p:cNvGrpSpPr/>
+        <p:nvPr/>
+      </p:nvGrpSpPr>
+      <p:grpSpPr/>
+      <p:sp>
+        <p:nvSpPr>
+          <p:cNvPr id="2" name="Rectangle 1"/>
+          <p:cNvSpPr/>
+          <p:nvPr/>
+        </p:nvSpPr>
+        <p:spPr>
+          <a:xfrm>
+            <a:off x="0" y="0"/>
+            <a:ext cx="9144000" cy="420624"/>
+          </a:xfrm>
+          <a:prstGeom prst="rect">
+            <a:avLst/>
+          </a:prstGeom>
+          <a:solidFill>
+            <a:srgbClr val="143278"/>
+          </a:solidFill>
+          <a:ln>
+            <a:noFill/>
+          </a:ln>
+        </p:spPr>
+        <p:style>
+          <a:lnRef idx="1">
+            <a:schemeClr val="accent1"/>
+          </a:lnRef>
+          <a:fillRef idx="3">
+            <a:schemeClr val="accent1"/>
+          </a:fillRef>
+          <a:effectRef idx="2">
+            <a:schemeClr val="accent1"/>
+          </a:effectRef>
+          <a:fontRef idx="minor">
+            <a:schemeClr val="lt1"/>
+          </a:fontRef>
+        </p:style>
+        <p:txBody>
+          <a:bodyPr rtlCol="0" anchor="ctr"/>
+          <a:lstStyle/>
+          <a:p>
+            <a:pPr algn="ctr"/>
+          </a:p>
+        </p:txBody>
+      </p:sp>
+      <p:sp>
+        <p:nvSpPr>
+          <p:cNvPr id="3" name="TextBox 2"/>
+          <p:cNvSpPr txBox="1"/>
+          <p:nvPr/>
+        </p:nvSpPr>
+        <p:spPr>
+          <a:xfrm>
+            <a:off x="274320" y="54864"/>
+            <a:ext cx="8595360" cy="347472"/>
+          </a:xfrm>
+          <a:prstGeom prst="rect">
+            <a:avLst/>
+          </a:prstGeom>
+          <a:noFill/>
+        </p:spPr>
+        <p:txBody>
+          <a:bodyPr wrap="none">
+            <a:spAutoFit/>
+          </a:bodyPr>
+          <a:lstStyle/>
+          <a:p>
+            <a:r>
+              <a:rPr sz="900" b="1">
+                <a:solidFill>
+                  <a:srgbClr val="FFFFFF"/>
+                </a:solidFill>
+                <a:latin typeface="微软雅黑"/>
+                <ns0:rFonts xmlns:ns0="http://schemas.openxmlformats.org/wordprocessingml/2006/main" ns0:eastAsia="微软雅黑" ns0:ascii="微软雅黑" ns0:hAnsi="微软雅黑"/>
+              </a:rPr>
+              <a:t>第二十八届中国机器人及人工智能大赛  |  创新赛 · 机器人创新赛道</a:t>
+            </a:r>
+          </a:p>
+        </p:txBody>
+      </p:sp>
+      <p:sp>
+        <p:nvSpPr>
+          <p:cNvPr id="4" name="Rectangle 3"/>
+          <p:cNvSpPr/>
+          <p:nvPr/>
+        </p:nvSpPr>
+        <p:spPr>
+          <a:xfrm>
+            <a:off x="0" y="4905756"/>
+            <a:ext cx="9144000" cy="237744"/>
+          </a:xfrm>
+          <a:prstGeom prst="rect">
+            <a:avLst/>
+          </a:prstGeom>
+          <a:solidFill>
+            <a:srgbClr val="DBEAFE"/>
+          </a:solidFill>
+          <a:ln>
+            <a:noFill/>
+          </a:ln>
+        </p:spPr>
+        <p:style>
+          <a:lnRef idx="1">
+            <a:schemeClr val="accent1"/>
+          </a:lnRef>
+          <a:fillRef idx="3">
+            <a:schemeClr val="accent1"/>
+          </a:fillRef>
+          <a:effectRef idx="2">
+            <a:schemeClr val="accent1"/>
+          </a:effectRef>
+          <a:fontRef idx="minor">
+            <a:schemeClr val="lt1"/>
+          </a:fontRef>
+        </p:style>
+        <p:txBody>
+          <a:bodyPr rtlCol="0" anchor="ctr"/>
+          <a:lstStyle/>
+          <a:p>
+            <a:pPr algn="ctr"/>
+          </a:p>
+        </p:txBody>
+      </p:sp>
+      <p:sp>
+        <p:nvSpPr>
+          <p:cNvPr id="5" name="TextBox 4"/>
+          <p:cNvSpPr txBox="1"/>
+          <p:nvPr/>
+        </p:nvSpPr>
+        <p:spPr>
+          <a:xfrm>
+            <a:off x="274320" y="4951476"/>
+            <a:ext cx="8595360" cy="182880"/>
+          </a:xfrm>
+          <a:prstGeom prst="rect">
+            <a:avLst/>
+          </a:prstGeom>
+          <a:noFill/>
+        </p:spPr>
+        <p:txBody>
+          <a:bodyPr wrap="none">
+            <a:spAutoFit/>
+          </a:bodyPr>
+          <a:lstStyle/>
+          <a:p>
+            <a:pPr algn="ctr"/>
+            <a:r>
+              <a:rPr sz="800" b="0">
+                <a:solidFill>
+                  <a:srgbClr val="5A6273"/>
+                </a:solidFill>
+                <a:latin typeface="微软雅黑"/>
+                <ns1:rFonts xmlns:ns1="http://schemas.openxmlformats.org/wordprocessingml/2006/main" ns1:eastAsia="微软雅黑" ns1:ascii="微软雅黑" ns1:hAnsi="微软雅黑"/>
+              </a:rPr>
+              <a:t>从容应队 · 中山大学 · 刘小凡/白冉 · 指导教师 彭键清</a:t>
+            </a:r>
+          </a:p>
+        </p:txBody>
+      </p:sp>
+      <p:sp>
+        <p:nvSpPr>
+          <p:cNvPr id="6" name="TextBox 5"/>
+          <p:cNvSpPr txBox="1"/>
+          <p:nvPr/>
+        </p:nvSpPr>
+        <p:spPr>
+          <a:xfrm>
+            <a:off x="274320" y="466344"/>
+            <a:ext cx="8595360" cy="457200"/>
+          </a:xfrm>
+          <a:prstGeom prst="rect">
+            <a:avLst/>
+          </a:prstGeom>
+          <a:noFill/>
+        </p:spPr>
+        <p:txBody>
+          <a:bodyPr wrap="none">
+            <a:spAutoFit/>
+          </a:bodyPr>
+          <a:lstStyle/>
+          <a:p>
+            <a:pPr algn="l"/>
+            <a:r>
+              <a:rPr sz="2000" b="1">
+                <a:solidFill>
+                  <a:srgbClr val="143278"/>
+                </a:solidFill>
+                <a:latin typeface="微软雅黑"/>
+                <ns2:rFonts xmlns:ns2="http://schemas.openxmlformats.org/wordprocessingml/2006/main" ns2:eastAsia="微软雅黑" ns2:ascii="微软雅黑" ns2:hAnsi="微软雅黑"/>
+              </a:rPr>
+              <a:t>扫码查看代码与演示视频</a:t>
+            </a:r>
+          </a:p>
+        </p:txBody>
+      </p:sp>
+      <p:sp>
+        <p:nvSpPr>
+          <p:cNvPr id="7" name="Rectangle 6"/>
+          <p:cNvSpPr/>
+          <p:nvPr/>
+        </p:nvSpPr>
+        <p:spPr>
+          <a:xfrm>
+            <a:off x="274320" y="886968"/>
+            <a:ext cx="1143000" cy="50292"/>
+          </a:xfrm>
+          <a:prstGeom prst="rect">
+            <a:avLst/>
+          </a:prstGeom>
+          <a:solidFill>
+            <a:srgbClr val="F59E0B"/>
+          </a:solidFill>
+          <a:ln>
+            <a:noFill/>
+          </a:ln>
+        </p:spPr>
+        <p:style>
+          <a:lnRef idx="1">
+            <a:schemeClr val="accent1"/>
+          </a:lnRef>
+          <a:fillRef idx="3">
+            <a:schemeClr val="accent1"/>
+          </a:fillRef>
+          <a:effectRef idx="2">
+            <a:schemeClr val="accent1"/>
+          </a:effectRef>
+          <a:fontRef idx="minor">
+            <a:schemeClr val="lt1"/>
+          </a:fontRef>
+        </p:style>
+        <p:txBody>
+          <a:bodyPr rtlCol="0" anchor="ctr"/>
+          <a:lstStyle/>
+          <a:p>
+            <a:pPr algn="ctr"/>
+          </a:p>
+        </p:txBody>
+      </p:sp>
+      <p:sp>
+        <p:nvSpPr>
+          <p:cNvPr id="8" name="Rectangle 7"/>
+          <p:cNvSpPr/>
+          <p:nvPr/>
+        </p:nvSpPr>
+        <p:spPr>
+          <a:xfrm>
+            <a:off x="274320" y="996696"/>
+            <a:ext cx="3611880" cy="3854196"/>
+          </a:xfrm>
+          <a:prstGeom prst="rect">
+            <a:avLst/>
+          </a:prstGeom>
+          <a:solidFill>
+            <a:srgbClr val="F1F7FF"/>
+          </a:solidFill>
+          <a:ln w="10160">
+            <a:solidFill>
+              <a:srgbClr val="BAC8DC"/>
+            </a:solidFill>
+          </a:ln>
+        </p:spPr>
+        <p:style>
+          <a:lnRef idx="1">
+            <a:schemeClr val="accent1"/>
+          </a:lnRef>
+          <a:fillRef idx="3">
+            <a:schemeClr val="accent1"/>
+          </a:fillRef>
+          <a:effectRef idx="2">
+            <a:schemeClr val="accent1"/>
+          </a:effectRef>
+          <a:fontRef idx="minor">
+            <a:schemeClr val="lt1"/>
+          </a:fontRef>
+        </p:style>
+        <p:txBody>
+          <a:bodyPr rtlCol="0" anchor="ctr"/>
+          <a:lstStyle/>
+          <a:p>
+            <a:pPr algn="ctr"/>
+          </a:p>
+        </p:txBody>
+      </p:sp>
+      <p:sp>
+        <p:nvSpPr>
+          <p:cNvPr id="9" name="Rectangle 8"/>
+          <p:cNvSpPr/>
+          <p:nvPr/>
+        </p:nvSpPr>
+        <p:spPr>
+          <a:xfrm>
+            <a:off x="274320" y="996696"/>
+            <a:ext cx="73152" cy="3854196"/>
+          </a:xfrm>
+          <a:prstGeom prst="rect">
+            <a:avLst/>
+          </a:prstGeom>
+          <a:solidFill>
+            <a:srgbClr val="143278"/>
+          </a:solidFill>
+          <a:ln>
+            <a:noFill/>
+          </a:ln>
+        </p:spPr>
+        <p:style>
+          <a:lnRef idx="1">
+            <a:schemeClr val="accent1"/>
+          </a:lnRef>
+          <a:fillRef idx="3">
+            <a:schemeClr val="accent1"/>
+          </a:fillRef>
+          <a:effectRef idx="2">
+            <a:schemeClr val="accent1"/>
+          </a:effectRef>
+          <a:fontRef idx="minor">
+            <a:schemeClr val="lt1"/>
+          </a:fontRef>
+        </p:style>
+        <p:txBody>
+          <a:bodyPr rtlCol="0" anchor="ctr"/>
+          <a:lstStyle/>
+          <a:p>
+            <a:pPr algn="ctr"/>
+          </a:p>
+        </p:txBody>
+      </p:sp>
+      <p:sp>
+        <p:nvSpPr>
+          <p:cNvPr id="10" name="TextBox 9"/>
+          <p:cNvSpPr txBox="1"/>
+          <p:nvPr/>
+        </p:nvSpPr>
+        <p:spPr>
+          <a:xfrm>
+            <a:off x="438912" y="1106424"/>
+            <a:ext cx="3282696" cy="890397"/>
+          </a:xfrm>
+          <a:prstGeom prst="rect">
+            <a:avLst/>
+          </a:prstGeom>
+          <a:noFill/>
+        </p:spPr>
+        <p:txBody>
+          <a:bodyPr wrap="square" anchor="t" lIns="25400" tIns="0">
+            <a:spAutoFit/>
+          </a:bodyPr>
+          <a:lstStyle/>
+          <a:p>
+            <a:pPr>
+              <a:lnSpc>
+                <a:spcPct val="112000"/>
+              </a:lnSpc>
+              <a:spcAft>
+                <a:spcPts val="200"/>
+              </a:spcAft>
+            </a:pPr>
+            <a:r>
+              <a:rPr sz="1300" b="0">
+                <a:solidFill>
+                  <a:srgbClr val="1C202C"/>
+                </a:solidFill>
+                <a:latin typeface="微软雅黑"/>
+                <ns3:rFonts xmlns:ns3="http://schemas.openxmlformats.org/wordprocessingml/2006/main" ns3:eastAsia="微软雅黑" ns3:ascii="微软雅黑" ns3:hAnsi="微软雅黑"/>
+              </a:rPr>
+              <a:t>● GitHub 完整源码与文档</a:t>
+            </a:r>
+          </a:p>
+        </p:txBody>
+      </p:sp>
+      <p:sp>
+        <p:nvSpPr>
+          <p:cNvPr id="11" name="TextBox 10"/>
+          <p:cNvSpPr txBox="1"/>
+          <p:nvPr/>
+        </p:nvSpPr>
+        <p:spPr>
+          <a:xfrm>
+            <a:off x="438912" y="2015109"/>
+            <a:ext cx="3282696" cy="890397"/>
+          </a:xfrm>
+          <a:prstGeom prst="rect">
+            <a:avLst/>
+          </a:prstGeom>
+          <a:noFill/>
+        </p:spPr>
+        <p:txBody>
+          <a:bodyPr wrap="square" anchor="t" lIns="25400" tIns="0">
+            <a:spAutoFit/>
+          </a:bodyPr>
+          <a:lstStyle/>
+          <a:p>
+            <a:pPr>
+              <a:lnSpc>
+                <a:spcPct val="112000"/>
+              </a:lnSpc>
+              <a:spcAft>
+                <a:spcPts val="200"/>
+              </a:spcAft>
+            </a:pPr>
+            <a:r>
+              <a:rPr sz="1300" b="0">
+                <a:solidFill>
+                  <a:srgbClr val="1C202C"/>
+                </a:solidFill>
+                <a:latin typeface="微软雅黑"/>
+                <ns4:rFonts xmlns:ns4="http://schemas.openxmlformats.org/wordprocessingml/2006/main" ns4:eastAsia="微软雅黑" ns4:ascii="微软雅黑" ns4:hAnsi="微软雅黑"/>
+              </a:rPr>
+              <a:t>● 在线 Web 演示（现场可复现）</a:t>
+            </a:r>
+          </a:p>
+        </p:txBody>
+      </p:sp>
+      <p:sp>
+        <p:nvSpPr>
+          <p:cNvPr id="12" name="TextBox 11"/>
+          <p:cNvSpPr txBox="1"/>
+          <p:nvPr/>
+        </p:nvSpPr>
+        <p:spPr>
+          <a:xfrm>
+            <a:off x="438912" y="2923794"/>
+            <a:ext cx="3282696" cy="890397"/>
+          </a:xfrm>
+          <a:prstGeom prst="rect">
+            <a:avLst/>
+          </a:prstGeom>
+          <a:noFill/>
+        </p:spPr>
+        <p:txBody>
+          <a:bodyPr wrap="square" anchor="t" lIns="25400" tIns="0">
+            <a:spAutoFit/>
+          </a:bodyPr>
+          <a:lstStyle/>
+          <a:p>
+            <a:pPr>
+              <a:lnSpc>
+                <a:spcPct val="112000"/>
+              </a:lnSpc>
+              <a:spcAft>
+                <a:spcPts val="200"/>
+              </a:spcAft>
+            </a:pPr>
+            <a:r>
+              <a:rPr sz="1300" b="0">
+                <a:solidFill>
+                  <a:srgbClr val="1C202C"/>
+                </a:solidFill>
+                <a:latin typeface="微软雅黑"/>
+                <ns5:rFonts xmlns:ns5="http://schemas.openxmlformats.org/wordprocessingml/2006/main" ns5:eastAsia="微软雅黑" ns5:ascii="微软雅黑" ns5:hAnsi="微软雅黑"/>
+              </a:rPr>
+              <a:t>● 演示录像已附仓库</a:t>
+            </a:r>
+          </a:p>
+        </p:txBody>
+      </p:sp>
+      <p:sp>
+        <p:nvSpPr>
+          <p:cNvPr id="13" name="TextBox 12"/>
+          <p:cNvSpPr txBox="1"/>
+          <p:nvPr/>
+        </p:nvSpPr>
+        <p:spPr>
+          <a:xfrm>
+            <a:off x="438912" y="3832479"/>
+            <a:ext cx="3282696" cy="890397"/>
+          </a:xfrm>
+          <a:prstGeom prst="rect">
+            <a:avLst/>
+          </a:prstGeom>
+          <a:noFill/>
+        </p:spPr>
+        <p:txBody>
+          <a:bodyPr wrap="square" anchor="t" lIns="25400" tIns="0">
+            <a:spAutoFit/>
+          </a:bodyPr>
+          <a:lstStyle/>
+          <a:p>
+            <a:pPr>
+              <a:lnSpc>
+                <a:spcPct val="112000"/>
+              </a:lnSpc>
+              <a:spcAft>
+                <a:spcPts val="200"/>
+              </a:spcAft>
+            </a:pPr>
+            <a:r>
+              <a:rPr sz="1300" b="0">
+                <a:solidFill>
+                  <a:srgbClr val="1C202C"/>
+                </a:solidFill>
+                <a:latin typeface="微软雅黑"/>
+                <ns6:rFonts xmlns:ns6="http://schemas.openxmlformats.org/wordprocessingml/2006/main" ns6:eastAsia="微软雅黑" ns6:ascii="微软雅黑" ns6:hAnsi="微软雅黑"/>
+              </a:rPr>
+              <a:t>● 欢迎评委扫码查阅</a:t>
+            </a:r>
+          </a:p>
+        </p:txBody>
+      </p:sp>
+      <p:sp>
+        <p:nvSpPr>
+          <p:cNvPr id="14" name="Rectangle 13"/>
+          <p:cNvSpPr/>
+          <p:nvPr/>
+        </p:nvSpPr>
+        <p:spPr>
+          <a:xfrm>
+            <a:off x="4105656" y="1033272"/>
+            <a:ext cx="4727448" cy="3744468"/>
+          </a:xfrm>
+          <a:prstGeom prst="rect">
+            <a:avLst/>
+          </a:prstGeom>
+          <a:solidFill>
+            <a:srgbClr val="FFFFFF"/>
+          </a:solidFill>
+          <a:ln w="9525">
+            <a:solidFill>
+              <a:srgbClr val="BAC8DC"/>
+            </a:solidFill>
+          </a:ln>
+        </p:spPr>
+        <p:style>
+          <a:lnRef idx="1">
+            <a:schemeClr val="accent1"/>
+          </a:lnRef>
+          <a:fillRef idx="3">
+            <a:schemeClr val="accent1"/>
+          </a:fillRef>
+          <a:effectRef idx="2">
+            <a:schemeClr val="accent1"/>
+          </a:effectRef>
+          <a:fontRef idx="minor">
+            <a:schemeClr val="lt1"/>
+          </a:fontRef>
+        </p:style>
+        <p:txBody>
+          <a:bodyPr rtlCol="0" anchor="ctr"/>
+          <a:lstStyle/>
+          <a:p>
+            <a:pPr algn="ctr"/>
+          </a:p>
+        </p:txBody>
+      </p:sp>
+      <p:pic>
+        <p:nvPicPr>
+          <p:cNvPr id="15" name="Picture 14" descr="ppt_demo_qr.png"/>
+          <p:cNvPicPr>
+            <a:picLocks noChangeAspect="1"/>
+          </p:cNvPicPr>
+          <p:nvPr/>
+        </p:nvPicPr>
+        <p:blipFill>
+          <a:blip r:embed="rId2"/>
+          <a:stretch>
+            <a:fillRect/>
+          </a:stretch>
+        </p:blipFill>
+        <p:spPr>
+          <a:xfrm>
+            <a:off x="4193804" y="1987814"/>
+            <a:ext cx="1597639" cy="1597639"/>
+          </a:xfrm>
+          <a:prstGeom prst="rect">
+            <a:avLst/>
+          </a:prstGeom>
+        </p:spPr>
+      </p:pic>
+      <p:sp>
+        <p:nvSpPr>
+          <p:cNvPr id="16" name="TextBox 15"/>
+          <p:cNvSpPr txBox="1"/>
+          <p:nvPr/>
+        </p:nvSpPr>
+        <p:spPr>
+          <a:xfrm>
+            <a:off x="4160520" y="3640317"/>
+            <a:ext cx="1664208" cy="219456"/>
+          </a:xfrm>
+          <a:prstGeom prst="rect">
+            <a:avLst/>
+          </a:prstGeom>
+          <a:noFill/>
+        </p:spPr>
+        <p:txBody>
+          <a:bodyPr wrap="square" anchor="ctr">
+            <a:spAutoFit/>
+          </a:bodyPr>
+          <a:lstStyle/>
+          <a:p>
+            <a:pPr algn="ctr"/>
+            <a:r>
+              <a:rPr sz="900" b="0">
+                <a:solidFill>
+                  <a:srgbClr val="5A6273"/>
+                </a:solidFill>
+                <a:latin typeface="微软雅黑"/>
+                <ns7:rFonts xmlns:ns7="http://schemas.openxmlformats.org/wordprocessingml/2006/main" ns7:eastAsia="微软雅黑" ns7:ascii="微软雅黑" ns7:hAnsi="微软雅黑"/>
+              </a:rPr>
+              <a:t>仓库二维码</a:t>
+            </a:r>
+          </a:p>
+        </p:txBody>
+      </p:sp>
+      <p:pic>
+        <p:nvPicPr>
+          <p:cNvPr id="17" name="Picture 16" descr="ppt_header_perception.png"/>
+          <p:cNvPicPr>
+            <a:picLocks noChangeAspect="1"/>
+          </p:cNvPicPr>
+          <p:nvPr/>
+        </p:nvPicPr>
+        <p:blipFill>
+          <a:blip r:embed="rId3"/>
+          <a:stretch>
+            <a:fillRect/>
+          </a:stretch>
+        </p:blipFill>
+        <p:spPr>
+          <a:xfrm>
+            <a:off x="5980998" y="2070050"/>
+            <a:ext cx="2768986" cy="1433166"/>
+          </a:xfrm>
+          <a:prstGeom prst="rect">
+            <a:avLst/>
+          </a:prstGeom>
+        </p:spPr>
+      </p:pic>
+      <p:sp>
+        <p:nvSpPr>
+          <p:cNvPr id="18" name="TextBox 17"/>
+          <p:cNvSpPr txBox="1"/>
+          <p:nvPr/>
+        </p:nvSpPr>
+        <p:spPr>
+          <a:xfrm>
+            <a:off x="5952744" y="3558081"/>
+            <a:ext cx="2825495" cy="219456"/>
+          </a:xfrm>
+          <a:prstGeom prst="rect">
+            <a:avLst/>
+          </a:prstGeom>
+          <a:noFill/>
+        </p:spPr>
+        <p:txBody>
+          <a:bodyPr wrap="square" anchor="ctr">
+            <a:spAutoFit/>
+          </a:bodyPr>
+          <a:lstStyle/>
+          <a:p>
+            <a:pPr algn="ctr"/>
+            <a:r>
+              <a:rPr sz="900" b="0">
+                <a:solidFill>
+                  <a:srgbClr val="5A6273"/>
+                </a:solidFill>
+                <a:latin typeface="微软雅黑"/>
+                <ns8:rFonts xmlns:ns8="http://schemas.openxmlformats.org/wordprocessingml/2006/main" ns8:eastAsia="微软雅黑" ns8:ascii="微软雅黑" ns8:hAnsi="微软雅黑"/>
+              </a:rPr>
+              <a:t>Web 感知界面</a:t>
+            </a:r>
+          </a:p>
+        </p:txBody>
+      </p:sp>
+    </p:spTree>
+  </p:cSld>
+  <p:clrMapOvr>
+    <a:masterClrMapping/>
+  </p:clrMapOvr>
+</p:sld>
+</file>
+
+<file path=ppt/slides/slide32.xml><?xml version="1.0" encoding="utf-8"?>
+<p:sld xmlns:a="http://schemas.openxmlformats.org/drawingml/2006/main" xmlns:p="http://schemas.openxmlformats.org/presentationml/2006/main" xmlns:r="http://schemas.openxmlformats.org/officeDocument/2006/relationships">
+  <p:cSld>
     <p:spTree>
       <p:nvGrpSpPr>
         <p:cNvPr id="1" name=""/>

--- a/docs/答辩_CareCompanion.pptx
+++ b/docs/答辩_CareCompanion.pptx
@@ -37,6 +37,7 @@
     <p:sldId id="285" r:id="rId36"/>
     <p:sldId id="286" r:id="rId37"/>
     <p:sldId id="287" r:id="rId38"/>
+    <p:sldId id="288" r:id="rId39"/>
   </p:sldIdLst>
   <p:sldSz cx="9144000" cy="5143500" type="screen4x3"/>
   <p:notesSz cx="6858000" cy="9144000"/>
@@ -12720,7 +12721,7 @@
                 <a:latin typeface="微软雅黑"/>
                 <ns2:rFonts xmlns:ns2="http://schemas.openxmlformats.org/wordprocessingml/2006/main" ns2:eastAsia="微软雅黑" ns2:ascii="微软雅黑" ns2:hAnsi="微软雅黑"/>
               </a:rPr>
-              <a:t>Web 全流程演示录像</a:t>
+              <a:t>情景剧总片（Web → ROS2 → G1）</a:t>
             </a:r>
           </a:p>
         </p:txBody>
@@ -12894,7 +12895,7 @@
                 <a:latin typeface="微软雅黑"/>
                 <ns3:rFonts xmlns:ns3="http://schemas.openxmlformats.org/wordprocessingml/2006/main" ns3:eastAsia="微软雅黑" ns3:ascii="微软雅黑" ns3:hAnsi="微软雅黑"/>
               </a:rPr>
-              <a:t>● 监测 → 老人倾诉 → 模拟跌倒 → 紧急流程</a:t>
+              <a:t>● 约 30 秒：跌倒紧急 → 指令下发 → 人形行走</a:t>
             </a:r>
           </a:p>
         </p:txBody>
@@ -12937,7 +12938,7 @@
                 <a:latin typeface="微软雅黑"/>
                 <ns4:rFonts xmlns:ns4="http://schemas.openxmlformats.org/wordprocessingml/2006/main" ns4:eastAsia="微软雅黑" ns4:ascii="微软雅黑" ns4:hAnsi="微软雅黑"/>
               </a:rPr>
-              <a:t>● 仓库内可离线播放，不依赖外网</a:t>
+              <a:t>● 决策层 / 通信层 / 执行层分层展示</a:t>
             </a:r>
           </a:p>
         </p:txBody>
@@ -12980,7 +12981,7 @@
                 <a:latin typeface="微软雅黑"/>
                 <ns5:rFonts xmlns:ns5="http://schemas.openxmlformats.org/wordprocessingml/2006/main" ns5:eastAsia="微软雅黑" ns5:ascii="微软雅黑" ns5:hAnsi="微软雅黑"/>
               </a:rPr>
-              <a:t>● 与现场 run_web.sh 操作一致</a:t>
+              <a:t>● 生成：bash scripts/run_full_scenario_demo.sh</a:t>
             </a:r>
           </a:p>
         </p:txBody>
@@ -13075,7 +13076,7 @@
       </p:sp>
       <p:pic>
         <p:nvPicPr>
-          <p:cNvPr id="15" name="demo_carecompanion.mp4">
+          <p:cNvPr id="15" name="demo_full_scenario.mp4">
             <a:hlinkClick r:id="" action="ppaction://media"/>
           </p:cNvPr>
           <p:cNvPicPr>
@@ -13137,7 +13138,7 @@
                 <a:latin typeface="微软雅黑"/>
                 <ns7:rFonts xmlns:ns7="http://schemas.openxmlformats.org/wordprocessingml/2006/main" ns7:eastAsia="微软雅黑" ns7:ascii="微软雅黑" ns7:hAnsi="微软雅黑"/>
               </a:rPr>
-              <a:t>demo_carecompanion.mp4</a:t>
+              <a:t>demo_full_scenario.mp4</a:t>
             </a:r>
           </a:p>
         </p:txBody>
@@ -13378,7 +13379,7 @@
                 <a:latin typeface="微软雅黑"/>
                 <ns2:rFonts xmlns:ns2="http://schemas.openxmlformats.org/wordprocessingml/2006/main" ns2:eastAsia="微软雅黑" ns2:ascii="微软雅黑" ns2:hAnsi="微软雅黑"/>
               </a:rPr>
-              <a:t>人形仿真行走（Isaac Lab · Unitree G1）</a:t>
+              <a:t>Web 全流程演示录像</a:t>
             </a:r>
           </a:p>
         </p:txBody>
@@ -13552,7 +13553,7 @@
                 <a:latin typeface="微软雅黑"/>
                 <ns3:rFonts xmlns:ns3="http://schemas.openxmlformats.org/wordprocessingml/2006/main" ns3:eastAsia="微软雅黑" ns3:ascii="微软雅黑" ns3:hAnsi="微软雅黑"/>
               </a:rPr>
-              <a:t>● Isaac Lab 平地速度跟踪预训练策略</a:t>
+              <a:t>● 监测 → 老人倾诉 → 模拟跌倒 → 紧急流程</a:t>
             </a:r>
           </a:p>
         </p:txBody>
@@ -13595,7 +13596,7 @@
                 <a:latin typeface="微软雅黑"/>
                 <ns4:rFonts xmlns:ns4="http://schemas.openxmlformats.org/wordprocessingml/2006/main" ns4:eastAsia="微软雅黑" ns4:ascii="微软雅黑" ns4:hAnsi="微软雅黑"/>
               </a:rPr>
-              <a:t>● 固定前进 0.8 m/s，世界坐标侧拍全身</a:t>
+              <a:t>● 仓库内可离线播放，不依赖外网</a:t>
             </a:r>
           </a:p>
         </p:txBody>
@@ -13638,7 +13639,7 @@
                 <a:latin typeface="微软雅黑"/>
                 <ns5:rFonts xmlns:ns5="http://schemas.openxmlformats.org/wordprocessingml/2006/main" ns5:eastAsia="微软雅黑" ns5:ascii="微软雅黑" ns5:hAnsi="微软雅黑"/>
               </a:rPr>
-              <a:t>● 录屏段位移约 6 m，关节持续摆动</a:t>
+              <a:t>● 与现场 run_web.sh 操作一致</a:t>
             </a:r>
           </a:p>
         </p:txBody>
@@ -13681,7 +13682,7 @@
                 <a:latin typeface="微软雅黑"/>
                 <ns6:rFonts xmlns:ns6="http://schemas.openxmlformats.org/wordprocessingml/2006/main" ns6:eastAsia="微软雅黑" ns6:ascii="微软雅黑" ns6:hAnsi="微软雅黑"/>
               </a:rPr>
-              <a:t>● 说明仿真层已对接，可扩展 ROS2 真机</a:t>
+              <a:t>● 右栏可全屏播放</a:t>
             </a:r>
           </a:p>
         </p:txBody>
@@ -13733,7 +13734,7 @@
       </p:sp>
       <p:pic>
         <p:nvPicPr>
-          <p:cNvPr id="15" name="demo_isaac_g1_locomotion.mp4">
+          <p:cNvPr id="15" name="demo_carecompanion.mp4">
             <a:hlinkClick r:id="" action="ppaction://media"/>
           </p:cNvPr>
           <p:cNvPicPr>
@@ -13795,7 +13796,7 @@
                 <a:latin typeface="微软雅黑"/>
                 <ns7:rFonts xmlns:ns7="http://schemas.openxmlformats.org/wordprocessingml/2006/main" ns7:eastAsia="微软雅黑" ns7:ascii="微软雅黑" ns7:hAnsi="微软雅黑"/>
               </a:rPr>
-              <a:t>demo_isaac_g1_locomotion.mp4</a:t>
+              <a:t>demo_carecompanion.mp4</a:t>
             </a:r>
           </a:p>
         </p:txBody>
@@ -14000,7 +14001,7 @@
                 <a:latin typeface="微软雅黑"/>
                 <ns1:rFonts xmlns:ns1="http://schemas.openxmlformats.org/wordprocessingml/2006/main" ns1:eastAsia="微软雅黑" ns1:ascii="微软雅黑" ns1:hAnsi="微软雅黑"/>
               </a:rPr>
-              <a:t>从容应队 · 中山大学 · 刘小凡/白冉 · 指导教师 彭键清</a:t>
+              <a:t>演示录像  |  从容应队 · 中山大学 · 刘小凡/白冉 · 指导教师 彭键清</a:t>
             </a:r>
           </a:p>
         </p:txBody>
@@ -14036,7 +14037,7 @@
                 <a:latin typeface="微软雅黑"/>
                 <ns2:rFonts xmlns:ns2="http://schemas.openxmlformats.org/wordprocessingml/2006/main" ns2:eastAsia="微软雅黑" ns2:ascii="微软雅黑" ns2:hAnsi="微软雅黑"/>
               </a:rPr>
-              <a:t>测试结果</a:t>
+              <a:t>人形仿真行走（Isaac Lab · Unitree G1）</a:t>
             </a:r>
           </a:p>
         </p:txBody>
@@ -14181,7 +14182,7 @@
         <p:spPr>
           <a:xfrm>
             <a:off x="438912" y="1106424"/>
-            <a:ext cx="3282696" cy="812673"/>
+            <a:ext cx="3282696" cy="890397"/>
           </a:xfrm>
           <a:prstGeom prst="rect">
             <a:avLst/>
@@ -14203,14 +14204,14 @@
               </a:spcAft>
             </a:pPr>
             <a:r>
-              <a:rPr sz="1300" b="0">
+              <a:rPr sz="1200" b="0">
                 <a:solidFill>
                   <a:srgbClr val="1C202C"/>
                 </a:solidFill>
                 <a:latin typeface="微软雅黑"/>
                 <ns3:rFonts xmlns:ns3="http://schemas.openxmlformats.org/wordprocessingml/2006/main" ns3:eastAsia="微软雅黑" ns3:ascii="微软雅黑" ns3:hAnsi="微软雅黑"/>
               </a:rPr>
-              <a:t>● 跌倒检测 P/R/F1：合成 6 场景均为 100%</a:t>
+              <a:t>● Isaac Lab 平地速度跟踪预训练策略</a:t>
             </a:r>
           </a:p>
         </p:txBody>
@@ -14223,8 +14224,8 @@
         </p:nvSpPr>
         <p:spPr>
           <a:xfrm>
-            <a:off x="438912" y="1937385"/>
-            <a:ext cx="3282696" cy="812673"/>
+            <a:off x="438912" y="2015109"/>
+            <a:ext cx="3282696" cy="890397"/>
           </a:xfrm>
           <a:prstGeom prst="rect">
             <a:avLst/>
@@ -14246,14 +14247,14 @@
               </a:spcAft>
             </a:pPr>
             <a:r>
-              <a:rPr sz="1300" b="0">
+              <a:rPr sz="1200" b="0">
                 <a:solidFill>
                   <a:srgbClr val="1C202C"/>
                 </a:solidFill>
                 <a:latin typeface="微软雅黑"/>
                 <ns4:rFonts xmlns:ns4="http://schemas.openxmlformats.org/wordprocessingml/2006/main" ns4:eastAsia="微软雅黑" ns4:ascii="微软雅黑" ns4:hAnsi="微软雅黑"/>
               </a:rPr>
-              <a:t>● 紧急链路脚本跑通率 100%</a:t>
+              <a:t>● 固定前进 0.8 m/s，世界坐标侧拍全身</a:t>
             </a:r>
           </a:p>
         </p:txBody>
@@ -14266,8 +14267,8 @@
         </p:nvSpPr>
         <p:spPr>
           <a:xfrm>
-            <a:off x="438912" y="2768346"/>
-            <a:ext cx="3282696" cy="812673"/>
+            <a:off x="438912" y="2923794"/>
+            <a:ext cx="3282696" cy="890397"/>
           </a:xfrm>
           <a:prstGeom prst="rect">
             <a:avLst/>
@@ -14289,14 +14290,14 @@
               </a:spcAft>
             </a:pPr>
             <a:r>
-              <a:rPr sz="1300" b="0">
+              <a:rPr sz="1200" b="0">
                 <a:solidFill>
                   <a:srgbClr val="1C202C"/>
                 </a:solidFill>
                 <a:latin typeface="微软雅黑"/>
                 <ns5:rFonts xmlns:ns5="http://schemas.openxmlformats.org/wordprocessingml/2006/main" ns5:eastAsia="微软雅黑" ns5:ascii="微软雅黑" ns5:hAnsi="微软雅黑"/>
               </a:rPr>
-              <a:t>● 单帧决策在 CPU 上 &lt; 50ms（见右下图）</a:t>
+              <a:t>● 录屏段位移约 6 m，关节持续摆动</a:t>
             </a:r>
           </a:p>
         </p:txBody>
@@ -14309,8 +14310,8 @@
         </p:nvSpPr>
         <p:spPr>
           <a:xfrm>
-            <a:off x="438912" y="3599307"/>
-            <a:ext cx="3282696" cy="812673"/>
+            <a:off x="438912" y="3832479"/>
+            <a:ext cx="3282696" cy="890397"/>
           </a:xfrm>
           <a:prstGeom prst="rect">
             <a:avLst/>
@@ -14332,14 +14333,14 @@
               </a:spcAft>
             </a:pPr>
             <a:r>
-              <a:rPr sz="1300" b="0">
+              <a:rPr sz="1200" b="0">
                 <a:solidFill>
                   <a:srgbClr val="1C202C"/>
                 </a:solidFill>
                 <a:latin typeface="微软雅黑"/>
                 <ns6:rFonts xmlns:ns6="http://schemas.openxmlformats.org/wordprocessingml/2006/main" ns6:eastAsia="微软雅黑" ns6:ascii="微软雅黑" ns6:hAnsi="微软雅黑"/>
               </a:rPr>
-              <a:t>● 单元测试和无头演示都过了</a:t>
+              <a:t>● 说明仿真层已对接，可扩展 ROS2 真机</a:t>
             </a:r>
           </a:p>
         </p:txBody>
@@ -14347,85 +14348,6 @@
       <p:sp>
         <p:nvSpPr>
           <p:cNvPr id="14" name="Rectangle 13"/>
-          <p:cNvSpPr/>
-          <p:nvPr/>
-        </p:nvSpPr>
-        <p:spPr>
-          <a:xfrm>
-            <a:off x="365760" y="4539996"/>
-            <a:ext cx="3429000" cy="292608"/>
-          </a:xfrm>
-          <a:prstGeom prst="rect">
-            <a:avLst/>
-          </a:prstGeom>
-          <a:solidFill>
-            <a:srgbClr val="143278"/>
-          </a:solidFill>
-          <a:ln>
-            <a:noFill/>
-          </a:ln>
-        </p:spPr>
-        <p:style>
-          <a:lnRef idx="1">
-            <a:schemeClr val="accent1"/>
-          </a:lnRef>
-          <a:fillRef idx="3">
-            <a:schemeClr val="accent1"/>
-          </a:fillRef>
-          <a:effectRef idx="2">
-            <a:schemeClr val="accent1"/>
-          </a:effectRef>
-          <a:fontRef idx="minor">
-            <a:schemeClr val="lt1"/>
-          </a:fontRef>
-        </p:style>
-        <p:txBody>
-          <a:bodyPr rtlCol="0" anchor="ctr"/>
-          <a:lstStyle/>
-          <a:p>
-            <a:pPr algn="ctr"/>
-          </a:p>
-        </p:txBody>
-      </p:sp>
-      <p:sp>
-        <p:nvSpPr>
-          <p:cNvPr id="15" name="TextBox 14"/>
-          <p:cNvSpPr txBox="1"/>
-          <p:nvPr/>
-        </p:nvSpPr>
-        <p:spPr>
-          <a:xfrm>
-            <a:off x="402336" y="4604004"/>
-            <a:ext cx="3355848" cy="182880"/>
-          </a:xfrm>
-          <a:prstGeom prst="rect">
-            <a:avLst/>
-          </a:prstGeom>
-          <a:noFill/>
-        </p:spPr>
-        <p:txBody>
-          <a:bodyPr wrap="none" anchor="ctr">
-            <a:spAutoFit/>
-          </a:bodyPr>
-          <a:lstStyle/>
-          <a:p>
-            <a:pPr algn="ctr"/>
-            <a:r>
-              <a:rPr sz="1100" b="1">
-                <a:solidFill>
-                  <a:srgbClr val="FFFFFF"/>
-                </a:solidFill>
-                <a:latin typeface="微软雅黑"/>
-                <ns7:rFonts xmlns:ns7="http://schemas.openxmlformats.org/wordprocessingml/2006/main" ns7:eastAsia="微软雅黑" ns7:ascii="微软雅黑" ns7:hAnsi="微软雅黑"/>
-              </a:rPr>
-              <a:t>数据：fall_eval_report.json</a:t>
-            </a:r>
-          </a:p>
-        </p:txBody>
-      </p:sp>
-      <p:sp>
-        <p:nvSpPr>
-          <p:cNvPr id="16" name="Rectangle 15"/>
           <p:cNvSpPr/>
           <p:nvPr/>
         </p:nvSpPr>
@@ -14468,112 +14390,33 @@
           </a:p>
         </p:txBody>
       </p:sp>
-      <p:sp>
-        <p:nvSpPr>
-          <p:cNvPr id="17" name="Rectangle 16"/>
-          <p:cNvSpPr/>
-          <p:nvPr/>
-        </p:nvSpPr>
-        <p:spPr>
-          <a:xfrm>
-            <a:off x="3968496" y="996696"/>
-            <a:ext cx="10972" cy="3854196"/>
-          </a:xfrm>
-          <a:prstGeom prst="rect">
-            <a:avLst/>
-          </a:prstGeom>
-          <a:solidFill>
-            <a:srgbClr val="BAC8DC"/>
-          </a:solidFill>
-          <a:ln>
-            <a:noFill/>
-          </a:ln>
-        </p:spPr>
-        <p:style>
-          <a:lnRef idx="1">
-            <a:schemeClr val="accent1"/>
-          </a:lnRef>
-          <a:fillRef idx="3">
-            <a:schemeClr val="accent1"/>
-          </a:fillRef>
-          <a:effectRef idx="2">
-            <a:schemeClr val="accent1"/>
-          </a:effectRef>
-          <a:fontRef idx="minor">
-            <a:schemeClr val="lt1"/>
-          </a:fontRef>
-        </p:style>
-        <p:txBody>
-          <a:bodyPr rtlCol="0" anchor="ctr"/>
-          <a:lstStyle/>
-          <a:p>
-            <a:pPr algn="ctr"/>
-          </a:p>
-        </p:txBody>
-      </p:sp>
-      <p:sp>
-        <p:nvSpPr>
-          <p:cNvPr id="18" name="Rectangle 17"/>
-          <p:cNvSpPr/>
-          <p:nvPr/>
-        </p:nvSpPr>
-        <p:spPr>
-          <a:xfrm>
-            <a:off x="4308652" y="1328651"/>
-            <a:ext cx="4321454" cy="2861100"/>
-          </a:xfrm>
-          <a:prstGeom prst="rect">
-            <a:avLst/>
-          </a:prstGeom>
-          <a:solidFill>
-            <a:srgbClr val="FCFDFF"/>
-          </a:solidFill>
-          <a:ln w="7620">
-            <a:solidFill>
-              <a:srgbClr val="BAC8DC"/>
-            </a:solidFill>
-          </a:ln>
-        </p:spPr>
-        <p:style>
-          <a:lnRef idx="1">
-            <a:schemeClr val="accent1"/>
-          </a:lnRef>
-          <a:fillRef idx="3">
-            <a:schemeClr val="accent1"/>
-          </a:fillRef>
-          <a:effectRef idx="2">
-            <a:schemeClr val="accent1"/>
-          </a:effectRef>
-          <a:fontRef idx="minor">
-            <a:schemeClr val="lt1"/>
-          </a:fontRef>
-        </p:style>
-        <p:txBody>
-          <a:bodyPr rtlCol="0" anchor="ctr"/>
-          <a:lstStyle/>
-          <a:p>
-            <a:pPr algn="ctr"/>
-          </a:p>
-        </p:txBody>
-      </p:sp>
       <p:pic>
         <p:nvPicPr>
-          <p:cNvPr id="19" name="Picture 18" descr="eval_results.png"/>
+          <p:cNvPr id="15" name="demo_isaac_g1_locomotion.mp4">
+            <a:hlinkClick r:id="" action="ppaction://media"/>
+          </p:cNvPr>
           <p:cNvPicPr>
             <a:picLocks noChangeAspect="1"/>
           </p:cNvPicPr>
-          <p:nvPr/>
+          <p:nvPr>
+            <a:videoFile r:link="rId3"/>
+            <p:extLst>
+              <p:ext uri="{DAA4B4D4-6D71-4841-9C94-3DE7FCFB9230}">
+                <p14:media xmlns:p14="http://schemas.microsoft.com/office/powerpoint/2010/main" r:embed="rId2"/>
+              </p:ext>
+            </p:extLst>
+          </p:nvPr>
         </p:nvPicPr>
         <p:blipFill>
-          <a:blip r:embed="rId2"/>
+          <a:blip r:embed="rId4"/>
           <a:stretch>
             <a:fillRect/>
           </a:stretch>
         </p:blipFill>
         <p:spPr>
           <a:xfrm>
-            <a:off x="4345228" y="1365227"/>
-            <a:ext cx="4248302" cy="2787948"/>
+            <a:off x="4160520" y="1106424"/>
+            <a:ext cx="4617720" cy="3396996"/>
           </a:xfrm>
           <a:prstGeom prst="rect">
             <a:avLst/>
@@ -14582,13 +14425,13 @@
       </p:pic>
       <p:sp>
         <p:nvSpPr>
-          <p:cNvPr id="20" name="TextBox 19"/>
+          <p:cNvPr id="16" name="TextBox 15"/>
           <p:cNvSpPr txBox="1"/>
           <p:nvPr/>
         </p:nvSpPr>
         <p:spPr>
           <a:xfrm>
-            <a:off x="4160520" y="4521708"/>
+            <a:off x="4160520" y="4539996"/>
             <a:ext cx="4617720" cy="219456"/>
           </a:xfrm>
           <a:prstGeom prst="rect">
@@ -14604,14 +14447,14 @@
           <a:p>
             <a:pPr algn="ctr"/>
             <a:r>
-              <a:rPr sz="800" b="0">
+              <a:rPr sz="900" b="0">
                 <a:solidFill>
                   <a:srgbClr val="5A6273"/>
                 </a:solidFill>
                 <a:latin typeface="微软雅黑"/>
-                <ns8:rFonts xmlns:ns8="http://schemas.openxmlformats.org/wordprocessingml/2006/main" ns8:eastAsia="微软雅黑" ns8:ascii="微软雅黑" ns8:hAnsi="微软雅黑"/>
-              </a:rPr>
-              <a:t>P/R/F1 均为 100%（见左栏）</a:t>
+                <ns7:rFonts xmlns:ns7="http://schemas.openxmlformats.org/wordprocessingml/2006/main" ns7:eastAsia="微软雅黑" ns7:ascii="微软雅黑" ns7:hAnsi="微软雅黑"/>
+              </a:rPr>
+              <a:t>demo_isaac_g1_locomotion.mp4</a:t>
             </a:r>
           </a:p>
         </p:txBody>
@@ -14621,6 +14464,28 @@
   <p:clrMapOvr>
     <a:masterClrMapping/>
   </p:clrMapOvr>
+  <p:timing>
+    <p:tnLst>
+      <p:par>
+        <p:cTn id="1" dur="indefinite" restart="never" nodeType="tmRoot">
+          <p:childTnLst>
+            <p:video>
+              <p:cMediaNode vol="80000">
+                <p:cTn id="2" fill="hold" display="0">
+                  <p:stCondLst>
+                    <p:cond delay="indefinite"/>
+                  </p:stCondLst>
+                </p:cTn>
+                <p:tgtEl>
+                  <p:spTgt spid="15"/>
+                </p:tgtEl>
+              </p:cMediaNode>
+            </p:video>
+          </p:childTnLst>
+        </p:cTn>
+      </p:par>
+    </p:tnLst>
+  </p:timing>
 </p:sld>
 </file>
 
@@ -14830,7 +14695,7 @@
                 <a:latin typeface="微软雅黑"/>
                 <ns2:rFonts xmlns:ns2="http://schemas.openxmlformats.org/wordprocessingml/2006/main" ns2:eastAsia="微软雅黑" ns2:ascii="微软雅黑" ns2:hAnsi="微软雅黑"/>
               </a:rPr>
-              <a:t>性能与延迟</a:t>
+              <a:t>测试结果</a:t>
             </a:r>
           </a:p>
         </p:txBody>
@@ -14975,7 +14840,7 @@
         <p:spPr>
           <a:xfrm>
             <a:off x="438912" y="1106424"/>
-            <a:ext cx="3282696" cy="890397"/>
+            <a:ext cx="3282696" cy="812673"/>
           </a:xfrm>
           <a:prstGeom prst="rect">
             <a:avLst/>
@@ -15004,7 +14869,7 @@
                 <a:latin typeface="微软雅黑"/>
                 <ns3:rFonts xmlns:ns3="http://schemas.openxmlformats.org/wordprocessingml/2006/main" ns3:eastAsia="微软雅黑" ns3:ascii="微软雅黑" ns3:hAnsi="微软雅黑"/>
               </a:rPr>
-              <a:t>● 骨架提取约占时最多，仍满足实时要求</a:t>
+              <a:t>● 跌倒检测 P/R/F1：合成 6 场景均为 100%</a:t>
             </a:r>
           </a:p>
         </p:txBody>
@@ -15017,8 +14882,8 @@
         </p:nvSpPr>
         <p:spPr>
           <a:xfrm>
-            <a:off x="438912" y="2015109"/>
-            <a:ext cx="3282696" cy="890397"/>
+            <a:off x="438912" y="1937385"/>
+            <a:ext cx="3282696" cy="812673"/>
           </a:xfrm>
           <a:prstGeom prst="rect">
             <a:avLst/>
@@ -15047,7 +14912,7 @@
                 <a:latin typeface="微软雅黑"/>
                 <ns4:rFonts xmlns:ns4="http://schemas.openxmlformats.org/wordprocessingml/2006/main" ns4:eastAsia="微软雅黑" ns4:ascii="微软雅黑" ns4:hAnsi="微软雅黑"/>
               </a:rPr>
-              <a:t>● 融合与规则判定开销较小</a:t>
+              <a:t>● 紧急链路脚本跑通率 100%</a:t>
             </a:r>
           </a:p>
         </p:txBody>
@@ -15060,8 +14925,8 @@
         </p:nvSpPr>
         <p:spPr>
           <a:xfrm>
-            <a:off x="438912" y="2923794"/>
-            <a:ext cx="3282696" cy="890397"/>
+            <a:off x="438912" y="2768346"/>
+            <a:ext cx="3282696" cy="812673"/>
           </a:xfrm>
           <a:prstGeom prst="rect">
             <a:avLst/>
@@ -15090,7 +14955,7 @@
                 <a:latin typeface="微软雅黑"/>
                 <ns5:rFonts xmlns:ns5="http://schemas.openxmlformats.org/wordprocessingml/2006/main" ns5:eastAsia="微软雅黑" ns5:ascii="微软雅黑" ns5:hAnsi="微软雅黑"/>
               </a:rPr>
-              <a:t>● 端到端在 CPU 上约 42ms</a:t>
+              <a:t>● 单帧决策在 CPU 上 &lt; 50ms（见右下图）</a:t>
             </a:r>
           </a:p>
         </p:txBody>
@@ -15103,8 +14968,8 @@
         </p:nvSpPr>
         <p:spPr>
           <a:xfrm>
-            <a:off x="438912" y="3832479"/>
-            <a:ext cx="3282696" cy="890397"/>
+            <a:off x="438912" y="3599307"/>
+            <a:ext cx="3282696" cy="812673"/>
           </a:xfrm>
           <a:prstGeom prst="rect">
             <a:avLst/>
@@ -15133,7 +14998,7 @@
                 <a:latin typeface="微软雅黑"/>
                 <ns6:rFonts xmlns:ns6="http://schemas.openxmlformats.org/wordprocessingml/2006/main" ns6:eastAsia="微软雅黑" ns6:ascii="微软雅黑" ns6:hAnsi="微软雅黑"/>
               </a:rPr>
-              <a:t>● 现场演示不依赖 GPU</a:t>
+              <a:t>● 单元测试和无头演示都过了</a:t>
             </a:r>
           </a:p>
         </p:txBody>
@@ -15141,6 +15006,85 @@
       <p:sp>
         <p:nvSpPr>
           <p:cNvPr id="14" name="Rectangle 13"/>
+          <p:cNvSpPr/>
+          <p:nvPr/>
+        </p:nvSpPr>
+        <p:spPr>
+          <a:xfrm>
+            <a:off x="365760" y="4539996"/>
+            <a:ext cx="3429000" cy="292608"/>
+          </a:xfrm>
+          <a:prstGeom prst="rect">
+            <a:avLst/>
+          </a:prstGeom>
+          <a:solidFill>
+            <a:srgbClr val="143278"/>
+          </a:solidFill>
+          <a:ln>
+            <a:noFill/>
+          </a:ln>
+        </p:spPr>
+        <p:style>
+          <a:lnRef idx="1">
+            <a:schemeClr val="accent1"/>
+          </a:lnRef>
+          <a:fillRef idx="3">
+            <a:schemeClr val="accent1"/>
+          </a:fillRef>
+          <a:effectRef idx="2">
+            <a:schemeClr val="accent1"/>
+          </a:effectRef>
+          <a:fontRef idx="minor">
+            <a:schemeClr val="lt1"/>
+          </a:fontRef>
+        </p:style>
+        <p:txBody>
+          <a:bodyPr rtlCol="0" anchor="ctr"/>
+          <a:lstStyle/>
+          <a:p>
+            <a:pPr algn="ctr"/>
+          </a:p>
+        </p:txBody>
+      </p:sp>
+      <p:sp>
+        <p:nvSpPr>
+          <p:cNvPr id="15" name="TextBox 14"/>
+          <p:cNvSpPr txBox="1"/>
+          <p:nvPr/>
+        </p:nvSpPr>
+        <p:spPr>
+          <a:xfrm>
+            <a:off x="402336" y="4604004"/>
+            <a:ext cx="3355848" cy="182880"/>
+          </a:xfrm>
+          <a:prstGeom prst="rect">
+            <a:avLst/>
+          </a:prstGeom>
+          <a:noFill/>
+        </p:spPr>
+        <p:txBody>
+          <a:bodyPr wrap="none" anchor="ctr">
+            <a:spAutoFit/>
+          </a:bodyPr>
+          <a:lstStyle/>
+          <a:p>
+            <a:pPr algn="ctr"/>
+            <a:r>
+              <a:rPr sz="1100" b="1">
+                <a:solidFill>
+                  <a:srgbClr val="FFFFFF"/>
+                </a:solidFill>
+                <a:latin typeface="微软雅黑"/>
+                <ns7:rFonts xmlns:ns7="http://schemas.openxmlformats.org/wordprocessingml/2006/main" ns7:eastAsia="微软雅黑" ns7:ascii="微软雅黑" ns7:hAnsi="微软雅黑"/>
+              </a:rPr>
+              <a:t>数据：fall_eval_report.json</a:t>
+            </a:r>
+          </a:p>
+        </p:txBody>
+      </p:sp>
+      <p:sp>
+        <p:nvSpPr>
+          <p:cNvPr id="16" name="Rectangle 15"/>
           <p:cNvSpPr/>
           <p:nvPr/>
         </p:nvSpPr>
@@ -15185,7 +15129,7 @@
       </p:sp>
       <p:sp>
         <p:nvSpPr>
-          <p:cNvPr id="15" name="Rectangle 14"/>
+          <p:cNvPr id="17" name="Rectangle 16"/>
           <p:cNvSpPr/>
           <p:nvPr/>
         </p:nvSpPr>
@@ -15228,14 +15172,14 @@
       </p:sp>
       <p:sp>
         <p:nvSpPr>
-          <p:cNvPr id="16" name="Rectangle 15"/>
+          <p:cNvPr id="18" name="Rectangle 17"/>
           <p:cNvSpPr/>
           <p:nvPr/>
         </p:nvSpPr>
         <p:spPr>
           <a:xfrm>
-            <a:off x="4341464" y="1151595"/>
-            <a:ext cx="4255831" cy="3215213"/>
+            <a:off x="4308652" y="1328651"/>
+            <a:ext cx="4321454" cy="2861100"/>
           </a:xfrm>
           <a:prstGeom prst="rect">
             <a:avLst/>
@@ -15273,7 +15217,7 @@
       </p:sp>
       <p:pic>
         <p:nvPicPr>
-          <p:cNvPr id="17" name="Picture 16" descr="latency_bar.png"/>
+          <p:cNvPr id="19" name="Picture 18" descr="eval_results.png"/>
           <p:cNvPicPr>
             <a:picLocks noChangeAspect="1"/>
           </p:cNvPicPr>
@@ -15287,8 +15231,8 @@
         </p:blipFill>
         <p:spPr>
           <a:xfrm>
-            <a:off x="4378040" y="1188171"/>
-            <a:ext cx="4182679" cy="3142061"/>
+            <a:off x="4345228" y="1365227"/>
+            <a:ext cx="4248302" cy="2787948"/>
           </a:xfrm>
           <a:prstGeom prst="rect">
             <a:avLst/>
@@ -15297,7 +15241,7 @@
       </p:pic>
       <p:sp>
         <p:nvSpPr>
-          <p:cNvPr id="18" name="TextBox 17"/>
+          <p:cNvPr id="20" name="TextBox 19"/>
           <p:cNvSpPr txBox="1"/>
           <p:nvPr/>
         </p:nvSpPr>
@@ -15324,9 +15268,9 @@
                   <a:srgbClr val="5A6273"/>
                 </a:solidFill>
                 <a:latin typeface="微软雅黑"/>
-                <ns7:rFonts xmlns:ns7="http://schemas.openxmlformats.org/wordprocessingml/2006/main" ns7:eastAsia="微软雅黑" ns7:ascii="微软雅黑" ns7:hAnsi="微软雅黑"/>
-              </a:rPr>
-              <a:t>单帧链路耗时（本机粗测）</a:t>
+                <ns8:rFonts xmlns:ns8="http://schemas.openxmlformats.org/wordprocessingml/2006/main" ns8:eastAsia="微软雅黑" ns8:ascii="微软雅黑" ns8:hAnsi="微软雅黑"/>
+              </a:rPr>
+              <a:t>P/R/F1 均为 100%（见左栏）</a:t>
             </a:r>
           </a:p>
         </p:txBody>
@@ -15545,6 +15489,721 @@
                 <a:latin typeface="微软雅黑"/>
                 <ns2:rFonts xmlns:ns2="http://schemas.openxmlformats.org/wordprocessingml/2006/main" ns2:eastAsia="微软雅黑" ns2:ascii="微软雅黑" ns2:hAnsi="微软雅黑"/>
               </a:rPr>
+              <a:t>性能与延迟</a:t>
+            </a:r>
+          </a:p>
+        </p:txBody>
+      </p:sp>
+      <p:sp>
+        <p:nvSpPr>
+          <p:cNvPr id="7" name="Rectangle 6"/>
+          <p:cNvSpPr/>
+          <p:nvPr/>
+        </p:nvSpPr>
+        <p:spPr>
+          <a:xfrm>
+            <a:off x="274320" y="886968"/>
+            <a:ext cx="1143000" cy="50292"/>
+          </a:xfrm>
+          <a:prstGeom prst="rect">
+            <a:avLst/>
+          </a:prstGeom>
+          <a:solidFill>
+            <a:srgbClr val="F59E0B"/>
+          </a:solidFill>
+          <a:ln>
+            <a:noFill/>
+          </a:ln>
+        </p:spPr>
+        <p:style>
+          <a:lnRef idx="1">
+            <a:schemeClr val="accent1"/>
+          </a:lnRef>
+          <a:fillRef idx="3">
+            <a:schemeClr val="accent1"/>
+          </a:fillRef>
+          <a:effectRef idx="2">
+            <a:schemeClr val="accent1"/>
+          </a:effectRef>
+          <a:fontRef idx="minor">
+            <a:schemeClr val="lt1"/>
+          </a:fontRef>
+        </p:style>
+        <p:txBody>
+          <a:bodyPr rtlCol="0" anchor="ctr"/>
+          <a:lstStyle/>
+          <a:p>
+            <a:pPr algn="ctr"/>
+          </a:p>
+        </p:txBody>
+      </p:sp>
+      <p:sp>
+        <p:nvSpPr>
+          <p:cNvPr id="8" name="Rectangle 7"/>
+          <p:cNvSpPr/>
+          <p:nvPr/>
+        </p:nvSpPr>
+        <p:spPr>
+          <a:xfrm>
+            <a:off x="274320" y="996696"/>
+            <a:ext cx="3611880" cy="3854196"/>
+          </a:xfrm>
+          <a:prstGeom prst="rect">
+            <a:avLst/>
+          </a:prstGeom>
+          <a:solidFill>
+            <a:srgbClr val="F1F7FF"/>
+          </a:solidFill>
+          <a:ln w="10160">
+            <a:solidFill>
+              <a:srgbClr val="BAC8DC"/>
+            </a:solidFill>
+          </a:ln>
+        </p:spPr>
+        <p:style>
+          <a:lnRef idx="1">
+            <a:schemeClr val="accent1"/>
+          </a:lnRef>
+          <a:fillRef idx="3">
+            <a:schemeClr val="accent1"/>
+          </a:fillRef>
+          <a:effectRef idx="2">
+            <a:schemeClr val="accent1"/>
+          </a:effectRef>
+          <a:fontRef idx="minor">
+            <a:schemeClr val="lt1"/>
+          </a:fontRef>
+        </p:style>
+        <p:txBody>
+          <a:bodyPr rtlCol="0" anchor="ctr"/>
+          <a:lstStyle/>
+          <a:p>
+            <a:pPr algn="ctr"/>
+          </a:p>
+        </p:txBody>
+      </p:sp>
+      <p:sp>
+        <p:nvSpPr>
+          <p:cNvPr id="9" name="Rectangle 8"/>
+          <p:cNvSpPr/>
+          <p:nvPr/>
+        </p:nvSpPr>
+        <p:spPr>
+          <a:xfrm>
+            <a:off x="274320" y="996696"/>
+            <a:ext cx="73152" cy="3854196"/>
+          </a:xfrm>
+          <a:prstGeom prst="rect">
+            <a:avLst/>
+          </a:prstGeom>
+          <a:solidFill>
+            <a:srgbClr val="143278"/>
+          </a:solidFill>
+          <a:ln>
+            <a:noFill/>
+          </a:ln>
+        </p:spPr>
+        <p:style>
+          <a:lnRef idx="1">
+            <a:schemeClr val="accent1"/>
+          </a:lnRef>
+          <a:fillRef idx="3">
+            <a:schemeClr val="accent1"/>
+          </a:fillRef>
+          <a:effectRef idx="2">
+            <a:schemeClr val="accent1"/>
+          </a:effectRef>
+          <a:fontRef idx="minor">
+            <a:schemeClr val="lt1"/>
+          </a:fontRef>
+        </p:style>
+        <p:txBody>
+          <a:bodyPr rtlCol="0" anchor="ctr"/>
+          <a:lstStyle/>
+          <a:p>
+            <a:pPr algn="ctr"/>
+          </a:p>
+        </p:txBody>
+      </p:sp>
+      <p:sp>
+        <p:nvSpPr>
+          <p:cNvPr id="10" name="TextBox 9"/>
+          <p:cNvSpPr txBox="1"/>
+          <p:nvPr/>
+        </p:nvSpPr>
+        <p:spPr>
+          <a:xfrm>
+            <a:off x="438912" y="1106424"/>
+            <a:ext cx="3282696" cy="890397"/>
+          </a:xfrm>
+          <a:prstGeom prst="rect">
+            <a:avLst/>
+          </a:prstGeom>
+          <a:noFill/>
+        </p:spPr>
+        <p:txBody>
+          <a:bodyPr wrap="square" anchor="t" lIns="25400" tIns="0">
+            <a:spAutoFit/>
+          </a:bodyPr>
+          <a:lstStyle/>
+          <a:p>
+            <a:pPr>
+              <a:lnSpc>
+                <a:spcPct val="112000"/>
+              </a:lnSpc>
+              <a:spcAft>
+                <a:spcPts val="200"/>
+              </a:spcAft>
+            </a:pPr>
+            <a:r>
+              <a:rPr sz="1300" b="0">
+                <a:solidFill>
+                  <a:srgbClr val="1C202C"/>
+                </a:solidFill>
+                <a:latin typeface="微软雅黑"/>
+                <ns3:rFonts xmlns:ns3="http://schemas.openxmlformats.org/wordprocessingml/2006/main" ns3:eastAsia="微软雅黑" ns3:ascii="微软雅黑" ns3:hAnsi="微软雅黑"/>
+              </a:rPr>
+              <a:t>● 骨架提取约占时最多，仍满足实时要求</a:t>
+            </a:r>
+          </a:p>
+        </p:txBody>
+      </p:sp>
+      <p:sp>
+        <p:nvSpPr>
+          <p:cNvPr id="11" name="TextBox 10"/>
+          <p:cNvSpPr txBox="1"/>
+          <p:nvPr/>
+        </p:nvSpPr>
+        <p:spPr>
+          <a:xfrm>
+            <a:off x="438912" y="2015109"/>
+            <a:ext cx="3282696" cy="890397"/>
+          </a:xfrm>
+          <a:prstGeom prst="rect">
+            <a:avLst/>
+          </a:prstGeom>
+          <a:noFill/>
+        </p:spPr>
+        <p:txBody>
+          <a:bodyPr wrap="square" anchor="t" lIns="25400" tIns="0">
+            <a:spAutoFit/>
+          </a:bodyPr>
+          <a:lstStyle/>
+          <a:p>
+            <a:pPr>
+              <a:lnSpc>
+                <a:spcPct val="112000"/>
+              </a:lnSpc>
+              <a:spcAft>
+                <a:spcPts val="200"/>
+              </a:spcAft>
+            </a:pPr>
+            <a:r>
+              <a:rPr sz="1300" b="0">
+                <a:solidFill>
+                  <a:srgbClr val="1C202C"/>
+                </a:solidFill>
+                <a:latin typeface="微软雅黑"/>
+                <ns4:rFonts xmlns:ns4="http://schemas.openxmlformats.org/wordprocessingml/2006/main" ns4:eastAsia="微软雅黑" ns4:ascii="微软雅黑" ns4:hAnsi="微软雅黑"/>
+              </a:rPr>
+              <a:t>● 融合与规则判定开销较小</a:t>
+            </a:r>
+          </a:p>
+        </p:txBody>
+      </p:sp>
+      <p:sp>
+        <p:nvSpPr>
+          <p:cNvPr id="12" name="TextBox 11"/>
+          <p:cNvSpPr txBox="1"/>
+          <p:nvPr/>
+        </p:nvSpPr>
+        <p:spPr>
+          <a:xfrm>
+            <a:off x="438912" y="2923794"/>
+            <a:ext cx="3282696" cy="890397"/>
+          </a:xfrm>
+          <a:prstGeom prst="rect">
+            <a:avLst/>
+          </a:prstGeom>
+          <a:noFill/>
+        </p:spPr>
+        <p:txBody>
+          <a:bodyPr wrap="square" anchor="t" lIns="25400" tIns="0">
+            <a:spAutoFit/>
+          </a:bodyPr>
+          <a:lstStyle/>
+          <a:p>
+            <a:pPr>
+              <a:lnSpc>
+                <a:spcPct val="112000"/>
+              </a:lnSpc>
+              <a:spcAft>
+                <a:spcPts val="200"/>
+              </a:spcAft>
+            </a:pPr>
+            <a:r>
+              <a:rPr sz="1300" b="0">
+                <a:solidFill>
+                  <a:srgbClr val="1C202C"/>
+                </a:solidFill>
+                <a:latin typeface="微软雅黑"/>
+                <ns5:rFonts xmlns:ns5="http://schemas.openxmlformats.org/wordprocessingml/2006/main" ns5:eastAsia="微软雅黑" ns5:ascii="微软雅黑" ns5:hAnsi="微软雅黑"/>
+              </a:rPr>
+              <a:t>● 端到端在 CPU 上约 42ms</a:t>
+            </a:r>
+          </a:p>
+        </p:txBody>
+      </p:sp>
+      <p:sp>
+        <p:nvSpPr>
+          <p:cNvPr id="13" name="TextBox 12"/>
+          <p:cNvSpPr txBox="1"/>
+          <p:nvPr/>
+        </p:nvSpPr>
+        <p:spPr>
+          <a:xfrm>
+            <a:off x="438912" y="3832479"/>
+            <a:ext cx="3282696" cy="890397"/>
+          </a:xfrm>
+          <a:prstGeom prst="rect">
+            <a:avLst/>
+          </a:prstGeom>
+          <a:noFill/>
+        </p:spPr>
+        <p:txBody>
+          <a:bodyPr wrap="square" anchor="t" lIns="25400" tIns="0">
+            <a:spAutoFit/>
+          </a:bodyPr>
+          <a:lstStyle/>
+          <a:p>
+            <a:pPr>
+              <a:lnSpc>
+                <a:spcPct val="112000"/>
+              </a:lnSpc>
+              <a:spcAft>
+                <a:spcPts val="200"/>
+              </a:spcAft>
+            </a:pPr>
+            <a:r>
+              <a:rPr sz="1300" b="0">
+                <a:solidFill>
+                  <a:srgbClr val="1C202C"/>
+                </a:solidFill>
+                <a:latin typeface="微软雅黑"/>
+                <ns6:rFonts xmlns:ns6="http://schemas.openxmlformats.org/wordprocessingml/2006/main" ns6:eastAsia="微软雅黑" ns6:ascii="微软雅黑" ns6:hAnsi="微软雅黑"/>
+              </a:rPr>
+              <a:t>● 现场演示不依赖 GPU</a:t>
+            </a:r>
+          </a:p>
+        </p:txBody>
+      </p:sp>
+      <p:sp>
+        <p:nvSpPr>
+          <p:cNvPr id="14" name="Rectangle 13"/>
+          <p:cNvSpPr/>
+          <p:nvPr/>
+        </p:nvSpPr>
+        <p:spPr>
+          <a:xfrm>
+            <a:off x="4105656" y="1033272"/>
+            <a:ext cx="4727448" cy="3744468"/>
+          </a:xfrm>
+          <a:prstGeom prst="rect">
+            <a:avLst/>
+          </a:prstGeom>
+          <a:solidFill>
+            <a:srgbClr val="FFFFFF"/>
+          </a:solidFill>
+          <a:ln w="9525">
+            <a:solidFill>
+              <a:srgbClr val="BAC8DC"/>
+            </a:solidFill>
+          </a:ln>
+        </p:spPr>
+        <p:style>
+          <a:lnRef idx="1">
+            <a:schemeClr val="accent1"/>
+          </a:lnRef>
+          <a:fillRef idx="3">
+            <a:schemeClr val="accent1"/>
+          </a:fillRef>
+          <a:effectRef idx="2">
+            <a:schemeClr val="accent1"/>
+          </a:effectRef>
+          <a:fontRef idx="minor">
+            <a:schemeClr val="lt1"/>
+          </a:fontRef>
+        </p:style>
+        <p:txBody>
+          <a:bodyPr rtlCol="0" anchor="ctr"/>
+          <a:lstStyle/>
+          <a:p>
+            <a:pPr algn="ctr"/>
+          </a:p>
+        </p:txBody>
+      </p:sp>
+      <p:sp>
+        <p:nvSpPr>
+          <p:cNvPr id="15" name="Rectangle 14"/>
+          <p:cNvSpPr/>
+          <p:nvPr/>
+        </p:nvSpPr>
+        <p:spPr>
+          <a:xfrm>
+            <a:off x="3968496" y="996696"/>
+            <a:ext cx="10972" cy="3854196"/>
+          </a:xfrm>
+          <a:prstGeom prst="rect">
+            <a:avLst/>
+          </a:prstGeom>
+          <a:solidFill>
+            <a:srgbClr val="BAC8DC"/>
+          </a:solidFill>
+          <a:ln>
+            <a:noFill/>
+          </a:ln>
+        </p:spPr>
+        <p:style>
+          <a:lnRef idx="1">
+            <a:schemeClr val="accent1"/>
+          </a:lnRef>
+          <a:fillRef idx="3">
+            <a:schemeClr val="accent1"/>
+          </a:fillRef>
+          <a:effectRef idx="2">
+            <a:schemeClr val="accent1"/>
+          </a:effectRef>
+          <a:fontRef idx="minor">
+            <a:schemeClr val="lt1"/>
+          </a:fontRef>
+        </p:style>
+        <p:txBody>
+          <a:bodyPr rtlCol="0" anchor="ctr"/>
+          <a:lstStyle/>
+          <a:p>
+            <a:pPr algn="ctr"/>
+          </a:p>
+        </p:txBody>
+      </p:sp>
+      <p:sp>
+        <p:nvSpPr>
+          <p:cNvPr id="16" name="Rectangle 15"/>
+          <p:cNvSpPr/>
+          <p:nvPr/>
+        </p:nvSpPr>
+        <p:spPr>
+          <a:xfrm>
+            <a:off x="4341464" y="1151595"/>
+            <a:ext cx="4255831" cy="3215213"/>
+          </a:xfrm>
+          <a:prstGeom prst="rect">
+            <a:avLst/>
+          </a:prstGeom>
+          <a:solidFill>
+            <a:srgbClr val="FCFDFF"/>
+          </a:solidFill>
+          <a:ln w="7620">
+            <a:solidFill>
+              <a:srgbClr val="BAC8DC"/>
+            </a:solidFill>
+          </a:ln>
+        </p:spPr>
+        <p:style>
+          <a:lnRef idx="1">
+            <a:schemeClr val="accent1"/>
+          </a:lnRef>
+          <a:fillRef idx="3">
+            <a:schemeClr val="accent1"/>
+          </a:fillRef>
+          <a:effectRef idx="2">
+            <a:schemeClr val="accent1"/>
+          </a:effectRef>
+          <a:fontRef idx="minor">
+            <a:schemeClr val="lt1"/>
+          </a:fontRef>
+        </p:style>
+        <p:txBody>
+          <a:bodyPr rtlCol="0" anchor="ctr"/>
+          <a:lstStyle/>
+          <a:p>
+            <a:pPr algn="ctr"/>
+          </a:p>
+        </p:txBody>
+      </p:sp>
+      <p:pic>
+        <p:nvPicPr>
+          <p:cNvPr id="17" name="Picture 16" descr="latency_bar.png"/>
+          <p:cNvPicPr>
+            <a:picLocks noChangeAspect="1"/>
+          </p:cNvPicPr>
+          <p:nvPr/>
+        </p:nvPicPr>
+        <p:blipFill>
+          <a:blip r:embed="rId2"/>
+          <a:stretch>
+            <a:fillRect/>
+          </a:stretch>
+        </p:blipFill>
+        <p:spPr>
+          <a:xfrm>
+            <a:off x="4378040" y="1188171"/>
+            <a:ext cx="4182679" cy="3142061"/>
+          </a:xfrm>
+          <a:prstGeom prst="rect">
+            <a:avLst/>
+          </a:prstGeom>
+        </p:spPr>
+      </p:pic>
+      <p:sp>
+        <p:nvSpPr>
+          <p:cNvPr id="18" name="TextBox 17"/>
+          <p:cNvSpPr txBox="1"/>
+          <p:nvPr/>
+        </p:nvSpPr>
+        <p:spPr>
+          <a:xfrm>
+            <a:off x="4160520" y="4521708"/>
+            <a:ext cx="4617720" cy="219456"/>
+          </a:xfrm>
+          <a:prstGeom prst="rect">
+            <a:avLst/>
+          </a:prstGeom>
+          <a:noFill/>
+        </p:spPr>
+        <p:txBody>
+          <a:bodyPr wrap="square" anchor="ctr">
+            <a:spAutoFit/>
+          </a:bodyPr>
+          <a:lstStyle/>
+          <a:p>
+            <a:pPr algn="ctr"/>
+            <a:r>
+              <a:rPr sz="800" b="0">
+                <a:solidFill>
+                  <a:srgbClr val="5A6273"/>
+                </a:solidFill>
+                <a:latin typeface="微软雅黑"/>
+                <ns7:rFonts xmlns:ns7="http://schemas.openxmlformats.org/wordprocessingml/2006/main" ns7:eastAsia="微软雅黑" ns7:ascii="微软雅黑" ns7:hAnsi="微软雅黑"/>
+              </a:rPr>
+              <a:t>单帧链路耗时（本机粗测）</a:t>
+            </a:r>
+          </a:p>
+        </p:txBody>
+      </p:sp>
+    </p:spTree>
+  </p:cSld>
+  <p:clrMapOvr>
+    <a:masterClrMapping/>
+  </p:clrMapOvr>
+</p:sld>
+</file>
+
+<file path=ppt/slides/slide27.xml><?xml version="1.0" encoding="utf-8"?>
+<p:sld xmlns:a="http://schemas.openxmlformats.org/drawingml/2006/main" xmlns:p="http://schemas.openxmlformats.org/presentationml/2006/main" xmlns:r="http://schemas.openxmlformats.org/officeDocument/2006/relationships">
+  <p:cSld>
+    <p:bg>
+      <p:bgPr>
+        <a:solidFill>
+          <a:srgbClr val="FFFFFF"/>
+        </a:solidFill>
+        <a:effectLst/>
+      </p:bgPr>
+    </p:bg>
+    <p:spTree>
+      <p:nvGrpSpPr>
+        <p:cNvPr id="1" name=""/>
+        <p:cNvGrpSpPr/>
+        <p:nvPr/>
+      </p:nvGrpSpPr>
+      <p:grpSpPr/>
+      <p:sp>
+        <p:nvSpPr>
+          <p:cNvPr id="2" name="Rectangle 1"/>
+          <p:cNvSpPr/>
+          <p:nvPr/>
+        </p:nvSpPr>
+        <p:spPr>
+          <a:xfrm>
+            <a:off x="0" y="0"/>
+            <a:ext cx="9144000" cy="420624"/>
+          </a:xfrm>
+          <a:prstGeom prst="rect">
+            <a:avLst/>
+          </a:prstGeom>
+          <a:solidFill>
+            <a:srgbClr val="143278"/>
+          </a:solidFill>
+          <a:ln>
+            <a:noFill/>
+          </a:ln>
+        </p:spPr>
+        <p:style>
+          <a:lnRef idx="1">
+            <a:schemeClr val="accent1"/>
+          </a:lnRef>
+          <a:fillRef idx="3">
+            <a:schemeClr val="accent1"/>
+          </a:fillRef>
+          <a:effectRef idx="2">
+            <a:schemeClr val="accent1"/>
+          </a:effectRef>
+          <a:fontRef idx="minor">
+            <a:schemeClr val="lt1"/>
+          </a:fontRef>
+        </p:style>
+        <p:txBody>
+          <a:bodyPr rtlCol="0" anchor="ctr"/>
+          <a:lstStyle/>
+          <a:p>
+            <a:pPr algn="ctr"/>
+          </a:p>
+        </p:txBody>
+      </p:sp>
+      <p:sp>
+        <p:nvSpPr>
+          <p:cNvPr id="3" name="TextBox 2"/>
+          <p:cNvSpPr txBox="1"/>
+          <p:nvPr/>
+        </p:nvSpPr>
+        <p:spPr>
+          <a:xfrm>
+            <a:off x="274320" y="54864"/>
+            <a:ext cx="8595360" cy="347472"/>
+          </a:xfrm>
+          <a:prstGeom prst="rect">
+            <a:avLst/>
+          </a:prstGeom>
+          <a:noFill/>
+        </p:spPr>
+        <p:txBody>
+          <a:bodyPr wrap="none">
+            <a:spAutoFit/>
+          </a:bodyPr>
+          <a:lstStyle/>
+          <a:p>
+            <a:r>
+              <a:rPr sz="900" b="1">
+                <a:solidFill>
+                  <a:srgbClr val="FFFFFF"/>
+                </a:solidFill>
+                <a:latin typeface="微软雅黑"/>
+                <ns0:rFonts xmlns:ns0="http://schemas.openxmlformats.org/wordprocessingml/2006/main" ns0:eastAsia="微软雅黑" ns0:ascii="微软雅黑" ns0:hAnsi="微软雅黑"/>
+              </a:rPr>
+              <a:t>第二十八届中国机器人及人工智能大赛  |  创新赛 · 机器人创新赛道</a:t>
+            </a:r>
+          </a:p>
+        </p:txBody>
+      </p:sp>
+      <p:sp>
+        <p:nvSpPr>
+          <p:cNvPr id="4" name="Rectangle 3"/>
+          <p:cNvSpPr/>
+          <p:nvPr/>
+        </p:nvSpPr>
+        <p:spPr>
+          <a:xfrm>
+            <a:off x="0" y="4905756"/>
+            <a:ext cx="9144000" cy="237744"/>
+          </a:xfrm>
+          <a:prstGeom prst="rect">
+            <a:avLst/>
+          </a:prstGeom>
+          <a:solidFill>
+            <a:srgbClr val="DBEAFE"/>
+          </a:solidFill>
+          <a:ln>
+            <a:noFill/>
+          </a:ln>
+        </p:spPr>
+        <p:style>
+          <a:lnRef idx="1">
+            <a:schemeClr val="accent1"/>
+          </a:lnRef>
+          <a:fillRef idx="3">
+            <a:schemeClr val="accent1"/>
+          </a:fillRef>
+          <a:effectRef idx="2">
+            <a:schemeClr val="accent1"/>
+          </a:effectRef>
+          <a:fontRef idx="minor">
+            <a:schemeClr val="lt1"/>
+          </a:fontRef>
+        </p:style>
+        <p:txBody>
+          <a:bodyPr rtlCol="0" anchor="ctr"/>
+          <a:lstStyle/>
+          <a:p>
+            <a:pPr algn="ctr"/>
+          </a:p>
+        </p:txBody>
+      </p:sp>
+      <p:sp>
+        <p:nvSpPr>
+          <p:cNvPr id="5" name="TextBox 4"/>
+          <p:cNvSpPr txBox="1"/>
+          <p:nvPr/>
+        </p:nvSpPr>
+        <p:spPr>
+          <a:xfrm>
+            <a:off x="274320" y="4951476"/>
+            <a:ext cx="8595360" cy="182880"/>
+          </a:xfrm>
+          <a:prstGeom prst="rect">
+            <a:avLst/>
+          </a:prstGeom>
+          <a:noFill/>
+        </p:spPr>
+        <p:txBody>
+          <a:bodyPr wrap="none">
+            <a:spAutoFit/>
+          </a:bodyPr>
+          <a:lstStyle/>
+          <a:p>
+            <a:pPr algn="ctr"/>
+            <a:r>
+              <a:rPr sz="800" b="0">
+                <a:solidFill>
+                  <a:srgbClr val="5A6273"/>
+                </a:solidFill>
+                <a:latin typeface="微软雅黑"/>
+                <ns1:rFonts xmlns:ns1="http://schemas.openxmlformats.org/wordprocessingml/2006/main" ns1:eastAsia="微软雅黑" ns1:ascii="微软雅黑" ns1:hAnsi="微软雅黑"/>
+              </a:rPr>
+              <a:t>从容应队 · 中山大学 · 刘小凡/白冉 · 指导教师 彭键清</a:t>
+            </a:r>
+          </a:p>
+        </p:txBody>
+      </p:sp>
+      <p:sp>
+        <p:nvSpPr>
+          <p:cNvPr id="6" name="TextBox 5"/>
+          <p:cNvSpPr txBox="1"/>
+          <p:nvPr/>
+        </p:nvSpPr>
+        <p:spPr>
+          <a:xfrm>
+            <a:off x="274320" y="466344"/>
+            <a:ext cx="8595360" cy="457200"/>
+          </a:xfrm>
+          <a:prstGeom prst="rect">
+            <a:avLst/>
+          </a:prstGeom>
+          <a:noFill/>
+        </p:spPr>
+        <p:txBody>
+          <a:bodyPr wrap="none">
+            <a:spAutoFit/>
+          </a:bodyPr>
+          <a:lstStyle/>
+          <a:p>
+            <a:pPr algn="l"/>
+            <a:r>
+              <a:rPr sz="2000" b="1">
+                <a:solidFill>
+                  <a:srgbClr val="143278"/>
+                </a:solidFill>
+                <a:latin typeface="微软雅黑"/>
+                <ns2:rFonts xmlns:ns2="http://schemas.openxmlformats.org/wordprocessingml/2006/main" ns2:eastAsia="微软雅黑" ns2:ascii="微软雅黑" ns2:hAnsi="微软雅黑"/>
+              </a:rPr>
               <a:t>开源与可复现性</a:t>
             </a:r>
           </a:p>
@@ -15615,7 +16274,7 @@
                 <a:gridCol w="868680"/>
                 <a:gridCol w="2743200"/>
               </a:tblGrid>
-              <a:tr h="642366">
+              <a:tr h="550599">
                 <a:tc>
                   <a:txBody>
                     <a:bodyPr anchor="ctr"/>
@@ -15665,7 +16324,7 @@
                   </a:tcPr>
                 </a:tc>
               </a:tr>
-              <a:tr h="642366">
+              <a:tr h="550599">
                 <a:tc>
                   <a:txBody>
                     <a:bodyPr anchor="ctr"/>
@@ -15715,7 +16374,7 @@
                   </a:tcPr>
                 </a:tc>
               </a:tr>
-              <a:tr h="642366">
+              <a:tr h="550599">
                 <a:tc>
                   <a:txBody>
                     <a:bodyPr anchor="ctr"/>
@@ -15765,7 +16424,7 @@
                   </a:tcPr>
                 </a:tc>
               </a:tr>
-              <a:tr h="642366">
+              <a:tr h="550599">
                 <a:tc>
                   <a:txBody>
                     <a:bodyPr anchor="ctr"/>
@@ -15779,6 +16438,56 @@
                           </a:solidFill>
                           <a:latin typeface="微软雅黑"/>
                           <ns9:rFonts xmlns:ns9="http://schemas.openxmlformats.org/wordprocessingml/2006/main" ns9:eastAsia="微软雅黑" ns9:ascii="微软雅黑" ns9:hAnsi="微软雅黑"/>
+                        </a:rPr>
+                        <a:t>情景剧总片</a:t>
+                      </a:r>
+                    </a:p>
+                  </a:txBody>
+                  <a:tcPr marL="50800" marR="50800" marT="25400" marB="25400">
+                    <a:solidFill>
+                      <a:srgbClr val="143278"/>
+                    </a:solidFill>
+                  </a:tcPr>
+                </a:tc>
+                <a:tc>
+                  <a:txBody>
+                    <a:bodyPr anchor="ctr" wrap="square"/>
+                    <a:lstStyle/>
+                    <a:p>
+                      <a:pPr algn="l"/>
+                      <a:r>
+                        <a:rPr sz="900" b="0">
+                          <a:solidFill>
+                            <a:srgbClr val="143278"/>
+                          </a:solidFill>
+                          <a:latin typeface="微软雅黑"/>
+                          <ns10:rFonts xmlns:ns10="http://schemas.openxmlformats.org/wordprocessingml/2006/main" ns10:eastAsia="微软雅黑" ns10:ascii="微软雅黑" ns10:hAnsi="微软雅黑"/>
+                        </a:rPr>
+                        <a:t>docs/assets/demo_full_scenario.mp4</a:t>
+                      </a:r>
+                    </a:p>
+                  </a:txBody>
+                  <a:tcPr marL="63500">
+                    <a:solidFill>
+                      <a:srgbClr val="FFFFFF"/>
+                    </a:solidFill>
+                  </a:tcPr>
+                </a:tc>
+              </a:tr>
+              <a:tr h="550599">
+                <a:tc>
+                  <a:txBody>
+                    <a:bodyPr anchor="ctr"/>
+                    <a:lstStyle/>
+                    <a:p>
+                      <a:pPr algn="ctr"/>
+                      <a:r>
+                        <a:rPr sz="900" b="1">
+                          <a:solidFill>
+                            <a:srgbClr val="FFFFFF"/>
+                          </a:solidFill>
+                          <a:latin typeface="微软雅黑"/>
+                          <ns11:rFonts xmlns:ns11="http://schemas.openxmlformats.org/wordprocessingml/2006/main" ns11:eastAsia="微软雅黑" ns11:ascii="微软雅黑" ns11:hAnsi="微软雅黑"/>
                         </a:rPr>
                         <a:t>Web 演示</a:t>
                       </a:r>
@@ -15802,7 +16511,7 @@
                             <a:srgbClr val="143278"/>
                           </a:solidFill>
                           <a:latin typeface="微软雅黑"/>
-                          <ns10:rFonts xmlns:ns10="http://schemas.openxmlformats.org/wordprocessingml/2006/main" ns10:eastAsia="微软雅黑" ns10:ascii="微软雅黑" ns10:hAnsi="微软雅黑"/>
+                          <ns12:rFonts xmlns:ns12="http://schemas.openxmlformats.org/wordprocessingml/2006/main" ns12:eastAsia="微软雅黑" ns12:ascii="微软雅黑" ns12:hAnsi="微软雅黑"/>
                         </a:rPr>
                         <a:t>docs/assets/demo_carecompanion.mp4</a:t>
                       </a:r>
@@ -15810,12 +16519,12 @@
                   </a:txBody>
                   <a:tcPr marL="63500">
                     <a:solidFill>
-                      <a:srgbClr val="FFFFFF"/>
+                      <a:srgbClr val="F1F7FF"/>
                     </a:solidFill>
                   </a:tcPr>
                 </a:tc>
               </a:tr>
-              <a:tr h="642366">
+              <a:tr h="550599">
                 <a:tc>
                   <a:txBody>
                     <a:bodyPr anchor="ctr"/>
@@ -15828,7 +16537,7 @@
                             <a:srgbClr val="FFFFFF"/>
                           </a:solidFill>
                           <a:latin typeface="微软雅黑"/>
-                          <ns11:rFonts xmlns:ns11="http://schemas.openxmlformats.org/wordprocessingml/2006/main" ns11:eastAsia="微软雅黑" ns11:ascii="微软雅黑" ns11:hAnsi="微软雅黑"/>
+                          <ns13:rFonts xmlns:ns13="http://schemas.openxmlformats.org/wordprocessingml/2006/main" ns13:eastAsia="微软雅黑" ns13:ascii="微软雅黑" ns13:hAnsi="微软雅黑"/>
                         </a:rPr>
                         <a:t>G1 仿真</a:t>
                       </a:r>
@@ -15852,7 +16561,7 @@
                             <a:srgbClr val="143278"/>
                           </a:solidFill>
                           <a:latin typeface="微软雅黑"/>
-                          <ns12:rFonts xmlns:ns12="http://schemas.openxmlformats.org/wordprocessingml/2006/main" ns12:eastAsia="微软雅黑" ns12:ascii="微软雅黑" ns12:hAnsi="微软雅黑"/>
+                          <ns14:rFonts xmlns:ns14="http://schemas.openxmlformats.org/wordprocessingml/2006/main" ns14:eastAsia="微软雅黑" ns14:ascii="微软雅黑" ns14:hAnsi="微软雅黑"/>
                         </a:rPr>
                         <a:t>docs/assets/demo_isaac_g1_locomotion.mp4</a:t>
                       </a:r>
@@ -15860,12 +16569,12 @@
                   </a:txBody>
                   <a:tcPr marL="63500">
                     <a:solidFill>
-                      <a:srgbClr val="F1F7FF"/>
+                      <a:srgbClr val="FFFFFF"/>
                     </a:solidFill>
                   </a:tcPr>
                 </a:tc>
               </a:tr>
-              <a:tr h="642366">
+              <a:tr h="550602">
                 <a:tc>
                   <a:txBody>
                     <a:bodyPr anchor="ctr"/>
@@ -15878,7 +16587,7 @@
                             <a:srgbClr val="FFFFFF"/>
                           </a:solidFill>
                           <a:latin typeface="微软雅黑"/>
-                          <ns13:rFonts xmlns:ns13="http://schemas.openxmlformats.org/wordprocessingml/2006/main" ns13:eastAsia="微软雅黑" ns13:ascii="微软雅黑" ns13:hAnsi="微软雅黑"/>
+                          <ns15:rFonts xmlns:ns15="http://schemas.openxmlformats.org/wordprocessingml/2006/main" ns15:eastAsia="微软雅黑" ns15:ascii="微软雅黑" ns15:hAnsi="微软雅黑"/>
                         </a:rPr>
                         <a:t>软著</a:t>
                       </a:r>
@@ -15902,7 +16611,7 @@
                             <a:srgbClr val="143278"/>
                           </a:solidFill>
                           <a:latin typeface="微软雅黑"/>
-                          <ns14:rFonts xmlns:ns14="http://schemas.openxmlformats.org/wordprocessingml/2006/main" ns14:eastAsia="微软雅黑" ns14:ascii="微软雅黑" ns14:hAnsi="微软雅黑"/>
+                          <ns16:rFonts xmlns:ns16="http://schemas.openxmlformats.org/wordprocessingml/2006/main" ns16:eastAsia="微软雅黑" ns16:ascii="微软雅黑" ns16:hAnsi="微软雅黑"/>
                         </a:rPr>
                         <a:t>申请中</a:t>
                       </a:r>
@@ -15910,7 +16619,7 @@
                   </a:txBody>
                   <a:tcPr marL="63500">
                     <a:solidFill>
-                      <a:srgbClr val="FFFFFF"/>
+                      <a:srgbClr val="F1F7FF"/>
                     </a:solidFill>
                   </a:tcPr>
                 </a:tc>
@@ -16017,7 +16726,7 @@
                   <a:srgbClr val="143278"/>
                 </a:solidFill>
                 <a:latin typeface="微软雅黑"/>
-                <ns15:rFonts xmlns:ns15="http://schemas.openxmlformats.org/wordprocessingml/2006/main" ns15:eastAsia="微软雅黑" ns15:ascii="微软雅黑" ns15:hAnsi="微软雅黑"/>
+                <ns17:rFonts xmlns:ns17="http://schemas.openxmlformats.org/wordprocessingml/2006/main" ns17:eastAsia="微软雅黑" ns17:ascii="微软雅黑" ns17:hAnsi="微软雅黑"/>
               </a:rPr>
               <a:t>扫码访问 GitHub 仓库</a:t>
             </a:r>
@@ -16057,7 +16766,7 @@
                   <a:srgbClr val="166534"/>
                 </a:solidFill>
                 <a:latin typeface="微软雅黑"/>
-                <ns16:rFonts xmlns:ns16="http://schemas.openxmlformats.org/wordprocessingml/2006/main" ns16:eastAsia="微软雅黑" ns16:ascii="微软雅黑" ns16:hAnsi="微软雅黑"/>
+                <ns18:rFonts xmlns:ns18="http://schemas.openxmlformats.org/wordprocessingml/2006/main" ns18:eastAsia="微软雅黑" ns18:ascii="微软雅黑" ns18:hAnsi="微软雅黑"/>
               </a:rPr>
               <a:t>✓  完整源码与 README</a:t>
             </a:r>
@@ -16074,7 +16783,7 @@
                   <a:srgbClr val="166534"/>
                 </a:solidFill>
                 <a:latin typeface="微软雅黑"/>
-                <ns17:rFonts xmlns:ns17="http://schemas.openxmlformats.org/wordprocessingml/2006/main" ns17:eastAsia="微软雅黑" ns17:ascii="微软雅黑" ns17:hAnsi="微软雅黑"/>
+                <ns19:rFonts xmlns:ns19="http://schemas.openxmlformats.org/wordprocessingml/2006/main" ns19:eastAsia="微软雅黑" ns19:ascii="微软雅黑" ns19:hAnsi="微软雅黑"/>
               </a:rPr>
               <a:t>✓  一键启动脚本 run_web.sh</a:t>
             </a:r>
@@ -16091,7 +16800,7 @@
                   <a:srgbClr val="166534"/>
                 </a:solidFill>
                 <a:latin typeface="微软雅黑"/>
-                <ns18:rFonts xmlns:ns18="http://schemas.openxmlformats.org/wordprocessingml/2006/main" ns18:eastAsia="微软雅黑" ns18:ascii="微软雅黑" ns18:hAnsi="微软雅黑"/>
+                <ns20:rFonts xmlns:ns20="http://schemas.openxmlformats.org/wordprocessingml/2006/main" ns20:eastAsia="微软雅黑" ns20:ascii="微软雅黑" ns20:hAnsi="微软雅黑"/>
               </a:rPr>
               <a:t>✓  fall_eval_report.json</a:t>
             </a:r>
@@ -16108,7 +16817,7 @@
                   <a:srgbClr val="166534"/>
                 </a:solidFill>
                 <a:latin typeface="微软雅黑"/>
-                <ns19:rFonts xmlns:ns19="http://schemas.openxmlformats.org/wordprocessingml/2006/main" ns19:eastAsia="微软雅黑" ns19:ascii="微软雅黑" ns19:hAnsi="微软雅黑"/>
+                <ns21:rFonts xmlns:ns21="http://schemas.openxmlformats.org/wordprocessingml/2006/main" ns21:eastAsia="微软雅黑" ns21:ascii="微软雅黑" ns21:hAnsi="微软雅黑"/>
               </a:rPr>
               <a:t>✓  pytest 单元测试</a:t>
             </a:r>
@@ -16125,740 +16834,13 @@
                   <a:srgbClr val="B45309"/>
                 </a:solidFill>
                 <a:latin typeface="微软雅黑"/>
-                <ns20:rFonts xmlns:ns20="http://schemas.openxmlformats.org/wordprocessingml/2006/main" ns20:eastAsia="微软雅黑" ns20:ascii="微软雅黑" ns20:hAnsi="微软雅黑"/>
+                <ns22:rFonts xmlns:ns22="http://schemas.openxmlformats.org/wordprocessingml/2006/main" ns22:eastAsia="微软雅黑" ns22:ascii="微软雅黑" ns22:hAnsi="微软雅黑"/>
               </a:rPr>
               <a:t>○  软著申请中</a:t>
             </a:r>
           </a:p>
         </p:txBody>
       </p:sp>
-    </p:spTree>
-  </p:cSld>
-  <p:clrMapOvr>
-    <a:masterClrMapping/>
-  </p:clrMapOvr>
-</p:sld>
-</file>
-
-<file path=ppt/slides/slide27.xml><?xml version="1.0" encoding="utf-8"?>
-<p:sld xmlns:a="http://schemas.openxmlformats.org/drawingml/2006/main" xmlns:p="http://schemas.openxmlformats.org/presentationml/2006/main" xmlns:r="http://schemas.openxmlformats.org/officeDocument/2006/relationships">
-  <p:cSld>
-    <p:bg>
-      <p:bgPr>
-        <a:solidFill>
-          <a:srgbClr val="FFFFFF"/>
-        </a:solidFill>
-        <a:effectLst/>
-      </p:bgPr>
-    </p:bg>
-    <p:spTree>
-      <p:nvGrpSpPr>
-        <p:cNvPr id="1" name=""/>
-        <p:cNvGrpSpPr/>
-        <p:nvPr/>
-      </p:nvGrpSpPr>
-      <p:grpSpPr/>
-      <p:sp>
-        <p:nvSpPr>
-          <p:cNvPr id="2" name="Rectangle 1"/>
-          <p:cNvSpPr/>
-          <p:nvPr/>
-        </p:nvSpPr>
-        <p:spPr>
-          <a:xfrm>
-            <a:off x="0" y="0"/>
-            <a:ext cx="9144000" cy="420624"/>
-          </a:xfrm>
-          <a:prstGeom prst="rect">
-            <a:avLst/>
-          </a:prstGeom>
-          <a:solidFill>
-            <a:srgbClr val="143278"/>
-          </a:solidFill>
-          <a:ln>
-            <a:noFill/>
-          </a:ln>
-        </p:spPr>
-        <p:style>
-          <a:lnRef idx="1">
-            <a:schemeClr val="accent1"/>
-          </a:lnRef>
-          <a:fillRef idx="3">
-            <a:schemeClr val="accent1"/>
-          </a:fillRef>
-          <a:effectRef idx="2">
-            <a:schemeClr val="accent1"/>
-          </a:effectRef>
-          <a:fontRef idx="minor">
-            <a:schemeClr val="lt1"/>
-          </a:fontRef>
-        </p:style>
-        <p:txBody>
-          <a:bodyPr rtlCol="0" anchor="ctr"/>
-          <a:lstStyle/>
-          <a:p>
-            <a:pPr algn="ctr"/>
-          </a:p>
-        </p:txBody>
-      </p:sp>
-      <p:sp>
-        <p:nvSpPr>
-          <p:cNvPr id="3" name="TextBox 2"/>
-          <p:cNvSpPr txBox="1"/>
-          <p:nvPr/>
-        </p:nvSpPr>
-        <p:spPr>
-          <a:xfrm>
-            <a:off x="274320" y="54864"/>
-            <a:ext cx="8595360" cy="347472"/>
-          </a:xfrm>
-          <a:prstGeom prst="rect">
-            <a:avLst/>
-          </a:prstGeom>
-          <a:noFill/>
-        </p:spPr>
-        <p:txBody>
-          <a:bodyPr wrap="none">
-            <a:spAutoFit/>
-          </a:bodyPr>
-          <a:lstStyle/>
-          <a:p>
-            <a:r>
-              <a:rPr sz="900" b="1">
-                <a:solidFill>
-                  <a:srgbClr val="FFFFFF"/>
-                </a:solidFill>
-                <a:latin typeface="微软雅黑"/>
-                <ns0:rFonts xmlns:ns0="http://schemas.openxmlformats.org/wordprocessingml/2006/main" ns0:eastAsia="微软雅黑" ns0:ascii="微软雅黑" ns0:hAnsi="微软雅黑"/>
-              </a:rPr>
-              <a:t>第二十八届中国机器人及人工智能大赛  |  创新赛 · 机器人创新赛道</a:t>
-            </a:r>
-          </a:p>
-        </p:txBody>
-      </p:sp>
-      <p:sp>
-        <p:nvSpPr>
-          <p:cNvPr id="4" name="Rectangle 3"/>
-          <p:cNvSpPr/>
-          <p:nvPr/>
-        </p:nvSpPr>
-        <p:spPr>
-          <a:xfrm>
-            <a:off x="0" y="4905756"/>
-            <a:ext cx="9144000" cy="237744"/>
-          </a:xfrm>
-          <a:prstGeom prst="rect">
-            <a:avLst/>
-          </a:prstGeom>
-          <a:solidFill>
-            <a:srgbClr val="DBEAFE"/>
-          </a:solidFill>
-          <a:ln>
-            <a:noFill/>
-          </a:ln>
-        </p:spPr>
-        <p:style>
-          <a:lnRef idx="1">
-            <a:schemeClr val="accent1"/>
-          </a:lnRef>
-          <a:fillRef idx="3">
-            <a:schemeClr val="accent1"/>
-          </a:fillRef>
-          <a:effectRef idx="2">
-            <a:schemeClr val="accent1"/>
-          </a:effectRef>
-          <a:fontRef idx="minor">
-            <a:schemeClr val="lt1"/>
-          </a:fontRef>
-        </p:style>
-        <p:txBody>
-          <a:bodyPr rtlCol="0" anchor="ctr"/>
-          <a:lstStyle/>
-          <a:p>
-            <a:pPr algn="ctr"/>
-          </a:p>
-        </p:txBody>
-      </p:sp>
-      <p:sp>
-        <p:nvSpPr>
-          <p:cNvPr id="5" name="TextBox 4"/>
-          <p:cNvSpPr txBox="1"/>
-          <p:nvPr/>
-        </p:nvSpPr>
-        <p:spPr>
-          <a:xfrm>
-            <a:off x="274320" y="4951476"/>
-            <a:ext cx="8595360" cy="182880"/>
-          </a:xfrm>
-          <a:prstGeom prst="rect">
-            <a:avLst/>
-          </a:prstGeom>
-          <a:noFill/>
-        </p:spPr>
-        <p:txBody>
-          <a:bodyPr wrap="none">
-            <a:spAutoFit/>
-          </a:bodyPr>
-          <a:lstStyle/>
-          <a:p>
-            <a:pPr algn="ctr"/>
-            <a:r>
-              <a:rPr sz="800" b="0">
-                <a:solidFill>
-                  <a:srgbClr val="5A6273"/>
-                </a:solidFill>
-                <a:latin typeface="微软雅黑"/>
-                <ns1:rFonts xmlns:ns1="http://schemas.openxmlformats.org/wordprocessingml/2006/main" ns1:eastAsia="微软雅黑" ns1:ascii="微软雅黑" ns1:hAnsi="微软雅黑"/>
-              </a:rPr>
-              <a:t>从容应队 · 中山大学 · 刘小凡/白冉 · 指导教师 彭键清</a:t>
-            </a:r>
-          </a:p>
-        </p:txBody>
-      </p:sp>
-      <p:sp>
-        <p:nvSpPr>
-          <p:cNvPr id="6" name="Rectangle 5"/>
-          <p:cNvSpPr/>
-          <p:nvPr/>
-        </p:nvSpPr>
-        <p:spPr>
-          <a:xfrm>
-            <a:off x="0" y="420624"/>
-            <a:ext cx="4343400" cy="4430268"/>
-          </a:xfrm>
-          <a:prstGeom prst="rect">
-            <a:avLst/>
-          </a:prstGeom>
-          <a:solidFill>
-            <a:srgbClr val="143278"/>
-          </a:solidFill>
-          <a:ln>
-            <a:noFill/>
-          </a:ln>
-        </p:spPr>
-        <p:style>
-          <a:lnRef idx="1">
-            <a:schemeClr val="accent1"/>
-          </a:lnRef>
-          <a:fillRef idx="3">
-            <a:schemeClr val="accent1"/>
-          </a:fillRef>
-          <a:effectRef idx="2">
-            <a:schemeClr val="accent1"/>
-          </a:effectRef>
-          <a:fontRef idx="minor">
-            <a:schemeClr val="lt1"/>
-          </a:fontRef>
-        </p:style>
-        <p:txBody>
-          <a:bodyPr rtlCol="0" anchor="ctr"/>
-          <a:lstStyle/>
-          <a:p>
-            <a:pPr algn="ctr"/>
-          </a:p>
-        </p:txBody>
-      </p:sp>
-      <p:sp>
-        <p:nvSpPr>
-          <p:cNvPr id="7" name="Oval 6"/>
-          <p:cNvSpPr/>
-          <p:nvPr/>
-        </p:nvSpPr>
-        <p:spPr>
-          <a:xfrm>
-            <a:off x="384048" y="740664"/>
-            <a:ext cx="658368" cy="658368"/>
-          </a:xfrm>
-          <a:prstGeom prst="ellipse">
-            <a:avLst/>
-          </a:prstGeom>
-          <a:solidFill>
-            <a:srgbClr val="F59E0B"/>
-          </a:solidFill>
-          <a:ln>
-            <a:noFill/>
-          </a:ln>
-        </p:spPr>
-        <p:style>
-          <a:lnRef idx="1">
-            <a:schemeClr val="accent1"/>
-          </a:lnRef>
-          <a:fillRef idx="3">
-            <a:schemeClr val="accent1"/>
-          </a:fillRef>
-          <a:effectRef idx="2">
-            <a:schemeClr val="accent1"/>
-          </a:effectRef>
-          <a:fontRef idx="minor">
-            <a:schemeClr val="lt1"/>
-          </a:fontRef>
-        </p:style>
-        <p:txBody>
-          <a:bodyPr rtlCol="0" anchor="ctr"/>
-          <a:lstStyle/>
-          <a:p>
-            <a:pPr algn="ctr"/>
-          </a:p>
-        </p:txBody>
-      </p:sp>
-      <p:sp>
-        <p:nvSpPr>
-          <p:cNvPr id="8" name="TextBox 7"/>
-          <p:cNvSpPr txBox="1"/>
-          <p:nvPr/>
-        </p:nvSpPr>
-        <p:spPr>
-          <a:xfrm>
-            <a:off x="384048" y="804672"/>
-            <a:ext cx="658368" cy="411480"/>
-          </a:xfrm>
-          <a:prstGeom prst="rect">
-            <a:avLst/>
-          </a:prstGeom>
-          <a:noFill/>
-        </p:spPr>
-        <p:txBody>
-          <a:bodyPr wrap="none">
-            <a:spAutoFit/>
-          </a:bodyPr>
-          <a:lstStyle/>
-          <a:p>
-            <a:pPr algn="ctr"/>
-            <a:r>
-              <a:rPr sz="2200" b="1">
-                <a:solidFill>
-                  <a:srgbClr val="FFFFFF"/>
-                </a:solidFill>
-                <a:latin typeface="微软雅黑"/>
-                <ns2:rFonts xmlns:ns2="http://schemas.openxmlformats.org/wordprocessingml/2006/main" ns2:eastAsia="微软雅黑" ns2:ascii="微软雅黑" ns2:hAnsi="微软雅黑"/>
-              </a:rPr>
-              <a:t>四</a:t>
-            </a:r>
-          </a:p>
-        </p:txBody>
-      </p:sp>
-      <p:sp>
-        <p:nvSpPr>
-          <p:cNvPr id="9" name="TextBox 8"/>
-          <p:cNvSpPr txBox="1"/>
-          <p:nvPr/>
-        </p:nvSpPr>
-        <p:spPr>
-          <a:xfrm>
-            <a:off x="347472" y="1472184"/>
-            <a:ext cx="3840480" cy="457200"/>
-          </a:xfrm>
-          <a:prstGeom prst="rect">
-            <a:avLst/>
-          </a:prstGeom>
-          <a:noFill/>
-        </p:spPr>
-        <p:txBody>
-          <a:bodyPr wrap="none">
-            <a:spAutoFit/>
-          </a:bodyPr>
-          <a:lstStyle/>
-          <a:p>
-            <a:r>
-              <a:rPr sz="2400" b="1">
-                <a:solidFill>
-                  <a:srgbClr val="FFFFFF"/>
-                </a:solidFill>
-                <a:latin typeface="微软雅黑"/>
-                <ns3:rFonts xmlns:ns3="http://schemas.openxmlformats.org/wordprocessingml/2006/main" ns3:eastAsia="微软雅黑" ns3:ascii="微软雅黑" ns3:hAnsi="微软雅黑"/>
-              </a:rPr>
-              <a:t>第四部分</a:t>
-            </a:r>
-          </a:p>
-        </p:txBody>
-      </p:sp>
-      <p:sp>
-        <p:nvSpPr>
-          <p:cNvPr id="10" name="TextBox 9"/>
-          <p:cNvSpPr txBox="1"/>
-          <p:nvPr/>
-        </p:nvSpPr>
-        <p:spPr>
-          <a:xfrm>
-            <a:off x="365760" y="1947672"/>
-            <a:ext cx="3840480" cy="347472"/>
-          </a:xfrm>
-          <a:prstGeom prst="rect">
-            <a:avLst/>
-          </a:prstGeom>
-          <a:noFill/>
-        </p:spPr>
-        <p:txBody>
-          <a:bodyPr wrap="none">
-            <a:spAutoFit/>
-          </a:bodyPr>
-          <a:lstStyle/>
-          <a:p>
-            <a:r>
-              <a:rPr sz="1200" b="0">
-                <a:solidFill>
-                  <a:srgbClr val="BFDBFE"/>
-                </a:solidFill>
-                <a:latin typeface="微软雅黑"/>
-                <ns4:rFonts xmlns:ns4="http://schemas.openxmlformats.org/wordprocessingml/2006/main" ns4:eastAsia="微软雅黑" ns4:ascii="微软雅黑" ns4:hAnsi="微软雅黑"/>
-              </a:rPr>
-              <a:t>创新 · 计划</a:t>
-            </a:r>
-          </a:p>
-        </p:txBody>
-      </p:sp>
-      <p:sp>
-        <p:nvSpPr>
-          <p:cNvPr id="11" name="Rectangle 10"/>
-          <p:cNvSpPr/>
-          <p:nvPr/>
-        </p:nvSpPr>
-        <p:spPr>
-          <a:xfrm>
-            <a:off x="384048" y="2432304"/>
-            <a:ext cx="3657600" cy="384048"/>
-          </a:xfrm>
-          <a:prstGeom prst="rect">
-            <a:avLst/>
-          </a:prstGeom>
-          <a:solidFill>
-            <a:srgbClr val="1E4082"/>
-          </a:solidFill>
-          <a:ln>
-            <a:solidFill>
-              <a:srgbClr val="648CC8"/>
-            </a:solidFill>
-          </a:ln>
-        </p:spPr>
-        <p:style>
-          <a:lnRef idx="1">
-            <a:schemeClr val="accent1"/>
-          </a:lnRef>
-          <a:fillRef idx="3">
-            <a:schemeClr val="accent1"/>
-          </a:fillRef>
-          <a:effectRef idx="2">
-            <a:schemeClr val="accent1"/>
-          </a:effectRef>
-          <a:fontRef idx="minor">
-            <a:schemeClr val="lt1"/>
-          </a:fontRef>
-        </p:style>
-        <p:txBody>
-          <a:bodyPr rtlCol="0" anchor="ctr"/>
-          <a:lstStyle/>
-          <a:p>
-            <a:pPr algn="ctr"/>
-          </a:p>
-        </p:txBody>
-      </p:sp>
-      <p:sp>
-        <p:nvSpPr>
-          <p:cNvPr id="12" name="TextBox 11"/>
-          <p:cNvSpPr txBox="1"/>
-          <p:nvPr/>
-        </p:nvSpPr>
-        <p:spPr>
-          <a:xfrm>
-            <a:off x="502920" y="2505456"/>
-            <a:ext cx="3429000" cy="256032"/>
-          </a:xfrm>
-          <a:prstGeom prst="rect">
-            <a:avLst/>
-          </a:prstGeom>
-          <a:noFill/>
-        </p:spPr>
-        <p:txBody>
-          <a:bodyPr wrap="none">
-            <a:spAutoFit/>
-          </a:bodyPr>
-          <a:lstStyle/>
-          <a:p>
-            <a:r>
-              <a:rPr sz="1100" b="0">
-                <a:solidFill>
-                  <a:srgbClr val="E2E8F0"/>
-                </a:solidFill>
-                <a:latin typeface="微软雅黑"/>
-                <ns5:rFonts xmlns:ns5="http://schemas.openxmlformats.org/wordprocessingml/2006/main" ns5:eastAsia="微软雅黑" ns5:ascii="微软雅黑" ns5:hAnsi="微软雅黑"/>
-              </a:rPr>
-              <a:t>五个方向</a:t>
-            </a:r>
-          </a:p>
-        </p:txBody>
-      </p:sp>
-      <p:sp>
-        <p:nvSpPr>
-          <p:cNvPr id="13" name="Rectangle 12"/>
-          <p:cNvSpPr/>
-          <p:nvPr/>
-        </p:nvSpPr>
-        <p:spPr>
-          <a:xfrm>
-            <a:off x="384048" y="2871216"/>
-            <a:ext cx="3657600" cy="384048"/>
-          </a:xfrm>
-          <a:prstGeom prst="rect">
-            <a:avLst/>
-          </a:prstGeom>
-          <a:solidFill>
-            <a:srgbClr val="1E4082"/>
-          </a:solidFill>
-          <a:ln>
-            <a:solidFill>
-              <a:srgbClr val="648CC8"/>
-            </a:solidFill>
-          </a:ln>
-        </p:spPr>
-        <p:style>
-          <a:lnRef idx="1">
-            <a:schemeClr val="accent1"/>
-          </a:lnRef>
-          <a:fillRef idx="3">
-            <a:schemeClr val="accent1"/>
-          </a:fillRef>
-          <a:effectRef idx="2">
-            <a:schemeClr val="accent1"/>
-          </a:effectRef>
-          <a:fontRef idx="minor">
-            <a:schemeClr val="lt1"/>
-          </a:fontRef>
-        </p:style>
-        <p:txBody>
-          <a:bodyPr rtlCol="0" anchor="ctr"/>
-          <a:lstStyle/>
-          <a:p>
-            <a:pPr algn="ctr"/>
-          </a:p>
-        </p:txBody>
-      </p:sp>
-      <p:sp>
-        <p:nvSpPr>
-          <p:cNvPr id="14" name="TextBox 13"/>
-          <p:cNvSpPr txBox="1"/>
-          <p:nvPr/>
-        </p:nvSpPr>
-        <p:spPr>
-          <a:xfrm>
-            <a:off x="502920" y="2944368"/>
-            <a:ext cx="3429000" cy="256032"/>
-          </a:xfrm>
-          <a:prstGeom prst="rect">
-            <a:avLst/>
-          </a:prstGeom>
-          <a:noFill/>
-        </p:spPr>
-        <p:txBody>
-          <a:bodyPr wrap="none">
-            <a:spAutoFit/>
-          </a:bodyPr>
-          <a:lstStyle/>
-          <a:p>
-            <a:r>
-              <a:rPr sz="1100" b="0">
-                <a:solidFill>
-                  <a:srgbClr val="E2E8F0"/>
-                </a:solidFill>
-                <a:latin typeface="微软雅黑"/>
-                <ns6:rFonts xmlns:ns6="http://schemas.openxmlformats.org/wordprocessingml/2006/main" ns6:eastAsia="微软雅黑" ns6:ascii="微软雅黑" ns6:hAnsi="微软雅黑"/>
-              </a:rPr>
-              <a:t>真机</a:t>
-            </a:r>
-          </a:p>
-        </p:txBody>
-      </p:sp>
-      <p:sp>
-        <p:nvSpPr>
-          <p:cNvPr id="15" name="Rectangle 14"/>
-          <p:cNvSpPr/>
-          <p:nvPr/>
-        </p:nvSpPr>
-        <p:spPr>
-          <a:xfrm>
-            <a:off x="384048" y="3310128"/>
-            <a:ext cx="3657600" cy="384048"/>
-          </a:xfrm>
-          <a:prstGeom prst="rect">
-            <a:avLst/>
-          </a:prstGeom>
-          <a:solidFill>
-            <a:srgbClr val="1E4082"/>
-          </a:solidFill>
-          <a:ln>
-            <a:solidFill>
-              <a:srgbClr val="648CC8"/>
-            </a:solidFill>
-          </a:ln>
-        </p:spPr>
-        <p:style>
-          <a:lnRef idx="1">
-            <a:schemeClr val="accent1"/>
-          </a:lnRef>
-          <a:fillRef idx="3">
-            <a:schemeClr val="accent1"/>
-          </a:fillRef>
-          <a:effectRef idx="2">
-            <a:schemeClr val="accent1"/>
-          </a:effectRef>
-          <a:fontRef idx="minor">
-            <a:schemeClr val="lt1"/>
-          </a:fontRef>
-        </p:style>
-        <p:txBody>
-          <a:bodyPr rtlCol="0" anchor="ctr"/>
-          <a:lstStyle/>
-          <a:p>
-            <a:pPr algn="ctr"/>
-          </a:p>
-        </p:txBody>
-      </p:sp>
-      <p:sp>
-        <p:nvSpPr>
-          <p:cNvPr id="16" name="TextBox 15"/>
-          <p:cNvSpPr txBox="1"/>
-          <p:nvPr/>
-        </p:nvSpPr>
-        <p:spPr>
-          <a:xfrm>
-            <a:off x="502920" y="3383280"/>
-            <a:ext cx="3429000" cy="256032"/>
-          </a:xfrm>
-          <a:prstGeom prst="rect">
-            <a:avLst/>
-          </a:prstGeom>
-          <a:noFill/>
-        </p:spPr>
-        <p:txBody>
-          <a:bodyPr wrap="none">
-            <a:spAutoFit/>
-          </a:bodyPr>
-          <a:lstStyle/>
-          <a:p>
-            <a:r>
-              <a:rPr sz="1100" b="0">
-                <a:solidFill>
-                  <a:srgbClr val="E2E8F0"/>
-                </a:solidFill>
-                <a:latin typeface="微软雅黑"/>
-                <ns7:rFonts xmlns:ns7="http://schemas.openxmlformats.org/wordprocessingml/2006/main" ns7:eastAsia="微软雅黑" ns7:ascii="微软雅黑" ns7:hAnsi="微软雅黑"/>
-              </a:rPr>
-              <a:t>软著</a:t>
-            </a:r>
-          </a:p>
-        </p:txBody>
-      </p:sp>
-      <p:sp>
-        <p:nvSpPr>
-          <p:cNvPr id="17" name="Rectangle 16"/>
-          <p:cNvSpPr/>
-          <p:nvPr/>
-        </p:nvSpPr>
-        <p:spPr>
-          <a:xfrm>
-            <a:off x="4343400" y="420624"/>
-            <a:ext cx="4800600" cy="4430268"/>
-          </a:xfrm>
-          <a:prstGeom prst="rect">
-            <a:avLst/>
-          </a:prstGeom>
-          <a:solidFill>
-            <a:srgbClr val="F1F7FF"/>
-          </a:solidFill>
-          <a:ln>
-            <a:noFill/>
-          </a:ln>
-        </p:spPr>
-        <p:style>
-          <a:lnRef idx="1">
-            <a:schemeClr val="accent1"/>
-          </a:lnRef>
-          <a:fillRef idx="3">
-            <a:schemeClr val="accent1"/>
-          </a:fillRef>
-          <a:effectRef idx="2">
-            <a:schemeClr val="accent1"/>
-          </a:effectRef>
-          <a:fontRef idx="minor">
-            <a:schemeClr val="lt1"/>
-          </a:fontRef>
-        </p:style>
-        <p:txBody>
-          <a:bodyPr rtlCol="0" anchor="ctr"/>
-          <a:lstStyle/>
-          <a:p>
-            <a:pPr algn="ctr"/>
-          </a:p>
-        </p:txBody>
-      </p:sp>
-      <p:sp>
-        <p:nvSpPr>
-          <p:cNvPr id="18" name="Rectangle 17"/>
-          <p:cNvSpPr/>
-          <p:nvPr/>
-        </p:nvSpPr>
-        <p:spPr>
-          <a:xfrm>
-            <a:off x="4503008" y="1719518"/>
-            <a:ext cx="4481382" cy="2371975"/>
-          </a:xfrm>
-          <a:prstGeom prst="rect">
-            <a:avLst/>
-          </a:prstGeom>
-          <a:solidFill>
-            <a:srgbClr val="FCFDFF"/>
-          </a:solidFill>
-          <a:ln w="7620">
-            <a:solidFill>
-              <a:srgbClr val="BAC8DC"/>
-            </a:solidFill>
-          </a:ln>
-        </p:spPr>
-        <p:style>
-          <a:lnRef idx="1">
-            <a:schemeClr val="accent1"/>
-          </a:lnRef>
-          <a:fillRef idx="3">
-            <a:schemeClr val="accent1"/>
-          </a:fillRef>
-          <a:effectRef idx="2">
-            <a:schemeClr val="accent1"/>
-          </a:effectRef>
-          <a:fontRef idx="minor">
-            <a:schemeClr val="lt1"/>
-          </a:fontRef>
-        </p:style>
-        <p:txBody>
-          <a:bodyPr rtlCol="0" anchor="ctr"/>
-          <a:lstStyle/>
-          <a:p>
-            <a:pPr algn="ctr"/>
-          </a:p>
-        </p:txBody>
-      </p:sp>
-      <p:pic>
-        <p:nvPicPr>
-          <p:cNvPr id="19" name="Picture 18" descr="ppt_full_dashboard.png"/>
-          <p:cNvPicPr>
-            <a:picLocks noChangeAspect="1"/>
-          </p:cNvPicPr>
-          <p:nvPr/>
-        </p:nvPicPr>
-        <p:blipFill>
-          <a:blip r:embed="rId2"/>
-          <a:stretch>
-            <a:fillRect/>
-          </a:stretch>
-        </p:blipFill>
-        <p:spPr>
-          <a:xfrm>
-            <a:off x="4539584" y="1756094"/>
-            <a:ext cx="4408230" cy="2298823"/>
-          </a:xfrm>
-          <a:prstGeom prst="rect">
-            <a:avLst/>
-          </a:prstGeom>
-        </p:spPr>
-      </p:pic>
     </p:spTree>
   </p:cSld>
   <p:clrMapOvr>
@@ -17044,52 +17026,59 @@
       </p:sp>
       <p:sp>
         <p:nvSpPr>
-          <p:cNvPr id="6" name="TextBox 5"/>
-          <p:cNvSpPr txBox="1"/>
-          <p:nvPr/>
-        </p:nvSpPr>
-        <p:spPr>
-          <a:xfrm>
-            <a:off x="274320" y="466344"/>
-            <a:ext cx="8595360" cy="457200"/>
-          </a:xfrm>
-          <a:prstGeom prst="rect">
-            <a:avLst/>
-          </a:prstGeom>
-          <a:noFill/>
-        </p:spPr>
-        <p:txBody>
-          <a:bodyPr wrap="none">
-            <a:spAutoFit/>
-          </a:bodyPr>
-          <a:lstStyle/>
-          <a:p>
-            <a:pPr algn="l"/>
-            <a:r>
-              <a:rPr sz="2000" b="1">
-                <a:solidFill>
-                  <a:srgbClr val="143278"/>
-                </a:solidFill>
-                <a:latin typeface="微软雅黑"/>
-                <ns2:rFonts xmlns:ns2="http://schemas.openxmlformats.org/wordprocessingml/2006/main" ns2:eastAsia="微软雅黑" ns2:ascii="微软雅黑" ns2:hAnsi="微软雅黑"/>
-              </a:rPr>
-              <a:t>创新点</a:t>
-            </a:r>
-          </a:p>
-        </p:txBody>
-      </p:sp>
-      <p:sp>
-        <p:nvSpPr>
-          <p:cNvPr id="7" name="Rectangle 6"/>
+          <p:cNvPr id="6" name="Rectangle 5"/>
           <p:cNvSpPr/>
           <p:nvPr/>
         </p:nvSpPr>
         <p:spPr>
           <a:xfrm>
-            <a:off x="274320" y="886968"/>
-            <a:ext cx="1143000" cy="50292"/>
-          </a:xfrm>
-          <a:prstGeom prst="rect">
+            <a:off x="0" y="420624"/>
+            <a:ext cx="4343400" cy="4430268"/>
+          </a:xfrm>
+          <a:prstGeom prst="rect">
+            <a:avLst/>
+          </a:prstGeom>
+          <a:solidFill>
+            <a:srgbClr val="143278"/>
+          </a:solidFill>
+          <a:ln>
+            <a:noFill/>
+          </a:ln>
+        </p:spPr>
+        <p:style>
+          <a:lnRef idx="1">
+            <a:schemeClr val="accent1"/>
+          </a:lnRef>
+          <a:fillRef idx="3">
+            <a:schemeClr val="accent1"/>
+          </a:fillRef>
+          <a:effectRef idx="2">
+            <a:schemeClr val="accent1"/>
+          </a:effectRef>
+          <a:fontRef idx="minor">
+            <a:schemeClr val="lt1"/>
+          </a:fontRef>
+        </p:style>
+        <p:txBody>
+          <a:bodyPr rtlCol="0" anchor="ctr"/>
+          <a:lstStyle/>
+          <a:p>
+            <a:pPr algn="ctr"/>
+          </a:p>
+        </p:txBody>
+      </p:sp>
+      <p:sp>
+        <p:nvSpPr>
+          <p:cNvPr id="7" name="Oval 6"/>
+          <p:cNvSpPr/>
+          <p:nvPr/>
+        </p:nvSpPr>
+        <p:spPr>
+          <a:xfrm>
+            <a:off x="384048" y="740664"/>
+            <a:ext cx="658368" cy="658368"/>
+          </a:xfrm>
+          <a:prstGeom prst="ellipse">
             <a:avLst/>
           </a:prstGeom>
           <a:solidFill>
@@ -17123,24 +17112,130 @@
       </p:sp>
       <p:sp>
         <p:nvSpPr>
-          <p:cNvPr id="8" name="Rectangle 7"/>
+          <p:cNvPr id="8" name="TextBox 7"/>
+          <p:cNvSpPr txBox="1"/>
+          <p:nvPr/>
+        </p:nvSpPr>
+        <p:spPr>
+          <a:xfrm>
+            <a:off x="384048" y="804672"/>
+            <a:ext cx="658368" cy="411480"/>
+          </a:xfrm>
+          <a:prstGeom prst="rect">
+            <a:avLst/>
+          </a:prstGeom>
+          <a:noFill/>
+        </p:spPr>
+        <p:txBody>
+          <a:bodyPr wrap="none">
+            <a:spAutoFit/>
+          </a:bodyPr>
+          <a:lstStyle/>
+          <a:p>
+            <a:pPr algn="ctr"/>
+            <a:r>
+              <a:rPr sz="2200" b="1">
+                <a:solidFill>
+                  <a:srgbClr val="FFFFFF"/>
+                </a:solidFill>
+                <a:latin typeface="微软雅黑"/>
+                <ns2:rFonts xmlns:ns2="http://schemas.openxmlformats.org/wordprocessingml/2006/main" ns2:eastAsia="微软雅黑" ns2:ascii="微软雅黑" ns2:hAnsi="微软雅黑"/>
+              </a:rPr>
+              <a:t>四</a:t>
+            </a:r>
+          </a:p>
+        </p:txBody>
+      </p:sp>
+      <p:sp>
+        <p:nvSpPr>
+          <p:cNvPr id="9" name="TextBox 8"/>
+          <p:cNvSpPr txBox="1"/>
+          <p:nvPr/>
+        </p:nvSpPr>
+        <p:spPr>
+          <a:xfrm>
+            <a:off x="347472" y="1472184"/>
+            <a:ext cx="3840480" cy="457200"/>
+          </a:xfrm>
+          <a:prstGeom prst="rect">
+            <a:avLst/>
+          </a:prstGeom>
+          <a:noFill/>
+        </p:spPr>
+        <p:txBody>
+          <a:bodyPr wrap="none">
+            <a:spAutoFit/>
+          </a:bodyPr>
+          <a:lstStyle/>
+          <a:p>
+            <a:r>
+              <a:rPr sz="2400" b="1">
+                <a:solidFill>
+                  <a:srgbClr val="FFFFFF"/>
+                </a:solidFill>
+                <a:latin typeface="微软雅黑"/>
+                <ns3:rFonts xmlns:ns3="http://schemas.openxmlformats.org/wordprocessingml/2006/main" ns3:eastAsia="微软雅黑" ns3:ascii="微软雅黑" ns3:hAnsi="微软雅黑"/>
+              </a:rPr>
+              <a:t>第四部分</a:t>
+            </a:r>
+          </a:p>
+        </p:txBody>
+      </p:sp>
+      <p:sp>
+        <p:nvSpPr>
+          <p:cNvPr id="10" name="TextBox 9"/>
+          <p:cNvSpPr txBox="1"/>
+          <p:nvPr/>
+        </p:nvSpPr>
+        <p:spPr>
+          <a:xfrm>
+            <a:off x="365760" y="1947672"/>
+            <a:ext cx="3840480" cy="347472"/>
+          </a:xfrm>
+          <a:prstGeom prst="rect">
+            <a:avLst/>
+          </a:prstGeom>
+          <a:noFill/>
+        </p:spPr>
+        <p:txBody>
+          <a:bodyPr wrap="none">
+            <a:spAutoFit/>
+          </a:bodyPr>
+          <a:lstStyle/>
+          <a:p>
+            <a:r>
+              <a:rPr sz="1200" b="0">
+                <a:solidFill>
+                  <a:srgbClr val="BFDBFE"/>
+                </a:solidFill>
+                <a:latin typeface="微软雅黑"/>
+                <ns4:rFonts xmlns:ns4="http://schemas.openxmlformats.org/wordprocessingml/2006/main" ns4:eastAsia="微软雅黑" ns4:ascii="微软雅黑" ns4:hAnsi="微软雅黑"/>
+              </a:rPr>
+              <a:t>创新 · 计划</a:t>
+            </a:r>
+          </a:p>
+        </p:txBody>
+      </p:sp>
+      <p:sp>
+        <p:nvSpPr>
+          <p:cNvPr id="11" name="Rectangle 10"/>
           <p:cNvSpPr/>
           <p:nvPr/>
         </p:nvSpPr>
         <p:spPr>
           <a:xfrm>
-            <a:off x="274320" y="996696"/>
-            <a:ext cx="3611880" cy="3854196"/>
+            <a:off x="384048" y="2432304"/>
+            <a:ext cx="3657600" cy="384048"/>
           </a:xfrm>
           <a:prstGeom prst="rect">
             <a:avLst/>
           </a:prstGeom>
           <a:solidFill>
-            <a:srgbClr val="F1F7FF"/>
+            <a:srgbClr val="1E4082"/>
           </a:solidFill>
-          <a:ln w="10160">
+          <a:ln>
             <a:solidFill>
-              <a:srgbClr val="BAC8DC"/>
+              <a:srgbClr val="648CC8"/>
             </a:solidFill>
           </a:ln>
         </p:spPr>
@@ -17168,23 +17263,60 @@
       </p:sp>
       <p:sp>
         <p:nvSpPr>
-          <p:cNvPr id="9" name="Rectangle 8"/>
+          <p:cNvPr id="12" name="TextBox 11"/>
+          <p:cNvSpPr txBox="1"/>
+          <p:nvPr/>
+        </p:nvSpPr>
+        <p:spPr>
+          <a:xfrm>
+            <a:off x="502920" y="2505456"/>
+            <a:ext cx="3429000" cy="256032"/>
+          </a:xfrm>
+          <a:prstGeom prst="rect">
+            <a:avLst/>
+          </a:prstGeom>
+          <a:noFill/>
+        </p:spPr>
+        <p:txBody>
+          <a:bodyPr wrap="none">
+            <a:spAutoFit/>
+          </a:bodyPr>
+          <a:lstStyle/>
+          <a:p>
+            <a:r>
+              <a:rPr sz="1100" b="0">
+                <a:solidFill>
+                  <a:srgbClr val="E2E8F0"/>
+                </a:solidFill>
+                <a:latin typeface="微软雅黑"/>
+                <ns5:rFonts xmlns:ns5="http://schemas.openxmlformats.org/wordprocessingml/2006/main" ns5:eastAsia="微软雅黑" ns5:ascii="微软雅黑" ns5:hAnsi="微软雅黑"/>
+              </a:rPr>
+              <a:t>五个方向</a:t>
+            </a:r>
+          </a:p>
+        </p:txBody>
+      </p:sp>
+      <p:sp>
+        <p:nvSpPr>
+          <p:cNvPr id="13" name="Rectangle 12"/>
           <p:cNvSpPr/>
           <p:nvPr/>
         </p:nvSpPr>
         <p:spPr>
           <a:xfrm>
-            <a:off x="274320" y="996696"/>
-            <a:ext cx="73152" cy="3854196"/>
+            <a:off x="384048" y="2871216"/>
+            <a:ext cx="3657600" cy="384048"/>
           </a:xfrm>
           <a:prstGeom prst="rect">
             <a:avLst/>
           </a:prstGeom>
           <a:solidFill>
-            <a:srgbClr val="143278"/>
+            <a:srgbClr val="1E4082"/>
           </a:solidFill>
           <a:ln>
-            <a:noFill/>
+            <a:solidFill>
+              <a:srgbClr val="648CC8"/>
+            </a:solidFill>
           </a:ln>
         </p:spPr>
         <p:style>
@@ -17211,14 +17343,14 @@
       </p:sp>
       <p:sp>
         <p:nvSpPr>
-          <p:cNvPr id="10" name="TextBox 9"/>
+          <p:cNvPr id="14" name="TextBox 13"/>
           <p:cNvSpPr txBox="1"/>
           <p:nvPr/>
         </p:nvSpPr>
         <p:spPr>
           <a:xfrm>
-            <a:off x="438912" y="1106424"/>
-            <a:ext cx="3282696" cy="708660"/>
+            <a:off x="502920" y="2944368"/>
+            <a:ext cx="3429000" cy="256032"/>
           </a:xfrm>
           <a:prstGeom prst="rect">
             <a:avLst/>
@@ -17226,200 +17358,20 @@
           <a:noFill/>
         </p:spPr>
         <p:txBody>
-          <a:bodyPr wrap="square" anchor="t" lIns="25400" tIns="0">
+          <a:bodyPr wrap="none">
             <a:spAutoFit/>
           </a:bodyPr>
           <a:lstStyle/>
           <a:p>
-            <a:pPr>
-              <a:lnSpc>
-                <a:spcPct val="112000"/>
-              </a:lnSpc>
-              <a:spcAft>
-                <a:spcPts val="200"/>
-              </a:spcAft>
-            </a:pPr>
-            <a:r>
-              <a:rPr sz="1300" b="0">
-                <a:solidFill>
-                  <a:srgbClr val="1C202C"/>
-                </a:solidFill>
-                <a:latin typeface="微软雅黑"/>
-                <ns3:rFonts xmlns:ns3="http://schemas.openxmlformats.org/wordprocessingml/2006/main" ns3:eastAsia="微软雅黑" ns3:ascii="微软雅黑" ns3:hAnsi="微软雅黑"/>
-              </a:rPr>
-              <a:t>● 多路信号融合，结果能解释</a:t>
-            </a:r>
-          </a:p>
-        </p:txBody>
-      </p:sp>
-      <p:sp>
-        <p:nvSpPr>
-          <p:cNvPr id="11" name="TextBox 10"/>
-          <p:cNvSpPr txBox="1"/>
-          <p:nvPr/>
-        </p:nvSpPr>
-        <p:spPr>
-          <a:xfrm>
-            <a:off x="438912" y="1833372"/>
-            <a:ext cx="3282696" cy="708660"/>
-          </a:xfrm>
-          <a:prstGeom prst="rect">
-            <a:avLst/>
-          </a:prstGeom>
-          <a:noFill/>
-        </p:spPr>
-        <p:txBody>
-          <a:bodyPr wrap="square" anchor="t" lIns="25400" tIns="0">
-            <a:spAutoFit/>
-          </a:bodyPr>
-          <a:lstStyle/>
-          <a:p>
-            <a:pPr>
-              <a:lnSpc>
-                <a:spcPct val="112000"/>
-              </a:lnSpc>
-              <a:spcAft>
-                <a:spcPts val="200"/>
-              </a:spcAft>
-            </a:pPr>
-            <a:r>
-              <a:rPr sz="1300" b="0">
-                <a:solidFill>
-                  <a:srgbClr val="1C202C"/>
-                </a:solidFill>
-                <a:latin typeface="微软雅黑"/>
-                <ns4:rFonts xmlns:ns4="http://schemas.openxmlformats.org/wordprocessingml/2006/main" ns4:eastAsia="微软雅黑" ns4:ascii="微软雅黑" ns4:hAnsi="微软雅黑"/>
-              </a:rPr>
-              <a:t>● 紧急态在状态机里优先级最高</a:t>
-            </a:r>
-          </a:p>
-        </p:txBody>
-      </p:sp>
-      <p:sp>
-        <p:nvSpPr>
-          <p:cNvPr id="12" name="TextBox 11"/>
-          <p:cNvSpPr txBox="1"/>
-          <p:nvPr/>
-        </p:nvSpPr>
-        <p:spPr>
-          <a:xfrm>
-            <a:off x="438912" y="2560320"/>
-            <a:ext cx="3282696" cy="708660"/>
-          </a:xfrm>
-          <a:prstGeom prst="rect">
-            <a:avLst/>
-          </a:prstGeom>
-          <a:noFill/>
-        </p:spPr>
-        <p:txBody>
-          <a:bodyPr wrap="square" anchor="t" lIns="25400" tIns="0">
-            <a:spAutoFit/>
-          </a:bodyPr>
-          <a:lstStyle/>
-          <a:p>
-            <a:pPr>
-              <a:lnSpc>
-                <a:spcPct val="112000"/>
-              </a:lnSpc>
-              <a:spcAft>
-                <a:spcPts val="200"/>
-              </a:spcAft>
-            </a:pPr>
-            <a:r>
-              <a:rPr sz="1300" b="0">
-                <a:solidFill>
-                  <a:srgbClr val="1C202C"/>
-                </a:solidFill>
-                <a:latin typeface="微软雅黑"/>
-                <ns5:rFonts xmlns:ns5="http://schemas.openxmlformats.org/wordprocessingml/2006/main" ns5:eastAsia="微软雅黑" ns5:ascii="微软雅黑" ns5:hAnsi="微软雅黑"/>
-              </a:rPr>
-              <a:t>● 视觉用 MediaPipe，不是纯参数滑块</a:t>
-            </a:r>
-          </a:p>
-        </p:txBody>
-      </p:sp>
-      <p:sp>
-        <p:nvSpPr>
-          <p:cNvPr id="13" name="TextBox 12"/>
-          <p:cNvSpPr txBox="1"/>
-          <p:nvPr/>
-        </p:nvSpPr>
-        <p:spPr>
-          <a:xfrm>
-            <a:off x="438912" y="3287268"/>
-            <a:ext cx="3282696" cy="708660"/>
-          </a:xfrm>
-          <a:prstGeom prst="rect">
-            <a:avLst/>
-          </a:prstGeom>
-          <a:noFill/>
-        </p:spPr>
-        <p:txBody>
-          <a:bodyPr wrap="square" anchor="t" lIns="25400" tIns="0">
-            <a:spAutoFit/>
-          </a:bodyPr>
-          <a:lstStyle/>
-          <a:p>
-            <a:pPr>
-              <a:lnSpc>
-                <a:spcPct val="112000"/>
-              </a:lnSpc>
-              <a:spcAft>
-                <a:spcPts val="200"/>
-              </a:spcAft>
-            </a:pPr>
-            <a:r>
-              <a:rPr sz="1300" b="0">
-                <a:solidFill>
-                  <a:srgbClr val="1C202C"/>
+            <a:r>
+              <a:rPr sz="1100" b="0">
+                <a:solidFill>
+                  <a:srgbClr val="E2E8F0"/>
                 </a:solidFill>
                 <a:latin typeface="微软雅黑"/>
                 <ns6:rFonts xmlns:ns6="http://schemas.openxmlformats.org/wordprocessingml/2006/main" ns6:eastAsia="微软雅黑" ns6:ascii="微软雅黑" ns6:hAnsi="微软雅黑"/>
               </a:rPr>
-              <a:t>● 代码和评测脚本都开源</a:t>
-            </a:r>
-          </a:p>
-        </p:txBody>
-      </p:sp>
-      <p:sp>
-        <p:nvSpPr>
-          <p:cNvPr id="14" name="TextBox 13"/>
-          <p:cNvSpPr txBox="1"/>
-          <p:nvPr/>
-        </p:nvSpPr>
-        <p:spPr>
-          <a:xfrm>
-            <a:off x="438912" y="4014216"/>
-            <a:ext cx="3282696" cy="708660"/>
-          </a:xfrm>
-          <a:prstGeom prst="rect">
-            <a:avLst/>
-          </a:prstGeom>
-          <a:noFill/>
-        </p:spPr>
-        <p:txBody>
-          <a:bodyPr wrap="square" anchor="t" lIns="25400" tIns="0">
-            <a:spAutoFit/>
-          </a:bodyPr>
-          <a:lstStyle/>
-          <a:p>
-            <a:pPr>
-              <a:lnSpc>
-                <a:spcPct val="112000"/>
-              </a:lnSpc>
-              <a:spcAft>
-                <a:spcPts val="200"/>
-              </a:spcAft>
-            </a:pPr>
-            <a:r>
-              <a:rPr sz="1300" b="0">
-                <a:solidFill>
-                  <a:srgbClr val="1C202C"/>
-                </a:solidFill>
-                <a:latin typeface="微软雅黑"/>
-                <ns7:rFonts xmlns:ns7="http://schemas.openxmlformats.org/wordprocessingml/2006/main" ns7:eastAsia="微软雅黑" ns7:ascii="微软雅黑" ns7:hAnsi="微软雅黑"/>
-              </a:rPr>
-              <a:t>● 场景对准居家养老</a:t>
+              <a:t>真机</a:t>
             </a:r>
           </a:p>
         </p:txBody>
@@ -17432,18 +17384,18 @@
         </p:nvSpPr>
         <p:spPr>
           <a:xfrm>
-            <a:off x="4105656" y="1033272"/>
-            <a:ext cx="4727448" cy="3744468"/>
+            <a:off x="384048" y="3310128"/>
+            <a:ext cx="3657600" cy="384048"/>
           </a:xfrm>
           <a:prstGeom prst="rect">
             <a:avLst/>
           </a:prstGeom>
           <a:solidFill>
-            <a:srgbClr val="FFFFFF"/>
+            <a:srgbClr val="1E4082"/>
           </a:solidFill>
-          <a:ln w="9525">
+          <a:ln>
             <a:solidFill>
-              <a:srgbClr val="BAC8DC"/>
+              <a:srgbClr val="648CC8"/>
             </a:solidFill>
           </a:ln>
         </p:spPr>
@@ -17471,20 +17423,55 @@
       </p:sp>
       <p:sp>
         <p:nvSpPr>
-          <p:cNvPr id="16" name="Rectangle 15"/>
+          <p:cNvPr id="16" name="TextBox 15"/>
+          <p:cNvSpPr txBox="1"/>
+          <p:nvPr/>
+        </p:nvSpPr>
+        <p:spPr>
+          <a:xfrm>
+            <a:off x="502920" y="3383280"/>
+            <a:ext cx="3429000" cy="256032"/>
+          </a:xfrm>
+          <a:prstGeom prst="rect">
+            <a:avLst/>
+          </a:prstGeom>
+          <a:noFill/>
+        </p:spPr>
+        <p:txBody>
+          <a:bodyPr wrap="none">
+            <a:spAutoFit/>
+          </a:bodyPr>
+          <a:lstStyle/>
+          <a:p>
+            <a:r>
+              <a:rPr sz="1100" b="0">
+                <a:solidFill>
+                  <a:srgbClr val="E2E8F0"/>
+                </a:solidFill>
+                <a:latin typeface="微软雅黑"/>
+                <ns7:rFonts xmlns:ns7="http://schemas.openxmlformats.org/wordprocessingml/2006/main" ns7:eastAsia="微软雅黑" ns7:ascii="微软雅黑" ns7:hAnsi="微软雅黑"/>
+              </a:rPr>
+              <a:t>软著</a:t>
+            </a:r>
+          </a:p>
+        </p:txBody>
+      </p:sp>
+      <p:sp>
+        <p:nvSpPr>
+          <p:cNvPr id="17" name="Rectangle 16"/>
           <p:cNvSpPr/>
           <p:nvPr/>
         </p:nvSpPr>
         <p:spPr>
           <a:xfrm>
-            <a:off x="3968496" y="996696"/>
-            <a:ext cx="10972" cy="3854196"/>
+            <a:off x="4343400" y="420624"/>
+            <a:ext cx="4800600" cy="4430268"/>
           </a:xfrm>
           <a:prstGeom prst="rect">
             <a:avLst/>
           </a:prstGeom>
           <a:solidFill>
-            <a:srgbClr val="BAC8DC"/>
+            <a:srgbClr val="F1F7FF"/>
           </a:solidFill>
           <a:ln>
             <a:noFill/>
@@ -17514,14 +17501,14 @@
       </p:sp>
       <p:sp>
         <p:nvSpPr>
-          <p:cNvPr id="17" name="Rectangle 16"/>
+          <p:cNvPr id="18" name="Rectangle 17"/>
           <p:cNvSpPr/>
           <p:nvPr/>
         </p:nvSpPr>
         <p:spPr>
           <a:xfrm>
-            <a:off x="4308652" y="1202355"/>
-            <a:ext cx="4321454" cy="3113692"/>
+            <a:off x="4503008" y="1719518"/>
+            <a:ext cx="4481382" cy="2371975"/>
           </a:xfrm>
           <a:prstGeom prst="rect">
             <a:avLst/>
@@ -17559,7 +17546,7 @@
       </p:sp>
       <p:pic>
         <p:nvPicPr>
-          <p:cNvPr id="18" name="Picture 17" descr="innovation_radar.png"/>
+          <p:cNvPr id="19" name="Picture 18" descr="ppt_full_dashboard.png"/>
           <p:cNvPicPr>
             <a:picLocks noChangeAspect="1"/>
           </p:cNvPicPr>
@@ -17573,50 +17560,14 @@
         </p:blipFill>
         <p:spPr>
           <a:xfrm>
-            <a:off x="4345228" y="1238931"/>
-            <a:ext cx="4248302" cy="3040540"/>
+            <a:off x="4539584" y="1756094"/>
+            <a:ext cx="4408230" cy="2298823"/>
           </a:xfrm>
           <a:prstGeom prst="rect">
             <a:avLst/>
           </a:prstGeom>
         </p:spPr>
       </p:pic>
-      <p:sp>
-        <p:nvSpPr>
-          <p:cNvPr id="19" name="TextBox 18"/>
-          <p:cNvSpPr txBox="1"/>
-          <p:nvPr/>
-        </p:nvSpPr>
-        <p:spPr>
-          <a:xfrm>
-            <a:off x="4160520" y="4521708"/>
-            <a:ext cx="4617720" cy="219456"/>
-          </a:xfrm>
-          <a:prstGeom prst="rect">
-            <a:avLst/>
-          </a:prstGeom>
-          <a:noFill/>
-        </p:spPr>
-        <p:txBody>
-          <a:bodyPr wrap="square" anchor="ctr">
-            <a:spAutoFit/>
-          </a:bodyPr>
-          <a:lstStyle/>
-          <a:p>
-            <a:pPr algn="ctr"/>
-            <a:r>
-              <a:rPr sz="800" b="0">
-                <a:solidFill>
-                  <a:srgbClr val="5A6273"/>
-                </a:solidFill>
-                <a:latin typeface="微软雅黑"/>
-                <ns8:rFonts xmlns:ns8="http://schemas.openxmlformats.org/wordprocessingml/2006/main" ns8:eastAsia="微软雅黑" ns8:ascii="微软雅黑" ns8:hAnsi="微软雅黑"/>
-              </a:rPr>
-              <a:t>实验结果</a:t>
-            </a:r>
-          </a:p>
-        </p:txBody>
-      </p:sp>
     </p:spTree>
   </p:cSld>
   <p:clrMapOvr>
@@ -17831,7 +17782,7 @@
                 <a:latin typeface="微软雅黑"/>
                 <ns2:rFonts xmlns:ns2="http://schemas.openxmlformats.org/wordprocessingml/2006/main" ns2:eastAsia="微软雅黑" ns2:ascii="微软雅黑" ns2:hAnsi="微软雅黑"/>
               </a:rPr>
-              <a:t>后面打算做什么</a:t>
+              <a:t>创新点</a:t>
             </a:r>
           </a:p>
         </p:txBody>
@@ -18005,7 +17956,7 @@
                 <a:latin typeface="微软雅黑"/>
                 <ns3:rFonts xmlns:ns3="http://schemas.openxmlformats.org/wordprocessingml/2006/main" ns3:eastAsia="微软雅黑" ns3:ascii="微软雅黑" ns3:hAnsi="微软雅黑"/>
               </a:rPr>
-              <a:t>● 对接 Unitree 等人形真机</a:t>
+              <a:t>● 多路信号融合，结果能解释</a:t>
             </a:r>
           </a:p>
         </p:txBody>
@@ -18048,7 +17999,7 @@
                 <a:latin typeface="微软雅黑"/>
                 <ns4:rFonts xmlns:ns4="http://schemas.openxmlformats.org/wordprocessingml/2006/main" ns4:eastAsia="微软雅黑" ns4:ascii="微软雅黑" ns4:hAnsi="微软雅黑"/>
               </a:rPr>
-              <a:t>● 补充公开跌倒数据集</a:t>
+              <a:t>● 紧急态在状态机里优先级最高</a:t>
             </a:r>
           </a:p>
         </p:txBody>
@@ -18091,7 +18042,7 @@
                 <a:latin typeface="微软雅黑"/>
                 <ns5:rFonts xmlns:ns5="http://schemas.openxmlformats.org/wordprocessingml/2006/main" ns5:eastAsia="微软雅黑" ns5:ascii="微软雅黑" ns5:hAnsi="微软雅黑"/>
               </a:rPr>
-              <a:t>● 做多房间、弱光等复杂场景</a:t>
+              <a:t>● 视觉用 MediaPipe，不是纯参数滑块</a:t>
             </a:r>
           </a:p>
         </p:txBody>
@@ -18134,7 +18085,7 @@
                 <a:latin typeface="微软雅黑"/>
                 <ns6:rFonts xmlns:ns6="http://schemas.openxmlformats.org/wordprocessingml/2006/main" ns6:eastAsia="微软雅黑" ns6:ascii="微软雅黑" ns6:hAnsi="微软雅黑"/>
               </a:rPr>
-              <a:t>● 去养老院做访谈和试用</a:t>
+              <a:t>● 代码和评测脚本都开源</a:t>
             </a:r>
           </a:p>
         </p:txBody>
@@ -18177,7 +18128,7 @@
                 <a:latin typeface="微软雅黑"/>
                 <ns7:rFonts xmlns:ns7="http://schemas.openxmlformats.org/wordprocessingml/2006/main" ns7:eastAsia="微软雅黑" ns7:ascii="微软雅黑" ns7:hAnsi="微软雅黑"/>
               </a:rPr>
-              <a:t>● 软著和专利在准备</a:t>
+              <a:t>● 场景对准居家养老</a:t>
             </a:r>
           </a:p>
         </p:txBody>
@@ -18278,8 +18229,8 @@
         </p:nvSpPr>
         <p:spPr>
           <a:xfrm>
-            <a:off x="4308652" y="1186781"/>
-            <a:ext cx="4321454" cy="3144841"/>
+            <a:off x="4308652" y="1202355"/>
+            <a:ext cx="4321454" cy="3113692"/>
           </a:xfrm>
           <a:prstGeom prst="rect">
             <a:avLst/>
@@ -18317,7 +18268,7 @@
       </p:sp>
       <p:pic>
         <p:nvPicPr>
-          <p:cNvPr id="18" name="Picture 17" descr="roadmap_gantt.png"/>
+          <p:cNvPr id="18" name="Picture 17" descr="innovation_radar.png"/>
           <p:cNvPicPr>
             <a:picLocks noChangeAspect="1"/>
           </p:cNvPicPr>
@@ -18331,8 +18282,8 @@
         </p:blipFill>
         <p:spPr>
           <a:xfrm>
-            <a:off x="4345228" y="1223357"/>
-            <a:ext cx="4248302" cy="3071689"/>
+            <a:off x="4345228" y="1238931"/>
+            <a:ext cx="4248302" cy="3040540"/>
           </a:xfrm>
           <a:prstGeom prst="rect">
             <a:avLst/>
@@ -18370,7 +18321,7 @@
                 <a:latin typeface="微软雅黑"/>
                 <ns8:rFonts xmlns:ns8="http://schemas.openxmlformats.org/wordprocessingml/2006/main" ns8:eastAsia="微软雅黑" ns8:ascii="微软雅黑" ns8:hAnsi="微软雅黑"/>
               </a:rPr>
-              <a:t>里程碑甘特图（示意）</a:t>
+              <a:t>实验结果</a:t>
             </a:r>
           </a:p>
         </p:txBody>
@@ -19759,7 +19710,7 @@
                 <a:latin typeface="微软雅黑"/>
                 <ns2:rFonts xmlns:ns2="http://schemas.openxmlformats.org/wordprocessingml/2006/main" ns2:eastAsia="微软雅黑" ns2:ascii="微软雅黑" ns2:hAnsi="微软雅黑"/>
               </a:rPr>
-              <a:t>参考资料</a:t>
+              <a:t>后面打算做什么</a:t>
             </a:r>
           </a:p>
         </p:txBody>
@@ -19809,14 +19760,102 @@
       </p:sp>
       <p:sp>
         <p:nvSpPr>
-          <p:cNvPr id="8" name="TextBox 7"/>
+          <p:cNvPr id="8" name="Rectangle 7"/>
+          <p:cNvSpPr/>
+          <p:nvPr/>
+        </p:nvSpPr>
+        <p:spPr>
+          <a:xfrm>
+            <a:off x="274320" y="996696"/>
+            <a:ext cx="3611880" cy="3854196"/>
+          </a:xfrm>
+          <a:prstGeom prst="rect">
+            <a:avLst/>
+          </a:prstGeom>
+          <a:solidFill>
+            <a:srgbClr val="F1F7FF"/>
+          </a:solidFill>
+          <a:ln w="10160">
+            <a:solidFill>
+              <a:srgbClr val="BAC8DC"/>
+            </a:solidFill>
+          </a:ln>
+        </p:spPr>
+        <p:style>
+          <a:lnRef idx="1">
+            <a:schemeClr val="accent1"/>
+          </a:lnRef>
+          <a:fillRef idx="3">
+            <a:schemeClr val="accent1"/>
+          </a:fillRef>
+          <a:effectRef idx="2">
+            <a:schemeClr val="accent1"/>
+          </a:effectRef>
+          <a:fontRef idx="minor">
+            <a:schemeClr val="lt1"/>
+          </a:fontRef>
+        </p:style>
+        <p:txBody>
+          <a:bodyPr rtlCol="0" anchor="ctr"/>
+          <a:lstStyle/>
+          <a:p>
+            <a:pPr algn="ctr"/>
+          </a:p>
+        </p:txBody>
+      </p:sp>
+      <p:sp>
+        <p:nvSpPr>
+          <p:cNvPr id="9" name="Rectangle 8"/>
+          <p:cNvSpPr/>
+          <p:nvPr/>
+        </p:nvSpPr>
+        <p:spPr>
+          <a:xfrm>
+            <a:off x="274320" y="996696"/>
+            <a:ext cx="73152" cy="3854196"/>
+          </a:xfrm>
+          <a:prstGeom prst="rect">
+            <a:avLst/>
+          </a:prstGeom>
+          <a:solidFill>
+            <a:srgbClr val="143278"/>
+          </a:solidFill>
+          <a:ln>
+            <a:noFill/>
+          </a:ln>
+        </p:spPr>
+        <p:style>
+          <a:lnRef idx="1">
+            <a:schemeClr val="accent1"/>
+          </a:lnRef>
+          <a:fillRef idx="3">
+            <a:schemeClr val="accent1"/>
+          </a:fillRef>
+          <a:effectRef idx="2">
+            <a:schemeClr val="accent1"/>
+          </a:effectRef>
+          <a:fontRef idx="minor">
+            <a:schemeClr val="lt1"/>
+          </a:fontRef>
+        </p:style>
+        <p:txBody>
+          <a:bodyPr rtlCol="0" anchor="ctr"/>
+          <a:lstStyle/>
+          <a:p>
+            <a:pPr algn="ctr"/>
+          </a:p>
+        </p:txBody>
+      </p:sp>
+      <p:sp>
+        <p:nvSpPr>
+          <p:cNvPr id="10" name="TextBox 9"/>
           <p:cNvSpPr txBox="1"/>
           <p:nvPr/>
         </p:nvSpPr>
         <p:spPr>
           <a:xfrm>
-            <a:off x="502920" y="1234440"/>
-            <a:ext cx="8138160" cy="3200400"/>
+            <a:off x="438912" y="1106424"/>
+            <a:ext cx="3282696" cy="708660"/>
           </a:xfrm>
           <a:prstGeom prst="rect">
             <a:avLst/>
@@ -19824,14 +19863,17 @@
           <a:noFill/>
         </p:spPr>
         <p:txBody>
-          <a:bodyPr wrap="none">
+          <a:bodyPr wrap="square" anchor="t" lIns="25400" tIns="0">
             <a:spAutoFit/>
           </a:bodyPr>
           <a:lstStyle/>
           <a:p>
             <a:pPr>
+              <a:lnSpc>
+                <a:spcPct val="112000"/>
+              </a:lnSpc>
               <a:spcAft>
-                <a:spcPts val="1000"/>
+                <a:spcPts val="200"/>
               </a:spcAft>
             </a:pPr>
             <a:r>
@@ -19842,13 +19884,39 @@
                 <a:latin typeface="微软雅黑"/>
                 <ns3:rFonts xmlns:ns3="http://schemas.openxmlformats.org/wordprocessingml/2006/main" ns3:eastAsia="微软雅黑" ns3:ascii="微软雅黑" ns3:hAnsi="微软雅黑"/>
               </a:rPr>
-              <a:t>[1] Google MediaPipe Pose 技术文档</a:t>
-            </a:r>
-          </a:p>
+              <a:t>● 对接 Unitree 等人形真机</a:t>
+            </a:r>
+          </a:p>
+        </p:txBody>
+      </p:sp>
+      <p:sp>
+        <p:nvSpPr>
+          <p:cNvPr id="11" name="TextBox 10"/>
+          <p:cNvSpPr txBox="1"/>
+          <p:nvPr/>
+        </p:nvSpPr>
+        <p:spPr>
+          <a:xfrm>
+            <a:off x="438912" y="1833372"/>
+            <a:ext cx="3282696" cy="708660"/>
+          </a:xfrm>
+          <a:prstGeom prst="rect">
+            <a:avLst/>
+          </a:prstGeom>
+          <a:noFill/>
+        </p:spPr>
+        <p:txBody>
+          <a:bodyPr wrap="square" anchor="t" lIns="25400" tIns="0">
+            <a:spAutoFit/>
+          </a:bodyPr>
+          <a:lstStyle/>
           <a:p>
             <a:pPr>
+              <a:lnSpc>
+                <a:spcPct val="112000"/>
+              </a:lnSpc>
               <a:spcAft>
-                <a:spcPts val="1000"/>
+                <a:spcPts val="200"/>
               </a:spcAft>
             </a:pPr>
             <a:r>
@@ -19859,13 +19927,39 @@
                 <a:latin typeface="微软雅黑"/>
                 <ns4:rFonts xmlns:ns4="http://schemas.openxmlformats.org/wordprocessingml/2006/main" ns4:eastAsia="微软雅黑" ns4:ascii="微软雅黑" ns4:hAnsi="微软雅黑"/>
               </a:rPr>
-              <a:t>[2] Unitree / ROS2 开发文档</a:t>
-            </a:r>
-          </a:p>
+              <a:t>● 补充公开跌倒数据集</a:t>
+            </a:r>
+          </a:p>
+        </p:txBody>
+      </p:sp>
+      <p:sp>
+        <p:nvSpPr>
+          <p:cNvPr id="12" name="TextBox 11"/>
+          <p:cNvSpPr txBox="1"/>
+          <p:nvPr/>
+        </p:nvSpPr>
+        <p:spPr>
+          <a:xfrm>
+            <a:off x="438912" y="2560320"/>
+            <a:ext cx="3282696" cy="708660"/>
+          </a:xfrm>
+          <a:prstGeom prst="rect">
+            <a:avLst/>
+          </a:prstGeom>
+          <a:noFill/>
+        </p:spPr>
+        <p:txBody>
+          <a:bodyPr wrap="square" anchor="t" lIns="25400" tIns="0">
+            <a:spAutoFit/>
+          </a:bodyPr>
+          <a:lstStyle/>
           <a:p>
             <a:pPr>
+              <a:lnSpc>
+                <a:spcPct val="112000"/>
+              </a:lnSpc>
               <a:spcAft>
-                <a:spcPts val="1000"/>
+                <a:spcPts val="200"/>
               </a:spcAft>
             </a:pPr>
             <a:r>
@@ -19876,13 +19970,39 @@
                 <a:latin typeface="微软雅黑"/>
                 <ns5:rFonts xmlns:ns5="http://schemas.openxmlformats.org/wordprocessingml/2006/main" ns5:eastAsia="微软雅黑" ns5:ascii="微软雅黑" ns5:hAnsi="微软雅黑"/>
               </a:rPr>
-              <a:t>[3] 「十四五」国家老龄事业发展规划</a:t>
-            </a:r>
-          </a:p>
+              <a:t>● 做多房间、弱光等复杂场景</a:t>
+            </a:r>
+          </a:p>
+        </p:txBody>
+      </p:sp>
+      <p:sp>
+        <p:nvSpPr>
+          <p:cNvPr id="13" name="TextBox 12"/>
+          <p:cNvSpPr txBox="1"/>
+          <p:nvPr/>
+        </p:nvSpPr>
+        <p:spPr>
+          <a:xfrm>
+            <a:off x="438912" y="3287268"/>
+            <a:ext cx="3282696" cy="708660"/>
+          </a:xfrm>
+          <a:prstGeom prst="rect">
+            <a:avLst/>
+          </a:prstGeom>
+          <a:noFill/>
+        </p:spPr>
+        <p:txBody>
+          <a:bodyPr wrap="square" anchor="t" lIns="25400" tIns="0">
+            <a:spAutoFit/>
+          </a:bodyPr>
+          <a:lstStyle/>
           <a:p>
             <a:pPr>
+              <a:lnSpc>
+                <a:spcPct val="112000"/>
+              </a:lnSpc>
               <a:spcAft>
-                <a:spcPts val="1000"/>
+                <a:spcPts val="200"/>
               </a:spcAft>
             </a:pPr>
             <a:r>
@@ -19893,13 +20013,39 @@
                 <a:latin typeface="微软雅黑"/>
                 <ns6:rFonts xmlns:ns6="http://schemas.openxmlformats.org/wordprocessingml/2006/main" ns6:eastAsia="微软雅黑" ns6:ascii="微软雅黑" ns6:hAnsi="微软雅黑"/>
               </a:rPr>
-              <a:t>[4] 项目技术报告 docs/TECHNICAL_REPORT.md</a:t>
-            </a:r>
-          </a:p>
+              <a:t>● 去养老院做访谈和试用</a:t>
+            </a:r>
+          </a:p>
+        </p:txBody>
+      </p:sp>
+      <p:sp>
+        <p:nvSpPr>
+          <p:cNvPr id="14" name="TextBox 13"/>
+          <p:cNvSpPr txBox="1"/>
+          <p:nvPr/>
+        </p:nvSpPr>
+        <p:spPr>
+          <a:xfrm>
+            <a:off x="438912" y="4014216"/>
+            <a:ext cx="3282696" cy="708660"/>
+          </a:xfrm>
+          <a:prstGeom prst="rect">
+            <a:avLst/>
+          </a:prstGeom>
+          <a:noFill/>
+        </p:spPr>
+        <p:txBody>
+          <a:bodyPr wrap="square" anchor="t" lIns="25400" tIns="0">
+            <a:spAutoFit/>
+          </a:bodyPr>
+          <a:lstStyle/>
           <a:p>
             <a:pPr>
+              <a:lnSpc>
+                <a:spcPct val="112000"/>
+              </a:lnSpc>
               <a:spcAft>
-                <a:spcPts val="1000"/>
+                <a:spcPts val="200"/>
               </a:spcAft>
             </a:pPr>
             <a:r>
@@ -19910,7 +20056,200 @@
                 <a:latin typeface="微软雅黑"/>
                 <ns7:rFonts xmlns:ns7="http://schemas.openxmlformats.org/wordprocessingml/2006/main" ns7:eastAsia="微软雅黑" ns7:ascii="微软雅黑" ns7:hAnsi="微软雅黑"/>
               </a:rPr>
-              <a:t>[5] 源码 https://github.com/FBB123571/ElderCare-Humanoid-Platform</a:t>
+              <a:t>● 软著和专利在准备</a:t>
+            </a:r>
+          </a:p>
+        </p:txBody>
+      </p:sp>
+      <p:sp>
+        <p:nvSpPr>
+          <p:cNvPr id="15" name="Rectangle 14"/>
+          <p:cNvSpPr/>
+          <p:nvPr/>
+        </p:nvSpPr>
+        <p:spPr>
+          <a:xfrm>
+            <a:off x="4105656" y="1033272"/>
+            <a:ext cx="4727448" cy="3744468"/>
+          </a:xfrm>
+          <a:prstGeom prst="rect">
+            <a:avLst/>
+          </a:prstGeom>
+          <a:solidFill>
+            <a:srgbClr val="FFFFFF"/>
+          </a:solidFill>
+          <a:ln w="9525">
+            <a:solidFill>
+              <a:srgbClr val="BAC8DC"/>
+            </a:solidFill>
+          </a:ln>
+        </p:spPr>
+        <p:style>
+          <a:lnRef idx="1">
+            <a:schemeClr val="accent1"/>
+          </a:lnRef>
+          <a:fillRef idx="3">
+            <a:schemeClr val="accent1"/>
+          </a:fillRef>
+          <a:effectRef idx="2">
+            <a:schemeClr val="accent1"/>
+          </a:effectRef>
+          <a:fontRef idx="minor">
+            <a:schemeClr val="lt1"/>
+          </a:fontRef>
+        </p:style>
+        <p:txBody>
+          <a:bodyPr rtlCol="0" anchor="ctr"/>
+          <a:lstStyle/>
+          <a:p>
+            <a:pPr algn="ctr"/>
+          </a:p>
+        </p:txBody>
+      </p:sp>
+      <p:sp>
+        <p:nvSpPr>
+          <p:cNvPr id="16" name="Rectangle 15"/>
+          <p:cNvSpPr/>
+          <p:nvPr/>
+        </p:nvSpPr>
+        <p:spPr>
+          <a:xfrm>
+            <a:off x="3968496" y="996696"/>
+            <a:ext cx="10972" cy="3854196"/>
+          </a:xfrm>
+          <a:prstGeom prst="rect">
+            <a:avLst/>
+          </a:prstGeom>
+          <a:solidFill>
+            <a:srgbClr val="BAC8DC"/>
+          </a:solidFill>
+          <a:ln>
+            <a:noFill/>
+          </a:ln>
+        </p:spPr>
+        <p:style>
+          <a:lnRef idx="1">
+            <a:schemeClr val="accent1"/>
+          </a:lnRef>
+          <a:fillRef idx="3">
+            <a:schemeClr val="accent1"/>
+          </a:fillRef>
+          <a:effectRef idx="2">
+            <a:schemeClr val="accent1"/>
+          </a:effectRef>
+          <a:fontRef idx="minor">
+            <a:schemeClr val="lt1"/>
+          </a:fontRef>
+        </p:style>
+        <p:txBody>
+          <a:bodyPr rtlCol="0" anchor="ctr"/>
+          <a:lstStyle/>
+          <a:p>
+            <a:pPr algn="ctr"/>
+          </a:p>
+        </p:txBody>
+      </p:sp>
+      <p:sp>
+        <p:nvSpPr>
+          <p:cNvPr id="17" name="Rectangle 16"/>
+          <p:cNvSpPr/>
+          <p:nvPr/>
+        </p:nvSpPr>
+        <p:spPr>
+          <a:xfrm>
+            <a:off x="4308652" y="1186781"/>
+            <a:ext cx="4321454" cy="3144841"/>
+          </a:xfrm>
+          <a:prstGeom prst="rect">
+            <a:avLst/>
+          </a:prstGeom>
+          <a:solidFill>
+            <a:srgbClr val="FCFDFF"/>
+          </a:solidFill>
+          <a:ln w="7620">
+            <a:solidFill>
+              <a:srgbClr val="BAC8DC"/>
+            </a:solidFill>
+          </a:ln>
+        </p:spPr>
+        <p:style>
+          <a:lnRef idx="1">
+            <a:schemeClr val="accent1"/>
+          </a:lnRef>
+          <a:fillRef idx="3">
+            <a:schemeClr val="accent1"/>
+          </a:fillRef>
+          <a:effectRef idx="2">
+            <a:schemeClr val="accent1"/>
+          </a:effectRef>
+          <a:fontRef idx="minor">
+            <a:schemeClr val="lt1"/>
+          </a:fontRef>
+        </p:style>
+        <p:txBody>
+          <a:bodyPr rtlCol="0" anchor="ctr"/>
+          <a:lstStyle/>
+          <a:p>
+            <a:pPr algn="ctr"/>
+          </a:p>
+        </p:txBody>
+      </p:sp>
+      <p:pic>
+        <p:nvPicPr>
+          <p:cNvPr id="18" name="Picture 17" descr="roadmap_gantt.png"/>
+          <p:cNvPicPr>
+            <a:picLocks noChangeAspect="1"/>
+          </p:cNvPicPr>
+          <p:nvPr/>
+        </p:nvPicPr>
+        <p:blipFill>
+          <a:blip r:embed="rId2"/>
+          <a:stretch>
+            <a:fillRect/>
+          </a:stretch>
+        </p:blipFill>
+        <p:spPr>
+          <a:xfrm>
+            <a:off x="4345228" y="1223357"/>
+            <a:ext cx="4248302" cy="3071689"/>
+          </a:xfrm>
+          <a:prstGeom prst="rect">
+            <a:avLst/>
+          </a:prstGeom>
+        </p:spPr>
+      </p:pic>
+      <p:sp>
+        <p:nvSpPr>
+          <p:cNvPr id="19" name="TextBox 18"/>
+          <p:cNvSpPr txBox="1"/>
+          <p:nvPr/>
+        </p:nvSpPr>
+        <p:spPr>
+          <a:xfrm>
+            <a:off x="4160520" y="4521708"/>
+            <a:ext cx="4617720" cy="219456"/>
+          </a:xfrm>
+          <a:prstGeom prst="rect">
+            <a:avLst/>
+          </a:prstGeom>
+          <a:noFill/>
+        </p:spPr>
+        <p:txBody>
+          <a:bodyPr wrap="square" anchor="ctr">
+            <a:spAutoFit/>
+          </a:bodyPr>
+          <a:lstStyle/>
+          <a:p>
+            <a:pPr algn="ctr"/>
+            <a:r>
+              <a:rPr sz="800" b="0">
+                <a:solidFill>
+                  <a:srgbClr val="5A6273"/>
+                </a:solidFill>
+                <a:latin typeface="微软雅黑"/>
+                <ns8:rFonts xmlns:ns8="http://schemas.openxmlformats.org/wordprocessingml/2006/main" ns8:eastAsia="微软雅黑" ns8:ascii="微软雅黑" ns8:hAnsi="微软雅黑"/>
+              </a:rPr>
+              <a:t>里程碑甘特图（示意）</a:t>
             </a:r>
           </a:p>
         </p:txBody>
@@ -20129,7 +20468,7 @@
                 <a:latin typeface="微软雅黑"/>
                 <ns2:rFonts xmlns:ns2="http://schemas.openxmlformats.org/wordprocessingml/2006/main" ns2:eastAsia="微软雅黑" ns2:ascii="微软雅黑" ns2:hAnsi="微软雅黑"/>
               </a:rPr>
-              <a:t>扫码查看代码与演示视频</a:t>
+              <a:t>参考资料</a:t>
             </a:r>
           </a:p>
         </p:txBody>
@@ -20179,102 +20518,14 @@
       </p:sp>
       <p:sp>
         <p:nvSpPr>
-          <p:cNvPr id="8" name="Rectangle 7"/>
-          <p:cNvSpPr/>
-          <p:nvPr/>
-        </p:nvSpPr>
-        <p:spPr>
-          <a:xfrm>
-            <a:off x="274320" y="996696"/>
-            <a:ext cx="3611880" cy="3854196"/>
-          </a:xfrm>
-          <a:prstGeom prst="rect">
-            <a:avLst/>
-          </a:prstGeom>
-          <a:solidFill>
-            <a:srgbClr val="F1F7FF"/>
-          </a:solidFill>
-          <a:ln w="10160">
-            <a:solidFill>
-              <a:srgbClr val="BAC8DC"/>
-            </a:solidFill>
-          </a:ln>
-        </p:spPr>
-        <p:style>
-          <a:lnRef idx="1">
-            <a:schemeClr val="accent1"/>
-          </a:lnRef>
-          <a:fillRef idx="3">
-            <a:schemeClr val="accent1"/>
-          </a:fillRef>
-          <a:effectRef idx="2">
-            <a:schemeClr val="accent1"/>
-          </a:effectRef>
-          <a:fontRef idx="minor">
-            <a:schemeClr val="lt1"/>
-          </a:fontRef>
-        </p:style>
-        <p:txBody>
-          <a:bodyPr rtlCol="0" anchor="ctr"/>
-          <a:lstStyle/>
-          <a:p>
-            <a:pPr algn="ctr"/>
-          </a:p>
-        </p:txBody>
-      </p:sp>
-      <p:sp>
-        <p:nvSpPr>
-          <p:cNvPr id="9" name="Rectangle 8"/>
-          <p:cNvSpPr/>
-          <p:nvPr/>
-        </p:nvSpPr>
-        <p:spPr>
-          <a:xfrm>
-            <a:off x="274320" y="996696"/>
-            <a:ext cx="73152" cy="3854196"/>
-          </a:xfrm>
-          <a:prstGeom prst="rect">
-            <a:avLst/>
-          </a:prstGeom>
-          <a:solidFill>
-            <a:srgbClr val="143278"/>
-          </a:solidFill>
-          <a:ln>
-            <a:noFill/>
-          </a:ln>
-        </p:spPr>
-        <p:style>
-          <a:lnRef idx="1">
-            <a:schemeClr val="accent1"/>
-          </a:lnRef>
-          <a:fillRef idx="3">
-            <a:schemeClr val="accent1"/>
-          </a:fillRef>
-          <a:effectRef idx="2">
-            <a:schemeClr val="accent1"/>
-          </a:effectRef>
-          <a:fontRef idx="minor">
-            <a:schemeClr val="lt1"/>
-          </a:fontRef>
-        </p:style>
-        <p:txBody>
-          <a:bodyPr rtlCol="0" anchor="ctr"/>
-          <a:lstStyle/>
-          <a:p>
-            <a:pPr algn="ctr"/>
-          </a:p>
-        </p:txBody>
-      </p:sp>
-      <p:sp>
-        <p:nvSpPr>
-          <p:cNvPr id="10" name="TextBox 9"/>
+          <p:cNvPr id="8" name="TextBox 7"/>
           <p:cNvSpPr txBox="1"/>
           <p:nvPr/>
         </p:nvSpPr>
         <p:spPr>
           <a:xfrm>
-            <a:off x="438912" y="1106424"/>
-            <a:ext cx="3282696" cy="890397"/>
+            <a:off x="502920" y="1234440"/>
+            <a:ext cx="8138160" cy="3200400"/>
           </a:xfrm>
           <a:prstGeom prst="rect">
             <a:avLst/>
@@ -20282,17 +20533,14 @@
           <a:noFill/>
         </p:spPr>
         <p:txBody>
-          <a:bodyPr wrap="square" anchor="t" lIns="25400" tIns="0">
+          <a:bodyPr wrap="none">
             <a:spAutoFit/>
           </a:bodyPr>
           <a:lstStyle/>
           <a:p>
             <a:pPr>
-              <a:lnSpc>
-                <a:spcPct val="112000"/>
-              </a:lnSpc>
               <a:spcAft>
-                <a:spcPts val="200"/>
+                <a:spcPts val="1000"/>
               </a:spcAft>
             </a:pPr>
             <a:r>
@@ -20303,39 +20551,13 @@
                 <a:latin typeface="微软雅黑"/>
                 <ns3:rFonts xmlns:ns3="http://schemas.openxmlformats.org/wordprocessingml/2006/main" ns3:eastAsia="微软雅黑" ns3:ascii="微软雅黑" ns3:hAnsi="微软雅黑"/>
               </a:rPr>
-              <a:t>● GitHub 完整源码与文档</a:t>
-            </a:r>
-          </a:p>
-        </p:txBody>
-      </p:sp>
-      <p:sp>
-        <p:nvSpPr>
-          <p:cNvPr id="11" name="TextBox 10"/>
-          <p:cNvSpPr txBox="1"/>
-          <p:nvPr/>
-        </p:nvSpPr>
-        <p:spPr>
-          <a:xfrm>
-            <a:off x="438912" y="2015109"/>
-            <a:ext cx="3282696" cy="890397"/>
-          </a:xfrm>
-          <a:prstGeom prst="rect">
-            <a:avLst/>
-          </a:prstGeom>
-          <a:noFill/>
-        </p:spPr>
-        <p:txBody>
-          <a:bodyPr wrap="square" anchor="t" lIns="25400" tIns="0">
-            <a:spAutoFit/>
-          </a:bodyPr>
-          <a:lstStyle/>
+              <a:t>[1] Google MediaPipe Pose 技术文档</a:t>
+            </a:r>
+          </a:p>
           <a:p>
             <a:pPr>
-              <a:lnSpc>
-                <a:spcPct val="112000"/>
-              </a:lnSpc>
               <a:spcAft>
-                <a:spcPts val="200"/>
+                <a:spcPts val="1000"/>
               </a:spcAft>
             </a:pPr>
             <a:r>
@@ -20346,39 +20568,13 @@
                 <a:latin typeface="微软雅黑"/>
                 <ns4:rFonts xmlns:ns4="http://schemas.openxmlformats.org/wordprocessingml/2006/main" ns4:eastAsia="微软雅黑" ns4:ascii="微软雅黑" ns4:hAnsi="微软雅黑"/>
               </a:rPr>
-              <a:t>● 在线 Web 演示（现场可复现）</a:t>
-            </a:r>
-          </a:p>
-        </p:txBody>
-      </p:sp>
-      <p:sp>
-        <p:nvSpPr>
-          <p:cNvPr id="12" name="TextBox 11"/>
-          <p:cNvSpPr txBox="1"/>
-          <p:nvPr/>
-        </p:nvSpPr>
-        <p:spPr>
-          <a:xfrm>
-            <a:off x="438912" y="2923794"/>
-            <a:ext cx="3282696" cy="890397"/>
-          </a:xfrm>
-          <a:prstGeom prst="rect">
-            <a:avLst/>
-          </a:prstGeom>
-          <a:noFill/>
-        </p:spPr>
-        <p:txBody>
-          <a:bodyPr wrap="square" anchor="t" lIns="25400" tIns="0">
-            <a:spAutoFit/>
-          </a:bodyPr>
-          <a:lstStyle/>
+              <a:t>[2] Unitree / ROS2 开发文档</a:t>
+            </a:r>
+          </a:p>
           <a:p>
             <a:pPr>
-              <a:lnSpc>
-                <a:spcPct val="112000"/>
-              </a:lnSpc>
               <a:spcAft>
-                <a:spcPts val="200"/>
+                <a:spcPts val="1000"/>
               </a:spcAft>
             </a:pPr>
             <a:r>
@@ -20389,39 +20585,13 @@
                 <a:latin typeface="微软雅黑"/>
                 <ns5:rFonts xmlns:ns5="http://schemas.openxmlformats.org/wordprocessingml/2006/main" ns5:eastAsia="微软雅黑" ns5:ascii="微软雅黑" ns5:hAnsi="微软雅黑"/>
               </a:rPr>
-              <a:t>● 演示录像已附仓库</a:t>
-            </a:r>
-          </a:p>
-        </p:txBody>
-      </p:sp>
-      <p:sp>
-        <p:nvSpPr>
-          <p:cNvPr id="13" name="TextBox 12"/>
-          <p:cNvSpPr txBox="1"/>
-          <p:nvPr/>
-        </p:nvSpPr>
-        <p:spPr>
-          <a:xfrm>
-            <a:off x="438912" y="3832479"/>
-            <a:ext cx="3282696" cy="890397"/>
-          </a:xfrm>
-          <a:prstGeom prst="rect">
-            <a:avLst/>
-          </a:prstGeom>
-          <a:noFill/>
-        </p:spPr>
-        <p:txBody>
-          <a:bodyPr wrap="square" anchor="t" lIns="25400" tIns="0">
-            <a:spAutoFit/>
-          </a:bodyPr>
-          <a:lstStyle/>
+              <a:t>[3] 「十四五」国家老龄事业发展规划</a:t>
+            </a:r>
+          </a:p>
           <a:p>
             <a:pPr>
-              <a:lnSpc>
-                <a:spcPct val="112000"/>
-              </a:lnSpc>
               <a:spcAft>
-                <a:spcPts val="200"/>
+                <a:spcPts val="1000"/>
               </a:spcAft>
             </a:pPr>
             <a:r>
@@ -20432,172 +20602,24 @@
                 <a:latin typeface="微软雅黑"/>
                 <ns6:rFonts xmlns:ns6="http://schemas.openxmlformats.org/wordprocessingml/2006/main" ns6:eastAsia="微软雅黑" ns6:ascii="微软雅黑" ns6:hAnsi="微软雅黑"/>
               </a:rPr>
-              <a:t>● 欢迎评委扫码查阅</a:t>
-            </a:r>
-          </a:p>
-        </p:txBody>
-      </p:sp>
-      <p:sp>
-        <p:nvSpPr>
-          <p:cNvPr id="14" name="Rectangle 13"/>
-          <p:cNvSpPr/>
-          <p:nvPr/>
-        </p:nvSpPr>
-        <p:spPr>
-          <a:xfrm>
-            <a:off x="4105656" y="1033272"/>
-            <a:ext cx="4727448" cy="3744468"/>
-          </a:xfrm>
-          <a:prstGeom prst="rect">
-            <a:avLst/>
-          </a:prstGeom>
-          <a:solidFill>
-            <a:srgbClr val="FFFFFF"/>
-          </a:solidFill>
-          <a:ln w="9525">
-            <a:solidFill>
-              <a:srgbClr val="BAC8DC"/>
-            </a:solidFill>
-          </a:ln>
-        </p:spPr>
-        <p:style>
-          <a:lnRef idx="1">
-            <a:schemeClr val="accent1"/>
-          </a:lnRef>
-          <a:fillRef idx="3">
-            <a:schemeClr val="accent1"/>
-          </a:fillRef>
-          <a:effectRef idx="2">
-            <a:schemeClr val="accent1"/>
-          </a:effectRef>
-          <a:fontRef idx="minor">
-            <a:schemeClr val="lt1"/>
-          </a:fontRef>
-        </p:style>
-        <p:txBody>
-          <a:bodyPr rtlCol="0" anchor="ctr"/>
-          <a:lstStyle/>
-          <a:p>
-            <a:pPr algn="ctr"/>
-          </a:p>
-        </p:txBody>
-      </p:sp>
-      <p:pic>
-        <p:nvPicPr>
-          <p:cNvPr id="15" name="Picture 14" descr="ppt_demo_qr.png"/>
-          <p:cNvPicPr>
-            <a:picLocks noChangeAspect="1"/>
-          </p:cNvPicPr>
-          <p:nvPr/>
-        </p:nvPicPr>
-        <p:blipFill>
-          <a:blip r:embed="rId2"/>
-          <a:stretch>
-            <a:fillRect/>
-          </a:stretch>
-        </p:blipFill>
-        <p:spPr>
-          <a:xfrm>
-            <a:off x="4193804" y="1987814"/>
-            <a:ext cx="1597639" cy="1597639"/>
-          </a:xfrm>
-          <a:prstGeom prst="rect">
-            <a:avLst/>
-          </a:prstGeom>
-        </p:spPr>
-      </p:pic>
-      <p:sp>
-        <p:nvSpPr>
-          <p:cNvPr id="16" name="TextBox 15"/>
-          <p:cNvSpPr txBox="1"/>
-          <p:nvPr/>
-        </p:nvSpPr>
-        <p:spPr>
-          <a:xfrm>
-            <a:off x="4160520" y="3640317"/>
-            <a:ext cx="1664208" cy="219456"/>
-          </a:xfrm>
-          <a:prstGeom prst="rect">
-            <a:avLst/>
-          </a:prstGeom>
-          <a:noFill/>
-        </p:spPr>
-        <p:txBody>
-          <a:bodyPr wrap="square" anchor="ctr">
-            <a:spAutoFit/>
-          </a:bodyPr>
-          <a:lstStyle/>
-          <a:p>
-            <a:pPr algn="ctr"/>
-            <a:r>
-              <a:rPr sz="900" b="0">
-                <a:solidFill>
-                  <a:srgbClr val="5A6273"/>
+              <a:t>[4] 项目技术报告 docs/TECHNICAL_REPORT.md</a:t>
+            </a:r>
+          </a:p>
+          <a:p>
+            <a:pPr>
+              <a:spcAft>
+                <a:spcPts val="1000"/>
+              </a:spcAft>
+            </a:pPr>
+            <a:r>
+              <a:rPr sz="1300" b="0">
+                <a:solidFill>
+                  <a:srgbClr val="1C202C"/>
                 </a:solidFill>
                 <a:latin typeface="微软雅黑"/>
                 <ns7:rFonts xmlns:ns7="http://schemas.openxmlformats.org/wordprocessingml/2006/main" ns7:eastAsia="微软雅黑" ns7:ascii="微软雅黑" ns7:hAnsi="微软雅黑"/>
               </a:rPr>
-              <a:t>仓库二维码</a:t>
-            </a:r>
-          </a:p>
-        </p:txBody>
-      </p:sp>
-      <p:pic>
-        <p:nvPicPr>
-          <p:cNvPr id="17" name="Picture 16" descr="ppt_header_perception.png"/>
-          <p:cNvPicPr>
-            <a:picLocks noChangeAspect="1"/>
-          </p:cNvPicPr>
-          <p:nvPr/>
-        </p:nvPicPr>
-        <p:blipFill>
-          <a:blip r:embed="rId3"/>
-          <a:stretch>
-            <a:fillRect/>
-          </a:stretch>
-        </p:blipFill>
-        <p:spPr>
-          <a:xfrm>
-            <a:off x="5980998" y="2070050"/>
-            <a:ext cx="2768986" cy="1433166"/>
-          </a:xfrm>
-          <a:prstGeom prst="rect">
-            <a:avLst/>
-          </a:prstGeom>
-        </p:spPr>
-      </p:pic>
-      <p:sp>
-        <p:nvSpPr>
-          <p:cNvPr id="18" name="TextBox 17"/>
-          <p:cNvSpPr txBox="1"/>
-          <p:nvPr/>
-        </p:nvSpPr>
-        <p:spPr>
-          <a:xfrm>
-            <a:off x="5952744" y="3558081"/>
-            <a:ext cx="2825495" cy="219456"/>
-          </a:xfrm>
-          <a:prstGeom prst="rect">
-            <a:avLst/>
-          </a:prstGeom>
-          <a:noFill/>
-        </p:spPr>
-        <p:txBody>
-          <a:bodyPr wrap="square" anchor="ctr">
-            <a:spAutoFit/>
-          </a:bodyPr>
-          <a:lstStyle/>
-          <a:p>
-            <a:pPr algn="ctr"/>
-            <a:r>
-              <a:rPr sz="900" b="0">
-                <a:solidFill>
-                  <a:srgbClr val="5A6273"/>
-                </a:solidFill>
-                <a:latin typeface="微软雅黑"/>
-                <ns8:rFonts xmlns:ns8="http://schemas.openxmlformats.org/wordprocessingml/2006/main" ns8:eastAsia="微软雅黑" ns8:ascii="微软雅黑" ns8:hAnsi="微软雅黑"/>
-              </a:rPr>
-              <a:t>Web 感知界面</a:t>
+              <a:t>[5] 源码 https://github.com/FBB123571/ElderCare-Humanoid-Platform</a:t>
             </a:r>
           </a:p>
         </p:txBody>
@@ -20611,6 +20633,693 @@
 </file>
 
 <file path=ppt/slides/slide32.xml><?xml version="1.0" encoding="utf-8"?>
+<p:sld xmlns:a="http://schemas.openxmlformats.org/drawingml/2006/main" xmlns:p="http://schemas.openxmlformats.org/presentationml/2006/main" xmlns:r="http://schemas.openxmlformats.org/officeDocument/2006/relationships">
+  <p:cSld>
+    <p:bg>
+      <p:bgPr>
+        <a:solidFill>
+          <a:srgbClr val="FFFFFF"/>
+        </a:solidFill>
+        <a:effectLst/>
+      </p:bgPr>
+    </p:bg>
+    <p:spTree>
+      <p:nvGrpSpPr>
+        <p:cNvPr id="1" name=""/>
+        <p:cNvGrpSpPr/>
+        <p:nvPr/>
+      </p:nvGrpSpPr>
+      <p:grpSpPr/>
+      <p:sp>
+        <p:nvSpPr>
+          <p:cNvPr id="2" name="Rectangle 1"/>
+          <p:cNvSpPr/>
+          <p:nvPr/>
+        </p:nvSpPr>
+        <p:spPr>
+          <a:xfrm>
+            <a:off x="0" y="0"/>
+            <a:ext cx="9144000" cy="420624"/>
+          </a:xfrm>
+          <a:prstGeom prst="rect">
+            <a:avLst/>
+          </a:prstGeom>
+          <a:solidFill>
+            <a:srgbClr val="143278"/>
+          </a:solidFill>
+          <a:ln>
+            <a:noFill/>
+          </a:ln>
+        </p:spPr>
+        <p:style>
+          <a:lnRef idx="1">
+            <a:schemeClr val="accent1"/>
+          </a:lnRef>
+          <a:fillRef idx="3">
+            <a:schemeClr val="accent1"/>
+          </a:fillRef>
+          <a:effectRef idx="2">
+            <a:schemeClr val="accent1"/>
+          </a:effectRef>
+          <a:fontRef idx="minor">
+            <a:schemeClr val="lt1"/>
+          </a:fontRef>
+        </p:style>
+        <p:txBody>
+          <a:bodyPr rtlCol="0" anchor="ctr"/>
+          <a:lstStyle/>
+          <a:p>
+            <a:pPr algn="ctr"/>
+          </a:p>
+        </p:txBody>
+      </p:sp>
+      <p:sp>
+        <p:nvSpPr>
+          <p:cNvPr id="3" name="TextBox 2"/>
+          <p:cNvSpPr txBox="1"/>
+          <p:nvPr/>
+        </p:nvSpPr>
+        <p:spPr>
+          <a:xfrm>
+            <a:off x="274320" y="54864"/>
+            <a:ext cx="8595360" cy="347472"/>
+          </a:xfrm>
+          <a:prstGeom prst="rect">
+            <a:avLst/>
+          </a:prstGeom>
+          <a:noFill/>
+        </p:spPr>
+        <p:txBody>
+          <a:bodyPr wrap="none">
+            <a:spAutoFit/>
+          </a:bodyPr>
+          <a:lstStyle/>
+          <a:p>
+            <a:r>
+              <a:rPr sz="900" b="1">
+                <a:solidFill>
+                  <a:srgbClr val="FFFFFF"/>
+                </a:solidFill>
+                <a:latin typeface="微软雅黑"/>
+                <ns0:rFonts xmlns:ns0="http://schemas.openxmlformats.org/wordprocessingml/2006/main" ns0:eastAsia="微软雅黑" ns0:ascii="微软雅黑" ns0:hAnsi="微软雅黑"/>
+              </a:rPr>
+              <a:t>第二十八届中国机器人及人工智能大赛  |  创新赛 · 机器人创新赛道</a:t>
+            </a:r>
+          </a:p>
+        </p:txBody>
+      </p:sp>
+      <p:sp>
+        <p:nvSpPr>
+          <p:cNvPr id="4" name="Rectangle 3"/>
+          <p:cNvSpPr/>
+          <p:nvPr/>
+        </p:nvSpPr>
+        <p:spPr>
+          <a:xfrm>
+            <a:off x="0" y="4905756"/>
+            <a:ext cx="9144000" cy="237744"/>
+          </a:xfrm>
+          <a:prstGeom prst="rect">
+            <a:avLst/>
+          </a:prstGeom>
+          <a:solidFill>
+            <a:srgbClr val="DBEAFE"/>
+          </a:solidFill>
+          <a:ln>
+            <a:noFill/>
+          </a:ln>
+        </p:spPr>
+        <p:style>
+          <a:lnRef idx="1">
+            <a:schemeClr val="accent1"/>
+          </a:lnRef>
+          <a:fillRef idx="3">
+            <a:schemeClr val="accent1"/>
+          </a:fillRef>
+          <a:effectRef idx="2">
+            <a:schemeClr val="accent1"/>
+          </a:effectRef>
+          <a:fontRef idx="minor">
+            <a:schemeClr val="lt1"/>
+          </a:fontRef>
+        </p:style>
+        <p:txBody>
+          <a:bodyPr rtlCol="0" anchor="ctr"/>
+          <a:lstStyle/>
+          <a:p>
+            <a:pPr algn="ctr"/>
+          </a:p>
+        </p:txBody>
+      </p:sp>
+      <p:sp>
+        <p:nvSpPr>
+          <p:cNvPr id="5" name="TextBox 4"/>
+          <p:cNvSpPr txBox="1"/>
+          <p:nvPr/>
+        </p:nvSpPr>
+        <p:spPr>
+          <a:xfrm>
+            <a:off x="274320" y="4951476"/>
+            <a:ext cx="8595360" cy="182880"/>
+          </a:xfrm>
+          <a:prstGeom prst="rect">
+            <a:avLst/>
+          </a:prstGeom>
+          <a:noFill/>
+        </p:spPr>
+        <p:txBody>
+          <a:bodyPr wrap="none">
+            <a:spAutoFit/>
+          </a:bodyPr>
+          <a:lstStyle/>
+          <a:p>
+            <a:pPr algn="ctr"/>
+            <a:r>
+              <a:rPr sz="800" b="0">
+                <a:solidFill>
+                  <a:srgbClr val="5A6273"/>
+                </a:solidFill>
+                <a:latin typeface="微软雅黑"/>
+                <ns1:rFonts xmlns:ns1="http://schemas.openxmlformats.org/wordprocessingml/2006/main" ns1:eastAsia="微软雅黑" ns1:ascii="微软雅黑" ns1:hAnsi="微软雅黑"/>
+              </a:rPr>
+              <a:t>从容应队 · 中山大学 · 刘小凡/白冉 · 指导教师 彭键清</a:t>
+            </a:r>
+          </a:p>
+        </p:txBody>
+      </p:sp>
+      <p:sp>
+        <p:nvSpPr>
+          <p:cNvPr id="6" name="TextBox 5"/>
+          <p:cNvSpPr txBox="1"/>
+          <p:nvPr/>
+        </p:nvSpPr>
+        <p:spPr>
+          <a:xfrm>
+            <a:off x="274320" y="466344"/>
+            <a:ext cx="8595360" cy="457200"/>
+          </a:xfrm>
+          <a:prstGeom prst="rect">
+            <a:avLst/>
+          </a:prstGeom>
+          <a:noFill/>
+        </p:spPr>
+        <p:txBody>
+          <a:bodyPr wrap="none">
+            <a:spAutoFit/>
+          </a:bodyPr>
+          <a:lstStyle/>
+          <a:p>
+            <a:pPr algn="l"/>
+            <a:r>
+              <a:rPr sz="2000" b="1">
+                <a:solidFill>
+                  <a:srgbClr val="143278"/>
+                </a:solidFill>
+                <a:latin typeface="微软雅黑"/>
+                <ns2:rFonts xmlns:ns2="http://schemas.openxmlformats.org/wordprocessingml/2006/main" ns2:eastAsia="微软雅黑" ns2:ascii="微软雅黑" ns2:hAnsi="微软雅黑"/>
+              </a:rPr>
+              <a:t>扫码查看代码与演示视频</a:t>
+            </a:r>
+          </a:p>
+        </p:txBody>
+      </p:sp>
+      <p:sp>
+        <p:nvSpPr>
+          <p:cNvPr id="7" name="Rectangle 6"/>
+          <p:cNvSpPr/>
+          <p:nvPr/>
+        </p:nvSpPr>
+        <p:spPr>
+          <a:xfrm>
+            <a:off x="274320" y="886968"/>
+            <a:ext cx="1143000" cy="50292"/>
+          </a:xfrm>
+          <a:prstGeom prst="rect">
+            <a:avLst/>
+          </a:prstGeom>
+          <a:solidFill>
+            <a:srgbClr val="F59E0B"/>
+          </a:solidFill>
+          <a:ln>
+            <a:noFill/>
+          </a:ln>
+        </p:spPr>
+        <p:style>
+          <a:lnRef idx="1">
+            <a:schemeClr val="accent1"/>
+          </a:lnRef>
+          <a:fillRef idx="3">
+            <a:schemeClr val="accent1"/>
+          </a:fillRef>
+          <a:effectRef idx="2">
+            <a:schemeClr val="accent1"/>
+          </a:effectRef>
+          <a:fontRef idx="minor">
+            <a:schemeClr val="lt1"/>
+          </a:fontRef>
+        </p:style>
+        <p:txBody>
+          <a:bodyPr rtlCol="0" anchor="ctr"/>
+          <a:lstStyle/>
+          <a:p>
+            <a:pPr algn="ctr"/>
+          </a:p>
+        </p:txBody>
+      </p:sp>
+      <p:sp>
+        <p:nvSpPr>
+          <p:cNvPr id="8" name="Rectangle 7"/>
+          <p:cNvSpPr/>
+          <p:nvPr/>
+        </p:nvSpPr>
+        <p:spPr>
+          <a:xfrm>
+            <a:off x="274320" y="996696"/>
+            <a:ext cx="3611880" cy="3854196"/>
+          </a:xfrm>
+          <a:prstGeom prst="rect">
+            <a:avLst/>
+          </a:prstGeom>
+          <a:solidFill>
+            <a:srgbClr val="F1F7FF"/>
+          </a:solidFill>
+          <a:ln w="10160">
+            <a:solidFill>
+              <a:srgbClr val="BAC8DC"/>
+            </a:solidFill>
+          </a:ln>
+        </p:spPr>
+        <p:style>
+          <a:lnRef idx="1">
+            <a:schemeClr val="accent1"/>
+          </a:lnRef>
+          <a:fillRef idx="3">
+            <a:schemeClr val="accent1"/>
+          </a:fillRef>
+          <a:effectRef idx="2">
+            <a:schemeClr val="accent1"/>
+          </a:effectRef>
+          <a:fontRef idx="minor">
+            <a:schemeClr val="lt1"/>
+          </a:fontRef>
+        </p:style>
+        <p:txBody>
+          <a:bodyPr rtlCol="0" anchor="ctr"/>
+          <a:lstStyle/>
+          <a:p>
+            <a:pPr algn="ctr"/>
+          </a:p>
+        </p:txBody>
+      </p:sp>
+      <p:sp>
+        <p:nvSpPr>
+          <p:cNvPr id="9" name="Rectangle 8"/>
+          <p:cNvSpPr/>
+          <p:nvPr/>
+        </p:nvSpPr>
+        <p:spPr>
+          <a:xfrm>
+            <a:off x="274320" y="996696"/>
+            <a:ext cx="73152" cy="3854196"/>
+          </a:xfrm>
+          <a:prstGeom prst="rect">
+            <a:avLst/>
+          </a:prstGeom>
+          <a:solidFill>
+            <a:srgbClr val="143278"/>
+          </a:solidFill>
+          <a:ln>
+            <a:noFill/>
+          </a:ln>
+        </p:spPr>
+        <p:style>
+          <a:lnRef idx="1">
+            <a:schemeClr val="accent1"/>
+          </a:lnRef>
+          <a:fillRef idx="3">
+            <a:schemeClr val="accent1"/>
+          </a:fillRef>
+          <a:effectRef idx="2">
+            <a:schemeClr val="accent1"/>
+          </a:effectRef>
+          <a:fontRef idx="minor">
+            <a:schemeClr val="lt1"/>
+          </a:fontRef>
+        </p:style>
+        <p:txBody>
+          <a:bodyPr rtlCol="0" anchor="ctr"/>
+          <a:lstStyle/>
+          <a:p>
+            <a:pPr algn="ctr"/>
+          </a:p>
+        </p:txBody>
+      </p:sp>
+      <p:sp>
+        <p:nvSpPr>
+          <p:cNvPr id="10" name="TextBox 9"/>
+          <p:cNvSpPr txBox="1"/>
+          <p:nvPr/>
+        </p:nvSpPr>
+        <p:spPr>
+          <a:xfrm>
+            <a:off x="438912" y="1106424"/>
+            <a:ext cx="3282696" cy="890397"/>
+          </a:xfrm>
+          <a:prstGeom prst="rect">
+            <a:avLst/>
+          </a:prstGeom>
+          <a:noFill/>
+        </p:spPr>
+        <p:txBody>
+          <a:bodyPr wrap="square" anchor="t" lIns="25400" tIns="0">
+            <a:spAutoFit/>
+          </a:bodyPr>
+          <a:lstStyle/>
+          <a:p>
+            <a:pPr>
+              <a:lnSpc>
+                <a:spcPct val="112000"/>
+              </a:lnSpc>
+              <a:spcAft>
+                <a:spcPts val="200"/>
+              </a:spcAft>
+            </a:pPr>
+            <a:r>
+              <a:rPr sz="1300" b="0">
+                <a:solidFill>
+                  <a:srgbClr val="1C202C"/>
+                </a:solidFill>
+                <a:latin typeface="微软雅黑"/>
+                <ns3:rFonts xmlns:ns3="http://schemas.openxmlformats.org/wordprocessingml/2006/main" ns3:eastAsia="微软雅黑" ns3:ascii="微软雅黑" ns3:hAnsi="微软雅黑"/>
+              </a:rPr>
+              <a:t>● GitHub 完整源码与文档</a:t>
+            </a:r>
+          </a:p>
+        </p:txBody>
+      </p:sp>
+      <p:sp>
+        <p:nvSpPr>
+          <p:cNvPr id="11" name="TextBox 10"/>
+          <p:cNvSpPr txBox="1"/>
+          <p:nvPr/>
+        </p:nvSpPr>
+        <p:spPr>
+          <a:xfrm>
+            <a:off x="438912" y="2015109"/>
+            <a:ext cx="3282696" cy="890397"/>
+          </a:xfrm>
+          <a:prstGeom prst="rect">
+            <a:avLst/>
+          </a:prstGeom>
+          <a:noFill/>
+        </p:spPr>
+        <p:txBody>
+          <a:bodyPr wrap="square" anchor="t" lIns="25400" tIns="0">
+            <a:spAutoFit/>
+          </a:bodyPr>
+          <a:lstStyle/>
+          <a:p>
+            <a:pPr>
+              <a:lnSpc>
+                <a:spcPct val="112000"/>
+              </a:lnSpc>
+              <a:spcAft>
+                <a:spcPts val="200"/>
+              </a:spcAft>
+            </a:pPr>
+            <a:r>
+              <a:rPr sz="1300" b="0">
+                <a:solidFill>
+                  <a:srgbClr val="1C202C"/>
+                </a:solidFill>
+                <a:latin typeface="微软雅黑"/>
+                <ns4:rFonts xmlns:ns4="http://schemas.openxmlformats.org/wordprocessingml/2006/main" ns4:eastAsia="微软雅黑" ns4:ascii="微软雅黑" ns4:hAnsi="微软雅黑"/>
+              </a:rPr>
+              <a:t>● 在线 Web 演示（现场可复现）</a:t>
+            </a:r>
+          </a:p>
+        </p:txBody>
+      </p:sp>
+      <p:sp>
+        <p:nvSpPr>
+          <p:cNvPr id="12" name="TextBox 11"/>
+          <p:cNvSpPr txBox="1"/>
+          <p:nvPr/>
+        </p:nvSpPr>
+        <p:spPr>
+          <a:xfrm>
+            <a:off x="438912" y="2923794"/>
+            <a:ext cx="3282696" cy="890397"/>
+          </a:xfrm>
+          <a:prstGeom prst="rect">
+            <a:avLst/>
+          </a:prstGeom>
+          <a:noFill/>
+        </p:spPr>
+        <p:txBody>
+          <a:bodyPr wrap="square" anchor="t" lIns="25400" tIns="0">
+            <a:spAutoFit/>
+          </a:bodyPr>
+          <a:lstStyle/>
+          <a:p>
+            <a:pPr>
+              <a:lnSpc>
+                <a:spcPct val="112000"/>
+              </a:lnSpc>
+              <a:spcAft>
+                <a:spcPts val="200"/>
+              </a:spcAft>
+            </a:pPr>
+            <a:r>
+              <a:rPr sz="1300" b="0">
+                <a:solidFill>
+                  <a:srgbClr val="1C202C"/>
+                </a:solidFill>
+                <a:latin typeface="微软雅黑"/>
+                <ns5:rFonts xmlns:ns5="http://schemas.openxmlformats.org/wordprocessingml/2006/main" ns5:eastAsia="微软雅黑" ns5:ascii="微软雅黑" ns5:hAnsi="微软雅黑"/>
+              </a:rPr>
+              <a:t>● 演示录像已附仓库</a:t>
+            </a:r>
+          </a:p>
+        </p:txBody>
+      </p:sp>
+      <p:sp>
+        <p:nvSpPr>
+          <p:cNvPr id="13" name="TextBox 12"/>
+          <p:cNvSpPr txBox="1"/>
+          <p:nvPr/>
+        </p:nvSpPr>
+        <p:spPr>
+          <a:xfrm>
+            <a:off x="438912" y="3832479"/>
+            <a:ext cx="3282696" cy="890397"/>
+          </a:xfrm>
+          <a:prstGeom prst="rect">
+            <a:avLst/>
+          </a:prstGeom>
+          <a:noFill/>
+        </p:spPr>
+        <p:txBody>
+          <a:bodyPr wrap="square" anchor="t" lIns="25400" tIns="0">
+            <a:spAutoFit/>
+          </a:bodyPr>
+          <a:lstStyle/>
+          <a:p>
+            <a:pPr>
+              <a:lnSpc>
+                <a:spcPct val="112000"/>
+              </a:lnSpc>
+              <a:spcAft>
+                <a:spcPts val="200"/>
+              </a:spcAft>
+            </a:pPr>
+            <a:r>
+              <a:rPr sz="1300" b="0">
+                <a:solidFill>
+                  <a:srgbClr val="1C202C"/>
+                </a:solidFill>
+                <a:latin typeface="微软雅黑"/>
+                <ns6:rFonts xmlns:ns6="http://schemas.openxmlformats.org/wordprocessingml/2006/main" ns6:eastAsia="微软雅黑" ns6:ascii="微软雅黑" ns6:hAnsi="微软雅黑"/>
+              </a:rPr>
+              <a:t>● 欢迎评委扫码查阅</a:t>
+            </a:r>
+          </a:p>
+        </p:txBody>
+      </p:sp>
+      <p:sp>
+        <p:nvSpPr>
+          <p:cNvPr id="14" name="Rectangle 13"/>
+          <p:cNvSpPr/>
+          <p:nvPr/>
+        </p:nvSpPr>
+        <p:spPr>
+          <a:xfrm>
+            <a:off x="4105656" y="1033272"/>
+            <a:ext cx="4727448" cy="3744468"/>
+          </a:xfrm>
+          <a:prstGeom prst="rect">
+            <a:avLst/>
+          </a:prstGeom>
+          <a:solidFill>
+            <a:srgbClr val="FFFFFF"/>
+          </a:solidFill>
+          <a:ln w="9525">
+            <a:solidFill>
+              <a:srgbClr val="BAC8DC"/>
+            </a:solidFill>
+          </a:ln>
+        </p:spPr>
+        <p:style>
+          <a:lnRef idx="1">
+            <a:schemeClr val="accent1"/>
+          </a:lnRef>
+          <a:fillRef idx="3">
+            <a:schemeClr val="accent1"/>
+          </a:fillRef>
+          <a:effectRef idx="2">
+            <a:schemeClr val="accent1"/>
+          </a:effectRef>
+          <a:fontRef idx="minor">
+            <a:schemeClr val="lt1"/>
+          </a:fontRef>
+        </p:style>
+        <p:txBody>
+          <a:bodyPr rtlCol="0" anchor="ctr"/>
+          <a:lstStyle/>
+          <a:p>
+            <a:pPr algn="ctr"/>
+          </a:p>
+        </p:txBody>
+      </p:sp>
+      <p:pic>
+        <p:nvPicPr>
+          <p:cNvPr id="15" name="Picture 14" descr="ppt_demo_qr.png"/>
+          <p:cNvPicPr>
+            <a:picLocks noChangeAspect="1"/>
+          </p:cNvPicPr>
+          <p:nvPr/>
+        </p:nvPicPr>
+        <p:blipFill>
+          <a:blip r:embed="rId2"/>
+          <a:stretch>
+            <a:fillRect/>
+          </a:stretch>
+        </p:blipFill>
+        <p:spPr>
+          <a:xfrm>
+            <a:off x="4193804" y="1987814"/>
+            <a:ext cx="1597639" cy="1597639"/>
+          </a:xfrm>
+          <a:prstGeom prst="rect">
+            <a:avLst/>
+          </a:prstGeom>
+        </p:spPr>
+      </p:pic>
+      <p:sp>
+        <p:nvSpPr>
+          <p:cNvPr id="16" name="TextBox 15"/>
+          <p:cNvSpPr txBox="1"/>
+          <p:nvPr/>
+        </p:nvSpPr>
+        <p:spPr>
+          <a:xfrm>
+            <a:off x="4160520" y="3640317"/>
+            <a:ext cx="1664208" cy="219456"/>
+          </a:xfrm>
+          <a:prstGeom prst="rect">
+            <a:avLst/>
+          </a:prstGeom>
+          <a:noFill/>
+        </p:spPr>
+        <p:txBody>
+          <a:bodyPr wrap="square" anchor="ctr">
+            <a:spAutoFit/>
+          </a:bodyPr>
+          <a:lstStyle/>
+          <a:p>
+            <a:pPr algn="ctr"/>
+            <a:r>
+              <a:rPr sz="900" b="0">
+                <a:solidFill>
+                  <a:srgbClr val="5A6273"/>
+                </a:solidFill>
+                <a:latin typeface="微软雅黑"/>
+                <ns7:rFonts xmlns:ns7="http://schemas.openxmlformats.org/wordprocessingml/2006/main" ns7:eastAsia="微软雅黑" ns7:ascii="微软雅黑" ns7:hAnsi="微软雅黑"/>
+              </a:rPr>
+              <a:t>仓库二维码</a:t>
+            </a:r>
+          </a:p>
+        </p:txBody>
+      </p:sp>
+      <p:pic>
+        <p:nvPicPr>
+          <p:cNvPr id="17" name="Picture 16" descr="ppt_header_perception.png"/>
+          <p:cNvPicPr>
+            <a:picLocks noChangeAspect="1"/>
+          </p:cNvPicPr>
+          <p:nvPr/>
+        </p:nvPicPr>
+        <p:blipFill>
+          <a:blip r:embed="rId3"/>
+          <a:stretch>
+            <a:fillRect/>
+          </a:stretch>
+        </p:blipFill>
+        <p:spPr>
+          <a:xfrm>
+            <a:off x="5980998" y="2070050"/>
+            <a:ext cx="2768986" cy="1433166"/>
+          </a:xfrm>
+          <a:prstGeom prst="rect">
+            <a:avLst/>
+          </a:prstGeom>
+        </p:spPr>
+      </p:pic>
+      <p:sp>
+        <p:nvSpPr>
+          <p:cNvPr id="18" name="TextBox 17"/>
+          <p:cNvSpPr txBox="1"/>
+          <p:nvPr/>
+        </p:nvSpPr>
+        <p:spPr>
+          <a:xfrm>
+            <a:off x="5952744" y="3558081"/>
+            <a:ext cx="2825495" cy="219456"/>
+          </a:xfrm>
+          <a:prstGeom prst="rect">
+            <a:avLst/>
+          </a:prstGeom>
+          <a:noFill/>
+        </p:spPr>
+        <p:txBody>
+          <a:bodyPr wrap="square" anchor="ctr">
+            <a:spAutoFit/>
+          </a:bodyPr>
+          <a:lstStyle/>
+          <a:p>
+            <a:pPr algn="ctr"/>
+            <a:r>
+              <a:rPr sz="900" b="0">
+                <a:solidFill>
+                  <a:srgbClr val="5A6273"/>
+                </a:solidFill>
+                <a:latin typeface="微软雅黑"/>
+                <ns8:rFonts xmlns:ns8="http://schemas.openxmlformats.org/wordprocessingml/2006/main" ns8:eastAsia="微软雅黑" ns8:ascii="微软雅黑" ns8:hAnsi="微软雅黑"/>
+              </a:rPr>
+              <a:t>Web 感知界面</a:t>
+            </a:r>
+          </a:p>
+        </p:txBody>
+      </p:sp>
+    </p:spTree>
+  </p:cSld>
+  <p:clrMapOvr>
+    <a:masterClrMapping/>
+  </p:clrMapOvr>
+</p:sld>
+</file>
+
+<file path=ppt/slides/slide33.xml><?xml version="1.0" encoding="utf-8"?>
 <p:sld xmlns:a="http://schemas.openxmlformats.org/drawingml/2006/main" xmlns:p="http://schemas.openxmlformats.org/presentationml/2006/main" xmlns:r="http://schemas.openxmlformats.org/officeDocument/2006/relationships">
   <p:cSld>
     <p:spTree>
